--- a/slides/TP557_16_detecção_de_anomalias.pptx
+++ b/slides/TP557_16_detecção_de_anomalias.pptx
@@ -6,47 +6,50 @@
     <p:sldMasterId id="2147483660" r:id="rId2"/>
   </p:sldMasterIdLst>
   <p:notesMasterIdLst>
-    <p:notesMasterId r:id="rId38"/>
+    <p:notesMasterId r:id="rId41"/>
   </p:notesMasterIdLst>
   <p:handoutMasterIdLst>
-    <p:handoutMasterId r:id="rId39"/>
+    <p:handoutMasterId r:id="rId42"/>
   </p:handoutMasterIdLst>
   <p:sldIdLst>
     <p:sldId id="256" r:id="rId3"/>
     <p:sldId id="583" r:id="rId4"/>
     <p:sldId id="584" r:id="rId5"/>
-    <p:sldId id="585" r:id="rId6"/>
-    <p:sldId id="586" r:id="rId7"/>
-    <p:sldId id="588" r:id="rId8"/>
-    <p:sldId id="587" r:id="rId9"/>
-    <p:sldId id="589" r:id="rId10"/>
-    <p:sldId id="590" r:id="rId11"/>
-    <p:sldId id="591" r:id="rId12"/>
-    <p:sldId id="614" r:id="rId13"/>
-    <p:sldId id="598" r:id="rId14"/>
-    <p:sldId id="592" r:id="rId15"/>
-    <p:sldId id="593" r:id="rId16"/>
-    <p:sldId id="597" r:id="rId17"/>
-    <p:sldId id="603" r:id="rId18"/>
-    <p:sldId id="594" r:id="rId19"/>
-    <p:sldId id="595" r:id="rId20"/>
-    <p:sldId id="596" r:id="rId21"/>
-    <p:sldId id="599" r:id="rId22"/>
-    <p:sldId id="600" r:id="rId23"/>
-    <p:sldId id="601" r:id="rId24"/>
-    <p:sldId id="602" r:id="rId25"/>
-    <p:sldId id="613" r:id="rId26"/>
-    <p:sldId id="610" r:id="rId27"/>
-    <p:sldId id="604" r:id="rId28"/>
-    <p:sldId id="605" r:id="rId29"/>
-    <p:sldId id="606" r:id="rId30"/>
-    <p:sldId id="607" r:id="rId31"/>
-    <p:sldId id="608" r:id="rId32"/>
-    <p:sldId id="609" r:id="rId33"/>
-    <p:sldId id="611" r:id="rId34"/>
-    <p:sldId id="612" r:id="rId35"/>
-    <p:sldId id="615" r:id="rId36"/>
-    <p:sldId id="616" r:id="rId37"/>
+    <p:sldId id="617" r:id="rId6"/>
+    <p:sldId id="618" r:id="rId7"/>
+    <p:sldId id="585" r:id="rId8"/>
+    <p:sldId id="586" r:id="rId9"/>
+    <p:sldId id="588" r:id="rId10"/>
+    <p:sldId id="587" r:id="rId11"/>
+    <p:sldId id="619" r:id="rId12"/>
+    <p:sldId id="589" r:id="rId13"/>
+    <p:sldId id="590" r:id="rId14"/>
+    <p:sldId id="591" r:id="rId15"/>
+    <p:sldId id="614" r:id="rId16"/>
+    <p:sldId id="598" r:id="rId17"/>
+    <p:sldId id="592" r:id="rId18"/>
+    <p:sldId id="593" r:id="rId19"/>
+    <p:sldId id="597" r:id="rId20"/>
+    <p:sldId id="603" r:id="rId21"/>
+    <p:sldId id="594" r:id="rId22"/>
+    <p:sldId id="595" r:id="rId23"/>
+    <p:sldId id="596" r:id="rId24"/>
+    <p:sldId id="599" r:id="rId25"/>
+    <p:sldId id="600" r:id="rId26"/>
+    <p:sldId id="601" r:id="rId27"/>
+    <p:sldId id="602" r:id="rId28"/>
+    <p:sldId id="613" r:id="rId29"/>
+    <p:sldId id="610" r:id="rId30"/>
+    <p:sldId id="604" r:id="rId31"/>
+    <p:sldId id="605" r:id="rId32"/>
+    <p:sldId id="606" r:id="rId33"/>
+    <p:sldId id="607" r:id="rId34"/>
+    <p:sldId id="608" r:id="rId35"/>
+    <p:sldId id="609" r:id="rId36"/>
+    <p:sldId id="611" r:id="rId37"/>
+    <p:sldId id="612" r:id="rId38"/>
+    <p:sldId id="615" r:id="rId39"/>
+    <p:sldId id="616" r:id="rId40"/>
   </p:sldIdLst>
   <p:sldSz cx="12192000" cy="6858000"/>
   <p:notesSz cx="7315200" cy="9601200"/>
@@ -235,7 +238,7 @@
           <a:p>
             <a:fld id="{144F1436-6906-4D93-B7A2-786C327BFA14}" type="datetimeFigureOut">
               <a:rPr lang="nl-BE" smtClean="0"/>
-              <a:t>1/11/2023</a:t>
+              <a:t>7/05/2025</a:t>
             </a:fld>
             <a:endParaRPr lang="nl-BE"/>
           </a:p>
@@ -301,7 +304,7 @@
           <a:p>
             <a:fld id="{F7E56D9B-79AD-444A-AFED-DEC23408F8B4}" type="slidenum">
               <a:rPr lang="nl-BE" smtClean="0"/>
-              <a:t>‹nº›</a:t>
+              <a:t>‹#›</a:t>
             </a:fld>
             <a:endParaRPr lang="nl-BE"/>
           </a:p>
@@ -400,7 +403,7 @@
           <a:p>
             <a:fld id="{AA8CD09E-2914-4F47-B6C1-51B2C31814C9}" type="datetimeFigureOut">
               <a:rPr lang="pt-BR" smtClean="0"/>
-              <a:t>01/11/2023</a:t>
+              <a:t>07/05/2025</a:t>
             </a:fld>
             <a:endParaRPr lang="pt-BR"/>
           </a:p>
@@ -558,7 +561,7 @@
           <a:p>
             <a:fld id="{6FC8D850-966F-45A6-8DE7-15B891E7D40D}" type="slidenum">
               <a:rPr lang="pt-BR" smtClean="0"/>
-              <a:t>‹nº›</a:t>
+              <a:t>‹#›</a:t>
             </a:fld>
             <a:endParaRPr lang="pt-BR"/>
           </a:p>
@@ -756,7 +759,13 @@
   <p:cSld>
     <p:spTree>
       <p:nvGrpSpPr>
-        <p:cNvPr id="1" name=""/>
+        <p:cNvPr id="1" name="">
+          <a:extLst>
+            <a:ext uri="{FF2B5EF4-FFF2-40B4-BE49-F238E27FC236}">
+              <a16:creationId xmlns:a16="http://schemas.microsoft.com/office/drawing/2014/main" id="{028258E3-4964-4042-8FEE-C76193FC6E40}"/>
+            </a:ext>
+          </a:extLst>
+        </p:cNvPr>
         <p:cNvGrpSpPr/>
         <p:nvPr/>
       </p:nvGrpSpPr>
@@ -770,7 +779,13 @@
       </p:grpSpPr>
       <p:sp>
         <p:nvSpPr>
-          <p:cNvPr id="2" name="Espaço Reservado para Imagem de Slide 1"/>
+          <p:cNvPr id="2" name="Espaço Reservado para Imagem de Slide 1">
+            <a:extLst>
+              <a:ext uri="{FF2B5EF4-FFF2-40B4-BE49-F238E27FC236}">
+                <a16:creationId xmlns:a16="http://schemas.microsoft.com/office/drawing/2014/main" id="{DFEC1B94-CADD-86CA-0D80-2D1283263FDF}"/>
+              </a:ext>
+            </a:extLst>
+          </p:cNvPr>
           <p:cNvSpPr>
             <a:spLocks noGrp="1" noRot="1" noChangeAspect="1"/>
           </p:cNvSpPr>
@@ -782,7 +797,13 @@
       </p:sp>
       <p:sp>
         <p:nvSpPr>
-          <p:cNvPr id="3" name="Espaço Reservado para Anotações 2"/>
+          <p:cNvPr id="3" name="Espaço Reservado para Anotações 2">
+            <a:extLst>
+              <a:ext uri="{FF2B5EF4-FFF2-40B4-BE49-F238E27FC236}">
+                <a16:creationId xmlns:a16="http://schemas.microsoft.com/office/drawing/2014/main" id="{08214764-D5E4-6A26-47B8-1E1E46DC017C}"/>
+              </a:ext>
+            </a:extLst>
+          </p:cNvPr>
           <p:cNvSpPr>
             <a:spLocks noGrp="1"/>
           </p:cNvSpPr>
@@ -801,7 +822,13 @@
       </p:sp>
       <p:sp>
         <p:nvSpPr>
-          <p:cNvPr id="4" name="Espaço Reservado para Número de Slide 3"/>
+          <p:cNvPr id="4" name="Espaço Reservado para Número de Slide 3">
+            <a:extLst>
+              <a:ext uri="{FF2B5EF4-FFF2-40B4-BE49-F238E27FC236}">
+                <a16:creationId xmlns:a16="http://schemas.microsoft.com/office/drawing/2014/main" id="{9AA1EE33-103B-9784-78D9-C7BF95BFF3C7}"/>
+              </a:ext>
+            </a:extLst>
+          </p:cNvPr>
           <p:cNvSpPr>
             <a:spLocks noGrp="1"/>
           </p:cNvSpPr>
@@ -825,7 +852,7 @@
     </p:spTree>
     <p:extLst>
       <p:ext uri="{BB962C8B-B14F-4D97-AF65-F5344CB8AC3E}">
-        <p14:creationId xmlns:p14="http://schemas.microsoft.com/office/powerpoint/2010/main" val="427012450"/>
+        <p14:creationId xmlns:p14="http://schemas.microsoft.com/office/powerpoint/2010/main" val="1213048649"/>
       </p:ext>
     </p:extLst>
   </p:cSld>
@@ -909,7 +936,7 @@
     </p:spTree>
     <p:extLst>
       <p:ext uri="{BB962C8B-B14F-4D97-AF65-F5344CB8AC3E}">
-        <p14:creationId xmlns:p14="http://schemas.microsoft.com/office/powerpoint/2010/main" val="640768579"/>
+        <p14:creationId xmlns:p14="http://schemas.microsoft.com/office/powerpoint/2010/main" val="2237530383"/>
       </p:ext>
     </p:extLst>
   </p:cSld>
@@ -993,7 +1020,7 @@
     </p:spTree>
     <p:extLst>
       <p:ext uri="{BB962C8B-B14F-4D97-AF65-F5344CB8AC3E}">
-        <p14:creationId xmlns:p14="http://schemas.microsoft.com/office/powerpoint/2010/main" val="3474849204"/>
+        <p14:creationId xmlns:p14="http://schemas.microsoft.com/office/powerpoint/2010/main" val="1100645157"/>
       </p:ext>
     </p:extLst>
   </p:cSld>
@@ -1077,7 +1104,7 @@
     </p:spTree>
     <p:extLst>
       <p:ext uri="{BB962C8B-B14F-4D97-AF65-F5344CB8AC3E}">
-        <p14:creationId xmlns:p14="http://schemas.microsoft.com/office/powerpoint/2010/main" val="1082316856"/>
+        <p14:creationId xmlns:p14="http://schemas.microsoft.com/office/powerpoint/2010/main" val="427012450"/>
       </p:ext>
     </p:extLst>
   </p:cSld>
@@ -1161,7 +1188,7 @@
     </p:spTree>
     <p:extLst>
       <p:ext uri="{BB962C8B-B14F-4D97-AF65-F5344CB8AC3E}">
-        <p14:creationId xmlns:p14="http://schemas.microsoft.com/office/powerpoint/2010/main" val="3940651076"/>
+        <p14:creationId xmlns:p14="http://schemas.microsoft.com/office/powerpoint/2010/main" val="640768579"/>
       </p:ext>
     </p:extLst>
   </p:cSld>
@@ -1245,7 +1272,7 @@
     </p:spTree>
     <p:extLst>
       <p:ext uri="{BB962C8B-B14F-4D97-AF65-F5344CB8AC3E}">
-        <p14:creationId xmlns:p14="http://schemas.microsoft.com/office/powerpoint/2010/main" val="1348824106"/>
+        <p14:creationId xmlns:p14="http://schemas.microsoft.com/office/powerpoint/2010/main" val="3474849204"/>
       </p:ext>
     </p:extLst>
   </p:cSld>
@@ -1329,7 +1356,7 @@
     </p:spTree>
     <p:extLst>
       <p:ext uri="{BB962C8B-B14F-4D97-AF65-F5344CB8AC3E}">
-        <p14:creationId xmlns:p14="http://schemas.microsoft.com/office/powerpoint/2010/main" val="707187450"/>
+        <p14:creationId xmlns:p14="http://schemas.microsoft.com/office/powerpoint/2010/main" val="1082316856"/>
       </p:ext>
     </p:extLst>
   </p:cSld>
@@ -1413,7 +1440,7 @@
     </p:spTree>
     <p:extLst>
       <p:ext uri="{BB962C8B-B14F-4D97-AF65-F5344CB8AC3E}">
-        <p14:creationId xmlns:p14="http://schemas.microsoft.com/office/powerpoint/2010/main" val="3509127843"/>
+        <p14:creationId xmlns:p14="http://schemas.microsoft.com/office/powerpoint/2010/main" val="3940651076"/>
       </p:ext>
     </p:extLst>
   </p:cSld>
@@ -1497,7 +1524,7 @@
     </p:spTree>
     <p:extLst>
       <p:ext uri="{BB962C8B-B14F-4D97-AF65-F5344CB8AC3E}">
-        <p14:creationId xmlns:p14="http://schemas.microsoft.com/office/powerpoint/2010/main" val="3333931488"/>
+        <p14:creationId xmlns:p14="http://schemas.microsoft.com/office/powerpoint/2010/main" val="1348824106"/>
       </p:ext>
     </p:extLst>
   </p:cSld>
@@ -1581,7 +1608,7 @@
     </p:spTree>
     <p:extLst>
       <p:ext uri="{BB962C8B-B14F-4D97-AF65-F5344CB8AC3E}">
-        <p14:creationId xmlns:p14="http://schemas.microsoft.com/office/powerpoint/2010/main" val="3769115210"/>
+        <p14:creationId xmlns:p14="http://schemas.microsoft.com/office/powerpoint/2010/main" val="707187450"/>
       </p:ext>
     </p:extLst>
   </p:cSld>
@@ -1749,7 +1776,7 @@
     </p:spTree>
     <p:extLst>
       <p:ext uri="{BB962C8B-B14F-4D97-AF65-F5344CB8AC3E}">
-        <p14:creationId xmlns:p14="http://schemas.microsoft.com/office/powerpoint/2010/main" val="457844314"/>
+        <p14:creationId xmlns:p14="http://schemas.microsoft.com/office/powerpoint/2010/main" val="3509127843"/>
       </p:ext>
     </p:extLst>
   </p:cSld>
@@ -1833,7 +1860,7 @@
     </p:spTree>
     <p:extLst>
       <p:ext uri="{BB962C8B-B14F-4D97-AF65-F5344CB8AC3E}">
-        <p14:creationId xmlns:p14="http://schemas.microsoft.com/office/powerpoint/2010/main" val="1661733777"/>
+        <p14:creationId xmlns:p14="http://schemas.microsoft.com/office/powerpoint/2010/main" val="3333931488"/>
       </p:ext>
     </p:extLst>
   </p:cSld>
@@ -1917,7 +1944,7 @@
     </p:spTree>
     <p:extLst>
       <p:ext uri="{BB962C8B-B14F-4D97-AF65-F5344CB8AC3E}">
-        <p14:creationId xmlns:p14="http://schemas.microsoft.com/office/powerpoint/2010/main" val="1803953556"/>
+        <p14:creationId xmlns:p14="http://schemas.microsoft.com/office/powerpoint/2010/main" val="3769115210"/>
       </p:ext>
     </p:extLst>
   </p:cSld>
@@ -2001,7 +2028,7 @@
     </p:spTree>
     <p:extLst>
       <p:ext uri="{BB962C8B-B14F-4D97-AF65-F5344CB8AC3E}">
-        <p14:creationId xmlns:p14="http://schemas.microsoft.com/office/powerpoint/2010/main" val="3041248039"/>
+        <p14:creationId xmlns:p14="http://schemas.microsoft.com/office/powerpoint/2010/main" val="457844314"/>
       </p:ext>
     </p:extLst>
   </p:cSld>
@@ -2085,7 +2112,7 @@
     </p:spTree>
     <p:extLst>
       <p:ext uri="{BB962C8B-B14F-4D97-AF65-F5344CB8AC3E}">
-        <p14:creationId xmlns:p14="http://schemas.microsoft.com/office/powerpoint/2010/main" val="482398735"/>
+        <p14:creationId xmlns:p14="http://schemas.microsoft.com/office/powerpoint/2010/main" val="1661733777"/>
       </p:ext>
     </p:extLst>
   </p:cSld>
@@ -2169,7 +2196,7 @@
     </p:spTree>
     <p:extLst>
       <p:ext uri="{BB962C8B-B14F-4D97-AF65-F5344CB8AC3E}">
-        <p14:creationId xmlns:p14="http://schemas.microsoft.com/office/powerpoint/2010/main" val="1805858919"/>
+        <p14:creationId xmlns:p14="http://schemas.microsoft.com/office/powerpoint/2010/main" val="1803953556"/>
       </p:ext>
     </p:extLst>
   </p:cSld>
@@ -2253,7 +2280,7 @@
     </p:spTree>
     <p:extLst>
       <p:ext uri="{BB962C8B-B14F-4D97-AF65-F5344CB8AC3E}">
-        <p14:creationId xmlns:p14="http://schemas.microsoft.com/office/powerpoint/2010/main" val="327160545"/>
+        <p14:creationId xmlns:p14="http://schemas.microsoft.com/office/powerpoint/2010/main" val="3041248039"/>
       </p:ext>
     </p:extLst>
   </p:cSld>
@@ -2337,7 +2364,7 @@
     </p:spTree>
     <p:extLst>
       <p:ext uri="{BB962C8B-B14F-4D97-AF65-F5344CB8AC3E}">
-        <p14:creationId xmlns:p14="http://schemas.microsoft.com/office/powerpoint/2010/main" val="594473513"/>
+        <p14:creationId xmlns:p14="http://schemas.microsoft.com/office/powerpoint/2010/main" val="482398735"/>
       </p:ext>
     </p:extLst>
   </p:cSld>
@@ -2421,7 +2448,7 @@
     </p:spTree>
     <p:extLst>
       <p:ext uri="{BB962C8B-B14F-4D97-AF65-F5344CB8AC3E}">
-        <p14:creationId xmlns:p14="http://schemas.microsoft.com/office/powerpoint/2010/main" val="1251283288"/>
+        <p14:creationId xmlns:p14="http://schemas.microsoft.com/office/powerpoint/2010/main" val="1805858919"/>
       </p:ext>
     </p:extLst>
   </p:cSld>
@@ -2505,7 +2532,7 @@
     </p:spTree>
     <p:extLst>
       <p:ext uri="{BB962C8B-B14F-4D97-AF65-F5344CB8AC3E}">
-        <p14:creationId xmlns:p14="http://schemas.microsoft.com/office/powerpoint/2010/main" val="2676107661"/>
+        <p14:creationId xmlns:p14="http://schemas.microsoft.com/office/powerpoint/2010/main" val="327160545"/>
       </p:ext>
     </p:extLst>
   </p:cSld>
@@ -2673,7 +2700,7 @@
     </p:spTree>
     <p:extLst>
       <p:ext uri="{BB962C8B-B14F-4D97-AF65-F5344CB8AC3E}">
-        <p14:creationId xmlns:p14="http://schemas.microsoft.com/office/powerpoint/2010/main" val="298418458"/>
+        <p14:creationId xmlns:p14="http://schemas.microsoft.com/office/powerpoint/2010/main" val="594473513"/>
       </p:ext>
     </p:extLst>
   </p:cSld>
@@ -2757,7 +2784,7 @@
     </p:spTree>
     <p:extLst>
       <p:ext uri="{BB962C8B-B14F-4D97-AF65-F5344CB8AC3E}">
-        <p14:creationId xmlns:p14="http://schemas.microsoft.com/office/powerpoint/2010/main" val="442563040"/>
+        <p14:creationId xmlns:p14="http://schemas.microsoft.com/office/powerpoint/2010/main" val="1251283288"/>
       </p:ext>
     </p:extLst>
   </p:cSld>
@@ -2830,78 +2857,18 @@
           <a:bodyPr/>
           <a:lstStyle/>
           <a:p>
-            <a:pPr marL="0" marR="0" lvl="0" indent="0" algn="r" defTabSz="914400" rtl="0" eaLnBrk="1" fontAlgn="auto" latinLnBrk="0" hangingPunct="1">
-              <a:lnSpc>
-                <a:spcPct val="100000"/>
-              </a:lnSpc>
-              <a:spcBef>
-                <a:spcPts val="0"/>
-              </a:spcBef>
-              <a:spcAft>
-                <a:spcPts val="0"/>
-              </a:spcAft>
-              <a:buClrTx/>
-              <a:buSzTx/>
-              <a:buFontTx/>
-              <a:buNone/>
-              <a:tabLst/>
-              <a:defRPr/>
-            </a:pPr>
             <a:fld id="{6FC8D850-966F-45A6-8DE7-15B891E7D40D}" type="slidenum">
-              <a:rPr kumimoji="0" lang="pt-BR" sz="2200" b="0" i="0" u="none" strike="noStrike" kern="1200" cap="none" spc="0" normalizeH="0" baseline="0" noProof="0" smtClean="0">
-                <a:ln>
-                  <a:noFill/>
-                </a:ln>
-                <a:solidFill>
-                  <a:prstClr val="black"/>
-                </a:solidFill>
-                <a:effectLst/>
-                <a:uLnTx/>
-                <a:uFillTx/>
-                <a:latin typeface="Calibri" panose="020F0502020204030204"/>
-                <a:ea typeface="+mn-ea"/>
-                <a:cs typeface="+mn-cs"/>
-              </a:rPr>
-              <a:pPr marL="0" marR="0" lvl="0" indent="0" algn="r" defTabSz="914400" rtl="0" eaLnBrk="1" fontAlgn="auto" latinLnBrk="0" hangingPunct="1">
-                <a:lnSpc>
-                  <a:spcPct val="100000"/>
-                </a:lnSpc>
-                <a:spcBef>
-                  <a:spcPts val="0"/>
-                </a:spcBef>
-                <a:spcAft>
-                  <a:spcPts val="0"/>
-                </a:spcAft>
-                <a:buClrTx/>
-                <a:buSzTx/>
-                <a:buFontTx/>
-                <a:buNone/>
-                <a:tabLst/>
-                <a:defRPr/>
-              </a:pPr>
+              <a:rPr lang="pt-BR" smtClean="0"/>
               <a:t>32</a:t>
             </a:fld>
-            <a:endParaRPr kumimoji="0" lang="pt-BR" sz="2200" b="0" i="0" u="none" strike="noStrike" kern="1200" cap="none" spc="0" normalizeH="0" baseline="0" noProof="0">
-              <a:ln>
-                <a:noFill/>
-              </a:ln>
-              <a:solidFill>
-                <a:prstClr val="black"/>
-              </a:solidFill>
-              <a:effectLst/>
-              <a:uLnTx/>
-              <a:uFillTx/>
-              <a:latin typeface="Calibri" panose="020F0502020204030204"/>
-              <a:ea typeface="+mn-ea"/>
-              <a:cs typeface="+mn-cs"/>
-            </a:endParaRPr>
+            <a:endParaRPr lang="pt-BR"/>
           </a:p>
         </p:txBody>
       </p:sp>
     </p:spTree>
     <p:extLst>
       <p:ext uri="{BB962C8B-B14F-4D97-AF65-F5344CB8AC3E}">
-        <p14:creationId xmlns:p14="http://schemas.microsoft.com/office/powerpoint/2010/main" val="2316046025"/>
+        <p14:creationId xmlns:p14="http://schemas.microsoft.com/office/powerpoint/2010/main" val="2676107661"/>
       </p:ext>
     </p:extLst>
   </p:cSld>
@@ -2974,78 +2941,18 @@
           <a:bodyPr/>
           <a:lstStyle/>
           <a:p>
-            <a:pPr marL="0" marR="0" lvl="0" indent="0" algn="r" defTabSz="914400" rtl="0" eaLnBrk="1" fontAlgn="auto" latinLnBrk="0" hangingPunct="1">
-              <a:lnSpc>
-                <a:spcPct val="100000"/>
-              </a:lnSpc>
-              <a:spcBef>
-                <a:spcPts val="0"/>
-              </a:spcBef>
-              <a:spcAft>
-                <a:spcPts val="0"/>
-              </a:spcAft>
-              <a:buClrTx/>
-              <a:buSzTx/>
-              <a:buFontTx/>
-              <a:buNone/>
-              <a:tabLst/>
-              <a:defRPr/>
-            </a:pPr>
             <a:fld id="{6FC8D850-966F-45A6-8DE7-15B891E7D40D}" type="slidenum">
-              <a:rPr kumimoji="0" lang="pt-BR" sz="2200" b="0" i="0" u="none" strike="noStrike" kern="1200" cap="none" spc="0" normalizeH="0" baseline="0" noProof="0" smtClean="0">
-                <a:ln>
-                  <a:noFill/>
-                </a:ln>
-                <a:solidFill>
-                  <a:prstClr val="black"/>
-                </a:solidFill>
-                <a:effectLst/>
-                <a:uLnTx/>
-                <a:uFillTx/>
-                <a:latin typeface="Calibri" panose="020F0502020204030204"/>
-                <a:ea typeface="+mn-ea"/>
-                <a:cs typeface="+mn-cs"/>
-              </a:rPr>
-              <a:pPr marL="0" marR="0" lvl="0" indent="0" algn="r" defTabSz="914400" rtl="0" eaLnBrk="1" fontAlgn="auto" latinLnBrk="0" hangingPunct="1">
-                <a:lnSpc>
-                  <a:spcPct val="100000"/>
-                </a:lnSpc>
-                <a:spcBef>
-                  <a:spcPts val="0"/>
-                </a:spcBef>
-                <a:spcAft>
-                  <a:spcPts val="0"/>
-                </a:spcAft>
-                <a:buClrTx/>
-                <a:buSzTx/>
-                <a:buFontTx/>
-                <a:buNone/>
-                <a:tabLst/>
-                <a:defRPr/>
-              </a:pPr>
+              <a:rPr lang="pt-BR" smtClean="0"/>
               <a:t>33</a:t>
             </a:fld>
-            <a:endParaRPr kumimoji="0" lang="pt-BR" sz="2200" b="0" i="0" u="none" strike="noStrike" kern="1200" cap="none" spc="0" normalizeH="0" baseline="0" noProof="0">
-              <a:ln>
-                <a:noFill/>
-              </a:ln>
-              <a:solidFill>
-                <a:prstClr val="black"/>
-              </a:solidFill>
-              <a:effectLst/>
-              <a:uLnTx/>
-              <a:uFillTx/>
-              <a:latin typeface="Calibri" panose="020F0502020204030204"/>
-              <a:ea typeface="+mn-ea"/>
-              <a:cs typeface="+mn-cs"/>
-            </a:endParaRPr>
+            <a:endParaRPr lang="pt-BR"/>
           </a:p>
         </p:txBody>
       </p:sp>
     </p:spTree>
     <p:extLst>
       <p:ext uri="{BB962C8B-B14F-4D97-AF65-F5344CB8AC3E}">
-        <p14:creationId xmlns:p14="http://schemas.microsoft.com/office/powerpoint/2010/main" val="1824153992"/>
+        <p14:creationId xmlns:p14="http://schemas.microsoft.com/office/powerpoint/2010/main" val="298418458"/>
       </p:ext>
     </p:extLst>
   </p:cSld>
@@ -3118,78 +3025,18 @@
           <a:bodyPr/>
           <a:lstStyle/>
           <a:p>
-            <a:pPr marL="0" marR="0" lvl="0" indent="0" algn="r" defTabSz="914400" rtl="0" eaLnBrk="1" fontAlgn="auto" latinLnBrk="0" hangingPunct="1">
-              <a:lnSpc>
-                <a:spcPct val="100000"/>
-              </a:lnSpc>
-              <a:spcBef>
-                <a:spcPts val="0"/>
-              </a:spcBef>
-              <a:spcAft>
-                <a:spcPts val="0"/>
-              </a:spcAft>
-              <a:buClrTx/>
-              <a:buSzTx/>
-              <a:buFontTx/>
-              <a:buNone/>
-              <a:tabLst/>
-              <a:defRPr/>
-            </a:pPr>
             <a:fld id="{6FC8D850-966F-45A6-8DE7-15B891E7D40D}" type="slidenum">
-              <a:rPr kumimoji="0" lang="pt-BR" sz="2200" b="0" i="0" u="none" strike="noStrike" kern="1200" cap="none" spc="0" normalizeH="0" baseline="0" noProof="0" smtClean="0">
-                <a:ln>
-                  <a:noFill/>
-                </a:ln>
-                <a:solidFill>
-                  <a:prstClr val="black"/>
-                </a:solidFill>
-                <a:effectLst/>
-                <a:uLnTx/>
-                <a:uFillTx/>
-                <a:latin typeface="Calibri" panose="020F0502020204030204"/>
-                <a:ea typeface="+mn-ea"/>
-                <a:cs typeface="+mn-cs"/>
-              </a:rPr>
-              <a:pPr marL="0" marR="0" lvl="0" indent="0" algn="r" defTabSz="914400" rtl="0" eaLnBrk="1" fontAlgn="auto" latinLnBrk="0" hangingPunct="1">
-                <a:lnSpc>
-                  <a:spcPct val="100000"/>
-                </a:lnSpc>
-                <a:spcBef>
-                  <a:spcPts val="0"/>
-                </a:spcBef>
-                <a:spcAft>
-                  <a:spcPts val="0"/>
-                </a:spcAft>
-                <a:buClrTx/>
-                <a:buSzTx/>
-                <a:buFontTx/>
-                <a:buNone/>
-                <a:tabLst/>
-                <a:defRPr/>
-              </a:pPr>
+              <a:rPr lang="pt-BR" smtClean="0"/>
               <a:t>34</a:t>
             </a:fld>
-            <a:endParaRPr kumimoji="0" lang="pt-BR" sz="2200" b="0" i="0" u="none" strike="noStrike" kern="1200" cap="none" spc="0" normalizeH="0" baseline="0" noProof="0">
-              <a:ln>
-                <a:noFill/>
-              </a:ln>
-              <a:solidFill>
-                <a:prstClr val="black"/>
-              </a:solidFill>
-              <a:effectLst/>
-              <a:uLnTx/>
-              <a:uFillTx/>
-              <a:latin typeface="Calibri" panose="020F0502020204030204"/>
-              <a:ea typeface="+mn-ea"/>
-              <a:cs typeface="+mn-cs"/>
-            </a:endParaRPr>
+            <a:endParaRPr lang="pt-BR"/>
           </a:p>
         </p:txBody>
       </p:sp>
     </p:spTree>
     <p:extLst>
       <p:ext uri="{BB962C8B-B14F-4D97-AF65-F5344CB8AC3E}">
-        <p14:creationId xmlns:p14="http://schemas.microsoft.com/office/powerpoint/2010/main" val="2389324630"/>
+        <p14:creationId xmlns:p14="http://schemas.microsoft.com/office/powerpoint/2010/main" val="442563040"/>
       </p:ext>
     </p:extLst>
   </p:cSld>
@@ -3333,7 +3180,7 @@
     </p:spTree>
     <p:extLst>
       <p:ext uri="{BB962C8B-B14F-4D97-AF65-F5344CB8AC3E}">
-        <p14:creationId xmlns:p14="http://schemas.microsoft.com/office/powerpoint/2010/main" val="227195064"/>
+        <p14:creationId xmlns:p14="http://schemas.microsoft.com/office/powerpoint/2010/main" val="2316046025"/>
       </p:ext>
     </p:extLst>
   </p:cSld>
@@ -3343,7 +3190,7 @@
 </p:notes>
 </file>
 
-<file path=ppt/notesSlides/notesSlide4.xml><?xml version="1.0" encoding="utf-8"?>
+<file path=ppt/notesSlides/notesSlide36.xml><?xml version="1.0" encoding="utf-8"?>
 <p:notes xmlns:a="http://schemas.openxmlformats.org/drawingml/2006/main" xmlns:r="http://schemas.openxmlformats.org/officeDocument/2006/relationships" xmlns:p="http://schemas.openxmlformats.org/presentationml/2006/main">
   <p:cSld>
     <p:spTree>
@@ -3406,18 +3253,78 @@
           <a:bodyPr/>
           <a:lstStyle/>
           <a:p>
+            <a:pPr marL="0" marR="0" lvl="0" indent="0" algn="r" defTabSz="914400" rtl="0" eaLnBrk="1" fontAlgn="auto" latinLnBrk="0" hangingPunct="1">
+              <a:lnSpc>
+                <a:spcPct val="100000"/>
+              </a:lnSpc>
+              <a:spcBef>
+                <a:spcPts val="0"/>
+              </a:spcBef>
+              <a:spcAft>
+                <a:spcPts val="0"/>
+              </a:spcAft>
+              <a:buClrTx/>
+              <a:buSzTx/>
+              <a:buFontTx/>
+              <a:buNone/>
+              <a:tabLst/>
+              <a:defRPr/>
+            </a:pPr>
             <a:fld id="{6FC8D850-966F-45A6-8DE7-15B891E7D40D}" type="slidenum">
-              <a:rPr lang="pt-BR" smtClean="0"/>
-              <a:t>4</a:t>
+              <a:rPr kumimoji="0" lang="pt-BR" sz="2200" b="0" i="0" u="none" strike="noStrike" kern="1200" cap="none" spc="0" normalizeH="0" baseline="0" noProof="0" smtClean="0">
+                <a:ln>
+                  <a:noFill/>
+                </a:ln>
+                <a:solidFill>
+                  <a:prstClr val="black"/>
+                </a:solidFill>
+                <a:effectLst/>
+                <a:uLnTx/>
+                <a:uFillTx/>
+                <a:latin typeface="Calibri" panose="020F0502020204030204"/>
+                <a:ea typeface="+mn-ea"/>
+                <a:cs typeface="+mn-cs"/>
+              </a:rPr>
+              <a:pPr marL="0" marR="0" lvl="0" indent="0" algn="r" defTabSz="914400" rtl="0" eaLnBrk="1" fontAlgn="auto" latinLnBrk="0" hangingPunct="1">
+                <a:lnSpc>
+                  <a:spcPct val="100000"/>
+                </a:lnSpc>
+                <a:spcBef>
+                  <a:spcPts val="0"/>
+                </a:spcBef>
+                <a:spcAft>
+                  <a:spcPts val="0"/>
+                </a:spcAft>
+                <a:buClrTx/>
+                <a:buSzTx/>
+                <a:buFontTx/>
+                <a:buNone/>
+                <a:tabLst/>
+                <a:defRPr/>
+              </a:pPr>
+              <a:t>36</a:t>
             </a:fld>
-            <a:endParaRPr lang="pt-BR"/>
+            <a:endParaRPr kumimoji="0" lang="pt-BR" sz="2200" b="0" i="0" u="none" strike="noStrike" kern="1200" cap="none" spc="0" normalizeH="0" baseline="0" noProof="0">
+              <a:ln>
+                <a:noFill/>
+              </a:ln>
+              <a:solidFill>
+                <a:prstClr val="black"/>
+              </a:solidFill>
+              <a:effectLst/>
+              <a:uLnTx/>
+              <a:uFillTx/>
+              <a:latin typeface="Calibri" panose="020F0502020204030204"/>
+              <a:ea typeface="+mn-ea"/>
+              <a:cs typeface="+mn-cs"/>
+            </a:endParaRPr>
           </a:p>
         </p:txBody>
       </p:sp>
     </p:spTree>
     <p:extLst>
       <p:ext uri="{BB962C8B-B14F-4D97-AF65-F5344CB8AC3E}">
-        <p14:creationId xmlns:p14="http://schemas.microsoft.com/office/powerpoint/2010/main" val="645644717"/>
+        <p14:creationId xmlns:p14="http://schemas.microsoft.com/office/powerpoint/2010/main" val="1824153992"/>
       </p:ext>
     </p:extLst>
   </p:cSld>
@@ -3427,7 +3334,7 @@
 </p:notes>
 </file>
 
-<file path=ppt/notesSlides/notesSlide5.xml><?xml version="1.0" encoding="utf-8"?>
+<file path=ppt/notesSlides/notesSlide37.xml><?xml version="1.0" encoding="utf-8"?>
 <p:notes xmlns:a="http://schemas.openxmlformats.org/drawingml/2006/main" xmlns:r="http://schemas.openxmlformats.org/officeDocument/2006/relationships" xmlns:p="http://schemas.openxmlformats.org/presentationml/2006/main">
   <p:cSld>
     <p:spTree>
@@ -3490,6 +3397,426 @@
           <a:bodyPr/>
           <a:lstStyle/>
           <a:p>
+            <a:pPr marL="0" marR="0" lvl="0" indent="0" algn="r" defTabSz="914400" rtl="0" eaLnBrk="1" fontAlgn="auto" latinLnBrk="0" hangingPunct="1">
+              <a:lnSpc>
+                <a:spcPct val="100000"/>
+              </a:lnSpc>
+              <a:spcBef>
+                <a:spcPts val="0"/>
+              </a:spcBef>
+              <a:spcAft>
+                <a:spcPts val="0"/>
+              </a:spcAft>
+              <a:buClrTx/>
+              <a:buSzTx/>
+              <a:buFontTx/>
+              <a:buNone/>
+              <a:tabLst/>
+              <a:defRPr/>
+            </a:pPr>
+            <a:fld id="{6FC8D850-966F-45A6-8DE7-15B891E7D40D}" type="slidenum">
+              <a:rPr kumimoji="0" lang="pt-BR" sz="2200" b="0" i="0" u="none" strike="noStrike" kern="1200" cap="none" spc="0" normalizeH="0" baseline="0" noProof="0" smtClean="0">
+                <a:ln>
+                  <a:noFill/>
+                </a:ln>
+                <a:solidFill>
+                  <a:prstClr val="black"/>
+                </a:solidFill>
+                <a:effectLst/>
+                <a:uLnTx/>
+                <a:uFillTx/>
+                <a:latin typeface="Calibri" panose="020F0502020204030204"/>
+                <a:ea typeface="+mn-ea"/>
+                <a:cs typeface="+mn-cs"/>
+              </a:rPr>
+              <a:pPr marL="0" marR="0" lvl="0" indent="0" algn="r" defTabSz="914400" rtl="0" eaLnBrk="1" fontAlgn="auto" latinLnBrk="0" hangingPunct="1">
+                <a:lnSpc>
+                  <a:spcPct val="100000"/>
+                </a:lnSpc>
+                <a:spcBef>
+                  <a:spcPts val="0"/>
+                </a:spcBef>
+                <a:spcAft>
+                  <a:spcPts val="0"/>
+                </a:spcAft>
+                <a:buClrTx/>
+                <a:buSzTx/>
+                <a:buFontTx/>
+                <a:buNone/>
+                <a:tabLst/>
+                <a:defRPr/>
+              </a:pPr>
+              <a:t>37</a:t>
+            </a:fld>
+            <a:endParaRPr kumimoji="0" lang="pt-BR" sz="2200" b="0" i="0" u="none" strike="noStrike" kern="1200" cap="none" spc="0" normalizeH="0" baseline="0" noProof="0">
+              <a:ln>
+                <a:noFill/>
+              </a:ln>
+              <a:solidFill>
+                <a:prstClr val="black"/>
+              </a:solidFill>
+              <a:effectLst/>
+              <a:uLnTx/>
+              <a:uFillTx/>
+              <a:latin typeface="Calibri" panose="020F0502020204030204"/>
+              <a:ea typeface="+mn-ea"/>
+              <a:cs typeface="+mn-cs"/>
+            </a:endParaRPr>
+          </a:p>
+        </p:txBody>
+      </p:sp>
+    </p:spTree>
+    <p:extLst>
+      <p:ext uri="{BB962C8B-B14F-4D97-AF65-F5344CB8AC3E}">
+        <p14:creationId xmlns:p14="http://schemas.microsoft.com/office/powerpoint/2010/main" val="2389324630"/>
+      </p:ext>
+    </p:extLst>
+  </p:cSld>
+  <p:clrMapOvr>
+    <a:masterClrMapping/>
+  </p:clrMapOvr>
+</p:notes>
+</file>
+
+<file path=ppt/notesSlides/notesSlide38.xml><?xml version="1.0" encoding="utf-8"?>
+<p:notes xmlns:a="http://schemas.openxmlformats.org/drawingml/2006/main" xmlns:r="http://schemas.openxmlformats.org/officeDocument/2006/relationships" xmlns:p="http://schemas.openxmlformats.org/presentationml/2006/main">
+  <p:cSld>
+    <p:spTree>
+      <p:nvGrpSpPr>
+        <p:cNvPr id="1" name=""/>
+        <p:cNvGrpSpPr/>
+        <p:nvPr/>
+      </p:nvGrpSpPr>
+      <p:grpSpPr>
+        <a:xfrm>
+          <a:off x="0" y="0"/>
+          <a:ext cx="0" cy="0"/>
+          <a:chOff x="0" y="0"/>
+          <a:chExt cx="0" cy="0"/>
+        </a:xfrm>
+      </p:grpSpPr>
+      <p:sp>
+        <p:nvSpPr>
+          <p:cNvPr id="2" name="Espaço Reservado para Imagem de Slide 1"/>
+          <p:cNvSpPr>
+            <a:spLocks noGrp="1" noRot="1" noChangeAspect="1"/>
+          </p:cNvSpPr>
+          <p:nvPr>
+            <p:ph type="sldImg"/>
+          </p:nvPr>
+        </p:nvSpPr>
+        <p:spPr/>
+      </p:sp>
+      <p:sp>
+        <p:nvSpPr>
+          <p:cNvPr id="3" name="Espaço Reservado para Anotações 2"/>
+          <p:cNvSpPr>
+            <a:spLocks noGrp="1"/>
+          </p:cNvSpPr>
+          <p:nvPr>
+            <p:ph type="body" idx="1"/>
+          </p:nvPr>
+        </p:nvSpPr>
+        <p:spPr/>
+        <p:txBody>
+          <a:bodyPr/>
+          <a:lstStyle/>
+          <a:p>
+            <a:endParaRPr lang="pt-BR" dirty="0"/>
+          </a:p>
+        </p:txBody>
+      </p:sp>
+      <p:sp>
+        <p:nvSpPr>
+          <p:cNvPr id="4" name="Espaço Reservado para Número de Slide 3"/>
+          <p:cNvSpPr>
+            <a:spLocks noGrp="1"/>
+          </p:cNvSpPr>
+          <p:nvPr>
+            <p:ph type="sldNum" sz="quarter" idx="5"/>
+          </p:nvPr>
+        </p:nvSpPr>
+        <p:spPr/>
+        <p:txBody>
+          <a:bodyPr/>
+          <a:lstStyle/>
+          <a:p>
+            <a:pPr marL="0" marR="0" lvl="0" indent="0" algn="r" defTabSz="914400" rtl="0" eaLnBrk="1" fontAlgn="auto" latinLnBrk="0" hangingPunct="1">
+              <a:lnSpc>
+                <a:spcPct val="100000"/>
+              </a:lnSpc>
+              <a:spcBef>
+                <a:spcPts val="0"/>
+              </a:spcBef>
+              <a:spcAft>
+                <a:spcPts val="0"/>
+              </a:spcAft>
+              <a:buClrTx/>
+              <a:buSzTx/>
+              <a:buFontTx/>
+              <a:buNone/>
+              <a:tabLst/>
+              <a:defRPr/>
+            </a:pPr>
+            <a:fld id="{6FC8D850-966F-45A6-8DE7-15B891E7D40D}" type="slidenum">
+              <a:rPr kumimoji="0" lang="pt-BR" sz="2200" b="0" i="0" u="none" strike="noStrike" kern="1200" cap="none" spc="0" normalizeH="0" baseline="0" noProof="0" smtClean="0">
+                <a:ln>
+                  <a:noFill/>
+                </a:ln>
+                <a:solidFill>
+                  <a:prstClr val="black"/>
+                </a:solidFill>
+                <a:effectLst/>
+                <a:uLnTx/>
+                <a:uFillTx/>
+                <a:latin typeface="Calibri" panose="020F0502020204030204"/>
+                <a:ea typeface="+mn-ea"/>
+                <a:cs typeface="+mn-cs"/>
+              </a:rPr>
+              <a:pPr marL="0" marR="0" lvl="0" indent="0" algn="r" defTabSz="914400" rtl="0" eaLnBrk="1" fontAlgn="auto" latinLnBrk="0" hangingPunct="1">
+                <a:lnSpc>
+                  <a:spcPct val="100000"/>
+                </a:lnSpc>
+                <a:spcBef>
+                  <a:spcPts val="0"/>
+                </a:spcBef>
+                <a:spcAft>
+                  <a:spcPts val="0"/>
+                </a:spcAft>
+                <a:buClrTx/>
+                <a:buSzTx/>
+                <a:buFontTx/>
+                <a:buNone/>
+                <a:tabLst/>
+                <a:defRPr/>
+              </a:pPr>
+              <a:t>38</a:t>
+            </a:fld>
+            <a:endParaRPr kumimoji="0" lang="pt-BR" sz="2200" b="0" i="0" u="none" strike="noStrike" kern="1200" cap="none" spc="0" normalizeH="0" baseline="0" noProof="0">
+              <a:ln>
+                <a:noFill/>
+              </a:ln>
+              <a:solidFill>
+                <a:prstClr val="black"/>
+              </a:solidFill>
+              <a:effectLst/>
+              <a:uLnTx/>
+              <a:uFillTx/>
+              <a:latin typeface="Calibri" panose="020F0502020204030204"/>
+              <a:ea typeface="+mn-ea"/>
+              <a:cs typeface="+mn-cs"/>
+            </a:endParaRPr>
+          </a:p>
+        </p:txBody>
+      </p:sp>
+    </p:spTree>
+    <p:extLst>
+      <p:ext uri="{BB962C8B-B14F-4D97-AF65-F5344CB8AC3E}">
+        <p14:creationId xmlns:p14="http://schemas.microsoft.com/office/powerpoint/2010/main" val="227195064"/>
+      </p:ext>
+    </p:extLst>
+  </p:cSld>
+  <p:clrMapOvr>
+    <a:masterClrMapping/>
+  </p:clrMapOvr>
+</p:notes>
+</file>
+
+<file path=ppt/notesSlides/notesSlide4.xml><?xml version="1.0" encoding="utf-8"?>
+<p:notes xmlns:a="http://schemas.openxmlformats.org/drawingml/2006/main" xmlns:r="http://schemas.openxmlformats.org/officeDocument/2006/relationships" xmlns:p="http://schemas.openxmlformats.org/presentationml/2006/main">
+  <p:cSld>
+    <p:spTree>
+      <p:nvGrpSpPr>
+        <p:cNvPr id="1" name="">
+          <a:extLst>
+            <a:ext uri="{FF2B5EF4-FFF2-40B4-BE49-F238E27FC236}">
+              <a16:creationId xmlns:a16="http://schemas.microsoft.com/office/drawing/2014/main" id="{81D44ABB-9657-6DA9-2FB6-DBD0202B0587}"/>
+            </a:ext>
+          </a:extLst>
+        </p:cNvPr>
+        <p:cNvGrpSpPr/>
+        <p:nvPr/>
+      </p:nvGrpSpPr>
+      <p:grpSpPr>
+        <a:xfrm>
+          <a:off x="0" y="0"/>
+          <a:ext cx="0" cy="0"/>
+          <a:chOff x="0" y="0"/>
+          <a:chExt cx="0" cy="0"/>
+        </a:xfrm>
+      </p:grpSpPr>
+      <p:sp>
+        <p:nvSpPr>
+          <p:cNvPr id="2" name="Espaço Reservado para Imagem de Slide 1">
+            <a:extLst>
+              <a:ext uri="{FF2B5EF4-FFF2-40B4-BE49-F238E27FC236}">
+                <a16:creationId xmlns:a16="http://schemas.microsoft.com/office/drawing/2014/main" id="{957A8168-6204-FC6A-54EF-7ED070F1892A}"/>
+              </a:ext>
+            </a:extLst>
+          </p:cNvPr>
+          <p:cNvSpPr>
+            <a:spLocks noGrp="1" noRot="1" noChangeAspect="1"/>
+          </p:cNvSpPr>
+          <p:nvPr>
+            <p:ph type="sldImg"/>
+          </p:nvPr>
+        </p:nvSpPr>
+        <p:spPr/>
+      </p:sp>
+      <p:sp>
+        <p:nvSpPr>
+          <p:cNvPr id="3" name="Espaço Reservado para Anotações 2">
+            <a:extLst>
+              <a:ext uri="{FF2B5EF4-FFF2-40B4-BE49-F238E27FC236}">
+                <a16:creationId xmlns:a16="http://schemas.microsoft.com/office/drawing/2014/main" id="{0DD17A59-59C0-1863-74A5-8CF28A016BFC}"/>
+              </a:ext>
+            </a:extLst>
+          </p:cNvPr>
+          <p:cNvSpPr>
+            <a:spLocks noGrp="1"/>
+          </p:cNvSpPr>
+          <p:nvPr>
+            <p:ph type="body" idx="1"/>
+          </p:nvPr>
+        </p:nvSpPr>
+        <p:spPr/>
+        <p:txBody>
+          <a:bodyPr/>
+          <a:lstStyle/>
+          <a:p>
+            <a:endParaRPr lang="pt-BR" dirty="0"/>
+          </a:p>
+        </p:txBody>
+      </p:sp>
+      <p:sp>
+        <p:nvSpPr>
+          <p:cNvPr id="4" name="Espaço Reservado para Número de Slide 3">
+            <a:extLst>
+              <a:ext uri="{FF2B5EF4-FFF2-40B4-BE49-F238E27FC236}">
+                <a16:creationId xmlns:a16="http://schemas.microsoft.com/office/drawing/2014/main" id="{C94DF04E-78BC-6F0C-E709-8B78E8FC735F}"/>
+              </a:ext>
+            </a:extLst>
+          </p:cNvPr>
+          <p:cNvSpPr>
+            <a:spLocks noGrp="1"/>
+          </p:cNvSpPr>
+          <p:nvPr>
+            <p:ph type="sldNum" sz="quarter" idx="5"/>
+          </p:nvPr>
+        </p:nvSpPr>
+        <p:spPr/>
+        <p:txBody>
+          <a:bodyPr/>
+          <a:lstStyle/>
+          <a:p>
+            <a:fld id="{6FC8D850-966F-45A6-8DE7-15B891E7D40D}" type="slidenum">
+              <a:rPr lang="pt-BR" smtClean="0"/>
+              <a:t>4</a:t>
+            </a:fld>
+            <a:endParaRPr lang="pt-BR"/>
+          </a:p>
+        </p:txBody>
+      </p:sp>
+    </p:spTree>
+    <p:extLst>
+      <p:ext uri="{BB962C8B-B14F-4D97-AF65-F5344CB8AC3E}">
+        <p14:creationId xmlns:p14="http://schemas.microsoft.com/office/powerpoint/2010/main" val="4246680932"/>
+      </p:ext>
+    </p:extLst>
+  </p:cSld>
+  <p:clrMapOvr>
+    <a:masterClrMapping/>
+  </p:clrMapOvr>
+</p:notes>
+</file>
+
+<file path=ppt/notesSlides/notesSlide5.xml><?xml version="1.0" encoding="utf-8"?>
+<p:notes xmlns:a="http://schemas.openxmlformats.org/drawingml/2006/main" xmlns:r="http://schemas.openxmlformats.org/officeDocument/2006/relationships" xmlns:p="http://schemas.openxmlformats.org/presentationml/2006/main">
+  <p:cSld>
+    <p:spTree>
+      <p:nvGrpSpPr>
+        <p:cNvPr id="1" name="">
+          <a:extLst>
+            <a:ext uri="{FF2B5EF4-FFF2-40B4-BE49-F238E27FC236}">
+              <a16:creationId xmlns:a16="http://schemas.microsoft.com/office/drawing/2014/main" id="{1A96B865-C020-9DE0-6006-E764210C79D6}"/>
+            </a:ext>
+          </a:extLst>
+        </p:cNvPr>
+        <p:cNvGrpSpPr/>
+        <p:nvPr/>
+      </p:nvGrpSpPr>
+      <p:grpSpPr>
+        <a:xfrm>
+          <a:off x="0" y="0"/>
+          <a:ext cx="0" cy="0"/>
+          <a:chOff x="0" y="0"/>
+          <a:chExt cx="0" cy="0"/>
+        </a:xfrm>
+      </p:grpSpPr>
+      <p:sp>
+        <p:nvSpPr>
+          <p:cNvPr id="2" name="Espaço Reservado para Imagem de Slide 1">
+            <a:extLst>
+              <a:ext uri="{FF2B5EF4-FFF2-40B4-BE49-F238E27FC236}">
+                <a16:creationId xmlns:a16="http://schemas.microsoft.com/office/drawing/2014/main" id="{91510CF5-3C4D-8693-C486-62F64F1FF4E1}"/>
+              </a:ext>
+            </a:extLst>
+          </p:cNvPr>
+          <p:cNvSpPr>
+            <a:spLocks noGrp="1" noRot="1" noChangeAspect="1"/>
+          </p:cNvSpPr>
+          <p:nvPr>
+            <p:ph type="sldImg"/>
+          </p:nvPr>
+        </p:nvSpPr>
+        <p:spPr/>
+      </p:sp>
+      <p:sp>
+        <p:nvSpPr>
+          <p:cNvPr id="3" name="Espaço Reservado para Anotações 2">
+            <a:extLst>
+              <a:ext uri="{FF2B5EF4-FFF2-40B4-BE49-F238E27FC236}">
+                <a16:creationId xmlns:a16="http://schemas.microsoft.com/office/drawing/2014/main" id="{8EF85D7A-CC75-DC59-0F38-4B9DA415B3CF}"/>
+              </a:ext>
+            </a:extLst>
+          </p:cNvPr>
+          <p:cNvSpPr>
+            <a:spLocks noGrp="1"/>
+          </p:cNvSpPr>
+          <p:nvPr>
+            <p:ph type="body" idx="1"/>
+          </p:nvPr>
+        </p:nvSpPr>
+        <p:spPr/>
+        <p:txBody>
+          <a:bodyPr/>
+          <a:lstStyle/>
+          <a:p>
+            <a:endParaRPr lang="pt-BR" dirty="0"/>
+          </a:p>
+        </p:txBody>
+      </p:sp>
+      <p:sp>
+        <p:nvSpPr>
+          <p:cNvPr id="4" name="Espaço Reservado para Número de Slide 3">
+            <a:extLst>
+              <a:ext uri="{FF2B5EF4-FFF2-40B4-BE49-F238E27FC236}">
+                <a16:creationId xmlns:a16="http://schemas.microsoft.com/office/drawing/2014/main" id="{24477E74-7EEB-66D4-5183-ECE5C6638530}"/>
+              </a:ext>
+            </a:extLst>
+          </p:cNvPr>
+          <p:cNvSpPr>
+            <a:spLocks noGrp="1"/>
+          </p:cNvSpPr>
+          <p:nvPr>
+            <p:ph type="sldNum" sz="quarter" idx="5"/>
+          </p:nvPr>
+        </p:nvSpPr>
+        <p:spPr/>
+        <p:txBody>
+          <a:bodyPr/>
+          <a:lstStyle/>
+          <a:p>
             <a:fld id="{6FC8D850-966F-45A6-8DE7-15B891E7D40D}" type="slidenum">
               <a:rPr lang="pt-BR" smtClean="0"/>
               <a:t>5</a:t>
@@ -3501,7 +3828,7 @@
     </p:spTree>
     <p:extLst>
       <p:ext uri="{BB962C8B-B14F-4D97-AF65-F5344CB8AC3E}">
-        <p14:creationId xmlns:p14="http://schemas.microsoft.com/office/powerpoint/2010/main" val="5455443"/>
+        <p14:creationId xmlns:p14="http://schemas.microsoft.com/office/powerpoint/2010/main" val="3083598729"/>
       </p:ext>
     </p:extLst>
   </p:cSld>
@@ -3585,7 +3912,7 @@
     </p:spTree>
     <p:extLst>
       <p:ext uri="{BB962C8B-B14F-4D97-AF65-F5344CB8AC3E}">
-        <p14:creationId xmlns:p14="http://schemas.microsoft.com/office/powerpoint/2010/main" val="2375987373"/>
+        <p14:creationId xmlns:p14="http://schemas.microsoft.com/office/powerpoint/2010/main" val="645644717"/>
       </p:ext>
     </p:extLst>
   </p:cSld>
@@ -3669,7 +3996,7 @@
     </p:spTree>
     <p:extLst>
       <p:ext uri="{BB962C8B-B14F-4D97-AF65-F5344CB8AC3E}">
-        <p14:creationId xmlns:p14="http://schemas.microsoft.com/office/powerpoint/2010/main" val="666031961"/>
+        <p14:creationId xmlns:p14="http://schemas.microsoft.com/office/powerpoint/2010/main" val="5455443"/>
       </p:ext>
     </p:extLst>
   </p:cSld>
@@ -3753,7 +4080,7 @@
     </p:spTree>
     <p:extLst>
       <p:ext uri="{BB962C8B-B14F-4D97-AF65-F5344CB8AC3E}">
-        <p14:creationId xmlns:p14="http://schemas.microsoft.com/office/powerpoint/2010/main" val="2237530383"/>
+        <p14:creationId xmlns:p14="http://schemas.microsoft.com/office/powerpoint/2010/main" val="2375987373"/>
       </p:ext>
     </p:extLst>
   </p:cSld>
@@ -3837,7 +4164,7 @@
     </p:spTree>
     <p:extLst>
       <p:ext uri="{BB962C8B-B14F-4D97-AF65-F5344CB8AC3E}">
-        <p14:creationId xmlns:p14="http://schemas.microsoft.com/office/powerpoint/2010/main" val="1100645157"/>
+        <p14:creationId xmlns:p14="http://schemas.microsoft.com/office/powerpoint/2010/main" val="666031961"/>
       </p:ext>
     </p:extLst>
   </p:cSld>
@@ -3994,7 +4321,7 @@
           <a:p>
             <a:fld id="{63289F7E-B80B-496E-81B4-D396C37C9454}" type="datetimeFigureOut">
               <a:rPr lang="pt-BR" smtClean="0"/>
-              <a:t>01/11/2023</a:t>
+              <a:t>07/05/2025</a:t>
             </a:fld>
             <a:endParaRPr lang="pt-BR"/>
           </a:p>
@@ -4048,7 +4375,7 @@
           <a:p>
             <a:fld id="{1A7E88B7-70CE-4035-AE73-13FA6FB985D4}" type="slidenum">
               <a:rPr lang="pt-BR" smtClean="0"/>
-              <a:t>‹nº›</a:t>
+              <a:t>‹#›</a:t>
             </a:fld>
             <a:endParaRPr lang="pt-BR"/>
           </a:p>
@@ -4192,7 +4519,7 @@
           <a:p>
             <a:fld id="{63289F7E-B80B-496E-81B4-D396C37C9454}" type="datetimeFigureOut">
               <a:rPr lang="pt-BR" smtClean="0"/>
-              <a:t>01/11/2023</a:t>
+              <a:t>07/05/2025</a:t>
             </a:fld>
             <a:endParaRPr lang="pt-BR"/>
           </a:p>
@@ -4246,7 +4573,7 @@
           <a:p>
             <a:fld id="{1A7E88B7-70CE-4035-AE73-13FA6FB985D4}" type="slidenum">
               <a:rPr lang="pt-BR" smtClean="0"/>
-              <a:t>‹nº›</a:t>
+              <a:t>‹#›</a:t>
             </a:fld>
             <a:endParaRPr lang="pt-BR"/>
           </a:p>
@@ -4400,7 +4727,7 @@
           <a:p>
             <a:fld id="{63289F7E-B80B-496E-81B4-D396C37C9454}" type="datetimeFigureOut">
               <a:rPr lang="pt-BR" smtClean="0"/>
-              <a:t>01/11/2023</a:t>
+              <a:t>07/05/2025</a:t>
             </a:fld>
             <a:endParaRPr lang="pt-BR"/>
           </a:p>
@@ -4454,7 +4781,7 @@
           <a:p>
             <a:fld id="{1A7E88B7-70CE-4035-AE73-13FA6FB985D4}" type="slidenum">
               <a:rPr lang="pt-BR" smtClean="0"/>
-              <a:t>‹nº›</a:t>
+              <a:t>‹#›</a:t>
             </a:fld>
             <a:endParaRPr lang="pt-BR"/>
           </a:p>
@@ -4655,7 +4982,7 @@
             <a:fld id="{1D8BD707-D9CF-40AE-B4C6-C98DA3205C09}" type="datetimeFigureOut">
               <a:rPr lang="en-US" smtClean="0"/>
               <a:pPr/>
-              <a:t>11/1/2023</a:t>
+              <a:t>5/7/2025</a:t>
             </a:fld>
             <a:endParaRPr lang="en-US"/>
           </a:p>
@@ -4698,7 +5025,7 @@
             <a:fld id="{B6F15528-21DE-4FAA-801E-634DDDAF4B2B}" type="slidenum">
               <a:rPr lang="en-US" smtClean="0"/>
               <a:pPr/>
-              <a:t>‹nº›</a:t>
+              <a:t>‹#›</a:t>
             </a:fld>
             <a:endParaRPr lang="en-US"/>
           </a:p>
@@ -4827,7 +5154,7 @@
             <a:fld id="{1D8BD707-D9CF-40AE-B4C6-C98DA3205C09}" type="datetimeFigureOut">
               <a:rPr lang="en-US" smtClean="0"/>
               <a:pPr/>
-              <a:t>11/1/2023</a:t>
+              <a:t>5/7/2025</a:t>
             </a:fld>
             <a:endParaRPr lang="en-US"/>
           </a:p>
@@ -4870,7 +5197,7 @@
             <a:fld id="{B6F15528-21DE-4FAA-801E-634DDDAF4B2B}" type="slidenum">
               <a:rPr lang="en-US" smtClean="0"/>
               <a:pPr/>
-              <a:t>‹nº›</a:t>
+              <a:t>‹#›</a:t>
             </a:fld>
             <a:endParaRPr lang="en-US"/>
           </a:p>
@@ -5075,7 +5402,7 @@
             <a:fld id="{1D8BD707-D9CF-40AE-B4C6-C98DA3205C09}" type="datetimeFigureOut">
               <a:rPr lang="en-US" smtClean="0"/>
               <a:pPr/>
-              <a:t>11/1/2023</a:t>
+              <a:t>5/7/2025</a:t>
             </a:fld>
             <a:endParaRPr lang="en-US"/>
           </a:p>
@@ -5118,7 +5445,7 @@
             <a:fld id="{B6F15528-21DE-4FAA-801E-634DDDAF4B2B}" type="slidenum">
               <a:rPr lang="en-US" smtClean="0"/>
               <a:pPr/>
-              <a:t>‹nº›</a:t>
+              <a:t>‹#›</a:t>
             </a:fld>
             <a:endParaRPr lang="en-US"/>
           </a:p>
@@ -5365,7 +5692,7 @@
             <a:fld id="{1D8BD707-D9CF-40AE-B4C6-C98DA3205C09}" type="datetimeFigureOut">
               <a:rPr lang="en-US" smtClean="0"/>
               <a:pPr/>
-              <a:t>11/1/2023</a:t>
+              <a:t>5/7/2025</a:t>
             </a:fld>
             <a:endParaRPr lang="en-US"/>
           </a:p>
@@ -5408,7 +5735,7 @@
             <a:fld id="{B6F15528-21DE-4FAA-801E-634DDDAF4B2B}" type="slidenum">
               <a:rPr lang="en-US" smtClean="0"/>
               <a:pPr/>
-              <a:t>‹nº›</a:t>
+              <a:t>‹#›</a:t>
             </a:fld>
             <a:endParaRPr lang="en-US"/>
           </a:p>
@@ -5789,7 +6116,7 @@
             <a:fld id="{1D8BD707-D9CF-40AE-B4C6-C98DA3205C09}" type="datetimeFigureOut">
               <a:rPr lang="en-US" smtClean="0"/>
               <a:pPr/>
-              <a:t>11/1/2023</a:t>
+              <a:t>5/7/2025</a:t>
             </a:fld>
             <a:endParaRPr lang="en-US"/>
           </a:p>
@@ -5832,7 +6159,7 @@
             <a:fld id="{B6F15528-21DE-4FAA-801E-634DDDAF4B2B}" type="slidenum">
               <a:rPr lang="en-US" smtClean="0"/>
               <a:pPr/>
-              <a:t>‹nº›</a:t>
+              <a:t>‹#›</a:t>
             </a:fld>
             <a:endParaRPr lang="en-US"/>
           </a:p>
@@ -5909,7 +6236,7 @@
             <a:fld id="{1D8BD707-D9CF-40AE-B4C6-C98DA3205C09}" type="datetimeFigureOut">
               <a:rPr lang="en-US" smtClean="0"/>
               <a:pPr/>
-              <a:t>11/1/2023</a:t>
+              <a:t>5/7/2025</a:t>
             </a:fld>
             <a:endParaRPr lang="en-US"/>
           </a:p>
@@ -5952,7 +6279,7 @@
             <a:fld id="{B6F15528-21DE-4FAA-801E-634DDDAF4B2B}" type="slidenum">
               <a:rPr lang="en-US" smtClean="0"/>
               <a:pPr/>
-              <a:t>‹nº›</a:t>
+              <a:t>‹#›</a:t>
             </a:fld>
             <a:endParaRPr lang="en-US"/>
           </a:p>
@@ -6006,7 +6333,7 @@
             <a:fld id="{1D8BD707-D9CF-40AE-B4C6-C98DA3205C09}" type="datetimeFigureOut">
               <a:rPr lang="en-US" smtClean="0"/>
               <a:pPr/>
-              <a:t>11/1/2023</a:t>
+              <a:t>5/7/2025</a:t>
             </a:fld>
             <a:endParaRPr lang="en-US"/>
           </a:p>
@@ -6049,7 +6376,7 @@
             <a:fld id="{B6F15528-21DE-4FAA-801E-634DDDAF4B2B}" type="slidenum">
               <a:rPr lang="en-US" smtClean="0"/>
               <a:pPr/>
-              <a:t>‹nº›</a:t>
+              <a:t>‹#›</a:t>
             </a:fld>
             <a:endParaRPr lang="en-US"/>
           </a:p>
@@ -6285,7 +6612,7 @@
             <a:fld id="{1D8BD707-D9CF-40AE-B4C6-C98DA3205C09}" type="datetimeFigureOut">
               <a:rPr lang="en-US" smtClean="0"/>
               <a:pPr/>
-              <a:t>11/1/2023</a:t>
+              <a:t>5/7/2025</a:t>
             </a:fld>
             <a:endParaRPr lang="en-US"/>
           </a:p>
@@ -6328,7 +6655,7 @@
             <a:fld id="{B6F15528-21DE-4FAA-801E-634DDDAF4B2B}" type="slidenum">
               <a:rPr lang="en-US" smtClean="0"/>
               <a:pPr/>
-              <a:t>‹nº›</a:t>
+              <a:t>‹#›</a:t>
             </a:fld>
             <a:endParaRPr lang="en-US"/>
           </a:p>
@@ -6472,7 +6799,7 @@
           <a:p>
             <a:fld id="{63289F7E-B80B-496E-81B4-D396C37C9454}" type="datetimeFigureOut">
               <a:rPr lang="pt-BR" smtClean="0"/>
-              <a:t>01/11/2023</a:t>
+              <a:t>07/05/2025</a:t>
             </a:fld>
             <a:endParaRPr lang="pt-BR"/>
           </a:p>
@@ -6526,7 +6853,7 @@
           <a:p>
             <a:fld id="{1A7E88B7-70CE-4035-AE73-13FA6FB985D4}" type="slidenum">
               <a:rPr lang="pt-BR" smtClean="0"/>
-              <a:t>‹nº›</a:t>
+              <a:t>‹#›</a:t>
             </a:fld>
             <a:endParaRPr lang="pt-BR"/>
           </a:p>
@@ -6742,7 +7069,7 @@
             <a:fld id="{1D8BD707-D9CF-40AE-B4C6-C98DA3205C09}" type="datetimeFigureOut">
               <a:rPr lang="en-US" smtClean="0"/>
               <a:pPr/>
-              <a:t>11/1/2023</a:t>
+              <a:t>5/7/2025</a:t>
             </a:fld>
             <a:endParaRPr lang="en-US"/>
           </a:p>
@@ -6785,7 +7112,7 @@
             <a:fld id="{B6F15528-21DE-4FAA-801E-634DDDAF4B2B}" type="slidenum">
               <a:rPr lang="en-US" smtClean="0"/>
               <a:pPr/>
-              <a:t>‹nº›</a:t>
+              <a:t>‹#›</a:t>
             </a:fld>
             <a:endParaRPr lang="en-US"/>
           </a:p>
@@ -6914,7 +7241,7 @@
             <a:fld id="{1D8BD707-D9CF-40AE-B4C6-C98DA3205C09}" type="datetimeFigureOut">
               <a:rPr lang="en-US" smtClean="0"/>
               <a:pPr/>
-              <a:t>11/1/2023</a:t>
+              <a:t>5/7/2025</a:t>
             </a:fld>
             <a:endParaRPr lang="en-US"/>
           </a:p>
@@ -6957,7 +7284,7 @@
             <a:fld id="{B6F15528-21DE-4FAA-801E-634DDDAF4B2B}" type="slidenum">
               <a:rPr lang="en-US" smtClean="0"/>
               <a:pPr/>
-              <a:t>‹nº›</a:t>
+              <a:t>‹#›</a:t>
             </a:fld>
             <a:endParaRPr lang="en-US"/>
           </a:p>
@@ -7096,7 +7423,7 @@
             <a:fld id="{1D8BD707-D9CF-40AE-B4C6-C98DA3205C09}" type="datetimeFigureOut">
               <a:rPr lang="en-US" smtClean="0"/>
               <a:pPr/>
-              <a:t>11/1/2023</a:t>
+              <a:t>5/7/2025</a:t>
             </a:fld>
             <a:endParaRPr lang="en-US"/>
           </a:p>
@@ -7139,7 +7466,7 @@
             <a:fld id="{B6F15528-21DE-4FAA-801E-634DDDAF4B2B}" type="slidenum">
               <a:rPr lang="en-US" smtClean="0"/>
               <a:pPr/>
-              <a:t>‹nº›</a:t>
+              <a:t>‹#›</a:t>
             </a:fld>
             <a:endParaRPr lang="en-US"/>
           </a:p>
@@ -7360,7 +7687,7 @@
           <a:p>
             <a:fld id="{63289F7E-B80B-496E-81B4-D396C37C9454}" type="datetimeFigureOut">
               <a:rPr lang="pt-BR" smtClean="0"/>
-              <a:t>01/11/2023</a:t>
+              <a:t>07/05/2025</a:t>
             </a:fld>
             <a:endParaRPr lang="pt-BR"/>
           </a:p>
@@ -7414,7 +7741,7 @@
           <a:p>
             <a:fld id="{1A7E88B7-70CE-4035-AE73-13FA6FB985D4}" type="slidenum">
               <a:rPr lang="pt-BR" smtClean="0"/>
-              <a:t>‹nº›</a:t>
+              <a:t>‹#›</a:t>
             </a:fld>
             <a:endParaRPr lang="pt-BR"/>
           </a:p>
@@ -7625,7 +7952,7 @@
           <a:p>
             <a:fld id="{63289F7E-B80B-496E-81B4-D396C37C9454}" type="datetimeFigureOut">
               <a:rPr lang="pt-BR" smtClean="0"/>
-              <a:t>01/11/2023</a:t>
+              <a:t>07/05/2025</a:t>
             </a:fld>
             <a:endParaRPr lang="pt-BR"/>
           </a:p>
@@ -7679,7 +8006,7 @@
           <a:p>
             <a:fld id="{1A7E88B7-70CE-4035-AE73-13FA6FB985D4}" type="slidenum">
               <a:rPr lang="pt-BR" smtClean="0"/>
-              <a:t>‹nº›</a:t>
+              <a:t>‹#›</a:t>
             </a:fld>
             <a:endParaRPr lang="pt-BR"/>
           </a:p>
@@ -8037,7 +8364,7 @@
           <a:p>
             <a:fld id="{63289F7E-B80B-496E-81B4-D396C37C9454}" type="datetimeFigureOut">
               <a:rPr lang="pt-BR" smtClean="0"/>
-              <a:t>01/11/2023</a:t>
+              <a:t>07/05/2025</a:t>
             </a:fld>
             <a:endParaRPr lang="pt-BR"/>
           </a:p>
@@ -8091,7 +8418,7 @@
           <a:p>
             <a:fld id="{1A7E88B7-70CE-4035-AE73-13FA6FB985D4}" type="slidenum">
               <a:rPr lang="pt-BR" smtClean="0"/>
-              <a:t>‹nº›</a:t>
+              <a:t>‹#›</a:t>
             </a:fld>
             <a:endParaRPr lang="pt-BR"/>
           </a:p>
@@ -8178,7 +8505,7 @@
           <a:p>
             <a:fld id="{63289F7E-B80B-496E-81B4-D396C37C9454}" type="datetimeFigureOut">
               <a:rPr lang="pt-BR" smtClean="0"/>
-              <a:t>01/11/2023</a:t>
+              <a:t>07/05/2025</a:t>
             </a:fld>
             <a:endParaRPr lang="pt-BR"/>
           </a:p>
@@ -8232,7 +8559,7 @@
           <a:p>
             <a:fld id="{1A7E88B7-70CE-4035-AE73-13FA6FB985D4}" type="slidenum">
               <a:rPr lang="pt-BR" smtClean="0"/>
-              <a:t>‹nº›</a:t>
+              <a:t>‹#›</a:t>
             </a:fld>
             <a:endParaRPr lang="pt-BR"/>
           </a:p>
@@ -8291,7 +8618,7 @@
           <a:p>
             <a:fld id="{63289F7E-B80B-496E-81B4-D396C37C9454}" type="datetimeFigureOut">
               <a:rPr lang="pt-BR" smtClean="0"/>
-              <a:t>01/11/2023</a:t>
+              <a:t>07/05/2025</a:t>
             </a:fld>
             <a:endParaRPr lang="pt-BR"/>
           </a:p>
@@ -8345,7 +8672,7 @@
           <a:p>
             <a:fld id="{1A7E88B7-70CE-4035-AE73-13FA6FB985D4}" type="slidenum">
               <a:rPr lang="pt-BR" smtClean="0"/>
-              <a:t>‹nº›</a:t>
+              <a:t>‹#›</a:t>
             </a:fld>
             <a:endParaRPr lang="pt-BR"/>
           </a:p>
@@ -8602,7 +8929,7 @@
           <a:p>
             <a:fld id="{63289F7E-B80B-496E-81B4-D396C37C9454}" type="datetimeFigureOut">
               <a:rPr lang="pt-BR" smtClean="0"/>
-              <a:t>01/11/2023</a:t>
+              <a:t>07/05/2025</a:t>
             </a:fld>
             <a:endParaRPr lang="pt-BR"/>
           </a:p>
@@ -8656,7 +8983,7 @@
           <a:p>
             <a:fld id="{1A7E88B7-70CE-4035-AE73-13FA6FB985D4}" type="slidenum">
               <a:rPr lang="pt-BR" smtClean="0"/>
-              <a:t>‹nº›</a:t>
+              <a:t>‹#›</a:t>
             </a:fld>
             <a:endParaRPr lang="pt-BR"/>
           </a:p>
@@ -8890,7 +9217,7 @@
           <a:p>
             <a:fld id="{63289F7E-B80B-496E-81B4-D396C37C9454}" type="datetimeFigureOut">
               <a:rPr lang="pt-BR" smtClean="0"/>
-              <a:t>01/11/2023</a:t>
+              <a:t>07/05/2025</a:t>
             </a:fld>
             <a:endParaRPr lang="pt-BR"/>
           </a:p>
@@ -8944,7 +9271,7 @@
           <a:p>
             <a:fld id="{1A7E88B7-70CE-4035-AE73-13FA6FB985D4}" type="slidenum">
               <a:rPr lang="pt-BR" smtClean="0"/>
-              <a:t>‹nº›</a:t>
+              <a:t>‹#›</a:t>
             </a:fld>
             <a:endParaRPr lang="pt-BR"/>
           </a:p>
@@ -9131,7 +9458,7 @@
           <a:p>
             <a:fld id="{63289F7E-B80B-496E-81B4-D396C37C9454}" type="datetimeFigureOut">
               <a:rPr lang="pt-BR" smtClean="0"/>
-              <a:t>01/11/2023</a:t>
+              <a:t>07/05/2025</a:t>
             </a:fld>
             <a:endParaRPr lang="pt-BR"/>
           </a:p>
@@ -9221,7 +9548,7 @@
           <a:p>
             <a:fld id="{1A7E88B7-70CE-4035-AE73-13FA6FB985D4}" type="slidenum">
               <a:rPr lang="pt-BR" smtClean="0"/>
-              <a:t>‹nº›</a:t>
+              <a:t>‹#›</a:t>
             </a:fld>
             <a:endParaRPr lang="pt-BR"/>
           </a:p>
@@ -9684,7 +10011,7 @@
             <a:fld id="{1D8BD707-D9CF-40AE-B4C6-C98DA3205C09}" type="datetimeFigureOut">
               <a:rPr lang="en-US" smtClean="0"/>
               <a:pPr/>
-              <a:t>11/1/2023</a:t>
+              <a:t>5/7/2025</a:t>
             </a:fld>
             <a:endParaRPr lang="en-US"/>
           </a:p>
@@ -9763,7 +10090,7 @@
             <a:fld id="{B6F15528-21DE-4FAA-801E-634DDDAF4B2B}" type="slidenum">
               <a:rPr lang="en-US" smtClean="0"/>
               <a:pPr/>
-              <a:t>‹nº›</a:t>
+              <a:t>‹#›</a:t>
             </a:fld>
             <a:endParaRPr lang="en-US"/>
           </a:p>
@@ -10318,7 +10645,13 @@
     </p:bg>
     <p:spTree>
       <p:nvGrpSpPr>
-        <p:cNvPr id="1" name=""/>
+        <p:cNvPr id="1" name="">
+          <a:extLst>
+            <a:ext uri="{FF2B5EF4-FFF2-40B4-BE49-F238E27FC236}">
+              <a16:creationId xmlns:a16="http://schemas.microsoft.com/office/drawing/2014/main" id="{1D2ED026-2C15-F909-7F1A-1BCDF565F98E}"/>
+            </a:ext>
+          </a:extLst>
+        </p:cNvPr>
         <p:cNvGrpSpPr/>
         <p:nvPr/>
       </p:nvGrpSpPr>
@@ -10335,7 +10668,7 @@
           <p:cNvPr id="2" name="Título 1">
             <a:extLst>
               <a:ext uri="{FF2B5EF4-FFF2-40B4-BE49-F238E27FC236}">
-                <a16:creationId xmlns:a16="http://schemas.microsoft.com/office/drawing/2014/main" id="{5F09B89C-3183-4D52-981A-62798DDFF2B8}"/>
+                <a16:creationId xmlns:a16="http://schemas.microsoft.com/office/drawing/2014/main" id="{E7D8352F-A491-0CCE-B312-D63883E2D756}"/>
               </a:ext>
             </a:extLst>
           </p:cNvPr>
@@ -10375,7 +10708,7 @@
           <p:cNvPr id="3" name="AutoShape 2" descr="An example of graph signal reconstruction over wireless sensor network. |  Download Scientific Diagram">
             <a:extLst>
               <a:ext uri="{FF2B5EF4-FFF2-40B4-BE49-F238E27FC236}">
-                <a16:creationId xmlns:a16="http://schemas.microsoft.com/office/drawing/2014/main" id="{0166B4DD-D72A-4A54-94A7-2C38133837FD}"/>
+                <a16:creationId xmlns:a16="http://schemas.microsoft.com/office/drawing/2014/main" id="{5E6BEEB2-491E-A507-3C4A-03CFF373EEAF}"/>
               </a:ext>
             </a:extLst>
           </p:cNvPr>
@@ -10426,7 +10759,7 @@
           <p:cNvPr id="7" name="AutoShape 4" descr="An example of graph signal reconstruction over wireless sensor network. |  Download Scientific Diagram">
             <a:extLst>
               <a:ext uri="{FF2B5EF4-FFF2-40B4-BE49-F238E27FC236}">
-                <a16:creationId xmlns:a16="http://schemas.microsoft.com/office/drawing/2014/main" id="{14C2B67D-81A1-457E-A410-FE4350A3CCA4}"/>
+                <a16:creationId xmlns:a16="http://schemas.microsoft.com/office/drawing/2014/main" id="{F185DCD3-5B1D-7A6C-C8CA-67E143D16E67}"/>
               </a:ext>
             </a:extLst>
           </p:cNvPr>
@@ -10477,7 +10810,7 @@
           <p:cNvPr id="4" name="Espaço Reservado para Conteúdo 3">
             <a:extLst>
               <a:ext uri="{FF2B5EF4-FFF2-40B4-BE49-F238E27FC236}">
-                <a16:creationId xmlns:a16="http://schemas.microsoft.com/office/drawing/2014/main" id="{5F1B432F-F570-AEC0-CFFF-C1D9196D7234}"/>
+                <a16:creationId xmlns:a16="http://schemas.microsoft.com/office/drawing/2014/main" id="{499811FC-ABB6-E014-BB5F-F6A45A11ACF5}"/>
               </a:ext>
             </a:extLst>
           </p:cNvPr>
@@ -10503,7 +10836,61 @@
             <a:pPr marL="0" indent="0">
               <a:buNone/>
             </a:pPr>
-            <a:endParaRPr lang="pt-BR" dirty="0"/>
+            <a:r>
+              <a:rPr lang="pt-BR" dirty="0"/>
+              <a:t>K-</a:t>
+            </a:r>
+            <a:r>
+              <a:rPr lang="pt-BR" dirty="0" err="1"/>
+              <a:t>means</a:t>
+            </a:r>
+            <a:r>
+              <a:rPr lang="pt-BR" dirty="0"/>
+              <a:t> </a:t>
+            </a:r>
+            <a:r>
+              <a:rPr lang="pt-BR" dirty="0" err="1"/>
+              <a:t>clustering</a:t>
+            </a:r>
+            <a:endParaRPr lang="pt-BR" dirty="0"/>
+          </a:p>
+          <a:p>
+            <a:r>
+              <a:rPr lang="pt-BR" dirty="0"/>
+              <a:t>É usado em problemas de</a:t>
+            </a:r>
+          </a:p>
+          <a:p>
+            <a:pPr lvl="1"/>
+            <a:r>
+              <a:rPr lang="pt-BR" dirty="0"/>
+              <a:t>Segmentação</a:t>
+            </a:r>
+          </a:p>
+          <a:p>
+            <a:pPr lvl="1"/>
+            <a:r>
+              <a:rPr lang="pt-BR" dirty="0"/>
+              <a:t>Agrupamento</a:t>
+            </a:r>
+          </a:p>
+          <a:p>
+            <a:pPr lvl="1"/>
+            <a:r>
+              <a:rPr lang="pt-BR" dirty="0"/>
+              <a:t>Redução de dimensionalidade</a:t>
+            </a:r>
+          </a:p>
+          <a:p>
+            <a:pPr lvl="1"/>
+            <a:r>
+              <a:rPr lang="pt-BR" b="1" i="1" dirty="0">
+                <a:solidFill>
+                  <a:srgbClr val="FF0000"/>
+                </a:solidFill>
+              </a:rPr>
+              <a:t>Detecção de anomalias</a:t>
+            </a:r>
           </a:p>
           <a:p>
             <a:pPr marL="0" indent="0">
@@ -10513,153 +10900,40 @@
           </a:p>
         </p:txBody>
       </p:sp>
-      <p:sp>
-        <p:nvSpPr>
-          <p:cNvPr id="6" name="CaixaDeTexto 5">
-            <a:extLst>
-              <a:ext uri="{FF2B5EF4-FFF2-40B4-BE49-F238E27FC236}">
-                <a16:creationId xmlns:a16="http://schemas.microsoft.com/office/drawing/2014/main" id="{470482DB-F365-0A83-E102-37A8EB7EACEF}"/>
-              </a:ext>
-            </a:extLst>
-          </p:cNvPr>
-          <p:cNvSpPr txBox="1"/>
-          <p:nvPr/>
-        </p:nvSpPr>
-        <p:spPr>
-          <a:xfrm>
-            <a:off x="846667" y="988201"/>
-            <a:ext cx="8229599" cy="5632311"/>
-          </a:xfrm>
-          <a:prstGeom prst="rect">
-            <a:avLst/>
-          </a:prstGeom>
-          <a:noFill/>
-        </p:spPr>
-        <p:txBody>
-          <a:bodyPr wrap="square">
-            <a:spAutoFit/>
-          </a:bodyPr>
-          <a:lstStyle/>
-          <a:p>
-            <a:endParaRPr lang="pt-BR" dirty="0"/>
-          </a:p>
-          <a:p>
-            <a:pPr marL="285750" indent="-285750">
-              <a:buFont typeface="Arial" panose="020B0604020202020204" pitchFamily="34" charset="0"/>
-              <a:buChar char="•"/>
-            </a:pPr>
-            <a:r>
-              <a:rPr lang="pt-BR" dirty="0"/>
-              <a:t>Exemplo: Centros de distribuição</a:t>
-            </a:r>
-          </a:p>
-          <a:p>
-            <a:endParaRPr lang="pt-BR" dirty="0"/>
-          </a:p>
-          <a:p>
-            <a:endParaRPr lang="pt-BR" dirty="0"/>
-          </a:p>
-          <a:p>
-            <a:endParaRPr lang="pt-BR" dirty="0"/>
-          </a:p>
-          <a:p>
-            <a:endParaRPr lang="pt-BR" dirty="0"/>
-          </a:p>
-          <a:p>
-            <a:endParaRPr lang="pt-BR" dirty="0"/>
-          </a:p>
-          <a:p>
-            <a:endParaRPr lang="pt-BR" dirty="0"/>
-          </a:p>
-          <a:p>
-            <a:endParaRPr lang="pt-BR" dirty="0"/>
-          </a:p>
-          <a:p>
-            <a:endParaRPr lang="pt-BR" dirty="0"/>
-          </a:p>
-          <a:p>
-            <a:endParaRPr lang="pt-BR" dirty="0"/>
-          </a:p>
-          <a:p>
-            <a:endParaRPr lang="pt-BR" dirty="0"/>
-          </a:p>
-          <a:p>
-            <a:endParaRPr lang="pt-BR" dirty="0"/>
-          </a:p>
-          <a:p>
-            <a:endParaRPr lang="pt-BR" dirty="0"/>
-          </a:p>
-          <a:p>
-            <a:endParaRPr lang="pt-BR" dirty="0"/>
-          </a:p>
-          <a:p>
-            <a:endParaRPr lang="pt-BR" dirty="0"/>
-          </a:p>
-          <a:p>
-            <a:r>
-              <a:rPr lang="pt-BR" dirty="0">
-                <a:hlinkClick r:id="rId4"/>
-              </a:rPr>
-              <a:t>https://medium.com/programadores-ajudando-programadores/k-means-o-que-%C3%A9-como-funciona-aplica%C3%A7%C3%B5es-e-exemplo-em-python-6021df6e2572</a:t>
-            </a:r>
-            <a:endParaRPr lang="pt-BR" dirty="0"/>
-          </a:p>
-          <a:p>
-            <a:endParaRPr lang="pt-BR" dirty="0"/>
-          </a:p>
-        </p:txBody>
-      </p:sp>
       <p:pic>
         <p:nvPicPr>
-          <p:cNvPr id="6146" name="Picture 2" descr="Centro de Distribuição: uma solução mais que viável – Novidá">
-            <a:extLst>
-              <a:ext uri="{FF2B5EF4-FFF2-40B4-BE49-F238E27FC236}">
-                <a16:creationId xmlns:a16="http://schemas.microsoft.com/office/drawing/2014/main" id="{4EEAF6B8-1AE8-82F9-6BD7-E45E945A8CB5}"/>
+          <p:cNvPr id="6" name="Picture 5">
+            <a:extLst>
+              <a:ext uri="{FF2B5EF4-FFF2-40B4-BE49-F238E27FC236}">
+                <a16:creationId xmlns:a16="http://schemas.microsoft.com/office/drawing/2014/main" id="{777B7683-5837-BFBE-BFE1-735C62F0B4E6}"/>
               </a:ext>
             </a:extLst>
           </p:cNvPr>
           <p:cNvPicPr>
-            <a:picLocks noChangeAspect="1" noChangeArrowheads="1"/>
+            <a:picLocks noChangeAspect="1"/>
           </p:cNvPicPr>
           <p:nvPr/>
         </p:nvPicPr>
         <p:blipFill>
-          <a:blip r:embed="rId5">
-            <a:extLst>
-              <a:ext uri="{28A0092B-C50C-407E-A947-70E740481C1C}">
-                <a14:useLocalDpi xmlns:a14="http://schemas.microsoft.com/office/drawing/2010/main" val="0"/>
-              </a:ext>
-            </a:extLst>
-          </a:blip>
-          <a:srcRect/>
+          <a:blip r:embed="rId4"/>
           <a:stretch>
             <a:fillRect/>
           </a:stretch>
         </p:blipFill>
-        <p:spPr bwMode="auto">
-          <a:xfrm>
-            <a:off x="2077156" y="1821535"/>
-            <a:ext cx="6191250" cy="3390900"/>
+        <p:spPr>
+          <a:xfrm>
+            <a:off x="4288220" y="2626493"/>
+            <a:ext cx="7213229" cy="3261484"/>
           </a:xfrm>
           <a:prstGeom prst="rect">
             <a:avLst/>
           </a:prstGeom>
-          <a:noFill/>
-          <a:extLst>
-            <a:ext uri="{909E8E84-426E-40DD-AFC4-6F175D3DCCD1}">
-              <a14:hiddenFill xmlns:a14="http://schemas.microsoft.com/office/drawing/2010/main">
-                <a:solidFill>
-                  <a:srgbClr val="FFFFFF"/>
-                </a:solidFill>
-              </a14:hiddenFill>
-            </a:ext>
-          </a:extLst>
         </p:spPr>
       </p:pic>
     </p:spTree>
     <p:extLst>
       <p:ext uri="{BB962C8B-B14F-4D97-AF65-F5344CB8AC3E}">
-        <p14:creationId xmlns:p14="http://schemas.microsoft.com/office/powerpoint/2010/main" val="1949754007"/>
+        <p14:creationId xmlns:p14="http://schemas.microsoft.com/office/powerpoint/2010/main" val="1992293854"/>
       </p:ext>
     </p:extLst>
   </p:cSld>
@@ -10861,7 +11135,7 @@
         <p:spPr>
           <a:xfrm>
             <a:off x="304800" y="1066801"/>
-            <a:ext cx="9810044" cy="2737556"/>
+            <a:ext cx="9810044" cy="558800"/>
           </a:xfrm>
         </p:spPr>
         <p:txBody>
@@ -10873,145 +11147,254 @@
             <a:pPr marL="0" indent="0">
               <a:buNone/>
             </a:pPr>
-            <a:endParaRPr lang="pt-BR" dirty="0"/>
-          </a:p>
-          <a:p>
-            <a:pPr marL="0" indent="0">
-              <a:buNone/>
-            </a:pPr>
-            <a:endParaRPr lang="pt-BR" dirty="0"/>
-          </a:p>
-        </p:txBody>
-      </p:sp>
-      <p:sp>
-        <p:nvSpPr>
-          <p:cNvPr id="6" name="CaixaDeTexto 5">
-            <a:extLst>
-              <a:ext uri="{FF2B5EF4-FFF2-40B4-BE49-F238E27FC236}">
-                <a16:creationId xmlns:a16="http://schemas.microsoft.com/office/drawing/2014/main" id="{470482DB-F365-0A83-E102-37A8EB7EACEF}"/>
-              </a:ext>
-            </a:extLst>
-          </p:cNvPr>
-          <p:cNvSpPr txBox="1"/>
-          <p:nvPr/>
-        </p:nvSpPr>
-        <p:spPr>
-          <a:xfrm>
-            <a:off x="846667" y="988201"/>
-            <a:ext cx="8229599" cy="3970318"/>
-          </a:xfrm>
-          <a:prstGeom prst="rect">
-            <a:avLst/>
-          </a:prstGeom>
-          <a:noFill/>
-        </p:spPr>
-        <p:txBody>
-          <a:bodyPr wrap="square">
-            <a:spAutoFit/>
-          </a:bodyPr>
-          <a:lstStyle/>
-          <a:p>
-            <a:endParaRPr lang="pt-BR" dirty="0"/>
-          </a:p>
-          <a:p>
-            <a:pPr marL="285750" indent="-285750">
-              <a:buFont typeface="Arial" panose="020B0604020202020204" pitchFamily="34" charset="0"/>
-              <a:buChar char="•"/>
-            </a:pPr>
             <a:r>
               <a:rPr lang="pt-BR" dirty="0"/>
-              <a:t>Exemplo: Centros de distribuição</a:t>
-            </a:r>
-          </a:p>
-          <a:p>
-            <a:endParaRPr lang="pt-BR" dirty="0"/>
-          </a:p>
-          <a:p>
-            <a:endParaRPr lang="pt-BR" dirty="0"/>
-          </a:p>
-          <a:p>
-            <a:endParaRPr lang="pt-BR" dirty="0"/>
-          </a:p>
-          <a:p>
-            <a:endParaRPr lang="pt-BR" dirty="0"/>
-          </a:p>
-          <a:p>
-            <a:endParaRPr lang="pt-BR" dirty="0"/>
-          </a:p>
-          <a:p>
-            <a:endParaRPr lang="pt-BR" dirty="0"/>
-          </a:p>
-          <a:p>
-            <a:endParaRPr lang="pt-BR" dirty="0"/>
-          </a:p>
-          <a:p>
-            <a:endParaRPr lang="pt-BR" dirty="0"/>
-          </a:p>
-          <a:p>
-            <a:endParaRPr lang="pt-BR" dirty="0"/>
-          </a:p>
-          <a:p>
-            <a:endParaRPr lang="pt-BR" dirty="0"/>
-          </a:p>
-          <a:p>
-            <a:endParaRPr lang="pt-BR" dirty="0"/>
-          </a:p>
-          <a:p>
-            <a:endParaRPr lang="pt-BR" dirty="0"/>
-          </a:p>
-        </p:txBody>
-      </p:sp>
-      <p:pic>
-        <p:nvPicPr>
-          <p:cNvPr id="3074" name="Picture 2" descr="Mapa do Brasil">
-            <a:extLst>
-              <a:ext uri="{FF2B5EF4-FFF2-40B4-BE49-F238E27FC236}">
-                <a16:creationId xmlns:a16="http://schemas.microsoft.com/office/drawing/2014/main" id="{BBEA9087-A8E1-78C5-981B-C50D7CF4635F}"/>
-              </a:ext>
-            </a:extLst>
-          </p:cNvPr>
-          <p:cNvPicPr>
-            <a:picLocks noChangeAspect="1" noChangeArrowheads="1"/>
-          </p:cNvPicPr>
-          <p:nvPr/>
-        </p:nvPicPr>
-        <p:blipFill>
-          <a:blip r:embed="rId4">
-            <a:extLst>
-              <a:ext uri="{28A0092B-C50C-407E-A947-70E740481C1C}">
-                <a14:useLocalDpi xmlns:a14="http://schemas.microsoft.com/office/drawing/2010/main" val="0"/>
-              </a:ext>
-            </a:extLst>
-          </a:blip>
-          <a:srcRect/>
-          <a:stretch>
-            <a:fillRect/>
-          </a:stretch>
-        </p:blipFill>
-        <p:spPr bwMode="auto">
-          <a:xfrm>
-            <a:off x="2579511" y="1983132"/>
-            <a:ext cx="5260622" cy="4344805"/>
-          </a:xfrm>
-          <a:prstGeom prst="rect">
-            <a:avLst/>
-          </a:prstGeom>
-          <a:noFill/>
-          <a:extLst>
-            <a:ext uri="{909E8E84-426E-40DD-AFC4-6F175D3DCCD1}">
-              <a14:hiddenFill xmlns:a14="http://schemas.microsoft.com/office/drawing/2010/main">
+              <a:t>K-</a:t>
+            </a:r>
+            <a:r>
+              <a:rPr lang="pt-BR" dirty="0" err="1"/>
+              <a:t>means</a:t>
+            </a:r>
+            <a:r>
+              <a:rPr lang="pt-BR" sz="3000" dirty="0"/>
+              <a:t> </a:t>
+            </a:r>
+            <a:r>
+              <a:rPr lang="pt-BR" dirty="0" err="1"/>
+              <a:t>pseudo-código</a:t>
+            </a:r>
+            <a:endParaRPr lang="pt-BR" dirty="0"/>
+          </a:p>
+        </p:txBody>
+      </p:sp>
+      <mc:AlternateContent xmlns:mc="http://schemas.openxmlformats.org/markup-compatibility/2006">
+        <mc:Choice xmlns:a14="http://schemas.microsoft.com/office/drawing/2010/main" Requires="a14">
+          <p:sp>
+            <p:nvSpPr>
+              <p:cNvPr id="5" name="TextBox 4">
+                <a:extLst>
+                  <a:ext uri="{FF2B5EF4-FFF2-40B4-BE49-F238E27FC236}">
+                    <a16:creationId xmlns:a16="http://schemas.microsoft.com/office/drawing/2014/main" id="{A60E2CD0-3AFD-013C-16CC-B158E81DC1CA}"/>
+                  </a:ext>
+                </a:extLst>
+              </p:cNvPr>
+              <p:cNvSpPr txBox="1"/>
+              <p:nvPr/>
+            </p:nvSpPr>
+            <p:spPr>
+              <a:xfrm>
+                <a:off x="1221786" y="2204015"/>
+                <a:ext cx="9545228" cy="2246769"/>
+              </a:xfrm>
+              <a:prstGeom prst="rect">
+                <a:avLst/>
+              </a:prstGeom>
+              <a:noFill/>
+              <a:ln>
                 <a:solidFill>
-                  <a:srgbClr val="FFFFFF"/>
+                  <a:schemeClr val="tx1"/>
                 </a:solidFill>
-              </a14:hiddenFill>
-            </a:ext>
-          </a:extLst>
-        </p:spPr>
-      </p:pic>
+              </a:ln>
+            </p:spPr>
+            <p:txBody>
+              <a:bodyPr wrap="square" rtlCol="0">
+                <a:spAutoFit/>
+              </a:bodyPr>
+              <a:lstStyle/>
+              <a:p>
+                <a:r>
+                  <a:rPr lang="pt-BR" sz="2000" b="1" dirty="0"/>
+                  <a:t>Entradas</a:t>
+                </a:r>
+                <a:r>
+                  <a:rPr lang="pt-BR" sz="2000" dirty="0"/>
+                  <a:t>: conjunto de exemplos e número de clusters, </a:t>
+                </a:r>
+                <a14:m>
+                  <m:oMath xmlns:m="http://schemas.openxmlformats.org/officeDocument/2006/math">
+                    <m:r>
+                      <a:rPr lang="pt-BR" sz="2000" i="1">
+                        <a:latin typeface="Cambria Math" panose="02040503050406030204" pitchFamily="18" charset="0"/>
+                      </a:rPr>
+                      <m:t>𝑘</m:t>
+                    </m:r>
+                  </m:oMath>
+                </a14:m>
+                <a:r>
+                  <a:rPr lang="pt-BR" sz="2000" dirty="0"/>
+                  <a:t>. </a:t>
+                </a:r>
+                <a:endParaRPr lang="pt-BR" sz="2000" b="1" dirty="0"/>
+              </a:p>
+              <a:p>
+                <a:pPr marL="342900" indent="-342900">
+                  <a:buFont typeface="+mj-lt"/>
+                  <a:buAutoNum type="arabicPeriod"/>
+                </a:pPr>
+                <a:r>
+                  <a:rPr lang="pt-BR" sz="2000" b="1" dirty="0"/>
+                  <a:t>Defina</a:t>
+                </a:r>
+                <a:r>
+                  <a:rPr lang="pt-BR" sz="2000" dirty="0"/>
+                  <a:t> </a:t>
+                </a:r>
+                <a14:m>
+                  <m:oMath xmlns:m="http://schemas.openxmlformats.org/officeDocument/2006/math">
+                    <m:r>
+                      <a:rPr lang="pt-BR" sz="2000" i="1">
+                        <a:latin typeface="Cambria Math" panose="02040503050406030204" pitchFamily="18" charset="0"/>
+                      </a:rPr>
+                      <m:t>𝑘</m:t>
+                    </m:r>
+                  </m:oMath>
+                </a14:m>
+                <a:r>
+                  <a:rPr lang="pt-BR" sz="2000" dirty="0"/>
+                  <a:t> centroides iniciais (geralmente, feito de forma aleatória).</a:t>
+                </a:r>
+              </a:p>
+              <a:p>
+                <a:pPr marL="342900" indent="-342900">
+                  <a:buFont typeface="+mj-lt"/>
+                  <a:buAutoNum type="arabicPeriod"/>
+                </a:pPr>
+                <a:r>
+                  <a:rPr lang="pt-BR" sz="2000" b="1" dirty="0"/>
+                  <a:t>Repita</a:t>
+                </a:r>
+              </a:p>
+              <a:p>
+                <a:pPr marL="800100" lvl="1" indent="-342900">
+                  <a:buFont typeface="+mj-lt"/>
+                  <a:buAutoNum type="alphaLcParenR"/>
+                </a:pPr>
+                <a:r>
+                  <a:rPr lang="pt-BR" sz="2000" dirty="0"/>
+                  <a:t>Calcule a distância de cada exemplo, </a:t>
+                </a:r>
+                <a14:m>
+                  <m:oMath xmlns:m="http://schemas.openxmlformats.org/officeDocument/2006/math">
+                    <m:r>
+                      <a:rPr lang="pt-BR" sz="2000" b="1" i="1">
+                        <a:latin typeface="Cambria Math" panose="02040503050406030204" pitchFamily="18" charset="0"/>
+                      </a:rPr>
+                      <m:t>𝒙</m:t>
+                    </m:r>
+                    <m:r>
+                      <a:rPr lang="pt-BR" sz="2000" b="1" i="1" smtClean="0">
+                        <a:latin typeface="Cambria Math" panose="02040503050406030204" pitchFamily="18" charset="0"/>
+                      </a:rPr>
+                      <m:t>,</m:t>
+                    </m:r>
+                    <m:r>
+                      <a:rPr lang="pt-BR" sz="2000" b="1" i="1">
+                        <a:latin typeface="Cambria Math" panose="02040503050406030204" pitchFamily="18" charset="0"/>
+                      </a:rPr>
+                      <m:t> </m:t>
+                    </m:r>
+                  </m:oMath>
+                </a14:m>
+                <a:r>
+                  <a:rPr lang="pt-BR" sz="2000" dirty="0"/>
+                  <a:t>para cada um dos </a:t>
+                </a:r>
+                <a14:m>
+                  <m:oMath xmlns:m="http://schemas.openxmlformats.org/officeDocument/2006/math">
+                    <m:r>
+                      <a:rPr lang="pt-BR" sz="2000" i="1">
+                        <a:latin typeface="Cambria Math" panose="02040503050406030204" pitchFamily="18" charset="0"/>
+                      </a:rPr>
+                      <m:t>𝑘</m:t>
+                    </m:r>
+                  </m:oMath>
+                </a14:m>
+                <a:r>
+                  <a:rPr lang="pt-BR" sz="2000" dirty="0"/>
+                  <a:t> centroides e atribua cada exemplo ao cluster mais próximo.</a:t>
+                </a:r>
+              </a:p>
+              <a:p>
+                <a:pPr marL="800100" lvl="1" indent="-342900">
+                  <a:buFont typeface="+mj-lt"/>
+                  <a:buAutoNum type="alphaLcParenR"/>
+                </a:pPr>
+                <a:r>
+                  <a:rPr lang="pt-BR" sz="2000" dirty="0"/>
+                  <a:t>Calcule o novo centroide de cada cluster.</a:t>
+                </a:r>
+              </a:p>
+              <a:p>
+                <a:pPr marL="342900" indent="-342900">
+                  <a:buFont typeface="+mj-lt"/>
+                  <a:buAutoNum type="arabicPeriod"/>
+                </a:pPr>
+                <a:r>
+                  <a:rPr lang="pt-BR" sz="2000" b="1" dirty="0"/>
+                  <a:t>Enquanto </a:t>
+                </a:r>
+                <a:r>
+                  <a:rPr lang="pt-BR" sz="2000" dirty="0"/>
+                  <a:t>as posições dos centroides continuarem mudando.</a:t>
+                </a:r>
+              </a:p>
+            </p:txBody>
+          </p:sp>
+        </mc:Choice>
+        <mc:Fallback>
+          <p:sp>
+            <p:nvSpPr>
+              <p:cNvPr id="5" name="TextBox 4">
+                <a:extLst>
+                  <a:ext uri="{FF2B5EF4-FFF2-40B4-BE49-F238E27FC236}">
+                    <a16:creationId xmlns:a16="http://schemas.microsoft.com/office/drawing/2014/main" id="{A60E2CD0-3AFD-013C-16CC-B158E81DC1CA}"/>
+                  </a:ext>
+                </a:extLst>
+              </p:cNvPr>
+              <p:cNvSpPr txBox="1">
+                <a:spLocks noRot="1" noChangeAspect="1" noMove="1" noResize="1" noEditPoints="1" noAdjustHandles="1" noChangeArrowheads="1" noChangeShapeType="1" noTextEdit="1"/>
+              </p:cNvSpPr>
+              <p:nvPr/>
+            </p:nvSpPr>
+            <p:spPr>
+              <a:xfrm>
+                <a:off x="1221786" y="2204015"/>
+                <a:ext cx="9545228" cy="2246769"/>
+              </a:xfrm>
+              <a:prstGeom prst="rect">
+                <a:avLst/>
+              </a:prstGeom>
+              <a:blipFill>
+                <a:blip r:embed="rId4"/>
+                <a:stretch>
+                  <a:fillRect l="-638" t="-1351" b="-3784"/>
+                </a:stretch>
+              </a:blipFill>
+              <a:ln>
+                <a:solidFill>
+                  <a:schemeClr val="tx1"/>
+                </a:solidFill>
+              </a:ln>
+            </p:spPr>
+            <p:txBody>
+              <a:bodyPr/>
+              <a:lstStyle/>
+              <a:p>
+                <a:r>
+                  <a:rPr lang="en-US">
+                    <a:noFill/>
+                  </a:rPr>
+                  <a:t> </a:t>
+                </a:r>
+              </a:p>
+            </p:txBody>
+          </p:sp>
+        </mc:Fallback>
+      </mc:AlternateContent>
     </p:spTree>
     <p:extLst>
       <p:ext uri="{BB962C8B-B14F-4D97-AF65-F5344CB8AC3E}">
-        <p14:creationId xmlns:p14="http://schemas.microsoft.com/office/powerpoint/2010/main" val="2223736072"/>
+        <p14:creationId xmlns:p14="http://schemas.microsoft.com/office/powerpoint/2010/main" val="59607418"/>
       </p:ext>
     </p:extLst>
   </p:cSld>
@@ -11235,127 +11618,57 @@
           </a:p>
         </p:txBody>
       </p:sp>
-      <p:sp>
-        <p:nvSpPr>
-          <p:cNvPr id="6" name="CaixaDeTexto 5">
-            <a:extLst>
-              <a:ext uri="{FF2B5EF4-FFF2-40B4-BE49-F238E27FC236}">
-                <a16:creationId xmlns:a16="http://schemas.microsoft.com/office/drawing/2014/main" id="{470482DB-F365-0A83-E102-37A8EB7EACEF}"/>
-              </a:ext>
-            </a:extLst>
-          </p:cNvPr>
-          <p:cNvSpPr txBox="1"/>
+      <p:pic>
+        <p:nvPicPr>
+          <p:cNvPr id="5122" name="Picture 2" descr="python - When using the K-Means Clustering Algorithm, is it possible to  have a set of data which results in an Infinite Loop? - Stack Overflow">
+            <a:extLst>
+              <a:ext uri="{FF2B5EF4-FFF2-40B4-BE49-F238E27FC236}">
+                <a16:creationId xmlns:a16="http://schemas.microsoft.com/office/drawing/2014/main" id="{42B409DD-27A2-FCB0-8589-328539C354F5}"/>
+              </a:ext>
+            </a:extLst>
+          </p:cNvPr>
+          <p:cNvPicPr>
+            <a:picLocks noChangeAspect="1" noChangeArrowheads="1"/>
+          </p:cNvPicPr>
           <p:nvPr/>
-        </p:nvSpPr>
-        <p:spPr>
-          <a:xfrm>
-            <a:off x="846667" y="988201"/>
-            <a:ext cx="8229599" cy="4801314"/>
+        </p:nvPicPr>
+        <p:blipFill>
+          <a:blip r:embed="rId4">
+            <a:extLst>
+              <a:ext uri="{28A0092B-C50C-407E-A947-70E740481C1C}">
+                <a14:useLocalDpi xmlns:a14="http://schemas.microsoft.com/office/drawing/2010/main" val="0"/>
+              </a:ext>
+            </a:extLst>
+          </a:blip>
+          <a:srcRect/>
+          <a:stretch>
+            <a:fillRect/>
+          </a:stretch>
+        </p:blipFill>
+        <p:spPr bwMode="auto">
+          <a:xfrm>
+            <a:off x="304800" y="945092"/>
+            <a:ext cx="9716440" cy="4877198"/>
           </a:xfrm>
           <a:prstGeom prst="rect">
             <a:avLst/>
           </a:prstGeom>
           <a:noFill/>
-        </p:spPr>
-        <p:txBody>
-          <a:bodyPr wrap="square">
-            <a:spAutoFit/>
-          </a:bodyPr>
-          <a:lstStyle/>
-          <a:p>
-            <a:endParaRPr lang="pt-BR" dirty="0"/>
-          </a:p>
-          <a:p>
-            <a:pPr marL="285750" indent="-285750">
-              <a:buFont typeface="Arial" panose="020B0604020202020204" pitchFamily="34" charset="0"/>
-              <a:buChar char="•"/>
-            </a:pPr>
-            <a:r>
-              <a:rPr lang="pt-BR" dirty="0"/>
-              <a:t>Exemplo: Centros de distribuição</a:t>
-            </a:r>
-          </a:p>
-          <a:p>
-            <a:endParaRPr lang="pt-BR" dirty="0"/>
-          </a:p>
-          <a:p>
-            <a:endParaRPr lang="pt-BR" dirty="0"/>
-          </a:p>
-          <a:p>
-            <a:endParaRPr lang="pt-BR" dirty="0"/>
-          </a:p>
-          <a:p>
-            <a:endParaRPr lang="pt-BR" dirty="0"/>
-          </a:p>
-          <a:p>
-            <a:endParaRPr lang="pt-BR" dirty="0"/>
-          </a:p>
-          <a:p>
-            <a:endParaRPr lang="pt-BR" dirty="0"/>
-          </a:p>
-          <a:p>
-            <a:endParaRPr lang="pt-BR" dirty="0"/>
-          </a:p>
-          <a:p>
-            <a:endParaRPr lang="pt-BR" dirty="0"/>
-          </a:p>
-          <a:p>
-            <a:endParaRPr lang="pt-BR" dirty="0"/>
-          </a:p>
-          <a:p>
-            <a:endParaRPr lang="pt-BR" dirty="0"/>
-          </a:p>
-          <a:p>
-            <a:endParaRPr lang="pt-BR" dirty="0"/>
-          </a:p>
-          <a:p>
-            <a:endParaRPr lang="pt-BR" dirty="0"/>
-          </a:p>
-          <a:p>
-            <a:endParaRPr lang="pt-BR" dirty="0"/>
-          </a:p>
-          <a:p>
-            <a:endParaRPr lang="pt-BR" dirty="0"/>
-          </a:p>
-          <a:p>
-            <a:endParaRPr lang="pt-BR" dirty="0"/>
-          </a:p>
-        </p:txBody>
-      </p:sp>
-      <p:pic>
-        <p:nvPicPr>
-          <p:cNvPr id="8" name="Imagem 7">
-            <a:extLst>
-              <a:ext uri="{FF2B5EF4-FFF2-40B4-BE49-F238E27FC236}">
-                <a16:creationId xmlns:a16="http://schemas.microsoft.com/office/drawing/2014/main" id="{2A0FC1B7-A101-0508-054B-D8349F0314EB}"/>
-              </a:ext>
-            </a:extLst>
-          </p:cNvPr>
-          <p:cNvPicPr>
-            <a:picLocks noChangeAspect="1"/>
-          </p:cNvPicPr>
-          <p:nvPr/>
-        </p:nvPicPr>
-        <p:blipFill>
-          <a:blip r:embed="rId4"/>
-          <a:stretch>
-            <a:fillRect/>
-          </a:stretch>
-        </p:blipFill>
-        <p:spPr>
-          <a:xfrm>
-            <a:off x="3097323" y="2146261"/>
-            <a:ext cx="4778154" cy="4168501"/>
-          </a:xfrm>
-          <a:prstGeom prst="rect">
-            <a:avLst/>
-          </a:prstGeom>
+          <a:extLst>
+            <a:ext uri="{909E8E84-426E-40DD-AFC4-6F175D3DCCD1}">
+              <a14:hiddenFill xmlns:a14="http://schemas.microsoft.com/office/drawing/2010/main">
+                <a:solidFill>
+                  <a:srgbClr val="FFFFFF"/>
+                </a:solidFill>
+              </a14:hiddenFill>
+            </a:ext>
+          </a:extLst>
         </p:spPr>
       </p:pic>
     </p:spTree>
     <p:extLst>
       <p:ext uri="{BB962C8B-B14F-4D97-AF65-F5344CB8AC3E}">
-        <p14:creationId xmlns:p14="http://schemas.microsoft.com/office/powerpoint/2010/main" val="904369752"/>
+        <p14:creationId xmlns:p14="http://schemas.microsoft.com/office/powerpoint/2010/main" val="2367148880"/>
       </p:ext>
     </p:extLst>
   </p:cSld>
@@ -11616,7 +11929,7 @@
             </a:pPr>
             <a:r>
               <a:rPr lang="pt-BR" dirty="0"/>
-              <a:t>Exemplo: Centros de distribuição</a:t>
+              <a:t>Exemplo:</a:t>
             </a:r>
           </a:p>
           <a:p>
@@ -11668,10 +11981,10 @@
       </p:sp>
       <p:pic>
         <p:nvPicPr>
-          <p:cNvPr id="7170" name="Picture 2">
-            <a:extLst>
-              <a:ext uri="{FF2B5EF4-FFF2-40B4-BE49-F238E27FC236}">
-                <a16:creationId xmlns:a16="http://schemas.microsoft.com/office/drawing/2014/main" id="{0852AE06-D862-AB3A-2E4A-809895A9DAC8}"/>
+          <p:cNvPr id="6146" name="Picture 2" descr="Centro de Distribuição: uma solução mais que viável – Novidá">
+            <a:extLst>
+              <a:ext uri="{FF2B5EF4-FFF2-40B4-BE49-F238E27FC236}">
+                <a16:creationId xmlns:a16="http://schemas.microsoft.com/office/drawing/2014/main" id="{4EEAF6B8-1AE8-82F9-6BD7-E45E945A8CB5}"/>
               </a:ext>
             </a:extLst>
           </p:cNvPr>
@@ -11695,8 +12008,8 @@
         </p:blipFill>
         <p:spPr bwMode="auto">
           <a:xfrm>
-            <a:off x="3047470" y="2142067"/>
-            <a:ext cx="5419725" cy="3981450"/>
+            <a:off x="2077156" y="1821535"/>
+            <a:ext cx="6191250" cy="3390900"/>
           </a:xfrm>
           <a:prstGeom prst="rect">
             <a:avLst/>
@@ -11716,7 +12029,7 @@
     </p:spTree>
     <p:extLst>
       <p:ext uri="{BB962C8B-B14F-4D97-AF65-F5344CB8AC3E}">
-        <p14:creationId xmlns:p14="http://schemas.microsoft.com/office/powerpoint/2010/main" val="290906085"/>
+        <p14:creationId xmlns:p14="http://schemas.microsoft.com/office/powerpoint/2010/main" val="1949754007"/>
       </p:ext>
     </p:extLst>
   </p:cSld>
@@ -11955,7 +12268,7 @@
         <p:spPr>
           <a:xfrm>
             <a:off x="846667" y="988201"/>
-            <a:ext cx="8229599" cy="4801314"/>
+            <a:ext cx="8229599" cy="3970318"/>
           </a:xfrm>
           <a:prstGeom prst="rect">
             <a:avLst/>
@@ -12016,23 +12329,14 @@
           <a:p>
             <a:endParaRPr lang="pt-BR" dirty="0"/>
           </a:p>
-          <a:p>
-            <a:endParaRPr lang="pt-BR" dirty="0"/>
-          </a:p>
-          <a:p>
-            <a:endParaRPr lang="pt-BR" dirty="0"/>
-          </a:p>
-          <a:p>
-            <a:endParaRPr lang="pt-BR" dirty="0"/>
-          </a:p>
         </p:txBody>
       </p:sp>
       <p:pic>
         <p:nvPicPr>
-          <p:cNvPr id="8194" name="Picture 2">
-            <a:extLst>
-              <a:ext uri="{FF2B5EF4-FFF2-40B4-BE49-F238E27FC236}">
-                <a16:creationId xmlns:a16="http://schemas.microsoft.com/office/drawing/2014/main" id="{495C0F98-25B1-BB0B-22CE-238E6C7C5DE2}"/>
+          <p:cNvPr id="3074" name="Picture 2" descr="Mapa do Brasil">
+            <a:extLst>
+              <a:ext uri="{FF2B5EF4-FFF2-40B4-BE49-F238E27FC236}">
+                <a16:creationId xmlns:a16="http://schemas.microsoft.com/office/drawing/2014/main" id="{BBEA9087-A8E1-78C5-981B-C50D7CF4635F}"/>
               </a:ext>
             </a:extLst>
           </p:cNvPr>
@@ -12056,8 +12360,8 @@
         </p:blipFill>
         <p:spPr bwMode="auto">
           <a:xfrm>
-            <a:off x="2923294" y="2239786"/>
-            <a:ext cx="5419725" cy="3981450"/>
+            <a:off x="2579511" y="1983132"/>
+            <a:ext cx="5260622" cy="4344805"/>
           </a:xfrm>
           <a:prstGeom prst="rect">
             <a:avLst/>
@@ -12077,7 +12381,7 @@
     </p:spTree>
     <p:extLst>
       <p:ext uri="{BB962C8B-B14F-4D97-AF65-F5344CB8AC3E}">
-        <p14:creationId xmlns:p14="http://schemas.microsoft.com/office/powerpoint/2010/main" val="1881627728"/>
+        <p14:creationId xmlns:p14="http://schemas.microsoft.com/office/powerpoint/2010/main" val="2223736072"/>
       </p:ext>
     </p:extLst>
   </p:cSld>
@@ -12393,7 +12697,7 @@
           <p:cNvPr id="8" name="Imagem 7">
             <a:extLst>
               <a:ext uri="{FF2B5EF4-FFF2-40B4-BE49-F238E27FC236}">
-                <a16:creationId xmlns:a16="http://schemas.microsoft.com/office/drawing/2014/main" id="{F8DB2E93-FBF7-2C19-4172-472216829630}"/>
+                <a16:creationId xmlns:a16="http://schemas.microsoft.com/office/drawing/2014/main" id="{2A0FC1B7-A101-0508-054B-D8349F0314EB}"/>
               </a:ext>
             </a:extLst>
           </p:cNvPr>
@@ -12410,8 +12714,8 @@
         </p:blipFill>
         <p:spPr>
           <a:xfrm>
-            <a:off x="3584442" y="2942530"/>
-            <a:ext cx="3955123" cy="1379340"/>
+            <a:off x="3097323" y="2146261"/>
+            <a:ext cx="4778154" cy="4168501"/>
           </a:xfrm>
           <a:prstGeom prst="rect">
             <a:avLst/>
@@ -12421,7 +12725,7 @@
     </p:spTree>
     <p:extLst>
       <p:ext uri="{BB962C8B-B14F-4D97-AF65-F5344CB8AC3E}">
-        <p14:creationId xmlns:p14="http://schemas.microsoft.com/office/powerpoint/2010/main" val="253421326"/>
+        <p14:creationId xmlns:p14="http://schemas.microsoft.com/office/powerpoint/2010/main" val="904369752"/>
       </p:ext>
     </p:extLst>
   </p:cSld>
@@ -12659,8 +12963,8 @@
         </p:nvSpPr>
         <p:spPr>
           <a:xfrm>
-            <a:off x="745067" y="989885"/>
-            <a:ext cx="8229599" cy="5355312"/>
+            <a:off x="846667" y="988201"/>
+            <a:ext cx="8229599" cy="4801314"/>
           </a:xfrm>
           <a:prstGeom prst="rect">
             <a:avLst/>
@@ -12689,62 +12993,100 @@
             <a:endParaRPr lang="pt-BR" dirty="0"/>
           </a:p>
           <a:p>
-            <a:r>
-              <a:rPr lang="pt-BR" dirty="0"/>
-              <a:t>Considerar a adição de mais lojas: sendo 21 só em São Paulo.</a:t>
-            </a:r>
-          </a:p>
-          <a:p>
-            <a:endParaRPr lang="pt-BR" dirty="0"/>
-          </a:p>
-          <a:p>
-            <a:endParaRPr lang="pt-BR" dirty="0"/>
-          </a:p>
-          <a:p>
-            <a:endParaRPr lang="pt-BR" dirty="0"/>
-          </a:p>
-          <a:p>
-            <a:endParaRPr lang="pt-BR" dirty="0"/>
-          </a:p>
-          <a:p>
-            <a:endParaRPr lang="pt-BR" dirty="0"/>
-          </a:p>
-          <a:p>
-            <a:endParaRPr lang="pt-BR" dirty="0"/>
-          </a:p>
-          <a:p>
-            <a:endParaRPr lang="pt-BR" dirty="0"/>
-          </a:p>
-          <a:p>
-            <a:endParaRPr lang="pt-BR" dirty="0"/>
-          </a:p>
-          <a:p>
-            <a:endParaRPr lang="pt-BR" dirty="0"/>
-          </a:p>
-          <a:p>
-            <a:endParaRPr lang="pt-BR" dirty="0"/>
-          </a:p>
-          <a:p>
-            <a:endParaRPr lang="pt-BR" dirty="0"/>
-          </a:p>
-          <a:p>
-            <a:endParaRPr lang="pt-BR" dirty="0"/>
-          </a:p>
-          <a:p>
-            <a:endParaRPr lang="pt-BR" dirty="0"/>
-          </a:p>
-          <a:p>
-            <a:endParaRPr lang="pt-BR" dirty="0"/>
-          </a:p>
-          <a:p>
-            <a:endParaRPr lang="pt-BR" dirty="0"/>
-          </a:p>
-        </p:txBody>
-      </p:sp>
+            <a:endParaRPr lang="pt-BR" dirty="0"/>
+          </a:p>
+          <a:p>
+            <a:endParaRPr lang="pt-BR" dirty="0"/>
+          </a:p>
+          <a:p>
+            <a:endParaRPr lang="pt-BR" dirty="0"/>
+          </a:p>
+          <a:p>
+            <a:endParaRPr lang="pt-BR" dirty="0"/>
+          </a:p>
+          <a:p>
+            <a:endParaRPr lang="pt-BR" dirty="0"/>
+          </a:p>
+          <a:p>
+            <a:endParaRPr lang="pt-BR" dirty="0"/>
+          </a:p>
+          <a:p>
+            <a:endParaRPr lang="pt-BR" dirty="0"/>
+          </a:p>
+          <a:p>
+            <a:endParaRPr lang="pt-BR" dirty="0"/>
+          </a:p>
+          <a:p>
+            <a:endParaRPr lang="pt-BR" dirty="0"/>
+          </a:p>
+          <a:p>
+            <a:endParaRPr lang="pt-BR" dirty="0"/>
+          </a:p>
+          <a:p>
+            <a:endParaRPr lang="pt-BR" dirty="0"/>
+          </a:p>
+          <a:p>
+            <a:endParaRPr lang="pt-BR" dirty="0"/>
+          </a:p>
+          <a:p>
+            <a:endParaRPr lang="pt-BR" dirty="0"/>
+          </a:p>
+          <a:p>
+            <a:endParaRPr lang="pt-BR" dirty="0"/>
+          </a:p>
+        </p:txBody>
+      </p:sp>
+      <p:pic>
+        <p:nvPicPr>
+          <p:cNvPr id="7170" name="Picture 2">
+            <a:extLst>
+              <a:ext uri="{FF2B5EF4-FFF2-40B4-BE49-F238E27FC236}">
+                <a16:creationId xmlns:a16="http://schemas.microsoft.com/office/drawing/2014/main" id="{0852AE06-D862-AB3A-2E4A-809895A9DAC8}"/>
+              </a:ext>
+            </a:extLst>
+          </p:cNvPr>
+          <p:cNvPicPr>
+            <a:picLocks noChangeAspect="1" noChangeArrowheads="1"/>
+          </p:cNvPicPr>
+          <p:nvPr/>
+        </p:nvPicPr>
+        <p:blipFill>
+          <a:blip r:embed="rId4">
+            <a:extLst>
+              <a:ext uri="{28A0092B-C50C-407E-A947-70E740481C1C}">
+                <a14:useLocalDpi xmlns:a14="http://schemas.microsoft.com/office/drawing/2010/main" val="0"/>
+              </a:ext>
+            </a:extLst>
+          </a:blip>
+          <a:srcRect/>
+          <a:stretch>
+            <a:fillRect/>
+          </a:stretch>
+        </p:blipFill>
+        <p:spPr bwMode="auto">
+          <a:xfrm>
+            <a:off x="3047470" y="2142067"/>
+            <a:ext cx="5419725" cy="3981450"/>
+          </a:xfrm>
+          <a:prstGeom prst="rect">
+            <a:avLst/>
+          </a:prstGeom>
+          <a:noFill/>
+          <a:extLst>
+            <a:ext uri="{909E8E84-426E-40DD-AFC4-6F175D3DCCD1}">
+              <a14:hiddenFill xmlns:a14="http://schemas.microsoft.com/office/drawing/2010/main">
+                <a:solidFill>
+                  <a:srgbClr val="FFFFFF"/>
+                </a:solidFill>
+              </a14:hiddenFill>
+            </a:ext>
+          </a:extLst>
+        </p:spPr>
+      </p:pic>
     </p:spTree>
     <p:extLst>
       <p:ext uri="{BB962C8B-B14F-4D97-AF65-F5344CB8AC3E}">
-        <p14:creationId xmlns:p14="http://schemas.microsoft.com/office/powerpoint/2010/main" val="3567116465"/>
+        <p14:creationId xmlns:p14="http://schemas.microsoft.com/office/powerpoint/2010/main" val="290906085"/>
       </p:ext>
     </p:extLst>
   </p:cSld>
@@ -13057,10 +13399,10 @@
       </p:sp>
       <p:pic>
         <p:nvPicPr>
-          <p:cNvPr id="9218" name="Picture 2">
-            <a:extLst>
-              <a:ext uri="{FF2B5EF4-FFF2-40B4-BE49-F238E27FC236}">
-                <a16:creationId xmlns:a16="http://schemas.microsoft.com/office/drawing/2014/main" id="{64C03338-7885-1632-F15A-D8024E40A43D}"/>
+          <p:cNvPr id="8194" name="Picture 2">
+            <a:extLst>
+              <a:ext uri="{FF2B5EF4-FFF2-40B4-BE49-F238E27FC236}">
+                <a16:creationId xmlns:a16="http://schemas.microsoft.com/office/drawing/2014/main" id="{495C0F98-25B1-BB0B-22CE-238E6C7C5DE2}"/>
               </a:ext>
             </a:extLst>
           </p:cNvPr>
@@ -13084,7 +13426,7 @@
         </p:blipFill>
         <p:spPr bwMode="auto">
           <a:xfrm>
-            <a:off x="3047472" y="2273653"/>
+            <a:off x="2923294" y="2239786"/>
             <a:ext cx="5419725" cy="3981450"/>
           </a:xfrm>
           <a:prstGeom prst="rect">
@@ -13105,7 +13447,7 @@
     </p:spTree>
     <p:extLst>
       <p:ext uri="{BB962C8B-B14F-4D97-AF65-F5344CB8AC3E}">
-        <p14:creationId xmlns:p14="http://schemas.microsoft.com/office/powerpoint/2010/main" val="699228913"/>
+        <p14:creationId xmlns:p14="http://schemas.microsoft.com/office/powerpoint/2010/main" val="1881627728"/>
       </p:ext>
     </p:extLst>
   </p:cSld>
@@ -13418,55 +13760,38 @@
       </p:sp>
       <p:pic>
         <p:nvPicPr>
-          <p:cNvPr id="10242" name="Picture 2">
-            <a:extLst>
-              <a:ext uri="{FF2B5EF4-FFF2-40B4-BE49-F238E27FC236}">
-                <a16:creationId xmlns:a16="http://schemas.microsoft.com/office/drawing/2014/main" id="{0A2B4FC7-A3CC-A0F0-4230-65FE1716A69C}"/>
+          <p:cNvPr id="8" name="Imagem 7">
+            <a:extLst>
+              <a:ext uri="{FF2B5EF4-FFF2-40B4-BE49-F238E27FC236}">
+                <a16:creationId xmlns:a16="http://schemas.microsoft.com/office/drawing/2014/main" id="{F8DB2E93-FBF7-2C19-4172-472216829630}"/>
               </a:ext>
             </a:extLst>
           </p:cNvPr>
           <p:cNvPicPr>
-            <a:picLocks noChangeAspect="1" noChangeArrowheads="1"/>
+            <a:picLocks noChangeAspect="1"/>
           </p:cNvPicPr>
           <p:nvPr/>
         </p:nvPicPr>
         <p:blipFill>
-          <a:blip r:embed="rId4">
-            <a:extLst>
-              <a:ext uri="{28A0092B-C50C-407E-A947-70E740481C1C}">
-                <a14:useLocalDpi xmlns:a14="http://schemas.microsoft.com/office/drawing/2010/main" val="0"/>
-              </a:ext>
-            </a:extLst>
-          </a:blip>
-          <a:srcRect/>
+          <a:blip r:embed="rId4"/>
           <a:stretch>
             <a:fillRect/>
           </a:stretch>
         </p:blipFill>
-        <p:spPr bwMode="auto">
-          <a:xfrm>
-            <a:off x="1987032" y="1974461"/>
-            <a:ext cx="5994213" cy="3903209"/>
+        <p:spPr>
+          <a:xfrm>
+            <a:off x="3584442" y="2942530"/>
+            <a:ext cx="3955123" cy="1379340"/>
           </a:xfrm>
           <a:prstGeom prst="rect">
             <a:avLst/>
           </a:prstGeom>
-          <a:noFill/>
-          <a:extLst>
-            <a:ext uri="{909E8E84-426E-40DD-AFC4-6F175D3DCCD1}">
-              <a14:hiddenFill xmlns:a14="http://schemas.microsoft.com/office/drawing/2010/main">
-                <a:solidFill>
-                  <a:srgbClr val="FFFFFF"/>
-                </a:solidFill>
-              </a14:hiddenFill>
-            </a:ext>
-          </a:extLst>
         </p:spPr>
       </p:pic>
     </p:spTree>
     <p:extLst>
       <p:ext uri="{BB962C8B-B14F-4D97-AF65-F5344CB8AC3E}">
-        <p14:creationId xmlns:p14="http://schemas.microsoft.com/office/powerpoint/2010/main" val="1466513416"/>
+        <p14:creationId xmlns:p14="http://schemas.microsoft.com/office/powerpoint/2010/main" val="253421326"/>
       </p:ext>
     </p:extLst>
   </p:cSld>
@@ -13704,8 +14029,8 @@
         </p:nvSpPr>
         <p:spPr>
           <a:xfrm>
-            <a:off x="846667" y="988201"/>
-            <a:ext cx="8229599" cy="4801314"/>
+            <a:off x="745067" y="989885"/>
+            <a:ext cx="8229599" cy="5355312"/>
           </a:xfrm>
           <a:prstGeom prst="rect">
             <a:avLst/>
@@ -13734,83 +14059,62 @@
             <a:endParaRPr lang="pt-BR" dirty="0"/>
           </a:p>
           <a:p>
-            <a:endParaRPr lang="pt-BR" dirty="0"/>
-          </a:p>
-          <a:p>
-            <a:endParaRPr lang="pt-BR" dirty="0"/>
-          </a:p>
-          <a:p>
-            <a:endParaRPr lang="pt-BR" dirty="0"/>
-          </a:p>
-          <a:p>
-            <a:endParaRPr lang="pt-BR" dirty="0"/>
-          </a:p>
-          <a:p>
-            <a:endParaRPr lang="pt-BR" dirty="0"/>
-          </a:p>
-          <a:p>
-            <a:endParaRPr lang="pt-BR" dirty="0"/>
-          </a:p>
-          <a:p>
-            <a:endParaRPr lang="pt-BR" dirty="0"/>
-          </a:p>
-          <a:p>
-            <a:endParaRPr lang="pt-BR" dirty="0"/>
-          </a:p>
-          <a:p>
-            <a:endParaRPr lang="pt-BR" dirty="0"/>
-          </a:p>
-          <a:p>
-            <a:endParaRPr lang="pt-BR" dirty="0"/>
-          </a:p>
-          <a:p>
-            <a:endParaRPr lang="pt-BR" dirty="0"/>
-          </a:p>
-          <a:p>
-            <a:endParaRPr lang="pt-BR" dirty="0"/>
-          </a:p>
-          <a:p>
-            <a:endParaRPr lang="pt-BR" dirty="0"/>
-          </a:p>
-          <a:p>
-            <a:endParaRPr lang="pt-BR" dirty="0"/>
-          </a:p>
-        </p:txBody>
-      </p:sp>
-      <p:pic>
-        <p:nvPicPr>
-          <p:cNvPr id="8" name="Imagem 7">
-            <a:extLst>
-              <a:ext uri="{FF2B5EF4-FFF2-40B4-BE49-F238E27FC236}">
-                <a16:creationId xmlns:a16="http://schemas.microsoft.com/office/drawing/2014/main" id="{D1DA67FB-2631-AF8D-50AD-718296A5CA75}"/>
-              </a:ext>
-            </a:extLst>
-          </p:cNvPr>
-          <p:cNvPicPr>
-            <a:picLocks noChangeAspect="1"/>
-          </p:cNvPicPr>
-          <p:nvPr/>
-        </p:nvPicPr>
-        <p:blipFill>
-          <a:blip r:embed="rId4"/>
-          <a:stretch>
-            <a:fillRect/>
-          </a:stretch>
-        </p:blipFill>
-        <p:spPr>
-          <a:xfrm>
-            <a:off x="3323243" y="2776154"/>
-            <a:ext cx="4755292" cy="1508891"/>
-          </a:xfrm>
-          <a:prstGeom prst="rect">
-            <a:avLst/>
-          </a:prstGeom>
-        </p:spPr>
-      </p:pic>
+            <a:r>
+              <a:rPr lang="pt-BR" dirty="0"/>
+              <a:t>Considerar a adição de mais lojas: sendo 21 só em São Paulo.</a:t>
+            </a:r>
+          </a:p>
+          <a:p>
+            <a:endParaRPr lang="pt-BR" dirty="0"/>
+          </a:p>
+          <a:p>
+            <a:endParaRPr lang="pt-BR" dirty="0"/>
+          </a:p>
+          <a:p>
+            <a:endParaRPr lang="pt-BR" dirty="0"/>
+          </a:p>
+          <a:p>
+            <a:endParaRPr lang="pt-BR" dirty="0"/>
+          </a:p>
+          <a:p>
+            <a:endParaRPr lang="pt-BR" dirty="0"/>
+          </a:p>
+          <a:p>
+            <a:endParaRPr lang="pt-BR" dirty="0"/>
+          </a:p>
+          <a:p>
+            <a:endParaRPr lang="pt-BR" dirty="0"/>
+          </a:p>
+          <a:p>
+            <a:endParaRPr lang="pt-BR" dirty="0"/>
+          </a:p>
+          <a:p>
+            <a:endParaRPr lang="pt-BR" dirty="0"/>
+          </a:p>
+          <a:p>
+            <a:endParaRPr lang="pt-BR" dirty="0"/>
+          </a:p>
+          <a:p>
+            <a:endParaRPr lang="pt-BR" dirty="0"/>
+          </a:p>
+          <a:p>
+            <a:endParaRPr lang="pt-BR" dirty="0"/>
+          </a:p>
+          <a:p>
+            <a:endParaRPr lang="pt-BR" dirty="0"/>
+          </a:p>
+          <a:p>
+            <a:endParaRPr lang="pt-BR" dirty="0"/>
+          </a:p>
+          <a:p>
+            <a:endParaRPr lang="pt-BR" dirty="0"/>
+          </a:p>
+        </p:txBody>
+      </p:sp>
     </p:spTree>
     <p:extLst>
       <p:ext uri="{BB962C8B-B14F-4D97-AF65-F5344CB8AC3E}">
-        <p14:creationId xmlns:p14="http://schemas.microsoft.com/office/powerpoint/2010/main" val="2795646663"/>
+        <p14:creationId xmlns:p14="http://schemas.microsoft.com/office/powerpoint/2010/main" val="3567116465"/>
       </p:ext>
     </p:extLst>
   </p:cSld>
@@ -14011,12 +14315,20 @@
           </a:xfrm>
         </p:spPr>
         <p:txBody>
-          <a:bodyPr/>
+          <a:bodyPr>
+            <a:normAutofit/>
+          </a:bodyPr>
           <a:lstStyle/>
           <a:p>
             <a:r>
               <a:rPr lang="pt-BR" dirty="0"/>
-              <a:t>A detecção de anomalias examina pontos de dados específicos e detecta ocorrências raras que parecem suspeitas porque são diferentes do padrão de comportamento estabelecido</a:t>
+              <a:t>Em análise de dados, a detecção de anomalias é a identificação de itens, eventos ou observações raras que levantam suspeitas por diferirem significativamente da maioria dos dados.</a:t>
+            </a:r>
+          </a:p>
+          <a:p>
+            <a:r>
+              <a:rPr lang="pt-BR" dirty="0"/>
+              <a:t>O objetivo de modelos de detecção de anomalias é identificar estes itens, eventos ou observações raras.</a:t>
             </a:r>
           </a:p>
         </p:txBody>
@@ -14050,8 +14362,8 @@
         </p:blipFill>
         <p:spPr bwMode="auto">
           <a:xfrm>
-            <a:off x="2968625" y="2081565"/>
-            <a:ext cx="5238750" cy="3914775"/>
+            <a:off x="2874225" y="2838121"/>
+            <a:ext cx="5379400" cy="4019879"/>
           </a:xfrm>
           <a:prstGeom prst="rect">
             <a:avLst/>
@@ -14384,10 +14696,10 @@
       </p:sp>
       <p:pic>
         <p:nvPicPr>
-          <p:cNvPr id="11266" name="Picture 2">
-            <a:extLst>
-              <a:ext uri="{FF2B5EF4-FFF2-40B4-BE49-F238E27FC236}">
-                <a16:creationId xmlns:a16="http://schemas.microsoft.com/office/drawing/2014/main" id="{EA0F2AD4-3B41-DAF2-6F90-94BD234A0736}"/>
+          <p:cNvPr id="9218" name="Picture 2">
+            <a:extLst>
+              <a:ext uri="{FF2B5EF4-FFF2-40B4-BE49-F238E27FC236}">
+                <a16:creationId xmlns:a16="http://schemas.microsoft.com/office/drawing/2014/main" id="{64C03338-7885-1632-F15A-D8024E40A43D}"/>
               </a:ext>
             </a:extLst>
           </p:cNvPr>
@@ -14411,8 +14723,8 @@
         </p:blipFill>
         <p:spPr bwMode="auto">
           <a:xfrm>
-            <a:off x="1042634" y="1759128"/>
-            <a:ext cx="8334375" cy="4333875"/>
+            <a:off x="3047472" y="2273653"/>
+            <a:ext cx="5419725" cy="3981450"/>
           </a:xfrm>
           <a:prstGeom prst="rect">
             <a:avLst/>
@@ -14432,7 +14744,7 @@
     </p:spTree>
     <p:extLst>
       <p:ext uri="{BB962C8B-B14F-4D97-AF65-F5344CB8AC3E}">
-        <p14:creationId xmlns:p14="http://schemas.microsoft.com/office/powerpoint/2010/main" val="1535757565"/>
+        <p14:creationId xmlns:p14="http://schemas.microsoft.com/office/powerpoint/2010/main" val="699228913"/>
       </p:ext>
     </p:extLst>
   </p:cSld>
@@ -14671,7 +14983,7 @@
         <p:spPr>
           <a:xfrm>
             <a:off x="846667" y="988201"/>
-            <a:ext cx="8229599" cy="6186309"/>
+            <a:ext cx="8229599" cy="4801314"/>
           </a:xfrm>
           <a:prstGeom prst="rect">
             <a:avLst/>
@@ -14684,12 +14996,6 @@
           </a:bodyPr>
           <a:lstStyle/>
           <a:p>
-            <a:r>
-              <a:rPr lang="pt-BR" dirty="0"/>
-              <a:t>Dados de meios de transporte:</a:t>
-            </a:r>
-          </a:p>
-          <a:p>
             <a:endParaRPr lang="pt-BR" dirty="0"/>
           </a:p>
           <a:p>
@@ -14699,104 +15005,107 @@
             </a:pPr>
             <a:r>
               <a:rPr lang="pt-BR" dirty="0"/>
-              <a:t>Rodovias</a:t>
-            </a:r>
-          </a:p>
-          <a:p>
-            <a:pPr marL="285750" indent="-285750">
-              <a:buFont typeface="Arial" panose="020B0604020202020204" pitchFamily="34" charset="0"/>
-              <a:buChar char="•"/>
-            </a:pPr>
-            <a:r>
-              <a:rPr lang="pt-BR" dirty="0"/>
-              <a:t>Ferrovias</a:t>
-            </a:r>
-          </a:p>
-          <a:p>
-            <a:pPr marL="285750" indent="-285750">
-              <a:buFont typeface="Arial" panose="020B0604020202020204" pitchFamily="34" charset="0"/>
-              <a:buChar char="•"/>
-            </a:pPr>
-            <a:r>
-              <a:rPr lang="pt-BR" dirty="0"/>
-              <a:t>Aeroportos</a:t>
-            </a:r>
-          </a:p>
-          <a:p>
-            <a:pPr marL="285750" indent="-285750">
-              <a:buFont typeface="Arial" panose="020B0604020202020204" pitchFamily="34" charset="0"/>
-              <a:buChar char="•"/>
-            </a:pPr>
-            <a:r>
-              <a:rPr lang="pt-BR" dirty="0"/>
-              <a:t>Rios navegáveis</a:t>
-            </a:r>
-          </a:p>
-          <a:p>
-            <a:pPr marL="285750" indent="-285750">
-              <a:buFont typeface="Arial" panose="020B0604020202020204" pitchFamily="34" charset="0"/>
-              <a:buChar char="•"/>
-            </a:pPr>
-            <a:r>
-              <a:rPr lang="pt-BR" dirty="0"/>
-              <a:t>Portos</a:t>
-            </a:r>
-          </a:p>
-          <a:p>
-            <a:pPr marL="285750" indent="-285750">
-              <a:buFont typeface="Arial" panose="020B0604020202020204" pitchFamily="34" charset="0"/>
-              <a:buChar char="•"/>
-            </a:pPr>
-            <a:endParaRPr lang="pt-BR" dirty="0"/>
-          </a:p>
-          <a:p>
-            <a:endParaRPr lang="pt-BR" dirty="0"/>
-          </a:p>
-          <a:p>
-            <a:endParaRPr lang="pt-BR" dirty="0"/>
-          </a:p>
-          <a:p>
-            <a:endParaRPr lang="pt-BR" dirty="0"/>
-          </a:p>
-          <a:p>
-            <a:endParaRPr lang="pt-BR" dirty="0"/>
-          </a:p>
-          <a:p>
-            <a:endParaRPr lang="pt-BR" dirty="0"/>
-          </a:p>
-          <a:p>
-            <a:endParaRPr lang="pt-BR" dirty="0"/>
-          </a:p>
-          <a:p>
-            <a:endParaRPr lang="pt-BR" dirty="0"/>
-          </a:p>
-          <a:p>
-            <a:endParaRPr lang="pt-BR" dirty="0"/>
-          </a:p>
-          <a:p>
-            <a:endParaRPr lang="pt-BR" dirty="0"/>
-          </a:p>
-          <a:p>
-            <a:endParaRPr lang="pt-BR" dirty="0"/>
-          </a:p>
-          <a:p>
-            <a:endParaRPr lang="pt-BR" dirty="0"/>
-          </a:p>
-          <a:p>
-            <a:endParaRPr lang="pt-BR" dirty="0"/>
-          </a:p>
-          <a:p>
-            <a:endParaRPr lang="pt-BR" dirty="0"/>
-          </a:p>
-          <a:p>
-            <a:endParaRPr lang="pt-BR" dirty="0"/>
-          </a:p>
-        </p:txBody>
-      </p:sp>
+              <a:t>Exemplo: Centros de distribuição</a:t>
+            </a:r>
+          </a:p>
+          <a:p>
+            <a:endParaRPr lang="pt-BR" dirty="0"/>
+          </a:p>
+          <a:p>
+            <a:endParaRPr lang="pt-BR" dirty="0"/>
+          </a:p>
+          <a:p>
+            <a:endParaRPr lang="pt-BR" dirty="0"/>
+          </a:p>
+          <a:p>
+            <a:endParaRPr lang="pt-BR" dirty="0"/>
+          </a:p>
+          <a:p>
+            <a:endParaRPr lang="pt-BR" dirty="0"/>
+          </a:p>
+          <a:p>
+            <a:endParaRPr lang="pt-BR" dirty="0"/>
+          </a:p>
+          <a:p>
+            <a:endParaRPr lang="pt-BR" dirty="0"/>
+          </a:p>
+          <a:p>
+            <a:endParaRPr lang="pt-BR" dirty="0"/>
+          </a:p>
+          <a:p>
+            <a:endParaRPr lang="pt-BR" dirty="0"/>
+          </a:p>
+          <a:p>
+            <a:endParaRPr lang="pt-BR" dirty="0"/>
+          </a:p>
+          <a:p>
+            <a:endParaRPr lang="pt-BR" dirty="0"/>
+          </a:p>
+          <a:p>
+            <a:endParaRPr lang="pt-BR" dirty="0"/>
+          </a:p>
+          <a:p>
+            <a:endParaRPr lang="pt-BR" dirty="0"/>
+          </a:p>
+          <a:p>
+            <a:endParaRPr lang="pt-BR" dirty="0"/>
+          </a:p>
+          <a:p>
+            <a:endParaRPr lang="pt-BR" dirty="0"/>
+          </a:p>
+        </p:txBody>
+      </p:sp>
+      <p:pic>
+        <p:nvPicPr>
+          <p:cNvPr id="10242" name="Picture 2">
+            <a:extLst>
+              <a:ext uri="{FF2B5EF4-FFF2-40B4-BE49-F238E27FC236}">
+                <a16:creationId xmlns:a16="http://schemas.microsoft.com/office/drawing/2014/main" id="{0A2B4FC7-A3CC-A0F0-4230-65FE1716A69C}"/>
+              </a:ext>
+            </a:extLst>
+          </p:cNvPr>
+          <p:cNvPicPr>
+            <a:picLocks noChangeAspect="1" noChangeArrowheads="1"/>
+          </p:cNvPicPr>
+          <p:nvPr/>
+        </p:nvPicPr>
+        <p:blipFill>
+          <a:blip r:embed="rId4">
+            <a:extLst>
+              <a:ext uri="{28A0092B-C50C-407E-A947-70E740481C1C}">
+                <a14:useLocalDpi xmlns:a14="http://schemas.microsoft.com/office/drawing/2010/main" val="0"/>
+              </a:ext>
+            </a:extLst>
+          </a:blip>
+          <a:srcRect/>
+          <a:stretch>
+            <a:fillRect/>
+          </a:stretch>
+        </p:blipFill>
+        <p:spPr bwMode="auto">
+          <a:xfrm>
+            <a:off x="1987032" y="1974461"/>
+            <a:ext cx="5994213" cy="3903209"/>
+          </a:xfrm>
+          <a:prstGeom prst="rect">
+            <a:avLst/>
+          </a:prstGeom>
+          <a:noFill/>
+          <a:extLst>
+            <a:ext uri="{909E8E84-426E-40DD-AFC4-6F175D3DCCD1}">
+              <a14:hiddenFill xmlns:a14="http://schemas.microsoft.com/office/drawing/2010/main">
+                <a:solidFill>
+                  <a:srgbClr val="FFFFFF"/>
+                </a:solidFill>
+              </a14:hiddenFill>
+            </a:ext>
+          </a:extLst>
+        </p:spPr>
+      </p:pic>
     </p:spTree>
     <p:extLst>
       <p:ext uri="{BB962C8B-B14F-4D97-AF65-F5344CB8AC3E}">
-        <p14:creationId xmlns:p14="http://schemas.microsoft.com/office/powerpoint/2010/main" val="3270078570"/>
+        <p14:creationId xmlns:p14="http://schemas.microsoft.com/office/powerpoint/2010/main" val="1466513416"/>
       </p:ext>
     </p:extLst>
   </p:cSld>
@@ -15035,7 +15344,7 @@
         <p:spPr>
           <a:xfrm>
             <a:off x="846667" y="988201"/>
-            <a:ext cx="8229599" cy="5355312"/>
+            <a:ext cx="8229599" cy="4801314"/>
           </a:xfrm>
           <a:prstGeom prst="rect">
             <a:avLst/>
@@ -15048,12 +15357,6 @@
           </a:bodyPr>
           <a:lstStyle/>
           <a:p>
-            <a:r>
-              <a:rPr lang="pt-BR" dirty="0"/>
-              <a:t>Dados de meios de transporte:</a:t>
-            </a:r>
-          </a:p>
-          <a:p>
             <a:endParaRPr lang="pt-BR" dirty="0"/>
           </a:p>
           <a:p>
@@ -15063,77 +15366,90 @@
             </a:pPr>
             <a:r>
               <a:rPr lang="pt-BR" dirty="0"/>
-              <a:t>Custo de frete;</a:t>
-            </a:r>
-          </a:p>
-          <a:p>
-            <a:pPr marL="285750" indent="-285750">
-              <a:buFont typeface="Arial" panose="020B0604020202020204" pitchFamily="34" charset="0"/>
-              <a:buChar char="•"/>
-            </a:pPr>
-            <a:r>
-              <a:rPr lang="pt-BR" dirty="0"/>
-              <a:t>Quantidade de empresas transportadoras;</a:t>
-            </a:r>
-          </a:p>
-          <a:p>
-            <a:pPr marL="285750" indent="-285750">
-              <a:buFont typeface="Arial" panose="020B0604020202020204" pitchFamily="34" charset="0"/>
-              <a:buChar char="•"/>
-            </a:pPr>
-            <a:r>
-              <a:rPr lang="pt-BR" dirty="0"/>
-              <a:t>Índice de sinistros (roubos de carga e acidentes).</a:t>
-            </a:r>
-          </a:p>
-          <a:p>
-            <a:endParaRPr lang="pt-BR" dirty="0"/>
-          </a:p>
-          <a:p>
-            <a:endParaRPr lang="pt-BR" dirty="0"/>
-          </a:p>
-          <a:p>
-            <a:endParaRPr lang="pt-BR" dirty="0"/>
-          </a:p>
-          <a:p>
-            <a:endParaRPr lang="pt-BR" dirty="0"/>
-          </a:p>
-          <a:p>
-            <a:endParaRPr lang="pt-BR" dirty="0"/>
-          </a:p>
-          <a:p>
-            <a:endParaRPr lang="pt-BR" dirty="0"/>
-          </a:p>
-          <a:p>
-            <a:endParaRPr lang="pt-BR" dirty="0"/>
-          </a:p>
-          <a:p>
-            <a:endParaRPr lang="pt-BR" dirty="0"/>
-          </a:p>
-          <a:p>
-            <a:endParaRPr lang="pt-BR" dirty="0"/>
-          </a:p>
-          <a:p>
-            <a:endParaRPr lang="pt-BR" dirty="0"/>
-          </a:p>
-          <a:p>
-            <a:endParaRPr lang="pt-BR" dirty="0"/>
-          </a:p>
-          <a:p>
-            <a:endParaRPr lang="pt-BR" dirty="0"/>
-          </a:p>
-          <a:p>
-            <a:endParaRPr lang="pt-BR" dirty="0"/>
-          </a:p>
-          <a:p>
-            <a:endParaRPr lang="pt-BR" dirty="0"/>
-          </a:p>
-        </p:txBody>
-      </p:sp>
+              <a:t>Exemplo: Centros de distribuição</a:t>
+            </a:r>
+          </a:p>
+          <a:p>
+            <a:endParaRPr lang="pt-BR" dirty="0"/>
+          </a:p>
+          <a:p>
+            <a:endParaRPr lang="pt-BR" dirty="0"/>
+          </a:p>
+          <a:p>
+            <a:endParaRPr lang="pt-BR" dirty="0"/>
+          </a:p>
+          <a:p>
+            <a:endParaRPr lang="pt-BR" dirty="0"/>
+          </a:p>
+          <a:p>
+            <a:endParaRPr lang="pt-BR" dirty="0"/>
+          </a:p>
+          <a:p>
+            <a:endParaRPr lang="pt-BR" dirty="0"/>
+          </a:p>
+          <a:p>
+            <a:endParaRPr lang="pt-BR" dirty="0"/>
+          </a:p>
+          <a:p>
+            <a:endParaRPr lang="pt-BR" dirty="0"/>
+          </a:p>
+          <a:p>
+            <a:endParaRPr lang="pt-BR" dirty="0"/>
+          </a:p>
+          <a:p>
+            <a:endParaRPr lang="pt-BR" dirty="0"/>
+          </a:p>
+          <a:p>
+            <a:endParaRPr lang="pt-BR" dirty="0"/>
+          </a:p>
+          <a:p>
+            <a:endParaRPr lang="pt-BR" dirty="0"/>
+          </a:p>
+          <a:p>
+            <a:endParaRPr lang="pt-BR" dirty="0"/>
+          </a:p>
+          <a:p>
+            <a:endParaRPr lang="pt-BR" dirty="0"/>
+          </a:p>
+          <a:p>
+            <a:endParaRPr lang="pt-BR" dirty="0"/>
+          </a:p>
+        </p:txBody>
+      </p:sp>
+      <p:pic>
+        <p:nvPicPr>
+          <p:cNvPr id="8" name="Imagem 7">
+            <a:extLst>
+              <a:ext uri="{FF2B5EF4-FFF2-40B4-BE49-F238E27FC236}">
+                <a16:creationId xmlns:a16="http://schemas.microsoft.com/office/drawing/2014/main" id="{D1DA67FB-2631-AF8D-50AD-718296A5CA75}"/>
+              </a:ext>
+            </a:extLst>
+          </p:cNvPr>
+          <p:cNvPicPr>
+            <a:picLocks noChangeAspect="1"/>
+          </p:cNvPicPr>
+          <p:nvPr/>
+        </p:nvPicPr>
+        <p:blipFill>
+          <a:blip r:embed="rId4"/>
+          <a:stretch>
+            <a:fillRect/>
+          </a:stretch>
+        </p:blipFill>
+        <p:spPr>
+          <a:xfrm>
+            <a:off x="3323243" y="2776154"/>
+            <a:ext cx="4755292" cy="1508891"/>
+          </a:xfrm>
+          <a:prstGeom prst="rect">
+            <a:avLst/>
+          </a:prstGeom>
+        </p:spPr>
+      </p:pic>
     </p:spTree>
     <p:extLst>
       <p:ext uri="{BB962C8B-B14F-4D97-AF65-F5344CB8AC3E}">
-        <p14:creationId xmlns:p14="http://schemas.microsoft.com/office/powerpoint/2010/main" val="3472512686"/>
+        <p14:creationId xmlns:p14="http://schemas.microsoft.com/office/powerpoint/2010/main" val="2795646663"/>
       </p:ext>
     </p:extLst>
   </p:cSld>
@@ -15372,7 +15688,7 @@
         <p:spPr>
           <a:xfrm>
             <a:off x="846667" y="988201"/>
-            <a:ext cx="8229599" cy="6186309"/>
+            <a:ext cx="8229599" cy="4801314"/>
           </a:xfrm>
           <a:prstGeom prst="rect">
             <a:avLst/>
@@ -15385,142 +15701,116 @@
           </a:bodyPr>
           <a:lstStyle/>
           <a:p>
-            <a:r>
-              <a:rPr lang="pt-BR" dirty="0"/>
-              <a:t>Dados de meios de transporte:</a:t>
-            </a:r>
-          </a:p>
-          <a:p>
-            <a:endParaRPr lang="pt-BR" dirty="0"/>
-          </a:p>
-          <a:p>
-            <a:pPr algn="l">
+            <a:endParaRPr lang="pt-BR" dirty="0"/>
+          </a:p>
+          <a:p>
+            <a:pPr marL="285750" indent="-285750">
               <a:buFont typeface="Arial" panose="020B0604020202020204" pitchFamily="34" charset="0"/>
               <a:buChar char="•"/>
             </a:pPr>
             <a:r>
-              <a:rPr lang="pt-BR" b="0" i="0" dirty="0">
+              <a:rPr lang="pt-BR" dirty="0"/>
+              <a:t>Exemplo: Centros de distribuição</a:t>
+            </a:r>
+          </a:p>
+          <a:p>
+            <a:endParaRPr lang="pt-BR" dirty="0"/>
+          </a:p>
+          <a:p>
+            <a:endParaRPr lang="pt-BR" dirty="0"/>
+          </a:p>
+          <a:p>
+            <a:endParaRPr lang="pt-BR" dirty="0"/>
+          </a:p>
+          <a:p>
+            <a:endParaRPr lang="pt-BR" dirty="0"/>
+          </a:p>
+          <a:p>
+            <a:endParaRPr lang="pt-BR" dirty="0"/>
+          </a:p>
+          <a:p>
+            <a:endParaRPr lang="pt-BR" dirty="0"/>
+          </a:p>
+          <a:p>
+            <a:endParaRPr lang="pt-BR" dirty="0"/>
+          </a:p>
+          <a:p>
+            <a:endParaRPr lang="pt-BR" dirty="0"/>
+          </a:p>
+          <a:p>
+            <a:endParaRPr lang="pt-BR" dirty="0"/>
+          </a:p>
+          <a:p>
+            <a:endParaRPr lang="pt-BR" dirty="0"/>
+          </a:p>
+          <a:p>
+            <a:endParaRPr lang="pt-BR" dirty="0"/>
+          </a:p>
+          <a:p>
+            <a:endParaRPr lang="pt-BR" dirty="0"/>
+          </a:p>
+          <a:p>
+            <a:endParaRPr lang="pt-BR" dirty="0"/>
+          </a:p>
+          <a:p>
+            <a:endParaRPr lang="pt-BR" dirty="0"/>
+          </a:p>
+          <a:p>
+            <a:endParaRPr lang="pt-BR" dirty="0"/>
+          </a:p>
+        </p:txBody>
+      </p:sp>
+      <p:pic>
+        <p:nvPicPr>
+          <p:cNvPr id="11266" name="Picture 2">
+            <a:extLst>
+              <a:ext uri="{FF2B5EF4-FFF2-40B4-BE49-F238E27FC236}">
+                <a16:creationId xmlns:a16="http://schemas.microsoft.com/office/drawing/2014/main" id="{EA0F2AD4-3B41-DAF2-6F90-94BD234A0736}"/>
+              </a:ext>
+            </a:extLst>
+          </p:cNvPr>
+          <p:cNvPicPr>
+            <a:picLocks noChangeAspect="1" noChangeArrowheads="1"/>
+          </p:cNvPicPr>
+          <p:nvPr/>
+        </p:nvPicPr>
+        <p:blipFill>
+          <a:blip r:embed="rId4">
+            <a:extLst>
+              <a:ext uri="{28A0092B-C50C-407E-A947-70E740481C1C}">
+                <a14:useLocalDpi xmlns:a14="http://schemas.microsoft.com/office/drawing/2010/main" val="0"/>
+              </a:ext>
+            </a:extLst>
+          </a:blip>
+          <a:srcRect/>
+          <a:stretch>
+            <a:fillRect/>
+          </a:stretch>
+        </p:blipFill>
+        <p:spPr bwMode="auto">
+          <a:xfrm>
+            <a:off x="1042634" y="1759128"/>
+            <a:ext cx="8334375" cy="4333875"/>
+          </a:xfrm>
+          <a:prstGeom prst="rect">
+            <a:avLst/>
+          </a:prstGeom>
+          <a:noFill/>
+          <a:extLst>
+            <a:ext uri="{909E8E84-426E-40DD-AFC4-6F175D3DCCD1}">
+              <a14:hiddenFill xmlns:a14="http://schemas.microsoft.com/office/drawing/2010/main">
                 <a:solidFill>
-                  <a:srgbClr val="242424"/>
+                  <a:srgbClr val="FFFFFF"/>
                 </a:solidFill>
-                <a:effectLst/>
-                <a:latin typeface="sohne"/>
-              </a:rPr>
-              <a:t>Oferta e custo de mão de obra;</a:t>
-            </a:r>
-          </a:p>
-          <a:p>
-            <a:pPr algn="l">
-              <a:buFont typeface="Arial" panose="020B0604020202020204" pitchFamily="34" charset="0"/>
-              <a:buChar char="•"/>
-            </a:pPr>
-            <a:r>
-              <a:rPr lang="pt-BR" b="0" i="0" dirty="0">
-                <a:solidFill>
-                  <a:srgbClr val="242424"/>
-                </a:solidFill>
-                <a:effectLst/>
-                <a:latin typeface="sohne"/>
-              </a:rPr>
-              <a:t>Oferta e custo de mão de obra “qualificada” (técnicos, engenheiros, gerentes, executivos);</a:t>
-            </a:r>
-          </a:p>
-          <a:p>
-            <a:pPr algn="l">
-              <a:buFont typeface="Arial" panose="020B0604020202020204" pitchFamily="34" charset="0"/>
-              <a:buChar char="•"/>
-            </a:pPr>
-            <a:r>
-              <a:rPr lang="pt-BR" b="0" i="0" dirty="0">
-                <a:solidFill>
-                  <a:srgbClr val="242424"/>
-                </a:solidFill>
-                <a:effectLst/>
-                <a:latin typeface="sohne"/>
-              </a:rPr>
-              <a:t>Tributos municipais e estaduais;</a:t>
-            </a:r>
-          </a:p>
-          <a:p>
-            <a:pPr algn="l">
-              <a:buFont typeface="Arial" panose="020B0604020202020204" pitchFamily="34" charset="0"/>
-              <a:buChar char="•"/>
-            </a:pPr>
-            <a:r>
-              <a:rPr lang="pt-BR" b="0" i="0" dirty="0">
-                <a:solidFill>
-                  <a:srgbClr val="242424"/>
-                </a:solidFill>
-                <a:effectLst/>
-                <a:latin typeface="sohne"/>
-              </a:rPr>
-              <a:t>Localização dos fornecedores</a:t>
-            </a:r>
-          </a:p>
-          <a:p>
-            <a:pPr algn="l">
-              <a:buFont typeface="Arial" panose="020B0604020202020204" pitchFamily="34" charset="0"/>
-              <a:buChar char="•"/>
-            </a:pPr>
-            <a:r>
-              <a:rPr lang="pt-BR" b="0" i="0" dirty="0">
-                <a:solidFill>
-                  <a:srgbClr val="242424"/>
-                </a:solidFill>
-                <a:effectLst/>
-                <a:latin typeface="sohne"/>
-              </a:rPr>
-              <a:t>Preços de aluguel de galpões</a:t>
-            </a:r>
-          </a:p>
-          <a:p>
-            <a:endParaRPr lang="pt-BR" dirty="0"/>
-          </a:p>
-          <a:p>
-            <a:endParaRPr lang="pt-BR" dirty="0"/>
-          </a:p>
-          <a:p>
-            <a:endParaRPr lang="pt-BR" dirty="0"/>
-          </a:p>
-          <a:p>
-            <a:endParaRPr lang="pt-BR" dirty="0"/>
-          </a:p>
-          <a:p>
-            <a:endParaRPr lang="pt-BR" dirty="0"/>
-          </a:p>
-          <a:p>
-            <a:endParaRPr lang="pt-BR" dirty="0"/>
-          </a:p>
-          <a:p>
-            <a:endParaRPr lang="pt-BR" dirty="0"/>
-          </a:p>
-          <a:p>
-            <a:endParaRPr lang="pt-BR" dirty="0"/>
-          </a:p>
-          <a:p>
-            <a:endParaRPr lang="pt-BR" dirty="0"/>
-          </a:p>
-          <a:p>
-            <a:endParaRPr lang="pt-BR" dirty="0"/>
-          </a:p>
-          <a:p>
-            <a:endParaRPr lang="pt-BR" dirty="0"/>
-          </a:p>
-          <a:p>
-            <a:endParaRPr lang="pt-BR" dirty="0"/>
-          </a:p>
-          <a:p>
-            <a:endParaRPr lang="pt-BR" dirty="0"/>
-          </a:p>
-          <a:p>
-            <a:endParaRPr lang="pt-BR" dirty="0"/>
-          </a:p>
-        </p:txBody>
-      </p:sp>
+              </a14:hiddenFill>
+            </a:ext>
+          </a:extLst>
+        </p:spPr>
+      </p:pic>
     </p:spTree>
     <p:extLst>
       <p:ext uri="{BB962C8B-B14F-4D97-AF65-F5344CB8AC3E}">
-        <p14:creationId xmlns:p14="http://schemas.microsoft.com/office/powerpoint/2010/main" val="2181483219"/>
+        <p14:creationId xmlns:p14="http://schemas.microsoft.com/office/powerpoint/2010/main" val="1535757565"/>
       </p:ext>
     </p:extLst>
   </p:cSld>
@@ -15759,7 +16049,7 @@
         <p:spPr>
           <a:xfrm>
             <a:off x="846667" y="988201"/>
-            <a:ext cx="8229599" cy="4524315"/>
+            <a:ext cx="8229599" cy="6186309"/>
           </a:xfrm>
           <a:prstGeom prst="rect">
             <a:avLst/>
@@ -15774,137 +16064,117 @@
           <a:p>
             <a:r>
               <a:rPr lang="pt-BR" dirty="0"/>
-              <a:t>K ótimo</a:t>
-            </a:r>
-          </a:p>
-          <a:p>
-            <a:endParaRPr lang="pt-BR" dirty="0"/>
-          </a:p>
-          <a:p>
-            <a:endParaRPr lang="pt-BR" dirty="0"/>
-          </a:p>
-          <a:p>
-            <a:endParaRPr lang="pt-BR" dirty="0"/>
-          </a:p>
-          <a:p>
-            <a:endParaRPr lang="pt-BR" dirty="0"/>
-          </a:p>
-          <a:p>
-            <a:endParaRPr lang="pt-BR" dirty="0"/>
-          </a:p>
-          <a:p>
-            <a:endParaRPr lang="pt-BR" dirty="0"/>
-          </a:p>
-          <a:p>
-            <a:endParaRPr lang="pt-BR" dirty="0"/>
-          </a:p>
-          <a:p>
-            <a:endParaRPr lang="pt-BR" dirty="0"/>
-          </a:p>
-          <a:p>
-            <a:endParaRPr lang="pt-BR" dirty="0"/>
-          </a:p>
-          <a:p>
-            <a:endParaRPr lang="pt-BR" dirty="0"/>
-          </a:p>
-          <a:p>
-            <a:endParaRPr lang="pt-BR" dirty="0"/>
-          </a:p>
-          <a:p>
-            <a:endParaRPr lang="pt-BR" dirty="0"/>
-          </a:p>
-          <a:p>
-            <a:endParaRPr lang="pt-BR" dirty="0"/>
-          </a:p>
-          <a:p>
-            <a:endParaRPr lang="pt-BR" dirty="0"/>
-          </a:p>
-          <a:p>
-            <a:endParaRPr lang="pt-BR" dirty="0"/>
-          </a:p>
-        </p:txBody>
-      </p:sp>
-      <p:pic>
-        <p:nvPicPr>
-          <p:cNvPr id="2050" name="Picture 2" descr="Base Teórica do K-Means! Aprenda a Lógica desse Algoritmo Hoje!">
-            <a:extLst>
-              <a:ext uri="{FF2B5EF4-FFF2-40B4-BE49-F238E27FC236}">
-                <a16:creationId xmlns:a16="http://schemas.microsoft.com/office/drawing/2014/main" id="{0694ADFD-EB2E-2BF0-18BE-B07E4CD60A5F}"/>
-              </a:ext>
-            </a:extLst>
-          </p:cNvPr>
-          <p:cNvPicPr>
-            <a:picLocks noChangeAspect="1" noChangeArrowheads="1"/>
-          </p:cNvPicPr>
-          <p:nvPr/>
-        </p:nvPicPr>
-        <p:blipFill>
-          <a:blip r:embed="rId4">
-            <a:extLst>
-              <a:ext uri="{28A0092B-C50C-407E-A947-70E740481C1C}">
-                <a14:useLocalDpi xmlns:a14="http://schemas.microsoft.com/office/drawing/2010/main" val="0"/>
-              </a:ext>
-            </a:extLst>
-          </a:blip>
-          <a:srcRect/>
-          <a:stretch>
-            <a:fillRect/>
-          </a:stretch>
-        </p:blipFill>
-        <p:spPr bwMode="auto">
-          <a:xfrm>
-            <a:off x="1526381" y="1605398"/>
-            <a:ext cx="7549885" cy="3444004"/>
-          </a:xfrm>
-          <a:prstGeom prst="rect">
-            <a:avLst/>
-          </a:prstGeom>
-          <a:noFill/>
-          <a:extLst>
-            <a:ext uri="{909E8E84-426E-40DD-AFC4-6F175D3DCCD1}">
-              <a14:hiddenFill xmlns:a14="http://schemas.microsoft.com/office/drawing/2010/main">
-                <a:solidFill>
-                  <a:srgbClr val="FFFFFF"/>
-                </a:solidFill>
-              </a14:hiddenFill>
-            </a:ext>
-          </a:extLst>
-        </p:spPr>
-      </p:pic>
-      <p:pic>
-        <p:nvPicPr>
-          <p:cNvPr id="8" name="Imagem 7">
-            <a:extLst>
-              <a:ext uri="{FF2B5EF4-FFF2-40B4-BE49-F238E27FC236}">
-                <a16:creationId xmlns:a16="http://schemas.microsoft.com/office/drawing/2014/main" id="{EEF69E85-6440-34FE-5C8A-A5F37765D292}"/>
-              </a:ext>
-            </a:extLst>
-          </p:cNvPr>
-          <p:cNvPicPr>
-            <a:picLocks noChangeAspect="1"/>
-          </p:cNvPicPr>
-          <p:nvPr/>
-        </p:nvPicPr>
-        <p:blipFill>
-          <a:blip r:embed="rId5"/>
-          <a:stretch>
-            <a:fillRect/>
-          </a:stretch>
-        </p:blipFill>
-        <p:spPr>
-          <a:xfrm>
-            <a:off x="4486439" y="5536951"/>
-            <a:ext cx="2377646" cy="784928"/>
-          </a:xfrm>
-          <a:prstGeom prst="rect">
-            <a:avLst/>
-          </a:prstGeom>
-        </p:spPr>
-      </p:pic>
+              <a:t>Dados de meios de transporte:</a:t>
+            </a:r>
+          </a:p>
+          <a:p>
+            <a:endParaRPr lang="pt-BR" dirty="0"/>
+          </a:p>
+          <a:p>
+            <a:pPr marL="285750" indent="-285750">
+              <a:buFont typeface="Arial" panose="020B0604020202020204" pitchFamily="34" charset="0"/>
+              <a:buChar char="•"/>
+            </a:pPr>
+            <a:r>
+              <a:rPr lang="pt-BR" dirty="0"/>
+              <a:t>Rodovias</a:t>
+            </a:r>
+          </a:p>
+          <a:p>
+            <a:pPr marL="285750" indent="-285750">
+              <a:buFont typeface="Arial" panose="020B0604020202020204" pitchFamily="34" charset="0"/>
+              <a:buChar char="•"/>
+            </a:pPr>
+            <a:r>
+              <a:rPr lang="pt-BR" dirty="0"/>
+              <a:t>Ferrovias</a:t>
+            </a:r>
+          </a:p>
+          <a:p>
+            <a:pPr marL="285750" indent="-285750">
+              <a:buFont typeface="Arial" panose="020B0604020202020204" pitchFamily="34" charset="0"/>
+              <a:buChar char="•"/>
+            </a:pPr>
+            <a:r>
+              <a:rPr lang="pt-BR" dirty="0"/>
+              <a:t>Aeroportos</a:t>
+            </a:r>
+          </a:p>
+          <a:p>
+            <a:pPr marL="285750" indent="-285750">
+              <a:buFont typeface="Arial" panose="020B0604020202020204" pitchFamily="34" charset="0"/>
+              <a:buChar char="•"/>
+            </a:pPr>
+            <a:r>
+              <a:rPr lang="pt-BR" dirty="0"/>
+              <a:t>Rios navegáveis</a:t>
+            </a:r>
+          </a:p>
+          <a:p>
+            <a:pPr marL="285750" indent="-285750">
+              <a:buFont typeface="Arial" panose="020B0604020202020204" pitchFamily="34" charset="0"/>
+              <a:buChar char="•"/>
+            </a:pPr>
+            <a:r>
+              <a:rPr lang="pt-BR" dirty="0"/>
+              <a:t>Portos</a:t>
+            </a:r>
+          </a:p>
+          <a:p>
+            <a:pPr marL="285750" indent="-285750">
+              <a:buFont typeface="Arial" panose="020B0604020202020204" pitchFamily="34" charset="0"/>
+              <a:buChar char="•"/>
+            </a:pPr>
+            <a:endParaRPr lang="pt-BR" dirty="0"/>
+          </a:p>
+          <a:p>
+            <a:endParaRPr lang="pt-BR" dirty="0"/>
+          </a:p>
+          <a:p>
+            <a:endParaRPr lang="pt-BR" dirty="0"/>
+          </a:p>
+          <a:p>
+            <a:endParaRPr lang="pt-BR" dirty="0"/>
+          </a:p>
+          <a:p>
+            <a:endParaRPr lang="pt-BR" dirty="0"/>
+          </a:p>
+          <a:p>
+            <a:endParaRPr lang="pt-BR" dirty="0"/>
+          </a:p>
+          <a:p>
+            <a:endParaRPr lang="pt-BR" dirty="0"/>
+          </a:p>
+          <a:p>
+            <a:endParaRPr lang="pt-BR" dirty="0"/>
+          </a:p>
+          <a:p>
+            <a:endParaRPr lang="pt-BR" dirty="0"/>
+          </a:p>
+          <a:p>
+            <a:endParaRPr lang="pt-BR" dirty="0"/>
+          </a:p>
+          <a:p>
+            <a:endParaRPr lang="pt-BR" dirty="0"/>
+          </a:p>
+          <a:p>
+            <a:endParaRPr lang="pt-BR" dirty="0"/>
+          </a:p>
+          <a:p>
+            <a:endParaRPr lang="pt-BR" dirty="0"/>
+          </a:p>
+          <a:p>
+            <a:endParaRPr lang="pt-BR" dirty="0"/>
+          </a:p>
+          <a:p>
+            <a:endParaRPr lang="pt-BR" dirty="0"/>
+          </a:p>
+        </p:txBody>
+      </p:sp>
     </p:spTree>
     <p:extLst>
       <p:ext uri="{BB962C8B-B14F-4D97-AF65-F5344CB8AC3E}">
-        <p14:creationId xmlns:p14="http://schemas.microsoft.com/office/powerpoint/2010/main" val="1144642794"/>
+        <p14:creationId xmlns:p14="http://schemas.microsoft.com/office/powerpoint/2010/main" val="3270078570"/>
       </p:ext>
     </p:extLst>
   </p:cSld>
@@ -15975,8 +16245,13 @@
           <a:p>
             <a:r>
               <a:rPr lang="pt-BR" dirty="0"/>
-              <a:t>Detecção de anomalias</a:t>
-            </a:r>
+              <a:t>K-</a:t>
+            </a:r>
+            <a:r>
+              <a:rPr lang="pt-BR" dirty="0" err="1"/>
+              <a:t>means</a:t>
+            </a:r>
+            <a:endParaRPr lang="pt-BR" dirty="0"/>
           </a:p>
         </p:txBody>
       </p:sp>
@@ -16138,7 +16413,7 @@
         <p:spPr>
           <a:xfrm>
             <a:off x="846667" y="988201"/>
-            <a:ext cx="8229599" cy="7017306"/>
+            <a:ext cx="8229599" cy="5355312"/>
           </a:xfrm>
           <a:prstGeom prst="rect">
             <a:avLst/>
@@ -16152,15 +16427,12 @@
           <a:lstStyle/>
           <a:p>
             <a:r>
-              <a:rPr lang="pt-BR" b="0" i="0" dirty="0">
-                <a:solidFill>
-                  <a:srgbClr val="212529"/>
-                </a:solidFill>
-                <a:effectLst/>
-                <a:latin typeface="-apple-system"/>
-              </a:rPr>
-              <a:t>Outliers</a:t>
-            </a:r>
+              <a:rPr lang="pt-BR" dirty="0"/>
+              <a:t>Dados de meios de transporte:</a:t>
+            </a:r>
+          </a:p>
+          <a:p>
+            <a:endParaRPr lang="pt-BR" dirty="0"/>
           </a:p>
           <a:p>
             <a:pPr marL="285750" indent="-285750">
@@ -16168,14 +16440,8 @@
               <a:buChar char="•"/>
             </a:pPr>
             <a:r>
-              <a:rPr lang="pt-BR" b="0" i="0" dirty="0">
-                <a:solidFill>
-                  <a:srgbClr val="212529"/>
-                </a:solidFill>
-                <a:effectLst/>
-                <a:latin typeface="-apple-system"/>
-              </a:rPr>
-              <a:t>Os dados de treinamento contêm valores discrepantes que são definidos como observações distantes das demais. </a:t>
+              <a:rPr lang="pt-BR" dirty="0"/>
+              <a:t>Custo de frete;</a:t>
             </a:r>
           </a:p>
           <a:p>
@@ -16184,14 +16450,8 @@
               <a:buChar char="•"/>
             </a:pPr>
             <a:r>
-              <a:rPr lang="pt-BR" b="0" i="0" dirty="0">
-                <a:solidFill>
-                  <a:srgbClr val="212529"/>
-                </a:solidFill>
-                <a:effectLst/>
-                <a:latin typeface="-apple-system"/>
-              </a:rPr>
-              <a:t>Os estimadores de detecção de outliers tentam, portanto, ajustar as regiões onde os dados de treinamento estão mais concentrados, ignorando as observações desviantes.</a:t>
+              <a:rPr lang="pt-BR" dirty="0"/>
+              <a:t>Quantidade de empresas transportadoras;</a:t>
             </a:r>
           </a:p>
           <a:p>
@@ -16199,89 +16459,12 @@
               <a:buFont typeface="Arial" panose="020B0604020202020204" pitchFamily="34" charset="0"/>
               <a:buChar char="•"/>
             </a:pPr>
-            <a:endParaRPr lang="pt-BR" dirty="0">
-              <a:solidFill>
-                <a:srgbClr val="212529"/>
-              </a:solidFill>
-              <a:latin typeface="-apple-system"/>
-            </a:endParaRPr>
-          </a:p>
-          <a:p>
-            <a:r>
-              <a:rPr lang="pt-BR" dirty="0" err="1">
-                <a:solidFill>
-                  <a:srgbClr val="212529"/>
-                </a:solidFill>
-                <a:latin typeface="-apple-system"/>
-              </a:rPr>
-              <a:t>Novelty</a:t>
-            </a:r>
-            <a:endParaRPr lang="pt-BR" dirty="0">
-              <a:solidFill>
-                <a:srgbClr val="212529"/>
-              </a:solidFill>
-              <a:latin typeface="-apple-system"/>
-            </a:endParaRPr>
-          </a:p>
-          <a:p>
-            <a:endParaRPr lang="pt-BR" dirty="0">
-              <a:solidFill>
-                <a:srgbClr val="212529"/>
-              </a:solidFill>
-              <a:latin typeface="-apple-system"/>
-            </a:endParaRPr>
-          </a:p>
-          <a:p>
-            <a:pPr marL="285750" indent="-285750">
-              <a:buFont typeface="Arial" panose="020B0604020202020204" pitchFamily="34" charset="0"/>
-              <a:buChar char="•"/>
-            </a:pPr>
-            <a:r>
-              <a:rPr lang="pt-BR" b="0" i="0" dirty="0">
-                <a:solidFill>
-                  <a:srgbClr val="212529"/>
-                </a:solidFill>
-                <a:effectLst/>
-                <a:latin typeface="-apple-system"/>
-              </a:rPr>
-              <a:t>Os dados de treinamento não são poluídos por valores discrepantes e estamos interessados ​​em detectar se uma </a:t>
-            </a:r>
-            <a:r>
-              <a:rPr lang="pt-BR" b="1" i="0" dirty="0">
-                <a:solidFill>
-                  <a:srgbClr val="212529"/>
-                </a:solidFill>
-                <a:effectLst/>
-                <a:latin typeface="-apple-system"/>
-              </a:rPr>
-              <a:t>nova</a:t>
-            </a:r>
-            <a:r>
-              <a:rPr lang="pt-BR" b="0" i="0" dirty="0">
-                <a:solidFill>
-                  <a:srgbClr val="212529"/>
-                </a:solidFill>
-                <a:effectLst/>
-                <a:latin typeface="-apple-system"/>
-              </a:rPr>
-              <a:t> observação é um valor discrepante.</a:t>
-            </a:r>
-          </a:p>
-          <a:p>
-            <a:pPr marL="285750" indent="-285750">
-              <a:buFont typeface="Arial" panose="020B0604020202020204" pitchFamily="34" charset="0"/>
-              <a:buChar char="•"/>
-            </a:pPr>
-            <a:r>
-              <a:rPr lang="pt-BR" b="0" i="0" dirty="0">
-                <a:solidFill>
-                  <a:srgbClr val="212529"/>
-                </a:solidFill>
-                <a:effectLst/>
-                <a:latin typeface="-apple-system"/>
-              </a:rPr>
-              <a:t> Neste contexto, um outlier também é chamado de novidade</a:t>
-            </a:r>
+            <a:r>
+              <a:rPr lang="pt-BR" dirty="0"/>
+              <a:t>Índice de sinistros (roubos de carga e acidentes).</a:t>
+            </a:r>
+          </a:p>
+          <a:p>
             <a:endParaRPr lang="pt-BR" dirty="0"/>
           </a:p>
           <a:p>
@@ -16328,7 +16511,7 @@
     </p:spTree>
     <p:extLst>
       <p:ext uri="{BB962C8B-B14F-4D97-AF65-F5344CB8AC3E}">
-        <p14:creationId xmlns:p14="http://schemas.microsoft.com/office/powerpoint/2010/main" val="3453401683"/>
+        <p14:creationId xmlns:p14="http://schemas.microsoft.com/office/powerpoint/2010/main" val="3472512686"/>
       </p:ext>
     </p:extLst>
   </p:cSld>
@@ -16399,8 +16582,13 @@
           <a:p>
             <a:r>
               <a:rPr lang="pt-BR" dirty="0"/>
-              <a:t>Detecção de anomalias</a:t>
-            </a:r>
+              <a:t>K-</a:t>
+            </a:r>
+            <a:r>
+              <a:rPr lang="pt-BR" dirty="0" err="1"/>
+              <a:t>means</a:t>
+            </a:r>
+            <a:endParaRPr lang="pt-BR" dirty="0"/>
           </a:p>
         </p:txBody>
       </p:sp>
@@ -16562,7 +16750,7 @@
         <p:spPr>
           <a:xfrm>
             <a:off x="846667" y="988201"/>
-            <a:ext cx="8229599" cy="4247317"/>
+            <a:ext cx="8229599" cy="6186309"/>
           </a:xfrm>
           <a:prstGeom prst="rect">
             <a:avLst/>
@@ -16575,139 +16763,142 @@
           </a:bodyPr>
           <a:lstStyle/>
           <a:p>
-            <a:endParaRPr lang="pt-BR" b="0" i="0" dirty="0">
-              <a:solidFill>
-                <a:srgbClr val="242424"/>
-              </a:solidFill>
-              <a:effectLst/>
-              <a:latin typeface="sohne"/>
-            </a:endParaRPr>
-          </a:p>
-          <a:p>
-            <a:endParaRPr lang="pt-BR" dirty="0"/>
-          </a:p>
-          <a:p>
-            <a:endParaRPr lang="pt-BR" dirty="0"/>
-          </a:p>
-          <a:p>
-            <a:endParaRPr lang="pt-BR" dirty="0"/>
-          </a:p>
-          <a:p>
-            <a:endParaRPr lang="pt-BR" dirty="0"/>
-          </a:p>
-          <a:p>
-            <a:endParaRPr lang="pt-BR" dirty="0"/>
-          </a:p>
-          <a:p>
-            <a:endParaRPr lang="pt-BR" dirty="0"/>
-          </a:p>
-          <a:p>
-            <a:endParaRPr lang="pt-BR" dirty="0"/>
-          </a:p>
-          <a:p>
-            <a:endParaRPr lang="pt-BR" dirty="0"/>
-          </a:p>
-          <a:p>
-            <a:endParaRPr lang="pt-BR" dirty="0"/>
-          </a:p>
-          <a:p>
-            <a:endParaRPr lang="pt-BR" dirty="0"/>
-          </a:p>
-          <a:p>
-            <a:endParaRPr lang="pt-BR" dirty="0"/>
-          </a:p>
-          <a:p>
-            <a:endParaRPr lang="pt-BR" dirty="0"/>
-          </a:p>
-          <a:p>
-            <a:endParaRPr lang="pt-BR" dirty="0"/>
-          </a:p>
-          <a:p>
-            <a:endParaRPr lang="pt-BR" dirty="0"/>
-          </a:p>
-        </p:txBody>
-      </p:sp>
-      <p:pic>
-        <p:nvPicPr>
-          <p:cNvPr id="10" name="Imagem 9">
-            <a:extLst>
-              <a:ext uri="{FF2B5EF4-FFF2-40B4-BE49-F238E27FC236}">
-                <a16:creationId xmlns:a16="http://schemas.microsoft.com/office/drawing/2014/main" id="{67B27A31-FF46-6D9B-7B7B-AE78D453C9D1}"/>
-              </a:ext>
-            </a:extLst>
-          </p:cNvPr>
-          <p:cNvPicPr>
-            <a:picLocks noChangeAspect="1"/>
-          </p:cNvPicPr>
-          <p:nvPr/>
-        </p:nvPicPr>
-        <p:blipFill>
-          <a:blip r:embed="rId4"/>
-          <a:stretch>
-            <a:fillRect/>
-          </a:stretch>
-        </p:blipFill>
-        <p:spPr>
-          <a:xfrm>
-            <a:off x="2240534" y="1181980"/>
-            <a:ext cx="6835732" cy="2507197"/>
-          </a:xfrm>
-          <a:prstGeom prst="rect">
-            <a:avLst/>
-          </a:prstGeom>
-        </p:spPr>
-      </p:pic>
-      <p:pic>
-        <p:nvPicPr>
-          <p:cNvPr id="1026" name="Picture 2" descr="The Challenges of Ensuring IoT Security | Invicti">
-            <a:extLst>
-              <a:ext uri="{FF2B5EF4-FFF2-40B4-BE49-F238E27FC236}">
-                <a16:creationId xmlns:a16="http://schemas.microsoft.com/office/drawing/2014/main" id="{7E4E8E32-645C-3525-0CA4-78DD2ED5044A}"/>
-              </a:ext>
-            </a:extLst>
-          </p:cNvPr>
-          <p:cNvPicPr>
-            <a:picLocks noChangeAspect="1" noChangeArrowheads="1"/>
-          </p:cNvPicPr>
-          <p:nvPr/>
-        </p:nvPicPr>
-        <p:blipFill>
-          <a:blip r:embed="rId5">
-            <a:extLst>
-              <a:ext uri="{28A0092B-C50C-407E-A947-70E740481C1C}">
-                <a14:useLocalDpi xmlns:a14="http://schemas.microsoft.com/office/drawing/2010/main" val="0"/>
-              </a:ext>
-            </a:extLst>
-          </a:blip>
-          <a:srcRect/>
-          <a:stretch>
-            <a:fillRect/>
-          </a:stretch>
-        </p:blipFill>
-        <p:spPr bwMode="auto">
-          <a:xfrm>
-            <a:off x="3417711" y="4024396"/>
-            <a:ext cx="4778022" cy="2508462"/>
-          </a:xfrm>
-          <a:prstGeom prst="rect">
-            <a:avLst/>
-          </a:prstGeom>
-          <a:noFill/>
-          <a:extLst>
-            <a:ext uri="{909E8E84-426E-40DD-AFC4-6F175D3DCCD1}">
-              <a14:hiddenFill xmlns:a14="http://schemas.microsoft.com/office/drawing/2010/main">
+            <a:r>
+              <a:rPr lang="pt-BR" dirty="0"/>
+              <a:t>Dados de meios de transporte:</a:t>
+            </a:r>
+          </a:p>
+          <a:p>
+            <a:endParaRPr lang="pt-BR" dirty="0"/>
+          </a:p>
+          <a:p>
+            <a:pPr algn="l">
+              <a:buFont typeface="Arial" panose="020B0604020202020204" pitchFamily="34" charset="0"/>
+              <a:buChar char="•"/>
+            </a:pPr>
+            <a:r>
+              <a:rPr lang="pt-BR" b="0" i="0" dirty="0">
                 <a:solidFill>
-                  <a:srgbClr val="FFFFFF"/>
+                  <a:srgbClr val="242424"/>
                 </a:solidFill>
-              </a14:hiddenFill>
-            </a:ext>
-          </a:extLst>
-        </p:spPr>
-      </p:pic>
+                <a:effectLst/>
+                <a:latin typeface="sohne"/>
+              </a:rPr>
+              <a:t>Oferta e custo de mão de obra;</a:t>
+            </a:r>
+          </a:p>
+          <a:p>
+            <a:pPr algn="l">
+              <a:buFont typeface="Arial" panose="020B0604020202020204" pitchFamily="34" charset="0"/>
+              <a:buChar char="•"/>
+            </a:pPr>
+            <a:r>
+              <a:rPr lang="pt-BR" b="0" i="0" dirty="0">
+                <a:solidFill>
+                  <a:srgbClr val="242424"/>
+                </a:solidFill>
+                <a:effectLst/>
+                <a:latin typeface="sohne"/>
+              </a:rPr>
+              <a:t>Oferta e custo de mão de obra “qualificada” (técnicos, engenheiros, gerentes, executivos);</a:t>
+            </a:r>
+          </a:p>
+          <a:p>
+            <a:pPr algn="l">
+              <a:buFont typeface="Arial" panose="020B0604020202020204" pitchFamily="34" charset="0"/>
+              <a:buChar char="•"/>
+            </a:pPr>
+            <a:r>
+              <a:rPr lang="pt-BR" b="0" i="0" dirty="0">
+                <a:solidFill>
+                  <a:srgbClr val="242424"/>
+                </a:solidFill>
+                <a:effectLst/>
+                <a:latin typeface="sohne"/>
+              </a:rPr>
+              <a:t>Tributos municipais e estaduais;</a:t>
+            </a:r>
+          </a:p>
+          <a:p>
+            <a:pPr algn="l">
+              <a:buFont typeface="Arial" panose="020B0604020202020204" pitchFamily="34" charset="0"/>
+              <a:buChar char="•"/>
+            </a:pPr>
+            <a:r>
+              <a:rPr lang="pt-BR" b="0" i="0" dirty="0">
+                <a:solidFill>
+                  <a:srgbClr val="242424"/>
+                </a:solidFill>
+                <a:effectLst/>
+                <a:latin typeface="sohne"/>
+              </a:rPr>
+              <a:t>Localização dos fornecedores</a:t>
+            </a:r>
+          </a:p>
+          <a:p>
+            <a:pPr algn="l">
+              <a:buFont typeface="Arial" panose="020B0604020202020204" pitchFamily="34" charset="0"/>
+              <a:buChar char="•"/>
+            </a:pPr>
+            <a:r>
+              <a:rPr lang="pt-BR" b="0" i="0" dirty="0">
+                <a:solidFill>
+                  <a:srgbClr val="242424"/>
+                </a:solidFill>
+                <a:effectLst/>
+                <a:latin typeface="sohne"/>
+              </a:rPr>
+              <a:t>Preços de aluguel de galpões</a:t>
+            </a:r>
+          </a:p>
+          <a:p>
+            <a:endParaRPr lang="pt-BR" dirty="0"/>
+          </a:p>
+          <a:p>
+            <a:endParaRPr lang="pt-BR" dirty="0"/>
+          </a:p>
+          <a:p>
+            <a:endParaRPr lang="pt-BR" dirty="0"/>
+          </a:p>
+          <a:p>
+            <a:endParaRPr lang="pt-BR" dirty="0"/>
+          </a:p>
+          <a:p>
+            <a:endParaRPr lang="pt-BR" dirty="0"/>
+          </a:p>
+          <a:p>
+            <a:endParaRPr lang="pt-BR" dirty="0"/>
+          </a:p>
+          <a:p>
+            <a:endParaRPr lang="pt-BR" dirty="0"/>
+          </a:p>
+          <a:p>
+            <a:endParaRPr lang="pt-BR" dirty="0"/>
+          </a:p>
+          <a:p>
+            <a:endParaRPr lang="pt-BR" dirty="0"/>
+          </a:p>
+          <a:p>
+            <a:endParaRPr lang="pt-BR" dirty="0"/>
+          </a:p>
+          <a:p>
+            <a:endParaRPr lang="pt-BR" dirty="0"/>
+          </a:p>
+          <a:p>
+            <a:endParaRPr lang="pt-BR" dirty="0"/>
+          </a:p>
+          <a:p>
+            <a:endParaRPr lang="pt-BR" dirty="0"/>
+          </a:p>
+          <a:p>
+            <a:endParaRPr lang="pt-BR" dirty="0"/>
+          </a:p>
+        </p:txBody>
+      </p:sp>
     </p:spTree>
     <p:extLst>
       <p:ext uri="{BB962C8B-B14F-4D97-AF65-F5344CB8AC3E}">
-        <p14:creationId xmlns:p14="http://schemas.microsoft.com/office/powerpoint/2010/main" val="65704128"/>
+        <p14:creationId xmlns:p14="http://schemas.microsoft.com/office/powerpoint/2010/main" val="2181483219"/>
       </p:ext>
     </p:extLst>
   </p:cSld>
@@ -16778,8 +16969,13 @@
           <a:p>
             <a:r>
               <a:rPr lang="pt-BR" dirty="0"/>
-              <a:t>Detecção de anomalias</a:t>
-            </a:r>
+              <a:t>K-</a:t>
+            </a:r>
+            <a:r>
+              <a:rPr lang="pt-BR" dirty="0" err="1"/>
+              <a:t>means</a:t>
+            </a:r>
+            <a:endParaRPr lang="pt-BR" dirty="0"/>
           </a:p>
         </p:txBody>
       </p:sp>
@@ -16940,8 +17136,8 @@
         </p:nvSpPr>
         <p:spPr>
           <a:xfrm>
-            <a:off x="756356" y="998967"/>
-            <a:ext cx="8229599" cy="2554545"/>
+            <a:off x="846667" y="988201"/>
+            <a:ext cx="8229599" cy="4524315"/>
           </a:xfrm>
           <a:prstGeom prst="rect">
             <a:avLst/>
@@ -16955,148 +17151,138 @@
           <a:lstStyle/>
           <a:p>
             <a:r>
-              <a:rPr lang="pt-BR" sz="2000" b="0" i="0" dirty="0">
+              <a:rPr lang="pt-BR" dirty="0"/>
+              <a:t>Como escolher o K ótimo?</a:t>
+            </a:r>
+          </a:p>
+          <a:p>
+            <a:endParaRPr lang="pt-BR" dirty="0"/>
+          </a:p>
+          <a:p>
+            <a:endParaRPr lang="pt-BR" dirty="0"/>
+          </a:p>
+          <a:p>
+            <a:endParaRPr lang="pt-BR" dirty="0"/>
+          </a:p>
+          <a:p>
+            <a:endParaRPr lang="pt-BR" dirty="0"/>
+          </a:p>
+          <a:p>
+            <a:endParaRPr lang="pt-BR" dirty="0"/>
+          </a:p>
+          <a:p>
+            <a:endParaRPr lang="pt-BR" dirty="0"/>
+          </a:p>
+          <a:p>
+            <a:endParaRPr lang="pt-BR" dirty="0"/>
+          </a:p>
+          <a:p>
+            <a:endParaRPr lang="pt-BR" dirty="0"/>
+          </a:p>
+          <a:p>
+            <a:endParaRPr lang="pt-BR" dirty="0"/>
+          </a:p>
+          <a:p>
+            <a:endParaRPr lang="pt-BR" dirty="0"/>
+          </a:p>
+          <a:p>
+            <a:endParaRPr lang="pt-BR" dirty="0"/>
+          </a:p>
+          <a:p>
+            <a:endParaRPr lang="pt-BR" dirty="0"/>
+          </a:p>
+          <a:p>
+            <a:endParaRPr lang="pt-BR" dirty="0"/>
+          </a:p>
+          <a:p>
+            <a:endParaRPr lang="pt-BR" dirty="0"/>
+          </a:p>
+          <a:p>
+            <a:endParaRPr lang="pt-BR" dirty="0"/>
+          </a:p>
+        </p:txBody>
+      </p:sp>
+      <p:pic>
+        <p:nvPicPr>
+          <p:cNvPr id="2050" name="Picture 2" descr="Base Teórica do K-Means! Aprenda a Lógica desse Algoritmo Hoje!">
+            <a:extLst>
+              <a:ext uri="{FF2B5EF4-FFF2-40B4-BE49-F238E27FC236}">
+                <a16:creationId xmlns:a16="http://schemas.microsoft.com/office/drawing/2014/main" id="{0694ADFD-EB2E-2BF0-18BE-B07E4CD60A5F}"/>
+              </a:ext>
+            </a:extLst>
+          </p:cNvPr>
+          <p:cNvPicPr>
+            <a:picLocks noChangeAspect="1" noChangeArrowheads="1"/>
+          </p:cNvPicPr>
+          <p:nvPr/>
+        </p:nvPicPr>
+        <p:blipFill>
+          <a:blip r:embed="rId4">
+            <a:extLst>
+              <a:ext uri="{28A0092B-C50C-407E-A947-70E740481C1C}">
+                <a14:useLocalDpi xmlns:a14="http://schemas.microsoft.com/office/drawing/2010/main" val="0"/>
+              </a:ext>
+            </a:extLst>
+          </a:blip>
+          <a:srcRect/>
+          <a:stretch>
+            <a:fillRect/>
+          </a:stretch>
+        </p:blipFill>
+        <p:spPr bwMode="auto">
+          <a:xfrm>
+            <a:off x="1526381" y="1605398"/>
+            <a:ext cx="7549885" cy="3444004"/>
+          </a:xfrm>
+          <a:prstGeom prst="rect">
+            <a:avLst/>
+          </a:prstGeom>
+          <a:noFill/>
+          <a:extLst>
+            <a:ext uri="{909E8E84-426E-40DD-AFC4-6F175D3DCCD1}">
+              <a14:hiddenFill xmlns:a14="http://schemas.microsoft.com/office/drawing/2010/main">
                 <a:solidFill>
-                  <a:srgbClr val="242424"/>
+                  <a:srgbClr val="FFFFFF"/>
                 </a:solidFill>
-                <a:effectLst/>
-                <a:latin typeface="sohne"/>
-              </a:rPr>
-              <a:t>Ameaças à segurança em redes </a:t>
-            </a:r>
-            <a:r>
-              <a:rPr lang="pt-BR" sz="2000" b="0" i="0" dirty="0" err="1">
-                <a:solidFill>
-                  <a:srgbClr val="242424"/>
-                </a:solidFill>
-                <a:effectLst/>
-                <a:latin typeface="sohne"/>
-              </a:rPr>
-              <a:t>IoT</a:t>
-            </a:r>
-            <a:endParaRPr lang="pt-BR" sz="2000" b="0" i="0" dirty="0">
-              <a:solidFill>
-                <a:srgbClr val="242424"/>
-              </a:solidFill>
-              <a:effectLst/>
-              <a:latin typeface="sohne"/>
-            </a:endParaRPr>
-          </a:p>
-          <a:p>
-            <a:pPr marL="285750" indent="-285750">
-              <a:buFont typeface="Arial" panose="020B0604020202020204" pitchFamily="34" charset="0"/>
-              <a:buChar char="•"/>
-            </a:pPr>
-            <a:r>
-              <a:rPr lang="pt-BR" sz="2000" b="0" i="0" dirty="0">
-                <a:solidFill>
-                  <a:srgbClr val="242424"/>
-                </a:solidFill>
-                <a:effectLst/>
-                <a:latin typeface="sohne"/>
-              </a:rPr>
-              <a:t>Aumento rápido de dispositivos conectados;</a:t>
-            </a:r>
-          </a:p>
-          <a:p>
-            <a:pPr marL="285750" indent="-285750">
-              <a:buFont typeface="Arial" panose="020B0604020202020204" pitchFamily="34" charset="0"/>
-              <a:buChar char="•"/>
-            </a:pPr>
-            <a:r>
-              <a:rPr lang="pt-BR" sz="2000" b="0" i="0" dirty="0">
-                <a:solidFill>
-                  <a:srgbClr val="242424"/>
-                </a:solidFill>
-                <a:effectLst/>
-                <a:latin typeface="sohne"/>
-              </a:rPr>
-              <a:t>Troca intensa de dados sensíveis através de redes;</a:t>
-            </a:r>
-          </a:p>
-          <a:p>
-            <a:pPr marL="285750" indent="-285750">
-              <a:buFont typeface="Arial" panose="020B0604020202020204" pitchFamily="34" charset="0"/>
-              <a:buChar char="•"/>
-            </a:pPr>
-            <a:r>
-              <a:rPr lang="pt-BR" sz="2000" b="0" i="0" dirty="0">
-                <a:solidFill>
-                  <a:srgbClr val="242424"/>
-                </a:solidFill>
-                <a:effectLst/>
-                <a:latin typeface="sohne"/>
-              </a:rPr>
-              <a:t>Disponibilidade de conjuntos de dados de tráfego de rede do mundo real.</a:t>
-            </a:r>
-          </a:p>
-          <a:p>
-            <a:r>
-              <a:rPr lang="pt-BR" sz="2000" b="0" i="0" dirty="0">
-                <a:solidFill>
-                  <a:srgbClr val="242424"/>
-                </a:solidFill>
-                <a:effectLst/>
-                <a:latin typeface="sohne"/>
-              </a:rPr>
-              <a:t>Detecção e classificação de novidades baseadas em ML</a:t>
-            </a:r>
-          </a:p>
-          <a:p>
-            <a:pPr marL="285750" indent="-285750">
-              <a:buFont typeface="Arial" panose="020B0604020202020204" pitchFamily="34" charset="0"/>
-              <a:buChar char="•"/>
-            </a:pPr>
-            <a:r>
-              <a:rPr lang="pt-BR" sz="2000" b="0" i="0" dirty="0">
-                <a:solidFill>
-                  <a:srgbClr val="242424"/>
-                </a:solidFill>
-                <a:effectLst/>
-                <a:latin typeface="sohne"/>
-              </a:rPr>
-              <a:t>Análise Automatizada de Tráfego de Rede (NTA);</a:t>
-            </a:r>
-          </a:p>
-          <a:p>
-            <a:pPr marL="285750" indent="-285750">
-              <a:buFont typeface="Arial" panose="020B0604020202020204" pitchFamily="34" charset="0"/>
-              <a:buChar char="•"/>
-            </a:pPr>
-            <a:r>
-              <a:rPr lang="pt-BR" sz="2000" b="0" i="0" dirty="0">
-                <a:solidFill>
-                  <a:srgbClr val="242424"/>
-                </a:solidFill>
-                <a:effectLst/>
-                <a:latin typeface="sohne"/>
-              </a:rPr>
-              <a:t>Detecção: identifique ameaças nunca antes vistas;</a:t>
-            </a:r>
-          </a:p>
-          <a:p>
-            <a:pPr marL="285750" indent="-285750">
-              <a:buFont typeface="Arial" panose="020B0604020202020204" pitchFamily="34" charset="0"/>
-              <a:buChar char="•"/>
-            </a:pPr>
-            <a:r>
-              <a:rPr lang="pt-BR" sz="2000" b="0" i="0" dirty="0">
-                <a:solidFill>
-                  <a:srgbClr val="242424"/>
-                </a:solidFill>
-                <a:effectLst/>
-                <a:latin typeface="sohne"/>
-              </a:rPr>
-              <a:t>Classificação: categoriza vestígios de ameaças conhecidas.</a:t>
-            </a:r>
-            <a:endParaRPr lang="pt-BR" sz="2000" dirty="0"/>
-          </a:p>
-        </p:txBody>
-      </p:sp>
+              </a14:hiddenFill>
+            </a:ext>
+          </a:extLst>
+        </p:spPr>
+      </p:pic>
+      <p:pic>
+        <p:nvPicPr>
+          <p:cNvPr id="8" name="Imagem 7">
+            <a:extLst>
+              <a:ext uri="{FF2B5EF4-FFF2-40B4-BE49-F238E27FC236}">
+                <a16:creationId xmlns:a16="http://schemas.microsoft.com/office/drawing/2014/main" id="{EEF69E85-6440-34FE-5C8A-A5F37765D292}"/>
+              </a:ext>
+            </a:extLst>
+          </p:cNvPr>
+          <p:cNvPicPr>
+            <a:picLocks noChangeAspect="1"/>
+          </p:cNvPicPr>
+          <p:nvPr/>
+        </p:nvPicPr>
+        <p:blipFill>
+          <a:blip r:embed="rId5"/>
+          <a:stretch>
+            <a:fillRect/>
+          </a:stretch>
+        </p:blipFill>
+        <p:spPr>
+          <a:xfrm>
+            <a:off x="4486439" y="5536951"/>
+            <a:ext cx="2377646" cy="784928"/>
+          </a:xfrm>
+          <a:prstGeom prst="rect">
+            <a:avLst/>
+          </a:prstGeom>
+        </p:spPr>
+      </p:pic>
     </p:spTree>
     <p:extLst>
       <p:ext uri="{BB962C8B-B14F-4D97-AF65-F5344CB8AC3E}">
-        <p14:creationId xmlns:p14="http://schemas.microsoft.com/office/powerpoint/2010/main" val="3789847492"/>
+        <p14:creationId xmlns:p14="http://schemas.microsoft.com/office/powerpoint/2010/main" val="1144642794"/>
       </p:ext>
     </p:extLst>
   </p:cSld>
@@ -17317,10 +17503,10 @@
       </p:sp>
       <p:sp>
         <p:nvSpPr>
-          <p:cNvPr id="10" name="CaixaDeTexto 9">
-            <a:extLst>
-              <a:ext uri="{FF2B5EF4-FFF2-40B4-BE49-F238E27FC236}">
-                <a16:creationId xmlns:a16="http://schemas.microsoft.com/office/drawing/2014/main" id="{4DF079FE-0EFE-3067-0DC3-B7BB425D701C}"/>
+          <p:cNvPr id="6" name="CaixaDeTexto 5">
+            <a:extLst>
+              <a:ext uri="{FF2B5EF4-FFF2-40B4-BE49-F238E27FC236}">
+                <a16:creationId xmlns:a16="http://schemas.microsoft.com/office/drawing/2014/main" id="{470482DB-F365-0A83-E102-37A8EB7EACEF}"/>
               </a:ext>
             </a:extLst>
           </p:cNvPr>
@@ -17329,8 +17515,8 @@
         </p:nvSpPr>
         <p:spPr>
           <a:xfrm>
-            <a:off x="1456266" y="1512249"/>
-            <a:ext cx="6096000" cy="1754326"/>
+            <a:off x="846667" y="988201"/>
+            <a:ext cx="8229599" cy="7017306"/>
           </a:xfrm>
           <a:prstGeom prst="rect">
             <a:avLst/>
@@ -17344,14 +17530,14 @@
           <a:lstStyle/>
           <a:p>
             <a:r>
-              <a:rPr lang="en-US" dirty="0"/>
-              <a:t>IoT Network Intrusion:</a:t>
-            </a:r>
-          </a:p>
-          <a:p>
-            <a:r>
-              <a:rPr lang="en-US" dirty="0"/>
-              <a:t>10% of ≈3M samples</a:t>
+              <a:rPr lang="pt-BR" b="0" i="0" dirty="0">
+                <a:solidFill>
+                  <a:srgbClr val="212529"/>
+                </a:solidFill>
+                <a:effectLst/>
+                <a:latin typeface="-apple-system"/>
+              </a:rPr>
+              <a:t>Outliers</a:t>
             </a:r>
           </a:p>
           <a:p>
@@ -17360,8 +17546,14 @@
               <a:buChar char="•"/>
             </a:pPr>
             <a:r>
-              <a:rPr lang="en-US" dirty="0"/>
-              <a:t>Mirai, </a:t>
+              <a:rPr lang="pt-BR" b="0" i="0" dirty="0">
+                <a:solidFill>
+                  <a:srgbClr val="212529"/>
+                </a:solidFill>
+                <a:effectLst/>
+                <a:latin typeface="-apple-system"/>
+              </a:rPr>
+              <a:t>Os dados de treinamento contêm valores discrepantes que são definidos como observações distantes das demais. </a:t>
             </a:r>
           </a:p>
           <a:p>
@@ -17370,8 +17562,14 @@
               <a:buChar char="•"/>
             </a:pPr>
             <a:r>
-              <a:rPr lang="en-US" dirty="0"/>
-              <a:t>Man-in-the-middle, </a:t>
+              <a:rPr lang="pt-BR" b="0" i="0" dirty="0">
+                <a:solidFill>
+                  <a:srgbClr val="212529"/>
+                </a:solidFill>
+                <a:effectLst/>
+                <a:latin typeface="-apple-system"/>
+              </a:rPr>
+              <a:t>Os estimadores de detecção de outliers tentam, portanto, ajustar as regiões onde os dados de treinamento estão mais concentrados, ignorando as observações desviantes.</a:t>
             </a:r>
           </a:p>
           <a:p>
@@ -17379,10 +17577,37 @@
               <a:buFont typeface="Arial" panose="020B0604020202020204" pitchFamily="34" charset="0"/>
               <a:buChar char="•"/>
             </a:pPr>
-            <a:r>
-              <a:rPr lang="en-US" dirty="0"/>
-              <a:t>DoS, </a:t>
-            </a:r>
+            <a:endParaRPr lang="pt-BR" dirty="0">
+              <a:solidFill>
+                <a:srgbClr val="212529"/>
+              </a:solidFill>
+              <a:latin typeface="-apple-system"/>
+            </a:endParaRPr>
+          </a:p>
+          <a:p>
+            <a:r>
+              <a:rPr lang="pt-BR" dirty="0" err="1">
+                <a:solidFill>
+                  <a:srgbClr val="212529"/>
+                </a:solidFill>
+                <a:latin typeface="-apple-system"/>
+              </a:rPr>
+              <a:t>Novelty</a:t>
+            </a:r>
+            <a:endParaRPr lang="pt-BR" dirty="0">
+              <a:solidFill>
+                <a:srgbClr val="212529"/>
+              </a:solidFill>
+              <a:latin typeface="-apple-system"/>
+            </a:endParaRPr>
+          </a:p>
+          <a:p>
+            <a:endParaRPr lang="pt-BR" dirty="0">
+              <a:solidFill>
+                <a:srgbClr val="212529"/>
+              </a:solidFill>
+              <a:latin typeface="-apple-system"/>
+            </a:endParaRPr>
           </a:p>
           <a:p>
             <a:pPr marL="285750" indent="-285750">
@@ -17390,51 +17615,98 @@
               <a:buChar char="•"/>
             </a:pPr>
             <a:r>
-              <a:rPr lang="en-US" dirty="0"/>
-              <a:t>Scanning</a:t>
-            </a:r>
-          </a:p>
-        </p:txBody>
-      </p:sp>
-      <p:sp>
-        <p:nvSpPr>
-          <p:cNvPr id="12" name="CaixaDeTexto 11">
-            <a:extLst>
-              <a:ext uri="{FF2B5EF4-FFF2-40B4-BE49-F238E27FC236}">
-                <a16:creationId xmlns:a16="http://schemas.microsoft.com/office/drawing/2014/main" id="{646BC624-C522-49D6-CFFF-4FFB18A2A777}"/>
-              </a:ext>
-            </a:extLst>
-          </p:cNvPr>
-          <p:cNvSpPr txBox="1"/>
-          <p:nvPr/>
-        </p:nvSpPr>
-        <p:spPr>
-          <a:xfrm>
-            <a:off x="1467555" y="4040772"/>
-            <a:ext cx="8116712" cy="369332"/>
-          </a:xfrm>
-          <a:prstGeom prst="rect">
-            <a:avLst/>
-          </a:prstGeom>
-          <a:noFill/>
-        </p:spPr>
-        <p:txBody>
-          <a:bodyPr wrap="square">
-            <a:spAutoFit/>
-          </a:bodyPr>
-          <a:lstStyle/>
-          <a:p>
-            <a:r>
-              <a:rPr lang="pt-BR" dirty="0"/>
-              <a:t>https://ieee-dataport.org/open-access/iot-network-intrusion-dataset</a:t>
-            </a:r>
+              <a:rPr lang="pt-BR" b="0" i="0" dirty="0">
+                <a:solidFill>
+                  <a:srgbClr val="212529"/>
+                </a:solidFill>
+                <a:effectLst/>
+                <a:latin typeface="-apple-system"/>
+              </a:rPr>
+              <a:t>Os dados de treinamento não são poluídos por valores discrepantes e estamos interessados ​​em detectar se uma </a:t>
+            </a:r>
+            <a:r>
+              <a:rPr lang="pt-BR" b="1" i="0" dirty="0">
+                <a:solidFill>
+                  <a:srgbClr val="212529"/>
+                </a:solidFill>
+                <a:effectLst/>
+                <a:latin typeface="-apple-system"/>
+              </a:rPr>
+              <a:t>nova</a:t>
+            </a:r>
+            <a:r>
+              <a:rPr lang="pt-BR" b="0" i="0" dirty="0">
+                <a:solidFill>
+                  <a:srgbClr val="212529"/>
+                </a:solidFill>
+                <a:effectLst/>
+                <a:latin typeface="-apple-system"/>
+              </a:rPr>
+              <a:t> observação é um valor discrepante.</a:t>
+            </a:r>
+          </a:p>
+          <a:p>
+            <a:pPr marL="285750" indent="-285750">
+              <a:buFont typeface="Arial" panose="020B0604020202020204" pitchFamily="34" charset="0"/>
+              <a:buChar char="•"/>
+            </a:pPr>
+            <a:r>
+              <a:rPr lang="pt-BR" b="0" i="0" dirty="0">
+                <a:solidFill>
+                  <a:srgbClr val="212529"/>
+                </a:solidFill>
+                <a:effectLst/>
+                <a:latin typeface="-apple-system"/>
+              </a:rPr>
+              <a:t> Neste contexto, um outlier também é chamado de novidade</a:t>
+            </a:r>
+            <a:endParaRPr lang="pt-BR" dirty="0"/>
+          </a:p>
+          <a:p>
+            <a:endParaRPr lang="pt-BR" dirty="0"/>
+          </a:p>
+          <a:p>
+            <a:endParaRPr lang="pt-BR" dirty="0"/>
+          </a:p>
+          <a:p>
+            <a:endParaRPr lang="pt-BR" dirty="0"/>
+          </a:p>
+          <a:p>
+            <a:endParaRPr lang="pt-BR" dirty="0"/>
+          </a:p>
+          <a:p>
+            <a:endParaRPr lang="pt-BR" dirty="0"/>
+          </a:p>
+          <a:p>
+            <a:endParaRPr lang="pt-BR" dirty="0"/>
+          </a:p>
+          <a:p>
+            <a:endParaRPr lang="pt-BR" dirty="0"/>
+          </a:p>
+          <a:p>
+            <a:endParaRPr lang="pt-BR" dirty="0"/>
+          </a:p>
+          <a:p>
+            <a:endParaRPr lang="pt-BR" dirty="0"/>
+          </a:p>
+          <a:p>
+            <a:endParaRPr lang="pt-BR" dirty="0"/>
+          </a:p>
+          <a:p>
+            <a:endParaRPr lang="pt-BR" dirty="0"/>
+          </a:p>
+          <a:p>
+            <a:endParaRPr lang="pt-BR" dirty="0"/>
+          </a:p>
+          <a:p>
+            <a:endParaRPr lang="pt-BR" dirty="0"/>
           </a:p>
         </p:txBody>
       </p:sp>
     </p:spTree>
     <p:extLst>
       <p:ext uri="{BB962C8B-B14F-4D97-AF65-F5344CB8AC3E}">
-        <p14:creationId xmlns:p14="http://schemas.microsoft.com/office/powerpoint/2010/main" val="1863321108"/>
+        <p14:creationId xmlns:p14="http://schemas.microsoft.com/office/powerpoint/2010/main" val="3453401683"/>
       </p:ext>
     </p:extLst>
   </p:cSld>
@@ -17653,12 +17925,92 @@
           </a:p>
         </p:txBody>
       </p:sp>
+      <p:sp>
+        <p:nvSpPr>
+          <p:cNvPr id="6" name="CaixaDeTexto 5">
+            <a:extLst>
+              <a:ext uri="{FF2B5EF4-FFF2-40B4-BE49-F238E27FC236}">
+                <a16:creationId xmlns:a16="http://schemas.microsoft.com/office/drawing/2014/main" id="{470482DB-F365-0A83-E102-37A8EB7EACEF}"/>
+              </a:ext>
+            </a:extLst>
+          </p:cNvPr>
+          <p:cNvSpPr txBox="1"/>
+          <p:nvPr/>
+        </p:nvSpPr>
+        <p:spPr>
+          <a:xfrm>
+            <a:off x="846667" y="988201"/>
+            <a:ext cx="8229599" cy="4247317"/>
+          </a:xfrm>
+          <a:prstGeom prst="rect">
+            <a:avLst/>
+          </a:prstGeom>
+          <a:noFill/>
+        </p:spPr>
+        <p:txBody>
+          <a:bodyPr wrap="square">
+            <a:spAutoFit/>
+          </a:bodyPr>
+          <a:lstStyle/>
+          <a:p>
+            <a:endParaRPr lang="pt-BR" b="0" i="0" dirty="0">
+              <a:solidFill>
+                <a:srgbClr val="242424"/>
+              </a:solidFill>
+              <a:effectLst/>
+              <a:latin typeface="sohne"/>
+            </a:endParaRPr>
+          </a:p>
+          <a:p>
+            <a:endParaRPr lang="pt-BR" dirty="0"/>
+          </a:p>
+          <a:p>
+            <a:endParaRPr lang="pt-BR" dirty="0"/>
+          </a:p>
+          <a:p>
+            <a:endParaRPr lang="pt-BR" dirty="0"/>
+          </a:p>
+          <a:p>
+            <a:endParaRPr lang="pt-BR" dirty="0"/>
+          </a:p>
+          <a:p>
+            <a:endParaRPr lang="pt-BR" dirty="0"/>
+          </a:p>
+          <a:p>
+            <a:endParaRPr lang="pt-BR" dirty="0"/>
+          </a:p>
+          <a:p>
+            <a:endParaRPr lang="pt-BR" dirty="0"/>
+          </a:p>
+          <a:p>
+            <a:endParaRPr lang="pt-BR" dirty="0"/>
+          </a:p>
+          <a:p>
+            <a:endParaRPr lang="pt-BR" dirty="0"/>
+          </a:p>
+          <a:p>
+            <a:endParaRPr lang="pt-BR" dirty="0"/>
+          </a:p>
+          <a:p>
+            <a:endParaRPr lang="pt-BR" dirty="0"/>
+          </a:p>
+          <a:p>
+            <a:endParaRPr lang="pt-BR" dirty="0"/>
+          </a:p>
+          <a:p>
+            <a:endParaRPr lang="pt-BR" dirty="0"/>
+          </a:p>
+          <a:p>
+            <a:endParaRPr lang="pt-BR" dirty="0"/>
+          </a:p>
+        </p:txBody>
+      </p:sp>
       <p:pic>
         <p:nvPicPr>
-          <p:cNvPr id="8" name="Imagem 7">
-            <a:extLst>
-              <a:ext uri="{FF2B5EF4-FFF2-40B4-BE49-F238E27FC236}">
-                <a16:creationId xmlns:a16="http://schemas.microsoft.com/office/drawing/2014/main" id="{BADF72E0-677F-530E-FE9F-BB8758F23E5A}"/>
+          <p:cNvPr id="10" name="Imagem 9">
+            <a:extLst>
+              <a:ext uri="{FF2B5EF4-FFF2-40B4-BE49-F238E27FC236}">
+                <a16:creationId xmlns:a16="http://schemas.microsoft.com/office/drawing/2014/main" id="{67B27A31-FF46-6D9B-7B7B-AE78D453C9D1}"/>
               </a:ext>
             </a:extLst>
           </p:cNvPr>
@@ -17675,18 +18027,65 @@
         </p:blipFill>
         <p:spPr>
           <a:xfrm>
-            <a:off x="3074408" y="1128813"/>
-            <a:ext cx="6043184" cy="5006774"/>
+            <a:off x="2240534" y="1181980"/>
+            <a:ext cx="6835732" cy="2507197"/>
           </a:xfrm>
           <a:prstGeom prst="rect">
             <a:avLst/>
           </a:prstGeom>
+        </p:spPr>
+      </p:pic>
+      <p:pic>
+        <p:nvPicPr>
+          <p:cNvPr id="1026" name="Picture 2" descr="The Challenges of Ensuring IoT Security | Invicti">
+            <a:extLst>
+              <a:ext uri="{FF2B5EF4-FFF2-40B4-BE49-F238E27FC236}">
+                <a16:creationId xmlns:a16="http://schemas.microsoft.com/office/drawing/2014/main" id="{7E4E8E32-645C-3525-0CA4-78DD2ED5044A}"/>
+              </a:ext>
+            </a:extLst>
+          </p:cNvPr>
+          <p:cNvPicPr>
+            <a:picLocks noChangeAspect="1" noChangeArrowheads="1"/>
+          </p:cNvPicPr>
+          <p:nvPr/>
+        </p:nvPicPr>
+        <p:blipFill>
+          <a:blip r:embed="rId5">
+            <a:extLst>
+              <a:ext uri="{28A0092B-C50C-407E-A947-70E740481C1C}">
+                <a14:useLocalDpi xmlns:a14="http://schemas.microsoft.com/office/drawing/2010/main" val="0"/>
+              </a:ext>
+            </a:extLst>
+          </a:blip>
+          <a:srcRect/>
+          <a:stretch>
+            <a:fillRect/>
+          </a:stretch>
+        </p:blipFill>
+        <p:spPr bwMode="auto">
+          <a:xfrm>
+            <a:off x="3417711" y="4024396"/>
+            <a:ext cx="4778022" cy="2508462"/>
+          </a:xfrm>
+          <a:prstGeom prst="rect">
+            <a:avLst/>
+          </a:prstGeom>
+          <a:noFill/>
+          <a:extLst>
+            <a:ext uri="{909E8E84-426E-40DD-AFC4-6F175D3DCCD1}">
+              <a14:hiddenFill xmlns:a14="http://schemas.microsoft.com/office/drawing/2010/main">
+                <a:solidFill>
+                  <a:srgbClr val="FFFFFF"/>
+                </a:solidFill>
+              </a14:hiddenFill>
+            </a:ext>
+          </a:extLst>
         </p:spPr>
       </p:pic>
     </p:spTree>
     <p:extLst>
       <p:ext uri="{BB962C8B-B14F-4D97-AF65-F5344CB8AC3E}">
-        <p14:creationId xmlns:p14="http://schemas.microsoft.com/office/powerpoint/2010/main" val="3632233341"/>
+        <p14:creationId xmlns:p14="http://schemas.microsoft.com/office/powerpoint/2010/main" val="65704128"/>
       </p:ext>
     </p:extLst>
   </p:cSld>
@@ -18166,40 +18565,177 @@
           </a:p>
         </p:txBody>
       </p:sp>
-      <p:pic>
-        <p:nvPicPr>
-          <p:cNvPr id="6" name="Imagem 5">
-            <a:extLst>
-              <a:ext uri="{FF2B5EF4-FFF2-40B4-BE49-F238E27FC236}">
-                <a16:creationId xmlns:a16="http://schemas.microsoft.com/office/drawing/2014/main" id="{16764048-7B68-9DB3-0313-F6C9A730F4D8}"/>
-              </a:ext>
-            </a:extLst>
-          </p:cNvPr>
-          <p:cNvPicPr>
-            <a:picLocks noChangeAspect="1"/>
-          </p:cNvPicPr>
+      <p:sp>
+        <p:nvSpPr>
+          <p:cNvPr id="6" name="CaixaDeTexto 5">
+            <a:extLst>
+              <a:ext uri="{FF2B5EF4-FFF2-40B4-BE49-F238E27FC236}">
+                <a16:creationId xmlns:a16="http://schemas.microsoft.com/office/drawing/2014/main" id="{470482DB-F365-0A83-E102-37A8EB7EACEF}"/>
+              </a:ext>
+            </a:extLst>
+          </p:cNvPr>
+          <p:cNvSpPr txBox="1"/>
           <p:nvPr/>
-        </p:nvPicPr>
-        <p:blipFill>
-          <a:blip r:embed="rId4"/>
-          <a:stretch>
-            <a:fillRect/>
-          </a:stretch>
-        </p:blipFill>
+        </p:nvSpPr>
         <p:spPr>
           <a:xfrm>
-            <a:off x="1096847" y="2442124"/>
-            <a:ext cx="9998306" cy="1973751"/>
+            <a:off x="756356" y="998967"/>
+            <a:ext cx="8229599" cy="2554545"/>
           </a:xfrm>
           <a:prstGeom prst="rect">
             <a:avLst/>
           </a:prstGeom>
-        </p:spPr>
-      </p:pic>
+          <a:noFill/>
+        </p:spPr>
+        <p:txBody>
+          <a:bodyPr wrap="square">
+            <a:spAutoFit/>
+          </a:bodyPr>
+          <a:lstStyle/>
+          <a:p>
+            <a:r>
+              <a:rPr lang="pt-BR" sz="2000" b="0" i="0" dirty="0">
+                <a:solidFill>
+                  <a:srgbClr val="242424"/>
+                </a:solidFill>
+                <a:effectLst/>
+                <a:latin typeface="sohne"/>
+              </a:rPr>
+              <a:t>Ameaças à segurança em redes </a:t>
+            </a:r>
+            <a:r>
+              <a:rPr lang="pt-BR" sz="2000" b="0" i="0" dirty="0" err="1">
+                <a:solidFill>
+                  <a:srgbClr val="242424"/>
+                </a:solidFill>
+                <a:effectLst/>
+                <a:latin typeface="sohne"/>
+              </a:rPr>
+              <a:t>IoT</a:t>
+            </a:r>
+            <a:endParaRPr lang="pt-BR" sz="2000" b="0" i="0" dirty="0">
+              <a:solidFill>
+                <a:srgbClr val="242424"/>
+              </a:solidFill>
+              <a:effectLst/>
+              <a:latin typeface="sohne"/>
+            </a:endParaRPr>
+          </a:p>
+          <a:p>
+            <a:pPr marL="285750" indent="-285750">
+              <a:buFont typeface="Arial" panose="020B0604020202020204" pitchFamily="34" charset="0"/>
+              <a:buChar char="•"/>
+            </a:pPr>
+            <a:r>
+              <a:rPr lang="pt-BR" sz="2000" b="0" i="0" dirty="0">
+                <a:solidFill>
+                  <a:srgbClr val="242424"/>
+                </a:solidFill>
+                <a:effectLst/>
+                <a:latin typeface="sohne"/>
+              </a:rPr>
+              <a:t>Aumento rápido de dispositivos conectados;</a:t>
+            </a:r>
+          </a:p>
+          <a:p>
+            <a:pPr marL="285750" indent="-285750">
+              <a:buFont typeface="Arial" panose="020B0604020202020204" pitchFamily="34" charset="0"/>
+              <a:buChar char="•"/>
+            </a:pPr>
+            <a:r>
+              <a:rPr lang="pt-BR" sz="2000" b="0" i="0" dirty="0">
+                <a:solidFill>
+                  <a:srgbClr val="242424"/>
+                </a:solidFill>
+                <a:effectLst/>
+                <a:latin typeface="sohne"/>
+              </a:rPr>
+              <a:t>Troca intensa de dados sensíveis através de redes;</a:t>
+            </a:r>
+          </a:p>
+          <a:p>
+            <a:pPr marL="285750" indent="-285750">
+              <a:buFont typeface="Arial" panose="020B0604020202020204" pitchFamily="34" charset="0"/>
+              <a:buChar char="•"/>
+            </a:pPr>
+            <a:r>
+              <a:rPr lang="pt-BR" sz="2000" b="0" i="0" dirty="0">
+                <a:solidFill>
+                  <a:srgbClr val="242424"/>
+                </a:solidFill>
+                <a:effectLst/>
+                <a:latin typeface="sohne"/>
+              </a:rPr>
+              <a:t>Disponibilidade de conjuntos de dados de tráfego de rede do mundo real.</a:t>
+            </a:r>
+          </a:p>
+          <a:p>
+            <a:r>
+              <a:rPr lang="pt-BR" sz="2000" b="0" i="0" dirty="0">
+                <a:solidFill>
+                  <a:srgbClr val="242424"/>
+                </a:solidFill>
+                <a:effectLst/>
+                <a:latin typeface="sohne"/>
+              </a:rPr>
+              <a:t>Detecção e classificação de novidades baseadas em ML</a:t>
+            </a:r>
+          </a:p>
+          <a:p>
+            <a:pPr marL="285750" indent="-285750">
+              <a:buFont typeface="Arial" panose="020B0604020202020204" pitchFamily="34" charset="0"/>
+              <a:buChar char="•"/>
+            </a:pPr>
+            <a:r>
+              <a:rPr lang="pt-BR" sz="2000" b="0" i="0" dirty="0">
+                <a:solidFill>
+                  <a:srgbClr val="242424"/>
+                </a:solidFill>
+                <a:effectLst/>
+                <a:latin typeface="sohne"/>
+              </a:rPr>
+              <a:t>Análise Automatizada de Tráfego de Rede (NTA);</a:t>
+            </a:r>
+          </a:p>
+          <a:p>
+            <a:pPr marL="285750" indent="-285750">
+              <a:buFont typeface="Arial" panose="020B0604020202020204" pitchFamily="34" charset="0"/>
+              <a:buChar char="•"/>
+            </a:pPr>
+            <a:r>
+              <a:rPr lang="pt-BR" sz="2000" b="0" i="0" dirty="0">
+                <a:solidFill>
+                  <a:srgbClr val="242424"/>
+                </a:solidFill>
+                <a:effectLst/>
+                <a:latin typeface="sohne"/>
+              </a:rPr>
+              <a:t>Detecção: identifique ameaças nunca antes vistas;</a:t>
+            </a:r>
+          </a:p>
+          <a:p>
+            <a:pPr marL="285750" indent="-285750">
+              <a:buFont typeface="Arial" panose="020B0604020202020204" pitchFamily="34" charset="0"/>
+              <a:buChar char="•"/>
+            </a:pPr>
+            <a:r>
+              <a:rPr lang="pt-BR" sz="2000" b="0" i="0" dirty="0">
+                <a:solidFill>
+                  <a:srgbClr val="242424"/>
+                </a:solidFill>
+                <a:effectLst/>
+                <a:latin typeface="sohne"/>
+              </a:rPr>
+              <a:t>Classificação: categoriza vestígios de ameaças conhecidas.</a:t>
+            </a:r>
+            <a:endParaRPr lang="pt-BR" sz="2000" dirty="0"/>
+          </a:p>
+        </p:txBody>
+      </p:sp>
     </p:spTree>
     <p:extLst>
       <p:ext uri="{BB962C8B-B14F-4D97-AF65-F5344CB8AC3E}">
-        <p14:creationId xmlns:p14="http://schemas.microsoft.com/office/powerpoint/2010/main" val="1993436904"/>
+        <p14:creationId xmlns:p14="http://schemas.microsoft.com/office/powerpoint/2010/main" val="3789847492"/>
       </p:ext>
     </p:extLst>
   </p:cSld>
@@ -18418,40 +18954,126 @@
           </a:p>
         </p:txBody>
       </p:sp>
-      <p:pic>
-        <p:nvPicPr>
-          <p:cNvPr id="8" name="Imagem 7">
-            <a:extLst>
-              <a:ext uri="{FF2B5EF4-FFF2-40B4-BE49-F238E27FC236}">
-                <a16:creationId xmlns:a16="http://schemas.microsoft.com/office/drawing/2014/main" id="{2E186F46-9317-70E2-BDCE-B5031FFAF9EF}"/>
-              </a:ext>
-            </a:extLst>
-          </p:cNvPr>
-          <p:cNvPicPr>
-            <a:picLocks noChangeAspect="1"/>
-          </p:cNvPicPr>
+      <p:sp>
+        <p:nvSpPr>
+          <p:cNvPr id="10" name="CaixaDeTexto 9">
+            <a:extLst>
+              <a:ext uri="{FF2B5EF4-FFF2-40B4-BE49-F238E27FC236}">
+                <a16:creationId xmlns:a16="http://schemas.microsoft.com/office/drawing/2014/main" id="{4DF079FE-0EFE-3067-0DC3-B7BB425D701C}"/>
+              </a:ext>
+            </a:extLst>
+          </p:cNvPr>
+          <p:cNvSpPr txBox="1"/>
           <p:nvPr/>
-        </p:nvPicPr>
-        <p:blipFill>
-          <a:blip r:embed="rId4"/>
-          <a:stretch>
-            <a:fillRect/>
-          </a:stretch>
-        </p:blipFill>
+        </p:nvSpPr>
         <p:spPr>
           <a:xfrm>
-            <a:off x="1127329" y="3327400"/>
-            <a:ext cx="9937341" cy="1798476"/>
+            <a:off x="1456266" y="1512249"/>
+            <a:ext cx="6096000" cy="1754326"/>
           </a:xfrm>
           <a:prstGeom prst="rect">
             <a:avLst/>
           </a:prstGeom>
-        </p:spPr>
-      </p:pic>
+          <a:noFill/>
+        </p:spPr>
+        <p:txBody>
+          <a:bodyPr wrap="square">
+            <a:spAutoFit/>
+          </a:bodyPr>
+          <a:lstStyle/>
+          <a:p>
+            <a:r>
+              <a:rPr lang="en-US" dirty="0"/>
+              <a:t>IoT Network Intrusion:</a:t>
+            </a:r>
+          </a:p>
+          <a:p>
+            <a:r>
+              <a:rPr lang="en-US" dirty="0"/>
+              <a:t>10% of ≈3M samples</a:t>
+            </a:r>
+          </a:p>
+          <a:p>
+            <a:pPr marL="285750" indent="-285750">
+              <a:buFont typeface="Arial" panose="020B0604020202020204" pitchFamily="34" charset="0"/>
+              <a:buChar char="•"/>
+            </a:pPr>
+            <a:r>
+              <a:rPr lang="en-US" dirty="0"/>
+              <a:t>Mirai, </a:t>
+            </a:r>
+          </a:p>
+          <a:p>
+            <a:pPr marL="285750" indent="-285750">
+              <a:buFont typeface="Arial" panose="020B0604020202020204" pitchFamily="34" charset="0"/>
+              <a:buChar char="•"/>
+            </a:pPr>
+            <a:r>
+              <a:rPr lang="en-US" dirty="0"/>
+              <a:t>Man-in-the-middle, </a:t>
+            </a:r>
+          </a:p>
+          <a:p>
+            <a:pPr marL="285750" indent="-285750">
+              <a:buFont typeface="Arial" panose="020B0604020202020204" pitchFamily="34" charset="0"/>
+              <a:buChar char="•"/>
+            </a:pPr>
+            <a:r>
+              <a:rPr lang="en-US" dirty="0"/>
+              <a:t>DoS, </a:t>
+            </a:r>
+          </a:p>
+          <a:p>
+            <a:pPr marL="285750" indent="-285750">
+              <a:buFont typeface="Arial" panose="020B0604020202020204" pitchFamily="34" charset="0"/>
+              <a:buChar char="•"/>
+            </a:pPr>
+            <a:r>
+              <a:rPr lang="en-US" dirty="0"/>
+              <a:t>Scanning</a:t>
+            </a:r>
+          </a:p>
+        </p:txBody>
+      </p:sp>
+      <p:sp>
+        <p:nvSpPr>
+          <p:cNvPr id="12" name="CaixaDeTexto 11">
+            <a:extLst>
+              <a:ext uri="{FF2B5EF4-FFF2-40B4-BE49-F238E27FC236}">
+                <a16:creationId xmlns:a16="http://schemas.microsoft.com/office/drawing/2014/main" id="{646BC624-C522-49D6-CFFF-4FFB18A2A777}"/>
+              </a:ext>
+            </a:extLst>
+          </p:cNvPr>
+          <p:cNvSpPr txBox="1"/>
+          <p:nvPr/>
+        </p:nvSpPr>
+        <p:spPr>
+          <a:xfrm>
+            <a:off x="1467555" y="4040772"/>
+            <a:ext cx="8116712" cy="369332"/>
+          </a:xfrm>
+          <a:prstGeom prst="rect">
+            <a:avLst/>
+          </a:prstGeom>
+          <a:noFill/>
+        </p:spPr>
+        <p:txBody>
+          <a:bodyPr wrap="square">
+            <a:spAutoFit/>
+          </a:bodyPr>
+          <a:lstStyle/>
+          <a:p>
+            <a:r>
+              <a:rPr lang="pt-BR" dirty="0"/>
+              <a:t>https://ieee-dataport.org/open-access/iot-network-intrusion-dataset</a:t>
+            </a:r>
+          </a:p>
+        </p:txBody>
+      </p:sp>
     </p:spTree>
     <p:extLst>
       <p:ext uri="{BB962C8B-B14F-4D97-AF65-F5344CB8AC3E}">
-        <p14:creationId xmlns:p14="http://schemas.microsoft.com/office/powerpoint/2010/main" val="708183461"/>
+        <p14:creationId xmlns:p14="http://schemas.microsoft.com/office/powerpoint/2010/main" val="1863321108"/>
       </p:ext>
     </p:extLst>
   </p:cSld>
@@ -18568,36 +19190,12 @@
           </a:bodyPr>
           <a:lstStyle/>
           <a:p>
-            <a:pPr marL="0" marR="0" lvl="0" indent="0" algn="l" defTabSz="609630" rtl="0" eaLnBrk="1" fontAlgn="auto" latinLnBrk="0" hangingPunct="1">
-              <a:lnSpc>
-                <a:spcPct val="100000"/>
-              </a:lnSpc>
-              <a:spcBef>
-                <a:spcPts val="0"/>
-              </a:spcBef>
-              <a:spcAft>
-                <a:spcPts val="0"/>
-              </a:spcAft>
-              <a:buClrTx/>
-              <a:buSzTx/>
-              <a:buFontTx/>
-              <a:buNone/>
-              <a:tabLst/>
-              <a:defRPr/>
-            </a:pPr>
-            <a:endParaRPr kumimoji="0" lang="pt-BR" sz="1200" b="0" i="0" u="none" strike="noStrike" kern="1200" cap="none" spc="0" normalizeH="0" baseline="0" noProof="0">
-              <a:ln>
-                <a:noFill/>
-              </a:ln>
+            <a:pPr defTabSz="609630"/>
+            <a:endParaRPr lang="pt-BR" sz="1200">
               <a:solidFill>
                 <a:prstClr val="black"/>
               </a:solidFill>
-              <a:effectLst/>
-              <a:uLnTx/>
-              <a:uFillTx/>
               <a:latin typeface="Calibri"/>
-              <a:ea typeface="+mn-ea"/>
-              <a:cs typeface="+mn-cs"/>
             </a:endParaRPr>
           </a:p>
         </p:txBody>
@@ -18643,36 +19241,12 @@
           </a:bodyPr>
           <a:lstStyle/>
           <a:p>
-            <a:pPr marL="0" marR="0" lvl="0" indent="0" algn="l" defTabSz="609630" rtl="0" eaLnBrk="1" fontAlgn="auto" latinLnBrk="0" hangingPunct="1">
-              <a:lnSpc>
-                <a:spcPct val="100000"/>
-              </a:lnSpc>
-              <a:spcBef>
-                <a:spcPts val="0"/>
-              </a:spcBef>
-              <a:spcAft>
-                <a:spcPts val="0"/>
-              </a:spcAft>
-              <a:buClrTx/>
-              <a:buSzTx/>
-              <a:buFontTx/>
-              <a:buNone/>
-              <a:tabLst/>
-              <a:defRPr/>
-            </a:pPr>
-            <a:endParaRPr kumimoji="0" lang="pt-BR" sz="1200" b="0" i="0" u="none" strike="noStrike" kern="1200" cap="none" spc="0" normalizeH="0" baseline="0" noProof="0">
-              <a:ln>
-                <a:noFill/>
-              </a:ln>
+            <a:pPr defTabSz="609630"/>
+            <a:endParaRPr lang="pt-BR" sz="1200">
               <a:solidFill>
                 <a:prstClr val="black"/>
               </a:solidFill>
-              <a:effectLst/>
-              <a:uLnTx/>
-              <a:uFillTx/>
               <a:latin typeface="Calibri"/>
-              <a:ea typeface="+mn-ea"/>
-              <a:cs typeface="+mn-cs"/>
             </a:endParaRPr>
           </a:p>
         </p:txBody>
@@ -18682,7 +19256,7 @@
           <p:cNvPr id="4" name="Espaço Reservado para Conteúdo 3">
             <a:extLst>
               <a:ext uri="{FF2B5EF4-FFF2-40B4-BE49-F238E27FC236}">
-                <a16:creationId xmlns:a16="http://schemas.microsoft.com/office/drawing/2014/main" id="{0349BA64-C9D7-4730-9CA9-5C4AD9FC7969}"/>
+                <a16:creationId xmlns:a16="http://schemas.microsoft.com/office/drawing/2014/main" id="{5F1B432F-F570-AEC0-CFFF-C1D9196D7234}"/>
               </a:ext>
             </a:extLst>
           </p:cNvPr>
@@ -18695,85 +19269,63 @@
         </p:nvSpPr>
         <p:spPr>
           <a:xfrm>
-            <a:off x="304800" y="1066800"/>
-            <a:ext cx="9295589" cy="4330419"/>
+            <a:off x="304800" y="1066801"/>
+            <a:ext cx="9810044" cy="2737556"/>
           </a:xfrm>
         </p:spPr>
         <p:txBody>
           <a:bodyPr>
-            <a:noAutofit/>
+            <a:normAutofit/>
           </a:bodyPr>
           <a:lstStyle/>
           <a:p>
-            <a:pPr marL="495308" indent="-342900" algn="just">
-              <a:lnSpc>
-                <a:spcPct val="107000"/>
-              </a:lnSpc>
-              <a:spcAft>
-                <a:spcPts val="533"/>
-              </a:spcAft>
+            <a:pPr marL="0" indent="0">
+              <a:buNone/>
             </a:pPr>
-            <a:r>
-              <a:rPr lang="pt-BR" sz="2000" dirty="0">
-                <a:ea typeface="Calibri" panose="020F0502020204030204" pitchFamily="34" charset="0"/>
-                <a:cs typeface="Arial" panose="020B0604020202020204" pitchFamily="34" charset="0"/>
-              </a:rPr>
-              <a:t>Movimentação de containers ao longo do ciclo logístico</a:t>
-            </a:r>
+            <a:endParaRPr lang="pt-BR" dirty="0"/>
+          </a:p>
+          <a:p>
+            <a:pPr marL="0" indent="0">
+              <a:buNone/>
+            </a:pPr>
+            <a:endParaRPr lang="pt-BR" dirty="0"/>
           </a:p>
         </p:txBody>
       </p:sp>
       <p:pic>
         <p:nvPicPr>
-          <p:cNvPr id="1026" name="Picture 2" descr="Free photo industrial containers box for logistic import export business.">
-            <a:extLst>
-              <a:ext uri="{FF2B5EF4-FFF2-40B4-BE49-F238E27FC236}">
-                <a16:creationId xmlns:a16="http://schemas.microsoft.com/office/drawing/2014/main" id="{FDC07977-F662-66CB-7534-103E83976919}"/>
+          <p:cNvPr id="8" name="Imagem 7">
+            <a:extLst>
+              <a:ext uri="{FF2B5EF4-FFF2-40B4-BE49-F238E27FC236}">
+                <a16:creationId xmlns:a16="http://schemas.microsoft.com/office/drawing/2014/main" id="{BADF72E0-677F-530E-FE9F-BB8758F23E5A}"/>
               </a:ext>
             </a:extLst>
           </p:cNvPr>
           <p:cNvPicPr>
-            <a:picLocks noChangeAspect="1" noChangeArrowheads="1"/>
+            <a:picLocks noChangeAspect="1"/>
           </p:cNvPicPr>
           <p:nvPr/>
         </p:nvPicPr>
         <p:blipFill>
-          <a:blip r:embed="rId4">
-            <a:extLst>
-              <a:ext uri="{28A0092B-C50C-407E-A947-70E740481C1C}">
-                <a14:useLocalDpi xmlns:a14="http://schemas.microsoft.com/office/drawing/2010/main" val="0"/>
-              </a:ext>
-            </a:extLst>
-          </a:blip>
-          <a:srcRect/>
+          <a:blip r:embed="rId4"/>
           <a:stretch>
             <a:fillRect/>
           </a:stretch>
         </p:blipFill>
-        <p:spPr bwMode="auto">
-          <a:xfrm>
-            <a:off x="2742141" y="1819275"/>
-            <a:ext cx="5962650" cy="3971925"/>
+        <p:spPr>
+          <a:xfrm>
+            <a:off x="3074408" y="1128813"/>
+            <a:ext cx="6043184" cy="5006774"/>
           </a:xfrm>
           <a:prstGeom prst="rect">
             <a:avLst/>
           </a:prstGeom>
-          <a:noFill/>
-          <a:extLst>
-            <a:ext uri="{909E8E84-426E-40DD-AFC4-6F175D3DCCD1}">
-              <a14:hiddenFill xmlns:a14="http://schemas.microsoft.com/office/drawing/2010/main">
-                <a:solidFill>
-                  <a:srgbClr val="FFFFFF"/>
-                </a:solidFill>
-              </a14:hiddenFill>
-            </a:ext>
-          </a:extLst>
         </p:spPr>
       </p:pic>
     </p:spTree>
     <p:extLst>
       <p:ext uri="{BB962C8B-B14F-4D97-AF65-F5344CB8AC3E}">
-        <p14:creationId xmlns:p14="http://schemas.microsoft.com/office/powerpoint/2010/main" val="3900979391"/>
+        <p14:creationId xmlns:p14="http://schemas.microsoft.com/office/powerpoint/2010/main" val="3632233341"/>
       </p:ext>
     </p:extLst>
   </p:cSld>
@@ -18890,36 +19442,12 @@
           </a:bodyPr>
           <a:lstStyle/>
           <a:p>
-            <a:pPr marL="0" marR="0" lvl="0" indent="0" algn="l" defTabSz="609630" rtl="0" eaLnBrk="1" fontAlgn="auto" latinLnBrk="0" hangingPunct="1">
-              <a:lnSpc>
-                <a:spcPct val="100000"/>
-              </a:lnSpc>
-              <a:spcBef>
-                <a:spcPts val="0"/>
-              </a:spcBef>
-              <a:spcAft>
-                <a:spcPts val="0"/>
-              </a:spcAft>
-              <a:buClrTx/>
-              <a:buSzTx/>
-              <a:buFontTx/>
-              <a:buNone/>
-              <a:tabLst/>
-              <a:defRPr/>
-            </a:pPr>
-            <a:endParaRPr kumimoji="0" lang="pt-BR" sz="1200" b="0" i="0" u="none" strike="noStrike" kern="1200" cap="none" spc="0" normalizeH="0" baseline="0" noProof="0">
-              <a:ln>
-                <a:noFill/>
-              </a:ln>
+            <a:pPr defTabSz="609630"/>
+            <a:endParaRPr lang="pt-BR" sz="1200">
               <a:solidFill>
                 <a:prstClr val="black"/>
               </a:solidFill>
-              <a:effectLst/>
-              <a:uLnTx/>
-              <a:uFillTx/>
               <a:latin typeface="Calibri"/>
-              <a:ea typeface="+mn-ea"/>
-              <a:cs typeface="+mn-cs"/>
             </a:endParaRPr>
           </a:p>
         </p:txBody>
@@ -18965,36 +19493,12 @@
           </a:bodyPr>
           <a:lstStyle/>
           <a:p>
-            <a:pPr marL="0" marR="0" lvl="0" indent="0" algn="l" defTabSz="609630" rtl="0" eaLnBrk="1" fontAlgn="auto" latinLnBrk="0" hangingPunct="1">
-              <a:lnSpc>
-                <a:spcPct val="100000"/>
-              </a:lnSpc>
-              <a:spcBef>
-                <a:spcPts val="0"/>
-              </a:spcBef>
-              <a:spcAft>
-                <a:spcPts val="0"/>
-              </a:spcAft>
-              <a:buClrTx/>
-              <a:buSzTx/>
-              <a:buFontTx/>
-              <a:buNone/>
-              <a:tabLst/>
-              <a:defRPr/>
-            </a:pPr>
-            <a:endParaRPr kumimoji="0" lang="pt-BR" sz="1200" b="0" i="0" u="none" strike="noStrike" kern="1200" cap="none" spc="0" normalizeH="0" baseline="0" noProof="0">
-              <a:ln>
-                <a:noFill/>
-              </a:ln>
+            <a:pPr defTabSz="609630"/>
+            <a:endParaRPr lang="pt-BR" sz="1200">
               <a:solidFill>
                 <a:prstClr val="black"/>
               </a:solidFill>
-              <a:effectLst/>
-              <a:uLnTx/>
-              <a:uFillTx/>
               <a:latin typeface="Calibri"/>
-              <a:ea typeface="+mn-ea"/>
-              <a:cs typeface="+mn-cs"/>
             </a:endParaRPr>
           </a:p>
         </p:txBody>
@@ -19004,7 +19508,7 @@
           <p:cNvPr id="4" name="Espaço Reservado para Conteúdo 3">
             <a:extLst>
               <a:ext uri="{FF2B5EF4-FFF2-40B4-BE49-F238E27FC236}">
-                <a16:creationId xmlns:a16="http://schemas.microsoft.com/office/drawing/2014/main" id="{0349BA64-C9D7-4730-9CA9-5C4AD9FC7969}"/>
+                <a16:creationId xmlns:a16="http://schemas.microsoft.com/office/drawing/2014/main" id="{5F1B432F-F570-AEC0-CFFF-C1D9196D7234}"/>
               </a:ext>
             </a:extLst>
           </p:cNvPr>
@@ -19017,181 +19521,63 @@
         </p:nvSpPr>
         <p:spPr>
           <a:xfrm>
-            <a:off x="304800" y="1066800"/>
-            <a:ext cx="9295589" cy="4330419"/>
+            <a:off x="304800" y="1066801"/>
+            <a:ext cx="9810044" cy="2737556"/>
           </a:xfrm>
         </p:spPr>
         <p:txBody>
           <a:bodyPr>
-            <a:noAutofit/>
+            <a:normAutofit/>
           </a:bodyPr>
           <a:lstStyle/>
           <a:p>
-            <a:pPr marL="495308" indent="-342900" algn="just">
-              <a:lnSpc>
-                <a:spcPct val="107000"/>
-              </a:lnSpc>
-              <a:spcAft>
-                <a:spcPts val="533"/>
-              </a:spcAft>
-            </a:pPr>
-            <a:r>
-              <a:rPr lang="pt-BR" sz="2000" dirty="0">
-                <a:ea typeface="Calibri" panose="020F0502020204030204" pitchFamily="34" charset="0"/>
-                <a:cs typeface="Arial" panose="020B0604020202020204" pitchFamily="34" charset="0"/>
-              </a:rPr>
-              <a:t>Movimentação de containers ao longo do ciclo logístico</a:t>
-            </a:r>
-          </a:p>
-          <a:p>
-            <a:pPr marL="152408" indent="0" algn="just">
-              <a:lnSpc>
-                <a:spcPct val="107000"/>
-              </a:lnSpc>
-              <a:spcAft>
-                <a:spcPts val="533"/>
-              </a:spcAft>
+            <a:pPr marL="0" indent="0">
               <a:buNone/>
             </a:pPr>
-            <a:r>
-              <a:rPr lang="pt-BR" sz="2000" dirty="0">
-                <a:ea typeface="Calibri" panose="020F0502020204030204" pitchFamily="34" charset="0"/>
-                <a:cs typeface="Arial" panose="020B0604020202020204" pitchFamily="34" charset="0"/>
-              </a:rPr>
-              <a:t>Classificação de 5 estados do container </a:t>
-            </a:r>
-          </a:p>
-          <a:p>
-            <a:pPr marL="152408" indent="0" algn="just">
-              <a:lnSpc>
-                <a:spcPct val="107000"/>
-              </a:lnSpc>
-              <a:spcAft>
-                <a:spcPts val="533"/>
-              </a:spcAft>
+            <a:endParaRPr lang="pt-BR" dirty="0"/>
+          </a:p>
+          <a:p>
+            <a:pPr marL="0" indent="0">
               <a:buNone/>
             </a:pPr>
-            <a:endParaRPr lang="pt-BR" sz="2000" dirty="0">
-              <a:ea typeface="Calibri" panose="020F0502020204030204" pitchFamily="34" charset="0"/>
-              <a:cs typeface="Arial" panose="020B0604020202020204" pitchFamily="34" charset="0"/>
-            </a:endParaRPr>
-          </a:p>
-          <a:p>
-            <a:pPr marL="495308" indent="-342900" algn="just">
-              <a:lnSpc>
-                <a:spcPct val="107000"/>
-              </a:lnSpc>
-              <a:spcAft>
-                <a:spcPts val="533"/>
-              </a:spcAft>
-            </a:pPr>
-            <a:r>
-              <a:rPr lang="pt-BR" sz="2000" dirty="0">
-                <a:ea typeface="Calibri" panose="020F0502020204030204" pitchFamily="34" charset="0"/>
-                <a:cs typeface="Arial" panose="020B0604020202020204" pitchFamily="34" charset="0"/>
-              </a:rPr>
-              <a:t>Parado</a:t>
-            </a:r>
-          </a:p>
-          <a:p>
-            <a:pPr marL="495308" indent="-342900" algn="just">
-              <a:lnSpc>
-                <a:spcPct val="107000"/>
-              </a:lnSpc>
-              <a:spcAft>
-                <a:spcPts val="533"/>
-              </a:spcAft>
-            </a:pPr>
-            <a:r>
-              <a:rPr lang="pt-BR" sz="2000" dirty="0">
-                <a:ea typeface="Calibri" panose="020F0502020204030204" pitchFamily="34" charset="0"/>
-                <a:cs typeface="Arial" panose="020B0604020202020204" pitchFamily="34" charset="0"/>
-              </a:rPr>
-              <a:t>Sendo erguido</a:t>
-            </a:r>
-          </a:p>
-          <a:p>
-            <a:pPr marL="495308" indent="-342900" algn="just">
-              <a:lnSpc>
-                <a:spcPct val="107000"/>
-              </a:lnSpc>
-              <a:spcAft>
-                <a:spcPts val="533"/>
-              </a:spcAft>
-            </a:pPr>
-            <a:r>
-              <a:rPr lang="pt-BR" sz="2000" dirty="0">
-                <a:ea typeface="Calibri" panose="020F0502020204030204" pitchFamily="34" charset="0"/>
-                <a:cs typeface="Arial" panose="020B0604020202020204" pitchFamily="34" charset="0"/>
-              </a:rPr>
-              <a:t>No mar</a:t>
-            </a:r>
-          </a:p>
-          <a:p>
-            <a:pPr marL="495308" indent="-342900" algn="just">
-              <a:lnSpc>
-                <a:spcPct val="107000"/>
-              </a:lnSpc>
-              <a:spcAft>
-                <a:spcPts val="533"/>
-              </a:spcAft>
-            </a:pPr>
-            <a:r>
-              <a:rPr lang="pt-BR" sz="2000" dirty="0">
-                <a:ea typeface="Calibri" panose="020F0502020204030204" pitchFamily="34" charset="0"/>
-                <a:cs typeface="Arial" panose="020B0604020202020204" pitchFamily="34" charset="0"/>
-              </a:rPr>
-              <a:t>No caminhão</a:t>
-            </a:r>
-          </a:p>
-          <a:p>
-            <a:pPr marL="495308" indent="-342900" algn="just">
-              <a:lnSpc>
-                <a:spcPct val="107000"/>
-              </a:lnSpc>
-              <a:spcAft>
-                <a:spcPts val="533"/>
-              </a:spcAft>
-            </a:pPr>
-            <a:r>
-              <a:rPr lang="pt-BR" sz="2000" dirty="0">
-                <a:solidFill>
-                  <a:srgbClr val="FF0000"/>
-                </a:solidFill>
-                <a:ea typeface="Calibri" panose="020F0502020204030204" pitchFamily="34" charset="0"/>
-                <a:cs typeface="Arial" panose="020B0604020202020204" pitchFamily="34" charset="0"/>
-              </a:rPr>
-              <a:t>Anomalia </a:t>
-            </a:r>
-            <a:r>
-              <a:rPr lang="pt-BR" sz="2000" dirty="0">
-                <a:ea typeface="Calibri" panose="020F0502020204030204" pitchFamily="34" charset="0"/>
-                <a:cs typeface="Arial" panose="020B0604020202020204" pitchFamily="34" charset="0"/>
-              </a:rPr>
-              <a:t>(ex. container caindo no mar, empilhadeira tombando)</a:t>
-            </a:r>
-          </a:p>
-          <a:p>
-            <a:pPr marL="152408" indent="0" algn="just">
-              <a:lnSpc>
-                <a:spcPct val="107000"/>
-              </a:lnSpc>
-              <a:spcAft>
-                <a:spcPts val="533"/>
-              </a:spcAft>
-              <a:buNone/>
-            </a:pPr>
-            <a:endParaRPr lang="pt-BR" sz="2000" dirty="0">
-              <a:ea typeface="Calibri" panose="020F0502020204030204" pitchFamily="34" charset="0"/>
-              <a:cs typeface="Arial" panose="020B0604020202020204" pitchFamily="34" charset="0"/>
-            </a:endParaRPr>
-          </a:p>
-        </p:txBody>
-      </p:sp>
+            <a:endParaRPr lang="pt-BR" dirty="0"/>
+          </a:p>
+        </p:txBody>
+      </p:sp>
+      <p:pic>
+        <p:nvPicPr>
+          <p:cNvPr id="6" name="Imagem 5">
+            <a:extLst>
+              <a:ext uri="{FF2B5EF4-FFF2-40B4-BE49-F238E27FC236}">
+                <a16:creationId xmlns:a16="http://schemas.microsoft.com/office/drawing/2014/main" id="{16764048-7B68-9DB3-0313-F6C9A730F4D8}"/>
+              </a:ext>
+            </a:extLst>
+          </p:cNvPr>
+          <p:cNvPicPr>
+            <a:picLocks noChangeAspect="1"/>
+          </p:cNvPicPr>
+          <p:nvPr/>
+        </p:nvPicPr>
+        <p:blipFill>
+          <a:blip r:embed="rId4"/>
+          <a:stretch>
+            <a:fillRect/>
+          </a:stretch>
+        </p:blipFill>
+        <p:spPr>
+          <a:xfrm>
+            <a:off x="1096847" y="2442124"/>
+            <a:ext cx="9998306" cy="1973751"/>
+          </a:xfrm>
+          <a:prstGeom prst="rect">
+            <a:avLst/>
+          </a:prstGeom>
+        </p:spPr>
+      </p:pic>
     </p:spTree>
     <p:extLst>
       <p:ext uri="{BB962C8B-B14F-4D97-AF65-F5344CB8AC3E}">
-        <p14:creationId xmlns:p14="http://schemas.microsoft.com/office/powerpoint/2010/main" val="3676245301"/>
+        <p14:creationId xmlns:p14="http://schemas.microsoft.com/office/powerpoint/2010/main" val="1993436904"/>
       </p:ext>
     </p:extLst>
   </p:cSld>
@@ -19308,36 +19694,12 @@
           </a:bodyPr>
           <a:lstStyle/>
           <a:p>
-            <a:pPr marL="0" marR="0" lvl="0" indent="0" algn="l" defTabSz="609630" rtl="0" eaLnBrk="1" fontAlgn="auto" latinLnBrk="0" hangingPunct="1">
-              <a:lnSpc>
-                <a:spcPct val="100000"/>
-              </a:lnSpc>
-              <a:spcBef>
-                <a:spcPts val="0"/>
-              </a:spcBef>
-              <a:spcAft>
-                <a:spcPts val="0"/>
-              </a:spcAft>
-              <a:buClrTx/>
-              <a:buSzTx/>
-              <a:buFontTx/>
-              <a:buNone/>
-              <a:tabLst/>
-              <a:defRPr/>
-            </a:pPr>
-            <a:endParaRPr kumimoji="0" lang="pt-BR" sz="1200" b="0" i="0" u="none" strike="noStrike" kern="1200" cap="none" spc="0" normalizeH="0" baseline="0" noProof="0">
-              <a:ln>
-                <a:noFill/>
-              </a:ln>
+            <a:pPr defTabSz="609630"/>
+            <a:endParaRPr lang="pt-BR" sz="1200">
               <a:solidFill>
                 <a:prstClr val="black"/>
               </a:solidFill>
-              <a:effectLst/>
-              <a:uLnTx/>
-              <a:uFillTx/>
               <a:latin typeface="Calibri"/>
-              <a:ea typeface="+mn-ea"/>
-              <a:cs typeface="+mn-cs"/>
             </a:endParaRPr>
           </a:p>
         </p:txBody>
@@ -19383,36 +19745,12 @@
           </a:bodyPr>
           <a:lstStyle/>
           <a:p>
-            <a:pPr marL="0" marR="0" lvl="0" indent="0" algn="l" defTabSz="609630" rtl="0" eaLnBrk="1" fontAlgn="auto" latinLnBrk="0" hangingPunct="1">
-              <a:lnSpc>
-                <a:spcPct val="100000"/>
-              </a:lnSpc>
-              <a:spcBef>
-                <a:spcPts val="0"/>
-              </a:spcBef>
-              <a:spcAft>
-                <a:spcPts val="0"/>
-              </a:spcAft>
-              <a:buClrTx/>
-              <a:buSzTx/>
-              <a:buFontTx/>
-              <a:buNone/>
-              <a:tabLst/>
-              <a:defRPr/>
-            </a:pPr>
-            <a:endParaRPr kumimoji="0" lang="pt-BR" sz="1200" b="0" i="0" u="none" strike="noStrike" kern="1200" cap="none" spc="0" normalizeH="0" baseline="0" noProof="0">
-              <a:ln>
-                <a:noFill/>
-              </a:ln>
+            <a:pPr defTabSz="609630"/>
+            <a:endParaRPr lang="pt-BR" sz="1200">
               <a:solidFill>
                 <a:prstClr val="black"/>
               </a:solidFill>
-              <a:effectLst/>
-              <a:uLnTx/>
-              <a:uFillTx/>
               <a:latin typeface="Calibri"/>
-              <a:ea typeface="+mn-ea"/>
-              <a:cs typeface="+mn-cs"/>
             </a:endParaRPr>
           </a:p>
         </p:txBody>
@@ -19422,7 +19760,7 @@
           <p:cNvPr id="4" name="Espaço Reservado para Conteúdo 3">
             <a:extLst>
               <a:ext uri="{FF2B5EF4-FFF2-40B4-BE49-F238E27FC236}">
-                <a16:creationId xmlns:a16="http://schemas.microsoft.com/office/drawing/2014/main" id="{0349BA64-C9D7-4730-9CA9-5C4AD9FC7969}"/>
+                <a16:creationId xmlns:a16="http://schemas.microsoft.com/office/drawing/2014/main" id="{5F1B432F-F570-AEC0-CFFF-C1D9196D7234}"/>
               </a:ext>
             </a:extLst>
           </p:cNvPr>
@@ -19435,71 +19773,63 @@
         </p:nvSpPr>
         <p:spPr>
           <a:xfrm>
-            <a:off x="304800" y="1066800"/>
-            <a:ext cx="9295589" cy="4330419"/>
+            <a:off x="304800" y="1066801"/>
+            <a:ext cx="9810044" cy="2737556"/>
           </a:xfrm>
         </p:spPr>
         <p:txBody>
           <a:bodyPr>
-            <a:noAutofit/>
+            <a:normAutofit/>
           </a:bodyPr>
           <a:lstStyle/>
           <a:p>
-            <a:pPr marL="152408" indent="0" algn="just">
-              <a:lnSpc>
-                <a:spcPct val="107000"/>
-              </a:lnSpc>
-              <a:spcAft>
-                <a:spcPts val="533"/>
-              </a:spcAft>
+            <a:pPr marL="0" indent="0">
               <a:buNone/>
             </a:pPr>
-            <a:r>
-              <a:rPr lang="pt-BR" sz="2000" dirty="0">
-                <a:ea typeface="Calibri" panose="020F0502020204030204" pitchFamily="34" charset="0"/>
-                <a:cs typeface="Arial" panose="020B0604020202020204" pitchFamily="34" charset="0"/>
-              </a:rPr>
-              <a:t>Trabalho:</a:t>
-            </a:r>
-          </a:p>
-          <a:p>
-            <a:pPr marL="152408" indent="0" algn="just">
-              <a:lnSpc>
-                <a:spcPct val="107000"/>
-              </a:lnSpc>
-              <a:spcAft>
-                <a:spcPts val="533"/>
-              </a:spcAft>
+            <a:endParaRPr lang="pt-BR" dirty="0"/>
+          </a:p>
+          <a:p>
+            <a:pPr marL="0" indent="0">
               <a:buNone/>
             </a:pPr>
-            <a:r>
-              <a:rPr lang="pt-BR" sz="2000" dirty="0">
-                <a:ea typeface="Calibri" panose="020F0502020204030204" pitchFamily="34" charset="0"/>
-                <a:cs typeface="Arial" panose="020B0604020202020204" pitchFamily="34" charset="0"/>
-              </a:rPr>
-              <a:t>Incluir e analisar no </a:t>
-            </a:r>
-            <a:r>
-              <a:rPr lang="pt-BR" sz="2000" dirty="0" err="1">
-                <a:ea typeface="Calibri" panose="020F0502020204030204" pitchFamily="34" charset="0"/>
-                <a:cs typeface="Arial" panose="020B0604020202020204" pitchFamily="34" charset="0"/>
-              </a:rPr>
-              <a:t>edge</a:t>
-            </a:r>
-            <a:r>
-              <a:rPr lang="pt-BR" sz="2000" dirty="0">
-                <a:ea typeface="Calibri" panose="020F0502020204030204" pitchFamily="34" charset="0"/>
-                <a:cs typeface="Arial" panose="020B0604020202020204" pitchFamily="34" charset="0"/>
-              </a:rPr>
-              <a:t> impulse possíveis anomalias nos dados da movimentação da cadeira de rodas pela cabeça.</a:t>
-            </a:r>
-          </a:p>
-        </p:txBody>
-      </p:sp>
+            <a:endParaRPr lang="pt-BR" dirty="0"/>
+          </a:p>
+        </p:txBody>
+      </p:sp>
+      <p:pic>
+        <p:nvPicPr>
+          <p:cNvPr id="8" name="Imagem 7">
+            <a:extLst>
+              <a:ext uri="{FF2B5EF4-FFF2-40B4-BE49-F238E27FC236}">
+                <a16:creationId xmlns:a16="http://schemas.microsoft.com/office/drawing/2014/main" id="{2E186F46-9317-70E2-BDCE-B5031FFAF9EF}"/>
+              </a:ext>
+            </a:extLst>
+          </p:cNvPr>
+          <p:cNvPicPr>
+            <a:picLocks noChangeAspect="1"/>
+          </p:cNvPicPr>
+          <p:nvPr/>
+        </p:nvPicPr>
+        <p:blipFill>
+          <a:blip r:embed="rId4"/>
+          <a:stretch>
+            <a:fillRect/>
+          </a:stretch>
+        </p:blipFill>
+        <p:spPr>
+          <a:xfrm>
+            <a:off x="1127329" y="3327400"/>
+            <a:ext cx="9937341" cy="1798476"/>
+          </a:xfrm>
+          <a:prstGeom prst="rect">
+            <a:avLst/>
+          </a:prstGeom>
+        </p:spPr>
+      </p:pic>
     </p:spTree>
     <p:extLst>
       <p:ext uri="{BB962C8B-B14F-4D97-AF65-F5344CB8AC3E}">
-        <p14:creationId xmlns:p14="http://schemas.microsoft.com/office/powerpoint/2010/main" val="3910318190"/>
+        <p14:creationId xmlns:p14="http://schemas.microsoft.com/office/powerpoint/2010/main" val="708183461"/>
       </p:ext>
     </p:extLst>
   </p:cSld>
@@ -19542,6 +19872,1054 @@
       </p:grpSpPr>
       <p:sp>
         <p:nvSpPr>
+          <p:cNvPr id="2" name="Título 1">
+            <a:extLst>
+              <a:ext uri="{FF2B5EF4-FFF2-40B4-BE49-F238E27FC236}">
+                <a16:creationId xmlns:a16="http://schemas.microsoft.com/office/drawing/2014/main" id="{5F09B89C-3183-4D52-981A-62798DDFF2B8}"/>
+              </a:ext>
+            </a:extLst>
+          </p:cNvPr>
+          <p:cNvSpPr>
+            <a:spLocks noGrp="1"/>
+          </p:cNvSpPr>
+          <p:nvPr>
+            <p:ph type="title"/>
+          </p:nvPr>
+        </p:nvSpPr>
+        <p:spPr>
+          <a:xfrm>
+            <a:off x="304800" y="183092"/>
+            <a:ext cx="6559285" cy="762000"/>
+          </a:xfrm>
+        </p:spPr>
+        <p:txBody>
+          <a:bodyPr>
+            <a:normAutofit/>
+          </a:bodyPr>
+          <a:lstStyle/>
+          <a:p>
+            <a:r>
+              <a:rPr lang="pt-BR" dirty="0"/>
+              <a:t>Detecção de anomalias</a:t>
+            </a:r>
+          </a:p>
+        </p:txBody>
+      </p:sp>
+      <p:sp>
+        <p:nvSpPr>
+          <p:cNvPr id="3" name="AutoShape 2" descr="An example of graph signal reconstruction over wireless sensor network. |  Download Scientific Diagram">
+            <a:extLst>
+              <a:ext uri="{FF2B5EF4-FFF2-40B4-BE49-F238E27FC236}">
+                <a16:creationId xmlns:a16="http://schemas.microsoft.com/office/drawing/2014/main" id="{0166B4DD-D72A-4A54-94A7-2C38133837FD}"/>
+              </a:ext>
+            </a:extLst>
+          </p:cNvPr>
+          <p:cNvSpPr>
+            <a:spLocks noChangeAspect="1" noChangeArrowheads="1"/>
+          </p:cNvSpPr>
+          <p:nvPr/>
+        </p:nvSpPr>
+        <p:spPr bwMode="auto">
+          <a:xfrm>
+            <a:off x="5994400" y="3327400"/>
+            <a:ext cx="203200" cy="203200"/>
+          </a:xfrm>
+          <a:prstGeom prst="rect">
+            <a:avLst/>
+          </a:prstGeom>
+          <a:noFill/>
+          <a:extLst>
+            <a:ext uri="{909E8E84-426E-40DD-AFC4-6F175D3DCCD1}">
+              <a14:hiddenFill xmlns:a14="http://schemas.microsoft.com/office/drawing/2010/main">
+                <a:solidFill>
+                  <a:srgbClr val="FFFFFF"/>
+                </a:solidFill>
+              </a14:hiddenFill>
+            </a:ext>
+          </a:extLst>
+        </p:spPr>
+        <p:txBody>
+          <a:bodyPr vert="horz" wrap="square" lIns="60960" tIns="30480" rIns="60960" bIns="30480" numCol="1" anchor="t" anchorCtr="0" compatLnSpc="1">
+            <a:prstTxWarp prst="textNoShape">
+              <a:avLst/>
+            </a:prstTxWarp>
+          </a:bodyPr>
+          <a:lstStyle/>
+          <a:p>
+            <a:pPr marL="0" marR="0" lvl="0" indent="0" algn="l" defTabSz="609630" rtl="0" eaLnBrk="1" fontAlgn="auto" latinLnBrk="0" hangingPunct="1">
+              <a:lnSpc>
+                <a:spcPct val="100000"/>
+              </a:lnSpc>
+              <a:spcBef>
+                <a:spcPts val="0"/>
+              </a:spcBef>
+              <a:spcAft>
+                <a:spcPts val="0"/>
+              </a:spcAft>
+              <a:buClrTx/>
+              <a:buSzTx/>
+              <a:buFontTx/>
+              <a:buNone/>
+              <a:tabLst/>
+              <a:defRPr/>
+            </a:pPr>
+            <a:endParaRPr kumimoji="0" lang="pt-BR" sz="1200" b="0" i="0" u="none" strike="noStrike" kern="1200" cap="none" spc="0" normalizeH="0" baseline="0" noProof="0">
+              <a:ln>
+                <a:noFill/>
+              </a:ln>
+              <a:solidFill>
+                <a:prstClr val="black"/>
+              </a:solidFill>
+              <a:effectLst/>
+              <a:uLnTx/>
+              <a:uFillTx/>
+              <a:latin typeface="Calibri"/>
+              <a:ea typeface="+mn-ea"/>
+              <a:cs typeface="+mn-cs"/>
+            </a:endParaRPr>
+          </a:p>
+        </p:txBody>
+      </p:sp>
+      <p:sp>
+        <p:nvSpPr>
+          <p:cNvPr id="7" name="AutoShape 4" descr="An example of graph signal reconstruction over wireless sensor network. |  Download Scientific Diagram">
+            <a:extLst>
+              <a:ext uri="{FF2B5EF4-FFF2-40B4-BE49-F238E27FC236}">
+                <a16:creationId xmlns:a16="http://schemas.microsoft.com/office/drawing/2014/main" id="{14C2B67D-81A1-457E-A410-FE4350A3CCA4}"/>
+              </a:ext>
+            </a:extLst>
+          </p:cNvPr>
+          <p:cNvSpPr>
+            <a:spLocks noChangeAspect="1" noChangeArrowheads="1"/>
+          </p:cNvSpPr>
+          <p:nvPr/>
+        </p:nvSpPr>
+        <p:spPr bwMode="auto">
+          <a:xfrm>
+            <a:off x="6096000" y="3429000"/>
+            <a:ext cx="203200" cy="203200"/>
+          </a:xfrm>
+          <a:prstGeom prst="rect">
+            <a:avLst/>
+          </a:prstGeom>
+          <a:noFill/>
+          <a:extLst>
+            <a:ext uri="{909E8E84-426E-40DD-AFC4-6F175D3DCCD1}">
+              <a14:hiddenFill xmlns:a14="http://schemas.microsoft.com/office/drawing/2010/main">
+                <a:solidFill>
+                  <a:srgbClr val="FFFFFF"/>
+                </a:solidFill>
+              </a14:hiddenFill>
+            </a:ext>
+          </a:extLst>
+        </p:spPr>
+        <p:txBody>
+          <a:bodyPr vert="horz" wrap="square" lIns="60960" tIns="30480" rIns="60960" bIns="30480" numCol="1" anchor="t" anchorCtr="0" compatLnSpc="1">
+            <a:prstTxWarp prst="textNoShape">
+              <a:avLst/>
+            </a:prstTxWarp>
+          </a:bodyPr>
+          <a:lstStyle/>
+          <a:p>
+            <a:pPr marL="0" marR="0" lvl="0" indent="0" algn="l" defTabSz="609630" rtl="0" eaLnBrk="1" fontAlgn="auto" latinLnBrk="0" hangingPunct="1">
+              <a:lnSpc>
+                <a:spcPct val="100000"/>
+              </a:lnSpc>
+              <a:spcBef>
+                <a:spcPts val="0"/>
+              </a:spcBef>
+              <a:spcAft>
+                <a:spcPts val="0"/>
+              </a:spcAft>
+              <a:buClrTx/>
+              <a:buSzTx/>
+              <a:buFontTx/>
+              <a:buNone/>
+              <a:tabLst/>
+              <a:defRPr/>
+            </a:pPr>
+            <a:endParaRPr kumimoji="0" lang="pt-BR" sz="1200" b="0" i="0" u="none" strike="noStrike" kern="1200" cap="none" spc="0" normalizeH="0" baseline="0" noProof="0">
+              <a:ln>
+                <a:noFill/>
+              </a:ln>
+              <a:solidFill>
+                <a:prstClr val="black"/>
+              </a:solidFill>
+              <a:effectLst/>
+              <a:uLnTx/>
+              <a:uFillTx/>
+              <a:latin typeface="Calibri"/>
+              <a:ea typeface="+mn-ea"/>
+              <a:cs typeface="+mn-cs"/>
+            </a:endParaRPr>
+          </a:p>
+        </p:txBody>
+      </p:sp>
+      <p:sp>
+        <p:nvSpPr>
+          <p:cNvPr id="4" name="Espaço Reservado para Conteúdo 3">
+            <a:extLst>
+              <a:ext uri="{FF2B5EF4-FFF2-40B4-BE49-F238E27FC236}">
+                <a16:creationId xmlns:a16="http://schemas.microsoft.com/office/drawing/2014/main" id="{0349BA64-C9D7-4730-9CA9-5C4AD9FC7969}"/>
+              </a:ext>
+            </a:extLst>
+          </p:cNvPr>
+          <p:cNvSpPr>
+            <a:spLocks noGrp="1"/>
+          </p:cNvSpPr>
+          <p:nvPr>
+            <p:ph idx="1"/>
+          </p:nvPr>
+        </p:nvSpPr>
+        <p:spPr>
+          <a:xfrm>
+            <a:off x="304800" y="1066800"/>
+            <a:ext cx="9295589" cy="4330419"/>
+          </a:xfrm>
+        </p:spPr>
+        <p:txBody>
+          <a:bodyPr>
+            <a:noAutofit/>
+          </a:bodyPr>
+          <a:lstStyle/>
+          <a:p>
+            <a:pPr marL="495308" indent="-342900" algn="just">
+              <a:lnSpc>
+                <a:spcPct val="107000"/>
+              </a:lnSpc>
+              <a:spcAft>
+                <a:spcPts val="533"/>
+              </a:spcAft>
+            </a:pPr>
+            <a:r>
+              <a:rPr lang="pt-BR" sz="2000" dirty="0">
+                <a:ea typeface="Calibri" panose="020F0502020204030204" pitchFamily="34" charset="0"/>
+                <a:cs typeface="Arial" panose="020B0604020202020204" pitchFamily="34" charset="0"/>
+              </a:rPr>
+              <a:t>Movimentação de containers ao longo do ciclo logístico</a:t>
+            </a:r>
+          </a:p>
+        </p:txBody>
+      </p:sp>
+      <p:pic>
+        <p:nvPicPr>
+          <p:cNvPr id="1026" name="Picture 2" descr="Free photo industrial containers box for logistic import export business.">
+            <a:extLst>
+              <a:ext uri="{FF2B5EF4-FFF2-40B4-BE49-F238E27FC236}">
+                <a16:creationId xmlns:a16="http://schemas.microsoft.com/office/drawing/2014/main" id="{FDC07977-F662-66CB-7534-103E83976919}"/>
+              </a:ext>
+            </a:extLst>
+          </p:cNvPr>
+          <p:cNvPicPr>
+            <a:picLocks noChangeAspect="1" noChangeArrowheads="1"/>
+          </p:cNvPicPr>
+          <p:nvPr/>
+        </p:nvPicPr>
+        <p:blipFill>
+          <a:blip r:embed="rId4">
+            <a:extLst>
+              <a:ext uri="{28A0092B-C50C-407E-A947-70E740481C1C}">
+                <a14:useLocalDpi xmlns:a14="http://schemas.microsoft.com/office/drawing/2010/main" val="0"/>
+              </a:ext>
+            </a:extLst>
+          </a:blip>
+          <a:srcRect/>
+          <a:stretch>
+            <a:fillRect/>
+          </a:stretch>
+        </p:blipFill>
+        <p:spPr bwMode="auto">
+          <a:xfrm>
+            <a:off x="2742141" y="1819275"/>
+            <a:ext cx="5962650" cy="3971925"/>
+          </a:xfrm>
+          <a:prstGeom prst="rect">
+            <a:avLst/>
+          </a:prstGeom>
+          <a:noFill/>
+          <a:extLst>
+            <a:ext uri="{909E8E84-426E-40DD-AFC4-6F175D3DCCD1}">
+              <a14:hiddenFill xmlns:a14="http://schemas.microsoft.com/office/drawing/2010/main">
+                <a:solidFill>
+                  <a:srgbClr val="FFFFFF"/>
+                </a:solidFill>
+              </a14:hiddenFill>
+            </a:ext>
+          </a:extLst>
+        </p:spPr>
+      </p:pic>
+    </p:spTree>
+    <p:extLst>
+      <p:ext uri="{BB962C8B-B14F-4D97-AF65-F5344CB8AC3E}">
+        <p14:creationId xmlns:p14="http://schemas.microsoft.com/office/powerpoint/2010/main" val="3900979391"/>
+      </p:ext>
+    </p:extLst>
+  </p:cSld>
+  <p:clrMapOvr>
+    <a:masterClrMapping/>
+  </p:clrMapOvr>
+</p:sld>
+</file>
+
+<file path=ppt/slides/slide36.xml><?xml version="1.0" encoding="utf-8"?>
+<p:sld xmlns:a="http://schemas.openxmlformats.org/drawingml/2006/main" xmlns:r="http://schemas.openxmlformats.org/officeDocument/2006/relationships" xmlns:p="http://schemas.openxmlformats.org/presentationml/2006/main">
+  <p:cSld>
+    <p:bg>
+      <p:bgPr>
+        <a:blipFill dpi="0" rotWithShape="1">
+          <a:blip r:embed="rId3">
+            <a:lum/>
+          </a:blip>
+          <a:srcRect/>
+          <a:stretch>
+            <a:fillRect/>
+          </a:stretch>
+        </a:blipFill>
+        <a:effectLst/>
+      </p:bgPr>
+    </p:bg>
+    <p:spTree>
+      <p:nvGrpSpPr>
+        <p:cNvPr id="1" name=""/>
+        <p:cNvGrpSpPr/>
+        <p:nvPr/>
+      </p:nvGrpSpPr>
+      <p:grpSpPr>
+        <a:xfrm>
+          <a:off x="0" y="0"/>
+          <a:ext cx="0" cy="0"/>
+          <a:chOff x="0" y="0"/>
+          <a:chExt cx="0" cy="0"/>
+        </a:xfrm>
+      </p:grpSpPr>
+      <p:sp>
+        <p:nvSpPr>
+          <p:cNvPr id="2" name="Título 1">
+            <a:extLst>
+              <a:ext uri="{FF2B5EF4-FFF2-40B4-BE49-F238E27FC236}">
+                <a16:creationId xmlns:a16="http://schemas.microsoft.com/office/drawing/2014/main" id="{5F09B89C-3183-4D52-981A-62798DDFF2B8}"/>
+              </a:ext>
+            </a:extLst>
+          </p:cNvPr>
+          <p:cNvSpPr>
+            <a:spLocks noGrp="1"/>
+          </p:cNvSpPr>
+          <p:nvPr>
+            <p:ph type="title"/>
+          </p:nvPr>
+        </p:nvSpPr>
+        <p:spPr>
+          <a:xfrm>
+            <a:off x="304800" y="183092"/>
+            <a:ext cx="6559285" cy="762000"/>
+          </a:xfrm>
+        </p:spPr>
+        <p:txBody>
+          <a:bodyPr>
+            <a:normAutofit/>
+          </a:bodyPr>
+          <a:lstStyle/>
+          <a:p>
+            <a:r>
+              <a:rPr lang="pt-BR" dirty="0"/>
+              <a:t>Detecção de anomalias</a:t>
+            </a:r>
+          </a:p>
+        </p:txBody>
+      </p:sp>
+      <p:sp>
+        <p:nvSpPr>
+          <p:cNvPr id="3" name="AutoShape 2" descr="An example of graph signal reconstruction over wireless sensor network. |  Download Scientific Diagram">
+            <a:extLst>
+              <a:ext uri="{FF2B5EF4-FFF2-40B4-BE49-F238E27FC236}">
+                <a16:creationId xmlns:a16="http://schemas.microsoft.com/office/drawing/2014/main" id="{0166B4DD-D72A-4A54-94A7-2C38133837FD}"/>
+              </a:ext>
+            </a:extLst>
+          </p:cNvPr>
+          <p:cNvSpPr>
+            <a:spLocks noChangeAspect="1" noChangeArrowheads="1"/>
+          </p:cNvSpPr>
+          <p:nvPr/>
+        </p:nvSpPr>
+        <p:spPr bwMode="auto">
+          <a:xfrm>
+            <a:off x="5994400" y="3327400"/>
+            <a:ext cx="203200" cy="203200"/>
+          </a:xfrm>
+          <a:prstGeom prst="rect">
+            <a:avLst/>
+          </a:prstGeom>
+          <a:noFill/>
+          <a:extLst>
+            <a:ext uri="{909E8E84-426E-40DD-AFC4-6F175D3DCCD1}">
+              <a14:hiddenFill xmlns:a14="http://schemas.microsoft.com/office/drawing/2010/main">
+                <a:solidFill>
+                  <a:srgbClr val="FFFFFF"/>
+                </a:solidFill>
+              </a14:hiddenFill>
+            </a:ext>
+          </a:extLst>
+        </p:spPr>
+        <p:txBody>
+          <a:bodyPr vert="horz" wrap="square" lIns="60960" tIns="30480" rIns="60960" bIns="30480" numCol="1" anchor="t" anchorCtr="0" compatLnSpc="1">
+            <a:prstTxWarp prst="textNoShape">
+              <a:avLst/>
+            </a:prstTxWarp>
+          </a:bodyPr>
+          <a:lstStyle/>
+          <a:p>
+            <a:pPr marL="0" marR="0" lvl="0" indent="0" algn="l" defTabSz="609630" rtl="0" eaLnBrk="1" fontAlgn="auto" latinLnBrk="0" hangingPunct="1">
+              <a:lnSpc>
+                <a:spcPct val="100000"/>
+              </a:lnSpc>
+              <a:spcBef>
+                <a:spcPts val="0"/>
+              </a:spcBef>
+              <a:spcAft>
+                <a:spcPts val="0"/>
+              </a:spcAft>
+              <a:buClrTx/>
+              <a:buSzTx/>
+              <a:buFontTx/>
+              <a:buNone/>
+              <a:tabLst/>
+              <a:defRPr/>
+            </a:pPr>
+            <a:endParaRPr kumimoji="0" lang="pt-BR" sz="1200" b="0" i="0" u="none" strike="noStrike" kern="1200" cap="none" spc="0" normalizeH="0" baseline="0" noProof="0">
+              <a:ln>
+                <a:noFill/>
+              </a:ln>
+              <a:solidFill>
+                <a:prstClr val="black"/>
+              </a:solidFill>
+              <a:effectLst/>
+              <a:uLnTx/>
+              <a:uFillTx/>
+              <a:latin typeface="Calibri"/>
+              <a:ea typeface="+mn-ea"/>
+              <a:cs typeface="+mn-cs"/>
+            </a:endParaRPr>
+          </a:p>
+        </p:txBody>
+      </p:sp>
+      <p:sp>
+        <p:nvSpPr>
+          <p:cNvPr id="7" name="AutoShape 4" descr="An example of graph signal reconstruction over wireless sensor network. |  Download Scientific Diagram">
+            <a:extLst>
+              <a:ext uri="{FF2B5EF4-FFF2-40B4-BE49-F238E27FC236}">
+                <a16:creationId xmlns:a16="http://schemas.microsoft.com/office/drawing/2014/main" id="{14C2B67D-81A1-457E-A410-FE4350A3CCA4}"/>
+              </a:ext>
+            </a:extLst>
+          </p:cNvPr>
+          <p:cNvSpPr>
+            <a:spLocks noChangeAspect="1" noChangeArrowheads="1"/>
+          </p:cNvSpPr>
+          <p:nvPr/>
+        </p:nvSpPr>
+        <p:spPr bwMode="auto">
+          <a:xfrm>
+            <a:off x="6096000" y="3429000"/>
+            <a:ext cx="203200" cy="203200"/>
+          </a:xfrm>
+          <a:prstGeom prst="rect">
+            <a:avLst/>
+          </a:prstGeom>
+          <a:noFill/>
+          <a:extLst>
+            <a:ext uri="{909E8E84-426E-40DD-AFC4-6F175D3DCCD1}">
+              <a14:hiddenFill xmlns:a14="http://schemas.microsoft.com/office/drawing/2010/main">
+                <a:solidFill>
+                  <a:srgbClr val="FFFFFF"/>
+                </a:solidFill>
+              </a14:hiddenFill>
+            </a:ext>
+          </a:extLst>
+        </p:spPr>
+        <p:txBody>
+          <a:bodyPr vert="horz" wrap="square" lIns="60960" tIns="30480" rIns="60960" bIns="30480" numCol="1" anchor="t" anchorCtr="0" compatLnSpc="1">
+            <a:prstTxWarp prst="textNoShape">
+              <a:avLst/>
+            </a:prstTxWarp>
+          </a:bodyPr>
+          <a:lstStyle/>
+          <a:p>
+            <a:pPr marL="0" marR="0" lvl="0" indent="0" algn="l" defTabSz="609630" rtl="0" eaLnBrk="1" fontAlgn="auto" latinLnBrk="0" hangingPunct="1">
+              <a:lnSpc>
+                <a:spcPct val="100000"/>
+              </a:lnSpc>
+              <a:spcBef>
+                <a:spcPts val="0"/>
+              </a:spcBef>
+              <a:spcAft>
+                <a:spcPts val="0"/>
+              </a:spcAft>
+              <a:buClrTx/>
+              <a:buSzTx/>
+              <a:buFontTx/>
+              <a:buNone/>
+              <a:tabLst/>
+              <a:defRPr/>
+            </a:pPr>
+            <a:endParaRPr kumimoji="0" lang="pt-BR" sz="1200" b="0" i="0" u="none" strike="noStrike" kern="1200" cap="none" spc="0" normalizeH="0" baseline="0" noProof="0">
+              <a:ln>
+                <a:noFill/>
+              </a:ln>
+              <a:solidFill>
+                <a:prstClr val="black"/>
+              </a:solidFill>
+              <a:effectLst/>
+              <a:uLnTx/>
+              <a:uFillTx/>
+              <a:latin typeface="Calibri"/>
+              <a:ea typeface="+mn-ea"/>
+              <a:cs typeface="+mn-cs"/>
+            </a:endParaRPr>
+          </a:p>
+        </p:txBody>
+      </p:sp>
+      <p:sp>
+        <p:nvSpPr>
+          <p:cNvPr id="4" name="Espaço Reservado para Conteúdo 3">
+            <a:extLst>
+              <a:ext uri="{FF2B5EF4-FFF2-40B4-BE49-F238E27FC236}">
+                <a16:creationId xmlns:a16="http://schemas.microsoft.com/office/drawing/2014/main" id="{0349BA64-C9D7-4730-9CA9-5C4AD9FC7969}"/>
+              </a:ext>
+            </a:extLst>
+          </p:cNvPr>
+          <p:cNvSpPr>
+            <a:spLocks noGrp="1"/>
+          </p:cNvSpPr>
+          <p:nvPr>
+            <p:ph idx="1"/>
+          </p:nvPr>
+        </p:nvSpPr>
+        <p:spPr>
+          <a:xfrm>
+            <a:off x="304800" y="1066800"/>
+            <a:ext cx="9295589" cy="4330419"/>
+          </a:xfrm>
+        </p:spPr>
+        <p:txBody>
+          <a:bodyPr>
+            <a:noAutofit/>
+          </a:bodyPr>
+          <a:lstStyle/>
+          <a:p>
+            <a:pPr marL="495308" indent="-342900" algn="just">
+              <a:lnSpc>
+                <a:spcPct val="107000"/>
+              </a:lnSpc>
+              <a:spcAft>
+                <a:spcPts val="533"/>
+              </a:spcAft>
+            </a:pPr>
+            <a:r>
+              <a:rPr lang="pt-BR" sz="2000" dirty="0">
+                <a:ea typeface="Calibri" panose="020F0502020204030204" pitchFamily="34" charset="0"/>
+                <a:cs typeface="Arial" panose="020B0604020202020204" pitchFamily="34" charset="0"/>
+              </a:rPr>
+              <a:t>Movimentação de containers ao longo do ciclo logístico</a:t>
+            </a:r>
+          </a:p>
+          <a:p>
+            <a:pPr marL="152408" indent="0" algn="just">
+              <a:lnSpc>
+                <a:spcPct val="107000"/>
+              </a:lnSpc>
+              <a:spcAft>
+                <a:spcPts val="533"/>
+              </a:spcAft>
+              <a:buNone/>
+            </a:pPr>
+            <a:r>
+              <a:rPr lang="pt-BR" sz="2000" dirty="0">
+                <a:ea typeface="Calibri" panose="020F0502020204030204" pitchFamily="34" charset="0"/>
+                <a:cs typeface="Arial" panose="020B0604020202020204" pitchFamily="34" charset="0"/>
+              </a:rPr>
+              <a:t>Classificação de 5 estados do container </a:t>
+            </a:r>
+          </a:p>
+          <a:p>
+            <a:pPr marL="152408" indent="0" algn="just">
+              <a:lnSpc>
+                <a:spcPct val="107000"/>
+              </a:lnSpc>
+              <a:spcAft>
+                <a:spcPts val="533"/>
+              </a:spcAft>
+              <a:buNone/>
+            </a:pPr>
+            <a:endParaRPr lang="pt-BR" sz="2000" dirty="0">
+              <a:ea typeface="Calibri" panose="020F0502020204030204" pitchFamily="34" charset="0"/>
+              <a:cs typeface="Arial" panose="020B0604020202020204" pitchFamily="34" charset="0"/>
+            </a:endParaRPr>
+          </a:p>
+          <a:p>
+            <a:pPr marL="495308" indent="-342900" algn="just">
+              <a:lnSpc>
+                <a:spcPct val="107000"/>
+              </a:lnSpc>
+              <a:spcAft>
+                <a:spcPts val="533"/>
+              </a:spcAft>
+            </a:pPr>
+            <a:r>
+              <a:rPr lang="pt-BR" sz="2000" dirty="0">
+                <a:ea typeface="Calibri" panose="020F0502020204030204" pitchFamily="34" charset="0"/>
+                <a:cs typeface="Arial" panose="020B0604020202020204" pitchFamily="34" charset="0"/>
+              </a:rPr>
+              <a:t>Parado</a:t>
+            </a:r>
+          </a:p>
+          <a:p>
+            <a:pPr marL="495308" indent="-342900" algn="just">
+              <a:lnSpc>
+                <a:spcPct val="107000"/>
+              </a:lnSpc>
+              <a:spcAft>
+                <a:spcPts val="533"/>
+              </a:spcAft>
+            </a:pPr>
+            <a:r>
+              <a:rPr lang="pt-BR" sz="2000" dirty="0">
+                <a:ea typeface="Calibri" panose="020F0502020204030204" pitchFamily="34" charset="0"/>
+                <a:cs typeface="Arial" panose="020B0604020202020204" pitchFamily="34" charset="0"/>
+              </a:rPr>
+              <a:t>Sendo erguido</a:t>
+            </a:r>
+          </a:p>
+          <a:p>
+            <a:pPr marL="495308" indent="-342900" algn="just">
+              <a:lnSpc>
+                <a:spcPct val="107000"/>
+              </a:lnSpc>
+              <a:spcAft>
+                <a:spcPts val="533"/>
+              </a:spcAft>
+            </a:pPr>
+            <a:r>
+              <a:rPr lang="pt-BR" sz="2000" dirty="0">
+                <a:ea typeface="Calibri" panose="020F0502020204030204" pitchFamily="34" charset="0"/>
+                <a:cs typeface="Arial" panose="020B0604020202020204" pitchFamily="34" charset="0"/>
+              </a:rPr>
+              <a:t>No mar</a:t>
+            </a:r>
+          </a:p>
+          <a:p>
+            <a:pPr marL="495308" indent="-342900" algn="just">
+              <a:lnSpc>
+                <a:spcPct val="107000"/>
+              </a:lnSpc>
+              <a:spcAft>
+                <a:spcPts val="533"/>
+              </a:spcAft>
+            </a:pPr>
+            <a:r>
+              <a:rPr lang="pt-BR" sz="2000" dirty="0">
+                <a:ea typeface="Calibri" panose="020F0502020204030204" pitchFamily="34" charset="0"/>
+                <a:cs typeface="Arial" panose="020B0604020202020204" pitchFamily="34" charset="0"/>
+              </a:rPr>
+              <a:t>No caminhão</a:t>
+            </a:r>
+          </a:p>
+          <a:p>
+            <a:pPr marL="495308" indent="-342900" algn="just">
+              <a:lnSpc>
+                <a:spcPct val="107000"/>
+              </a:lnSpc>
+              <a:spcAft>
+                <a:spcPts val="533"/>
+              </a:spcAft>
+            </a:pPr>
+            <a:r>
+              <a:rPr lang="pt-BR" sz="2000" dirty="0">
+                <a:solidFill>
+                  <a:srgbClr val="FF0000"/>
+                </a:solidFill>
+                <a:ea typeface="Calibri" panose="020F0502020204030204" pitchFamily="34" charset="0"/>
+                <a:cs typeface="Arial" panose="020B0604020202020204" pitchFamily="34" charset="0"/>
+              </a:rPr>
+              <a:t>Anomalia </a:t>
+            </a:r>
+            <a:r>
+              <a:rPr lang="pt-BR" sz="2000" dirty="0">
+                <a:ea typeface="Calibri" panose="020F0502020204030204" pitchFamily="34" charset="0"/>
+                <a:cs typeface="Arial" panose="020B0604020202020204" pitchFamily="34" charset="0"/>
+              </a:rPr>
+              <a:t>(ex. container caindo no mar, empilhadeira tombando)</a:t>
+            </a:r>
+          </a:p>
+          <a:p>
+            <a:pPr marL="152408" indent="0" algn="just">
+              <a:lnSpc>
+                <a:spcPct val="107000"/>
+              </a:lnSpc>
+              <a:spcAft>
+                <a:spcPts val="533"/>
+              </a:spcAft>
+              <a:buNone/>
+            </a:pPr>
+            <a:endParaRPr lang="pt-BR" sz="2000" dirty="0">
+              <a:ea typeface="Calibri" panose="020F0502020204030204" pitchFamily="34" charset="0"/>
+              <a:cs typeface="Arial" panose="020B0604020202020204" pitchFamily="34" charset="0"/>
+            </a:endParaRPr>
+          </a:p>
+        </p:txBody>
+      </p:sp>
+    </p:spTree>
+    <p:extLst>
+      <p:ext uri="{BB962C8B-B14F-4D97-AF65-F5344CB8AC3E}">
+        <p14:creationId xmlns:p14="http://schemas.microsoft.com/office/powerpoint/2010/main" val="3676245301"/>
+      </p:ext>
+    </p:extLst>
+  </p:cSld>
+  <p:clrMapOvr>
+    <a:masterClrMapping/>
+  </p:clrMapOvr>
+</p:sld>
+</file>
+
+<file path=ppt/slides/slide37.xml><?xml version="1.0" encoding="utf-8"?>
+<p:sld xmlns:a="http://schemas.openxmlformats.org/drawingml/2006/main" xmlns:r="http://schemas.openxmlformats.org/officeDocument/2006/relationships" xmlns:p="http://schemas.openxmlformats.org/presentationml/2006/main">
+  <p:cSld>
+    <p:bg>
+      <p:bgPr>
+        <a:blipFill dpi="0" rotWithShape="1">
+          <a:blip r:embed="rId3">
+            <a:lum/>
+          </a:blip>
+          <a:srcRect/>
+          <a:stretch>
+            <a:fillRect/>
+          </a:stretch>
+        </a:blipFill>
+        <a:effectLst/>
+      </p:bgPr>
+    </p:bg>
+    <p:spTree>
+      <p:nvGrpSpPr>
+        <p:cNvPr id="1" name=""/>
+        <p:cNvGrpSpPr/>
+        <p:nvPr/>
+      </p:nvGrpSpPr>
+      <p:grpSpPr>
+        <a:xfrm>
+          <a:off x="0" y="0"/>
+          <a:ext cx="0" cy="0"/>
+          <a:chOff x="0" y="0"/>
+          <a:chExt cx="0" cy="0"/>
+        </a:xfrm>
+      </p:grpSpPr>
+      <p:sp>
+        <p:nvSpPr>
+          <p:cNvPr id="2" name="Título 1">
+            <a:extLst>
+              <a:ext uri="{FF2B5EF4-FFF2-40B4-BE49-F238E27FC236}">
+                <a16:creationId xmlns:a16="http://schemas.microsoft.com/office/drawing/2014/main" id="{5F09B89C-3183-4D52-981A-62798DDFF2B8}"/>
+              </a:ext>
+            </a:extLst>
+          </p:cNvPr>
+          <p:cNvSpPr>
+            <a:spLocks noGrp="1"/>
+          </p:cNvSpPr>
+          <p:nvPr>
+            <p:ph type="title"/>
+          </p:nvPr>
+        </p:nvSpPr>
+        <p:spPr>
+          <a:xfrm>
+            <a:off x="304800" y="183092"/>
+            <a:ext cx="6559285" cy="762000"/>
+          </a:xfrm>
+        </p:spPr>
+        <p:txBody>
+          <a:bodyPr>
+            <a:normAutofit/>
+          </a:bodyPr>
+          <a:lstStyle/>
+          <a:p>
+            <a:r>
+              <a:rPr lang="pt-BR" dirty="0"/>
+              <a:t>Detecção de anomalias</a:t>
+            </a:r>
+          </a:p>
+        </p:txBody>
+      </p:sp>
+      <p:sp>
+        <p:nvSpPr>
+          <p:cNvPr id="3" name="AutoShape 2" descr="An example of graph signal reconstruction over wireless sensor network. |  Download Scientific Diagram">
+            <a:extLst>
+              <a:ext uri="{FF2B5EF4-FFF2-40B4-BE49-F238E27FC236}">
+                <a16:creationId xmlns:a16="http://schemas.microsoft.com/office/drawing/2014/main" id="{0166B4DD-D72A-4A54-94A7-2C38133837FD}"/>
+              </a:ext>
+            </a:extLst>
+          </p:cNvPr>
+          <p:cNvSpPr>
+            <a:spLocks noChangeAspect="1" noChangeArrowheads="1"/>
+          </p:cNvSpPr>
+          <p:nvPr/>
+        </p:nvSpPr>
+        <p:spPr bwMode="auto">
+          <a:xfrm>
+            <a:off x="5994400" y="3327400"/>
+            <a:ext cx="203200" cy="203200"/>
+          </a:xfrm>
+          <a:prstGeom prst="rect">
+            <a:avLst/>
+          </a:prstGeom>
+          <a:noFill/>
+          <a:extLst>
+            <a:ext uri="{909E8E84-426E-40DD-AFC4-6F175D3DCCD1}">
+              <a14:hiddenFill xmlns:a14="http://schemas.microsoft.com/office/drawing/2010/main">
+                <a:solidFill>
+                  <a:srgbClr val="FFFFFF"/>
+                </a:solidFill>
+              </a14:hiddenFill>
+            </a:ext>
+          </a:extLst>
+        </p:spPr>
+        <p:txBody>
+          <a:bodyPr vert="horz" wrap="square" lIns="60960" tIns="30480" rIns="60960" bIns="30480" numCol="1" anchor="t" anchorCtr="0" compatLnSpc="1">
+            <a:prstTxWarp prst="textNoShape">
+              <a:avLst/>
+            </a:prstTxWarp>
+          </a:bodyPr>
+          <a:lstStyle/>
+          <a:p>
+            <a:pPr marL="0" marR="0" lvl="0" indent="0" algn="l" defTabSz="609630" rtl="0" eaLnBrk="1" fontAlgn="auto" latinLnBrk="0" hangingPunct="1">
+              <a:lnSpc>
+                <a:spcPct val="100000"/>
+              </a:lnSpc>
+              <a:spcBef>
+                <a:spcPts val="0"/>
+              </a:spcBef>
+              <a:spcAft>
+                <a:spcPts val="0"/>
+              </a:spcAft>
+              <a:buClrTx/>
+              <a:buSzTx/>
+              <a:buFontTx/>
+              <a:buNone/>
+              <a:tabLst/>
+              <a:defRPr/>
+            </a:pPr>
+            <a:endParaRPr kumimoji="0" lang="pt-BR" sz="1200" b="0" i="0" u="none" strike="noStrike" kern="1200" cap="none" spc="0" normalizeH="0" baseline="0" noProof="0">
+              <a:ln>
+                <a:noFill/>
+              </a:ln>
+              <a:solidFill>
+                <a:prstClr val="black"/>
+              </a:solidFill>
+              <a:effectLst/>
+              <a:uLnTx/>
+              <a:uFillTx/>
+              <a:latin typeface="Calibri"/>
+              <a:ea typeface="+mn-ea"/>
+              <a:cs typeface="+mn-cs"/>
+            </a:endParaRPr>
+          </a:p>
+        </p:txBody>
+      </p:sp>
+      <p:sp>
+        <p:nvSpPr>
+          <p:cNvPr id="7" name="AutoShape 4" descr="An example of graph signal reconstruction over wireless sensor network. |  Download Scientific Diagram">
+            <a:extLst>
+              <a:ext uri="{FF2B5EF4-FFF2-40B4-BE49-F238E27FC236}">
+                <a16:creationId xmlns:a16="http://schemas.microsoft.com/office/drawing/2014/main" id="{14C2B67D-81A1-457E-A410-FE4350A3CCA4}"/>
+              </a:ext>
+            </a:extLst>
+          </p:cNvPr>
+          <p:cNvSpPr>
+            <a:spLocks noChangeAspect="1" noChangeArrowheads="1"/>
+          </p:cNvSpPr>
+          <p:nvPr/>
+        </p:nvSpPr>
+        <p:spPr bwMode="auto">
+          <a:xfrm>
+            <a:off x="6096000" y="3429000"/>
+            <a:ext cx="203200" cy="203200"/>
+          </a:xfrm>
+          <a:prstGeom prst="rect">
+            <a:avLst/>
+          </a:prstGeom>
+          <a:noFill/>
+          <a:extLst>
+            <a:ext uri="{909E8E84-426E-40DD-AFC4-6F175D3DCCD1}">
+              <a14:hiddenFill xmlns:a14="http://schemas.microsoft.com/office/drawing/2010/main">
+                <a:solidFill>
+                  <a:srgbClr val="FFFFFF"/>
+                </a:solidFill>
+              </a14:hiddenFill>
+            </a:ext>
+          </a:extLst>
+        </p:spPr>
+        <p:txBody>
+          <a:bodyPr vert="horz" wrap="square" lIns="60960" tIns="30480" rIns="60960" bIns="30480" numCol="1" anchor="t" anchorCtr="0" compatLnSpc="1">
+            <a:prstTxWarp prst="textNoShape">
+              <a:avLst/>
+            </a:prstTxWarp>
+          </a:bodyPr>
+          <a:lstStyle/>
+          <a:p>
+            <a:pPr marL="0" marR="0" lvl="0" indent="0" algn="l" defTabSz="609630" rtl="0" eaLnBrk="1" fontAlgn="auto" latinLnBrk="0" hangingPunct="1">
+              <a:lnSpc>
+                <a:spcPct val="100000"/>
+              </a:lnSpc>
+              <a:spcBef>
+                <a:spcPts val="0"/>
+              </a:spcBef>
+              <a:spcAft>
+                <a:spcPts val="0"/>
+              </a:spcAft>
+              <a:buClrTx/>
+              <a:buSzTx/>
+              <a:buFontTx/>
+              <a:buNone/>
+              <a:tabLst/>
+              <a:defRPr/>
+            </a:pPr>
+            <a:endParaRPr kumimoji="0" lang="pt-BR" sz="1200" b="0" i="0" u="none" strike="noStrike" kern="1200" cap="none" spc="0" normalizeH="0" baseline="0" noProof="0">
+              <a:ln>
+                <a:noFill/>
+              </a:ln>
+              <a:solidFill>
+                <a:prstClr val="black"/>
+              </a:solidFill>
+              <a:effectLst/>
+              <a:uLnTx/>
+              <a:uFillTx/>
+              <a:latin typeface="Calibri"/>
+              <a:ea typeface="+mn-ea"/>
+              <a:cs typeface="+mn-cs"/>
+            </a:endParaRPr>
+          </a:p>
+        </p:txBody>
+      </p:sp>
+      <p:sp>
+        <p:nvSpPr>
+          <p:cNvPr id="4" name="Espaço Reservado para Conteúdo 3">
+            <a:extLst>
+              <a:ext uri="{FF2B5EF4-FFF2-40B4-BE49-F238E27FC236}">
+                <a16:creationId xmlns:a16="http://schemas.microsoft.com/office/drawing/2014/main" id="{0349BA64-C9D7-4730-9CA9-5C4AD9FC7969}"/>
+              </a:ext>
+            </a:extLst>
+          </p:cNvPr>
+          <p:cNvSpPr>
+            <a:spLocks noGrp="1"/>
+          </p:cNvSpPr>
+          <p:nvPr>
+            <p:ph idx="1"/>
+          </p:nvPr>
+        </p:nvSpPr>
+        <p:spPr>
+          <a:xfrm>
+            <a:off x="304800" y="1066800"/>
+            <a:ext cx="9295589" cy="4330419"/>
+          </a:xfrm>
+        </p:spPr>
+        <p:txBody>
+          <a:bodyPr>
+            <a:noAutofit/>
+          </a:bodyPr>
+          <a:lstStyle/>
+          <a:p>
+            <a:pPr marL="152408" indent="0" algn="just">
+              <a:lnSpc>
+                <a:spcPct val="107000"/>
+              </a:lnSpc>
+              <a:spcAft>
+                <a:spcPts val="533"/>
+              </a:spcAft>
+              <a:buNone/>
+            </a:pPr>
+            <a:r>
+              <a:rPr lang="pt-BR" sz="2000" dirty="0">
+                <a:ea typeface="Calibri" panose="020F0502020204030204" pitchFamily="34" charset="0"/>
+                <a:cs typeface="Arial" panose="020B0604020202020204" pitchFamily="34" charset="0"/>
+              </a:rPr>
+              <a:t>Trabalho:</a:t>
+            </a:r>
+          </a:p>
+          <a:p>
+            <a:pPr marL="152408" indent="0" algn="just">
+              <a:lnSpc>
+                <a:spcPct val="107000"/>
+              </a:lnSpc>
+              <a:spcAft>
+                <a:spcPts val="533"/>
+              </a:spcAft>
+              <a:buNone/>
+            </a:pPr>
+            <a:r>
+              <a:rPr lang="pt-BR" sz="2000" dirty="0">
+                <a:ea typeface="Calibri" panose="020F0502020204030204" pitchFamily="34" charset="0"/>
+                <a:cs typeface="Arial" panose="020B0604020202020204" pitchFamily="34" charset="0"/>
+              </a:rPr>
+              <a:t>Incluir e analisar no </a:t>
+            </a:r>
+            <a:r>
+              <a:rPr lang="pt-BR" sz="2000" dirty="0" err="1">
+                <a:ea typeface="Calibri" panose="020F0502020204030204" pitchFamily="34" charset="0"/>
+                <a:cs typeface="Arial" panose="020B0604020202020204" pitchFamily="34" charset="0"/>
+              </a:rPr>
+              <a:t>edge</a:t>
+            </a:r>
+            <a:r>
+              <a:rPr lang="pt-BR" sz="2000" dirty="0">
+                <a:ea typeface="Calibri" panose="020F0502020204030204" pitchFamily="34" charset="0"/>
+                <a:cs typeface="Arial" panose="020B0604020202020204" pitchFamily="34" charset="0"/>
+              </a:rPr>
+              <a:t> impulse possíveis anomalias nos dados da movimentação da cadeira de rodas pela cabeça.</a:t>
+            </a:r>
+          </a:p>
+        </p:txBody>
+      </p:sp>
+    </p:spTree>
+    <p:extLst>
+      <p:ext uri="{BB962C8B-B14F-4D97-AF65-F5344CB8AC3E}">
+        <p14:creationId xmlns:p14="http://schemas.microsoft.com/office/powerpoint/2010/main" val="3910318190"/>
+      </p:ext>
+    </p:extLst>
+  </p:cSld>
+  <p:clrMapOvr>
+    <a:masterClrMapping/>
+  </p:clrMapOvr>
+</p:sld>
+</file>
+
+<file path=ppt/slides/slide38.xml><?xml version="1.0" encoding="utf-8"?>
+<p:sld xmlns:a="http://schemas.openxmlformats.org/drawingml/2006/main" xmlns:r="http://schemas.openxmlformats.org/officeDocument/2006/relationships" xmlns:p="http://schemas.openxmlformats.org/presentationml/2006/main">
+  <p:cSld>
+    <p:bg>
+      <p:bgPr>
+        <a:blipFill dpi="0" rotWithShape="1">
+          <a:blip r:embed="rId3">
+            <a:lum/>
+          </a:blip>
+          <a:srcRect/>
+          <a:stretch>
+            <a:fillRect/>
+          </a:stretch>
+        </a:blipFill>
+        <a:effectLst/>
+      </p:bgPr>
+    </p:bg>
+    <p:spTree>
+      <p:nvGrpSpPr>
+        <p:cNvPr id="1" name=""/>
+        <p:cNvGrpSpPr/>
+        <p:nvPr/>
+      </p:nvGrpSpPr>
+      <p:grpSpPr>
+        <a:xfrm>
+          <a:off x="0" y="0"/>
+          <a:ext cx="0" cy="0"/>
+          <a:chOff x="0" y="0"/>
+          <a:chExt cx="0" cy="0"/>
+        </a:xfrm>
+      </p:grpSpPr>
+      <p:sp>
+        <p:nvSpPr>
           <p:cNvPr id="3" name="AutoShape 2" descr="An example of graph signal reconstruction over wireless sensor network. |  Download Scientific Diagram">
             <a:extLst>
               <a:ext uri="{FF2B5EF4-FFF2-40B4-BE49-F238E27FC236}">
@@ -19829,7 +21207,13 @@
     </p:bg>
     <p:spTree>
       <p:nvGrpSpPr>
-        <p:cNvPr id="1" name=""/>
+        <p:cNvPr id="1" name="">
+          <a:extLst>
+            <a:ext uri="{FF2B5EF4-FFF2-40B4-BE49-F238E27FC236}">
+              <a16:creationId xmlns:a16="http://schemas.microsoft.com/office/drawing/2014/main" id="{98BB9CFE-6A1E-773F-748F-0B1511B0C33C}"/>
+            </a:ext>
+          </a:extLst>
+        </p:cNvPr>
         <p:cNvGrpSpPr/>
         <p:nvPr/>
       </p:nvGrpSpPr>
@@ -19846,7 +21230,7 @@
           <p:cNvPr id="2" name="Título 1">
             <a:extLst>
               <a:ext uri="{FF2B5EF4-FFF2-40B4-BE49-F238E27FC236}">
-                <a16:creationId xmlns:a16="http://schemas.microsoft.com/office/drawing/2014/main" id="{5F09B89C-3183-4D52-981A-62798DDFF2B8}"/>
+                <a16:creationId xmlns:a16="http://schemas.microsoft.com/office/drawing/2014/main" id="{D6AE7C36-1A69-455D-9B3F-CE6A188B67D2}"/>
               </a:ext>
             </a:extLst>
           </p:cNvPr>
@@ -19881,7 +21265,7 @@
           <p:cNvPr id="3" name="AutoShape 2" descr="An example of graph signal reconstruction over wireless sensor network. |  Download Scientific Diagram">
             <a:extLst>
               <a:ext uri="{FF2B5EF4-FFF2-40B4-BE49-F238E27FC236}">
-                <a16:creationId xmlns:a16="http://schemas.microsoft.com/office/drawing/2014/main" id="{0166B4DD-D72A-4A54-94A7-2C38133837FD}"/>
+                <a16:creationId xmlns:a16="http://schemas.microsoft.com/office/drawing/2014/main" id="{A70C22B8-A518-637D-8E29-4AD8BA96F2E5}"/>
               </a:ext>
             </a:extLst>
           </p:cNvPr>
@@ -19932,7 +21316,7 @@
           <p:cNvPr id="7" name="AutoShape 4" descr="An example of graph signal reconstruction over wireless sensor network. |  Download Scientific Diagram">
             <a:extLst>
               <a:ext uri="{FF2B5EF4-FFF2-40B4-BE49-F238E27FC236}">
-                <a16:creationId xmlns:a16="http://schemas.microsoft.com/office/drawing/2014/main" id="{14C2B67D-81A1-457E-A410-FE4350A3CCA4}"/>
+                <a16:creationId xmlns:a16="http://schemas.microsoft.com/office/drawing/2014/main" id="{9DDBA47E-08FA-1589-A6B0-D175C8DB3870}"/>
               </a:ext>
             </a:extLst>
           </p:cNvPr>
@@ -19983,7 +21367,7 @@
           <p:cNvPr id="4" name="Espaço Reservado para Conteúdo 3">
             <a:extLst>
               <a:ext uri="{FF2B5EF4-FFF2-40B4-BE49-F238E27FC236}">
-                <a16:creationId xmlns:a16="http://schemas.microsoft.com/office/drawing/2014/main" id="{5F1B432F-F570-AEC0-CFFF-C1D9196D7234}"/>
+                <a16:creationId xmlns:a16="http://schemas.microsoft.com/office/drawing/2014/main" id="{3EC2F8FC-0419-713D-914B-351007B70198}"/>
               </a:ext>
             </a:extLst>
           </p:cNvPr>
@@ -19996,38 +21380,41 @@
         </p:nvSpPr>
         <p:spPr>
           <a:xfrm>
-            <a:off x="304800" y="1066801"/>
-            <a:ext cx="9810044" cy="2737556"/>
+            <a:off x="304799" y="1066801"/>
+            <a:ext cx="10783615" cy="2737556"/>
           </a:xfrm>
         </p:spPr>
         <p:txBody>
           <a:bodyPr/>
           <a:lstStyle/>
+          <a:p>
+            <a:r>
+              <a:rPr lang="pt-BR" dirty="0"/>
+              <a:t>Aprendizado não supervisionado</a:t>
+            </a:r>
+          </a:p>
+          <a:p>
+            <a:endParaRPr lang="pt-BR" dirty="0"/>
+          </a:p>
           <a:p>
             <a:pPr marL="0" indent="0">
               <a:buNone/>
             </a:pPr>
             <a:r>
               <a:rPr lang="pt-BR" dirty="0"/>
-              <a:t>Aprendizado não supervisionado</a:t>
-            </a:r>
-          </a:p>
-          <a:p>
-            <a:pPr marL="0" indent="0">
-              <a:buNone/>
-            </a:pPr>
-            <a:endParaRPr lang="pt-BR" dirty="0"/>
-          </a:p>
-          <a:p>
+              <a:t>Em geral, detecção de anomalias é feita com modelos de </a:t>
+            </a:r>
+            <a:r>
+              <a:rPr lang="pt-BR" b="1" i="1" dirty="0">
+                <a:solidFill>
+                  <a:srgbClr val="FF0000"/>
+                </a:solidFill>
+              </a:rPr>
+              <a:t>aprendizado não-supervisionado</a:t>
+            </a:r>
             <a:r>
               <a:rPr lang="pt-BR" dirty="0"/>
-              <a:t>O aprendizado não supervisionado, também conhecido como aprendizado de máquina não supervisionado, usa algoritmos de aprendizado de máquina para analisar e agrupar conjuntos de dados não rotulados. </a:t>
-            </a:r>
-          </a:p>
-          <a:p>
-            <a:r>
-              <a:rPr lang="pt-BR" dirty="0"/>
-              <a:t>Esses algoritmos descobrem padrões ocultos ou agrupamentos de dados sem a necessidade de intervenção humana.</a:t>
+              <a:t>.</a:t>
             </a:r>
           </a:p>
         </p:txBody>
@@ -20035,7 +21422,7 @@
     </p:spTree>
     <p:extLst>
       <p:ext uri="{BB962C8B-B14F-4D97-AF65-F5344CB8AC3E}">
-        <p14:creationId xmlns:p14="http://schemas.microsoft.com/office/powerpoint/2010/main" val="1681526059"/>
+        <p14:creationId xmlns:p14="http://schemas.microsoft.com/office/powerpoint/2010/main" val="2913236058"/>
       </p:ext>
     </p:extLst>
   </p:cSld>
@@ -20064,7 +21451,13 @@
     </p:bg>
     <p:spTree>
       <p:nvGrpSpPr>
-        <p:cNvPr id="1" name=""/>
+        <p:cNvPr id="1" name="">
+          <a:extLst>
+            <a:ext uri="{FF2B5EF4-FFF2-40B4-BE49-F238E27FC236}">
+              <a16:creationId xmlns:a16="http://schemas.microsoft.com/office/drawing/2014/main" id="{4BEE645A-2B34-7E0A-B495-9E08115C114F}"/>
+            </a:ext>
+          </a:extLst>
+        </p:cNvPr>
         <p:cNvGrpSpPr/>
         <p:nvPr/>
       </p:nvGrpSpPr>
@@ -20081,7 +21474,7 @@
           <p:cNvPr id="2" name="Título 1">
             <a:extLst>
               <a:ext uri="{FF2B5EF4-FFF2-40B4-BE49-F238E27FC236}">
-                <a16:creationId xmlns:a16="http://schemas.microsoft.com/office/drawing/2014/main" id="{5F09B89C-3183-4D52-981A-62798DDFF2B8}"/>
+                <a16:creationId xmlns:a16="http://schemas.microsoft.com/office/drawing/2014/main" id="{6830007A-DB4C-2A4F-4BEA-C99F6D3A48A1}"/>
               </a:ext>
             </a:extLst>
           </p:cNvPr>
@@ -20116,7 +21509,7 @@
           <p:cNvPr id="3" name="AutoShape 2" descr="An example of graph signal reconstruction over wireless sensor network. |  Download Scientific Diagram">
             <a:extLst>
               <a:ext uri="{FF2B5EF4-FFF2-40B4-BE49-F238E27FC236}">
-                <a16:creationId xmlns:a16="http://schemas.microsoft.com/office/drawing/2014/main" id="{0166B4DD-D72A-4A54-94A7-2C38133837FD}"/>
+                <a16:creationId xmlns:a16="http://schemas.microsoft.com/office/drawing/2014/main" id="{6D0996EA-75F6-5DB3-31CE-34545741D699}"/>
               </a:ext>
             </a:extLst>
           </p:cNvPr>
@@ -20167,7 +21560,7 @@
           <p:cNvPr id="7" name="AutoShape 4" descr="An example of graph signal reconstruction over wireless sensor network. |  Download Scientific Diagram">
             <a:extLst>
               <a:ext uri="{FF2B5EF4-FFF2-40B4-BE49-F238E27FC236}">
-                <a16:creationId xmlns:a16="http://schemas.microsoft.com/office/drawing/2014/main" id="{14C2B67D-81A1-457E-A410-FE4350A3CCA4}"/>
+                <a16:creationId xmlns:a16="http://schemas.microsoft.com/office/drawing/2014/main" id="{03DF04D3-3E62-0CE8-4BAE-3E988ACCB20B}"/>
               </a:ext>
             </a:extLst>
           </p:cNvPr>
@@ -20218,7 +21611,7 @@
           <p:cNvPr id="4" name="Espaço Reservado para Conteúdo 3">
             <a:extLst>
               <a:ext uri="{FF2B5EF4-FFF2-40B4-BE49-F238E27FC236}">
-                <a16:creationId xmlns:a16="http://schemas.microsoft.com/office/drawing/2014/main" id="{5F1B432F-F570-AEC0-CFFF-C1D9196D7234}"/>
+                <a16:creationId xmlns:a16="http://schemas.microsoft.com/office/drawing/2014/main" id="{0E15BC1C-3221-26E6-2166-E19D2A6E48B6}"/>
               </a:ext>
             </a:extLst>
           </p:cNvPr>
@@ -20231,134 +21624,30 @@
         </p:nvSpPr>
         <p:spPr>
           <a:xfrm>
-            <a:off x="304800" y="1066801"/>
-            <a:ext cx="9810044" cy="2737556"/>
-          </a:xfrm>
-        </p:spPr>
-        <p:txBody>
-          <a:bodyPr/>
-          <a:lstStyle/>
-          <a:p>
-            <a:pPr marL="0" indent="0">
+            <a:off x="2170385" y="2565400"/>
+            <a:ext cx="7131270" cy="1890986"/>
+          </a:xfrm>
+        </p:spPr>
+        <p:txBody>
+          <a:bodyPr>
+            <a:noAutofit/>
+          </a:bodyPr>
+          <a:lstStyle/>
+          <a:p>
+            <a:pPr marL="0" indent="0" algn="ctr">
               <a:buNone/>
             </a:pPr>
             <a:r>
-              <a:rPr lang="pt-BR" dirty="0"/>
-              <a:t>Aprendizado supervisionado versus não supervisionado</a:t>
-            </a:r>
-          </a:p>
-          <a:p>
-            <a:pPr marL="0" indent="0">
-              <a:buNone/>
-            </a:pPr>
-            <a:endParaRPr lang="pt-BR" dirty="0"/>
-          </a:p>
-          <a:p>
-            <a:pPr marL="0" indent="0">
-              <a:buNone/>
-            </a:pPr>
-            <a:endParaRPr lang="pt-BR" dirty="0"/>
-          </a:p>
-        </p:txBody>
-      </p:sp>
-      <p:pic>
-        <p:nvPicPr>
-          <p:cNvPr id="3074" name="Picture 2" descr="Unsupervised machine learning">
-            <a:extLst>
-              <a:ext uri="{FF2B5EF4-FFF2-40B4-BE49-F238E27FC236}">
-                <a16:creationId xmlns:a16="http://schemas.microsoft.com/office/drawing/2014/main" id="{9C9BB3FA-B234-195B-6E78-1F5F1A0B5DD5}"/>
-              </a:ext>
-            </a:extLst>
-          </p:cNvPr>
-          <p:cNvPicPr>
-            <a:picLocks noChangeAspect="1" noChangeArrowheads="1"/>
-          </p:cNvPicPr>
-          <p:nvPr/>
-        </p:nvPicPr>
-        <p:blipFill>
-          <a:blip r:embed="rId4">
-            <a:extLst>
-              <a:ext uri="{28A0092B-C50C-407E-A947-70E740481C1C}">
-                <a14:useLocalDpi xmlns:a14="http://schemas.microsoft.com/office/drawing/2010/main" val="0"/>
-              </a:ext>
-            </a:extLst>
-          </a:blip>
-          <a:srcRect/>
-          <a:stretch>
-            <a:fillRect/>
-          </a:stretch>
-        </p:blipFill>
-        <p:spPr bwMode="auto">
-          <a:xfrm>
-            <a:off x="2410947" y="4393301"/>
-            <a:ext cx="6371808" cy="2433132"/>
-          </a:xfrm>
-          <a:prstGeom prst="rect">
-            <a:avLst/>
-          </a:prstGeom>
-          <a:noFill/>
-          <a:extLst>
-            <a:ext uri="{909E8E84-426E-40DD-AFC4-6F175D3DCCD1}">
-              <a14:hiddenFill xmlns:a14="http://schemas.microsoft.com/office/drawing/2010/main">
-                <a:solidFill>
-                  <a:srgbClr val="FFFFFF"/>
-                </a:solidFill>
-              </a14:hiddenFill>
-            </a:ext>
-          </a:extLst>
-        </p:spPr>
-      </p:pic>
-      <p:pic>
-        <p:nvPicPr>
-          <p:cNvPr id="3076" name="Picture 4" descr="Supervised machine learning">
-            <a:extLst>
-              <a:ext uri="{FF2B5EF4-FFF2-40B4-BE49-F238E27FC236}">
-                <a16:creationId xmlns:a16="http://schemas.microsoft.com/office/drawing/2014/main" id="{85D641D0-2AF2-0E0D-20E1-BE0FB83D483A}"/>
-              </a:ext>
-            </a:extLst>
-          </p:cNvPr>
-          <p:cNvPicPr>
-            <a:picLocks noChangeAspect="1" noChangeArrowheads="1"/>
-          </p:cNvPicPr>
-          <p:nvPr/>
-        </p:nvPicPr>
-        <p:blipFill>
-          <a:blip r:embed="rId5">
-            <a:extLst>
-              <a:ext uri="{28A0092B-C50C-407E-A947-70E740481C1C}">
-                <a14:useLocalDpi xmlns:a14="http://schemas.microsoft.com/office/drawing/2010/main" val="0"/>
-              </a:ext>
-            </a:extLst>
-          </a:blip>
-          <a:srcRect/>
-          <a:stretch>
-            <a:fillRect/>
-          </a:stretch>
-        </p:blipFill>
-        <p:spPr bwMode="auto">
-          <a:xfrm>
-            <a:off x="2496457" y="1623490"/>
-            <a:ext cx="5787974" cy="2737556"/>
-          </a:xfrm>
-          <a:prstGeom prst="rect">
-            <a:avLst/>
-          </a:prstGeom>
-          <a:noFill/>
-          <a:extLst>
-            <a:ext uri="{909E8E84-426E-40DD-AFC4-6F175D3DCCD1}">
-              <a14:hiddenFill xmlns:a14="http://schemas.microsoft.com/office/drawing/2010/main">
-                <a:solidFill>
-                  <a:srgbClr val="FFFFFF"/>
-                </a:solidFill>
-              </a14:hiddenFill>
-            </a:ext>
-          </a:extLst>
-        </p:spPr>
-      </p:pic>
+              <a:rPr lang="pt-BR" sz="6000" dirty="0"/>
+              <a:t>Mas o que são esses modelos?</a:t>
+            </a:r>
+          </a:p>
+        </p:txBody>
+      </p:sp>
     </p:spTree>
     <p:extLst>
       <p:ext uri="{BB962C8B-B14F-4D97-AF65-F5344CB8AC3E}">
-        <p14:creationId xmlns:p14="http://schemas.microsoft.com/office/powerpoint/2010/main" val="940125731"/>
+        <p14:creationId xmlns:p14="http://schemas.microsoft.com/office/powerpoint/2010/main" val="263454686"/>
       </p:ext>
     </p:extLst>
   </p:cSld>
@@ -20562,76 +21851,50 @@
           <a:bodyPr/>
           <a:lstStyle/>
           <a:p>
-            <a:r>
-              <a:rPr lang="pt-BR" dirty="0"/>
-              <a:t>O objetivo do agrupamento é dividir a população ou conjunto de pontos de dados em vários grupos, de modo que os pontos de dados dentro de cada grupo sejam mais comparáveis ​​entre si e diferentes dos pontos de dados dentro dos outros grupos.</a:t>
-            </a:r>
-          </a:p>
-          <a:p>
-            <a:r>
-              <a:rPr lang="pt-BR" dirty="0"/>
-              <a:t> É essencialmente um agrupamento de coisas com base em quão semelhantes e diferentes elas são entre si. </a:t>
-            </a:r>
-          </a:p>
-          <a:p>
             <a:pPr marL="0" indent="0">
               <a:buNone/>
             </a:pPr>
-            <a:endParaRPr lang="pt-BR" dirty="0"/>
-          </a:p>
-        </p:txBody>
-      </p:sp>
-      <p:pic>
-        <p:nvPicPr>
-          <p:cNvPr id="4098" name="Picture 2" descr="What is K-means Clustering and it's use cases ? | by Avijit das | Medium">
-            <a:extLst>
-              <a:ext uri="{FF2B5EF4-FFF2-40B4-BE49-F238E27FC236}">
-                <a16:creationId xmlns:a16="http://schemas.microsoft.com/office/drawing/2014/main" id="{056C7919-93FD-E63C-B36E-CC710CDD6044}"/>
-              </a:ext>
-            </a:extLst>
-          </p:cNvPr>
-          <p:cNvPicPr>
-            <a:picLocks noChangeAspect="1" noChangeArrowheads="1"/>
-          </p:cNvPicPr>
-          <p:nvPr/>
-        </p:nvPicPr>
-        <p:blipFill>
-          <a:blip r:embed="rId4">
-            <a:extLst>
-              <a:ext uri="{28A0092B-C50C-407E-A947-70E740481C1C}">
-                <a14:useLocalDpi xmlns:a14="http://schemas.microsoft.com/office/drawing/2010/main" val="0"/>
-              </a:ext>
-            </a:extLst>
-          </a:blip>
-          <a:srcRect/>
-          <a:stretch>
-            <a:fillRect/>
-          </a:stretch>
-        </p:blipFill>
-        <p:spPr bwMode="auto">
-          <a:xfrm>
-            <a:off x="2487788" y="3327400"/>
-            <a:ext cx="6272390" cy="2654150"/>
-          </a:xfrm>
-          <a:prstGeom prst="rect">
-            <a:avLst/>
-          </a:prstGeom>
-          <a:noFill/>
-          <a:extLst>
-            <a:ext uri="{909E8E84-426E-40DD-AFC4-6F175D3DCCD1}">
-              <a14:hiddenFill xmlns:a14="http://schemas.microsoft.com/office/drawing/2010/main">
+            <a:r>
+              <a:rPr lang="pt-BR" dirty="0"/>
+              <a:t>Aprendizado não supervisionado</a:t>
+            </a:r>
+          </a:p>
+          <a:p>
+            <a:pPr marL="0" indent="0">
+              <a:buNone/>
+            </a:pPr>
+            <a:endParaRPr lang="pt-BR" dirty="0"/>
+          </a:p>
+          <a:p>
+            <a:r>
+              <a:rPr lang="pt-BR" dirty="0"/>
+              <a:t>Os algoritmos de aprendizado não supervisionado </a:t>
+            </a:r>
+            <a:r>
+              <a:rPr lang="pt-BR" b="1" i="1" dirty="0">
                 <a:solidFill>
-                  <a:srgbClr val="FFFFFF"/>
+                  <a:srgbClr val="FF0000"/>
                 </a:solidFill>
-              </a14:hiddenFill>
-            </a:ext>
-          </a:extLst>
-        </p:spPr>
-      </p:pic>
+              </a:rPr>
+              <a:t>agrupam</a:t>
+            </a:r>
+            <a:r>
+              <a:rPr lang="pt-BR" dirty="0"/>
+              <a:t> conjuntos de dados não rotulados. </a:t>
+            </a:r>
+          </a:p>
+          <a:p>
+            <a:r>
+              <a:rPr lang="pt-BR" dirty="0"/>
+              <a:t>Esses algoritmos descobrem padrões ocultos ou agrupamentos de dados sem a necessidade de rótulos ou de intervenção humana.</a:t>
+            </a:r>
+          </a:p>
+        </p:txBody>
+      </p:sp>
     </p:spTree>
     <p:extLst>
       <p:ext uri="{BB962C8B-B14F-4D97-AF65-F5344CB8AC3E}">
-        <p14:creationId xmlns:p14="http://schemas.microsoft.com/office/powerpoint/2010/main" val="4212180700"/>
+        <p14:creationId xmlns:p14="http://schemas.microsoft.com/office/powerpoint/2010/main" val="1681526059"/>
       </p:ext>
     </p:extLst>
   </p:cSld>
@@ -20702,13 +21965,8 @@
           <a:p>
             <a:r>
               <a:rPr lang="pt-BR" dirty="0"/>
-              <a:t>K-</a:t>
-            </a:r>
-            <a:r>
-              <a:rPr lang="pt-BR" dirty="0" err="1"/>
-              <a:t>means</a:t>
-            </a:r>
-            <a:endParaRPr lang="pt-BR" dirty="0"/>
+              <a:t>Detecção de anomalias</a:t>
+            </a:r>
           </a:p>
         </p:txBody>
       </p:sp>
@@ -20837,9 +22095,7 @@
           </a:xfrm>
         </p:spPr>
         <p:txBody>
-          <a:bodyPr>
-            <a:normAutofit/>
-          </a:bodyPr>
+          <a:bodyPr/>
           <a:lstStyle/>
           <a:p>
             <a:pPr marL="0" indent="0">
@@ -20847,48 +22103,7 @@
             </a:pPr>
             <a:r>
               <a:rPr lang="pt-BR" dirty="0"/>
-              <a:t>K-</a:t>
-            </a:r>
-            <a:r>
-              <a:rPr lang="pt-BR" dirty="0" err="1"/>
-              <a:t>means</a:t>
-            </a:r>
-            <a:r>
-              <a:rPr lang="pt-BR" dirty="0"/>
-              <a:t> </a:t>
-            </a:r>
-            <a:r>
-              <a:rPr lang="pt-BR" dirty="0" err="1"/>
-              <a:t>clustering</a:t>
-            </a:r>
-            <a:endParaRPr lang="pt-BR" dirty="0"/>
-          </a:p>
-          <a:p>
-            <a:r>
-              <a:rPr lang="pt-BR" dirty="0"/>
-              <a:t>O objetivo do K-</a:t>
-            </a:r>
-            <a:r>
-              <a:rPr lang="pt-BR" dirty="0" err="1"/>
-              <a:t>means</a:t>
-            </a:r>
-            <a:r>
-              <a:rPr lang="pt-BR" dirty="0"/>
-              <a:t> é simples: agrupar pontos de dados semelhantes e descobrir padrões subjacentes. </a:t>
-            </a:r>
-          </a:p>
-          <a:p>
-            <a:r>
-              <a:rPr lang="pt-BR" dirty="0"/>
-              <a:t>Para atingir este objetivo, o K-</a:t>
-            </a:r>
-            <a:r>
-              <a:rPr lang="pt-BR" dirty="0" err="1"/>
-              <a:t>means</a:t>
-            </a:r>
-            <a:r>
-              <a:rPr lang="pt-BR" dirty="0"/>
-              <a:t> procura um número fixo (k) de clusters em um conjunto de dados.</a:t>
+              <a:t>Aprendizado supervisionado versus não supervisionado</a:t>
             </a:r>
           </a:p>
           <a:p>
@@ -20897,14 +22112,20 @@
             </a:pPr>
             <a:endParaRPr lang="pt-BR" dirty="0"/>
           </a:p>
+          <a:p>
+            <a:pPr marL="0" indent="0">
+              <a:buNone/>
+            </a:pPr>
+            <a:endParaRPr lang="pt-BR" dirty="0"/>
+          </a:p>
         </p:txBody>
       </p:sp>
       <p:pic>
         <p:nvPicPr>
-          <p:cNvPr id="4098" name="Picture 2" descr="K-Means Clustering Algorithm - Javatpoint">
-            <a:extLst>
-              <a:ext uri="{FF2B5EF4-FFF2-40B4-BE49-F238E27FC236}">
-                <a16:creationId xmlns:a16="http://schemas.microsoft.com/office/drawing/2014/main" id="{45592E60-7087-AC09-6FA1-B6EBEB4488EC}"/>
+          <p:cNvPr id="3074" name="Picture 2" descr="Unsupervised machine learning">
+            <a:extLst>
+              <a:ext uri="{FF2B5EF4-FFF2-40B4-BE49-F238E27FC236}">
+                <a16:creationId xmlns:a16="http://schemas.microsoft.com/office/drawing/2014/main" id="{9C9BB3FA-B234-195B-6E78-1F5F1A0B5DD5}"/>
               </a:ext>
             </a:extLst>
           </p:cNvPr>
@@ -20928,8 +22149,8 @@
         </p:blipFill>
         <p:spPr bwMode="auto">
           <a:xfrm>
-            <a:off x="3232326" y="3327400"/>
-            <a:ext cx="5343525" cy="2695575"/>
+            <a:off x="2410947" y="4393301"/>
+            <a:ext cx="6371808" cy="2433132"/>
           </a:xfrm>
           <a:prstGeom prst="rect">
             <a:avLst/>
@@ -20946,10 +22167,57 @@
           </a:extLst>
         </p:spPr>
       </p:pic>
+      <p:pic>
+        <p:nvPicPr>
+          <p:cNvPr id="3076" name="Picture 4" descr="Supervised machine learning">
+            <a:extLst>
+              <a:ext uri="{FF2B5EF4-FFF2-40B4-BE49-F238E27FC236}">
+                <a16:creationId xmlns:a16="http://schemas.microsoft.com/office/drawing/2014/main" id="{85D641D0-2AF2-0E0D-20E1-BE0FB83D483A}"/>
+              </a:ext>
+            </a:extLst>
+          </p:cNvPr>
+          <p:cNvPicPr>
+            <a:picLocks noChangeAspect="1" noChangeArrowheads="1"/>
+          </p:cNvPicPr>
+          <p:nvPr/>
+        </p:nvPicPr>
+        <p:blipFill>
+          <a:blip r:embed="rId5">
+            <a:extLst>
+              <a:ext uri="{28A0092B-C50C-407E-A947-70E740481C1C}">
+                <a14:useLocalDpi xmlns:a14="http://schemas.microsoft.com/office/drawing/2010/main" val="0"/>
+              </a:ext>
+            </a:extLst>
+          </a:blip>
+          <a:srcRect/>
+          <a:stretch>
+            <a:fillRect/>
+          </a:stretch>
+        </p:blipFill>
+        <p:spPr bwMode="auto">
+          <a:xfrm>
+            <a:off x="2496457" y="1623490"/>
+            <a:ext cx="5787974" cy="2737556"/>
+          </a:xfrm>
+          <a:prstGeom prst="rect">
+            <a:avLst/>
+          </a:prstGeom>
+          <a:noFill/>
+          <a:extLst>
+            <a:ext uri="{909E8E84-426E-40DD-AFC4-6F175D3DCCD1}">
+              <a14:hiddenFill xmlns:a14="http://schemas.microsoft.com/office/drawing/2010/main">
+                <a:solidFill>
+                  <a:srgbClr val="FFFFFF"/>
+                </a:solidFill>
+              </a14:hiddenFill>
+            </a:ext>
+          </a:extLst>
+        </p:spPr>
+      </p:pic>
     </p:spTree>
     <p:extLst>
       <p:ext uri="{BB962C8B-B14F-4D97-AF65-F5344CB8AC3E}">
-        <p14:creationId xmlns:p14="http://schemas.microsoft.com/office/powerpoint/2010/main" val="2642443892"/>
+        <p14:creationId xmlns:p14="http://schemas.microsoft.com/office/powerpoint/2010/main" val="940125731"/>
       </p:ext>
     </p:extLst>
   </p:cSld>
@@ -21020,13 +22288,8 @@
           <a:p>
             <a:r>
               <a:rPr lang="pt-BR" dirty="0"/>
-              <a:t>K-</a:t>
-            </a:r>
-            <a:r>
-              <a:rPr lang="pt-BR" dirty="0" err="1"/>
-              <a:t>means</a:t>
-            </a:r>
-            <a:endParaRPr lang="pt-BR" dirty="0"/>
+              <a:t>Detecção de anomalias</a:t>
+            </a:r>
           </a:p>
         </p:txBody>
       </p:sp>
@@ -21150,81 +22413,92 @@
         </p:nvSpPr>
         <p:spPr>
           <a:xfrm>
-            <a:off x="304800" y="1066801"/>
-            <a:ext cx="9810044" cy="2737556"/>
+            <a:off x="304799" y="1066801"/>
+            <a:ext cx="10100441" cy="2737556"/>
           </a:xfrm>
         </p:spPr>
         <p:txBody>
           <a:bodyPr>
-            <a:normAutofit lnSpcReduction="10000"/>
+            <a:normAutofit/>
           </a:bodyPr>
           <a:lstStyle/>
+          <a:p>
+            <a:r>
+              <a:rPr lang="pt-BR" dirty="0"/>
+              <a:t>O algoritmo não supervisionado mais conhecido é o de clusterização ou agrupamento.</a:t>
+            </a:r>
+          </a:p>
+          <a:p>
+            <a:r>
+              <a:rPr lang="pt-BR" dirty="0"/>
+              <a:t>O objetivo do agrupamento é dividir os dados em vários grupos ou clusters, de modo que os pontos de dados dentro de cada grupo sejam mais comparáveis ​​entre si e diferentes dos pontos de dados dentro dos outros grupos.</a:t>
+            </a:r>
+          </a:p>
+          <a:p>
+            <a:r>
+              <a:rPr lang="pt-BR" dirty="0"/>
+              <a:t> É essencialmente um agrupamento de coisas com base em quão semelhantes (ou próximos) e diferentes elas são entre si. </a:t>
+            </a:r>
+          </a:p>
           <a:p>
             <a:pPr marL="0" indent="0">
               <a:buNone/>
             </a:pPr>
-            <a:r>
-              <a:rPr lang="pt-BR" dirty="0"/>
-              <a:t>K-</a:t>
-            </a:r>
-            <a:r>
-              <a:rPr lang="pt-BR" dirty="0" err="1"/>
-              <a:t>means</a:t>
-            </a:r>
-            <a:r>
-              <a:rPr lang="pt-BR" dirty="0"/>
-              <a:t> </a:t>
-            </a:r>
-            <a:r>
-              <a:rPr lang="pt-BR" dirty="0" err="1"/>
-              <a:t>clustering</a:t>
-            </a:r>
-            <a:endParaRPr lang="pt-BR" dirty="0"/>
-          </a:p>
-          <a:p>
-            <a:r>
-              <a:rPr lang="pt-BR" dirty="0"/>
-              <a:t>Primeiro, inicializamos aleatoriamente k pontos, chamados de médias ou </a:t>
-            </a:r>
-            <a:r>
-              <a:rPr lang="pt-BR" dirty="0" err="1"/>
-              <a:t>centróides</a:t>
-            </a:r>
-            <a:r>
-              <a:rPr lang="pt-BR" dirty="0"/>
-              <a:t> de cluster.</a:t>
-            </a:r>
-          </a:p>
-          <a:p>
-            <a:r>
-              <a:rPr lang="pt-BR" dirty="0"/>
-              <a:t>Categorizamos cada item de acordo com sua média mais próxima e atualizamos as coordenadas da média, que são as médias dos itens categorizados naquele cluster até o momento.</a:t>
-            </a:r>
-          </a:p>
-          <a:p>
-            <a:r>
-              <a:rPr lang="pt-BR" dirty="0"/>
-              <a:t>Repetimos o processo para um determinado número de iterações ou variação de posição dos clusters e ao final temos nossos clusters.</a:t>
-            </a:r>
-          </a:p>
-          <a:p>
-            <a:pPr marL="0" indent="0">
-              <a:buNone/>
-            </a:pPr>
-            <a:endParaRPr lang="pt-BR" dirty="0"/>
-          </a:p>
-          <a:p>
-            <a:pPr marL="0" indent="0">
-              <a:buNone/>
-            </a:pPr>
-            <a:endParaRPr lang="pt-BR" dirty="0"/>
-          </a:p>
-        </p:txBody>
-      </p:sp>
+            <a:endParaRPr lang="pt-BR" dirty="0"/>
+          </a:p>
+        </p:txBody>
+      </p:sp>
+      <p:pic>
+        <p:nvPicPr>
+          <p:cNvPr id="4098" name="Picture 2" descr="What is K-means Clustering and it's use cases ? | by Avijit das | Medium">
+            <a:extLst>
+              <a:ext uri="{FF2B5EF4-FFF2-40B4-BE49-F238E27FC236}">
+                <a16:creationId xmlns:a16="http://schemas.microsoft.com/office/drawing/2014/main" id="{056C7919-93FD-E63C-B36E-CC710CDD6044}"/>
+              </a:ext>
+            </a:extLst>
+          </p:cNvPr>
+          <p:cNvPicPr>
+            <a:picLocks noChangeAspect="1" noChangeArrowheads="1"/>
+          </p:cNvPicPr>
+          <p:nvPr/>
+        </p:nvPicPr>
+        <p:blipFill>
+          <a:blip r:embed="rId4">
+            <a:extLst>
+              <a:ext uri="{28A0092B-C50C-407E-A947-70E740481C1C}">
+                <a14:useLocalDpi xmlns:a14="http://schemas.microsoft.com/office/drawing/2010/main" val="0"/>
+              </a:ext>
+            </a:extLst>
+          </a:blip>
+          <a:srcRect/>
+          <a:stretch>
+            <a:fillRect/>
+          </a:stretch>
+        </p:blipFill>
+        <p:spPr bwMode="auto">
+          <a:xfrm>
+            <a:off x="2487788" y="3327400"/>
+            <a:ext cx="6272390" cy="2654150"/>
+          </a:xfrm>
+          <a:prstGeom prst="rect">
+            <a:avLst/>
+          </a:prstGeom>
+          <a:noFill/>
+          <a:extLst>
+            <a:ext uri="{909E8E84-426E-40DD-AFC4-6F175D3DCCD1}">
+              <a14:hiddenFill xmlns:a14="http://schemas.microsoft.com/office/drawing/2010/main">
+                <a:solidFill>
+                  <a:srgbClr val="FFFFFF"/>
+                </a:solidFill>
+              </a14:hiddenFill>
+            </a:ext>
+          </a:extLst>
+        </p:spPr>
+      </p:pic>
     </p:spTree>
     <p:extLst>
       <p:ext uri="{BB962C8B-B14F-4D97-AF65-F5344CB8AC3E}">
-        <p14:creationId xmlns:p14="http://schemas.microsoft.com/office/powerpoint/2010/main" val="59607418"/>
+        <p14:creationId xmlns:p14="http://schemas.microsoft.com/office/powerpoint/2010/main" val="4212180700"/>
       </p:ext>
     </p:extLst>
   </p:cSld>
@@ -21438,7 +22712,72 @@
             <a:pPr marL="0" indent="0">
               <a:buNone/>
             </a:pPr>
-            <a:endParaRPr lang="pt-BR" dirty="0"/>
+            <a:r>
+              <a:rPr lang="pt-BR" dirty="0"/>
+              <a:t>K-</a:t>
+            </a:r>
+            <a:r>
+              <a:rPr lang="pt-BR" dirty="0" err="1"/>
+              <a:t>means</a:t>
+            </a:r>
+            <a:r>
+              <a:rPr lang="pt-BR" dirty="0"/>
+              <a:t> </a:t>
+            </a:r>
+            <a:r>
+              <a:rPr lang="pt-BR" dirty="0" err="1"/>
+              <a:t>clustering</a:t>
+            </a:r>
+            <a:endParaRPr lang="pt-BR" dirty="0"/>
+          </a:p>
+          <a:p>
+            <a:r>
+              <a:rPr lang="pt-BR" dirty="0"/>
+              <a:t>O algoritmo de clusterização mais conhecido é o K-</a:t>
+            </a:r>
+            <a:r>
+              <a:rPr lang="pt-BR" dirty="0" err="1"/>
+              <a:t>means</a:t>
+            </a:r>
+            <a:r>
+              <a:rPr lang="pt-BR" dirty="0"/>
+              <a:t>.</a:t>
+            </a:r>
+          </a:p>
+          <a:p>
+            <a:r>
+              <a:rPr lang="pt-BR" dirty="0"/>
+              <a:t>O objetivo do K-</a:t>
+            </a:r>
+            <a:r>
+              <a:rPr lang="pt-BR" dirty="0" err="1"/>
+              <a:t>means</a:t>
+            </a:r>
+            <a:r>
+              <a:rPr lang="pt-BR" dirty="0"/>
+              <a:t> é simples: agrupar pontos de dados semelhantes e descobrir padrões subjacentes.</a:t>
+            </a:r>
+          </a:p>
+          <a:p>
+            <a:pPr lvl="1"/>
+            <a:r>
+              <a:rPr lang="pt-BR" dirty="0"/>
+              <a:t>Semelhante aqui é no sentido de proximidade.</a:t>
+            </a:r>
+          </a:p>
+          <a:p>
+            <a:r>
+              <a:rPr lang="pt-BR" dirty="0"/>
+              <a:t>Para atingir este objetivo, o K-</a:t>
+            </a:r>
+            <a:r>
+              <a:rPr lang="pt-BR" dirty="0" err="1"/>
+              <a:t>means</a:t>
+            </a:r>
+            <a:r>
+              <a:rPr lang="pt-BR" dirty="0"/>
+              <a:t> procura um número fixo (k) de clusters em um conjunto de dados.</a:t>
+            </a:r>
           </a:p>
           <a:p>
             <a:pPr marL="0" indent="0">
@@ -21450,10 +22789,10 @@
       </p:sp>
       <p:pic>
         <p:nvPicPr>
-          <p:cNvPr id="5122" name="Picture 2" descr="python - When using the K-Means Clustering Algorithm, is it possible to  have a set of data which results in an Infinite Loop? - Stack Overflow">
-            <a:extLst>
-              <a:ext uri="{FF2B5EF4-FFF2-40B4-BE49-F238E27FC236}">
-                <a16:creationId xmlns:a16="http://schemas.microsoft.com/office/drawing/2014/main" id="{42B409DD-27A2-FCB0-8589-328539C354F5}"/>
+          <p:cNvPr id="4098" name="Picture 2" descr="K-Means Clustering Algorithm - Javatpoint">
+            <a:extLst>
+              <a:ext uri="{FF2B5EF4-FFF2-40B4-BE49-F238E27FC236}">
+                <a16:creationId xmlns:a16="http://schemas.microsoft.com/office/drawing/2014/main" id="{45592E60-7087-AC09-6FA1-B6EBEB4488EC}"/>
               </a:ext>
             </a:extLst>
           </p:cNvPr>
@@ -21477,8 +22816,8 @@
         </p:blipFill>
         <p:spPr bwMode="auto">
           <a:xfrm>
-            <a:off x="304800" y="945092"/>
-            <a:ext cx="9716440" cy="4877198"/>
+            <a:off x="3232326" y="3327400"/>
+            <a:ext cx="5343525" cy="2695575"/>
           </a:xfrm>
           <a:prstGeom prst="rect">
             <a:avLst/>
@@ -21498,7 +22837,7 @@
     </p:spTree>
     <p:extLst>
       <p:ext uri="{BB962C8B-B14F-4D97-AF65-F5344CB8AC3E}">
-        <p14:creationId xmlns:p14="http://schemas.microsoft.com/office/powerpoint/2010/main" val="2367148880"/>
+        <p14:creationId xmlns:p14="http://schemas.microsoft.com/office/powerpoint/2010/main" val="2642443892"/>
       </p:ext>
     </p:extLst>
   </p:cSld>

--- a/slides/TP557_16_detecção_de_anomalias.pptx
+++ b/slides/TP557_16_detecção_de_anomalias.pptx
@@ -6,10 +6,10 @@
     <p:sldMasterId id="2147483660" r:id="rId2"/>
   </p:sldMasterIdLst>
   <p:notesMasterIdLst>
-    <p:notesMasterId r:id="rId37"/>
+    <p:notesMasterId r:id="rId28"/>
   </p:notesMasterIdLst>
   <p:handoutMasterIdLst>
-    <p:handoutMasterId r:id="rId38"/>
+    <p:handoutMasterId r:id="rId29"/>
   </p:handoutMasterIdLst>
   <p:sldIdLst>
     <p:sldId id="256" r:id="rId3"/>
@@ -27,25 +27,16 @@
     <p:sldId id="626" r:id="rId15"/>
     <p:sldId id="629" r:id="rId16"/>
     <p:sldId id="584" r:id="rId17"/>
-    <p:sldId id="621" r:id="rId18"/>
-    <p:sldId id="591" r:id="rId19"/>
-    <p:sldId id="598" r:id="rId20"/>
-    <p:sldId id="592" r:id="rId21"/>
-    <p:sldId id="593" r:id="rId22"/>
-    <p:sldId id="597" r:id="rId23"/>
-    <p:sldId id="603" r:id="rId24"/>
-    <p:sldId id="594" r:id="rId25"/>
-    <p:sldId id="595" r:id="rId26"/>
-    <p:sldId id="596" r:id="rId27"/>
-    <p:sldId id="600" r:id="rId28"/>
-    <p:sldId id="601" r:id="rId29"/>
-    <p:sldId id="602" r:id="rId30"/>
-    <p:sldId id="613" r:id="rId31"/>
-    <p:sldId id="610" r:id="rId32"/>
-    <p:sldId id="611" r:id="rId33"/>
-    <p:sldId id="612" r:id="rId34"/>
-    <p:sldId id="615" r:id="rId35"/>
-    <p:sldId id="616" r:id="rId36"/>
+    <p:sldId id="630" r:id="rId18"/>
+    <p:sldId id="621" r:id="rId19"/>
+    <p:sldId id="591" r:id="rId20"/>
+    <p:sldId id="593" r:id="rId21"/>
+    <p:sldId id="603" r:id="rId22"/>
+    <p:sldId id="613" r:id="rId23"/>
+    <p:sldId id="611" r:id="rId24"/>
+    <p:sldId id="612" r:id="rId25"/>
+    <p:sldId id="615" r:id="rId26"/>
+    <p:sldId id="616" r:id="rId27"/>
   </p:sldIdLst>
   <p:sldSz cx="12192000" cy="6858000"/>
   <p:notesSz cx="7315200" cy="9601200"/>
@@ -234,7 +225,7 @@
           <a:p>
             <a:fld id="{144F1436-6906-4D93-B7A2-786C327BFA14}" type="datetimeFigureOut">
               <a:rPr lang="nl-BE" smtClean="0"/>
-              <a:t>12/05/2025</a:t>
+              <a:t>13/05/2025</a:t>
             </a:fld>
             <a:endParaRPr lang="nl-BE"/>
           </a:p>
@@ -300,7 +291,7 @@
           <a:p>
             <a:fld id="{F7E56D9B-79AD-444A-AFED-DEC23408F8B4}" type="slidenum">
               <a:rPr lang="nl-BE" smtClean="0"/>
-              <a:t>‹nº›</a:t>
+              <a:t>‹#›</a:t>
             </a:fld>
             <a:endParaRPr lang="nl-BE"/>
           </a:p>
@@ -399,7 +390,7 @@
           <a:p>
             <a:fld id="{AA8CD09E-2914-4F47-B6C1-51B2C31814C9}" type="datetimeFigureOut">
               <a:rPr lang="pt-BR" smtClean="0"/>
-              <a:t>12/05/2025</a:t>
+              <a:t>13/05/2025</a:t>
             </a:fld>
             <a:endParaRPr lang="pt-BR"/>
           </a:p>
@@ -557,7 +548,7 @@
           <a:p>
             <a:fld id="{6FC8D850-966F-45A6-8DE7-15B891E7D40D}" type="slidenum">
               <a:rPr lang="pt-BR" smtClean="0"/>
-              <a:t>‹nº›</a:t>
+              <a:t>‹#›</a:t>
             </a:fld>
             <a:endParaRPr lang="pt-BR"/>
           </a:p>
@@ -758,7 +749,7 @@
         <p:cNvPr id="1" name="">
           <a:extLst>
             <a:ext uri="{FF2B5EF4-FFF2-40B4-BE49-F238E27FC236}">
-              <a16:creationId xmlns:a16="http://schemas.microsoft.com/office/drawing/2014/main" xmlns="" id="{3DC8778D-274C-4550-BFA6-2BF2EE1372DF}"/>
+              <a16:creationId xmlns:a16="http://schemas.microsoft.com/office/drawing/2014/main" id="{3DC8778D-274C-4550-BFA6-2BF2EE1372DF}"/>
             </a:ext>
           </a:extLst>
         </p:cNvPr>
@@ -778,7 +769,7 @@
           <p:cNvPr id="2" name="Espaço Reservado para Imagem de Slide 1">
             <a:extLst>
               <a:ext uri="{FF2B5EF4-FFF2-40B4-BE49-F238E27FC236}">
-                <a16:creationId xmlns:a16="http://schemas.microsoft.com/office/drawing/2014/main" xmlns="" id="{C35AD5E8-765A-E917-B919-F1F6AE347F53}"/>
+                <a16:creationId xmlns:a16="http://schemas.microsoft.com/office/drawing/2014/main" id="{C35AD5E8-765A-E917-B919-F1F6AE347F53}"/>
               </a:ext>
             </a:extLst>
           </p:cNvPr>
@@ -796,7 +787,7 @@
           <p:cNvPr id="3" name="Espaço Reservado para Anotações 2">
             <a:extLst>
               <a:ext uri="{FF2B5EF4-FFF2-40B4-BE49-F238E27FC236}">
-                <a16:creationId xmlns:a16="http://schemas.microsoft.com/office/drawing/2014/main" xmlns="" id="{9D90C0BF-FC56-01AC-3AD0-5B5E6D0FB45D}"/>
+                <a16:creationId xmlns:a16="http://schemas.microsoft.com/office/drawing/2014/main" id="{9D90C0BF-FC56-01AC-3AD0-5B5E6D0FB45D}"/>
               </a:ext>
             </a:extLst>
           </p:cNvPr>
@@ -821,7 +812,7 @@
           <p:cNvPr id="4" name="Espaço Reservado para Número de Slide 3">
             <a:extLst>
               <a:ext uri="{FF2B5EF4-FFF2-40B4-BE49-F238E27FC236}">
-                <a16:creationId xmlns:a16="http://schemas.microsoft.com/office/drawing/2014/main" xmlns="" id="{41EF1718-29E8-7DF3-052E-E040AF947292}"/>
+                <a16:creationId xmlns:a16="http://schemas.microsoft.com/office/drawing/2014/main" id="{41EF1718-29E8-7DF3-052E-E040AF947292}"/>
               </a:ext>
             </a:extLst>
           </p:cNvPr>
@@ -866,7 +857,7 @@
         <p:cNvPr id="1" name="">
           <a:extLst>
             <a:ext uri="{FF2B5EF4-FFF2-40B4-BE49-F238E27FC236}">
-              <a16:creationId xmlns:a16="http://schemas.microsoft.com/office/drawing/2014/main" xmlns="" id="{D5CE570B-6F22-A16C-FB7C-644660A08E50}"/>
+              <a16:creationId xmlns:a16="http://schemas.microsoft.com/office/drawing/2014/main" id="{D5CE570B-6F22-A16C-FB7C-644660A08E50}"/>
             </a:ext>
           </a:extLst>
         </p:cNvPr>
@@ -886,7 +877,7 @@
           <p:cNvPr id="2" name="Espaço Reservado para Imagem de Slide 1">
             <a:extLst>
               <a:ext uri="{FF2B5EF4-FFF2-40B4-BE49-F238E27FC236}">
-                <a16:creationId xmlns:a16="http://schemas.microsoft.com/office/drawing/2014/main" xmlns="" id="{54988FE9-CE61-8F19-30AA-F0093DA959FE}"/>
+                <a16:creationId xmlns:a16="http://schemas.microsoft.com/office/drawing/2014/main" id="{54988FE9-CE61-8F19-30AA-F0093DA959FE}"/>
               </a:ext>
             </a:extLst>
           </p:cNvPr>
@@ -904,7 +895,7 @@
           <p:cNvPr id="3" name="Espaço Reservado para Anotações 2">
             <a:extLst>
               <a:ext uri="{FF2B5EF4-FFF2-40B4-BE49-F238E27FC236}">
-                <a16:creationId xmlns:a16="http://schemas.microsoft.com/office/drawing/2014/main" xmlns="" id="{FF56B3B1-0912-3AF5-3099-3CC1931A01BF}"/>
+                <a16:creationId xmlns:a16="http://schemas.microsoft.com/office/drawing/2014/main" id="{FF56B3B1-0912-3AF5-3099-3CC1931A01BF}"/>
               </a:ext>
             </a:extLst>
           </p:cNvPr>
@@ -929,7 +920,7 @@
           <p:cNvPr id="4" name="Espaço Reservado para Número de Slide 3">
             <a:extLst>
               <a:ext uri="{FF2B5EF4-FFF2-40B4-BE49-F238E27FC236}">
-                <a16:creationId xmlns:a16="http://schemas.microsoft.com/office/drawing/2014/main" xmlns="" id="{EA8F2BE0-E2B3-AC2B-9D52-752913B7CF4B}"/>
+                <a16:creationId xmlns:a16="http://schemas.microsoft.com/office/drawing/2014/main" id="{EA8F2BE0-E2B3-AC2B-9D52-752913B7CF4B}"/>
               </a:ext>
             </a:extLst>
           </p:cNvPr>
@@ -974,7 +965,7 @@
         <p:cNvPr id="1" name="">
           <a:extLst>
             <a:ext uri="{FF2B5EF4-FFF2-40B4-BE49-F238E27FC236}">
-              <a16:creationId xmlns:a16="http://schemas.microsoft.com/office/drawing/2014/main" xmlns="" id="{38F770F4-9A55-E975-D43C-FCEA3ED2C1A9}"/>
+              <a16:creationId xmlns:a16="http://schemas.microsoft.com/office/drawing/2014/main" id="{38F770F4-9A55-E975-D43C-FCEA3ED2C1A9}"/>
             </a:ext>
           </a:extLst>
         </p:cNvPr>
@@ -994,7 +985,7 @@
           <p:cNvPr id="2" name="Espaço Reservado para Imagem de Slide 1">
             <a:extLst>
               <a:ext uri="{FF2B5EF4-FFF2-40B4-BE49-F238E27FC236}">
-                <a16:creationId xmlns:a16="http://schemas.microsoft.com/office/drawing/2014/main" xmlns="" id="{AEDFCAA5-FC8C-DD9C-AFC5-CB278DE7F744}"/>
+                <a16:creationId xmlns:a16="http://schemas.microsoft.com/office/drawing/2014/main" id="{AEDFCAA5-FC8C-DD9C-AFC5-CB278DE7F744}"/>
               </a:ext>
             </a:extLst>
           </p:cNvPr>
@@ -1012,7 +1003,7 @@
           <p:cNvPr id="3" name="Espaço Reservado para Anotações 2">
             <a:extLst>
               <a:ext uri="{FF2B5EF4-FFF2-40B4-BE49-F238E27FC236}">
-                <a16:creationId xmlns:a16="http://schemas.microsoft.com/office/drawing/2014/main" xmlns="" id="{D403E6E9-E099-A9A5-653E-6F0722996927}"/>
+                <a16:creationId xmlns:a16="http://schemas.microsoft.com/office/drawing/2014/main" id="{D403E6E9-E099-A9A5-653E-6F0722996927}"/>
               </a:ext>
             </a:extLst>
           </p:cNvPr>
@@ -1037,7 +1028,7 @@
           <p:cNvPr id="4" name="Espaço Reservado para Número de Slide 3">
             <a:extLst>
               <a:ext uri="{FF2B5EF4-FFF2-40B4-BE49-F238E27FC236}">
-                <a16:creationId xmlns:a16="http://schemas.microsoft.com/office/drawing/2014/main" xmlns="" id="{384EBEF5-7321-520D-7991-F3CC5AF3A56D}"/>
+                <a16:creationId xmlns:a16="http://schemas.microsoft.com/office/drawing/2014/main" id="{384EBEF5-7321-520D-7991-F3CC5AF3A56D}"/>
               </a:ext>
             </a:extLst>
           </p:cNvPr>
@@ -1082,7 +1073,7 @@
         <p:cNvPr id="1" name="">
           <a:extLst>
             <a:ext uri="{FF2B5EF4-FFF2-40B4-BE49-F238E27FC236}">
-              <a16:creationId xmlns:a16="http://schemas.microsoft.com/office/drawing/2014/main" xmlns="" id="{31D8DD9A-FB73-B3DA-6F9F-A22549E2ACF5}"/>
+              <a16:creationId xmlns:a16="http://schemas.microsoft.com/office/drawing/2014/main" id="{31D8DD9A-FB73-B3DA-6F9F-A22549E2ACF5}"/>
             </a:ext>
           </a:extLst>
         </p:cNvPr>
@@ -1102,7 +1093,7 @@
           <p:cNvPr id="2" name="Espaço Reservado para Imagem de Slide 1">
             <a:extLst>
               <a:ext uri="{FF2B5EF4-FFF2-40B4-BE49-F238E27FC236}">
-                <a16:creationId xmlns:a16="http://schemas.microsoft.com/office/drawing/2014/main" xmlns="" id="{E99B0F2D-8473-FC35-AF28-ECE2A1829004}"/>
+                <a16:creationId xmlns:a16="http://schemas.microsoft.com/office/drawing/2014/main" id="{E99B0F2D-8473-FC35-AF28-ECE2A1829004}"/>
               </a:ext>
             </a:extLst>
           </p:cNvPr>
@@ -1120,7 +1111,7 @@
           <p:cNvPr id="3" name="Espaço Reservado para Anotações 2">
             <a:extLst>
               <a:ext uri="{FF2B5EF4-FFF2-40B4-BE49-F238E27FC236}">
-                <a16:creationId xmlns:a16="http://schemas.microsoft.com/office/drawing/2014/main" xmlns="" id="{8C9962D3-EA60-94A8-A6D4-C3161BED15BF}"/>
+                <a16:creationId xmlns:a16="http://schemas.microsoft.com/office/drawing/2014/main" id="{8C9962D3-EA60-94A8-A6D4-C3161BED15BF}"/>
               </a:ext>
             </a:extLst>
           </p:cNvPr>
@@ -1145,7 +1136,7 @@
           <p:cNvPr id="4" name="Espaço Reservado para Número de Slide 3">
             <a:extLst>
               <a:ext uri="{FF2B5EF4-FFF2-40B4-BE49-F238E27FC236}">
-                <a16:creationId xmlns:a16="http://schemas.microsoft.com/office/drawing/2014/main" xmlns="" id="{1A62ECEA-4026-B0E1-9730-4E6CBBB39369}"/>
+                <a16:creationId xmlns:a16="http://schemas.microsoft.com/office/drawing/2014/main" id="{1A62ECEA-4026-B0E1-9730-4E6CBBB39369}"/>
               </a:ext>
             </a:extLst>
           </p:cNvPr>
@@ -1355,7 +1346,13 @@
   <p:cSld>
     <p:spTree>
       <p:nvGrpSpPr>
-        <p:cNvPr id="1" name=""/>
+        <p:cNvPr id="1" name="">
+          <a:extLst>
+            <a:ext uri="{FF2B5EF4-FFF2-40B4-BE49-F238E27FC236}">
+              <a16:creationId xmlns:a16="http://schemas.microsoft.com/office/drawing/2014/main" id="{6E955CAB-F21A-9D08-F98D-00EB95ED3441}"/>
+            </a:ext>
+          </a:extLst>
+        </p:cNvPr>
         <p:cNvGrpSpPr/>
         <p:nvPr/>
       </p:nvGrpSpPr>
@@ -1369,7 +1366,13 @@
       </p:grpSpPr>
       <p:sp>
         <p:nvSpPr>
-          <p:cNvPr id="2" name="Espaço Reservado para Imagem de Slide 1"/>
+          <p:cNvPr id="2" name="Espaço Reservado para Imagem de Slide 1">
+            <a:extLst>
+              <a:ext uri="{FF2B5EF4-FFF2-40B4-BE49-F238E27FC236}">
+                <a16:creationId xmlns:a16="http://schemas.microsoft.com/office/drawing/2014/main" id="{0D72ECCF-390F-6700-31C9-EBB590D4368D}"/>
+              </a:ext>
+            </a:extLst>
+          </p:cNvPr>
           <p:cNvSpPr>
             <a:spLocks noGrp="1" noRot="1" noChangeAspect="1"/>
           </p:cNvSpPr>
@@ -1381,7 +1384,13 @@
       </p:sp>
       <p:sp>
         <p:nvSpPr>
-          <p:cNvPr id="3" name="Espaço Reservado para Anotações 2"/>
+          <p:cNvPr id="3" name="Espaço Reservado para Anotações 2">
+            <a:extLst>
+              <a:ext uri="{FF2B5EF4-FFF2-40B4-BE49-F238E27FC236}">
+                <a16:creationId xmlns:a16="http://schemas.microsoft.com/office/drawing/2014/main" id="{577FA9D6-B2FE-523B-86B7-0EFD6452DDF4}"/>
+              </a:ext>
+            </a:extLst>
+          </p:cNvPr>
           <p:cNvSpPr>
             <a:spLocks noGrp="1"/>
           </p:cNvSpPr>
@@ -1400,7 +1409,13 @@
       </p:sp>
       <p:sp>
         <p:nvSpPr>
-          <p:cNvPr id="4" name="Espaço Reservado para Número de Slide 3"/>
+          <p:cNvPr id="4" name="Espaço Reservado para Número de Slide 3">
+            <a:extLst>
+              <a:ext uri="{FF2B5EF4-FFF2-40B4-BE49-F238E27FC236}">
+                <a16:creationId xmlns:a16="http://schemas.microsoft.com/office/drawing/2014/main" id="{1DBD4D4D-75F0-64AD-BA32-1AF4C4593BDD}"/>
+              </a:ext>
+            </a:extLst>
+          </p:cNvPr>
           <p:cNvSpPr>
             <a:spLocks noGrp="1"/>
           </p:cNvSpPr>
@@ -1415,7 +1430,7 @@
           <a:p>
             <a:fld id="{6FC8D850-966F-45A6-8DE7-15B891E7D40D}" type="slidenum">
               <a:rPr lang="pt-BR" smtClean="0"/>
-              <a:t>17</a:t>
+              <a:t>16</a:t>
             </a:fld>
             <a:endParaRPr lang="pt-BR"/>
           </a:p>
@@ -1424,7 +1439,7 @@
     </p:spTree>
     <p:extLst>
       <p:ext uri="{BB962C8B-B14F-4D97-AF65-F5344CB8AC3E}">
-        <p14:creationId xmlns:p14="http://schemas.microsoft.com/office/powerpoint/2010/main" val="427012450"/>
+        <p14:creationId xmlns:p14="http://schemas.microsoft.com/office/powerpoint/2010/main" val="3481828047"/>
       </p:ext>
     </p:extLst>
   </p:cSld>
@@ -1508,7 +1523,7 @@
     </p:spTree>
     <p:extLst>
       <p:ext uri="{BB962C8B-B14F-4D97-AF65-F5344CB8AC3E}">
-        <p14:creationId xmlns:p14="http://schemas.microsoft.com/office/powerpoint/2010/main" val="3474849204"/>
+        <p14:creationId xmlns:p14="http://schemas.microsoft.com/office/powerpoint/2010/main" val="427012450"/>
       </p:ext>
     </p:extLst>
   </p:cSld>
@@ -1592,7 +1607,7 @@
     </p:spTree>
     <p:extLst>
       <p:ext uri="{BB962C8B-B14F-4D97-AF65-F5344CB8AC3E}">
-        <p14:creationId xmlns:p14="http://schemas.microsoft.com/office/powerpoint/2010/main" val="1082316856"/>
+        <p14:creationId xmlns:p14="http://schemas.microsoft.com/office/powerpoint/2010/main" val="3940651076"/>
       </p:ext>
     </p:extLst>
   </p:cSld>
@@ -1676,7 +1691,7 @@
     </p:spTree>
     <p:extLst>
       <p:ext uri="{BB962C8B-B14F-4D97-AF65-F5344CB8AC3E}">
-        <p14:creationId xmlns:p14="http://schemas.microsoft.com/office/powerpoint/2010/main" val="3940651076"/>
+        <p14:creationId xmlns:p14="http://schemas.microsoft.com/office/powerpoint/2010/main" val="707187450"/>
       </p:ext>
     </p:extLst>
   </p:cSld>
@@ -1844,7 +1859,7 @@
     </p:spTree>
     <p:extLst>
       <p:ext uri="{BB962C8B-B14F-4D97-AF65-F5344CB8AC3E}">
-        <p14:creationId xmlns:p14="http://schemas.microsoft.com/office/powerpoint/2010/main" val="1348824106"/>
+        <p14:creationId xmlns:p14="http://schemas.microsoft.com/office/powerpoint/2010/main" val="482398735"/>
       </p:ext>
     </p:extLst>
   </p:cSld>
@@ -1855,846 +1870,6 @@
 </file>
 
 <file path=ppt/notesSlides/notesSlide21.xml><?xml version="1.0" encoding="utf-8"?>
-<p:notes xmlns:a="http://schemas.openxmlformats.org/drawingml/2006/main" xmlns:r="http://schemas.openxmlformats.org/officeDocument/2006/relationships" xmlns:p="http://schemas.openxmlformats.org/presentationml/2006/main">
-  <p:cSld>
-    <p:spTree>
-      <p:nvGrpSpPr>
-        <p:cNvPr id="1" name=""/>
-        <p:cNvGrpSpPr/>
-        <p:nvPr/>
-      </p:nvGrpSpPr>
-      <p:grpSpPr>
-        <a:xfrm>
-          <a:off x="0" y="0"/>
-          <a:ext cx="0" cy="0"/>
-          <a:chOff x="0" y="0"/>
-          <a:chExt cx="0" cy="0"/>
-        </a:xfrm>
-      </p:grpSpPr>
-      <p:sp>
-        <p:nvSpPr>
-          <p:cNvPr id="2" name="Espaço Reservado para Imagem de Slide 1"/>
-          <p:cNvSpPr>
-            <a:spLocks noGrp="1" noRot="1" noChangeAspect="1"/>
-          </p:cNvSpPr>
-          <p:nvPr>
-            <p:ph type="sldImg"/>
-          </p:nvPr>
-        </p:nvSpPr>
-        <p:spPr/>
-      </p:sp>
-      <p:sp>
-        <p:nvSpPr>
-          <p:cNvPr id="3" name="Espaço Reservado para Anotações 2"/>
-          <p:cNvSpPr>
-            <a:spLocks noGrp="1"/>
-          </p:cNvSpPr>
-          <p:nvPr>
-            <p:ph type="body" idx="1"/>
-          </p:nvPr>
-        </p:nvSpPr>
-        <p:spPr/>
-        <p:txBody>
-          <a:bodyPr/>
-          <a:lstStyle/>
-          <a:p>
-            <a:endParaRPr lang="pt-BR" dirty="0"/>
-          </a:p>
-        </p:txBody>
-      </p:sp>
-      <p:sp>
-        <p:nvSpPr>
-          <p:cNvPr id="4" name="Espaço Reservado para Número de Slide 3"/>
-          <p:cNvSpPr>
-            <a:spLocks noGrp="1"/>
-          </p:cNvSpPr>
-          <p:nvPr>
-            <p:ph type="sldNum" sz="quarter" idx="5"/>
-          </p:nvPr>
-        </p:nvSpPr>
-        <p:spPr/>
-        <p:txBody>
-          <a:bodyPr/>
-          <a:lstStyle/>
-          <a:p>
-            <a:fld id="{6FC8D850-966F-45A6-8DE7-15B891E7D40D}" type="slidenum">
-              <a:rPr lang="pt-BR" smtClean="0"/>
-              <a:t>22</a:t>
-            </a:fld>
-            <a:endParaRPr lang="pt-BR"/>
-          </a:p>
-        </p:txBody>
-      </p:sp>
-    </p:spTree>
-    <p:extLst>
-      <p:ext uri="{BB962C8B-B14F-4D97-AF65-F5344CB8AC3E}">
-        <p14:creationId xmlns:p14="http://schemas.microsoft.com/office/powerpoint/2010/main" val="707187450"/>
-      </p:ext>
-    </p:extLst>
-  </p:cSld>
-  <p:clrMapOvr>
-    <a:masterClrMapping/>
-  </p:clrMapOvr>
-</p:notes>
-</file>
-
-<file path=ppt/notesSlides/notesSlide22.xml><?xml version="1.0" encoding="utf-8"?>
-<p:notes xmlns:a="http://schemas.openxmlformats.org/drawingml/2006/main" xmlns:r="http://schemas.openxmlformats.org/officeDocument/2006/relationships" xmlns:p="http://schemas.openxmlformats.org/presentationml/2006/main">
-  <p:cSld>
-    <p:spTree>
-      <p:nvGrpSpPr>
-        <p:cNvPr id="1" name=""/>
-        <p:cNvGrpSpPr/>
-        <p:nvPr/>
-      </p:nvGrpSpPr>
-      <p:grpSpPr>
-        <a:xfrm>
-          <a:off x="0" y="0"/>
-          <a:ext cx="0" cy="0"/>
-          <a:chOff x="0" y="0"/>
-          <a:chExt cx="0" cy="0"/>
-        </a:xfrm>
-      </p:grpSpPr>
-      <p:sp>
-        <p:nvSpPr>
-          <p:cNvPr id="2" name="Espaço Reservado para Imagem de Slide 1"/>
-          <p:cNvSpPr>
-            <a:spLocks noGrp="1" noRot="1" noChangeAspect="1"/>
-          </p:cNvSpPr>
-          <p:nvPr>
-            <p:ph type="sldImg"/>
-          </p:nvPr>
-        </p:nvSpPr>
-        <p:spPr/>
-      </p:sp>
-      <p:sp>
-        <p:nvSpPr>
-          <p:cNvPr id="3" name="Espaço Reservado para Anotações 2"/>
-          <p:cNvSpPr>
-            <a:spLocks noGrp="1"/>
-          </p:cNvSpPr>
-          <p:nvPr>
-            <p:ph type="body" idx="1"/>
-          </p:nvPr>
-        </p:nvSpPr>
-        <p:spPr/>
-        <p:txBody>
-          <a:bodyPr/>
-          <a:lstStyle/>
-          <a:p>
-            <a:endParaRPr lang="pt-BR" dirty="0"/>
-          </a:p>
-        </p:txBody>
-      </p:sp>
-      <p:sp>
-        <p:nvSpPr>
-          <p:cNvPr id="4" name="Espaço Reservado para Número de Slide 3"/>
-          <p:cNvSpPr>
-            <a:spLocks noGrp="1"/>
-          </p:cNvSpPr>
-          <p:nvPr>
-            <p:ph type="sldNum" sz="quarter" idx="5"/>
-          </p:nvPr>
-        </p:nvSpPr>
-        <p:spPr/>
-        <p:txBody>
-          <a:bodyPr/>
-          <a:lstStyle/>
-          <a:p>
-            <a:fld id="{6FC8D850-966F-45A6-8DE7-15B891E7D40D}" type="slidenum">
-              <a:rPr lang="pt-BR" smtClean="0"/>
-              <a:t>23</a:t>
-            </a:fld>
-            <a:endParaRPr lang="pt-BR"/>
-          </a:p>
-        </p:txBody>
-      </p:sp>
-    </p:spTree>
-    <p:extLst>
-      <p:ext uri="{BB962C8B-B14F-4D97-AF65-F5344CB8AC3E}">
-        <p14:creationId xmlns:p14="http://schemas.microsoft.com/office/powerpoint/2010/main" val="3509127843"/>
-      </p:ext>
-    </p:extLst>
-  </p:cSld>
-  <p:clrMapOvr>
-    <a:masterClrMapping/>
-  </p:clrMapOvr>
-</p:notes>
-</file>
-
-<file path=ppt/notesSlides/notesSlide23.xml><?xml version="1.0" encoding="utf-8"?>
-<p:notes xmlns:a="http://schemas.openxmlformats.org/drawingml/2006/main" xmlns:r="http://schemas.openxmlformats.org/officeDocument/2006/relationships" xmlns:p="http://schemas.openxmlformats.org/presentationml/2006/main">
-  <p:cSld>
-    <p:spTree>
-      <p:nvGrpSpPr>
-        <p:cNvPr id="1" name=""/>
-        <p:cNvGrpSpPr/>
-        <p:nvPr/>
-      </p:nvGrpSpPr>
-      <p:grpSpPr>
-        <a:xfrm>
-          <a:off x="0" y="0"/>
-          <a:ext cx="0" cy="0"/>
-          <a:chOff x="0" y="0"/>
-          <a:chExt cx="0" cy="0"/>
-        </a:xfrm>
-      </p:grpSpPr>
-      <p:sp>
-        <p:nvSpPr>
-          <p:cNvPr id="2" name="Espaço Reservado para Imagem de Slide 1"/>
-          <p:cNvSpPr>
-            <a:spLocks noGrp="1" noRot="1" noChangeAspect="1"/>
-          </p:cNvSpPr>
-          <p:nvPr>
-            <p:ph type="sldImg"/>
-          </p:nvPr>
-        </p:nvSpPr>
-        <p:spPr/>
-      </p:sp>
-      <p:sp>
-        <p:nvSpPr>
-          <p:cNvPr id="3" name="Espaço Reservado para Anotações 2"/>
-          <p:cNvSpPr>
-            <a:spLocks noGrp="1"/>
-          </p:cNvSpPr>
-          <p:nvPr>
-            <p:ph type="body" idx="1"/>
-          </p:nvPr>
-        </p:nvSpPr>
-        <p:spPr/>
-        <p:txBody>
-          <a:bodyPr/>
-          <a:lstStyle/>
-          <a:p>
-            <a:endParaRPr lang="pt-BR" dirty="0"/>
-          </a:p>
-        </p:txBody>
-      </p:sp>
-      <p:sp>
-        <p:nvSpPr>
-          <p:cNvPr id="4" name="Espaço Reservado para Número de Slide 3"/>
-          <p:cNvSpPr>
-            <a:spLocks noGrp="1"/>
-          </p:cNvSpPr>
-          <p:nvPr>
-            <p:ph type="sldNum" sz="quarter" idx="5"/>
-          </p:nvPr>
-        </p:nvSpPr>
-        <p:spPr/>
-        <p:txBody>
-          <a:bodyPr/>
-          <a:lstStyle/>
-          <a:p>
-            <a:fld id="{6FC8D850-966F-45A6-8DE7-15B891E7D40D}" type="slidenum">
-              <a:rPr lang="pt-BR" smtClean="0"/>
-              <a:t>24</a:t>
-            </a:fld>
-            <a:endParaRPr lang="pt-BR"/>
-          </a:p>
-        </p:txBody>
-      </p:sp>
-    </p:spTree>
-    <p:extLst>
-      <p:ext uri="{BB962C8B-B14F-4D97-AF65-F5344CB8AC3E}">
-        <p14:creationId xmlns:p14="http://schemas.microsoft.com/office/powerpoint/2010/main" val="3333931488"/>
-      </p:ext>
-    </p:extLst>
-  </p:cSld>
-  <p:clrMapOvr>
-    <a:masterClrMapping/>
-  </p:clrMapOvr>
-</p:notes>
-</file>
-
-<file path=ppt/notesSlides/notesSlide24.xml><?xml version="1.0" encoding="utf-8"?>
-<p:notes xmlns:a="http://schemas.openxmlformats.org/drawingml/2006/main" xmlns:r="http://schemas.openxmlformats.org/officeDocument/2006/relationships" xmlns:p="http://schemas.openxmlformats.org/presentationml/2006/main">
-  <p:cSld>
-    <p:spTree>
-      <p:nvGrpSpPr>
-        <p:cNvPr id="1" name=""/>
-        <p:cNvGrpSpPr/>
-        <p:nvPr/>
-      </p:nvGrpSpPr>
-      <p:grpSpPr>
-        <a:xfrm>
-          <a:off x="0" y="0"/>
-          <a:ext cx="0" cy="0"/>
-          <a:chOff x="0" y="0"/>
-          <a:chExt cx="0" cy="0"/>
-        </a:xfrm>
-      </p:grpSpPr>
-      <p:sp>
-        <p:nvSpPr>
-          <p:cNvPr id="2" name="Espaço Reservado para Imagem de Slide 1"/>
-          <p:cNvSpPr>
-            <a:spLocks noGrp="1" noRot="1" noChangeAspect="1"/>
-          </p:cNvSpPr>
-          <p:nvPr>
-            <p:ph type="sldImg"/>
-          </p:nvPr>
-        </p:nvSpPr>
-        <p:spPr/>
-      </p:sp>
-      <p:sp>
-        <p:nvSpPr>
-          <p:cNvPr id="3" name="Espaço Reservado para Anotações 2"/>
-          <p:cNvSpPr>
-            <a:spLocks noGrp="1"/>
-          </p:cNvSpPr>
-          <p:nvPr>
-            <p:ph type="body" idx="1"/>
-          </p:nvPr>
-        </p:nvSpPr>
-        <p:spPr/>
-        <p:txBody>
-          <a:bodyPr/>
-          <a:lstStyle/>
-          <a:p>
-            <a:endParaRPr lang="pt-BR" dirty="0"/>
-          </a:p>
-        </p:txBody>
-      </p:sp>
-      <p:sp>
-        <p:nvSpPr>
-          <p:cNvPr id="4" name="Espaço Reservado para Número de Slide 3"/>
-          <p:cNvSpPr>
-            <a:spLocks noGrp="1"/>
-          </p:cNvSpPr>
-          <p:nvPr>
-            <p:ph type="sldNum" sz="quarter" idx="5"/>
-          </p:nvPr>
-        </p:nvSpPr>
-        <p:spPr/>
-        <p:txBody>
-          <a:bodyPr/>
-          <a:lstStyle/>
-          <a:p>
-            <a:fld id="{6FC8D850-966F-45A6-8DE7-15B891E7D40D}" type="slidenum">
-              <a:rPr lang="pt-BR" smtClean="0"/>
-              <a:t>25</a:t>
-            </a:fld>
-            <a:endParaRPr lang="pt-BR"/>
-          </a:p>
-        </p:txBody>
-      </p:sp>
-    </p:spTree>
-    <p:extLst>
-      <p:ext uri="{BB962C8B-B14F-4D97-AF65-F5344CB8AC3E}">
-        <p14:creationId xmlns:p14="http://schemas.microsoft.com/office/powerpoint/2010/main" val="3769115210"/>
-      </p:ext>
-    </p:extLst>
-  </p:cSld>
-  <p:clrMapOvr>
-    <a:masterClrMapping/>
-  </p:clrMapOvr>
-</p:notes>
-</file>
-
-<file path=ppt/notesSlides/notesSlide25.xml><?xml version="1.0" encoding="utf-8"?>
-<p:notes xmlns:a="http://schemas.openxmlformats.org/drawingml/2006/main" xmlns:r="http://schemas.openxmlformats.org/officeDocument/2006/relationships" xmlns:p="http://schemas.openxmlformats.org/presentationml/2006/main">
-  <p:cSld>
-    <p:spTree>
-      <p:nvGrpSpPr>
-        <p:cNvPr id="1" name=""/>
-        <p:cNvGrpSpPr/>
-        <p:nvPr/>
-      </p:nvGrpSpPr>
-      <p:grpSpPr>
-        <a:xfrm>
-          <a:off x="0" y="0"/>
-          <a:ext cx="0" cy="0"/>
-          <a:chOff x="0" y="0"/>
-          <a:chExt cx="0" cy="0"/>
-        </a:xfrm>
-      </p:grpSpPr>
-      <p:sp>
-        <p:nvSpPr>
-          <p:cNvPr id="2" name="Espaço Reservado para Imagem de Slide 1"/>
-          <p:cNvSpPr>
-            <a:spLocks noGrp="1" noRot="1" noChangeAspect="1"/>
-          </p:cNvSpPr>
-          <p:nvPr>
-            <p:ph type="sldImg"/>
-          </p:nvPr>
-        </p:nvSpPr>
-        <p:spPr/>
-      </p:sp>
-      <p:sp>
-        <p:nvSpPr>
-          <p:cNvPr id="3" name="Espaço Reservado para Anotações 2"/>
-          <p:cNvSpPr>
-            <a:spLocks noGrp="1"/>
-          </p:cNvSpPr>
-          <p:nvPr>
-            <p:ph type="body" idx="1"/>
-          </p:nvPr>
-        </p:nvSpPr>
-        <p:spPr/>
-        <p:txBody>
-          <a:bodyPr/>
-          <a:lstStyle/>
-          <a:p>
-            <a:endParaRPr lang="pt-BR" dirty="0"/>
-          </a:p>
-        </p:txBody>
-      </p:sp>
-      <p:sp>
-        <p:nvSpPr>
-          <p:cNvPr id="4" name="Espaço Reservado para Número de Slide 3"/>
-          <p:cNvSpPr>
-            <a:spLocks noGrp="1"/>
-          </p:cNvSpPr>
-          <p:nvPr>
-            <p:ph type="sldNum" sz="quarter" idx="5"/>
-          </p:nvPr>
-        </p:nvSpPr>
-        <p:spPr/>
-        <p:txBody>
-          <a:bodyPr/>
-          <a:lstStyle/>
-          <a:p>
-            <a:fld id="{6FC8D850-966F-45A6-8DE7-15B891E7D40D}" type="slidenum">
-              <a:rPr lang="pt-BR" smtClean="0"/>
-              <a:t>26</a:t>
-            </a:fld>
-            <a:endParaRPr lang="pt-BR"/>
-          </a:p>
-        </p:txBody>
-      </p:sp>
-    </p:spTree>
-    <p:extLst>
-      <p:ext uri="{BB962C8B-B14F-4D97-AF65-F5344CB8AC3E}">
-        <p14:creationId xmlns:p14="http://schemas.microsoft.com/office/powerpoint/2010/main" val="1661733777"/>
-      </p:ext>
-    </p:extLst>
-  </p:cSld>
-  <p:clrMapOvr>
-    <a:masterClrMapping/>
-  </p:clrMapOvr>
-</p:notes>
-</file>
-
-<file path=ppt/notesSlides/notesSlide26.xml><?xml version="1.0" encoding="utf-8"?>
-<p:notes xmlns:a="http://schemas.openxmlformats.org/drawingml/2006/main" xmlns:r="http://schemas.openxmlformats.org/officeDocument/2006/relationships" xmlns:p="http://schemas.openxmlformats.org/presentationml/2006/main">
-  <p:cSld>
-    <p:spTree>
-      <p:nvGrpSpPr>
-        <p:cNvPr id="1" name=""/>
-        <p:cNvGrpSpPr/>
-        <p:nvPr/>
-      </p:nvGrpSpPr>
-      <p:grpSpPr>
-        <a:xfrm>
-          <a:off x="0" y="0"/>
-          <a:ext cx="0" cy="0"/>
-          <a:chOff x="0" y="0"/>
-          <a:chExt cx="0" cy="0"/>
-        </a:xfrm>
-      </p:grpSpPr>
-      <p:sp>
-        <p:nvSpPr>
-          <p:cNvPr id="2" name="Espaço Reservado para Imagem de Slide 1"/>
-          <p:cNvSpPr>
-            <a:spLocks noGrp="1" noRot="1" noChangeAspect="1"/>
-          </p:cNvSpPr>
-          <p:nvPr>
-            <p:ph type="sldImg"/>
-          </p:nvPr>
-        </p:nvSpPr>
-        <p:spPr/>
-      </p:sp>
-      <p:sp>
-        <p:nvSpPr>
-          <p:cNvPr id="3" name="Espaço Reservado para Anotações 2"/>
-          <p:cNvSpPr>
-            <a:spLocks noGrp="1"/>
-          </p:cNvSpPr>
-          <p:nvPr>
-            <p:ph type="body" idx="1"/>
-          </p:nvPr>
-        </p:nvSpPr>
-        <p:spPr/>
-        <p:txBody>
-          <a:bodyPr/>
-          <a:lstStyle/>
-          <a:p>
-            <a:endParaRPr lang="pt-BR" dirty="0"/>
-          </a:p>
-        </p:txBody>
-      </p:sp>
-      <p:sp>
-        <p:nvSpPr>
-          <p:cNvPr id="4" name="Espaço Reservado para Número de Slide 3"/>
-          <p:cNvSpPr>
-            <a:spLocks noGrp="1"/>
-          </p:cNvSpPr>
-          <p:nvPr>
-            <p:ph type="sldNum" sz="quarter" idx="5"/>
-          </p:nvPr>
-        </p:nvSpPr>
-        <p:spPr/>
-        <p:txBody>
-          <a:bodyPr/>
-          <a:lstStyle/>
-          <a:p>
-            <a:fld id="{6FC8D850-966F-45A6-8DE7-15B891E7D40D}" type="slidenum">
-              <a:rPr lang="pt-BR" smtClean="0"/>
-              <a:t>27</a:t>
-            </a:fld>
-            <a:endParaRPr lang="pt-BR"/>
-          </a:p>
-        </p:txBody>
-      </p:sp>
-    </p:spTree>
-    <p:extLst>
-      <p:ext uri="{BB962C8B-B14F-4D97-AF65-F5344CB8AC3E}">
-        <p14:creationId xmlns:p14="http://schemas.microsoft.com/office/powerpoint/2010/main" val="1803953556"/>
-      </p:ext>
-    </p:extLst>
-  </p:cSld>
-  <p:clrMapOvr>
-    <a:masterClrMapping/>
-  </p:clrMapOvr>
-</p:notes>
-</file>
-
-<file path=ppt/notesSlides/notesSlide27.xml><?xml version="1.0" encoding="utf-8"?>
-<p:notes xmlns:a="http://schemas.openxmlformats.org/drawingml/2006/main" xmlns:r="http://schemas.openxmlformats.org/officeDocument/2006/relationships" xmlns:p="http://schemas.openxmlformats.org/presentationml/2006/main">
-  <p:cSld>
-    <p:spTree>
-      <p:nvGrpSpPr>
-        <p:cNvPr id="1" name=""/>
-        <p:cNvGrpSpPr/>
-        <p:nvPr/>
-      </p:nvGrpSpPr>
-      <p:grpSpPr>
-        <a:xfrm>
-          <a:off x="0" y="0"/>
-          <a:ext cx="0" cy="0"/>
-          <a:chOff x="0" y="0"/>
-          <a:chExt cx="0" cy="0"/>
-        </a:xfrm>
-      </p:grpSpPr>
-      <p:sp>
-        <p:nvSpPr>
-          <p:cNvPr id="2" name="Espaço Reservado para Imagem de Slide 1"/>
-          <p:cNvSpPr>
-            <a:spLocks noGrp="1" noRot="1" noChangeAspect="1"/>
-          </p:cNvSpPr>
-          <p:nvPr>
-            <p:ph type="sldImg"/>
-          </p:nvPr>
-        </p:nvSpPr>
-        <p:spPr/>
-      </p:sp>
-      <p:sp>
-        <p:nvSpPr>
-          <p:cNvPr id="3" name="Espaço Reservado para Anotações 2"/>
-          <p:cNvSpPr>
-            <a:spLocks noGrp="1"/>
-          </p:cNvSpPr>
-          <p:nvPr>
-            <p:ph type="body" idx="1"/>
-          </p:nvPr>
-        </p:nvSpPr>
-        <p:spPr/>
-        <p:txBody>
-          <a:bodyPr/>
-          <a:lstStyle/>
-          <a:p>
-            <a:endParaRPr lang="pt-BR" dirty="0"/>
-          </a:p>
-        </p:txBody>
-      </p:sp>
-      <p:sp>
-        <p:nvSpPr>
-          <p:cNvPr id="4" name="Espaço Reservado para Número de Slide 3"/>
-          <p:cNvSpPr>
-            <a:spLocks noGrp="1"/>
-          </p:cNvSpPr>
-          <p:nvPr>
-            <p:ph type="sldNum" sz="quarter" idx="5"/>
-          </p:nvPr>
-        </p:nvSpPr>
-        <p:spPr/>
-        <p:txBody>
-          <a:bodyPr/>
-          <a:lstStyle/>
-          <a:p>
-            <a:fld id="{6FC8D850-966F-45A6-8DE7-15B891E7D40D}" type="slidenum">
-              <a:rPr lang="pt-BR" smtClean="0"/>
-              <a:t>28</a:t>
-            </a:fld>
-            <a:endParaRPr lang="pt-BR"/>
-          </a:p>
-        </p:txBody>
-      </p:sp>
-    </p:spTree>
-    <p:extLst>
-      <p:ext uri="{BB962C8B-B14F-4D97-AF65-F5344CB8AC3E}">
-        <p14:creationId xmlns:p14="http://schemas.microsoft.com/office/powerpoint/2010/main" val="3041248039"/>
-      </p:ext>
-    </p:extLst>
-  </p:cSld>
-  <p:clrMapOvr>
-    <a:masterClrMapping/>
-  </p:clrMapOvr>
-</p:notes>
-</file>
-
-<file path=ppt/notesSlides/notesSlide28.xml><?xml version="1.0" encoding="utf-8"?>
-<p:notes xmlns:a="http://schemas.openxmlformats.org/drawingml/2006/main" xmlns:r="http://schemas.openxmlformats.org/officeDocument/2006/relationships" xmlns:p="http://schemas.openxmlformats.org/presentationml/2006/main">
-  <p:cSld>
-    <p:spTree>
-      <p:nvGrpSpPr>
-        <p:cNvPr id="1" name=""/>
-        <p:cNvGrpSpPr/>
-        <p:nvPr/>
-      </p:nvGrpSpPr>
-      <p:grpSpPr>
-        <a:xfrm>
-          <a:off x="0" y="0"/>
-          <a:ext cx="0" cy="0"/>
-          <a:chOff x="0" y="0"/>
-          <a:chExt cx="0" cy="0"/>
-        </a:xfrm>
-      </p:grpSpPr>
-      <p:sp>
-        <p:nvSpPr>
-          <p:cNvPr id="2" name="Espaço Reservado para Imagem de Slide 1"/>
-          <p:cNvSpPr>
-            <a:spLocks noGrp="1" noRot="1" noChangeAspect="1"/>
-          </p:cNvSpPr>
-          <p:nvPr>
-            <p:ph type="sldImg"/>
-          </p:nvPr>
-        </p:nvSpPr>
-        <p:spPr/>
-      </p:sp>
-      <p:sp>
-        <p:nvSpPr>
-          <p:cNvPr id="3" name="Espaço Reservado para Anotações 2"/>
-          <p:cNvSpPr>
-            <a:spLocks noGrp="1"/>
-          </p:cNvSpPr>
-          <p:nvPr>
-            <p:ph type="body" idx="1"/>
-          </p:nvPr>
-        </p:nvSpPr>
-        <p:spPr/>
-        <p:txBody>
-          <a:bodyPr/>
-          <a:lstStyle/>
-          <a:p>
-            <a:endParaRPr lang="pt-BR" dirty="0"/>
-          </a:p>
-        </p:txBody>
-      </p:sp>
-      <p:sp>
-        <p:nvSpPr>
-          <p:cNvPr id="4" name="Espaço Reservado para Número de Slide 3"/>
-          <p:cNvSpPr>
-            <a:spLocks noGrp="1"/>
-          </p:cNvSpPr>
-          <p:nvPr>
-            <p:ph type="sldNum" sz="quarter" idx="5"/>
-          </p:nvPr>
-        </p:nvSpPr>
-        <p:spPr/>
-        <p:txBody>
-          <a:bodyPr/>
-          <a:lstStyle/>
-          <a:p>
-            <a:fld id="{6FC8D850-966F-45A6-8DE7-15B891E7D40D}" type="slidenum">
-              <a:rPr lang="pt-BR" smtClean="0"/>
-              <a:t>29</a:t>
-            </a:fld>
-            <a:endParaRPr lang="pt-BR"/>
-          </a:p>
-        </p:txBody>
-      </p:sp>
-    </p:spTree>
-    <p:extLst>
-      <p:ext uri="{BB962C8B-B14F-4D97-AF65-F5344CB8AC3E}">
-        <p14:creationId xmlns:p14="http://schemas.microsoft.com/office/powerpoint/2010/main" val="482398735"/>
-      </p:ext>
-    </p:extLst>
-  </p:cSld>
-  <p:clrMapOvr>
-    <a:masterClrMapping/>
-  </p:clrMapOvr>
-</p:notes>
-</file>
-
-<file path=ppt/notesSlides/notesSlide29.xml><?xml version="1.0" encoding="utf-8"?>
-<p:notes xmlns:a="http://schemas.openxmlformats.org/drawingml/2006/main" xmlns:r="http://schemas.openxmlformats.org/officeDocument/2006/relationships" xmlns:p="http://schemas.openxmlformats.org/presentationml/2006/main">
-  <p:cSld>
-    <p:spTree>
-      <p:nvGrpSpPr>
-        <p:cNvPr id="1" name=""/>
-        <p:cNvGrpSpPr/>
-        <p:nvPr/>
-      </p:nvGrpSpPr>
-      <p:grpSpPr>
-        <a:xfrm>
-          <a:off x="0" y="0"/>
-          <a:ext cx="0" cy="0"/>
-          <a:chOff x="0" y="0"/>
-          <a:chExt cx="0" cy="0"/>
-        </a:xfrm>
-      </p:grpSpPr>
-      <p:sp>
-        <p:nvSpPr>
-          <p:cNvPr id="2" name="Espaço Reservado para Imagem de Slide 1"/>
-          <p:cNvSpPr>
-            <a:spLocks noGrp="1" noRot="1" noChangeAspect="1"/>
-          </p:cNvSpPr>
-          <p:nvPr>
-            <p:ph type="sldImg"/>
-          </p:nvPr>
-        </p:nvSpPr>
-        <p:spPr/>
-      </p:sp>
-      <p:sp>
-        <p:nvSpPr>
-          <p:cNvPr id="3" name="Espaço Reservado para Anotações 2"/>
-          <p:cNvSpPr>
-            <a:spLocks noGrp="1"/>
-          </p:cNvSpPr>
-          <p:nvPr>
-            <p:ph type="body" idx="1"/>
-          </p:nvPr>
-        </p:nvSpPr>
-        <p:spPr/>
-        <p:txBody>
-          <a:bodyPr/>
-          <a:lstStyle/>
-          <a:p>
-            <a:endParaRPr lang="pt-BR" dirty="0"/>
-          </a:p>
-        </p:txBody>
-      </p:sp>
-      <p:sp>
-        <p:nvSpPr>
-          <p:cNvPr id="4" name="Espaço Reservado para Número de Slide 3"/>
-          <p:cNvSpPr>
-            <a:spLocks noGrp="1"/>
-          </p:cNvSpPr>
-          <p:nvPr>
-            <p:ph type="sldNum" sz="quarter" idx="5"/>
-          </p:nvPr>
-        </p:nvSpPr>
-        <p:spPr/>
-        <p:txBody>
-          <a:bodyPr/>
-          <a:lstStyle/>
-          <a:p>
-            <a:fld id="{6FC8D850-966F-45A6-8DE7-15B891E7D40D}" type="slidenum">
-              <a:rPr lang="pt-BR" smtClean="0"/>
-              <a:t>30</a:t>
-            </a:fld>
-            <a:endParaRPr lang="pt-BR"/>
-          </a:p>
-        </p:txBody>
-      </p:sp>
-    </p:spTree>
-    <p:extLst>
-      <p:ext uri="{BB962C8B-B14F-4D97-AF65-F5344CB8AC3E}">
-        <p14:creationId xmlns:p14="http://schemas.microsoft.com/office/powerpoint/2010/main" val="1805858919"/>
-      </p:ext>
-    </p:extLst>
-  </p:cSld>
-  <p:clrMapOvr>
-    <a:masterClrMapping/>
-  </p:clrMapOvr>
-</p:notes>
-</file>
-
-<file path=ppt/notesSlides/notesSlide3.xml><?xml version="1.0" encoding="utf-8"?>
-<p:notes xmlns:a="http://schemas.openxmlformats.org/drawingml/2006/main" xmlns:r="http://schemas.openxmlformats.org/officeDocument/2006/relationships" xmlns:p="http://schemas.openxmlformats.org/presentationml/2006/main">
-  <p:cSld>
-    <p:spTree>
-      <p:nvGrpSpPr>
-        <p:cNvPr id="1" name=""/>
-        <p:cNvGrpSpPr/>
-        <p:nvPr/>
-      </p:nvGrpSpPr>
-      <p:grpSpPr>
-        <a:xfrm>
-          <a:off x="0" y="0"/>
-          <a:ext cx="0" cy="0"/>
-          <a:chOff x="0" y="0"/>
-          <a:chExt cx="0" cy="0"/>
-        </a:xfrm>
-      </p:grpSpPr>
-      <p:sp>
-        <p:nvSpPr>
-          <p:cNvPr id="2" name="Espaço Reservado para Imagem de Slide 1"/>
-          <p:cNvSpPr>
-            <a:spLocks noGrp="1" noRot="1" noChangeAspect="1"/>
-          </p:cNvSpPr>
-          <p:nvPr>
-            <p:ph type="sldImg"/>
-          </p:nvPr>
-        </p:nvSpPr>
-        <p:spPr/>
-      </p:sp>
-      <p:sp>
-        <p:nvSpPr>
-          <p:cNvPr id="3" name="Espaço Reservado para Anotações 2"/>
-          <p:cNvSpPr>
-            <a:spLocks noGrp="1"/>
-          </p:cNvSpPr>
-          <p:nvPr>
-            <p:ph type="body" idx="1"/>
-          </p:nvPr>
-        </p:nvSpPr>
-        <p:spPr/>
-        <p:txBody>
-          <a:bodyPr/>
-          <a:lstStyle/>
-          <a:p>
-            <a:endParaRPr lang="pt-BR" dirty="0"/>
-          </a:p>
-        </p:txBody>
-      </p:sp>
-      <p:sp>
-        <p:nvSpPr>
-          <p:cNvPr id="4" name="Espaço Reservado para Número de Slide 3"/>
-          <p:cNvSpPr>
-            <a:spLocks noGrp="1"/>
-          </p:cNvSpPr>
-          <p:nvPr>
-            <p:ph type="sldNum" sz="quarter" idx="5"/>
-          </p:nvPr>
-        </p:nvSpPr>
-        <p:spPr/>
-        <p:txBody>
-          <a:bodyPr/>
-          <a:lstStyle/>
-          <a:p>
-            <a:fld id="{6FC8D850-966F-45A6-8DE7-15B891E7D40D}" type="slidenum">
-              <a:rPr lang="pt-BR" smtClean="0"/>
-              <a:t>3</a:t>
-            </a:fld>
-            <a:endParaRPr lang="pt-BR"/>
-          </a:p>
-        </p:txBody>
-      </p:sp>
-    </p:spTree>
-    <p:extLst>
-      <p:ext uri="{BB962C8B-B14F-4D97-AF65-F5344CB8AC3E}">
-        <p14:creationId xmlns:p14="http://schemas.microsoft.com/office/powerpoint/2010/main" val="5455443"/>
-      </p:ext>
-    </p:extLst>
-  </p:cSld>
-  <p:clrMapOvr>
-    <a:masterClrMapping/>
-  </p:clrMapOvr>
-</p:notes>
-</file>
-
-<file path=ppt/notesSlides/notesSlide30.xml><?xml version="1.0" encoding="utf-8"?>
 <p:notes xmlns:a="http://schemas.openxmlformats.org/drawingml/2006/main" xmlns:r="http://schemas.openxmlformats.org/officeDocument/2006/relationships" xmlns:p="http://schemas.openxmlformats.org/presentationml/2006/main">
   <p:cSld>
     <p:spTree>
@@ -2806,7 +1981,7 @@
                 <a:tabLst/>
                 <a:defRPr/>
               </a:pPr>
-              <a:t>31</a:t>
+              <a:t>22</a:t>
             </a:fld>
             <a:endParaRPr kumimoji="0" lang="pt-BR" sz="2200" b="0" i="0" u="none" strike="noStrike" kern="1200" cap="none" spc="0" normalizeH="0" baseline="0" noProof="0">
               <a:ln>
@@ -2838,7 +2013,7 @@
 </p:notes>
 </file>
 
-<file path=ppt/notesSlides/notesSlide31.xml><?xml version="1.0" encoding="utf-8"?>
+<file path=ppt/notesSlides/notesSlide22.xml><?xml version="1.0" encoding="utf-8"?>
 <p:notes xmlns:a="http://schemas.openxmlformats.org/drawingml/2006/main" xmlns:r="http://schemas.openxmlformats.org/officeDocument/2006/relationships" xmlns:p="http://schemas.openxmlformats.org/presentationml/2006/main">
   <p:cSld>
     <p:spTree>
@@ -2950,7 +2125,7 @@
                 <a:tabLst/>
                 <a:defRPr/>
               </a:pPr>
-              <a:t>32</a:t>
+              <a:t>23</a:t>
             </a:fld>
             <a:endParaRPr kumimoji="0" lang="pt-BR" sz="2200" b="0" i="0" u="none" strike="noStrike" kern="1200" cap="none" spc="0" normalizeH="0" baseline="0" noProof="0">
               <a:ln>
@@ -2982,7 +2157,7 @@
 </p:notes>
 </file>
 
-<file path=ppt/notesSlides/notesSlide32.xml><?xml version="1.0" encoding="utf-8"?>
+<file path=ppt/notesSlides/notesSlide23.xml><?xml version="1.0" encoding="utf-8"?>
 <p:notes xmlns:a="http://schemas.openxmlformats.org/drawingml/2006/main" xmlns:r="http://schemas.openxmlformats.org/officeDocument/2006/relationships" xmlns:p="http://schemas.openxmlformats.org/presentationml/2006/main">
   <p:cSld>
     <p:spTree>
@@ -3094,7 +2269,7 @@
                 <a:tabLst/>
                 <a:defRPr/>
               </a:pPr>
-              <a:t>33</a:t>
+              <a:t>24</a:t>
             </a:fld>
             <a:endParaRPr kumimoji="0" lang="pt-BR" sz="2200" b="0" i="0" u="none" strike="noStrike" kern="1200" cap="none" spc="0" normalizeH="0" baseline="0" noProof="0">
               <a:ln>
@@ -3126,7 +2301,7 @@
 </p:notes>
 </file>
 
-<file path=ppt/notesSlides/notesSlide33.xml><?xml version="1.0" encoding="utf-8"?>
+<file path=ppt/notesSlides/notesSlide24.xml><?xml version="1.0" encoding="utf-8"?>
 <p:notes xmlns:a="http://schemas.openxmlformats.org/drawingml/2006/main" xmlns:r="http://schemas.openxmlformats.org/officeDocument/2006/relationships" xmlns:p="http://schemas.openxmlformats.org/presentationml/2006/main">
   <p:cSld>
     <p:spTree>
@@ -3238,7 +2413,7 @@
                 <a:tabLst/>
                 <a:defRPr/>
               </a:pPr>
-              <a:t>34</a:t>
+              <a:t>25</a:t>
             </a:fld>
             <a:endParaRPr kumimoji="0" lang="pt-BR" sz="2200" b="0" i="0" u="none" strike="noStrike" kern="1200" cap="none" spc="0" normalizeH="0" baseline="0" noProof="0">
               <a:ln>
@@ -3261,6 +2436,90 @@
     <p:extLst>
       <p:ext uri="{BB962C8B-B14F-4D97-AF65-F5344CB8AC3E}">
         <p14:creationId xmlns:p14="http://schemas.microsoft.com/office/powerpoint/2010/main" val="227195064"/>
+      </p:ext>
+    </p:extLst>
+  </p:cSld>
+  <p:clrMapOvr>
+    <a:masterClrMapping/>
+  </p:clrMapOvr>
+</p:notes>
+</file>
+
+<file path=ppt/notesSlides/notesSlide3.xml><?xml version="1.0" encoding="utf-8"?>
+<p:notes xmlns:a="http://schemas.openxmlformats.org/drawingml/2006/main" xmlns:r="http://schemas.openxmlformats.org/officeDocument/2006/relationships" xmlns:p="http://schemas.openxmlformats.org/presentationml/2006/main">
+  <p:cSld>
+    <p:spTree>
+      <p:nvGrpSpPr>
+        <p:cNvPr id="1" name=""/>
+        <p:cNvGrpSpPr/>
+        <p:nvPr/>
+      </p:nvGrpSpPr>
+      <p:grpSpPr>
+        <a:xfrm>
+          <a:off x="0" y="0"/>
+          <a:ext cx="0" cy="0"/>
+          <a:chOff x="0" y="0"/>
+          <a:chExt cx="0" cy="0"/>
+        </a:xfrm>
+      </p:grpSpPr>
+      <p:sp>
+        <p:nvSpPr>
+          <p:cNvPr id="2" name="Espaço Reservado para Imagem de Slide 1"/>
+          <p:cNvSpPr>
+            <a:spLocks noGrp="1" noRot="1" noChangeAspect="1"/>
+          </p:cNvSpPr>
+          <p:nvPr>
+            <p:ph type="sldImg"/>
+          </p:nvPr>
+        </p:nvSpPr>
+        <p:spPr/>
+      </p:sp>
+      <p:sp>
+        <p:nvSpPr>
+          <p:cNvPr id="3" name="Espaço Reservado para Anotações 2"/>
+          <p:cNvSpPr>
+            <a:spLocks noGrp="1"/>
+          </p:cNvSpPr>
+          <p:nvPr>
+            <p:ph type="body" idx="1"/>
+          </p:nvPr>
+        </p:nvSpPr>
+        <p:spPr/>
+        <p:txBody>
+          <a:bodyPr/>
+          <a:lstStyle/>
+          <a:p>
+            <a:endParaRPr lang="pt-BR" dirty="0"/>
+          </a:p>
+        </p:txBody>
+      </p:sp>
+      <p:sp>
+        <p:nvSpPr>
+          <p:cNvPr id="4" name="Espaço Reservado para Número de Slide 3"/>
+          <p:cNvSpPr>
+            <a:spLocks noGrp="1"/>
+          </p:cNvSpPr>
+          <p:nvPr>
+            <p:ph type="sldNum" sz="quarter" idx="5"/>
+          </p:nvPr>
+        </p:nvSpPr>
+        <p:spPr/>
+        <p:txBody>
+          <a:bodyPr/>
+          <a:lstStyle/>
+          <a:p>
+            <a:fld id="{6FC8D850-966F-45A6-8DE7-15B891E7D40D}" type="slidenum">
+              <a:rPr lang="pt-BR" smtClean="0"/>
+              <a:t>3</a:t>
+            </a:fld>
+            <a:endParaRPr lang="pt-BR"/>
+          </a:p>
+        </p:txBody>
+      </p:sp>
+    </p:spTree>
+    <p:extLst>
+      <p:ext uri="{BB962C8B-B14F-4D97-AF65-F5344CB8AC3E}">
+        <p14:creationId xmlns:p14="http://schemas.microsoft.com/office/powerpoint/2010/main" val="5455443"/>
       </p:ext>
     </p:extLst>
   </p:cSld>
@@ -3530,7 +2789,7 @@
         <p:cNvPr id="1" name="">
           <a:extLst>
             <a:ext uri="{FF2B5EF4-FFF2-40B4-BE49-F238E27FC236}">
-              <a16:creationId xmlns:a16="http://schemas.microsoft.com/office/drawing/2014/main" xmlns="" id="{5BDAD2A1-5359-2B35-87A2-CB62DA9AC234}"/>
+              <a16:creationId xmlns:a16="http://schemas.microsoft.com/office/drawing/2014/main" id="{5BDAD2A1-5359-2B35-87A2-CB62DA9AC234}"/>
             </a:ext>
           </a:extLst>
         </p:cNvPr>
@@ -3550,7 +2809,7 @@
           <p:cNvPr id="2" name="Espaço Reservado para Imagem de Slide 1">
             <a:extLst>
               <a:ext uri="{FF2B5EF4-FFF2-40B4-BE49-F238E27FC236}">
-                <a16:creationId xmlns:a16="http://schemas.microsoft.com/office/drawing/2014/main" xmlns="" id="{E3CCF2D8-39A8-6970-A91C-CA1BB1172B74}"/>
+                <a16:creationId xmlns:a16="http://schemas.microsoft.com/office/drawing/2014/main" id="{E3CCF2D8-39A8-6970-A91C-CA1BB1172B74}"/>
               </a:ext>
             </a:extLst>
           </p:cNvPr>
@@ -3568,7 +2827,7 @@
           <p:cNvPr id="3" name="Espaço Reservado para Anotações 2">
             <a:extLst>
               <a:ext uri="{FF2B5EF4-FFF2-40B4-BE49-F238E27FC236}">
-                <a16:creationId xmlns:a16="http://schemas.microsoft.com/office/drawing/2014/main" xmlns="" id="{D2A0BCB8-A319-F2B9-61A9-80B79A20C8AD}"/>
+                <a16:creationId xmlns:a16="http://schemas.microsoft.com/office/drawing/2014/main" id="{D2A0BCB8-A319-F2B9-61A9-80B79A20C8AD}"/>
               </a:ext>
             </a:extLst>
           </p:cNvPr>
@@ -3593,7 +2852,7 @@
           <p:cNvPr id="4" name="Espaço Reservado para Número de Slide 3">
             <a:extLst>
               <a:ext uri="{FF2B5EF4-FFF2-40B4-BE49-F238E27FC236}">
-                <a16:creationId xmlns:a16="http://schemas.microsoft.com/office/drawing/2014/main" xmlns="" id="{7430ECDE-57AD-7D93-14A4-A77602871389}"/>
+                <a16:creationId xmlns:a16="http://schemas.microsoft.com/office/drawing/2014/main" id="{7430ECDE-57AD-7D93-14A4-A77602871389}"/>
               </a:ext>
             </a:extLst>
           </p:cNvPr>
@@ -3638,7 +2897,7 @@
         <p:cNvPr id="1" name="">
           <a:extLst>
             <a:ext uri="{FF2B5EF4-FFF2-40B4-BE49-F238E27FC236}">
-              <a16:creationId xmlns:a16="http://schemas.microsoft.com/office/drawing/2014/main" xmlns="" id="{2E6003E3-9C23-DFB4-E656-EE817B7B63F5}"/>
+              <a16:creationId xmlns:a16="http://schemas.microsoft.com/office/drawing/2014/main" id="{2E6003E3-9C23-DFB4-E656-EE817B7B63F5}"/>
             </a:ext>
           </a:extLst>
         </p:cNvPr>
@@ -3658,7 +2917,7 @@
           <p:cNvPr id="2" name="Espaço Reservado para Imagem de Slide 1">
             <a:extLst>
               <a:ext uri="{FF2B5EF4-FFF2-40B4-BE49-F238E27FC236}">
-                <a16:creationId xmlns:a16="http://schemas.microsoft.com/office/drawing/2014/main" xmlns="" id="{A47E6B73-509B-606A-BA52-ECD9A901942C}"/>
+                <a16:creationId xmlns:a16="http://schemas.microsoft.com/office/drawing/2014/main" id="{A47E6B73-509B-606A-BA52-ECD9A901942C}"/>
               </a:ext>
             </a:extLst>
           </p:cNvPr>
@@ -3676,7 +2935,7 @@
           <p:cNvPr id="3" name="Espaço Reservado para Anotações 2">
             <a:extLst>
               <a:ext uri="{FF2B5EF4-FFF2-40B4-BE49-F238E27FC236}">
-                <a16:creationId xmlns:a16="http://schemas.microsoft.com/office/drawing/2014/main" xmlns="" id="{1E7DD88D-B209-FE30-9F24-9AD224BF1EC8}"/>
+                <a16:creationId xmlns:a16="http://schemas.microsoft.com/office/drawing/2014/main" id="{1E7DD88D-B209-FE30-9F24-9AD224BF1EC8}"/>
               </a:ext>
             </a:extLst>
           </p:cNvPr>
@@ -3701,7 +2960,7 @@
           <p:cNvPr id="4" name="Espaço Reservado para Número de Slide 3">
             <a:extLst>
               <a:ext uri="{FF2B5EF4-FFF2-40B4-BE49-F238E27FC236}">
-                <a16:creationId xmlns:a16="http://schemas.microsoft.com/office/drawing/2014/main" xmlns="" id="{4A209F62-F946-427E-D702-876E44243A30}"/>
+                <a16:creationId xmlns:a16="http://schemas.microsoft.com/office/drawing/2014/main" id="{4A209F62-F946-427E-D702-876E44243A30}"/>
               </a:ext>
             </a:extLst>
           </p:cNvPr>
@@ -3746,7 +3005,7 @@
         <p:cNvPr id="1" name="">
           <a:extLst>
             <a:ext uri="{FF2B5EF4-FFF2-40B4-BE49-F238E27FC236}">
-              <a16:creationId xmlns:a16="http://schemas.microsoft.com/office/drawing/2014/main" xmlns="" id="{31790B8E-ACCA-F7FC-062F-E911F5C53D3B}"/>
+              <a16:creationId xmlns:a16="http://schemas.microsoft.com/office/drawing/2014/main" id="{31790B8E-ACCA-F7FC-062F-E911F5C53D3B}"/>
             </a:ext>
           </a:extLst>
         </p:cNvPr>
@@ -3766,7 +3025,7 @@
           <p:cNvPr id="2" name="Espaço Reservado para Imagem de Slide 1">
             <a:extLst>
               <a:ext uri="{FF2B5EF4-FFF2-40B4-BE49-F238E27FC236}">
-                <a16:creationId xmlns:a16="http://schemas.microsoft.com/office/drawing/2014/main" xmlns="" id="{77BBB11C-3D4E-BD82-F35A-38E1761E0CFD}"/>
+                <a16:creationId xmlns:a16="http://schemas.microsoft.com/office/drawing/2014/main" id="{77BBB11C-3D4E-BD82-F35A-38E1761E0CFD}"/>
               </a:ext>
             </a:extLst>
           </p:cNvPr>
@@ -3784,7 +3043,7 @@
           <p:cNvPr id="3" name="Espaço Reservado para Anotações 2">
             <a:extLst>
               <a:ext uri="{FF2B5EF4-FFF2-40B4-BE49-F238E27FC236}">
-                <a16:creationId xmlns:a16="http://schemas.microsoft.com/office/drawing/2014/main" xmlns="" id="{88D90C90-61FD-F2FA-BABE-D96B4D6667D3}"/>
+                <a16:creationId xmlns:a16="http://schemas.microsoft.com/office/drawing/2014/main" id="{88D90C90-61FD-F2FA-BABE-D96B4D6667D3}"/>
               </a:ext>
             </a:extLst>
           </p:cNvPr>
@@ -3809,7 +3068,7 @@
           <p:cNvPr id="4" name="Espaço Reservado para Número de Slide 3">
             <a:extLst>
               <a:ext uri="{FF2B5EF4-FFF2-40B4-BE49-F238E27FC236}">
-                <a16:creationId xmlns:a16="http://schemas.microsoft.com/office/drawing/2014/main" xmlns="" id="{281AAE74-6902-1DF5-1CE0-D34FA2800337}"/>
+                <a16:creationId xmlns:a16="http://schemas.microsoft.com/office/drawing/2014/main" id="{281AAE74-6902-1DF5-1CE0-D34FA2800337}"/>
               </a:ext>
             </a:extLst>
           </p:cNvPr>
@@ -3868,7 +3127,7 @@
           <p:cNvPr id="2" name="Título 1">
             <a:extLst>
               <a:ext uri="{FF2B5EF4-FFF2-40B4-BE49-F238E27FC236}">
-                <a16:creationId xmlns:a16="http://schemas.microsoft.com/office/drawing/2014/main" xmlns="" id="{1DB9B4FF-B06E-403C-A326-BDC64D8FF94E}"/>
+                <a16:creationId xmlns:a16="http://schemas.microsoft.com/office/drawing/2014/main" id="{1DB9B4FF-B06E-403C-A326-BDC64D8FF94E}"/>
               </a:ext>
             </a:extLst>
           </p:cNvPr>
@@ -3905,7 +3164,7 @@
           <p:cNvPr id="3" name="Subtítulo 2">
             <a:extLst>
               <a:ext uri="{FF2B5EF4-FFF2-40B4-BE49-F238E27FC236}">
-                <a16:creationId xmlns:a16="http://schemas.microsoft.com/office/drawing/2014/main" xmlns="" id="{247BDFCE-746E-45BF-A319-4733D58D1632}"/>
+                <a16:creationId xmlns:a16="http://schemas.microsoft.com/office/drawing/2014/main" id="{247BDFCE-746E-45BF-A319-4733D58D1632}"/>
               </a:ext>
             </a:extLst>
           </p:cNvPr>
@@ -3975,7 +3234,7 @@
           <p:cNvPr id="4" name="Espaço Reservado para Data 3">
             <a:extLst>
               <a:ext uri="{FF2B5EF4-FFF2-40B4-BE49-F238E27FC236}">
-                <a16:creationId xmlns:a16="http://schemas.microsoft.com/office/drawing/2014/main" xmlns="" id="{9EDE2778-5372-4104-B96D-968184DA8288}"/>
+                <a16:creationId xmlns:a16="http://schemas.microsoft.com/office/drawing/2014/main" id="{9EDE2778-5372-4104-B96D-968184DA8288}"/>
               </a:ext>
             </a:extLst>
           </p:cNvPr>
@@ -3993,7 +3252,7 @@
           <a:p>
             <a:fld id="{63289F7E-B80B-496E-81B4-D396C37C9454}" type="datetimeFigureOut">
               <a:rPr lang="pt-BR" smtClean="0"/>
-              <a:t>12/05/2025</a:t>
+              <a:t>13/05/2025</a:t>
             </a:fld>
             <a:endParaRPr lang="pt-BR"/>
           </a:p>
@@ -4004,7 +3263,7 @@
           <p:cNvPr id="5" name="Espaço Reservado para Rodapé 4">
             <a:extLst>
               <a:ext uri="{FF2B5EF4-FFF2-40B4-BE49-F238E27FC236}">
-                <a16:creationId xmlns:a16="http://schemas.microsoft.com/office/drawing/2014/main" xmlns="" id="{C1DD0F41-C861-4051-988D-3024A37A4B93}"/>
+                <a16:creationId xmlns:a16="http://schemas.microsoft.com/office/drawing/2014/main" id="{C1DD0F41-C861-4051-988D-3024A37A4B93}"/>
               </a:ext>
             </a:extLst>
           </p:cNvPr>
@@ -4029,7 +3288,7 @@
           <p:cNvPr id="6" name="Espaço Reservado para Número de Slide 5">
             <a:extLst>
               <a:ext uri="{FF2B5EF4-FFF2-40B4-BE49-F238E27FC236}">
-                <a16:creationId xmlns:a16="http://schemas.microsoft.com/office/drawing/2014/main" xmlns="" id="{07E5967E-D980-431A-A5DB-3F0C5030A81E}"/>
+                <a16:creationId xmlns:a16="http://schemas.microsoft.com/office/drawing/2014/main" id="{07E5967E-D980-431A-A5DB-3F0C5030A81E}"/>
               </a:ext>
             </a:extLst>
           </p:cNvPr>
@@ -4047,7 +3306,7 @@
           <a:p>
             <a:fld id="{1A7E88B7-70CE-4035-AE73-13FA6FB985D4}" type="slidenum">
               <a:rPr lang="pt-BR" smtClean="0"/>
-              <a:t>‹nº›</a:t>
+              <a:t>‹#›</a:t>
             </a:fld>
             <a:endParaRPr lang="pt-BR"/>
           </a:p>
@@ -4088,7 +3347,7 @@
           <p:cNvPr id="2" name="Título 1">
             <a:extLst>
               <a:ext uri="{FF2B5EF4-FFF2-40B4-BE49-F238E27FC236}">
-                <a16:creationId xmlns:a16="http://schemas.microsoft.com/office/drawing/2014/main" xmlns="" id="{9036C49F-3E68-4175-81BA-3C3FEE44308A}"/>
+                <a16:creationId xmlns:a16="http://schemas.microsoft.com/office/drawing/2014/main" id="{9036C49F-3E68-4175-81BA-3C3FEE44308A}"/>
               </a:ext>
             </a:extLst>
           </p:cNvPr>
@@ -4116,7 +3375,7 @@
           <p:cNvPr id="3" name="Espaço Reservado para Texto Vertical 2">
             <a:extLst>
               <a:ext uri="{FF2B5EF4-FFF2-40B4-BE49-F238E27FC236}">
-                <a16:creationId xmlns:a16="http://schemas.microsoft.com/office/drawing/2014/main" xmlns="" id="{426FA736-3DD3-4D4E-B57B-BBE1D8F7D424}"/>
+                <a16:creationId xmlns:a16="http://schemas.microsoft.com/office/drawing/2014/main" id="{426FA736-3DD3-4D4E-B57B-BBE1D8F7D424}"/>
               </a:ext>
             </a:extLst>
           </p:cNvPr>
@@ -4173,7 +3432,7 @@
           <p:cNvPr id="4" name="Espaço Reservado para Data 3">
             <a:extLst>
               <a:ext uri="{FF2B5EF4-FFF2-40B4-BE49-F238E27FC236}">
-                <a16:creationId xmlns:a16="http://schemas.microsoft.com/office/drawing/2014/main" xmlns="" id="{99E8855C-D8FD-48F6-B14E-861E0DE4D915}"/>
+                <a16:creationId xmlns:a16="http://schemas.microsoft.com/office/drawing/2014/main" id="{99E8855C-D8FD-48F6-B14E-861E0DE4D915}"/>
               </a:ext>
             </a:extLst>
           </p:cNvPr>
@@ -4191,7 +3450,7 @@
           <a:p>
             <a:fld id="{63289F7E-B80B-496E-81B4-D396C37C9454}" type="datetimeFigureOut">
               <a:rPr lang="pt-BR" smtClean="0"/>
-              <a:t>12/05/2025</a:t>
+              <a:t>13/05/2025</a:t>
             </a:fld>
             <a:endParaRPr lang="pt-BR"/>
           </a:p>
@@ -4202,7 +3461,7 @@
           <p:cNvPr id="5" name="Espaço Reservado para Rodapé 4">
             <a:extLst>
               <a:ext uri="{FF2B5EF4-FFF2-40B4-BE49-F238E27FC236}">
-                <a16:creationId xmlns:a16="http://schemas.microsoft.com/office/drawing/2014/main" xmlns="" id="{97C0BB88-2F21-42A5-ACFF-83DA47F2D340}"/>
+                <a16:creationId xmlns:a16="http://schemas.microsoft.com/office/drawing/2014/main" id="{97C0BB88-2F21-42A5-ACFF-83DA47F2D340}"/>
               </a:ext>
             </a:extLst>
           </p:cNvPr>
@@ -4227,7 +3486,7 @@
           <p:cNvPr id="6" name="Espaço Reservado para Número de Slide 5">
             <a:extLst>
               <a:ext uri="{FF2B5EF4-FFF2-40B4-BE49-F238E27FC236}">
-                <a16:creationId xmlns:a16="http://schemas.microsoft.com/office/drawing/2014/main" xmlns="" id="{6CB462B3-1F22-4C05-B4B8-7A279FB7D5E9}"/>
+                <a16:creationId xmlns:a16="http://schemas.microsoft.com/office/drawing/2014/main" id="{6CB462B3-1F22-4C05-B4B8-7A279FB7D5E9}"/>
               </a:ext>
             </a:extLst>
           </p:cNvPr>
@@ -4245,7 +3504,7 @@
           <a:p>
             <a:fld id="{1A7E88B7-70CE-4035-AE73-13FA6FB985D4}" type="slidenum">
               <a:rPr lang="pt-BR" smtClean="0"/>
-              <a:t>‹nº›</a:t>
+              <a:t>‹#›</a:t>
             </a:fld>
             <a:endParaRPr lang="pt-BR"/>
           </a:p>
@@ -4286,7 +3545,7 @@
           <p:cNvPr id="2" name="Título Vertical 1">
             <a:extLst>
               <a:ext uri="{FF2B5EF4-FFF2-40B4-BE49-F238E27FC236}">
-                <a16:creationId xmlns:a16="http://schemas.microsoft.com/office/drawing/2014/main" xmlns="" id="{EAEAB728-701C-4207-A9D5-23FF45C60502}"/>
+                <a16:creationId xmlns:a16="http://schemas.microsoft.com/office/drawing/2014/main" id="{EAEAB728-701C-4207-A9D5-23FF45C60502}"/>
               </a:ext>
             </a:extLst>
           </p:cNvPr>
@@ -4319,7 +3578,7 @@
           <p:cNvPr id="3" name="Espaço Reservado para Texto Vertical 2">
             <a:extLst>
               <a:ext uri="{FF2B5EF4-FFF2-40B4-BE49-F238E27FC236}">
-                <a16:creationId xmlns:a16="http://schemas.microsoft.com/office/drawing/2014/main" xmlns="" id="{BA8C8CCF-7823-480A-9A19-0F664DD17E3B}"/>
+                <a16:creationId xmlns:a16="http://schemas.microsoft.com/office/drawing/2014/main" id="{BA8C8CCF-7823-480A-9A19-0F664DD17E3B}"/>
               </a:ext>
             </a:extLst>
           </p:cNvPr>
@@ -4381,7 +3640,7 @@
           <p:cNvPr id="4" name="Espaço Reservado para Data 3">
             <a:extLst>
               <a:ext uri="{FF2B5EF4-FFF2-40B4-BE49-F238E27FC236}">
-                <a16:creationId xmlns:a16="http://schemas.microsoft.com/office/drawing/2014/main" xmlns="" id="{721D5734-7B1F-425D-942F-6EB73344027C}"/>
+                <a16:creationId xmlns:a16="http://schemas.microsoft.com/office/drawing/2014/main" id="{721D5734-7B1F-425D-942F-6EB73344027C}"/>
               </a:ext>
             </a:extLst>
           </p:cNvPr>
@@ -4399,7 +3658,7 @@
           <a:p>
             <a:fld id="{63289F7E-B80B-496E-81B4-D396C37C9454}" type="datetimeFigureOut">
               <a:rPr lang="pt-BR" smtClean="0"/>
-              <a:t>12/05/2025</a:t>
+              <a:t>13/05/2025</a:t>
             </a:fld>
             <a:endParaRPr lang="pt-BR"/>
           </a:p>
@@ -4410,7 +3669,7 @@
           <p:cNvPr id="5" name="Espaço Reservado para Rodapé 4">
             <a:extLst>
               <a:ext uri="{FF2B5EF4-FFF2-40B4-BE49-F238E27FC236}">
-                <a16:creationId xmlns:a16="http://schemas.microsoft.com/office/drawing/2014/main" xmlns="" id="{1E1AAEAC-F08D-45FE-89EC-B1B349A868C9}"/>
+                <a16:creationId xmlns:a16="http://schemas.microsoft.com/office/drawing/2014/main" id="{1E1AAEAC-F08D-45FE-89EC-B1B349A868C9}"/>
               </a:ext>
             </a:extLst>
           </p:cNvPr>
@@ -4435,7 +3694,7 @@
           <p:cNvPr id="6" name="Espaço Reservado para Número de Slide 5">
             <a:extLst>
               <a:ext uri="{FF2B5EF4-FFF2-40B4-BE49-F238E27FC236}">
-                <a16:creationId xmlns:a16="http://schemas.microsoft.com/office/drawing/2014/main" xmlns="" id="{BAA44493-9911-47B2-87A6-C2141A972BC8}"/>
+                <a16:creationId xmlns:a16="http://schemas.microsoft.com/office/drawing/2014/main" id="{BAA44493-9911-47B2-87A6-C2141A972BC8}"/>
               </a:ext>
             </a:extLst>
           </p:cNvPr>
@@ -4453,7 +3712,7 @@
           <a:p>
             <a:fld id="{1A7E88B7-70CE-4035-AE73-13FA6FB985D4}" type="slidenum">
               <a:rPr lang="pt-BR" smtClean="0"/>
-              <a:t>‹nº›</a:t>
+              <a:t>‹#›</a:t>
             </a:fld>
             <a:endParaRPr lang="pt-BR"/>
           </a:p>
@@ -4654,7 +3913,7 @@
             <a:fld id="{1D8BD707-D9CF-40AE-B4C6-C98DA3205C09}" type="datetimeFigureOut">
               <a:rPr lang="en-US" smtClean="0"/>
               <a:pPr/>
-              <a:t>5/12/2025</a:t>
+              <a:t>5/13/2025</a:t>
             </a:fld>
             <a:endParaRPr lang="en-US"/>
           </a:p>
@@ -4697,7 +3956,7 @@
             <a:fld id="{B6F15528-21DE-4FAA-801E-634DDDAF4B2B}" type="slidenum">
               <a:rPr lang="en-US" smtClean="0"/>
               <a:pPr/>
-              <a:t>‹nº›</a:t>
+              <a:t>‹#›</a:t>
             </a:fld>
             <a:endParaRPr lang="en-US"/>
           </a:p>
@@ -4826,7 +4085,7 @@
             <a:fld id="{1D8BD707-D9CF-40AE-B4C6-C98DA3205C09}" type="datetimeFigureOut">
               <a:rPr lang="en-US" smtClean="0"/>
               <a:pPr/>
-              <a:t>5/12/2025</a:t>
+              <a:t>5/13/2025</a:t>
             </a:fld>
             <a:endParaRPr lang="en-US"/>
           </a:p>
@@ -4869,7 +4128,7 @@
             <a:fld id="{B6F15528-21DE-4FAA-801E-634DDDAF4B2B}" type="slidenum">
               <a:rPr lang="en-US" smtClean="0"/>
               <a:pPr/>
-              <a:t>‹nº›</a:t>
+              <a:t>‹#›</a:t>
             </a:fld>
             <a:endParaRPr lang="en-US"/>
           </a:p>
@@ -5074,7 +4333,7 @@
             <a:fld id="{1D8BD707-D9CF-40AE-B4C6-C98DA3205C09}" type="datetimeFigureOut">
               <a:rPr lang="en-US" smtClean="0"/>
               <a:pPr/>
-              <a:t>5/12/2025</a:t>
+              <a:t>5/13/2025</a:t>
             </a:fld>
             <a:endParaRPr lang="en-US"/>
           </a:p>
@@ -5117,7 +4376,7 @@
             <a:fld id="{B6F15528-21DE-4FAA-801E-634DDDAF4B2B}" type="slidenum">
               <a:rPr lang="en-US" smtClean="0"/>
               <a:pPr/>
-              <a:t>‹nº›</a:t>
+              <a:t>‹#›</a:t>
             </a:fld>
             <a:endParaRPr lang="en-US"/>
           </a:p>
@@ -5364,7 +4623,7 @@
             <a:fld id="{1D8BD707-D9CF-40AE-B4C6-C98DA3205C09}" type="datetimeFigureOut">
               <a:rPr lang="en-US" smtClean="0"/>
               <a:pPr/>
-              <a:t>5/12/2025</a:t>
+              <a:t>5/13/2025</a:t>
             </a:fld>
             <a:endParaRPr lang="en-US"/>
           </a:p>
@@ -5407,7 +4666,7 @@
             <a:fld id="{B6F15528-21DE-4FAA-801E-634DDDAF4B2B}" type="slidenum">
               <a:rPr lang="en-US" smtClean="0"/>
               <a:pPr/>
-              <a:t>‹nº›</a:t>
+              <a:t>‹#›</a:t>
             </a:fld>
             <a:endParaRPr lang="en-US"/>
           </a:p>
@@ -5788,7 +5047,7 @@
             <a:fld id="{1D8BD707-D9CF-40AE-B4C6-C98DA3205C09}" type="datetimeFigureOut">
               <a:rPr lang="en-US" smtClean="0"/>
               <a:pPr/>
-              <a:t>5/12/2025</a:t>
+              <a:t>5/13/2025</a:t>
             </a:fld>
             <a:endParaRPr lang="en-US"/>
           </a:p>
@@ -5831,7 +5090,7 @@
             <a:fld id="{B6F15528-21DE-4FAA-801E-634DDDAF4B2B}" type="slidenum">
               <a:rPr lang="en-US" smtClean="0"/>
               <a:pPr/>
-              <a:t>‹nº›</a:t>
+              <a:t>‹#›</a:t>
             </a:fld>
             <a:endParaRPr lang="en-US"/>
           </a:p>
@@ -5908,7 +5167,7 @@
             <a:fld id="{1D8BD707-D9CF-40AE-B4C6-C98DA3205C09}" type="datetimeFigureOut">
               <a:rPr lang="en-US" smtClean="0"/>
               <a:pPr/>
-              <a:t>5/12/2025</a:t>
+              <a:t>5/13/2025</a:t>
             </a:fld>
             <a:endParaRPr lang="en-US"/>
           </a:p>
@@ -5951,7 +5210,7 @@
             <a:fld id="{B6F15528-21DE-4FAA-801E-634DDDAF4B2B}" type="slidenum">
               <a:rPr lang="en-US" smtClean="0"/>
               <a:pPr/>
-              <a:t>‹nº›</a:t>
+              <a:t>‹#›</a:t>
             </a:fld>
             <a:endParaRPr lang="en-US"/>
           </a:p>
@@ -6005,7 +5264,7 @@
             <a:fld id="{1D8BD707-D9CF-40AE-B4C6-C98DA3205C09}" type="datetimeFigureOut">
               <a:rPr lang="en-US" smtClean="0"/>
               <a:pPr/>
-              <a:t>5/12/2025</a:t>
+              <a:t>5/13/2025</a:t>
             </a:fld>
             <a:endParaRPr lang="en-US"/>
           </a:p>
@@ -6048,7 +5307,7 @@
             <a:fld id="{B6F15528-21DE-4FAA-801E-634DDDAF4B2B}" type="slidenum">
               <a:rPr lang="en-US" smtClean="0"/>
               <a:pPr/>
-              <a:t>‹nº›</a:t>
+              <a:t>‹#›</a:t>
             </a:fld>
             <a:endParaRPr lang="en-US"/>
           </a:p>
@@ -6284,7 +5543,7 @@
             <a:fld id="{1D8BD707-D9CF-40AE-B4C6-C98DA3205C09}" type="datetimeFigureOut">
               <a:rPr lang="en-US" smtClean="0"/>
               <a:pPr/>
-              <a:t>5/12/2025</a:t>
+              <a:t>5/13/2025</a:t>
             </a:fld>
             <a:endParaRPr lang="en-US"/>
           </a:p>
@@ -6327,7 +5586,7 @@
             <a:fld id="{B6F15528-21DE-4FAA-801E-634DDDAF4B2B}" type="slidenum">
               <a:rPr lang="en-US" smtClean="0"/>
               <a:pPr/>
-              <a:t>‹nº›</a:t>
+              <a:t>‹#›</a:t>
             </a:fld>
             <a:endParaRPr lang="en-US"/>
           </a:p>
@@ -6368,7 +5627,7 @@
           <p:cNvPr id="2" name="Título 1">
             <a:extLst>
               <a:ext uri="{FF2B5EF4-FFF2-40B4-BE49-F238E27FC236}">
-                <a16:creationId xmlns:a16="http://schemas.microsoft.com/office/drawing/2014/main" xmlns="" id="{71BD44A5-8F21-4626-A01D-48A1C874B1D5}"/>
+                <a16:creationId xmlns:a16="http://schemas.microsoft.com/office/drawing/2014/main" id="{71BD44A5-8F21-4626-A01D-48A1C874B1D5}"/>
               </a:ext>
             </a:extLst>
           </p:cNvPr>
@@ -6396,7 +5655,7 @@
           <p:cNvPr id="3" name="Espaço Reservado para Conteúdo 2">
             <a:extLst>
               <a:ext uri="{FF2B5EF4-FFF2-40B4-BE49-F238E27FC236}">
-                <a16:creationId xmlns:a16="http://schemas.microsoft.com/office/drawing/2014/main" xmlns="" id="{B79E8085-65A9-48AA-951D-71D978BFF4ED}"/>
+                <a16:creationId xmlns:a16="http://schemas.microsoft.com/office/drawing/2014/main" id="{B79E8085-65A9-48AA-951D-71D978BFF4ED}"/>
               </a:ext>
             </a:extLst>
           </p:cNvPr>
@@ -6453,7 +5712,7 @@
           <p:cNvPr id="4" name="Espaço Reservado para Data 3">
             <a:extLst>
               <a:ext uri="{FF2B5EF4-FFF2-40B4-BE49-F238E27FC236}">
-                <a16:creationId xmlns:a16="http://schemas.microsoft.com/office/drawing/2014/main" xmlns="" id="{F05BE1AF-51EA-425D-B188-DE7BD675009F}"/>
+                <a16:creationId xmlns:a16="http://schemas.microsoft.com/office/drawing/2014/main" id="{F05BE1AF-51EA-425D-B188-DE7BD675009F}"/>
               </a:ext>
             </a:extLst>
           </p:cNvPr>
@@ -6471,7 +5730,7 @@
           <a:p>
             <a:fld id="{63289F7E-B80B-496E-81B4-D396C37C9454}" type="datetimeFigureOut">
               <a:rPr lang="pt-BR" smtClean="0"/>
-              <a:t>12/05/2025</a:t>
+              <a:t>13/05/2025</a:t>
             </a:fld>
             <a:endParaRPr lang="pt-BR"/>
           </a:p>
@@ -6482,7 +5741,7 @@
           <p:cNvPr id="5" name="Espaço Reservado para Rodapé 4">
             <a:extLst>
               <a:ext uri="{FF2B5EF4-FFF2-40B4-BE49-F238E27FC236}">
-                <a16:creationId xmlns:a16="http://schemas.microsoft.com/office/drawing/2014/main" xmlns="" id="{121BE632-29CF-4CB9-B365-C9EF38F89BE6}"/>
+                <a16:creationId xmlns:a16="http://schemas.microsoft.com/office/drawing/2014/main" id="{121BE632-29CF-4CB9-B365-C9EF38F89BE6}"/>
               </a:ext>
             </a:extLst>
           </p:cNvPr>
@@ -6507,7 +5766,7 @@
           <p:cNvPr id="6" name="Espaço Reservado para Número de Slide 5">
             <a:extLst>
               <a:ext uri="{FF2B5EF4-FFF2-40B4-BE49-F238E27FC236}">
-                <a16:creationId xmlns:a16="http://schemas.microsoft.com/office/drawing/2014/main" xmlns="" id="{60CF3DD1-9AEC-4A57-B461-4E4DD86FAC18}"/>
+                <a16:creationId xmlns:a16="http://schemas.microsoft.com/office/drawing/2014/main" id="{60CF3DD1-9AEC-4A57-B461-4E4DD86FAC18}"/>
               </a:ext>
             </a:extLst>
           </p:cNvPr>
@@ -6525,7 +5784,7 @@
           <a:p>
             <a:fld id="{1A7E88B7-70CE-4035-AE73-13FA6FB985D4}" type="slidenum">
               <a:rPr lang="pt-BR" smtClean="0"/>
-              <a:t>‹nº›</a:t>
+              <a:t>‹#›</a:t>
             </a:fld>
             <a:endParaRPr lang="pt-BR"/>
           </a:p>
@@ -6741,7 +6000,7 @@
             <a:fld id="{1D8BD707-D9CF-40AE-B4C6-C98DA3205C09}" type="datetimeFigureOut">
               <a:rPr lang="en-US" smtClean="0"/>
               <a:pPr/>
-              <a:t>5/12/2025</a:t>
+              <a:t>5/13/2025</a:t>
             </a:fld>
             <a:endParaRPr lang="en-US"/>
           </a:p>
@@ -6784,7 +6043,7 @@
             <a:fld id="{B6F15528-21DE-4FAA-801E-634DDDAF4B2B}" type="slidenum">
               <a:rPr lang="en-US" smtClean="0"/>
               <a:pPr/>
-              <a:t>‹nº›</a:t>
+              <a:t>‹#›</a:t>
             </a:fld>
             <a:endParaRPr lang="en-US"/>
           </a:p>
@@ -6913,7 +6172,7 @@
             <a:fld id="{1D8BD707-D9CF-40AE-B4C6-C98DA3205C09}" type="datetimeFigureOut">
               <a:rPr lang="en-US" smtClean="0"/>
               <a:pPr/>
-              <a:t>5/12/2025</a:t>
+              <a:t>5/13/2025</a:t>
             </a:fld>
             <a:endParaRPr lang="en-US"/>
           </a:p>
@@ -6956,7 +6215,7 @@
             <a:fld id="{B6F15528-21DE-4FAA-801E-634DDDAF4B2B}" type="slidenum">
               <a:rPr lang="en-US" smtClean="0"/>
               <a:pPr/>
-              <a:t>‹nº›</a:t>
+              <a:t>‹#›</a:t>
             </a:fld>
             <a:endParaRPr lang="en-US"/>
           </a:p>
@@ -7095,7 +6354,7 @@
             <a:fld id="{1D8BD707-D9CF-40AE-B4C6-C98DA3205C09}" type="datetimeFigureOut">
               <a:rPr lang="en-US" smtClean="0"/>
               <a:pPr/>
-              <a:t>5/12/2025</a:t>
+              <a:t>5/13/2025</a:t>
             </a:fld>
             <a:endParaRPr lang="en-US"/>
           </a:p>
@@ -7138,7 +6397,7 @@
             <a:fld id="{B6F15528-21DE-4FAA-801E-634DDDAF4B2B}" type="slidenum">
               <a:rPr lang="en-US" smtClean="0"/>
               <a:pPr/>
-              <a:t>‹nº›</a:t>
+              <a:t>‹#›</a:t>
             </a:fld>
             <a:endParaRPr lang="en-US"/>
           </a:p>
@@ -7179,7 +6438,7 @@
           <p:cNvPr id="2" name="Título 1">
             <a:extLst>
               <a:ext uri="{FF2B5EF4-FFF2-40B4-BE49-F238E27FC236}">
-                <a16:creationId xmlns:a16="http://schemas.microsoft.com/office/drawing/2014/main" xmlns="" id="{34AB2FF0-A4D7-4E28-991D-FF26140D5988}"/>
+                <a16:creationId xmlns:a16="http://schemas.microsoft.com/office/drawing/2014/main" id="{34AB2FF0-A4D7-4E28-991D-FF26140D5988}"/>
               </a:ext>
             </a:extLst>
           </p:cNvPr>
@@ -7216,7 +6475,7 @@
           <p:cNvPr id="3" name="Espaço Reservado para Texto 2">
             <a:extLst>
               <a:ext uri="{FF2B5EF4-FFF2-40B4-BE49-F238E27FC236}">
-                <a16:creationId xmlns:a16="http://schemas.microsoft.com/office/drawing/2014/main" xmlns="" id="{E2AC45B0-4145-40DB-8E61-105461170604}"/>
+                <a16:creationId xmlns:a16="http://schemas.microsoft.com/office/drawing/2014/main" id="{E2AC45B0-4145-40DB-8E61-105461170604}"/>
               </a:ext>
             </a:extLst>
           </p:cNvPr>
@@ -7341,7 +6600,7 @@
           <p:cNvPr id="4" name="Espaço Reservado para Data 3">
             <a:extLst>
               <a:ext uri="{FF2B5EF4-FFF2-40B4-BE49-F238E27FC236}">
-                <a16:creationId xmlns:a16="http://schemas.microsoft.com/office/drawing/2014/main" xmlns="" id="{50F1D3FB-740A-4EBA-A309-2CE71D12ECFB}"/>
+                <a16:creationId xmlns:a16="http://schemas.microsoft.com/office/drawing/2014/main" id="{50F1D3FB-740A-4EBA-A309-2CE71D12ECFB}"/>
               </a:ext>
             </a:extLst>
           </p:cNvPr>
@@ -7359,7 +6618,7 @@
           <a:p>
             <a:fld id="{63289F7E-B80B-496E-81B4-D396C37C9454}" type="datetimeFigureOut">
               <a:rPr lang="pt-BR" smtClean="0"/>
-              <a:t>12/05/2025</a:t>
+              <a:t>13/05/2025</a:t>
             </a:fld>
             <a:endParaRPr lang="pt-BR"/>
           </a:p>
@@ -7370,7 +6629,7 @@
           <p:cNvPr id="5" name="Espaço Reservado para Rodapé 4">
             <a:extLst>
               <a:ext uri="{FF2B5EF4-FFF2-40B4-BE49-F238E27FC236}">
-                <a16:creationId xmlns:a16="http://schemas.microsoft.com/office/drawing/2014/main" xmlns="" id="{BDCAB18F-8715-4465-A940-F9C193A2ACE9}"/>
+                <a16:creationId xmlns:a16="http://schemas.microsoft.com/office/drawing/2014/main" id="{BDCAB18F-8715-4465-A940-F9C193A2ACE9}"/>
               </a:ext>
             </a:extLst>
           </p:cNvPr>
@@ -7395,7 +6654,7 @@
           <p:cNvPr id="6" name="Espaço Reservado para Número de Slide 5">
             <a:extLst>
               <a:ext uri="{FF2B5EF4-FFF2-40B4-BE49-F238E27FC236}">
-                <a16:creationId xmlns:a16="http://schemas.microsoft.com/office/drawing/2014/main" xmlns="" id="{353466C6-8248-429F-8056-FF040BF509EB}"/>
+                <a16:creationId xmlns:a16="http://schemas.microsoft.com/office/drawing/2014/main" id="{353466C6-8248-429F-8056-FF040BF509EB}"/>
               </a:ext>
             </a:extLst>
           </p:cNvPr>
@@ -7413,7 +6672,7 @@
           <a:p>
             <a:fld id="{1A7E88B7-70CE-4035-AE73-13FA6FB985D4}" type="slidenum">
               <a:rPr lang="pt-BR" smtClean="0"/>
-              <a:t>‹nº›</a:t>
+              <a:t>‹#›</a:t>
             </a:fld>
             <a:endParaRPr lang="pt-BR"/>
           </a:p>
@@ -7454,7 +6713,7 @@
           <p:cNvPr id="2" name="Título 1">
             <a:extLst>
               <a:ext uri="{FF2B5EF4-FFF2-40B4-BE49-F238E27FC236}">
-                <a16:creationId xmlns:a16="http://schemas.microsoft.com/office/drawing/2014/main" xmlns="" id="{BC7BB9F0-F14B-4A91-B2B7-35BC47FE4DE7}"/>
+                <a16:creationId xmlns:a16="http://schemas.microsoft.com/office/drawing/2014/main" id="{BC7BB9F0-F14B-4A91-B2B7-35BC47FE4DE7}"/>
               </a:ext>
             </a:extLst>
           </p:cNvPr>
@@ -7482,7 +6741,7 @@
           <p:cNvPr id="3" name="Espaço Reservado para Conteúdo 2">
             <a:extLst>
               <a:ext uri="{FF2B5EF4-FFF2-40B4-BE49-F238E27FC236}">
-                <a16:creationId xmlns:a16="http://schemas.microsoft.com/office/drawing/2014/main" xmlns="" id="{EC1FC1C4-73DA-47A6-8496-B0B457F7D39A}"/>
+                <a16:creationId xmlns:a16="http://schemas.microsoft.com/office/drawing/2014/main" id="{EC1FC1C4-73DA-47A6-8496-B0B457F7D39A}"/>
               </a:ext>
             </a:extLst>
           </p:cNvPr>
@@ -7544,7 +6803,7 @@
           <p:cNvPr id="4" name="Espaço Reservado para Conteúdo 3">
             <a:extLst>
               <a:ext uri="{FF2B5EF4-FFF2-40B4-BE49-F238E27FC236}">
-                <a16:creationId xmlns:a16="http://schemas.microsoft.com/office/drawing/2014/main" xmlns="" id="{E92F06A8-A449-4D92-9912-76873E529B38}"/>
+                <a16:creationId xmlns:a16="http://schemas.microsoft.com/office/drawing/2014/main" id="{E92F06A8-A449-4D92-9912-76873E529B38}"/>
               </a:ext>
             </a:extLst>
           </p:cNvPr>
@@ -7606,7 +6865,7 @@
           <p:cNvPr id="5" name="Espaço Reservado para Data 4">
             <a:extLst>
               <a:ext uri="{FF2B5EF4-FFF2-40B4-BE49-F238E27FC236}">
-                <a16:creationId xmlns:a16="http://schemas.microsoft.com/office/drawing/2014/main" xmlns="" id="{938070A4-BC2F-4D55-BD8D-DEAF11BB9EE9}"/>
+                <a16:creationId xmlns:a16="http://schemas.microsoft.com/office/drawing/2014/main" id="{938070A4-BC2F-4D55-BD8D-DEAF11BB9EE9}"/>
               </a:ext>
             </a:extLst>
           </p:cNvPr>
@@ -7624,7 +6883,7 @@
           <a:p>
             <a:fld id="{63289F7E-B80B-496E-81B4-D396C37C9454}" type="datetimeFigureOut">
               <a:rPr lang="pt-BR" smtClean="0"/>
-              <a:t>12/05/2025</a:t>
+              <a:t>13/05/2025</a:t>
             </a:fld>
             <a:endParaRPr lang="pt-BR"/>
           </a:p>
@@ -7635,7 +6894,7 @@
           <p:cNvPr id="6" name="Espaço Reservado para Rodapé 5">
             <a:extLst>
               <a:ext uri="{FF2B5EF4-FFF2-40B4-BE49-F238E27FC236}">
-                <a16:creationId xmlns:a16="http://schemas.microsoft.com/office/drawing/2014/main" xmlns="" id="{45CC2DB8-844A-465F-BA9A-7734C80C7F43}"/>
+                <a16:creationId xmlns:a16="http://schemas.microsoft.com/office/drawing/2014/main" id="{45CC2DB8-844A-465F-BA9A-7734C80C7F43}"/>
               </a:ext>
             </a:extLst>
           </p:cNvPr>
@@ -7660,7 +6919,7 @@
           <p:cNvPr id="7" name="Espaço Reservado para Número de Slide 6">
             <a:extLst>
               <a:ext uri="{FF2B5EF4-FFF2-40B4-BE49-F238E27FC236}">
-                <a16:creationId xmlns:a16="http://schemas.microsoft.com/office/drawing/2014/main" xmlns="" id="{4CC606A8-097B-4040-94E0-CD8C88280D8F}"/>
+                <a16:creationId xmlns:a16="http://schemas.microsoft.com/office/drawing/2014/main" id="{4CC606A8-097B-4040-94E0-CD8C88280D8F}"/>
               </a:ext>
             </a:extLst>
           </p:cNvPr>
@@ -7678,7 +6937,7 @@
           <a:p>
             <a:fld id="{1A7E88B7-70CE-4035-AE73-13FA6FB985D4}" type="slidenum">
               <a:rPr lang="pt-BR" smtClean="0"/>
-              <a:t>‹nº›</a:t>
+              <a:t>‹#›</a:t>
             </a:fld>
             <a:endParaRPr lang="pt-BR"/>
           </a:p>
@@ -7719,7 +6978,7 @@
           <p:cNvPr id="2" name="Título 1">
             <a:extLst>
               <a:ext uri="{FF2B5EF4-FFF2-40B4-BE49-F238E27FC236}">
-                <a16:creationId xmlns:a16="http://schemas.microsoft.com/office/drawing/2014/main" xmlns="" id="{76D66686-0143-4CB6-8C09-BA326F1E7ACA}"/>
+                <a16:creationId xmlns:a16="http://schemas.microsoft.com/office/drawing/2014/main" id="{76D66686-0143-4CB6-8C09-BA326F1E7ACA}"/>
               </a:ext>
             </a:extLst>
           </p:cNvPr>
@@ -7752,7 +7011,7 @@
           <p:cNvPr id="3" name="Espaço Reservado para Texto 2">
             <a:extLst>
               <a:ext uri="{FF2B5EF4-FFF2-40B4-BE49-F238E27FC236}">
-                <a16:creationId xmlns:a16="http://schemas.microsoft.com/office/drawing/2014/main" xmlns="" id="{0227AB85-F59E-4BCE-B846-4FA0992C2F23}"/>
+                <a16:creationId xmlns:a16="http://schemas.microsoft.com/office/drawing/2014/main" id="{0227AB85-F59E-4BCE-B846-4FA0992C2F23}"/>
               </a:ext>
             </a:extLst>
           </p:cNvPr>
@@ -7823,7 +7082,7 @@
           <p:cNvPr id="4" name="Espaço Reservado para Conteúdo 3">
             <a:extLst>
               <a:ext uri="{FF2B5EF4-FFF2-40B4-BE49-F238E27FC236}">
-                <a16:creationId xmlns:a16="http://schemas.microsoft.com/office/drawing/2014/main" xmlns="" id="{3373456C-7319-4D0A-827D-D29F6B083F5D}"/>
+                <a16:creationId xmlns:a16="http://schemas.microsoft.com/office/drawing/2014/main" id="{3373456C-7319-4D0A-827D-D29F6B083F5D}"/>
               </a:ext>
             </a:extLst>
           </p:cNvPr>
@@ -7885,7 +7144,7 @@
           <p:cNvPr id="5" name="Espaço Reservado para Texto 4">
             <a:extLst>
               <a:ext uri="{FF2B5EF4-FFF2-40B4-BE49-F238E27FC236}">
-                <a16:creationId xmlns:a16="http://schemas.microsoft.com/office/drawing/2014/main" xmlns="" id="{4CD109D0-2E83-4262-8029-A871CEC47406}"/>
+                <a16:creationId xmlns:a16="http://schemas.microsoft.com/office/drawing/2014/main" id="{4CD109D0-2E83-4262-8029-A871CEC47406}"/>
               </a:ext>
             </a:extLst>
           </p:cNvPr>
@@ -7956,7 +7215,7 @@
           <p:cNvPr id="6" name="Espaço Reservado para Conteúdo 5">
             <a:extLst>
               <a:ext uri="{FF2B5EF4-FFF2-40B4-BE49-F238E27FC236}">
-                <a16:creationId xmlns:a16="http://schemas.microsoft.com/office/drawing/2014/main" xmlns="" id="{AD706E3A-CFBB-4A6C-A65F-D0360A9E74FE}"/>
+                <a16:creationId xmlns:a16="http://schemas.microsoft.com/office/drawing/2014/main" id="{AD706E3A-CFBB-4A6C-A65F-D0360A9E74FE}"/>
               </a:ext>
             </a:extLst>
           </p:cNvPr>
@@ -8018,7 +7277,7 @@
           <p:cNvPr id="7" name="Espaço Reservado para Data 6">
             <a:extLst>
               <a:ext uri="{FF2B5EF4-FFF2-40B4-BE49-F238E27FC236}">
-                <a16:creationId xmlns:a16="http://schemas.microsoft.com/office/drawing/2014/main" xmlns="" id="{4172C0E5-5AF0-4805-BB51-443733CD2BD5}"/>
+                <a16:creationId xmlns:a16="http://schemas.microsoft.com/office/drawing/2014/main" id="{4172C0E5-5AF0-4805-BB51-443733CD2BD5}"/>
               </a:ext>
             </a:extLst>
           </p:cNvPr>
@@ -8036,7 +7295,7 @@
           <a:p>
             <a:fld id="{63289F7E-B80B-496E-81B4-D396C37C9454}" type="datetimeFigureOut">
               <a:rPr lang="pt-BR" smtClean="0"/>
-              <a:t>12/05/2025</a:t>
+              <a:t>13/05/2025</a:t>
             </a:fld>
             <a:endParaRPr lang="pt-BR"/>
           </a:p>
@@ -8047,7 +7306,7 @@
           <p:cNvPr id="8" name="Espaço Reservado para Rodapé 7">
             <a:extLst>
               <a:ext uri="{FF2B5EF4-FFF2-40B4-BE49-F238E27FC236}">
-                <a16:creationId xmlns:a16="http://schemas.microsoft.com/office/drawing/2014/main" xmlns="" id="{0E801648-156F-497E-99CF-797DF48051E1}"/>
+                <a16:creationId xmlns:a16="http://schemas.microsoft.com/office/drawing/2014/main" id="{0E801648-156F-497E-99CF-797DF48051E1}"/>
               </a:ext>
             </a:extLst>
           </p:cNvPr>
@@ -8072,7 +7331,7 @@
           <p:cNvPr id="9" name="Espaço Reservado para Número de Slide 8">
             <a:extLst>
               <a:ext uri="{FF2B5EF4-FFF2-40B4-BE49-F238E27FC236}">
-                <a16:creationId xmlns:a16="http://schemas.microsoft.com/office/drawing/2014/main" xmlns="" id="{EEE23D32-80E7-4796-A137-66BF842E4B53}"/>
+                <a16:creationId xmlns:a16="http://schemas.microsoft.com/office/drawing/2014/main" id="{EEE23D32-80E7-4796-A137-66BF842E4B53}"/>
               </a:ext>
             </a:extLst>
           </p:cNvPr>
@@ -8090,7 +7349,7 @@
           <a:p>
             <a:fld id="{1A7E88B7-70CE-4035-AE73-13FA6FB985D4}" type="slidenum">
               <a:rPr lang="pt-BR" smtClean="0"/>
-              <a:t>‹nº›</a:t>
+              <a:t>‹#›</a:t>
             </a:fld>
             <a:endParaRPr lang="pt-BR"/>
           </a:p>
@@ -8131,7 +7390,7 @@
           <p:cNvPr id="2" name="Título 1">
             <a:extLst>
               <a:ext uri="{FF2B5EF4-FFF2-40B4-BE49-F238E27FC236}">
-                <a16:creationId xmlns:a16="http://schemas.microsoft.com/office/drawing/2014/main" xmlns="" id="{2BCE2379-C78F-47E1-8CFC-B846E7AF148D}"/>
+                <a16:creationId xmlns:a16="http://schemas.microsoft.com/office/drawing/2014/main" id="{2BCE2379-C78F-47E1-8CFC-B846E7AF148D}"/>
               </a:ext>
             </a:extLst>
           </p:cNvPr>
@@ -8159,7 +7418,7 @@
           <p:cNvPr id="3" name="Espaço Reservado para Data 2">
             <a:extLst>
               <a:ext uri="{FF2B5EF4-FFF2-40B4-BE49-F238E27FC236}">
-                <a16:creationId xmlns:a16="http://schemas.microsoft.com/office/drawing/2014/main" xmlns="" id="{342600A9-7F92-4E22-9D94-E4717252A817}"/>
+                <a16:creationId xmlns:a16="http://schemas.microsoft.com/office/drawing/2014/main" id="{342600A9-7F92-4E22-9D94-E4717252A817}"/>
               </a:ext>
             </a:extLst>
           </p:cNvPr>
@@ -8177,7 +7436,7 @@
           <a:p>
             <a:fld id="{63289F7E-B80B-496E-81B4-D396C37C9454}" type="datetimeFigureOut">
               <a:rPr lang="pt-BR" smtClean="0"/>
-              <a:t>12/05/2025</a:t>
+              <a:t>13/05/2025</a:t>
             </a:fld>
             <a:endParaRPr lang="pt-BR"/>
           </a:p>
@@ -8188,7 +7447,7 @@
           <p:cNvPr id="4" name="Espaço Reservado para Rodapé 3">
             <a:extLst>
               <a:ext uri="{FF2B5EF4-FFF2-40B4-BE49-F238E27FC236}">
-                <a16:creationId xmlns:a16="http://schemas.microsoft.com/office/drawing/2014/main" xmlns="" id="{192E6BED-F546-40CC-A2DF-99CBA853654E}"/>
+                <a16:creationId xmlns:a16="http://schemas.microsoft.com/office/drawing/2014/main" id="{192E6BED-F546-40CC-A2DF-99CBA853654E}"/>
               </a:ext>
             </a:extLst>
           </p:cNvPr>
@@ -8213,7 +7472,7 @@
           <p:cNvPr id="5" name="Espaço Reservado para Número de Slide 4">
             <a:extLst>
               <a:ext uri="{FF2B5EF4-FFF2-40B4-BE49-F238E27FC236}">
-                <a16:creationId xmlns:a16="http://schemas.microsoft.com/office/drawing/2014/main" xmlns="" id="{6091CC40-A8C4-4063-80EB-CC5099621678}"/>
+                <a16:creationId xmlns:a16="http://schemas.microsoft.com/office/drawing/2014/main" id="{6091CC40-A8C4-4063-80EB-CC5099621678}"/>
               </a:ext>
             </a:extLst>
           </p:cNvPr>
@@ -8231,7 +7490,7 @@
           <a:p>
             <a:fld id="{1A7E88B7-70CE-4035-AE73-13FA6FB985D4}" type="slidenum">
               <a:rPr lang="pt-BR" smtClean="0"/>
-              <a:t>‹nº›</a:t>
+              <a:t>‹#›</a:t>
             </a:fld>
             <a:endParaRPr lang="pt-BR"/>
           </a:p>
@@ -8272,7 +7531,7 @@
           <p:cNvPr id="2" name="Espaço Reservado para Data 1">
             <a:extLst>
               <a:ext uri="{FF2B5EF4-FFF2-40B4-BE49-F238E27FC236}">
-                <a16:creationId xmlns:a16="http://schemas.microsoft.com/office/drawing/2014/main" xmlns="" id="{DD19515C-212C-4EAE-84A3-8FF4BC844F1B}"/>
+                <a16:creationId xmlns:a16="http://schemas.microsoft.com/office/drawing/2014/main" id="{DD19515C-212C-4EAE-84A3-8FF4BC844F1B}"/>
               </a:ext>
             </a:extLst>
           </p:cNvPr>
@@ -8290,7 +7549,7 @@
           <a:p>
             <a:fld id="{63289F7E-B80B-496E-81B4-D396C37C9454}" type="datetimeFigureOut">
               <a:rPr lang="pt-BR" smtClean="0"/>
-              <a:t>12/05/2025</a:t>
+              <a:t>13/05/2025</a:t>
             </a:fld>
             <a:endParaRPr lang="pt-BR"/>
           </a:p>
@@ -8301,7 +7560,7 @@
           <p:cNvPr id="3" name="Espaço Reservado para Rodapé 2">
             <a:extLst>
               <a:ext uri="{FF2B5EF4-FFF2-40B4-BE49-F238E27FC236}">
-                <a16:creationId xmlns:a16="http://schemas.microsoft.com/office/drawing/2014/main" xmlns="" id="{94D3D120-B3E8-4C96-861D-7A4F12F49B3A}"/>
+                <a16:creationId xmlns:a16="http://schemas.microsoft.com/office/drawing/2014/main" id="{94D3D120-B3E8-4C96-861D-7A4F12F49B3A}"/>
               </a:ext>
             </a:extLst>
           </p:cNvPr>
@@ -8326,7 +7585,7 @@
           <p:cNvPr id="4" name="Espaço Reservado para Número de Slide 3">
             <a:extLst>
               <a:ext uri="{FF2B5EF4-FFF2-40B4-BE49-F238E27FC236}">
-                <a16:creationId xmlns:a16="http://schemas.microsoft.com/office/drawing/2014/main" xmlns="" id="{42E49B68-FA1B-468B-9F17-D5C09243D454}"/>
+                <a16:creationId xmlns:a16="http://schemas.microsoft.com/office/drawing/2014/main" id="{42E49B68-FA1B-468B-9F17-D5C09243D454}"/>
               </a:ext>
             </a:extLst>
           </p:cNvPr>
@@ -8344,7 +7603,7 @@
           <a:p>
             <a:fld id="{1A7E88B7-70CE-4035-AE73-13FA6FB985D4}" type="slidenum">
               <a:rPr lang="pt-BR" smtClean="0"/>
-              <a:t>‹nº›</a:t>
+              <a:t>‹#›</a:t>
             </a:fld>
             <a:endParaRPr lang="pt-BR"/>
           </a:p>
@@ -8385,7 +7644,7 @@
           <p:cNvPr id="2" name="Título 1">
             <a:extLst>
               <a:ext uri="{FF2B5EF4-FFF2-40B4-BE49-F238E27FC236}">
-                <a16:creationId xmlns:a16="http://schemas.microsoft.com/office/drawing/2014/main" xmlns="" id="{1C17BCBE-A897-4319-85EC-D87909C24980}"/>
+                <a16:creationId xmlns:a16="http://schemas.microsoft.com/office/drawing/2014/main" id="{1C17BCBE-A897-4319-85EC-D87909C24980}"/>
               </a:ext>
             </a:extLst>
           </p:cNvPr>
@@ -8422,7 +7681,7 @@
           <p:cNvPr id="3" name="Espaço Reservado para Conteúdo 2">
             <a:extLst>
               <a:ext uri="{FF2B5EF4-FFF2-40B4-BE49-F238E27FC236}">
-                <a16:creationId xmlns:a16="http://schemas.microsoft.com/office/drawing/2014/main" xmlns="" id="{4226F885-0204-4913-868B-4B8B82576F17}"/>
+                <a16:creationId xmlns:a16="http://schemas.microsoft.com/office/drawing/2014/main" id="{4226F885-0204-4913-868B-4B8B82576F17}"/>
               </a:ext>
             </a:extLst>
           </p:cNvPr>
@@ -8512,7 +7771,7 @@
           <p:cNvPr id="4" name="Espaço Reservado para Texto 3">
             <a:extLst>
               <a:ext uri="{FF2B5EF4-FFF2-40B4-BE49-F238E27FC236}">
-                <a16:creationId xmlns:a16="http://schemas.microsoft.com/office/drawing/2014/main" xmlns="" id="{00F9F784-A858-441B-8AB5-697098141751}"/>
+                <a16:creationId xmlns:a16="http://schemas.microsoft.com/office/drawing/2014/main" id="{00F9F784-A858-441B-8AB5-697098141751}"/>
               </a:ext>
             </a:extLst>
           </p:cNvPr>
@@ -8583,7 +7842,7 @@
           <p:cNvPr id="5" name="Espaço Reservado para Data 4">
             <a:extLst>
               <a:ext uri="{FF2B5EF4-FFF2-40B4-BE49-F238E27FC236}">
-                <a16:creationId xmlns:a16="http://schemas.microsoft.com/office/drawing/2014/main" xmlns="" id="{A4DC363A-5000-472E-8B17-02E7DCB8840A}"/>
+                <a16:creationId xmlns:a16="http://schemas.microsoft.com/office/drawing/2014/main" id="{A4DC363A-5000-472E-8B17-02E7DCB8840A}"/>
               </a:ext>
             </a:extLst>
           </p:cNvPr>
@@ -8601,7 +7860,7 @@
           <a:p>
             <a:fld id="{63289F7E-B80B-496E-81B4-D396C37C9454}" type="datetimeFigureOut">
               <a:rPr lang="pt-BR" smtClean="0"/>
-              <a:t>12/05/2025</a:t>
+              <a:t>13/05/2025</a:t>
             </a:fld>
             <a:endParaRPr lang="pt-BR"/>
           </a:p>
@@ -8612,7 +7871,7 @@
           <p:cNvPr id="6" name="Espaço Reservado para Rodapé 5">
             <a:extLst>
               <a:ext uri="{FF2B5EF4-FFF2-40B4-BE49-F238E27FC236}">
-                <a16:creationId xmlns:a16="http://schemas.microsoft.com/office/drawing/2014/main" xmlns="" id="{5548425D-2C21-4C56-BAD4-662978775C28}"/>
+                <a16:creationId xmlns:a16="http://schemas.microsoft.com/office/drawing/2014/main" id="{5548425D-2C21-4C56-BAD4-662978775C28}"/>
               </a:ext>
             </a:extLst>
           </p:cNvPr>
@@ -8637,7 +7896,7 @@
           <p:cNvPr id="7" name="Espaço Reservado para Número de Slide 6">
             <a:extLst>
               <a:ext uri="{FF2B5EF4-FFF2-40B4-BE49-F238E27FC236}">
-                <a16:creationId xmlns:a16="http://schemas.microsoft.com/office/drawing/2014/main" xmlns="" id="{C63E9726-E64C-42B2-AE8A-8C235A956B48}"/>
+                <a16:creationId xmlns:a16="http://schemas.microsoft.com/office/drawing/2014/main" id="{C63E9726-E64C-42B2-AE8A-8C235A956B48}"/>
               </a:ext>
             </a:extLst>
           </p:cNvPr>
@@ -8655,7 +7914,7 @@
           <a:p>
             <a:fld id="{1A7E88B7-70CE-4035-AE73-13FA6FB985D4}" type="slidenum">
               <a:rPr lang="pt-BR" smtClean="0"/>
-              <a:t>‹nº›</a:t>
+              <a:t>‹#›</a:t>
             </a:fld>
             <a:endParaRPr lang="pt-BR"/>
           </a:p>
@@ -8696,7 +7955,7 @@
           <p:cNvPr id="2" name="Título 1">
             <a:extLst>
               <a:ext uri="{FF2B5EF4-FFF2-40B4-BE49-F238E27FC236}">
-                <a16:creationId xmlns:a16="http://schemas.microsoft.com/office/drawing/2014/main" xmlns="" id="{11086A78-3E74-450C-96A6-CA8AC37AF772}"/>
+                <a16:creationId xmlns:a16="http://schemas.microsoft.com/office/drawing/2014/main" id="{11086A78-3E74-450C-96A6-CA8AC37AF772}"/>
               </a:ext>
             </a:extLst>
           </p:cNvPr>
@@ -8733,7 +7992,7 @@
           <p:cNvPr id="3" name="Espaço Reservado para Imagem 2">
             <a:extLst>
               <a:ext uri="{FF2B5EF4-FFF2-40B4-BE49-F238E27FC236}">
-                <a16:creationId xmlns:a16="http://schemas.microsoft.com/office/drawing/2014/main" xmlns="" id="{5F5B7312-975A-4DBC-9B2F-3652ADA006FD}"/>
+                <a16:creationId xmlns:a16="http://schemas.microsoft.com/office/drawing/2014/main" id="{5F5B7312-975A-4DBC-9B2F-3652ADA006FD}"/>
               </a:ext>
             </a:extLst>
           </p:cNvPr>
@@ -8800,7 +8059,7 @@
           <p:cNvPr id="4" name="Espaço Reservado para Texto 3">
             <a:extLst>
               <a:ext uri="{FF2B5EF4-FFF2-40B4-BE49-F238E27FC236}">
-                <a16:creationId xmlns:a16="http://schemas.microsoft.com/office/drawing/2014/main" xmlns="" id="{AAF805F5-1DFF-41C6-944C-7D79FE0D0963}"/>
+                <a16:creationId xmlns:a16="http://schemas.microsoft.com/office/drawing/2014/main" id="{AAF805F5-1DFF-41C6-944C-7D79FE0D0963}"/>
               </a:ext>
             </a:extLst>
           </p:cNvPr>
@@ -8871,7 +8130,7 @@
           <p:cNvPr id="5" name="Espaço Reservado para Data 4">
             <a:extLst>
               <a:ext uri="{FF2B5EF4-FFF2-40B4-BE49-F238E27FC236}">
-                <a16:creationId xmlns:a16="http://schemas.microsoft.com/office/drawing/2014/main" xmlns="" id="{02113D81-8665-4516-BD81-C6A1F254EECD}"/>
+                <a16:creationId xmlns:a16="http://schemas.microsoft.com/office/drawing/2014/main" id="{02113D81-8665-4516-BD81-C6A1F254EECD}"/>
               </a:ext>
             </a:extLst>
           </p:cNvPr>
@@ -8889,7 +8148,7 @@
           <a:p>
             <a:fld id="{63289F7E-B80B-496E-81B4-D396C37C9454}" type="datetimeFigureOut">
               <a:rPr lang="pt-BR" smtClean="0"/>
-              <a:t>12/05/2025</a:t>
+              <a:t>13/05/2025</a:t>
             </a:fld>
             <a:endParaRPr lang="pt-BR"/>
           </a:p>
@@ -8900,7 +8159,7 @@
           <p:cNvPr id="6" name="Espaço Reservado para Rodapé 5">
             <a:extLst>
               <a:ext uri="{FF2B5EF4-FFF2-40B4-BE49-F238E27FC236}">
-                <a16:creationId xmlns:a16="http://schemas.microsoft.com/office/drawing/2014/main" xmlns="" id="{2B00C88B-FF32-40AA-A187-727D96FD7862}"/>
+                <a16:creationId xmlns:a16="http://schemas.microsoft.com/office/drawing/2014/main" id="{2B00C88B-FF32-40AA-A187-727D96FD7862}"/>
               </a:ext>
             </a:extLst>
           </p:cNvPr>
@@ -8925,7 +8184,7 @@
           <p:cNvPr id="7" name="Espaço Reservado para Número de Slide 6">
             <a:extLst>
               <a:ext uri="{FF2B5EF4-FFF2-40B4-BE49-F238E27FC236}">
-                <a16:creationId xmlns:a16="http://schemas.microsoft.com/office/drawing/2014/main" xmlns="" id="{A04D1A2D-69F7-4B8F-A730-BC26DC340BA6}"/>
+                <a16:creationId xmlns:a16="http://schemas.microsoft.com/office/drawing/2014/main" id="{A04D1A2D-69F7-4B8F-A730-BC26DC340BA6}"/>
               </a:ext>
             </a:extLst>
           </p:cNvPr>
@@ -8943,7 +8202,7 @@
           <a:p>
             <a:fld id="{1A7E88B7-70CE-4035-AE73-13FA6FB985D4}" type="slidenum">
               <a:rPr lang="pt-BR" smtClean="0"/>
-              <a:t>‹nº›</a:t>
+              <a:t>‹#›</a:t>
             </a:fld>
             <a:endParaRPr lang="pt-BR"/>
           </a:p>
@@ -8989,7 +8248,7 @@
           <p:cNvPr id="2" name="Espaço Reservado para Título 1">
             <a:extLst>
               <a:ext uri="{FF2B5EF4-FFF2-40B4-BE49-F238E27FC236}">
-                <a16:creationId xmlns:a16="http://schemas.microsoft.com/office/drawing/2014/main" xmlns="" id="{E69A0273-1966-4A1B-9370-4C1CE5036371}"/>
+                <a16:creationId xmlns:a16="http://schemas.microsoft.com/office/drawing/2014/main" id="{E69A0273-1966-4A1B-9370-4C1CE5036371}"/>
               </a:ext>
             </a:extLst>
           </p:cNvPr>
@@ -9027,7 +8286,7 @@
           <p:cNvPr id="3" name="Espaço Reservado para Texto 2">
             <a:extLst>
               <a:ext uri="{FF2B5EF4-FFF2-40B4-BE49-F238E27FC236}">
-                <a16:creationId xmlns:a16="http://schemas.microsoft.com/office/drawing/2014/main" xmlns="" id="{3B9CF87A-0448-49A7-AB25-EBC1D56A40EF}"/>
+                <a16:creationId xmlns:a16="http://schemas.microsoft.com/office/drawing/2014/main" id="{3B9CF87A-0448-49A7-AB25-EBC1D56A40EF}"/>
               </a:ext>
             </a:extLst>
           </p:cNvPr>
@@ -9094,7 +8353,7 @@
           <p:cNvPr id="4" name="Espaço Reservado para Data 3">
             <a:extLst>
               <a:ext uri="{FF2B5EF4-FFF2-40B4-BE49-F238E27FC236}">
-                <a16:creationId xmlns:a16="http://schemas.microsoft.com/office/drawing/2014/main" xmlns="" id="{2EF7B1F2-BB5A-44D0-816D-16AD2C71430E}"/>
+                <a16:creationId xmlns:a16="http://schemas.microsoft.com/office/drawing/2014/main" id="{2EF7B1F2-BB5A-44D0-816D-16AD2C71430E}"/>
               </a:ext>
             </a:extLst>
           </p:cNvPr>
@@ -9130,7 +8389,7 @@
           <a:p>
             <a:fld id="{63289F7E-B80B-496E-81B4-D396C37C9454}" type="datetimeFigureOut">
               <a:rPr lang="pt-BR" smtClean="0"/>
-              <a:t>12/05/2025</a:t>
+              <a:t>13/05/2025</a:t>
             </a:fld>
             <a:endParaRPr lang="pt-BR"/>
           </a:p>
@@ -9141,7 +8400,7 @@
           <p:cNvPr id="5" name="Espaço Reservado para Rodapé 4">
             <a:extLst>
               <a:ext uri="{FF2B5EF4-FFF2-40B4-BE49-F238E27FC236}">
-                <a16:creationId xmlns:a16="http://schemas.microsoft.com/office/drawing/2014/main" xmlns="" id="{C703F94C-2CC8-4DAA-BC35-14FC3E841DCD}"/>
+                <a16:creationId xmlns:a16="http://schemas.microsoft.com/office/drawing/2014/main" id="{C703F94C-2CC8-4DAA-BC35-14FC3E841DCD}"/>
               </a:ext>
             </a:extLst>
           </p:cNvPr>
@@ -9184,7 +8443,7 @@
           <p:cNvPr id="6" name="Espaço Reservado para Número de Slide 5">
             <a:extLst>
               <a:ext uri="{FF2B5EF4-FFF2-40B4-BE49-F238E27FC236}">
-                <a16:creationId xmlns:a16="http://schemas.microsoft.com/office/drawing/2014/main" xmlns="" id="{64051336-7048-457A-8B61-D94291D71648}"/>
+                <a16:creationId xmlns:a16="http://schemas.microsoft.com/office/drawing/2014/main" id="{64051336-7048-457A-8B61-D94291D71648}"/>
               </a:ext>
             </a:extLst>
           </p:cNvPr>
@@ -9220,7 +8479,7 @@
           <a:p>
             <a:fld id="{1A7E88B7-70CE-4035-AE73-13FA6FB985D4}" type="slidenum">
               <a:rPr lang="pt-BR" smtClean="0"/>
-              <a:t>‹nº›</a:t>
+              <a:t>‹#›</a:t>
             </a:fld>
             <a:endParaRPr lang="pt-BR"/>
           </a:p>
@@ -9683,7 +8942,7 @@
             <a:fld id="{1D8BD707-D9CF-40AE-B4C6-C98DA3205C09}" type="datetimeFigureOut">
               <a:rPr lang="en-US" smtClean="0"/>
               <a:pPr/>
-              <a:t>5/12/2025</a:t>
+              <a:t>5/13/2025</a:t>
             </a:fld>
             <a:endParaRPr lang="en-US"/>
           </a:p>
@@ -9762,7 +9021,7 @@
             <a:fld id="{B6F15528-21DE-4FAA-801E-634DDDAF4B2B}" type="slidenum">
               <a:rPr lang="en-US" smtClean="0"/>
               <a:pPr/>
-              <a:t>‹nº›</a:t>
+              <a:t>‹#›</a:t>
             </a:fld>
             <a:endParaRPr lang="en-US"/>
           </a:p>
@@ -10064,7 +9323,7 @@
           <p:cNvPr id="2" name="Título 1">
             <a:extLst>
               <a:ext uri="{FF2B5EF4-FFF2-40B4-BE49-F238E27FC236}">
-                <a16:creationId xmlns:a16="http://schemas.microsoft.com/office/drawing/2014/main" xmlns="" id="{32666AC8-2E17-4DB4-B0F5-60C640CCFD2E}"/>
+                <a16:creationId xmlns:a16="http://schemas.microsoft.com/office/drawing/2014/main" id="{32666AC8-2E17-4DB4-B0F5-60C640CCFD2E}"/>
               </a:ext>
             </a:extLst>
           </p:cNvPr>
@@ -10099,10 +9358,6 @@
               <a:rPr lang="pt-BR" sz="5400" dirty="0"/>
               <a:t> Learning:</a:t>
             </a:r>
-            <a:r>
-              <a:rPr lang="pt-BR" dirty="0"/>
-              <a:t/>
-            </a:r>
             <a:br>
               <a:rPr lang="pt-BR" dirty="0"/>
             </a:br>
@@ -10118,7 +9373,7 @@
           <p:cNvPr id="1026" name="Picture 2" descr="Logo">
             <a:extLst>
               <a:ext uri="{FF2B5EF4-FFF2-40B4-BE49-F238E27FC236}">
-                <a16:creationId xmlns:a16="http://schemas.microsoft.com/office/drawing/2014/main" xmlns="" id="{3F2642E0-4F6A-4196-8F58-E77D36E9A33F}"/>
+                <a16:creationId xmlns:a16="http://schemas.microsoft.com/office/drawing/2014/main" id="{3F2642E0-4F6A-4196-8F58-E77D36E9A33F}"/>
               </a:ext>
             </a:extLst>
           </p:cNvPr>
@@ -10163,7 +9418,7 @@
           <p:cNvPr id="5122" name="Picture 2" descr="Image result for machine learning">
             <a:extLst>
               <a:ext uri="{FF2B5EF4-FFF2-40B4-BE49-F238E27FC236}">
-                <a16:creationId xmlns:a16="http://schemas.microsoft.com/office/drawing/2014/main" xmlns="" id="{810CE0A2-4102-44A6-A370-175E7896CDCB}"/>
+                <a16:creationId xmlns:a16="http://schemas.microsoft.com/office/drawing/2014/main" id="{810CE0A2-4102-44A6-A370-175E7896CDCB}"/>
               </a:ext>
             </a:extLst>
           </p:cNvPr>
@@ -10208,7 +9463,7 @@
           <p:cNvPr id="3" name="Picture 2" descr="IoT Group">
             <a:extLst>
               <a:ext uri="{FF2B5EF4-FFF2-40B4-BE49-F238E27FC236}">
-                <a16:creationId xmlns:a16="http://schemas.microsoft.com/office/drawing/2014/main" xmlns="" id="{AC034F57-E830-B6E7-6790-12FDBBDB2975}"/>
+                <a16:creationId xmlns:a16="http://schemas.microsoft.com/office/drawing/2014/main" id="{AC034F57-E830-B6E7-6790-12FDBBDB2975}"/>
               </a:ext>
             </a:extLst>
           </p:cNvPr>
@@ -10253,7 +9508,7 @@
           <p:cNvPr id="5" name="CaixaDeTexto 4">
             <a:extLst>
               <a:ext uri="{FF2B5EF4-FFF2-40B4-BE49-F238E27FC236}">
-                <a16:creationId xmlns:a16="http://schemas.microsoft.com/office/drawing/2014/main" xmlns="" id="{2D82026D-D2EA-05D7-61F2-DEE04704DB7E}"/>
+                <a16:creationId xmlns:a16="http://schemas.microsoft.com/office/drawing/2014/main" id="{2D82026D-D2EA-05D7-61F2-DEE04704DB7E}"/>
               </a:ext>
             </a:extLst>
           </p:cNvPr>
@@ -10324,7 +9579,7 @@
         <p:cNvPr id="1" name="">
           <a:extLst>
             <a:ext uri="{FF2B5EF4-FFF2-40B4-BE49-F238E27FC236}">
-              <a16:creationId xmlns:a16="http://schemas.microsoft.com/office/drawing/2014/main" xmlns="" id="{1F378FD1-DBF4-DCA8-F1BC-B3E89729AAC1}"/>
+              <a16:creationId xmlns:a16="http://schemas.microsoft.com/office/drawing/2014/main" id="{1F378FD1-DBF4-DCA8-F1BC-B3E89729AAC1}"/>
             </a:ext>
           </a:extLst>
         </p:cNvPr>
@@ -10344,7 +9599,7 @@
           <p:cNvPr id="2" name="Título 1">
             <a:extLst>
               <a:ext uri="{FF2B5EF4-FFF2-40B4-BE49-F238E27FC236}">
-                <a16:creationId xmlns:a16="http://schemas.microsoft.com/office/drawing/2014/main" xmlns="" id="{27002D84-8C44-E80A-6CE1-1C285A07DF3A}"/>
+                <a16:creationId xmlns:a16="http://schemas.microsoft.com/office/drawing/2014/main" id="{27002D84-8C44-E80A-6CE1-1C285A07DF3A}"/>
               </a:ext>
             </a:extLst>
           </p:cNvPr>
@@ -10384,7 +9639,7 @@
           <p:cNvPr id="3" name="AutoShape 2" descr="An example of graph signal reconstruction over wireless sensor network. |  Download Scientific Diagram">
             <a:extLst>
               <a:ext uri="{FF2B5EF4-FFF2-40B4-BE49-F238E27FC236}">
-                <a16:creationId xmlns:a16="http://schemas.microsoft.com/office/drawing/2014/main" xmlns="" id="{3E14BFEB-7725-6B4D-C589-A43632C98002}"/>
+                <a16:creationId xmlns:a16="http://schemas.microsoft.com/office/drawing/2014/main" id="{3E14BFEB-7725-6B4D-C589-A43632C98002}"/>
               </a:ext>
             </a:extLst>
           </p:cNvPr>
@@ -10435,7 +9690,7 @@
           <p:cNvPr id="7" name="AutoShape 4" descr="An example of graph signal reconstruction over wireless sensor network. |  Download Scientific Diagram">
             <a:extLst>
               <a:ext uri="{FF2B5EF4-FFF2-40B4-BE49-F238E27FC236}">
-                <a16:creationId xmlns:a16="http://schemas.microsoft.com/office/drawing/2014/main" xmlns="" id="{DDC94C5F-D329-0D03-2D55-303CAEA46575}"/>
+                <a16:creationId xmlns:a16="http://schemas.microsoft.com/office/drawing/2014/main" id="{DDC94C5F-D329-0D03-2D55-303CAEA46575}"/>
               </a:ext>
             </a:extLst>
           </p:cNvPr>
@@ -10486,7 +9741,7 @@
           <p:cNvPr id="4" name="Espaço Reservado para Conteúdo 3">
             <a:extLst>
               <a:ext uri="{FF2B5EF4-FFF2-40B4-BE49-F238E27FC236}">
-                <a16:creationId xmlns:a16="http://schemas.microsoft.com/office/drawing/2014/main" xmlns="" id="{0C330112-2C2B-538C-EFFC-0C5273ED92DF}"/>
+                <a16:creationId xmlns:a16="http://schemas.microsoft.com/office/drawing/2014/main" id="{0C330112-2C2B-538C-EFFC-0C5273ED92DF}"/>
               </a:ext>
             </a:extLst>
           </p:cNvPr>
@@ -10529,7 +9784,7 @@
           <p:cNvPr id="8" name="Picture 7">
             <a:extLst>
               <a:ext uri="{FF2B5EF4-FFF2-40B4-BE49-F238E27FC236}">
-                <a16:creationId xmlns:a16="http://schemas.microsoft.com/office/drawing/2014/main" xmlns="" id="{4A874BBD-11DB-833A-341F-F134DDD11108}"/>
+                <a16:creationId xmlns:a16="http://schemas.microsoft.com/office/drawing/2014/main" id="{4A874BBD-11DB-833A-341F-F134DDD11108}"/>
               </a:ext>
             </a:extLst>
           </p:cNvPr>
@@ -10559,7 +9814,7 @@
           <p:cNvPr id="10" name="TextBox 9">
             <a:extLst>
               <a:ext uri="{FF2B5EF4-FFF2-40B4-BE49-F238E27FC236}">
-                <a16:creationId xmlns:a16="http://schemas.microsoft.com/office/drawing/2014/main" xmlns="" id="{FB63ADD3-D956-76C5-F130-F38465877D67}"/>
+                <a16:creationId xmlns:a16="http://schemas.microsoft.com/office/drawing/2014/main" id="{FB63ADD3-D956-76C5-F130-F38465877D67}"/>
               </a:ext>
             </a:extLst>
           </p:cNvPr>
@@ -10582,15 +9837,6 @@
           </a:bodyPr>
           <a:lstStyle/>
           <a:p>
-            <a:r>
-              <a:rPr lang="pt-BR" b="0" i="0" dirty="0" smtClean="0">
-                <a:solidFill>
-                  <a:srgbClr val="404040"/>
-                </a:solidFill>
-                <a:effectLst/>
-              </a:rPr>
-              <a:t>4. Recalcula-se </a:t>
-            </a:r>
             <a:r>
               <a:rPr lang="pt-BR" b="0" i="0" dirty="0">
                 <a:solidFill>
@@ -10598,7 +9844,7 @@
                 </a:solidFill>
                 <a:effectLst/>
               </a:rPr>
-              <a:t>o centroide do clusters.</a:t>
+              <a:t>4. Recalcula-se o centroide do clusters.</a:t>
             </a:r>
             <a:endParaRPr lang="en-US" dirty="0"/>
           </a:p>
@@ -10639,7 +9885,7 @@
         <p:cNvPr id="1" name="">
           <a:extLst>
             <a:ext uri="{FF2B5EF4-FFF2-40B4-BE49-F238E27FC236}">
-              <a16:creationId xmlns:a16="http://schemas.microsoft.com/office/drawing/2014/main" xmlns="" id="{9BB75298-302A-6135-F195-096473EDA4DD}"/>
+              <a16:creationId xmlns:a16="http://schemas.microsoft.com/office/drawing/2014/main" id="{9BB75298-302A-6135-F195-096473EDA4DD}"/>
             </a:ext>
           </a:extLst>
         </p:cNvPr>
@@ -10659,7 +9905,7 @@
           <p:cNvPr id="2" name="Título 1">
             <a:extLst>
               <a:ext uri="{FF2B5EF4-FFF2-40B4-BE49-F238E27FC236}">
-                <a16:creationId xmlns:a16="http://schemas.microsoft.com/office/drawing/2014/main" xmlns="" id="{27828DF8-D69B-BFFF-D2B4-A925DD43717D}"/>
+                <a16:creationId xmlns:a16="http://schemas.microsoft.com/office/drawing/2014/main" id="{27828DF8-D69B-BFFF-D2B4-A925DD43717D}"/>
               </a:ext>
             </a:extLst>
           </p:cNvPr>
@@ -10699,7 +9945,7 @@
           <p:cNvPr id="3" name="AutoShape 2" descr="An example of graph signal reconstruction over wireless sensor network. |  Download Scientific Diagram">
             <a:extLst>
               <a:ext uri="{FF2B5EF4-FFF2-40B4-BE49-F238E27FC236}">
-                <a16:creationId xmlns:a16="http://schemas.microsoft.com/office/drawing/2014/main" xmlns="" id="{A4C3F9D2-0307-0450-4E41-55D3298E641B}"/>
+                <a16:creationId xmlns:a16="http://schemas.microsoft.com/office/drawing/2014/main" id="{A4C3F9D2-0307-0450-4E41-55D3298E641B}"/>
               </a:ext>
             </a:extLst>
           </p:cNvPr>
@@ -10750,7 +9996,7 @@
           <p:cNvPr id="7" name="AutoShape 4" descr="An example of graph signal reconstruction over wireless sensor network. |  Download Scientific Diagram">
             <a:extLst>
               <a:ext uri="{FF2B5EF4-FFF2-40B4-BE49-F238E27FC236}">
-                <a16:creationId xmlns:a16="http://schemas.microsoft.com/office/drawing/2014/main" xmlns="" id="{A5277E26-0B39-A36B-7447-436FDC3E025E}"/>
+                <a16:creationId xmlns:a16="http://schemas.microsoft.com/office/drawing/2014/main" id="{A5277E26-0B39-A36B-7447-436FDC3E025E}"/>
               </a:ext>
             </a:extLst>
           </p:cNvPr>
@@ -10801,7 +10047,7 @@
           <p:cNvPr id="4" name="Espaço Reservado para Conteúdo 3">
             <a:extLst>
               <a:ext uri="{FF2B5EF4-FFF2-40B4-BE49-F238E27FC236}">
-                <a16:creationId xmlns:a16="http://schemas.microsoft.com/office/drawing/2014/main" xmlns="" id="{83702F57-B420-BA92-57FC-CDEAF0E04638}"/>
+                <a16:creationId xmlns:a16="http://schemas.microsoft.com/office/drawing/2014/main" id="{83702F57-B420-BA92-57FC-CDEAF0E04638}"/>
               </a:ext>
             </a:extLst>
           </p:cNvPr>
@@ -10844,7 +10090,7 @@
           <p:cNvPr id="6" name="Picture 5">
             <a:extLst>
               <a:ext uri="{FF2B5EF4-FFF2-40B4-BE49-F238E27FC236}">
-                <a16:creationId xmlns:a16="http://schemas.microsoft.com/office/drawing/2014/main" xmlns="" id="{BE9E2474-44BE-43D0-EE2F-D03349050DA2}"/>
+                <a16:creationId xmlns:a16="http://schemas.microsoft.com/office/drawing/2014/main" id="{BE9E2474-44BE-43D0-EE2F-D03349050DA2}"/>
               </a:ext>
             </a:extLst>
           </p:cNvPr>
@@ -10874,7 +10120,7 @@
           <p:cNvPr id="10" name="TextBox 9">
             <a:extLst>
               <a:ext uri="{FF2B5EF4-FFF2-40B4-BE49-F238E27FC236}">
-                <a16:creationId xmlns:a16="http://schemas.microsoft.com/office/drawing/2014/main" xmlns="" id="{E7FEC406-7A7E-5D78-DF69-D2416A2375C3}"/>
+                <a16:creationId xmlns:a16="http://schemas.microsoft.com/office/drawing/2014/main" id="{E7FEC406-7A7E-5D78-DF69-D2416A2375C3}"/>
               </a:ext>
             </a:extLst>
           </p:cNvPr>
@@ -10897,15 +10143,6 @@
           </a:bodyPr>
           <a:lstStyle/>
           <a:p>
-            <a:r>
-              <a:rPr lang="pt-BR" b="0" i="0" dirty="0" smtClean="0">
-                <a:solidFill>
-                  <a:srgbClr val="404040"/>
-                </a:solidFill>
-                <a:effectLst/>
-              </a:rPr>
-              <a:t>5. Repete-se </a:t>
-            </a:r>
             <a:r>
               <a:rPr lang="pt-BR" b="0" i="0" dirty="0">
                 <a:solidFill>
@@ -10913,7 +10150,7 @@
                 </a:solidFill>
                 <a:effectLst/>
               </a:rPr>
-              <a:t>os passos 3 e 4.</a:t>
+              <a:t>5. Repete-se os passos 3 e 4.</a:t>
             </a:r>
             <a:endParaRPr lang="en-US" dirty="0"/>
           </a:p>
@@ -10954,7 +10191,7 @@
         <p:cNvPr id="1" name="">
           <a:extLst>
             <a:ext uri="{FF2B5EF4-FFF2-40B4-BE49-F238E27FC236}">
-              <a16:creationId xmlns:a16="http://schemas.microsoft.com/office/drawing/2014/main" xmlns="" id="{749972DB-1A29-C878-AC52-B084A233C66B}"/>
+              <a16:creationId xmlns:a16="http://schemas.microsoft.com/office/drawing/2014/main" id="{749972DB-1A29-C878-AC52-B084A233C66B}"/>
             </a:ext>
           </a:extLst>
         </p:cNvPr>
@@ -10974,7 +10211,7 @@
           <p:cNvPr id="2" name="Título 1">
             <a:extLst>
               <a:ext uri="{FF2B5EF4-FFF2-40B4-BE49-F238E27FC236}">
-                <a16:creationId xmlns:a16="http://schemas.microsoft.com/office/drawing/2014/main" xmlns="" id="{223F31A0-EB34-A3FB-D3AD-8E88098E62F1}"/>
+                <a16:creationId xmlns:a16="http://schemas.microsoft.com/office/drawing/2014/main" id="{223F31A0-EB34-A3FB-D3AD-8E88098E62F1}"/>
               </a:ext>
             </a:extLst>
           </p:cNvPr>
@@ -11014,7 +10251,7 @@
           <p:cNvPr id="3" name="AutoShape 2" descr="An example of graph signal reconstruction over wireless sensor network. |  Download Scientific Diagram">
             <a:extLst>
               <a:ext uri="{FF2B5EF4-FFF2-40B4-BE49-F238E27FC236}">
-                <a16:creationId xmlns:a16="http://schemas.microsoft.com/office/drawing/2014/main" xmlns="" id="{A22086E9-56E3-EC28-E48A-9069376FF074}"/>
+                <a16:creationId xmlns:a16="http://schemas.microsoft.com/office/drawing/2014/main" id="{A22086E9-56E3-EC28-E48A-9069376FF074}"/>
               </a:ext>
             </a:extLst>
           </p:cNvPr>
@@ -11065,7 +10302,7 @@
           <p:cNvPr id="7" name="AutoShape 4" descr="An example of graph signal reconstruction over wireless sensor network. |  Download Scientific Diagram">
             <a:extLst>
               <a:ext uri="{FF2B5EF4-FFF2-40B4-BE49-F238E27FC236}">
-                <a16:creationId xmlns:a16="http://schemas.microsoft.com/office/drawing/2014/main" xmlns="" id="{E1A13779-07EA-5350-121F-C4141832B952}"/>
+                <a16:creationId xmlns:a16="http://schemas.microsoft.com/office/drawing/2014/main" id="{E1A13779-07EA-5350-121F-C4141832B952}"/>
               </a:ext>
             </a:extLst>
           </p:cNvPr>
@@ -11116,7 +10353,7 @@
           <p:cNvPr id="4" name="Espaço Reservado para Conteúdo 3">
             <a:extLst>
               <a:ext uri="{FF2B5EF4-FFF2-40B4-BE49-F238E27FC236}">
-                <a16:creationId xmlns:a16="http://schemas.microsoft.com/office/drawing/2014/main" xmlns="" id="{B461F4C5-B5F4-E3F6-B686-4C94C38803D5}"/>
+                <a16:creationId xmlns:a16="http://schemas.microsoft.com/office/drawing/2014/main" id="{B461F4C5-B5F4-E3F6-B686-4C94C38803D5}"/>
               </a:ext>
             </a:extLst>
           </p:cNvPr>
@@ -11159,7 +10396,7 @@
           <p:cNvPr id="6" name="Picture 5">
             <a:extLst>
               <a:ext uri="{FF2B5EF4-FFF2-40B4-BE49-F238E27FC236}">
-                <a16:creationId xmlns:a16="http://schemas.microsoft.com/office/drawing/2014/main" xmlns="" id="{CD544109-9098-CA3C-766B-DFEB05AE1F38}"/>
+                <a16:creationId xmlns:a16="http://schemas.microsoft.com/office/drawing/2014/main" id="{CD544109-9098-CA3C-766B-DFEB05AE1F38}"/>
               </a:ext>
             </a:extLst>
           </p:cNvPr>
@@ -11189,7 +10426,7 @@
           <p:cNvPr id="9" name="TextBox 9">
             <a:extLst>
               <a:ext uri="{FF2B5EF4-FFF2-40B4-BE49-F238E27FC236}">
-                <a16:creationId xmlns:a16="http://schemas.microsoft.com/office/drawing/2014/main" xmlns="" id="{E7FEC406-7A7E-5D78-DF69-D2416A2375C3}"/>
+                <a16:creationId xmlns:a16="http://schemas.microsoft.com/office/drawing/2014/main" id="{E7FEC406-7A7E-5D78-DF69-D2416A2375C3}"/>
               </a:ext>
             </a:extLst>
           </p:cNvPr>
@@ -11212,15 +10449,6 @@
           </a:bodyPr>
           <a:lstStyle/>
           <a:p>
-            <a:r>
-              <a:rPr lang="pt-BR" b="0" i="0" dirty="0" smtClean="0">
-                <a:solidFill>
-                  <a:srgbClr val="404040"/>
-                </a:solidFill>
-                <a:effectLst/>
-              </a:rPr>
-              <a:t>5. Repete-se </a:t>
-            </a:r>
             <a:r>
               <a:rPr lang="pt-BR" b="0" i="0" dirty="0">
                 <a:solidFill>
@@ -11228,7 +10456,7 @@
                 </a:solidFill>
                 <a:effectLst/>
               </a:rPr>
-              <a:t>os passos 3 e 4.</a:t>
+              <a:t>5. Repete-se os passos 3 e 4.</a:t>
             </a:r>
             <a:endParaRPr lang="en-US" dirty="0"/>
           </a:p>
@@ -11269,7 +10497,7 @@
         <p:cNvPr id="1" name="">
           <a:extLst>
             <a:ext uri="{FF2B5EF4-FFF2-40B4-BE49-F238E27FC236}">
-              <a16:creationId xmlns:a16="http://schemas.microsoft.com/office/drawing/2014/main" xmlns="" id="{69317B56-95CF-5EB4-1950-84D108AD8D37}"/>
+              <a16:creationId xmlns:a16="http://schemas.microsoft.com/office/drawing/2014/main" id="{69317B56-95CF-5EB4-1950-84D108AD8D37}"/>
             </a:ext>
           </a:extLst>
         </p:cNvPr>
@@ -11289,7 +10517,7 @@
           <p:cNvPr id="2" name="Título 1">
             <a:extLst>
               <a:ext uri="{FF2B5EF4-FFF2-40B4-BE49-F238E27FC236}">
-                <a16:creationId xmlns:a16="http://schemas.microsoft.com/office/drawing/2014/main" xmlns="" id="{48642745-4759-3504-B537-1A643C25576D}"/>
+                <a16:creationId xmlns:a16="http://schemas.microsoft.com/office/drawing/2014/main" id="{48642745-4759-3504-B537-1A643C25576D}"/>
               </a:ext>
             </a:extLst>
           </p:cNvPr>
@@ -11329,7 +10557,7 @@
           <p:cNvPr id="3" name="AutoShape 2" descr="An example of graph signal reconstruction over wireless sensor network. |  Download Scientific Diagram">
             <a:extLst>
               <a:ext uri="{FF2B5EF4-FFF2-40B4-BE49-F238E27FC236}">
-                <a16:creationId xmlns:a16="http://schemas.microsoft.com/office/drawing/2014/main" xmlns="" id="{84E44FE8-BA6E-9F6F-1997-0AD869D77EFD}"/>
+                <a16:creationId xmlns:a16="http://schemas.microsoft.com/office/drawing/2014/main" id="{84E44FE8-BA6E-9F6F-1997-0AD869D77EFD}"/>
               </a:ext>
             </a:extLst>
           </p:cNvPr>
@@ -11380,7 +10608,7 @@
           <p:cNvPr id="7" name="AutoShape 4" descr="An example of graph signal reconstruction over wireless sensor network. |  Download Scientific Diagram">
             <a:extLst>
               <a:ext uri="{FF2B5EF4-FFF2-40B4-BE49-F238E27FC236}">
-                <a16:creationId xmlns:a16="http://schemas.microsoft.com/office/drawing/2014/main" xmlns="" id="{21DB31B1-11EA-8016-35EE-14EA7345F531}"/>
+                <a16:creationId xmlns:a16="http://schemas.microsoft.com/office/drawing/2014/main" id="{21DB31B1-11EA-8016-35EE-14EA7345F531}"/>
               </a:ext>
             </a:extLst>
           </p:cNvPr>
@@ -11431,7 +10659,7 @@
           <p:cNvPr id="4" name="Espaço Reservado para Conteúdo 3">
             <a:extLst>
               <a:ext uri="{FF2B5EF4-FFF2-40B4-BE49-F238E27FC236}">
-                <a16:creationId xmlns:a16="http://schemas.microsoft.com/office/drawing/2014/main" xmlns="" id="{63D17EBA-F020-2A71-B133-21937AD74F91}"/>
+                <a16:creationId xmlns:a16="http://schemas.microsoft.com/office/drawing/2014/main" id="{63D17EBA-F020-2A71-B133-21937AD74F91}"/>
               </a:ext>
             </a:extLst>
           </p:cNvPr>
@@ -11474,7 +10702,7 @@
           <p:cNvPr id="6" name="Picture 5">
             <a:extLst>
               <a:ext uri="{FF2B5EF4-FFF2-40B4-BE49-F238E27FC236}">
-                <a16:creationId xmlns:a16="http://schemas.microsoft.com/office/drawing/2014/main" xmlns="" id="{9F08A47C-C93C-D40B-F5DC-3C29F2EEEE60}"/>
+                <a16:creationId xmlns:a16="http://schemas.microsoft.com/office/drawing/2014/main" id="{9F08A47C-C93C-D40B-F5DC-3C29F2EEEE60}"/>
               </a:ext>
             </a:extLst>
           </p:cNvPr>
@@ -11504,7 +10732,7 @@
           <p:cNvPr id="8" name="TextBox 7">
             <a:extLst>
               <a:ext uri="{FF2B5EF4-FFF2-40B4-BE49-F238E27FC236}">
-                <a16:creationId xmlns:a16="http://schemas.microsoft.com/office/drawing/2014/main" xmlns="" id="{4376C1A9-3731-8BF9-861E-3D686FEA4F43}"/>
+                <a16:creationId xmlns:a16="http://schemas.microsoft.com/office/drawing/2014/main" id="{4376C1A9-3731-8BF9-861E-3D686FEA4F43}"/>
               </a:ext>
             </a:extLst>
           </p:cNvPr>
@@ -11527,15 +10755,6 @@
           </a:bodyPr>
           <a:lstStyle/>
           <a:p>
-            <a:r>
-              <a:rPr lang="pt-BR" b="0" i="0" dirty="0" smtClean="0">
-                <a:solidFill>
-                  <a:srgbClr val="404040"/>
-                </a:solidFill>
-                <a:effectLst/>
-              </a:rPr>
-              <a:t>Repete-se os </a:t>
-            </a:r>
             <a:r>
               <a:rPr lang="pt-BR" b="0" i="0" dirty="0">
                 <a:solidFill>
@@ -11543,29 +10762,11 @@
                 </a:solidFill>
                 <a:effectLst/>
               </a:rPr>
-              <a:t>passos </a:t>
-            </a:r>
-            <a:r>
-              <a:rPr lang="pt-BR" b="0" i="0" dirty="0" smtClean="0">
-                <a:solidFill>
-                  <a:srgbClr val="404040"/>
-                </a:solidFill>
-                <a:effectLst/>
-              </a:rPr>
-              <a:t>3-4</a:t>
+              <a:t>Repete-se os passos 3-4</a:t>
             </a:r>
             <a:r>
               <a:rPr lang="pt-BR" dirty="0"/>
               <a:t> </a:t>
-            </a:r>
-            <a:r>
-              <a:rPr lang="pt-BR" b="0" i="0" dirty="0" smtClean="0">
-                <a:solidFill>
-                  <a:srgbClr val="404040"/>
-                </a:solidFill>
-                <a:effectLst/>
-              </a:rPr>
-              <a:t>até </a:t>
             </a:r>
             <a:r>
               <a:rPr lang="pt-BR" b="0" i="0" dirty="0">
@@ -11574,16 +10775,7 @@
                 </a:solidFill>
                 <a:effectLst/>
               </a:rPr>
-              <a:t>que um dos seguintes </a:t>
-            </a:r>
-            <a:r>
-              <a:rPr lang="pt-BR" b="0" i="0" dirty="0" smtClean="0">
-                <a:solidFill>
-                  <a:srgbClr val="404040"/>
-                </a:solidFill>
-                <a:effectLst/>
-              </a:rPr>
-              <a:t>ocorra:</a:t>
+              <a:t>até que um dos seguintes ocorra:</a:t>
             </a:r>
             <a:endParaRPr lang="pt-BR" dirty="0"/>
           </a:p>
@@ -11592,15 +10784,6 @@
               <a:buFont typeface="+mj-lt"/>
               <a:buAutoNum type="arabicPeriod"/>
             </a:pPr>
-            <a:r>
-              <a:rPr lang="pt-BR" b="0" i="0" dirty="0" smtClean="0">
-                <a:solidFill>
-                  <a:srgbClr val="404040"/>
-                </a:solidFill>
-                <a:effectLst/>
-              </a:rPr>
-              <a:t>A </a:t>
-            </a:r>
             <a:r>
               <a:rPr lang="pt-BR" b="0" i="0" dirty="0">
                 <a:solidFill>
@@ -11608,17 +10791,15 @@
                 </a:solidFill>
                 <a:effectLst/>
               </a:rPr>
-              <a:t>soma das distâncias entre os pontos de dados e o </a:t>
-            </a:r>
-            <a:r>
-              <a:rPr lang="pt-BR" b="0" i="0" dirty="0" err="1">
-                <a:solidFill>
-                  <a:srgbClr val="404040"/>
-                </a:solidFill>
-                <a:effectLst/>
-              </a:rPr>
-              <a:t>centróide</a:t>
-            </a:r>
+              <a:t>A soma das distâncias entre os pontos de dados e o centroide correspondente seja minimizada</a:t>
+            </a:r>
+            <a:endParaRPr lang="pt-BR" dirty="0"/>
+          </a:p>
+          <a:p>
+            <a:pPr marL="342900" indent="-342900">
+              <a:buFont typeface="+mj-lt"/>
+              <a:buAutoNum type="arabicPeriod"/>
+            </a:pPr>
             <a:r>
               <a:rPr lang="pt-BR" b="0" i="0" dirty="0">
                 <a:solidFill>
@@ -11626,16 +10807,7 @@
                 </a:solidFill>
                 <a:effectLst/>
               </a:rPr>
-              <a:t> correspondente seja </a:t>
-            </a:r>
-            <a:r>
-              <a:rPr lang="pt-BR" b="0" i="0" dirty="0" smtClean="0">
-                <a:solidFill>
-                  <a:srgbClr val="404040"/>
-                </a:solidFill>
-                <a:effectLst/>
-              </a:rPr>
-              <a:t>minimizada</a:t>
+              <a:t>Não haja alteração nos centroides</a:t>
             </a:r>
             <a:endParaRPr lang="pt-BR" dirty="0"/>
           </a:p>
@@ -11644,15 +10816,6 @@
               <a:buFont typeface="+mj-lt"/>
               <a:buAutoNum type="arabicPeriod"/>
             </a:pPr>
-            <a:r>
-              <a:rPr lang="pt-BR" b="0" i="0" dirty="0" smtClean="0">
-                <a:solidFill>
-                  <a:srgbClr val="404040"/>
-                </a:solidFill>
-                <a:effectLst/>
-              </a:rPr>
-              <a:t>Não </a:t>
-            </a:r>
             <a:r>
               <a:rPr lang="pt-BR" b="0" i="0" dirty="0">
                 <a:solidFill>
@@ -11660,41 +10823,7 @@
                 </a:solidFill>
                 <a:effectLst/>
               </a:rPr>
-              <a:t>haja alteração nos </a:t>
-            </a:r>
-            <a:r>
-              <a:rPr lang="pt-BR" b="0" i="0" dirty="0" smtClean="0">
-                <a:solidFill>
-                  <a:srgbClr val="404040"/>
-                </a:solidFill>
-                <a:effectLst/>
-              </a:rPr>
-              <a:t>centroides</a:t>
-            </a:r>
-            <a:endParaRPr lang="pt-BR" dirty="0"/>
-          </a:p>
-          <a:p>
-            <a:pPr marL="342900" indent="-342900">
-              <a:buFont typeface="+mj-lt"/>
-              <a:buAutoNum type="arabicPeriod"/>
-            </a:pPr>
-            <a:r>
-              <a:rPr lang="pt-BR" b="0" i="0" dirty="0" smtClean="0">
-                <a:solidFill>
-                  <a:srgbClr val="404040"/>
-                </a:solidFill>
-                <a:effectLst/>
-              </a:rPr>
-              <a:t>O </a:t>
-            </a:r>
-            <a:r>
-              <a:rPr lang="pt-BR" b="0" i="0" dirty="0">
-                <a:solidFill>
-                  <a:srgbClr val="404040"/>
-                </a:solidFill>
-                <a:effectLst/>
-              </a:rPr>
-              <a:t>número máximo de iterações seja atingido</a:t>
+              <a:t>O número máximo de iterações seja atingido</a:t>
             </a:r>
             <a:endParaRPr lang="en-US" dirty="0"/>
           </a:p>
@@ -11772,7 +10901,7 @@
           <p:cNvPr id="2" name="Título 1">
             <a:extLst>
               <a:ext uri="{FF2B5EF4-FFF2-40B4-BE49-F238E27FC236}">
-                <a16:creationId xmlns:a16="http://schemas.microsoft.com/office/drawing/2014/main" xmlns="" id="{5F09B89C-3183-4D52-981A-62798DDFF2B8}"/>
+                <a16:creationId xmlns:a16="http://schemas.microsoft.com/office/drawing/2014/main" id="{5F09B89C-3183-4D52-981A-62798DDFF2B8}"/>
               </a:ext>
             </a:extLst>
           </p:cNvPr>
@@ -11807,7 +10936,7 @@
           <p:cNvPr id="3" name="AutoShape 2" descr="An example of graph signal reconstruction over wireless sensor network. |  Download Scientific Diagram">
             <a:extLst>
               <a:ext uri="{FF2B5EF4-FFF2-40B4-BE49-F238E27FC236}">
-                <a16:creationId xmlns:a16="http://schemas.microsoft.com/office/drawing/2014/main" xmlns="" id="{0166B4DD-D72A-4A54-94A7-2C38133837FD}"/>
+                <a16:creationId xmlns:a16="http://schemas.microsoft.com/office/drawing/2014/main" id="{0166B4DD-D72A-4A54-94A7-2C38133837FD}"/>
               </a:ext>
             </a:extLst>
           </p:cNvPr>
@@ -11858,7 +10987,7 @@
           <p:cNvPr id="7" name="AutoShape 4" descr="An example of graph signal reconstruction over wireless sensor network. |  Download Scientific Diagram">
             <a:extLst>
               <a:ext uri="{FF2B5EF4-FFF2-40B4-BE49-F238E27FC236}">
-                <a16:creationId xmlns:a16="http://schemas.microsoft.com/office/drawing/2014/main" xmlns="" id="{14C2B67D-81A1-457E-A410-FE4350A3CCA4}"/>
+                <a16:creationId xmlns:a16="http://schemas.microsoft.com/office/drawing/2014/main" id="{14C2B67D-81A1-457E-A410-FE4350A3CCA4}"/>
               </a:ext>
             </a:extLst>
           </p:cNvPr>
@@ -11909,7 +11038,7 @@
           <p:cNvPr id="1026" name="Picture 2" descr="Univariate Anomaly Detection | Anomaly Detection Algorithms">
             <a:extLst>
               <a:ext uri="{FF2B5EF4-FFF2-40B4-BE49-F238E27FC236}">
-                <a16:creationId xmlns:a16="http://schemas.microsoft.com/office/drawing/2014/main" xmlns="" id="{D6FF8611-2758-C1DA-8FC6-10C7681C129F}"/>
+                <a16:creationId xmlns:a16="http://schemas.microsoft.com/office/drawing/2014/main" id="{D6FF8611-2758-C1DA-8FC6-10C7681C129F}"/>
               </a:ext>
             </a:extLst>
           </p:cNvPr>
@@ -11956,7 +11085,7 @@
           <p:cNvPr id="4" name="Espaço Reservado para Conteúdo 3">
             <a:extLst>
               <a:ext uri="{FF2B5EF4-FFF2-40B4-BE49-F238E27FC236}">
-                <a16:creationId xmlns:a16="http://schemas.microsoft.com/office/drawing/2014/main" xmlns="" id="{5F1B432F-F570-AEC0-CFFF-C1D9196D7234}"/>
+                <a16:creationId xmlns:a16="http://schemas.microsoft.com/office/drawing/2014/main" id="{5F1B432F-F570-AEC0-CFFF-C1D9196D7234}"/>
               </a:ext>
             </a:extLst>
           </p:cNvPr>
@@ -11981,55 +11110,42 @@
           <a:p>
             <a:r>
               <a:rPr lang="pt-BR" dirty="0"/>
-              <a:t>A</a:t>
-            </a:r>
-            <a:r>
-              <a:rPr lang="pt-BR" dirty="0" smtClean="0"/>
-              <a:t> </a:t>
-            </a:r>
+              <a:t>A detecção de anomalias é a identificação de itens, eventos ou observações raras que levantam suspeitas por diferirem significativamente da maioria dos dados.</a:t>
+            </a:r>
+          </a:p>
+          <a:p>
             <a:r>
               <a:rPr lang="pt-BR" dirty="0"/>
-              <a:t>detecção de anomalias é a identificação de itens, eventos ou observações raras que levantam suspeitas por diferirem significativamente da maioria dos dados</a:t>
-            </a:r>
-            <a:r>
-              <a:rPr lang="pt-BR" dirty="0" smtClean="0"/>
-              <a:t>.</a:t>
-            </a:r>
-          </a:p>
-          <a:p>
-            <a:r>
-              <a:rPr lang="pt-BR" dirty="0" smtClean="0"/>
               <a:t>Exemplos</a:t>
             </a:r>
           </a:p>
           <a:p>
             <a:pPr lvl="1"/>
             <a:r>
-              <a:rPr lang="pt-BR" dirty="0" smtClean="0"/>
+              <a:rPr lang="pt-BR" dirty="0"/>
               <a:t>Detecção de spam</a:t>
             </a:r>
           </a:p>
           <a:p>
             <a:pPr lvl="1"/>
             <a:r>
-              <a:rPr lang="pt-BR" dirty="0" smtClean="0"/>
+              <a:rPr lang="pt-BR" dirty="0"/>
               <a:t>Detecção de fraude de cartão de crédito</a:t>
             </a:r>
           </a:p>
           <a:p>
             <a:pPr lvl="1"/>
             <a:r>
-              <a:rPr lang="pt-BR" dirty="0" smtClean="0"/>
+              <a:rPr lang="pt-BR" dirty="0"/>
               <a:t>Detecção de falhas</a:t>
             </a:r>
           </a:p>
           <a:p>
             <a:pPr lvl="1"/>
             <a:r>
-              <a:rPr lang="pt-BR" dirty="0" smtClean="0"/>
+              <a:rPr lang="pt-BR" dirty="0"/>
               <a:t>Detecção de movimento</a:t>
             </a:r>
-            <a:endParaRPr lang="pt-BR" dirty="0" smtClean="0"/>
           </a:p>
           <a:p>
             <a:pPr lvl="1"/>
@@ -12086,7 +11202,7 @@
           <p:cNvPr id="2" name="Título 1">
             <a:extLst>
               <a:ext uri="{FF2B5EF4-FFF2-40B4-BE49-F238E27FC236}">
-                <a16:creationId xmlns:a16="http://schemas.microsoft.com/office/drawing/2014/main" xmlns="" id="{5F09B89C-3183-4D52-981A-62798DDFF2B8}"/>
+                <a16:creationId xmlns:a16="http://schemas.microsoft.com/office/drawing/2014/main" id="{5F09B89C-3183-4D52-981A-62798DDFF2B8}"/>
               </a:ext>
             </a:extLst>
           </p:cNvPr>
@@ -12121,7 +11237,7 @@
           <p:cNvPr id="3" name="AutoShape 2" descr="An example of graph signal reconstruction over wireless sensor network. |  Download Scientific Diagram">
             <a:extLst>
               <a:ext uri="{FF2B5EF4-FFF2-40B4-BE49-F238E27FC236}">
-                <a16:creationId xmlns:a16="http://schemas.microsoft.com/office/drawing/2014/main" xmlns="" id="{0166B4DD-D72A-4A54-94A7-2C38133837FD}"/>
+                <a16:creationId xmlns:a16="http://schemas.microsoft.com/office/drawing/2014/main" id="{0166B4DD-D72A-4A54-94A7-2C38133837FD}"/>
               </a:ext>
             </a:extLst>
           </p:cNvPr>
@@ -12172,7 +11288,7 @@
           <p:cNvPr id="7" name="AutoShape 4" descr="An example of graph signal reconstruction over wireless sensor network. |  Download Scientific Diagram">
             <a:extLst>
               <a:ext uri="{FF2B5EF4-FFF2-40B4-BE49-F238E27FC236}">
-                <a16:creationId xmlns:a16="http://schemas.microsoft.com/office/drawing/2014/main" xmlns="" id="{14C2B67D-81A1-457E-A410-FE4350A3CCA4}"/>
+                <a16:creationId xmlns:a16="http://schemas.microsoft.com/office/drawing/2014/main" id="{14C2B67D-81A1-457E-A410-FE4350A3CCA4}"/>
               </a:ext>
             </a:extLst>
           </p:cNvPr>
@@ -12223,7 +11339,7 @@
           <p:cNvPr id="4" name="Espaço Reservado para Conteúdo 3">
             <a:extLst>
               <a:ext uri="{FF2B5EF4-FFF2-40B4-BE49-F238E27FC236}">
-                <a16:creationId xmlns:a16="http://schemas.microsoft.com/office/drawing/2014/main" xmlns="" id="{5F1B432F-F570-AEC0-CFFF-C1D9196D7234}"/>
+                <a16:creationId xmlns:a16="http://schemas.microsoft.com/office/drawing/2014/main" id="{5F1B432F-F570-AEC0-CFFF-C1D9196D7234}"/>
               </a:ext>
             </a:extLst>
           </p:cNvPr>
@@ -12256,7 +11372,7 @@
           <p:cNvPr id="2050" name="Picture 2" descr="Anomaly Detection Real World Scenarios Approaches and Live Implementation -  YouTube">
             <a:extLst>
               <a:ext uri="{FF2B5EF4-FFF2-40B4-BE49-F238E27FC236}">
-                <a16:creationId xmlns:a16="http://schemas.microsoft.com/office/drawing/2014/main" xmlns="" id="{FDE7A801-6226-C67C-506A-7A9F297D280C}"/>
+                <a16:creationId xmlns:a16="http://schemas.microsoft.com/office/drawing/2014/main" id="{FDE7A801-6226-C67C-506A-7A9F297D280C}"/>
               </a:ext>
             </a:extLst>
           </p:cNvPr>
@@ -12312,86 +11428,6 @@
 </file>
 
 <file path=ppt/slides/slide16.xml><?xml version="1.0" encoding="utf-8"?>
-<p:sld xmlns:a="http://schemas.openxmlformats.org/drawingml/2006/main" xmlns:r="http://schemas.openxmlformats.org/officeDocument/2006/relationships" xmlns:p="http://schemas.openxmlformats.org/presentationml/2006/main">
-  <p:cSld>
-    <p:spTree>
-      <p:nvGrpSpPr>
-        <p:cNvPr id="1" name=""/>
-        <p:cNvGrpSpPr/>
-        <p:nvPr/>
-      </p:nvGrpSpPr>
-      <p:grpSpPr>
-        <a:xfrm>
-          <a:off x="0" y="0"/>
-          <a:ext cx="0" cy="0"/>
-          <a:chOff x="0" y="0"/>
-          <a:chExt cx="0" cy="0"/>
-        </a:xfrm>
-      </p:grpSpPr>
-      <p:sp>
-        <p:nvSpPr>
-          <p:cNvPr id="2" name="Title 1">
-            <a:extLst>
-              <a:ext uri="{FF2B5EF4-FFF2-40B4-BE49-F238E27FC236}">
-                <a16:creationId xmlns:a16="http://schemas.microsoft.com/office/drawing/2014/main" xmlns="" id="{59016FD1-6296-97BB-4C76-AD710414CCC6}"/>
-              </a:ext>
-            </a:extLst>
-          </p:cNvPr>
-          <p:cNvSpPr>
-            <a:spLocks noGrp="1"/>
-          </p:cNvSpPr>
-          <p:nvPr>
-            <p:ph type="title"/>
-          </p:nvPr>
-        </p:nvSpPr>
-        <p:spPr/>
-        <p:txBody>
-          <a:bodyPr/>
-          <a:lstStyle/>
-          <a:p>
-            <a:endParaRPr lang="en-US"/>
-          </a:p>
-        </p:txBody>
-      </p:sp>
-      <p:sp>
-        <p:nvSpPr>
-          <p:cNvPr id="3" name="Content Placeholder 2">
-            <a:extLst>
-              <a:ext uri="{FF2B5EF4-FFF2-40B4-BE49-F238E27FC236}">
-                <a16:creationId xmlns:a16="http://schemas.microsoft.com/office/drawing/2014/main" xmlns="" id="{82472478-144F-3D25-9C47-48A21F2E7CAB}"/>
-              </a:ext>
-            </a:extLst>
-          </p:cNvPr>
-          <p:cNvSpPr>
-            <a:spLocks noGrp="1"/>
-          </p:cNvSpPr>
-          <p:nvPr>
-            <p:ph idx="1"/>
-          </p:nvPr>
-        </p:nvSpPr>
-        <p:spPr/>
-        <p:txBody>
-          <a:bodyPr/>
-          <a:lstStyle/>
-          <a:p>
-            <a:endParaRPr lang="en-US"/>
-          </a:p>
-        </p:txBody>
-      </p:sp>
-    </p:spTree>
-    <p:extLst>
-      <p:ext uri="{BB962C8B-B14F-4D97-AF65-F5344CB8AC3E}">
-        <p14:creationId xmlns:p14="http://schemas.microsoft.com/office/powerpoint/2010/main" val="151179307"/>
-      </p:ext>
-    </p:extLst>
-  </p:cSld>
-  <p:clrMapOvr>
-    <a:masterClrMapping/>
-  </p:clrMapOvr>
-</p:sld>
-</file>
-
-<file path=ppt/slides/slide17.xml><?xml version="1.0" encoding="utf-8"?>
 <p:sld xmlns:a="http://schemas.openxmlformats.org/drawingml/2006/main" xmlns:r="http://schemas.openxmlformats.org/officeDocument/2006/relationships" xmlns:p="http://schemas.openxmlformats.org/presentationml/2006/main">
   <p:cSld>
     <p:bg>
@@ -12410,7 +11446,13 @@
     </p:bg>
     <p:spTree>
       <p:nvGrpSpPr>
-        <p:cNvPr id="1" name=""/>
+        <p:cNvPr id="1" name="">
+          <a:extLst>
+            <a:ext uri="{FF2B5EF4-FFF2-40B4-BE49-F238E27FC236}">
+              <a16:creationId xmlns:a16="http://schemas.microsoft.com/office/drawing/2014/main" id="{042E1AD8-1AE2-9D66-D1D0-BECEA32F14E0}"/>
+            </a:ext>
+          </a:extLst>
+        </p:cNvPr>
         <p:cNvGrpSpPr/>
         <p:nvPr/>
       </p:nvGrpSpPr>
@@ -12427,7 +11469,7 @@
           <p:cNvPr id="2" name="Título 1">
             <a:extLst>
               <a:ext uri="{FF2B5EF4-FFF2-40B4-BE49-F238E27FC236}">
-                <a16:creationId xmlns:a16="http://schemas.microsoft.com/office/drawing/2014/main" xmlns="" id="{5F09B89C-3183-4D52-981A-62798DDFF2B8}"/>
+                <a16:creationId xmlns:a16="http://schemas.microsoft.com/office/drawing/2014/main" id="{91362F63-8B67-2CA5-F1E0-70285F8A5D99}"/>
               </a:ext>
             </a:extLst>
           </p:cNvPr>
@@ -12452,13 +11494,8 @@
           <a:p>
             <a:r>
               <a:rPr lang="pt-BR" dirty="0"/>
-              <a:t>K-</a:t>
-            </a:r>
-            <a:r>
-              <a:rPr lang="pt-BR" dirty="0" err="1"/>
-              <a:t>means</a:t>
-            </a:r>
-            <a:endParaRPr lang="pt-BR" dirty="0"/>
+              <a:t>Detecção de anomalias</a:t>
+            </a:r>
           </a:p>
         </p:txBody>
       </p:sp>
@@ -12467,7 +11504,7 @@
           <p:cNvPr id="3" name="AutoShape 2" descr="An example of graph signal reconstruction over wireless sensor network. |  Download Scientific Diagram">
             <a:extLst>
               <a:ext uri="{FF2B5EF4-FFF2-40B4-BE49-F238E27FC236}">
-                <a16:creationId xmlns:a16="http://schemas.microsoft.com/office/drawing/2014/main" xmlns="" id="{0166B4DD-D72A-4A54-94A7-2C38133837FD}"/>
+                <a16:creationId xmlns:a16="http://schemas.microsoft.com/office/drawing/2014/main" id="{22FDC0BB-96C6-D071-6072-8265FA475D3B}"/>
               </a:ext>
             </a:extLst>
           </p:cNvPr>
@@ -12518,7 +11555,7 @@
           <p:cNvPr id="7" name="AutoShape 4" descr="An example of graph signal reconstruction over wireless sensor network. |  Download Scientific Diagram">
             <a:extLst>
               <a:ext uri="{FF2B5EF4-FFF2-40B4-BE49-F238E27FC236}">
-                <a16:creationId xmlns:a16="http://schemas.microsoft.com/office/drawing/2014/main" xmlns="" id="{14C2B67D-81A1-457E-A410-FE4350A3CCA4}"/>
+                <a16:creationId xmlns:a16="http://schemas.microsoft.com/office/drawing/2014/main" id="{0D2FBB85-B0FE-5D58-DBE2-4C312CB1B3A1}"/>
               </a:ext>
             </a:extLst>
           </p:cNvPr>
@@ -12569,7 +11606,7 @@
           <p:cNvPr id="4" name="Espaço Reservado para Conteúdo 3">
             <a:extLst>
               <a:ext uri="{FF2B5EF4-FFF2-40B4-BE49-F238E27FC236}">
-                <a16:creationId xmlns:a16="http://schemas.microsoft.com/office/drawing/2014/main" xmlns="" id="{5F1B432F-F570-AEC0-CFFF-C1D9196D7234}"/>
+                <a16:creationId xmlns:a16="http://schemas.microsoft.com/office/drawing/2014/main" id="{F19EED01-E2A7-FCA9-AE40-ABE3206A5DB3}"/>
               </a:ext>
             </a:extLst>
           </p:cNvPr>
@@ -12587,214 +11624,257 @@
           </a:xfrm>
         </p:spPr>
         <p:txBody>
-          <a:bodyPr>
-            <a:normAutofit/>
-          </a:bodyPr>
-          <a:lstStyle/>
-          <a:p>
-            <a:pPr marL="0" indent="0">
-              <a:buNone/>
-            </a:pPr>
-            <a:endParaRPr lang="pt-BR" dirty="0"/>
-          </a:p>
-          <a:p>
-            <a:pPr marL="0" indent="0">
-              <a:buNone/>
-            </a:pPr>
-            <a:endParaRPr lang="pt-BR" dirty="0"/>
-          </a:p>
-        </p:txBody>
-      </p:sp>
-      <p:sp>
-        <p:nvSpPr>
-          <p:cNvPr id="6" name="CaixaDeTexto 5">
-            <a:extLst>
-              <a:ext uri="{FF2B5EF4-FFF2-40B4-BE49-F238E27FC236}">
-                <a16:creationId xmlns:a16="http://schemas.microsoft.com/office/drawing/2014/main" xmlns="" id="{470482DB-F365-0A83-E102-37A8EB7EACEF}"/>
-              </a:ext>
-            </a:extLst>
-          </p:cNvPr>
-          <p:cNvSpPr txBox="1"/>
-          <p:nvPr/>
-        </p:nvSpPr>
-        <p:spPr>
-          <a:xfrm>
-            <a:off x="846667" y="988201"/>
-            <a:ext cx="8229599" cy="4801314"/>
-          </a:xfrm>
-          <a:prstGeom prst="rect">
-            <a:avLst/>
-          </a:prstGeom>
-          <a:noFill/>
-        </p:spPr>
-        <p:txBody>
-          <a:bodyPr wrap="square">
-            <a:spAutoFit/>
-          </a:bodyPr>
-          <a:lstStyle/>
-          <a:p>
-            <a:endParaRPr lang="pt-BR" dirty="0"/>
-          </a:p>
-          <a:p>
-            <a:pPr marL="285750" indent="-285750">
-              <a:buFont typeface="Arial" panose="020B0604020202020204" pitchFamily="34" charset="0"/>
-              <a:buChar char="•"/>
-            </a:pPr>
+          <a:bodyPr/>
+          <a:lstStyle/>
+          <a:p>
             <a:r>
               <a:rPr lang="pt-BR" dirty="0"/>
-              <a:t>Exemplo</a:t>
-            </a:r>
+              <a:t>Algoritmos</a:t>
+            </a:r>
+          </a:p>
+          <a:p>
+            <a:pPr lvl="1"/>
             <a:r>
               <a:rPr lang="pt-BR" dirty="0"/>
-              <a:t>: Centros de distribuição</a:t>
-            </a:r>
-            <a:endParaRPr lang="pt-BR" dirty="0"/>
-          </a:p>
-          <a:p>
-            <a:endParaRPr lang="pt-BR" dirty="0"/>
-          </a:p>
-          <a:p>
-            <a:endParaRPr lang="pt-BR" dirty="0"/>
-          </a:p>
-          <a:p>
-            <a:endParaRPr lang="pt-BR" dirty="0"/>
-          </a:p>
-          <a:p>
-            <a:endParaRPr lang="pt-BR" dirty="0"/>
-          </a:p>
-          <a:p>
-            <a:endParaRPr lang="pt-BR" dirty="0"/>
-          </a:p>
-          <a:p>
-            <a:endParaRPr lang="pt-BR" dirty="0"/>
-          </a:p>
-          <a:p>
-            <a:endParaRPr lang="pt-BR" dirty="0"/>
-          </a:p>
-          <a:p>
-            <a:endParaRPr lang="pt-BR" dirty="0"/>
-          </a:p>
-          <a:p>
-            <a:endParaRPr lang="pt-BR" dirty="0"/>
-          </a:p>
-          <a:p>
-            <a:endParaRPr lang="pt-BR" dirty="0"/>
-          </a:p>
-          <a:p>
-            <a:endParaRPr lang="pt-BR" dirty="0"/>
-          </a:p>
-          <a:p>
-            <a:endParaRPr lang="pt-BR" dirty="0"/>
-          </a:p>
-          <a:p>
-            <a:endParaRPr lang="pt-BR" dirty="0"/>
-          </a:p>
-          <a:p>
-            <a:endParaRPr lang="pt-BR" dirty="0"/>
-          </a:p>
-          <a:p>
-            <a:endParaRPr lang="pt-BR" dirty="0"/>
+              <a:t>K-</a:t>
+            </a:r>
+            <a:r>
+              <a:rPr lang="pt-BR" dirty="0" err="1"/>
+              <a:t>means</a:t>
+            </a:r>
+            <a:r>
+              <a:rPr lang="pt-BR" dirty="0"/>
+              <a:t> usando a  área do centroide</a:t>
+            </a:r>
+          </a:p>
+          <a:p>
+            <a:pPr lvl="1"/>
+            <a:r>
+              <a:rPr lang="pt-BR" dirty="0" err="1"/>
+              <a:t>Isolation</a:t>
+            </a:r>
+            <a:r>
+              <a:rPr lang="pt-BR" dirty="0"/>
+              <a:t> Forest</a:t>
+            </a:r>
+          </a:p>
+          <a:p>
+            <a:pPr lvl="1"/>
+            <a:r>
+              <a:rPr lang="pt-BR" dirty="0" err="1"/>
+              <a:t>One-Class</a:t>
+            </a:r>
+            <a:r>
+              <a:rPr lang="pt-BR" dirty="0"/>
+              <a:t> SVM</a:t>
+            </a:r>
+          </a:p>
+          <a:p>
+            <a:pPr lvl="1"/>
+            <a:r>
+              <a:rPr lang="pt-BR" dirty="0"/>
+              <a:t>Local Outlier Factor</a:t>
+            </a:r>
+          </a:p>
+          <a:p>
+            <a:pPr lvl="1"/>
+            <a:r>
+              <a:rPr lang="pt-BR" dirty="0"/>
+              <a:t>Etc.</a:t>
+            </a:r>
           </a:p>
         </p:txBody>
       </p:sp>
       <p:pic>
         <p:nvPicPr>
-          <p:cNvPr id="6146" name="Picture 2" descr="Centro de Distribuição: uma solução mais que viável – Novidá">
-            <a:extLst>
-              <a:ext uri="{FF2B5EF4-FFF2-40B4-BE49-F238E27FC236}">
-                <a16:creationId xmlns:a16="http://schemas.microsoft.com/office/drawing/2014/main" xmlns="" id="{4EEAF6B8-1AE8-82F9-6BD7-E45E945A8CB5}"/>
+          <p:cNvPr id="6" name="Picture 5">
+            <a:extLst>
+              <a:ext uri="{FF2B5EF4-FFF2-40B4-BE49-F238E27FC236}">
+                <a16:creationId xmlns:a16="http://schemas.microsoft.com/office/drawing/2014/main" id="{874D15ED-AE97-5474-7E5D-B644432B2D4C}"/>
               </a:ext>
             </a:extLst>
           </p:cNvPr>
           <p:cNvPicPr>
-            <a:picLocks noChangeAspect="1" noChangeArrowheads="1"/>
+            <a:picLocks noChangeAspect="1"/>
           </p:cNvPicPr>
           <p:nvPr/>
         </p:nvPicPr>
         <p:blipFill>
-          <a:blip r:embed="rId4">
-            <a:extLst>
-              <a:ext uri="{28A0092B-C50C-407E-A947-70E740481C1C}">
-                <a14:useLocalDpi xmlns:a14="http://schemas.microsoft.com/office/drawing/2010/main" val="0"/>
-              </a:ext>
-            </a:extLst>
-          </a:blip>
-          <a:srcRect/>
+          <a:blip r:embed="rId4"/>
           <a:stretch>
             <a:fillRect/>
           </a:stretch>
         </p:blipFill>
-        <p:spPr bwMode="auto">
-          <a:xfrm>
-            <a:off x="257880" y="2298121"/>
-            <a:ext cx="5787320" cy="3169671"/>
+        <p:spPr>
+          <a:xfrm>
+            <a:off x="1772916" y="2833412"/>
+            <a:ext cx="3623052" cy="3269104"/>
           </a:xfrm>
           <a:prstGeom prst="rect">
             <a:avLst/>
           </a:prstGeom>
-          <a:noFill/>
-          <a:extLst>
-            <a:ext uri="{909E8E84-426E-40DD-AFC4-6F175D3DCCD1}">
-              <a14:hiddenFill xmlns:a14="http://schemas.microsoft.com/office/drawing/2010/main">
-                <a:solidFill>
-                  <a:srgbClr val="FFFFFF"/>
-                </a:solidFill>
-              </a14:hiddenFill>
-            </a:ext>
-          </a:extLst>
         </p:spPr>
       </p:pic>
       <p:pic>
         <p:nvPicPr>
-          <p:cNvPr id="8" name="Picture 2" descr="Mapa do Brasil">
-            <a:extLst>
-              <a:ext uri="{FF2B5EF4-FFF2-40B4-BE49-F238E27FC236}">
-                <a16:creationId xmlns:a16="http://schemas.microsoft.com/office/drawing/2014/main" xmlns="" id="{BBEA9087-A8E1-78C5-981B-C50D7CF4635F}"/>
+          <p:cNvPr id="9" name="Picture 8">
+            <a:extLst>
+              <a:ext uri="{FF2B5EF4-FFF2-40B4-BE49-F238E27FC236}">
+                <a16:creationId xmlns:a16="http://schemas.microsoft.com/office/drawing/2014/main" id="{14197941-A588-8F4A-49EA-1C5B6528F761}"/>
               </a:ext>
             </a:extLst>
           </p:cNvPr>
           <p:cNvPicPr>
-            <a:picLocks noChangeAspect="1" noChangeArrowheads="1"/>
+            <a:picLocks noChangeAspect="1"/>
           </p:cNvPicPr>
           <p:nvPr/>
         </p:nvPicPr>
         <p:blipFill>
-          <a:blip r:embed="rId5">
-            <a:extLst>
-              <a:ext uri="{28A0092B-C50C-407E-A947-70E740481C1C}">
-                <a14:useLocalDpi xmlns:a14="http://schemas.microsoft.com/office/drawing/2010/main" val="0"/>
-              </a:ext>
-            </a:extLst>
-          </a:blip>
-          <a:srcRect/>
+          <a:blip r:embed="rId5"/>
           <a:stretch>
             <a:fillRect/>
           </a:stretch>
         </p:blipFill>
-        <p:spPr bwMode="auto">
-          <a:xfrm>
-            <a:off x="6587067" y="2025586"/>
-            <a:ext cx="4307416" cy="3557542"/>
+        <p:spPr>
+          <a:xfrm>
+            <a:off x="6727728" y="2833412"/>
+            <a:ext cx="3686332" cy="3269104"/>
           </a:xfrm>
           <a:prstGeom prst="rect">
             <a:avLst/>
           </a:prstGeom>
-          <a:noFill/>
-          <a:extLst>
-            <a:ext uri="{909E8E84-426E-40DD-AFC4-6F175D3DCCD1}">
-              <a14:hiddenFill xmlns:a14="http://schemas.microsoft.com/office/drawing/2010/main">
-                <a:solidFill>
-                  <a:srgbClr val="FFFFFF"/>
-                </a:solidFill>
-              </a14:hiddenFill>
-            </a:ext>
-          </a:extLst>
         </p:spPr>
       </p:pic>
+      <p:sp>
+        <p:nvSpPr>
+          <p:cNvPr id="10" name="Arrow: Right 9">
+            <a:extLst>
+              <a:ext uri="{FF2B5EF4-FFF2-40B4-BE49-F238E27FC236}">
+                <a16:creationId xmlns:a16="http://schemas.microsoft.com/office/drawing/2014/main" id="{02EF8AE6-9567-78CC-094E-7578F2C11532}"/>
+              </a:ext>
+            </a:extLst>
+          </p:cNvPr>
+          <p:cNvSpPr/>
+          <p:nvPr/>
+        </p:nvSpPr>
+        <p:spPr>
+          <a:xfrm>
+            <a:off x="5573986" y="4070566"/>
+            <a:ext cx="840828" cy="588580"/>
+          </a:xfrm>
+          <a:prstGeom prst="rightArrow">
+            <a:avLst/>
+          </a:prstGeom>
+        </p:spPr>
+        <p:style>
+          <a:lnRef idx="2">
+            <a:schemeClr val="accent1">
+              <a:shade val="15000"/>
+            </a:schemeClr>
+          </a:lnRef>
+          <a:fillRef idx="1">
+            <a:schemeClr val="accent1"/>
+          </a:fillRef>
+          <a:effectRef idx="0">
+            <a:schemeClr val="accent1"/>
+          </a:effectRef>
+          <a:fontRef idx="minor">
+            <a:schemeClr val="lt1"/>
+          </a:fontRef>
+        </p:style>
+        <p:txBody>
+          <a:bodyPr rtlCol="0" anchor="ctr"/>
+          <a:lstStyle/>
+          <a:p>
+            <a:pPr algn="ctr"/>
+            <a:endParaRPr lang="en-US"/>
+          </a:p>
+        </p:txBody>
+      </p:sp>
     </p:spTree>
     <p:extLst>
       <p:ext uri="{BB962C8B-B14F-4D97-AF65-F5344CB8AC3E}">
-        <p14:creationId xmlns:p14="http://schemas.microsoft.com/office/powerpoint/2010/main" val="1949754007"/>
+        <p14:creationId xmlns:p14="http://schemas.microsoft.com/office/powerpoint/2010/main" val="2922560037"/>
+      </p:ext>
+    </p:extLst>
+  </p:cSld>
+  <p:clrMapOvr>
+    <a:masterClrMapping/>
+  </p:clrMapOvr>
+</p:sld>
+</file>
+
+<file path=ppt/slides/slide17.xml><?xml version="1.0" encoding="utf-8"?>
+<p:sld xmlns:a="http://schemas.openxmlformats.org/drawingml/2006/main" xmlns:r="http://schemas.openxmlformats.org/officeDocument/2006/relationships" xmlns:p="http://schemas.openxmlformats.org/presentationml/2006/main">
+  <p:cSld>
+    <p:spTree>
+      <p:nvGrpSpPr>
+        <p:cNvPr id="1" name=""/>
+        <p:cNvGrpSpPr/>
+        <p:nvPr/>
+      </p:nvGrpSpPr>
+      <p:grpSpPr>
+        <a:xfrm>
+          <a:off x="0" y="0"/>
+          <a:ext cx="0" cy="0"/>
+          <a:chOff x="0" y="0"/>
+          <a:chExt cx="0" cy="0"/>
+        </a:xfrm>
+      </p:grpSpPr>
+      <p:sp>
+        <p:nvSpPr>
+          <p:cNvPr id="2" name="Title 1">
+            <a:extLst>
+              <a:ext uri="{FF2B5EF4-FFF2-40B4-BE49-F238E27FC236}">
+                <a16:creationId xmlns:a16="http://schemas.microsoft.com/office/drawing/2014/main" id="{59016FD1-6296-97BB-4C76-AD710414CCC6}"/>
+              </a:ext>
+            </a:extLst>
+          </p:cNvPr>
+          <p:cNvSpPr>
+            <a:spLocks noGrp="1"/>
+          </p:cNvSpPr>
+          <p:nvPr>
+            <p:ph type="title"/>
+          </p:nvPr>
+        </p:nvSpPr>
+        <p:spPr/>
+        <p:txBody>
+          <a:bodyPr/>
+          <a:lstStyle/>
+          <a:p>
+            <a:endParaRPr lang="en-US"/>
+          </a:p>
+        </p:txBody>
+      </p:sp>
+      <p:sp>
+        <p:nvSpPr>
+          <p:cNvPr id="3" name="Content Placeholder 2">
+            <a:extLst>
+              <a:ext uri="{FF2B5EF4-FFF2-40B4-BE49-F238E27FC236}">
+                <a16:creationId xmlns:a16="http://schemas.microsoft.com/office/drawing/2014/main" id="{82472478-144F-3D25-9C47-48A21F2E7CAB}"/>
+              </a:ext>
+            </a:extLst>
+          </p:cNvPr>
+          <p:cNvSpPr>
+            <a:spLocks noGrp="1"/>
+          </p:cNvSpPr>
+          <p:nvPr>
+            <p:ph idx="1"/>
+          </p:nvPr>
+        </p:nvSpPr>
+        <p:spPr/>
+        <p:txBody>
+          <a:bodyPr/>
+          <a:lstStyle/>
+          <a:p>
+            <a:endParaRPr lang="en-US"/>
+          </a:p>
+        </p:txBody>
+      </p:sp>
+    </p:spTree>
+    <p:extLst>
+      <p:ext uri="{BB962C8B-B14F-4D97-AF65-F5344CB8AC3E}">
+        <p14:creationId xmlns:p14="http://schemas.microsoft.com/office/powerpoint/2010/main" val="151179307"/>
       </p:ext>
     </p:extLst>
   </p:cSld>
@@ -12840,7 +11920,7 @@
           <p:cNvPr id="2" name="Título 1">
             <a:extLst>
               <a:ext uri="{FF2B5EF4-FFF2-40B4-BE49-F238E27FC236}">
-                <a16:creationId xmlns:a16="http://schemas.microsoft.com/office/drawing/2014/main" xmlns="" id="{5F09B89C-3183-4D52-981A-62798DDFF2B8}"/>
+                <a16:creationId xmlns:a16="http://schemas.microsoft.com/office/drawing/2014/main" id="{5F09B89C-3183-4D52-981A-62798DDFF2B8}"/>
               </a:ext>
             </a:extLst>
           </p:cNvPr>
@@ -12880,7 +11960,7 @@
           <p:cNvPr id="3" name="AutoShape 2" descr="An example of graph signal reconstruction over wireless sensor network. |  Download Scientific Diagram">
             <a:extLst>
               <a:ext uri="{FF2B5EF4-FFF2-40B4-BE49-F238E27FC236}">
-                <a16:creationId xmlns:a16="http://schemas.microsoft.com/office/drawing/2014/main" xmlns="" id="{0166B4DD-D72A-4A54-94A7-2C38133837FD}"/>
+                <a16:creationId xmlns:a16="http://schemas.microsoft.com/office/drawing/2014/main" id="{0166B4DD-D72A-4A54-94A7-2C38133837FD}"/>
               </a:ext>
             </a:extLst>
           </p:cNvPr>
@@ -12931,7 +12011,7 @@
           <p:cNvPr id="7" name="AutoShape 4" descr="An example of graph signal reconstruction over wireless sensor network. |  Download Scientific Diagram">
             <a:extLst>
               <a:ext uri="{FF2B5EF4-FFF2-40B4-BE49-F238E27FC236}">
-                <a16:creationId xmlns:a16="http://schemas.microsoft.com/office/drawing/2014/main" xmlns="" id="{14C2B67D-81A1-457E-A410-FE4350A3CCA4}"/>
+                <a16:creationId xmlns:a16="http://schemas.microsoft.com/office/drawing/2014/main" id="{14C2B67D-81A1-457E-A410-FE4350A3CCA4}"/>
               </a:ext>
             </a:extLst>
           </p:cNvPr>
@@ -12982,7 +12062,7 @@
           <p:cNvPr id="4" name="Espaço Reservado para Conteúdo 3">
             <a:extLst>
               <a:ext uri="{FF2B5EF4-FFF2-40B4-BE49-F238E27FC236}">
-                <a16:creationId xmlns:a16="http://schemas.microsoft.com/office/drawing/2014/main" xmlns="" id="{5F1B432F-F570-AEC0-CFFF-C1D9196D7234}"/>
+                <a16:creationId xmlns:a16="http://schemas.microsoft.com/office/drawing/2014/main" id="{5F1B432F-F570-AEC0-CFFF-C1D9196D7234}"/>
               </a:ext>
             </a:extLst>
           </p:cNvPr>
@@ -13023,7 +12103,7 @@
           <p:cNvPr id="6" name="CaixaDeTexto 5">
             <a:extLst>
               <a:ext uri="{FF2B5EF4-FFF2-40B4-BE49-F238E27FC236}">
-                <a16:creationId xmlns:a16="http://schemas.microsoft.com/office/drawing/2014/main" xmlns="" id="{470482DB-F365-0A83-E102-37A8EB7EACEF}"/>
+                <a16:creationId xmlns:a16="http://schemas.microsoft.com/office/drawing/2014/main" id="{470482DB-F365-0A83-E102-37A8EB7EACEF}"/>
               </a:ext>
             </a:extLst>
           </p:cNvPr>
@@ -13055,8 +12135,19 @@
             </a:pPr>
             <a:r>
               <a:rPr lang="pt-BR" dirty="0"/>
-              <a:t>Exemplo: Centros de distribuição</a:t>
-            </a:r>
+              <a:t>Exemplo: </a:t>
+            </a:r>
+            <a:r>
+              <a:rPr lang="pt-BR" b="0" i="0" dirty="0">
+                <a:solidFill>
+                  <a:srgbClr val="404040"/>
+                </a:solidFill>
+                <a:effectLst/>
+                <a:latin typeface="DeepSeek-CJK-patch"/>
+              </a:rPr>
+              <a:t>Escolha de Locais para Centros de Distribuição</a:t>
+            </a:r>
+            <a:endParaRPr lang="pt-BR" dirty="0"/>
           </a:p>
           <a:p>
             <a:endParaRPr lang="pt-BR" dirty="0"/>
@@ -13107,38 +12198,102 @@
       </p:sp>
       <p:pic>
         <p:nvPicPr>
-          <p:cNvPr id="8" name="Imagem 7">
-            <a:extLst>
-              <a:ext uri="{FF2B5EF4-FFF2-40B4-BE49-F238E27FC236}">
-                <a16:creationId xmlns:a16="http://schemas.microsoft.com/office/drawing/2014/main" xmlns="" id="{2A0FC1B7-A101-0508-054B-D8349F0314EB}"/>
+          <p:cNvPr id="6146" name="Picture 2" descr="Centro de Distribuição: uma solução mais que viável – Novidá">
+            <a:extLst>
+              <a:ext uri="{FF2B5EF4-FFF2-40B4-BE49-F238E27FC236}">
+                <a16:creationId xmlns:a16="http://schemas.microsoft.com/office/drawing/2014/main" id="{4EEAF6B8-1AE8-82F9-6BD7-E45E945A8CB5}"/>
               </a:ext>
             </a:extLst>
           </p:cNvPr>
           <p:cNvPicPr>
-            <a:picLocks noChangeAspect="1"/>
+            <a:picLocks noChangeAspect="1" noChangeArrowheads="1"/>
           </p:cNvPicPr>
           <p:nvPr/>
         </p:nvPicPr>
         <p:blipFill>
-          <a:blip r:embed="rId4"/>
+          <a:blip r:embed="rId4">
+            <a:extLst>
+              <a:ext uri="{28A0092B-C50C-407E-A947-70E740481C1C}">
+                <a14:useLocalDpi xmlns:a14="http://schemas.microsoft.com/office/drawing/2010/main" val="0"/>
+              </a:ext>
+            </a:extLst>
+          </a:blip>
+          <a:srcRect/>
           <a:stretch>
             <a:fillRect/>
           </a:stretch>
         </p:blipFill>
-        <p:spPr>
-          <a:xfrm>
-            <a:off x="3097323" y="2146261"/>
-            <a:ext cx="4778154" cy="4168501"/>
+        <p:spPr bwMode="auto">
+          <a:xfrm>
+            <a:off x="257880" y="2298121"/>
+            <a:ext cx="5787320" cy="3169671"/>
           </a:xfrm>
           <a:prstGeom prst="rect">
             <a:avLst/>
           </a:prstGeom>
+          <a:noFill/>
+          <a:extLst>
+            <a:ext uri="{909E8E84-426E-40DD-AFC4-6F175D3DCCD1}">
+              <a14:hiddenFill xmlns:a14="http://schemas.microsoft.com/office/drawing/2010/main">
+                <a:solidFill>
+                  <a:srgbClr val="FFFFFF"/>
+                </a:solidFill>
+              </a14:hiddenFill>
+            </a:ext>
+          </a:extLst>
+        </p:spPr>
+      </p:pic>
+      <p:pic>
+        <p:nvPicPr>
+          <p:cNvPr id="8" name="Picture 2" descr="Mapa do Brasil">
+            <a:extLst>
+              <a:ext uri="{FF2B5EF4-FFF2-40B4-BE49-F238E27FC236}">
+                <a16:creationId xmlns:a16="http://schemas.microsoft.com/office/drawing/2014/main" id="{BBEA9087-A8E1-78C5-981B-C50D7CF4635F}"/>
+              </a:ext>
+            </a:extLst>
+          </p:cNvPr>
+          <p:cNvPicPr>
+            <a:picLocks noChangeAspect="1" noChangeArrowheads="1"/>
+          </p:cNvPicPr>
+          <p:nvPr/>
+        </p:nvPicPr>
+        <p:blipFill>
+          <a:blip r:embed="rId5">
+            <a:extLst>
+              <a:ext uri="{28A0092B-C50C-407E-A947-70E740481C1C}">
+                <a14:useLocalDpi xmlns:a14="http://schemas.microsoft.com/office/drawing/2010/main" val="0"/>
+              </a:ext>
+            </a:extLst>
+          </a:blip>
+          <a:srcRect/>
+          <a:stretch>
+            <a:fillRect/>
+          </a:stretch>
+        </p:blipFill>
+        <p:spPr bwMode="auto">
+          <a:xfrm>
+            <a:off x="6587067" y="2025586"/>
+            <a:ext cx="4307416" cy="3557542"/>
+          </a:xfrm>
+          <a:prstGeom prst="rect">
+            <a:avLst/>
+          </a:prstGeom>
+          <a:noFill/>
+          <a:extLst>
+            <a:ext uri="{909E8E84-426E-40DD-AFC4-6F175D3DCCD1}">
+              <a14:hiddenFill xmlns:a14="http://schemas.microsoft.com/office/drawing/2010/main">
+                <a:solidFill>
+                  <a:srgbClr val="FFFFFF"/>
+                </a:solidFill>
+              </a14:hiddenFill>
+            </a:ext>
+          </a:extLst>
         </p:spPr>
       </p:pic>
     </p:spTree>
     <p:extLst>
       <p:ext uri="{BB962C8B-B14F-4D97-AF65-F5344CB8AC3E}">
-        <p14:creationId xmlns:p14="http://schemas.microsoft.com/office/powerpoint/2010/main" val="904369752"/>
+        <p14:creationId xmlns:p14="http://schemas.microsoft.com/office/powerpoint/2010/main" val="1949754007"/>
       </p:ext>
     </p:extLst>
   </p:cSld>
@@ -13184,7 +12339,7 @@
           <p:cNvPr id="2" name="Título 1">
             <a:extLst>
               <a:ext uri="{FF2B5EF4-FFF2-40B4-BE49-F238E27FC236}">
-                <a16:creationId xmlns:a16="http://schemas.microsoft.com/office/drawing/2014/main" xmlns="" id="{5F09B89C-3183-4D52-981A-62798DDFF2B8}"/>
+                <a16:creationId xmlns:a16="http://schemas.microsoft.com/office/drawing/2014/main" id="{5F09B89C-3183-4D52-981A-62798DDFF2B8}"/>
               </a:ext>
             </a:extLst>
           </p:cNvPr>
@@ -13224,7 +12379,7 @@
           <p:cNvPr id="3" name="AutoShape 2" descr="An example of graph signal reconstruction over wireless sensor network. |  Download Scientific Diagram">
             <a:extLst>
               <a:ext uri="{FF2B5EF4-FFF2-40B4-BE49-F238E27FC236}">
-                <a16:creationId xmlns:a16="http://schemas.microsoft.com/office/drawing/2014/main" xmlns="" id="{0166B4DD-D72A-4A54-94A7-2C38133837FD}"/>
+                <a16:creationId xmlns:a16="http://schemas.microsoft.com/office/drawing/2014/main" id="{0166B4DD-D72A-4A54-94A7-2C38133837FD}"/>
               </a:ext>
             </a:extLst>
           </p:cNvPr>
@@ -13275,7 +12430,7 @@
           <p:cNvPr id="7" name="AutoShape 4" descr="An example of graph signal reconstruction over wireless sensor network. |  Download Scientific Diagram">
             <a:extLst>
               <a:ext uri="{FF2B5EF4-FFF2-40B4-BE49-F238E27FC236}">
-                <a16:creationId xmlns:a16="http://schemas.microsoft.com/office/drawing/2014/main" xmlns="" id="{14C2B67D-81A1-457E-A410-FE4350A3CCA4}"/>
+                <a16:creationId xmlns:a16="http://schemas.microsoft.com/office/drawing/2014/main" id="{14C2B67D-81A1-457E-A410-FE4350A3CCA4}"/>
               </a:ext>
             </a:extLst>
           </p:cNvPr>
@@ -13326,7 +12481,7 @@
           <p:cNvPr id="4" name="Espaço Reservado para Conteúdo 3">
             <a:extLst>
               <a:ext uri="{FF2B5EF4-FFF2-40B4-BE49-F238E27FC236}">
-                <a16:creationId xmlns:a16="http://schemas.microsoft.com/office/drawing/2014/main" xmlns="" id="{5F1B432F-F570-AEC0-CFFF-C1D9196D7234}"/>
+                <a16:creationId xmlns:a16="http://schemas.microsoft.com/office/drawing/2014/main" id="{5F1B432F-F570-AEC0-CFFF-C1D9196D7234}"/>
               </a:ext>
             </a:extLst>
           </p:cNvPr>
@@ -13367,7 +12522,7 @@
           <p:cNvPr id="6" name="CaixaDeTexto 5">
             <a:extLst>
               <a:ext uri="{FF2B5EF4-FFF2-40B4-BE49-F238E27FC236}">
-                <a16:creationId xmlns:a16="http://schemas.microsoft.com/office/drawing/2014/main" xmlns="" id="{470482DB-F365-0A83-E102-37A8EB7EACEF}"/>
+                <a16:creationId xmlns:a16="http://schemas.microsoft.com/office/drawing/2014/main" id="{470482DB-F365-0A83-E102-37A8EB7EACEF}"/>
               </a:ext>
             </a:extLst>
           </p:cNvPr>
@@ -13451,10 +12606,10 @@
       </p:sp>
       <p:pic>
         <p:nvPicPr>
-          <p:cNvPr id="7170" name="Picture 2">
-            <a:extLst>
-              <a:ext uri="{FF2B5EF4-FFF2-40B4-BE49-F238E27FC236}">
-                <a16:creationId xmlns:a16="http://schemas.microsoft.com/office/drawing/2014/main" xmlns="" id="{0852AE06-D862-AB3A-2E4A-809895A9DAC8}"/>
+          <p:cNvPr id="8194" name="Picture 2">
+            <a:extLst>
+              <a:ext uri="{FF2B5EF4-FFF2-40B4-BE49-F238E27FC236}">
+                <a16:creationId xmlns:a16="http://schemas.microsoft.com/office/drawing/2014/main" id="{495C0F98-25B1-BB0B-22CE-238E6C7C5DE2}"/>
               </a:ext>
             </a:extLst>
           </p:cNvPr>
@@ -13478,7 +12633,7 @@
         </p:blipFill>
         <p:spPr bwMode="auto">
           <a:xfrm>
-            <a:off x="3047470" y="2142067"/>
+            <a:off x="2923294" y="2239786"/>
             <a:ext cx="5419725" cy="3981450"/>
           </a:xfrm>
           <a:prstGeom prst="rect">
@@ -13499,7 +12654,7 @@
     </p:spTree>
     <p:extLst>
       <p:ext uri="{BB962C8B-B14F-4D97-AF65-F5344CB8AC3E}">
-        <p14:creationId xmlns:p14="http://schemas.microsoft.com/office/powerpoint/2010/main" val="290906085"/>
+        <p14:creationId xmlns:p14="http://schemas.microsoft.com/office/powerpoint/2010/main" val="1881627728"/>
       </p:ext>
     </p:extLst>
   </p:cSld>
@@ -13545,7 +12700,7 @@
           <p:cNvPr id="2" name="Título 1">
             <a:extLst>
               <a:ext uri="{FF2B5EF4-FFF2-40B4-BE49-F238E27FC236}">
-                <a16:creationId xmlns:a16="http://schemas.microsoft.com/office/drawing/2014/main" xmlns="" id="{5F09B89C-3183-4D52-981A-62798DDFF2B8}"/>
+                <a16:creationId xmlns:a16="http://schemas.microsoft.com/office/drawing/2014/main" id="{5F09B89C-3183-4D52-981A-62798DDFF2B8}"/>
               </a:ext>
             </a:extLst>
           </p:cNvPr>
@@ -13580,7 +12735,7 @@
           <p:cNvPr id="3" name="AutoShape 2" descr="An example of graph signal reconstruction over wireless sensor network. |  Download Scientific Diagram">
             <a:extLst>
               <a:ext uri="{FF2B5EF4-FFF2-40B4-BE49-F238E27FC236}">
-                <a16:creationId xmlns:a16="http://schemas.microsoft.com/office/drawing/2014/main" xmlns="" id="{0166B4DD-D72A-4A54-94A7-2C38133837FD}"/>
+                <a16:creationId xmlns:a16="http://schemas.microsoft.com/office/drawing/2014/main" id="{0166B4DD-D72A-4A54-94A7-2C38133837FD}"/>
               </a:ext>
             </a:extLst>
           </p:cNvPr>
@@ -13631,7 +12786,7 @@
           <p:cNvPr id="7" name="AutoShape 4" descr="An example of graph signal reconstruction over wireless sensor network. |  Download Scientific Diagram">
             <a:extLst>
               <a:ext uri="{FF2B5EF4-FFF2-40B4-BE49-F238E27FC236}">
-                <a16:creationId xmlns:a16="http://schemas.microsoft.com/office/drawing/2014/main" xmlns="" id="{14C2B67D-81A1-457E-A410-FE4350A3CCA4}"/>
+                <a16:creationId xmlns:a16="http://schemas.microsoft.com/office/drawing/2014/main" id="{14C2B67D-81A1-457E-A410-FE4350A3CCA4}"/>
               </a:ext>
             </a:extLst>
           </p:cNvPr>
@@ -13682,7 +12837,7 @@
           <p:cNvPr id="4" name="Espaço Reservado para Conteúdo 3">
             <a:extLst>
               <a:ext uri="{FF2B5EF4-FFF2-40B4-BE49-F238E27FC236}">
-                <a16:creationId xmlns:a16="http://schemas.microsoft.com/office/drawing/2014/main" xmlns="" id="{5F1B432F-F570-AEC0-CFFF-C1D9196D7234}"/>
+                <a16:creationId xmlns:a16="http://schemas.microsoft.com/office/drawing/2014/main" id="{5F1B432F-F570-AEC0-CFFF-C1D9196D7234}"/>
               </a:ext>
             </a:extLst>
           </p:cNvPr>
@@ -13805,7 +12960,7 @@
           <p:cNvPr id="2" name="Título 1">
             <a:extLst>
               <a:ext uri="{FF2B5EF4-FFF2-40B4-BE49-F238E27FC236}">
-                <a16:creationId xmlns:a16="http://schemas.microsoft.com/office/drawing/2014/main" xmlns="" id="{5F09B89C-3183-4D52-981A-62798DDFF2B8}"/>
+                <a16:creationId xmlns:a16="http://schemas.microsoft.com/office/drawing/2014/main" id="{5F09B89C-3183-4D52-981A-62798DDFF2B8}"/>
               </a:ext>
             </a:extLst>
           </p:cNvPr>
@@ -13845,7 +13000,7 @@
           <p:cNvPr id="3" name="AutoShape 2" descr="An example of graph signal reconstruction over wireless sensor network. |  Download Scientific Diagram">
             <a:extLst>
               <a:ext uri="{FF2B5EF4-FFF2-40B4-BE49-F238E27FC236}">
-                <a16:creationId xmlns:a16="http://schemas.microsoft.com/office/drawing/2014/main" xmlns="" id="{0166B4DD-D72A-4A54-94A7-2C38133837FD}"/>
+                <a16:creationId xmlns:a16="http://schemas.microsoft.com/office/drawing/2014/main" id="{0166B4DD-D72A-4A54-94A7-2C38133837FD}"/>
               </a:ext>
             </a:extLst>
           </p:cNvPr>
@@ -13896,7 +13051,7 @@
           <p:cNvPr id="7" name="AutoShape 4" descr="An example of graph signal reconstruction over wireless sensor network. |  Download Scientific Diagram">
             <a:extLst>
               <a:ext uri="{FF2B5EF4-FFF2-40B4-BE49-F238E27FC236}">
-                <a16:creationId xmlns:a16="http://schemas.microsoft.com/office/drawing/2014/main" xmlns="" id="{14C2B67D-81A1-457E-A410-FE4350A3CCA4}"/>
+                <a16:creationId xmlns:a16="http://schemas.microsoft.com/office/drawing/2014/main" id="{14C2B67D-81A1-457E-A410-FE4350A3CCA4}"/>
               </a:ext>
             </a:extLst>
           </p:cNvPr>
@@ -13947,7 +13102,7 @@
           <p:cNvPr id="4" name="Espaço Reservado para Conteúdo 3">
             <a:extLst>
               <a:ext uri="{FF2B5EF4-FFF2-40B4-BE49-F238E27FC236}">
-                <a16:creationId xmlns:a16="http://schemas.microsoft.com/office/drawing/2014/main" xmlns="" id="{5F1B432F-F570-AEC0-CFFF-C1D9196D7234}"/>
+                <a16:creationId xmlns:a16="http://schemas.microsoft.com/office/drawing/2014/main" id="{5F1B432F-F570-AEC0-CFFF-C1D9196D7234}"/>
               </a:ext>
             </a:extLst>
           </p:cNvPr>
@@ -13988,7 +13143,7 @@
           <p:cNvPr id="6" name="CaixaDeTexto 5">
             <a:extLst>
               <a:ext uri="{FF2B5EF4-FFF2-40B4-BE49-F238E27FC236}">
-                <a16:creationId xmlns:a16="http://schemas.microsoft.com/office/drawing/2014/main" xmlns="" id="{470482DB-F365-0A83-E102-37A8EB7EACEF}"/>
+                <a16:creationId xmlns:a16="http://schemas.microsoft.com/office/drawing/2014/main" id="{470482DB-F365-0A83-E102-37A8EB7EACEF}"/>
               </a:ext>
             </a:extLst>
           </p:cNvPr>
@@ -13997,8 +13152,8 @@
         </p:nvSpPr>
         <p:spPr>
           <a:xfrm>
-            <a:off x="846667" y="988201"/>
-            <a:ext cx="8229599" cy="4801314"/>
+            <a:off x="745067" y="989885"/>
+            <a:ext cx="8229599" cy="5355312"/>
           </a:xfrm>
           <a:prstGeom prst="rect">
             <a:avLst/>
@@ -14027,6 +13182,12 @@
             <a:endParaRPr lang="pt-BR" dirty="0"/>
           </a:p>
           <a:p>
+            <a:r>
+              <a:rPr lang="pt-BR" dirty="0"/>
+              <a:t>Considerar a adição de mais lojas: sendo 21 só em São Paulo.</a:t>
+            </a:r>
+          </a:p>
+          <a:p>
             <a:endParaRPr lang="pt-BR" dirty="0"/>
           </a:p>
           <a:p>
@@ -14068,59 +13229,15 @@
           <a:p>
             <a:endParaRPr lang="pt-BR" dirty="0"/>
           </a:p>
-        </p:txBody>
-      </p:sp>
-      <p:pic>
-        <p:nvPicPr>
-          <p:cNvPr id="8194" name="Picture 2">
-            <a:extLst>
-              <a:ext uri="{FF2B5EF4-FFF2-40B4-BE49-F238E27FC236}">
-                <a16:creationId xmlns:a16="http://schemas.microsoft.com/office/drawing/2014/main" xmlns="" id="{495C0F98-25B1-BB0B-22CE-238E6C7C5DE2}"/>
-              </a:ext>
-            </a:extLst>
-          </p:cNvPr>
-          <p:cNvPicPr>
-            <a:picLocks noChangeAspect="1" noChangeArrowheads="1"/>
-          </p:cNvPicPr>
-          <p:nvPr/>
-        </p:nvPicPr>
-        <p:blipFill>
-          <a:blip r:embed="rId4">
-            <a:extLst>
-              <a:ext uri="{28A0092B-C50C-407E-A947-70E740481C1C}">
-                <a14:useLocalDpi xmlns:a14="http://schemas.microsoft.com/office/drawing/2010/main" val="0"/>
-              </a:ext>
-            </a:extLst>
-          </a:blip>
-          <a:srcRect/>
-          <a:stretch>
-            <a:fillRect/>
-          </a:stretch>
-        </p:blipFill>
-        <p:spPr bwMode="auto">
-          <a:xfrm>
-            <a:off x="2923294" y="2239786"/>
-            <a:ext cx="5419725" cy="3981450"/>
-          </a:xfrm>
-          <a:prstGeom prst="rect">
-            <a:avLst/>
-          </a:prstGeom>
-          <a:noFill/>
-          <a:extLst>
-            <a:ext uri="{909E8E84-426E-40DD-AFC4-6F175D3DCCD1}">
-              <a14:hiddenFill xmlns:a14="http://schemas.microsoft.com/office/drawing/2010/main">
-                <a:solidFill>
-                  <a:srgbClr val="FFFFFF"/>
-                </a:solidFill>
-              </a14:hiddenFill>
-            </a:ext>
-          </a:extLst>
-        </p:spPr>
-      </p:pic>
+          <a:p>
+            <a:endParaRPr lang="pt-BR" dirty="0"/>
+          </a:p>
+        </p:txBody>
+      </p:sp>
     </p:spTree>
     <p:extLst>
       <p:ext uri="{BB962C8B-B14F-4D97-AF65-F5344CB8AC3E}">
-        <p14:creationId xmlns:p14="http://schemas.microsoft.com/office/powerpoint/2010/main" val="1881627728"/>
+        <p14:creationId xmlns:p14="http://schemas.microsoft.com/office/powerpoint/2010/main" val="3567116465"/>
       </p:ext>
     </p:extLst>
   </p:cSld>
@@ -14166,7 +13283,7 @@
           <p:cNvPr id="2" name="Título 1">
             <a:extLst>
               <a:ext uri="{FF2B5EF4-FFF2-40B4-BE49-F238E27FC236}">
-                <a16:creationId xmlns:a16="http://schemas.microsoft.com/office/drawing/2014/main" xmlns="" id="{5F09B89C-3183-4D52-981A-62798DDFF2B8}"/>
+                <a16:creationId xmlns:a16="http://schemas.microsoft.com/office/drawing/2014/main" id="{5F09B89C-3183-4D52-981A-62798DDFF2B8}"/>
               </a:ext>
             </a:extLst>
           </p:cNvPr>
@@ -14206,7 +13323,7 @@
           <p:cNvPr id="3" name="AutoShape 2" descr="An example of graph signal reconstruction over wireless sensor network. |  Download Scientific Diagram">
             <a:extLst>
               <a:ext uri="{FF2B5EF4-FFF2-40B4-BE49-F238E27FC236}">
-                <a16:creationId xmlns:a16="http://schemas.microsoft.com/office/drawing/2014/main" xmlns="" id="{0166B4DD-D72A-4A54-94A7-2C38133837FD}"/>
+                <a16:creationId xmlns:a16="http://schemas.microsoft.com/office/drawing/2014/main" id="{0166B4DD-D72A-4A54-94A7-2C38133837FD}"/>
               </a:ext>
             </a:extLst>
           </p:cNvPr>
@@ -14257,7 +13374,7 @@
           <p:cNvPr id="7" name="AutoShape 4" descr="An example of graph signal reconstruction over wireless sensor network. |  Download Scientific Diagram">
             <a:extLst>
               <a:ext uri="{FF2B5EF4-FFF2-40B4-BE49-F238E27FC236}">
-                <a16:creationId xmlns:a16="http://schemas.microsoft.com/office/drawing/2014/main" xmlns="" id="{14C2B67D-81A1-457E-A410-FE4350A3CCA4}"/>
+                <a16:creationId xmlns:a16="http://schemas.microsoft.com/office/drawing/2014/main" id="{14C2B67D-81A1-457E-A410-FE4350A3CCA4}"/>
               </a:ext>
             </a:extLst>
           </p:cNvPr>
@@ -14308,7 +13425,7 @@
           <p:cNvPr id="4" name="Espaço Reservado para Conteúdo 3">
             <a:extLst>
               <a:ext uri="{FF2B5EF4-FFF2-40B4-BE49-F238E27FC236}">
-                <a16:creationId xmlns:a16="http://schemas.microsoft.com/office/drawing/2014/main" xmlns="" id="{5F1B432F-F570-AEC0-CFFF-C1D9196D7234}"/>
+                <a16:creationId xmlns:a16="http://schemas.microsoft.com/office/drawing/2014/main" id="{5F1B432F-F570-AEC0-CFFF-C1D9196D7234}"/>
               </a:ext>
             </a:extLst>
           </p:cNvPr>
@@ -14349,7 +13466,7 @@
           <p:cNvPr id="6" name="CaixaDeTexto 5">
             <a:extLst>
               <a:ext uri="{FF2B5EF4-FFF2-40B4-BE49-F238E27FC236}">
-                <a16:creationId xmlns:a16="http://schemas.microsoft.com/office/drawing/2014/main" xmlns="" id="{470482DB-F365-0A83-E102-37A8EB7EACEF}"/>
+                <a16:creationId xmlns:a16="http://schemas.microsoft.com/office/drawing/2014/main" id="{470482DB-F365-0A83-E102-37A8EB7EACEF}"/>
               </a:ext>
             </a:extLst>
           </p:cNvPr>
@@ -14359,7 +13476,7 @@
         <p:spPr>
           <a:xfrm>
             <a:off x="846667" y="988201"/>
-            <a:ext cx="8229599" cy="4801314"/>
+            <a:ext cx="8229599" cy="4524315"/>
           </a:xfrm>
           <a:prstGeom prst="rect">
             <a:avLst/>
@@ -14372,19 +13489,15 @@
           </a:bodyPr>
           <a:lstStyle/>
           <a:p>
+            <a:r>
+              <a:rPr lang="pt-BR" dirty="0"/>
+              <a:t>Como escolher o K ótimo?</a:t>
+            </a:r>
+          </a:p>
+          <a:p>
             <a:endParaRPr lang="pt-BR" dirty="0"/>
           </a:p>
           <a:p>
-            <a:pPr marL="285750" indent="-285750">
-              <a:buFont typeface="Arial" panose="020B0604020202020204" pitchFamily="34" charset="0"/>
-              <a:buChar char="•"/>
-            </a:pPr>
-            <a:r>
-              <a:rPr lang="pt-BR" dirty="0"/>
-              <a:t>Exemplo: Centros de distribuição</a:t>
-            </a:r>
-          </a:p>
-          <a:p>
             <a:endParaRPr lang="pt-BR" dirty="0"/>
           </a:p>
           <a:p>
@@ -14426,17 +13539,61 @@
           <a:p>
             <a:endParaRPr lang="pt-BR" dirty="0"/>
           </a:p>
-          <a:p>
-            <a:endParaRPr lang="pt-BR" dirty="0"/>
-          </a:p>
-        </p:txBody>
-      </p:sp>
+        </p:txBody>
+      </p:sp>
+      <p:pic>
+        <p:nvPicPr>
+          <p:cNvPr id="2050" name="Picture 2" descr="Base Teórica do K-Means! Aprenda a Lógica desse Algoritmo Hoje!">
+            <a:extLst>
+              <a:ext uri="{FF2B5EF4-FFF2-40B4-BE49-F238E27FC236}">
+                <a16:creationId xmlns:a16="http://schemas.microsoft.com/office/drawing/2014/main" id="{0694ADFD-EB2E-2BF0-18BE-B07E4CD60A5F}"/>
+              </a:ext>
+            </a:extLst>
+          </p:cNvPr>
+          <p:cNvPicPr>
+            <a:picLocks noChangeAspect="1" noChangeArrowheads="1"/>
+          </p:cNvPicPr>
+          <p:nvPr/>
+        </p:nvPicPr>
+        <p:blipFill>
+          <a:blip r:embed="rId4">
+            <a:extLst>
+              <a:ext uri="{28A0092B-C50C-407E-A947-70E740481C1C}">
+                <a14:useLocalDpi xmlns:a14="http://schemas.microsoft.com/office/drawing/2010/main" val="0"/>
+              </a:ext>
+            </a:extLst>
+          </a:blip>
+          <a:srcRect/>
+          <a:stretch>
+            <a:fillRect/>
+          </a:stretch>
+        </p:blipFill>
+        <p:spPr bwMode="auto">
+          <a:xfrm>
+            <a:off x="1526381" y="1605398"/>
+            <a:ext cx="7549885" cy="3444004"/>
+          </a:xfrm>
+          <a:prstGeom prst="rect">
+            <a:avLst/>
+          </a:prstGeom>
+          <a:noFill/>
+          <a:extLst>
+            <a:ext uri="{909E8E84-426E-40DD-AFC4-6F175D3DCCD1}">
+              <a14:hiddenFill xmlns:a14="http://schemas.microsoft.com/office/drawing/2010/main">
+                <a:solidFill>
+                  <a:srgbClr val="FFFFFF"/>
+                </a:solidFill>
+              </a14:hiddenFill>
+            </a:ext>
+          </a:extLst>
+        </p:spPr>
+      </p:pic>
       <p:pic>
         <p:nvPicPr>
           <p:cNvPr id="8" name="Imagem 7">
             <a:extLst>
               <a:ext uri="{FF2B5EF4-FFF2-40B4-BE49-F238E27FC236}">
-                <a16:creationId xmlns:a16="http://schemas.microsoft.com/office/drawing/2014/main" xmlns="" id="{F8DB2E93-FBF7-2C19-4172-472216829630}"/>
+                <a16:creationId xmlns:a16="http://schemas.microsoft.com/office/drawing/2014/main" id="{EEF69E85-6440-34FE-5C8A-A5F37765D292}"/>
               </a:ext>
             </a:extLst>
           </p:cNvPr>
@@ -14446,15 +13603,15 @@
           <p:nvPr/>
         </p:nvPicPr>
         <p:blipFill>
-          <a:blip r:embed="rId4"/>
+          <a:blip r:embed="rId5"/>
           <a:stretch>
             <a:fillRect/>
           </a:stretch>
         </p:blipFill>
         <p:spPr>
           <a:xfrm>
-            <a:off x="3584442" y="2942530"/>
-            <a:ext cx="3955123" cy="1379340"/>
+            <a:off x="4486439" y="5536951"/>
+            <a:ext cx="2377646" cy="784928"/>
           </a:xfrm>
           <a:prstGeom prst="rect">
             <a:avLst/>
@@ -14464,7 +13621,7 @@
     </p:spTree>
     <p:extLst>
       <p:ext uri="{BB962C8B-B14F-4D97-AF65-F5344CB8AC3E}">
-        <p14:creationId xmlns:p14="http://schemas.microsoft.com/office/powerpoint/2010/main" val="253421326"/>
+        <p14:creationId xmlns:p14="http://schemas.microsoft.com/office/powerpoint/2010/main" val="1144642794"/>
       </p:ext>
     </p:extLst>
   </p:cSld>
@@ -14510,7 +13667,7 @@
           <p:cNvPr id="2" name="Título 1">
             <a:extLst>
               <a:ext uri="{FF2B5EF4-FFF2-40B4-BE49-F238E27FC236}">
-                <a16:creationId xmlns:a16="http://schemas.microsoft.com/office/drawing/2014/main" xmlns="" id="{5F09B89C-3183-4D52-981A-62798DDFF2B8}"/>
+                <a16:creationId xmlns:a16="http://schemas.microsoft.com/office/drawing/2014/main" id="{5F09B89C-3183-4D52-981A-62798DDFF2B8}"/>
               </a:ext>
             </a:extLst>
           </p:cNvPr>
@@ -14535,13 +13692,8 @@
           <a:p>
             <a:r>
               <a:rPr lang="pt-BR" dirty="0"/>
-              <a:t>K-</a:t>
-            </a:r>
-            <a:r>
-              <a:rPr lang="pt-BR" dirty="0" err="1"/>
-              <a:t>means</a:t>
-            </a:r>
-            <a:endParaRPr lang="pt-BR" dirty="0"/>
+              <a:t>Detecção de anomalias</a:t>
+            </a:r>
           </a:p>
         </p:txBody>
       </p:sp>
@@ -14550,7 +13702,7 @@
           <p:cNvPr id="3" name="AutoShape 2" descr="An example of graph signal reconstruction over wireless sensor network. |  Download Scientific Diagram">
             <a:extLst>
               <a:ext uri="{FF2B5EF4-FFF2-40B4-BE49-F238E27FC236}">
-                <a16:creationId xmlns:a16="http://schemas.microsoft.com/office/drawing/2014/main" xmlns="" id="{0166B4DD-D72A-4A54-94A7-2C38133837FD}"/>
+                <a16:creationId xmlns:a16="http://schemas.microsoft.com/office/drawing/2014/main" id="{0166B4DD-D72A-4A54-94A7-2C38133837FD}"/>
               </a:ext>
             </a:extLst>
           </p:cNvPr>
@@ -14586,12 +13738,36 @@
           </a:bodyPr>
           <a:lstStyle/>
           <a:p>
-            <a:pPr defTabSz="609630"/>
-            <a:endParaRPr lang="pt-BR" sz="1200">
+            <a:pPr marL="0" marR="0" lvl="0" indent="0" algn="l" defTabSz="609630" rtl="0" eaLnBrk="1" fontAlgn="auto" latinLnBrk="0" hangingPunct="1">
+              <a:lnSpc>
+                <a:spcPct val="100000"/>
+              </a:lnSpc>
+              <a:spcBef>
+                <a:spcPts val="0"/>
+              </a:spcBef>
+              <a:spcAft>
+                <a:spcPts val="0"/>
+              </a:spcAft>
+              <a:buClrTx/>
+              <a:buSzTx/>
+              <a:buFontTx/>
+              <a:buNone/>
+              <a:tabLst/>
+              <a:defRPr/>
+            </a:pPr>
+            <a:endParaRPr kumimoji="0" lang="pt-BR" sz="1200" b="0" i="0" u="none" strike="noStrike" kern="1200" cap="none" spc="0" normalizeH="0" baseline="0" noProof="0">
+              <a:ln>
+                <a:noFill/>
+              </a:ln>
               <a:solidFill>
                 <a:prstClr val="black"/>
               </a:solidFill>
+              <a:effectLst/>
+              <a:uLnTx/>
+              <a:uFillTx/>
               <a:latin typeface="Calibri"/>
+              <a:ea typeface="+mn-ea"/>
+              <a:cs typeface="+mn-cs"/>
             </a:endParaRPr>
           </a:p>
         </p:txBody>
@@ -14601,7 +13777,7 @@
           <p:cNvPr id="7" name="AutoShape 4" descr="An example of graph signal reconstruction over wireless sensor network. |  Download Scientific Diagram">
             <a:extLst>
               <a:ext uri="{FF2B5EF4-FFF2-40B4-BE49-F238E27FC236}">
-                <a16:creationId xmlns:a16="http://schemas.microsoft.com/office/drawing/2014/main" xmlns="" id="{14C2B67D-81A1-457E-A410-FE4350A3CCA4}"/>
+                <a16:creationId xmlns:a16="http://schemas.microsoft.com/office/drawing/2014/main" id="{14C2B67D-81A1-457E-A410-FE4350A3CCA4}"/>
               </a:ext>
             </a:extLst>
           </p:cNvPr>
@@ -14637,12 +13813,36 @@
           </a:bodyPr>
           <a:lstStyle/>
           <a:p>
-            <a:pPr defTabSz="609630"/>
-            <a:endParaRPr lang="pt-BR" sz="1200">
+            <a:pPr marL="0" marR="0" lvl="0" indent="0" algn="l" defTabSz="609630" rtl="0" eaLnBrk="1" fontAlgn="auto" latinLnBrk="0" hangingPunct="1">
+              <a:lnSpc>
+                <a:spcPct val="100000"/>
+              </a:lnSpc>
+              <a:spcBef>
+                <a:spcPts val="0"/>
+              </a:spcBef>
+              <a:spcAft>
+                <a:spcPts val="0"/>
+              </a:spcAft>
+              <a:buClrTx/>
+              <a:buSzTx/>
+              <a:buFontTx/>
+              <a:buNone/>
+              <a:tabLst/>
+              <a:defRPr/>
+            </a:pPr>
+            <a:endParaRPr kumimoji="0" lang="pt-BR" sz="1200" b="0" i="0" u="none" strike="noStrike" kern="1200" cap="none" spc="0" normalizeH="0" baseline="0" noProof="0">
+              <a:ln>
+                <a:noFill/>
+              </a:ln>
               <a:solidFill>
                 <a:prstClr val="black"/>
               </a:solidFill>
+              <a:effectLst/>
+              <a:uLnTx/>
+              <a:uFillTx/>
               <a:latin typeface="Calibri"/>
+              <a:ea typeface="+mn-ea"/>
+              <a:cs typeface="+mn-cs"/>
             </a:endParaRPr>
           </a:p>
         </p:txBody>
@@ -14652,7 +13852,7 @@
           <p:cNvPr id="4" name="Espaço Reservado para Conteúdo 3">
             <a:extLst>
               <a:ext uri="{FF2B5EF4-FFF2-40B4-BE49-F238E27FC236}">
-                <a16:creationId xmlns:a16="http://schemas.microsoft.com/office/drawing/2014/main" xmlns="" id="{5F1B432F-F570-AEC0-CFFF-C1D9196D7234}"/>
+                <a16:creationId xmlns:a16="http://schemas.microsoft.com/office/drawing/2014/main" id="{0349BA64-C9D7-4730-9CA9-5C4AD9FC7969}"/>
               </a:ext>
             </a:extLst>
           </p:cNvPr>
@@ -14665,129 +13865,85 @@
         </p:nvSpPr>
         <p:spPr>
           <a:xfrm>
-            <a:off x="304800" y="1066801"/>
-            <a:ext cx="9810044" cy="2737556"/>
+            <a:off x="304800" y="1066800"/>
+            <a:ext cx="9295589" cy="4330419"/>
           </a:xfrm>
         </p:spPr>
         <p:txBody>
           <a:bodyPr>
-            <a:normAutofit/>
+            <a:noAutofit/>
           </a:bodyPr>
           <a:lstStyle/>
           <a:p>
-            <a:pPr marL="0" indent="0">
-              <a:buNone/>
+            <a:pPr marL="495308" indent="-342900" algn="just">
+              <a:lnSpc>
+                <a:spcPct val="107000"/>
+              </a:lnSpc>
+              <a:spcAft>
+                <a:spcPts val="533"/>
+              </a:spcAft>
             </a:pPr>
-            <a:endParaRPr lang="pt-BR" dirty="0"/>
-          </a:p>
-          <a:p>
-            <a:pPr marL="0" indent="0">
-              <a:buNone/>
-            </a:pPr>
-            <a:endParaRPr lang="pt-BR" dirty="0"/>
-          </a:p>
-        </p:txBody>
-      </p:sp>
-      <p:sp>
-        <p:nvSpPr>
-          <p:cNvPr id="6" name="CaixaDeTexto 5">
-            <a:extLst>
-              <a:ext uri="{FF2B5EF4-FFF2-40B4-BE49-F238E27FC236}">
-                <a16:creationId xmlns:a16="http://schemas.microsoft.com/office/drawing/2014/main" xmlns="" id="{470482DB-F365-0A83-E102-37A8EB7EACEF}"/>
-              </a:ext>
-            </a:extLst>
-          </p:cNvPr>
-          <p:cNvSpPr txBox="1"/>
+            <a:r>
+              <a:rPr lang="pt-BR" sz="2000" dirty="0">
+                <a:ea typeface="Calibri" panose="020F0502020204030204" pitchFamily="34" charset="0"/>
+                <a:cs typeface="Arial" panose="020B0604020202020204" pitchFamily="34" charset="0"/>
+              </a:rPr>
+              <a:t>Movimentação de containers ao longo do ciclo logístico</a:t>
+            </a:r>
+          </a:p>
+        </p:txBody>
+      </p:sp>
+      <p:pic>
+        <p:nvPicPr>
+          <p:cNvPr id="1026" name="Picture 2" descr="Free photo industrial containers box for logistic import export business.">
+            <a:extLst>
+              <a:ext uri="{FF2B5EF4-FFF2-40B4-BE49-F238E27FC236}">
+                <a16:creationId xmlns:a16="http://schemas.microsoft.com/office/drawing/2014/main" id="{FDC07977-F662-66CB-7534-103E83976919}"/>
+              </a:ext>
+            </a:extLst>
+          </p:cNvPr>
+          <p:cNvPicPr>
+            <a:picLocks noChangeAspect="1" noChangeArrowheads="1"/>
+          </p:cNvPicPr>
           <p:nvPr/>
-        </p:nvSpPr>
-        <p:spPr>
-          <a:xfrm>
-            <a:off x="745067" y="989885"/>
-            <a:ext cx="8229599" cy="5355312"/>
+        </p:nvPicPr>
+        <p:blipFill>
+          <a:blip r:embed="rId4">
+            <a:extLst>
+              <a:ext uri="{28A0092B-C50C-407E-A947-70E740481C1C}">
+                <a14:useLocalDpi xmlns:a14="http://schemas.microsoft.com/office/drawing/2010/main" val="0"/>
+              </a:ext>
+            </a:extLst>
+          </a:blip>
+          <a:srcRect/>
+          <a:stretch>
+            <a:fillRect/>
+          </a:stretch>
+        </p:blipFill>
+        <p:spPr bwMode="auto">
+          <a:xfrm>
+            <a:off x="2742141" y="1819275"/>
+            <a:ext cx="5962650" cy="3971925"/>
           </a:xfrm>
           <a:prstGeom prst="rect">
             <a:avLst/>
           </a:prstGeom>
           <a:noFill/>
-        </p:spPr>
-        <p:txBody>
-          <a:bodyPr wrap="square">
-            <a:spAutoFit/>
-          </a:bodyPr>
-          <a:lstStyle/>
-          <a:p>
-            <a:endParaRPr lang="pt-BR" dirty="0"/>
-          </a:p>
-          <a:p>
-            <a:pPr marL="285750" indent="-285750">
-              <a:buFont typeface="Arial" panose="020B0604020202020204" pitchFamily="34" charset="0"/>
-              <a:buChar char="•"/>
-            </a:pPr>
-            <a:r>
-              <a:rPr lang="pt-BR" dirty="0"/>
-              <a:t>Exemplo: Centros de distribuição</a:t>
-            </a:r>
-          </a:p>
-          <a:p>
-            <a:endParaRPr lang="pt-BR" dirty="0"/>
-          </a:p>
-          <a:p>
-            <a:r>
-              <a:rPr lang="pt-BR" dirty="0"/>
-              <a:t>Considerar a adição de mais lojas: sendo 21 só em São Paulo.</a:t>
-            </a:r>
-          </a:p>
-          <a:p>
-            <a:endParaRPr lang="pt-BR" dirty="0"/>
-          </a:p>
-          <a:p>
-            <a:endParaRPr lang="pt-BR" dirty="0"/>
-          </a:p>
-          <a:p>
-            <a:endParaRPr lang="pt-BR" dirty="0"/>
-          </a:p>
-          <a:p>
-            <a:endParaRPr lang="pt-BR" dirty="0"/>
-          </a:p>
-          <a:p>
-            <a:endParaRPr lang="pt-BR" dirty="0"/>
-          </a:p>
-          <a:p>
-            <a:endParaRPr lang="pt-BR" dirty="0"/>
-          </a:p>
-          <a:p>
-            <a:endParaRPr lang="pt-BR" dirty="0"/>
-          </a:p>
-          <a:p>
-            <a:endParaRPr lang="pt-BR" dirty="0"/>
-          </a:p>
-          <a:p>
-            <a:endParaRPr lang="pt-BR" dirty="0"/>
-          </a:p>
-          <a:p>
-            <a:endParaRPr lang="pt-BR" dirty="0"/>
-          </a:p>
-          <a:p>
-            <a:endParaRPr lang="pt-BR" dirty="0"/>
-          </a:p>
-          <a:p>
-            <a:endParaRPr lang="pt-BR" dirty="0"/>
-          </a:p>
-          <a:p>
-            <a:endParaRPr lang="pt-BR" dirty="0"/>
-          </a:p>
-          <a:p>
-            <a:endParaRPr lang="pt-BR" dirty="0"/>
-          </a:p>
-          <a:p>
-            <a:endParaRPr lang="pt-BR" dirty="0"/>
-          </a:p>
-        </p:txBody>
-      </p:sp>
+          <a:extLst>
+            <a:ext uri="{909E8E84-426E-40DD-AFC4-6F175D3DCCD1}">
+              <a14:hiddenFill xmlns:a14="http://schemas.microsoft.com/office/drawing/2010/main">
+                <a:solidFill>
+                  <a:srgbClr val="FFFFFF"/>
+                </a:solidFill>
+              </a14:hiddenFill>
+            </a:ext>
+          </a:extLst>
+        </p:spPr>
+      </p:pic>
     </p:spTree>
     <p:extLst>
       <p:ext uri="{BB962C8B-B14F-4D97-AF65-F5344CB8AC3E}">
-        <p14:creationId xmlns:p14="http://schemas.microsoft.com/office/powerpoint/2010/main" val="3567116465"/>
+        <p14:creationId xmlns:p14="http://schemas.microsoft.com/office/powerpoint/2010/main" val="3900979391"/>
       </p:ext>
     </p:extLst>
   </p:cSld>
@@ -14833,7 +13989,7 @@
           <p:cNvPr id="2" name="Título 1">
             <a:extLst>
               <a:ext uri="{FF2B5EF4-FFF2-40B4-BE49-F238E27FC236}">
-                <a16:creationId xmlns:a16="http://schemas.microsoft.com/office/drawing/2014/main" xmlns="" id="{5F09B89C-3183-4D52-981A-62798DDFF2B8}"/>
+                <a16:creationId xmlns:a16="http://schemas.microsoft.com/office/drawing/2014/main" id="{5F09B89C-3183-4D52-981A-62798DDFF2B8}"/>
               </a:ext>
             </a:extLst>
           </p:cNvPr>
@@ -14858,13 +14014,8 @@
           <a:p>
             <a:r>
               <a:rPr lang="pt-BR" dirty="0"/>
-              <a:t>K-</a:t>
-            </a:r>
-            <a:r>
-              <a:rPr lang="pt-BR" dirty="0" err="1"/>
-              <a:t>means</a:t>
-            </a:r>
-            <a:endParaRPr lang="pt-BR" dirty="0"/>
+              <a:t>Detecção de anomalias</a:t>
+            </a:r>
           </a:p>
         </p:txBody>
       </p:sp>
@@ -14873,7 +14024,7 @@
           <p:cNvPr id="3" name="AutoShape 2" descr="An example of graph signal reconstruction over wireless sensor network. |  Download Scientific Diagram">
             <a:extLst>
               <a:ext uri="{FF2B5EF4-FFF2-40B4-BE49-F238E27FC236}">
-                <a16:creationId xmlns:a16="http://schemas.microsoft.com/office/drawing/2014/main" xmlns="" id="{0166B4DD-D72A-4A54-94A7-2C38133837FD}"/>
+                <a16:creationId xmlns:a16="http://schemas.microsoft.com/office/drawing/2014/main" id="{0166B4DD-D72A-4A54-94A7-2C38133837FD}"/>
               </a:ext>
             </a:extLst>
           </p:cNvPr>
@@ -14909,12 +14060,36 @@
           </a:bodyPr>
           <a:lstStyle/>
           <a:p>
-            <a:pPr defTabSz="609630"/>
-            <a:endParaRPr lang="pt-BR" sz="1200">
+            <a:pPr marL="0" marR="0" lvl="0" indent="0" algn="l" defTabSz="609630" rtl="0" eaLnBrk="1" fontAlgn="auto" latinLnBrk="0" hangingPunct="1">
+              <a:lnSpc>
+                <a:spcPct val="100000"/>
+              </a:lnSpc>
+              <a:spcBef>
+                <a:spcPts val="0"/>
+              </a:spcBef>
+              <a:spcAft>
+                <a:spcPts val="0"/>
+              </a:spcAft>
+              <a:buClrTx/>
+              <a:buSzTx/>
+              <a:buFontTx/>
+              <a:buNone/>
+              <a:tabLst/>
+              <a:defRPr/>
+            </a:pPr>
+            <a:endParaRPr kumimoji="0" lang="pt-BR" sz="1200" b="0" i="0" u="none" strike="noStrike" kern="1200" cap="none" spc="0" normalizeH="0" baseline="0" noProof="0">
+              <a:ln>
+                <a:noFill/>
+              </a:ln>
               <a:solidFill>
                 <a:prstClr val="black"/>
               </a:solidFill>
+              <a:effectLst/>
+              <a:uLnTx/>
+              <a:uFillTx/>
               <a:latin typeface="Calibri"/>
+              <a:ea typeface="+mn-ea"/>
+              <a:cs typeface="+mn-cs"/>
             </a:endParaRPr>
           </a:p>
         </p:txBody>
@@ -14924,7 +14099,7 @@
           <p:cNvPr id="7" name="AutoShape 4" descr="An example of graph signal reconstruction over wireless sensor network. |  Download Scientific Diagram">
             <a:extLst>
               <a:ext uri="{FF2B5EF4-FFF2-40B4-BE49-F238E27FC236}">
-                <a16:creationId xmlns:a16="http://schemas.microsoft.com/office/drawing/2014/main" xmlns="" id="{14C2B67D-81A1-457E-A410-FE4350A3CCA4}"/>
+                <a16:creationId xmlns:a16="http://schemas.microsoft.com/office/drawing/2014/main" id="{14C2B67D-81A1-457E-A410-FE4350A3CCA4}"/>
               </a:ext>
             </a:extLst>
           </p:cNvPr>
@@ -14960,12 +14135,36 @@
           </a:bodyPr>
           <a:lstStyle/>
           <a:p>
-            <a:pPr defTabSz="609630"/>
-            <a:endParaRPr lang="pt-BR" sz="1200">
+            <a:pPr marL="0" marR="0" lvl="0" indent="0" algn="l" defTabSz="609630" rtl="0" eaLnBrk="1" fontAlgn="auto" latinLnBrk="0" hangingPunct="1">
+              <a:lnSpc>
+                <a:spcPct val="100000"/>
+              </a:lnSpc>
+              <a:spcBef>
+                <a:spcPts val="0"/>
+              </a:spcBef>
+              <a:spcAft>
+                <a:spcPts val="0"/>
+              </a:spcAft>
+              <a:buClrTx/>
+              <a:buSzTx/>
+              <a:buFontTx/>
+              <a:buNone/>
+              <a:tabLst/>
+              <a:defRPr/>
+            </a:pPr>
+            <a:endParaRPr kumimoji="0" lang="pt-BR" sz="1200" b="0" i="0" u="none" strike="noStrike" kern="1200" cap="none" spc="0" normalizeH="0" baseline="0" noProof="0">
+              <a:ln>
+                <a:noFill/>
+              </a:ln>
               <a:solidFill>
                 <a:prstClr val="black"/>
               </a:solidFill>
+              <a:effectLst/>
+              <a:uLnTx/>
+              <a:uFillTx/>
               <a:latin typeface="Calibri"/>
+              <a:ea typeface="+mn-ea"/>
+              <a:cs typeface="+mn-cs"/>
             </a:endParaRPr>
           </a:p>
         </p:txBody>
@@ -14975,7 +14174,7 @@
           <p:cNvPr id="4" name="Espaço Reservado para Conteúdo 3">
             <a:extLst>
               <a:ext uri="{FF2B5EF4-FFF2-40B4-BE49-F238E27FC236}">
-                <a16:creationId xmlns:a16="http://schemas.microsoft.com/office/drawing/2014/main" xmlns="" id="{5F1B432F-F570-AEC0-CFFF-C1D9196D7234}"/>
+                <a16:creationId xmlns:a16="http://schemas.microsoft.com/office/drawing/2014/main" id="{0349BA64-C9D7-4730-9CA9-5C4AD9FC7969}"/>
               </a:ext>
             </a:extLst>
           </p:cNvPr>
@@ -14988,167 +14187,181 @@
         </p:nvSpPr>
         <p:spPr>
           <a:xfrm>
-            <a:off x="304800" y="1066801"/>
-            <a:ext cx="9810044" cy="2737556"/>
+            <a:off x="304800" y="1066800"/>
+            <a:ext cx="9295589" cy="4330419"/>
           </a:xfrm>
         </p:spPr>
         <p:txBody>
           <a:bodyPr>
-            <a:normAutofit/>
+            <a:noAutofit/>
           </a:bodyPr>
           <a:lstStyle/>
           <a:p>
-            <a:pPr marL="0" indent="0">
+            <a:pPr marL="495308" indent="-342900" algn="just">
+              <a:lnSpc>
+                <a:spcPct val="107000"/>
+              </a:lnSpc>
+              <a:spcAft>
+                <a:spcPts val="533"/>
+              </a:spcAft>
+            </a:pPr>
+            <a:r>
+              <a:rPr lang="pt-BR" sz="2000" dirty="0">
+                <a:ea typeface="Calibri" panose="020F0502020204030204" pitchFamily="34" charset="0"/>
+                <a:cs typeface="Arial" panose="020B0604020202020204" pitchFamily="34" charset="0"/>
+              </a:rPr>
+              <a:t>Movimentação de containers ao longo do ciclo logístico</a:t>
+            </a:r>
+          </a:p>
+          <a:p>
+            <a:pPr marL="152408" indent="0" algn="just">
+              <a:lnSpc>
+                <a:spcPct val="107000"/>
+              </a:lnSpc>
+              <a:spcAft>
+                <a:spcPts val="533"/>
+              </a:spcAft>
               <a:buNone/>
             </a:pPr>
-            <a:endParaRPr lang="pt-BR" dirty="0"/>
-          </a:p>
-          <a:p>
-            <a:pPr marL="0" indent="0">
+            <a:r>
+              <a:rPr lang="pt-BR" sz="2000" dirty="0">
+                <a:ea typeface="Calibri" panose="020F0502020204030204" pitchFamily="34" charset="0"/>
+                <a:cs typeface="Arial" panose="020B0604020202020204" pitchFamily="34" charset="0"/>
+              </a:rPr>
+              <a:t>Classificação de 5 estados do container </a:t>
+            </a:r>
+          </a:p>
+          <a:p>
+            <a:pPr marL="152408" indent="0" algn="just">
+              <a:lnSpc>
+                <a:spcPct val="107000"/>
+              </a:lnSpc>
+              <a:spcAft>
+                <a:spcPts val="533"/>
+              </a:spcAft>
               <a:buNone/>
             </a:pPr>
-            <a:endParaRPr lang="pt-BR" dirty="0"/>
-          </a:p>
-        </p:txBody>
-      </p:sp>
-      <p:sp>
-        <p:nvSpPr>
-          <p:cNvPr id="6" name="CaixaDeTexto 5">
-            <a:extLst>
-              <a:ext uri="{FF2B5EF4-FFF2-40B4-BE49-F238E27FC236}">
-                <a16:creationId xmlns:a16="http://schemas.microsoft.com/office/drawing/2014/main" xmlns="" id="{470482DB-F365-0A83-E102-37A8EB7EACEF}"/>
-              </a:ext>
-            </a:extLst>
-          </p:cNvPr>
-          <p:cNvSpPr txBox="1"/>
-          <p:nvPr/>
-        </p:nvSpPr>
-        <p:spPr>
-          <a:xfrm>
-            <a:off x="846667" y="988201"/>
-            <a:ext cx="8229599" cy="4801314"/>
-          </a:xfrm>
-          <a:prstGeom prst="rect">
-            <a:avLst/>
-          </a:prstGeom>
-          <a:noFill/>
-        </p:spPr>
-        <p:txBody>
-          <a:bodyPr wrap="square">
-            <a:spAutoFit/>
-          </a:bodyPr>
-          <a:lstStyle/>
-          <a:p>
-            <a:endParaRPr lang="pt-BR" dirty="0"/>
-          </a:p>
-          <a:p>
-            <a:pPr marL="285750" indent="-285750">
-              <a:buFont typeface="Arial" panose="020B0604020202020204" pitchFamily="34" charset="0"/>
-              <a:buChar char="•"/>
+            <a:endParaRPr lang="pt-BR" sz="2000" dirty="0">
+              <a:ea typeface="Calibri" panose="020F0502020204030204" pitchFamily="34" charset="0"/>
+              <a:cs typeface="Arial" panose="020B0604020202020204" pitchFamily="34" charset="0"/>
+            </a:endParaRPr>
+          </a:p>
+          <a:p>
+            <a:pPr marL="495308" indent="-342900" algn="just">
+              <a:lnSpc>
+                <a:spcPct val="107000"/>
+              </a:lnSpc>
+              <a:spcAft>
+                <a:spcPts val="533"/>
+              </a:spcAft>
             </a:pPr>
             <a:r>
-              <a:rPr lang="pt-BR" dirty="0"/>
-              <a:t>Exemplo: Centros de distribuição</a:t>
-            </a:r>
-          </a:p>
-          <a:p>
-            <a:endParaRPr lang="pt-BR" dirty="0"/>
-          </a:p>
-          <a:p>
-            <a:endParaRPr lang="pt-BR" dirty="0"/>
-          </a:p>
-          <a:p>
-            <a:endParaRPr lang="pt-BR" dirty="0"/>
-          </a:p>
-          <a:p>
-            <a:endParaRPr lang="pt-BR" dirty="0"/>
-          </a:p>
-          <a:p>
-            <a:endParaRPr lang="pt-BR" dirty="0"/>
-          </a:p>
-          <a:p>
-            <a:endParaRPr lang="pt-BR" dirty="0"/>
-          </a:p>
-          <a:p>
-            <a:endParaRPr lang="pt-BR" dirty="0"/>
-          </a:p>
-          <a:p>
-            <a:endParaRPr lang="pt-BR" dirty="0"/>
-          </a:p>
-          <a:p>
-            <a:endParaRPr lang="pt-BR" dirty="0"/>
-          </a:p>
-          <a:p>
-            <a:endParaRPr lang="pt-BR" dirty="0"/>
-          </a:p>
-          <a:p>
-            <a:endParaRPr lang="pt-BR" dirty="0"/>
-          </a:p>
-          <a:p>
-            <a:endParaRPr lang="pt-BR" dirty="0"/>
-          </a:p>
-          <a:p>
-            <a:endParaRPr lang="pt-BR" dirty="0"/>
-          </a:p>
-          <a:p>
-            <a:endParaRPr lang="pt-BR" dirty="0"/>
-          </a:p>
-          <a:p>
-            <a:endParaRPr lang="pt-BR" dirty="0"/>
-          </a:p>
-        </p:txBody>
-      </p:sp>
-      <p:pic>
-        <p:nvPicPr>
-          <p:cNvPr id="9218" name="Picture 2">
-            <a:extLst>
-              <a:ext uri="{FF2B5EF4-FFF2-40B4-BE49-F238E27FC236}">
-                <a16:creationId xmlns:a16="http://schemas.microsoft.com/office/drawing/2014/main" xmlns="" id="{64C03338-7885-1632-F15A-D8024E40A43D}"/>
-              </a:ext>
-            </a:extLst>
-          </p:cNvPr>
-          <p:cNvPicPr>
-            <a:picLocks noChangeAspect="1" noChangeArrowheads="1"/>
-          </p:cNvPicPr>
-          <p:nvPr/>
-        </p:nvPicPr>
-        <p:blipFill>
-          <a:blip r:embed="rId4">
-            <a:extLst>
-              <a:ext uri="{28A0092B-C50C-407E-A947-70E740481C1C}">
-                <a14:useLocalDpi xmlns:a14="http://schemas.microsoft.com/office/drawing/2010/main" val="0"/>
-              </a:ext>
-            </a:extLst>
-          </a:blip>
-          <a:srcRect/>
-          <a:stretch>
-            <a:fillRect/>
-          </a:stretch>
-        </p:blipFill>
-        <p:spPr bwMode="auto">
-          <a:xfrm>
-            <a:off x="3047472" y="2273653"/>
-            <a:ext cx="5419725" cy="3981450"/>
-          </a:xfrm>
-          <a:prstGeom prst="rect">
-            <a:avLst/>
-          </a:prstGeom>
-          <a:noFill/>
-          <a:extLst>
-            <a:ext uri="{909E8E84-426E-40DD-AFC4-6F175D3DCCD1}">
-              <a14:hiddenFill xmlns:a14="http://schemas.microsoft.com/office/drawing/2010/main">
+              <a:rPr lang="pt-BR" sz="2000" dirty="0">
+                <a:ea typeface="Calibri" panose="020F0502020204030204" pitchFamily="34" charset="0"/>
+                <a:cs typeface="Arial" panose="020B0604020202020204" pitchFamily="34" charset="0"/>
+              </a:rPr>
+              <a:t>Parado</a:t>
+            </a:r>
+          </a:p>
+          <a:p>
+            <a:pPr marL="495308" indent="-342900" algn="just">
+              <a:lnSpc>
+                <a:spcPct val="107000"/>
+              </a:lnSpc>
+              <a:spcAft>
+                <a:spcPts val="533"/>
+              </a:spcAft>
+            </a:pPr>
+            <a:r>
+              <a:rPr lang="pt-BR" sz="2000" dirty="0">
+                <a:ea typeface="Calibri" panose="020F0502020204030204" pitchFamily="34" charset="0"/>
+                <a:cs typeface="Arial" panose="020B0604020202020204" pitchFamily="34" charset="0"/>
+              </a:rPr>
+              <a:t>Sendo erguido</a:t>
+            </a:r>
+          </a:p>
+          <a:p>
+            <a:pPr marL="495308" indent="-342900" algn="just">
+              <a:lnSpc>
+                <a:spcPct val="107000"/>
+              </a:lnSpc>
+              <a:spcAft>
+                <a:spcPts val="533"/>
+              </a:spcAft>
+            </a:pPr>
+            <a:r>
+              <a:rPr lang="pt-BR" sz="2000" dirty="0">
+                <a:ea typeface="Calibri" panose="020F0502020204030204" pitchFamily="34" charset="0"/>
+                <a:cs typeface="Arial" panose="020B0604020202020204" pitchFamily="34" charset="0"/>
+              </a:rPr>
+              <a:t>No mar</a:t>
+            </a:r>
+          </a:p>
+          <a:p>
+            <a:pPr marL="495308" indent="-342900" algn="just">
+              <a:lnSpc>
+                <a:spcPct val="107000"/>
+              </a:lnSpc>
+              <a:spcAft>
+                <a:spcPts val="533"/>
+              </a:spcAft>
+            </a:pPr>
+            <a:r>
+              <a:rPr lang="pt-BR" sz="2000" dirty="0">
+                <a:ea typeface="Calibri" panose="020F0502020204030204" pitchFamily="34" charset="0"/>
+                <a:cs typeface="Arial" panose="020B0604020202020204" pitchFamily="34" charset="0"/>
+              </a:rPr>
+              <a:t>No caminhão</a:t>
+            </a:r>
+          </a:p>
+          <a:p>
+            <a:pPr marL="495308" indent="-342900" algn="just">
+              <a:lnSpc>
+                <a:spcPct val="107000"/>
+              </a:lnSpc>
+              <a:spcAft>
+                <a:spcPts val="533"/>
+              </a:spcAft>
+            </a:pPr>
+            <a:r>
+              <a:rPr lang="pt-BR" sz="2000" dirty="0">
                 <a:solidFill>
-                  <a:srgbClr val="FFFFFF"/>
+                  <a:srgbClr val="FF0000"/>
                 </a:solidFill>
-              </a14:hiddenFill>
-            </a:ext>
-          </a:extLst>
-        </p:spPr>
-      </p:pic>
+                <a:ea typeface="Calibri" panose="020F0502020204030204" pitchFamily="34" charset="0"/>
+                <a:cs typeface="Arial" panose="020B0604020202020204" pitchFamily="34" charset="0"/>
+              </a:rPr>
+              <a:t>Anomalia </a:t>
+            </a:r>
+            <a:r>
+              <a:rPr lang="pt-BR" sz="2000" dirty="0">
+                <a:ea typeface="Calibri" panose="020F0502020204030204" pitchFamily="34" charset="0"/>
+                <a:cs typeface="Arial" panose="020B0604020202020204" pitchFamily="34" charset="0"/>
+              </a:rPr>
+              <a:t>(e.g., container caindo no mar, empilhadeira tombando)</a:t>
+            </a:r>
+          </a:p>
+          <a:p>
+            <a:pPr marL="152408" indent="0" algn="just">
+              <a:lnSpc>
+                <a:spcPct val="107000"/>
+              </a:lnSpc>
+              <a:spcAft>
+                <a:spcPts val="533"/>
+              </a:spcAft>
+              <a:buNone/>
+            </a:pPr>
+            <a:endParaRPr lang="pt-BR" sz="2000" dirty="0">
+              <a:ea typeface="Calibri" panose="020F0502020204030204" pitchFamily="34" charset="0"/>
+              <a:cs typeface="Arial" panose="020B0604020202020204" pitchFamily="34" charset="0"/>
+            </a:endParaRPr>
+          </a:p>
+        </p:txBody>
+      </p:sp>
     </p:spTree>
     <p:extLst>
       <p:ext uri="{BB962C8B-B14F-4D97-AF65-F5344CB8AC3E}">
-        <p14:creationId xmlns:p14="http://schemas.microsoft.com/office/powerpoint/2010/main" val="699228913"/>
+        <p14:creationId xmlns:p14="http://schemas.microsoft.com/office/powerpoint/2010/main" val="3676245301"/>
       </p:ext>
     </p:extLst>
   </p:cSld>
@@ -15194,7 +14407,7 @@
           <p:cNvPr id="2" name="Título 1">
             <a:extLst>
               <a:ext uri="{FF2B5EF4-FFF2-40B4-BE49-F238E27FC236}">
-                <a16:creationId xmlns:a16="http://schemas.microsoft.com/office/drawing/2014/main" xmlns="" id="{5F09B89C-3183-4D52-981A-62798DDFF2B8}"/>
+                <a16:creationId xmlns:a16="http://schemas.microsoft.com/office/drawing/2014/main" id="{5F09B89C-3183-4D52-981A-62798DDFF2B8}"/>
               </a:ext>
             </a:extLst>
           </p:cNvPr>
@@ -15219,13 +14432,8 @@
           <a:p>
             <a:r>
               <a:rPr lang="pt-BR" dirty="0"/>
-              <a:t>K-</a:t>
-            </a:r>
-            <a:r>
-              <a:rPr lang="pt-BR" dirty="0" err="1"/>
-              <a:t>means</a:t>
-            </a:r>
-            <a:endParaRPr lang="pt-BR" dirty="0"/>
+              <a:t>Detecção de anomalias</a:t>
+            </a:r>
           </a:p>
         </p:txBody>
       </p:sp>
@@ -15234,7 +14442,7 @@
           <p:cNvPr id="3" name="AutoShape 2" descr="An example of graph signal reconstruction over wireless sensor network. |  Download Scientific Diagram">
             <a:extLst>
               <a:ext uri="{FF2B5EF4-FFF2-40B4-BE49-F238E27FC236}">
-                <a16:creationId xmlns:a16="http://schemas.microsoft.com/office/drawing/2014/main" xmlns="" id="{0166B4DD-D72A-4A54-94A7-2C38133837FD}"/>
+                <a16:creationId xmlns:a16="http://schemas.microsoft.com/office/drawing/2014/main" id="{0166B4DD-D72A-4A54-94A7-2C38133837FD}"/>
               </a:ext>
             </a:extLst>
           </p:cNvPr>
@@ -15270,12 +14478,36 @@
           </a:bodyPr>
           <a:lstStyle/>
           <a:p>
-            <a:pPr defTabSz="609630"/>
-            <a:endParaRPr lang="pt-BR" sz="1200">
+            <a:pPr marL="0" marR="0" lvl="0" indent="0" algn="l" defTabSz="609630" rtl="0" eaLnBrk="1" fontAlgn="auto" latinLnBrk="0" hangingPunct="1">
+              <a:lnSpc>
+                <a:spcPct val="100000"/>
+              </a:lnSpc>
+              <a:spcBef>
+                <a:spcPts val="0"/>
+              </a:spcBef>
+              <a:spcAft>
+                <a:spcPts val="0"/>
+              </a:spcAft>
+              <a:buClrTx/>
+              <a:buSzTx/>
+              <a:buFontTx/>
+              <a:buNone/>
+              <a:tabLst/>
+              <a:defRPr/>
+            </a:pPr>
+            <a:endParaRPr kumimoji="0" lang="pt-BR" sz="1200" b="0" i="0" u="none" strike="noStrike" kern="1200" cap="none" spc="0" normalizeH="0" baseline="0" noProof="0">
+              <a:ln>
+                <a:noFill/>
+              </a:ln>
               <a:solidFill>
                 <a:prstClr val="black"/>
               </a:solidFill>
+              <a:effectLst/>
+              <a:uLnTx/>
+              <a:uFillTx/>
               <a:latin typeface="Calibri"/>
+              <a:ea typeface="+mn-ea"/>
+              <a:cs typeface="+mn-cs"/>
             </a:endParaRPr>
           </a:p>
         </p:txBody>
@@ -15285,7 +14517,7 @@
           <p:cNvPr id="7" name="AutoShape 4" descr="An example of graph signal reconstruction over wireless sensor network. |  Download Scientific Diagram">
             <a:extLst>
               <a:ext uri="{FF2B5EF4-FFF2-40B4-BE49-F238E27FC236}">
-                <a16:creationId xmlns:a16="http://schemas.microsoft.com/office/drawing/2014/main" xmlns="" id="{14C2B67D-81A1-457E-A410-FE4350A3CCA4}"/>
+                <a16:creationId xmlns:a16="http://schemas.microsoft.com/office/drawing/2014/main" id="{14C2B67D-81A1-457E-A410-FE4350A3CCA4}"/>
               </a:ext>
             </a:extLst>
           </p:cNvPr>
@@ -15321,12 +14553,36 @@
           </a:bodyPr>
           <a:lstStyle/>
           <a:p>
-            <a:pPr defTabSz="609630"/>
-            <a:endParaRPr lang="pt-BR" sz="1200">
+            <a:pPr marL="0" marR="0" lvl="0" indent="0" algn="l" defTabSz="609630" rtl="0" eaLnBrk="1" fontAlgn="auto" latinLnBrk="0" hangingPunct="1">
+              <a:lnSpc>
+                <a:spcPct val="100000"/>
+              </a:lnSpc>
+              <a:spcBef>
+                <a:spcPts val="0"/>
+              </a:spcBef>
+              <a:spcAft>
+                <a:spcPts val="0"/>
+              </a:spcAft>
+              <a:buClrTx/>
+              <a:buSzTx/>
+              <a:buFontTx/>
+              <a:buNone/>
+              <a:tabLst/>
+              <a:defRPr/>
+            </a:pPr>
+            <a:endParaRPr kumimoji="0" lang="pt-BR" sz="1200" b="0" i="0" u="none" strike="noStrike" kern="1200" cap="none" spc="0" normalizeH="0" baseline="0" noProof="0">
+              <a:ln>
+                <a:noFill/>
+              </a:ln>
               <a:solidFill>
                 <a:prstClr val="black"/>
               </a:solidFill>
+              <a:effectLst/>
+              <a:uLnTx/>
+              <a:uFillTx/>
               <a:latin typeface="Calibri"/>
+              <a:ea typeface="+mn-ea"/>
+              <a:cs typeface="+mn-cs"/>
             </a:endParaRPr>
           </a:p>
         </p:txBody>
@@ -15336,7 +14592,7 @@
           <p:cNvPr id="4" name="Espaço Reservado para Conteúdo 3">
             <a:extLst>
               <a:ext uri="{FF2B5EF4-FFF2-40B4-BE49-F238E27FC236}">
-                <a16:creationId xmlns:a16="http://schemas.microsoft.com/office/drawing/2014/main" xmlns="" id="{5F1B432F-F570-AEC0-CFFF-C1D9196D7234}"/>
+                <a16:creationId xmlns:a16="http://schemas.microsoft.com/office/drawing/2014/main" id="{0349BA64-C9D7-4730-9CA9-5C4AD9FC7969}"/>
               </a:ext>
             </a:extLst>
           </p:cNvPr>
@@ -15349,167 +14605,71 @@
         </p:nvSpPr>
         <p:spPr>
           <a:xfrm>
-            <a:off x="304800" y="1066801"/>
-            <a:ext cx="9810044" cy="2737556"/>
+            <a:off x="304800" y="1066800"/>
+            <a:ext cx="9295589" cy="4330419"/>
           </a:xfrm>
         </p:spPr>
         <p:txBody>
           <a:bodyPr>
-            <a:normAutofit/>
+            <a:noAutofit/>
           </a:bodyPr>
           <a:lstStyle/>
           <a:p>
-            <a:pPr marL="0" indent="0">
+            <a:pPr marL="152408" indent="0" algn="just">
+              <a:lnSpc>
+                <a:spcPct val="107000"/>
+              </a:lnSpc>
+              <a:spcAft>
+                <a:spcPts val="533"/>
+              </a:spcAft>
               <a:buNone/>
             </a:pPr>
-            <a:endParaRPr lang="pt-BR" dirty="0"/>
-          </a:p>
-          <a:p>
-            <a:pPr marL="0" indent="0">
+            <a:r>
+              <a:rPr lang="pt-BR" sz="2000" dirty="0">
+                <a:ea typeface="Calibri" panose="020F0502020204030204" pitchFamily="34" charset="0"/>
+                <a:cs typeface="Arial" panose="020B0604020202020204" pitchFamily="34" charset="0"/>
+              </a:rPr>
+              <a:t>Trabalho:</a:t>
+            </a:r>
+          </a:p>
+          <a:p>
+            <a:pPr marL="152408" indent="0" algn="just">
+              <a:lnSpc>
+                <a:spcPct val="107000"/>
+              </a:lnSpc>
+              <a:spcAft>
+                <a:spcPts val="533"/>
+              </a:spcAft>
               <a:buNone/>
             </a:pPr>
-            <a:endParaRPr lang="pt-BR" dirty="0"/>
-          </a:p>
-        </p:txBody>
-      </p:sp>
-      <p:sp>
-        <p:nvSpPr>
-          <p:cNvPr id="6" name="CaixaDeTexto 5">
-            <a:extLst>
-              <a:ext uri="{FF2B5EF4-FFF2-40B4-BE49-F238E27FC236}">
-                <a16:creationId xmlns:a16="http://schemas.microsoft.com/office/drawing/2014/main" xmlns="" id="{470482DB-F365-0A83-E102-37A8EB7EACEF}"/>
-              </a:ext>
-            </a:extLst>
-          </p:cNvPr>
-          <p:cNvSpPr txBox="1"/>
-          <p:nvPr/>
-        </p:nvSpPr>
-        <p:spPr>
-          <a:xfrm>
-            <a:off x="846667" y="988201"/>
-            <a:ext cx="8229599" cy="4801314"/>
-          </a:xfrm>
-          <a:prstGeom prst="rect">
-            <a:avLst/>
-          </a:prstGeom>
-          <a:noFill/>
-        </p:spPr>
-        <p:txBody>
-          <a:bodyPr wrap="square">
-            <a:spAutoFit/>
-          </a:bodyPr>
-          <a:lstStyle/>
-          <a:p>
-            <a:endParaRPr lang="pt-BR" dirty="0"/>
-          </a:p>
-          <a:p>
-            <a:pPr marL="285750" indent="-285750">
-              <a:buFont typeface="Arial" panose="020B0604020202020204" pitchFamily="34" charset="0"/>
-              <a:buChar char="•"/>
-            </a:pPr>
-            <a:r>
-              <a:rPr lang="pt-BR" dirty="0"/>
-              <a:t>Exemplo: Centros de distribuição</a:t>
-            </a:r>
-          </a:p>
-          <a:p>
-            <a:endParaRPr lang="pt-BR" dirty="0"/>
-          </a:p>
-          <a:p>
-            <a:endParaRPr lang="pt-BR" dirty="0"/>
-          </a:p>
-          <a:p>
-            <a:endParaRPr lang="pt-BR" dirty="0"/>
-          </a:p>
-          <a:p>
-            <a:endParaRPr lang="pt-BR" dirty="0"/>
-          </a:p>
-          <a:p>
-            <a:endParaRPr lang="pt-BR" dirty="0"/>
-          </a:p>
-          <a:p>
-            <a:endParaRPr lang="pt-BR" dirty="0"/>
-          </a:p>
-          <a:p>
-            <a:endParaRPr lang="pt-BR" dirty="0"/>
-          </a:p>
-          <a:p>
-            <a:endParaRPr lang="pt-BR" dirty="0"/>
-          </a:p>
-          <a:p>
-            <a:endParaRPr lang="pt-BR" dirty="0"/>
-          </a:p>
-          <a:p>
-            <a:endParaRPr lang="pt-BR" dirty="0"/>
-          </a:p>
-          <a:p>
-            <a:endParaRPr lang="pt-BR" dirty="0"/>
-          </a:p>
-          <a:p>
-            <a:endParaRPr lang="pt-BR" dirty="0"/>
-          </a:p>
-          <a:p>
-            <a:endParaRPr lang="pt-BR" dirty="0"/>
-          </a:p>
-          <a:p>
-            <a:endParaRPr lang="pt-BR" dirty="0"/>
-          </a:p>
-          <a:p>
-            <a:endParaRPr lang="pt-BR" dirty="0"/>
-          </a:p>
-        </p:txBody>
-      </p:sp>
-      <p:pic>
-        <p:nvPicPr>
-          <p:cNvPr id="10242" name="Picture 2">
-            <a:extLst>
-              <a:ext uri="{FF2B5EF4-FFF2-40B4-BE49-F238E27FC236}">
-                <a16:creationId xmlns:a16="http://schemas.microsoft.com/office/drawing/2014/main" xmlns="" id="{0A2B4FC7-A3CC-A0F0-4230-65FE1716A69C}"/>
-              </a:ext>
-            </a:extLst>
-          </p:cNvPr>
-          <p:cNvPicPr>
-            <a:picLocks noChangeAspect="1" noChangeArrowheads="1"/>
-          </p:cNvPicPr>
-          <p:nvPr/>
-        </p:nvPicPr>
-        <p:blipFill>
-          <a:blip r:embed="rId4">
-            <a:extLst>
-              <a:ext uri="{28A0092B-C50C-407E-A947-70E740481C1C}">
-                <a14:useLocalDpi xmlns:a14="http://schemas.microsoft.com/office/drawing/2010/main" val="0"/>
-              </a:ext>
-            </a:extLst>
-          </a:blip>
-          <a:srcRect/>
-          <a:stretch>
-            <a:fillRect/>
-          </a:stretch>
-        </p:blipFill>
-        <p:spPr bwMode="auto">
-          <a:xfrm>
-            <a:off x="1987032" y="1974461"/>
-            <a:ext cx="5994213" cy="3903209"/>
-          </a:xfrm>
-          <a:prstGeom prst="rect">
-            <a:avLst/>
-          </a:prstGeom>
-          <a:noFill/>
-          <a:extLst>
-            <a:ext uri="{909E8E84-426E-40DD-AFC4-6F175D3DCCD1}">
-              <a14:hiddenFill xmlns:a14="http://schemas.microsoft.com/office/drawing/2010/main">
-                <a:solidFill>
-                  <a:srgbClr val="FFFFFF"/>
-                </a:solidFill>
-              </a14:hiddenFill>
-            </a:ext>
-          </a:extLst>
-        </p:spPr>
-      </p:pic>
+            <a:r>
+              <a:rPr lang="pt-BR" sz="2000" dirty="0">
+                <a:ea typeface="Calibri" panose="020F0502020204030204" pitchFamily="34" charset="0"/>
+                <a:cs typeface="Arial" panose="020B0604020202020204" pitchFamily="34" charset="0"/>
+              </a:rPr>
+              <a:t>Incluir e analisar no </a:t>
+            </a:r>
+            <a:r>
+              <a:rPr lang="pt-BR" sz="2000" dirty="0" err="1">
+                <a:ea typeface="Calibri" panose="020F0502020204030204" pitchFamily="34" charset="0"/>
+                <a:cs typeface="Arial" panose="020B0604020202020204" pitchFamily="34" charset="0"/>
+              </a:rPr>
+              <a:t>edge</a:t>
+            </a:r>
+            <a:r>
+              <a:rPr lang="pt-BR" sz="2000" dirty="0">
+                <a:ea typeface="Calibri" panose="020F0502020204030204" pitchFamily="34" charset="0"/>
+                <a:cs typeface="Arial" panose="020B0604020202020204" pitchFamily="34" charset="0"/>
+              </a:rPr>
+              <a:t> impulse possíveis anomalias nos dados da movimentação da cadeira de rodas pela cabeça.</a:t>
+            </a:r>
+          </a:p>
+        </p:txBody>
+      </p:sp>
     </p:spTree>
     <p:extLst>
       <p:ext uri="{BB962C8B-B14F-4D97-AF65-F5344CB8AC3E}">
-        <p14:creationId xmlns:p14="http://schemas.microsoft.com/office/powerpoint/2010/main" val="1466513416"/>
+        <p14:creationId xmlns:p14="http://schemas.microsoft.com/office/powerpoint/2010/main" val="3910318190"/>
       </p:ext>
     </p:extLst>
   </p:cSld>
@@ -15552,50 +14712,10 @@
       </p:grpSpPr>
       <p:sp>
         <p:nvSpPr>
-          <p:cNvPr id="2" name="Título 1">
-            <a:extLst>
-              <a:ext uri="{FF2B5EF4-FFF2-40B4-BE49-F238E27FC236}">
-                <a16:creationId xmlns:a16="http://schemas.microsoft.com/office/drawing/2014/main" xmlns="" id="{5F09B89C-3183-4D52-981A-62798DDFF2B8}"/>
-              </a:ext>
-            </a:extLst>
-          </p:cNvPr>
-          <p:cNvSpPr>
-            <a:spLocks noGrp="1"/>
-          </p:cNvSpPr>
-          <p:nvPr>
-            <p:ph type="title"/>
-          </p:nvPr>
-        </p:nvSpPr>
-        <p:spPr>
-          <a:xfrm>
-            <a:off x="304800" y="183092"/>
-            <a:ext cx="6559285" cy="762000"/>
-          </a:xfrm>
-        </p:spPr>
-        <p:txBody>
-          <a:bodyPr>
-            <a:normAutofit/>
-          </a:bodyPr>
-          <a:lstStyle/>
-          <a:p>
-            <a:r>
-              <a:rPr lang="pt-BR" dirty="0"/>
-              <a:t>K-</a:t>
-            </a:r>
-            <a:r>
-              <a:rPr lang="pt-BR" dirty="0" err="1"/>
-              <a:t>means</a:t>
-            </a:r>
-            <a:endParaRPr lang="pt-BR" dirty="0"/>
-          </a:p>
-        </p:txBody>
-      </p:sp>
-      <p:sp>
-        <p:nvSpPr>
           <p:cNvPr id="3" name="AutoShape 2" descr="An example of graph signal reconstruction over wireless sensor network. |  Download Scientific Diagram">
             <a:extLst>
               <a:ext uri="{FF2B5EF4-FFF2-40B4-BE49-F238E27FC236}">
-                <a16:creationId xmlns:a16="http://schemas.microsoft.com/office/drawing/2014/main" xmlns="" id="{0166B4DD-D72A-4A54-94A7-2C38133837FD}"/>
+                <a16:creationId xmlns:a16="http://schemas.microsoft.com/office/drawing/2014/main" id="{0166B4DD-D72A-4A54-94A7-2C38133837FD}"/>
               </a:ext>
             </a:extLst>
           </p:cNvPr>
@@ -15631,12 +14751,36 @@
           </a:bodyPr>
           <a:lstStyle/>
           <a:p>
-            <a:pPr defTabSz="609630"/>
-            <a:endParaRPr lang="pt-BR" sz="1200">
+            <a:pPr marL="0" marR="0" lvl="0" indent="0" algn="l" defTabSz="609630" rtl="0" eaLnBrk="1" fontAlgn="auto" latinLnBrk="0" hangingPunct="1">
+              <a:lnSpc>
+                <a:spcPct val="100000"/>
+              </a:lnSpc>
+              <a:spcBef>
+                <a:spcPts val="0"/>
+              </a:spcBef>
+              <a:spcAft>
+                <a:spcPts val="0"/>
+              </a:spcAft>
+              <a:buClrTx/>
+              <a:buSzTx/>
+              <a:buFontTx/>
+              <a:buNone/>
+              <a:tabLst/>
+              <a:defRPr/>
+            </a:pPr>
+            <a:endParaRPr kumimoji="0" lang="pt-BR" sz="1200" b="0" i="0" u="none" strike="noStrike" kern="1200" cap="none" spc="0" normalizeH="0" baseline="0" noProof="0">
+              <a:ln>
+                <a:noFill/>
+              </a:ln>
               <a:solidFill>
                 <a:prstClr val="black"/>
               </a:solidFill>
+              <a:effectLst/>
+              <a:uLnTx/>
+              <a:uFillTx/>
               <a:latin typeface="Calibri"/>
+              <a:ea typeface="+mn-ea"/>
+              <a:cs typeface="+mn-cs"/>
             </a:endParaRPr>
           </a:p>
         </p:txBody>
@@ -15646,7 +14790,7 @@
           <p:cNvPr id="7" name="AutoShape 4" descr="An example of graph signal reconstruction over wireless sensor network. |  Download Scientific Diagram">
             <a:extLst>
               <a:ext uri="{FF2B5EF4-FFF2-40B4-BE49-F238E27FC236}">
-                <a16:creationId xmlns:a16="http://schemas.microsoft.com/office/drawing/2014/main" xmlns="" id="{14C2B67D-81A1-457E-A410-FE4350A3CCA4}"/>
+                <a16:creationId xmlns:a16="http://schemas.microsoft.com/office/drawing/2014/main" id="{14C2B67D-81A1-457E-A410-FE4350A3CCA4}"/>
               </a:ext>
             </a:extLst>
           </p:cNvPr>
@@ -15682,12 +14826,36 @@
           </a:bodyPr>
           <a:lstStyle/>
           <a:p>
-            <a:pPr defTabSz="609630"/>
-            <a:endParaRPr lang="pt-BR" sz="1200">
+            <a:pPr marL="0" marR="0" lvl="0" indent="0" algn="l" defTabSz="609630" rtl="0" eaLnBrk="1" fontAlgn="auto" latinLnBrk="0" hangingPunct="1">
+              <a:lnSpc>
+                <a:spcPct val="100000"/>
+              </a:lnSpc>
+              <a:spcBef>
+                <a:spcPts val="0"/>
+              </a:spcBef>
+              <a:spcAft>
+                <a:spcPts val="0"/>
+              </a:spcAft>
+              <a:buClrTx/>
+              <a:buSzTx/>
+              <a:buFontTx/>
+              <a:buNone/>
+              <a:tabLst/>
+              <a:defRPr/>
+            </a:pPr>
+            <a:endParaRPr kumimoji="0" lang="pt-BR" sz="1200" b="0" i="0" u="none" strike="noStrike" kern="1200" cap="none" spc="0" normalizeH="0" baseline="0" noProof="0">
+              <a:ln>
+                <a:noFill/>
+              </a:ln>
               <a:solidFill>
                 <a:prstClr val="black"/>
               </a:solidFill>
+              <a:effectLst/>
+              <a:uLnTx/>
+              <a:uFillTx/>
               <a:latin typeface="Calibri"/>
+              <a:ea typeface="+mn-ea"/>
+              <a:cs typeface="+mn-cs"/>
             </a:endParaRPr>
           </a:p>
         </p:txBody>
@@ -15697,7 +14865,7 @@
           <p:cNvPr id="4" name="Espaço Reservado para Conteúdo 3">
             <a:extLst>
               <a:ext uri="{FF2B5EF4-FFF2-40B4-BE49-F238E27FC236}">
-                <a16:creationId xmlns:a16="http://schemas.microsoft.com/office/drawing/2014/main" xmlns="" id="{5F1B432F-F570-AEC0-CFFF-C1D9196D7234}"/>
+                <a16:creationId xmlns:a16="http://schemas.microsoft.com/office/drawing/2014/main" id="{0349BA64-C9D7-4730-9CA9-5C4AD9FC7969}"/>
               </a:ext>
             </a:extLst>
           </p:cNvPr>
@@ -15710,1622 +14878,99 @@
         </p:nvSpPr>
         <p:spPr>
           <a:xfrm>
-            <a:off x="304800" y="1066801"/>
-            <a:ext cx="9810044" cy="2737556"/>
+            <a:off x="304800" y="1066800"/>
+            <a:ext cx="9295589" cy="4330419"/>
           </a:xfrm>
         </p:spPr>
         <p:txBody>
           <a:bodyPr>
-            <a:normAutofit/>
+            <a:noAutofit/>
           </a:bodyPr>
           <a:lstStyle/>
           <a:p>
-            <a:pPr marL="0" indent="0">
+            <a:pPr marL="152408" indent="0" algn="ctr">
+              <a:lnSpc>
+                <a:spcPct val="107000"/>
+              </a:lnSpc>
+              <a:spcAft>
+                <a:spcPts val="533"/>
+              </a:spcAft>
               <a:buNone/>
             </a:pPr>
-            <a:endParaRPr lang="pt-BR" dirty="0"/>
-          </a:p>
-          <a:p>
-            <a:pPr marL="0" indent="0">
+            <a:endParaRPr lang="pt-BR" sz="2400" dirty="0">
+              <a:ea typeface="Calibri" panose="020F0502020204030204" pitchFamily="34" charset="0"/>
+              <a:cs typeface="Arial" panose="020B0604020202020204" pitchFamily="34" charset="0"/>
+            </a:endParaRPr>
+          </a:p>
+          <a:p>
+            <a:pPr marL="152408" indent="0" algn="ctr">
+              <a:lnSpc>
+                <a:spcPct val="107000"/>
+              </a:lnSpc>
+              <a:spcAft>
+                <a:spcPts val="533"/>
+              </a:spcAft>
               <a:buNone/>
             </a:pPr>
-            <a:endParaRPr lang="pt-BR" dirty="0"/>
-          </a:p>
-        </p:txBody>
-      </p:sp>
-      <p:sp>
-        <p:nvSpPr>
-          <p:cNvPr id="6" name="CaixaDeTexto 5">
-            <a:extLst>
-              <a:ext uri="{FF2B5EF4-FFF2-40B4-BE49-F238E27FC236}">
-                <a16:creationId xmlns:a16="http://schemas.microsoft.com/office/drawing/2014/main" xmlns="" id="{470482DB-F365-0A83-E102-37A8EB7EACEF}"/>
-              </a:ext>
-            </a:extLst>
-          </p:cNvPr>
-          <p:cNvSpPr txBox="1"/>
-          <p:nvPr/>
-        </p:nvSpPr>
-        <p:spPr>
-          <a:xfrm>
-            <a:off x="846667" y="988201"/>
-            <a:ext cx="8229599" cy="4801314"/>
-          </a:xfrm>
-          <a:prstGeom prst="rect">
-            <a:avLst/>
-          </a:prstGeom>
-          <a:noFill/>
-        </p:spPr>
-        <p:txBody>
-          <a:bodyPr wrap="square">
-            <a:spAutoFit/>
-          </a:bodyPr>
-          <a:lstStyle/>
-          <a:p>
-            <a:endParaRPr lang="pt-BR" dirty="0"/>
-          </a:p>
-          <a:p>
-            <a:pPr marL="285750" indent="-285750">
-              <a:buFont typeface="Arial" panose="020B0604020202020204" pitchFamily="34" charset="0"/>
-              <a:buChar char="•"/>
+            <a:endParaRPr lang="pt-BR" sz="2400" dirty="0">
+              <a:ea typeface="Calibri" panose="020F0502020204030204" pitchFamily="34" charset="0"/>
+              <a:cs typeface="Arial" panose="020B0604020202020204" pitchFamily="34" charset="0"/>
+            </a:endParaRPr>
+          </a:p>
+          <a:p>
+            <a:pPr marL="152408" indent="0" algn="ctr">
+              <a:lnSpc>
+                <a:spcPct val="107000"/>
+              </a:lnSpc>
+              <a:spcAft>
+                <a:spcPts val="533"/>
+              </a:spcAft>
+              <a:buNone/>
             </a:pPr>
-            <a:r>
-              <a:rPr lang="pt-BR" dirty="0"/>
-              <a:t>Exemplo: Centros de distribuição</a:t>
-            </a:r>
-          </a:p>
-          <a:p>
-            <a:endParaRPr lang="pt-BR" dirty="0"/>
-          </a:p>
-          <a:p>
-            <a:endParaRPr lang="pt-BR" dirty="0"/>
-          </a:p>
-          <a:p>
-            <a:endParaRPr lang="pt-BR" dirty="0"/>
-          </a:p>
-          <a:p>
-            <a:endParaRPr lang="pt-BR" dirty="0"/>
-          </a:p>
-          <a:p>
-            <a:endParaRPr lang="pt-BR" dirty="0"/>
-          </a:p>
-          <a:p>
-            <a:endParaRPr lang="pt-BR" dirty="0"/>
-          </a:p>
-          <a:p>
-            <a:endParaRPr lang="pt-BR" dirty="0"/>
-          </a:p>
-          <a:p>
-            <a:endParaRPr lang="pt-BR" dirty="0"/>
-          </a:p>
-          <a:p>
-            <a:endParaRPr lang="pt-BR" dirty="0"/>
-          </a:p>
-          <a:p>
-            <a:endParaRPr lang="pt-BR" dirty="0"/>
-          </a:p>
-          <a:p>
-            <a:endParaRPr lang="pt-BR" dirty="0"/>
-          </a:p>
-          <a:p>
-            <a:endParaRPr lang="pt-BR" dirty="0"/>
-          </a:p>
-          <a:p>
-            <a:endParaRPr lang="pt-BR" dirty="0"/>
-          </a:p>
-          <a:p>
-            <a:endParaRPr lang="pt-BR" dirty="0"/>
-          </a:p>
-          <a:p>
-            <a:endParaRPr lang="pt-BR" dirty="0"/>
-          </a:p>
-        </p:txBody>
-      </p:sp>
-      <p:pic>
-        <p:nvPicPr>
-          <p:cNvPr id="8" name="Imagem 7">
-            <a:extLst>
-              <a:ext uri="{FF2B5EF4-FFF2-40B4-BE49-F238E27FC236}">
-                <a16:creationId xmlns:a16="http://schemas.microsoft.com/office/drawing/2014/main" xmlns="" id="{D1DA67FB-2631-AF8D-50AD-718296A5CA75}"/>
-              </a:ext>
-            </a:extLst>
-          </p:cNvPr>
-          <p:cNvPicPr>
-            <a:picLocks noChangeAspect="1"/>
-          </p:cNvPicPr>
-          <p:nvPr/>
-        </p:nvPicPr>
-        <p:blipFill>
-          <a:blip r:embed="rId4"/>
-          <a:stretch>
-            <a:fillRect/>
-          </a:stretch>
-        </p:blipFill>
-        <p:spPr>
-          <a:xfrm>
-            <a:off x="3323243" y="2776154"/>
-            <a:ext cx="4755292" cy="1508891"/>
-          </a:xfrm>
-          <a:prstGeom prst="rect">
-            <a:avLst/>
-          </a:prstGeom>
-        </p:spPr>
-      </p:pic>
+            <a:endParaRPr lang="pt-BR" sz="2400" dirty="0">
+              <a:ea typeface="Calibri" panose="020F0502020204030204" pitchFamily="34" charset="0"/>
+              <a:cs typeface="Arial" panose="020B0604020202020204" pitchFamily="34" charset="0"/>
+            </a:endParaRPr>
+          </a:p>
+          <a:p>
+            <a:pPr marL="152408" indent="0" algn="ctr">
+              <a:lnSpc>
+                <a:spcPct val="107000"/>
+              </a:lnSpc>
+              <a:spcAft>
+                <a:spcPts val="533"/>
+              </a:spcAft>
+              <a:buNone/>
+            </a:pPr>
+            <a:r>
+              <a:rPr lang="pt-BR" sz="2400" dirty="0">
+                <a:ea typeface="Calibri" panose="020F0502020204030204" pitchFamily="34" charset="0"/>
+                <a:cs typeface="Arial" panose="020B0604020202020204" pitchFamily="34" charset="0"/>
+              </a:rPr>
+              <a:t>Acompanhamento do trabalho final</a:t>
+            </a:r>
+          </a:p>
+          <a:p>
+            <a:pPr marL="152408" indent="0" algn="just">
+              <a:lnSpc>
+                <a:spcPct val="107000"/>
+              </a:lnSpc>
+              <a:spcAft>
+                <a:spcPts val="533"/>
+              </a:spcAft>
+              <a:buNone/>
+            </a:pPr>
+            <a:endParaRPr lang="pt-BR" sz="2000" dirty="0">
+              <a:ea typeface="Calibri" panose="020F0502020204030204" pitchFamily="34" charset="0"/>
+              <a:cs typeface="Arial" panose="020B0604020202020204" pitchFamily="34" charset="0"/>
+            </a:endParaRPr>
+          </a:p>
+        </p:txBody>
+      </p:sp>
     </p:spTree>
     <p:extLst>
       <p:ext uri="{BB962C8B-B14F-4D97-AF65-F5344CB8AC3E}">
-        <p14:creationId xmlns:p14="http://schemas.microsoft.com/office/powerpoint/2010/main" val="2795646663"/>
-      </p:ext>
-    </p:extLst>
-  </p:cSld>
-  <p:clrMapOvr>
-    <a:masterClrMapping/>
-  </p:clrMapOvr>
-</p:sld>
-</file>
-
-<file path=ppt/slides/slide26.xml><?xml version="1.0" encoding="utf-8"?>
-<p:sld xmlns:a="http://schemas.openxmlformats.org/drawingml/2006/main" xmlns:r="http://schemas.openxmlformats.org/officeDocument/2006/relationships" xmlns:p="http://schemas.openxmlformats.org/presentationml/2006/main">
-  <p:cSld>
-    <p:bg>
-      <p:bgPr>
-        <a:blipFill dpi="0" rotWithShape="1">
-          <a:blip r:embed="rId3">
-            <a:lum/>
-          </a:blip>
-          <a:srcRect/>
-          <a:stretch>
-            <a:fillRect/>
-          </a:stretch>
-        </a:blipFill>
-        <a:effectLst/>
-      </p:bgPr>
-    </p:bg>
-    <p:spTree>
-      <p:nvGrpSpPr>
-        <p:cNvPr id="1" name=""/>
-        <p:cNvGrpSpPr/>
-        <p:nvPr/>
-      </p:nvGrpSpPr>
-      <p:grpSpPr>
-        <a:xfrm>
-          <a:off x="0" y="0"/>
-          <a:ext cx="0" cy="0"/>
-          <a:chOff x="0" y="0"/>
-          <a:chExt cx="0" cy="0"/>
-        </a:xfrm>
-      </p:grpSpPr>
-      <p:sp>
-        <p:nvSpPr>
-          <p:cNvPr id="2" name="Título 1">
-            <a:extLst>
-              <a:ext uri="{FF2B5EF4-FFF2-40B4-BE49-F238E27FC236}">
-                <a16:creationId xmlns:a16="http://schemas.microsoft.com/office/drawing/2014/main" xmlns="" id="{5F09B89C-3183-4D52-981A-62798DDFF2B8}"/>
-              </a:ext>
-            </a:extLst>
-          </p:cNvPr>
-          <p:cNvSpPr>
-            <a:spLocks noGrp="1"/>
-          </p:cNvSpPr>
-          <p:nvPr>
-            <p:ph type="title"/>
-          </p:nvPr>
-        </p:nvSpPr>
-        <p:spPr>
-          <a:xfrm>
-            <a:off x="304800" y="183092"/>
-            <a:ext cx="6559285" cy="762000"/>
-          </a:xfrm>
-        </p:spPr>
-        <p:txBody>
-          <a:bodyPr>
-            <a:normAutofit/>
-          </a:bodyPr>
-          <a:lstStyle/>
-          <a:p>
-            <a:r>
-              <a:rPr lang="pt-BR" dirty="0"/>
-              <a:t>K-</a:t>
-            </a:r>
-            <a:r>
-              <a:rPr lang="pt-BR" dirty="0" err="1"/>
-              <a:t>means</a:t>
-            </a:r>
-            <a:endParaRPr lang="pt-BR" dirty="0"/>
-          </a:p>
-        </p:txBody>
-      </p:sp>
-      <p:sp>
-        <p:nvSpPr>
-          <p:cNvPr id="3" name="AutoShape 2" descr="An example of graph signal reconstruction over wireless sensor network. |  Download Scientific Diagram">
-            <a:extLst>
-              <a:ext uri="{FF2B5EF4-FFF2-40B4-BE49-F238E27FC236}">
-                <a16:creationId xmlns:a16="http://schemas.microsoft.com/office/drawing/2014/main" xmlns="" id="{0166B4DD-D72A-4A54-94A7-2C38133837FD}"/>
-              </a:ext>
-            </a:extLst>
-          </p:cNvPr>
-          <p:cNvSpPr>
-            <a:spLocks noChangeAspect="1" noChangeArrowheads="1"/>
-          </p:cNvSpPr>
-          <p:nvPr/>
-        </p:nvSpPr>
-        <p:spPr bwMode="auto">
-          <a:xfrm>
-            <a:off x="5994400" y="3327400"/>
-            <a:ext cx="203200" cy="203200"/>
-          </a:xfrm>
-          <a:prstGeom prst="rect">
-            <a:avLst/>
-          </a:prstGeom>
-          <a:noFill/>
-          <a:extLst>
-            <a:ext uri="{909E8E84-426E-40DD-AFC4-6F175D3DCCD1}">
-              <a14:hiddenFill xmlns:a14="http://schemas.microsoft.com/office/drawing/2010/main">
-                <a:solidFill>
-                  <a:srgbClr val="FFFFFF"/>
-                </a:solidFill>
-              </a14:hiddenFill>
-            </a:ext>
-          </a:extLst>
-        </p:spPr>
-        <p:txBody>
-          <a:bodyPr vert="horz" wrap="square" lIns="60960" tIns="30480" rIns="60960" bIns="30480" numCol="1" anchor="t" anchorCtr="0" compatLnSpc="1">
-            <a:prstTxWarp prst="textNoShape">
-              <a:avLst/>
-            </a:prstTxWarp>
-          </a:bodyPr>
-          <a:lstStyle/>
-          <a:p>
-            <a:pPr defTabSz="609630"/>
-            <a:endParaRPr lang="pt-BR" sz="1200">
-              <a:solidFill>
-                <a:prstClr val="black"/>
-              </a:solidFill>
-              <a:latin typeface="Calibri"/>
-            </a:endParaRPr>
-          </a:p>
-        </p:txBody>
-      </p:sp>
-      <p:sp>
-        <p:nvSpPr>
-          <p:cNvPr id="7" name="AutoShape 4" descr="An example of graph signal reconstruction over wireless sensor network. |  Download Scientific Diagram">
-            <a:extLst>
-              <a:ext uri="{FF2B5EF4-FFF2-40B4-BE49-F238E27FC236}">
-                <a16:creationId xmlns:a16="http://schemas.microsoft.com/office/drawing/2014/main" xmlns="" id="{14C2B67D-81A1-457E-A410-FE4350A3CCA4}"/>
-              </a:ext>
-            </a:extLst>
-          </p:cNvPr>
-          <p:cNvSpPr>
-            <a:spLocks noChangeAspect="1" noChangeArrowheads="1"/>
-          </p:cNvSpPr>
-          <p:nvPr/>
-        </p:nvSpPr>
-        <p:spPr bwMode="auto">
-          <a:xfrm>
-            <a:off x="6096000" y="3429000"/>
-            <a:ext cx="203200" cy="203200"/>
-          </a:xfrm>
-          <a:prstGeom prst="rect">
-            <a:avLst/>
-          </a:prstGeom>
-          <a:noFill/>
-          <a:extLst>
-            <a:ext uri="{909E8E84-426E-40DD-AFC4-6F175D3DCCD1}">
-              <a14:hiddenFill xmlns:a14="http://schemas.microsoft.com/office/drawing/2010/main">
-                <a:solidFill>
-                  <a:srgbClr val="FFFFFF"/>
-                </a:solidFill>
-              </a14:hiddenFill>
-            </a:ext>
-          </a:extLst>
-        </p:spPr>
-        <p:txBody>
-          <a:bodyPr vert="horz" wrap="square" lIns="60960" tIns="30480" rIns="60960" bIns="30480" numCol="1" anchor="t" anchorCtr="0" compatLnSpc="1">
-            <a:prstTxWarp prst="textNoShape">
-              <a:avLst/>
-            </a:prstTxWarp>
-          </a:bodyPr>
-          <a:lstStyle/>
-          <a:p>
-            <a:pPr defTabSz="609630"/>
-            <a:endParaRPr lang="pt-BR" sz="1200">
-              <a:solidFill>
-                <a:prstClr val="black"/>
-              </a:solidFill>
-              <a:latin typeface="Calibri"/>
-            </a:endParaRPr>
-          </a:p>
-        </p:txBody>
-      </p:sp>
-      <p:sp>
-        <p:nvSpPr>
-          <p:cNvPr id="4" name="Espaço Reservado para Conteúdo 3">
-            <a:extLst>
-              <a:ext uri="{FF2B5EF4-FFF2-40B4-BE49-F238E27FC236}">
-                <a16:creationId xmlns:a16="http://schemas.microsoft.com/office/drawing/2014/main" xmlns="" id="{5F1B432F-F570-AEC0-CFFF-C1D9196D7234}"/>
-              </a:ext>
-            </a:extLst>
-          </p:cNvPr>
-          <p:cNvSpPr>
-            <a:spLocks noGrp="1"/>
-          </p:cNvSpPr>
-          <p:nvPr>
-            <p:ph idx="1"/>
-          </p:nvPr>
-        </p:nvSpPr>
-        <p:spPr>
-          <a:xfrm>
-            <a:off x="304800" y="1066801"/>
-            <a:ext cx="9810044" cy="2737556"/>
-          </a:xfrm>
-        </p:spPr>
-        <p:txBody>
-          <a:bodyPr>
-            <a:normAutofit/>
-          </a:bodyPr>
-          <a:lstStyle/>
-          <a:p>
-            <a:pPr marL="0" indent="0">
-              <a:buNone/>
-            </a:pPr>
-            <a:endParaRPr lang="pt-BR" dirty="0"/>
-          </a:p>
-          <a:p>
-            <a:pPr marL="0" indent="0">
-              <a:buNone/>
-            </a:pPr>
-            <a:endParaRPr lang="pt-BR" dirty="0"/>
-          </a:p>
-        </p:txBody>
-      </p:sp>
-      <p:sp>
-        <p:nvSpPr>
-          <p:cNvPr id="6" name="CaixaDeTexto 5">
-            <a:extLst>
-              <a:ext uri="{FF2B5EF4-FFF2-40B4-BE49-F238E27FC236}">
-                <a16:creationId xmlns:a16="http://schemas.microsoft.com/office/drawing/2014/main" xmlns="" id="{470482DB-F365-0A83-E102-37A8EB7EACEF}"/>
-              </a:ext>
-            </a:extLst>
-          </p:cNvPr>
-          <p:cNvSpPr txBox="1"/>
-          <p:nvPr/>
-        </p:nvSpPr>
-        <p:spPr>
-          <a:xfrm>
-            <a:off x="846667" y="988201"/>
-            <a:ext cx="8229599" cy="6186309"/>
-          </a:xfrm>
-          <a:prstGeom prst="rect">
-            <a:avLst/>
-          </a:prstGeom>
-          <a:noFill/>
-        </p:spPr>
-        <p:txBody>
-          <a:bodyPr wrap="square">
-            <a:spAutoFit/>
-          </a:bodyPr>
-          <a:lstStyle/>
-          <a:p>
-            <a:r>
-              <a:rPr lang="pt-BR" dirty="0"/>
-              <a:t>Dados de meios de transporte:</a:t>
-            </a:r>
-          </a:p>
-          <a:p>
-            <a:endParaRPr lang="pt-BR" dirty="0"/>
-          </a:p>
-          <a:p>
-            <a:pPr marL="285750" indent="-285750">
-              <a:buFont typeface="Arial" panose="020B0604020202020204" pitchFamily="34" charset="0"/>
-              <a:buChar char="•"/>
-            </a:pPr>
-            <a:r>
-              <a:rPr lang="pt-BR" dirty="0"/>
-              <a:t>Rodovias</a:t>
-            </a:r>
-          </a:p>
-          <a:p>
-            <a:pPr marL="285750" indent="-285750">
-              <a:buFont typeface="Arial" panose="020B0604020202020204" pitchFamily="34" charset="0"/>
-              <a:buChar char="•"/>
-            </a:pPr>
-            <a:r>
-              <a:rPr lang="pt-BR" dirty="0"/>
-              <a:t>Ferrovias</a:t>
-            </a:r>
-          </a:p>
-          <a:p>
-            <a:pPr marL="285750" indent="-285750">
-              <a:buFont typeface="Arial" panose="020B0604020202020204" pitchFamily="34" charset="0"/>
-              <a:buChar char="•"/>
-            </a:pPr>
-            <a:r>
-              <a:rPr lang="pt-BR" dirty="0"/>
-              <a:t>Aeroportos</a:t>
-            </a:r>
-          </a:p>
-          <a:p>
-            <a:pPr marL="285750" indent="-285750">
-              <a:buFont typeface="Arial" panose="020B0604020202020204" pitchFamily="34" charset="0"/>
-              <a:buChar char="•"/>
-            </a:pPr>
-            <a:r>
-              <a:rPr lang="pt-BR" dirty="0"/>
-              <a:t>Rios navegáveis</a:t>
-            </a:r>
-          </a:p>
-          <a:p>
-            <a:pPr marL="285750" indent="-285750">
-              <a:buFont typeface="Arial" panose="020B0604020202020204" pitchFamily="34" charset="0"/>
-              <a:buChar char="•"/>
-            </a:pPr>
-            <a:r>
-              <a:rPr lang="pt-BR" dirty="0"/>
-              <a:t>Portos</a:t>
-            </a:r>
-          </a:p>
-          <a:p>
-            <a:pPr marL="285750" indent="-285750">
-              <a:buFont typeface="Arial" panose="020B0604020202020204" pitchFamily="34" charset="0"/>
-              <a:buChar char="•"/>
-            </a:pPr>
-            <a:endParaRPr lang="pt-BR" dirty="0"/>
-          </a:p>
-          <a:p>
-            <a:endParaRPr lang="pt-BR" dirty="0"/>
-          </a:p>
-          <a:p>
-            <a:endParaRPr lang="pt-BR" dirty="0"/>
-          </a:p>
-          <a:p>
-            <a:endParaRPr lang="pt-BR" dirty="0"/>
-          </a:p>
-          <a:p>
-            <a:endParaRPr lang="pt-BR" dirty="0"/>
-          </a:p>
-          <a:p>
-            <a:endParaRPr lang="pt-BR" dirty="0"/>
-          </a:p>
-          <a:p>
-            <a:endParaRPr lang="pt-BR" dirty="0"/>
-          </a:p>
-          <a:p>
-            <a:endParaRPr lang="pt-BR" dirty="0"/>
-          </a:p>
-          <a:p>
-            <a:endParaRPr lang="pt-BR" dirty="0"/>
-          </a:p>
-          <a:p>
-            <a:endParaRPr lang="pt-BR" dirty="0"/>
-          </a:p>
-          <a:p>
-            <a:endParaRPr lang="pt-BR" dirty="0"/>
-          </a:p>
-          <a:p>
-            <a:endParaRPr lang="pt-BR" dirty="0"/>
-          </a:p>
-          <a:p>
-            <a:endParaRPr lang="pt-BR" dirty="0"/>
-          </a:p>
-          <a:p>
-            <a:endParaRPr lang="pt-BR" dirty="0"/>
-          </a:p>
-          <a:p>
-            <a:endParaRPr lang="pt-BR" dirty="0"/>
-          </a:p>
-        </p:txBody>
-      </p:sp>
-    </p:spTree>
-    <p:extLst>
-      <p:ext uri="{BB962C8B-B14F-4D97-AF65-F5344CB8AC3E}">
-        <p14:creationId xmlns:p14="http://schemas.microsoft.com/office/powerpoint/2010/main" val="3270078570"/>
-      </p:ext>
-    </p:extLst>
-  </p:cSld>
-  <p:clrMapOvr>
-    <a:masterClrMapping/>
-  </p:clrMapOvr>
-</p:sld>
-</file>
-
-<file path=ppt/slides/slide27.xml><?xml version="1.0" encoding="utf-8"?>
-<p:sld xmlns:a="http://schemas.openxmlformats.org/drawingml/2006/main" xmlns:r="http://schemas.openxmlformats.org/officeDocument/2006/relationships" xmlns:p="http://schemas.openxmlformats.org/presentationml/2006/main">
-  <p:cSld>
-    <p:bg>
-      <p:bgPr>
-        <a:blipFill dpi="0" rotWithShape="1">
-          <a:blip r:embed="rId3">
-            <a:lum/>
-          </a:blip>
-          <a:srcRect/>
-          <a:stretch>
-            <a:fillRect/>
-          </a:stretch>
-        </a:blipFill>
-        <a:effectLst/>
-      </p:bgPr>
-    </p:bg>
-    <p:spTree>
-      <p:nvGrpSpPr>
-        <p:cNvPr id="1" name=""/>
-        <p:cNvGrpSpPr/>
-        <p:nvPr/>
-      </p:nvGrpSpPr>
-      <p:grpSpPr>
-        <a:xfrm>
-          <a:off x="0" y="0"/>
-          <a:ext cx="0" cy="0"/>
-          <a:chOff x="0" y="0"/>
-          <a:chExt cx="0" cy="0"/>
-        </a:xfrm>
-      </p:grpSpPr>
-      <p:sp>
-        <p:nvSpPr>
-          <p:cNvPr id="2" name="Título 1">
-            <a:extLst>
-              <a:ext uri="{FF2B5EF4-FFF2-40B4-BE49-F238E27FC236}">
-                <a16:creationId xmlns:a16="http://schemas.microsoft.com/office/drawing/2014/main" xmlns="" id="{5F09B89C-3183-4D52-981A-62798DDFF2B8}"/>
-              </a:ext>
-            </a:extLst>
-          </p:cNvPr>
-          <p:cNvSpPr>
-            <a:spLocks noGrp="1"/>
-          </p:cNvSpPr>
-          <p:nvPr>
-            <p:ph type="title"/>
-          </p:nvPr>
-        </p:nvSpPr>
-        <p:spPr>
-          <a:xfrm>
-            <a:off x="304800" y="183092"/>
-            <a:ext cx="6559285" cy="762000"/>
-          </a:xfrm>
-        </p:spPr>
-        <p:txBody>
-          <a:bodyPr>
-            <a:normAutofit/>
-          </a:bodyPr>
-          <a:lstStyle/>
-          <a:p>
-            <a:r>
-              <a:rPr lang="pt-BR" dirty="0"/>
-              <a:t>K-</a:t>
-            </a:r>
-            <a:r>
-              <a:rPr lang="pt-BR" dirty="0" err="1"/>
-              <a:t>means</a:t>
-            </a:r>
-            <a:endParaRPr lang="pt-BR" dirty="0"/>
-          </a:p>
-        </p:txBody>
-      </p:sp>
-      <p:sp>
-        <p:nvSpPr>
-          <p:cNvPr id="3" name="AutoShape 2" descr="An example of graph signal reconstruction over wireless sensor network. |  Download Scientific Diagram">
-            <a:extLst>
-              <a:ext uri="{FF2B5EF4-FFF2-40B4-BE49-F238E27FC236}">
-                <a16:creationId xmlns:a16="http://schemas.microsoft.com/office/drawing/2014/main" xmlns="" id="{0166B4DD-D72A-4A54-94A7-2C38133837FD}"/>
-              </a:ext>
-            </a:extLst>
-          </p:cNvPr>
-          <p:cNvSpPr>
-            <a:spLocks noChangeAspect="1" noChangeArrowheads="1"/>
-          </p:cNvSpPr>
-          <p:nvPr/>
-        </p:nvSpPr>
-        <p:spPr bwMode="auto">
-          <a:xfrm>
-            <a:off x="5994400" y="3327400"/>
-            <a:ext cx="203200" cy="203200"/>
-          </a:xfrm>
-          <a:prstGeom prst="rect">
-            <a:avLst/>
-          </a:prstGeom>
-          <a:noFill/>
-          <a:extLst>
-            <a:ext uri="{909E8E84-426E-40DD-AFC4-6F175D3DCCD1}">
-              <a14:hiddenFill xmlns:a14="http://schemas.microsoft.com/office/drawing/2010/main">
-                <a:solidFill>
-                  <a:srgbClr val="FFFFFF"/>
-                </a:solidFill>
-              </a14:hiddenFill>
-            </a:ext>
-          </a:extLst>
-        </p:spPr>
-        <p:txBody>
-          <a:bodyPr vert="horz" wrap="square" lIns="60960" tIns="30480" rIns="60960" bIns="30480" numCol="1" anchor="t" anchorCtr="0" compatLnSpc="1">
-            <a:prstTxWarp prst="textNoShape">
-              <a:avLst/>
-            </a:prstTxWarp>
-          </a:bodyPr>
-          <a:lstStyle/>
-          <a:p>
-            <a:pPr defTabSz="609630"/>
-            <a:endParaRPr lang="pt-BR" sz="1200">
-              <a:solidFill>
-                <a:prstClr val="black"/>
-              </a:solidFill>
-              <a:latin typeface="Calibri"/>
-            </a:endParaRPr>
-          </a:p>
-        </p:txBody>
-      </p:sp>
-      <p:sp>
-        <p:nvSpPr>
-          <p:cNvPr id="7" name="AutoShape 4" descr="An example of graph signal reconstruction over wireless sensor network. |  Download Scientific Diagram">
-            <a:extLst>
-              <a:ext uri="{FF2B5EF4-FFF2-40B4-BE49-F238E27FC236}">
-                <a16:creationId xmlns:a16="http://schemas.microsoft.com/office/drawing/2014/main" xmlns="" id="{14C2B67D-81A1-457E-A410-FE4350A3CCA4}"/>
-              </a:ext>
-            </a:extLst>
-          </p:cNvPr>
-          <p:cNvSpPr>
-            <a:spLocks noChangeAspect="1" noChangeArrowheads="1"/>
-          </p:cNvSpPr>
-          <p:nvPr/>
-        </p:nvSpPr>
-        <p:spPr bwMode="auto">
-          <a:xfrm>
-            <a:off x="6096000" y="3429000"/>
-            <a:ext cx="203200" cy="203200"/>
-          </a:xfrm>
-          <a:prstGeom prst="rect">
-            <a:avLst/>
-          </a:prstGeom>
-          <a:noFill/>
-          <a:extLst>
-            <a:ext uri="{909E8E84-426E-40DD-AFC4-6F175D3DCCD1}">
-              <a14:hiddenFill xmlns:a14="http://schemas.microsoft.com/office/drawing/2010/main">
-                <a:solidFill>
-                  <a:srgbClr val="FFFFFF"/>
-                </a:solidFill>
-              </a14:hiddenFill>
-            </a:ext>
-          </a:extLst>
-        </p:spPr>
-        <p:txBody>
-          <a:bodyPr vert="horz" wrap="square" lIns="60960" tIns="30480" rIns="60960" bIns="30480" numCol="1" anchor="t" anchorCtr="0" compatLnSpc="1">
-            <a:prstTxWarp prst="textNoShape">
-              <a:avLst/>
-            </a:prstTxWarp>
-          </a:bodyPr>
-          <a:lstStyle/>
-          <a:p>
-            <a:pPr defTabSz="609630"/>
-            <a:endParaRPr lang="pt-BR" sz="1200">
-              <a:solidFill>
-                <a:prstClr val="black"/>
-              </a:solidFill>
-              <a:latin typeface="Calibri"/>
-            </a:endParaRPr>
-          </a:p>
-        </p:txBody>
-      </p:sp>
-      <p:sp>
-        <p:nvSpPr>
-          <p:cNvPr id="4" name="Espaço Reservado para Conteúdo 3">
-            <a:extLst>
-              <a:ext uri="{FF2B5EF4-FFF2-40B4-BE49-F238E27FC236}">
-                <a16:creationId xmlns:a16="http://schemas.microsoft.com/office/drawing/2014/main" xmlns="" id="{5F1B432F-F570-AEC0-CFFF-C1D9196D7234}"/>
-              </a:ext>
-            </a:extLst>
-          </p:cNvPr>
-          <p:cNvSpPr>
-            <a:spLocks noGrp="1"/>
-          </p:cNvSpPr>
-          <p:nvPr>
-            <p:ph idx="1"/>
-          </p:nvPr>
-        </p:nvSpPr>
-        <p:spPr>
-          <a:xfrm>
-            <a:off x="304800" y="1066801"/>
-            <a:ext cx="9810044" cy="2737556"/>
-          </a:xfrm>
-        </p:spPr>
-        <p:txBody>
-          <a:bodyPr>
-            <a:normAutofit/>
-          </a:bodyPr>
-          <a:lstStyle/>
-          <a:p>
-            <a:pPr marL="0" indent="0">
-              <a:buNone/>
-            </a:pPr>
-            <a:endParaRPr lang="pt-BR" dirty="0"/>
-          </a:p>
-          <a:p>
-            <a:pPr marL="0" indent="0">
-              <a:buNone/>
-            </a:pPr>
-            <a:endParaRPr lang="pt-BR" dirty="0"/>
-          </a:p>
-        </p:txBody>
-      </p:sp>
-      <p:sp>
-        <p:nvSpPr>
-          <p:cNvPr id="6" name="CaixaDeTexto 5">
-            <a:extLst>
-              <a:ext uri="{FF2B5EF4-FFF2-40B4-BE49-F238E27FC236}">
-                <a16:creationId xmlns:a16="http://schemas.microsoft.com/office/drawing/2014/main" xmlns="" id="{470482DB-F365-0A83-E102-37A8EB7EACEF}"/>
-              </a:ext>
-            </a:extLst>
-          </p:cNvPr>
-          <p:cNvSpPr txBox="1"/>
-          <p:nvPr/>
-        </p:nvSpPr>
-        <p:spPr>
-          <a:xfrm>
-            <a:off x="846667" y="988201"/>
-            <a:ext cx="8229599" cy="5355312"/>
-          </a:xfrm>
-          <a:prstGeom prst="rect">
-            <a:avLst/>
-          </a:prstGeom>
-          <a:noFill/>
-        </p:spPr>
-        <p:txBody>
-          <a:bodyPr wrap="square">
-            <a:spAutoFit/>
-          </a:bodyPr>
-          <a:lstStyle/>
-          <a:p>
-            <a:r>
-              <a:rPr lang="pt-BR" dirty="0"/>
-              <a:t>Dados de meios de transporte:</a:t>
-            </a:r>
-          </a:p>
-          <a:p>
-            <a:endParaRPr lang="pt-BR" dirty="0"/>
-          </a:p>
-          <a:p>
-            <a:pPr marL="285750" indent="-285750">
-              <a:buFont typeface="Arial" panose="020B0604020202020204" pitchFamily="34" charset="0"/>
-              <a:buChar char="•"/>
-            </a:pPr>
-            <a:r>
-              <a:rPr lang="pt-BR" dirty="0"/>
-              <a:t>Custo de frete;</a:t>
-            </a:r>
-          </a:p>
-          <a:p>
-            <a:pPr marL="285750" indent="-285750">
-              <a:buFont typeface="Arial" panose="020B0604020202020204" pitchFamily="34" charset="0"/>
-              <a:buChar char="•"/>
-            </a:pPr>
-            <a:r>
-              <a:rPr lang="pt-BR" dirty="0"/>
-              <a:t>Quantidade de empresas transportadoras;</a:t>
-            </a:r>
-          </a:p>
-          <a:p>
-            <a:pPr marL="285750" indent="-285750">
-              <a:buFont typeface="Arial" panose="020B0604020202020204" pitchFamily="34" charset="0"/>
-              <a:buChar char="•"/>
-            </a:pPr>
-            <a:r>
-              <a:rPr lang="pt-BR" dirty="0"/>
-              <a:t>Índice de sinistros (roubos de carga e acidentes).</a:t>
-            </a:r>
-          </a:p>
-          <a:p>
-            <a:endParaRPr lang="pt-BR" dirty="0"/>
-          </a:p>
-          <a:p>
-            <a:endParaRPr lang="pt-BR" dirty="0"/>
-          </a:p>
-          <a:p>
-            <a:endParaRPr lang="pt-BR" dirty="0"/>
-          </a:p>
-          <a:p>
-            <a:endParaRPr lang="pt-BR" dirty="0"/>
-          </a:p>
-          <a:p>
-            <a:endParaRPr lang="pt-BR" dirty="0"/>
-          </a:p>
-          <a:p>
-            <a:endParaRPr lang="pt-BR" dirty="0"/>
-          </a:p>
-          <a:p>
-            <a:endParaRPr lang="pt-BR" dirty="0"/>
-          </a:p>
-          <a:p>
-            <a:endParaRPr lang="pt-BR" dirty="0"/>
-          </a:p>
-          <a:p>
-            <a:endParaRPr lang="pt-BR" dirty="0"/>
-          </a:p>
-          <a:p>
-            <a:endParaRPr lang="pt-BR" dirty="0"/>
-          </a:p>
-          <a:p>
-            <a:endParaRPr lang="pt-BR" dirty="0"/>
-          </a:p>
-          <a:p>
-            <a:endParaRPr lang="pt-BR" dirty="0"/>
-          </a:p>
-          <a:p>
-            <a:endParaRPr lang="pt-BR" dirty="0"/>
-          </a:p>
-          <a:p>
-            <a:endParaRPr lang="pt-BR" dirty="0"/>
-          </a:p>
-        </p:txBody>
-      </p:sp>
-    </p:spTree>
-    <p:extLst>
-      <p:ext uri="{BB962C8B-B14F-4D97-AF65-F5344CB8AC3E}">
-        <p14:creationId xmlns:p14="http://schemas.microsoft.com/office/powerpoint/2010/main" val="3472512686"/>
-      </p:ext>
-    </p:extLst>
-  </p:cSld>
-  <p:clrMapOvr>
-    <a:masterClrMapping/>
-  </p:clrMapOvr>
-</p:sld>
-</file>
-
-<file path=ppt/slides/slide28.xml><?xml version="1.0" encoding="utf-8"?>
-<p:sld xmlns:a="http://schemas.openxmlformats.org/drawingml/2006/main" xmlns:r="http://schemas.openxmlformats.org/officeDocument/2006/relationships" xmlns:p="http://schemas.openxmlformats.org/presentationml/2006/main">
-  <p:cSld>
-    <p:bg>
-      <p:bgPr>
-        <a:blipFill dpi="0" rotWithShape="1">
-          <a:blip r:embed="rId3">
-            <a:lum/>
-          </a:blip>
-          <a:srcRect/>
-          <a:stretch>
-            <a:fillRect/>
-          </a:stretch>
-        </a:blipFill>
-        <a:effectLst/>
-      </p:bgPr>
-    </p:bg>
-    <p:spTree>
-      <p:nvGrpSpPr>
-        <p:cNvPr id="1" name=""/>
-        <p:cNvGrpSpPr/>
-        <p:nvPr/>
-      </p:nvGrpSpPr>
-      <p:grpSpPr>
-        <a:xfrm>
-          <a:off x="0" y="0"/>
-          <a:ext cx="0" cy="0"/>
-          <a:chOff x="0" y="0"/>
-          <a:chExt cx="0" cy="0"/>
-        </a:xfrm>
-      </p:grpSpPr>
-      <p:sp>
-        <p:nvSpPr>
-          <p:cNvPr id="2" name="Título 1">
-            <a:extLst>
-              <a:ext uri="{FF2B5EF4-FFF2-40B4-BE49-F238E27FC236}">
-                <a16:creationId xmlns:a16="http://schemas.microsoft.com/office/drawing/2014/main" xmlns="" id="{5F09B89C-3183-4D52-981A-62798DDFF2B8}"/>
-              </a:ext>
-            </a:extLst>
-          </p:cNvPr>
-          <p:cNvSpPr>
-            <a:spLocks noGrp="1"/>
-          </p:cNvSpPr>
-          <p:nvPr>
-            <p:ph type="title"/>
-          </p:nvPr>
-        </p:nvSpPr>
-        <p:spPr>
-          <a:xfrm>
-            <a:off x="304800" y="183092"/>
-            <a:ext cx="6559285" cy="762000"/>
-          </a:xfrm>
-        </p:spPr>
-        <p:txBody>
-          <a:bodyPr>
-            <a:normAutofit/>
-          </a:bodyPr>
-          <a:lstStyle/>
-          <a:p>
-            <a:r>
-              <a:rPr lang="pt-BR" dirty="0"/>
-              <a:t>K-</a:t>
-            </a:r>
-            <a:r>
-              <a:rPr lang="pt-BR" dirty="0" err="1"/>
-              <a:t>means</a:t>
-            </a:r>
-            <a:endParaRPr lang="pt-BR" dirty="0"/>
-          </a:p>
-        </p:txBody>
-      </p:sp>
-      <p:sp>
-        <p:nvSpPr>
-          <p:cNvPr id="3" name="AutoShape 2" descr="An example of graph signal reconstruction over wireless sensor network. |  Download Scientific Diagram">
-            <a:extLst>
-              <a:ext uri="{FF2B5EF4-FFF2-40B4-BE49-F238E27FC236}">
-                <a16:creationId xmlns:a16="http://schemas.microsoft.com/office/drawing/2014/main" xmlns="" id="{0166B4DD-D72A-4A54-94A7-2C38133837FD}"/>
-              </a:ext>
-            </a:extLst>
-          </p:cNvPr>
-          <p:cNvSpPr>
-            <a:spLocks noChangeAspect="1" noChangeArrowheads="1"/>
-          </p:cNvSpPr>
-          <p:nvPr/>
-        </p:nvSpPr>
-        <p:spPr bwMode="auto">
-          <a:xfrm>
-            <a:off x="5994400" y="3327400"/>
-            <a:ext cx="203200" cy="203200"/>
-          </a:xfrm>
-          <a:prstGeom prst="rect">
-            <a:avLst/>
-          </a:prstGeom>
-          <a:noFill/>
-          <a:extLst>
-            <a:ext uri="{909E8E84-426E-40DD-AFC4-6F175D3DCCD1}">
-              <a14:hiddenFill xmlns:a14="http://schemas.microsoft.com/office/drawing/2010/main">
-                <a:solidFill>
-                  <a:srgbClr val="FFFFFF"/>
-                </a:solidFill>
-              </a14:hiddenFill>
-            </a:ext>
-          </a:extLst>
-        </p:spPr>
-        <p:txBody>
-          <a:bodyPr vert="horz" wrap="square" lIns="60960" tIns="30480" rIns="60960" bIns="30480" numCol="1" anchor="t" anchorCtr="0" compatLnSpc="1">
-            <a:prstTxWarp prst="textNoShape">
-              <a:avLst/>
-            </a:prstTxWarp>
-          </a:bodyPr>
-          <a:lstStyle/>
-          <a:p>
-            <a:pPr defTabSz="609630"/>
-            <a:endParaRPr lang="pt-BR" sz="1200">
-              <a:solidFill>
-                <a:prstClr val="black"/>
-              </a:solidFill>
-              <a:latin typeface="Calibri"/>
-            </a:endParaRPr>
-          </a:p>
-        </p:txBody>
-      </p:sp>
-      <p:sp>
-        <p:nvSpPr>
-          <p:cNvPr id="7" name="AutoShape 4" descr="An example of graph signal reconstruction over wireless sensor network. |  Download Scientific Diagram">
-            <a:extLst>
-              <a:ext uri="{FF2B5EF4-FFF2-40B4-BE49-F238E27FC236}">
-                <a16:creationId xmlns:a16="http://schemas.microsoft.com/office/drawing/2014/main" xmlns="" id="{14C2B67D-81A1-457E-A410-FE4350A3CCA4}"/>
-              </a:ext>
-            </a:extLst>
-          </p:cNvPr>
-          <p:cNvSpPr>
-            <a:spLocks noChangeAspect="1" noChangeArrowheads="1"/>
-          </p:cNvSpPr>
-          <p:nvPr/>
-        </p:nvSpPr>
-        <p:spPr bwMode="auto">
-          <a:xfrm>
-            <a:off x="6096000" y="3429000"/>
-            <a:ext cx="203200" cy="203200"/>
-          </a:xfrm>
-          <a:prstGeom prst="rect">
-            <a:avLst/>
-          </a:prstGeom>
-          <a:noFill/>
-          <a:extLst>
-            <a:ext uri="{909E8E84-426E-40DD-AFC4-6F175D3DCCD1}">
-              <a14:hiddenFill xmlns:a14="http://schemas.microsoft.com/office/drawing/2010/main">
-                <a:solidFill>
-                  <a:srgbClr val="FFFFFF"/>
-                </a:solidFill>
-              </a14:hiddenFill>
-            </a:ext>
-          </a:extLst>
-        </p:spPr>
-        <p:txBody>
-          <a:bodyPr vert="horz" wrap="square" lIns="60960" tIns="30480" rIns="60960" bIns="30480" numCol="1" anchor="t" anchorCtr="0" compatLnSpc="1">
-            <a:prstTxWarp prst="textNoShape">
-              <a:avLst/>
-            </a:prstTxWarp>
-          </a:bodyPr>
-          <a:lstStyle/>
-          <a:p>
-            <a:pPr defTabSz="609630"/>
-            <a:endParaRPr lang="pt-BR" sz="1200">
-              <a:solidFill>
-                <a:prstClr val="black"/>
-              </a:solidFill>
-              <a:latin typeface="Calibri"/>
-            </a:endParaRPr>
-          </a:p>
-        </p:txBody>
-      </p:sp>
-      <p:sp>
-        <p:nvSpPr>
-          <p:cNvPr id="4" name="Espaço Reservado para Conteúdo 3">
-            <a:extLst>
-              <a:ext uri="{FF2B5EF4-FFF2-40B4-BE49-F238E27FC236}">
-                <a16:creationId xmlns:a16="http://schemas.microsoft.com/office/drawing/2014/main" xmlns="" id="{5F1B432F-F570-AEC0-CFFF-C1D9196D7234}"/>
-              </a:ext>
-            </a:extLst>
-          </p:cNvPr>
-          <p:cNvSpPr>
-            <a:spLocks noGrp="1"/>
-          </p:cNvSpPr>
-          <p:nvPr>
-            <p:ph idx="1"/>
-          </p:nvPr>
-        </p:nvSpPr>
-        <p:spPr>
-          <a:xfrm>
-            <a:off x="304800" y="1066801"/>
-            <a:ext cx="9810044" cy="2737556"/>
-          </a:xfrm>
-        </p:spPr>
-        <p:txBody>
-          <a:bodyPr>
-            <a:normAutofit/>
-          </a:bodyPr>
-          <a:lstStyle/>
-          <a:p>
-            <a:pPr marL="0" indent="0">
-              <a:buNone/>
-            </a:pPr>
-            <a:endParaRPr lang="pt-BR" dirty="0"/>
-          </a:p>
-          <a:p>
-            <a:pPr marL="0" indent="0">
-              <a:buNone/>
-            </a:pPr>
-            <a:endParaRPr lang="pt-BR" dirty="0"/>
-          </a:p>
-        </p:txBody>
-      </p:sp>
-      <p:sp>
-        <p:nvSpPr>
-          <p:cNvPr id="6" name="CaixaDeTexto 5">
-            <a:extLst>
-              <a:ext uri="{FF2B5EF4-FFF2-40B4-BE49-F238E27FC236}">
-                <a16:creationId xmlns:a16="http://schemas.microsoft.com/office/drawing/2014/main" xmlns="" id="{470482DB-F365-0A83-E102-37A8EB7EACEF}"/>
-              </a:ext>
-            </a:extLst>
-          </p:cNvPr>
-          <p:cNvSpPr txBox="1"/>
-          <p:nvPr/>
-        </p:nvSpPr>
-        <p:spPr>
-          <a:xfrm>
-            <a:off x="846667" y="988201"/>
-            <a:ext cx="8229599" cy="6186309"/>
-          </a:xfrm>
-          <a:prstGeom prst="rect">
-            <a:avLst/>
-          </a:prstGeom>
-          <a:noFill/>
-        </p:spPr>
-        <p:txBody>
-          <a:bodyPr wrap="square">
-            <a:spAutoFit/>
-          </a:bodyPr>
-          <a:lstStyle/>
-          <a:p>
-            <a:r>
-              <a:rPr lang="pt-BR" dirty="0"/>
-              <a:t>Dados de meios de transporte:</a:t>
-            </a:r>
-          </a:p>
-          <a:p>
-            <a:endParaRPr lang="pt-BR" dirty="0"/>
-          </a:p>
-          <a:p>
-            <a:pPr algn="l">
-              <a:buFont typeface="Arial" panose="020B0604020202020204" pitchFamily="34" charset="0"/>
-              <a:buChar char="•"/>
-            </a:pPr>
-            <a:r>
-              <a:rPr lang="pt-BR" b="0" i="0" dirty="0">
-                <a:solidFill>
-                  <a:srgbClr val="242424"/>
-                </a:solidFill>
-                <a:effectLst/>
-                <a:latin typeface="sohne"/>
-              </a:rPr>
-              <a:t>Oferta e custo de mão de obra;</a:t>
-            </a:r>
-          </a:p>
-          <a:p>
-            <a:pPr algn="l">
-              <a:buFont typeface="Arial" panose="020B0604020202020204" pitchFamily="34" charset="0"/>
-              <a:buChar char="•"/>
-            </a:pPr>
-            <a:r>
-              <a:rPr lang="pt-BR" b="0" i="0" dirty="0">
-                <a:solidFill>
-                  <a:srgbClr val="242424"/>
-                </a:solidFill>
-                <a:effectLst/>
-                <a:latin typeface="sohne"/>
-              </a:rPr>
-              <a:t>Oferta e custo de mão de obra “qualificada” (técnicos, engenheiros, gerentes, executivos);</a:t>
-            </a:r>
-          </a:p>
-          <a:p>
-            <a:pPr algn="l">
-              <a:buFont typeface="Arial" panose="020B0604020202020204" pitchFamily="34" charset="0"/>
-              <a:buChar char="•"/>
-            </a:pPr>
-            <a:r>
-              <a:rPr lang="pt-BR" b="0" i="0" dirty="0">
-                <a:solidFill>
-                  <a:srgbClr val="242424"/>
-                </a:solidFill>
-                <a:effectLst/>
-                <a:latin typeface="sohne"/>
-              </a:rPr>
-              <a:t>Tributos municipais e estaduais;</a:t>
-            </a:r>
-          </a:p>
-          <a:p>
-            <a:pPr algn="l">
-              <a:buFont typeface="Arial" panose="020B0604020202020204" pitchFamily="34" charset="0"/>
-              <a:buChar char="•"/>
-            </a:pPr>
-            <a:r>
-              <a:rPr lang="pt-BR" b="0" i="0" dirty="0">
-                <a:solidFill>
-                  <a:srgbClr val="242424"/>
-                </a:solidFill>
-                <a:effectLst/>
-                <a:latin typeface="sohne"/>
-              </a:rPr>
-              <a:t>Localização dos fornecedores</a:t>
-            </a:r>
-          </a:p>
-          <a:p>
-            <a:pPr algn="l">
-              <a:buFont typeface="Arial" panose="020B0604020202020204" pitchFamily="34" charset="0"/>
-              <a:buChar char="•"/>
-            </a:pPr>
-            <a:r>
-              <a:rPr lang="pt-BR" b="0" i="0" dirty="0">
-                <a:solidFill>
-                  <a:srgbClr val="242424"/>
-                </a:solidFill>
-                <a:effectLst/>
-                <a:latin typeface="sohne"/>
-              </a:rPr>
-              <a:t>Preços de aluguel de galpões</a:t>
-            </a:r>
-          </a:p>
-          <a:p>
-            <a:endParaRPr lang="pt-BR" dirty="0"/>
-          </a:p>
-          <a:p>
-            <a:endParaRPr lang="pt-BR" dirty="0"/>
-          </a:p>
-          <a:p>
-            <a:endParaRPr lang="pt-BR" dirty="0"/>
-          </a:p>
-          <a:p>
-            <a:endParaRPr lang="pt-BR" dirty="0"/>
-          </a:p>
-          <a:p>
-            <a:endParaRPr lang="pt-BR" dirty="0"/>
-          </a:p>
-          <a:p>
-            <a:endParaRPr lang="pt-BR" dirty="0"/>
-          </a:p>
-          <a:p>
-            <a:endParaRPr lang="pt-BR" dirty="0"/>
-          </a:p>
-          <a:p>
-            <a:endParaRPr lang="pt-BR" dirty="0"/>
-          </a:p>
-          <a:p>
-            <a:endParaRPr lang="pt-BR" dirty="0"/>
-          </a:p>
-          <a:p>
-            <a:endParaRPr lang="pt-BR" dirty="0"/>
-          </a:p>
-          <a:p>
-            <a:endParaRPr lang="pt-BR" dirty="0"/>
-          </a:p>
-          <a:p>
-            <a:endParaRPr lang="pt-BR" dirty="0"/>
-          </a:p>
-          <a:p>
-            <a:endParaRPr lang="pt-BR" dirty="0"/>
-          </a:p>
-          <a:p>
-            <a:endParaRPr lang="pt-BR" dirty="0"/>
-          </a:p>
-        </p:txBody>
-      </p:sp>
-    </p:spTree>
-    <p:extLst>
-      <p:ext uri="{BB962C8B-B14F-4D97-AF65-F5344CB8AC3E}">
-        <p14:creationId xmlns:p14="http://schemas.microsoft.com/office/powerpoint/2010/main" val="2181483219"/>
-      </p:ext>
-    </p:extLst>
-  </p:cSld>
-  <p:clrMapOvr>
-    <a:masterClrMapping/>
-  </p:clrMapOvr>
-</p:sld>
-</file>
-
-<file path=ppt/slides/slide29.xml><?xml version="1.0" encoding="utf-8"?>
-<p:sld xmlns:a="http://schemas.openxmlformats.org/drawingml/2006/main" xmlns:r="http://schemas.openxmlformats.org/officeDocument/2006/relationships" xmlns:p="http://schemas.openxmlformats.org/presentationml/2006/main">
-  <p:cSld>
-    <p:bg>
-      <p:bgPr>
-        <a:blipFill dpi="0" rotWithShape="1">
-          <a:blip r:embed="rId3">
-            <a:lum/>
-          </a:blip>
-          <a:srcRect/>
-          <a:stretch>
-            <a:fillRect/>
-          </a:stretch>
-        </a:blipFill>
-        <a:effectLst/>
-      </p:bgPr>
-    </p:bg>
-    <p:spTree>
-      <p:nvGrpSpPr>
-        <p:cNvPr id="1" name=""/>
-        <p:cNvGrpSpPr/>
-        <p:nvPr/>
-      </p:nvGrpSpPr>
-      <p:grpSpPr>
-        <a:xfrm>
-          <a:off x="0" y="0"/>
-          <a:ext cx="0" cy="0"/>
-          <a:chOff x="0" y="0"/>
-          <a:chExt cx="0" cy="0"/>
-        </a:xfrm>
-      </p:grpSpPr>
-      <p:sp>
-        <p:nvSpPr>
-          <p:cNvPr id="2" name="Título 1">
-            <a:extLst>
-              <a:ext uri="{FF2B5EF4-FFF2-40B4-BE49-F238E27FC236}">
-                <a16:creationId xmlns:a16="http://schemas.microsoft.com/office/drawing/2014/main" xmlns="" id="{5F09B89C-3183-4D52-981A-62798DDFF2B8}"/>
-              </a:ext>
-            </a:extLst>
-          </p:cNvPr>
-          <p:cNvSpPr>
-            <a:spLocks noGrp="1"/>
-          </p:cNvSpPr>
-          <p:nvPr>
-            <p:ph type="title"/>
-          </p:nvPr>
-        </p:nvSpPr>
-        <p:spPr>
-          <a:xfrm>
-            <a:off x="304800" y="183092"/>
-            <a:ext cx="6559285" cy="762000"/>
-          </a:xfrm>
-        </p:spPr>
-        <p:txBody>
-          <a:bodyPr>
-            <a:normAutofit/>
-          </a:bodyPr>
-          <a:lstStyle/>
-          <a:p>
-            <a:r>
-              <a:rPr lang="pt-BR" dirty="0"/>
-              <a:t>K-</a:t>
-            </a:r>
-            <a:r>
-              <a:rPr lang="pt-BR" dirty="0" err="1"/>
-              <a:t>means</a:t>
-            </a:r>
-            <a:endParaRPr lang="pt-BR" dirty="0"/>
-          </a:p>
-        </p:txBody>
-      </p:sp>
-      <p:sp>
-        <p:nvSpPr>
-          <p:cNvPr id="3" name="AutoShape 2" descr="An example of graph signal reconstruction over wireless sensor network. |  Download Scientific Diagram">
-            <a:extLst>
-              <a:ext uri="{FF2B5EF4-FFF2-40B4-BE49-F238E27FC236}">
-                <a16:creationId xmlns:a16="http://schemas.microsoft.com/office/drawing/2014/main" xmlns="" id="{0166B4DD-D72A-4A54-94A7-2C38133837FD}"/>
-              </a:ext>
-            </a:extLst>
-          </p:cNvPr>
-          <p:cNvSpPr>
-            <a:spLocks noChangeAspect="1" noChangeArrowheads="1"/>
-          </p:cNvSpPr>
-          <p:nvPr/>
-        </p:nvSpPr>
-        <p:spPr bwMode="auto">
-          <a:xfrm>
-            <a:off x="5994400" y="3327400"/>
-            <a:ext cx="203200" cy="203200"/>
-          </a:xfrm>
-          <a:prstGeom prst="rect">
-            <a:avLst/>
-          </a:prstGeom>
-          <a:noFill/>
-          <a:extLst>
-            <a:ext uri="{909E8E84-426E-40DD-AFC4-6F175D3DCCD1}">
-              <a14:hiddenFill xmlns:a14="http://schemas.microsoft.com/office/drawing/2010/main">
-                <a:solidFill>
-                  <a:srgbClr val="FFFFFF"/>
-                </a:solidFill>
-              </a14:hiddenFill>
-            </a:ext>
-          </a:extLst>
-        </p:spPr>
-        <p:txBody>
-          <a:bodyPr vert="horz" wrap="square" lIns="60960" tIns="30480" rIns="60960" bIns="30480" numCol="1" anchor="t" anchorCtr="0" compatLnSpc="1">
-            <a:prstTxWarp prst="textNoShape">
-              <a:avLst/>
-            </a:prstTxWarp>
-          </a:bodyPr>
-          <a:lstStyle/>
-          <a:p>
-            <a:pPr defTabSz="609630"/>
-            <a:endParaRPr lang="pt-BR" sz="1200">
-              <a:solidFill>
-                <a:prstClr val="black"/>
-              </a:solidFill>
-              <a:latin typeface="Calibri"/>
-            </a:endParaRPr>
-          </a:p>
-        </p:txBody>
-      </p:sp>
-      <p:sp>
-        <p:nvSpPr>
-          <p:cNvPr id="7" name="AutoShape 4" descr="An example of graph signal reconstruction over wireless sensor network. |  Download Scientific Diagram">
-            <a:extLst>
-              <a:ext uri="{FF2B5EF4-FFF2-40B4-BE49-F238E27FC236}">
-                <a16:creationId xmlns:a16="http://schemas.microsoft.com/office/drawing/2014/main" xmlns="" id="{14C2B67D-81A1-457E-A410-FE4350A3CCA4}"/>
-              </a:ext>
-            </a:extLst>
-          </p:cNvPr>
-          <p:cNvSpPr>
-            <a:spLocks noChangeAspect="1" noChangeArrowheads="1"/>
-          </p:cNvSpPr>
-          <p:nvPr/>
-        </p:nvSpPr>
-        <p:spPr bwMode="auto">
-          <a:xfrm>
-            <a:off x="6096000" y="3429000"/>
-            <a:ext cx="203200" cy="203200"/>
-          </a:xfrm>
-          <a:prstGeom prst="rect">
-            <a:avLst/>
-          </a:prstGeom>
-          <a:noFill/>
-          <a:extLst>
-            <a:ext uri="{909E8E84-426E-40DD-AFC4-6F175D3DCCD1}">
-              <a14:hiddenFill xmlns:a14="http://schemas.microsoft.com/office/drawing/2010/main">
-                <a:solidFill>
-                  <a:srgbClr val="FFFFFF"/>
-                </a:solidFill>
-              </a14:hiddenFill>
-            </a:ext>
-          </a:extLst>
-        </p:spPr>
-        <p:txBody>
-          <a:bodyPr vert="horz" wrap="square" lIns="60960" tIns="30480" rIns="60960" bIns="30480" numCol="1" anchor="t" anchorCtr="0" compatLnSpc="1">
-            <a:prstTxWarp prst="textNoShape">
-              <a:avLst/>
-            </a:prstTxWarp>
-          </a:bodyPr>
-          <a:lstStyle/>
-          <a:p>
-            <a:pPr defTabSz="609630"/>
-            <a:endParaRPr lang="pt-BR" sz="1200">
-              <a:solidFill>
-                <a:prstClr val="black"/>
-              </a:solidFill>
-              <a:latin typeface="Calibri"/>
-            </a:endParaRPr>
-          </a:p>
-        </p:txBody>
-      </p:sp>
-      <p:sp>
-        <p:nvSpPr>
-          <p:cNvPr id="4" name="Espaço Reservado para Conteúdo 3">
-            <a:extLst>
-              <a:ext uri="{FF2B5EF4-FFF2-40B4-BE49-F238E27FC236}">
-                <a16:creationId xmlns:a16="http://schemas.microsoft.com/office/drawing/2014/main" xmlns="" id="{5F1B432F-F570-AEC0-CFFF-C1D9196D7234}"/>
-              </a:ext>
-            </a:extLst>
-          </p:cNvPr>
-          <p:cNvSpPr>
-            <a:spLocks noGrp="1"/>
-          </p:cNvSpPr>
-          <p:nvPr>
-            <p:ph idx="1"/>
-          </p:nvPr>
-        </p:nvSpPr>
-        <p:spPr>
-          <a:xfrm>
-            <a:off x="304800" y="1066801"/>
-            <a:ext cx="9810044" cy="2737556"/>
-          </a:xfrm>
-        </p:spPr>
-        <p:txBody>
-          <a:bodyPr>
-            <a:normAutofit/>
-          </a:bodyPr>
-          <a:lstStyle/>
-          <a:p>
-            <a:pPr marL="0" indent="0">
-              <a:buNone/>
-            </a:pPr>
-            <a:endParaRPr lang="pt-BR" dirty="0"/>
-          </a:p>
-          <a:p>
-            <a:pPr marL="0" indent="0">
-              <a:buNone/>
-            </a:pPr>
-            <a:endParaRPr lang="pt-BR" dirty="0"/>
-          </a:p>
-        </p:txBody>
-      </p:sp>
-      <p:sp>
-        <p:nvSpPr>
-          <p:cNvPr id="6" name="CaixaDeTexto 5">
-            <a:extLst>
-              <a:ext uri="{FF2B5EF4-FFF2-40B4-BE49-F238E27FC236}">
-                <a16:creationId xmlns:a16="http://schemas.microsoft.com/office/drawing/2014/main" xmlns="" id="{470482DB-F365-0A83-E102-37A8EB7EACEF}"/>
-              </a:ext>
-            </a:extLst>
-          </p:cNvPr>
-          <p:cNvSpPr txBox="1"/>
-          <p:nvPr/>
-        </p:nvSpPr>
-        <p:spPr>
-          <a:xfrm>
-            <a:off x="846667" y="988201"/>
-            <a:ext cx="8229599" cy="4524315"/>
-          </a:xfrm>
-          <a:prstGeom prst="rect">
-            <a:avLst/>
-          </a:prstGeom>
-          <a:noFill/>
-        </p:spPr>
-        <p:txBody>
-          <a:bodyPr wrap="square">
-            <a:spAutoFit/>
-          </a:bodyPr>
-          <a:lstStyle/>
-          <a:p>
-            <a:r>
-              <a:rPr lang="pt-BR" dirty="0"/>
-              <a:t>Como escolher o K ótimo?</a:t>
-            </a:r>
-          </a:p>
-          <a:p>
-            <a:endParaRPr lang="pt-BR" dirty="0"/>
-          </a:p>
-          <a:p>
-            <a:endParaRPr lang="pt-BR" dirty="0"/>
-          </a:p>
-          <a:p>
-            <a:endParaRPr lang="pt-BR" dirty="0"/>
-          </a:p>
-          <a:p>
-            <a:endParaRPr lang="pt-BR" dirty="0"/>
-          </a:p>
-          <a:p>
-            <a:endParaRPr lang="pt-BR" dirty="0"/>
-          </a:p>
-          <a:p>
-            <a:endParaRPr lang="pt-BR" dirty="0"/>
-          </a:p>
-          <a:p>
-            <a:endParaRPr lang="pt-BR" dirty="0"/>
-          </a:p>
-          <a:p>
-            <a:endParaRPr lang="pt-BR" dirty="0"/>
-          </a:p>
-          <a:p>
-            <a:endParaRPr lang="pt-BR" dirty="0"/>
-          </a:p>
-          <a:p>
-            <a:endParaRPr lang="pt-BR" dirty="0"/>
-          </a:p>
-          <a:p>
-            <a:endParaRPr lang="pt-BR" dirty="0"/>
-          </a:p>
-          <a:p>
-            <a:endParaRPr lang="pt-BR" dirty="0"/>
-          </a:p>
-          <a:p>
-            <a:endParaRPr lang="pt-BR" dirty="0"/>
-          </a:p>
-          <a:p>
-            <a:endParaRPr lang="pt-BR" dirty="0"/>
-          </a:p>
-          <a:p>
-            <a:endParaRPr lang="pt-BR" dirty="0"/>
-          </a:p>
-        </p:txBody>
-      </p:sp>
-      <p:pic>
-        <p:nvPicPr>
-          <p:cNvPr id="2050" name="Picture 2" descr="Base Teórica do K-Means! Aprenda a Lógica desse Algoritmo Hoje!">
-            <a:extLst>
-              <a:ext uri="{FF2B5EF4-FFF2-40B4-BE49-F238E27FC236}">
-                <a16:creationId xmlns:a16="http://schemas.microsoft.com/office/drawing/2014/main" xmlns="" id="{0694ADFD-EB2E-2BF0-18BE-B07E4CD60A5F}"/>
-              </a:ext>
-            </a:extLst>
-          </p:cNvPr>
-          <p:cNvPicPr>
-            <a:picLocks noChangeAspect="1" noChangeArrowheads="1"/>
-          </p:cNvPicPr>
-          <p:nvPr/>
-        </p:nvPicPr>
-        <p:blipFill>
-          <a:blip r:embed="rId4">
-            <a:extLst>
-              <a:ext uri="{28A0092B-C50C-407E-A947-70E740481C1C}">
-                <a14:useLocalDpi xmlns:a14="http://schemas.microsoft.com/office/drawing/2010/main" val="0"/>
-              </a:ext>
-            </a:extLst>
-          </a:blip>
-          <a:srcRect/>
-          <a:stretch>
-            <a:fillRect/>
-          </a:stretch>
-        </p:blipFill>
-        <p:spPr bwMode="auto">
-          <a:xfrm>
-            <a:off x="1526381" y="1605398"/>
-            <a:ext cx="7549885" cy="3444004"/>
-          </a:xfrm>
-          <a:prstGeom prst="rect">
-            <a:avLst/>
-          </a:prstGeom>
-          <a:noFill/>
-          <a:extLst>
-            <a:ext uri="{909E8E84-426E-40DD-AFC4-6F175D3DCCD1}">
-              <a14:hiddenFill xmlns:a14="http://schemas.microsoft.com/office/drawing/2010/main">
-                <a:solidFill>
-                  <a:srgbClr val="FFFFFF"/>
-                </a:solidFill>
-              </a14:hiddenFill>
-            </a:ext>
-          </a:extLst>
-        </p:spPr>
-      </p:pic>
-      <p:pic>
-        <p:nvPicPr>
-          <p:cNvPr id="8" name="Imagem 7">
-            <a:extLst>
-              <a:ext uri="{FF2B5EF4-FFF2-40B4-BE49-F238E27FC236}">
-                <a16:creationId xmlns:a16="http://schemas.microsoft.com/office/drawing/2014/main" xmlns="" id="{EEF69E85-6440-34FE-5C8A-A5F37765D292}"/>
-              </a:ext>
-            </a:extLst>
-          </p:cNvPr>
-          <p:cNvPicPr>
-            <a:picLocks noChangeAspect="1"/>
-          </p:cNvPicPr>
-          <p:nvPr/>
-        </p:nvPicPr>
-        <p:blipFill>
-          <a:blip r:embed="rId5"/>
-          <a:stretch>
-            <a:fillRect/>
-          </a:stretch>
-        </p:blipFill>
-        <p:spPr>
-          <a:xfrm>
-            <a:off x="4486439" y="5536951"/>
-            <a:ext cx="2377646" cy="784928"/>
-          </a:xfrm>
-          <a:prstGeom prst="rect">
-            <a:avLst/>
-          </a:prstGeom>
-        </p:spPr>
-      </p:pic>
-    </p:spTree>
-    <p:extLst>
-      <p:ext uri="{BB962C8B-B14F-4D97-AF65-F5344CB8AC3E}">
-        <p14:creationId xmlns:p14="http://schemas.microsoft.com/office/powerpoint/2010/main" val="1144642794"/>
+        <p14:creationId xmlns:p14="http://schemas.microsoft.com/office/powerpoint/2010/main" val="3660226339"/>
       </p:ext>
     </p:extLst>
   </p:cSld>
@@ -17371,7 +15016,7 @@
           <p:cNvPr id="2" name="Título 1">
             <a:extLst>
               <a:ext uri="{FF2B5EF4-FFF2-40B4-BE49-F238E27FC236}">
-                <a16:creationId xmlns:a16="http://schemas.microsoft.com/office/drawing/2014/main" xmlns="" id="{5F09B89C-3183-4D52-981A-62798DDFF2B8}"/>
+                <a16:creationId xmlns:a16="http://schemas.microsoft.com/office/drawing/2014/main" id="{5F09B89C-3183-4D52-981A-62798DDFF2B8}"/>
               </a:ext>
             </a:extLst>
           </p:cNvPr>
@@ -17409,7 +15054,7 @@
           <p:cNvPr id="3" name="AutoShape 2" descr="An example of graph signal reconstruction over wireless sensor network. |  Download Scientific Diagram">
             <a:extLst>
               <a:ext uri="{FF2B5EF4-FFF2-40B4-BE49-F238E27FC236}">
-                <a16:creationId xmlns:a16="http://schemas.microsoft.com/office/drawing/2014/main" xmlns="" id="{0166B4DD-D72A-4A54-94A7-2C38133837FD}"/>
+                <a16:creationId xmlns:a16="http://schemas.microsoft.com/office/drawing/2014/main" id="{0166B4DD-D72A-4A54-94A7-2C38133837FD}"/>
               </a:ext>
             </a:extLst>
           </p:cNvPr>
@@ -17460,7 +15105,7 @@
           <p:cNvPr id="7" name="AutoShape 4" descr="An example of graph signal reconstruction over wireless sensor network. |  Download Scientific Diagram">
             <a:extLst>
               <a:ext uri="{FF2B5EF4-FFF2-40B4-BE49-F238E27FC236}">
-                <a16:creationId xmlns:a16="http://schemas.microsoft.com/office/drawing/2014/main" xmlns="" id="{14C2B67D-81A1-457E-A410-FE4350A3CCA4}"/>
+                <a16:creationId xmlns:a16="http://schemas.microsoft.com/office/drawing/2014/main" id="{14C2B67D-81A1-457E-A410-FE4350A3CCA4}"/>
               </a:ext>
             </a:extLst>
           </p:cNvPr>
@@ -17511,7 +15156,7 @@
           <p:cNvPr id="4" name="Espaço Reservado para Conteúdo 3">
             <a:extLst>
               <a:ext uri="{FF2B5EF4-FFF2-40B4-BE49-F238E27FC236}">
-                <a16:creationId xmlns:a16="http://schemas.microsoft.com/office/drawing/2014/main" xmlns="" id="{5F1B432F-F570-AEC0-CFFF-C1D9196D7234}"/>
+                <a16:creationId xmlns:a16="http://schemas.microsoft.com/office/drawing/2014/main" id="{5F1B432F-F570-AEC0-CFFF-C1D9196D7234}"/>
               </a:ext>
             </a:extLst>
           </p:cNvPr>
@@ -17550,7 +15195,7 @@
           <p:cNvPr id="3074" name="Picture 2" descr="Unsupervised machine learning">
             <a:extLst>
               <a:ext uri="{FF2B5EF4-FFF2-40B4-BE49-F238E27FC236}">
-                <a16:creationId xmlns:a16="http://schemas.microsoft.com/office/drawing/2014/main" xmlns="" id="{9C9BB3FA-B234-195B-6E78-1F5F1A0B5DD5}"/>
+                <a16:creationId xmlns:a16="http://schemas.microsoft.com/office/drawing/2014/main" id="{9C9BB3FA-B234-195B-6E78-1F5F1A0B5DD5}"/>
               </a:ext>
             </a:extLst>
           </p:cNvPr>
@@ -17597,7 +15242,7 @@
           <p:cNvPr id="3076" name="Picture 4" descr="Supervised machine learning">
             <a:extLst>
               <a:ext uri="{FF2B5EF4-FFF2-40B4-BE49-F238E27FC236}">
-                <a16:creationId xmlns:a16="http://schemas.microsoft.com/office/drawing/2014/main" xmlns="" id="{85D641D0-2AF2-0E0D-20E1-BE0FB83D483A}"/>
+                <a16:creationId xmlns:a16="http://schemas.microsoft.com/office/drawing/2014/main" id="{85D641D0-2AF2-0E0D-20E1-BE0FB83D483A}"/>
               </a:ext>
             </a:extLst>
           </p:cNvPr>
@@ -17643,1800 +15288,6 @@
     <p:extLst>
       <p:ext uri="{BB962C8B-B14F-4D97-AF65-F5344CB8AC3E}">
         <p14:creationId xmlns:p14="http://schemas.microsoft.com/office/powerpoint/2010/main" val="940125731"/>
-      </p:ext>
-    </p:extLst>
-  </p:cSld>
-  <p:clrMapOvr>
-    <a:masterClrMapping/>
-  </p:clrMapOvr>
-</p:sld>
-</file>
-
-<file path=ppt/slides/slide30.xml><?xml version="1.0" encoding="utf-8"?>
-<p:sld xmlns:a="http://schemas.openxmlformats.org/drawingml/2006/main" xmlns:r="http://schemas.openxmlformats.org/officeDocument/2006/relationships" xmlns:p="http://schemas.openxmlformats.org/presentationml/2006/main">
-  <p:cSld>
-    <p:bg>
-      <p:bgPr>
-        <a:blipFill dpi="0" rotWithShape="1">
-          <a:blip r:embed="rId3">
-            <a:lum/>
-          </a:blip>
-          <a:srcRect/>
-          <a:stretch>
-            <a:fillRect/>
-          </a:stretch>
-        </a:blipFill>
-        <a:effectLst/>
-      </p:bgPr>
-    </p:bg>
-    <p:spTree>
-      <p:nvGrpSpPr>
-        <p:cNvPr id="1" name=""/>
-        <p:cNvGrpSpPr/>
-        <p:nvPr/>
-      </p:nvGrpSpPr>
-      <p:grpSpPr>
-        <a:xfrm>
-          <a:off x="0" y="0"/>
-          <a:ext cx="0" cy="0"/>
-          <a:chOff x="0" y="0"/>
-          <a:chExt cx="0" cy="0"/>
-        </a:xfrm>
-      </p:grpSpPr>
-      <p:sp>
-        <p:nvSpPr>
-          <p:cNvPr id="2" name="Título 1">
-            <a:extLst>
-              <a:ext uri="{FF2B5EF4-FFF2-40B4-BE49-F238E27FC236}">
-                <a16:creationId xmlns:a16="http://schemas.microsoft.com/office/drawing/2014/main" xmlns="" id="{5F09B89C-3183-4D52-981A-62798DDFF2B8}"/>
-              </a:ext>
-            </a:extLst>
-          </p:cNvPr>
-          <p:cNvSpPr>
-            <a:spLocks noGrp="1"/>
-          </p:cNvSpPr>
-          <p:nvPr>
-            <p:ph type="title"/>
-          </p:nvPr>
-        </p:nvSpPr>
-        <p:spPr>
-          <a:xfrm>
-            <a:off x="304800" y="183092"/>
-            <a:ext cx="6559285" cy="762000"/>
-          </a:xfrm>
-        </p:spPr>
-        <p:txBody>
-          <a:bodyPr>
-            <a:normAutofit/>
-          </a:bodyPr>
-          <a:lstStyle/>
-          <a:p>
-            <a:r>
-              <a:rPr lang="pt-BR" dirty="0"/>
-              <a:t>Detecção de anomalias</a:t>
-            </a:r>
-          </a:p>
-        </p:txBody>
-      </p:sp>
-      <p:sp>
-        <p:nvSpPr>
-          <p:cNvPr id="3" name="AutoShape 2" descr="An example of graph signal reconstruction over wireless sensor network. |  Download Scientific Diagram">
-            <a:extLst>
-              <a:ext uri="{FF2B5EF4-FFF2-40B4-BE49-F238E27FC236}">
-                <a16:creationId xmlns:a16="http://schemas.microsoft.com/office/drawing/2014/main" xmlns="" id="{0166B4DD-D72A-4A54-94A7-2C38133837FD}"/>
-              </a:ext>
-            </a:extLst>
-          </p:cNvPr>
-          <p:cNvSpPr>
-            <a:spLocks noChangeAspect="1" noChangeArrowheads="1"/>
-          </p:cNvSpPr>
-          <p:nvPr/>
-        </p:nvSpPr>
-        <p:spPr bwMode="auto">
-          <a:xfrm>
-            <a:off x="5994400" y="3327400"/>
-            <a:ext cx="203200" cy="203200"/>
-          </a:xfrm>
-          <a:prstGeom prst="rect">
-            <a:avLst/>
-          </a:prstGeom>
-          <a:noFill/>
-          <a:extLst>
-            <a:ext uri="{909E8E84-426E-40DD-AFC4-6F175D3DCCD1}">
-              <a14:hiddenFill xmlns:a14="http://schemas.microsoft.com/office/drawing/2010/main">
-                <a:solidFill>
-                  <a:srgbClr val="FFFFFF"/>
-                </a:solidFill>
-              </a14:hiddenFill>
-            </a:ext>
-          </a:extLst>
-        </p:spPr>
-        <p:txBody>
-          <a:bodyPr vert="horz" wrap="square" lIns="60960" tIns="30480" rIns="60960" bIns="30480" numCol="1" anchor="t" anchorCtr="0" compatLnSpc="1">
-            <a:prstTxWarp prst="textNoShape">
-              <a:avLst/>
-            </a:prstTxWarp>
-          </a:bodyPr>
-          <a:lstStyle/>
-          <a:p>
-            <a:pPr defTabSz="609630"/>
-            <a:endParaRPr lang="pt-BR" sz="1200">
-              <a:solidFill>
-                <a:prstClr val="black"/>
-              </a:solidFill>
-              <a:latin typeface="Calibri"/>
-            </a:endParaRPr>
-          </a:p>
-        </p:txBody>
-      </p:sp>
-      <p:sp>
-        <p:nvSpPr>
-          <p:cNvPr id="7" name="AutoShape 4" descr="An example of graph signal reconstruction over wireless sensor network. |  Download Scientific Diagram">
-            <a:extLst>
-              <a:ext uri="{FF2B5EF4-FFF2-40B4-BE49-F238E27FC236}">
-                <a16:creationId xmlns:a16="http://schemas.microsoft.com/office/drawing/2014/main" xmlns="" id="{14C2B67D-81A1-457E-A410-FE4350A3CCA4}"/>
-              </a:ext>
-            </a:extLst>
-          </p:cNvPr>
-          <p:cNvSpPr>
-            <a:spLocks noChangeAspect="1" noChangeArrowheads="1"/>
-          </p:cNvSpPr>
-          <p:nvPr/>
-        </p:nvSpPr>
-        <p:spPr bwMode="auto">
-          <a:xfrm>
-            <a:off x="6096000" y="3429000"/>
-            <a:ext cx="203200" cy="203200"/>
-          </a:xfrm>
-          <a:prstGeom prst="rect">
-            <a:avLst/>
-          </a:prstGeom>
-          <a:noFill/>
-          <a:extLst>
-            <a:ext uri="{909E8E84-426E-40DD-AFC4-6F175D3DCCD1}">
-              <a14:hiddenFill xmlns:a14="http://schemas.microsoft.com/office/drawing/2010/main">
-                <a:solidFill>
-                  <a:srgbClr val="FFFFFF"/>
-                </a:solidFill>
-              </a14:hiddenFill>
-            </a:ext>
-          </a:extLst>
-        </p:spPr>
-        <p:txBody>
-          <a:bodyPr vert="horz" wrap="square" lIns="60960" tIns="30480" rIns="60960" bIns="30480" numCol="1" anchor="t" anchorCtr="0" compatLnSpc="1">
-            <a:prstTxWarp prst="textNoShape">
-              <a:avLst/>
-            </a:prstTxWarp>
-          </a:bodyPr>
-          <a:lstStyle/>
-          <a:p>
-            <a:pPr defTabSz="609630"/>
-            <a:endParaRPr lang="pt-BR" sz="1200">
-              <a:solidFill>
-                <a:prstClr val="black"/>
-              </a:solidFill>
-              <a:latin typeface="Calibri"/>
-            </a:endParaRPr>
-          </a:p>
-        </p:txBody>
-      </p:sp>
-      <p:sp>
-        <p:nvSpPr>
-          <p:cNvPr id="4" name="Espaço Reservado para Conteúdo 3">
-            <a:extLst>
-              <a:ext uri="{FF2B5EF4-FFF2-40B4-BE49-F238E27FC236}">
-                <a16:creationId xmlns:a16="http://schemas.microsoft.com/office/drawing/2014/main" xmlns="" id="{5F1B432F-F570-AEC0-CFFF-C1D9196D7234}"/>
-              </a:ext>
-            </a:extLst>
-          </p:cNvPr>
-          <p:cNvSpPr>
-            <a:spLocks noGrp="1"/>
-          </p:cNvSpPr>
-          <p:nvPr>
-            <p:ph idx="1"/>
-          </p:nvPr>
-        </p:nvSpPr>
-        <p:spPr>
-          <a:xfrm>
-            <a:off x="304800" y="1066801"/>
-            <a:ext cx="9810044" cy="2737556"/>
-          </a:xfrm>
-        </p:spPr>
-        <p:txBody>
-          <a:bodyPr>
-            <a:normAutofit/>
-          </a:bodyPr>
-          <a:lstStyle/>
-          <a:p>
-            <a:pPr marL="0" indent="0">
-              <a:buNone/>
-            </a:pPr>
-            <a:endParaRPr lang="pt-BR" dirty="0"/>
-          </a:p>
-          <a:p>
-            <a:pPr marL="0" indent="0">
-              <a:buNone/>
-            </a:pPr>
-            <a:endParaRPr lang="pt-BR" dirty="0"/>
-          </a:p>
-        </p:txBody>
-      </p:sp>
-      <p:sp>
-        <p:nvSpPr>
-          <p:cNvPr id="6" name="CaixaDeTexto 5">
-            <a:extLst>
-              <a:ext uri="{FF2B5EF4-FFF2-40B4-BE49-F238E27FC236}">
-                <a16:creationId xmlns:a16="http://schemas.microsoft.com/office/drawing/2014/main" xmlns="" id="{470482DB-F365-0A83-E102-37A8EB7EACEF}"/>
-              </a:ext>
-            </a:extLst>
-          </p:cNvPr>
-          <p:cNvSpPr txBox="1"/>
-          <p:nvPr/>
-        </p:nvSpPr>
-        <p:spPr>
-          <a:xfrm>
-            <a:off x="846667" y="988201"/>
-            <a:ext cx="8229599" cy="7017306"/>
-          </a:xfrm>
-          <a:prstGeom prst="rect">
-            <a:avLst/>
-          </a:prstGeom>
-          <a:noFill/>
-        </p:spPr>
-        <p:txBody>
-          <a:bodyPr wrap="square">
-            <a:spAutoFit/>
-          </a:bodyPr>
-          <a:lstStyle/>
-          <a:p>
-            <a:r>
-              <a:rPr lang="pt-BR" b="0" i="0" dirty="0">
-                <a:solidFill>
-                  <a:srgbClr val="212529"/>
-                </a:solidFill>
-                <a:effectLst/>
-                <a:latin typeface="-apple-system"/>
-              </a:rPr>
-              <a:t>Outliers</a:t>
-            </a:r>
-          </a:p>
-          <a:p>
-            <a:pPr marL="285750" indent="-285750">
-              <a:buFont typeface="Arial" panose="020B0604020202020204" pitchFamily="34" charset="0"/>
-              <a:buChar char="•"/>
-            </a:pPr>
-            <a:r>
-              <a:rPr lang="pt-BR" b="0" i="0" dirty="0">
-                <a:solidFill>
-                  <a:srgbClr val="212529"/>
-                </a:solidFill>
-                <a:effectLst/>
-                <a:latin typeface="-apple-system"/>
-              </a:rPr>
-              <a:t>Os dados de treinamento contêm valores discrepantes que são definidos como observações distantes das demais. </a:t>
-            </a:r>
-          </a:p>
-          <a:p>
-            <a:pPr marL="285750" indent="-285750">
-              <a:buFont typeface="Arial" panose="020B0604020202020204" pitchFamily="34" charset="0"/>
-              <a:buChar char="•"/>
-            </a:pPr>
-            <a:r>
-              <a:rPr lang="pt-BR" b="0" i="0" dirty="0">
-                <a:solidFill>
-                  <a:srgbClr val="212529"/>
-                </a:solidFill>
-                <a:effectLst/>
-                <a:latin typeface="-apple-system"/>
-              </a:rPr>
-              <a:t>Os estimadores de detecção de outliers tentam, portanto, ajustar as regiões onde os dados de treinamento estão mais concentrados, ignorando as observações desviantes.</a:t>
-            </a:r>
-          </a:p>
-          <a:p>
-            <a:pPr marL="285750" indent="-285750">
-              <a:buFont typeface="Arial" panose="020B0604020202020204" pitchFamily="34" charset="0"/>
-              <a:buChar char="•"/>
-            </a:pPr>
-            <a:endParaRPr lang="pt-BR" dirty="0">
-              <a:solidFill>
-                <a:srgbClr val="212529"/>
-              </a:solidFill>
-              <a:latin typeface="-apple-system"/>
-            </a:endParaRPr>
-          </a:p>
-          <a:p>
-            <a:r>
-              <a:rPr lang="pt-BR" dirty="0" err="1">
-                <a:solidFill>
-                  <a:srgbClr val="212529"/>
-                </a:solidFill>
-                <a:latin typeface="-apple-system"/>
-              </a:rPr>
-              <a:t>Novelty</a:t>
-            </a:r>
-            <a:endParaRPr lang="pt-BR" dirty="0">
-              <a:solidFill>
-                <a:srgbClr val="212529"/>
-              </a:solidFill>
-              <a:latin typeface="-apple-system"/>
-            </a:endParaRPr>
-          </a:p>
-          <a:p>
-            <a:endParaRPr lang="pt-BR" dirty="0">
-              <a:solidFill>
-                <a:srgbClr val="212529"/>
-              </a:solidFill>
-              <a:latin typeface="-apple-system"/>
-            </a:endParaRPr>
-          </a:p>
-          <a:p>
-            <a:pPr marL="285750" indent="-285750">
-              <a:buFont typeface="Arial" panose="020B0604020202020204" pitchFamily="34" charset="0"/>
-              <a:buChar char="•"/>
-            </a:pPr>
-            <a:r>
-              <a:rPr lang="pt-BR" b="0" i="0" dirty="0">
-                <a:solidFill>
-                  <a:srgbClr val="212529"/>
-                </a:solidFill>
-                <a:effectLst/>
-                <a:latin typeface="-apple-system"/>
-              </a:rPr>
-              <a:t>Os dados de treinamento não são poluídos por valores discrepantes e estamos interessados ​​em detectar se uma </a:t>
-            </a:r>
-            <a:r>
-              <a:rPr lang="pt-BR" b="1" i="0" dirty="0">
-                <a:solidFill>
-                  <a:srgbClr val="212529"/>
-                </a:solidFill>
-                <a:effectLst/>
-                <a:latin typeface="-apple-system"/>
-              </a:rPr>
-              <a:t>nova</a:t>
-            </a:r>
-            <a:r>
-              <a:rPr lang="pt-BR" b="0" i="0" dirty="0">
-                <a:solidFill>
-                  <a:srgbClr val="212529"/>
-                </a:solidFill>
-                <a:effectLst/>
-                <a:latin typeface="-apple-system"/>
-              </a:rPr>
-              <a:t> observação é um valor discrepante.</a:t>
-            </a:r>
-          </a:p>
-          <a:p>
-            <a:pPr marL="285750" indent="-285750">
-              <a:buFont typeface="Arial" panose="020B0604020202020204" pitchFamily="34" charset="0"/>
-              <a:buChar char="•"/>
-            </a:pPr>
-            <a:r>
-              <a:rPr lang="pt-BR" b="0" i="0" dirty="0">
-                <a:solidFill>
-                  <a:srgbClr val="212529"/>
-                </a:solidFill>
-                <a:effectLst/>
-                <a:latin typeface="-apple-system"/>
-              </a:rPr>
-              <a:t> Neste contexto, um outlier também é chamado de novidade</a:t>
-            </a:r>
-            <a:endParaRPr lang="pt-BR" dirty="0"/>
-          </a:p>
-          <a:p>
-            <a:endParaRPr lang="pt-BR" dirty="0"/>
-          </a:p>
-          <a:p>
-            <a:endParaRPr lang="pt-BR" dirty="0"/>
-          </a:p>
-          <a:p>
-            <a:endParaRPr lang="pt-BR" dirty="0"/>
-          </a:p>
-          <a:p>
-            <a:endParaRPr lang="pt-BR" dirty="0"/>
-          </a:p>
-          <a:p>
-            <a:endParaRPr lang="pt-BR" dirty="0"/>
-          </a:p>
-          <a:p>
-            <a:endParaRPr lang="pt-BR" dirty="0"/>
-          </a:p>
-          <a:p>
-            <a:endParaRPr lang="pt-BR" dirty="0"/>
-          </a:p>
-          <a:p>
-            <a:endParaRPr lang="pt-BR" dirty="0"/>
-          </a:p>
-          <a:p>
-            <a:endParaRPr lang="pt-BR" dirty="0"/>
-          </a:p>
-          <a:p>
-            <a:endParaRPr lang="pt-BR" dirty="0"/>
-          </a:p>
-          <a:p>
-            <a:endParaRPr lang="pt-BR" dirty="0"/>
-          </a:p>
-          <a:p>
-            <a:endParaRPr lang="pt-BR" dirty="0"/>
-          </a:p>
-          <a:p>
-            <a:endParaRPr lang="pt-BR" dirty="0"/>
-          </a:p>
-        </p:txBody>
-      </p:sp>
-    </p:spTree>
-    <p:extLst>
-      <p:ext uri="{BB962C8B-B14F-4D97-AF65-F5344CB8AC3E}">
-        <p14:creationId xmlns:p14="http://schemas.microsoft.com/office/powerpoint/2010/main" val="3453401683"/>
-      </p:ext>
-    </p:extLst>
-  </p:cSld>
-  <p:clrMapOvr>
-    <a:masterClrMapping/>
-  </p:clrMapOvr>
-</p:sld>
-</file>
-
-<file path=ppt/slides/slide31.xml><?xml version="1.0" encoding="utf-8"?>
-<p:sld xmlns:a="http://schemas.openxmlformats.org/drawingml/2006/main" xmlns:r="http://schemas.openxmlformats.org/officeDocument/2006/relationships" xmlns:p="http://schemas.openxmlformats.org/presentationml/2006/main">
-  <p:cSld>
-    <p:bg>
-      <p:bgPr>
-        <a:blipFill dpi="0" rotWithShape="1">
-          <a:blip r:embed="rId3">
-            <a:lum/>
-          </a:blip>
-          <a:srcRect/>
-          <a:stretch>
-            <a:fillRect/>
-          </a:stretch>
-        </a:blipFill>
-        <a:effectLst/>
-      </p:bgPr>
-    </p:bg>
-    <p:spTree>
-      <p:nvGrpSpPr>
-        <p:cNvPr id="1" name=""/>
-        <p:cNvGrpSpPr/>
-        <p:nvPr/>
-      </p:nvGrpSpPr>
-      <p:grpSpPr>
-        <a:xfrm>
-          <a:off x="0" y="0"/>
-          <a:ext cx="0" cy="0"/>
-          <a:chOff x="0" y="0"/>
-          <a:chExt cx="0" cy="0"/>
-        </a:xfrm>
-      </p:grpSpPr>
-      <p:sp>
-        <p:nvSpPr>
-          <p:cNvPr id="2" name="Título 1">
-            <a:extLst>
-              <a:ext uri="{FF2B5EF4-FFF2-40B4-BE49-F238E27FC236}">
-                <a16:creationId xmlns:a16="http://schemas.microsoft.com/office/drawing/2014/main" xmlns="" id="{5F09B89C-3183-4D52-981A-62798DDFF2B8}"/>
-              </a:ext>
-            </a:extLst>
-          </p:cNvPr>
-          <p:cNvSpPr>
-            <a:spLocks noGrp="1"/>
-          </p:cNvSpPr>
-          <p:nvPr>
-            <p:ph type="title"/>
-          </p:nvPr>
-        </p:nvSpPr>
-        <p:spPr>
-          <a:xfrm>
-            <a:off x="304800" y="183092"/>
-            <a:ext cx="6559285" cy="762000"/>
-          </a:xfrm>
-        </p:spPr>
-        <p:txBody>
-          <a:bodyPr>
-            <a:normAutofit/>
-          </a:bodyPr>
-          <a:lstStyle/>
-          <a:p>
-            <a:r>
-              <a:rPr lang="pt-BR" dirty="0"/>
-              <a:t>Detecção de anomalias</a:t>
-            </a:r>
-          </a:p>
-        </p:txBody>
-      </p:sp>
-      <p:sp>
-        <p:nvSpPr>
-          <p:cNvPr id="3" name="AutoShape 2" descr="An example of graph signal reconstruction over wireless sensor network. |  Download Scientific Diagram">
-            <a:extLst>
-              <a:ext uri="{FF2B5EF4-FFF2-40B4-BE49-F238E27FC236}">
-                <a16:creationId xmlns:a16="http://schemas.microsoft.com/office/drawing/2014/main" xmlns="" id="{0166B4DD-D72A-4A54-94A7-2C38133837FD}"/>
-              </a:ext>
-            </a:extLst>
-          </p:cNvPr>
-          <p:cNvSpPr>
-            <a:spLocks noChangeAspect="1" noChangeArrowheads="1"/>
-          </p:cNvSpPr>
-          <p:nvPr/>
-        </p:nvSpPr>
-        <p:spPr bwMode="auto">
-          <a:xfrm>
-            <a:off x="5994400" y="3327400"/>
-            <a:ext cx="203200" cy="203200"/>
-          </a:xfrm>
-          <a:prstGeom prst="rect">
-            <a:avLst/>
-          </a:prstGeom>
-          <a:noFill/>
-          <a:extLst>
-            <a:ext uri="{909E8E84-426E-40DD-AFC4-6F175D3DCCD1}">
-              <a14:hiddenFill xmlns:a14="http://schemas.microsoft.com/office/drawing/2010/main">
-                <a:solidFill>
-                  <a:srgbClr val="FFFFFF"/>
-                </a:solidFill>
-              </a14:hiddenFill>
-            </a:ext>
-          </a:extLst>
-        </p:spPr>
-        <p:txBody>
-          <a:bodyPr vert="horz" wrap="square" lIns="60960" tIns="30480" rIns="60960" bIns="30480" numCol="1" anchor="t" anchorCtr="0" compatLnSpc="1">
-            <a:prstTxWarp prst="textNoShape">
-              <a:avLst/>
-            </a:prstTxWarp>
-          </a:bodyPr>
-          <a:lstStyle/>
-          <a:p>
-            <a:pPr marL="0" marR="0" lvl="0" indent="0" algn="l" defTabSz="609630" rtl="0" eaLnBrk="1" fontAlgn="auto" latinLnBrk="0" hangingPunct="1">
-              <a:lnSpc>
-                <a:spcPct val="100000"/>
-              </a:lnSpc>
-              <a:spcBef>
-                <a:spcPts val="0"/>
-              </a:spcBef>
-              <a:spcAft>
-                <a:spcPts val="0"/>
-              </a:spcAft>
-              <a:buClrTx/>
-              <a:buSzTx/>
-              <a:buFontTx/>
-              <a:buNone/>
-              <a:tabLst/>
-              <a:defRPr/>
-            </a:pPr>
-            <a:endParaRPr kumimoji="0" lang="pt-BR" sz="1200" b="0" i="0" u="none" strike="noStrike" kern="1200" cap="none" spc="0" normalizeH="0" baseline="0" noProof="0">
-              <a:ln>
-                <a:noFill/>
-              </a:ln>
-              <a:solidFill>
-                <a:prstClr val="black"/>
-              </a:solidFill>
-              <a:effectLst/>
-              <a:uLnTx/>
-              <a:uFillTx/>
-              <a:latin typeface="Calibri"/>
-              <a:ea typeface="+mn-ea"/>
-              <a:cs typeface="+mn-cs"/>
-            </a:endParaRPr>
-          </a:p>
-        </p:txBody>
-      </p:sp>
-      <p:sp>
-        <p:nvSpPr>
-          <p:cNvPr id="7" name="AutoShape 4" descr="An example of graph signal reconstruction over wireless sensor network. |  Download Scientific Diagram">
-            <a:extLst>
-              <a:ext uri="{FF2B5EF4-FFF2-40B4-BE49-F238E27FC236}">
-                <a16:creationId xmlns:a16="http://schemas.microsoft.com/office/drawing/2014/main" xmlns="" id="{14C2B67D-81A1-457E-A410-FE4350A3CCA4}"/>
-              </a:ext>
-            </a:extLst>
-          </p:cNvPr>
-          <p:cNvSpPr>
-            <a:spLocks noChangeAspect="1" noChangeArrowheads="1"/>
-          </p:cNvSpPr>
-          <p:nvPr/>
-        </p:nvSpPr>
-        <p:spPr bwMode="auto">
-          <a:xfrm>
-            <a:off x="6096000" y="3429000"/>
-            <a:ext cx="203200" cy="203200"/>
-          </a:xfrm>
-          <a:prstGeom prst="rect">
-            <a:avLst/>
-          </a:prstGeom>
-          <a:noFill/>
-          <a:extLst>
-            <a:ext uri="{909E8E84-426E-40DD-AFC4-6F175D3DCCD1}">
-              <a14:hiddenFill xmlns:a14="http://schemas.microsoft.com/office/drawing/2010/main">
-                <a:solidFill>
-                  <a:srgbClr val="FFFFFF"/>
-                </a:solidFill>
-              </a14:hiddenFill>
-            </a:ext>
-          </a:extLst>
-        </p:spPr>
-        <p:txBody>
-          <a:bodyPr vert="horz" wrap="square" lIns="60960" tIns="30480" rIns="60960" bIns="30480" numCol="1" anchor="t" anchorCtr="0" compatLnSpc="1">
-            <a:prstTxWarp prst="textNoShape">
-              <a:avLst/>
-            </a:prstTxWarp>
-          </a:bodyPr>
-          <a:lstStyle/>
-          <a:p>
-            <a:pPr marL="0" marR="0" lvl="0" indent="0" algn="l" defTabSz="609630" rtl="0" eaLnBrk="1" fontAlgn="auto" latinLnBrk="0" hangingPunct="1">
-              <a:lnSpc>
-                <a:spcPct val="100000"/>
-              </a:lnSpc>
-              <a:spcBef>
-                <a:spcPts val="0"/>
-              </a:spcBef>
-              <a:spcAft>
-                <a:spcPts val="0"/>
-              </a:spcAft>
-              <a:buClrTx/>
-              <a:buSzTx/>
-              <a:buFontTx/>
-              <a:buNone/>
-              <a:tabLst/>
-              <a:defRPr/>
-            </a:pPr>
-            <a:endParaRPr kumimoji="0" lang="pt-BR" sz="1200" b="0" i="0" u="none" strike="noStrike" kern="1200" cap="none" spc="0" normalizeH="0" baseline="0" noProof="0">
-              <a:ln>
-                <a:noFill/>
-              </a:ln>
-              <a:solidFill>
-                <a:prstClr val="black"/>
-              </a:solidFill>
-              <a:effectLst/>
-              <a:uLnTx/>
-              <a:uFillTx/>
-              <a:latin typeface="Calibri"/>
-              <a:ea typeface="+mn-ea"/>
-              <a:cs typeface="+mn-cs"/>
-            </a:endParaRPr>
-          </a:p>
-        </p:txBody>
-      </p:sp>
-      <p:sp>
-        <p:nvSpPr>
-          <p:cNvPr id="4" name="Espaço Reservado para Conteúdo 3">
-            <a:extLst>
-              <a:ext uri="{FF2B5EF4-FFF2-40B4-BE49-F238E27FC236}">
-                <a16:creationId xmlns:a16="http://schemas.microsoft.com/office/drawing/2014/main" xmlns="" id="{0349BA64-C9D7-4730-9CA9-5C4AD9FC7969}"/>
-              </a:ext>
-            </a:extLst>
-          </p:cNvPr>
-          <p:cNvSpPr>
-            <a:spLocks noGrp="1"/>
-          </p:cNvSpPr>
-          <p:nvPr>
-            <p:ph idx="1"/>
-          </p:nvPr>
-        </p:nvSpPr>
-        <p:spPr>
-          <a:xfrm>
-            <a:off x="304800" y="1066800"/>
-            <a:ext cx="9295589" cy="4330419"/>
-          </a:xfrm>
-        </p:spPr>
-        <p:txBody>
-          <a:bodyPr>
-            <a:noAutofit/>
-          </a:bodyPr>
-          <a:lstStyle/>
-          <a:p>
-            <a:pPr marL="495308" indent="-342900" algn="just">
-              <a:lnSpc>
-                <a:spcPct val="107000"/>
-              </a:lnSpc>
-              <a:spcAft>
-                <a:spcPts val="533"/>
-              </a:spcAft>
-            </a:pPr>
-            <a:r>
-              <a:rPr lang="pt-BR" sz="2000" dirty="0">
-                <a:ea typeface="Calibri" panose="020F0502020204030204" pitchFamily="34" charset="0"/>
-                <a:cs typeface="Arial" panose="020B0604020202020204" pitchFamily="34" charset="0"/>
-              </a:rPr>
-              <a:t>Movimentação de containers ao longo do ciclo logístico</a:t>
-            </a:r>
-          </a:p>
-        </p:txBody>
-      </p:sp>
-      <p:pic>
-        <p:nvPicPr>
-          <p:cNvPr id="1026" name="Picture 2" descr="Free photo industrial containers box for logistic import export business.">
-            <a:extLst>
-              <a:ext uri="{FF2B5EF4-FFF2-40B4-BE49-F238E27FC236}">
-                <a16:creationId xmlns:a16="http://schemas.microsoft.com/office/drawing/2014/main" xmlns="" id="{FDC07977-F662-66CB-7534-103E83976919}"/>
-              </a:ext>
-            </a:extLst>
-          </p:cNvPr>
-          <p:cNvPicPr>
-            <a:picLocks noChangeAspect="1" noChangeArrowheads="1"/>
-          </p:cNvPicPr>
-          <p:nvPr/>
-        </p:nvPicPr>
-        <p:blipFill>
-          <a:blip r:embed="rId4">
-            <a:extLst>
-              <a:ext uri="{28A0092B-C50C-407E-A947-70E740481C1C}">
-                <a14:useLocalDpi xmlns:a14="http://schemas.microsoft.com/office/drawing/2010/main" val="0"/>
-              </a:ext>
-            </a:extLst>
-          </a:blip>
-          <a:srcRect/>
-          <a:stretch>
-            <a:fillRect/>
-          </a:stretch>
-        </p:blipFill>
-        <p:spPr bwMode="auto">
-          <a:xfrm>
-            <a:off x="2742141" y="1819275"/>
-            <a:ext cx="5962650" cy="3971925"/>
-          </a:xfrm>
-          <a:prstGeom prst="rect">
-            <a:avLst/>
-          </a:prstGeom>
-          <a:noFill/>
-          <a:extLst>
-            <a:ext uri="{909E8E84-426E-40DD-AFC4-6F175D3DCCD1}">
-              <a14:hiddenFill xmlns:a14="http://schemas.microsoft.com/office/drawing/2010/main">
-                <a:solidFill>
-                  <a:srgbClr val="FFFFFF"/>
-                </a:solidFill>
-              </a14:hiddenFill>
-            </a:ext>
-          </a:extLst>
-        </p:spPr>
-      </p:pic>
-    </p:spTree>
-    <p:extLst>
-      <p:ext uri="{BB962C8B-B14F-4D97-AF65-F5344CB8AC3E}">
-        <p14:creationId xmlns:p14="http://schemas.microsoft.com/office/powerpoint/2010/main" val="3900979391"/>
-      </p:ext>
-    </p:extLst>
-  </p:cSld>
-  <p:clrMapOvr>
-    <a:masterClrMapping/>
-  </p:clrMapOvr>
-</p:sld>
-</file>
-
-<file path=ppt/slides/slide32.xml><?xml version="1.0" encoding="utf-8"?>
-<p:sld xmlns:a="http://schemas.openxmlformats.org/drawingml/2006/main" xmlns:r="http://schemas.openxmlformats.org/officeDocument/2006/relationships" xmlns:p="http://schemas.openxmlformats.org/presentationml/2006/main">
-  <p:cSld>
-    <p:bg>
-      <p:bgPr>
-        <a:blipFill dpi="0" rotWithShape="1">
-          <a:blip r:embed="rId3">
-            <a:lum/>
-          </a:blip>
-          <a:srcRect/>
-          <a:stretch>
-            <a:fillRect/>
-          </a:stretch>
-        </a:blipFill>
-        <a:effectLst/>
-      </p:bgPr>
-    </p:bg>
-    <p:spTree>
-      <p:nvGrpSpPr>
-        <p:cNvPr id="1" name=""/>
-        <p:cNvGrpSpPr/>
-        <p:nvPr/>
-      </p:nvGrpSpPr>
-      <p:grpSpPr>
-        <a:xfrm>
-          <a:off x="0" y="0"/>
-          <a:ext cx="0" cy="0"/>
-          <a:chOff x="0" y="0"/>
-          <a:chExt cx="0" cy="0"/>
-        </a:xfrm>
-      </p:grpSpPr>
-      <p:sp>
-        <p:nvSpPr>
-          <p:cNvPr id="2" name="Título 1">
-            <a:extLst>
-              <a:ext uri="{FF2B5EF4-FFF2-40B4-BE49-F238E27FC236}">
-                <a16:creationId xmlns:a16="http://schemas.microsoft.com/office/drawing/2014/main" xmlns="" id="{5F09B89C-3183-4D52-981A-62798DDFF2B8}"/>
-              </a:ext>
-            </a:extLst>
-          </p:cNvPr>
-          <p:cNvSpPr>
-            <a:spLocks noGrp="1"/>
-          </p:cNvSpPr>
-          <p:nvPr>
-            <p:ph type="title"/>
-          </p:nvPr>
-        </p:nvSpPr>
-        <p:spPr>
-          <a:xfrm>
-            <a:off x="304800" y="183092"/>
-            <a:ext cx="6559285" cy="762000"/>
-          </a:xfrm>
-        </p:spPr>
-        <p:txBody>
-          <a:bodyPr>
-            <a:normAutofit/>
-          </a:bodyPr>
-          <a:lstStyle/>
-          <a:p>
-            <a:r>
-              <a:rPr lang="pt-BR" dirty="0"/>
-              <a:t>Detecção de anomalias</a:t>
-            </a:r>
-          </a:p>
-        </p:txBody>
-      </p:sp>
-      <p:sp>
-        <p:nvSpPr>
-          <p:cNvPr id="3" name="AutoShape 2" descr="An example of graph signal reconstruction over wireless sensor network. |  Download Scientific Diagram">
-            <a:extLst>
-              <a:ext uri="{FF2B5EF4-FFF2-40B4-BE49-F238E27FC236}">
-                <a16:creationId xmlns:a16="http://schemas.microsoft.com/office/drawing/2014/main" xmlns="" id="{0166B4DD-D72A-4A54-94A7-2C38133837FD}"/>
-              </a:ext>
-            </a:extLst>
-          </p:cNvPr>
-          <p:cNvSpPr>
-            <a:spLocks noChangeAspect="1" noChangeArrowheads="1"/>
-          </p:cNvSpPr>
-          <p:nvPr/>
-        </p:nvSpPr>
-        <p:spPr bwMode="auto">
-          <a:xfrm>
-            <a:off x="5994400" y="3327400"/>
-            <a:ext cx="203200" cy="203200"/>
-          </a:xfrm>
-          <a:prstGeom prst="rect">
-            <a:avLst/>
-          </a:prstGeom>
-          <a:noFill/>
-          <a:extLst>
-            <a:ext uri="{909E8E84-426E-40DD-AFC4-6F175D3DCCD1}">
-              <a14:hiddenFill xmlns:a14="http://schemas.microsoft.com/office/drawing/2010/main">
-                <a:solidFill>
-                  <a:srgbClr val="FFFFFF"/>
-                </a:solidFill>
-              </a14:hiddenFill>
-            </a:ext>
-          </a:extLst>
-        </p:spPr>
-        <p:txBody>
-          <a:bodyPr vert="horz" wrap="square" lIns="60960" tIns="30480" rIns="60960" bIns="30480" numCol="1" anchor="t" anchorCtr="0" compatLnSpc="1">
-            <a:prstTxWarp prst="textNoShape">
-              <a:avLst/>
-            </a:prstTxWarp>
-          </a:bodyPr>
-          <a:lstStyle/>
-          <a:p>
-            <a:pPr marL="0" marR="0" lvl="0" indent="0" algn="l" defTabSz="609630" rtl="0" eaLnBrk="1" fontAlgn="auto" latinLnBrk="0" hangingPunct="1">
-              <a:lnSpc>
-                <a:spcPct val="100000"/>
-              </a:lnSpc>
-              <a:spcBef>
-                <a:spcPts val="0"/>
-              </a:spcBef>
-              <a:spcAft>
-                <a:spcPts val="0"/>
-              </a:spcAft>
-              <a:buClrTx/>
-              <a:buSzTx/>
-              <a:buFontTx/>
-              <a:buNone/>
-              <a:tabLst/>
-              <a:defRPr/>
-            </a:pPr>
-            <a:endParaRPr kumimoji="0" lang="pt-BR" sz="1200" b="0" i="0" u="none" strike="noStrike" kern="1200" cap="none" spc="0" normalizeH="0" baseline="0" noProof="0">
-              <a:ln>
-                <a:noFill/>
-              </a:ln>
-              <a:solidFill>
-                <a:prstClr val="black"/>
-              </a:solidFill>
-              <a:effectLst/>
-              <a:uLnTx/>
-              <a:uFillTx/>
-              <a:latin typeface="Calibri"/>
-              <a:ea typeface="+mn-ea"/>
-              <a:cs typeface="+mn-cs"/>
-            </a:endParaRPr>
-          </a:p>
-        </p:txBody>
-      </p:sp>
-      <p:sp>
-        <p:nvSpPr>
-          <p:cNvPr id="7" name="AutoShape 4" descr="An example of graph signal reconstruction over wireless sensor network. |  Download Scientific Diagram">
-            <a:extLst>
-              <a:ext uri="{FF2B5EF4-FFF2-40B4-BE49-F238E27FC236}">
-                <a16:creationId xmlns:a16="http://schemas.microsoft.com/office/drawing/2014/main" xmlns="" id="{14C2B67D-81A1-457E-A410-FE4350A3CCA4}"/>
-              </a:ext>
-            </a:extLst>
-          </p:cNvPr>
-          <p:cNvSpPr>
-            <a:spLocks noChangeAspect="1" noChangeArrowheads="1"/>
-          </p:cNvSpPr>
-          <p:nvPr/>
-        </p:nvSpPr>
-        <p:spPr bwMode="auto">
-          <a:xfrm>
-            <a:off x="6096000" y="3429000"/>
-            <a:ext cx="203200" cy="203200"/>
-          </a:xfrm>
-          <a:prstGeom prst="rect">
-            <a:avLst/>
-          </a:prstGeom>
-          <a:noFill/>
-          <a:extLst>
-            <a:ext uri="{909E8E84-426E-40DD-AFC4-6F175D3DCCD1}">
-              <a14:hiddenFill xmlns:a14="http://schemas.microsoft.com/office/drawing/2010/main">
-                <a:solidFill>
-                  <a:srgbClr val="FFFFFF"/>
-                </a:solidFill>
-              </a14:hiddenFill>
-            </a:ext>
-          </a:extLst>
-        </p:spPr>
-        <p:txBody>
-          <a:bodyPr vert="horz" wrap="square" lIns="60960" tIns="30480" rIns="60960" bIns="30480" numCol="1" anchor="t" anchorCtr="0" compatLnSpc="1">
-            <a:prstTxWarp prst="textNoShape">
-              <a:avLst/>
-            </a:prstTxWarp>
-          </a:bodyPr>
-          <a:lstStyle/>
-          <a:p>
-            <a:pPr marL="0" marR="0" lvl="0" indent="0" algn="l" defTabSz="609630" rtl="0" eaLnBrk="1" fontAlgn="auto" latinLnBrk="0" hangingPunct="1">
-              <a:lnSpc>
-                <a:spcPct val="100000"/>
-              </a:lnSpc>
-              <a:spcBef>
-                <a:spcPts val="0"/>
-              </a:spcBef>
-              <a:spcAft>
-                <a:spcPts val="0"/>
-              </a:spcAft>
-              <a:buClrTx/>
-              <a:buSzTx/>
-              <a:buFontTx/>
-              <a:buNone/>
-              <a:tabLst/>
-              <a:defRPr/>
-            </a:pPr>
-            <a:endParaRPr kumimoji="0" lang="pt-BR" sz="1200" b="0" i="0" u="none" strike="noStrike" kern="1200" cap="none" spc="0" normalizeH="0" baseline="0" noProof="0">
-              <a:ln>
-                <a:noFill/>
-              </a:ln>
-              <a:solidFill>
-                <a:prstClr val="black"/>
-              </a:solidFill>
-              <a:effectLst/>
-              <a:uLnTx/>
-              <a:uFillTx/>
-              <a:latin typeface="Calibri"/>
-              <a:ea typeface="+mn-ea"/>
-              <a:cs typeface="+mn-cs"/>
-            </a:endParaRPr>
-          </a:p>
-        </p:txBody>
-      </p:sp>
-      <p:sp>
-        <p:nvSpPr>
-          <p:cNvPr id="4" name="Espaço Reservado para Conteúdo 3">
-            <a:extLst>
-              <a:ext uri="{FF2B5EF4-FFF2-40B4-BE49-F238E27FC236}">
-                <a16:creationId xmlns:a16="http://schemas.microsoft.com/office/drawing/2014/main" xmlns="" id="{0349BA64-C9D7-4730-9CA9-5C4AD9FC7969}"/>
-              </a:ext>
-            </a:extLst>
-          </p:cNvPr>
-          <p:cNvSpPr>
-            <a:spLocks noGrp="1"/>
-          </p:cNvSpPr>
-          <p:nvPr>
-            <p:ph idx="1"/>
-          </p:nvPr>
-        </p:nvSpPr>
-        <p:spPr>
-          <a:xfrm>
-            <a:off x="304800" y="1066800"/>
-            <a:ext cx="9295589" cy="4330419"/>
-          </a:xfrm>
-        </p:spPr>
-        <p:txBody>
-          <a:bodyPr>
-            <a:noAutofit/>
-          </a:bodyPr>
-          <a:lstStyle/>
-          <a:p>
-            <a:pPr marL="495308" indent="-342900" algn="just">
-              <a:lnSpc>
-                <a:spcPct val="107000"/>
-              </a:lnSpc>
-              <a:spcAft>
-                <a:spcPts val="533"/>
-              </a:spcAft>
-            </a:pPr>
-            <a:r>
-              <a:rPr lang="pt-BR" sz="2000" dirty="0">
-                <a:ea typeface="Calibri" panose="020F0502020204030204" pitchFamily="34" charset="0"/>
-                <a:cs typeface="Arial" panose="020B0604020202020204" pitchFamily="34" charset="0"/>
-              </a:rPr>
-              <a:t>Movimentação de containers ao longo do ciclo logístico</a:t>
-            </a:r>
-          </a:p>
-          <a:p>
-            <a:pPr marL="152408" indent="0" algn="just">
-              <a:lnSpc>
-                <a:spcPct val="107000"/>
-              </a:lnSpc>
-              <a:spcAft>
-                <a:spcPts val="533"/>
-              </a:spcAft>
-              <a:buNone/>
-            </a:pPr>
-            <a:r>
-              <a:rPr lang="pt-BR" sz="2000" dirty="0">
-                <a:ea typeface="Calibri" panose="020F0502020204030204" pitchFamily="34" charset="0"/>
-                <a:cs typeface="Arial" panose="020B0604020202020204" pitchFamily="34" charset="0"/>
-              </a:rPr>
-              <a:t>Classificação de 5 estados do container </a:t>
-            </a:r>
-          </a:p>
-          <a:p>
-            <a:pPr marL="152408" indent="0" algn="just">
-              <a:lnSpc>
-                <a:spcPct val="107000"/>
-              </a:lnSpc>
-              <a:spcAft>
-                <a:spcPts val="533"/>
-              </a:spcAft>
-              <a:buNone/>
-            </a:pPr>
-            <a:endParaRPr lang="pt-BR" sz="2000" dirty="0">
-              <a:ea typeface="Calibri" panose="020F0502020204030204" pitchFamily="34" charset="0"/>
-              <a:cs typeface="Arial" panose="020B0604020202020204" pitchFamily="34" charset="0"/>
-            </a:endParaRPr>
-          </a:p>
-          <a:p>
-            <a:pPr marL="495308" indent="-342900" algn="just">
-              <a:lnSpc>
-                <a:spcPct val="107000"/>
-              </a:lnSpc>
-              <a:spcAft>
-                <a:spcPts val="533"/>
-              </a:spcAft>
-            </a:pPr>
-            <a:r>
-              <a:rPr lang="pt-BR" sz="2000" dirty="0">
-                <a:ea typeface="Calibri" panose="020F0502020204030204" pitchFamily="34" charset="0"/>
-                <a:cs typeface="Arial" panose="020B0604020202020204" pitchFamily="34" charset="0"/>
-              </a:rPr>
-              <a:t>Parado</a:t>
-            </a:r>
-          </a:p>
-          <a:p>
-            <a:pPr marL="495308" indent="-342900" algn="just">
-              <a:lnSpc>
-                <a:spcPct val="107000"/>
-              </a:lnSpc>
-              <a:spcAft>
-                <a:spcPts val="533"/>
-              </a:spcAft>
-            </a:pPr>
-            <a:r>
-              <a:rPr lang="pt-BR" sz="2000" dirty="0">
-                <a:ea typeface="Calibri" panose="020F0502020204030204" pitchFamily="34" charset="0"/>
-                <a:cs typeface="Arial" panose="020B0604020202020204" pitchFamily="34" charset="0"/>
-              </a:rPr>
-              <a:t>Sendo erguido</a:t>
-            </a:r>
-          </a:p>
-          <a:p>
-            <a:pPr marL="495308" indent="-342900" algn="just">
-              <a:lnSpc>
-                <a:spcPct val="107000"/>
-              </a:lnSpc>
-              <a:spcAft>
-                <a:spcPts val="533"/>
-              </a:spcAft>
-            </a:pPr>
-            <a:r>
-              <a:rPr lang="pt-BR" sz="2000" dirty="0">
-                <a:ea typeface="Calibri" panose="020F0502020204030204" pitchFamily="34" charset="0"/>
-                <a:cs typeface="Arial" panose="020B0604020202020204" pitchFamily="34" charset="0"/>
-              </a:rPr>
-              <a:t>No mar</a:t>
-            </a:r>
-          </a:p>
-          <a:p>
-            <a:pPr marL="495308" indent="-342900" algn="just">
-              <a:lnSpc>
-                <a:spcPct val="107000"/>
-              </a:lnSpc>
-              <a:spcAft>
-                <a:spcPts val="533"/>
-              </a:spcAft>
-            </a:pPr>
-            <a:r>
-              <a:rPr lang="pt-BR" sz="2000" dirty="0">
-                <a:ea typeface="Calibri" panose="020F0502020204030204" pitchFamily="34" charset="0"/>
-                <a:cs typeface="Arial" panose="020B0604020202020204" pitchFamily="34" charset="0"/>
-              </a:rPr>
-              <a:t>No caminhão</a:t>
-            </a:r>
-          </a:p>
-          <a:p>
-            <a:pPr marL="495308" indent="-342900" algn="just">
-              <a:lnSpc>
-                <a:spcPct val="107000"/>
-              </a:lnSpc>
-              <a:spcAft>
-                <a:spcPts val="533"/>
-              </a:spcAft>
-            </a:pPr>
-            <a:r>
-              <a:rPr lang="pt-BR" sz="2000" dirty="0">
-                <a:solidFill>
-                  <a:srgbClr val="FF0000"/>
-                </a:solidFill>
-                <a:ea typeface="Calibri" panose="020F0502020204030204" pitchFamily="34" charset="0"/>
-                <a:cs typeface="Arial" panose="020B0604020202020204" pitchFamily="34" charset="0"/>
-              </a:rPr>
-              <a:t>Anomalia </a:t>
-            </a:r>
-            <a:r>
-              <a:rPr lang="pt-BR" sz="2000" dirty="0" smtClean="0">
-                <a:ea typeface="Calibri" panose="020F0502020204030204" pitchFamily="34" charset="0"/>
-                <a:cs typeface="Arial" panose="020B0604020202020204" pitchFamily="34" charset="0"/>
-              </a:rPr>
-              <a:t>(</a:t>
-            </a:r>
-            <a:r>
-              <a:rPr lang="pt-BR" sz="2000" dirty="0" smtClean="0">
-                <a:ea typeface="Calibri" panose="020F0502020204030204" pitchFamily="34" charset="0"/>
-                <a:cs typeface="Arial" panose="020B0604020202020204" pitchFamily="34" charset="0"/>
-              </a:rPr>
-              <a:t>e.g.,</a:t>
-            </a:r>
-            <a:r>
-              <a:rPr lang="pt-BR" sz="2000" dirty="0" smtClean="0">
-                <a:ea typeface="Calibri" panose="020F0502020204030204" pitchFamily="34" charset="0"/>
-                <a:cs typeface="Arial" panose="020B0604020202020204" pitchFamily="34" charset="0"/>
-              </a:rPr>
-              <a:t> </a:t>
-            </a:r>
-            <a:r>
-              <a:rPr lang="pt-BR" sz="2000" dirty="0">
-                <a:ea typeface="Calibri" panose="020F0502020204030204" pitchFamily="34" charset="0"/>
-                <a:cs typeface="Arial" panose="020B0604020202020204" pitchFamily="34" charset="0"/>
-              </a:rPr>
-              <a:t>container caindo no mar, empilhadeira tombando)</a:t>
-            </a:r>
-          </a:p>
-          <a:p>
-            <a:pPr marL="152408" indent="0" algn="just">
-              <a:lnSpc>
-                <a:spcPct val="107000"/>
-              </a:lnSpc>
-              <a:spcAft>
-                <a:spcPts val="533"/>
-              </a:spcAft>
-              <a:buNone/>
-            </a:pPr>
-            <a:endParaRPr lang="pt-BR" sz="2000" dirty="0">
-              <a:ea typeface="Calibri" panose="020F0502020204030204" pitchFamily="34" charset="0"/>
-              <a:cs typeface="Arial" panose="020B0604020202020204" pitchFamily="34" charset="0"/>
-            </a:endParaRPr>
-          </a:p>
-        </p:txBody>
-      </p:sp>
-    </p:spTree>
-    <p:extLst>
-      <p:ext uri="{BB962C8B-B14F-4D97-AF65-F5344CB8AC3E}">
-        <p14:creationId xmlns:p14="http://schemas.microsoft.com/office/powerpoint/2010/main" val="3676245301"/>
-      </p:ext>
-    </p:extLst>
-  </p:cSld>
-  <p:clrMapOvr>
-    <a:masterClrMapping/>
-  </p:clrMapOvr>
-</p:sld>
-</file>
-
-<file path=ppt/slides/slide33.xml><?xml version="1.0" encoding="utf-8"?>
-<p:sld xmlns:a="http://schemas.openxmlformats.org/drawingml/2006/main" xmlns:r="http://schemas.openxmlformats.org/officeDocument/2006/relationships" xmlns:p="http://schemas.openxmlformats.org/presentationml/2006/main">
-  <p:cSld>
-    <p:bg>
-      <p:bgPr>
-        <a:blipFill dpi="0" rotWithShape="1">
-          <a:blip r:embed="rId3">
-            <a:lum/>
-          </a:blip>
-          <a:srcRect/>
-          <a:stretch>
-            <a:fillRect/>
-          </a:stretch>
-        </a:blipFill>
-        <a:effectLst/>
-      </p:bgPr>
-    </p:bg>
-    <p:spTree>
-      <p:nvGrpSpPr>
-        <p:cNvPr id="1" name=""/>
-        <p:cNvGrpSpPr/>
-        <p:nvPr/>
-      </p:nvGrpSpPr>
-      <p:grpSpPr>
-        <a:xfrm>
-          <a:off x="0" y="0"/>
-          <a:ext cx="0" cy="0"/>
-          <a:chOff x="0" y="0"/>
-          <a:chExt cx="0" cy="0"/>
-        </a:xfrm>
-      </p:grpSpPr>
-      <p:sp>
-        <p:nvSpPr>
-          <p:cNvPr id="2" name="Título 1">
-            <a:extLst>
-              <a:ext uri="{FF2B5EF4-FFF2-40B4-BE49-F238E27FC236}">
-                <a16:creationId xmlns:a16="http://schemas.microsoft.com/office/drawing/2014/main" xmlns="" id="{5F09B89C-3183-4D52-981A-62798DDFF2B8}"/>
-              </a:ext>
-            </a:extLst>
-          </p:cNvPr>
-          <p:cNvSpPr>
-            <a:spLocks noGrp="1"/>
-          </p:cNvSpPr>
-          <p:nvPr>
-            <p:ph type="title"/>
-          </p:nvPr>
-        </p:nvSpPr>
-        <p:spPr>
-          <a:xfrm>
-            <a:off x="304800" y="183092"/>
-            <a:ext cx="6559285" cy="762000"/>
-          </a:xfrm>
-        </p:spPr>
-        <p:txBody>
-          <a:bodyPr>
-            <a:normAutofit/>
-          </a:bodyPr>
-          <a:lstStyle/>
-          <a:p>
-            <a:r>
-              <a:rPr lang="pt-BR" dirty="0"/>
-              <a:t>Detecção de anomalias</a:t>
-            </a:r>
-          </a:p>
-        </p:txBody>
-      </p:sp>
-      <p:sp>
-        <p:nvSpPr>
-          <p:cNvPr id="3" name="AutoShape 2" descr="An example of graph signal reconstruction over wireless sensor network. |  Download Scientific Diagram">
-            <a:extLst>
-              <a:ext uri="{FF2B5EF4-FFF2-40B4-BE49-F238E27FC236}">
-                <a16:creationId xmlns:a16="http://schemas.microsoft.com/office/drawing/2014/main" xmlns="" id="{0166B4DD-D72A-4A54-94A7-2C38133837FD}"/>
-              </a:ext>
-            </a:extLst>
-          </p:cNvPr>
-          <p:cNvSpPr>
-            <a:spLocks noChangeAspect="1" noChangeArrowheads="1"/>
-          </p:cNvSpPr>
-          <p:nvPr/>
-        </p:nvSpPr>
-        <p:spPr bwMode="auto">
-          <a:xfrm>
-            <a:off x="5994400" y="3327400"/>
-            <a:ext cx="203200" cy="203200"/>
-          </a:xfrm>
-          <a:prstGeom prst="rect">
-            <a:avLst/>
-          </a:prstGeom>
-          <a:noFill/>
-          <a:extLst>
-            <a:ext uri="{909E8E84-426E-40DD-AFC4-6F175D3DCCD1}">
-              <a14:hiddenFill xmlns:a14="http://schemas.microsoft.com/office/drawing/2010/main">
-                <a:solidFill>
-                  <a:srgbClr val="FFFFFF"/>
-                </a:solidFill>
-              </a14:hiddenFill>
-            </a:ext>
-          </a:extLst>
-        </p:spPr>
-        <p:txBody>
-          <a:bodyPr vert="horz" wrap="square" lIns="60960" tIns="30480" rIns="60960" bIns="30480" numCol="1" anchor="t" anchorCtr="0" compatLnSpc="1">
-            <a:prstTxWarp prst="textNoShape">
-              <a:avLst/>
-            </a:prstTxWarp>
-          </a:bodyPr>
-          <a:lstStyle/>
-          <a:p>
-            <a:pPr marL="0" marR="0" lvl="0" indent="0" algn="l" defTabSz="609630" rtl="0" eaLnBrk="1" fontAlgn="auto" latinLnBrk="0" hangingPunct="1">
-              <a:lnSpc>
-                <a:spcPct val="100000"/>
-              </a:lnSpc>
-              <a:spcBef>
-                <a:spcPts val="0"/>
-              </a:spcBef>
-              <a:spcAft>
-                <a:spcPts val="0"/>
-              </a:spcAft>
-              <a:buClrTx/>
-              <a:buSzTx/>
-              <a:buFontTx/>
-              <a:buNone/>
-              <a:tabLst/>
-              <a:defRPr/>
-            </a:pPr>
-            <a:endParaRPr kumimoji="0" lang="pt-BR" sz="1200" b="0" i="0" u="none" strike="noStrike" kern="1200" cap="none" spc="0" normalizeH="0" baseline="0" noProof="0">
-              <a:ln>
-                <a:noFill/>
-              </a:ln>
-              <a:solidFill>
-                <a:prstClr val="black"/>
-              </a:solidFill>
-              <a:effectLst/>
-              <a:uLnTx/>
-              <a:uFillTx/>
-              <a:latin typeface="Calibri"/>
-              <a:ea typeface="+mn-ea"/>
-              <a:cs typeface="+mn-cs"/>
-            </a:endParaRPr>
-          </a:p>
-        </p:txBody>
-      </p:sp>
-      <p:sp>
-        <p:nvSpPr>
-          <p:cNvPr id="7" name="AutoShape 4" descr="An example of graph signal reconstruction over wireless sensor network. |  Download Scientific Diagram">
-            <a:extLst>
-              <a:ext uri="{FF2B5EF4-FFF2-40B4-BE49-F238E27FC236}">
-                <a16:creationId xmlns:a16="http://schemas.microsoft.com/office/drawing/2014/main" xmlns="" id="{14C2B67D-81A1-457E-A410-FE4350A3CCA4}"/>
-              </a:ext>
-            </a:extLst>
-          </p:cNvPr>
-          <p:cNvSpPr>
-            <a:spLocks noChangeAspect="1" noChangeArrowheads="1"/>
-          </p:cNvSpPr>
-          <p:nvPr/>
-        </p:nvSpPr>
-        <p:spPr bwMode="auto">
-          <a:xfrm>
-            <a:off x="6096000" y="3429000"/>
-            <a:ext cx="203200" cy="203200"/>
-          </a:xfrm>
-          <a:prstGeom prst="rect">
-            <a:avLst/>
-          </a:prstGeom>
-          <a:noFill/>
-          <a:extLst>
-            <a:ext uri="{909E8E84-426E-40DD-AFC4-6F175D3DCCD1}">
-              <a14:hiddenFill xmlns:a14="http://schemas.microsoft.com/office/drawing/2010/main">
-                <a:solidFill>
-                  <a:srgbClr val="FFFFFF"/>
-                </a:solidFill>
-              </a14:hiddenFill>
-            </a:ext>
-          </a:extLst>
-        </p:spPr>
-        <p:txBody>
-          <a:bodyPr vert="horz" wrap="square" lIns="60960" tIns="30480" rIns="60960" bIns="30480" numCol="1" anchor="t" anchorCtr="0" compatLnSpc="1">
-            <a:prstTxWarp prst="textNoShape">
-              <a:avLst/>
-            </a:prstTxWarp>
-          </a:bodyPr>
-          <a:lstStyle/>
-          <a:p>
-            <a:pPr marL="0" marR="0" lvl="0" indent="0" algn="l" defTabSz="609630" rtl="0" eaLnBrk="1" fontAlgn="auto" latinLnBrk="0" hangingPunct="1">
-              <a:lnSpc>
-                <a:spcPct val="100000"/>
-              </a:lnSpc>
-              <a:spcBef>
-                <a:spcPts val="0"/>
-              </a:spcBef>
-              <a:spcAft>
-                <a:spcPts val="0"/>
-              </a:spcAft>
-              <a:buClrTx/>
-              <a:buSzTx/>
-              <a:buFontTx/>
-              <a:buNone/>
-              <a:tabLst/>
-              <a:defRPr/>
-            </a:pPr>
-            <a:endParaRPr kumimoji="0" lang="pt-BR" sz="1200" b="0" i="0" u="none" strike="noStrike" kern="1200" cap="none" spc="0" normalizeH="0" baseline="0" noProof="0">
-              <a:ln>
-                <a:noFill/>
-              </a:ln>
-              <a:solidFill>
-                <a:prstClr val="black"/>
-              </a:solidFill>
-              <a:effectLst/>
-              <a:uLnTx/>
-              <a:uFillTx/>
-              <a:latin typeface="Calibri"/>
-              <a:ea typeface="+mn-ea"/>
-              <a:cs typeface="+mn-cs"/>
-            </a:endParaRPr>
-          </a:p>
-        </p:txBody>
-      </p:sp>
-      <p:sp>
-        <p:nvSpPr>
-          <p:cNvPr id="4" name="Espaço Reservado para Conteúdo 3">
-            <a:extLst>
-              <a:ext uri="{FF2B5EF4-FFF2-40B4-BE49-F238E27FC236}">
-                <a16:creationId xmlns:a16="http://schemas.microsoft.com/office/drawing/2014/main" xmlns="" id="{0349BA64-C9D7-4730-9CA9-5C4AD9FC7969}"/>
-              </a:ext>
-            </a:extLst>
-          </p:cNvPr>
-          <p:cNvSpPr>
-            <a:spLocks noGrp="1"/>
-          </p:cNvSpPr>
-          <p:nvPr>
-            <p:ph idx="1"/>
-          </p:nvPr>
-        </p:nvSpPr>
-        <p:spPr>
-          <a:xfrm>
-            <a:off x="304800" y="1066800"/>
-            <a:ext cx="9295589" cy="4330419"/>
-          </a:xfrm>
-        </p:spPr>
-        <p:txBody>
-          <a:bodyPr>
-            <a:noAutofit/>
-          </a:bodyPr>
-          <a:lstStyle/>
-          <a:p>
-            <a:pPr marL="152408" indent="0" algn="just">
-              <a:lnSpc>
-                <a:spcPct val="107000"/>
-              </a:lnSpc>
-              <a:spcAft>
-                <a:spcPts val="533"/>
-              </a:spcAft>
-              <a:buNone/>
-            </a:pPr>
-            <a:r>
-              <a:rPr lang="pt-BR" sz="2000" dirty="0">
-                <a:ea typeface="Calibri" panose="020F0502020204030204" pitchFamily="34" charset="0"/>
-                <a:cs typeface="Arial" panose="020B0604020202020204" pitchFamily="34" charset="0"/>
-              </a:rPr>
-              <a:t>Trabalho:</a:t>
-            </a:r>
-          </a:p>
-          <a:p>
-            <a:pPr marL="152408" indent="0" algn="just">
-              <a:lnSpc>
-                <a:spcPct val="107000"/>
-              </a:lnSpc>
-              <a:spcAft>
-                <a:spcPts val="533"/>
-              </a:spcAft>
-              <a:buNone/>
-            </a:pPr>
-            <a:r>
-              <a:rPr lang="pt-BR" sz="2000" dirty="0">
-                <a:ea typeface="Calibri" panose="020F0502020204030204" pitchFamily="34" charset="0"/>
-                <a:cs typeface="Arial" panose="020B0604020202020204" pitchFamily="34" charset="0"/>
-              </a:rPr>
-              <a:t>Incluir e analisar no </a:t>
-            </a:r>
-            <a:r>
-              <a:rPr lang="pt-BR" sz="2000" dirty="0" err="1">
-                <a:ea typeface="Calibri" panose="020F0502020204030204" pitchFamily="34" charset="0"/>
-                <a:cs typeface="Arial" panose="020B0604020202020204" pitchFamily="34" charset="0"/>
-              </a:rPr>
-              <a:t>edge</a:t>
-            </a:r>
-            <a:r>
-              <a:rPr lang="pt-BR" sz="2000" dirty="0">
-                <a:ea typeface="Calibri" panose="020F0502020204030204" pitchFamily="34" charset="0"/>
-                <a:cs typeface="Arial" panose="020B0604020202020204" pitchFamily="34" charset="0"/>
-              </a:rPr>
-              <a:t> impulse possíveis anomalias nos dados da movimentação da cadeira de rodas pela cabeça.</a:t>
-            </a:r>
-          </a:p>
-        </p:txBody>
-      </p:sp>
-    </p:spTree>
-    <p:extLst>
-      <p:ext uri="{BB962C8B-B14F-4D97-AF65-F5344CB8AC3E}">
-        <p14:creationId xmlns:p14="http://schemas.microsoft.com/office/powerpoint/2010/main" val="3910318190"/>
-      </p:ext>
-    </p:extLst>
-  </p:cSld>
-  <p:clrMapOvr>
-    <a:masterClrMapping/>
-  </p:clrMapOvr>
-</p:sld>
-</file>
-
-<file path=ppt/slides/slide34.xml><?xml version="1.0" encoding="utf-8"?>
-<p:sld xmlns:a="http://schemas.openxmlformats.org/drawingml/2006/main" xmlns:r="http://schemas.openxmlformats.org/officeDocument/2006/relationships" xmlns:p="http://schemas.openxmlformats.org/presentationml/2006/main">
-  <p:cSld>
-    <p:bg>
-      <p:bgPr>
-        <a:blipFill dpi="0" rotWithShape="1">
-          <a:blip r:embed="rId3">
-            <a:lum/>
-          </a:blip>
-          <a:srcRect/>
-          <a:stretch>
-            <a:fillRect/>
-          </a:stretch>
-        </a:blipFill>
-        <a:effectLst/>
-      </p:bgPr>
-    </p:bg>
-    <p:spTree>
-      <p:nvGrpSpPr>
-        <p:cNvPr id="1" name=""/>
-        <p:cNvGrpSpPr/>
-        <p:nvPr/>
-      </p:nvGrpSpPr>
-      <p:grpSpPr>
-        <a:xfrm>
-          <a:off x="0" y="0"/>
-          <a:ext cx="0" cy="0"/>
-          <a:chOff x="0" y="0"/>
-          <a:chExt cx="0" cy="0"/>
-        </a:xfrm>
-      </p:grpSpPr>
-      <p:sp>
-        <p:nvSpPr>
-          <p:cNvPr id="3" name="AutoShape 2" descr="An example of graph signal reconstruction over wireless sensor network. |  Download Scientific Diagram">
-            <a:extLst>
-              <a:ext uri="{FF2B5EF4-FFF2-40B4-BE49-F238E27FC236}">
-                <a16:creationId xmlns:a16="http://schemas.microsoft.com/office/drawing/2014/main" xmlns="" id="{0166B4DD-D72A-4A54-94A7-2C38133837FD}"/>
-              </a:ext>
-            </a:extLst>
-          </p:cNvPr>
-          <p:cNvSpPr>
-            <a:spLocks noChangeAspect="1" noChangeArrowheads="1"/>
-          </p:cNvSpPr>
-          <p:nvPr/>
-        </p:nvSpPr>
-        <p:spPr bwMode="auto">
-          <a:xfrm>
-            <a:off x="5994400" y="3327400"/>
-            <a:ext cx="203200" cy="203200"/>
-          </a:xfrm>
-          <a:prstGeom prst="rect">
-            <a:avLst/>
-          </a:prstGeom>
-          <a:noFill/>
-          <a:extLst>
-            <a:ext uri="{909E8E84-426E-40DD-AFC4-6F175D3DCCD1}">
-              <a14:hiddenFill xmlns:a14="http://schemas.microsoft.com/office/drawing/2010/main">
-                <a:solidFill>
-                  <a:srgbClr val="FFFFFF"/>
-                </a:solidFill>
-              </a14:hiddenFill>
-            </a:ext>
-          </a:extLst>
-        </p:spPr>
-        <p:txBody>
-          <a:bodyPr vert="horz" wrap="square" lIns="60960" tIns="30480" rIns="60960" bIns="30480" numCol="1" anchor="t" anchorCtr="0" compatLnSpc="1">
-            <a:prstTxWarp prst="textNoShape">
-              <a:avLst/>
-            </a:prstTxWarp>
-          </a:bodyPr>
-          <a:lstStyle/>
-          <a:p>
-            <a:pPr marL="0" marR="0" lvl="0" indent="0" algn="l" defTabSz="609630" rtl="0" eaLnBrk="1" fontAlgn="auto" latinLnBrk="0" hangingPunct="1">
-              <a:lnSpc>
-                <a:spcPct val="100000"/>
-              </a:lnSpc>
-              <a:spcBef>
-                <a:spcPts val="0"/>
-              </a:spcBef>
-              <a:spcAft>
-                <a:spcPts val="0"/>
-              </a:spcAft>
-              <a:buClrTx/>
-              <a:buSzTx/>
-              <a:buFontTx/>
-              <a:buNone/>
-              <a:tabLst/>
-              <a:defRPr/>
-            </a:pPr>
-            <a:endParaRPr kumimoji="0" lang="pt-BR" sz="1200" b="0" i="0" u="none" strike="noStrike" kern="1200" cap="none" spc="0" normalizeH="0" baseline="0" noProof="0">
-              <a:ln>
-                <a:noFill/>
-              </a:ln>
-              <a:solidFill>
-                <a:prstClr val="black"/>
-              </a:solidFill>
-              <a:effectLst/>
-              <a:uLnTx/>
-              <a:uFillTx/>
-              <a:latin typeface="Calibri"/>
-              <a:ea typeface="+mn-ea"/>
-              <a:cs typeface="+mn-cs"/>
-            </a:endParaRPr>
-          </a:p>
-        </p:txBody>
-      </p:sp>
-      <p:sp>
-        <p:nvSpPr>
-          <p:cNvPr id="7" name="AutoShape 4" descr="An example of graph signal reconstruction over wireless sensor network. |  Download Scientific Diagram">
-            <a:extLst>
-              <a:ext uri="{FF2B5EF4-FFF2-40B4-BE49-F238E27FC236}">
-                <a16:creationId xmlns:a16="http://schemas.microsoft.com/office/drawing/2014/main" xmlns="" id="{14C2B67D-81A1-457E-A410-FE4350A3CCA4}"/>
-              </a:ext>
-            </a:extLst>
-          </p:cNvPr>
-          <p:cNvSpPr>
-            <a:spLocks noChangeAspect="1" noChangeArrowheads="1"/>
-          </p:cNvSpPr>
-          <p:nvPr/>
-        </p:nvSpPr>
-        <p:spPr bwMode="auto">
-          <a:xfrm>
-            <a:off x="6096000" y="3429000"/>
-            <a:ext cx="203200" cy="203200"/>
-          </a:xfrm>
-          <a:prstGeom prst="rect">
-            <a:avLst/>
-          </a:prstGeom>
-          <a:noFill/>
-          <a:extLst>
-            <a:ext uri="{909E8E84-426E-40DD-AFC4-6F175D3DCCD1}">
-              <a14:hiddenFill xmlns:a14="http://schemas.microsoft.com/office/drawing/2010/main">
-                <a:solidFill>
-                  <a:srgbClr val="FFFFFF"/>
-                </a:solidFill>
-              </a14:hiddenFill>
-            </a:ext>
-          </a:extLst>
-        </p:spPr>
-        <p:txBody>
-          <a:bodyPr vert="horz" wrap="square" lIns="60960" tIns="30480" rIns="60960" bIns="30480" numCol="1" anchor="t" anchorCtr="0" compatLnSpc="1">
-            <a:prstTxWarp prst="textNoShape">
-              <a:avLst/>
-            </a:prstTxWarp>
-          </a:bodyPr>
-          <a:lstStyle/>
-          <a:p>
-            <a:pPr marL="0" marR="0" lvl="0" indent="0" algn="l" defTabSz="609630" rtl="0" eaLnBrk="1" fontAlgn="auto" latinLnBrk="0" hangingPunct="1">
-              <a:lnSpc>
-                <a:spcPct val="100000"/>
-              </a:lnSpc>
-              <a:spcBef>
-                <a:spcPts val="0"/>
-              </a:spcBef>
-              <a:spcAft>
-                <a:spcPts val="0"/>
-              </a:spcAft>
-              <a:buClrTx/>
-              <a:buSzTx/>
-              <a:buFontTx/>
-              <a:buNone/>
-              <a:tabLst/>
-              <a:defRPr/>
-            </a:pPr>
-            <a:endParaRPr kumimoji="0" lang="pt-BR" sz="1200" b="0" i="0" u="none" strike="noStrike" kern="1200" cap="none" spc="0" normalizeH="0" baseline="0" noProof="0">
-              <a:ln>
-                <a:noFill/>
-              </a:ln>
-              <a:solidFill>
-                <a:prstClr val="black"/>
-              </a:solidFill>
-              <a:effectLst/>
-              <a:uLnTx/>
-              <a:uFillTx/>
-              <a:latin typeface="Calibri"/>
-              <a:ea typeface="+mn-ea"/>
-              <a:cs typeface="+mn-cs"/>
-            </a:endParaRPr>
-          </a:p>
-        </p:txBody>
-      </p:sp>
-      <p:sp>
-        <p:nvSpPr>
-          <p:cNvPr id="4" name="Espaço Reservado para Conteúdo 3">
-            <a:extLst>
-              <a:ext uri="{FF2B5EF4-FFF2-40B4-BE49-F238E27FC236}">
-                <a16:creationId xmlns:a16="http://schemas.microsoft.com/office/drawing/2014/main" xmlns="" id="{0349BA64-C9D7-4730-9CA9-5C4AD9FC7969}"/>
-              </a:ext>
-            </a:extLst>
-          </p:cNvPr>
-          <p:cNvSpPr>
-            <a:spLocks noGrp="1"/>
-          </p:cNvSpPr>
-          <p:nvPr>
-            <p:ph idx="1"/>
-          </p:nvPr>
-        </p:nvSpPr>
-        <p:spPr>
-          <a:xfrm>
-            <a:off x="304800" y="1066800"/>
-            <a:ext cx="9295589" cy="4330419"/>
-          </a:xfrm>
-        </p:spPr>
-        <p:txBody>
-          <a:bodyPr>
-            <a:noAutofit/>
-          </a:bodyPr>
-          <a:lstStyle/>
-          <a:p>
-            <a:pPr marL="152408" indent="0" algn="ctr">
-              <a:lnSpc>
-                <a:spcPct val="107000"/>
-              </a:lnSpc>
-              <a:spcAft>
-                <a:spcPts val="533"/>
-              </a:spcAft>
-              <a:buNone/>
-            </a:pPr>
-            <a:endParaRPr lang="pt-BR" sz="2400" dirty="0">
-              <a:ea typeface="Calibri" panose="020F0502020204030204" pitchFamily="34" charset="0"/>
-              <a:cs typeface="Arial" panose="020B0604020202020204" pitchFamily="34" charset="0"/>
-            </a:endParaRPr>
-          </a:p>
-          <a:p>
-            <a:pPr marL="152408" indent="0" algn="ctr">
-              <a:lnSpc>
-                <a:spcPct val="107000"/>
-              </a:lnSpc>
-              <a:spcAft>
-                <a:spcPts val="533"/>
-              </a:spcAft>
-              <a:buNone/>
-            </a:pPr>
-            <a:endParaRPr lang="pt-BR" sz="2400" dirty="0">
-              <a:ea typeface="Calibri" panose="020F0502020204030204" pitchFamily="34" charset="0"/>
-              <a:cs typeface="Arial" panose="020B0604020202020204" pitchFamily="34" charset="0"/>
-            </a:endParaRPr>
-          </a:p>
-          <a:p>
-            <a:pPr marL="152408" indent="0" algn="ctr">
-              <a:lnSpc>
-                <a:spcPct val="107000"/>
-              </a:lnSpc>
-              <a:spcAft>
-                <a:spcPts val="533"/>
-              </a:spcAft>
-              <a:buNone/>
-            </a:pPr>
-            <a:endParaRPr lang="pt-BR" sz="2400" dirty="0">
-              <a:ea typeface="Calibri" panose="020F0502020204030204" pitchFamily="34" charset="0"/>
-              <a:cs typeface="Arial" panose="020B0604020202020204" pitchFamily="34" charset="0"/>
-            </a:endParaRPr>
-          </a:p>
-          <a:p>
-            <a:pPr marL="152408" indent="0" algn="ctr">
-              <a:lnSpc>
-                <a:spcPct val="107000"/>
-              </a:lnSpc>
-              <a:spcAft>
-                <a:spcPts val="533"/>
-              </a:spcAft>
-              <a:buNone/>
-            </a:pPr>
-            <a:r>
-              <a:rPr lang="pt-BR" sz="2400" dirty="0">
-                <a:ea typeface="Calibri" panose="020F0502020204030204" pitchFamily="34" charset="0"/>
-                <a:cs typeface="Arial" panose="020B0604020202020204" pitchFamily="34" charset="0"/>
-              </a:rPr>
-              <a:t>Acompanhamento do trabalho final</a:t>
-            </a:r>
-          </a:p>
-          <a:p>
-            <a:pPr marL="152408" indent="0" algn="just">
-              <a:lnSpc>
-                <a:spcPct val="107000"/>
-              </a:lnSpc>
-              <a:spcAft>
-                <a:spcPts val="533"/>
-              </a:spcAft>
-              <a:buNone/>
-            </a:pPr>
-            <a:endParaRPr lang="pt-BR" sz="2000" dirty="0">
-              <a:ea typeface="Calibri" panose="020F0502020204030204" pitchFamily="34" charset="0"/>
-              <a:cs typeface="Arial" panose="020B0604020202020204" pitchFamily="34" charset="0"/>
-            </a:endParaRPr>
-          </a:p>
-        </p:txBody>
-      </p:sp>
-    </p:spTree>
-    <p:extLst>
-      <p:ext uri="{BB962C8B-B14F-4D97-AF65-F5344CB8AC3E}">
-        <p14:creationId xmlns:p14="http://schemas.microsoft.com/office/powerpoint/2010/main" val="3660226339"/>
       </p:ext>
     </p:extLst>
   </p:cSld>
@@ -19482,7 +15333,7 @@
           <p:cNvPr id="2" name="Título 1">
             <a:extLst>
               <a:ext uri="{FF2B5EF4-FFF2-40B4-BE49-F238E27FC236}">
-                <a16:creationId xmlns:a16="http://schemas.microsoft.com/office/drawing/2014/main" xmlns="" id="{5F09B89C-3183-4D52-981A-62798DDFF2B8}"/>
+                <a16:creationId xmlns:a16="http://schemas.microsoft.com/office/drawing/2014/main" id="{5F09B89C-3183-4D52-981A-62798DDFF2B8}"/>
               </a:ext>
             </a:extLst>
           </p:cNvPr>
@@ -19506,10 +15357,9 @@
           <a:lstStyle/>
           <a:p>
             <a:r>
-              <a:rPr lang="pt-BR" dirty="0" smtClean="0"/>
+              <a:rPr lang="pt-BR" dirty="0"/>
               <a:t>Clusterização</a:t>
             </a:r>
-            <a:endParaRPr lang="pt-BR" dirty="0"/>
           </a:p>
         </p:txBody>
       </p:sp>
@@ -19518,7 +15368,7 @@
           <p:cNvPr id="3" name="AutoShape 2" descr="An example of graph signal reconstruction over wireless sensor network. |  Download Scientific Diagram">
             <a:extLst>
               <a:ext uri="{FF2B5EF4-FFF2-40B4-BE49-F238E27FC236}">
-                <a16:creationId xmlns:a16="http://schemas.microsoft.com/office/drawing/2014/main" xmlns="" id="{0166B4DD-D72A-4A54-94A7-2C38133837FD}"/>
+                <a16:creationId xmlns:a16="http://schemas.microsoft.com/office/drawing/2014/main" id="{0166B4DD-D72A-4A54-94A7-2C38133837FD}"/>
               </a:ext>
             </a:extLst>
           </p:cNvPr>
@@ -19569,7 +15419,7 @@
           <p:cNvPr id="7" name="AutoShape 4" descr="An example of graph signal reconstruction over wireless sensor network. |  Download Scientific Diagram">
             <a:extLst>
               <a:ext uri="{FF2B5EF4-FFF2-40B4-BE49-F238E27FC236}">
-                <a16:creationId xmlns:a16="http://schemas.microsoft.com/office/drawing/2014/main" xmlns="" id="{14C2B67D-81A1-457E-A410-FE4350A3CCA4}"/>
+                <a16:creationId xmlns:a16="http://schemas.microsoft.com/office/drawing/2014/main" id="{14C2B67D-81A1-457E-A410-FE4350A3CCA4}"/>
               </a:ext>
             </a:extLst>
           </p:cNvPr>
@@ -19620,7 +15470,7 @@
           <p:cNvPr id="4" name="Espaço Reservado para Conteúdo 3">
             <a:extLst>
               <a:ext uri="{FF2B5EF4-FFF2-40B4-BE49-F238E27FC236}">
-                <a16:creationId xmlns:a16="http://schemas.microsoft.com/office/drawing/2014/main" xmlns="" id="{5F1B432F-F570-AEC0-CFFF-C1D9196D7234}"/>
+                <a16:creationId xmlns:a16="http://schemas.microsoft.com/office/drawing/2014/main" id="{5F1B432F-F570-AEC0-CFFF-C1D9196D7234}"/>
               </a:ext>
             </a:extLst>
           </p:cNvPr>
@@ -19673,7 +15523,7 @@
           <p:cNvPr id="4098" name="Picture 2" descr="What is K-means Clustering and it's use cases ? | by Avijit das | Medium">
             <a:extLst>
               <a:ext uri="{FF2B5EF4-FFF2-40B4-BE49-F238E27FC236}">
-                <a16:creationId xmlns:a16="http://schemas.microsoft.com/office/drawing/2014/main" xmlns="" id="{056C7919-93FD-E63C-B36E-CC710CDD6044}"/>
+                <a16:creationId xmlns:a16="http://schemas.microsoft.com/office/drawing/2014/main" id="{056C7919-93FD-E63C-B36E-CC710CDD6044}"/>
               </a:ext>
             </a:extLst>
           </p:cNvPr>
@@ -19764,7 +15614,7 @@
           <p:cNvPr id="2" name="Título 1">
             <a:extLst>
               <a:ext uri="{FF2B5EF4-FFF2-40B4-BE49-F238E27FC236}">
-                <a16:creationId xmlns:a16="http://schemas.microsoft.com/office/drawing/2014/main" xmlns="" id="{5F09B89C-3183-4D52-981A-62798DDFF2B8}"/>
+                <a16:creationId xmlns:a16="http://schemas.microsoft.com/office/drawing/2014/main" id="{5F09B89C-3183-4D52-981A-62798DDFF2B8}"/>
               </a:ext>
             </a:extLst>
           </p:cNvPr>
@@ -19804,7 +15654,7 @@
           <p:cNvPr id="3" name="AutoShape 2" descr="An example of graph signal reconstruction over wireless sensor network. |  Download Scientific Diagram">
             <a:extLst>
               <a:ext uri="{FF2B5EF4-FFF2-40B4-BE49-F238E27FC236}">
-                <a16:creationId xmlns:a16="http://schemas.microsoft.com/office/drawing/2014/main" xmlns="" id="{0166B4DD-D72A-4A54-94A7-2C38133837FD}"/>
+                <a16:creationId xmlns:a16="http://schemas.microsoft.com/office/drawing/2014/main" id="{0166B4DD-D72A-4A54-94A7-2C38133837FD}"/>
               </a:ext>
             </a:extLst>
           </p:cNvPr>
@@ -19855,7 +15705,7 @@
           <p:cNvPr id="7" name="AutoShape 4" descr="An example of graph signal reconstruction over wireless sensor network. |  Download Scientific Diagram">
             <a:extLst>
               <a:ext uri="{FF2B5EF4-FFF2-40B4-BE49-F238E27FC236}">
-                <a16:creationId xmlns:a16="http://schemas.microsoft.com/office/drawing/2014/main" xmlns="" id="{14C2B67D-81A1-457E-A410-FE4350A3CCA4}"/>
+                <a16:creationId xmlns:a16="http://schemas.microsoft.com/office/drawing/2014/main" id="{14C2B67D-81A1-457E-A410-FE4350A3CCA4}"/>
               </a:ext>
             </a:extLst>
           </p:cNvPr>
@@ -19906,7 +15756,7 @@
           <p:cNvPr id="4" name="Espaço Reservado para Conteúdo 3">
             <a:extLst>
               <a:ext uri="{FF2B5EF4-FFF2-40B4-BE49-F238E27FC236}">
-                <a16:creationId xmlns:a16="http://schemas.microsoft.com/office/drawing/2014/main" xmlns="" id="{5F1B432F-F570-AEC0-CFFF-C1D9196D7234}"/>
+                <a16:creationId xmlns:a16="http://schemas.microsoft.com/office/drawing/2014/main" id="{5F1B432F-F570-AEC0-CFFF-C1D9196D7234}"/>
               </a:ext>
             </a:extLst>
           </p:cNvPr>
@@ -19990,7 +15840,7 @@
           <p:cNvPr id="4098" name="Picture 2" descr="K-Means Clustering Algorithm - Javatpoint">
             <a:extLst>
               <a:ext uri="{FF2B5EF4-FFF2-40B4-BE49-F238E27FC236}">
-                <a16:creationId xmlns:a16="http://schemas.microsoft.com/office/drawing/2014/main" xmlns="" id="{45592E60-7087-AC09-6FA1-B6EBEB4488EC}"/>
+                <a16:creationId xmlns:a16="http://schemas.microsoft.com/office/drawing/2014/main" id="{45592E60-7087-AC09-6FA1-B6EBEB4488EC}"/>
               </a:ext>
             </a:extLst>
           </p:cNvPr>
@@ -20081,7 +15931,7 @@
           <p:cNvPr id="2" name="Título 1">
             <a:extLst>
               <a:ext uri="{FF2B5EF4-FFF2-40B4-BE49-F238E27FC236}">
-                <a16:creationId xmlns:a16="http://schemas.microsoft.com/office/drawing/2014/main" xmlns="" id="{5F09B89C-3183-4D52-981A-62798DDFF2B8}"/>
+                <a16:creationId xmlns:a16="http://schemas.microsoft.com/office/drawing/2014/main" id="{5F09B89C-3183-4D52-981A-62798DDFF2B8}"/>
               </a:ext>
             </a:extLst>
           </p:cNvPr>
@@ -20121,7 +15971,7 @@
           <p:cNvPr id="3" name="AutoShape 2" descr="An example of graph signal reconstruction over wireless sensor network. |  Download Scientific Diagram">
             <a:extLst>
               <a:ext uri="{FF2B5EF4-FFF2-40B4-BE49-F238E27FC236}">
-                <a16:creationId xmlns:a16="http://schemas.microsoft.com/office/drawing/2014/main" xmlns="" id="{0166B4DD-D72A-4A54-94A7-2C38133837FD}"/>
+                <a16:creationId xmlns:a16="http://schemas.microsoft.com/office/drawing/2014/main" id="{0166B4DD-D72A-4A54-94A7-2C38133837FD}"/>
               </a:ext>
             </a:extLst>
           </p:cNvPr>
@@ -20172,7 +16022,7 @@
           <p:cNvPr id="7" name="AutoShape 4" descr="An example of graph signal reconstruction over wireless sensor network. |  Download Scientific Diagram">
             <a:extLst>
               <a:ext uri="{FF2B5EF4-FFF2-40B4-BE49-F238E27FC236}">
-                <a16:creationId xmlns:a16="http://schemas.microsoft.com/office/drawing/2014/main" xmlns="" id="{14C2B67D-81A1-457E-A410-FE4350A3CCA4}"/>
+                <a16:creationId xmlns:a16="http://schemas.microsoft.com/office/drawing/2014/main" id="{14C2B67D-81A1-457E-A410-FE4350A3CCA4}"/>
               </a:ext>
             </a:extLst>
           </p:cNvPr>
@@ -20223,7 +16073,7 @@
           <p:cNvPr id="4" name="Espaço Reservado para Conteúdo 3">
             <a:extLst>
               <a:ext uri="{FF2B5EF4-FFF2-40B4-BE49-F238E27FC236}">
-                <a16:creationId xmlns:a16="http://schemas.microsoft.com/office/drawing/2014/main" xmlns="" id="{5F1B432F-F570-AEC0-CFFF-C1D9196D7234}"/>
+                <a16:creationId xmlns:a16="http://schemas.microsoft.com/office/drawing/2014/main" id="{5F1B432F-F570-AEC0-CFFF-C1D9196D7234}"/>
               </a:ext>
             </a:extLst>
           </p:cNvPr>
@@ -20276,7 +16126,7 @@
               <p:cNvPr id="5" name="TextBox 4">
                 <a:extLst>
                   <a:ext uri="{FF2B5EF4-FFF2-40B4-BE49-F238E27FC236}">
-                    <a16:creationId xmlns:a16="http://schemas.microsoft.com/office/drawing/2014/main" xmlns="" id="{A60E2CD0-3AFD-013C-16CC-B158E81DC1CA}"/>
+                    <a16:creationId xmlns:a16="http://schemas.microsoft.com/office/drawing/2014/main" id="{A60E2CD0-3AFD-013C-16CC-B158E81DC1CA}"/>
                   </a:ext>
                 </a:extLst>
               </p:cNvPr>
@@ -20528,7 +16378,7 @@
         <p:cNvPr id="1" name="">
           <a:extLst>
             <a:ext uri="{FF2B5EF4-FFF2-40B4-BE49-F238E27FC236}">
-              <a16:creationId xmlns:a16="http://schemas.microsoft.com/office/drawing/2014/main" xmlns="" id="{8A1FE513-AB4A-132F-B33C-C1A69C4E90BB}"/>
+              <a16:creationId xmlns:a16="http://schemas.microsoft.com/office/drawing/2014/main" id="{8A1FE513-AB4A-132F-B33C-C1A69C4E90BB}"/>
             </a:ext>
           </a:extLst>
         </p:cNvPr>
@@ -20548,7 +16398,7 @@
           <p:cNvPr id="2" name="Título 1">
             <a:extLst>
               <a:ext uri="{FF2B5EF4-FFF2-40B4-BE49-F238E27FC236}">
-                <a16:creationId xmlns:a16="http://schemas.microsoft.com/office/drawing/2014/main" xmlns="" id="{E5BC5611-534A-CB77-C071-F477937D3B59}"/>
+                <a16:creationId xmlns:a16="http://schemas.microsoft.com/office/drawing/2014/main" id="{E5BC5611-534A-CB77-C071-F477937D3B59}"/>
               </a:ext>
             </a:extLst>
           </p:cNvPr>
@@ -20588,7 +16438,7 @@
           <p:cNvPr id="3" name="AutoShape 2" descr="An example of graph signal reconstruction over wireless sensor network. |  Download Scientific Diagram">
             <a:extLst>
               <a:ext uri="{FF2B5EF4-FFF2-40B4-BE49-F238E27FC236}">
-                <a16:creationId xmlns:a16="http://schemas.microsoft.com/office/drawing/2014/main" xmlns="" id="{7E7F13EA-3BD1-43C2-79EA-B881793AD8AD}"/>
+                <a16:creationId xmlns:a16="http://schemas.microsoft.com/office/drawing/2014/main" id="{7E7F13EA-3BD1-43C2-79EA-B881793AD8AD}"/>
               </a:ext>
             </a:extLst>
           </p:cNvPr>
@@ -20639,7 +16489,7 @@
           <p:cNvPr id="7" name="AutoShape 4" descr="An example of graph signal reconstruction over wireless sensor network. |  Download Scientific Diagram">
             <a:extLst>
               <a:ext uri="{FF2B5EF4-FFF2-40B4-BE49-F238E27FC236}">
-                <a16:creationId xmlns:a16="http://schemas.microsoft.com/office/drawing/2014/main" xmlns="" id="{A0891BC2-FEAE-19E7-B671-ECE0FACC07C4}"/>
+                <a16:creationId xmlns:a16="http://schemas.microsoft.com/office/drawing/2014/main" id="{A0891BC2-FEAE-19E7-B671-ECE0FACC07C4}"/>
               </a:ext>
             </a:extLst>
           </p:cNvPr>
@@ -20690,7 +16540,7 @@
           <p:cNvPr id="4" name="Espaço Reservado para Conteúdo 3">
             <a:extLst>
               <a:ext uri="{FF2B5EF4-FFF2-40B4-BE49-F238E27FC236}">
-                <a16:creationId xmlns:a16="http://schemas.microsoft.com/office/drawing/2014/main" xmlns="" id="{747C2E78-E437-28C4-0BAF-D2D2AC1C96CB}"/>
+                <a16:creationId xmlns:a16="http://schemas.microsoft.com/office/drawing/2014/main" id="{747C2E78-E437-28C4-0BAF-D2D2AC1C96CB}"/>
               </a:ext>
             </a:extLst>
           </p:cNvPr>
@@ -20733,7 +16583,7 @@
           <p:cNvPr id="6" name="Picture 5">
             <a:extLst>
               <a:ext uri="{FF2B5EF4-FFF2-40B4-BE49-F238E27FC236}">
-                <a16:creationId xmlns:a16="http://schemas.microsoft.com/office/drawing/2014/main" xmlns="" id="{F98B536F-38AB-58C5-0FFB-41BDB557E9EF}"/>
+                <a16:creationId xmlns:a16="http://schemas.microsoft.com/office/drawing/2014/main" id="{F98B536F-38AB-58C5-0FFB-41BDB557E9EF}"/>
               </a:ext>
             </a:extLst>
           </p:cNvPr>
@@ -20763,7 +16613,7 @@
           <p:cNvPr id="8" name="TextBox 7">
             <a:extLst>
               <a:ext uri="{FF2B5EF4-FFF2-40B4-BE49-F238E27FC236}">
-                <a16:creationId xmlns:a16="http://schemas.microsoft.com/office/drawing/2014/main" xmlns="" id="{04EA9FAE-D371-68E0-2CB7-9C8893491B3B}"/>
+                <a16:creationId xmlns:a16="http://schemas.microsoft.com/office/drawing/2014/main" id="{04EA9FAE-D371-68E0-2CB7-9C8893491B3B}"/>
               </a:ext>
             </a:extLst>
           </p:cNvPr>
@@ -20787,12 +16637,8 @@
           <a:lstStyle/>
           <a:p>
             <a:r>
-              <a:rPr lang="pt-BR" dirty="0" smtClean="0"/>
-              <a:t>1. Define-se o número de clusters, K </a:t>
-            </a:r>
-            <a:r>
               <a:rPr lang="pt-BR" dirty="0"/>
-              <a:t>= 3</a:t>
+              <a:t>1. Define-se o número de clusters, K = 3</a:t>
             </a:r>
             <a:endParaRPr lang="en-US" dirty="0"/>
           </a:p>
@@ -20833,7 +16679,7 @@
         <p:cNvPr id="1" name="">
           <a:extLst>
             <a:ext uri="{FF2B5EF4-FFF2-40B4-BE49-F238E27FC236}">
-              <a16:creationId xmlns:a16="http://schemas.microsoft.com/office/drawing/2014/main" xmlns="" id="{B86C6B89-4D49-2EC0-F063-638BD6935412}"/>
+              <a16:creationId xmlns:a16="http://schemas.microsoft.com/office/drawing/2014/main" id="{B86C6B89-4D49-2EC0-F063-638BD6935412}"/>
             </a:ext>
           </a:extLst>
         </p:cNvPr>
@@ -20853,7 +16699,7 @@
           <p:cNvPr id="2" name="Título 1">
             <a:extLst>
               <a:ext uri="{FF2B5EF4-FFF2-40B4-BE49-F238E27FC236}">
-                <a16:creationId xmlns:a16="http://schemas.microsoft.com/office/drawing/2014/main" xmlns="" id="{B81115AF-9415-9558-8D7C-7CA5F9E9ED43}"/>
+                <a16:creationId xmlns:a16="http://schemas.microsoft.com/office/drawing/2014/main" id="{B81115AF-9415-9558-8D7C-7CA5F9E9ED43}"/>
               </a:ext>
             </a:extLst>
           </p:cNvPr>
@@ -20893,7 +16739,7 @@
           <p:cNvPr id="3" name="AutoShape 2" descr="An example of graph signal reconstruction over wireless sensor network. |  Download Scientific Diagram">
             <a:extLst>
               <a:ext uri="{FF2B5EF4-FFF2-40B4-BE49-F238E27FC236}">
-                <a16:creationId xmlns:a16="http://schemas.microsoft.com/office/drawing/2014/main" xmlns="" id="{55584ECE-67DE-1FFA-9FE4-D3C3D4136411}"/>
+                <a16:creationId xmlns:a16="http://schemas.microsoft.com/office/drawing/2014/main" id="{55584ECE-67DE-1FFA-9FE4-D3C3D4136411}"/>
               </a:ext>
             </a:extLst>
           </p:cNvPr>
@@ -20944,7 +16790,7 @@
           <p:cNvPr id="7" name="AutoShape 4" descr="An example of graph signal reconstruction over wireless sensor network. |  Download Scientific Diagram">
             <a:extLst>
               <a:ext uri="{FF2B5EF4-FFF2-40B4-BE49-F238E27FC236}">
-                <a16:creationId xmlns:a16="http://schemas.microsoft.com/office/drawing/2014/main" xmlns="" id="{A9D0FB6C-59DD-7620-EBAF-21BB030E5B51}"/>
+                <a16:creationId xmlns:a16="http://schemas.microsoft.com/office/drawing/2014/main" id="{A9D0FB6C-59DD-7620-EBAF-21BB030E5B51}"/>
               </a:ext>
             </a:extLst>
           </p:cNvPr>
@@ -20995,7 +16841,7 @@
           <p:cNvPr id="4" name="Espaço Reservado para Conteúdo 3">
             <a:extLst>
               <a:ext uri="{FF2B5EF4-FFF2-40B4-BE49-F238E27FC236}">
-                <a16:creationId xmlns:a16="http://schemas.microsoft.com/office/drawing/2014/main" xmlns="" id="{EC6F58C6-8849-231E-3B12-60D9682EF42B}"/>
+                <a16:creationId xmlns:a16="http://schemas.microsoft.com/office/drawing/2014/main" id="{EC6F58C6-8849-231E-3B12-60D9682EF42B}"/>
               </a:ext>
             </a:extLst>
           </p:cNvPr>
@@ -21038,7 +16884,7 @@
           <p:cNvPr id="6" name="Picture 5">
             <a:extLst>
               <a:ext uri="{FF2B5EF4-FFF2-40B4-BE49-F238E27FC236}">
-                <a16:creationId xmlns:a16="http://schemas.microsoft.com/office/drawing/2014/main" xmlns="" id="{69F3FE92-0D0B-AECE-B64E-FC9D2F3EADBC}"/>
+                <a16:creationId xmlns:a16="http://schemas.microsoft.com/office/drawing/2014/main" id="{69F3FE92-0D0B-AECE-B64E-FC9D2F3EADBC}"/>
               </a:ext>
             </a:extLst>
           </p:cNvPr>
@@ -21068,7 +16914,7 @@
           <p:cNvPr id="8" name="TextBox 7">
             <a:extLst>
               <a:ext uri="{FF2B5EF4-FFF2-40B4-BE49-F238E27FC236}">
-                <a16:creationId xmlns:a16="http://schemas.microsoft.com/office/drawing/2014/main" xmlns="" id="{5D947541-89EC-69EF-1918-6EFD56E0B3C2}"/>
+                <a16:creationId xmlns:a16="http://schemas.microsoft.com/office/drawing/2014/main" id="{5D947541-89EC-69EF-1918-6EFD56E0B3C2}"/>
               </a:ext>
             </a:extLst>
           </p:cNvPr>
@@ -21092,50 +16938,49 @@
           <a:lstStyle/>
           <a:p>
             <a:r>
-              <a:rPr lang="en-US" dirty="0" smtClean="0"/>
+              <a:rPr lang="en-US" dirty="0"/>
               <a:t>2. </a:t>
             </a:r>
             <a:r>
-              <a:rPr lang="en-US" dirty="0" err="1" smtClean="0"/>
+              <a:rPr lang="en-US" dirty="0" err="1"/>
               <a:t>Escolhe</a:t>
             </a:r>
             <a:r>
-              <a:rPr lang="en-US" dirty="0" smtClean="0"/>
+              <a:rPr lang="en-US" dirty="0"/>
               <a:t>-se </a:t>
             </a:r>
             <a:r>
-              <a:rPr lang="en-US" dirty="0" err="1" smtClean="0"/>
+              <a:rPr lang="en-US" dirty="0" err="1"/>
               <a:t>os</a:t>
             </a:r>
             <a:r>
-              <a:rPr lang="en-US" dirty="0" smtClean="0"/>
+              <a:rPr lang="en-US" dirty="0"/>
               <a:t> </a:t>
             </a:r>
             <a:r>
-              <a:rPr lang="en-US" dirty="0" err="1" smtClean="0"/>
+              <a:rPr lang="en-US" dirty="0" err="1"/>
               <a:t>centroides</a:t>
             </a:r>
             <a:r>
-              <a:rPr lang="en-US" dirty="0" smtClean="0"/>
+              <a:rPr lang="en-US" dirty="0"/>
               <a:t> para </a:t>
             </a:r>
             <a:r>
-              <a:rPr lang="en-US" dirty="0" err="1" smtClean="0"/>
+              <a:rPr lang="en-US" dirty="0" err="1"/>
               <a:t>cada</a:t>
             </a:r>
             <a:r>
-              <a:rPr lang="en-US" dirty="0" smtClean="0"/>
+              <a:rPr lang="en-US" dirty="0"/>
               <a:t> cluster de forma </a:t>
             </a:r>
             <a:r>
-              <a:rPr lang="en-US" dirty="0" err="1" smtClean="0"/>
+              <a:rPr lang="en-US" dirty="0" err="1"/>
               <a:t>aleatória</a:t>
             </a:r>
             <a:r>
-              <a:rPr lang="en-US" dirty="0" smtClean="0"/>
+              <a:rPr lang="en-US" dirty="0"/>
               <a:t>.</a:t>
             </a:r>
-            <a:endParaRPr lang="en-US" dirty="0"/>
           </a:p>
         </p:txBody>
       </p:sp>
@@ -21174,7 +17019,7 @@
         <p:cNvPr id="1" name="">
           <a:extLst>
             <a:ext uri="{FF2B5EF4-FFF2-40B4-BE49-F238E27FC236}">
-              <a16:creationId xmlns:a16="http://schemas.microsoft.com/office/drawing/2014/main" xmlns="" id="{42119100-E668-77C4-3183-771B95B265DA}"/>
+              <a16:creationId xmlns:a16="http://schemas.microsoft.com/office/drawing/2014/main" id="{42119100-E668-77C4-3183-771B95B265DA}"/>
             </a:ext>
           </a:extLst>
         </p:cNvPr>
@@ -21194,7 +17039,7 @@
           <p:cNvPr id="2" name="Título 1">
             <a:extLst>
               <a:ext uri="{FF2B5EF4-FFF2-40B4-BE49-F238E27FC236}">
-                <a16:creationId xmlns:a16="http://schemas.microsoft.com/office/drawing/2014/main" xmlns="" id="{4EBCA554-D396-DCCB-4744-F3695D6FD50E}"/>
+                <a16:creationId xmlns:a16="http://schemas.microsoft.com/office/drawing/2014/main" id="{4EBCA554-D396-DCCB-4744-F3695D6FD50E}"/>
               </a:ext>
             </a:extLst>
           </p:cNvPr>
@@ -21234,7 +17079,7 @@
           <p:cNvPr id="3" name="AutoShape 2" descr="An example of graph signal reconstruction over wireless sensor network. |  Download Scientific Diagram">
             <a:extLst>
               <a:ext uri="{FF2B5EF4-FFF2-40B4-BE49-F238E27FC236}">
-                <a16:creationId xmlns:a16="http://schemas.microsoft.com/office/drawing/2014/main" xmlns="" id="{3380BF6D-7A0A-C11E-50C6-1F567BA3A3D4}"/>
+                <a16:creationId xmlns:a16="http://schemas.microsoft.com/office/drawing/2014/main" id="{3380BF6D-7A0A-C11E-50C6-1F567BA3A3D4}"/>
               </a:ext>
             </a:extLst>
           </p:cNvPr>
@@ -21285,7 +17130,7 @@
           <p:cNvPr id="7" name="AutoShape 4" descr="An example of graph signal reconstruction over wireless sensor network. |  Download Scientific Diagram">
             <a:extLst>
               <a:ext uri="{FF2B5EF4-FFF2-40B4-BE49-F238E27FC236}">
-                <a16:creationId xmlns:a16="http://schemas.microsoft.com/office/drawing/2014/main" xmlns="" id="{52BFF569-F440-2D60-8296-D8243B2988E7}"/>
+                <a16:creationId xmlns:a16="http://schemas.microsoft.com/office/drawing/2014/main" id="{52BFF569-F440-2D60-8296-D8243B2988E7}"/>
               </a:ext>
             </a:extLst>
           </p:cNvPr>
@@ -21336,7 +17181,7 @@
           <p:cNvPr id="4" name="Espaço Reservado para Conteúdo 3">
             <a:extLst>
               <a:ext uri="{FF2B5EF4-FFF2-40B4-BE49-F238E27FC236}">
-                <a16:creationId xmlns:a16="http://schemas.microsoft.com/office/drawing/2014/main" xmlns="" id="{E0298857-CD80-B8D1-6E62-55E6C3A64A44}"/>
+                <a16:creationId xmlns:a16="http://schemas.microsoft.com/office/drawing/2014/main" id="{E0298857-CD80-B8D1-6E62-55E6C3A64A44}"/>
               </a:ext>
             </a:extLst>
           </p:cNvPr>
@@ -21379,7 +17224,7 @@
           <p:cNvPr id="6" name="Picture 5">
             <a:extLst>
               <a:ext uri="{FF2B5EF4-FFF2-40B4-BE49-F238E27FC236}">
-                <a16:creationId xmlns:a16="http://schemas.microsoft.com/office/drawing/2014/main" xmlns="" id="{1C0684BB-EFF7-DBA8-3519-25CE2A1A9632}"/>
+                <a16:creationId xmlns:a16="http://schemas.microsoft.com/office/drawing/2014/main" id="{1C0684BB-EFF7-DBA8-3519-25CE2A1A9632}"/>
               </a:ext>
             </a:extLst>
           </p:cNvPr>
@@ -21409,7 +17254,7 @@
           <p:cNvPr id="9" name="TextBox 8">
             <a:extLst>
               <a:ext uri="{FF2B5EF4-FFF2-40B4-BE49-F238E27FC236}">
-                <a16:creationId xmlns:a16="http://schemas.microsoft.com/office/drawing/2014/main" xmlns="" id="{38267D7C-379A-003E-4048-8D4DDD969EB6}"/>
+                <a16:creationId xmlns:a16="http://schemas.microsoft.com/office/drawing/2014/main" id="{38267D7C-379A-003E-4048-8D4DDD969EB6}"/>
               </a:ext>
             </a:extLst>
           </p:cNvPr>
@@ -21432,15 +17277,6 @@
           </a:bodyPr>
           <a:lstStyle/>
           <a:p>
-            <a:r>
-              <a:rPr lang="pt-BR" b="0" i="0" dirty="0" smtClean="0">
-                <a:solidFill>
-                  <a:srgbClr val="404040"/>
-                </a:solidFill>
-                <a:effectLst/>
-              </a:rPr>
-              <a:t>3. Atribui-se </a:t>
-            </a:r>
             <a:r>
               <a:rPr lang="pt-BR" b="0" i="0" dirty="0">
                 <a:solidFill>
@@ -21448,7 +17284,7 @@
                 </a:solidFill>
                 <a:effectLst/>
               </a:rPr>
-              <a:t>cada amostra ao </a:t>
+              <a:t>3. Atribui-se cada amostra ao </a:t>
             </a:r>
             <a:r>
               <a:rPr lang="pt-BR" b="0" i="0" dirty="0" err="1">
@@ -21467,10 +17303,6 @@
                 <a:effectLst/>
               </a:rPr>
               <a:t> mais próximo com base na distância euclidiana.</a:t>
-            </a:r>
-            <a:r>
-              <a:rPr lang="pt-BR" dirty="0"/>
-              <a:t/>
             </a:r>
             <a:br>
               <a:rPr lang="pt-BR" dirty="0"/>

--- a/slides/TP557_16_detecção_de_anomalias.pptx
+++ b/slides/TP557_16_detecção_de_anomalias.pptx
@@ -28,8 +28,8 @@
     <p:sldId id="629" r:id="rId16"/>
     <p:sldId id="584" r:id="rId17"/>
     <p:sldId id="630" r:id="rId18"/>
-    <p:sldId id="621" r:id="rId19"/>
-    <p:sldId id="591" r:id="rId20"/>
+    <p:sldId id="591" r:id="rId19"/>
+    <p:sldId id="621" r:id="rId20"/>
     <p:sldId id="593" r:id="rId21"/>
     <p:sldId id="603" r:id="rId22"/>
     <p:sldId id="613" r:id="rId23"/>
@@ -291,7 +291,7 @@
           <a:p>
             <a:fld id="{F7E56D9B-79AD-444A-AFED-DEC23408F8B4}" type="slidenum">
               <a:rPr lang="nl-BE" smtClean="0"/>
-              <a:t>‹#›</a:t>
+              <a:t>‹nº›</a:t>
             </a:fld>
             <a:endParaRPr lang="nl-BE"/>
           </a:p>
@@ -548,7 +548,7 @@
           <a:p>
             <a:fld id="{6FC8D850-966F-45A6-8DE7-15B891E7D40D}" type="slidenum">
               <a:rPr lang="pt-BR" smtClean="0"/>
-              <a:t>‹#›</a:t>
+              <a:t>‹nº›</a:t>
             </a:fld>
             <a:endParaRPr lang="pt-BR"/>
           </a:p>
@@ -749,7 +749,7 @@
         <p:cNvPr id="1" name="">
           <a:extLst>
             <a:ext uri="{FF2B5EF4-FFF2-40B4-BE49-F238E27FC236}">
-              <a16:creationId xmlns:a16="http://schemas.microsoft.com/office/drawing/2014/main" id="{3DC8778D-274C-4550-BFA6-2BF2EE1372DF}"/>
+              <a16:creationId xmlns:a16="http://schemas.microsoft.com/office/drawing/2014/main" xmlns="" id="{3DC8778D-274C-4550-BFA6-2BF2EE1372DF}"/>
             </a:ext>
           </a:extLst>
         </p:cNvPr>
@@ -769,7 +769,7 @@
           <p:cNvPr id="2" name="Espaço Reservado para Imagem de Slide 1">
             <a:extLst>
               <a:ext uri="{FF2B5EF4-FFF2-40B4-BE49-F238E27FC236}">
-                <a16:creationId xmlns:a16="http://schemas.microsoft.com/office/drawing/2014/main" id="{C35AD5E8-765A-E917-B919-F1F6AE347F53}"/>
+                <a16:creationId xmlns:a16="http://schemas.microsoft.com/office/drawing/2014/main" xmlns="" id="{C35AD5E8-765A-E917-B919-F1F6AE347F53}"/>
               </a:ext>
             </a:extLst>
           </p:cNvPr>
@@ -787,7 +787,7 @@
           <p:cNvPr id="3" name="Espaço Reservado para Anotações 2">
             <a:extLst>
               <a:ext uri="{FF2B5EF4-FFF2-40B4-BE49-F238E27FC236}">
-                <a16:creationId xmlns:a16="http://schemas.microsoft.com/office/drawing/2014/main" id="{9D90C0BF-FC56-01AC-3AD0-5B5E6D0FB45D}"/>
+                <a16:creationId xmlns:a16="http://schemas.microsoft.com/office/drawing/2014/main" xmlns="" id="{9D90C0BF-FC56-01AC-3AD0-5B5E6D0FB45D}"/>
               </a:ext>
             </a:extLst>
           </p:cNvPr>
@@ -812,7 +812,7 @@
           <p:cNvPr id="4" name="Espaço Reservado para Número de Slide 3">
             <a:extLst>
               <a:ext uri="{FF2B5EF4-FFF2-40B4-BE49-F238E27FC236}">
-                <a16:creationId xmlns:a16="http://schemas.microsoft.com/office/drawing/2014/main" id="{41EF1718-29E8-7DF3-052E-E040AF947292}"/>
+                <a16:creationId xmlns:a16="http://schemas.microsoft.com/office/drawing/2014/main" xmlns="" id="{41EF1718-29E8-7DF3-052E-E040AF947292}"/>
               </a:ext>
             </a:extLst>
           </p:cNvPr>
@@ -857,7 +857,7 @@
         <p:cNvPr id="1" name="">
           <a:extLst>
             <a:ext uri="{FF2B5EF4-FFF2-40B4-BE49-F238E27FC236}">
-              <a16:creationId xmlns:a16="http://schemas.microsoft.com/office/drawing/2014/main" id="{D5CE570B-6F22-A16C-FB7C-644660A08E50}"/>
+              <a16:creationId xmlns:a16="http://schemas.microsoft.com/office/drawing/2014/main" xmlns="" id="{D5CE570B-6F22-A16C-FB7C-644660A08E50}"/>
             </a:ext>
           </a:extLst>
         </p:cNvPr>
@@ -877,7 +877,7 @@
           <p:cNvPr id="2" name="Espaço Reservado para Imagem de Slide 1">
             <a:extLst>
               <a:ext uri="{FF2B5EF4-FFF2-40B4-BE49-F238E27FC236}">
-                <a16:creationId xmlns:a16="http://schemas.microsoft.com/office/drawing/2014/main" id="{54988FE9-CE61-8F19-30AA-F0093DA959FE}"/>
+                <a16:creationId xmlns:a16="http://schemas.microsoft.com/office/drawing/2014/main" xmlns="" id="{54988FE9-CE61-8F19-30AA-F0093DA959FE}"/>
               </a:ext>
             </a:extLst>
           </p:cNvPr>
@@ -895,7 +895,7 @@
           <p:cNvPr id="3" name="Espaço Reservado para Anotações 2">
             <a:extLst>
               <a:ext uri="{FF2B5EF4-FFF2-40B4-BE49-F238E27FC236}">
-                <a16:creationId xmlns:a16="http://schemas.microsoft.com/office/drawing/2014/main" id="{FF56B3B1-0912-3AF5-3099-3CC1931A01BF}"/>
+                <a16:creationId xmlns:a16="http://schemas.microsoft.com/office/drawing/2014/main" xmlns="" id="{FF56B3B1-0912-3AF5-3099-3CC1931A01BF}"/>
               </a:ext>
             </a:extLst>
           </p:cNvPr>
@@ -920,7 +920,7 @@
           <p:cNvPr id="4" name="Espaço Reservado para Número de Slide 3">
             <a:extLst>
               <a:ext uri="{FF2B5EF4-FFF2-40B4-BE49-F238E27FC236}">
-                <a16:creationId xmlns:a16="http://schemas.microsoft.com/office/drawing/2014/main" id="{EA8F2BE0-E2B3-AC2B-9D52-752913B7CF4B}"/>
+                <a16:creationId xmlns:a16="http://schemas.microsoft.com/office/drawing/2014/main" xmlns="" id="{EA8F2BE0-E2B3-AC2B-9D52-752913B7CF4B}"/>
               </a:ext>
             </a:extLst>
           </p:cNvPr>
@@ -965,7 +965,7 @@
         <p:cNvPr id="1" name="">
           <a:extLst>
             <a:ext uri="{FF2B5EF4-FFF2-40B4-BE49-F238E27FC236}">
-              <a16:creationId xmlns:a16="http://schemas.microsoft.com/office/drawing/2014/main" id="{38F770F4-9A55-E975-D43C-FCEA3ED2C1A9}"/>
+              <a16:creationId xmlns:a16="http://schemas.microsoft.com/office/drawing/2014/main" xmlns="" id="{38F770F4-9A55-E975-D43C-FCEA3ED2C1A9}"/>
             </a:ext>
           </a:extLst>
         </p:cNvPr>
@@ -985,7 +985,7 @@
           <p:cNvPr id="2" name="Espaço Reservado para Imagem de Slide 1">
             <a:extLst>
               <a:ext uri="{FF2B5EF4-FFF2-40B4-BE49-F238E27FC236}">
-                <a16:creationId xmlns:a16="http://schemas.microsoft.com/office/drawing/2014/main" id="{AEDFCAA5-FC8C-DD9C-AFC5-CB278DE7F744}"/>
+                <a16:creationId xmlns:a16="http://schemas.microsoft.com/office/drawing/2014/main" xmlns="" id="{AEDFCAA5-FC8C-DD9C-AFC5-CB278DE7F744}"/>
               </a:ext>
             </a:extLst>
           </p:cNvPr>
@@ -1003,7 +1003,7 @@
           <p:cNvPr id="3" name="Espaço Reservado para Anotações 2">
             <a:extLst>
               <a:ext uri="{FF2B5EF4-FFF2-40B4-BE49-F238E27FC236}">
-                <a16:creationId xmlns:a16="http://schemas.microsoft.com/office/drawing/2014/main" id="{D403E6E9-E099-A9A5-653E-6F0722996927}"/>
+                <a16:creationId xmlns:a16="http://schemas.microsoft.com/office/drawing/2014/main" xmlns="" id="{D403E6E9-E099-A9A5-653E-6F0722996927}"/>
               </a:ext>
             </a:extLst>
           </p:cNvPr>
@@ -1028,7 +1028,7 @@
           <p:cNvPr id="4" name="Espaço Reservado para Número de Slide 3">
             <a:extLst>
               <a:ext uri="{FF2B5EF4-FFF2-40B4-BE49-F238E27FC236}">
-                <a16:creationId xmlns:a16="http://schemas.microsoft.com/office/drawing/2014/main" id="{384EBEF5-7321-520D-7991-F3CC5AF3A56D}"/>
+                <a16:creationId xmlns:a16="http://schemas.microsoft.com/office/drawing/2014/main" xmlns="" id="{384EBEF5-7321-520D-7991-F3CC5AF3A56D}"/>
               </a:ext>
             </a:extLst>
           </p:cNvPr>
@@ -1073,7 +1073,7 @@
         <p:cNvPr id="1" name="">
           <a:extLst>
             <a:ext uri="{FF2B5EF4-FFF2-40B4-BE49-F238E27FC236}">
-              <a16:creationId xmlns:a16="http://schemas.microsoft.com/office/drawing/2014/main" id="{31D8DD9A-FB73-B3DA-6F9F-A22549E2ACF5}"/>
+              <a16:creationId xmlns:a16="http://schemas.microsoft.com/office/drawing/2014/main" xmlns="" id="{31D8DD9A-FB73-B3DA-6F9F-A22549E2ACF5}"/>
             </a:ext>
           </a:extLst>
         </p:cNvPr>
@@ -1093,7 +1093,7 @@
           <p:cNvPr id="2" name="Espaço Reservado para Imagem de Slide 1">
             <a:extLst>
               <a:ext uri="{FF2B5EF4-FFF2-40B4-BE49-F238E27FC236}">
-                <a16:creationId xmlns:a16="http://schemas.microsoft.com/office/drawing/2014/main" id="{E99B0F2D-8473-FC35-AF28-ECE2A1829004}"/>
+                <a16:creationId xmlns:a16="http://schemas.microsoft.com/office/drawing/2014/main" xmlns="" id="{E99B0F2D-8473-FC35-AF28-ECE2A1829004}"/>
               </a:ext>
             </a:extLst>
           </p:cNvPr>
@@ -1111,7 +1111,7 @@
           <p:cNvPr id="3" name="Espaço Reservado para Anotações 2">
             <a:extLst>
               <a:ext uri="{FF2B5EF4-FFF2-40B4-BE49-F238E27FC236}">
-                <a16:creationId xmlns:a16="http://schemas.microsoft.com/office/drawing/2014/main" id="{8C9962D3-EA60-94A8-A6D4-C3161BED15BF}"/>
+                <a16:creationId xmlns:a16="http://schemas.microsoft.com/office/drawing/2014/main" xmlns="" id="{8C9962D3-EA60-94A8-A6D4-C3161BED15BF}"/>
               </a:ext>
             </a:extLst>
           </p:cNvPr>
@@ -1136,7 +1136,7 @@
           <p:cNvPr id="4" name="Espaço Reservado para Número de Slide 3">
             <a:extLst>
               <a:ext uri="{FF2B5EF4-FFF2-40B4-BE49-F238E27FC236}">
-                <a16:creationId xmlns:a16="http://schemas.microsoft.com/office/drawing/2014/main" id="{1A62ECEA-4026-B0E1-9730-4E6CBBB39369}"/>
+                <a16:creationId xmlns:a16="http://schemas.microsoft.com/office/drawing/2014/main" xmlns="" id="{1A62ECEA-4026-B0E1-9730-4E6CBBB39369}"/>
               </a:ext>
             </a:extLst>
           </p:cNvPr>
@@ -1349,7 +1349,7 @@
         <p:cNvPr id="1" name="">
           <a:extLst>
             <a:ext uri="{FF2B5EF4-FFF2-40B4-BE49-F238E27FC236}">
-              <a16:creationId xmlns:a16="http://schemas.microsoft.com/office/drawing/2014/main" id="{6E955CAB-F21A-9D08-F98D-00EB95ED3441}"/>
+              <a16:creationId xmlns:a16="http://schemas.microsoft.com/office/drawing/2014/main" xmlns="" id="{6E955CAB-F21A-9D08-F98D-00EB95ED3441}"/>
             </a:ext>
           </a:extLst>
         </p:cNvPr>
@@ -1369,7 +1369,7 @@
           <p:cNvPr id="2" name="Espaço Reservado para Imagem de Slide 1">
             <a:extLst>
               <a:ext uri="{FF2B5EF4-FFF2-40B4-BE49-F238E27FC236}">
-                <a16:creationId xmlns:a16="http://schemas.microsoft.com/office/drawing/2014/main" id="{0D72ECCF-390F-6700-31C9-EBB590D4368D}"/>
+                <a16:creationId xmlns:a16="http://schemas.microsoft.com/office/drawing/2014/main" xmlns="" id="{0D72ECCF-390F-6700-31C9-EBB590D4368D}"/>
               </a:ext>
             </a:extLst>
           </p:cNvPr>
@@ -1387,7 +1387,7 @@
           <p:cNvPr id="3" name="Espaço Reservado para Anotações 2">
             <a:extLst>
               <a:ext uri="{FF2B5EF4-FFF2-40B4-BE49-F238E27FC236}">
-                <a16:creationId xmlns:a16="http://schemas.microsoft.com/office/drawing/2014/main" id="{577FA9D6-B2FE-523B-86B7-0EFD6452DDF4}"/>
+                <a16:creationId xmlns:a16="http://schemas.microsoft.com/office/drawing/2014/main" xmlns="" id="{577FA9D6-B2FE-523B-86B7-0EFD6452DDF4}"/>
               </a:ext>
             </a:extLst>
           </p:cNvPr>
@@ -1412,7 +1412,7 @@
           <p:cNvPr id="4" name="Espaço Reservado para Número de Slide 3">
             <a:extLst>
               <a:ext uri="{FF2B5EF4-FFF2-40B4-BE49-F238E27FC236}">
-                <a16:creationId xmlns:a16="http://schemas.microsoft.com/office/drawing/2014/main" id="{1DBD4D4D-75F0-64AD-BA32-1AF4C4593BDD}"/>
+                <a16:creationId xmlns:a16="http://schemas.microsoft.com/office/drawing/2014/main" xmlns="" id="{1DBD4D4D-75F0-64AD-BA32-1AF4C4593BDD}"/>
               </a:ext>
             </a:extLst>
           </p:cNvPr>
@@ -1514,7 +1514,7 @@
           <a:p>
             <a:fld id="{6FC8D850-966F-45A6-8DE7-15B891E7D40D}" type="slidenum">
               <a:rPr lang="pt-BR" smtClean="0"/>
-              <a:t>18</a:t>
+              <a:t>17</a:t>
             </a:fld>
             <a:endParaRPr lang="pt-BR"/>
           </a:p>
@@ -2789,7 +2789,7 @@
         <p:cNvPr id="1" name="">
           <a:extLst>
             <a:ext uri="{FF2B5EF4-FFF2-40B4-BE49-F238E27FC236}">
-              <a16:creationId xmlns:a16="http://schemas.microsoft.com/office/drawing/2014/main" id="{5BDAD2A1-5359-2B35-87A2-CB62DA9AC234}"/>
+              <a16:creationId xmlns:a16="http://schemas.microsoft.com/office/drawing/2014/main" xmlns="" id="{5BDAD2A1-5359-2B35-87A2-CB62DA9AC234}"/>
             </a:ext>
           </a:extLst>
         </p:cNvPr>
@@ -2809,7 +2809,7 @@
           <p:cNvPr id="2" name="Espaço Reservado para Imagem de Slide 1">
             <a:extLst>
               <a:ext uri="{FF2B5EF4-FFF2-40B4-BE49-F238E27FC236}">
-                <a16:creationId xmlns:a16="http://schemas.microsoft.com/office/drawing/2014/main" id="{E3CCF2D8-39A8-6970-A91C-CA1BB1172B74}"/>
+                <a16:creationId xmlns:a16="http://schemas.microsoft.com/office/drawing/2014/main" xmlns="" id="{E3CCF2D8-39A8-6970-A91C-CA1BB1172B74}"/>
               </a:ext>
             </a:extLst>
           </p:cNvPr>
@@ -2827,7 +2827,7 @@
           <p:cNvPr id="3" name="Espaço Reservado para Anotações 2">
             <a:extLst>
               <a:ext uri="{FF2B5EF4-FFF2-40B4-BE49-F238E27FC236}">
-                <a16:creationId xmlns:a16="http://schemas.microsoft.com/office/drawing/2014/main" id="{D2A0BCB8-A319-F2B9-61A9-80B79A20C8AD}"/>
+                <a16:creationId xmlns:a16="http://schemas.microsoft.com/office/drawing/2014/main" xmlns="" id="{D2A0BCB8-A319-F2B9-61A9-80B79A20C8AD}"/>
               </a:ext>
             </a:extLst>
           </p:cNvPr>
@@ -2852,7 +2852,7 @@
           <p:cNvPr id="4" name="Espaço Reservado para Número de Slide 3">
             <a:extLst>
               <a:ext uri="{FF2B5EF4-FFF2-40B4-BE49-F238E27FC236}">
-                <a16:creationId xmlns:a16="http://schemas.microsoft.com/office/drawing/2014/main" id="{7430ECDE-57AD-7D93-14A4-A77602871389}"/>
+                <a16:creationId xmlns:a16="http://schemas.microsoft.com/office/drawing/2014/main" xmlns="" id="{7430ECDE-57AD-7D93-14A4-A77602871389}"/>
               </a:ext>
             </a:extLst>
           </p:cNvPr>
@@ -2897,7 +2897,7 @@
         <p:cNvPr id="1" name="">
           <a:extLst>
             <a:ext uri="{FF2B5EF4-FFF2-40B4-BE49-F238E27FC236}">
-              <a16:creationId xmlns:a16="http://schemas.microsoft.com/office/drawing/2014/main" id="{2E6003E3-9C23-DFB4-E656-EE817B7B63F5}"/>
+              <a16:creationId xmlns:a16="http://schemas.microsoft.com/office/drawing/2014/main" xmlns="" id="{2E6003E3-9C23-DFB4-E656-EE817B7B63F5}"/>
             </a:ext>
           </a:extLst>
         </p:cNvPr>
@@ -2917,7 +2917,7 @@
           <p:cNvPr id="2" name="Espaço Reservado para Imagem de Slide 1">
             <a:extLst>
               <a:ext uri="{FF2B5EF4-FFF2-40B4-BE49-F238E27FC236}">
-                <a16:creationId xmlns:a16="http://schemas.microsoft.com/office/drawing/2014/main" id="{A47E6B73-509B-606A-BA52-ECD9A901942C}"/>
+                <a16:creationId xmlns:a16="http://schemas.microsoft.com/office/drawing/2014/main" xmlns="" id="{A47E6B73-509B-606A-BA52-ECD9A901942C}"/>
               </a:ext>
             </a:extLst>
           </p:cNvPr>
@@ -2935,7 +2935,7 @@
           <p:cNvPr id="3" name="Espaço Reservado para Anotações 2">
             <a:extLst>
               <a:ext uri="{FF2B5EF4-FFF2-40B4-BE49-F238E27FC236}">
-                <a16:creationId xmlns:a16="http://schemas.microsoft.com/office/drawing/2014/main" id="{1E7DD88D-B209-FE30-9F24-9AD224BF1EC8}"/>
+                <a16:creationId xmlns:a16="http://schemas.microsoft.com/office/drawing/2014/main" xmlns="" id="{1E7DD88D-B209-FE30-9F24-9AD224BF1EC8}"/>
               </a:ext>
             </a:extLst>
           </p:cNvPr>
@@ -2960,7 +2960,7 @@
           <p:cNvPr id="4" name="Espaço Reservado para Número de Slide 3">
             <a:extLst>
               <a:ext uri="{FF2B5EF4-FFF2-40B4-BE49-F238E27FC236}">
-                <a16:creationId xmlns:a16="http://schemas.microsoft.com/office/drawing/2014/main" id="{4A209F62-F946-427E-D702-876E44243A30}"/>
+                <a16:creationId xmlns:a16="http://schemas.microsoft.com/office/drawing/2014/main" xmlns="" id="{4A209F62-F946-427E-D702-876E44243A30}"/>
               </a:ext>
             </a:extLst>
           </p:cNvPr>
@@ -3005,7 +3005,7 @@
         <p:cNvPr id="1" name="">
           <a:extLst>
             <a:ext uri="{FF2B5EF4-FFF2-40B4-BE49-F238E27FC236}">
-              <a16:creationId xmlns:a16="http://schemas.microsoft.com/office/drawing/2014/main" id="{31790B8E-ACCA-F7FC-062F-E911F5C53D3B}"/>
+              <a16:creationId xmlns:a16="http://schemas.microsoft.com/office/drawing/2014/main" xmlns="" id="{31790B8E-ACCA-F7FC-062F-E911F5C53D3B}"/>
             </a:ext>
           </a:extLst>
         </p:cNvPr>
@@ -3025,7 +3025,7 @@
           <p:cNvPr id="2" name="Espaço Reservado para Imagem de Slide 1">
             <a:extLst>
               <a:ext uri="{FF2B5EF4-FFF2-40B4-BE49-F238E27FC236}">
-                <a16:creationId xmlns:a16="http://schemas.microsoft.com/office/drawing/2014/main" id="{77BBB11C-3D4E-BD82-F35A-38E1761E0CFD}"/>
+                <a16:creationId xmlns:a16="http://schemas.microsoft.com/office/drawing/2014/main" xmlns="" id="{77BBB11C-3D4E-BD82-F35A-38E1761E0CFD}"/>
               </a:ext>
             </a:extLst>
           </p:cNvPr>
@@ -3043,7 +3043,7 @@
           <p:cNvPr id="3" name="Espaço Reservado para Anotações 2">
             <a:extLst>
               <a:ext uri="{FF2B5EF4-FFF2-40B4-BE49-F238E27FC236}">
-                <a16:creationId xmlns:a16="http://schemas.microsoft.com/office/drawing/2014/main" id="{88D90C90-61FD-F2FA-BABE-D96B4D6667D3}"/>
+                <a16:creationId xmlns:a16="http://schemas.microsoft.com/office/drawing/2014/main" xmlns="" id="{88D90C90-61FD-F2FA-BABE-D96B4D6667D3}"/>
               </a:ext>
             </a:extLst>
           </p:cNvPr>
@@ -3068,7 +3068,7 @@
           <p:cNvPr id="4" name="Espaço Reservado para Número de Slide 3">
             <a:extLst>
               <a:ext uri="{FF2B5EF4-FFF2-40B4-BE49-F238E27FC236}">
-                <a16:creationId xmlns:a16="http://schemas.microsoft.com/office/drawing/2014/main" id="{281AAE74-6902-1DF5-1CE0-D34FA2800337}"/>
+                <a16:creationId xmlns:a16="http://schemas.microsoft.com/office/drawing/2014/main" xmlns="" id="{281AAE74-6902-1DF5-1CE0-D34FA2800337}"/>
               </a:ext>
             </a:extLst>
           </p:cNvPr>
@@ -3127,7 +3127,7 @@
           <p:cNvPr id="2" name="Título 1">
             <a:extLst>
               <a:ext uri="{FF2B5EF4-FFF2-40B4-BE49-F238E27FC236}">
-                <a16:creationId xmlns:a16="http://schemas.microsoft.com/office/drawing/2014/main" id="{1DB9B4FF-B06E-403C-A326-BDC64D8FF94E}"/>
+                <a16:creationId xmlns:a16="http://schemas.microsoft.com/office/drawing/2014/main" xmlns="" id="{1DB9B4FF-B06E-403C-A326-BDC64D8FF94E}"/>
               </a:ext>
             </a:extLst>
           </p:cNvPr>
@@ -3164,7 +3164,7 @@
           <p:cNvPr id="3" name="Subtítulo 2">
             <a:extLst>
               <a:ext uri="{FF2B5EF4-FFF2-40B4-BE49-F238E27FC236}">
-                <a16:creationId xmlns:a16="http://schemas.microsoft.com/office/drawing/2014/main" id="{247BDFCE-746E-45BF-A319-4733D58D1632}"/>
+                <a16:creationId xmlns:a16="http://schemas.microsoft.com/office/drawing/2014/main" xmlns="" id="{247BDFCE-746E-45BF-A319-4733D58D1632}"/>
               </a:ext>
             </a:extLst>
           </p:cNvPr>
@@ -3234,7 +3234,7 @@
           <p:cNvPr id="4" name="Espaço Reservado para Data 3">
             <a:extLst>
               <a:ext uri="{FF2B5EF4-FFF2-40B4-BE49-F238E27FC236}">
-                <a16:creationId xmlns:a16="http://schemas.microsoft.com/office/drawing/2014/main" id="{9EDE2778-5372-4104-B96D-968184DA8288}"/>
+                <a16:creationId xmlns:a16="http://schemas.microsoft.com/office/drawing/2014/main" xmlns="" id="{9EDE2778-5372-4104-B96D-968184DA8288}"/>
               </a:ext>
             </a:extLst>
           </p:cNvPr>
@@ -3263,7 +3263,7 @@
           <p:cNvPr id="5" name="Espaço Reservado para Rodapé 4">
             <a:extLst>
               <a:ext uri="{FF2B5EF4-FFF2-40B4-BE49-F238E27FC236}">
-                <a16:creationId xmlns:a16="http://schemas.microsoft.com/office/drawing/2014/main" id="{C1DD0F41-C861-4051-988D-3024A37A4B93}"/>
+                <a16:creationId xmlns:a16="http://schemas.microsoft.com/office/drawing/2014/main" xmlns="" id="{C1DD0F41-C861-4051-988D-3024A37A4B93}"/>
               </a:ext>
             </a:extLst>
           </p:cNvPr>
@@ -3288,7 +3288,7 @@
           <p:cNvPr id="6" name="Espaço Reservado para Número de Slide 5">
             <a:extLst>
               <a:ext uri="{FF2B5EF4-FFF2-40B4-BE49-F238E27FC236}">
-                <a16:creationId xmlns:a16="http://schemas.microsoft.com/office/drawing/2014/main" id="{07E5967E-D980-431A-A5DB-3F0C5030A81E}"/>
+                <a16:creationId xmlns:a16="http://schemas.microsoft.com/office/drawing/2014/main" xmlns="" id="{07E5967E-D980-431A-A5DB-3F0C5030A81E}"/>
               </a:ext>
             </a:extLst>
           </p:cNvPr>
@@ -3306,7 +3306,7 @@
           <a:p>
             <a:fld id="{1A7E88B7-70CE-4035-AE73-13FA6FB985D4}" type="slidenum">
               <a:rPr lang="pt-BR" smtClean="0"/>
-              <a:t>‹#›</a:t>
+              <a:t>‹nº›</a:t>
             </a:fld>
             <a:endParaRPr lang="pt-BR"/>
           </a:p>
@@ -3347,7 +3347,7 @@
           <p:cNvPr id="2" name="Título 1">
             <a:extLst>
               <a:ext uri="{FF2B5EF4-FFF2-40B4-BE49-F238E27FC236}">
-                <a16:creationId xmlns:a16="http://schemas.microsoft.com/office/drawing/2014/main" id="{9036C49F-3E68-4175-81BA-3C3FEE44308A}"/>
+                <a16:creationId xmlns:a16="http://schemas.microsoft.com/office/drawing/2014/main" xmlns="" id="{9036C49F-3E68-4175-81BA-3C3FEE44308A}"/>
               </a:ext>
             </a:extLst>
           </p:cNvPr>
@@ -3375,7 +3375,7 @@
           <p:cNvPr id="3" name="Espaço Reservado para Texto Vertical 2">
             <a:extLst>
               <a:ext uri="{FF2B5EF4-FFF2-40B4-BE49-F238E27FC236}">
-                <a16:creationId xmlns:a16="http://schemas.microsoft.com/office/drawing/2014/main" id="{426FA736-3DD3-4D4E-B57B-BBE1D8F7D424}"/>
+                <a16:creationId xmlns:a16="http://schemas.microsoft.com/office/drawing/2014/main" xmlns="" id="{426FA736-3DD3-4D4E-B57B-BBE1D8F7D424}"/>
               </a:ext>
             </a:extLst>
           </p:cNvPr>
@@ -3432,7 +3432,7 @@
           <p:cNvPr id="4" name="Espaço Reservado para Data 3">
             <a:extLst>
               <a:ext uri="{FF2B5EF4-FFF2-40B4-BE49-F238E27FC236}">
-                <a16:creationId xmlns:a16="http://schemas.microsoft.com/office/drawing/2014/main" id="{99E8855C-D8FD-48F6-B14E-861E0DE4D915}"/>
+                <a16:creationId xmlns:a16="http://schemas.microsoft.com/office/drawing/2014/main" xmlns="" id="{99E8855C-D8FD-48F6-B14E-861E0DE4D915}"/>
               </a:ext>
             </a:extLst>
           </p:cNvPr>
@@ -3461,7 +3461,7 @@
           <p:cNvPr id="5" name="Espaço Reservado para Rodapé 4">
             <a:extLst>
               <a:ext uri="{FF2B5EF4-FFF2-40B4-BE49-F238E27FC236}">
-                <a16:creationId xmlns:a16="http://schemas.microsoft.com/office/drawing/2014/main" id="{97C0BB88-2F21-42A5-ACFF-83DA47F2D340}"/>
+                <a16:creationId xmlns:a16="http://schemas.microsoft.com/office/drawing/2014/main" xmlns="" id="{97C0BB88-2F21-42A5-ACFF-83DA47F2D340}"/>
               </a:ext>
             </a:extLst>
           </p:cNvPr>
@@ -3486,7 +3486,7 @@
           <p:cNvPr id="6" name="Espaço Reservado para Número de Slide 5">
             <a:extLst>
               <a:ext uri="{FF2B5EF4-FFF2-40B4-BE49-F238E27FC236}">
-                <a16:creationId xmlns:a16="http://schemas.microsoft.com/office/drawing/2014/main" id="{6CB462B3-1F22-4C05-B4B8-7A279FB7D5E9}"/>
+                <a16:creationId xmlns:a16="http://schemas.microsoft.com/office/drawing/2014/main" xmlns="" id="{6CB462B3-1F22-4C05-B4B8-7A279FB7D5E9}"/>
               </a:ext>
             </a:extLst>
           </p:cNvPr>
@@ -3504,7 +3504,7 @@
           <a:p>
             <a:fld id="{1A7E88B7-70CE-4035-AE73-13FA6FB985D4}" type="slidenum">
               <a:rPr lang="pt-BR" smtClean="0"/>
-              <a:t>‹#›</a:t>
+              <a:t>‹nº›</a:t>
             </a:fld>
             <a:endParaRPr lang="pt-BR"/>
           </a:p>
@@ -3545,7 +3545,7 @@
           <p:cNvPr id="2" name="Título Vertical 1">
             <a:extLst>
               <a:ext uri="{FF2B5EF4-FFF2-40B4-BE49-F238E27FC236}">
-                <a16:creationId xmlns:a16="http://schemas.microsoft.com/office/drawing/2014/main" id="{EAEAB728-701C-4207-A9D5-23FF45C60502}"/>
+                <a16:creationId xmlns:a16="http://schemas.microsoft.com/office/drawing/2014/main" xmlns="" id="{EAEAB728-701C-4207-A9D5-23FF45C60502}"/>
               </a:ext>
             </a:extLst>
           </p:cNvPr>
@@ -3578,7 +3578,7 @@
           <p:cNvPr id="3" name="Espaço Reservado para Texto Vertical 2">
             <a:extLst>
               <a:ext uri="{FF2B5EF4-FFF2-40B4-BE49-F238E27FC236}">
-                <a16:creationId xmlns:a16="http://schemas.microsoft.com/office/drawing/2014/main" id="{BA8C8CCF-7823-480A-9A19-0F664DD17E3B}"/>
+                <a16:creationId xmlns:a16="http://schemas.microsoft.com/office/drawing/2014/main" xmlns="" id="{BA8C8CCF-7823-480A-9A19-0F664DD17E3B}"/>
               </a:ext>
             </a:extLst>
           </p:cNvPr>
@@ -3640,7 +3640,7 @@
           <p:cNvPr id="4" name="Espaço Reservado para Data 3">
             <a:extLst>
               <a:ext uri="{FF2B5EF4-FFF2-40B4-BE49-F238E27FC236}">
-                <a16:creationId xmlns:a16="http://schemas.microsoft.com/office/drawing/2014/main" id="{721D5734-7B1F-425D-942F-6EB73344027C}"/>
+                <a16:creationId xmlns:a16="http://schemas.microsoft.com/office/drawing/2014/main" xmlns="" id="{721D5734-7B1F-425D-942F-6EB73344027C}"/>
               </a:ext>
             </a:extLst>
           </p:cNvPr>
@@ -3669,7 +3669,7 @@
           <p:cNvPr id="5" name="Espaço Reservado para Rodapé 4">
             <a:extLst>
               <a:ext uri="{FF2B5EF4-FFF2-40B4-BE49-F238E27FC236}">
-                <a16:creationId xmlns:a16="http://schemas.microsoft.com/office/drawing/2014/main" id="{1E1AAEAC-F08D-45FE-89EC-B1B349A868C9}"/>
+                <a16:creationId xmlns:a16="http://schemas.microsoft.com/office/drawing/2014/main" xmlns="" id="{1E1AAEAC-F08D-45FE-89EC-B1B349A868C9}"/>
               </a:ext>
             </a:extLst>
           </p:cNvPr>
@@ -3694,7 +3694,7 @@
           <p:cNvPr id="6" name="Espaço Reservado para Número de Slide 5">
             <a:extLst>
               <a:ext uri="{FF2B5EF4-FFF2-40B4-BE49-F238E27FC236}">
-                <a16:creationId xmlns:a16="http://schemas.microsoft.com/office/drawing/2014/main" id="{BAA44493-9911-47B2-87A6-C2141A972BC8}"/>
+                <a16:creationId xmlns:a16="http://schemas.microsoft.com/office/drawing/2014/main" xmlns="" id="{BAA44493-9911-47B2-87A6-C2141A972BC8}"/>
               </a:ext>
             </a:extLst>
           </p:cNvPr>
@@ -3712,7 +3712,7 @@
           <a:p>
             <a:fld id="{1A7E88B7-70CE-4035-AE73-13FA6FB985D4}" type="slidenum">
               <a:rPr lang="pt-BR" smtClean="0"/>
-              <a:t>‹#›</a:t>
+              <a:t>‹nº›</a:t>
             </a:fld>
             <a:endParaRPr lang="pt-BR"/>
           </a:p>
@@ -3956,7 +3956,7 @@
             <a:fld id="{B6F15528-21DE-4FAA-801E-634DDDAF4B2B}" type="slidenum">
               <a:rPr lang="en-US" smtClean="0"/>
               <a:pPr/>
-              <a:t>‹#›</a:t>
+              <a:t>‹nº›</a:t>
             </a:fld>
             <a:endParaRPr lang="en-US"/>
           </a:p>
@@ -4128,7 +4128,7 @@
             <a:fld id="{B6F15528-21DE-4FAA-801E-634DDDAF4B2B}" type="slidenum">
               <a:rPr lang="en-US" smtClean="0"/>
               <a:pPr/>
-              <a:t>‹#›</a:t>
+              <a:t>‹nº›</a:t>
             </a:fld>
             <a:endParaRPr lang="en-US"/>
           </a:p>
@@ -4376,7 +4376,7 @@
             <a:fld id="{B6F15528-21DE-4FAA-801E-634DDDAF4B2B}" type="slidenum">
               <a:rPr lang="en-US" smtClean="0"/>
               <a:pPr/>
-              <a:t>‹#›</a:t>
+              <a:t>‹nº›</a:t>
             </a:fld>
             <a:endParaRPr lang="en-US"/>
           </a:p>
@@ -4666,7 +4666,7 @@
             <a:fld id="{B6F15528-21DE-4FAA-801E-634DDDAF4B2B}" type="slidenum">
               <a:rPr lang="en-US" smtClean="0"/>
               <a:pPr/>
-              <a:t>‹#›</a:t>
+              <a:t>‹nº›</a:t>
             </a:fld>
             <a:endParaRPr lang="en-US"/>
           </a:p>
@@ -5090,7 +5090,7 @@
             <a:fld id="{B6F15528-21DE-4FAA-801E-634DDDAF4B2B}" type="slidenum">
               <a:rPr lang="en-US" smtClean="0"/>
               <a:pPr/>
-              <a:t>‹#›</a:t>
+              <a:t>‹nº›</a:t>
             </a:fld>
             <a:endParaRPr lang="en-US"/>
           </a:p>
@@ -5210,7 +5210,7 @@
             <a:fld id="{B6F15528-21DE-4FAA-801E-634DDDAF4B2B}" type="slidenum">
               <a:rPr lang="en-US" smtClean="0"/>
               <a:pPr/>
-              <a:t>‹#›</a:t>
+              <a:t>‹nº›</a:t>
             </a:fld>
             <a:endParaRPr lang="en-US"/>
           </a:p>
@@ -5307,7 +5307,7 @@
             <a:fld id="{B6F15528-21DE-4FAA-801E-634DDDAF4B2B}" type="slidenum">
               <a:rPr lang="en-US" smtClean="0"/>
               <a:pPr/>
-              <a:t>‹#›</a:t>
+              <a:t>‹nº›</a:t>
             </a:fld>
             <a:endParaRPr lang="en-US"/>
           </a:p>
@@ -5586,7 +5586,7 @@
             <a:fld id="{B6F15528-21DE-4FAA-801E-634DDDAF4B2B}" type="slidenum">
               <a:rPr lang="en-US" smtClean="0"/>
               <a:pPr/>
-              <a:t>‹#›</a:t>
+              <a:t>‹nº›</a:t>
             </a:fld>
             <a:endParaRPr lang="en-US"/>
           </a:p>
@@ -5627,7 +5627,7 @@
           <p:cNvPr id="2" name="Título 1">
             <a:extLst>
               <a:ext uri="{FF2B5EF4-FFF2-40B4-BE49-F238E27FC236}">
-                <a16:creationId xmlns:a16="http://schemas.microsoft.com/office/drawing/2014/main" id="{71BD44A5-8F21-4626-A01D-48A1C874B1D5}"/>
+                <a16:creationId xmlns:a16="http://schemas.microsoft.com/office/drawing/2014/main" xmlns="" id="{71BD44A5-8F21-4626-A01D-48A1C874B1D5}"/>
               </a:ext>
             </a:extLst>
           </p:cNvPr>
@@ -5655,7 +5655,7 @@
           <p:cNvPr id="3" name="Espaço Reservado para Conteúdo 2">
             <a:extLst>
               <a:ext uri="{FF2B5EF4-FFF2-40B4-BE49-F238E27FC236}">
-                <a16:creationId xmlns:a16="http://schemas.microsoft.com/office/drawing/2014/main" id="{B79E8085-65A9-48AA-951D-71D978BFF4ED}"/>
+                <a16:creationId xmlns:a16="http://schemas.microsoft.com/office/drawing/2014/main" xmlns="" id="{B79E8085-65A9-48AA-951D-71D978BFF4ED}"/>
               </a:ext>
             </a:extLst>
           </p:cNvPr>
@@ -5712,7 +5712,7 @@
           <p:cNvPr id="4" name="Espaço Reservado para Data 3">
             <a:extLst>
               <a:ext uri="{FF2B5EF4-FFF2-40B4-BE49-F238E27FC236}">
-                <a16:creationId xmlns:a16="http://schemas.microsoft.com/office/drawing/2014/main" id="{F05BE1AF-51EA-425D-B188-DE7BD675009F}"/>
+                <a16:creationId xmlns:a16="http://schemas.microsoft.com/office/drawing/2014/main" xmlns="" id="{F05BE1AF-51EA-425D-B188-DE7BD675009F}"/>
               </a:ext>
             </a:extLst>
           </p:cNvPr>
@@ -5741,7 +5741,7 @@
           <p:cNvPr id="5" name="Espaço Reservado para Rodapé 4">
             <a:extLst>
               <a:ext uri="{FF2B5EF4-FFF2-40B4-BE49-F238E27FC236}">
-                <a16:creationId xmlns:a16="http://schemas.microsoft.com/office/drawing/2014/main" id="{121BE632-29CF-4CB9-B365-C9EF38F89BE6}"/>
+                <a16:creationId xmlns:a16="http://schemas.microsoft.com/office/drawing/2014/main" xmlns="" id="{121BE632-29CF-4CB9-B365-C9EF38F89BE6}"/>
               </a:ext>
             </a:extLst>
           </p:cNvPr>
@@ -5766,7 +5766,7 @@
           <p:cNvPr id="6" name="Espaço Reservado para Número de Slide 5">
             <a:extLst>
               <a:ext uri="{FF2B5EF4-FFF2-40B4-BE49-F238E27FC236}">
-                <a16:creationId xmlns:a16="http://schemas.microsoft.com/office/drawing/2014/main" id="{60CF3DD1-9AEC-4A57-B461-4E4DD86FAC18}"/>
+                <a16:creationId xmlns:a16="http://schemas.microsoft.com/office/drawing/2014/main" xmlns="" id="{60CF3DD1-9AEC-4A57-B461-4E4DD86FAC18}"/>
               </a:ext>
             </a:extLst>
           </p:cNvPr>
@@ -5784,7 +5784,7 @@
           <a:p>
             <a:fld id="{1A7E88B7-70CE-4035-AE73-13FA6FB985D4}" type="slidenum">
               <a:rPr lang="pt-BR" smtClean="0"/>
-              <a:t>‹#›</a:t>
+              <a:t>‹nº›</a:t>
             </a:fld>
             <a:endParaRPr lang="pt-BR"/>
           </a:p>
@@ -6043,7 +6043,7 @@
             <a:fld id="{B6F15528-21DE-4FAA-801E-634DDDAF4B2B}" type="slidenum">
               <a:rPr lang="en-US" smtClean="0"/>
               <a:pPr/>
-              <a:t>‹#›</a:t>
+              <a:t>‹nº›</a:t>
             </a:fld>
             <a:endParaRPr lang="en-US"/>
           </a:p>
@@ -6215,7 +6215,7 @@
             <a:fld id="{B6F15528-21DE-4FAA-801E-634DDDAF4B2B}" type="slidenum">
               <a:rPr lang="en-US" smtClean="0"/>
               <a:pPr/>
-              <a:t>‹#›</a:t>
+              <a:t>‹nº›</a:t>
             </a:fld>
             <a:endParaRPr lang="en-US"/>
           </a:p>
@@ -6397,7 +6397,7 @@
             <a:fld id="{B6F15528-21DE-4FAA-801E-634DDDAF4B2B}" type="slidenum">
               <a:rPr lang="en-US" smtClean="0"/>
               <a:pPr/>
-              <a:t>‹#›</a:t>
+              <a:t>‹nº›</a:t>
             </a:fld>
             <a:endParaRPr lang="en-US"/>
           </a:p>
@@ -6438,7 +6438,7 @@
           <p:cNvPr id="2" name="Título 1">
             <a:extLst>
               <a:ext uri="{FF2B5EF4-FFF2-40B4-BE49-F238E27FC236}">
-                <a16:creationId xmlns:a16="http://schemas.microsoft.com/office/drawing/2014/main" id="{34AB2FF0-A4D7-4E28-991D-FF26140D5988}"/>
+                <a16:creationId xmlns:a16="http://schemas.microsoft.com/office/drawing/2014/main" xmlns="" id="{34AB2FF0-A4D7-4E28-991D-FF26140D5988}"/>
               </a:ext>
             </a:extLst>
           </p:cNvPr>
@@ -6475,7 +6475,7 @@
           <p:cNvPr id="3" name="Espaço Reservado para Texto 2">
             <a:extLst>
               <a:ext uri="{FF2B5EF4-FFF2-40B4-BE49-F238E27FC236}">
-                <a16:creationId xmlns:a16="http://schemas.microsoft.com/office/drawing/2014/main" id="{E2AC45B0-4145-40DB-8E61-105461170604}"/>
+                <a16:creationId xmlns:a16="http://schemas.microsoft.com/office/drawing/2014/main" xmlns="" id="{E2AC45B0-4145-40DB-8E61-105461170604}"/>
               </a:ext>
             </a:extLst>
           </p:cNvPr>
@@ -6600,7 +6600,7 @@
           <p:cNvPr id="4" name="Espaço Reservado para Data 3">
             <a:extLst>
               <a:ext uri="{FF2B5EF4-FFF2-40B4-BE49-F238E27FC236}">
-                <a16:creationId xmlns:a16="http://schemas.microsoft.com/office/drawing/2014/main" id="{50F1D3FB-740A-4EBA-A309-2CE71D12ECFB}"/>
+                <a16:creationId xmlns:a16="http://schemas.microsoft.com/office/drawing/2014/main" xmlns="" id="{50F1D3FB-740A-4EBA-A309-2CE71D12ECFB}"/>
               </a:ext>
             </a:extLst>
           </p:cNvPr>
@@ -6629,7 +6629,7 @@
           <p:cNvPr id="5" name="Espaço Reservado para Rodapé 4">
             <a:extLst>
               <a:ext uri="{FF2B5EF4-FFF2-40B4-BE49-F238E27FC236}">
-                <a16:creationId xmlns:a16="http://schemas.microsoft.com/office/drawing/2014/main" id="{BDCAB18F-8715-4465-A940-F9C193A2ACE9}"/>
+                <a16:creationId xmlns:a16="http://schemas.microsoft.com/office/drawing/2014/main" xmlns="" id="{BDCAB18F-8715-4465-A940-F9C193A2ACE9}"/>
               </a:ext>
             </a:extLst>
           </p:cNvPr>
@@ -6654,7 +6654,7 @@
           <p:cNvPr id="6" name="Espaço Reservado para Número de Slide 5">
             <a:extLst>
               <a:ext uri="{FF2B5EF4-FFF2-40B4-BE49-F238E27FC236}">
-                <a16:creationId xmlns:a16="http://schemas.microsoft.com/office/drawing/2014/main" id="{353466C6-8248-429F-8056-FF040BF509EB}"/>
+                <a16:creationId xmlns:a16="http://schemas.microsoft.com/office/drawing/2014/main" xmlns="" id="{353466C6-8248-429F-8056-FF040BF509EB}"/>
               </a:ext>
             </a:extLst>
           </p:cNvPr>
@@ -6672,7 +6672,7 @@
           <a:p>
             <a:fld id="{1A7E88B7-70CE-4035-AE73-13FA6FB985D4}" type="slidenum">
               <a:rPr lang="pt-BR" smtClean="0"/>
-              <a:t>‹#›</a:t>
+              <a:t>‹nº›</a:t>
             </a:fld>
             <a:endParaRPr lang="pt-BR"/>
           </a:p>
@@ -6713,7 +6713,7 @@
           <p:cNvPr id="2" name="Título 1">
             <a:extLst>
               <a:ext uri="{FF2B5EF4-FFF2-40B4-BE49-F238E27FC236}">
-                <a16:creationId xmlns:a16="http://schemas.microsoft.com/office/drawing/2014/main" id="{BC7BB9F0-F14B-4A91-B2B7-35BC47FE4DE7}"/>
+                <a16:creationId xmlns:a16="http://schemas.microsoft.com/office/drawing/2014/main" xmlns="" id="{BC7BB9F0-F14B-4A91-B2B7-35BC47FE4DE7}"/>
               </a:ext>
             </a:extLst>
           </p:cNvPr>
@@ -6741,7 +6741,7 @@
           <p:cNvPr id="3" name="Espaço Reservado para Conteúdo 2">
             <a:extLst>
               <a:ext uri="{FF2B5EF4-FFF2-40B4-BE49-F238E27FC236}">
-                <a16:creationId xmlns:a16="http://schemas.microsoft.com/office/drawing/2014/main" id="{EC1FC1C4-73DA-47A6-8496-B0B457F7D39A}"/>
+                <a16:creationId xmlns:a16="http://schemas.microsoft.com/office/drawing/2014/main" xmlns="" id="{EC1FC1C4-73DA-47A6-8496-B0B457F7D39A}"/>
               </a:ext>
             </a:extLst>
           </p:cNvPr>
@@ -6803,7 +6803,7 @@
           <p:cNvPr id="4" name="Espaço Reservado para Conteúdo 3">
             <a:extLst>
               <a:ext uri="{FF2B5EF4-FFF2-40B4-BE49-F238E27FC236}">
-                <a16:creationId xmlns:a16="http://schemas.microsoft.com/office/drawing/2014/main" id="{E92F06A8-A449-4D92-9912-76873E529B38}"/>
+                <a16:creationId xmlns:a16="http://schemas.microsoft.com/office/drawing/2014/main" xmlns="" id="{E92F06A8-A449-4D92-9912-76873E529B38}"/>
               </a:ext>
             </a:extLst>
           </p:cNvPr>
@@ -6865,7 +6865,7 @@
           <p:cNvPr id="5" name="Espaço Reservado para Data 4">
             <a:extLst>
               <a:ext uri="{FF2B5EF4-FFF2-40B4-BE49-F238E27FC236}">
-                <a16:creationId xmlns:a16="http://schemas.microsoft.com/office/drawing/2014/main" id="{938070A4-BC2F-4D55-BD8D-DEAF11BB9EE9}"/>
+                <a16:creationId xmlns:a16="http://schemas.microsoft.com/office/drawing/2014/main" xmlns="" id="{938070A4-BC2F-4D55-BD8D-DEAF11BB9EE9}"/>
               </a:ext>
             </a:extLst>
           </p:cNvPr>
@@ -6894,7 +6894,7 @@
           <p:cNvPr id="6" name="Espaço Reservado para Rodapé 5">
             <a:extLst>
               <a:ext uri="{FF2B5EF4-FFF2-40B4-BE49-F238E27FC236}">
-                <a16:creationId xmlns:a16="http://schemas.microsoft.com/office/drawing/2014/main" id="{45CC2DB8-844A-465F-BA9A-7734C80C7F43}"/>
+                <a16:creationId xmlns:a16="http://schemas.microsoft.com/office/drawing/2014/main" xmlns="" id="{45CC2DB8-844A-465F-BA9A-7734C80C7F43}"/>
               </a:ext>
             </a:extLst>
           </p:cNvPr>
@@ -6919,7 +6919,7 @@
           <p:cNvPr id="7" name="Espaço Reservado para Número de Slide 6">
             <a:extLst>
               <a:ext uri="{FF2B5EF4-FFF2-40B4-BE49-F238E27FC236}">
-                <a16:creationId xmlns:a16="http://schemas.microsoft.com/office/drawing/2014/main" id="{4CC606A8-097B-4040-94E0-CD8C88280D8F}"/>
+                <a16:creationId xmlns:a16="http://schemas.microsoft.com/office/drawing/2014/main" xmlns="" id="{4CC606A8-097B-4040-94E0-CD8C88280D8F}"/>
               </a:ext>
             </a:extLst>
           </p:cNvPr>
@@ -6937,7 +6937,7 @@
           <a:p>
             <a:fld id="{1A7E88B7-70CE-4035-AE73-13FA6FB985D4}" type="slidenum">
               <a:rPr lang="pt-BR" smtClean="0"/>
-              <a:t>‹#›</a:t>
+              <a:t>‹nº›</a:t>
             </a:fld>
             <a:endParaRPr lang="pt-BR"/>
           </a:p>
@@ -6978,7 +6978,7 @@
           <p:cNvPr id="2" name="Título 1">
             <a:extLst>
               <a:ext uri="{FF2B5EF4-FFF2-40B4-BE49-F238E27FC236}">
-                <a16:creationId xmlns:a16="http://schemas.microsoft.com/office/drawing/2014/main" id="{76D66686-0143-4CB6-8C09-BA326F1E7ACA}"/>
+                <a16:creationId xmlns:a16="http://schemas.microsoft.com/office/drawing/2014/main" xmlns="" id="{76D66686-0143-4CB6-8C09-BA326F1E7ACA}"/>
               </a:ext>
             </a:extLst>
           </p:cNvPr>
@@ -7011,7 +7011,7 @@
           <p:cNvPr id="3" name="Espaço Reservado para Texto 2">
             <a:extLst>
               <a:ext uri="{FF2B5EF4-FFF2-40B4-BE49-F238E27FC236}">
-                <a16:creationId xmlns:a16="http://schemas.microsoft.com/office/drawing/2014/main" id="{0227AB85-F59E-4BCE-B846-4FA0992C2F23}"/>
+                <a16:creationId xmlns:a16="http://schemas.microsoft.com/office/drawing/2014/main" xmlns="" id="{0227AB85-F59E-4BCE-B846-4FA0992C2F23}"/>
               </a:ext>
             </a:extLst>
           </p:cNvPr>
@@ -7082,7 +7082,7 @@
           <p:cNvPr id="4" name="Espaço Reservado para Conteúdo 3">
             <a:extLst>
               <a:ext uri="{FF2B5EF4-FFF2-40B4-BE49-F238E27FC236}">
-                <a16:creationId xmlns:a16="http://schemas.microsoft.com/office/drawing/2014/main" id="{3373456C-7319-4D0A-827D-D29F6B083F5D}"/>
+                <a16:creationId xmlns:a16="http://schemas.microsoft.com/office/drawing/2014/main" xmlns="" id="{3373456C-7319-4D0A-827D-D29F6B083F5D}"/>
               </a:ext>
             </a:extLst>
           </p:cNvPr>
@@ -7144,7 +7144,7 @@
           <p:cNvPr id="5" name="Espaço Reservado para Texto 4">
             <a:extLst>
               <a:ext uri="{FF2B5EF4-FFF2-40B4-BE49-F238E27FC236}">
-                <a16:creationId xmlns:a16="http://schemas.microsoft.com/office/drawing/2014/main" id="{4CD109D0-2E83-4262-8029-A871CEC47406}"/>
+                <a16:creationId xmlns:a16="http://schemas.microsoft.com/office/drawing/2014/main" xmlns="" id="{4CD109D0-2E83-4262-8029-A871CEC47406}"/>
               </a:ext>
             </a:extLst>
           </p:cNvPr>
@@ -7215,7 +7215,7 @@
           <p:cNvPr id="6" name="Espaço Reservado para Conteúdo 5">
             <a:extLst>
               <a:ext uri="{FF2B5EF4-FFF2-40B4-BE49-F238E27FC236}">
-                <a16:creationId xmlns:a16="http://schemas.microsoft.com/office/drawing/2014/main" id="{AD706E3A-CFBB-4A6C-A65F-D0360A9E74FE}"/>
+                <a16:creationId xmlns:a16="http://schemas.microsoft.com/office/drawing/2014/main" xmlns="" id="{AD706E3A-CFBB-4A6C-A65F-D0360A9E74FE}"/>
               </a:ext>
             </a:extLst>
           </p:cNvPr>
@@ -7277,7 +7277,7 @@
           <p:cNvPr id="7" name="Espaço Reservado para Data 6">
             <a:extLst>
               <a:ext uri="{FF2B5EF4-FFF2-40B4-BE49-F238E27FC236}">
-                <a16:creationId xmlns:a16="http://schemas.microsoft.com/office/drawing/2014/main" id="{4172C0E5-5AF0-4805-BB51-443733CD2BD5}"/>
+                <a16:creationId xmlns:a16="http://schemas.microsoft.com/office/drawing/2014/main" xmlns="" id="{4172C0E5-5AF0-4805-BB51-443733CD2BD5}"/>
               </a:ext>
             </a:extLst>
           </p:cNvPr>
@@ -7306,7 +7306,7 @@
           <p:cNvPr id="8" name="Espaço Reservado para Rodapé 7">
             <a:extLst>
               <a:ext uri="{FF2B5EF4-FFF2-40B4-BE49-F238E27FC236}">
-                <a16:creationId xmlns:a16="http://schemas.microsoft.com/office/drawing/2014/main" id="{0E801648-156F-497E-99CF-797DF48051E1}"/>
+                <a16:creationId xmlns:a16="http://schemas.microsoft.com/office/drawing/2014/main" xmlns="" id="{0E801648-156F-497E-99CF-797DF48051E1}"/>
               </a:ext>
             </a:extLst>
           </p:cNvPr>
@@ -7331,7 +7331,7 @@
           <p:cNvPr id="9" name="Espaço Reservado para Número de Slide 8">
             <a:extLst>
               <a:ext uri="{FF2B5EF4-FFF2-40B4-BE49-F238E27FC236}">
-                <a16:creationId xmlns:a16="http://schemas.microsoft.com/office/drawing/2014/main" id="{EEE23D32-80E7-4796-A137-66BF842E4B53}"/>
+                <a16:creationId xmlns:a16="http://schemas.microsoft.com/office/drawing/2014/main" xmlns="" id="{EEE23D32-80E7-4796-A137-66BF842E4B53}"/>
               </a:ext>
             </a:extLst>
           </p:cNvPr>
@@ -7349,7 +7349,7 @@
           <a:p>
             <a:fld id="{1A7E88B7-70CE-4035-AE73-13FA6FB985D4}" type="slidenum">
               <a:rPr lang="pt-BR" smtClean="0"/>
-              <a:t>‹#›</a:t>
+              <a:t>‹nº›</a:t>
             </a:fld>
             <a:endParaRPr lang="pt-BR"/>
           </a:p>
@@ -7390,7 +7390,7 @@
           <p:cNvPr id="2" name="Título 1">
             <a:extLst>
               <a:ext uri="{FF2B5EF4-FFF2-40B4-BE49-F238E27FC236}">
-                <a16:creationId xmlns:a16="http://schemas.microsoft.com/office/drawing/2014/main" id="{2BCE2379-C78F-47E1-8CFC-B846E7AF148D}"/>
+                <a16:creationId xmlns:a16="http://schemas.microsoft.com/office/drawing/2014/main" xmlns="" id="{2BCE2379-C78F-47E1-8CFC-B846E7AF148D}"/>
               </a:ext>
             </a:extLst>
           </p:cNvPr>
@@ -7418,7 +7418,7 @@
           <p:cNvPr id="3" name="Espaço Reservado para Data 2">
             <a:extLst>
               <a:ext uri="{FF2B5EF4-FFF2-40B4-BE49-F238E27FC236}">
-                <a16:creationId xmlns:a16="http://schemas.microsoft.com/office/drawing/2014/main" id="{342600A9-7F92-4E22-9D94-E4717252A817}"/>
+                <a16:creationId xmlns:a16="http://schemas.microsoft.com/office/drawing/2014/main" xmlns="" id="{342600A9-7F92-4E22-9D94-E4717252A817}"/>
               </a:ext>
             </a:extLst>
           </p:cNvPr>
@@ -7447,7 +7447,7 @@
           <p:cNvPr id="4" name="Espaço Reservado para Rodapé 3">
             <a:extLst>
               <a:ext uri="{FF2B5EF4-FFF2-40B4-BE49-F238E27FC236}">
-                <a16:creationId xmlns:a16="http://schemas.microsoft.com/office/drawing/2014/main" id="{192E6BED-F546-40CC-A2DF-99CBA853654E}"/>
+                <a16:creationId xmlns:a16="http://schemas.microsoft.com/office/drawing/2014/main" xmlns="" id="{192E6BED-F546-40CC-A2DF-99CBA853654E}"/>
               </a:ext>
             </a:extLst>
           </p:cNvPr>
@@ -7472,7 +7472,7 @@
           <p:cNvPr id="5" name="Espaço Reservado para Número de Slide 4">
             <a:extLst>
               <a:ext uri="{FF2B5EF4-FFF2-40B4-BE49-F238E27FC236}">
-                <a16:creationId xmlns:a16="http://schemas.microsoft.com/office/drawing/2014/main" id="{6091CC40-A8C4-4063-80EB-CC5099621678}"/>
+                <a16:creationId xmlns:a16="http://schemas.microsoft.com/office/drawing/2014/main" xmlns="" id="{6091CC40-A8C4-4063-80EB-CC5099621678}"/>
               </a:ext>
             </a:extLst>
           </p:cNvPr>
@@ -7490,7 +7490,7 @@
           <a:p>
             <a:fld id="{1A7E88B7-70CE-4035-AE73-13FA6FB985D4}" type="slidenum">
               <a:rPr lang="pt-BR" smtClean="0"/>
-              <a:t>‹#›</a:t>
+              <a:t>‹nº›</a:t>
             </a:fld>
             <a:endParaRPr lang="pt-BR"/>
           </a:p>
@@ -7531,7 +7531,7 @@
           <p:cNvPr id="2" name="Espaço Reservado para Data 1">
             <a:extLst>
               <a:ext uri="{FF2B5EF4-FFF2-40B4-BE49-F238E27FC236}">
-                <a16:creationId xmlns:a16="http://schemas.microsoft.com/office/drawing/2014/main" id="{DD19515C-212C-4EAE-84A3-8FF4BC844F1B}"/>
+                <a16:creationId xmlns:a16="http://schemas.microsoft.com/office/drawing/2014/main" xmlns="" id="{DD19515C-212C-4EAE-84A3-8FF4BC844F1B}"/>
               </a:ext>
             </a:extLst>
           </p:cNvPr>
@@ -7560,7 +7560,7 @@
           <p:cNvPr id="3" name="Espaço Reservado para Rodapé 2">
             <a:extLst>
               <a:ext uri="{FF2B5EF4-FFF2-40B4-BE49-F238E27FC236}">
-                <a16:creationId xmlns:a16="http://schemas.microsoft.com/office/drawing/2014/main" id="{94D3D120-B3E8-4C96-861D-7A4F12F49B3A}"/>
+                <a16:creationId xmlns:a16="http://schemas.microsoft.com/office/drawing/2014/main" xmlns="" id="{94D3D120-B3E8-4C96-861D-7A4F12F49B3A}"/>
               </a:ext>
             </a:extLst>
           </p:cNvPr>
@@ -7585,7 +7585,7 @@
           <p:cNvPr id="4" name="Espaço Reservado para Número de Slide 3">
             <a:extLst>
               <a:ext uri="{FF2B5EF4-FFF2-40B4-BE49-F238E27FC236}">
-                <a16:creationId xmlns:a16="http://schemas.microsoft.com/office/drawing/2014/main" id="{42E49B68-FA1B-468B-9F17-D5C09243D454}"/>
+                <a16:creationId xmlns:a16="http://schemas.microsoft.com/office/drawing/2014/main" xmlns="" id="{42E49B68-FA1B-468B-9F17-D5C09243D454}"/>
               </a:ext>
             </a:extLst>
           </p:cNvPr>
@@ -7603,7 +7603,7 @@
           <a:p>
             <a:fld id="{1A7E88B7-70CE-4035-AE73-13FA6FB985D4}" type="slidenum">
               <a:rPr lang="pt-BR" smtClean="0"/>
-              <a:t>‹#›</a:t>
+              <a:t>‹nº›</a:t>
             </a:fld>
             <a:endParaRPr lang="pt-BR"/>
           </a:p>
@@ -7644,7 +7644,7 @@
           <p:cNvPr id="2" name="Título 1">
             <a:extLst>
               <a:ext uri="{FF2B5EF4-FFF2-40B4-BE49-F238E27FC236}">
-                <a16:creationId xmlns:a16="http://schemas.microsoft.com/office/drawing/2014/main" id="{1C17BCBE-A897-4319-85EC-D87909C24980}"/>
+                <a16:creationId xmlns:a16="http://schemas.microsoft.com/office/drawing/2014/main" xmlns="" id="{1C17BCBE-A897-4319-85EC-D87909C24980}"/>
               </a:ext>
             </a:extLst>
           </p:cNvPr>
@@ -7681,7 +7681,7 @@
           <p:cNvPr id="3" name="Espaço Reservado para Conteúdo 2">
             <a:extLst>
               <a:ext uri="{FF2B5EF4-FFF2-40B4-BE49-F238E27FC236}">
-                <a16:creationId xmlns:a16="http://schemas.microsoft.com/office/drawing/2014/main" id="{4226F885-0204-4913-868B-4B8B82576F17}"/>
+                <a16:creationId xmlns:a16="http://schemas.microsoft.com/office/drawing/2014/main" xmlns="" id="{4226F885-0204-4913-868B-4B8B82576F17}"/>
               </a:ext>
             </a:extLst>
           </p:cNvPr>
@@ -7771,7 +7771,7 @@
           <p:cNvPr id="4" name="Espaço Reservado para Texto 3">
             <a:extLst>
               <a:ext uri="{FF2B5EF4-FFF2-40B4-BE49-F238E27FC236}">
-                <a16:creationId xmlns:a16="http://schemas.microsoft.com/office/drawing/2014/main" id="{00F9F784-A858-441B-8AB5-697098141751}"/>
+                <a16:creationId xmlns:a16="http://schemas.microsoft.com/office/drawing/2014/main" xmlns="" id="{00F9F784-A858-441B-8AB5-697098141751}"/>
               </a:ext>
             </a:extLst>
           </p:cNvPr>
@@ -7842,7 +7842,7 @@
           <p:cNvPr id="5" name="Espaço Reservado para Data 4">
             <a:extLst>
               <a:ext uri="{FF2B5EF4-FFF2-40B4-BE49-F238E27FC236}">
-                <a16:creationId xmlns:a16="http://schemas.microsoft.com/office/drawing/2014/main" id="{A4DC363A-5000-472E-8B17-02E7DCB8840A}"/>
+                <a16:creationId xmlns:a16="http://schemas.microsoft.com/office/drawing/2014/main" xmlns="" id="{A4DC363A-5000-472E-8B17-02E7DCB8840A}"/>
               </a:ext>
             </a:extLst>
           </p:cNvPr>
@@ -7871,7 +7871,7 @@
           <p:cNvPr id="6" name="Espaço Reservado para Rodapé 5">
             <a:extLst>
               <a:ext uri="{FF2B5EF4-FFF2-40B4-BE49-F238E27FC236}">
-                <a16:creationId xmlns:a16="http://schemas.microsoft.com/office/drawing/2014/main" id="{5548425D-2C21-4C56-BAD4-662978775C28}"/>
+                <a16:creationId xmlns:a16="http://schemas.microsoft.com/office/drawing/2014/main" xmlns="" id="{5548425D-2C21-4C56-BAD4-662978775C28}"/>
               </a:ext>
             </a:extLst>
           </p:cNvPr>
@@ -7896,7 +7896,7 @@
           <p:cNvPr id="7" name="Espaço Reservado para Número de Slide 6">
             <a:extLst>
               <a:ext uri="{FF2B5EF4-FFF2-40B4-BE49-F238E27FC236}">
-                <a16:creationId xmlns:a16="http://schemas.microsoft.com/office/drawing/2014/main" id="{C63E9726-E64C-42B2-AE8A-8C235A956B48}"/>
+                <a16:creationId xmlns:a16="http://schemas.microsoft.com/office/drawing/2014/main" xmlns="" id="{C63E9726-E64C-42B2-AE8A-8C235A956B48}"/>
               </a:ext>
             </a:extLst>
           </p:cNvPr>
@@ -7914,7 +7914,7 @@
           <a:p>
             <a:fld id="{1A7E88B7-70CE-4035-AE73-13FA6FB985D4}" type="slidenum">
               <a:rPr lang="pt-BR" smtClean="0"/>
-              <a:t>‹#›</a:t>
+              <a:t>‹nº›</a:t>
             </a:fld>
             <a:endParaRPr lang="pt-BR"/>
           </a:p>
@@ -7955,7 +7955,7 @@
           <p:cNvPr id="2" name="Título 1">
             <a:extLst>
               <a:ext uri="{FF2B5EF4-FFF2-40B4-BE49-F238E27FC236}">
-                <a16:creationId xmlns:a16="http://schemas.microsoft.com/office/drawing/2014/main" id="{11086A78-3E74-450C-96A6-CA8AC37AF772}"/>
+                <a16:creationId xmlns:a16="http://schemas.microsoft.com/office/drawing/2014/main" xmlns="" id="{11086A78-3E74-450C-96A6-CA8AC37AF772}"/>
               </a:ext>
             </a:extLst>
           </p:cNvPr>
@@ -7992,7 +7992,7 @@
           <p:cNvPr id="3" name="Espaço Reservado para Imagem 2">
             <a:extLst>
               <a:ext uri="{FF2B5EF4-FFF2-40B4-BE49-F238E27FC236}">
-                <a16:creationId xmlns:a16="http://schemas.microsoft.com/office/drawing/2014/main" id="{5F5B7312-975A-4DBC-9B2F-3652ADA006FD}"/>
+                <a16:creationId xmlns:a16="http://schemas.microsoft.com/office/drawing/2014/main" xmlns="" id="{5F5B7312-975A-4DBC-9B2F-3652ADA006FD}"/>
               </a:ext>
             </a:extLst>
           </p:cNvPr>
@@ -8059,7 +8059,7 @@
           <p:cNvPr id="4" name="Espaço Reservado para Texto 3">
             <a:extLst>
               <a:ext uri="{FF2B5EF4-FFF2-40B4-BE49-F238E27FC236}">
-                <a16:creationId xmlns:a16="http://schemas.microsoft.com/office/drawing/2014/main" id="{AAF805F5-1DFF-41C6-944C-7D79FE0D0963}"/>
+                <a16:creationId xmlns:a16="http://schemas.microsoft.com/office/drawing/2014/main" xmlns="" id="{AAF805F5-1DFF-41C6-944C-7D79FE0D0963}"/>
               </a:ext>
             </a:extLst>
           </p:cNvPr>
@@ -8130,7 +8130,7 @@
           <p:cNvPr id="5" name="Espaço Reservado para Data 4">
             <a:extLst>
               <a:ext uri="{FF2B5EF4-FFF2-40B4-BE49-F238E27FC236}">
-                <a16:creationId xmlns:a16="http://schemas.microsoft.com/office/drawing/2014/main" id="{02113D81-8665-4516-BD81-C6A1F254EECD}"/>
+                <a16:creationId xmlns:a16="http://schemas.microsoft.com/office/drawing/2014/main" xmlns="" id="{02113D81-8665-4516-BD81-C6A1F254EECD}"/>
               </a:ext>
             </a:extLst>
           </p:cNvPr>
@@ -8159,7 +8159,7 @@
           <p:cNvPr id="6" name="Espaço Reservado para Rodapé 5">
             <a:extLst>
               <a:ext uri="{FF2B5EF4-FFF2-40B4-BE49-F238E27FC236}">
-                <a16:creationId xmlns:a16="http://schemas.microsoft.com/office/drawing/2014/main" id="{2B00C88B-FF32-40AA-A187-727D96FD7862}"/>
+                <a16:creationId xmlns:a16="http://schemas.microsoft.com/office/drawing/2014/main" xmlns="" id="{2B00C88B-FF32-40AA-A187-727D96FD7862}"/>
               </a:ext>
             </a:extLst>
           </p:cNvPr>
@@ -8184,7 +8184,7 @@
           <p:cNvPr id="7" name="Espaço Reservado para Número de Slide 6">
             <a:extLst>
               <a:ext uri="{FF2B5EF4-FFF2-40B4-BE49-F238E27FC236}">
-                <a16:creationId xmlns:a16="http://schemas.microsoft.com/office/drawing/2014/main" id="{A04D1A2D-69F7-4B8F-A730-BC26DC340BA6}"/>
+                <a16:creationId xmlns:a16="http://schemas.microsoft.com/office/drawing/2014/main" xmlns="" id="{A04D1A2D-69F7-4B8F-A730-BC26DC340BA6}"/>
               </a:ext>
             </a:extLst>
           </p:cNvPr>
@@ -8202,7 +8202,7 @@
           <a:p>
             <a:fld id="{1A7E88B7-70CE-4035-AE73-13FA6FB985D4}" type="slidenum">
               <a:rPr lang="pt-BR" smtClean="0"/>
-              <a:t>‹#›</a:t>
+              <a:t>‹nº›</a:t>
             </a:fld>
             <a:endParaRPr lang="pt-BR"/>
           </a:p>
@@ -8248,7 +8248,7 @@
           <p:cNvPr id="2" name="Espaço Reservado para Título 1">
             <a:extLst>
               <a:ext uri="{FF2B5EF4-FFF2-40B4-BE49-F238E27FC236}">
-                <a16:creationId xmlns:a16="http://schemas.microsoft.com/office/drawing/2014/main" id="{E69A0273-1966-4A1B-9370-4C1CE5036371}"/>
+                <a16:creationId xmlns:a16="http://schemas.microsoft.com/office/drawing/2014/main" xmlns="" id="{E69A0273-1966-4A1B-9370-4C1CE5036371}"/>
               </a:ext>
             </a:extLst>
           </p:cNvPr>
@@ -8286,7 +8286,7 @@
           <p:cNvPr id="3" name="Espaço Reservado para Texto 2">
             <a:extLst>
               <a:ext uri="{FF2B5EF4-FFF2-40B4-BE49-F238E27FC236}">
-                <a16:creationId xmlns:a16="http://schemas.microsoft.com/office/drawing/2014/main" id="{3B9CF87A-0448-49A7-AB25-EBC1D56A40EF}"/>
+                <a16:creationId xmlns:a16="http://schemas.microsoft.com/office/drawing/2014/main" xmlns="" id="{3B9CF87A-0448-49A7-AB25-EBC1D56A40EF}"/>
               </a:ext>
             </a:extLst>
           </p:cNvPr>
@@ -8353,7 +8353,7 @@
           <p:cNvPr id="4" name="Espaço Reservado para Data 3">
             <a:extLst>
               <a:ext uri="{FF2B5EF4-FFF2-40B4-BE49-F238E27FC236}">
-                <a16:creationId xmlns:a16="http://schemas.microsoft.com/office/drawing/2014/main" id="{2EF7B1F2-BB5A-44D0-816D-16AD2C71430E}"/>
+                <a16:creationId xmlns:a16="http://schemas.microsoft.com/office/drawing/2014/main" xmlns="" id="{2EF7B1F2-BB5A-44D0-816D-16AD2C71430E}"/>
               </a:ext>
             </a:extLst>
           </p:cNvPr>
@@ -8400,7 +8400,7 @@
           <p:cNvPr id="5" name="Espaço Reservado para Rodapé 4">
             <a:extLst>
               <a:ext uri="{FF2B5EF4-FFF2-40B4-BE49-F238E27FC236}">
-                <a16:creationId xmlns:a16="http://schemas.microsoft.com/office/drawing/2014/main" id="{C703F94C-2CC8-4DAA-BC35-14FC3E841DCD}"/>
+                <a16:creationId xmlns:a16="http://schemas.microsoft.com/office/drawing/2014/main" xmlns="" id="{C703F94C-2CC8-4DAA-BC35-14FC3E841DCD}"/>
               </a:ext>
             </a:extLst>
           </p:cNvPr>
@@ -8443,7 +8443,7 @@
           <p:cNvPr id="6" name="Espaço Reservado para Número de Slide 5">
             <a:extLst>
               <a:ext uri="{FF2B5EF4-FFF2-40B4-BE49-F238E27FC236}">
-                <a16:creationId xmlns:a16="http://schemas.microsoft.com/office/drawing/2014/main" id="{64051336-7048-457A-8B61-D94291D71648}"/>
+                <a16:creationId xmlns:a16="http://schemas.microsoft.com/office/drawing/2014/main" xmlns="" id="{64051336-7048-457A-8B61-D94291D71648}"/>
               </a:ext>
             </a:extLst>
           </p:cNvPr>
@@ -8479,7 +8479,7 @@
           <a:p>
             <a:fld id="{1A7E88B7-70CE-4035-AE73-13FA6FB985D4}" type="slidenum">
               <a:rPr lang="pt-BR" smtClean="0"/>
-              <a:t>‹#›</a:t>
+              <a:t>‹nº›</a:t>
             </a:fld>
             <a:endParaRPr lang="pt-BR"/>
           </a:p>
@@ -9021,7 +9021,7 @@
             <a:fld id="{B6F15528-21DE-4FAA-801E-634DDDAF4B2B}" type="slidenum">
               <a:rPr lang="en-US" smtClean="0"/>
               <a:pPr/>
-              <a:t>‹#›</a:t>
+              <a:t>‹nº›</a:t>
             </a:fld>
             <a:endParaRPr lang="en-US"/>
           </a:p>
@@ -9323,7 +9323,7 @@
           <p:cNvPr id="2" name="Título 1">
             <a:extLst>
               <a:ext uri="{FF2B5EF4-FFF2-40B4-BE49-F238E27FC236}">
-                <a16:creationId xmlns:a16="http://schemas.microsoft.com/office/drawing/2014/main" id="{32666AC8-2E17-4DB4-B0F5-60C640CCFD2E}"/>
+                <a16:creationId xmlns:a16="http://schemas.microsoft.com/office/drawing/2014/main" xmlns="" id="{32666AC8-2E17-4DB4-B0F5-60C640CCFD2E}"/>
               </a:ext>
             </a:extLst>
           </p:cNvPr>
@@ -9358,6 +9358,10 @@
               <a:rPr lang="pt-BR" sz="5400" dirty="0"/>
               <a:t> Learning:</a:t>
             </a:r>
+            <a:r>
+              <a:rPr lang="pt-BR" dirty="0"/>
+              <a:t/>
+            </a:r>
             <a:br>
               <a:rPr lang="pt-BR" dirty="0"/>
             </a:br>
@@ -9373,7 +9377,7 @@
           <p:cNvPr id="1026" name="Picture 2" descr="Logo">
             <a:extLst>
               <a:ext uri="{FF2B5EF4-FFF2-40B4-BE49-F238E27FC236}">
-                <a16:creationId xmlns:a16="http://schemas.microsoft.com/office/drawing/2014/main" id="{3F2642E0-4F6A-4196-8F58-E77D36E9A33F}"/>
+                <a16:creationId xmlns:a16="http://schemas.microsoft.com/office/drawing/2014/main" xmlns="" id="{3F2642E0-4F6A-4196-8F58-E77D36E9A33F}"/>
               </a:ext>
             </a:extLst>
           </p:cNvPr>
@@ -9418,7 +9422,7 @@
           <p:cNvPr id="5122" name="Picture 2" descr="Image result for machine learning">
             <a:extLst>
               <a:ext uri="{FF2B5EF4-FFF2-40B4-BE49-F238E27FC236}">
-                <a16:creationId xmlns:a16="http://schemas.microsoft.com/office/drawing/2014/main" id="{810CE0A2-4102-44A6-A370-175E7896CDCB}"/>
+                <a16:creationId xmlns:a16="http://schemas.microsoft.com/office/drawing/2014/main" xmlns="" id="{810CE0A2-4102-44A6-A370-175E7896CDCB}"/>
               </a:ext>
             </a:extLst>
           </p:cNvPr>
@@ -9463,7 +9467,7 @@
           <p:cNvPr id="3" name="Picture 2" descr="IoT Group">
             <a:extLst>
               <a:ext uri="{FF2B5EF4-FFF2-40B4-BE49-F238E27FC236}">
-                <a16:creationId xmlns:a16="http://schemas.microsoft.com/office/drawing/2014/main" id="{AC034F57-E830-B6E7-6790-12FDBBDB2975}"/>
+                <a16:creationId xmlns:a16="http://schemas.microsoft.com/office/drawing/2014/main" xmlns="" id="{AC034F57-E830-B6E7-6790-12FDBBDB2975}"/>
               </a:ext>
             </a:extLst>
           </p:cNvPr>
@@ -9508,7 +9512,7 @@
           <p:cNvPr id="5" name="CaixaDeTexto 4">
             <a:extLst>
               <a:ext uri="{FF2B5EF4-FFF2-40B4-BE49-F238E27FC236}">
-                <a16:creationId xmlns:a16="http://schemas.microsoft.com/office/drawing/2014/main" id="{2D82026D-D2EA-05D7-61F2-DEE04704DB7E}"/>
+                <a16:creationId xmlns:a16="http://schemas.microsoft.com/office/drawing/2014/main" xmlns="" id="{2D82026D-D2EA-05D7-61F2-DEE04704DB7E}"/>
               </a:ext>
             </a:extLst>
           </p:cNvPr>
@@ -9579,7 +9583,7 @@
         <p:cNvPr id="1" name="">
           <a:extLst>
             <a:ext uri="{FF2B5EF4-FFF2-40B4-BE49-F238E27FC236}">
-              <a16:creationId xmlns:a16="http://schemas.microsoft.com/office/drawing/2014/main" id="{1F378FD1-DBF4-DCA8-F1BC-B3E89729AAC1}"/>
+              <a16:creationId xmlns:a16="http://schemas.microsoft.com/office/drawing/2014/main" xmlns="" id="{1F378FD1-DBF4-DCA8-F1BC-B3E89729AAC1}"/>
             </a:ext>
           </a:extLst>
         </p:cNvPr>
@@ -9599,7 +9603,7 @@
           <p:cNvPr id="2" name="Título 1">
             <a:extLst>
               <a:ext uri="{FF2B5EF4-FFF2-40B4-BE49-F238E27FC236}">
-                <a16:creationId xmlns:a16="http://schemas.microsoft.com/office/drawing/2014/main" id="{27002D84-8C44-E80A-6CE1-1C285A07DF3A}"/>
+                <a16:creationId xmlns:a16="http://schemas.microsoft.com/office/drawing/2014/main" xmlns="" id="{27002D84-8C44-E80A-6CE1-1C285A07DF3A}"/>
               </a:ext>
             </a:extLst>
           </p:cNvPr>
@@ -9639,7 +9643,7 @@
           <p:cNvPr id="3" name="AutoShape 2" descr="An example of graph signal reconstruction over wireless sensor network. |  Download Scientific Diagram">
             <a:extLst>
               <a:ext uri="{FF2B5EF4-FFF2-40B4-BE49-F238E27FC236}">
-                <a16:creationId xmlns:a16="http://schemas.microsoft.com/office/drawing/2014/main" id="{3E14BFEB-7725-6B4D-C589-A43632C98002}"/>
+                <a16:creationId xmlns:a16="http://schemas.microsoft.com/office/drawing/2014/main" xmlns="" id="{3E14BFEB-7725-6B4D-C589-A43632C98002}"/>
               </a:ext>
             </a:extLst>
           </p:cNvPr>
@@ -9690,7 +9694,7 @@
           <p:cNvPr id="7" name="AutoShape 4" descr="An example of graph signal reconstruction over wireless sensor network. |  Download Scientific Diagram">
             <a:extLst>
               <a:ext uri="{FF2B5EF4-FFF2-40B4-BE49-F238E27FC236}">
-                <a16:creationId xmlns:a16="http://schemas.microsoft.com/office/drawing/2014/main" id="{DDC94C5F-D329-0D03-2D55-303CAEA46575}"/>
+                <a16:creationId xmlns:a16="http://schemas.microsoft.com/office/drawing/2014/main" xmlns="" id="{DDC94C5F-D329-0D03-2D55-303CAEA46575}"/>
               </a:ext>
             </a:extLst>
           </p:cNvPr>
@@ -9741,7 +9745,7 @@
           <p:cNvPr id="4" name="Espaço Reservado para Conteúdo 3">
             <a:extLst>
               <a:ext uri="{FF2B5EF4-FFF2-40B4-BE49-F238E27FC236}">
-                <a16:creationId xmlns:a16="http://schemas.microsoft.com/office/drawing/2014/main" id="{0C330112-2C2B-538C-EFFC-0C5273ED92DF}"/>
+                <a16:creationId xmlns:a16="http://schemas.microsoft.com/office/drawing/2014/main" xmlns="" id="{0C330112-2C2B-538C-EFFC-0C5273ED92DF}"/>
               </a:ext>
             </a:extLst>
           </p:cNvPr>
@@ -9784,7 +9788,7 @@
           <p:cNvPr id="8" name="Picture 7">
             <a:extLst>
               <a:ext uri="{FF2B5EF4-FFF2-40B4-BE49-F238E27FC236}">
-                <a16:creationId xmlns:a16="http://schemas.microsoft.com/office/drawing/2014/main" id="{4A874BBD-11DB-833A-341F-F134DDD11108}"/>
+                <a16:creationId xmlns:a16="http://schemas.microsoft.com/office/drawing/2014/main" xmlns="" id="{4A874BBD-11DB-833A-341F-F134DDD11108}"/>
               </a:ext>
             </a:extLst>
           </p:cNvPr>
@@ -9814,7 +9818,7 @@
           <p:cNvPr id="10" name="TextBox 9">
             <a:extLst>
               <a:ext uri="{FF2B5EF4-FFF2-40B4-BE49-F238E27FC236}">
-                <a16:creationId xmlns:a16="http://schemas.microsoft.com/office/drawing/2014/main" id="{FB63ADD3-D956-76C5-F130-F38465877D67}"/>
+                <a16:creationId xmlns:a16="http://schemas.microsoft.com/office/drawing/2014/main" xmlns="" id="{FB63ADD3-D956-76C5-F130-F38465877D67}"/>
               </a:ext>
             </a:extLst>
           </p:cNvPr>
@@ -9885,7 +9889,7 @@
         <p:cNvPr id="1" name="">
           <a:extLst>
             <a:ext uri="{FF2B5EF4-FFF2-40B4-BE49-F238E27FC236}">
-              <a16:creationId xmlns:a16="http://schemas.microsoft.com/office/drawing/2014/main" id="{9BB75298-302A-6135-F195-096473EDA4DD}"/>
+              <a16:creationId xmlns:a16="http://schemas.microsoft.com/office/drawing/2014/main" xmlns="" id="{9BB75298-302A-6135-F195-096473EDA4DD}"/>
             </a:ext>
           </a:extLst>
         </p:cNvPr>
@@ -9905,7 +9909,7 @@
           <p:cNvPr id="2" name="Título 1">
             <a:extLst>
               <a:ext uri="{FF2B5EF4-FFF2-40B4-BE49-F238E27FC236}">
-                <a16:creationId xmlns:a16="http://schemas.microsoft.com/office/drawing/2014/main" id="{27828DF8-D69B-BFFF-D2B4-A925DD43717D}"/>
+                <a16:creationId xmlns:a16="http://schemas.microsoft.com/office/drawing/2014/main" xmlns="" id="{27828DF8-D69B-BFFF-D2B4-A925DD43717D}"/>
               </a:ext>
             </a:extLst>
           </p:cNvPr>
@@ -9945,7 +9949,7 @@
           <p:cNvPr id="3" name="AutoShape 2" descr="An example of graph signal reconstruction over wireless sensor network. |  Download Scientific Diagram">
             <a:extLst>
               <a:ext uri="{FF2B5EF4-FFF2-40B4-BE49-F238E27FC236}">
-                <a16:creationId xmlns:a16="http://schemas.microsoft.com/office/drawing/2014/main" id="{A4C3F9D2-0307-0450-4E41-55D3298E641B}"/>
+                <a16:creationId xmlns:a16="http://schemas.microsoft.com/office/drawing/2014/main" xmlns="" id="{A4C3F9D2-0307-0450-4E41-55D3298E641B}"/>
               </a:ext>
             </a:extLst>
           </p:cNvPr>
@@ -9996,7 +10000,7 @@
           <p:cNvPr id="7" name="AutoShape 4" descr="An example of graph signal reconstruction over wireless sensor network. |  Download Scientific Diagram">
             <a:extLst>
               <a:ext uri="{FF2B5EF4-FFF2-40B4-BE49-F238E27FC236}">
-                <a16:creationId xmlns:a16="http://schemas.microsoft.com/office/drawing/2014/main" id="{A5277E26-0B39-A36B-7447-436FDC3E025E}"/>
+                <a16:creationId xmlns:a16="http://schemas.microsoft.com/office/drawing/2014/main" xmlns="" id="{A5277E26-0B39-A36B-7447-436FDC3E025E}"/>
               </a:ext>
             </a:extLst>
           </p:cNvPr>
@@ -10047,7 +10051,7 @@
           <p:cNvPr id="4" name="Espaço Reservado para Conteúdo 3">
             <a:extLst>
               <a:ext uri="{FF2B5EF4-FFF2-40B4-BE49-F238E27FC236}">
-                <a16:creationId xmlns:a16="http://schemas.microsoft.com/office/drawing/2014/main" id="{83702F57-B420-BA92-57FC-CDEAF0E04638}"/>
+                <a16:creationId xmlns:a16="http://schemas.microsoft.com/office/drawing/2014/main" xmlns="" id="{83702F57-B420-BA92-57FC-CDEAF0E04638}"/>
               </a:ext>
             </a:extLst>
           </p:cNvPr>
@@ -10090,7 +10094,7 @@
           <p:cNvPr id="6" name="Picture 5">
             <a:extLst>
               <a:ext uri="{FF2B5EF4-FFF2-40B4-BE49-F238E27FC236}">
-                <a16:creationId xmlns:a16="http://schemas.microsoft.com/office/drawing/2014/main" id="{BE9E2474-44BE-43D0-EE2F-D03349050DA2}"/>
+                <a16:creationId xmlns:a16="http://schemas.microsoft.com/office/drawing/2014/main" xmlns="" id="{BE9E2474-44BE-43D0-EE2F-D03349050DA2}"/>
               </a:ext>
             </a:extLst>
           </p:cNvPr>
@@ -10120,7 +10124,7 @@
           <p:cNvPr id="10" name="TextBox 9">
             <a:extLst>
               <a:ext uri="{FF2B5EF4-FFF2-40B4-BE49-F238E27FC236}">
-                <a16:creationId xmlns:a16="http://schemas.microsoft.com/office/drawing/2014/main" id="{E7FEC406-7A7E-5D78-DF69-D2416A2375C3}"/>
+                <a16:creationId xmlns:a16="http://schemas.microsoft.com/office/drawing/2014/main" xmlns="" id="{E7FEC406-7A7E-5D78-DF69-D2416A2375C3}"/>
               </a:ext>
             </a:extLst>
           </p:cNvPr>
@@ -10191,7 +10195,7 @@
         <p:cNvPr id="1" name="">
           <a:extLst>
             <a:ext uri="{FF2B5EF4-FFF2-40B4-BE49-F238E27FC236}">
-              <a16:creationId xmlns:a16="http://schemas.microsoft.com/office/drawing/2014/main" id="{749972DB-1A29-C878-AC52-B084A233C66B}"/>
+              <a16:creationId xmlns:a16="http://schemas.microsoft.com/office/drawing/2014/main" xmlns="" id="{749972DB-1A29-C878-AC52-B084A233C66B}"/>
             </a:ext>
           </a:extLst>
         </p:cNvPr>
@@ -10211,7 +10215,7 @@
           <p:cNvPr id="2" name="Título 1">
             <a:extLst>
               <a:ext uri="{FF2B5EF4-FFF2-40B4-BE49-F238E27FC236}">
-                <a16:creationId xmlns:a16="http://schemas.microsoft.com/office/drawing/2014/main" id="{223F31A0-EB34-A3FB-D3AD-8E88098E62F1}"/>
+                <a16:creationId xmlns:a16="http://schemas.microsoft.com/office/drawing/2014/main" xmlns="" id="{223F31A0-EB34-A3FB-D3AD-8E88098E62F1}"/>
               </a:ext>
             </a:extLst>
           </p:cNvPr>
@@ -10251,7 +10255,7 @@
           <p:cNvPr id="3" name="AutoShape 2" descr="An example of graph signal reconstruction over wireless sensor network. |  Download Scientific Diagram">
             <a:extLst>
               <a:ext uri="{FF2B5EF4-FFF2-40B4-BE49-F238E27FC236}">
-                <a16:creationId xmlns:a16="http://schemas.microsoft.com/office/drawing/2014/main" id="{A22086E9-56E3-EC28-E48A-9069376FF074}"/>
+                <a16:creationId xmlns:a16="http://schemas.microsoft.com/office/drawing/2014/main" xmlns="" id="{A22086E9-56E3-EC28-E48A-9069376FF074}"/>
               </a:ext>
             </a:extLst>
           </p:cNvPr>
@@ -10302,7 +10306,7 @@
           <p:cNvPr id="7" name="AutoShape 4" descr="An example of graph signal reconstruction over wireless sensor network. |  Download Scientific Diagram">
             <a:extLst>
               <a:ext uri="{FF2B5EF4-FFF2-40B4-BE49-F238E27FC236}">
-                <a16:creationId xmlns:a16="http://schemas.microsoft.com/office/drawing/2014/main" id="{E1A13779-07EA-5350-121F-C4141832B952}"/>
+                <a16:creationId xmlns:a16="http://schemas.microsoft.com/office/drawing/2014/main" xmlns="" id="{E1A13779-07EA-5350-121F-C4141832B952}"/>
               </a:ext>
             </a:extLst>
           </p:cNvPr>
@@ -10353,7 +10357,7 @@
           <p:cNvPr id="4" name="Espaço Reservado para Conteúdo 3">
             <a:extLst>
               <a:ext uri="{FF2B5EF4-FFF2-40B4-BE49-F238E27FC236}">
-                <a16:creationId xmlns:a16="http://schemas.microsoft.com/office/drawing/2014/main" id="{B461F4C5-B5F4-E3F6-B686-4C94C38803D5}"/>
+                <a16:creationId xmlns:a16="http://schemas.microsoft.com/office/drawing/2014/main" xmlns="" id="{B461F4C5-B5F4-E3F6-B686-4C94C38803D5}"/>
               </a:ext>
             </a:extLst>
           </p:cNvPr>
@@ -10396,7 +10400,7 @@
           <p:cNvPr id="6" name="Picture 5">
             <a:extLst>
               <a:ext uri="{FF2B5EF4-FFF2-40B4-BE49-F238E27FC236}">
-                <a16:creationId xmlns:a16="http://schemas.microsoft.com/office/drawing/2014/main" id="{CD544109-9098-CA3C-766B-DFEB05AE1F38}"/>
+                <a16:creationId xmlns:a16="http://schemas.microsoft.com/office/drawing/2014/main" xmlns="" id="{CD544109-9098-CA3C-766B-DFEB05AE1F38}"/>
               </a:ext>
             </a:extLst>
           </p:cNvPr>
@@ -10426,7 +10430,7 @@
           <p:cNvPr id="9" name="TextBox 9">
             <a:extLst>
               <a:ext uri="{FF2B5EF4-FFF2-40B4-BE49-F238E27FC236}">
-                <a16:creationId xmlns:a16="http://schemas.microsoft.com/office/drawing/2014/main" id="{E7FEC406-7A7E-5D78-DF69-D2416A2375C3}"/>
+                <a16:creationId xmlns:a16="http://schemas.microsoft.com/office/drawing/2014/main" xmlns="" id="{E7FEC406-7A7E-5D78-DF69-D2416A2375C3}"/>
               </a:ext>
             </a:extLst>
           </p:cNvPr>
@@ -10497,7 +10501,7 @@
         <p:cNvPr id="1" name="">
           <a:extLst>
             <a:ext uri="{FF2B5EF4-FFF2-40B4-BE49-F238E27FC236}">
-              <a16:creationId xmlns:a16="http://schemas.microsoft.com/office/drawing/2014/main" id="{69317B56-95CF-5EB4-1950-84D108AD8D37}"/>
+              <a16:creationId xmlns:a16="http://schemas.microsoft.com/office/drawing/2014/main" xmlns="" id="{69317B56-95CF-5EB4-1950-84D108AD8D37}"/>
             </a:ext>
           </a:extLst>
         </p:cNvPr>
@@ -10517,7 +10521,7 @@
           <p:cNvPr id="2" name="Título 1">
             <a:extLst>
               <a:ext uri="{FF2B5EF4-FFF2-40B4-BE49-F238E27FC236}">
-                <a16:creationId xmlns:a16="http://schemas.microsoft.com/office/drawing/2014/main" id="{48642745-4759-3504-B537-1A643C25576D}"/>
+                <a16:creationId xmlns:a16="http://schemas.microsoft.com/office/drawing/2014/main" xmlns="" id="{48642745-4759-3504-B537-1A643C25576D}"/>
               </a:ext>
             </a:extLst>
           </p:cNvPr>
@@ -10557,7 +10561,7 @@
           <p:cNvPr id="3" name="AutoShape 2" descr="An example of graph signal reconstruction over wireless sensor network. |  Download Scientific Diagram">
             <a:extLst>
               <a:ext uri="{FF2B5EF4-FFF2-40B4-BE49-F238E27FC236}">
-                <a16:creationId xmlns:a16="http://schemas.microsoft.com/office/drawing/2014/main" id="{84E44FE8-BA6E-9F6F-1997-0AD869D77EFD}"/>
+                <a16:creationId xmlns:a16="http://schemas.microsoft.com/office/drawing/2014/main" xmlns="" id="{84E44FE8-BA6E-9F6F-1997-0AD869D77EFD}"/>
               </a:ext>
             </a:extLst>
           </p:cNvPr>
@@ -10608,7 +10612,7 @@
           <p:cNvPr id="7" name="AutoShape 4" descr="An example of graph signal reconstruction over wireless sensor network. |  Download Scientific Diagram">
             <a:extLst>
               <a:ext uri="{FF2B5EF4-FFF2-40B4-BE49-F238E27FC236}">
-                <a16:creationId xmlns:a16="http://schemas.microsoft.com/office/drawing/2014/main" id="{21DB31B1-11EA-8016-35EE-14EA7345F531}"/>
+                <a16:creationId xmlns:a16="http://schemas.microsoft.com/office/drawing/2014/main" xmlns="" id="{21DB31B1-11EA-8016-35EE-14EA7345F531}"/>
               </a:ext>
             </a:extLst>
           </p:cNvPr>
@@ -10659,7 +10663,7 @@
           <p:cNvPr id="4" name="Espaço Reservado para Conteúdo 3">
             <a:extLst>
               <a:ext uri="{FF2B5EF4-FFF2-40B4-BE49-F238E27FC236}">
-                <a16:creationId xmlns:a16="http://schemas.microsoft.com/office/drawing/2014/main" id="{63D17EBA-F020-2A71-B133-21937AD74F91}"/>
+                <a16:creationId xmlns:a16="http://schemas.microsoft.com/office/drawing/2014/main" xmlns="" id="{63D17EBA-F020-2A71-B133-21937AD74F91}"/>
               </a:ext>
             </a:extLst>
           </p:cNvPr>
@@ -10702,7 +10706,7 @@
           <p:cNvPr id="6" name="Picture 5">
             <a:extLst>
               <a:ext uri="{FF2B5EF4-FFF2-40B4-BE49-F238E27FC236}">
-                <a16:creationId xmlns:a16="http://schemas.microsoft.com/office/drawing/2014/main" id="{9F08A47C-C93C-D40B-F5DC-3C29F2EEEE60}"/>
+                <a16:creationId xmlns:a16="http://schemas.microsoft.com/office/drawing/2014/main" xmlns="" id="{9F08A47C-C93C-D40B-F5DC-3C29F2EEEE60}"/>
               </a:ext>
             </a:extLst>
           </p:cNvPr>
@@ -10732,7 +10736,7 @@
           <p:cNvPr id="8" name="TextBox 7">
             <a:extLst>
               <a:ext uri="{FF2B5EF4-FFF2-40B4-BE49-F238E27FC236}">
-                <a16:creationId xmlns:a16="http://schemas.microsoft.com/office/drawing/2014/main" id="{4376C1A9-3731-8BF9-861E-3D686FEA4F43}"/>
+                <a16:creationId xmlns:a16="http://schemas.microsoft.com/office/drawing/2014/main" xmlns="" id="{4376C1A9-3731-8BF9-861E-3D686FEA4F43}"/>
               </a:ext>
             </a:extLst>
           </p:cNvPr>
@@ -10901,7 +10905,7 @@
           <p:cNvPr id="2" name="Título 1">
             <a:extLst>
               <a:ext uri="{FF2B5EF4-FFF2-40B4-BE49-F238E27FC236}">
-                <a16:creationId xmlns:a16="http://schemas.microsoft.com/office/drawing/2014/main" id="{5F09B89C-3183-4D52-981A-62798DDFF2B8}"/>
+                <a16:creationId xmlns:a16="http://schemas.microsoft.com/office/drawing/2014/main" xmlns="" id="{5F09B89C-3183-4D52-981A-62798DDFF2B8}"/>
               </a:ext>
             </a:extLst>
           </p:cNvPr>
@@ -10936,7 +10940,7 @@
           <p:cNvPr id="3" name="AutoShape 2" descr="An example of graph signal reconstruction over wireless sensor network. |  Download Scientific Diagram">
             <a:extLst>
               <a:ext uri="{FF2B5EF4-FFF2-40B4-BE49-F238E27FC236}">
-                <a16:creationId xmlns:a16="http://schemas.microsoft.com/office/drawing/2014/main" id="{0166B4DD-D72A-4A54-94A7-2C38133837FD}"/>
+                <a16:creationId xmlns:a16="http://schemas.microsoft.com/office/drawing/2014/main" xmlns="" id="{0166B4DD-D72A-4A54-94A7-2C38133837FD}"/>
               </a:ext>
             </a:extLst>
           </p:cNvPr>
@@ -10987,7 +10991,7 @@
           <p:cNvPr id="7" name="AutoShape 4" descr="An example of graph signal reconstruction over wireless sensor network. |  Download Scientific Diagram">
             <a:extLst>
               <a:ext uri="{FF2B5EF4-FFF2-40B4-BE49-F238E27FC236}">
-                <a16:creationId xmlns:a16="http://schemas.microsoft.com/office/drawing/2014/main" id="{14C2B67D-81A1-457E-A410-FE4350A3CCA4}"/>
+                <a16:creationId xmlns:a16="http://schemas.microsoft.com/office/drawing/2014/main" xmlns="" id="{14C2B67D-81A1-457E-A410-FE4350A3CCA4}"/>
               </a:ext>
             </a:extLst>
           </p:cNvPr>
@@ -11038,7 +11042,7 @@
           <p:cNvPr id="1026" name="Picture 2" descr="Univariate Anomaly Detection | Anomaly Detection Algorithms">
             <a:extLst>
               <a:ext uri="{FF2B5EF4-FFF2-40B4-BE49-F238E27FC236}">
-                <a16:creationId xmlns:a16="http://schemas.microsoft.com/office/drawing/2014/main" id="{D6FF8611-2758-C1DA-8FC6-10C7681C129F}"/>
+                <a16:creationId xmlns:a16="http://schemas.microsoft.com/office/drawing/2014/main" xmlns="" id="{D6FF8611-2758-C1DA-8FC6-10C7681C129F}"/>
               </a:ext>
             </a:extLst>
           </p:cNvPr>
@@ -11085,7 +11089,7 @@
           <p:cNvPr id="4" name="Espaço Reservado para Conteúdo 3">
             <a:extLst>
               <a:ext uri="{FF2B5EF4-FFF2-40B4-BE49-F238E27FC236}">
-                <a16:creationId xmlns:a16="http://schemas.microsoft.com/office/drawing/2014/main" id="{5F1B432F-F570-AEC0-CFFF-C1D9196D7234}"/>
+                <a16:creationId xmlns:a16="http://schemas.microsoft.com/office/drawing/2014/main" xmlns="" id="{5F1B432F-F570-AEC0-CFFF-C1D9196D7234}"/>
               </a:ext>
             </a:extLst>
           </p:cNvPr>
@@ -11202,7 +11206,7 @@
           <p:cNvPr id="2" name="Título 1">
             <a:extLst>
               <a:ext uri="{FF2B5EF4-FFF2-40B4-BE49-F238E27FC236}">
-                <a16:creationId xmlns:a16="http://schemas.microsoft.com/office/drawing/2014/main" id="{5F09B89C-3183-4D52-981A-62798DDFF2B8}"/>
+                <a16:creationId xmlns:a16="http://schemas.microsoft.com/office/drawing/2014/main" xmlns="" id="{5F09B89C-3183-4D52-981A-62798DDFF2B8}"/>
               </a:ext>
             </a:extLst>
           </p:cNvPr>
@@ -11237,7 +11241,7 @@
           <p:cNvPr id="3" name="AutoShape 2" descr="An example of graph signal reconstruction over wireless sensor network. |  Download Scientific Diagram">
             <a:extLst>
               <a:ext uri="{FF2B5EF4-FFF2-40B4-BE49-F238E27FC236}">
-                <a16:creationId xmlns:a16="http://schemas.microsoft.com/office/drawing/2014/main" id="{0166B4DD-D72A-4A54-94A7-2C38133837FD}"/>
+                <a16:creationId xmlns:a16="http://schemas.microsoft.com/office/drawing/2014/main" xmlns="" id="{0166B4DD-D72A-4A54-94A7-2C38133837FD}"/>
               </a:ext>
             </a:extLst>
           </p:cNvPr>
@@ -11288,7 +11292,7 @@
           <p:cNvPr id="7" name="AutoShape 4" descr="An example of graph signal reconstruction over wireless sensor network. |  Download Scientific Diagram">
             <a:extLst>
               <a:ext uri="{FF2B5EF4-FFF2-40B4-BE49-F238E27FC236}">
-                <a16:creationId xmlns:a16="http://schemas.microsoft.com/office/drawing/2014/main" id="{14C2B67D-81A1-457E-A410-FE4350A3CCA4}"/>
+                <a16:creationId xmlns:a16="http://schemas.microsoft.com/office/drawing/2014/main" xmlns="" id="{14C2B67D-81A1-457E-A410-FE4350A3CCA4}"/>
               </a:ext>
             </a:extLst>
           </p:cNvPr>
@@ -11339,7 +11343,7 @@
           <p:cNvPr id="4" name="Espaço Reservado para Conteúdo 3">
             <a:extLst>
               <a:ext uri="{FF2B5EF4-FFF2-40B4-BE49-F238E27FC236}">
-                <a16:creationId xmlns:a16="http://schemas.microsoft.com/office/drawing/2014/main" id="{5F1B432F-F570-AEC0-CFFF-C1D9196D7234}"/>
+                <a16:creationId xmlns:a16="http://schemas.microsoft.com/office/drawing/2014/main" xmlns="" id="{5F1B432F-F570-AEC0-CFFF-C1D9196D7234}"/>
               </a:ext>
             </a:extLst>
           </p:cNvPr>
@@ -11372,7 +11376,7 @@
           <p:cNvPr id="2050" name="Picture 2" descr="Anomaly Detection Real World Scenarios Approaches and Live Implementation -  YouTube">
             <a:extLst>
               <a:ext uri="{FF2B5EF4-FFF2-40B4-BE49-F238E27FC236}">
-                <a16:creationId xmlns:a16="http://schemas.microsoft.com/office/drawing/2014/main" id="{FDE7A801-6226-C67C-506A-7A9F297D280C}"/>
+                <a16:creationId xmlns:a16="http://schemas.microsoft.com/office/drawing/2014/main" xmlns="" id="{FDE7A801-6226-C67C-506A-7A9F297D280C}"/>
               </a:ext>
             </a:extLst>
           </p:cNvPr>
@@ -11449,7 +11453,7 @@
         <p:cNvPr id="1" name="">
           <a:extLst>
             <a:ext uri="{FF2B5EF4-FFF2-40B4-BE49-F238E27FC236}">
-              <a16:creationId xmlns:a16="http://schemas.microsoft.com/office/drawing/2014/main" id="{042E1AD8-1AE2-9D66-D1D0-BECEA32F14E0}"/>
+              <a16:creationId xmlns:a16="http://schemas.microsoft.com/office/drawing/2014/main" xmlns="" id="{042E1AD8-1AE2-9D66-D1D0-BECEA32F14E0}"/>
             </a:ext>
           </a:extLst>
         </p:cNvPr>
@@ -11469,7 +11473,7 @@
           <p:cNvPr id="2" name="Título 1">
             <a:extLst>
               <a:ext uri="{FF2B5EF4-FFF2-40B4-BE49-F238E27FC236}">
-                <a16:creationId xmlns:a16="http://schemas.microsoft.com/office/drawing/2014/main" id="{91362F63-8B67-2CA5-F1E0-70285F8A5D99}"/>
+                <a16:creationId xmlns:a16="http://schemas.microsoft.com/office/drawing/2014/main" xmlns="" id="{91362F63-8B67-2CA5-F1E0-70285F8A5D99}"/>
               </a:ext>
             </a:extLst>
           </p:cNvPr>
@@ -11504,7 +11508,7 @@
           <p:cNvPr id="3" name="AutoShape 2" descr="An example of graph signal reconstruction over wireless sensor network. |  Download Scientific Diagram">
             <a:extLst>
               <a:ext uri="{FF2B5EF4-FFF2-40B4-BE49-F238E27FC236}">
-                <a16:creationId xmlns:a16="http://schemas.microsoft.com/office/drawing/2014/main" id="{22FDC0BB-96C6-D071-6072-8265FA475D3B}"/>
+                <a16:creationId xmlns:a16="http://schemas.microsoft.com/office/drawing/2014/main" xmlns="" id="{22FDC0BB-96C6-D071-6072-8265FA475D3B}"/>
               </a:ext>
             </a:extLst>
           </p:cNvPr>
@@ -11555,7 +11559,7 @@
           <p:cNvPr id="7" name="AutoShape 4" descr="An example of graph signal reconstruction over wireless sensor network. |  Download Scientific Diagram">
             <a:extLst>
               <a:ext uri="{FF2B5EF4-FFF2-40B4-BE49-F238E27FC236}">
-                <a16:creationId xmlns:a16="http://schemas.microsoft.com/office/drawing/2014/main" id="{0D2FBB85-B0FE-5D58-DBE2-4C312CB1B3A1}"/>
+                <a16:creationId xmlns:a16="http://schemas.microsoft.com/office/drawing/2014/main" xmlns="" id="{0D2FBB85-B0FE-5D58-DBE2-4C312CB1B3A1}"/>
               </a:ext>
             </a:extLst>
           </p:cNvPr>
@@ -11606,7 +11610,7 @@
           <p:cNvPr id="4" name="Espaço Reservado para Conteúdo 3">
             <a:extLst>
               <a:ext uri="{FF2B5EF4-FFF2-40B4-BE49-F238E27FC236}">
-                <a16:creationId xmlns:a16="http://schemas.microsoft.com/office/drawing/2014/main" id="{F19EED01-E2A7-FCA9-AE40-ABE3206A5DB3}"/>
+                <a16:creationId xmlns:a16="http://schemas.microsoft.com/office/drawing/2014/main" xmlns="" id="{F19EED01-E2A7-FCA9-AE40-ABE3206A5DB3}"/>
               </a:ext>
             </a:extLst>
           </p:cNvPr>
@@ -11690,7 +11694,7 @@
           <p:cNvPr id="6" name="Picture 5">
             <a:extLst>
               <a:ext uri="{FF2B5EF4-FFF2-40B4-BE49-F238E27FC236}">
-                <a16:creationId xmlns:a16="http://schemas.microsoft.com/office/drawing/2014/main" id="{874D15ED-AE97-5474-7E5D-B644432B2D4C}"/>
+                <a16:creationId xmlns:a16="http://schemas.microsoft.com/office/drawing/2014/main" xmlns="" id="{874D15ED-AE97-5474-7E5D-B644432B2D4C}"/>
               </a:ext>
             </a:extLst>
           </p:cNvPr>
@@ -11720,7 +11724,7 @@
           <p:cNvPr id="9" name="Picture 8">
             <a:extLst>
               <a:ext uri="{FF2B5EF4-FFF2-40B4-BE49-F238E27FC236}">
-                <a16:creationId xmlns:a16="http://schemas.microsoft.com/office/drawing/2014/main" id="{14197941-A588-8F4A-49EA-1C5B6528F761}"/>
+                <a16:creationId xmlns:a16="http://schemas.microsoft.com/office/drawing/2014/main" xmlns="" id="{14197941-A588-8F4A-49EA-1C5B6528F761}"/>
               </a:ext>
             </a:extLst>
           </p:cNvPr>
@@ -11750,7 +11754,7 @@
           <p:cNvPr id="10" name="Arrow: Right 9">
             <a:extLst>
               <a:ext uri="{FF2B5EF4-FFF2-40B4-BE49-F238E27FC236}">
-                <a16:creationId xmlns:a16="http://schemas.microsoft.com/office/drawing/2014/main" id="{02EF8AE6-9567-78CC-094E-7578F2C11532}"/>
+                <a16:creationId xmlns:a16="http://schemas.microsoft.com/office/drawing/2014/main" xmlns="" id="{02EF8AE6-9567-78CC-094E-7578F2C11532}"/>
               </a:ext>
             </a:extLst>
           </p:cNvPr>
@@ -11805,86 +11809,6 @@
 </file>
 
 <file path=ppt/slides/slide17.xml><?xml version="1.0" encoding="utf-8"?>
-<p:sld xmlns:a="http://schemas.openxmlformats.org/drawingml/2006/main" xmlns:r="http://schemas.openxmlformats.org/officeDocument/2006/relationships" xmlns:p="http://schemas.openxmlformats.org/presentationml/2006/main">
-  <p:cSld>
-    <p:spTree>
-      <p:nvGrpSpPr>
-        <p:cNvPr id="1" name=""/>
-        <p:cNvGrpSpPr/>
-        <p:nvPr/>
-      </p:nvGrpSpPr>
-      <p:grpSpPr>
-        <a:xfrm>
-          <a:off x="0" y="0"/>
-          <a:ext cx="0" cy="0"/>
-          <a:chOff x="0" y="0"/>
-          <a:chExt cx="0" cy="0"/>
-        </a:xfrm>
-      </p:grpSpPr>
-      <p:sp>
-        <p:nvSpPr>
-          <p:cNvPr id="2" name="Title 1">
-            <a:extLst>
-              <a:ext uri="{FF2B5EF4-FFF2-40B4-BE49-F238E27FC236}">
-                <a16:creationId xmlns:a16="http://schemas.microsoft.com/office/drawing/2014/main" id="{59016FD1-6296-97BB-4C76-AD710414CCC6}"/>
-              </a:ext>
-            </a:extLst>
-          </p:cNvPr>
-          <p:cNvSpPr>
-            <a:spLocks noGrp="1"/>
-          </p:cNvSpPr>
-          <p:nvPr>
-            <p:ph type="title"/>
-          </p:nvPr>
-        </p:nvSpPr>
-        <p:spPr/>
-        <p:txBody>
-          <a:bodyPr/>
-          <a:lstStyle/>
-          <a:p>
-            <a:endParaRPr lang="en-US"/>
-          </a:p>
-        </p:txBody>
-      </p:sp>
-      <p:sp>
-        <p:nvSpPr>
-          <p:cNvPr id="3" name="Content Placeholder 2">
-            <a:extLst>
-              <a:ext uri="{FF2B5EF4-FFF2-40B4-BE49-F238E27FC236}">
-                <a16:creationId xmlns:a16="http://schemas.microsoft.com/office/drawing/2014/main" id="{82472478-144F-3D25-9C47-48A21F2E7CAB}"/>
-              </a:ext>
-            </a:extLst>
-          </p:cNvPr>
-          <p:cNvSpPr>
-            <a:spLocks noGrp="1"/>
-          </p:cNvSpPr>
-          <p:nvPr>
-            <p:ph idx="1"/>
-          </p:nvPr>
-        </p:nvSpPr>
-        <p:spPr/>
-        <p:txBody>
-          <a:bodyPr/>
-          <a:lstStyle/>
-          <a:p>
-            <a:endParaRPr lang="en-US"/>
-          </a:p>
-        </p:txBody>
-      </p:sp>
-    </p:spTree>
-    <p:extLst>
-      <p:ext uri="{BB962C8B-B14F-4D97-AF65-F5344CB8AC3E}">
-        <p14:creationId xmlns:p14="http://schemas.microsoft.com/office/powerpoint/2010/main" val="151179307"/>
-      </p:ext>
-    </p:extLst>
-  </p:cSld>
-  <p:clrMapOvr>
-    <a:masterClrMapping/>
-  </p:clrMapOvr>
-</p:sld>
-</file>
-
-<file path=ppt/slides/slide18.xml><?xml version="1.0" encoding="utf-8"?>
 <p:sld xmlns:a="http://schemas.openxmlformats.org/drawingml/2006/main" xmlns:r="http://schemas.openxmlformats.org/officeDocument/2006/relationships" xmlns:p="http://schemas.openxmlformats.org/presentationml/2006/main">
   <p:cSld>
     <p:bg>
@@ -11920,7 +11844,7 @@
           <p:cNvPr id="2" name="Título 1">
             <a:extLst>
               <a:ext uri="{FF2B5EF4-FFF2-40B4-BE49-F238E27FC236}">
-                <a16:creationId xmlns:a16="http://schemas.microsoft.com/office/drawing/2014/main" id="{5F09B89C-3183-4D52-981A-62798DDFF2B8}"/>
+                <a16:creationId xmlns:a16="http://schemas.microsoft.com/office/drawing/2014/main" xmlns="" id="{5F09B89C-3183-4D52-981A-62798DDFF2B8}"/>
               </a:ext>
             </a:extLst>
           </p:cNvPr>
@@ -11960,7 +11884,7 @@
           <p:cNvPr id="3" name="AutoShape 2" descr="An example of graph signal reconstruction over wireless sensor network. |  Download Scientific Diagram">
             <a:extLst>
               <a:ext uri="{FF2B5EF4-FFF2-40B4-BE49-F238E27FC236}">
-                <a16:creationId xmlns:a16="http://schemas.microsoft.com/office/drawing/2014/main" id="{0166B4DD-D72A-4A54-94A7-2C38133837FD}"/>
+                <a16:creationId xmlns:a16="http://schemas.microsoft.com/office/drawing/2014/main" xmlns="" id="{0166B4DD-D72A-4A54-94A7-2C38133837FD}"/>
               </a:ext>
             </a:extLst>
           </p:cNvPr>
@@ -12011,7 +11935,7 @@
           <p:cNvPr id="7" name="AutoShape 4" descr="An example of graph signal reconstruction over wireless sensor network. |  Download Scientific Diagram">
             <a:extLst>
               <a:ext uri="{FF2B5EF4-FFF2-40B4-BE49-F238E27FC236}">
-                <a16:creationId xmlns:a16="http://schemas.microsoft.com/office/drawing/2014/main" id="{14C2B67D-81A1-457E-A410-FE4350A3CCA4}"/>
+                <a16:creationId xmlns:a16="http://schemas.microsoft.com/office/drawing/2014/main" xmlns="" id="{14C2B67D-81A1-457E-A410-FE4350A3CCA4}"/>
               </a:ext>
             </a:extLst>
           </p:cNvPr>
@@ -12062,7 +11986,7 @@
           <p:cNvPr id="4" name="Espaço Reservado para Conteúdo 3">
             <a:extLst>
               <a:ext uri="{FF2B5EF4-FFF2-40B4-BE49-F238E27FC236}">
-                <a16:creationId xmlns:a16="http://schemas.microsoft.com/office/drawing/2014/main" id="{5F1B432F-F570-AEC0-CFFF-C1D9196D7234}"/>
+                <a16:creationId xmlns:a16="http://schemas.microsoft.com/office/drawing/2014/main" xmlns="" id="{5F1B432F-F570-AEC0-CFFF-C1D9196D7234}"/>
               </a:ext>
             </a:extLst>
           </p:cNvPr>
@@ -12103,7 +12027,7 @@
           <p:cNvPr id="6" name="CaixaDeTexto 5">
             <a:extLst>
               <a:ext uri="{FF2B5EF4-FFF2-40B4-BE49-F238E27FC236}">
-                <a16:creationId xmlns:a16="http://schemas.microsoft.com/office/drawing/2014/main" id="{470482DB-F365-0A83-E102-37A8EB7EACEF}"/>
+                <a16:creationId xmlns:a16="http://schemas.microsoft.com/office/drawing/2014/main" xmlns="" id="{470482DB-F365-0A83-E102-37A8EB7EACEF}"/>
               </a:ext>
             </a:extLst>
           </p:cNvPr>
@@ -12138,16 +12062,9 @@
               <a:t>Exemplo: </a:t>
             </a:r>
             <a:r>
-              <a:rPr lang="pt-BR" b="0" i="0" dirty="0">
-                <a:solidFill>
-                  <a:srgbClr val="404040"/>
-                </a:solidFill>
-                <a:effectLst/>
-                <a:latin typeface="DeepSeek-CJK-patch"/>
-              </a:rPr>
+              <a:rPr lang="pt-BR" dirty="0"/>
               <a:t>Escolha de Locais para Centros de Distribuição</a:t>
             </a:r>
-            <a:endParaRPr lang="pt-BR" dirty="0"/>
           </a:p>
           <a:p>
             <a:endParaRPr lang="pt-BR" dirty="0"/>
@@ -12201,7 +12118,7 @@
           <p:cNvPr id="6146" name="Picture 2" descr="Centro de Distribuição: uma solução mais que viável – Novidá">
             <a:extLst>
               <a:ext uri="{FF2B5EF4-FFF2-40B4-BE49-F238E27FC236}">
-                <a16:creationId xmlns:a16="http://schemas.microsoft.com/office/drawing/2014/main" id="{4EEAF6B8-1AE8-82F9-6BD7-E45E945A8CB5}"/>
+                <a16:creationId xmlns:a16="http://schemas.microsoft.com/office/drawing/2014/main" xmlns="" id="{4EEAF6B8-1AE8-82F9-6BD7-E45E945A8CB5}"/>
               </a:ext>
             </a:extLst>
           </p:cNvPr>
@@ -12248,7 +12165,7 @@
           <p:cNvPr id="8" name="Picture 2" descr="Mapa do Brasil">
             <a:extLst>
               <a:ext uri="{FF2B5EF4-FFF2-40B4-BE49-F238E27FC236}">
-                <a16:creationId xmlns:a16="http://schemas.microsoft.com/office/drawing/2014/main" id="{BBEA9087-A8E1-78C5-981B-C50D7CF4635F}"/>
+                <a16:creationId xmlns:a16="http://schemas.microsoft.com/office/drawing/2014/main" xmlns="" id="{BBEA9087-A8E1-78C5-981B-C50D7CF4635F}"/>
               </a:ext>
             </a:extLst>
           </p:cNvPr>
@@ -12294,6 +12211,86 @@
     <p:extLst>
       <p:ext uri="{BB962C8B-B14F-4D97-AF65-F5344CB8AC3E}">
         <p14:creationId xmlns:p14="http://schemas.microsoft.com/office/powerpoint/2010/main" val="1949754007"/>
+      </p:ext>
+    </p:extLst>
+  </p:cSld>
+  <p:clrMapOvr>
+    <a:masterClrMapping/>
+  </p:clrMapOvr>
+</p:sld>
+</file>
+
+<file path=ppt/slides/slide18.xml><?xml version="1.0" encoding="utf-8"?>
+<p:sld xmlns:a="http://schemas.openxmlformats.org/drawingml/2006/main" xmlns:r="http://schemas.openxmlformats.org/officeDocument/2006/relationships" xmlns:p="http://schemas.openxmlformats.org/presentationml/2006/main">
+  <p:cSld>
+    <p:spTree>
+      <p:nvGrpSpPr>
+        <p:cNvPr id="1" name=""/>
+        <p:cNvGrpSpPr/>
+        <p:nvPr/>
+      </p:nvGrpSpPr>
+      <p:grpSpPr>
+        <a:xfrm>
+          <a:off x="0" y="0"/>
+          <a:ext cx="0" cy="0"/>
+          <a:chOff x="0" y="0"/>
+          <a:chExt cx="0" cy="0"/>
+        </a:xfrm>
+      </p:grpSpPr>
+      <p:sp>
+        <p:nvSpPr>
+          <p:cNvPr id="2" name="Title 1">
+            <a:extLst>
+              <a:ext uri="{FF2B5EF4-FFF2-40B4-BE49-F238E27FC236}">
+                <a16:creationId xmlns:a16="http://schemas.microsoft.com/office/drawing/2014/main" xmlns="" id="{59016FD1-6296-97BB-4C76-AD710414CCC6}"/>
+              </a:ext>
+            </a:extLst>
+          </p:cNvPr>
+          <p:cNvSpPr>
+            <a:spLocks noGrp="1"/>
+          </p:cNvSpPr>
+          <p:nvPr>
+            <p:ph type="title"/>
+          </p:nvPr>
+        </p:nvSpPr>
+        <p:spPr/>
+        <p:txBody>
+          <a:bodyPr/>
+          <a:lstStyle/>
+          <a:p>
+            <a:endParaRPr lang="en-US"/>
+          </a:p>
+        </p:txBody>
+      </p:sp>
+      <p:sp>
+        <p:nvSpPr>
+          <p:cNvPr id="3" name="Content Placeholder 2">
+            <a:extLst>
+              <a:ext uri="{FF2B5EF4-FFF2-40B4-BE49-F238E27FC236}">
+                <a16:creationId xmlns:a16="http://schemas.microsoft.com/office/drawing/2014/main" xmlns="" id="{82472478-144F-3D25-9C47-48A21F2E7CAB}"/>
+              </a:ext>
+            </a:extLst>
+          </p:cNvPr>
+          <p:cNvSpPr>
+            <a:spLocks noGrp="1"/>
+          </p:cNvSpPr>
+          <p:nvPr>
+            <p:ph idx="1"/>
+          </p:nvPr>
+        </p:nvSpPr>
+        <p:spPr/>
+        <p:txBody>
+          <a:bodyPr/>
+          <a:lstStyle/>
+          <a:p>
+            <a:endParaRPr lang="en-US"/>
+          </a:p>
+        </p:txBody>
+      </p:sp>
+    </p:spTree>
+    <p:extLst>
+      <p:ext uri="{BB962C8B-B14F-4D97-AF65-F5344CB8AC3E}">
+        <p14:creationId xmlns:p14="http://schemas.microsoft.com/office/powerpoint/2010/main" val="151179307"/>
       </p:ext>
     </p:extLst>
   </p:cSld>
@@ -12339,7 +12336,7 @@
           <p:cNvPr id="2" name="Título 1">
             <a:extLst>
               <a:ext uri="{FF2B5EF4-FFF2-40B4-BE49-F238E27FC236}">
-                <a16:creationId xmlns:a16="http://schemas.microsoft.com/office/drawing/2014/main" id="{5F09B89C-3183-4D52-981A-62798DDFF2B8}"/>
+                <a16:creationId xmlns:a16="http://schemas.microsoft.com/office/drawing/2014/main" xmlns="" id="{5F09B89C-3183-4D52-981A-62798DDFF2B8}"/>
               </a:ext>
             </a:extLst>
           </p:cNvPr>
@@ -12379,7 +12376,7 @@
           <p:cNvPr id="3" name="AutoShape 2" descr="An example of graph signal reconstruction over wireless sensor network. |  Download Scientific Diagram">
             <a:extLst>
               <a:ext uri="{FF2B5EF4-FFF2-40B4-BE49-F238E27FC236}">
-                <a16:creationId xmlns:a16="http://schemas.microsoft.com/office/drawing/2014/main" id="{0166B4DD-D72A-4A54-94A7-2C38133837FD}"/>
+                <a16:creationId xmlns:a16="http://schemas.microsoft.com/office/drawing/2014/main" xmlns="" id="{0166B4DD-D72A-4A54-94A7-2C38133837FD}"/>
               </a:ext>
             </a:extLst>
           </p:cNvPr>
@@ -12430,7 +12427,7 @@
           <p:cNvPr id="7" name="AutoShape 4" descr="An example of graph signal reconstruction over wireless sensor network. |  Download Scientific Diagram">
             <a:extLst>
               <a:ext uri="{FF2B5EF4-FFF2-40B4-BE49-F238E27FC236}">
-                <a16:creationId xmlns:a16="http://schemas.microsoft.com/office/drawing/2014/main" id="{14C2B67D-81A1-457E-A410-FE4350A3CCA4}"/>
+                <a16:creationId xmlns:a16="http://schemas.microsoft.com/office/drawing/2014/main" xmlns="" id="{14C2B67D-81A1-457E-A410-FE4350A3CCA4}"/>
               </a:ext>
             </a:extLst>
           </p:cNvPr>
@@ -12481,7 +12478,7 @@
           <p:cNvPr id="4" name="Espaço Reservado para Conteúdo 3">
             <a:extLst>
               <a:ext uri="{FF2B5EF4-FFF2-40B4-BE49-F238E27FC236}">
-                <a16:creationId xmlns:a16="http://schemas.microsoft.com/office/drawing/2014/main" id="{5F1B432F-F570-AEC0-CFFF-C1D9196D7234}"/>
+                <a16:creationId xmlns:a16="http://schemas.microsoft.com/office/drawing/2014/main" xmlns="" id="{5F1B432F-F570-AEC0-CFFF-C1D9196D7234}"/>
               </a:ext>
             </a:extLst>
           </p:cNvPr>
@@ -12522,7 +12519,7 @@
           <p:cNvPr id="6" name="CaixaDeTexto 5">
             <a:extLst>
               <a:ext uri="{FF2B5EF4-FFF2-40B4-BE49-F238E27FC236}">
-                <a16:creationId xmlns:a16="http://schemas.microsoft.com/office/drawing/2014/main" id="{470482DB-F365-0A83-E102-37A8EB7EACEF}"/>
+                <a16:creationId xmlns:a16="http://schemas.microsoft.com/office/drawing/2014/main" xmlns="" id="{470482DB-F365-0A83-E102-37A8EB7EACEF}"/>
               </a:ext>
             </a:extLst>
           </p:cNvPr>
@@ -12609,7 +12606,7 @@
           <p:cNvPr id="8194" name="Picture 2">
             <a:extLst>
               <a:ext uri="{FF2B5EF4-FFF2-40B4-BE49-F238E27FC236}">
-                <a16:creationId xmlns:a16="http://schemas.microsoft.com/office/drawing/2014/main" id="{495C0F98-25B1-BB0B-22CE-238E6C7C5DE2}"/>
+                <a16:creationId xmlns:a16="http://schemas.microsoft.com/office/drawing/2014/main" xmlns="" id="{495C0F98-25B1-BB0B-22CE-238E6C7C5DE2}"/>
               </a:ext>
             </a:extLst>
           </p:cNvPr>
@@ -12700,7 +12697,7 @@
           <p:cNvPr id="2" name="Título 1">
             <a:extLst>
               <a:ext uri="{FF2B5EF4-FFF2-40B4-BE49-F238E27FC236}">
-                <a16:creationId xmlns:a16="http://schemas.microsoft.com/office/drawing/2014/main" id="{5F09B89C-3183-4D52-981A-62798DDFF2B8}"/>
+                <a16:creationId xmlns:a16="http://schemas.microsoft.com/office/drawing/2014/main" xmlns="" id="{5F09B89C-3183-4D52-981A-62798DDFF2B8}"/>
               </a:ext>
             </a:extLst>
           </p:cNvPr>
@@ -12735,7 +12732,7 @@
           <p:cNvPr id="3" name="AutoShape 2" descr="An example of graph signal reconstruction over wireless sensor network. |  Download Scientific Diagram">
             <a:extLst>
               <a:ext uri="{FF2B5EF4-FFF2-40B4-BE49-F238E27FC236}">
-                <a16:creationId xmlns:a16="http://schemas.microsoft.com/office/drawing/2014/main" id="{0166B4DD-D72A-4A54-94A7-2C38133837FD}"/>
+                <a16:creationId xmlns:a16="http://schemas.microsoft.com/office/drawing/2014/main" xmlns="" id="{0166B4DD-D72A-4A54-94A7-2C38133837FD}"/>
               </a:ext>
             </a:extLst>
           </p:cNvPr>
@@ -12786,7 +12783,7 @@
           <p:cNvPr id="7" name="AutoShape 4" descr="An example of graph signal reconstruction over wireless sensor network. |  Download Scientific Diagram">
             <a:extLst>
               <a:ext uri="{FF2B5EF4-FFF2-40B4-BE49-F238E27FC236}">
-                <a16:creationId xmlns:a16="http://schemas.microsoft.com/office/drawing/2014/main" id="{14C2B67D-81A1-457E-A410-FE4350A3CCA4}"/>
+                <a16:creationId xmlns:a16="http://schemas.microsoft.com/office/drawing/2014/main" xmlns="" id="{14C2B67D-81A1-457E-A410-FE4350A3CCA4}"/>
               </a:ext>
             </a:extLst>
           </p:cNvPr>
@@ -12837,7 +12834,7 @@
           <p:cNvPr id="4" name="Espaço Reservado para Conteúdo 3">
             <a:extLst>
               <a:ext uri="{FF2B5EF4-FFF2-40B4-BE49-F238E27FC236}">
-                <a16:creationId xmlns:a16="http://schemas.microsoft.com/office/drawing/2014/main" id="{5F1B432F-F570-AEC0-CFFF-C1D9196D7234}"/>
+                <a16:creationId xmlns:a16="http://schemas.microsoft.com/office/drawing/2014/main" xmlns="" id="{5F1B432F-F570-AEC0-CFFF-C1D9196D7234}"/>
               </a:ext>
             </a:extLst>
           </p:cNvPr>
@@ -12960,7 +12957,7 @@
           <p:cNvPr id="2" name="Título 1">
             <a:extLst>
               <a:ext uri="{FF2B5EF4-FFF2-40B4-BE49-F238E27FC236}">
-                <a16:creationId xmlns:a16="http://schemas.microsoft.com/office/drawing/2014/main" id="{5F09B89C-3183-4D52-981A-62798DDFF2B8}"/>
+                <a16:creationId xmlns:a16="http://schemas.microsoft.com/office/drawing/2014/main" xmlns="" id="{5F09B89C-3183-4D52-981A-62798DDFF2B8}"/>
               </a:ext>
             </a:extLst>
           </p:cNvPr>
@@ -13000,7 +12997,7 @@
           <p:cNvPr id="3" name="AutoShape 2" descr="An example of graph signal reconstruction over wireless sensor network. |  Download Scientific Diagram">
             <a:extLst>
               <a:ext uri="{FF2B5EF4-FFF2-40B4-BE49-F238E27FC236}">
-                <a16:creationId xmlns:a16="http://schemas.microsoft.com/office/drawing/2014/main" id="{0166B4DD-D72A-4A54-94A7-2C38133837FD}"/>
+                <a16:creationId xmlns:a16="http://schemas.microsoft.com/office/drawing/2014/main" xmlns="" id="{0166B4DD-D72A-4A54-94A7-2C38133837FD}"/>
               </a:ext>
             </a:extLst>
           </p:cNvPr>
@@ -13051,7 +13048,7 @@
           <p:cNvPr id="7" name="AutoShape 4" descr="An example of graph signal reconstruction over wireless sensor network. |  Download Scientific Diagram">
             <a:extLst>
               <a:ext uri="{FF2B5EF4-FFF2-40B4-BE49-F238E27FC236}">
-                <a16:creationId xmlns:a16="http://schemas.microsoft.com/office/drawing/2014/main" id="{14C2B67D-81A1-457E-A410-FE4350A3CCA4}"/>
+                <a16:creationId xmlns:a16="http://schemas.microsoft.com/office/drawing/2014/main" xmlns="" id="{14C2B67D-81A1-457E-A410-FE4350A3CCA4}"/>
               </a:ext>
             </a:extLst>
           </p:cNvPr>
@@ -13102,7 +13099,7 @@
           <p:cNvPr id="4" name="Espaço Reservado para Conteúdo 3">
             <a:extLst>
               <a:ext uri="{FF2B5EF4-FFF2-40B4-BE49-F238E27FC236}">
-                <a16:creationId xmlns:a16="http://schemas.microsoft.com/office/drawing/2014/main" id="{5F1B432F-F570-AEC0-CFFF-C1D9196D7234}"/>
+                <a16:creationId xmlns:a16="http://schemas.microsoft.com/office/drawing/2014/main" xmlns="" id="{5F1B432F-F570-AEC0-CFFF-C1D9196D7234}"/>
               </a:ext>
             </a:extLst>
           </p:cNvPr>
@@ -13143,7 +13140,7 @@
           <p:cNvPr id="6" name="CaixaDeTexto 5">
             <a:extLst>
               <a:ext uri="{FF2B5EF4-FFF2-40B4-BE49-F238E27FC236}">
-                <a16:creationId xmlns:a16="http://schemas.microsoft.com/office/drawing/2014/main" id="{470482DB-F365-0A83-E102-37A8EB7EACEF}"/>
+                <a16:creationId xmlns:a16="http://schemas.microsoft.com/office/drawing/2014/main" xmlns="" id="{470482DB-F365-0A83-E102-37A8EB7EACEF}"/>
               </a:ext>
             </a:extLst>
           </p:cNvPr>
@@ -13283,7 +13280,7 @@
           <p:cNvPr id="2" name="Título 1">
             <a:extLst>
               <a:ext uri="{FF2B5EF4-FFF2-40B4-BE49-F238E27FC236}">
-                <a16:creationId xmlns:a16="http://schemas.microsoft.com/office/drawing/2014/main" id="{5F09B89C-3183-4D52-981A-62798DDFF2B8}"/>
+                <a16:creationId xmlns:a16="http://schemas.microsoft.com/office/drawing/2014/main" xmlns="" id="{5F09B89C-3183-4D52-981A-62798DDFF2B8}"/>
               </a:ext>
             </a:extLst>
           </p:cNvPr>
@@ -13323,7 +13320,7 @@
           <p:cNvPr id="3" name="AutoShape 2" descr="An example of graph signal reconstruction over wireless sensor network. |  Download Scientific Diagram">
             <a:extLst>
               <a:ext uri="{FF2B5EF4-FFF2-40B4-BE49-F238E27FC236}">
-                <a16:creationId xmlns:a16="http://schemas.microsoft.com/office/drawing/2014/main" id="{0166B4DD-D72A-4A54-94A7-2C38133837FD}"/>
+                <a16:creationId xmlns:a16="http://schemas.microsoft.com/office/drawing/2014/main" xmlns="" id="{0166B4DD-D72A-4A54-94A7-2C38133837FD}"/>
               </a:ext>
             </a:extLst>
           </p:cNvPr>
@@ -13374,7 +13371,7 @@
           <p:cNvPr id="7" name="AutoShape 4" descr="An example of graph signal reconstruction over wireless sensor network. |  Download Scientific Diagram">
             <a:extLst>
               <a:ext uri="{FF2B5EF4-FFF2-40B4-BE49-F238E27FC236}">
-                <a16:creationId xmlns:a16="http://schemas.microsoft.com/office/drawing/2014/main" id="{14C2B67D-81A1-457E-A410-FE4350A3CCA4}"/>
+                <a16:creationId xmlns:a16="http://schemas.microsoft.com/office/drawing/2014/main" xmlns="" id="{14C2B67D-81A1-457E-A410-FE4350A3CCA4}"/>
               </a:ext>
             </a:extLst>
           </p:cNvPr>
@@ -13425,7 +13422,7 @@
           <p:cNvPr id="4" name="Espaço Reservado para Conteúdo 3">
             <a:extLst>
               <a:ext uri="{FF2B5EF4-FFF2-40B4-BE49-F238E27FC236}">
-                <a16:creationId xmlns:a16="http://schemas.microsoft.com/office/drawing/2014/main" id="{5F1B432F-F570-AEC0-CFFF-C1D9196D7234}"/>
+                <a16:creationId xmlns:a16="http://schemas.microsoft.com/office/drawing/2014/main" xmlns="" id="{5F1B432F-F570-AEC0-CFFF-C1D9196D7234}"/>
               </a:ext>
             </a:extLst>
           </p:cNvPr>
@@ -13466,7 +13463,7 @@
           <p:cNvPr id="6" name="CaixaDeTexto 5">
             <a:extLst>
               <a:ext uri="{FF2B5EF4-FFF2-40B4-BE49-F238E27FC236}">
-                <a16:creationId xmlns:a16="http://schemas.microsoft.com/office/drawing/2014/main" id="{470482DB-F365-0A83-E102-37A8EB7EACEF}"/>
+                <a16:creationId xmlns:a16="http://schemas.microsoft.com/office/drawing/2014/main" xmlns="" id="{470482DB-F365-0A83-E102-37A8EB7EACEF}"/>
               </a:ext>
             </a:extLst>
           </p:cNvPr>
@@ -13546,7 +13543,7 @@
           <p:cNvPr id="2050" name="Picture 2" descr="Base Teórica do K-Means! Aprenda a Lógica desse Algoritmo Hoje!">
             <a:extLst>
               <a:ext uri="{FF2B5EF4-FFF2-40B4-BE49-F238E27FC236}">
-                <a16:creationId xmlns:a16="http://schemas.microsoft.com/office/drawing/2014/main" id="{0694ADFD-EB2E-2BF0-18BE-B07E4CD60A5F}"/>
+                <a16:creationId xmlns:a16="http://schemas.microsoft.com/office/drawing/2014/main" xmlns="" id="{0694ADFD-EB2E-2BF0-18BE-B07E4CD60A5F}"/>
               </a:ext>
             </a:extLst>
           </p:cNvPr>
@@ -13593,7 +13590,7 @@
           <p:cNvPr id="8" name="Imagem 7">
             <a:extLst>
               <a:ext uri="{FF2B5EF4-FFF2-40B4-BE49-F238E27FC236}">
-                <a16:creationId xmlns:a16="http://schemas.microsoft.com/office/drawing/2014/main" id="{EEF69E85-6440-34FE-5C8A-A5F37765D292}"/>
+                <a16:creationId xmlns:a16="http://schemas.microsoft.com/office/drawing/2014/main" xmlns="" id="{EEF69E85-6440-34FE-5C8A-A5F37765D292}"/>
               </a:ext>
             </a:extLst>
           </p:cNvPr>
@@ -13667,7 +13664,7 @@
           <p:cNvPr id="2" name="Título 1">
             <a:extLst>
               <a:ext uri="{FF2B5EF4-FFF2-40B4-BE49-F238E27FC236}">
-                <a16:creationId xmlns:a16="http://schemas.microsoft.com/office/drawing/2014/main" id="{5F09B89C-3183-4D52-981A-62798DDFF2B8}"/>
+                <a16:creationId xmlns:a16="http://schemas.microsoft.com/office/drawing/2014/main" xmlns="" id="{5F09B89C-3183-4D52-981A-62798DDFF2B8}"/>
               </a:ext>
             </a:extLst>
           </p:cNvPr>
@@ -13702,7 +13699,7 @@
           <p:cNvPr id="3" name="AutoShape 2" descr="An example of graph signal reconstruction over wireless sensor network. |  Download Scientific Diagram">
             <a:extLst>
               <a:ext uri="{FF2B5EF4-FFF2-40B4-BE49-F238E27FC236}">
-                <a16:creationId xmlns:a16="http://schemas.microsoft.com/office/drawing/2014/main" id="{0166B4DD-D72A-4A54-94A7-2C38133837FD}"/>
+                <a16:creationId xmlns:a16="http://schemas.microsoft.com/office/drawing/2014/main" xmlns="" id="{0166B4DD-D72A-4A54-94A7-2C38133837FD}"/>
               </a:ext>
             </a:extLst>
           </p:cNvPr>
@@ -13777,7 +13774,7 @@
           <p:cNvPr id="7" name="AutoShape 4" descr="An example of graph signal reconstruction over wireless sensor network. |  Download Scientific Diagram">
             <a:extLst>
               <a:ext uri="{FF2B5EF4-FFF2-40B4-BE49-F238E27FC236}">
-                <a16:creationId xmlns:a16="http://schemas.microsoft.com/office/drawing/2014/main" id="{14C2B67D-81A1-457E-A410-FE4350A3CCA4}"/>
+                <a16:creationId xmlns:a16="http://schemas.microsoft.com/office/drawing/2014/main" xmlns="" id="{14C2B67D-81A1-457E-A410-FE4350A3CCA4}"/>
               </a:ext>
             </a:extLst>
           </p:cNvPr>
@@ -13852,7 +13849,7 @@
           <p:cNvPr id="4" name="Espaço Reservado para Conteúdo 3">
             <a:extLst>
               <a:ext uri="{FF2B5EF4-FFF2-40B4-BE49-F238E27FC236}">
-                <a16:creationId xmlns:a16="http://schemas.microsoft.com/office/drawing/2014/main" id="{0349BA64-C9D7-4730-9CA9-5C4AD9FC7969}"/>
+                <a16:creationId xmlns:a16="http://schemas.microsoft.com/office/drawing/2014/main" xmlns="" id="{0349BA64-C9D7-4730-9CA9-5C4AD9FC7969}"/>
               </a:ext>
             </a:extLst>
           </p:cNvPr>
@@ -13898,7 +13895,7 @@
           <p:cNvPr id="1026" name="Picture 2" descr="Free photo industrial containers box for logistic import export business.">
             <a:extLst>
               <a:ext uri="{FF2B5EF4-FFF2-40B4-BE49-F238E27FC236}">
-                <a16:creationId xmlns:a16="http://schemas.microsoft.com/office/drawing/2014/main" id="{FDC07977-F662-66CB-7534-103E83976919}"/>
+                <a16:creationId xmlns:a16="http://schemas.microsoft.com/office/drawing/2014/main" xmlns="" id="{FDC07977-F662-66CB-7534-103E83976919}"/>
               </a:ext>
             </a:extLst>
           </p:cNvPr>
@@ -13989,7 +13986,7 @@
           <p:cNvPr id="2" name="Título 1">
             <a:extLst>
               <a:ext uri="{FF2B5EF4-FFF2-40B4-BE49-F238E27FC236}">
-                <a16:creationId xmlns:a16="http://schemas.microsoft.com/office/drawing/2014/main" id="{5F09B89C-3183-4D52-981A-62798DDFF2B8}"/>
+                <a16:creationId xmlns:a16="http://schemas.microsoft.com/office/drawing/2014/main" xmlns="" id="{5F09B89C-3183-4D52-981A-62798DDFF2B8}"/>
               </a:ext>
             </a:extLst>
           </p:cNvPr>
@@ -14024,7 +14021,7 @@
           <p:cNvPr id="3" name="AutoShape 2" descr="An example of graph signal reconstruction over wireless sensor network. |  Download Scientific Diagram">
             <a:extLst>
               <a:ext uri="{FF2B5EF4-FFF2-40B4-BE49-F238E27FC236}">
-                <a16:creationId xmlns:a16="http://schemas.microsoft.com/office/drawing/2014/main" id="{0166B4DD-D72A-4A54-94A7-2C38133837FD}"/>
+                <a16:creationId xmlns:a16="http://schemas.microsoft.com/office/drawing/2014/main" xmlns="" id="{0166B4DD-D72A-4A54-94A7-2C38133837FD}"/>
               </a:ext>
             </a:extLst>
           </p:cNvPr>
@@ -14099,7 +14096,7 @@
           <p:cNvPr id="7" name="AutoShape 4" descr="An example of graph signal reconstruction over wireless sensor network. |  Download Scientific Diagram">
             <a:extLst>
               <a:ext uri="{FF2B5EF4-FFF2-40B4-BE49-F238E27FC236}">
-                <a16:creationId xmlns:a16="http://schemas.microsoft.com/office/drawing/2014/main" id="{14C2B67D-81A1-457E-A410-FE4350A3CCA4}"/>
+                <a16:creationId xmlns:a16="http://schemas.microsoft.com/office/drawing/2014/main" xmlns="" id="{14C2B67D-81A1-457E-A410-FE4350A3CCA4}"/>
               </a:ext>
             </a:extLst>
           </p:cNvPr>
@@ -14174,7 +14171,7 @@
           <p:cNvPr id="4" name="Espaço Reservado para Conteúdo 3">
             <a:extLst>
               <a:ext uri="{FF2B5EF4-FFF2-40B4-BE49-F238E27FC236}">
-                <a16:creationId xmlns:a16="http://schemas.microsoft.com/office/drawing/2014/main" id="{0349BA64-C9D7-4730-9CA9-5C4AD9FC7969}"/>
+                <a16:creationId xmlns:a16="http://schemas.microsoft.com/office/drawing/2014/main" xmlns="" id="{0349BA64-C9D7-4730-9CA9-5C4AD9FC7969}"/>
               </a:ext>
             </a:extLst>
           </p:cNvPr>
@@ -14407,7 +14404,7 @@
           <p:cNvPr id="2" name="Título 1">
             <a:extLst>
               <a:ext uri="{FF2B5EF4-FFF2-40B4-BE49-F238E27FC236}">
-                <a16:creationId xmlns:a16="http://schemas.microsoft.com/office/drawing/2014/main" id="{5F09B89C-3183-4D52-981A-62798DDFF2B8}"/>
+                <a16:creationId xmlns:a16="http://schemas.microsoft.com/office/drawing/2014/main" xmlns="" id="{5F09B89C-3183-4D52-981A-62798DDFF2B8}"/>
               </a:ext>
             </a:extLst>
           </p:cNvPr>
@@ -14442,7 +14439,7 @@
           <p:cNvPr id="3" name="AutoShape 2" descr="An example of graph signal reconstruction over wireless sensor network. |  Download Scientific Diagram">
             <a:extLst>
               <a:ext uri="{FF2B5EF4-FFF2-40B4-BE49-F238E27FC236}">
-                <a16:creationId xmlns:a16="http://schemas.microsoft.com/office/drawing/2014/main" id="{0166B4DD-D72A-4A54-94A7-2C38133837FD}"/>
+                <a16:creationId xmlns:a16="http://schemas.microsoft.com/office/drawing/2014/main" xmlns="" id="{0166B4DD-D72A-4A54-94A7-2C38133837FD}"/>
               </a:ext>
             </a:extLst>
           </p:cNvPr>
@@ -14517,7 +14514,7 @@
           <p:cNvPr id="7" name="AutoShape 4" descr="An example of graph signal reconstruction over wireless sensor network. |  Download Scientific Diagram">
             <a:extLst>
               <a:ext uri="{FF2B5EF4-FFF2-40B4-BE49-F238E27FC236}">
-                <a16:creationId xmlns:a16="http://schemas.microsoft.com/office/drawing/2014/main" id="{14C2B67D-81A1-457E-A410-FE4350A3CCA4}"/>
+                <a16:creationId xmlns:a16="http://schemas.microsoft.com/office/drawing/2014/main" xmlns="" id="{14C2B67D-81A1-457E-A410-FE4350A3CCA4}"/>
               </a:ext>
             </a:extLst>
           </p:cNvPr>
@@ -14592,7 +14589,7 @@
           <p:cNvPr id="4" name="Espaço Reservado para Conteúdo 3">
             <a:extLst>
               <a:ext uri="{FF2B5EF4-FFF2-40B4-BE49-F238E27FC236}">
-                <a16:creationId xmlns:a16="http://schemas.microsoft.com/office/drawing/2014/main" id="{0349BA64-C9D7-4730-9CA9-5C4AD9FC7969}"/>
+                <a16:creationId xmlns:a16="http://schemas.microsoft.com/office/drawing/2014/main" xmlns="" id="{0349BA64-C9D7-4730-9CA9-5C4AD9FC7969}"/>
               </a:ext>
             </a:extLst>
           </p:cNvPr>
@@ -14715,7 +14712,7 @@
           <p:cNvPr id="3" name="AutoShape 2" descr="An example of graph signal reconstruction over wireless sensor network. |  Download Scientific Diagram">
             <a:extLst>
               <a:ext uri="{FF2B5EF4-FFF2-40B4-BE49-F238E27FC236}">
-                <a16:creationId xmlns:a16="http://schemas.microsoft.com/office/drawing/2014/main" id="{0166B4DD-D72A-4A54-94A7-2C38133837FD}"/>
+                <a16:creationId xmlns:a16="http://schemas.microsoft.com/office/drawing/2014/main" xmlns="" id="{0166B4DD-D72A-4A54-94A7-2C38133837FD}"/>
               </a:ext>
             </a:extLst>
           </p:cNvPr>
@@ -14790,7 +14787,7 @@
           <p:cNvPr id="7" name="AutoShape 4" descr="An example of graph signal reconstruction over wireless sensor network. |  Download Scientific Diagram">
             <a:extLst>
               <a:ext uri="{FF2B5EF4-FFF2-40B4-BE49-F238E27FC236}">
-                <a16:creationId xmlns:a16="http://schemas.microsoft.com/office/drawing/2014/main" id="{14C2B67D-81A1-457E-A410-FE4350A3CCA4}"/>
+                <a16:creationId xmlns:a16="http://schemas.microsoft.com/office/drawing/2014/main" xmlns="" id="{14C2B67D-81A1-457E-A410-FE4350A3CCA4}"/>
               </a:ext>
             </a:extLst>
           </p:cNvPr>
@@ -14865,7 +14862,7 @@
           <p:cNvPr id="4" name="Espaço Reservado para Conteúdo 3">
             <a:extLst>
               <a:ext uri="{FF2B5EF4-FFF2-40B4-BE49-F238E27FC236}">
-                <a16:creationId xmlns:a16="http://schemas.microsoft.com/office/drawing/2014/main" id="{0349BA64-C9D7-4730-9CA9-5C4AD9FC7969}"/>
+                <a16:creationId xmlns:a16="http://schemas.microsoft.com/office/drawing/2014/main" xmlns="" id="{0349BA64-C9D7-4730-9CA9-5C4AD9FC7969}"/>
               </a:ext>
             </a:extLst>
           </p:cNvPr>
@@ -15016,7 +15013,7 @@
           <p:cNvPr id="2" name="Título 1">
             <a:extLst>
               <a:ext uri="{FF2B5EF4-FFF2-40B4-BE49-F238E27FC236}">
-                <a16:creationId xmlns:a16="http://schemas.microsoft.com/office/drawing/2014/main" id="{5F09B89C-3183-4D52-981A-62798DDFF2B8}"/>
+                <a16:creationId xmlns:a16="http://schemas.microsoft.com/office/drawing/2014/main" xmlns="" id="{5F09B89C-3183-4D52-981A-62798DDFF2B8}"/>
               </a:ext>
             </a:extLst>
           </p:cNvPr>
@@ -15054,7 +15051,7 @@
           <p:cNvPr id="3" name="AutoShape 2" descr="An example of graph signal reconstruction over wireless sensor network. |  Download Scientific Diagram">
             <a:extLst>
               <a:ext uri="{FF2B5EF4-FFF2-40B4-BE49-F238E27FC236}">
-                <a16:creationId xmlns:a16="http://schemas.microsoft.com/office/drawing/2014/main" id="{0166B4DD-D72A-4A54-94A7-2C38133837FD}"/>
+                <a16:creationId xmlns:a16="http://schemas.microsoft.com/office/drawing/2014/main" xmlns="" id="{0166B4DD-D72A-4A54-94A7-2C38133837FD}"/>
               </a:ext>
             </a:extLst>
           </p:cNvPr>
@@ -15105,7 +15102,7 @@
           <p:cNvPr id="7" name="AutoShape 4" descr="An example of graph signal reconstruction over wireless sensor network. |  Download Scientific Diagram">
             <a:extLst>
               <a:ext uri="{FF2B5EF4-FFF2-40B4-BE49-F238E27FC236}">
-                <a16:creationId xmlns:a16="http://schemas.microsoft.com/office/drawing/2014/main" id="{14C2B67D-81A1-457E-A410-FE4350A3CCA4}"/>
+                <a16:creationId xmlns:a16="http://schemas.microsoft.com/office/drawing/2014/main" xmlns="" id="{14C2B67D-81A1-457E-A410-FE4350A3CCA4}"/>
               </a:ext>
             </a:extLst>
           </p:cNvPr>
@@ -15156,7 +15153,7 @@
           <p:cNvPr id="4" name="Espaço Reservado para Conteúdo 3">
             <a:extLst>
               <a:ext uri="{FF2B5EF4-FFF2-40B4-BE49-F238E27FC236}">
-                <a16:creationId xmlns:a16="http://schemas.microsoft.com/office/drawing/2014/main" id="{5F1B432F-F570-AEC0-CFFF-C1D9196D7234}"/>
+                <a16:creationId xmlns:a16="http://schemas.microsoft.com/office/drawing/2014/main" xmlns="" id="{5F1B432F-F570-AEC0-CFFF-C1D9196D7234}"/>
               </a:ext>
             </a:extLst>
           </p:cNvPr>
@@ -15195,7 +15192,7 @@
           <p:cNvPr id="3074" name="Picture 2" descr="Unsupervised machine learning">
             <a:extLst>
               <a:ext uri="{FF2B5EF4-FFF2-40B4-BE49-F238E27FC236}">
-                <a16:creationId xmlns:a16="http://schemas.microsoft.com/office/drawing/2014/main" id="{9C9BB3FA-B234-195B-6E78-1F5F1A0B5DD5}"/>
+                <a16:creationId xmlns:a16="http://schemas.microsoft.com/office/drawing/2014/main" xmlns="" id="{9C9BB3FA-B234-195B-6E78-1F5F1A0B5DD5}"/>
               </a:ext>
             </a:extLst>
           </p:cNvPr>
@@ -15242,7 +15239,7 @@
           <p:cNvPr id="3076" name="Picture 4" descr="Supervised machine learning">
             <a:extLst>
               <a:ext uri="{FF2B5EF4-FFF2-40B4-BE49-F238E27FC236}">
-                <a16:creationId xmlns:a16="http://schemas.microsoft.com/office/drawing/2014/main" id="{85D641D0-2AF2-0E0D-20E1-BE0FB83D483A}"/>
+                <a16:creationId xmlns:a16="http://schemas.microsoft.com/office/drawing/2014/main" xmlns="" id="{85D641D0-2AF2-0E0D-20E1-BE0FB83D483A}"/>
               </a:ext>
             </a:extLst>
           </p:cNvPr>
@@ -15333,7 +15330,7 @@
           <p:cNvPr id="2" name="Título 1">
             <a:extLst>
               <a:ext uri="{FF2B5EF4-FFF2-40B4-BE49-F238E27FC236}">
-                <a16:creationId xmlns:a16="http://schemas.microsoft.com/office/drawing/2014/main" id="{5F09B89C-3183-4D52-981A-62798DDFF2B8}"/>
+                <a16:creationId xmlns:a16="http://schemas.microsoft.com/office/drawing/2014/main" xmlns="" id="{5F09B89C-3183-4D52-981A-62798DDFF2B8}"/>
               </a:ext>
             </a:extLst>
           </p:cNvPr>
@@ -15368,7 +15365,7 @@
           <p:cNvPr id="3" name="AutoShape 2" descr="An example of graph signal reconstruction over wireless sensor network. |  Download Scientific Diagram">
             <a:extLst>
               <a:ext uri="{FF2B5EF4-FFF2-40B4-BE49-F238E27FC236}">
-                <a16:creationId xmlns:a16="http://schemas.microsoft.com/office/drawing/2014/main" id="{0166B4DD-D72A-4A54-94A7-2C38133837FD}"/>
+                <a16:creationId xmlns:a16="http://schemas.microsoft.com/office/drawing/2014/main" xmlns="" id="{0166B4DD-D72A-4A54-94A7-2C38133837FD}"/>
               </a:ext>
             </a:extLst>
           </p:cNvPr>
@@ -15419,7 +15416,7 @@
           <p:cNvPr id="7" name="AutoShape 4" descr="An example of graph signal reconstruction over wireless sensor network. |  Download Scientific Diagram">
             <a:extLst>
               <a:ext uri="{FF2B5EF4-FFF2-40B4-BE49-F238E27FC236}">
-                <a16:creationId xmlns:a16="http://schemas.microsoft.com/office/drawing/2014/main" id="{14C2B67D-81A1-457E-A410-FE4350A3CCA4}"/>
+                <a16:creationId xmlns:a16="http://schemas.microsoft.com/office/drawing/2014/main" xmlns="" id="{14C2B67D-81A1-457E-A410-FE4350A3CCA4}"/>
               </a:ext>
             </a:extLst>
           </p:cNvPr>
@@ -15470,7 +15467,7 @@
           <p:cNvPr id="4" name="Espaço Reservado para Conteúdo 3">
             <a:extLst>
               <a:ext uri="{FF2B5EF4-FFF2-40B4-BE49-F238E27FC236}">
-                <a16:creationId xmlns:a16="http://schemas.microsoft.com/office/drawing/2014/main" id="{5F1B432F-F570-AEC0-CFFF-C1D9196D7234}"/>
+                <a16:creationId xmlns:a16="http://schemas.microsoft.com/office/drawing/2014/main" xmlns="" id="{5F1B432F-F570-AEC0-CFFF-C1D9196D7234}"/>
               </a:ext>
             </a:extLst>
           </p:cNvPr>
@@ -15523,7 +15520,7 @@
           <p:cNvPr id="4098" name="Picture 2" descr="What is K-means Clustering and it's use cases ? | by Avijit das | Medium">
             <a:extLst>
               <a:ext uri="{FF2B5EF4-FFF2-40B4-BE49-F238E27FC236}">
-                <a16:creationId xmlns:a16="http://schemas.microsoft.com/office/drawing/2014/main" id="{056C7919-93FD-E63C-B36E-CC710CDD6044}"/>
+                <a16:creationId xmlns:a16="http://schemas.microsoft.com/office/drawing/2014/main" xmlns="" id="{056C7919-93FD-E63C-B36E-CC710CDD6044}"/>
               </a:ext>
             </a:extLst>
           </p:cNvPr>
@@ -15614,7 +15611,7 @@
           <p:cNvPr id="2" name="Título 1">
             <a:extLst>
               <a:ext uri="{FF2B5EF4-FFF2-40B4-BE49-F238E27FC236}">
-                <a16:creationId xmlns:a16="http://schemas.microsoft.com/office/drawing/2014/main" id="{5F09B89C-3183-4D52-981A-62798DDFF2B8}"/>
+                <a16:creationId xmlns:a16="http://schemas.microsoft.com/office/drawing/2014/main" xmlns="" id="{5F09B89C-3183-4D52-981A-62798DDFF2B8}"/>
               </a:ext>
             </a:extLst>
           </p:cNvPr>
@@ -15654,7 +15651,7 @@
           <p:cNvPr id="3" name="AutoShape 2" descr="An example of graph signal reconstruction over wireless sensor network. |  Download Scientific Diagram">
             <a:extLst>
               <a:ext uri="{FF2B5EF4-FFF2-40B4-BE49-F238E27FC236}">
-                <a16:creationId xmlns:a16="http://schemas.microsoft.com/office/drawing/2014/main" id="{0166B4DD-D72A-4A54-94A7-2C38133837FD}"/>
+                <a16:creationId xmlns:a16="http://schemas.microsoft.com/office/drawing/2014/main" xmlns="" id="{0166B4DD-D72A-4A54-94A7-2C38133837FD}"/>
               </a:ext>
             </a:extLst>
           </p:cNvPr>
@@ -15705,7 +15702,7 @@
           <p:cNvPr id="7" name="AutoShape 4" descr="An example of graph signal reconstruction over wireless sensor network. |  Download Scientific Diagram">
             <a:extLst>
               <a:ext uri="{FF2B5EF4-FFF2-40B4-BE49-F238E27FC236}">
-                <a16:creationId xmlns:a16="http://schemas.microsoft.com/office/drawing/2014/main" id="{14C2B67D-81A1-457E-A410-FE4350A3CCA4}"/>
+                <a16:creationId xmlns:a16="http://schemas.microsoft.com/office/drawing/2014/main" xmlns="" id="{14C2B67D-81A1-457E-A410-FE4350A3CCA4}"/>
               </a:ext>
             </a:extLst>
           </p:cNvPr>
@@ -15756,7 +15753,7 @@
           <p:cNvPr id="4" name="Espaço Reservado para Conteúdo 3">
             <a:extLst>
               <a:ext uri="{FF2B5EF4-FFF2-40B4-BE49-F238E27FC236}">
-                <a16:creationId xmlns:a16="http://schemas.microsoft.com/office/drawing/2014/main" id="{5F1B432F-F570-AEC0-CFFF-C1D9196D7234}"/>
+                <a16:creationId xmlns:a16="http://schemas.microsoft.com/office/drawing/2014/main" xmlns="" id="{5F1B432F-F570-AEC0-CFFF-C1D9196D7234}"/>
               </a:ext>
             </a:extLst>
           </p:cNvPr>
@@ -15840,7 +15837,7 @@
           <p:cNvPr id="4098" name="Picture 2" descr="K-Means Clustering Algorithm - Javatpoint">
             <a:extLst>
               <a:ext uri="{FF2B5EF4-FFF2-40B4-BE49-F238E27FC236}">
-                <a16:creationId xmlns:a16="http://schemas.microsoft.com/office/drawing/2014/main" id="{45592E60-7087-AC09-6FA1-B6EBEB4488EC}"/>
+                <a16:creationId xmlns:a16="http://schemas.microsoft.com/office/drawing/2014/main" xmlns="" id="{45592E60-7087-AC09-6FA1-B6EBEB4488EC}"/>
               </a:ext>
             </a:extLst>
           </p:cNvPr>
@@ -15931,7 +15928,7 @@
           <p:cNvPr id="2" name="Título 1">
             <a:extLst>
               <a:ext uri="{FF2B5EF4-FFF2-40B4-BE49-F238E27FC236}">
-                <a16:creationId xmlns:a16="http://schemas.microsoft.com/office/drawing/2014/main" id="{5F09B89C-3183-4D52-981A-62798DDFF2B8}"/>
+                <a16:creationId xmlns:a16="http://schemas.microsoft.com/office/drawing/2014/main" xmlns="" id="{5F09B89C-3183-4D52-981A-62798DDFF2B8}"/>
               </a:ext>
             </a:extLst>
           </p:cNvPr>
@@ -15971,7 +15968,7 @@
           <p:cNvPr id="3" name="AutoShape 2" descr="An example of graph signal reconstruction over wireless sensor network. |  Download Scientific Diagram">
             <a:extLst>
               <a:ext uri="{FF2B5EF4-FFF2-40B4-BE49-F238E27FC236}">
-                <a16:creationId xmlns:a16="http://schemas.microsoft.com/office/drawing/2014/main" id="{0166B4DD-D72A-4A54-94A7-2C38133837FD}"/>
+                <a16:creationId xmlns:a16="http://schemas.microsoft.com/office/drawing/2014/main" xmlns="" id="{0166B4DD-D72A-4A54-94A7-2C38133837FD}"/>
               </a:ext>
             </a:extLst>
           </p:cNvPr>
@@ -16022,7 +16019,7 @@
           <p:cNvPr id="7" name="AutoShape 4" descr="An example of graph signal reconstruction over wireless sensor network. |  Download Scientific Diagram">
             <a:extLst>
               <a:ext uri="{FF2B5EF4-FFF2-40B4-BE49-F238E27FC236}">
-                <a16:creationId xmlns:a16="http://schemas.microsoft.com/office/drawing/2014/main" id="{14C2B67D-81A1-457E-A410-FE4350A3CCA4}"/>
+                <a16:creationId xmlns:a16="http://schemas.microsoft.com/office/drawing/2014/main" xmlns="" id="{14C2B67D-81A1-457E-A410-FE4350A3CCA4}"/>
               </a:ext>
             </a:extLst>
           </p:cNvPr>
@@ -16073,7 +16070,7 @@
           <p:cNvPr id="4" name="Espaço Reservado para Conteúdo 3">
             <a:extLst>
               <a:ext uri="{FF2B5EF4-FFF2-40B4-BE49-F238E27FC236}">
-                <a16:creationId xmlns:a16="http://schemas.microsoft.com/office/drawing/2014/main" id="{5F1B432F-F570-AEC0-CFFF-C1D9196D7234}"/>
+                <a16:creationId xmlns:a16="http://schemas.microsoft.com/office/drawing/2014/main" xmlns="" id="{5F1B432F-F570-AEC0-CFFF-C1D9196D7234}"/>
               </a:ext>
             </a:extLst>
           </p:cNvPr>
@@ -16126,7 +16123,7 @@
               <p:cNvPr id="5" name="TextBox 4">
                 <a:extLst>
                   <a:ext uri="{FF2B5EF4-FFF2-40B4-BE49-F238E27FC236}">
-                    <a16:creationId xmlns:a16="http://schemas.microsoft.com/office/drawing/2014/main" id="{A60E2CD0-3AFD-013C-16CC-B158E81DC1CA}"/>
+                    <a16:creationId xmlns:a16="http://schemas.microsoft.com/office/drawing/2014/main" xmlns="" id="{A60E2CD0-3AFD-013C-16CC-B158E81DC1CA}"/>
                   </a:ext>
                 </a:extLst>
               </p:cNvPr>
@@ -16378,7 +16375,7 @@
         <p:cNvPr id="1" name="">
           <a:extLst>
             <a:ext uri="{FF2B5EF4-FFF2-40B4-BE49-F238E27FC236}">
-              <a16:creationId xmlns:a16="http://schemas.microsoft.com/office/drawing/2014/main" id="{8A1FE513-AB4A-132F-B33C-C1A69C4E90BB}"/>
+              <a16:creationId xmlns:a16="http://schemas.microsoft.com/office/drawing/2014/main" xmlns="" id="{8A1FE513-AB4A-132F-B33C-C1A69C4E90BB}"/>
             </a:ext>
           </a:extLst>
         </p:cNvPr>
@@ -16398,7 +16395,7 @@
           <p:cNvPr id="2" name="Título 1">
             <a:extLst>
               <a:ext uri="{FF2B5EF4-FFF2-40B4-BE49-F238E27FC236}">
-                <a16:creationId xmlns:a16="http://schemas.microsoft.com/office/drawing/2014/main" id="{E5BC5611-534A-CB77-C071-F477937D3B59}"/>
+                <a16:creationId xmlns:a16="http://schemas.microsoft.com/office/drawing/2014/main" xmlns="" id="{E5BC5611-534A-CB77-C071-F477937D3B59}"/>
               </a:ext>
             </a:extLst>
           </p:cNvPr>
@@ -16438,7 +16435,7 @@
           <p:cNvPr id="3" name="AutoShape 2" descr="An example of graph signal reconstruction over wireless sensor network. |  Download Scientific Diagram">
             <a:extLst>
               <a:ext uri="{FF2B5EF4-FFF2-40B4-BE49-F238E27FC236}">
-                <a16:creationId xmlns:a16="http://schemas.microsoft.com/office/drawing/2014/main" id="{7E7F13EA-3BD1-43C2-79EA-B881793AD8AD}"/>
+                <a16:creationId xmlns:a16="http://schemas.microsoft.com/office/drawing/2014/main" xmlns="" id="{7E7F13EA-3BD1-43C2-79EA-B881793AD8AD}"/>
               </a:ext>
             </a:extLst>
           </p:cNvPr>
@@ -16489,7 +16486,7 @@
           <p:cNvPr id="7" name="AutoShape 4" descr="An example of graph signal reconstruction over wireless sensor network. |  Download Scientific Diagram">
             <a:extLst>
               <a:ext uri="{FF2B5EF4-FFF2-40B4-BE49-F238E27FC236}">
-                <a16:creationId xmlns:a16="http://schemas.microsoft.com/office/drawing/2014/main" id="{A0891BC2-FEAE-19E7-B671-ECE0FACC07C4}"/>
+                <a16:creationId xmlns:a16="http://schemas.microsoft.com/office/drawing/2014/main" xmlns="" id="{A0891BC2-FEAE-19E7-B671-ECE0FACC07C4}"/>
               </a:ext>
             </a:extLst>
           </p:cNvPr>
@@ -16540,7 +16537,7 @@
           <p:cNvPr id="4" name="Espaço Reservado para Conteúdo 3">
             <a:extLst>
               <a:ext uri="{FF2B5EF4-FFF2-40B4-BE49-F238E27FC236}">
-                <a16:creationId xmlns:a16="http://schemas.microsoft.com/office/drawing/2014/main" id="{747C2E78-E437-28C4-0BAF-D2D2AC1C96CB}"/>
+                <a16:creationId xmlns:a16="http://schemas.microsoft.com/office/drawing/2014/main" xmlns="" id="{747C2E78-E437-28C4-0BAF-D2D2AC1C96CB}"/>
               </a:ext>
             </a:extLst>
           </p:cNvPr>
@@ -16583,7 +16580,7 @@
           <p:cNvPr id="6" name="Picture 5">
             <a:extLst>
               <a:ext uri="{FF2B5EF4-FFF2-40B4-BE49-F238E27FC236}">
-                <a16:creationId xmlns:a16="http://schemas.microsoft.com/office/drawing/2014/main" id="{F98B536F-38AB-58C5-0FFB-41BDB557E9EF}"/>
+                <a16:creationId xmlns:a16="http://schemas.microsoft.com/office/drawing/2014/main" xmlns="" id="{F98B536F-38AB-58C5-0FFB-41BDB557E9EF}"/>
               </a:ext>
             </a:extLst>
           </p:cNvPr>
@@ -16613,7 +16610,7 @@
           <p:cNvPr id="8" name="TextBox 7">
             <a:extLst>
               <a:ext uri="{FF2B5EF4-FFF2-40B4-BE49-F238E27FC236}">
-                <a16:creationId xmlns:a16="http://schemas.microsoft.com/office/drawing/2014/main" id="{04EA9FAE-D371-68E0-2CB7-9C8893491B3B}"/>
+                <a16:creationId xmlns:a16="http://schemas.microsoft.com/office/drawing/2014/main" xmlns="" id="{04EA9FAE-D371-68E0-2CB7-9C8893491B3B}"/>
               </a:ext>
             </a:extLst>
           </p:cNvPr>
@@ -16679,7 +16676,7 @@
         <p:cNvPr id="1" name="">
           <a:extLst>
             <a:ext uri="{FF2B5EF4-FFF2-40B4-BE49-F238E27FC236}">
-              <a16:creationId xmlns:a16="http://schemas.microsoft.com/office/drawing/2014/main" id="{B86C6B89-4D49-2EC0-F063-638BD6935412}"/>
+              <a16:creationId xmlns:a16="http://schemas.microsoft.com/office/drawing/2014/main" xmlns="" id="{B86C6B89-4D49-2EC0-F063-638BD6935412}"/>
             </a:ext>
           </a:extLst>
         </p:cNvPr>
@@ -16699,7 +16696,7 @@
           <p:cNvPr id="2" name="Título 1">
             <a:extLst>
               <a:ext uri="{FF2B5EF4-FFF2-40B4-BE49-F238E27FC236}">
-                <a16:creationId xmlns:a16="http://schemas.microsoft.com/office/drawing/2014/main" id="{B81115AF-9415-9558-8D7C-7CA5F9E9ED43}"/>
+                <a16:creationId xmlns:a16="http://schemas.microsoft.com/office/drawing/2014/main" xmlns="" id="{B81115AF-9415-9558-8D7C-7CA5F9E9ED43}"/>
               </a:ext>
             </a:extLst>
           </p:cNvPr>
@@ -16739,7 +16736,7 @@
           <p:cNvPr id="3" name="AutoShape 2" descr="An example of graph signal reconstruction over wireless sensor network. |  Download Scientific Diagram">
             <a:extLst>
               <a:ext uri="{FF2B5EF4-FFF2-40B4-BE49-F238E27FC236}">
-                <a16:creationId xmlns:a16="http://schemas.microsoft.com/office/drawing/2014/main" id="{55584ECE-67DE-1FFA-9FE4-D3C3D4136411}"/>
+                <a16:creationId xmlns:a16="http://schemas.microsoft.com/office/drawing/2014/main" xmlns="" id="{55584ECE-67DE-1FFA-9FE4-D3C3D4136411}"/>
               </a:ext>
             </a:extLst>
           </p:cNvPr>
@@ -16790,7 +16787,7 @@
           <p:cNvPr id="7" name="AutoShape 4" descr="An example of graph signal reconstruction over wireless sensor network. |  Download Scientific Diagram">
             <a:extLst>
               <a:ext uri="{FF2B5EF4-FFF2-40B4-BE49-F238E27FC236}">
-                <a16:creationId xmlns:a16="http://schemas.microsoft.com/office/drawing/2014/main" id="{A9D0FB6C-59DD-7620-EBAF-21BB030E5B51}"/>
+                <a16:creationId xmlns:a16="http://schemas.microsoft.com/office/drawing/2014/main" xmlns="" id="{A9D0FB6C-59DD-7620-EBAF-21BB030E5B51}"/>
               </a:ext>
             </a:extLst>
           </p:cNvPr>
@@ -16841,7 +16838,7 @@
           <p:cNvPr id="4" name="Espaço Reservado para Conteúdo 3">
             <a:extLst>
               <a:ext uri="{FF2B5EF4-FFF2-40B4-BE49-F238E27FC236}">
-                <a16:creationId xmlns:a16="http://schemas.microsoft.com/office/drawing/2014/main" id="{EC6F58C6-8849-231E-3B12-60D9682EF42B}"/>
+                <a16:creationId xmlns:a16="http://schemas.microsoft.com/office/drawing/2014/main" xmlns="" id="{EC6F58C6-8849-231E-3B12-60D9682EF42B}"/>
               </a:ext>
             </a:extLst>
           </p:cNvPr>
@@ -16884,7 +16881,7 @@
           <p:cNvPr id="6" name="Picture 5">
             <a:extLst>
               <a:ext uri="{FF2B5EF4-FFF2-40B4-BE49-F238E27FC236}">
-                <a16:creationId xmlns:a16="http://schemas.microsoft.com/office/drawing/2014/main" id="{69F3FE92-0D0B-AECE-B64E-FC9D2F3EADBC}"/>
+                <a16:creationId xmlns:a16="http://schemas.microsoft.com/office/drawing/2014/main" xmlns="" id="{69F3FE92-0D0B-AECE-B64E-FC9D2F3EADBC}"/>
               </a:ext>
             </a:extLst>
           </p:cNvPr>
@@ -16914,7 +16911,7 @@
           <p:cNvPr id="8" name="TextBox 7">
             <a:extLst>
               <a:ext uri="{FF2B5EF4-FFF2-40B4-BE49-F238E27FC236}">
-                <a16:creationId xmlns:a16="http://schemas.microsoft.com/office/drawing/2014/main" id="{5D947541-89EC-69EF-1918-6EFD56E0B3C2}"/>
+                <a16:creationId xmlns:a16="http://schemas.microsoft.com/office/drawing/2014/main" xmlns="" id="{5D947541-89EC-69EF-1918-6EFD56E0B3C2}"/>
               </a:ext>
             </a:extLst>
           </p:cNvPr>
@@ -17019,7 +17016,7 @@
         <p:cNvPr id="1" name="">
           <a:extLst>
             <a:ext uri="{FF2B5EF4-FFF2-40B4-BE49-F238E27FC236}">
-              <a16:creationId xmlns:a16="http://schemas.microsoft.com/office/drawing/2014/main" id="{42119100-E668-77C4-3183-771B95B265DA}"/>
+              <a16:creationId xmlns:a16="http://schemas.microsoft.com/office/drawing/2014/main" xmlns="" id="{42119100-E668-77C4-3183-771B95B265DA}"/>
             </a:ext>
           </a:extLst>
         </p:cNvPr>
@@ -17039,7 +17036,7 @@
           <p:cNvPr id="2" name="Título 1">
             <a:extLst>
               <a:ext uri="{FF2B5EF4-FFF2-40B4-BE49-F238E27FC236}">
-                <a16:creationId xmlns:a16="http://schemas.microsoft.com/office/drawing/2014/main" id="{4EBCA554-D396-DCCB-4744-F3695D6FD50E}"/>
+                <a16:creationId xmlns:a16="http://schemas.microsoft.com/office/drawing/2014/main" xmlns="" id="{4EBCA554-D396-DCCB-4744-F3695D6FD50E}"/>
               </a:ext>
             </a:extLst>
           </p:cNvPr>
@@ -17079,7 +17076,7 @@
           <p:cNvPr id="3" name="AutoShape 2" descr="An example of graph signal reconstruction over wireless sensor network. |  Download Scientific Diagram">
             <a:extLst>
               <a:ext uri="{FF2B5EF4-FFF2-40B4-BE49-F238E27FC236}">
-                <a16:creationId xmlns:a16="http://schemas.microsoft.com/office/drawing/2014/main" id="{3380BF6D-7A0A-C11E-50C6-1F567BA3A3D4}"/>
+                <a16:creationId xmlns:a16="http://schemas.microsoft.com/office/drawing/2014/main" xmlns="" id="{3380BF6D-7A0A-C11E-50C6-1F567BA3A3D4}"/>
               </a:ext>
             </a:extLst>
           </p:cNvPr>
@@ -17130,7 +17127,7 @@
           <p:cNvPr id="7" name="AutoShape 4" descr="An example of graph signal reconstruction over wireless sensor network. |  Download Scientific Diagram">
             <a:extLst>
               <a:ext uri="{FF2B5EF4-FFF2-40B4-BE49-F238E27FC236}">
-                <a16:creationId xmlns:a16="http://schemas.microsoft.com/office/drawing/2014/main" id="{52BFF569-F440-2D60-8296-D8243B2988E7}"/>
+                <a16:creationId xmlns:a16="http://schemas.microsoft.com/office/drawing/2014/main" xmlns="" id="{52BFF569-F440-2D60-8296-D8243B2988E7}"/>
               </a:ext>
             </a:extLst>
           </p:cNvPr>
@@ -17181,7 +17178,7 @@
           <p:cNvPr id="4" name="Espaço Reservado para Conteúdo 3">
             <a:extLst>
               <a:ext uri="{FF2B5EF4-FFF2-40B4-BE49-F238E27FC236}">
-                <a16:creationId xmlns:a16="http://schemas.microsoft.com/office/drawing/2014/main" id="{E0298857-CD80-B8D1-6E62-55E6C3A64A44}"/>
+                <a16:creationId xmlns:a16="http://schemas.microsoft.com/office/drawing/2014/main" xmlns="" id="{E0298857-CD80-B8D1-6E62-55E6C3A64A44}"/>
               </a:ext>
             </a:extLst>
           </p:cNvPr>
@@ -17224,7 +17221,7 @@
           <p:cNvPr id="6" name="Picture 5">
             <a:extLst>
               <a:ext uri="{FF2B5EF4-FFF2-40B4-BE49-F238E27FC236}">
-                <a16:creationId xmlns:a16="http://schemas.microsoft.com/office/drawing/2014/main" id="{1C0684BB-EFF7-DBA8-3519-25CE2A1A9632}"/>
+                <a16:creationId xmlns:a16="http://schemas.microsoft.com/office/drawing/2014/main" xmlns="" id="{1C0684BB-EFF7-DBA8-3519-25CE2A1A9632}"/>
               </a:ext>
             </a:extLst>
           </p:cNvPr>
@@ -17254,7 +17251,7 @@
           <p:cNvPr id="9" name="TextBox 8">
             <a:extLst>
               <a:ext uri="{FF2B5EF4-FFF2-40B4-BE49-F238E27FC236}">
-                <a16:creationId xmlns:a16="http://schemas.microsoft.com/office/drawing/2014/main" id="{38267D7C-379A-003E-4048-8D4DDD969EB6}"/>
+                <a16:creationId xmlns:a16="http://schemas.microsoft.com/office/drawing/2014/main" xmlns="" id="{38267D7C-379A-003E-4048-8D4DDD969EB6}"/>
               </a:ext>
             </a:extLst>
           </p:cNvPr>
@@ -17303,6 +17300,10 @@
                 <a:effectLst/>
               </a:rPr>
               <a:t> mais próximo com base na distância euclidiana.</a:t>
+            </a:r>
+            <a:r>
+              <a:rPr lang="pt-BR" dirty="0"/>
+              <a:t/>
             </a:r>
             <a:br>
               <a:rPr lang="pt-BR" dirty="0"/>

--- a/slides/TP557_16_detecção_de_anomalias.pptx
+++ b/slides/TP557_16_detecção_de_anomalias.pptx
@@ -749,7 +749,7 @@
         <p:cNvPr id="1" name="">
           <a:extLst>
             <a:ext uri="{FF2B5EF4-FFF2-40B4-BE49-F238E27FC236}">
-              <a16:creationId xmlns:a16="http://schemas.microsoft.com/office/drawing/2014/main" xmlns="" id="{3DC8778D-274C-4550-BFA6-2BF2EE1372DF}"/>
+              <a16:creationId xmlns="" xmlns:a16="http://schemas.microsoft.com/office/drawing/2014/main" id="{3DC8778D-274C-4550-BFA6-2BF2EE1372DF}"/>
             </a:ext>
           </a:extLst>
         </p:cNvPr>
@@ -769,7 +769,7 @@
           <p:cNvPr id="2" name="Espaço Reservado para Imagem de Slide 1">
             <a:extLst>
               <a:ext uri="{FF2B5EF4-FFF2-40B4-BE49-F238E27FC236}">
-                <a16:creationId xmlns:a16="http://schemas.microsoft.com/office/drawing/2014/main" xmlns="" id="{C35AD5E8-765A-E917-B919-F1F6AE347F53}"/>
+                <a16:creationId xmlns="" xmlns:a16="http://schemas.microsoft.com/office/drawing/2014/main" id="{C35AD5E8-765A-E917-B919-F1F6AE347F53}"/>
               </a:ext>
             </a:extLst>
           </p:cNvPr>
@@ -787,7 +787,7 @@
           <p:cNvPr id="3" name="Espaço Reservado para Anotações 2">
             <a:extLst>
               <a:ext uri="{FF2B5EF4-FFF2-40B4-BE49-F238E27FC236}">
-                <a16:creationId xmlns:a16="http://schemas.microsoft.com/office/drawing/2014/main" xmlns="" id="{9D90C0BF-FC56-01AC-3AD0-5B5E6D0FB45D}"/>
+                <a16:creationId xmlns="" xmlns:a16="http://schemas.microsoft.com/office/drawing/2014/main" id="{9D90C0BF-FC56-01AC-3AD0-5B5E6D0FB45D}"/>
               </a:ext>
             </a:extLst>
           </p:cNvPr>
@@ -812,7 +812,7 @@
           <p:cNvPr id="4" name="Espaço Reservado para Número de Slide 3">
             <a:extLst>
               <a:ext uri="{FF2B5EF4-FFF2-40B4-BE49-F238E27FC236}">
-                <a16:creationId xmlns:a16="http://schemas.microsoft.com/office/drawing/2014/main" xmlns="" id="{41EF1718-29E8-7DF3-052E-E040AF947292}"/>
+                <a16:creationId xmlns="" xmlns:a16="http://schemas.microsoft.com/office/drawing/2014/main" id="{41EF1718-29E8-7DF3-052E-E040AF947292}"/>
               </a:ext>
             </a:extLst>
           </p:cNvPr>
@@ -857,7 +857,7 @@
         <p:cNvPr id="1" name="">
           <a:extLst>
             <a:ext uri="{FF2B5EF4-FFF2-40B4-BE49-F238E27FC236}">
-              <a16:creationId xmlns:a16="http://schemas.microsoft.com/office/drawing/2014/main" xmlns="" id="{D5CE570B-6F22-A16C-FB7C-644660A08E50}"/>
+              <a16:creationId xmlns="" xmlns:a16="http://schemas.microsoft.com/office/drawing/2014/main" id="{D5CE570B-6F22-A16C-FB7C-644660A08E50}"/>
             </a:ext>
           </a:extLst>
         </p:cNvPr>
@@ -877,7 +877,7 @@
           <p:cNvPr id="2" name="Espaço Reservado para Imagem de Slide 1">
             <a:extLst>
               <a:ext uri="{FF2B5EF4-FFF2-40B4-BE49-F238E27FC236}">
-                <a16:creationId xmlns:a16="http://schemas.microsoft.com/office/drawing/2014/main" xmlns="" id="{54988FE9-CE61-8F19-30AA-F0093DA959FE}"/>
+                <a16:creationId xmlns="" xmlns:a16="http://schemas.microsoft.com/office/drawing/2014/main" id="{54988FE9-CE61-8F19-30AA-F0093DA959FE}"/>
               </a:ext>
             </a:extLst>
           </p:cNvPr>
@@ -895,7 +895,7 @@
           <p:cNvPr id="3" name="Espaço Reservado para Anotações 2">
             <a:extLst>
               <a:ext uri="{FF2B5EF4-FFF2-40B4-BE49-F238E27FC236}">
-                <a16:creationId xmlns:a16="http://schemas.microsoft.com/office/drawing/2014/main" xmlns="" id="{FF56B3B1-0912-3AF5-3099-3CC1931A01BF}"/>
+                <a16:creationId xmlns="" xmlns:a16="http://schemas.microsoft.com/office/drawing/2014/main" id="{FF56B3B1-0912-3AF5-3099-3CC1931A01BF}"/>
               </a:ext>
             </a:extLst>
           </p:cNvPr>
@@ -920,7 +920,7 @@
           <p:cNvPr id="4" name="Espaço Reservado para Número de Slide 3">
             <a:extLst>
               <a:ext uri="{FF2B5EF4-FFF2-40B4-BE49-F238E27FC236}">
-                <a16:creationId xmlns:a16="http://schemas.microsoft.com/office/drawing/2014/main" xmlns="" id="{EA8F2BE0-E2B3-AC2B-9D52-752913B7CF4B}"/>
+                <a16:creationId xmlns="" xmlns:a16="http://schemas.microsoft.com/office/drawing/2014/main" id="{EA8F2BE0-E2B3-AC2B-9D52-752913B7CF4B}"/>
               </a:ext>
             </a:extLst>
           </p:cNvPr>
@@ -965,7 +965,7 @@
         <p:cNvPr id="1" name="">
           <a:extLst>
             <a:ext uri="{FF2B5EF4-FFF2-40B4-BE49-F238E27FC236}">
-              <a16:creationId xmlns:a16="http://schemas.microsoft.com/office/drawing/2014/main" xmlns="" id="{38F770F4-9A55-E975-D43C-FCEA3ED2C1A9}"/>
+              <a16:creationId xmlns="" xmlns:a16="http://schemas.microsoft.com/office/drawing/2014/main" id="{38F770F4-9A55-E975-D43C-FCEA3ED2C1A9}"/>
             </a:ext>
           </a:extLst>
         </p:cNvPr>
@@ -985,7 +985,7 @@
           <p:cNvPr id="2" name="Espaço Reservado para Imagem de Slide 1">
             <a:extLst>
               <a:ext uri="{FF2B5EF4-FFF2-40B4-BE49-F238E27FC236}">
-                <a16:creationId xmlns:a16="http://schemas.microsoft.com/office/drawing/2014/main" xmlns="" id="{AEDFCAA5-FC8C-DD9C-AFC5-CB278DE7F744}"/>
+                <a16:creationId xmlns="" xmlns:a16="http://schemas.microsoft.com/office/drawing/2014/main" id="{AEDFCAA5-FC8C-DD9C-AFC5-CB278DE7F744}"/>
               </a:ext>
             </a:extLst>
           </p:cNvPr>
@@ -1003,7 +1003,7 @@
           <p:cNvPr id="3" name="Espaço Reservado para Anotações 2">
             <a:extLst>
               <a:ext uri="{FF2B5EF4-FFF2-40B4-BE49-F238E27FC236}">
-                <a16:creationId xmlns:a16="http://schemas.microsoft.com/office/drawing/2014/main" xmlns="" id="{D403E6E9-E099-A9A5-653E-6F0722996927}"/>
+                <a16:creationId xmlns="" xmlns:a16="http://schemas.microsoft.com/office/drawing/2014/main" id="{D403E6E9-E099-A9A5-653E-6F0722996927}"/>
               </a:ext>
             </a:extLst>
           </p:cNvPr>
@@ -1028,7 +1028,7 @@
           <p:cNvPr id="4" name="Espaço Reservado para Número de Slide 3">
             <a:extLst>
               <a:ext uri="{FF2B5EF4-FFF2-40B4-BE49-F238E27FC236}">
-                <a16:creationId xmlns:a16="http://schemas.microsoft.com/office/drawing/2014/main" xmlns="" id="{384EBEF5-7321-520D-7991-F3CC5AF3A56D}"/>
+                <a16:creationId xmlns="" xmlns:a16="http://schemas.microsoft.com/office/drawing/2014/main" id="{384EBEF5-7321-520D-7991-F3CC5AF3A56D}"/>
               </a:ext>
             </a:extLst>
           </p:cNvPr>
@@ -1073,7 +1073,7 @@
         <p:cNvPr id="1" name="">
           <a:extLst>
             <a:ext uri="{FF2B5EF4-FFF2-40B4-BE49-F238E27FC236}">
-              <a16:creationId xmlns:a16="http://schemas.microsoft.com/office/drawing/2014/main" xmlns="" id="{31D8DD9A-FB73-B3DA-6F9F-A22549E2ACF5}"/>
+              <a16:creationId xmlns="" xmlns:a16="http://schemas.microsoft.com/office/drawing/2014/main" id="{31D8DD9A-FB73-B3DA-6F9F-A22549E2ACF5}"/>
             </a:ext>
           </a:extLst>
         </p:cNvPr>
@@ -1093,7 +1093,7 @@
           <p:cNvPr id="2" name="Espaço Reservado para Imagem de Slide 1">
             <a:extLst>
               <a:ext uri="{FF2B5EF4-FFF2-40B4-BE49-F238E27FC236}">
-                <a16:creationId xmlns:a16="http://schemas.microsoft.com/office/drawing/2014/main" xmlns="" id="{E99B0F2D-8473-FC35-AF28-ECE2A1829004}"/>
+                <a16:creationId xmlns="" xmlns:a16="http://schemas.microsoft.com/office/drawing/2014/main" id="{E99B0F2D-8473-FC35-AF28-ECE2A1829004}"/>
               </a:ext>
             </a:extLst>
           </p:cNvPr>
@@ -1111,7 +1111,7 @@
           <p:cNvPr id="3" name="Espaço Reservado para Anotações 2">
             <a:extLst>
               <a:ext uri="{FF2B5EF4-FFF2-40B4-BE49-F238E27FC236}">
-                <a16:creationId xmlns:a16="http://schemas.microsoft.com/office/drawing/2014/main" xmlns="" id="{8C9962D3-EA60-94A8-A6D4-C3161BED15BF}"/>
+                <a16:creationId xmlns="" xmlns:a16="http://schemas.microsoft.com/office/drawing/2014/main" id="{8C9962D3-EA60-94A8-A6D4-C3161BED15BF}"/>
               </a:ext>
             </a:extLst>
           </p:cNvPr>
@@ -1136,7 +1136,7 @@
           <p:cNvPr id="4" name="Espaço Reservado para Número de Slide 3">
             <a:extLst>
               <a:ext uri="{FF2B5EF4-FFF2-40B4-BE49-F238E27FC236}">
-                <a16:creationId xmlns:a16="http://schemas.microsoft.com/office/drawing/2014/main" xmlns="" id="{1A62ECEA-4026-B0E1-9730-4E6CBBB39369}"/>
+                <a16:creationId xmlns="" xmlns:a16="http://schemas.microsoft.com/office/drawing/2014/main" id="{1A62ECEA-4026-B0E1-9730-4E6CBBB39369}"/>
               </a:ext>
             </a:extLst>
           </p:cNvPr>
@@ -1349,7 +1349,7 @@
         <p:cNvPr id="1" name="">
           <a:extLst>
             <a:ext uri="{FF2B5EF4-FFF2-40B4-BE49-F238E27FC236}">
-              <a16:creationId xmlns:a16="http://schemas.microsoft.com/office/drawing/2014/main" xmlns="" id="{6E955CAB-F21A-9D08-F98D-00EB95ED3441}"/>
+              <a16:creationId xmlns="" xmlns:a16="http://schemas.microsoft.com/office/drawing/2014/main" id="{6E955CAB-F21A-9D08-F98D-00EB95ED3441}"/>
             </a:ext>
           </a:extLst>
         </p:cNvPr>
@@ -1369,7 +1369,7 @@
           <p:cNvPr id="2" name="Espaço Reservado para Imagem de Slide 1">
             <a:extLst>
               <a:ext uri="{FF2B5EF4-FFF2-40B4-BE49-F238E27FC236}">
-                <a16:creationId xmlns:a16="http://schemas.microsoft.com/office/drawing/2014/main" xmlns="" id="{0D72ECCF-390F-6700-31C9-EBB590D4368D}"/>
+                <a16:creationId xmlns="" xmlns:a16="http://schemas.microsoft.com/office/drawing/2014/main" id="{0D72ECCF-390F-6700-31C9-EBB590D4368D}"/>
               </a:ext>
             </a:extLst>
           </p:cNvPr>
@@ -1387,7 +1387,7 @@
           <p:cNvPr id="3" name="Espaço Reservado para Anotações 2">
             <a:extLst>
               <a:ext uri="{FF2B5EF4-FFF2-40B4-BE49-F238E27FC236}">
-                <a16:creationId xmlns:a16="http://schemas.microsoft.com/office/drawing/2014/main" xmlns="" id="{577FA9D6-B2FE-523B-86B7-0EFD6452DDF4}"/>
+                <a16:creationId xmlns="" xmlns:a16="http://schemas.microsoft.com/office/drawing/2014/main" id="{577FA9D6-B2FE-523B-86B7-0EFD6452DDF4}"/>
               </a:ext>
             </a:extLst>
           </p:cNvPr>
@@ -1412,7 +1412,7 @@
           <p:cNvPr id="4" name="Espaço Reservado para Número de Slide 3">
             <a:extLst>
               <a:ext uri="{FF2B5EF4-FFF2-40B4-BE49-F238E27FC236}">
-                <a16:creationId xmlns:a16="http://schemas.microsoft.com/office/drawing/2014/main" xmlns="" id="{1DBD4D4D-75F0-64AD-BA32-1AF4C4593BDD}"/>
+                <a16:creationId xmlns="" xmlns:a16="http://schemas.microsoft.com/office/drawing/2014/main" id="{1DBD4D4D-75F0-64AD-BA32-1AF4C4593BDD}"/>
               </a:ext>
             </a:extLst>
           </p:cNvPr>
@@ -1493,7 +1493,15 @@
           <a:bodyPr/>
           <a:lstStyle/>
           <a:p>
-            <a:endParaRPr lang="pt-BR" dirty="0"/>
+            <a:r>
+              <a:rPr lang="pt-BR" dirty="0" smtClean="0"/>
+              <a:t>https://</a:t>
+            </a:r>
+            <a:r>
+              <a:rPr lang="pt-BR" u="sng" dirty="0" smtClean="0"/>
+              <a:t>colab.research.google.com/github/zz4fap/tp557-iot-ml/blob/main/examples/k_means_centros_de_distribuição.ipynb</a:t>
+            </a:r>
+            <a:endParaRPr lang="pt-BR" u="sng" dirty="0"/>
           </a:p>
         </p:txBody>
       </p:sp>
@@ -2789,7 +2797,7 @@
         <p:cNvPr id="1" name="">
           <a:extLst>
             <a:ext uri="{FF2B5EF4-FFF2-40B4-BE49-F238E27FC236}">
-              <a16:creationId xmlns:a16="http://schemas.microsoft.com/office/drawing/2014/main" xmlns="" id="{5BDAD2A1-5359-2B35-87A2-CB62DA9AC234}"/>
+              <a16:creationId xmlns="" xmlns:a16="http://schemas.microsoft.com/office/drawing/2014/main" id="{5BDAD2A1-5359-2B35-87A2-CB62DA9AC234}"/>
             </a:ext>
           </a:extLst>
         </p:cNvPr>
@@ -2809,7 +2817,7 @@
           <p:cNvPr id="2" name="Espaço Reservado para Imagem de Slide 1">
             <a:extLst>
               <a:ext uri="{FF2B5EF4-FFF2-40B4-BE49-F238E27FC236}">
-                <a16:creationId xmlns:a16="http://schemas.microsoft.com/office/drawing/2014/main" xmlns="" id="{E3CCF2D8-39A8-6970-A91C-CA1BB1172B74}"/>
+                <a16:creationId xmlns="" xmlns:a16="http://schemas.microsoft.com/office/drawing/2014/main" id="{E3CCF2D8-39A8-6970-A91C-CA1BB1172B74}"/>
               </a:ext>
             </a:extLst>
           </p:cNvPr>
@@ -2827,7 +2835,7 @@
           <p:cNvPr id="3" name="Espaço Reservado para Anotações 2">
             <a:extLst>
               <a:ext uri="{FF2B5EF4-FFF2-40B4-BE49-F238E27FC236}">
-                <a16:creationId xmlns:a16="http://schemas.microsoft.com/office/drawing/2014/main" xmlns="" id="{D2A0BCB8-A319-F2B9-61A9-80B79A20C8AD}"/>
+                <a16:creationId xmlns="" xmlns:a16="http://schemas.microsoft.com/office/drawing/2014/main" id="{D2A0BCB8-A319-F2B9-61A9-80B79A20C8AD}"/>
               </a:ext>
             </a:extLst>
           </p:cNvPr>
@@ -2852,7 +2860,7 @@
           <p:cNvPr id="4" name="Espaço Reservado para Número de Slide 3">
             <a:extLst>
               <a:ext uri="{FF2B5EF4-FFF2-40B4-BE49-F238E27FC236}">
-                <a16:creationId xmlns:a16="http://schemas.microsoft.com/office/drawing/2014/main" xmlns="" id="{7430ECDE-57AD-7D93-14A4-A77602871389}"/>
+                <a16:creationId xmlns="" xmlns:a16="http://schemas.microsoft.com/office/drawing/2014/main" id="{7430ECDE-57AD-7D93-14A4-A77602871389}"/>
               </a:ext>
             </a:extLst>
           </p:cNvPr>
@@ -2897,7 +2905,7 @@
         <p:cNvPr id="1" name="">
           <a:extLst>
             <a:ext uri="{FF2B5EF4-FFF2-40B4-BE49-F238E27FC236}">
-              <a16:creationId xmlns:a16="http://schemas.microsoft.com/office/drawing/2014/main" xmlns="" id="{2E6003E3-9C23-DFB4-E656-EE817B7B63F5}"/>
+              <a16:creationId xmlns="" xmlns:a16="http://schemas.microsoft.com/office/drawing/2014/main" id="{2E6003E3-9C23-DFB4-E656-EE817B7B63F5}"/>
             </a:ext>
           </a:extLst>
         </p:cNvPr>
@@ -2917,7 +2925,7 @@
           <p:cNvPr id="2" name="Espaço Reservado para Imagem de Slide 1">
             <a:extLst>
               <a:ext uri="{FF2B5EF4-FFF2-40B4-BE49-F238E27FC236}">
-                <a16:creationId xmlns:a16="http://schemas.microsoft.com/office/drawing/2014/main" xmlns="" id="{A47E6B73-509B-606A-BA52-ECD9A901942C}"/>
+                <a16:creationId xmlns="" xmlns:a16="http://schemas.microsoft.com/office/drawing/2014/main" id="{A47E6B73-509B-606A-BA52-ECD9A901942C}"/>
               </a:ext>
             </a:extLst>
           </p:cNvPr>
@@ -2935,7 +2943,7 @@
           <p:cNvPr id="3" name="Espaço Reservado para Anotações 2">
             <a:extLst>
               <a:ext uri="{FF2B5EF4-FFF2-40B4-BE49-F238E27FC236}">
-                <a16:creationId xmlns:a16="http://schemas.microsoft.com/office/drawing/2014/main" xmlns="" id="{1E7DD88D-B209-FE30-9F24-9AD224BF1EC8}"/>
+                <a16:creationId xmlns="" xmlns:a16="http://schemas.microsoft.com/office/drawing/2014/main" id="{1E7DD88D-B209-FE30-9F24-9AD224BF1EC8}"/>
               </a:ext>
             </a:extLst>
           </p:cNvPr>
@@ -2960,7 +2968,7 @@
           <p:cNvPr id="4" name="Espaço Reservado para Número de Slide 3">
             <a:extLst>
               <a:ext uri="{FF2B5EF4-FFF2-40B4-BE49-F238E27FC236}">
-                <a16:creationId xmlns:a16="http://schemas.microsoft.com/office/drawing/2014/main" xmlns="" id="{4A209F62-F946-427E-D702-876E44243A30}"/>
+                <a16:creationId xmlns="" xmlns:a16="http://schemas.microsoft.com/office/drawing/2014/main" id="{4A209F62-F946-427E-D702-876E44243A30}"/>
               </a:ext>
             </a:extLst>
           </p:cNvPr>
@@ -3005,7 +3013,7 @@
         <p:cNvPr id="1" name="">
           <a:extLst>
             <a:ext uri="{FF2B5EF4-FFF2-40B4-BE49-F238E27FC236}">
-              <a16:creationId xmlns:a16="http://schemas.microsoft.com/office/drawing/2014/main" xmlns="" id="{31790B8E-ACCA-F7FC-062F-E911F5C53D3B}"/>
+              <a16:creationId xmlns="" xmlns:a16="http://schemas.microsoft.com/office/drawing/2014/main" id="{31790B8E-ACCA-F7FC-062F-E911F5C53D3B}"/>
             </a:ext>
           </a:extLst>
         </p:cNvPr>
@@ -3025,7 +3033,7 @@
           <p:cNvPr id="2" name="Espaço Reservado para Imagem de Slide 1">
             <a:extLst>
               <a:ext uri="{FF2B5EF4-FFF2-40B4-BE49-F238E27FC236}">
-                <a16:creationId xmlns:a16="http://schemas.microsoft.com/office/drawing/2014/main" xmlns="" id="{77BBB11C-3D4E-BD82-F35A-38E1761E0CFD}"/>
+                <a16:creationId xmlns="" xmlns:a16="http://schemas.microsoft.com/office/drawing/2014/main" id="{77BBB11C-3D4E-BD82-F35A-38E1761E0CFD}"/>
               </a:ext>
             </a:extLst>
           </p:cNvPr>
@@ -3043,7 +3051,7 @@
           <p:cNvPr id="3" name="Espaço Reservado para Anotações 2">
             <a:extLst>
               <a:ext uri="{FF2B5EF4-FFF2-40B4-BE49-F238E27FC236}">
-                <a16:creationId xmlns:a16="http://schemas.microsoft.com/office/drawing/2014/main" xmlns="" id="{88D90C90-61FD-F2FA-BABE-D96B4D6667D3}"/>
+                <a16:creationId xmlns="" xmlns:a16="http://schemas.microsoft.com/office/drawing/2014/main" id="{88D90C90-61FD-F2FA-BABE-D96B4D6667D3}"/>
               </a:ext>
             </a:extLst>
           </p:cNvPr>
@@ -3068,7 +3076,7 @@
           <p:cNvPr id="4" name="Espaço Reservado para Número de Slide 3">
             <a:extLst>
               <a:ext uri="{FF2B5EF4-FFF2-40B4-BE49-F238E27FC236}">
-                <a16:creationId xmlns:a16="http://schemas.microsoft.com/office/drawing/2014/main" xmlns="" id="{281AAE74-6902-1DF5-1CE0-D34FA2800337}"/>
+                <a16:creationId xmlns="" xmlns:a16="http://schemas.microsoft.com/office/drawing/2014/main" id="{281AAE74-6902-1DF5-1CE0-D34FA2800337}"/>
               </a:ext>
             </a:extLst>
           </p:cNvPr>
@@ -3127,7 +3135,7 @@
           <p:cNvPr id="2" name="Título 1">
             <a:extLst>
               <a:ext uri="{FF2B5EF4-FFF2-40B4-BE49-F238E27FC236}">
-                <a16:creationId xmlns:a16="http://schemas.microsoft.com/office/drawing/2014/main" xmlns="" id="{1DB9B4FF-B06E-403C-A326-BDC64D8FF94E}"/>
+                <a16:creationId xmlns="" xmlns:a16="http://schemas.microsoft.com/office/drawing/2014/main" id="{1DB9B4FF-B06E-403C-A326-BDC64D8FF94E}"/>
               </a:ext>
             </a:extLst>
           </p:cNvPr>
@@ -3164,7 +3172,7 @@
           <p:cNvPr id="3" name="Subtítulo 2">
             <a:extLst>
               <a:ext uri="{FF2B5EF4-FFF2-40B4-BE49-F238E27FC236}">
-                <a16:creationId xmlns:a16="http://schemas.microsoft.com/office/drawing/2014/main" xmlns="" id="{247BDFCE-746E-45BF-A319-4733D58D1632}"/>
+                <a16:creationId xmlns="" xmlns:a16="http://schemas.microsoft.com/office/drawing/2014/main" id="{247BDFCE-746E-45BF-A319-4733D58D1632}"/>
               </a:ext>
             </a:extLst>
           </p:cNvPr>
@@ -3234,7 +3242,7 @@
           <p:cNvPr id="4" name="Espaço Reservado para Data 3">
             <a:extLst>
               <a:ext uri="{FF2B5EF4-FFF2-40B4-BE49-F238E27FC236}">
-                <a16:creationId xmlns:a16="http://schemas.microsoft.com/office/drawing/2014/main" xmlns="" id="{9EDE2778-5372-4104-B96D-968184DA8288}"/>
+                <a16:creationId xmlns="" xmlns:a16="http://schemas.microsoft.com/office/drawing/2014/main" id="{9EDE2778-5372-4104-B96D-968184DA8288}"/>
               </a:ext>
             </a:extLst>
           </p:cNvPr>
@@ -3263,7 +3271,7 @@
           <p:cNvPr id="5" name="Espaço Reservado para Rodapé 4">
             <a:extLst>
               <a:ext uri="{FF2B5EF4-FFF2-40B4-BE49-F238E27FC236}">
-                <a16:creationId xmlns:a16="http://schemas.microsoft.com/office/drawing/2014/main" xmlns="" id="{C1DD0F41-C861-4051-988D-3024A37A4B93}"/>
+                <a16:creationId xmlns="" xmlns:a16="http://schemas.microsoft.com/office/drawing/2014/main" id="{C1DD0F41-C861-4051-988D-3024A37A4B93}"/>
               </a:ext>
             </a:extLst>
           </p:cNvPr>
@@ -3288,7 +3296,7 @@
           <p:cNvPr id="6" name="Espaço Reservado para Número de Slide 5">
             <a:extLst>
               <a:ext uri="{FF2B5EF4-FFF2-40B4-BE49-F238E27FC236}">
-                <a16:creationId xmlns:a16="http://schemas.microsoft.com/office/drawing/2014/main" xmlns="" id="{07E5967E-D980-431A-A5DB-3F0C5030A81E}"/>
+                <a16:creationId xmlns="" xmlns:a16="http://schemas.microsoft.com/office/drawing/2014/main" id="{07E5967E-D980-431A-A5DB-3F0C5030A81E}"/>
               </a:ext>
             </a:extLst>
           </p:cNvPr>
@@ -3347,7 +3355,7 @@
           <p:cNvPr id="2" name="Título 1">
             <a:extLst>
               <a:ext uri="{FF2B5EF4-FFF2-40B4-BE49-F238E27FC236}">
-                <a16:creationId xmlns:a16="http://schemas.microsoft.com/office/drawing/2014/main" xmlns="" id="{9036C49F-3E68-4175-81BA-3C3FEE44308A}"/>
+                <a16:creationId xmlns="" xmlns:a16="http://schemas.microsoft.com/office/drawing/2014/main" id="{9036C49F-3E68-4175-81BA-3C3FEE44308A}"/>
               </a:ext>
             </a:extLst>
           </p:cNvPr>
@@ -3375,7 +3383,7 @@
           <p:cNvPr id="3" name="Espaço Reservado para Texto Vertical 2">
             <a:extLst>
               <a:ext uri="{FF2B5EF4-FFF2-40B4-BE49-F238E27FC236}">
-                <a16:creationId xmlns:a16="http://schemas.microsoft.com/office/drawing/2014/main" xmlns="" id="{426FA736-3DD3-4D4E-B57B-BBE1D8F7D424}"/>
+                <a16:creationId xmlns="" xmlns:a16="http://schemas.microsoft.com/office/drawing/2014/main" id="{426FA736-3DD3-4D4E-B57B-BBE1D8F7D424}"/>
               </a:ext>
             </a:extLst>
           </p:cNvPr>
@@ -3432,7 +3440,7 @@
           <p:cNvPr id="4" name="Espaço Reservado para Data 3">
             <a:extLst>
               <a:ext uri="{FF2B5EF4-FFF2-40B4-BE49-F238E27FC236}">
-                <a16:creationId xmlns:a16="http://schemas.microsoft.com/office/drawing/2014/main" xmlns="" id="{99E8855C-D8FD-48F6-B14E-861E0DE4D915}"/>
+                <a16:creationId xmlns="" xmlns:a16="http://schemas.microsoft.com/office/drawing/2014/main" id="{99E8855C-D8FD-48F6-B14E-861E0DE4D915}"/>
               </a:ext>
             </a:extLst>
           </p:cNvPr>
@@ -3461,7 +3469,7 @@
           <p:cNvPr id="5" name="Espaço Reservado para Rodapé 4">
             <a:extLst>
               <a:ext uri="{FF2B5EF4-FFF2-40B4-BE49-F238E27FC236}">
-                <a16:creationId xmlns:a16="http://schemas.microsoft.com/office/drawing/2014/main" xmlns="" id="{97C0BB88-2F21-42A5-ACFF-83DA47F2D340}"/>
+                <a16:creationId xmlns="" xmlns:a16="http://schemas.microsoft.com/office/drawing/2014/main" id="{97C0BB88-2F21-42A5-ACFF-83DA47F2D340}"/>
               </a:ext>
             </a:extLst>
           </p:cNvPr>
@@ -3486,7 +3494,7 @@
           <p:cNvPr id="6" name="Espaço Reservado para Número de Slide 5">
             <a:extLst>
               <a:ext uri="{FF2B5EF4-FFF2-40B4-BE49-F238E27FC236}">
-                <a16:creationId xmlns:a16="http://schemas.microsoft.com/office/drawing/2014/main" xmlns="" id="{6CB462B3-1F22-4C05-B4B8-7A279FB7D5E9}"/>
+                <a16:creationId xmlns="" xmlns:a16="http://schemas.microsoft.com/office/drawing/2014/main" id="{6CB462B3-1F22-4C05-B4B8-7A279FB7D5E9}"/>
               </a:ext>
             </a:extLst>
           </p:cNvPr>
@@ -3545,7 +3553,7 @@
           <p:cNvPr id="2" name="Título Vertical 1">
             <a:extLst>
               <a:ext uri="{FF2B5EF4-FFF2-40B4-BE49-F238E27FC236}">
-                <a16:creationId xmlns:a16="http://schemas.microsoft.com/office/drawing/2014/main" xmlns="" id="{EAEAB728-701C-4207-A9D5-23FF45C60502}"/>
+                <a16:creationId xmlns="" xmlns:a16="http://schemas.microsoft.com/office/drawing/2014/main" id="{EAEAB728-701C-4207-A9D5-23FF45C60502}"/>
               </a:ext>
             </a:extLst>
           </p:cNvPr>
@@ -3578,7 +3586,7 @@
           <p:cNvPr id="3" name="Espaço Reservado para Texto Vertical 2">
             <a:extLst>
               <a:ext uri="{FF2B5EF4-FFF2-40B4-BE49-F238E27FC236}">
-                <a16:creationId xmlns:a16="http://schemas.microsoft.com/office/drawing/2014/main" xmlns="" id="{BA8C8CCF-7823-480A-9A19-0F664DD17E3B}"/>
+                <a16:creationId xmlns="" xmlns:a16="http://schemas.microsoft.com/office/drawing/2014/main" id="{BA8C8CCF-7823-480A-9A19-0F664DD17E3B}"/>
               </a:ext>
             </a:extLst>
           </p:cNvPr>
@@ -3640,7 +3648,7 @@
           <p:cNvPr id="4" name="Espaço Reservado para Data 3">
             <a:extLst>
               <a:ext uri="{FF2B5EF4-FFF2-40B4-BE49-F238E27FC236}">
-                <a16:creationId xmlns:a16="http://schemas.microsoft.com/office/drawing/2014/main" xmlns="" id="{721D5734-7B1F-425D-942F-6EB73344027C}"/>
+                <a16:creationId xmlns="" xmlns:a16="http://schemas.microsoft.com/office/drawing/2014/main" id="{721D5734-7B1F-425D-942F-6EB73344027C}"/>
               </a:ext>
             </a:extLst>
           </p:cNvPr>
@@ -3669,7 +3677,7 @@
           <p:cNvPr id="5" name="Espaço Reservado para Rodapé 4">
             <a:extLst>
               <a:ext uri="{FF2B5EF4-FFF2-40B4-BE49-F238E27FC236}">
-                <a16:creationId xmlns:a16="http://schemas.microsoft.com/office/drawing/2014/main" xmlns="" id="{1E1AAEAC-F08D-45FE-89EC-B1B349A868C9}"/>
+                <a16:creationId xmlns="" xmlns:a16="http://schemas.microsoft.com/office/drawing/2014/main" id="{1E1AAEAC-F08D-45FE-89EC-B1B349A868C9}"/>
               </a:ext>
             </a:extLst>
           </p:cNvPr>
@@ -3694,7 +3702,7 @@
           <p:cNvPr id="6" name="Espaço Reservado para Número de Slide 5">
             <a:extLst>
               <a:ext uri="{FF2B5EF4-FFF2-40B4-BE49-F238E27FC236}">
-                <a16:creationId xmlns:a16="http://schemas.microsoft.com/office/drawing/2014/main" xmlns="" id="{BAA44493-9911-47B2-87A6-C2141A972BC8}"/>
+                <a16:creationId xmlns="" xmlns:a16="http://schemas.microsoft.com/office/drawing/2014/main" id="{BAA44493-9911-47B2-87A6-C2141A972BC8}"/>
               </a:ext>
             </a:extLst>
           </p:cNvPr>
@@ -5627,7 +5635,7 @@
           <p:cNvPr id="2" name="Título 1">
             <a:extLst>
               <a:ext uri="{FF2B5EF4-FFF2-40B4-BE49-F238E27FC236}">
-                <a16:creationId xmlns:a16="http://schemas.microsoft.com/office/drawing/2014/main" xmlns="" id="{71BD44A5-8F21-4626-A01D-48A1C874B1D5}"/>
+                <a16:creationId xmlns="" xmlns:a16="http://schemas.microsoft.com/office/drawing/2014/main" id="{71BD44A5-8F21-4626-A01D-48A1C874B1D5}"/>
               </a:ext>
             </a:extLst>
           </p:cNvPr>
@@ -5655,7 +5663,7 @@
           <p:cNvPr id="3" name="Espaço Reservado para Conteúdo 2">
             <a:extLst>
               <a:ext uri="{FF2B5EF4-FFF2-40B4-BE49-F238E27FC236}">
-                <a16:creationId xmlns:a16="http://schemas.microsoft.com/office/drawing/2014/main" xmlns="" id="{B79E8085-65A9-48AA-951D-71D978BFF4ED}"/>
+                <a16:creationId xmlns="" xmlns:a16="http://schemas.microsoft.com/office/drawing/2014/main" id="{B79E8085-65A9-48AA-951D-71D978BFF4ED}"/>
               </a:ext>
             </a:extLst>
           </p:cNvPr>
@@ -5712,7 +5720,7 @@
           <p:cNvPr id="4" name="Espaço Reservado para Data 3">
             <a:extLst>
               <a:ext uri="{FF2B5EF4-FFF2-40B4-BE49-F238E27FC236}">
-                <a16:creationId xmlns:a16="http://schemas.microsoft.com/office/drawing/2014/main" xmlns="" id="{F05BE1AF-51EA-425D-B188-DE7BD675009F}"/>
+                <a16:creationId xmlns="" xmlns:a16="http://schemas.microsoft.com/office/drawing/2014/main" id="{F05BE1AF-51EA-425D-B188-DE7BD675009F}"/>
               </a:ext>
             </a:extLst>
           </p:cNvPr>
@@ -5741,7 +5749,7 @@
           <p:cNvPr id="5" name="Espaço Reservado para Rodapé 4">
             <a:extLst>
               <a:ext uri="{FF2B5EF4-FFF2-40B4-BE49-F238E27FC236}">
-                <a16:creationId xmlns:a16="http://schemas.microsoft.com/office/drawing/2014/main" xmlns="" id="{121BE632-29CF-4CB9-B365-C9EF38F89BE6}"/>
+                <a16:creationId xmlns="" xmlns:a16="http://schemas.microsoft.com/office/drawing/2014/main" id="{121BE632-29CF-4CB9-B365-C9EF38F89BE6}"/>
               </a:ext>
             </a:extLst>
           </p:cNvPr>
@@ -5766,7 +5774,7 @@
           <p:cNvPr id="6" name="Espaço Reservado para Número de Slide 5">
             <a:extLst>
               <a:ext uri="{FF2B5EF4-FFF2-40B4-BE49-F238E27FC236}">
-                <a16:creationId xmlns:a16="http://schemas.microsoft.com/office/drawing/2014/main" xmlns="" id="{60CF3DD1-9AEC-4A57-B461-4E4DD86FAC18}"/>
+                <a16:creationId xmlns="" xmlns:a16="http://schemas.microsoft.com/office/drawing/2014/main" id="{60CF3DD1-9AEC-4A57-B461-4E4DD86FAC18}"/>
               </a:ext>
             </a:extLst>
           </p:cNvPr>
@@ -6438,7 +6446,7 @@
           <p:cNvPr id="2" name="Título 1">
             <a:extLst>
               <a:ext uri="{FF2B5EF4-FFF2-40B4-BE49-F238E27FC236}">
-                <a16:creationId xmlns:a16="http://schemas.microsoft.com/office/drawing/2014/main" xmlns="" id="{34AB2FF0-A4D7-4E28-991D-FF26140D5988}"/>
+                <a16:creationId xmlns="" xmlns:a16="http://schemas.microsoft.com/office/drawing/2014/main" id="{34AB2FF0-A4D7-4E28-991D-FF26140D5988}"/>
               </a:ext>
             </a:extLst>
           </p:cNvPr>
@@ -6475,7 +6483,7 @@
           <p:cNvPr id="3" name="Espaço Reservado para Texto 2">
             <a:extLst>
               <a:ext uri="{FF2B5EF4-FFF2-40B4-BE49-F238E27FC236}">
-                <a16:creationId xmlns:a16="http://schemas.microsoft.com/office/drawing/2014/main" xmlns="" id="{E2AC45B0-4145-40DB-8E61-105461170604}"/>
+                <a16:creationId xmlns="" xmlns:a16="http://schemas.microsoft.com/office/drawing/2014/main" id="{E2AC45B0-4145-40DB-8E61-105461170604}"/>
               </a:ext>
             </a:extLst>
           </p:cNvPr>
@@ -6600,7 +6608,7 @@
           <p:cNvPr id="4" name="Espaço Reservado para Data 3">
             <a:extLst>
               <a:ext uri="{FF2B5EF4-FFF2-40B4-BE49-F238E27FC236}">
-                <a16:creationId xmlns:a16="http://schemas.microsoft.com/office/drawing/2014/main" xmlns="" id="{50F1D3FB-740A-4EBA-A309-2CE71D12ECFB}"/>
+                <a16:creationId xmlns="" xmlns:a16="http://schemas.microsoft.com/office/drawing/2014/main" id="{50F1D3FB-740A-4EBA-A309-2CE71D12ECFB}"/>
               </a:ext>
             </a:extLst>
           </p:cNvPr>
@@ -6629,7 +6637,7 @@
           <p:cNvPr id="5" name="Espaço Reservado para Rodapé 4">
             <a:extLst>
               <a:ext uri="{FF2B5EF4-FFF2-40B4-BE49-F238E27FC236}">
-                <a16:creationId xmlns:a16="http://schemas.microsoft.com/office/drawing/2014/main" xmlns="" id="{BDCAB18F-8715-4465-A940-F9C193A2ACE9}"/>
+                <a16:creationId xmlns="" xmlns:a16="http://schemas.microsoft.com/office/drawing/2014/main" id="{BDCAB18F-8715-4465-A940-F9C193A2ACE9}"/>
               </a:ext>
             </a:extLst>
           </p:cNvPr>
@@ -6654,7 +6662,7 @@
           <p:cNvPr id="6" name="Espaço Reservado para Número de Slide 5">
             <a:extLst>
               <a:ext uri="{FF2B5EF4-FFF2-40B4-BE49-F238E27FC236}">
-                <a16:creationId xmlns:a16="http://schemas.microsoft.com/office/drawing/2014/main" xmlns="" id="{353466C6-8248-429F-8056-FF040BF509EB}"/>
+                <a16:creationId xmlns="" xmlns:a16="http://schemas.microsoft.com/office/drawing/2014/main" id="{353466C6-8248-429F-8056-FF040BF509EB}"/>
               </a:ext>
             </a:extLst>
           </p:cNvPr>
@@ -6713,7 +6721,7 @@
           <p:cNvPr id="2" name="Título 1">
             <a:extLst>
               <a:ext uri="{FF2B5EF4-FFF2-40B4-BE49-F238E27FC236}">
-                <a16:creationId xmlns:a16="http://schemas.microsoft.com/office/drawing/2014/main" xmlns="" id="{BC7BB9F0-F14B-4A91-B2B7-35BC47FE4DE7}"/>
+                <a16:creationId xmlns="" xmlns:a16="http://schemas.microsoft.com/office/drawing/2014/main" id="{BC7BB9F0-F14B-4A91-B2B7-35BC47FE4DE7}"/>
               </a:ext>
             </a:extLst>
           </p:cNvPr>
@@ -6741,7 +6749,7 @@
           <p:cNvPr id="3" name="Espaço Reservado para Conteúdo 2">
             <a:extLst>
               <a:ext uri="{FF2B5EF4-FFF2-40B4-BE49-F238E27FC236}">
-                <a16:creationId xmlns:a16="http://schemas.microsoft.com/office/drawing/2014/main" xmlns="" id="{EC1FC1C4-73DA-47A6-8496-B0B457F7D39A}"/>
+                <a16:creationId xmlns="" xmlns:a16="http://schemas.microsoft.com/office/drawing/2014/main" id="{EC1FC1C4-73DA-47A6-8496-B0B457F7D39A}"/>
               </a:ext>
             </a:extLst>
           </p:cNvPr>
@@ -6803,7 +6811,7 @@
           <p:cNvPr id="4" name="Espaço Reservado para Conteúdo 3">
             <a:extLst>
               <a:ext uri="{FF2B5EF4-FFF2-40B4-BE49-F238E27FC236}">
-                <a16:creationId xmlns:a16="http://schemas.microsoft.com/office/drawing/2014/main" xmlns="" id="{E92F06A8-A449-4D92-9912-76873E529B38}"/>
+                <a16:creationId xmlns="" xmlns:a16="http://schemas.microsoft.com/office/drawing/2014/main" id="{E92F06A8-A449-4D92-9912-76873E529B38}"/>
               </a:ext>
             </a:extLst>
           </p:cNvPr>
@@ -6865,7 +6873,7 @@
           <p:cNvPr id="5" name="Espaço Reservado para Data 4">
             <a:extLst>
               <a:ext uri="{FF2B5EF4-FFF2-40B4-BE49-F238E27FC236}">
-                <a16:creationId xmlns:a16="http://schemas.microsoft.com/office/drawing/2014/main" xmlns="" id="{938070A4-BC2F-4D55-BD8D-DEAF11BB9EE9}"/>
+                <a16:creationId xmlns="" xmlns:a16="http://schemas.microsoft.com/office/drawing/2014/main" id="{938070A4-BC2F-4D55-BD8D-DEAF11BB9EE9}"/>
               </a:ext>
             </a:extLst>
           </p:cNvPr>
@@ -6894,7 +6902,7 @@
           <p:cNvPr id="6" name="Espaço Reservado para Rodapé 5">
             <a:extLst>
               <a:ext uri="{FF2B5EF4-FFF2-40B4-BE49-F238E27FC236}">
-                <a16:creationId xmlns:a16="http://schemas.microsoft.com/office/drawing/2014/main" xmlns="" id="{45CC2DB8-844A-465F-BA9A-7734C80C7F43}"/>
+                <a16:creationId xmlns="" xmlns:a16="http://schemas.microsoft.com/office/drawing/2014/main" id="{45CC2DB8-844A-465F-BA9A-7734C80C7F43}"/>
               </a:ext>
             </a:extLst>
           </p:cNvPr>
@@ -6919,7 +6927,7 @@
           <p:cNvPr id="7" name="Espaço Reservado para Número de Slide 6">
             <a:extLst>
               <a:ext uri="{FF2B5EF4-FFF2-40B4-BE49-F238E27FC236}">
-                <a16:creationId xmlns:a16="http://schemas.microsoft.com/office/drawing/2014/main" xmlns="" id="{4CC606A8-097B-4040-94E0-CD8C88280D8F}"/>
+                <a16:creationId xmlns="" xmlns:a16="http://schemas.microsoft.com/office/drawing/2014/main" id="{4CC606A8-097B-4040-94E0-CD8C88280D8F}"/>
               </a:ext>
             </a:extLst>
           </p:cNvPr>
@@ -6978,7 +6986,7 @@
           <p:cNvPr id="2" name="Título 1">
             <a:extLst>
               <a:ext uri="{FF2B5EF4-FFF2-40B4-BE49-F238E27FC236}">
-                <a16:creationId xmlns:a16="http://schemas.microsoft.com/office/drawing/2014/main" xmlns="" id="{76D66686-0143-4CB6-8C09-BA326F1E7ACA}"/>
+                <a16:creationId xmlns="" xmlns:a16="http://schemas.microsoft.com/office/drawing/2014/main" id="{76D66686-0143-4CB6-8C09-BA326F1E7ACA}"/>
               </a:ext>
             </a:extLst>
           </p:cNvPr>
@@ -7011,7 +7019,7 @@
           <p:cNvPr id="3" name="Espaço Reservado para Texto 2">
             <a:extLst>
               <a:ext uri="{FF2B5EF4-FFF2-40B4-BE49-F238E27FC236}">
-                <a16:creationId xmlns:a16="http://schemas.microsoft.com/office/drawing/2014/main" xmlns="" id="{0227AB85-F59E-4BCE-B846-4FA0992C2F23}"/>
+                <a16:creationId xmlns="" xmlns:a16="http://schemas.microsoft.com/office/drawing/2014/main" id="{0227AB85-F59E-4BCE-B846-4FA0992C2F23}"/>
               </a:ext>
             </a:extLst>
           </p:cNvPr>
@@ -7082,7 +7090,7 @@
           <p:cNvPr id="4" name="Espaço Reservado para Conteúdo 3">
             <a:extLst>
               <a:ext uri="{FF2B5EF4-FFF2-40B4-BE49-F238E27FC236}">
-                <a16:creationId xmlns:a16="http://schemas.microsoft.com/office/drawing/2014/main" xmlns="" id="{3373456C-7319-4D0A-827D-D29F6B083F5D}"/>
+                <a16:creationId xmlns="" xmlns:a16="http://schemas.microsoft.com/office/drawing/2014/main" id="{3373456C-7319-4D0A-827D-D29F6B083F5D}"/>
               </a:ext>
             </a:extLst>
           </p:cNvPr>
@@ -7144,7 +7152,7 @@
           <p:cNvPr id="5" name="Espaço Reservado para Texto 4">
             <a:extLst>
               <a:ext uri="{FF2B5EF4-FFF2-40B4-BE49-F238E27FC236}">
-                <a16:creationId xmlns:a16="http://schemas.microsoft.com/office/drawing/2014/main" xmlns="" id="{4CD109D0-2E83-4262-8029-A871CEC47406}"/>
+                <a16:creationId xmlns="" xmlns:a16="http://schemas.microsoft.com/office/drawing/2014/main" id="{4CD109D0-2E83-4262-8029-A871CEC47406}"/>
               </a:ext>
             </a:extLst>
           </p:cNvPr>
@@ -7215,7 +7223,7 @@
           <p:cNvPr id="6" name="Espaço Reservado para Conteúdo 5">
             <a:extLst>
               <a:ext uri="{FF2B5EF4-FFF2-40B4-BE49-F238E27FC236}">
-                <a16:creationId xmlns:a16="http://schemas.microsoft.com/office/drawing/2014/main" xmlns="" id="{AD706E3A-CFBB-4A6C-A65F-D0360A9E74FE}"/>
+                <a16:creationId xmlns="" xmlns:a16="http://schemas.microsoft.com/office/drawing/2014/main" id="{AD706E3A-CFBB-4A6C-A65F-D0360A9E74FE}"/>
               </a:ext>
             </a:extLst>
           </p:cNvPr>
@@ -7277,7 +7285,7 @@
           <p:cNvPr id="7" name="Espaço Reservado para Data 6">
             <a:extLst>
               <a:ext uri="{FF2B5EF4-FFF2-40B4-BE49-F238E27FC236}">
-                <a16:creationId xmlns:a16="http://schemas.microsoft.com/office/drawing/2014/main" xmlns="" id="{4172C0E5-5AF0-4805-BB51-443733CD2BD5}"/>
+                <a16:creationId xmlns="" xmlns:a16="http://schemas.microsoft.com/office/drawing/2014/main" id="{4172C0E5-5AF0-4805-BB51-443733CD2BD5}"/>
               </a:ext>
             </a:extLst>
           </p:cNvPr>
@@ -7306,7 +7314,7 @@
           <p:cNvPr id="8" name="Espaço Reservado para Rodapé 7">
             <a:extLst>
               <a:ext uri="{FF2B5EF4-FFF2-40B4-BE49-F238E27FC236}">
-                <a16:creationId xmlns:a16="http://schemas.microsoft.com/office/drawing/2014/main" xmlns="" id="{0E801648-156F-497E-99CF-797DF48051E1}"/>
+                <a16:creationId xmlns="" xmlns:a16="http://schemas.microsoft.com/office/drawing/2014/main" id="{0E801648-156F-497E-99CF-797DF48051E1}"/>
               </a:ext>
             </a:extLst>
           </p:cNvPr>
@@ -7331,7 +7339,7 @@
           <p:cNvPr id="9" name="Espaço Reservado para Número de Slide 8">
             <a:extLst>
               <a:ext uri="{FF2B5EF4-FFF2-40B4-BE49-F238E27FC236}">
-                <a16:creationId xmlns:a16="http://schemas.microsoft.com/office/drawing/2014/main" xmlns="" id="{EEE23D32-80E7-4796-A137-66BF842E4B53}"/>
+                <a16:creationId xmlns="" xmlns:a16="http://schemas.microsoft.com/office/drawing/2014/main" id="{EEE23D32-80E7-4796-A137-66BF842E4B53}"/>
               </a:ext>
             </a:extLst>
           </p:cNvPr>
@@ -7390,7 +7398,7 @@
           <p:cNvPr id="2" name="Título 1">
             <a:extLst>
               <a:ext uri="{FF2B5EF4-FFF2-40B4-BE49-F238E27FC236}">
-                <a16:creationId xmlns:a16="http://schemas.microsoft.com/office/drawing/2014/main" xmlns="" id="{2BCE2379-C78F-47E1-8CFC-B846E7AF148D}"/>
+                <a16:creationId xmlns="" xmlns:a16="http://schemas.microsoft.com/office/drawing/2014/main" id="{2BCE2379-C78F-47E1-8CFC-B846E7AF148D}"/>
               </a:ext>
             </a:extLst>
           </p:cNvPr>
@@ -7418,7 +7426,7 @@
           <p:cNvPr id="3" name="Espaço Reservado para Data 2">
             <a:extLst>
               <a:ext uri="{FF2B5EF4-FFF2-40B4-BE49-F238E27FC236}">
-                <a16:creationId xmlns:a16="http://schemas.microsoft.com/office/drawing/2014/main" xmlns="" id="{342600A9-7F92-4E22-9D94-E4717252A817}"/>
+                <a16:creationId xmlns="" xmlns:a16="http://schemas.microsoft.com/office/drawing/2014/main" id="{342600A9-7F92-4E22-9D94-E4717252A817}"/>
               </a:ext>
             </a:extLst>
           </p:cNvPr>
@@ -7447,7 +7455,7 @@
           <p:cNvPr id="4" name="Espaço Reservado para Rodapé 3">
             <a:extLst>
               <a:ext uri="{FF2B5EF4-FFF2-40B4-BE49-F238E27FC236}">
-                <a16:creationId xmlns:a16="http://schemas.microsoft.com/office/drawing/2014/main" xmlns="" id="{192E6BED-F546-40CC-A2DF-99CBA853654E}"/>
+                <a16:creationId xmlns="" xmlns:a16="http://schemas.microsoft.com/office/drawing/2014/main" id="{192E6BED-F546-40CC-A2DF-99CBA853654E}"/>
               </a:ext>
             </a:extLst>
           </p:cNvPr>
@@ -7472,7 +7480,7 @@
           <p:cNvPr id="5" name="Espaço Reservado para Número de Slide 4">
             <a:extLst>
               <a:ext uri="{FF2B5EF4-FFF2-40B4-BE49-F238E27FC236}">
-                <a16:creationId xmlns:a16="http://schemas.microsoft.com/office/drawing/2014/main" xmlns="" id="{6091CC40-A8C4-4063-80EB-CC5099621678}"/>
+                <a16:creationId xmlns="" xmlns:a16="http://schemas.microsoft.com/office/drawing/2014/main" id="{6091CC40-A8C4-4063-80EB-CC5099621678}"/>
               </a:ext>
             </a:extLst>
           </p:cNvPr>
@@ -7531,7 +7539,7 @@
           <p:cNvPr id="2" name="Espaço Reservado para Data 1">
             <a:extLst>
               <a:ext uri="{FF2B5EF4-FFF2-40B4-BE49-F238E27FC236}">
-                <a16:creationId xmlns:a16="http://schemas.microsoft.com/office/drawing/2014/main" xmlns="" id="{DD19515C-212C-4EAE-84A3-8FF4BC844F1B}"/>
+                <a16:creationId xmlns="" xmlns:a16="http://schemas.microsoft.com/office/drawing/2014/main" id="{DD19515C-212C-4EAE-84A3-8FF4BC844F1B}"/>
               </a:ext>
             </a:extLst>
           </p:cNvPr>
@@ -7560,7 +7568,7 @@
           <p:cNvPr id="3" name="Espaço Reservado para Rodapé 2">
             <a:extLst>
               <a:ext uri="{FF2B5EF4-FFF2-40B4-BE49-F238E27FC236}">
-                <a16:creationId xmlns:a16="http://schemas.microsoft.com/office/drawing/2014/main" xmlns="" id="{94D3D120-B3E8-4C96-861D-7A4F12F49B3A}"/>
+                <a16:creationId xmlns="" xmlns:a16="http://schemas.microsoft.com/office/drawing/2014/main" id="{94D3D120-B3E8-4C96-861D-7A4F12F49B3A}"/>
               </a:ext>
             </a:extLst>
           </p:cNvPr>
@@ -7585,7 +7593,7 @@
           <p:cNvPr id="4" name="Espaço Reservado para Número de Slide 3">
             <a:extLst>
               <a:ext uri="{FF2B5EF4-FFF2-40B4-BE49-F238E27FC236}">
-                <a16:creationId xmlns:a16="http://schemas.microsoft.com/office/drawing/2014/main" xmlns="" id="{42E49B68-FA1B-468B-9F17-D5C09243D454}"/>
+                <a16:creationId xmlns="" xmlns:a16="http://schemas.microsoft.com/office/drawing/2014/main" id="{42E49B68-FA1B-468B-9F17-D5C09243D454}"/>
               </a:ext>
             </a:extLst>
           </p:cNvPr>
@@ -7644,7 +7652,7 @@
           <p:cNvPr id="2" name="Título 1">
             <a:extLst>
               <a:ext uri="{FF2B5EF4-FFF2-40B4-BE49-F238E27FC236}">
-                <a16:creationId xmlns:a16="http://schemas.microsoft.com/office/drawing/2014/main" xmlns="" id="{1C17BCBE-A897-4319-85EC-D87909C24980}"/>
+                <a16:creationId xmlns="" xmlns:a16="http://schemas.microsoft.com/office/drawing/2014/main" id="{1C17BCBE-A897-4319-85EC-D87909C24980}"/>
               </a:ext>
             </a:extLst>
           </p:cNvPr>
@@ -7681,7 +7689,7 @@
           <p:cNvPr id="3" name="Espaço Reservado para Conteúdo 2">
             <a:extLst>
               <a:ext uri="{FF2B5EF4-FFF2-40B4-BE49-F238E27FC236}">
-                <a16:creationId xmlns:a16="http://schemas.microsoft.com/office/drawing/2014/main" xmlns="" id="{4226F885-0204-4913-868B-4B8B82576F17}"/>
+                <a16:creationId xmlns="" xmlns:a16="http://schemas.microsoft.com/office/drawing/2014/main" id="{4226F885-0204-4913-868B-4B8B82576F17}"/>
               </a:ext>
             </a:extLst>
           </p:cNvPr>
@@ -7771,7 +7779,7 @@
           <p:cNvPr id="4" name="Espaço Reservado para Texto 3">
             <a:extLst>
               <a:ext uri="{FF2B5EF4-FFF2-40B4-BE49-F238E27FC236}">
-                <a16:creationId xmlns:a16="http://schemas.microsoft.com/office/drawing/2014/main" xmlns="" id="{00F9F784-A858-441B-8AB5-697098141751}"/>
+                <a16:creationId xmlns="" xmlns:a16="http://schemas.microsoft.com/office/drawing/2014/main" id="{00F9F784-A858-441B-8AB5-697098141751}"/>
               </a:ext>
             </a:extLst>
           </p:cNvPr>
@@ -7842,7 +7850,7 @@
           <p:cNvPr id="5" name="Espaço Reservado para Data 4">
             <a:extLst>
               <a:ext uri="{FF2B5EF4-FFF2-40B4-BE49-F238E27FC236}">
-                <a16:creationId xmlns:a16="http://schemas.microsoft.com/office/drawing/2014/main" xmlns="" id="{A4DC363A-5000-472E-8B17-02E7DCB8840A}"/>
+                <a16:creationId xmlns="" xmlns:a16="http://schemas.microsoft.com/office/drawing/2014/main" id="{A4DC363A-5000-472E-8B17-02E7DCB8840A}"/>
               </a:ext>
             </a:extLst>
           </p:cNvPr>
@@ -7871,7 +7879,7 @@
           <p:cNvPr id="6" name="Espaço Reservado para Rodapé 5">
             <a:extLst>
               <a:ext uri="{FF2B5EF4-FFF2-40B4-BE49-F238E27FC236}">
-                <a16:creationId xmlns:a16="http://schemas.microsoft.com/office/drawing/2014/main" xmlns="" id="{5548425D-2C21-4C56-BAD4-662978775C28}"/>
+                <a16:creationId xmlns="" xmlns:a16="http://schemas.microsoft.com/office/drawing/2014/main" id="{5548425D-2C21-4C56-BAD4-662978775C28}"/>
               </a:ext>
             </a:extLst>
           </p:cNvPr>
@@ -7896,7 +7904,7 @@
           <p:cNvPr id="7" name="Espaço Reservado para Número de Slide 6">
             <a:extLst>
               <a:ext uri="{FF2B5EF4-FFF2-40B4-BE49-F238E27FC236}">
-                <a16:creationId xmlns:a16="http://schemas.microsoft.com/office/drawing/2014/main" xmlns="" id="{C63E9726-E64C-42B2-AE8A-8C235A956B48}"/>
+                <a16:creationId xmlns="" xmlns:a16="http://schemas.microsoft.com/office/drawing/2014/main" id="{C63E9726-E64C-42B2-AE8A-8C235A956B48}"/>
               </a:ext>
             </a:extLst>
           </p:cNvPr>
@@ -7955,7 +7963,7 @@
           <p:cNvPr id="2" name="Título 1">
             <a:extLst>
               <a:ext uri="{FF2B5EF4-FFF2-40B4-BE49-F238E27FC236}">
-                <a16:creationId xmlns:a16="http://schemas.microsoft.com/office/drawing/2014/main" xmlns="" id="{11086A78-3E74-450C-96A6-CA8AC37AF772}"/>
+                <a16:creationId xmlns="" xmlns:a16="http://schemas.microsoft.com/office/drawing/2014/main" id="{11086A78-3E74-450C-96A6-CA8AC37AF772}"/>
               </a:ext>
             </a:extLst>
           </p:cNvPr>
@@ -7992,7 +8000,7 @@
           <p:cNvPr id="3" name="Espaço Reservado para Imagem 2">
             <a:extLst>
               <a:ext uri="{FF2B5EF4-FFF2-40B4-BE49-F238E27FC236}">
-                <a16:creationId xmlns:a16="http://schemas.microsoft.com/office/drawing/2014/main" xmlns="" id="{5F5B7312-975A-4DBC-9B2F-3652ADA006FD}"/>
+                <a16:creationId xmlns="" xmlns:a16="http://schemas.microsoft.com/office/drawing/2014/main" id="{5F5B7312-975A-4DBC-9B2F-3652ADA006FD}"/>
               </a:ext>
             </a:extLst>
           </p:cNvPr>
@@ -8059,7 +8067,7 @@
           <p:cNvPr id="4" name="Espaço Reservado para Texto 3">
             <a:extLst>
               <a:ext uri="{FF2B5EF4-FFF2-40B4-BE49-F238E27FC236}">
-                <a16:creationId xmlns:a16="http://schemas.microsoft.com/office/drawing/2014/main" xmlns="" id="{AAF805F5-1DFF-41C6-944C-7D79FE0D0963}"/>
+                <a16:creationId xmlns="" xmlns:a16="http://schemas.microsoft.com/office/drawing/2014/main" id="{AAF805F5-1DFF-41C6-944C-7D79FE0D0963}"/>
               </a:ext>
             </a:extLst>
           </p:cNvPr>
@@ -8130,7 +8138,7 @@
           <p:cNvPr id="5" name="Espaço Reservado para Data 4">
             <a:extLst>
               <a:ext uri="{FF2B5EF4-FFF2-40B4-BE49-F238E27FC236}">
-                <a16:creationId xmlns:a16="http://schemas.microsoft.com/office/drawing/2014/main" xmlns="" id="{02113D81-8665-4516-BD81-C6A1F254EECD}"/>
+                <a16:creationId xmlns="" xmlns:a16="http://schemas.microsoft.com/office/drawing/2014/main" id="{02113D81-8665-4516-BD81-C6A1F254EECD}"/>
               </a:ext>
             </a:extLst>
           </p:cNvPr>
@@ -8159,7 +8167,7 @@
           <p:cNvPr id="6" name="Espaço Reservado para Rodapé 5">
             <a:extLst>
               <a:ext uri="{FF2B5EF4-FFF2-40B4-BE49-F238E27FC236}">
-                <a16:creationId xmlns:a16="http://schemas.microsoft.com/office/drawing/2014/main" xmlns="" id="{2B00C88B-FF32-40AA-A187-727D96FD7862}"/>
+                <a16:creationId xmlns="" xmlns:a16="http://schemas.microsoft.com/office/drawing/2014/main" id="{2B00C88B-FF32-40AA-A187-727D96FD7862}"/>
               </a:ext>
             </a:extLst>
           </p:cNvPr>
@@ -8184,7 +8192,7 @@
           <p:cNvPr id="7" name="Espaço Reservado para Número de Slide 6">
             <a:extLst>
               <a:ext uri="{FF2B5EF4-FFF2-40B4-BE49-F238E27FC236}">
-                <a16:creationId xmlns:a16="http://schemas.microsoft.com/office/drawing/2014/main" xmlns="" id="{A04D1A2D-69F7-4B8F-A730-BC26DC340BA6}"/>
+                <a16:creationId xmlns="" xmlns:a16="http://schemas.microsoft.com/office/drawing/2014/main" id="{A04D1A2D-69F7-4B8F-A730-BC26DC340BA6}"/>
               </a:ext>
             </a:extLst>
           </p:cNvPr>
@@ -8248,7 +8256,7 @@
           <p:cNvPr id="2" name="Espaço Reservado para Título 1">
             <a:extLst>
               <a:ext uri="{FF2B5EF4-FFF2-40B4-BE49-F238E27FC236}">
-                <a16:creationId xmlns:a16="http://schemas.microsoft.com/office/drawing/2014/main" xmlns="" id="{E69A0273-1966-4A1B-9370-4C1CE5036371}"/>
+                <a16:creationId xmlns="" xmlns:a16="http://schemas.microsoft.com/office/drawing/2014/main" id="{E69A0273-1966-4A1B-9370-4C1CE5036371}"/>
               </a:ext>
             </a:extLst>
           </p:cNvPr>
@@ -8286,7 +8294,7 @@
           <p:cNvPr id="3" name="Espaço Reservado para Texto 2">
             <a:extLst>
               <a:ext uri="{FF2B5EF4-FFF2-40B4-BE49-F238E27FC236}">
-                <a16:creationId xmlns:a16="http://schemas.microsoft.com/office/drawing/2014/main" xmlns="" id="{3B9CF87A-0448-49A7-AB25-EBC1D56A40EF}"/>
+                <a16:creationId xmlns="" xmlns:a16="http://schemas.microsoft.com/office/drawing/2014/main" id="{3B9CF87A-0448-49A7-AB25-EBC1D56A40EF}"/>
               </a:ext>
             </a:extLst>
           </p:cNvPr>
@@ -8353,7 +8361,7 @@
           <p:cNvPr id="4" name="Espaço Reservado para Data 3">
             <a:extLst>
               <a:ext uri="{FF2B5EF4-FFF2-40B4-BE49-F238E27FC236}">
-                <a16:creationId xmlns:a16="http://schemas.microsoft.com/office/drawing/2014/main" xmlns="" id="{2EF7B1F2-BB5A-44D0-816D-16AD2C71430E}"/>
+                <a16:creationId xmlns="" xmlns:a16="http://schemas.microsoft.com/office/drawing/2014/main" id="{2EF7B1F2-BB5A-44D0-816D-16AD2C71430E}"/>
               </a:ext>
             </a:extLst>
           </p:cNvPr>
@@ -8400,7 +8408,7 @@
           <p:cNvPr id="5" name="Espaço Reservado para Rodapé 4">
             <a:extLst>
               <a:ext uri="{FF2B5EF4-FFF2-40B4-BE49-F238E27FC236}">
-                <a16:creationId xmlns:a16="http://schemas.microsoft.com/office/drawing/2014/main" xmlns="" id="{C703F94C-2CC8-4DAA-BC35-14FC3E841DCD}"/>
+                <a16:creationId xmlns="" xmlns:a16="http://schemas.microsoft.com/office/drawing/2014/main" id="{C703F94C-2CC8-4DAA-BC35-14FC3E841DCD}"/>
               </a:ext>
             </a:extLst>
           </p:cNvPr>
@@ -8443,7 +8451,7 @@
           <p:cNvPr id="6" name="Espaço Reservado para Número de Slide 5">
             <a:extLst>
               <a:ext uri="{FF2B5EF4-FFF2-40B4-BE49-F238E27FC236}">
-                <a16:creationId xmlns:a16="http://schemas.microsoft.com/office/drawing/2014/main" xmlns="" id="{64051336-7048-457A-8B61-D94291D71648}"/>
+                <a16:creationId xmlns="" xmlns:a16="http://schemas.microsoft.com/office/drawing/2014/main" id="{64051336-7048-457A-8B61-D94291D71648}"/>
               </a:ext>
             </a:extLst>
           </p:cNvPr>
@@ -9323,7 +9331,7 @@
           <p:cNvPr id="2" name="Título 1">
             <a:extLst>
               <a:ext uri="{FF2B5EF4-FFF2-40B4-BE49-F238E27FC236}">
-                <a16:creationId xmlns:a16="http://schemas.microsoft.com/office/drawing/2014/main" xmlns="" id="{32666AC8-2E17-4DB4-B0F5-60C640CCFD2E}"/>
+                <a16:creationId xmlns="" xmlns:a16="http://schemas.microsoft.com/office/drawing/2014/main" id="{32666AC8-2E17-4DB4-B0F5-60C640CCFD2E}"/>
               </a:ext>
             </a:extLst>
           </p:cNvPr>
@@ -9377,7 +9385,7 @@
           <p:cNvPr id="1026" name="Picture 2" descr="Logo">
             <a:extLst>
               <a:ext uri="{FF2B5EF4-FFF2-40B4-BE49-F238E27FC236}">
-                <a16:creationId xmlns:a16="http://schemas.microsoft.com/office/drawing/2014/main" xmlns="" id="{3F2642E0-4F6A-4196-8F58-E77D36E9A33F}"/>
+                <a16:creationId xmlns="" xmlns:a16="http://schemas.microsoft.com/office/drawing/2014/main" id="{3F2642E0-4F6A-4196-8F58-E77D36E9A33F}"/>
               </a:ext>
             </a:extLst>
           </p:cNvPr>
@@ -9422,7 +9430,7 @@
           <p:cNvPr id="5122" name="Picture 2" descr="Image result for machine learning">
             <a:extLst>
               <a:ext uri="{FF2B5EF4-FFF2-40B4-BE49-F238E27FC236}">
-                <a16:creationId xmlns:a16="http://schemas.microsoft.com/office/drawing/2014/main" xmlns="" id="{810CE0A2-4102-44A6-A370-175E7896CDCB}"/>
+                <a16:creationId xmlns="" xmlns:a16="http://schemas.microsoft.com/office/drawing/2014/main" id="{810CE0A2-4102-44A6-A370-175E7896CDCB}"/>
               </a:ext>
             </a:extLst>
           </p:cNvPr>
@@ -9467,7 +9475,7 @@
           <p:cNvPr id="3" name="Picture 2" descr="IoT Group">
             <a:extLst>
               <a:ext uri="{FF2B5EF4-FFF2-40B4-BE49-F238E27FC236}">
-                <a16:creationId xmlns:a16="http://schemas.microsoft.com/office/drawing/2014/main" xmlns="" id="{AC034F57-E830-B6E7-6790-12FDBBDB2975}"/>
+                <a16:creationId xmlns="" xmlns:a16="http://schemas.microsoft.com/office/drawing/2014/main" id="{AC034F57-E830-B6E7-6790-12FDBBDB2975}"/>
               </a:ext>
             </a:extLst>
           </p:cNvPr>
@@ -9512,7 +9520,7 @@
           <p:cNvPr id="5" name="CaixaDeTexto 4">
             <a:extLst>
               <a:ext uri="{FF2B5EF4-FFF2-40B4-BE49-F238E27FC236}">
-                <a16:creationId xmlns:a16="http://schemas.microsoft.com/office/drawing/2014/main" xmlns="" id="{2D82026D-D2EA-05D7-61F2-DEE04704DB7E}"/>
+                <a16:creationId xmlns="" xmlns:a16="http://schemas.microsoft.com/office/drawing/2014/main" id="{2D82026D-D2EA-05D7-61F2-DEE04704DB7E}"/>
               </a:ext>
             </a:extLst>
           </p:cNvPr>
@@ -9583,7 +9591,7 @@
         <p:cNvPr id="1" name="">
           <a:extLst>
             <a:ext uri="{FF2B5EF4-FFF2-40B4-BE49-F238E27FC236}">
-              <a16:creationId xmlns:a16="http://schemas.microsoft.com/office/drawing/2014/main" xmlns="" id="{1F378FD1-DBF4-DCA8-F1BC-B3E89729AAC1}"/>
+              <a16:creationId xmlns="" xmlns:a16="http://schemas.microsoft.com/office/drawing/2014/main" id="{1F378FD1-DBF4-DCA8-F1BC-B3E89729AAC1}"/>
             </a:ext>
           </a:extLst>
         </p:cNvPr>
@@ -9603,7 +9611,7 @@
           <p:cNvPr id="2" name="Título 1">
             <a:extLst>
               <a:ext uri="{FF2B5EF4-FFF2-40B4-BE49-F238E27FC236}">
-                <a16:creationId xmlns:a16="http://schemas.microsoft.com/office/drawing/2014/main" xmlns="" id="{27002D84-8C44-E80A-6CE1-1C285A07DF3A}"/>
+                <a16:creationId xmlns="" xmlns:a16="http://schemas.microsoft.com/office/drawing/2014/main" id="{27002D84-8C44-E80A-6CE1-1C285A07DF3A}"/>
               </a:ext>
             </a:extLst>
           </p:cNvPr>
@@ -9643,7 +9651,7 @@
           <p:cNvPr id="3" name="AutoShape 2" descr="An example of graph signal reconstruction over wireless sensor network. |  Download Scientific Diagram">
             <a:extLst>
               <a:ext uri="{FF2B5EF4-FFF2-40B4-BE49-F238E27FC236}">
-                <a16:creationId xmlns:a16="http://schemas.microsoft.com/office/drawing/2014/main" xmlns="" id="{3E14BFEB-7725-6B4D-C589-A43632C98002}"/>
+                <a16:creationId xmlns="" xmlns:a16="http://schemas.microsoft.com/office/drawing/2014/main" id="{3E14BFEB-7725-6B4D-C589-A43632C98002}"/>
               </a:ext>
             </a:extLst>
           </p:cNvPr>
@@ -9694,7 +9702,7 @@
           <p:cNvPr id="7" name="AutoShape 4" descr="An example of graph signal reconstruction over wireless sensor network. |  Download Scientific Diagram">
             <a:extLst>
               <a:ext uri="{FF2B5EF4-FFF2-40B4-BE49-F238E27FC236}">
-                <a16:creationId xmlns:a16="http://schemas.microsoft.com/office/drawing/2014/main" xmlns="" id="{DDC94C5F-D329-0D03-2D55-303CAEA46575}"/>
+                <a16:creationId xmlns="" xmlns:a16="http://schemas.microsoft.com/office/drawing/2014/main" id="{DDC94C5F-D329-0D03-2D55-303CAEA46575}"/>
               </a:ext>
             </a:extLst>
           </p:cNvPr>
@@ -9745,7 +9753,7 @@
           <p:cNvPr id="4" name="Espaço Reservado para Conteúdo 3">
             <a:extLst>
               <a:ext uri="{FF2B5EF4-FFF2-40B4-BE49-F238E27FC236}">
-                <a16:creationId xmlns:a16="http://schemas.microsoft.com/office/drawing/2014/main" xmlns="" id="{0C330112-2C2B-538C-EFFC-0C5273ED92DF}"/>
+                <a16:creationId xmlns="" xmlns:a16="http://schemas.microsoft.com/office/drawing/2014/main" id="{0C330112-2C2B-538C-EFFC-0C5273ED92DF}"/>
               </a:ext>
             </a:extLst>
           </p:cNvPr>
@@ -9788,7 +9796,7 @@
           <p:cNvPr id="8" name="Picture 7">
             <a:extLst>
               <a:ext uri="{FF2B5EF4-FFF2-40B4-BE49-F238E27FC236}">
-                <a16:creationId xmlns:a16="http://schemas.microsoft.com/office/drawing/2014/main" xmlns="" id="{4A874BBD-11DB-833A-341F-F134DDD11108}"/>
+                <a16:creationId xmlns="" xmlns:a16="http://schemas.microsoft.com/office/drawing/2014/main" id="{4A874BBD-11DB-833A-341F-F134DDD11108}"/>
               </a:ext>
             </a:extLst>
           </p:cNvPr>
@@ -9818,7 +9826,7 @@
           <p:cNvPr id="10" name="TextBox 9">
             <a:extLst>
               <a:ext uri="{FF2B5EF4-FFF2-40B4-BE49-F238E27FC236}">
-                <a16:creationId xmlns:a16="http://schemas.microsoft.com/office/drawing/2014/main" xmlns="" id="{FB63ADD3-D956-76C5-F130-F38465877D67}"/>
+                <a16:creationId xmlns="" xmlns:a16="http://schemas.microsoft.com/office/drawing/2014/main" id="{FB63ADD3-D956-76C5-F130-F38465877D67}"/>
               </a:ext>
             </a:extLst>
           </p:cNvPr>
@@ -9889,7 +9897,7 @@
         <p:cNvPr id="1" name="">
           <a:extLst>
             <a:ext uri="{FF2B5EF4-FFF2-40B4-BE49-F238E27FC236}">
-              <a16:creationId xmlns:a16="http://schemas.microsoft.com/office/drawing/2014/main" xmlns="" id="{9BB75298-302A-6135-F195-096473EDA4DD}"/>
+              <a16:creationId xmlns="" xmlns:a16="http://schemas.microsoft.com/office/drawing/2014/main" id="{9BB75298-302A-6135-F195-096473EDA4DD}"/>
             </a:ext>
           </a:extLst>
         </p:cNvPr>
@@ -9909,7 +9917,7 @@
           <p:cNvPr id="2" name="Título 1">
             <a:extLst>
               <a:ext uri="{FF2B5EF4-FFF2-40B4-BE49-F238E27FC236}">
-                <a16:creationId xmlns:a16="http://schemas.microsoft.com/office/drawing/2014/main" xmlns="" id="{27828DF8-D69B-BFFF-D2B4-A925DD43717D}"/>
+                <a16:creationId xmlns="" xmlns:a16="http://schemas.microsoft.com/office/drawing/2014/main" id="{27828DF8-D69B-BFFF-D2B4-A925DD43717D}"/>
               </a:ext>
             </a:extLst>
           </p:cNvPr>
@@ -9949,7 +9957,7 @@
           <p:cNvPr id="3" name="AutoShape 2" descr="An example of graph signal reconstruction over wireless sensor network. |  Download Scientific Diagram">
             <a:extLst>
               <a:ext uri="{FF2B5EF4-FFF2-40B4-BE49-F238E27FC236}">
-                <a16:creationId xmlns:a16="http://schemas.microsoft.com/office/drawing/2014/main" xmlns="" id="{A4C3F9D2-0307-0450-4E41-55D3298E641B}"/>
+                <a16:creationId xmlns="" xmlns:a16="http://schemas.microsoft.com/office/drawing/2014/main" id="{A4C3F9D2-0307-0450-4E41-55D3298E641B}"/>
               </a:ext>
             </a:extLst>
           </p:cNvPr>
@@ -10000,7 +10008,7 @@
           <p:cNvPr id="7" name="AutoShape 4" descr="An example of graph signal reconstruction over wireless sensor network. |  Download Scientific Diagram">
             <a:extLst>
               <a:ext uri="{FF2B5EF4-FFF2-40B4-BE49-F238E27FC236}">
-                <a16:creationId xmlns:a16="http://schemas.microsoft.com/office/drawing/2014/main" xmlns="" id="{A5277E26-0B39-A36B-7447-436FDC3E025E}"/>
+                <a16:creationId xmlns="" xmlns:a16="http://schemas.microsoft.com/office/drawing/2014/main" id="{A5277E26-0B39-A36B-7447-436FDC3E025E}"/>
               </a:ext>
             </a:extLst>
           </p:cNvPr>
@@ -10051,7 +10059,7 @@
           <p:cNvPr id="4" name="Espaço Reservado para Conteúdo 3">
             <a:extLst>
               <a:ext uri="{FF2B5EF4-FFF2-40B4-BE49-F238E27FC236}">
-                <a16:creationId xmlns:a16="http://schemas.microsoft.com/office/drawing/2014/main" xmlns="" id="{83702F57-B420-BA92-57FC-CDEAF0E04638}"/>
+                <a16:creationId xmlns="" xmlns:a16="http://schemas.microsoft.com/office/drawing/2014/main" id="{83702F57-B420-BA92-57FC-CDEAF0E04638}"/>
               </a:ext>
             </a:extLst>
           </p:cNvPr>
@@ -10094,7 +10102,7 @@
           <p:cNvPr id="6" name="Picture 5">
             <a:extLst>
               <a:ext uri="{FF2B5EF4-FFF2-40B4-BE49-F238E27FC236}">
-                <a16:creationId xmlns:a16="http://schemas.microsoft.com/office/drawing/2014/main" xmlns="" id="{BE9E2474-44BE-43D0-EE2F-D03349050DA2}"/>
+                <a16:creationId xmlns="" xmlns:a16="http://schemas.microsoft.com/office/drawing/2014/main" id="{BE9E2474-44BE-43D0-EE2F-D03349050DA2}"/>
               </a:ext>
             </a:extLst>
           </p:cNvPr>
@@ -10124,7 +10132,7 @@
           <p:cNvPr id="10" name="TextBox 9">
             <a:extLst>
               <a:ext uri="{FF2B5EF4-FFF2-40B4-BE49-F238E27FC236}">
-                <a16:creationId xmlns:a16="http://schemas.microsoft.com/office/drawing/2014/main" xmlns="" id="{E7FEC406-7A7E-5D78-DF69-D2416A2375C3}"/>
+                <a16:creationId xmlns="" xmlns:a16="http://schemas.microsoft.com/office/drawing/2014/main" id="{E7FEC406-7A7E-5D78-DF69-D2416A2375C3}"/>
               </a:ext>
             </a:extLst>
           </p:cNvPr>
@@ -10195,7 +10203,7 @@
         <p:cNvPr id="1" name="">
           <a:extLst>
             <a:ext uri="{FF2B5EF4-FFF2-40B4-BE49-F238E27FC236}">
-              <a16:creationId xmlns:a16="http://schemas.microsoft.com/office/drawing/2014/main" xmlns="" id="{749972DB-1A29-C878-AC52-B084A233C66B}"/>
+              <a16:creationId xmlns="" xmlns:a16="http://schemas.microsoft.com/office/drawing/2014/main" id="{749972DB-1A29-C878-AC52-B084A233C66B}"/>
             </a:ext>
           </a:extLst>
         </p:cNvPr>
@@ -10215,7 +10223,7 @@
           <p:cNvPr id="2" name="Título 1">
             <a:extLst>
               <a:ext uri="{FF2B5EF4-FFF2-40B4-BE49-F238E27FC236}">
-                <a16:creationId xmlns:a16="http://schemas.microsoft.com/office/drawing/2014/main" xmlns="" id="{223F31A0-EB34-A3FB-D3AD-8E88098E62F1}"/>
+                <a16:creationId xmlns="" xmlns:a16="http://schemas.microsoft.com/office/drawing/2014/main" id="{223F31A0-EB34-A3FB-D3AD-8E88098E62F1}"/>
               </a:ext>
             </a:extLst>
           </p:cNvPr>
@@ -10255,7 +10263,7 @@
           <p:cNvPr id="3" name="AutoShape 2" descr="An example of graph signal reconstruction over wireless sensor network. |  Download Scientific Diagram">
             <a:extLst>
               <a:ext uri="{FF2B5EF4-FFF2-40B4-BE49-F238E27FC236}">
-                <a16:creationId xmlns:a16="http://schemas.microsoft.com/office/drawing/2014/main" xmlns="" id="{A22086E9-56E3-EC28-E48A-9069376FF074}"/>
+                <a16:creationId xmlns="" xmlns:a16="http://schemas.microsoft.com/office/drawing/2014/main" id="{A22086E9-56E3-EC28-E48A-9069376FF074}"/>
               </a:ext>
             </a:extLst>
           </p:cNvPr>
@@ -10306,7 +10314,7 @@
           <p:cNvPr id="7" name="AutoShape 4" descr="An example of graph signal reconstruction over wireless sensor network. |  Download Scientific Diagram">
             <a:extLst>
               <a:ext uri="{FF2B5EF4-FFF2-40B4-BE49-F238E27FC236}">
-                <a16:creationId xmlns:a16="http://schemas.microsoft.com/office/drawing/2014/main" xmlns="" id="{E1A13779-07EA-5350-121F-C4141832B952}"/>
+                <a16:creationId xmlns="" xmlns:a16="http://schemas.microsoft.com/office/drawing/2014/main" id="{E1A13779-07EA-5350-121F-C4141832B952}"/>
               </a:ext>
             </a:extLst>
           </p:cNvPr>
@@ -10357,7 +10365,7 @@
           <p:cNvPr id="4" name="Espaço Reservado para Conteúdo 3">
             <a:extLst>
               <a:ext uri="{FF2B5EF4-FFF2-40B4-BE49-F238E27FC236}">
-                <a16:creationId xmlns:a16="http://schemas.microsoft.com/office/drawing/2014/main" xmlns="" id="{B461F4C5-B5F4-E3F6-B686-4C94C38803D5}"/>
+                <a16:creationId xmlns="" xmlns:a16="http://schemas.microsoft.com/office/drawing/2014/main" id="{B461F4C5-B5F4-E3F6-B686-4C94C38803D5}"/>
               </a:ext>
             </a:extLst>
           </p:cNvPr>
@@ -10400,7 +10408,7 @@
           <p:cNvPr id="6" name="Picture 5">
             <a:extLst>
               <a:ext uri="{FF2B5EF4-FFF2-40B4-BE49-F238E27FC236}">
-                <a16:creationId xmlns:a16="http://schemas.microsoft.com/office/drawing/2014/main" xmlns="" id="{CD544109-9098-CA3C-766B-DFEB05AE1F38}"/>
+                <a16:creationId xmlns="" xmlns:a16="http://schemas.microsoft.com/office/drawing/2014/main" id="{CD544109-9098-CA3C-766B-DFEB05AE1F38}"/>
               </a:ext>
             </a:extLst>
           </p:cNvPr>
@@ -10430,7 +10438,7 @@
           <p:cNvPr id="9" name="TextBox 9">
             <a:extLst>
               <a:ext uri="{FF2B5EF4-FFF2-40B4-BE49-F238E27FC236}">
-                <a16:creationId xmlns:a16="http://schemas.microsoft.com/office/drawing/2014/main" xmlns="" id="{E7FEC406-7A7E-5D78-DF69-D2416A2375C3}"/>
+                <a16:creationId xmlns="" xmlns:a16="http://schemas.microsoft.com/office/drawing/2014/main" id="{E7FEC406-7A7E-5D78-DF69-D2416A2375C3}"/>
               </a:ext>
             </a:extLst>
           </p:cNvPr>
@@ -10501,7 +10509,7 @@
         <p:cNvPr id="1" name="">
           <a:extLst>
             <a:ext uri="{FF2B5EF4-FFF2-40B4-BE49-F238E27FC236}">
-              <a16:creationId xmlns:a16="http://schemas.microsoft.com/office/drawing/2014/main" xmlns="" id="{69317B56-95CF-5EB4-1950-84D108AD8D37}"/>
+              <a16:creationId xmlns="" xmlns:a16="http://schemas.microsoft.com/office/drawing/2014/main" id="{69317B56-95CF-5EB4-1950-84D108AD8D37}"/>
             </a:ext>
           </a:extLst>
         </p:cNvPr>
@@ -10521,7 +10529,7 @@
           <p:cNvPr id="2" name="Título 1">
             <a:extLst>
               <a:ext uri="{FF2B5EF4-FFF2-40B4-BE49-F238E27FC236}">
-                <a16:creationId xmlns:a16="http://schemas.microsoft.com/office/drawing/2014/main" xmlns="" id="{48642745-4759-3504-B537-1A643C25576D}"/>
+                <a16:creationId xmlns="" xmlns:a16="http://schemas.microsoft.com/office/drawing/2014/main" id="{48642745-4759-3504-B537-1A643C25576D}"/>
               </a:ext>
             </a:extLst>
           </p:cNvPr>
@@ -10561,7 +10569,7 @@
           <p:cNvPr id="3" name="AutoShape 2" descr="An example of graph signal reconstruction over wireless sensor network. |  Download Scientific Diagram">
             <a:extLst>
               <a:ext uri="{FF2B5EF4-FFF2-40B4-BE49-F238E27FC236}">
-                <a16:creationId xmlns:a16="http://schemas.microsoft.com/office/drawing/2014/main" xmlns="" id="{84E44FE8-BA6E-9F6F-1997-0AD869D77EFD}"/>
+                <a16:creationId xmlns="" xmlns:a16="http://schemas.microsoft.com/office/drawing/2014/main" id="{84E44FE8-BA6E-9F6F-1997-0AD869D77EFD}"/>
               </a:ext>
             </a:extLst>
           </p:cNvPr>
@@ -10612,7 +10620,7 @@
           <p:cNvPr id="7" name="AutoShape 4" descr="An example of graph signal reconstruction over wireless sensor network. |  Download Scientific Diagram">
             <a:extLst>
               <a:ext uri="{FF2B5EF4-FFF2-40B4-BE49-F238E27FC236}">
-                <a16:creationId xmlns:a16="http://schemas.microsoft.com/office/drawing/2014/main" xmlns="" id="{21DB31B1-11EA-8016-35EE-14EA7345F531}"/>
+                <a16:creationId xmlns="" xmlns:a16="http://schemas.microsoft.com/office/drawing/2014/main" id="{21DB31B1-11EA-8016-35EE-14EA7345F531}"/>
               </a:ext>
             </a:extLst>
           </p:cNvPr>
@@ -10663,7 +10671,7 @@
           <p:cNvPr id="4" name="Espaço Reservado para Conteúdo 3">
             <a:extLst>
               <a:ext uri="{FF2B5EF4-FFF2-40B4-BE49-F238E27FC236}">
-                <a16:creationId xmlns:a16="http://schemas.microsoft.com/office/drawing/2014/main" xmlns="" id="{63D17EBA-F020-2A71-B133-21937AD74F91}"/>
+                <a16:creationId xmlns="" xmlns:a16="http://schemas.microsoft.com/office/drawing/2014/main" id="{63D17EBA-F020-2A71-B133-21937AD74F91}"/>
               </a:ext>
             </a:extLst>
           </p:cNvPr>
@@ -10706,7 +10714,7 @@
           <p:cNvPr id="6" name="Picture 5">
             <a:extLst>
               <a:ext uri="{FF2B5EF4-FFF2-40B4-BE49-F238E27FC236}">
-                <a16:creationId xmlns:a16="http://schemas.microsoft.com/office/drawing/2014/main" xmlns="" id="{9F08A47C-C93C-D40B-F5DC-3C29F2EEEE60}"/>
+                <a16:creationId xmlns="" xmlns:a16="http://schemas.microsoft.com/office/drawing/2014/main" id="{9F08A47C-C93C-D40B-F5DC-3C29F2EEEE60}"/>
               </a:ext>
             </a:extLst>
           </p:cNvPr>
@@ -10736,7 +10744,7 @@
           <p:cNvPr id="8" name="TextBox 7">
             <a:extLst>
               <a:ext uri="{FF2B5EF4-FFF2-40B4-BE49-F238E27FC236}">
-                <a16:creationId xmlns:a16="http://schemas.microsoft.com/office/drawing/2014/main" xmlns="" id="{4376C1A9-3731-8BF9-861E-3D686FEA4F43}"/>
+                <a16:creationId xmlns="" xmlns:a16="http://schemas.microsoft.com/office/drawing/2014/main" id="{4376C1A9-3731-8BF9-861E-3D686FEA4F43}"/>
               </a:ext>
             </a:extLst>
           </p:cNvPr>
@@ -10905,7 +10913,7 @@
           <p:cNvPr id="2" name="Título 1">
             <a:extLst>
               <a:ext uri="{FF2B5EF4-FFF2-40B4-BE49-F238E27FC236}">
-                <a16:creationId xmlns:a16="http://schemas.microsoft.com/office/drawing/2014/main" xmlns="" id="{5F09B89C-3183-4D52-981A-62798DDFF2B8}"/>
+                <a16:creationId xmlns="" xmlns:a16="http://schemas.microsoft.com/office/drawing/2014/main" id="{5F09B89C-3183-4D52-981A-62798DDFF2B8}"/>
               </a:ext>
             </a:extLst>
           </p:cNvPr>
@@ -10940,7 +10948,7 @@
           <p:cNvPr id="3" name="AutoShape 2" descr="An example of graph signal reconstruction over wireless sensor network. |  Download Scientific Diagram">
             <a:extLst>
               <a:ext uri="{FF2B5EF4-FFF2-40B4-BE49-F238E27FC236}">
-                <a16:creationId xmlns:a16="http://schemas.microsoft.com/office/drawing/2014/main" xmlns="" id="{0166B4DD-D72A-4A54-94A7-2C38133837FD}"/>
+                <a16:creationId xmlns="" xmlns:a16="http://schemas.microsoft.com/office/drawing/2014/main" id="{0166B4DD-D72A-4A54-94A7-2C38133837FD}"/>
               </a:ext>
             </a:extLst>
           </p:cNvPr>
@@ -10991,7 +10999,7 @@
           <p:cNvPr id="7" name="AutoShape 4" descr="An example of graph signal reconstruction over wireless sensor network. |  Download Scientific Diagram">
             <a:extLst>
               <a:ext uri="{FF2B5EF4-FFF2-40B4-BE49-F238E27FC236}">
-                <a16:creationId xmlns:a16="http://schemas.microsoft.com/office/drawing/2014/main" xmlns="" id="{14C2B67D-81A1-457E-A410-FE4350A3CCA4}"/>
+                <a16:creationId xmlns="" xmlns:a16="http://schemas.microsoft.com/office/drawing/2014/main" id="{14C2B67D-81A1-457E-A410-FE4350A3CCA4}"/>
               </a:ext>
             </a:extLst>
           </p:cNvPr>
@@ -11042,7 +11050,7 @@
           <p:cNvPr id="1026" name="Picture 2" descr="Univariate Anomaly Detection | Anomaly Detection Algorithms">
             <a:extLst>
               <a:ext uri="{FF2B5EF4-FFF2-40B4-BE49-F238E27FC236}">
-                <a16:creationId xmlns:a16="http://schemas.microsoft.com/office/drawing/2014/main" xmlns="" id="{D6FF8611-2758-C1DA-8FC6-10C7681C129F}"/>
+                <a16:creationId xmlns="" xmlns:a16="http://schemas.microsoft.com/office/drawing/2014/main" id="{D6FF8611-2758-C1DA-8FC6-10C7681C129F}"/>
               </a:ext>
             </a:extLst>
           </p:cNvPr>
@@ -11089,7 +11097,7 @@
           <p:cNvPr id="4" name="Espaço Reservado para Conteúdo 3">
             <a:extLst>
               <a:ext uri="{FF2B5EF4-FFF2-40B4-BE49-F238E27FC236}">
-                <a16:creationId xmlns:a16="http://schemas.microsoft.com/office/drawing/2014/main" xmlns="" id="{5F1B432F-F570-AEC0-CFFF-C1D9196D7234}"/>
+                <a16:creationId xmlns="" xmlns:a16="http://schemas.microsoft.com/office/drawing/2014/main" id="{5F1B432F-F570-AEC0-CFFF-C1D9196D7234}"/>
               </a:ext>
             </a:extLst>
           </p:cNvPr>
@@ -11206,7 +11214,7 @@
           <p:cNvPr id="2" name="Título 1">
             <a:extLst>
               <a:ext uri="{FF2B5EF4-FFF2-40B4-BE49-F238E27FC236}">
-                <a16:creationId xmlns:a16="http://schemas.microsoft.com/office/drawing/2014/main" xmlns="" id="{5F09B89C-3183-4D52-981A-62798DDFF2B8}"/>
+                <a16:creationId xmlns="" xmlns:a16="http://schemas.microsoft.com/office/drawing/2014/main" id="{5F09B89C-3183-4D52-981A-62798DDFF2B8}"/>
               </a:ext>
             </a:extLst>
           </p:cNvPr>
@@ -11241,7 +11249,7 @@
           <p:cNvPr id="3" name="AutoShape 2" descr="An example of graph signal reconstruction over wireless sensor network. |  Download Scientific Diagram">
             <a:extLst>
               <a:ext uri="{FF2B5EF4-FFF2-40B4-BE49-F238E27FC236}">
-                <a16:creationId xmlns:a16="http://schemas.microsoft.com/office/drawing/2014/main" xmlns="" id="{0166B4DD-D72A-4A54-94A7-2C38133837FD}"/>
+                <a16:creationId xmlns="" xmlns:a16="http://schemas.microsoft.com/office/drawing/2014/main" id="{0166B4DD-D72A-4A54-94A7-2C38133837FD}"/>
               </a:ext>
             </a:extLst>
           </p:cNvPr>
@@ -11292,7 +11300,7 @@
           <p:cNvPr id="7" name="AutoShape 4" descr="An example of graph signal reconstruction over wireless sensor network. |  Download Scientific Diagram">
             <a:extLst>
               <a:ext uri="{FF2B5EF4-FFF2-40B4-BE49-F238E27FC236}">
-                <a16:creationId xmlns:a16="http://schemas.microsoft.com/office/drawing/2014/main" xmlns="" id="{14C2B67D-81A1-457E-A410-FE4350A3CCA4}"/>
+                <a16:creationId xmlns="" xmlns:a16="http://schemas.microsoft.com/office/drawing/2014/main" id="{14C2B67D-81A1-457E-A410-FE4350A3CCA4}"/>
               </a:ext>
             </a:extLst>
           </p:cNvPr>
@@ -11343,7 +11351,7 @@
           <p:cNvPr id="4" name="Espaço Reservado para Conteúdo 3">
             <a:extLst>
               <a:ext uri="{FF2B5EF4-FFF2-40B4-BE49-F238E27FC236}">
-                <a16:creationId xmlns:a16="http://schemas.microsoft.com/office/drawing/2014/main" xmlns="" id="{5F1B432F-F570-AEC0-CFFF-C1D9196D7234}"/>
+                <a16:creationId xmlns="" xmlns:a16="http://schemas.microsoft.com/office/drawing/2014/main" id="{5F1B432F-F570-AEC0-CFFF-C1D9196D7234}"/>
               </a:ext>
             </a:extLst>
           </p:cNvPr>
@@ -11376,7 +11384,7 @@
           <p:cNvPr id="2050" name="Picture 2" descr="Anomaly Detection Real World Scenarios Approaches and Live Implementation -  YouTube">
             <a:extLst>
               <a:ext uri="{FF2B5EF4-FFF2-40B4-BE49-F238E27FC236}">
-                <a16:creationId xmlns:a16="http://schemas.microsoft.com/office/drawing/2014/main" xmlns="" id="{FDE7A801-6226-C67C-506A-7A9F297D280C}"/>
+                <a16:creationId xmlns="" xmlns:a16="http://schemas.microsoft.com/office/drawing/2014/main" id="{FDE7A801-6226-C67C-506A-7A9F297D280C}"/>
               </a:ext>
             </a:extLst>
           </p:cNvPr>
@@ -11453,7 +11461,7 @@
         <p:cNvPr id="1" name="">
           <a:extLst>
             <a:ext uri="{FF2B5EF4-FFF2-40B4-BE49-F238E27FC236}">
-              <a16:creationId xmlns:a16="http://schemas.microsoft.com/office/drawing/2014/main" xmlns="" id="{042E1AD8-1AE2-9D66-D1D0-BECEA32F14E0}"/>
+              <a16:creationId xmlns="" xmlns:a16="http://schemas.microsoft.com/office/drawing/2014/main" id="{042E1AD8-1AE2-9D66-D1D0-BECEA32F14E0}"/>
             </a:ext>
           </a:extLst>
         </p:cNvPr>
@@ -11473,7 +11481,7 @@
           <p:cNvPr id="2" name="Título 1">
             <a:extLst>
               <a:ext uri="{FF2B5EF4-FFF2-40B4-BE49-F238E27FC236}">
-                <a16:creationId xmlns:a16="http://schemas.microsoft.com/office/drawing/2014/main" xmlns="" id="{91362F63-8B67-2CA5-F1E0-70285F8A5D99}"/>
+                <a16:creationId xmlns="" xmlns:a16="http://schemas.microsoft.com/office/drawing/2014/main" id="{91362F63-8B67-2CA5-F1E0-70285F8A5D99}"/>
               </a:ext>
             </a:extLst>
           </p:cNvPr>
@@ -11508,7 +11516,7 @@
           <p:cNvPr id="3" name="AutoShape 2" descr="An example of graph signal reconstruction over wireless sensor network. |  Download Scientific Diagram">
             <a:extLst>
               <a:ext uri="{FF2B5EF4-FFF2-40B4-BE49-F238E27FC236}">
-                <a16:creationId xmlns:a16="http://schemas.microsoft.com/office/drawing/2014/main" xmlns="" id="{22FDC0BB-96C6-D071-6072-8265FA475D3B}"/>
+                <a16:creationId xmlns="" xmlns:a16="http://schemas.microsoft.com/office/drawing/2014/main" id="{22FDC0BB-96C6-D071-6072-8265FA475D3B}"/>
               </a:ext>
             </a:extLst>
           </p:cNvPr>
@@ -11559,7 +11567,7 @@
           <p:cNvPr id="7" name="AutoShape 4" descr="An example of graph signal reconstruction over wireless sensor network. |  Download Scientific Diagram">
             <a:extLst>
               <a:ext uri="{FF2B5EF4-FFF2-40B4-BE49-F238E27FC236}">
-                <a16:creationId xmlns:a16="http://schemas.microsoft.com/office/drawing/2014/main" xmlns="" id="{0D2FBB85-B0FE-5D58-DBE2-4C312CB1B3A1}"/>
+                <a16:creationId xmlns="" xmlns:a16="http://schemas.microsoft.com/office/drawing/2014/main" id="{0D2FBB85-B0FE-5D58-DBE2-4C312CB1B3A1}"/>
               </a:ext>
             </a:extLst>
           </p:cNvPr>
@@ -11610,7 +11618,7 @@
           <p:cNvPr id="4" name="Espaço Reservado para Conteúdo 3">
             <a:extLst>
               <a:ext uri="{FF2B5EF4-FFF2-40B4-BE49-F238E27FC236}">
-                <a16:creationId xmlns:a16="http://schemas.microsoft.com/office/drawing/2014/main" xmlns="" id="{F19EED01-E2A7-FCA9-AE40-ABE3206A5DB3}"/>
+                <a16:creationId xmlns="" xmlns:a16="http://schemas.microsoft.com/office/drawing/2014/main" id="{F19EED01-E2A7-FCA9-AE40-ABE3206A5DB3}"/>
               </a:ext>
             </a:extLst>
           </p:cNvPr>
@@ -11694,7 +11702,7 @@
           <p:cNvPr id="6" name="Picture 5">
             <a:extLst>
               <a:ext uri="{FF2B5EF4-FFF2-40B4-BE49-F238E27FC236}">
-                <a16:creationId xmlns:a16="http://schemas.microsoft.com/office/drawing/2014/main" xmlns="" id="{874D15ED-AE97-5474-7E5D-B644432B2D4C}"/>
+                <a16:creationId xmlns="" xmlns:a16="http://schemas.microsoft.com/office/drawing/2014/main" id="{874D15ED-AE97-5474-7E5D-B644432B2D4C}"/>
               </a:ext>
             </a:extLst>
           </p:cNvPr>
@@ -11724,7 +11732,7 @@
           <p:cNvPr id="9" name="Picture 8">
             <a:extLst>
               <a:ext uri="{FF2B5EF4-FFF2-40B4-BE49-F238E27FC236}">
-                <a16:creationId xmlns:a16="http://schemas.microsoft.com/office/drawing/2014/main" xmlns="" id="{14197941-A588-8F4A-49EA-1C5B6528F761}"/>
+                <a16:creationId xmlns="" xmlns:a16="http://schemas.microsoft.com/office/drawing/2014/main" id="{14197941-A588-8F4A-49EA-1C5B6528F761}"/>
               </a:ext>
             </a:extLst>
           </p:cNvPr>
@@ -11754,7 +11762,7 @@
           <p:cNvPr id="10" name="Arrow: Right 9">
             <a:extLst>
               <a:ext uri="{FF2B5EF4-FFF2-40B4-BE49-F238E27FC236}">
-                <a16:creationId xmlns:a16="http://schemas.microsoft.com/office/drawing/2014/main" xmlns="" id="{02EF8AE6-9567-78CC-094E-7578F2C11532}"/>
+                <a16:creationId xmlns="" xmlns:a16="http://schemas.microsoft.com/office/drawing/2014/main" id="{02EF8AE6-9567-78CC-094E-7578F2C11532}"/>
               </a:ext>
             </a:extLst>
           </p:cNvPr>
@@ -11844,7 +11852,7 @@
           <p:cNvPr id="2" name="Título 1">
             <a:extLst>
               <a:ext uri="{FF2B5EF4-FFF2-40B4-BE49-F238E27FC236}">
-                <a16:creationId xmlns:a16="http://schemas.microsoft.com/office/drawing/2014/main" xmlns="" id="{5F09B89C-3183-4D52-981A-62798DDFF2B8}"/>
+                <a16:creationId xmlns="" xmlns:a16="http://schemas.microsoft.com/office/drawing/2014/main" id="{5F09B89C-3183-4D52-981A-62798DDFF2B8}"/>
               </a:ext>
             </a:extLst>
           </p:cNvPr>
@@ -11884,7 +11892,7 @@
           <p:cNvPr id="3" name="AutoShape 2" descr="An example of graph signal reconstruction over wireless sensor network. |  Download Scientific Diagram">
             <a:extLst>
               <a:ext uri="{FF2B5EF4-FFF2-40B4-BE49-F238E27FC236}">
-                <a16:creationId xmlns:a16="http://schemas.microsoft.com/office/drawing/2014/main" xmlns="" id="{0166B4DD-D72A-4A54-94A7-2C38133837FD}"/>
+                <a16:creationId xmlns="" xmlns:a16="http://schemas.microsoft.com/office/drawing/2014/main" id="{0166B4DD-D72A-4A54-94A7-2C38133837FD}"/>
               </a:ext>
             </a:extLst>
           </p:cNvPr>
@@ -11935,7 +11943,7 @@
           <p:cNvPr id="7" name="AutoShape 4" descr="An example of graph signal reconstruction over wireless sensor network. |  Download Scientific Diagram">
             <a:extLst>
               <a:ext uri="{FF2B5EF4-FFF2-40B4-BE49-F238E27FC236}">
-                <a16:creationId xmlns:a16="http://schemas.microsoft.com/office/drawing/2014/main" xmlns="" id="{14C2B67D-81A1-457E-A410-FE4350A3CCA4}"/>
+                <a16:creationId xmlns="" xmlns:a16="http://schemas.microsoft.com/office/drawing/2014/main" id="{14C2B67D-81A1-457E-A410-FE4350A3CCA4}"/>
               </a:ext>
             </a:extLst>
           </p:cNvPr>
@@ -11986,7 +11994,7 @@
           <p:cNvPr id="4" name="Espaço Reservado para Conteúdo 3">
             <a:extLst>
               <a:ext uri="{FF2B5EF4-FFF2-40B4-BE49-F238E27FC236}">
-                <a16:creationId xmlns:a16="http://schemas.microsoft.com/office/drawing/2014/main" xmlns="" id="{5F1B432F-F570-AEC0-CFFF-C1D9196D7234}"/>
+                <a16:creationId xmlns="" xmlns:a16="http://schemas.microsoft.com/office/drawing/2014/main" id="{5F1B432F-F570-AEC0-CFFF-C1D9196D7234}"/>
               </a:ext>
             </a:extLst>
           </p:cNvPr>
@@ -12027,7 +12035,7 @@
           <p:cNvPr id="6" name="CaixaDeTexto 5">
             <a:extLst>
               <a:ext uri="{FF2B5EF4-FFF2-40B4-BE49-F238E27FC236}">
-                <a16:creationId xmlns:a16="http://schemas.microsoft.com/office/drawing/2014/main" xmlns="" id="{470482DB-F365-0A83-E102-37A8EB7EACEF}"/>
+                <a16:creationId xmlns="" xmlns:a16="http://schemas.microsoft.com/office/drawing/2014/main" id="{470482DB-F365-0A83-E102-37A8EB7EACEF}"/>
               </a:ext>
             </a:extLst>
           </p:cNvPr>
@@ -12059,11 +12067,7 @@
             </a:pPr>
             <a:r>
               <a:rPr lang="pt-BR" dirty="0"/>
-              <a:t>Exemplo: </a:t>
-            </a:r>
-            <a:r>
-              <a:rPr lang="pt-BR" dirty="0"/>
-              <a:t>Escolha de Locais para Centros de Distribuição</a:t>
+              <a:t>Exemplo: Escolha de Locais para Centros de Distribuição</a:t>
             </a:r>
           </a:p>
           <a:p>
@@ -12118,7 +12122,7 @@
           <p:cNvPr id="6146" name="Picture 2" descr="Centro de Distribuição: uma solução mais que viável – Novidá">
             <a:extLst>
               <a:ext uri="{FF2B5EF4-FFF2-40B4-BE49-F238E27FC236}">
-                <a16:creationId xmlns:a16="http://schemas.microsoft.com/office/drawing/2014/main" xmlns="" id="{4EEAF6B8-1AE8-82F9-6BD7-E45E945A8CB5}"/>
+                <a16:creationId xmlns="" xmlns:a16="http://schemas.microsoft.com/office/drawing/2014/main" id="{4EEAF6B8-1AE8-82F9-6BD7-E45E945A8CB5}"/>
               </a:ext>
             </a:extLst>
           </p:cNvPr>
@@ -12165,7 +12169,7 @@
           <p:cNvPr id="8" name="Picture 2" descr="Mapa do Brasil">
             <a:extLst>
               <a:ext uri="{FF2B5EF4-FFF2-40B4-BE49-F238E27FC236}">
-                <a16:creationId xmlns:a16="http://schemas.microsoft.com/office/drawing/2014/main" xmlns="" id="{BBEA9087-A8E1-78C5-981B-C50D7CF4635F}"/>
+                <a16:creationId xmlns="" xmlns:a16="http://schemas.microsoft.com/office/drawing/2014/main" id="{BBEA9087-A8E1-78C5-981B-C50D7CF4635F}"/>
               </a:ext>
             </a:extLst>
           </p:cNvPr>
@@ -12207,6 +12211,46 @@
           </a:extLst>
         </p:spPr>
       </p:pic>
+      <p:sp>
+        <p:nvSpPr>
+          <p:cNvPr id="5" name="Retângulo 4"/>
+          <p:cNvSpPr/>
+          <p:nvPr/>
+        </p:nvSpPr>
+        <p:spPr>
+          <a:xfrm>
+            <a:off x="2309284" y="5704891"/>
+            <a:ext cx="6431491" cy="923330"/>
+          </a:xfrm>
+          <a:prstGeom prst="rect">
+            <a:avLst/>
+          </a:prstGeom>
+        </p:spPr>
+        <p:txBody>
+          <a:bodyPr wrap="square">
+            <a:spAutoFit/>
+          </a:bodyPr>
+          <a:lstStyle/>
+          <a:p>
+            <a:r>
+              <a:rPr lang="pt-BR" dirty="0">
+                <a:hlinkClick r:id="rId6"/>
+              </a:rPr>
+              <a:t>https://</a:t>
+            </a:r>
+            <a:r>
+              <a:rPr lang="pt-BR" u="sng" dirty="0" smtClean="0">
+                <a:hlinkClick r:id="rId6"/>
+              </a:rPr>
+              <a:t>colab.research.google.com/github/zz4fap/tp557-iot-ml/blob/main/examples/k_means_centros_de_distribuição.ipynb</a:t>
+            </a:r>
+            <a:endParaRPr lang="pt-BR" u="sng" dirty="0"/>
+          </a:p>
+          <a:p>
+            <a:endParaRPr lang="pt-BR" u="sng" dirty="0" smtClean="0"/>
+          </a:p>
+        </p:txBody>
+      </p:sp>
     </p:spTree>
     <p:extLst>
       <p:ext uri="{BB962C8B-B14F-4D97-AF65-F5344CB8AC3E}">
@@ -12242,7 +12286,7 @@
           <p:cNvPr id="2" name="Title 1">
             <a:extLst>
               <a:ext uri="{FF2B5EF4-FFF2-40B4-BE49-F238E27FC236}">
-                <a16:creationId xmlns:a16="http://schemas.microsoft.com/office/drawing/2014/main" xmlns="" id="{59016FD1-6296-97BB-4C76-AD710414CCC6}"/>
+                <a16:creationId xmlns="" xmlns:a16="http://schemas.microsoft.com/office/drawing/2014/main" id="{59016FD1-6296-97BB-4C76-AD710414CCC6}"/>
               </a:ext>
             </a:extLst>
           </p:cNvPr>
@@ -12267,7 +12311,7 @@
           <p:cNvPr id="3" name="Content Placeholder 2">
             <a:extLst>
               <a:ext uri="{FF2B5EF4-FFF2-40B4-BE49-F238E27FC236}">
-                <a16:creationId xmlns:a16="http://schemas.microsoft.com/office/drawing/2014/main" xmlns="" id="{82472478-144F-3D25-9C47-48A21F2E7CAB}"/>
+                <a16:creationId xmlns="" xmlns:a16="http://schemas.microsoft.com/office/drawing/2014/main" id="{82472478-144F-3D25-9C47-48A21F2E7CAB}"/>
               </a:ext>
             </a:extLst>
           </p:cNvPr>
@@ -12336,7 +12380,7 @@
           <p:cNvPr id="2" name="Título 1">
             <a:extLst>
               <a:ext uri="{FF2B5EF4-FFF2-40B4-BE49-F238E27FC236}">
-                <a16:creationId xmlns:a16="http://schemas.microsoft.com/office/drawing/2014/main" xmlns="" id="{5F09B89C-3183-4D52-981A-62798DDFF2B8}"/>
+                <a16:creationId xmlns="" xmlns:a16="http://schemas.microsoft.com/office/drawing/2014/main" id="{5F09B89C-3183-4D52-981A-62798DDFF2B8}"/>
               </a:ext>
             </a:extLst>
           </p:cNvPr>
@@ -12376,7 +12420,7 @@
           <p:cNvPr id="3" name="AutoShape 2" descr="An example of graph signal reconstruction over wireless sensor network. |  Download Scientific Diagram">
             <a:extLst>
               <a:ext uri="{FF2B5EF4-FFF2-40B4-BE49-F238E27FC236}">
-                <a16:creationId xmlns:a16="http://schemas.microsoft.com/office/drawing/2014/main" xmlns="" id="{0166B4DD-D72A-4A54-94A7-2C38133837FD}"/>
+                <a16:creationId xmlns="" xmlns:a16="http://schemas.microsoft.com/office/drawing/2014/main" id="{0166B4DD-D72A-4A54-94A7-2C38133837FD}"/>
               </a:ext>
             </a:extLst>
           </p:cNvPr>
@@ -12427,7 +12471,7 @@
           <p:cNvPr id="7" name="AutoShape 4" descr="An example of graph signal reconstruction over wireless sensor network. |  Download Scientific Diagram">
             <a:extLst>
               <a:ext uri="{FF2B5EF4-FFF2-40B4-BE49-F238E27FC236}">
-                <a16:creationId xmlns:a16="http://schemas.microsoft.com/office/drawing/2014/main" xmlns="" id="{14C2B67D-81A1-457E-A410-FE4350A3CCA4}"/>
+                <a16:creationId xmlns="" xmlns:a16="http://schemas.microsoft.com/office/drawing/2014/main" id="{14C2B67D-81A1-457E-A410-FE4350A3CCA4}"/>
               </a:ext>
             </a:extLst>
           </p:cNvPr>
@@ -12478,7 +12522,7 @@
           <p:cNvPr id="4" name="Espaço Reservado para Conteúdo 3">
             <a:extLst>
               <a:ext uri="{FF2B5EF4-FFF2-40B4-BE49-F238E27FC236}">
-                <a16:creationId xmlns:a16="http://schemas.microsoft.com/office/drawing/2014/main" xmlns="" id="{5F1B432F-F570-AEC0-CFFF-C1D9196D7234}"/>
+                <a16:creationId xmlns="" xmlns:a16="http://schemas.microsoft.com/office/drawing/2014/main" id="{5F1B432F-F570-AEC0-CFFF-C1D9196D7234}"/>
               </a:ext>
             </a:extLst>
           </p:cNvPr>
@@ -12519,7 +12563,7 @@
           <p:cNvPr id="6" name="CaixaDeTexto 5">
             <a:extLst>
               <a:ext uri="{FF2B5EF4-FFF2-40B4-BE49-F238E27FC236}">
-                <a16:creationId xmlns:a16="http://schemas.microsoft.com/office/drawing/2014/main" xmlns="" id="{470482DB-F365-0A83-E102-37A8EB7EACEF}"/>
+                <a16:creationId xmlns="" xmlns:a16="http://schemas.microsoft.com/office/drawing/2014/main" id="{470482DB-F365-0A83-E102-37A8EB7EACEF}"/>
               </a:ext>
             </a:extLst>
           </p:cNvPr>
@@ -12606,7 +12650,7 @@
           <p:cNvPr id="8194" name="Picture 2">
             <a:extLst>
               <a:ext uri="{FF2B5EF4-FFF2-40B4-BE49-F238E27FC236}">
-                <a16:creationId xmlns:a16="http://schemas.microsoft.com/office/drawing/2014/main" xmlns="" id="{495C0F98-25B1-BB0B-22CE-238E6C7C5DE2}"/>
+                <a16:creationId xmlns="" xmlns:a16="http://schemas.microsoft.com/office/drawing/2014/main" id="{495C0F98-25B1-BB0B-22CE-238E6C7C5DE2}"/>
               </a:ext>
             </a:extLst>
           </p:cNvPr>
@@ -12697,7 +12741,7 @@
           <p:cNvPr id="2" name="Título 1">
             <a:extLst>
               <a:ext uri="{FF2B5EF4-FFF2-40B4-BE49-F238E27FC236}">
-                <a16:creationId xmlns:a16="http://schemas.microsoft.com/office/drawing/2014/main" xmlns="" id="{5F09B89C-3183-4D52-981A-62798DDFF2B8}"/>
+                <a16:creationId xmlns="" xmlns:a16="http://schemas.microsoft.com/office/drawing/2014/main" id="{5F09B89C-3183-4D52-981A-62798DDFF2B8}"/>
               </a:ext>
             </a:extLst>
           </p:cNvPr>
@@ -12732,7 +12776,7 @@
           <p:cNvPr id="3" name="AutoShape 2" descr="An example of graph signal reconstruction over wireless sensor network. |  Download Scientific Diagram">
             <a:extLst>
               <a:ext uri="{FF2B5EF4-FFF2-40B4-BE49-F238E27FC236}">
-                <a16:creationId xmlns:a16="http://schemas.microsoft.com/office/drawing/2014/main" xmlns="" id="{0166B4DD-D72A-4A54-94A7-2C38133837FD}"/>
+                <a16:creationId xmlns="" xmlns:a16="http://schemas.microsoft.com/office/drawing/2014/main" id="{0166B4DD-D72A-4A54-94A7-2C38133837FD}"/>
               </a:ext>
             </a:extLst>
           </p:cNvPr>
@@ -12783,7 +12827,7 @@
           <p:cNvPr id="7" name="AutoShape 4" descr="An example of graph signal reconstruction over wireless sensor network. |  Download Scientific Diagram">
             <a:extLst>
               <a:ext uri="{FF2B5EF4-FFF2-40B4-BE49-F238E27FC236}">
-                <a16:creationId xmlns:a16="http://schemas.microsoft.com/office/drawing/2014/main" xmlns="" id="{14C2B67D-81A1-457E-A410-FE4350A3CCA4}"/>
+                <a16:creationId xmlns="" xmlns:a16="http://schemas.microsoft.com/office/drawing/2014/main" id="{14C2B67D-81A1-457E-A410-FE4350A3CCA4}"/>
               </a:ext>
             </a:extLst>
           </p:cNvPr>
@@ -12834,7 +12878,7 @@
           <p:cNvPr id="4" name="Espaço Reservado para Conteúdo 3">
             <a:extLst>
               <a:ext uri="{FF2B5EF4-FFF2-40B4-BE49-F238E27FC236}">
-                <a16:creationId xmlns:a16="http://schemas.microsoft.com/office/drawing/2014/main" xmlns="" id="{5F1B432F-F570-AEC0-CFFF-C1D9196D7234}"/>
+                <a16:creationId xmlns="" xmlns:a16="http://schemas.microsoft.com/office/drawing/2014/main" id="{5F1B432F-F570-AEC0-CFFF-C1D9196D7234}"/>
               </a:ext>
             </a:extLst>
           </p:cNvPr>
@@ -12957,7 +13001,7 @@
           <p:cNvPr id="2" name="Título 1">
             <a:extLst>
               <a:ext uri="{FF2B5EF4-FFF2-40B4-BE49-F238E27FC236}">
-                <a16:creationId xmlns:a16="http://schemas.microsoft.com/office/drawing/2014/main" xmlns="" id="{5F09B89C-3183-4D52-981A-62798DDFF2B8}"/>
+                <a16:creationId xmlns="" xmlns:a16="http://schemas.microsoft.com/office/drawing/2014/main" id="{5F09B89C-3183-4D52-981A-62798DDFF2B8}"/>
               </a:ext>
             </a:extLst>
           </p:cNvPr>
@@ -12997,7 +13041,7 @@
           <p:cNvPr id="3" name="AutoShape 2" descr="An example of graph signal reconstruction over wireless sensor network. |  Download Scientific Diagram">
             <a:extLst>
               <a:ext uri="{FF2B5EF4-FFF2-40B4-BE49-F238E27FC236}">
-                <a16:creationId xmlns:a16="http://schemas.microsoft.com/office/drawing/2014/main" xmlns="" id="{0166B4DD-D72A-4A54-94A7-2C38133837FD}"/>
+                <a16:creationId xmlns="" xmlns:a16="http://schemas.microsoft.com/office/drawing/2014/main" id="{0166B4DD-D72A-4A54-94A7-2C38133837FD}"/>
               </a:ext>
             </a:extLst>
           </p:cNvPr>
@@ -13048,7 +13092,7 @@
           <p:cNvPr id="7" name="AutoShape 4" descr="An example of graph signal reconstruction over wireless sensor network. |  Download Scientific Diagram">
             <a:extLst>
               <a:ext uri="{FF2B5EF4-FFF2-40B4-BE49-F238E27FC236}">
-                <a16:creationId xmlns:a16="http://schemas.microsoft.com/office/drawing/2014/main" xmlns="" id="{14C2B67D-81A1-457E-A410-FE4350A3CCA4}"/>
+                <a16:creationId xmlns="" xmlns:a16="http://schemas.microsoft.com/office/drawing/2014/main" id="{14C2B67D-81A1-457E-A410-FE4350A3CCA4}"/>
               </a:ext>
             </a:extLst>
           </p:cNvPr>
@@ -13099,7 +13143,7 @@
           <p:cNvPr id="4" name="Espaço Reservado para Conteúdo 3">
             <a:extLst>
               <a:ext uri="{FF2B5EF4-FFF2-40B4-BE49-F238E27FC236}">
-                <a16:creationId xmlns:a16="http://schemas.microsoft.com/office/drawing/2014/main" xmlns="" id="{5F1B432F-F570-AEC0-CFFF-C1D9196D7234}"/>
+                <a16:creationId xmlns="" xmlns:a16="http://schemas.microsoft.com/office/drawing/2014/main" id="{5F1B432F-F570-AEC0-CFFF-C1D9196D7234}"/>
               </a:ext>
             </a:extLst>
           </p:cNvPr>
@@ -13140,7 +13184,7 @@
           <p:cNvPr id="6" name="CaixaDeTexto 5">
             <a:extLst>
               <a:ext uri="{FF2B5EF4-FFF2-40B4-BE49-F238E27FC236}">
-                <a16:creationId xmlns:a16="http://schemas.microsoft.com/office/drawing/2014/main" xmlns="" id="{470482DB-F365-0A83-E102-37A8EB7EACEF}"/>
+                <a16:creationId xmlns="" xmlns:a16="http://schemas.microsoft.com/office/drawing/2014/main" id="{470482DB-F365-0A83-E102-37A8EB7EACEF}"/>
               </a:ext>
             </a:extLst>
           </p:cNvPr>
@@ -13280,7 +13324,7 @@
           <p:cNvPr id="2" name="Título 1">
             <a:extLst>
               <a:ext uri="{FF2B5EF4-FFF2-40B4-BE49-F238E27FC236}">
-                <a16:creationId xmlns:a16="http://schemas.microsoft.com/office/drawing/2014/main" xmlns="" id="{5F09B89C-3183-4D52-981A-62798DDFF2B8}"/>
+                <a16:creationId xmlns="" xmlns:a16="http://schemas.microsoft.com/office/drawing/2014/main" id="{5F09B89C-3183-4D52-981A-62798DDFF2B8}"/>
               </a:ext>
             </a:extLst>
           </p:cNvPr>
@@ -13320,7 +13364,7 @@
           <p:cNvPr id="3" name="AutoShape 2" descr="An example of graph signal reconstruction over wireless sensor network. |  Download Scientific Diagram">
             <a:extLst>
               <a:ext uri="{FF2B5EF4-FFF2-40B4-BE49-F238E27FC236}">
-                <a16:creationId xmlns:a16="http://schemas.microsoft.com/office/drawing/2014/main" xmlns="" id="{0166B4DD-D72A-4A54-94A7-2C38133837FD}"/>
+                <a16:creationId xmlns="" xmlns:a16="http://schemas.microsoft.com/office/drawing/2014/main" id="{0166B4DD-D72A-4A54-94A7-2C38133837FD}"/>
               </a:ext>
             </a:extLst>
           </p:cNvPr>
@@ -13371,7 +13415,7 @@
           <p:cNvPr id="7" name="AutoShape 4" descr="An example of graph signal reconstruction over wireless sensor network. |  Download Scientific Diagram">
             <a:extLst>
               <a:ext uri="{FF2B5EF4-FFF2-40B4-BE49-F238E27FC236}">
-                <a16:creationId xmlns:a16="http://schemas.microsoft.com/office/drawing/2014/main" xmlns="" id="{14C2B67D-81A1-457E-A410-FE4350A3CCA4}"/>
+                <a16:creationId xmlns="" xmlns:a16="http://schemas.microsoft.com/office/drawing/2014/main" id="{14C2B67D-81A1-457E-A410-FE4350A3CCA4}"/>
               </a:ext>
             </a:extLst>
           </p:cNvPr>
@@ -13422,7 +13466,7 @@
           <p:cNvPr id="4" name="Espaço Reservado para Conteúdo 3">
             <a:extLst>
               <a:ext uri="{FF2B5EF4-FFF2-40B4-BE49-F238E27FC236}">
-                <a16:creationId xmlns:a16="http://schemas.microsoft.com/office/drawing/2014/main" xmlns="" id="{5F1B432F-F570-AEC0-CFFF-C1D9196D7234}"/>
+                <a16:creationId xmlns="" xmlns:a16="http://schemas.microsoft.com/office/drawing/2014/main" id="{5F1B432F-F570-AEC0-CFFF-C1D9196D7234}"/>
               </a:ext>
             </a:extLst>
           </p:cNvPr>
@@ -13463,7 +13507,7 @@
           <p:cNvPr id="6" name="CaixaDeTexto 5">
             <a:extLst>
               <a:ext uri="{FF2B5EF4-FFF2-40B4-BE49-F238E27FC236}">
-                <a16:creationId xmlns:a16="http://schemas.microsoft.com/office/drawing/2014/main" xmlns="" id="{470482DB-F365-0A83-E102-37A8EB7EACEF}"/>
+                <a16:creationId xmlns="" xmlns:a16="http://schemas.microsoft.com/office/drawing/2014/main" id="{470482DB-F365-0A83-E102-37A8EB7EACEF}"/>
               </a:ext>
             </a:extLst>
           </p:cNvPr>
@@ -13543,7 +13587,7 @@
           <p:cNvPr id="2050" name="Picture 2" descr="Base Teórica do K-Means! Aprenda a Lógica desse Algoritmo Hoje!">
             <a:extLst>
               <a:ext uri="{FF2B5EF4-FFF2-40B4-BE49-F238E27FC236}">
-                <a16:creationId xmlns:a16="http://schemas.microsoft.com/office/drawing/2014/main" xmlns="" id="{0694ADFD-EB2E-2BF0-18BE-B07E4CD60A5F}"/>
+                <a16:creationId xmlns="" xmlns:a16="http://schemas.microsoft.com/office/drawing/2014/main" id="{0694ADFD-EB2E-2BF0-18BE-B07E4CD60A5F}"/>
               </a:ext>
             </a:extLst>
           </p:cNvPr>
@@ -13590,7 +13634,7 @@
           <p:cNvPr id="8" name="Imagem 7">
             <a:extLst>
               <a:ext uri="{FF2B5EF4-FFF2-40B4-BE49-F238E27FC236}">
-                <a16:creationId xmlns:a16="http://schemas.microsoft.com/office/drawing/2014/main" xmlns="" id="{EEF69E85-6440-34FE-5C8A-A5F37765D292}"/>
+                <a16:creationId xmlns="" xmlns:a16="http://schemas.microsoft.com/office/drawing/2014/main" id="{EEF69E85-6440-34FE-5C8A-A5F37765D292}"/>
               </a:ext>
             </a:extLst>
           </p:cNvPr>
@@ -13664,7 +13708,7 @@
           <p:cNvPr id="2" name="Título 1">
             <a:extLst>
               <a:ext uri="{FF2B5EF4-FFF2-40B4-BE49-F238E27FC236}">
-                <a16:creationId xmlns:a16="http://schemas.microsoft.com/office/drawing/2014/main" xmlns="" id="{5F09B89C-3183-4D52-981A-62798DDFF2B8}"/>
+                <a16:creationId xmlns="" xmlns:a16="http://schemas.microsoft.com/office/drawing/2014/main" id="{5F09B89C-3183-4D52-981A-62798DDFF2B8}"/>
               </a:ext>
             </a:extLst>
           </p:cNvPr>
@@ -13699,7 +13743,7 @@
           <p:cNvPr id="3" name="AutoShape 2" descr="An example of graph signal reconstruction over wireless sensor network. |  Download Scientific Diagram">
             <a:extLst>
               <a:ext uri="{FF2B5EF4-FFF2-40B4-BE49-F238E27FC236}">
-                <a16:creationId xmlns:a16="http://schemas.microsoft.com/office/drawing/2014/main" xmlns="" id="{0166B4DD-D72A-4A54-94A7-2C38133837FD}"/>
+                <a16:creationId xmlns="" xmlns:a16="http://schemas.microsoft.com/office/drawing/2014/main" id="{0166B4DD-D72A-4A54-94A7-2C38133837FD}"/>
               </a:ext>
             </a:extLst>
           </p:cNvPr>
@@ -13774,7 +13818,7 @@
           <p:cNvPr id="7" name="AutoShape 4" descr="An example of graph signal reconstruction over wireless sensor network. |  Download Scientific Diagram">
             <a:extLst>
               <a:ext uri="{FF2B5EF4-FFF2-40B4-BE49-F238E27FC236}">
-                <a16:creationId xmlns:a16="http://schemas.microsoft.com/office/drawing/2014/main" xmlns="" id="{14C2B67D-81A1-457E-A410-FE4350A3CCA4}"/>
+                <a16:creationId xmlns="" xmlns:a16="http://schemas.microsoft.com/office/drawing/2014/main" id="{14C2B67D-81A1-457E-A410-FE4350A3CCA4}"/>
               </a:ext>
             </a:extLst>
           </p:cNvPr>
@@ -13849,7 +13893,7 @@
           <p:cNvPr id="4" name="Espaço Reservado para Conteúdo 3">
             <a:extLst>
               <a:ext uri="{FF2B5EF4-FFF2-40B4-BE49-F238E27FC236}">
-                <a16:creationId xmlns:a16="http://schemas.microsoft.com/office/drawing/2014/main" xmlns="" id="{0349BA64-C9D7-4730-9CA9-5C4AD9FC7969}"/>
+                <a16:creationId xmlns="" xmlns:a16="http://schemas.microsoft.com/office/drawing/2014/main" id="{0349BA64-C9D7-4730-9CA9-5C4AD9FC7969}"/>
               </a:ext>
             </a:extLst>
           </p:cNvPr>
@@ -13895,7 +13939,7 @@
           <p:cNvPr id="1026" name="Picture 2" descr="Free photo industrial containers box for logistic import export business.">
             <a:extLst>
               <a:ext uri="{FF2B5EF4-FFF2-40B4-BE49-F238E27FC236}">
-                <a16:creationId xmlns:a16="http://schemas.microsoft.com/office/drawing/2014/main" xmlns="" id="{FDC07977-F662-66CB-7534-103E83976919}"/>
+                <a16:creationId xmlns="" xmlns:a16="http://schemas.microsoft.com/office/drawing/2014/main" id="{FDC07977-F662-66CB-7534-103E83976919}"/>
               </a:ext>
             </a:extLst>
           </p:cNvPr>
@@ -13986,7 +14030,7 @@
           <p:cNvPr id="2" name="Título 1">
             <a:extLst>
               <a:ext uri="{FF2B5EF4-FFF2-40B4-BE49-F238E27FC236}">
-                <a16:creationId xmlns:a16="http://schemas.microsoft.com/office/drawing/2014/main" xmlns="" id="{5F09B89C-3183-4D52-981A-62798DDFF2B8}"/>
+                <a16:creationId xmlns="" xmlns:a16="http://schemas.microsoft.com/office/drawing/2014/main" id="{5F09B89C-3183-4D52-981A-62798DDFF2B8}"/>
               </a:ext>
             </a:extLst>
           </p:cNvPr>
@@ -14021,7 +14065,7 @@
           <p:cNvPr id="3" name="AutoShape 2" descr="An example of graph signal reconstruction over wireless sensor network. |  Download Scientific Diagram">
             <a:extLst>
               <a:ext uri="{FF2B5EF4-FFF2-40B4-BE49-F238E27FC236}">
-                <a16:creationId xmlns:a16="http://schemas.microsoft.com/office/drawing/2014/main" xmlns="" id="{0166B4DD-D72A-4A54-94A7-2C38133837FD}"/>
+                <a16:creationId xmlns="" xmlns:a16="http://schemas.microsoft.com/office/drawing/2014/main" id="{0166B4DD-D72A-4A54-94A7-2C38133837FD}"/>
               </a:ext>
             </a:extLst>
           </p:cNvPr>
@@ -14096,7 +14140,7 @@
           <p:cNvPr id="7" name="AutoShape 4" descr="An example of graph signal reconstruction over wireless sensor network. |  Download Scientific Diagram">
             <a:extLst>
               <a:ext uri="{FF2B5EF4-FFF2-40B4-BE49-F238E27FC236}">
-                <a16:creationId xmlns:a16="http://schemas.microsoft.com/office/drawing/2014/main" xmlns="" id="{14C2B67D-81A1-457E-A410-FE4350A3CCA4}"/>
+                <a16:creationId xmlns="" xmlns:a16="http://schemas.microsoft.com/office/drawing/2014/main" id="{14C2B67D-81A1-457E-A410-FE4350A3CCA4}"/>
               </a:ext>
             </a:extLst>
           </p:cNvPr>
@@ -14171,7 +14215,7 @@
           <p:cNvPr id="4" name="Espaço Reservado para Conteúdo 3">
             <a:extLst>
               <a:ext uri="{FF2B5EF4-FFF2-40B4-BE49-F238E27FC236}">
-                <a16:creationId xmlns:a16="http://schemas.microsoft.com/office/drawing/2014/main" xmlns="" id="{0349BA64-C9D7-4730-9CA9-5C4AD9FC7969}"/>
+                <a16:creationId xmlns="" xmlns:a16="http://schemas.microsoft.com/office/drawing/2014/main" id="{0349BA64-C9D7-4730-9CA9-5C4AD9FC7969}"/>
               </a:ext>
             </a:extLst>
           </p:cNvPr>
@@ -14404,7 +14448,7 @@
           <p:cNvPr id="2" name="Título 1">
             <a:extLst>
               <a:ext uri="{FF2B5EF4-FFF2-40B4-BE49-F238E27FC236}">
-                <a16:creationId xmlns:a16="http://schemas.microsoft.com/office/drawing/2014/main" xmlns="" id="{5F09B89C-3183-4D52-981A-62798DDFF2B8}"/>
+                <a16:creationId xmlns="" xmlns:a16="http://schemas.microsoft.com/office/drawing/2014/main" id="{5F09B89C-3183-4D52-981A-62798DDFF2B8}"/>
               </a:ext>
             </a:extLst>
           </p:cNvPr>
@@ -14439,7 +14483,7 @@
           <p:cNvPr id="3" name="AutoShape 2" descr="An example of graph signal reconstruction over wireless sensor network. |  Download Scientific Diagram">
             <a:extLst>
               <a:ext uri="{FF2B5EF4-FFF2-40B4-BE49-F238E27FC236}">
-                <a16:creationId xmlns:a16="http://schemas.microsoft.com/office/drawing/2014/main" xmlns="" id="{0166B4DD-D72A-4A54-94A7-2C38133837FD}"/>
+                <a16:creationId xmlns="" xmlns:a16="http://schemas.microsoft.com/office/drawing/2014/main" id="{0166B4DD-D72A-4A54-94A7-2C38133837FD}"/>
               </a:ext>
             </a:extLst>
           </p:cNvPr>
@@ -14514,7 +14558,7 @@
           <p:cNvPr id="7" name="AutoShape 4" descr="An example of graph signal reconstruction over wireless sensor network. |  Download Scientific Diagram">
             <a:extLst>
               <a:ext uri="{FF2B5EF4-FFF2-40B4-BE49-F238E27FC236}">
-                <a16:creationId xmlns:a16="http://schemas.microsoft.com/office/drawing/2014/main" xmlns="" id="{14C2B67D-81A1-457E-A410-FE4350A3CCA4}"/>
+                <a16:creationId xmlns="" xmlns:a16="http://schemas.microsoft.com/office/drawing/2014/main" id="{14C2B67D-81A1-457E-A410-FE4350A3CCA4}"/>
               </a:ext>
             </a:extLst>
           </p:cNvPr>
@@ -14589,7 +14633,7 @@
           <p:cNvPr id="4" name="Espaço Reservado para Conteúdo 3">
             <a:extLst>
               <a:ext uri="{FF2B5EF4-FFF2-40B4-BE49-F238E27FC236}">
-                <a16:creationId xmlns:a16="http://schemas.microsoft.com/office/drawing/2014/main" xmlns="" id="{0349BA64-C9D7-4730-9CA9-5C4AD9FC7969}"/>
+                <a16:creationId xmlns="" xmlns:a16="http://schemas.microsoft.com/office/drawing/2014/main" id="{0349BA64-C9D7-4730-9CA9-5C4AD9FC7969}"/>
               </a:ext>
             </a:extLst>
           </p:cNvPr>
@@ -14712,7 +14756,7 @@
           <p:cNvPr id="3" name="AutoShape 2" descr="An example of graph signal reconstruction over wireless sensor network. |  Download Scientific Diagram">
             <a:extLst>
               <a:ext uri="{FF2B5EF4-FFF2-40B4-BE49-F238E27FC236}">
-                <a16:creationId xmlns:a16="http://schemas.microsoft.com/office/drawing/2014/main" xmlns="" id="{0166B4DD-D72A-4A54-94A7-2C38133837FD}"/>
+                <a16:creationId xmlns="" xmlns:a16="http://schemas.microsoft.com/office/drawing/2014/main" id="{0166B4DD-D72A-4A54-94A7-2C38133837FD}"/>
               </a:ext>
             </a:extLst>
           </p:cNvPr>
@@ -14787,7 +14831,7 @@
           <p:cNvPr id="7" name="AutoShape 4" descr="An example of graph signal reconstruction over wireless sensor network. |  Download Scientific Diagram">
             <a:extLst>
               <a:ext uri="{FF2B5EF4-FFF2-40B4-BE49-F238E27FC236}">
-                <a16:creationId xmlns:a16="http://schemas.microsoft.com/office/drawing/2014/main" xmlns="" id="{14C2B67D-81A1-457E-A410-FE4350A3CCA4}"/>
+                <a16:creationId xmlns="" xmlns:a16="http://schemas.microsoft.com/office/drawing/2014/main" id="{14C2B67D-81A1-457E-A410-FE4350A3CCA4}"/>
               </a:ext>
             </a:extLst>
           </p:cNvPr>
@@ -14862,7 +14906,7 @@
           <p:cNvPr id="4" name="Espaço Reservado para Conteúdo 3">
             <a:extLst>
               <a:ext uri="{FF2B5EF4-FFF2-40B4-BE49-F238E27FC236}">
-                <a16:creationId xmlns:a16="http://schemas.microsoft.com/office/drawing/2014/main" xmlns="" id="{0349BA64-C9D7-4730-9CA9-5C4AD9FC7969}"/>
+                <a16:creationId xmlns="" xmlns:a16="http://schemas.microsoft.com/office/drawing/2014/main" id="{0349BA64-C9D7-4730-9CA9-5C4AD9FC7969}"/>
               </a:ext>
             </a:extLst>
           </p:cNvPr>
@@ -15013,7 +15057,7 @@
           <p:cNvPr id="2" name="Título 1">
             <a:extLst>
               <a:ext uri="{FF2B5EF4-FFF2-40B4-BE49-F238E27FC236}">
-                <a16:creationId xmlns:a16="http://schemas.microsoft.com/office/drawing/2014/main" xmlns="" id="{5F09B89C-3183-4D52-981A-62798DDFF2B8}"/>
+                <a16:creationId xmlns="" xmlns:a16="http://schemas.microsoft.com/office/drawing/2014/main" id="{5F09B89C-3183-4D52-981A-62798DDFF2B8}"/>
               </a:ext>
             </a:extLst>
           </p:cNvPr>
@@ -15051,7 +15095,7 @@
           <p:cNvPr id="3" name="AutoShape 2" descr="An example of graph signal reconstruction over wireless sensor network. |  Download Scientific Diagram">
             <a:extLst>
               <a:ext uri="{FF2B5EF4-FFF2-40B4-BE49-F238E27FC236}">
-                <a16:creationId xmlns:a16="http://schemas.microsoft.com/office/drawing/2014/main" xmlns="" id="{0166B4DD-D72A-4A54-94A7-2C38133837FD}"/>
+                <a16:creationId xmlns="" xmlns:a16="http://schemas.microsoft.com/office/drawing/2014/main" id="{0166B4DD-D72A-4A54-94A7-2C38133837FD}"/>
               </a:ext>
             </a:extLst>
           </p:cNvPr>
@@ -15102,7 +15146,7 @@
           <p:cNvPr id="7" name="AutoShape 4" descr="An example of graph signal reconstruction over wireless sensor network. |  Download Scientific Diagram">
             <a:extLst>
               <a:ext uri="{FF2B5EF4-FFF2-40B4-BE49-F238E27FC236}">
-                <a16:creationId xmlns:a16="http://schemas.microsoft.com/office/drawing/2014/main" xmlns="" id="{14C2B67D-81A1-457E-A410-FE4350A3CCA4}"/>
+                <a16:creationId xmlns="" xmlns:a16="http://schemas.microsoft.com/office/drawing/2014/main" id="{14C2B67D-81A1-457E-A410-FE4350A3CCA4}"/>
               </a:ext>
             </a:extLst>
           </p:cNvPr>
@@ -15153,7 +15197,7 @@
           <p:cNvPr id="4" name="Espaço Reservado para Conteúdo 3">
             <a:extLst>
               <a:ext uri="{FF2B5EF4-FFF2-40B4-BE49-F238E27FC236}">
-                <a16:creationId xmlns:a16="http://schemas.microsoft.com/office/drawing/2014/main" xmlns="" id="{5F1B432F-F570-AEC0-CFFF-C1D9196D7234}"/>
+                <a16:creationId xmlns="" xmlns:a16="http://schemas.microsoft.com/office/drawing/2014/main" id="{5F1B432F-F570-AEC0-CFFF-C1D9196D7234}"/>
               </a:ext>
             </a:extLst>
           </p:cNvPr>
@@ -15192,7 +15236,7 @@
           <p:cNvPr id="3074" name="Picture 2" descr="Unsupervised machine learning">
             <a:extLst>
               <a:ext uri="{FF2B5EF4-FFF2-40B4-BE49-F238E27FC236}">
-                <a16:creationId xmlns:a16="http://schemas.microsoft.com/office/drawing/2014/main" xmlns="" id="{9C9BB3FA-B234-195B-6E78-1F5F1A0B5DD5}"/>
+                <a16:creationId xmlns="" xmlns:a16="http://schemas.microsoft.com/office/drawing/2014/main" id="{9C9BB3FA-B234-195B-6E78-1F5F1A0B5DD5}"/>
               </a:ext>
             </a:extLst>
           </p:cNvPr>
@@ -15239,7 +15283,7 @@
           <p:cNvPr id="3076" name="Picture 4" descr="Supervised machine learning">
             <a:extLst>
               <a:ext uri="{FF2B5EF4-FFF2-40B4-BE49-F238E27FC236}">
-                <a16:creationId xmlns:a16="http://schemas.microsoft.com/office/drawing/2014/main" xmlns="" id="{85D641D0-2AF2-0E0D-20E1-BE0FB83D483A}"/>
+                <a16:creationId xmlns="" xmlns:a16="http://schemas.microsoft.com/office/drawing/2014/main" id="{85D641D0-2AF2-0E0D-20E1-BE0FB83D483A}"/>
               </a:ext>
             </a:extLst>
           </p:cNvPr>
@@ -15330,7 +15374,7 @@
           <p:cNvPr id="2" name="Título 1">
             <a:extLst>
               <a:ext uri="{FF2B5EF4-FFF2-40B4-BE49-F238E27FC236}">
-                <a16:creationId xmlns:a16="http://schemas.microsoft.com/office/drawing/2014/main" xmlns="" id="{5F09B89C-3183-4D52-981A-62798DDFF2B8}"/>
+                <a16:creationId xmlns="" xmlns:a16="http://schemas.microsoft.com/office/drawing/2014/main" id="{5F09B89C-3183-4D52-981A-62798DDFF2B8}"/>
               </a:ext>
             </a:extLst>
           </p:cNvPr>
@@ -15365,7 +15409,7 @@
           <p:cNvPr id="3" name="AutoShape 2" descr="An example of graph signal reconstruction over wireless sensor network. |  Download Scientific Diagram">
             <a:extLst>
               <a:ext uri="{FF2B5EF4-FFF2-40B4-BE49-F238E27FC236}">
-                <a16:creationId xmlns:a16="http://schemas.microsoft.com/office/drawing/2014/main" xmlns="" id="{0166B4DD-D72A-4A54-94A7-2C38133837FD}"/>
+                <a16:creationId xmlns="" xmlns:a16="http://schemas.microsoft.com/office/drawing/2014/main" id="{0166B4DD-D72A-4A54-94A7-2C38133837FD}"/>
               </a:ext>
             </a:extLst>
           </p:cNvPr>
@@ -15416,7 +15460,7 @@
           <p:cNvPr id="7" name="AutoShape 4" descr="An example of graph signal reconstruction over wireless sensor network. |  Download Scientific Diagram">
             <a:extLst>
               <a:ext uri="{FF2B5EF4-FFF2-40B4-BE49-F238E27FC236}">
-                <a16:creationId xmlns:a16="http://schemas.microsoft.com/office/drawing/2014/main" xmlns="" id="{14C2B67D-81A1-457E-A410-FE4350A3CCA4}"/>
+                <a16:creationId xmlns="" xmlns:a16="http://schemas.microsoft.com/office/drawing/2014/main" id="{14C2B67D-81A1-457E-A410-FE4350A3CCA4}"/>
               </a:ext>
             </a:extLst>
           </p:cNvPr>
@@ -15467,7 +15511,7 @@
           <p:cNvPr id="4" name="Espaço Reservado para Conteúdo 3">
             <a:extLst>
               <a:ext uri="{FF2B5EF4-FFF2-40B4-BE49-F238E27FC236}">
-                <a16:creationId xmlns:a16="http://schemas.microsoft.com/office/drawing/2014/main" xmlns="" id="{5F1B432F-F570-AEC0-CFFF-C1D9196D7234}"/>
+                <a16:creationId xmlns="" xmlns:a16="http://schemas.microsoft.com/office/drawing/2014/main" id="{5F1B432F-F570-AEC0-CFFF-C1D9196D7234}"/>
               </a:ext>
             </a:extLst>
           </p:cNvPr>
@@ -15520,7 +15564,7 @@
           <p:cNvPr id="4098" name="Picture 2" descr="What is K-means Clustering and it's use cases ? | by Avijit das | Medium">
             <a:extLst>
               <a:ext uri="{FF2B5EF4-FFF2-40B4-BE49-F238E27FC236}">
-                <a16:creationId xmlns:a16="http://schemas.microsoft.com/office/drawing/2014/main" xmlns="" id="{056C7919-93FD-E63C-B36E-CC710CDD6044}"/>
+                <a16:creationId xmlns="" xmlns:a16="http://schemas.microsoft.com/office/drawing/2014/main" id="{056C7919-93FD-E63C-B36E-CC710CDD6044}"/>
               </a:ext>
             </a:extLst>
           </p:cNvPr>
@@ -15611,7 +15655,7 @@
           <p:cNvPr id="2" name="Título 1">
             <a:extLst>
               <a:ext uri="{FF2B5EF4-FFF2-40B4-BE49-F238E27FC236}">
-                <a16:creationId xmlns:a16="http://schemas.microsoft.com/office/drawing/2014/main" xmlns="" id="{5F09B89C-3183-4D52-981A-62798DDFF2B8}"/>
+                <a16:creationId xmlns="" xmlns:a16="http://schemas.microsoft.com/office/drawing/2014/main" id="{5F09B89C-3183-4D52-981A-62798DDFF2B8}"/>
               </a:ext>
             </a:extLst>
           </p:cNvPr>
@@ -15651,7 +15695,7 @@
           <p:cNvPr id="3" name="AutoShape 2" descr="An example of graph signal reconstruction over wireless sensor network. |  Download Scientific Diagram">
             <a:extLst>
               <a:ext uri="{FF2B5EF4-FFF2-40B4-BE49-F238E27FC236}">
-                <a16:creationId xmlns:a16="http://schemas.microsoft.com/office/drawing/2014/main" xmlns="" id="{0166B4DD-D72A-4A54-94A7-2C38133837FD}"/>
+                <a16:creationId xmlns="" xmlns:a16="http://schemas.microsoft.com/office/drawing/2014/main" id="{0166B4DD-D72A-4A54-94A7-2C38133837FD}"/>
               </a:ext>
             </a:extLst>
           </p:cNvPr>
@@ -15702,7 +15746,7 @@
           <p:cNvPr id="7" name="AutoShape 4" descr="An example of graph signal reconstruction over wireless sensor network. |  Download Scientific Diagram">
             <a:extLst>
               <a:ext uri="{FF2B5EF4-FFF2-40B4-BE49-F238E27FC236}">
-                <a16:creationId xmlns:a16="http://schemas.microsoft.com/office/drawing/2014/main" xmlns="" id="{14C2B67D-81A1-457E-A410-FE4350A3CCA4}"/>
+                <a16:creationId xmlns="" xmlns:a16="http://schemas.microsoft.com/office/drawing/2014/main" id="{14C2B67D-81A1-457E-A410-FE4350A3CCA4}"/>
               </a:ext>
             </a:extLst>
           </p:cNvPr>
@@ -15753,7 +15797,7 @@
           <p:cNvPr id="4" name="Espaço Reservado para Conteúdo 3">
             <a:extLst>
               <a:ext uri="{FF2B5EF4-FFF2-40B4-BE49-F238E27FC236}">
-                <a16:creationId xmlns:a16="http://schemas.microsoft.com/office/drawing/2014/main" xmlns="" id="{5F1B432F-F570-AEC0-CFFF-C1D9196D7234}"/>
+                <a16:creationId xmlns="" xmlns:a16="http://schemas.microsoft.com/office/drawing/2014/main" id="{5F1B432F-F570-AEC0-CFFF-C1D9196D7234}"/>
               </a:ext>
             </a:extLst>
           </p:cNvPr>
@@ -15837,7 +15881,7 @@
           <p:cNvPr id="4098" name="Picture 2" descr="K-Means Clustering Algorithm - Javatpoint">
             <a:extLst>
               <a:ext uri="{FF2B5EF4-FFF2-40B4-BE49-F238E27FC236}">
-                <a16:creationId xmlns:a16="http://schemas.microsoft.com/office/drawing/2014/main" xmlns="" id="{45592E60-7087-AC09-6FA1-B6EBEB4488EC}"/>
+                <a16:creationId xmlns="" xmlns:a16="http://schemas.microsoft.com/office/drawing/2014/main" id="{45592E60-7087-AC09-6FA1-B6EBEB4488EC}"/>
               </a:ext>
             </a:extLst>
           </p:cNvPr>
@@ -15928,7 +15972,7 @@
           <p:cNvPr id="2" name="Título 1">
             <a:extLst>
               <a:ext uri="{FF2B5EF4-FFF2-40B4-BE49-F238E27FC236}">
-                <a16:creationId xmlns:a16="http://schemas.microsoft.com/office/drawing/2014/main" xmlns="" id="{5F09B89C-3183-4D52-981A-62798DDFF2B8}"/>
+                <a16:creationId xmlns="" xmlns:a16="http://schemas.microsoft.com/office/drawing/2014/main" id="{5F09B89C-3183-4D52-981A-62798DDFF2B8}"/>
               </a:ext>
             </a:extLst>
           </p:cNvPr>
@@ -15968,7 +16012,7 @@
           <p:cNvPr id="3" name="AutoShape 2" descr="An example of graph signal reconstruction over wireless sensor network. |  Download Scientific Diagram">
             <a:extLst>
               <a:ext uri="{FF2B5EF4-FFF2-40B4-BE49-F238E27FC236}">
-                <a16:creationId xmlns:a16="http://schemas.microsoft.com/office/drawing/2014/main" xmlns="" id="{0166B4DD-D72A-4A54-94A7-2C38133837FD}"/>
+                <a16:creationId xmlns="" xmlns:a16="http://schemas.microsoft.com/office/drawing/2014/main" id="{0166B4DD-D72A-4A54-94A7-2C38133837FD}"/>
               </a:ext>
             </a:extLst>
           </p:cNvPr>
@@ -16019,7 +16063,7 @@
           <p:cNvPr id="7" name="AutoShape 4" descr="An example of graph signal reconstruction over wireless sensor network. |  Download Scientific Diagram">
             <a:extLst>
               <a:ext uri="{FF2B5EF4-FFF2-40B4-BE49-F238E27FC236}">
-                <a16:creationId xmlns:a16="http://schemas.microsoft.com/office/drawing/2014/main" xmlns="" id="{14C2B67D-81A1-457E-A410-FE4350A3CCA4}"/>
+                <a16:creationId xmlns="" xmlns:a16="http://schemas.microsoft.com/office/drawing/2014/main" id="{14C2B67D-81A1-457E-A410-FE4350A3CCA4}"/>
               </a:ext>
             </a:extLst>
           </p:cNvPr>
@@ -16070,7 +16114,7 @@
           <p:cNvPr id="4" name="Espaço Reservado para Conteúdo 3">
             <a:extLst>
               <a:ext uri="{FF2B5EF4-FFF2-40B4-BE49-F238E27FC236}">
-                <a16:creationId xmlns:a16="http://schemas.microsoft.com/office/drawing/2014/main" xmlns="" id="{5F1B432F-F570-AEC0-CFFF-C1D9196D7234}"/>
+                <a16:creationId xmlns="" xmlns:a16="http://schemas.microsoft.com/office/drawing/2014/main" id="{5F1B432F-F570-AEC0-CFFF-C1D9196D7234}"/>
               </a:ext>
             </a:extLst>
           </p:cNvPr>
@@ -16123,7 +16167,7 @@
               <p:cNvPr id="5" name="TextBox 4">
                 <a:extLst>
                   <a:ext uri="{FF2B5EF4-FFF2-40B4-BE49-F238E27FC236}">
-                    <a16:creationId xmlns:a16="http://schemas.microsoft.com/office/drawing/2014/main" xmlns="" id="{A60E2CD0-3AFD-013C-16CC-B158E81DC1CA}"/>
+                    <a16:creationId xmlns="" xmlns:a16="http://schemas.microsoft.com/office/drawing/2014/main" id="{A60E2CD0-3AFD-013C-16CC-B158E81DC1CA}"/>
                   </a:ext>
                 </a:extLst>
               </p:cNvPr>
@@ -16375,7 +16419,7 @@
         <p:cNvPr id="1" name="">
           <a:extLst>
             <a:ext uri="{FF2B5EF4-FFF2-40B4-BE49-F238E27FC236}">
-              <a16:creationId xmlns:a16="http://schemas.microsoft.com/office/drawing/2014/main" xmlns="" id="{8A1FE513-AB4A-132F-B33C-C1A69C4E90BB}"/>
+              <a16:creationId xmlns="" xmlns:a16="http://schemas.microsoft.com/office/drawing/2014/main" id="{8A1FE513-AB4A-132F-B33C-C1A69C4E90BB}"/>
             </a:ext>
           </a:extLst>
         </p:cNvPr>
@@ -16395,7 +16439,7 @@
           <p:cNvPr id="2" name="Título 1">
             <a:extLst>
               <a:ext uri="{FF2B5EF4-FFF2-40B4-BE49-F238E27FC236}">
-                <a16:creationId xmlns:a16="http://schemas.microsoft.com/office/drawing/2014/main" xmlns="" id="{E5BC5611-534A-CB77-C071-F477937D3B59}"/>
+                <a16:creationId xmlns="" xmlns:a16="http://schemas.microsoft.com/office/drawing/2014/main" id="{E5BC5611-534A-CB77-C071-F477937D3B59}"/>
               </a:ext>
             </a:extLst>
           </p:cNvPr>
@@ -16435,7 +16479,7 @@
           <p:cNvPr id="3" name="AutoShape 2" descr="An example of graph signal reconstruction over wireless sensor network. |  Download Scientific Diagram">
             <a:extLst>
               <a:ext uri="{FF2B5EF4-FFF2-40B4-BE49-F238E27FC236}">
-                <a16:creationId xmlns:a16="http://schemas.microsoft.com/office/drawing/2014/main" xmlns="" id="{7E7F13EA-3BD1-43C2-79EA-B881793AD8AD}"/>
+                <a16:creationId xmlns="" xmlns:a16="http://schemas.microsoft.com/office/drawing/2014/main" id="{7E7F13EA-3BD1-43C2-79EA-B881793AD8AD}"/>
               </a:ext>
             </a:extLst>
           </p:cNvPr>
@@ -16486,7 +16530,7 @@
           <p:cNvPr id="7" name="AutoShape 4" descr="An example of graph signal reconstruction over wireless sensor network. |  Download Scientific Diagram">
             <a:extLst>
               <a:ext uri="{FF2B5EF4-FFF2-40B4-BE49-F238E27FC236}">
-                <a16:creationId xmlns:a16="http://schemas.microsoft.com/office/drawing/2014/main" xmlns="" id="{A0891BC2-FEAE-19E7-B671-ECE0FACC07C4}"/>
+                <a16:creationId xmlns="" xmlns:a16="http://schemas.microsoft.com/office/drawing/2014/main" id="{A0891BC2-FEAE-19E7-B671-ECE0FACC07C4}"/>
               </a:ext>
             </a:extLst>
           </p:cNvPr>
@@ -16537,7 +16581,7 @@
           <p:cNvPr id="4" name="Espaço Reservado para Conteúdo 3">
             <a:extLst>
               <a:ext uri="{FF2B5EF4-FFF2-40B4-BE49-F238E27FC236}">
-                <a16:creationId xmlns:a16="http://schemas.microsoft.com/office/drawing/2014/main" xmlns="" id="{747C2E78-E437-28C4-0BAF-D2D2AC1C96CB}"/>
+                <a16:creationId xmlns="" xmlns:a16="http://schemas.microsoft.com/office/drawing/2014/main" id="{747C2E78-E437-28C4-0BAF-D2D2AC1C96CB}"/>
               </a:ext>
             </a:extLst>
           </p:cNvPr>
@@ -16580,7 +16624,7 @@
           <p:cNvPr id="6" name="Picture 5">
             <a:extLst>
               <a:ext uri="{FF2B5EF4-FFF2-40B4-BE49-F238E27FC236}">
-                <a16:creationId xmlns:a16="http://schemas.microsoft.com/office/drawing/2014/main" xmlns="" id="{F98B536F-38AB-58C5-0FFB-41BDB557E9EF}"/>
+                <a16:creationId xmlns="" xmlns:a16="http://schemas.microsoft.com/office/drawing/2014/main" id="{F98B536F-38AB-58C5-0FFB-41BDB557E9EF}"/>
               </a:ext>
             </a:extLst>
           </p:cNvPr>
@@ -16610,7 +16654,7 @@
           <p:cNvPr id="8" name="TextBox 7">
             <a:extLst>
               <a:ext uri="{FF2B5EF4-FFF2-40B4-BE49-F238E27FC236}">
-                <a16:creationId xmlns:a16="http://schemas.microsoft.com/office/drawing/2014/main" xmlns="" id="{04EA9FAE-D371-68E0-2CB7-9C8893491B3B}"/>
+                <a16:creationId xmlns="" xmlns:a16="http://schemas.microsoft.com/office/drawing/2014/main" id="{04EA9FAE-D371-68E0-2CB7-9C8893491B3B}"/>
               </a:ext>
             </a:extLst>
           </p:cNvPr>
@@ -16676,7 +16720,7 @@
         <p:cNvPr id="1" name="">
           <a:extLst>
             <a:ext uri="{FF2B5EF4-FFF2-40B4-BE49-F238E27FC236}">
-              <a16:creationId xmlns:a16="http://schemas.microsoft.com/office/drawing/2014/main" xmlns="" id="{B86C6B89-4D49-2EC0-F063-638BD6935412}"/>
+              <a16:creationId xmlns="" xmlns:a16="http://schemas.microsoft.com/office/drawing/2014/main" id="{B86C6B89-4D49-2EC0-F063-638BD6935412}"/>
             </a:ext>
           </a:extLst>
         </p:cNvPr>
@@ -16696,7 +16740,7 @@
           <p:cNvPr id="2" name="Título 1">
             <a:extLst>
               <a:ext uri="{FF2B5EF4-FFF2-40B4-BE49-F238E27FC236}">
-                <a16:creationId xmlns:a16="http://schemas.microsoft.com/office/drawing/2014/main" xmlns="" id="{B81115AF-9415-9558-8D7C-7CA5F9E9ED43}"/>
+                <a16:creationId xmlns="" xmlns:a16="http://schemas.microsoft.com/office/drawing/2014/main" id="{B81115AF-9415-9558-8D7C-7CA5F9E9ED43}"/>
               </a:ext>
             </a:extLst>
           </p:cNvPr>
@@ -16736,7 +16780,7 @@
           <p:cNvPr id="3" name="AutoShape 2" descr="An example of graph signal reconstruction over wireless sensor network. |  Download Scientific Diagram">
             <a:extLst>
               <a:ext uri="{FF2B5EF4-FFF2-40B4-BE49-F238E27FC236}">
-                <a16:creationId xmlns:a16="http://schemas.microsoft.com/office/drawing/2014/main" xmlns="" id="{55584ECE-67DE-1FFA-9FE4-D3C3D4136411}"/>
+                <a16:creationId xmlns="" xmlns:a16="http://schemas.microsoft.com/office/drawing/2014/main" id="{55584ECE-67DE-1FFA-9FE4-D3C3D4136411}"/>
               </a:ext>
             </a:extLst>
           </p:cNvPr>
@@ -16787,7 +16831,7 @@
           <p:cNvPr id="7" name="AutoShape 4" descr="An example of graph signal reconstruction over wireless sensor network. |  Download Scientific Diagram">
             <a:extLst>
               <a:ext uri="{FF2B5EF4-FFF2-40B4-BE49-F238E27FC236}">
-                <a16:creationId xmlns:a16="http://schemas.microsoft.com/office/drawing/2014/main" xmlns="" id="{A9D0FB6C-59DD-7620-EBAF-21BB030E5B51}"/>
+                <a16:creationId xmlns="" xmlns:a16="http://schemas.microsoft.com/office/drawing/2014/main" id="{A9D0FB6C-59DD-7620-EBAF-21BB030E5B51}"/>
               </a:ext>
             </a:extLst>
           </p:cNvPr>
@@ -16838,7 +16882,7 @@
           <p:cNvPr id="4" name="Espaço Reservado para Conteúdo 3">
             <a:extLst>
               <a:ext uri="{FF2B5EF4-FFF2-40B4-BE49-F238E27FC236}">
-                <a16:creationId xmlns:a16="http://schemas.microsoft.com/office/drawing/2014/main" xmlns="" id="{EC6F58C6-8849-231E-3B12-60D9682EF42B}"/>
+                <a16:creationId xmlns="" xmlns:a16="http://schemas.microsoft.com/office/drawing/2014/main" id="{EC6F58C6-8849-231E-3B12-60D9682EF42B}"/>
               </a:ext>
             </a:extLst>
           </p:cNvPr>
@@ -16881,7 +16925,7 @@
           <p:cNvPr id="6" name="Picture 5">
             <a:extLst>
               <a:ext uri="{FF2B5EF4-FFF2-40B4-BE49-F238E27FC236}">
-                <a16:creationId xmlns:a16="http://schemas.microsoft.com/office/drawing/2014/main" xmlns="" id="{69F3FE92-0D0B-AECE-B64E-FC9D2F3EADBC}"/>
+                <a16:creationId xmlns="" xmlns:a16="http://schemas.microsoft.com/office/drawing/2014/main" id="{69F3FE92-0D0B-AECE-B64E-FC9D2F3EADBC}"/>
               </a:ext>
             </a:extLst>
           </p:cNvPr>
@@ -16911,7 +16955,7 @@
           <p:cNvPr id="8" name="TextBox 7">
             <a:extLst>
               <a:ext uri="{FF2B5EF4-FFF2-40B4-BE49-F238E27FC236}">
-                <a16:creationId xmlns:a16="http://schemas.microsoft.com/office/drawing/2014/main" xmlns="" id="{5D947541-89EC-69EF-1918-6EFD56E0B3C2}"/>
+                <a16:creationId xmlns="" xmlns:a16="http://schemas.microsoft.com/office/drawing/2014/main" id="{5D947541-89EC-69EF-1918-6EFD56E0B3C2}"/>
               </a:ext>
             </a:extLst>
           </p:cNvPr>
@@ -17016,7 +17060,7 @@
         <p:cNvPr id="1" name="">
           <a:extLst>
             <a:ext uri="{FF2B5EF4-FFF2-40B4-BE49-F238E27FC236}">
-              <a16:creationId xmlns:a16="http://schemas.microsoft.com/office/drawing/2014/main" xmlns="" id="{42119100-E668-77C4-3183-771B95B265DA}"/>
+              <a16:creationId xmlns="" xmlns:a16="http://schemas.microsoft.com/office/drawing/2014/main" id="{42119100-E668-77C4-3183-771B95B265DA}"/>
             </a:ext>
           </a:extLst>
         </p:cNvPr>
@@ -17036,7 +17080,7 @@
           <p:cNvPr id="2" name="Título 1">
             <a:extLst>
               <a:ext uri="{FF2B5EF4-FFF2-40B4-BE49-F238E27FC236}">
-                <a16:creationId xmlns:a16="http://schemas.microsoft.com/office/drawing/2014/main" xmlns="" id="{4EBCA554-D396-DCCB-4744-F3695D6FD50E}"/>
+                <a16:creationId xmlns="" xmlns:a16="http://schemas.microsoft.com/office/drawing/2014/main" id="{4EBCA554-D396-DCCB-4744-F3695D6FD50E}"/>
               </a:ext>
             </a:extLst>
           </p:cNvPr>
@@ -17076,7 +17120,7 @@
           <p:cNvPr id="3" name="AutoShape 2" descr="An example of graph signal reconstruction over wireless sensor network. |  Download Scientific Diagram">
             <a:extLst>
               <a:ext uri="{FF2B5EF4-FFF2-40B4-BE49-F238E27FC236}">
-                <a16:creationId xmlns:a16="http://schemas.microsoft.com/office/drawing/2014/main" xmlns="" id="{3380BF6D-7A0A-C11E-50C6-1F567BA3A3D4}"/>
+                <a16:creationId xmlns="" xmlns:a16="http://schemas.microsoft.com/office/drawing/2014/main" id="{3380BF6D-7A0A-C11E-50C6-1F567BA3A3D4}"/>
               </a:ext>
             </a:extLst>
           </p:cNvPr>
@@ -17127,7 +17171,7 @@
           <p:cNvPr id="7" name="AutoShape 4" descr="An example of graph signal reconstruction over wireless sensor network. |  Download Scientific Diagram">
             <a:extLst>
               <a:ext uri="{FF2B5EF4-FFF2-40B4-BE49-F238E27FC236}">
-                <a16:creationId xmlns:a16="http://schemas.microsoft.com/office/drawing/2014/main" xmlns="" id="{52BFF569-F440-2D60-8296-D8243B2988E7}"/>
+                <a16:creationId xmlns="" xmlns:a16="http://schemas.microsoft.com/office/drawing/2014/main" id="{52BFF569-F440-2D60-8296-D8243B2988E7}"/>
               </a:ext>
             </a:extLst>
           </p:cNvPr>
@@ -17178,7 +17222,7 @@
           <p:cNvPr id="4" name="Espaço Reservado para Conteúdo 3">
             <a:extLst>
               <a:ext uri="{FF2B5EF4-FFF2-40B4-BE49-F238E27FC236}">
-                <a16:creationId xmlns:a16="http://schemas.microsoft.com/office/drawing/2014/main" xmlns="" id="{E0298857-CD80-B8D1-6E62-55E6C3A64A44}"/>
+                <a16:creationId xmlns="" xmlns:a16="http://schemas.microsoft.com/office/drawing/2014/main" id="{E0298857-CD80-B8D1-6E62-55E6C3A64A44}"/>
               </a:ext>
             </a:extLst>
           </p:cNvPr>
@@ -17221,7 +17265,7 @@
           <p:cNvPr id="6" name="Picture 5">
             <a:extLst>
               <a:ext uri="{FF2B5EF4-FFF2-40B4-BE49-F238E27FC236}">
-                <a16:creationId xmlns:a16="http://schemas.microsoft.com/office/drawing/2014/main" xmlns="" id="{1C0684BB-EFF7-DBA8-3519-25CE2A1A9632}"/>
+                <a16:creationId xmlns="" xmlns:a16="http://schemas.microsoft.com/office/drawing/2014/main" id="{1C0684BB-EFF7-DBA8-3519-25CE2A1A9632}"/>
               </a:ext>
             </a:extLst>
           </p:cNvPr>
@@ -17251,7 +17295,7 @@
           <p:cNvPr id="9" name="TextBox 8">
             <a:extLst>
               <a:ext uri="{FF2B5EF4-FFF2-40B4-BE49-F238E27FC236}">
-                <a16:creationId xmlns:a16="http://schemas.microsoft.com/office/drawing/2014/main" xmlns="" id="{38267D7C-379A-003E-4048-8D4DDD969EB6}"/>
+                <a16:creationId xmlns="" xmlns:a16="http://schemas.microsoft.com/office/drawing/2014/main" id="{38267D7C-379A-003E-4048-8D4DDD969EB6}"/>
               </a:ext>
             </a:extLst>
           </p:cNvPr>

--- a/slides/TP557_16_detecção_de_anomalias.pptx
+++ b/slides/TP557_16_detecção_de_anomalias.pptx
@@ -6,10 +6,10 @@
     <p:sldMasterId id="2147483660" r:id="rId2"/>
   </p:sldMasterIdLst>
   <p:notesMasterIdLst>
-    <p:notesMasterId r:id="rId28"/>
+    <p:notesMasterId r:id="rId25"/>
   </p:notesMasterIdLst>
   <p:handoutMasterIdLst>
-    <p:handoutMasterId r:id="rId29"/>
+    <p:handoutMasterId r:id="rId26"/>
   </p:handoutMasterIdLst>
   <p:sldIdLst>
     <p:sldId id="256" r:id="rId3"/>
@@ -29,14 +29,11 @@
     <p:sldId id="584" r:id="rId17"/>
     <p:sldId id="630" r:id="rId18"/>
     <p:sldId id="591" r:id="rId19"/>
-    <p:sldId id="621" r:id="rId20"/>
-    <p:sldId id="593" r:id="rId21"/>
-    <p:sldId id="603" r:id="rId22"/>
-    <p:sldId id="613" r:id="rId23"/>
-    <p:sldId id="611" r:id="rId24"/>
-    <p:sldId id="612" r:id="rId25"/>
-    <p:sldId id="615" r:id="rId26"/>
-    <p:sldId id="616" r:id="rId27"/>
+    <p:sldId id="613" r:id="rId20"/>
+    <p:sldId id="611" r:id="rId21"/>
+    <p:sldId id="612" r:id="rId22"/>
+    <p:sldId id="615" r:id="rId23"/>
+    <p:sldId id="616" r:id="rId24"/>
   </p:sldIdLst>
   <p:sldSz cx="12192000" cy="6858000"/>
   <p:notesSz cx="7315200" cy="9601200"/>
@@ -225,7 +222,7 @@
           <a:p>
             <a:fld id="{144F1436-6906-4D93-B7A2-786C327BFA14}" type="datetimeFigureOut">
               <a:rPr lang="nl-BE" smtClean="0"/>
-              <a:t>13/05/2025</a:t>
+              <a:t>14/05/2025</a:t>
             </a:fld>
             <a:endParaRPr lang="nl-BE"/>
           </a:p>
@@ -291,7 +288,7 @@
           <a:p>
             <a:fld id="{F7E56D9B-79AD-444A-AFED-DEC23408F8B4}" type="slidenum">
               <a:rPr lang="nl-BE" smtClean="0"/>
-              <a:t>‹nº›</a:t>
+              <a:t>‹#›</a:t>
             </a:fld>
             <a:endParaRPr lang="nl-BE"/>
           </a:p>
@@ -390,7 +387,7 @@
           <a:p>
             <a:fld id="{AA8CD09E-2914-4F47-B6C1-51B2C31814C9}" type="datetimeFigureOut">
               <a:rPr lang="pt-BR" smtClean="0"/>
-              <a:t>13/05/2025</a:t>
+              <a:t>14/05/2025</a:t>
             </a:fld>
             <a:endParaRPr lang="pt-BR"/>
           </a:p>
@@ -548,7 +545,7 @@
           <a:p>
             <a:fld id="{6FC8D850-966F-45A6-8DE7-15B891E7D40D}" type="slidenum">
               <a:rPr lang="pt-BR" smtClean="0"/>
-              <a:t>‹nº›</a:t>
+              <a:t>‹#›</a:t>
             </a:fld>
             <a:endParaRPr lang="pt-BR"/>
           </a:p>
@@ -749,7 +746,7 @@
         <p:cNvPr id="1" name="">
           <a:extLst>
             <a:ext uri="{FF2B5EF4-FFF2-40B4-BE49-F238E27FC236}">
-              <a16:creationId xmlns="" xmlns:a16="http://schemas.microsoft.com/office/drawing/2014/main" id="{3DC8778D-274C-4550-BFA6-2BF2EE1372DF}"/>
+              <a16:creationId xmlns:a16="http://schemas.microsoft.com/office/drawing/2014/main" id="{3DC8778D-274C-4550-BFA6-2BF2EE1372DF}"/>
             </a:ext>
           </a:extLst>
         </p:cNvPr>
@@ -769,7 +766,7 @@
           <p:cNvPr id="2" name="Espaço Reservado para Imagem de Slide 1">
             <a:extLst>
               <a:ext uri="{FF2B5EF4-FFF2-40B4-BE49-F238E27FC236}">
-                <a16:creationId xmlns="" xmlns:a16="http://schemas.microsoft.com/office/drawing/2014/main" id="{C35AD5E8-765A-E917-B919-F1F6AE347F53}"/>
+                <a16:creationId xmlns:a16="http://schemas.microsoft.com/office/drawing/2014/main" id="{C35AD5E8-765A-E917-B919-F1F6AE347F53}"/>
               </a:ext>
             </a:extLst>
           </p:cNvPr>
@@ -787,7 +784,7 @@
           <p:cNvPr id="3" name="Espaço Reservado para Anotações 2">
             <a:extLst>
               <a:ext uri="{FF2B5EF4-FFF2-40B4-BE49-F238E27FC236}">
-                <a16:creationId xmlns="" xmlns:a16="http://schemas.microsoft.com/office/drawing/2014/main" id="{9D90C0BF-FC56-01AC-3AD0-5B5E6D0FB45D}"/>
+                <a16:creationId xmlns:a16="http://schemas.microsoft.com/office/drawing/2014/main" id="{9D90C0BF-FC56-01AC-3AD0-5B5E6D0FB45D}"/>
               </a:ext>
             </a:extLst>
           </p:cNvPr>
@@ -812,7 +809,7 @@
           <p:cNvPr id="4" name="Espaço Reservado para Número de Slide 3">
             <a:extLst>
               <a:ext uri="{FF2B5EF4-FFF2-40B4-BE49-F238E27FC236}">
-                <a16:creationId xmlns="" xmlns:a16="http://schemas.microsoft.com/office/drawing/2014/main" id="{41EF1718-29E8-7DF3-052E-E040AF947292}"/>
+                <a16:creationId xmlns:a16="http://schemas.microsoft.com/office/drawing/2014/main" id="{41EF1718-29E8-7DF3-052E-E040AF947292}"/>
               </a:ext>
             </a:extLst>
           </p:cNvPr>
@@ -857,7 +854,7 @@
         <p:cNvPr id="1" name="">
           <a:extLst>
             <a:ext uri="{FF2B5EF4-FFF2-40B4-BE49-F238E27FC236}">
-              <a16:creationId xmlns="" xmlns:a16="http://schemas.microsoft.com/office/drawing/2014/main" id="{D5CE570B-6F22-A16C-FB7C-644660A08E50}"/>
+              <a16:creationId xmlns:a16="http://schemas.microsoft.com/office/drawing/2014/main" id="{D5CE570B-6F22-A16C-FB7C-644660A08E50}"/>
             </a:ext>
           </a:extLst>
         </p:cNvPr>
@@ -877,7 +874,7 @@
           <p:cNvPr id="2" name="Espaço Reservado para Imagem de Slide 1">
             <a:extLst>
               <a:ext uri="{FF2B5EF4-FFF2-40B4-BE49-F238E27FC236}">
-                <a16:creationId xmlns="" xmlns:a16="http://schemas.microsoft.com/office/drawing/2014/main" id="{54988FE9-CE61-8F19-30AA-F0093DA959FE}"/>
+                <a16:creationId xmlns:a16="http://schemas.microsoft.com/office/drawing/2014/main" id="{54988FE9-CE61-8F19-30AA-F0093DA959FE}"/>
               </a:ext>
             </a:extLst>
           </p:cNvPr>
@@ -895,7 +892,7 @@
           <p:cNvPr id="3" name="Espaço Reservado para Anotações 2">
             <a:extLst>
               <a:ext uri="{FF2B5EF4-FFF2-40B4-BE49-F238E27FC236}">
-                <a16:creationId xmlns="" xmlns:a16="http://schemas.microsoft.com/office/drawing/2014/main" id="{FF56B3B1-0912-3AF5-3099-3CC1931A01BF}"/>
+                <a16:creationId xmlns:a16="http://schemas.microsoft.com/office/drawing/2014/main" id="{FF56B3B1-0912-3AF5-3099-3CC1931A01BF}"/>
               </a:ext>
             </a:extLst>
           </p:cNvPr>
@@ -920,7 +917,7 @@
           <p:cNvPr id="4" name="Espaço Reservado para Número de Slide 3">
             <a:extLst>
               <a:ext uri="{FF2B5EF4-FFF2-40B4-BE49-F238E27FC236}">
-                <a16:creationId xmlns="" xmlns:a16="http://schemas.microsoft.com/office/drawing/2014/main" id="{EA8F2BE0-E2B3-AC2B-9D52-752913B7CF4B}"/>
+                <a16:creationId xmlns:a16="http://schemas.microsoft.com/office/drawing/2014/main" id="{EA8F2BE0-E2B3-AC2B-9D52-752913B7CF4B}"/>
               </a:ext>
             </a:extLst>
           </p:cNvPr>
@@ -965,7 +962,7 @@
         <p:cNvPr id="1" name="">
           <a:extLst>
             <a:ext uri="{FF2B5EF4-FFF2-40B4-BE49-F238E27FC236}">
-              <a16:creationId xmlns="" xmlns:a16="http://schemas.microsoft.com/office/drawing/2014/main" id="{38F770F4-9A55-E975-D43C-FCEA3ED2C1A9}"/>
+              <a16:creationId xmlns:a16="http://schemas.microsoft.com/office/drawing/2014/main" id="{38F770F4-9A55-E975-D43C-FCEA3ED2C1A9}"/>
             </a:ext>
           </a:extLst>
         </p:cNvPr>
@@ -985,7 +982,7 @@
           <p:cNvPr id="2" name="Espaço Reservado para Imagem de Slide 1">
             <a:extLst>
               <a:ext uri="{FF2B5EF4-FFF2-40B4-BE49-F238E27FC236}">
-                <a16:creationId xmlns="" xmlns:a16="http://schemas.microsoft.com/office/drawing/2014/main" id="{AEDFCAA5-FC8C-DD9C-AFC5-CB278DE7F744}"/>
+                <a16:creationId xmlns:a16="http://schemas.microsoft.com/office/drawing/2014/main" id="{AEDFCAA5-FC8C-DD9C-AFC5-CB278DE7F744}"/>
               </a:ext>
             </a:extLst>
           </p:cNvPr>
@@ -1003,7 +1000,7 @@
           <p:cNvPr id="3" name="Espaço Reservado para Anotações 2">
             <a:extLst>
               <a:ext uri="{FF2B5EF4-FFF2-40B4-BE49-F238E27FC236}">
-                <a16:creationId xmlns="" xmlns:a16="http://schemas.microsoft.com/office/drawing/2014/main" id="{D403E6E9-E099-A9A5-653E-6F0722996927}"/>
+                <a16:creationId xmlns:a16="http://schemas.microsoft.com/office/drawing/2014/main" id="{D403E6E9-E099-A9A5-653E-6F0722996927}"/>
               </a:ext>
             </a:extLst>
           </p:cNvPr>
@@ -1028,7 +1025,7 @@
           <p:cNvPr id="4" name="Espaço Reservado para Número de Slide 3">
             <a:extLst>
               <a:ext uri="{FF2B5EF4-FFF2-40B4-BE49-F238E27FC236}">
-                <a16:creationId xmlns="" xmlns:a16="http://schemas.microsoft.com/office/drawing/2014/main" id="{384EBEF5-7321-520D-7991-F3CC5AF3A56D}"/>
+                <a16:creationId xmlns:a16="http://schemas.microsoft.com/office/drawing/2014/main" id="{384EBEF5-7321-520D-7991-F3CC5AF3A56D}"/>
               </a:ext>
             </a:extLst>
           </p:cNvPr>
@@ -1073,7 +1070,7 @@
         <p:cNvPr id="1" name="">
           <a:extLst>
             <a:ext uri="{FF2B5EF4-FFF2-40B4-BE49-F238E27FC236}">
-              <a16:creationId xmlns="" xmlns:a16="http://schemas.microsoft.com/office/drawing/2014/main" id="{31D8DD9A-FB73-B3DA-6F9F-A22549E2ACF5}"/>
+              <a16:creationId xmlns:a16="http://schemas.microsoft.com/office/drawing/2014/main" id="{31D8DD9A-FB73-B3DA-6F9F-A22549E2ACF5}"/>
             </a:ext>
           </a:extLst>
         </p:cNvPr>
@@ -1093,7 +1090,7 @@
           <p:cNvPr id="2" name="Espaço Reservado para Imagem de Slide 1">
             <a:extLst>
               <a:ext uri="{FF2B5EF4-FFF2-40B4-BE49-F238E27FC236}">
-                <a16:creationId xmlns="" xmlns:a16="http://schemas.microsoft.com/office/drawing/2014/main" id="{E99B0F2D-8473-FC35-AF28-ECE2A1829004}"/>
+                <a16:creationId xmlns:a16="http://schemas.microsoft.com/office/drawing/2014/main" id="{E99B0F2D-8473-FC35-AF28-ECE2A1829004}"/>
               </a:ext>
             </a:extLst>
           </p:cNvPr>
@@ -1111,7 +1108,7 @@
           <p:cNvPr id="3" name="Espaço Reservado para Anotações 2">
             <a:extLst>
               <a:ext uri="{FF2B5EF4-FFF2-40B4-BE49-F238E27FC236}">
-                <a16:creationId xmlns="" xmlns:a16="http://schemas.microsoft.com/office/drawing/2014/main" id="{8C9962D3-EA60-94A8-A6D4-C3161BED15BF}"/>
+                <a16:creationId xmlns:a16="http://schemas.microsoft.com/office/drawing/2014/main" id="{8C9962D3-EA60-94A8-A6D4-C3161BED15BF}"/>
               </a:ext>
             </a:extLst>
           </p:cNvPr>
@@ -1136,7 +1133,7 @@
           <p:cNvPr id="4" name="Espaço Reservado para Número de Slide 3">
             <a:extLst>
               <a:ext uri="{FF2B5EF4-FFF2-40B4-BE49-F238E27FC236}">
-                <a16:creationId xmlns="" xmlns:a16="http://schemas.microsoft.com/office/drawing/2014/main" id="{1A62ECEA-4026-B0E1-9730-4E6CBBB39369}"/>
+                <a16:creationId xmlns:a16="http://schemas.microsoft.com/office/drawing/2014/main" id="{1A62ECEA-4026-B0E1-9730-4E6CBBB39369}"/>
               </a:ext>
             </a:extLst>
           </p:cNvPr>
@@ -1349,7 +1346,7 @@
         <p:cNvPr id="1" name="">
           <a:extLst>
             <a:ext uri="{FF2B5EF4-FFF2-40B4-BE49-F238E27FC236}">
-              <a16:creationId xmlns="" xmlns:a16="http://schemas.microsoft.com/office/drawing/2014/main" id="{6E955CAB-F21A-9D08-F98D-00EB95ED3441}"/>
+              <a16:creationId xmlns:a16="http://schemas.microsoft.com/office/drawing/2014/main" id="{6E955CAB-F21A-9D08-F98D-00EB95ED3441}"/>
             </a:ext>
           </a:extLst>
         </p:cNvPr>
@@ -1369,7 +1366,7 @@
           <p:cNvPr id="2" name="Espaço Reservado para Imagem de Slide 1">
             <a:extLst>
               <a:ext uri="{FF2B5EF4-FFF2-40B4-BE49-F238E27FC236}">
-                <a16:creationId xmlns="" xmlns:a16="http://schemas.microsoft.com/office/drawing/2014/main" id="{0D72ECCF-390F-6700-31C9-EBB590D4368D}"/>
+                <a16:creationId xmlns:a16="http://schemas.microsoft.com/office/drawing/2014/main" id="{0D72ECCF-390F-6700-31C9-EBB590D4368D}"/>
               </a:ext>
             </a:extLst>
           </p:cNvPr>
@@ -1387,7 +1384,7 @@
           <p:cNvPr id="3" name="Espaço Reservado para Anotações 2">
             <a:extLst>
               <a:ext uri="{FF2B5EF4-FFF2-40B4-BE49-F238E27FC236}">
-                <a16:creationId xmlns="" xmlns:a16="http://schemas.microsoft.com/office/drawing/2014/main" id="{577FA9D6-B2FE-523B-86B7-0EFD6452DDF4}"/>
+                <a16:creationId xmlns:a16="http://schemas.microsoft.com/office/drawing/2014/main" id="{577FA9D6-B2FE-523B-86B7-0EFD6452DDF4}"/>
               </a:ext>
             </a:extLst>
           </p:cNvPr>
@@ -1412,7 +1409,7 @@
           <p:cNvPr id="4" name="Espaço Reservado para Número de Slide 3">
             <a:extLst>
               <a:ext uri="{FF2B5EF4-FFF2-40B4-BE49-F238E27FC236}">
-                <a16:creationId xmlns="" xmlns:a16="http://schemas.microsoft.com/office/drawing/2014/main" id="{1DBD4D4D-75F0-64AD-BA32-1AF4C4593BDD}"/>
+                <a16:creationId xmlns:a16="http://schemas.microsoft.com/office/drawing/2014/main" id="{1DBD4D4D-75F0-64AD-BA32-1AF4C4593BDD}"/>
               </a:ext>
             </a:extLst>
           </p:cNvPr>
@@ -1494,14 +1491,13 @@
           <a:lstStyle/>
           <a:p>
             <a:r>
-              <a:rPr lang="pt-BR" dirty="0" smtClean="0"/>
+              <a:rPr lang="pt-BR" dirty="0"/>
               <a:t>https://</a:t>
             </a:r>
             <a:r>
-              <a:rPr lang="pt-BR" u="sng" dirty="0" smtClean="0"/>
+              <a:rPr lang="pt-BR" u="sng" dirty="0"/>
               <a:t>colab.research.google.com/github/zz4fap/tp557-iot-ml/blob/main/examples/k_means_centros_de_distribuição.ipynb</a:t>
             </a:r>
-            <a:endParaRPr lang="pt-BR" u="sng" dirty="0"/>
           </a:p>
         </p:txBody>
       </p:sp>
@@ -1606,7 +1602,7 @@
           <a:p>
             <a:fld id="{6FC8D850-966F-45A6-8DE7-15B891E7D40D}" type="slidenum">
               <a:rPr lang="pt-BR" smtClean="0"/>
-              <a:t>19</a:t>
+              <a:t>18</a:t>
             </a:fld>
             <a:endParaRPr lang="pt-BR"/>
           </a:p>
@@ -1615,7 +1611,7 @@
     </p:spTree>
     <p:extLst>
       <p:ext uri="{BB962C8B-B14F-4D97-AF65-F5344CB8AC3E}">
-        <p14:creationId xmlns:p14="http://schemas.microsoft.com/office/powerpoint/2010/main" val="3940651076"/>
+        <p14:creationId xmlns:p14="http://schemas.microsoft.com/office/powerpoint/2010/main" val="482398735"/>
       </p:ext>
     </p:extLst>
   </p:cSld>
@@ -1688,18 +1684,78 @@
           <a:bodyPr/>
           <a:lstStyle/>
           <a:p>
+            <a:pPr marL="0" marR="0" lvl="0" indent="0" algn="r" defTabSz="914400" rtl="0" eaLnBrk="1" fontAlgn="auto" latinLnBrk="0" hangingPunct="1">
+              <a:lnSpc>
+                <a:spcPct val="100000"/>
+              </a:lnSpc>
+              <a:spcBef>
+                <a:spcPts val="0"/>
+              </a:spcBef>
+              <a:spcAft>
+                <a:spcPts val="0"/>
+              </a:spcAft>
+              <a:buClrTx/>
+              <a:buSzTx/>
+              <a:buFontTx/>
+              <a:buNone/>
+              <a:tabLst/>
+              <a:defRPr/>
+            </a:pPr>
             <a:fld id="{6FC8D850-966F-45A6-8DE7-15B891E7D40D}" type="slidenum">
-              <a:rPr lang="pt-BR" smtClean="0"/>
-              <a:t>20</a:t>
+              <a:rPr kumimoji="0" lang="pt-BR" sz="2200" b="0" i="0" u="none" strike="noStrike" kern="1200" cap="none" spc="0" normalizeH="0" baseline="0" noProof="0" smtClean="0">
+                <a:ln>
+                  <a:noFill/>
+                </a:ln>
+                <a:solidFill>
+                  <a:prstClr val="black"/>
+                </a:solidFill>
+                <a:effectLst/>
+                <a:uLnTx/>
+                <a:uFillTx/>
+                <a:latin typeface="Calibri" panose="020F0502020204030204"/>
+                <a:ea typeface="+mn-ea"/>
+                <a:cs typeface="+mn-cs"/>
+              </a:rPr>
+              <a:pPr marL="0" marR="0" lvl="0" indent="0" algn="r" defTabSz="914400" rtl="0" eaLnBrk="1" fontAlgn="auto" latinLnBrk="0" hangingPunct="1">
+                <a:lnSpc>
+                  <a:spcPct val="100000"/>
+                </a:lnSpc>
+                <a:spcBef>
+                  <a:spcPts val="0"/>
+                </a:spcBef>
+                <a:spcAft>
+                  <a:spcPts val="0"/>
+                </a:spcAft>
+                <a:buClrTx/>
+                <a:buSzTx/>
+                <a:buFontTx/>
+                <a:buNone/>
+                <a:tabLst/>
+                <a:defRPr/>
+              </a:pPr>
+              <a:t>19</a:t>
             </a:fld>
-            <a:endParaRPr lang="pt-BR"/>
+            <a:endParaRPr kumimoji="0" lang="pt-BR" sz="2200" b="0" i="0" u="none" strike="noStrike" kern="1200" cap="none" spc="0" normalizeH="0" baseline="0" noProof="0">
+              <a:ln>
+                <a:noFill/>
+              </a:ln>
+              <a:solidFill>
+                <a:prstClr val="black"/>
+              </a:solidFill>
+              <a:effectLst/>
+              <a:uLnTx/>
+              <a:uFillTx/>
+              <a:latin typeface="Calibri" panose="020F0502020204030204"/>
+              <a:ea typeface="+mn-ea"/>
+              <a:cs typeface="+mn-cs"/>
+            </a:endParaRPr>
           </a:p>
         </p:txBody>
       </p:sp>
     </p:spTree>
     <p:extLst>
       <p:ext uri="{BB962C8B-B14F-4D97-AF65-F5344CB8AC3E}">
-        <p14:creationId xmlns:p14="http://schemas.microsoft.com/office/powerpoint/2010/main" val="707187450"/>
+        <p14:creationId xmlns:p14="http://schemas.microsoft.com/office/powerpoint/2010/main" val="2316046025"/>
       </p:ext>
     </p:extLst>
   </p:cSld>
@@ -1856,18 +1912,78 @@
           <a:bodyPr/>
           <a:lstStyle/>
           <a:p>
+            <a:pPr marL="0" marR="0" lvl="0" indent="0" algn="r" defTabSz="914400" rtl="0" eaLnBrk="1" fontAlgn="auto" latinLnBrk="0" hangingPunct="1">
+              <a:lnSpc>
+                <a:spcPct val="100000"/>
+              </a:lnSpc>
+              <a:spcBef>
+                <a:spcPts val="0"/>
+              </a:spcBef>
+              <a:spcAft>
+                <a:spcPts val="0"/>
+              </a:spcAft>
+              <a:buClrTx/>
+              <a:buSzTx/>
+              <a:buFontTx/>
+              <a:buNone/>
+              <a:tabLst/>
+              <a:defRPr/>
+            </a:pPr>
             <a:fld id="{6FC8D850-966F-45A6-8DE7-15B891E7D40D}" type="slidenum">
-              <a:rPr lang="pt-BR" smtClean="0"/>
-              <a:t>21</a:t>
+              <a:rPr kumimoji="0" lang="pt-BR" sz="2200" b="0" i="0" u="none" strike="noStrike" kern="1200" cap="none" spc="0" normalizeH="0" baseline="0" noProof="0" smtClean="0">
+                <a:ln>
+                  <a:noFill/>
+                </a:ln>
+                <a:solidFill>
+                  <a:prstClr val="black"/>
+                </a:solidFill>
+                <a:effectLst/>
+                <a:uLnTx/>
+                <a:uFillTx/>
+                <a:latin typeface="Calibri" panose="020F0502020204030204"/>
+                <a:ea typeface="+mn-ea"/>
+                <a:cs typeface="+mn-cs"/>
+              </a:rPr>
+              <a:pPr marL="0" marR="0" lvl="0" indent="0" algn="r" defTabSz="914400" rtl="0" eaLnBrk="1" fontAlgn="auto" latinLnBrk="0" hangingPunct="1">
+                <a:lnSpc>
+                  <a:spcPct val="100000"/>
+                </a:lnSpc>
+                <a:spcBef>
+                  <a:spcPts val="0"/>
+                </a:spcBef>
+                <a:spcAft>
+                  <a:spcPts val="0"/>
+                </a:spcAft>
+                <a:buClrTx/>
+                <a:buSzTx/>
+                <a:buFontTx/>
+                <a:buNone/>
+                <a:tabLst/>
+                <a:defRPr/>
+              </a:pPr>
+              <a:t>20</a:t>
             </a:fld>
-            <a:endParaRPr lang="pt-BR"/>
+            <a:endParaRPr kumimoji="0" lang="pt-BR" sz="2200" b="0" i="0" u="none" strike="noStrike" kern="1200" cap="none" spc="0" normalizeH="0" baseline="0" noProof="0">
+              <a:ln>
+                <a:noFill/>
+              </a:ln>
+              <a:solidFill>
+                <a:prstClr val="black"/>
+              </a:solidFill>
+              <a:effectLst/>
+              <a:uLnTx/>
+              <a:uFillTx/>
+              <a:latin typeface="Calibri" panose="020F0502020204030204"/>
+              <a:ea typeface="+mn-ea"/>
+              <a:cs typeface="+mn-cs"/>
+            </a:endParaRPr>
           </a:p>
         </p:txBody>
       </p:sp>
     </p:spTree>
     <p:extLst>
       <p:ext uri="{BB962C8B-B14F-4D97-AF65-F5344CB8AC3E}">
-        <p14:creationId xmlns:p14="http://schemas.microsoft.com/office/powerpoint/2010/main" val="482398735"/>
+        <p14:creationId xmlns:p14="http://schemas.microsoft.com/office/powerpoint/2010/main" val="1824153992"/>
       </p:ext>
     </p:extLst>
   </p:cSld>
@@ -1878,6 +1994,150 @@
 </file>
 
 <file path=ppt/notesSlides/notesSlide21.xml><?xml version="1.0" encoding="utf-8"?>
+<p:notes xmlns:a="http://schemas.openxmlformats.org/drawingml/2006/main" xmlns:r="http://schemas.openxmlformats.org/officeDocument/2006/relationships" xmlns:p="http://schemas.openxmlformats.org/presentationml/2006/main">
+  <p:cSld>
+    <p:spTree>
+      <p:nvGrpSpPr>
+        <p:cNvPr id="1" name=""/>
+        <p:cNvGrpSpPr/>
+        <p:nvPr/>
+      </p:nvGrpSpPr>
+      <p:grpSpPr>
+        <a:xfrm>
+          <a:off x="0" y="0"/>
+          <a:ext cx="0" cy="0"/>
+          <a:chOff x="0" y="0"/>
+          <a:chExt cx="0" cy="0"/>
+        </a:xfrm>
+      </p:grpSpPr>
+      <p:sp>
+        <p:nvSpPr>
+          <p:cNvPr id="2" name="Espaço Reservado para Imagem de Slide 1"/>
+          <p:cNvSpPr>
+            <a:spLocks noGrp="1" noRot="1" noChangeAspect="1"/>
+          </p:cNvSpPr>
+          <p:nvPr>
+            <p:ph type="sldImg"/>
+          </p:nvPr>
+        </p:nvSpPr>
+        <p:spPr/>
+      </p:sp>
+      <p:sp>
+        <p:nvSpPr>
+          <p:cNvPr id="3" name="Espaço Reservado para Anotações 2"/>
+          <p:cNvSpPr>
+            <a:spLocks noGrp="1"/>
+          </p:cNvSpPr>
+          <p:nvPr>
+            <p:ph type="body" idx="1"/>
+          </p:nvPr>
+        </p:nvSpPr>
+        <p:spPr/>
+        <p:txBody>
+          <a:bodyPr/>
+          <a:lstStyle/>
+          <a:p>
+            <a:endParaRPr lang="pt-BR" dirty="0"/>
+          </a:p>
+        </p:txBody>
+      </p:sp>
+      <p:sp>
+        <p:nvSpPr>
+          <p:cNvPr id="4" name="Espaço Reservado para Número de Slide 3"/>
+          <p:cNvSpPr>
+            <a:spLocks noGrp="1"/>
+          </p:cNvSpPr>
+          <p:nvPr>
+            <p:ph type="sldNum" sz="quarter" idx="5"/>
+          </p:nvPr>
+        </p:nvSpPr>
+        <p:spPr/>
+        <p:txBody>
+          <a:bodyPr/>
+          <a:lstStyle/>
+          <a:p>
+            <a:pPr marL="0" marR="0" lvl="0" indent="0" algn="r" defTabSz="914400" rtl="0" eaLnBrk="1" fontAlgn="auto" latinLnBrk="0" hangingPunct="1">
+              <a:lnSpc>
+                <a:spcPct val="100000"/>
+              </a:lnSpc>
+              <a:spcBef>
+                <a:spcPts val="0"/>
+              </a:spcBef>
+              <a:spcAft>
+                <a:spcPts val="0"/>
+              </a:spcAft>
+              <a:buClrTx/>
+              <a:buSzTx/>
+              <a:buFontTx/>
+              <a:buNone/>
+              <a:tabLst/>
+              <a:defRPr/>
+            </a:pPr>
+            <a:fld id="{6FC8D850-966F-45A6-8DE7-15B891E7D40D}" type="slidenum">
+              <a:rPr kumimoji="0" lang="pt-BR" sz="2200" b="0" i="0" u="none" strike="noStrike" kern="1200" cap="none" spc="0" normalizeH="0" baseline="0" noProof="0" smtClean="0">
+                <a:ln>
+                  <a:noFill/>
+                </a:ln>
+                <a:solidFill>
+                  <a:prstClr val="black"/>
+                </a:solidFill>
+                <a:effectLst/>
+                <a:uLnTx/>
+                <a:uFillTx/>
+                <a:latin typeface="Calibri" panose="020F0502020204030204"/>
+                <a:ea typeface="+mn-ea"/>
+                <a:cs typeface="+mn-cs"/>
+              </a:rPr>
+              <a:pPr marL="0" marR="0" lvl="0" indent="0" algn="r" defTabSz="914400" rtl="0" eaLnBrk="1" fontAlgn="auto" latinLnBrk="0" hangingPunct="1">
+                <a:lnSpc>
+                  <a:spcPct val="100000"/>
+                </a:lnSpc>
+                <a:spcBef>
+                  <a:spcPts val="0"/>
+                </a:spcBef>
+                <a:spcAft>
+                  <a:spcPts val="0"/>
+                </a:spcAft>
+                <a:buClrTx/>
+                <a:buSzTx/>
+                <a:buFontTx/>
+                <a:buNone/>
+                <a:tabLst/>
+                <a:defRPr/>
+              </a:pPr>
+              <a:t>21</a:t>
+            </a:fld>
+            <a:endParaRPr kumimoji="0" lang="pt-BR" sz="2200" b="0" i="0" u="none" strike="noStrike" kern="1200" cap="none" spc="0" normalizeH="0" baseline="0" noProof="0">
+              <a:ln>
+                <a:noFill/>
+              </a:ln>
+              <a:solidFill>
+                <a:prstClr val="black"/>
+              </a:solidFill>
+              <a:effectLst/>
+              <a:uLnTx/>
+              <a:uFillTx/>
+              <a:latin typeface="Calibri" panose="020F0502020204030204"/>
+              <a:ea typeface="+mn-ea"/>
+              <a:cs typeface="+mn-cs"/>
+            </a:endParaRPr>
+          </a:p>
+        </p:txBody>
+      </p:sp>
+    </p:spTree>
+    <p:extLst>
+      <p:ext uri="{BB962C8B-B14F-4D97-AF65-F5344CB8AC3E}">
+        <p14:creationId xmlns:p14="http://schemas.microsoft.com/office/powerpoint/2010/main" val="2389324630"/>
+      </p:ext>
+    </p:extLst>
+  </p:cSld>
+  <p:clrMapOvr>
+    <a:masterClrMapping/>
+  </p:clrMapOvr>
+</p:notes>
+</file>
+
+<file path=ppt/notesSlides/notesSlide22.xml><?xml version="1.0" encoding="utf-8"?>
 <p:notes xmlns:a="http://schemas.openxmlformats.org/drawingml/2006/main" xmlns:r="http://schemas.openxmlformats.org/officeDocument/2006/relationships" xmlns:p="http://schemas.openxmlformats.org/presentationml/2006/main">
   <p:cSld>
     <p:spTree>
@@ -2011,438 +2271,6 @@
     </p:spTree>
     <p:extLst>
       <p:ext uri="{BB962C8B-B14F-4D97-AF65-F5344CB8AC3E}">
-        <p14:creationId xmlns:p14="http://schemas.microsoft.com/office/powerpoint/2010/main" val="2316046025"/>
-      </p:ext>
-    </p:extLst>
-  </p:cSld>
-  <p:clrMapOvr>
-    <a:masterClrMapping/>
-  </p:clrMapOvr>
-</p:notes>
-</file>
-
-<file path=ppt/notesSlides/notesSlide22.xml><?xml version="1.0" encoding="utf-8"?>
-<p:notes xmlns:a="http://schemas.openxmlformats.org/drawingml/2006/main" xmlns:r="http://schemas.openxmlformats.org/officeDocument/2006/relationships" xmlns:p="http://schemas.openxmlformats.org/presentationml/2006/main">
-  <p:cSld>
-    <p:spTree>
-      <p:nvGrpSpPr>
-        <p:cNvPr id="1" name=""/>
-        <p:cNvGrpSpPr/>
-        <p:nvPr/>
-      </p:nvGrpSpPr>
-      <p:grpSpPr>
-        <a:xfrm>
-          <a:off x="0" y="0"/>
-          <a:ext cx="0" cy="0"/>
-          <a:chOff x="0" y="0"/>
-          <a:chExt cx="0" cy="0"/>
-        </a:xfrm>
-      </p:grpSpPr>
-      <p:sp>
-        <p:nvSpPr>
-          <p:cNvPr id="2" name="Espaço Reservado para Imagem de Slide 1"/>
-          <p:cNvSpPr>
-            <a:spLocks noGrp="1" noRot="1" noChangeAspect="1"/>
-          </p:cNvSpPr>
-          <p:nvPr>
-            <p:ph type="sldImg"/>
-          </p:nvPr>
-        </p:nvSpPr>
-        <p:spPr/>
-      </p:sp>
-      <p:sp>
-        <p:nvSpPr>
-          <p:cNvPr id="3" name="Espaço Reservado para Anotações 2"/>
-          <p:cNvSpPr>
-            <a:spLocks noGrp="1"/>
-          </p:cNvSpPr>
-          <p:nvPr>
-            <p:ph type="body" idx="1"/>
-          </p:nvPr>
-        </p:nvSpPr>
-        <p:spPr/>
-        <p:txBody>
-          <a:bodyPr/>
-          <a:lstStyle/>
-          <a:p>
-            <a:endParaRPr lang="pt-BR" dirty="0"/>
-          </a:p>
-        </p:txBody>
-      </p:sp>
-      <p:sp>
-        <p:nvSpPr>
-          <p:cNvPr id="4" name="Espaço Reservado para Número de Slide 3"/>
-          <p:cNvSpPr>
-            <a:spLocks noGrp="1"/>
-          </p:cNvSpPr>
-          <p:nvPr>
-            <p:ph type="sldNum" sz="quarter" idx="5"/>
-          </p:nvPr>
-        </p:nvSpPr>
-        <p:spPr/>
-        <p:txBody>
-          <a:bodyPr/>
-          <a:lstStyle/>
-          <a:p>
-            <a:pPr marL="0" marR="0" lvl="0" indent="0" algn="r" defTabSz="914400" rtl="0" eaLnBrk="1" fontAlgn="auto" latinLnBrk="0" hangingPunct="1">
-              <a:lnSpc>
-                <a:spcPct val="100000"/>
-              </a:lnSpc>
-              <a:spcBef>
-                <a:spcPts val="0"/>
-              </a:spcBef>
-              <a:spcAft>
-                <a:spcPts val="0"/>
-              </a:spcAft>
-              <a:buClrTx/>
-              <a:buSzTx/>
-              <a:buFontTx/>
-              <a:buNone/>
-              <a:tabLst/>
-              <a:defRPr/>
-            </a:pPr>
-            <a:fld id="{6FC8D850-966F-45A6-8DE7-15B891E7D40D}" type="slidenum">
-              <a:rPr kumimoji="0" lang="pt-BR" sz="2200" b="0" i="0" u="none" strike="noStrike" kern="1200" cap="none" spc="0" normalizeH="0" baseline="0" noProof="0" smtClean="0">
-                <a:ln>
-                  <a:noFill/>
-                </a:ln>
-                <a:solidFill>
-                  <a:prstClr val="black"/>
-                </a:solidFill>
-                <a:effectLst/>
-                <a:uLnTx/>
-                <a:uFillTx/>
-                <a:latin typeface="Calibri" panose="020F0502020204030204"/>
-                <a:ea typeface="+mn-ea"/>
-                <a:cs typeface="+mn-cs"/>
-              </a:rPr>
-              <a:pPr marL="0" marR="0" lvl="0" indent="0" algn="r" defTabSz="914400" rtl="0" eaLnBrk="1" fontAlgn="auto" latinLnBrk="0" hangingPunct="1">
-                <a:lnSpc>
-                  <a:spcPct val="100000"/>
-                </a:lnSpc>
-                <a:spcBef>
-                  <a:spcPts val="0"/>
-                </a:spcBef>
-                <a:spcAft>
-                  <a:spcPts val="0"/>
-                </a:spcAft>
-                <a:buClrTx/>
-                <a:buSzTx/>
-                <a:buFontTx/>
-                <a:buNone/>
-                <a:tabLst/>
-                <a:defRPr/>
-              </a:pPr>
-              <a:t>23</a:t>
-            </a:fld>
-            <a:endParaRPr kumimoji="0" lang="pt-BR" sz="2200" b="0" i="0" u="none" strike="noStrike" kern="1200" cap="none" spc="0" normalizeH="0" baseline="0" noProof="0">
-              <a:ln>
-                <a:noFill/>
-              </a:ln>
-              <a:solidFill>
-                <a:prstClr val="black"/>
-              </a:solidFill>
-              <a:effectLst/>
-              <a:uLnTx/>
-              <a:uFillTx/>
-              <a:latin typeface="Calibri" panose="020F0502020204030204"/>
-              <a:ea typeface="+mn-ea"/>
-              <a:cs typeface="+mn-cs"/>
-            </a:endParaRPr>
-          </a:p>
-        </p:txBody>
-      </p:sp>
-    </p:spTree>
-    <p:extLst>
-      <p:ext uri="{BB962C8B-B14F-4D97-AF65-F5344CB8AC3E}">
-        <p14:creationId xmlns:p14="http://schemas.microsoft.com/office/powerpoint/2010/main" val="1824153992"/>
-      </p:ext>
-    </p:extLst>
-  </p:cSld>
-  <p:clrMapOvr>
-    <a:masterClrMapping/>
-  </p:clrMapOvr>
-</p:notes>
-</file>
-
-<file path=ppt/notesSlides/notesSlide23.xml><?xml version="1.0" encoding="utf-8"?>
-<p:notes xmlns:a="http://schemas.openxmlformats.org/drawingml/2006/main" xmlns:r="http://schemas.openxmlformats.org/officeDocument/2006/relationships" xmlns:p="http://schemas.openxmlformats.org/presentationml/2006/main">
-  <p:cSld>
-    <p:spTree>
-      <p:nvGrpSpPr>
-        <p:cNvPr id="1" name=""/>
-        <p:cNvGrpSpPr/>
-        <p:nvPr/>
-      </p:nvGrpSpPr>
-      <p:grpSpPr>
-        <a:xfrm>
-          <a:off x="0" y="0"/>
-          <a:ext cx="0" cy="0"/>
-          <a:chOff x="0" y="0"/>
-          <a:chExt cx="0" cy="0"/>
-        </a:xfrm>
-      </p:grpSpPr>
-      <p:sp>
-        <p:nvSpPr>
-          <p:cNvPr id="2" name="Espaço Reservado para Imagem de Slide 1"/>
-          <p:cNvSpPr>
-            <a:spLocks noGrp="1" noRot="1" noChangeAspect="1"/>
-          </p:cNvSpPr>
-          <p:nvPr>
-            <p:ph type="sldImg"/>
-          </p:nvPr>
-        </p:nvSpPr>
-        <p:spPr/>
-      </p:sp>
-      <p:sp>
-        <p:nvSpPr>
-          <p:cNvPr id="3" name="Espaço Reservado para Anotações 2"/>
-          <p:cNvSpPr>
-            <a:spLocks noGrp="1"/>
-          </p:cNvSpPr>
-          <p:nvPr>
-            <p:ph type="body" idx="1"/>
-          </p:nvPr>
-        </p:nvSpPr>
-        <p:spPr/>
-        <p:txBody>
-          <a:bodyPr/>
-          <a:lstStyle/>
-          <a:p>
-            <a:endParaRPr lang="pt-BR" dirty="0"/>
-          </a:p>
-        </p:txBody>
-      </p:sp>
-      <p:sp>
-        <p:nvSpPr>
-          <p:cNvPr id="4" name="Espaço Reservado para Número de Slide 3"/>
-          <p:cNvSpPr>
-            <a:spLocks noGrp="1"/>
-          </p:cNvSpPr>
-          <p:nvPr>
-            <p:ph type="sldNum" sz="quarter" idx="5"/>
-          </p:nvPr>
-        </p:nvSpPr>
-        <p:spPr/>
-        <p:txBody>
-          <a:bodyPr/>
-          <a:lstStyle/>
-          <a:p>
-            <a:pPr marL="0" marR="0" lvl="0" indent="0" algn="r" defTabSz="914400" rtl="0" eaLnBrk="1" fontAlgn="auto" latinLnBrk="0" hangingPunct="1">
-              <a:lnSpc>
-                <a:spcPct val="100000"/>
-              </a:lnSpc>
-              <a:spcBef>
-                <a:spcPts val="0"/>
-              </a:spcBef>
-              <a:spcAft>
-                <a:spcPts val="0"/>
-              </a:spcAft>
-              <a:buClrTx/>
-              <a:buSzTx/>
-              <a:buFontTx/>
-              <a:buNone/>
-              <a:tabLst/>
-              <a:defRPr/>
-            </a:pPr>
-            <a:fld id="{6FC8D850-966F-45A6-8DE7-15B891E7D40D}" type="slidenum">
-              <a:rPr kumimoji="0" lang="pt-BR" sz="2200" b="0" i="0" u="none" strike="noStrike" kern="1200" cap="none" spc="0" normalizeH="0" baseline="0" noProof="0" smtClean="0">
-                <a:ln>
-                  <a:noFill/>
-                </a:ln>
-                <a:solidFill>
-                  <a:prstClr val="black"/>
-                </a:solidFill>
-                <a:effectLst/>
-                <a:uLnTx/>
-                <a:uFillTx/>
-                <a:latin typeface="Calibri" panose="020F0502020204030204"/>
-                <a:ea typeface="+mn-ea"/>
-                <a:cs typeface="+mn-cs"/>
-              </a:rPr>
-              <a:pPr marL="0" marR="0" lvl="0" indent="0" algn="r" defTabSz="914400" rtl="0" eaLnBrk="1" fontAlgn="auto" latinLnBrk="0" hangingPunct="1">
-                <a:lnSpc>
-                  <a:spcPct val="100000"/>
-                </a:lnSpc>
-                <a:spcBef>
-                  <a:spcPts val="0"/>
-                </a:spcBef>
-                <a:spcAft>
-                  <a:spcPts val="0"/>
-                </a:spcAft>
-                <a:buClrTx/>
-                <a:buSzTx/>
-                <a:buFontTx/>
-                <a:buNone/>
-                <a:tabLst/>
-                <a:defRPr/>
-              </a:pPr>
-              <a:t>24</a:t>
-            </a:fld>
-            <a:endParaRPr kumimoji="0" lang="pt-BR" sz="2200" b="0" i="0" u="none" strike="noStrike" kern="1200" cap="none" spc="0" normalizeH="0" baseline="0" noProof="0">
-              <a:ln>
-                <a:noFill/>
-              </a:ln>
-              <a:solidFill>
-                <a:prstClr val="black"/>
-              </a:solidFill>
-              <a:effectLst/>
-              <a:uLnTx/>
-              <a:uFillTx/>
-              <a:latin typeface="Calibri" panose="020F0502020204030204"/>
-              <a:ea typeface="+mn-ea"/>
-              <a:cs typeface="+mn-cs"/>
-            </a:endParaRPr>
-          </a:p>
-        </p:txBody>
-      </p:sp>
-    </p:spTree>
-    <p:extLst>
-      <p:ext uri="{BB962C8B-B14F-4D97-AF65-F5344CB8AC3E}">
-        <p14:creationId xmlns:p14="http://schemas.microsoft.com/office/powerpoint/2010/main" val="2389324630"/>
-      </p:ext>
-    </p:extLst>
-  </p:cSld>
-  <p:clrMapOvr>
-    <a:masterClrMapping/>
-  </p:clrMapOvr>
-</p:notes>
-</file>
-
-<file path=ppt/notesSlides/notesSlide24.xml><?xml version="1.0" encoding="utf-8"?>
-<p:notes xmlns:a="http://schemas.openxmlformats.org/drawingml/2006/main" xmlns:r="http://schemas.openxmlformats.org/officeDocument/2006/relationships" xmlns:p="http://schemas.openxmlformats.org/presentationml/2006/main">
-  <p:cSld>
-    <p:spTree>
-      <p:nvGrpSpPr>
-        <p:cNvPr id="1" name=""/>
-        <p:cNvGrpSpPr/>
-        <p:nvPr/>
-      </p:nvGrpSpPr>
-      <p:grpSpPr>
-        <a:xfrm>
-          <a:off x="0" y="0"/>
-          <a:ext cx="0" cy="0"/>
-          <a:chOff x="0" y="0"/>
-          <a:chExt cx="0" cy="0"/>
-        </a:xfrm>
-      </p:grpSpPr>
-      <p:sp>
-        <p:nvSpPr>
-          <p:cNvPr id="2" name="Espaço Reservado para Imagem de Slide 1"/>
-          <p:cNvSpPr>
-            <a:spLocks noGrp="1" noRot="1" noChangeAspect="1"/>
-          </p:cNvSpPr>
-          <p:nvPr>
-            <p:ph type="sldImg"/>
-          </p:nvPr>
-        </p:nvSpPr>
-        <p:spPr/>
-      </p:sp>
-      <p:sp>
-        <p:nvSpPr>
-          <p:cNvPr id="3" name="Espaço Reservado para Anotações 2"/>
-          <p:cNvSpPr>
-            <a:spLocks noGrp="1"/>
-          </p:cNvSpPr>
-          <p:nvPr>
-            <p:ph type="body" idx="1"/>
-          </p:nvPr>
-        </p:nvSpPr>
-        <p:spPr/>
-        <p:txBody>
-          <a:bodyPr/>
-          <a:lstStyle/>
-          <a:p>
-            <a:endParaRPr lang="pt-BR" dirty="0"/>
-          </a:p>
-        </p:txBody>
-      </p:sp>
-      <p:sp>
-        <p:nvSpPr>
-          <p:cNvPr id="4" name="Espaço Reservado para Número de Slide 3"/>
-          <p:cNvSpPr>
-            <a:spLocks noGrp="1"/>
-          </p:cNvSpPr>
-          <p:nvPr>
-            <p:ph type="sldNum" sz="quarter" idx="5"/>
-          </p:nvPr>
-        </p:nvSpPr>
-        <p:spPr/>
-        <p:txBody>
-          <a:bodyPr/>
-          <a:lstStyle/>
-          <a:p>
-            <a:pPr marL="0" marR="0" lvl="0" indent="0" algn="r" defTabSz="914400" rtl="0" eaLnBrk="1" fontAlgn="auto" latinLnBrk="0" hangingPunct="1">
-              <a:lnSpc>
-                <a:spcPct val="100000"/>
-              </a:lnSpc>
-              <a:spcBef>
-                <a:spcPts val="0"/>
-              </a:spcBef>
-              <a:spcAft>
-                <a:spcPts val="0"/>
-              </a:spcAft>
-              <a:buClrTx/>
-              <a:buSzTx/>
-              <a:buFontTx/>
-              <a:buNone/>
-              <a:tabLst/>
-              <a:defRPr/>
-            </a:pPr>
-            <a:fld id="{6FC8D850-966F-45A6-8DE7-15B891E7D40D}" type="slidenum">
-              <a:rPr kumimoji="0" lang="pt-BR" sz="2200" b="0" i="0" u="none" strike="noStrike" kern="1200" cap="none" spc="0" normalizeH="0" baseline="0" noProof="0" smtClean="0">
-                <a:ln>
-                  <a:noFill/>
-                </a:ln>
-                <a:solidFill>
-                  <a:prstClr val="black"/>
-                </a:solidFill>
-                <a:effectLst/>
-                <a:uLnTx/>
-                <a:uFillTx/>
-                <a:latin typeface="Calibri" panose="020F0502020204030204"/>
-                <a:ea typeface="+mn-ea"/>
-                <a:cs typeface="+mn-cs"/>
-              </a:rPr>
-              <a:pPr marL="0" marR="0" lvl="0" indent="0" algn="r" defTabSz="914400" rtl="0" eaLnBrk="1" fontAlgn="auto" latinLnBrk="0" hangingPunct="1">
-                <a:lnSpc>
-                  <a:spcPct val="100000"/>
-                </a:lnSpc>
-                <a:spcBef>
-                  <a:spcPts val="0"/>
-                </a:spcBef>
-                <a:spcAft>
-                  <a:spcPts val="0"/>
-                </a:spcAft>
-                <a:buClrTx/>
-                <a:buSzTx/>
-                <a:buFontTx/>
-                <a:buNone/>
-                <a:tabLst/>
-                <a:defRPr/>
-              </a:pPr>
-              <a:t>25</a:t>
-            </a:fld>
-            <a:endParaRPr kumimoji="0" lang="pt-BR" sz="2200" b="0" i="0" u="none" strike="noStrike" kern="1200" cap="none" spc="0" normalizeH="0" baseline="0" noProof="0">
-              <a:ln>
-                <a:noFill/>
-              </a:ln>
-              <a:solidFill>
-                <a:prstClr val="black"/>
-              </a:solidFill>
-              <a:effectLst/>
-              <a:uLnTx/>
-              <a:uFillTx/>
-              <a:latin typeface="Calibri" panose="020F0502020204030204"/>
-              <a:ea typeface="+mn-ea"/>
-              <a:cs typeface="+mn-cs"/>
-            </a:endParaRPr>
-          </a:p>
-        </p:txBody>
-      </p:sp>
-    </p:spTree>
-    <p:extLst>
-      <p:ext uri="{BB962C8B-B14F-4D97-AF65-F5344CB8AC3E}">
         <p14:creationId xmlns:p14="http://schemas.microsoft.com/office/powerpoint/2010/main" val="227195064"/>
       </p:ext>
     </p:extLst>
@@ -2797,7 +2625,7 @@
         <p:cNvPr id="1" name="">
           <a:extLst>
             <a:ext uri="{FF2B5EF4-FFF2-40B4-BE49-F238E27FC236}">
-              <a16:creationId xmlns="" xmlns:a16="http://schemas.microsoft.com/office/drawing/2014/main" id="{5BDAD2A1-5359-2B35-87A2-CB62DA9AC234}"/>
+              <a16:creationId xmlns:a16="http://schemas.microsoft.com/office/drawing/2014/main" id="{5BDAD2A1-5359-2B35-87A2-CB62DA9AC234}"/>
             </a:ext>
           </a:extLst>
         </p:cNvPr>
@@ -2817,7 +2645,7 @@
           <p:cNvPr id="2" name="Espaço Reservado para Imagem de Slide 1">
             <a:extLst>
               <a:ext uri="{FF2B5EF4-FFF2-40B4-BE49-F238E27FC236}">
-                <a16:creationId xmlns="" xmlns:a16="http://schemas.microsoft.com/office/drawing/2014/main" id="{E3CCF2D8-39A8-6970-A91C-CA1BB1172B74}"/>
+                <a16:creationId xmlns:a16="http://schemas.microsoft.com/office/drawing/2014/main" id="{E3CCF2D8-39A8-6970-A91C-CA1BB1172B74}"/>
               </a:ext>
             </a:extLst>
           </p:cNvPr>
@@ -2835,7 +2663,7 @@
           <p:cNvPr id="3" name="Espaço Reservado para Anotações 2">
             <a:extLst>
               <a:ext uri="{FF2B5EF4-FFF2-40B4-BE49-F238E27FC236}">
-                <a16:creationId xmlns="" xmlns:a16="http://schemas.microsoft.com/office/drawing/2014/main" id="{D2A0BCB8-A319-F2B9-61A9-80B79A20C8AD}"/>
+                <a16:creationId xmlns:a16="http://schemas.microsoft.com/office/drawing/2014/main" id="{D2A0BCB8-A319-F2B9-61A9-80B79A20C8AD}"/>
               </a:ext>
             </a:extLst>
           </p:cNvPr>
@@ -2860,7 +2688,7 @@
           <p:cNvPr id="4" name="Espaço Reservado para Número de Slide 3">
             <a:extLst>
               <a:ext uri="{FF2B5EF4-FFF2-40B4-BE49-F238E27FC236}">
-                <a16:creationId xmlns="" xmlns:a16="http://schemas.microsoft.com/office/drawing/2014/main" id="{7430ECDE-57AD-7D93-14A4-A77602871389}"/>
+                <a16:creationId xmlns:a16="http://schemas.microsoft.com/office/drawing/2014/main" id="{7430ECDE-57AD-7D93-14A4-A77602871389}"/>
               </a:ext>
             </a:extLst>
           </p:cNvPr>
@@ -2905,7 +2733,7 @@
         <p:cNvPr id="1" name="">
           <a:extLst>
             <a:ext uri="{FF2B5EF4-FFF2-40B4-BE49-F238E27FC236}">
-              <a16:creationId xmlns="" xmlns:a16="http://schemas.microsoft.com/office/drawing/2014/main" id="{2E6003E3-9C23-DFB4-E656-EE817B7B63F5}"/>
+              <a16:creationId xmlns:a16="http://schemas.microsoft.com/office/drawing/2014/main" id="{2E6003E3-9C23-DFB4-E656-EE817B7B63F5}"/>
             </a:ext>
           </a:extLst>
         </p:cNvPr>
@@ -2925,7 +2753,7 @@
           <p:cNvPr id="2" name="Espaço Reservado para Imagem de Slide 1">
             <a:extLst>
               <a:ext uri="{FF2B5EF4-FFF2-40B4-BE49-F238E27FC236}">
-                <a16:creationId xmlns="" xmlns:a16="http://schemas.microsoft.com/office/drawing/2014/main" id="{A47E6B73-509B-606A-BA52-ECD9A901942C}"/>
+                <a16:creationId xmlns:a16="http://schemas.microsoft.com/office/drawing/2014/main" id="{A47E6B73-509B-606A-BA52-ECD9A901942C}"/>
               </a:ext>
             </a:extLst>
           </p:cNvPr>
@@ -2943,7 +2771,7 @@
           <p:cNvPr id="3" name="Espaço Reservado para Anotações 2">
             <a:extLst>
               <a:ext uri="{FF2B5EF4-FFF2-40B4-BE49-F238E27FC236}">
-                <a16:creationId xmlns="" xmlns:a16="http://schemas.microsoft.com/office/drawing/2014/main" id="{1E7DD88D-B209-FE30-9F24-9AD224BF1EC8}"/>
+                <a16:creationId xmlns:a16="http://schemas.microsoft.com/office/drawing/2014/main" id="{1E7DD88D-B209-FE30-9F24-9AD224BF1EC8}"/>
               </a:ext>
             </a:extLst>
           </p:cNvPr>
@@ -2968,7 +2796,7 @@
           <p:cNvPr id="4" name="Espaço Reservado para Número de Slide 3">
             <a:extLst>
               <a:ext uri="{FF2B5EF4-FFF2-40B4-BE49-F238E27FC236}">
-                <a16:creationId xmlns="" xmlns:a16="http://schemas.microsoft.com/office/drawing/2014/main" id="{4A209F62-F946-427E-D702-876E44243A30}"/>
+                <a16:creationId xmlns:a16="http://schemas.microsoft.com/office/drawing/2014/main" id="{4A209F62-F946-427E-D702-876E44243A30}"/>
               </a:ext>
             </a:extLst>
           </p:cNvPr>
@@ -3013,7 +2841,7 @@
         <p:cNvPr id="1" name="">
           <a:extLst>
             <a:ext uri="{FF2B5EF4-FFF2-40B4-BE49-F238E27FC236}">
-              <a16:creationId xmlns="" xmlns:a16="http://schemas.microsoft.com/office/drawing/2014/main" id="{31790B8E-ACCA-F7FC-062F-E911F5C53D3B}"/>
+              <a16:creationId xmlns:a16="http://schemas.microsoft.com/office/drawing/2014/main" id="{31790B8E-ACCA-F7FC-062F-E911F5C53D3B}"/>
             </a:ext>
           </a:extLst>
         </p:cNvPr>
@@ -3033,7 +2861,7 @@
           <p:cNvPr id="2" name="Espaço Reservado para Imagem de Slide 1">
             <a:extLst>
               <a:ext uri="{FF2B5EF4-FFF2-40B4-BE49-F238E27FC236}">
-                <a16:creationId xmlns="" xmlns:a16="http://schemas.microsoft.com/office/drawing/2014/main" id="{77BBB11C-3D4E-BD82-F35A-38E1761E0CFD}"/>
+                <a16:creationId xmlns:a16="http://schemas.microsoft.com/office/drawing/2014/main" id="{77BBB11C-3D4E-BD82-F35A-38E1761E0CFD}"/>
               </a:ext>
             </a:extLst>
           </p:cNvPr>
@@ -3051,7 +2879,7 @@
           <p:cNvPr id="3" name="Espaço Reservado para Anotações 2">
             <a:extLst>
               <a:ext uri="{FF2B5EF4-FFF2-40B4-BE49-F238E27FC236}">
-                <a16:creationId xmlns="" xmlns:a16="http://schemas.microsoft.com/office/drawing/2014/main" id="{88D90C90-61FD-F2FA-BABE-D96B4D6667D3}"/>
+                <a16:creationId xmlns:a16="http://schemas.microsoft.com/office/drawing/2014/main" id="{88D90C90-61FD-F2FA-BABE-D96B4D6667D3}"/>
               </a:ext>
             </a:extLst>
           </p:cNvPr>
@@ -3076,7 +2904,7 @@
           <p:cNvPr id="4" name="Espaço Reservado para Número de Slide 3">
             <a:extLst>
               <a:ext uri="{FF2B5EF4-FFF2-40B4-BE49-F238E27FC236}">
-                <a16:creationId xmlns="" xmlns:a16="http://schemas.microsoft.com/office/drawing/2014/main" id="{281AAE74-6902-1DF5-1CE0-D34FA2800337}"/>
+                <a16:creationId xmlns:a16="http://schemas.microsoft.com/office/drawing/2014/main" id="{281AAE74-6902-1DF5-1CE0-D34FA2800337}"/>
               </a:ext>
             </a:extLst>
           </p:cNvPr>
@@ -3135,7 +2963,7 @@
           <p:cNvPr id="2" name="Título 1">
             <a:extLst>
               <a:ext uri="{FF2B5EF4-FFF2-40B4-BE49-F238E27FC236}">
-                <a16:creationId xmlns="" xmlns:a16="http://schemas.microsoft.com/office/drawing/2014/main" id="{1DB9B4FF-B06E-403C-A326-BDC64D8FF94E}"/>
+                <a16:creationId xmlns:a16="http://schemas.microsoft.com/office/drawing/2014/main" id="{1DB9B4FF-B06E-403C-A326-BDC64D8FF94E}"/>
               </a:ext>
             </a:extLst>
           </p:cNvPr>
@@ -3172,7 +3000,7 @@
           <p:cNvPr id="3" name="Subtítulo 2">
             <a:extLst>
               <a:ext uri="{FF2B5EF4-FFF2-40B4-BE49-F238E27FC236}">
-                <a16:creationId xmlns="" xmlns:a16="http://schemas.microsoft.com/office/drawing/2014/main" id="{247BDFCE-746E-45BF-A319-4733D58D1632}"/>
+                <a16:creationId xmlns:a16="http://schemas.microsoft.com/office/drawing/2014/main" id="{247BDFCE-746E-45BF-A319-4733D58D1632}"/>
               </a:ext>
             </a:extLst>
           </p:cNvPr>
@@ -3242,7 +3070,7 @@
           <p:cNvPr id="4" name="Espaço Reservado para Data 3">
             <a:extLst>
               <a:ext uri="{FF2B5EF4-FFF2-40B4-BE49-F238E27FC236}">
-                <a16:creationId xmlns="" xmlns:a16="http://schemas.microsoft.com/office/drawing/2014/main" id="{9EDE2778-5372-4104-B96D-968184DA8288}"/>
+                <a16:creationId xmlns:a16="http://schemas.microsoft.com/office/drawing/2014/main" id="{9EDE2778-5372-4104-B96D-968184DA8288}"/>
               </a:ext>
             </a:extLst>
           </p:cNvPr>
@@ -3260,7 +3088,7 @@
           <a:p>
             <a:fld id="{63289F7E-B80B-496E-81B4-D396C37C9454}" type="datetimeFigureOut">
               <a:rPr lang="pt-BR" smtClean="0"/>
-              <a:t>13/05/2025</a:t>
+              <a:t>14/05/2025</a:t>
             </a:fld>
             <a:endParaRPr lang="pt-BR"/>
           </a:p>
@@ -3271,7 +3099,7 @@
           <p:cNvPr id="5" name="Espaço Reservado para Rodapé 4">
             <a:extLst>
               <a:ext uri="{FF2B5EF4-FFF2-40B4-BE49-F238E27FC236}">
-                <a16:creationId xmlns="" xmlns:a16="http://schemas.microsoft.com/office/drawing/2014/main" id="{C1DD0F41-C861-4051-988D-3024A37A4B93}"/>
+                <a16:creationId xmlns:a16="http://schemas.microsoft.com/office/drawing/2014/main" id="{C1DD0F41-C861-4051-988D-3024A37A4B93}"/>
               </a:ext>
             </a:extLst>
           </p:cNvPr>
@@ -3296,7 +3124,7 @@
           <p:cNvPr id="6" name="Espaço Reservado para Número de Slide 5">
             <a:extLst>
               <a:ext uri="{FF2B5EF4-FFF2-40B4-BE49-F238E27FC236}">
-                <a16:creationId xmlns="" xmlns:a16="http://schemas.microsoft.com/office/drawing/2014/main" id="{07E5967E-D980-431A-A5DB-3F0C5030A81E}"/>
+                <a16:creationId xmlns:a16="http://schemas.microsoft.com/office/drawing/2014/main" id="{07E5967E-D980-431A-A5DB-3F0C5030A81E}"/>
               </a:ext>
             </a:extLst>
           </p:cNvPr>
@@ -3314,7 +3142,7 @@
           <a:p>
             <a:fld id="{1A7E88B7-70CE-4035-AE73-13FA6FB985D4}" type="slidenum">
               <a:rPr lang="pt-BR" smtClean="0"/>
-              <a:t>‹nº›</a:t>
+              <a:t>‹#›</a:t>
             </a:fld>
             <a:endParaRPr lang="pt-BR"/>
           </a:p>
@@ -3355,7 +3183,7 @@
           <p:cNvPr id="2" name="Título 1">
             <a:extLst>
               <a:ext uri="{FF2B5EF4-FFF2-40B4-BE49-F238E27FC236}">
-                <a16:creationId xmlns="" xmlns:a16="http://schemas.microsoft.com/office/drawing/2014/main" id="{9036C49F-3E68-4175-81BA-3C3FEE44308A}"/>
+                <a16:creationId xmlns:a16="http://schemas.microsoft.com/office/drawing/2014/main" id="{9036C49F-3E68-4175-81BA-3C3FEE44308A}"/>
               </a:ext>
             </a:extLst>
           </p:cNvPr>
@@ -3383,7 +3211,7 @@
           <p:cNvPr id="3" name="Espaço Reservado para Texto Vertical 2">
             <a:extLst>
               <a:ext uri="{FF2B5EF4-FFF2-40B4-BE49-F238E27FC236}">
-                <a16:creationId xmlns="" xmlns:a16="http://schemas.microsoft.com/office/drawing/2014/main" id="{426FA736-3DD3-4D4E-B57B-BBE1D8F7D424}"/>
+                <a16:creationId xmlns:a16="http://schemas.microsoft.com/office/drawing/2014/main" id="{426FA736-3DD3-4D4E-B57B-BBE1D8F7D424}"/>
               </a:ext>
             </a:extLst>
           </p:cNvPr>
@@ -3440,7 +3268,7 @@
           <p:cNvPr id="4" name="Espaço Reservado para Data 3">
             <a:extLst>
               <a:ext uri="{FF2B5EF4-FFF2-40B4-BE49-F238E27FC236}">
-                <a16:creationId xmlns="" xmlns:a16="http://schemas.microsoft.com/office/drawing/2014/main" id="{99E8855C-D8FD-48F6-B14E-861E0DE4D915}"/>
+                <a16:creationId xmlns:a16="http://schemas.microsoft.com/office/drawing/2014/main" id="{99E8855C-D8FD-48F6-B14E-861E0DE4D915}"/>
               </a:ext>
             </a:extLst>
           </p:cNvPr>
@@ -3458,7 +3286,7 @@
           <a:p>
             <a:fld id="{63289F7E-B80B-496E-81B4-D396C37C9454}" type="datetimeFigureOut">
               <a:rPr lang="pt-BR" smtClean="0"/>
-              <a:t>13/05/2025</a:t>
+              <a:t>14/05/2025</a:t>
             </a:fld>
             <a:endParaRPr lang="pt-BR"/>
           </a:p>
@@ -3469,7 +3297,7 @@
           <p:cNvPr id="5" name="Espaço Reservado para Rodapé 4">
             <a:extLst>
               <a:ext uri="{FF2B5EF4-FFF2-40B4-BE49-F238E27FC236}">
-                <a16:creationId xmlns="" xmlns:a16="http://schemas.microsoft.com/office/drawing/2014/main" id="{97C0BB88-2F21-42A5-ACFF-83DA47F2D340}"/>
+                <a16:creationId xmlns:a16="http://schemas.microsoft.com/office/drawing/2014/main" id="{97C0BB88-2F21-42A5-ACFF-83DA47F2D340}"/>
               </a:ext>
             </a:extLst>
           </p:cNvPr>
@@ -3494,7 +3322,7 @@
           <p:cNvPr id="6" name="Espaço Reservado para Número de Slide 5">
             <a:extLst>
               <a:ext uri="{FF2B5EF4-FFF2-40B4-BE49-F238E27FC236}">
-                <a16:creationId xmlns="" xmlns:a16="http://schemas.microsoft.com/office/drawing/2014/main" id="{6CB462B3-1F22-4C05-B4B8-7A279FB7D5E9}"/>
+                <a16:creationId xmlns:a16="http://schemas.microsoft.com/office/drawing/2014/main" id="{6CB462B3-1F22-4C05-B4B8-7A279FB7D5E9}"/>
               </a:ext>
             </a:extLst>
           </p:cNvPr>
@@ -3512,7 +3340,7 @@
           <a:p>
             <a:fld id="{1A7E88B7-70CE-4035-AE73-13FA6FB985D4}" type="slidenum">
               <a:rPr lang="pt-BR" smtClean="0"/>
-              <a:t>‹nº›</a:t>
+              <a:t>‹#›</a:t>
             </a:fld>
             <a:endParaRPr lang="pt-BR"/>
           </a:p>
@@ -3553,7 +3381,7 @@
           <p:cNvPr id="2" name="Título Vertical 1">
             <a:extLst>
               <a:ext uri="{FF2B5EF4-FFF2-40B4-BE49-F238E27FC236}">
-                <a16:creationId xmlns="" xmlns:a16="http://schemas.microsoft.com/office/drawing/2014/main" id="{EAEAB728-701C-4207-A9D5-23FF45C60502}"/>
+                <a16:creationId xmlns:a16="http://schemas.microsoft.com/office/drawing/2014/main" id="{EAEAB728-701C-4207-A9D5-23FF45C60502}"/>
               </a:ext>
             </a:extLst>
           </p:cNvPr>
@@ -3586,7 +3414,7 @@
           <p:cNvPr id="3" name="Espaço Reservado para Texto Vertical 2">
             <a:extLst>
               <a:ext uri="{FF2B5EF4-FFF2-40B4-BE49-F238E27FC236}">
-                <a16:creationId xmlns="" xmlns:a16="http://schemas.microsoft.com/office/drawing/2014/main" id="{BA8C8CCF-7823-480A-9A19-0F664DD17E3B}"/>
+                <a16:creationId xmlns:a16="http://schemas.microsoft.com/office/drawing/2014/main" id="{BA8C8CCF-7823-480A-9A19-0F664DD17E3B}"/>
               </a:ext>
             </a:extLst>
           </p:cNvPr>
@@ -3648,7 +3476,7 @@
           <p:cNvPr id="4" name="Espaço Reservado para Data 3">
             <a:extLst>
               <a:ext uri="{FF2B5EF4-FFF2-40B4-BE49-F238E27FC236}">
-                <a16:creationId xmlns="" xmlns:a16="http://schemas.microsoft.com/office/drawing/2014/main" id="{721D5734-7B1F-425D-942F-6EB73344027C}"/>
+                <a16:creationId xmlns:a16="http://schemas.microsoft.com/office/drawing/2014/main" id="{721D5734-7B1F-425D-942F-6EB73344027C}"/>
               </a:ext>
             </a:extLst>
           </p:cNvPr>
@@ -3666,7 +3494,7 @@
           <a:p>
             <a:fld id="{63289F7E-B80B-496E-81B4-D396C37C9454}" type="datetimeFigureOut">
               <a:rPr lang="pt-BR" smtClean="0"/>
-              <a:t>13/05/2025</a:t>
+              <a:t>14/05/2025</a:t>
             </a:fld>
             <a:endParaRPr lang="pt-BR"/>
           </a:p>
@@ -3677,7 +3505,7 @@
           <p:cNvPr id="5" name="Espaço Reservado para Rodapé 4">
             <a:extLst>
               <a:ext uri="{FF2B5EF4-FFF2-40B4-BE49-F238E27FC236}">
-                <a16:creationId xmlns="" xmlns:a16="http://schemas.microsoft.com/office/drawing/2014/main" id="{1E1AAEAC-F08D-45FE-89EC-B1B349A868C9}"/>
+                <a16:creationId xmlns:a16="http://schemas.microsoft.com/office/drawing/2014/main" id="{1E1AAEAC-F08D-45FE-89EC-B1B349A868C9}"/>
               </a:ext>
             </a:extLst>
           </p:cNvPr>
@@ -3702,7 +3530,7 @@
           <p:cNvPr id="6" name="Espaço Reservado para Número de Slide 5">
             <a:extLst>
               <a:ext uri="{FF2B5EF4-FFF2-40B4-BE49-F238E27FC236}">
-                <a16:creationId xmlns="" xmlns:a16="http://schemas.microsoft.com/office/drawing/2014/main" id="{BAA44493-9911-47B2-87A6-C2141A972BC8}"/>
+                <a16:creationId xmlns:a16="http://schemas.microsoft.com/office/drawing/2014/main" id="{BAA44493-9911-47B2-87A6-C2141A972BC8}"/>
               </a:ext>
             </a:extLst>
           </p:cNvPr>
@@ -3720,7 +3548,7 @@
           <a:p>
             <a:fld id="{1A7E88B7-70CE-4035-AE73-13FA6FB985D4}" type="slidenum">
               <a:rPr lang="pt-BR" smtClean="0"/>
-              <a:t>‹nº›</a:t>
+              <a:t>‹#›</a:t>
             </a:fld>
             <a:endParaRPr lang="pt-BR"/>
           </a:p>
@@ -3921,7 +3749,7 @@
             <a:fld id="{1D8BD707-D9CF-40AE-B4C6-C98DA3205C09}" type="datetimeFigureOut">
               <a:rPr lang="en-US" smtClean="0"/>
               <a:pPr/>
-              <a:t>5/13/2025</a:t>
+              <a:t>5/14/2025</a:t>
             </a:fld>
             <a:endParaRPr lang="en-US"/>
           </a:p>
@@ -3964,7 +3792,7 @@
             <a:fld id="{B6F15528-21DE-4FAA-801E-634DDDAF4B2B}" type="slidenum">
               <a:rPr lang="en-US" smtClean="0"/>
               <a:pPr/>
-              <a:t>‹nº›</a:t>
+              <a:t>‹#›</a:t>
             </a:fld>
             <a:endParaRPr lang="en-US"/>
           </a:p>
@@ -4093,7 +3921,7 @@
             <a:fld id="{1D8BD707-D9CF-40AE-B4C6-C98DA3205C09}" type="datetimeFigureOut">
               <a:rPr lang="en-US" smtClean="0"/>
               <a:pPr/>
-              <a:t>5/13/2025</a:t>
+              <a:t>5/14/2025</a:t>
             </a:fld>
             <a:endParaRPr lang="en-US"/>
           </a:p>
@@ -4136,7 +3964,7 @@
             <a:fld id="{B6F15528-21DE-4FAA-801E-634DDDAF4B2B}" type="slidenum">
               <a:rPr lang="en-US" smtClean="0"/>
               <a:pPr/>
-              <a:t>‹nº›</a:t>
+              <a:t>‹#›</a:t>
             </a:fld>
             <a:endParaRPr lang="en-US"/>
           </a:p>
@@ -4341,7 +4169,7 @@
             <a:fld id="{1D8BD707-D9CF-40AE-B4C6-C98DA3205C09}" type="datetimeFigureOut">
               <a:rPr lang="en-US" smtClean="0"/>
               <a:pPr/>
-              <a:t>5/13/2025</a:t>
+              <a:t>5/14/2025</a:t>
             </a:fld>
             <a:endParaRPr lang="en-US"/>
           </a:p>
@@ -4384,7 +4212,7 @@
             <a:fld id="{B6F15528-21DE-4FAA-801E-634DDDAF4B2B}" type="slidenum">
               <a:rPr lang="en-US" smtClean="0"/>
               <a:pPr/>
-              <a:t>‹nº›</a:t>
+              <a:t>‹#›</a:t>
             </a:fld>
             <a:endParaRPr lang="en-US"/>
           </a:p>
@@ -4631,7 +4459,7 @@
             <a:fld id="{1D8BD707-D9CF-40AE-B4C6-C98DA3205C09}" type="datetimeFigureOut">
               <a:rPr lang="en-US" smtClean="0"/>
               <a:pPr/>
-              <a:t>5/13/2025</a:t>
+              <a:t>5/14/2025</a:t>
             </a:fld>
             <a:endParaRPr lang="en-US"/>
           </a:p>
@@ -4674,7 +4502,7 @@
             <a:fld id="{B6F15528-21DE-4FAA-801E-634DDDAF4B2B}" type="slidenum">
               <a:rPr lang="en-US" smtClean="0"/>
               <a:pPr/>
-              <a:t>‹nº›</a:t>
+              <a:t>‹#›</a:t>
             </a:fld>
             <a:endParaRPr lang="en-US"/>
           </a:p>
@@ -5055,7 +4883,7 @@
             <a:fld id="{1D8BD707-D9CF-40AE-B4C6-C98DA3205C09}" type="datetimeFigureOut">
               <a:rPr lang="en-US" smtClean="0"/>
               <a:pPr/>
-              <a:t>5/13/2025</a:t>
+              <a:t>5/14/2025</a:t>
             </a:fld>
             <a:endParaRPr lang="en-US"/>
           </a:p>
@@ -5098,7 +4926,7 @@
             <a:fld id="{B6F15528-21DE-4FAA-801E-634DDDAF4B2B}" type="slidenum">
               <a:rPr lang="en-US" smtClean="0"/>
               <a:pPr/>
-              <a:t>‹nº›</a:t>
+              <a:t>‹#›</a:t>
             </a:fld>
             <a:endParaRPr lang="en-US"/>
           </a:p>
@@ -5175,7 +5003,7 @@
             <a:fld id="{1D8BD707-D9CF-40AE-B4C6-C98DA3205C09}" type="datetimeFigureOut">
               <a:rPr lang="en-US" smtClean="0"/>
               <a:pPr/>
-              <a:t>5/13/2025</a:t>
+              <a:t>5/14/2025</a:t>
             </a:fld>
             <a:endParaRPr lang="en-US"/>
           </a:p>
@@ -5218,7 +5046,7 @@
             <a:fld id="{B6F15528-21DE-4FAA-801E-634DDDAF4B2B}" type="slidenum">
               <a:rPr lang="en-US" smtClean="0"/>
               <a:pPr/>
-              <a:t>‹nº›</a:t>
+              <a:t>‹#›</a:t>
             </a:fld>
             <a:endParaRPr lang="en-US"/>
           </a:p>
@@ -5272,7 +5100,7 @@
             <a:fld id="{1D8BD707-D9CF-40AE-B4C6-C98DA3205C09}" type="datetimeFigureOut">
               <a:rPr lang="en-US" smtClean="0"/>
               <a:pPr/>
-              <a:t>5/13/2025</a:t>
+              <a:t>5/14/2025</a:t>
             </a:fld>
             <a:endParaRPr lang="en-US"/>
           </a:p>
@@ -5315,7 +5143,7 @@
             <a:fld id="{B6F15528-21DE-4FAA-801E-634DDDAF4B2B}" type="slidenum">
               <a:rPr lang="en-US" smtClean="0"/>
               <a:pPr/>
-              <a:t>‹nº›</a:t>
+              <a:t>‹#›</a:t>
             </a:fld>
             <a:endParaRPr lang="en-US"/>
           </a:p>
@@ -5551,7 +5379,7 @@
             <a:fld id="{1D8BD707-D9CF-40AE-B4C6-C98DA3205C09}" type="datetimeFigureOut">
               <a:rPr lang="en-US" smtClean="0"/>
               <a:pPr/>
-              <a:t>5/13/2025</a:t>
+              <a:t>5/14/2025</a:t>
             </a:fld>
             <a:endParaRPr lang="en-US"/>
           </a:p>
@@ -5594,7 +5422,7 @@
             <a:fld id="{B6F15528-21DE-4FAA-801E-634DDDAF4B2B}" type="slidenum">
               <a:rPr lang="en-US" smtClean="0"/>
               <a:pPr/>
-              <a:t>‹nº›</a:t>
+              <a:t>‹#›</a:t>
             </a:fld>
             <a:endParaRPr lang="en-US"/>
           </a:p>
@@ -5635,7 +5463,7 @@
           <p:cNvPr id="2" name="Título 1">
             <a:extLst>
               <a:ext uri="{FF2B5EF4-FFF2-40B4-BE49-F238E27FC236}">
-                <a16:creationId xmlns="" xmlns:a16="http://schemas.microsoft.com/office/drawing/2014/main" id="{71BD44A5-8F21-4626-A01D-48A1C874B1D5}"/>
+                <a16:creationId xmlns:a16="http://schemas.microsoft.com/office/drawing/2014/main" id="{71BD44A5-8F21-4626-A01D-48A1C874B1D5}"/>
               </a:ext>
             </a:extLst>
           </p:cNvPr>
@@ -5663,7 +5491,7 @@
           <p:cNvPr id="3" name="Espaço Reservado para Conteúdo 2">
             <a:extLst>
               <a:ext uri="{FF2B5EF4-FFF2-40B4-BE49-F238E27FC236}">
-                <a16:creationId xmlns="" xmlns:a16="http://schemas.microsoft.com/office/drawing/2014/main" id="{B79E8085-65A9-48AA-951D-71D978BFF4ED}"/>
+                <a16:creationId xmlns:a16="http://schemas.microsoft.com/office/drawing/2014/main" id="{B79E8085-65A9-48AA-951D-71D978BFF4ED}"/>
               </a:ext>
             </a:extLst>
           </p:cNvPr>
@@ -5720,7 +5548,7 @@
           <p:cNvPr id="4" name="Espaço Reservado para Data 3">
             <a:extLst>
               <a:ext uri="{FF2B5EF4-FFF2-40B4-BE49-F238E27FC236}">
-                <a16:creationId xmlns="" xmlns:a16="http://schemas.microsoft.com/office/drawing/2014/main" id="{F05BE1AF-51EA-425D-B188-DE7BD675009F}"/>
+                <a16:creationId xmlns:a16="http://schemas.microsoft.com/office/drawing/2014/main" id="{F05BE1AF-51EA-425D-B188-DE7BD675009F}"/>
               </a:ext>
             </a:extLst>
           </p:cNvPr>
@@ -5738,7 +5566,7 @@
           <a:p>
             <a:fld id="{63289F7E-B80B-496E-81B4-D396C37C9454}" type="datetimeFigureOut">
               <a:rPr lang="pt-BR" smtClean="0"/>
-              <a:t>13/05/2025</a:t>
+              <a:t>14/05/2025</a:t>
             </a:fld>
             <a:endParaRPr lang="pt-BR"/>
           </a:p>
@@ -5749,7 +5577,7 @@
           <p:cNvPr id="5" name="Espaço Reservado para Rodapé 4">
             <a:extLst>
               <a:ext uri="{FF2B5EF4-FFF2-40B4-BE49-F238E27FC236}">
-                <a16:creationId xmlns="" xmlns:a16="http://schemas.microsoft.com/office/drawing/2014/main" id="{121BE632-29CF-4CB9-B365-C9EF38F89BE6}"/>
+                <a16:creationId xmlns:a16="http://schemas.microsoft.com/office/drawing/2014/main" id="{121BE632-29CF-4CB9-B365-C9EF38F89BE6}"/>
               </a:ext>
             </a:extLst>
           </p:cNvPr>
@@ -5774,7 +5602,7 @@
           <p:cNvPr id="6" name="Espaço Reservado para Número de Slide 5">
             <a:extLst>
               <a:ext uri="{FF2B5EF4-FFF2-40B4-BE49-F238E27FC236}">
-                <a16:creationId xmlns="" xmlns:a16="http://schemas.microsoft.com/office/drawing/2014/main" id="{60CF3DD1-9AEC-4A57-B461-4E4DD86FAC18}"/>
+                <a16:creationId xmlns:a16="http://schemas.microsoft.com/office/drawing/2014/main" id="{60CF3DD1-9AEC-4A57-B461-4E4DD86FAC18}"/>
               </a:ext>
             </a:extLst>
           </p:cNvPr>
@@ -5792,7 +5620,7 @@
           <a:p>
             <a:fld id="{1A7E88B7-70CE-4035-AE73-13FA6FB985D4}" type="slidenum">
               <a:rPr lang="pt-BR" smtClean="0"/>
-              <a:t>‹nº›</a:t>
+              <a:t>‹#›</a:t>
             </a:fld>
             <a:endParaRPr lang="pt-BR"/>
           </a:p>
@@ -6008,7 +5836,7 @@
             <a:fld id="{1D8BD707-D9CF-40AE-B4C6-C98DA3205C09}" type="datetimeFigureOut">
               <a:rPr lang="en-US" smtClean="0"/>
               <a:pPr/>
-              <a:t>5/13/2025</a:t>
+              <a:t>5/14/2025</a:t>
             </a:fld>
             <a:endParaRPr lang="en-US"/>
           </a:p>
@@ -6051,7 +5879,7 @@
             <a:fld id="{B6F15528-21DE-4FAA-801E-634DDDAF4B2B}" type="slidenum">
               <a:rPr lang="en-US" smtClean="0"/>
               <a:pPr/>
-              <a:t>‹nº›</a:t>
+              <a:t>‹#›</a:t>
             </a:fld>
             <a:endParaRPr lang="en-US"/>
           </a:p>
@@ -6180,7 +6008,7 @@
             <a:fld id="{1D8BD707-D9CF-40AE-B4C6-C98DA3205C09}" type="datetimeFigureOut">
               <a:rPr lang="en-US" smtClean="0"/>
               <a:pPr/>
-              <a:t>5/13/2025</a:t>
+              <a:t>5/14/2025</a:t>
             </a:fld>
             <a:endParaRPr lang="en-US"/>
           </a:p>
@@ -6223,7 +6051,7 @@
             <a:fld id="{B6F15528-21DE-4FAA-801E-634DDDAF4B2B}" type="slidenum">
               <a:rPr lang="en-US" smtClean="0"/>
               <a:pPr/>
-              <a:t>‹nº›</a:t>
+              <a:t>‹#›</a:t>
             </a:fld>
             <a:endParaRPr lang="en-US"/>
           </a:p>
@@ -6362,7 +6190,7 @@
             <a:fld id="{1D8BD707-D9CF-40AE-B4C6-C98DA3205C09}" type="datetimeFigureOut">
               <a:rPr lang="en-US" smtClean="0"/>
               <a:pPr/>
-              <a:t>5/13/2025</a:t>
+              <a:t>5/14/2025</a:t>
             </a:fld>
             <a:endParaRPr lang="en-US"/>
           </a:p>
@@ -6405,7 +6233,7 @@
             <a:fld id="{B6F15528-21DE-4FAA-801E-634DDDAF4B2B}" type="slidenum">
               <a:rPr lang="en-US" smtClean="0"/>
               <a:pPr/>
-              <a:t>‹nº›</a:t>
+              <a:t>‹#›</a:t>
             </a:fld>
             <a:endParaRPr lang="en-US"/>
           </a:p>
@@ -6446,7 +6274,7 @@
           <p:cNvPr id="2" name="Título 1">
             <a:extLst>
               <a:ext uri="{FF2B5EF4-FFF2-40B4-BE49-F238E27FC236}">
-                <a16:creationId xmlns="" xmlns:a16="http://schemas.microsoft.com/office/drawing/2014/main" id="{34AB2FF0-A4D7-4E28-991D-FF26140D5988}"/>
+                <a16:creationId xmlns:a16="http://schemas.microsoft.com/office/drawing/2014/main" id="{34AB2FF0-A4D7-4E28-991D-FF26140D5988}"/>
               </a:ext>
             </a:extLst>
           </p:cNvPr>
@@ -6483,7 +6311,7 @@
           <p:cNvPr id="3" name="Espaço Reservado para Texto 2">
             <a:extLst>
               <a:ext uri="{FF2B5EF4-FFF2-40B4-BE49-F238E27FC236}">
-                <a16:creationId xmlns="" xmlns:a16="http://schemas.microsoft.com/office/drawing/2014/main" id="{E2AC45B0-4145-40DB-8E61-105461170604}"/>
+                <a16:creationId xmlns:a16="http://schemas.microsoft.com/office/drawing/2014/main" id="{E2AC45B0-4145-40DB-8E61-105461170604}"/>
               </a:ext>
             </a:extLst>
           </p:cNvPr>
@@ -6608,7 +6436,7 @@
           <p:cNvPr id="4" name="Espaço Reservado para Data 3">
             <a:extLst>
               <a:ext uri="{FF2B5EF4-FFF2-40B4-BE49-F238E27FC236}">
-                <a16:creationId xmlns="" xmlns:a16="http://schemas.microsoft.com/office/drawing/2014/main" id="{50F1D3FB-740A-4EBA-A309-2CE71D12ECFB}"/>
+                <a16:creationId xmlns:a16="http://schemas.microsoft.com/office/drawing/2014/main" id="{50F1D3FB-740A-4EBA-A309-2CE71D12ECFB}"/>
               </a:ext>
             </a:extLst>
           </p:cNvPr>
@@ -6626,7 +6454,7 @@
           <a:p>
             <a:fld id="{63289F7E-B80B-496E-81B4-D396C37C9454}" type="datetimeFigureOut">
               <a:rPr lang="pt-BR" smtClean="0"/>
-              <a:t>13/05/2025</a:t>
+              <a:t>14/05/2025</a:t>
             </a:fld>
             <a:endParaRPr lang="pt-BR"/>
           </a:p>
@@ -6637,7 +6465,7 @@
           <p:cNvPr id="5" name="Espaço Reservado para Rodapé 4">
             <a:extLst>
               <a:ext uri="{FF2B5EF4-FFF2-40B4-BE49-F238E27FC236}">
-                <a16:creationId xmlns="" xmlns:a16="http://schemas.microsoft.com/office/drawing/2014/main" id="{BDCAB18F-8715-4465-A940-F9C193A2ACE9}"/>
+                <a16:creationId xmlns:a16="http://schemas.microsoft.com/office/drawing/2014/main" id="{BDCAB18F-8715-4465-A940-F9C193A2ACE9}"/>
               </a:ext>
             </a:extLst>
           </p:cNvPr>
@@ -6662,7 +6490,7 @@
           <p:cNvPr id="6" name="Espaço Reservado para Número de Slide 5">
             <a:extLst>
               <a:ext uri="{FF2B5EF4-FFF2-40B4-BE49-F238E27FC236}">
-                <a16:creationId xmlns="" xmlns:a16="http://schemas.microsoft.com/office/drawing/2014/main" id="{353466C6-8248-429F-8056-FF040BF509EB}"/>
+                <a16:creationId xmlns:a16="http://schemas.microsoft.com/office/drawing/2014/main" id="{353466C6-8248-429F-8056-FF040BF509EB}"/>
               </a:ext>
             </a:extLst>
           </p:cNvPr>
@@ -6680,7 +6508,7 @@
           <a:p>
             <a:fld id="{1A7E88B7-70CE-4035-AE73-13FA6FB985D4}" type="slidenum">
               <a:rPr lang="pt-BR" smtClean="0"/>
-              <a:t>‹nº›</a:t>
+              <a:t>‹#›</a:t>
             </a:fld>
             <a:endParaRPr lang="pt-BR"/>
           </a:p>
@@ -6721,7 +6549,7 @@
           <p:cNvPr id="2" name="Título 1">
             <a:extLst>
               <a:ext uri="{FF2B5EF4-FFF2-40B4-BE49-F238E27FC236}">
-                <a16:creationId xmlns="" xmlns:a16="http://schemas.microsoft.com/office/drawing/2014/main" id="{BC7BB9F0-F14B-4A91-B2B7-35BC47FE4DE7}"/>
+                <a16:creationId xmlns:a16="http://schemas.microsoft.com/office/drawing/2014/main" id="{BC7BB9F0-F14B-4A91-B2B7-35BC47FE4DE7}"/>
               </a:ext>
             </a:extLst>
           </p:cNvPr>
@@ -6749,7 +6577,7 @@
           <p:cNvPr id="3" name="Espaço Reservado para Conteúdo 2">
             <a:extLst>
               <a:ext uri="{FF2B5EF4-FFF2-40B4-BE49-F238E27FC236}">
-                <a16:creationId xmlns="" xmlns:a16="http://schemas.microsoft.com/office/drawing/2014/main" id="{EC1FC1C4-73DA-47A6-8496-B0B457F7D39A}"/>
+                <a16:creationId xmlns:a16="http://schemas.microsoft.com/office/drawing/2014/main" id="{EC1FC1C4-73DA-47A6-8496-B0B457F7D39A}"/>
               </a:ext>
             </a:extLst>
           </p:cNvPr>
@@ -6811,7 +6639,7 @@
           <p:cNvPr id="4" name="Espaço Reservado para Conteúdo 3">
             <a:extLst>
               <a:ext uri="{FF2B5EF4-FFF2-40B4-BE49-F238E27FC236}">
-                <a16:creationId xmlns="" xmlns:a16="http://schemas.microsoft.com/office/drawing/2014/main" id="{E92F06A8-A449-4D92-9912-76873E529B38}"/>
+                <a16:creationId xmlns:a16="http://schemas.microsoft.com/office/drawing/2014/main" id="{E92F06A8-A449-4D92-9912-76873E529B38}"/>
               </a:ext>
             </a:extLst>
           </p:cNvPr>
@@ -6873,7 +6701,7 @@
           <p:cNvPr id="5" name="Espaço Reservado para Data 4">
             <a:extLst>
               <a:ext uri="{FF2B5EF4-FFF2-40B4-BE49-F238E27FC236}">
-                <a16:creationId xmlns="" xmlns:a16="http://schemas.microsoft.com/office/drawing/2014/main" id="{938070A4-BC2F-4D55-BD8D-DEAF11BB9EE9}"/>
+                <a16:creationId xmlns:a16="http://schemas.microsoft.com/office/drawing/2014/main" id="{938070A4-BC2F-4D55-BD8D-DEAF11BB9EE9}"/>
               </a:ext>
             </a:extLst>
           </p:cNvPr>
@@ -6891,7 +6719,7 @@
           <a:p>
             <a:fld id="{63289F7E-B80B-496E-81B4-D396C37C9454}" type="datetimeFigureOut">
               <a:rPr lang="pt-BR" smtClean="0"/>
-              <a:t>13/05/2025</a:t>
+              <a:t>14/05/2025</a:t>
             </a:fld>
             <a:endParaRPr lang="pt-BR"/>
           </a:p>
@@ -6902,7 +6730,7 @@
           <p:cNvPr id="6" name="Espaço Reservado para Rodapé 5">
             <a:extLst>
               <a:ext uri="{FF2B5EF4-FFF2-40B4-BE49-F238E27FC236}">
-                <a16:creationId xmlns="" xmlns:a16="http://schemas.microsoft.com/office/drawing/2014/main" id="{45CC2DB8-844A-465F-BA9A-7734C80C7F43}"/>
+                <a16:creationId xmlns:a16="http://schemas.microsoft.com/office/drawing/2014/main" id="{45CC2DB8-844A-465F-BA9A-7734C80C7F43}"/>
               </a:ext>
             </a:extLst>
           </p:cNvPr>
@@ -6927,7 +6755,7 @@
           <p:cNvPr id="7" name="Espaço Reservado para Número de Slide 6">
             <a:extLst>
               <a:ext uri="{FF2B5EF4-FFF2-40B4-BE49-F238E27FC236}">
-                <a16:creationId xmlns="" xmlns:a16="http://schemas.microsoft.com/office/drawing/2014/main" id="{4CC606A8-097B-4040-94E0-CD8C88280D8F}"/>
+                <a16:creationId xmlns:a16="http://schemas.microsoft.com/office/drawing/2014/main" id="{4CC606A8-097B-4040-94E0-CD8C88280D8F}"/>
               </a:ext>
             </a:extLst>
           </p:cNvPr>
@@ -6945,7 +6773,7 @@
           <a:p>
             <a:fld id="{1A7E88B7-70CE-4035-AE73-13FA6FB985D4}" type="slidenum">
               <a:rPr lang="pt-BR" smtClean="0"/>
-              <a:t>‹nº›</a:t>
+              <a:t>‹#›</a:t>
             </a:fld>
             <a:endParaRPr lang="pt-BR"/>
           </a:p>
@@ -6986,7 +6814,7 @@
           <p:cNvPr id="2" name="Título 1">
             <a:extLst>
               <a:ext uri="{FF2B5EF4-FFF2-40B4-BE49-F238E27FC236}">
-                <a16:creationId xmlns="" xmlns:a16="http://schemas.microsoft.com/office/drawing/2014/main" id="{76D66686-0143-4CB6-8C09-BA326F1E7ACA}"/>
+                <a16:creationId xmlns:a16="http://schemas.microsoft.com/office/drawing/2014/main" id="{76D66686-0143-4CB6-8C09-BA326F1E7ACA}"/>
               </a:ext>
             </a:extLst>
           </p:cNvPr>
@@ -7019,7 +6847,7 @@
           <p:cNvPr id="3" name="Espaço Reservado para Texto 2">
             <a:extLst>
               <a:ext uri="{FF2B5EF4-FFF2-40B4-BE49-F238E27FC236}">
-                <a16:creationId xmlns="" xmlns:a16="http://schemas.microsoft.com/office/drawing/2014/main" id="{0227AB85-F59E-4BCE-B846-4FA0992C2F23}"/>
+                <a16:creationId xmlns:a16="http://schemas.microsoft.com/office/drawing/2014/main" id="{0227AB85-F59E-4BCE-B846-4FA0992C2F23}"/>
               </a:ext>
             </a:extLst>
           </p:cNvPr>
@@ -7090,7 +6918,7 @@
           <p:cNvPr id="4" name="Espaço Reservado para Conteúdo 3">
             <a:extLst>
               <a:ext uri="{FF2B5EF4-FFF2-40B4-BE49-F238E27FC236}">
-                <a16:creationId xmlns="" xmlns:a16="http://schemas.microsoft.com/office/drawing/2014/main" id="{3373456C-7319-4D0A-827D-D29F6B083F5D}"/>
+                <a16:creationId xmlns:a16="http://schemas.microsoft.com/office/drawing/2014/main" id="{3373456C-7319-4D0A-827D-D29F6B083F5D}"/>
               </a:ext>
             </a:extLst>
           </p:cNvPr>
@@ -7152,7 +6980,7 @@
           <p:cNvPr id="5" name="Espaço Reservado para Texto 4">
             <a:extLst>
               <a:ext uri="{FF2B5EF4-FFF2-40B4-BE49-F238E27FC236}">
-                <a16:creationId xmlns="" xmlns:a16="http://schemas.microsoft.com/office/drawing/2014/main" id="{4CD109D0-2E83-4262-8029-A871CEC47406}"/>
+                <a16:creationId xmlns:a16="http://schemas.microsoft.com/office/drawing/2014/main" id="{4CD109D0-2E83-4262-8029-A871CEC47406}"/>
               </a:ext>
             </a:extLst>
           </p:cNvPr>
@@ -7223,7 +7051,7 @@
           <p:cNvPr id="6" name="Espaço Reservado para Conteúdo 5">
             <a:extLst>
               <a:ext uri="{FF2B5EF4-FFF2-40B4-BE49-F238E27FC236}">
-                <a16:creationId xmlns="" xmlns:a16="http://schemas.microsoft.com/office/drawing/2014/main" id="{AD706E3A-CFBB-4A6C-A65F-D0360A9E74FE}"/>
+                <a16:creationId xmlns:a16="http://schemas.microsoft.com/office/drawing/2014/main" id="{AD706E3A-CFBB-4A6C-A65F-D0360A9E74FE}"/>
               </a:ext>
             </a:extLst>
           </p:cNvPr>
@@ -7285,7 +7113,7 @@
           <p:cNvPr id="7" name="Espaço Reservado para Data 6">
             <a:extLst>
               <a:ext uri="{FF2B5EF4-FFF2-40B4-BE49-F238E27FC236}">
-                <a16:creationId xmlns="" xmlns:a16="http://schemas.microsoft.com/office/drawing/2014/main" id="{4172C0E5-5AF0-4805-BB51-443733CD2BD5}"/>
+                <a16:creationId xmlns:a16="http://schemas.microsoft.com/office/drawing/2014/main" id="{4172C0E5-5AF0-4805-BB51-443733CD2BD5}"/>
               </a:ext>
             </a:extLst>
           </p:cNvPr>
@@ -7303,7 +7131,7 @@
           <a:p>
             <a:fld id="{63289F7E-B80B-496E-81B4-D396C37C9454}" type="datetimeFigureOut">
               <a:rPr lang="pt-BR" smtClean="0"/>
-              <a:t>13/05/2025</a:t>
+              <a:t>14/05/2025</a:t>
             </a:fld>
             <a:endParaRPr lang="pt-BR"/>
           </a:p>
@@ -7314,7 +7142,7 @@
           <p:cNvPr id="8" name="Espaço Reservado para Rodapé 7">
             <a:extLst>
               <a:ext uri="{FF2B5EF4-FFF2-40B4-BE49-F238E27FC236}">
-                <a16:creationId xmlns="" xmlns:a16="http://schemas.microsoft.com/office/drawing/2014/main" id="{0E801648-156F-497E-99CF-797DF48051E1}"/>
+                <a16:creationId xmlns:a16="http://schemas.microsoft.com/office/drawing/2014/main" id="{0E801648-156F-497E-99CF-797DF48051E1}"/>
               </a:ext>
             </a:extLst>
           </p:cNvPr>
@@ -7339,7 +7167,7 @@
           <p:cNvPr id="9" name="Espaço Reservado para Número de Slide 8">
             <a:extLst>
               <a:ext uri="{FF2B5EF4-FFF2-40B4-BE49-F238E27FC236}">
-                <a16:creationId xmlns="" xmlns:a16="http://schemas.microsoft.com/office/drawing/2014/main" id="{EEE23D32-80E7-4796-A137-66BF842E4B53}"/>
+                <a16:creationId xmlns:a16="http://schemas.microsoft.com/office/drawing/2014/main" id="{EEE23D32-80E7-4796-A137-66BF842E4B53}"/>
               </a:ext>
             </a:extLst>
           </p:cNvPr>
@@ -7357,7 +7185,7 @@
           <a:p>
             <a:fld id="{1A7E88B7-70CE-4035-AE73-13FA6FB985D4}" type="slidenum">
               <a:rPr lang="pt-BR" smtClean="0"/>
-              <a:t>‹nº›</a:t>
+              <a:t>‹#›</a:t>
             </a:fld>
             <a:endParaRPr lang="pt-BR"/>
           </a:p>
@@ -7398,7 +7226,7 @@
           <p:cNvPr id="2" name="Título 1">
             <a:extLst>
               <a:ext uri="{FF2B5EF4-FFF2-40B4-BE49-F238E27FC236}">
-                <a16:creationId xmlns="" xmlns:a16="http://schemas.microsoft.com/office/drawing/2014/main" id="{2BCE2379-C78F-47E1-8CFC-B846E7AF148D}"/>
+                <a16:creationId xmlns:a16="http://schemas.microsoft.com/office/drawing/2014/main" id="{2BCE2379-C78F-47E1-8CFC-B846E7AF148D}"/>
               </a:ext>
             </a:extLst>
           </p:cNvPr>
@@ -7426,7 +7254,7 @@
           <p:cNvPr id="3" name="Espaço Reservado para Data 2">
             <a:extLst>
               <a:ext uri="{FF2B5EF4-FFF2-40B4-BE49-F238E27FC236}">
-                <a16:creationId xmlns="" xmlns:a16="http://schemas.microsoft.com/office/drawing/2014/main" id="{342600A9-7F92-4E22-9D94-E4717252A817}"/>
+                <a16:creationId xmlns:a16="http://schemas.microsoft.com/office/drawing/2014/main" id="{342600A9-7F92-4E22-9D94-E4717252A817}"/>
               </a:ext>
             </a:extLst>
           </p:cNvPr>
@@ -7444,7 +7272,7 @@
           <a:p>
             <a:fld id="{63289F7E-B80B-496E-81B4-D396C37C9454}" type="datetimeFigureOut">
               <a:rPr lang="pt-BR" smtClean="0"/>
-              <a:t>13/05/2025</a:t>
+              <a:t>14/05/2025</a:t>
             </a:fld>
             <a:endParaRPr lang="pt-BR"/>
           </a:p>
@@ -7455,7 +7283,7 @@
           <p:cNvPr id="4" name="Espaço Reservado para Rodapé 3">
             <a:extLst>
               <a:ext uri="{FF2B5EF4-FFF2-40B4-BE49-F238E27FC236}">
-                <a16:creationId xmlns="" xmlns:a16="http://schemas.microsoft.com/office/drawing/2014/main" id="{192E6BED-F546-40CC-A2DF-99CBA853654E}"/>
+                <a16:creationId xmlns:a16="http://schemas.microsoft.com/office/drawing/2014/main" id="{192E6BED-F546-40CC-A2DF-99CBA853654E}"/>
               </a:ext>
             </a:extLst>
           </p:cNvPr>
@@ -7480,7 +7308,7 @@
           <p:cNvPr id="5" name="Espaço Reservado para Número de Slide 4">
             <a:extLst>
               <a:ext uri="{FF2B5EF4-FFF2-40B4-BE49-F238E27FC236}">
-                <a16:creationId xmlns="" xmlns:a16="http://schemas.microsoft.com/office/drawing/2014/main" id="{6091CC40-A8C4-4063-80EB-CC5099621678}"/>
+                <a16:creationId xmlns:a16="http://schemas.microsoft.com/office/drawing/2014/main" id="{6091CC40-A8C4-4063-80EB-CC5099621678}"/>
               </a:ext>
             </a:extLst>
           </p:cNvPr>
@@ -7498,7 +7326,7 @@
           <a:p>
             <a:fld id="{1A7E88B7-70CE-4035-AE73-13FA6FB985D4}" type="slidenum">
               <a:rPr lang="pt-BR" smtClean="0"/>
-              <a:t>‹nº›</a:t>
+              <a:t>‹#›</a:t>
             </a:fld>
             <a:endParaRPr lang="pt-BR"/>
           </a:p>
@@ -7539,7 +7367,7 @@
           <p:cNvPr id="2" name="Espaço Reservado para Data 1">
             <a:extLst>
               <a:ext uri="{FF2B5EF4-FFF2-40B4-BE49-F238E27FC236}">
-                <a16:creationId xmlns="" xmlns:a16="http://schemas.microsoft.com/office/drawing/2014/main" id="{DD19515C-212C-4EAE-84A3-8FF4BC844F1B}"/>
+                <a16:creationId xmlns:a16="http://schemas.microsoft.com/office/drawing/2014/main" id="{DD19515C-212C-4EAE-84A3-8FF4BC844F1B}"/>
               </a:ext>
             </a:extLst>
           </p:cNvPr>
@@ -7557,7 +7385,7 @@
           <a:p>
             <a:fld id="{63289F7E-B80B-496E-81B4-D396C37C9454}" type="datetimeFigureOut">
               <a:rPr lang="pt-BR" smtClean="0"/>
-              <a:t>13/05/2025</a:t>
+              <a:t>14/05/2025</a:t>
             </a:fld>
             <a:endParaRPr lang="pt-BR"/>
           </a:p>
@@ -7568,7 +7396,7 @@
           <p:cNvPr id="3" name="Espaço Reservado para Rodapé 2">
             <a:extLst>
               <a:ext uri="{FF2B5EF4-FFF2-40B4-BE49-F238E27FC236}">
-                <a16:creationId xmlns="" xmlns:a16="http://schemas.microsoft.com/office/drawing/2014/main" id="{94D3D120-B3E8-4C96-861D-7A4F12F49B3A}"/>
+                <a16:creationId xmlns:a16="http://schemas.microsoft.com/office/drawing/2014/main" id="{94D3D120-B3E8-4C96-861D-7A4F12F49B3A}"/>
               </a:ext>
             </a:extLst>
           </p:cNvPr>
@@ -7593,7 +7421,7 @@
           <p:cNvPr id="4" name="Espaço Reservado para Número de Slide 3">
             <a:extLst>
               <a:ext uri="{FF2B5EF4-FFF2-40B4-BE49-F238E27FC236}">
-                <a16:creationId xmlns="" xmlns:a16="http://schemas.microsoft.com/office/drawing/2014/main" id="{42E49B68-FA1B-468B-9F17-D5C09243D454}"/>
+                <a16:creationId xmlns:a16="http://schemas.microsoft.com/office/drawing/2014/main" id="{42E49B68-FA1B-468B-9F17-D5C09243D454}"/>
               </a:ext>
             </a:extLst>
           </p:cNvPr>
@@ -7611,7 +7439,7 @@
           <a:p>
             <a:fld id="{1A7E88B7-70CE-4035-AE73-13FA6FB985D4}" type="slidenum">
               <a:rPr lang="pt-BR" smtClean="0"/>
-              <a:t>‹nº›</a:t>
+              <a:t>‹#›</a:t>
             </a:fld>
             <a:endParaRPr lang="pt-BR"/>
           </a:p>
@@ -7652,7 +7480,7 @@
           <p:cNvPr id="2" name="Título 1">
             <a:extLst>
               <a:ext uri="{FF2B5EF4-FFF2-40B4-BE49-F238E27FC236}">
-                <a16:creationId xmlns="" xmlns:a16="http://schemas.microsoft.com/office/drawing/2014/main" id="{1C17BCBE-A897-4319-85EC-D87909C24980}"/>
+                <a16:creationId xmlns:a16="http://schemas.microsoft.com/office/drawing/2014/main" id="{1C17BCBE-A897-4319-85EC-D87909C24980}"/>
               </a:ext>
             </a:extLst>
           </p:cNvPr>
@@ -7689,7 +7517,7 @@
           <p:cNvPr id="3" name="Espaço Reservado para Conteúdo 2">
             <a:extLst>
               <a:ext uri="{FF2B5EF4-FFF2-40B4-BE49-F238E27FC236}">
-                <a16:creationId xmlns="" xmlns:a16="http://schemas.microsoft.com/office/drawing/2014/main" id="{4226F885-0204-4913-868B-4B8B82576F17}"/>
+                <a16:creationId xmlns:a16="http://schemas.microsoft.com/office/drawing/2014/main" id="{4226F885-0204-4913-868B-4B8B82576F17}"/>
               </a:ext>
             </a:extLst>
           </p:cNvPr>
@@ -7779,7 +7607,7 @@
           <p:cNvPr id="4" name="Espaço Reservado para Texto 3">
             <a:extLst>
               <a:ext uri="{FF2B5EF4-FFF2-40B4-BE49-F238E27FC236}">
-                <a16:creationId xmlns="" xmlns:a16="http://schemas.microsoft.com/office/drawing/2014/main" id="{00F9F784-A858-441B-8AB5-697098141751}"/>
+                <a16:creationId xmlns:a16="http://schemas.microsoft.com/office/drawing/2014/main" id="{00F9F784-A858-441B-8AB5-697098141751}"/>
               </a:ext>
             </a:extLst>
           </p:cNvPr>
@@ -7850,7 +7678,7 @@
           <p:cNvPr id="5" name="Espaço Reservado para Data 4">
             <a:extLst>
               <a:ext uri="{FF2B5EF4-FFF2-40B4-BE49-F238E27FC236}">
-                <a16:creationId xmlns="" xmlns:a16="http://schemas.microsoft.com/office/drawing/2014/main" id="{A4DC363A-5000-472E-8B17-02E7DCB8840A}"/>
+                <a16:creationId xmlns:a16="http://schemas.microsoft.com/office/drawing/2014/main" id="{A4DC363A-5000-472E-8B17-02E7DCB8840A}"/>
               </a:ext>
             </a:extLst>
           </p:cNvPr>
@@ -7868,7 +7696,7 @@
           <a:p>
             <a:fld id="{63289F7E-B80B-496E-81B4-D396C37C9454}" type="datetimeFigureOut">
               <a:rPr lang="pt-BR" smtClean="0"/>
-              <a:t>13/05/2025</a:t>
+              <a:t>14/05/2025</a:t>
             </a:fld>
             <a:endParaRPr lang="pt-BR"/>
           </a:p>
@@ -7879,7 +7707,7 @@
           <p:cNvPr id="6" name="Espaço Reservado para Rodapé 5">
             <a:extLst>
               <a:ext uri="{FF2B5EF4-FFF2-40B4-BE49-F238E27FC236}">
-                <a16:creationId xmlns="" xmlns:a16="http://schemas.microsoft.com/office/drawing/2014/main" id="{5548425D-2C21-4C56-BAD4-662978775C28}"/>
+                <a16:creationId xmlns:a16="http://schemas.microsoft.com/office/drawing/2014/main" id="{5548425D-2C21-4C56-BAD4-662978775C28}"/>
               </a:ext>
             </a:extLst>
           </p:cNvPr>
@@ -7904,7 +7732,7 @@
           <p:cNvPr id="7" name="Espaço Reservado para Número de Slide 6">
             <a:extLst>
               <a:ext uri="{FF2B5EF4-FFF2-40B4-BE49-F238E27FC236}">
-                <a16:creationId xmlns="" xmlns:a16="http://schemas.microsoft.com/office/drawing/2014/main" id="{C63E9726-E64C-42B2-AE8A-8C235A956B48}"/>
+                <a16:creationId xmlns:a16="http://schemas.microsoft.com/office/drawing/2014/main" id="{C63E9726-E64C-42B2-AE8A-8C235A956B48}"/>
               </a:ext>
             </a:extLst>
           </p:cNvPr>
@@ -7922,7 +7750,7 @@
           <a:p>
             <a:fld id="{1A7E88B7-70CE-4035-AE73-13FA6FB985D4}" type="slidenum">
               <a:rPr lang="pt-BR" smtClean="0"/>
-              <a:t>‹nº›</a:t>
+              <a:t>‹#›</a:t>
             </a:fld>
             <a:endParaRPr lang="pt-BR"/>
           </a:p>
@@ -7963,7 +7791,7 @@
           <p:cNvPr id="2" name="Título 1">
             <a:extLst>
               <a:ext uri="{FF2B5EF4-FFF2-40B4-BE49-F238E27FC236}">
-                <a16:creationId xmlns="" xmlns:a16="http://schemas.microsoft.com/office/drawing/2014/main" id="{11086A78-3E74-450C-96A6-CA8AC37AF772}"/>
+                <a16:creationId xmlns:a16="http://schemas.microsoft.com/office/drawing/2014/main" id="{11086A78-3E74-450C-96A6-CA8AC37AF772}"/>
               </a:ext>
             </a:extLst>
           </p:cNvPr>
@@ -8000,7 +7828,7 @@
           <p:cNvPr id="3" name="Espaço Reservado para Imagem 2">
             <a:extLst>
               <a:ext uri="{FF2B5EF4-FFF2-40B4-BE49-F238E27FC236}">
-                <a16:creationId xmlns="" xmlns:a16="http://schemas.microsoft.com/office/drawing/2014/main" id="{5F5B7312-975A-4DBC-9B2F-3652ADA006FD}"/>
+                <a16:creationId xmlns:a16="http://schemas.microsoft.com/office/drawing/2014/main" id="{5F5B7312-975A-4DBC-9B2F-3652ADA006FD}"/>
               </a:ext>
             </a:extLst>
           </p:cNvPr>
@@ -8067,7 +7895,7 @@
           <p:cNvPr id="4" name="Espaço Reservado para Texto 3">
             <a:extLst>
               <a:ext uri="{FF2B5EF4-FFF2-40B4-BE49-F238E27FC236}">
-                <a16:creationId xmlns="" xmlns:a16="http://schemas.microsoft.com/office/drawing/2014/main" id="{AAF805F5-1DFF-41C6-944C-7D79FE0D0963}"/>
+                <a16:creationId xmlns:a16="http://schemas.microsoft.com/office/drawing/2014/main" id="{AAF805F5-1DFF-41C6-944C-7D79FE0D0963}"/>
               </a:ext>
             </a:extLst>
           </p:cNvPr>
@@ -8138,7 +7966,7 @@
           <p:cNvPr id="5" name="Espaço Reservado para Data 4">
             <a:extLst>
               <a:ext uri="{FF2B5EF4-FFF2-40B4-BE49-F238E27FC236}">
-                <a16:creationId xmlns="" xmlns:a16="http://schemas.microsoft.com/office/drawing/2014/main" id="{02113D81-8665-4516-BD81-C6A1F254EECD}"/>
+                <a16:creationId xmlns:a16="http://schemas.microsoft.com/office/drawing/2014/main" id="{02113D81-8665-4516-BD81-C6A1F254EECD}"/>
               </a:ext>
             </a:extLst>
           </p:cNvPr>
@@ -8156,7 +7984,7 @@
           <a:p>
             <a:fld id="{63289F7E-B80B-496E-81B4-D396C37C9454}" type="datetimeFigureOut">
               <a:rPr lang="pt-BR" smtClean="0"/>
-              <a:t>13/05/2025</a:t>
+              <a:t>14/05/2025</a:t>
             </a:fld>
             <a:endParaRPr lang="pt-BR"/>
           </a:p>
@@ -8167,7 +7995,7 @@
           <p:cNvPr id="6" name="Espaço Reservado para Rodapé 5">
             <a:extLst>
               <a:ext uri="{FF2B5EF4-FFF2-40B4-BE49-F238E27FC236}">
-                <a16:creationId xmlns="" xmlns:a16="http://schemas.microsoft.com/office/drawing/2014/main" id="{2B00C88B-FF32-40AA-A187-727D96FD7862}"/>
+                <a16:creationId xmlns:a16="http://schemas.microsoft.com/office/drawing/2014/main" id="{2B00C88B-FF32-40AA-A187-727D96FD7862}"/>
               </a:ext>
             </a:extLst>
           </p:cNvPr>
@@ -8192,7 +8020,7 @@
           <p:cNvPr id="7" name="Espaço Reservado para Número de Slide 6">
             <a:extLst>
               <a:ext uri="{FF2B5EF4-FFF2-40B4-BE49-F238E27FC236}">
-                <a16:creationId xmlns="" xmlns:a16="http://schemas.microsoft.com/office/drawing/2014/main" id="{A04D1A2D-69F7-4B8F-A730-BC26DC340BA6}"/>
+                <a16:creationId xmlns:a16="http://schemas.microsoft.com/office/drawing/2014/main" id="{A04D1A2D-69F7-4B8F-A730-BC26DC340BA6}"/>
               </a:ext>
             </a:extLst>
           </p:cNvPr>
@@ -8210,7 +8038,7 @@
           <a:p>
             <a:fld id="{1A7E88B7-70CE-4035-AE73-13FA6FB985D4}" type="slidenum">
               <a:rPr lang="pt-BR" smtClean="0"/>
-              <a:t>‹nº›</a:t>
+              <a:t>‹#›</a:t>
             </a:fld>
             <a:endParaRPr lang="pt-BR"/>
           </a:p>
@@ -8256,7 +8084,7 @@
           <p:cNvPr id="2" name="Espaço Reservado para Título 1">
             <a:extLst>
               <a:ext uri="{FF2B5EF4-FFF2-40B4-BE49-F238E27FC236}">
-                <a16:creationId xmlns="" xmlns:a16="http://schemas.microsoft.com/office/drawing/2014/main" id="{E69A0273-1966-4A1B-9370-4C1CE5036371}"/>
+                <a16:creationId xmlns:a16="http://schemas.microsoft.com/office/drawing/2014/main" id="{E69A0273-1966-4A1B-9370-4C1CE5036371}"/>
               </a:ext>
             </a:extLst>
           </p:cNvPr>
@@ -8294,7 +8122,7 @@
           <p:cNvPr id="3" name="Espaço Reservado para Texto 2">
             <a:extLst>
               <a:ext uri="{FF2B5EF4-FFF2-40B4-BE49-F238E27FC236}">
-                <a16:creationId xmlns="" xmlns:a16="http://schemas.microsoft.com/office/drawing/2014/main" id="{3B9CF87A-0448-49A7-AB25-EBC1D56A40EF}"/>
+                <a16:creationId xmlns:a16="http://schemas.microsoft.com/office/drawing/2014/main" id="{3B9CF87A-0448-49A7-AB25-EBC1D56A40EF}"/>
               </a:ext>
             </a:extLst>
           </p:cNvPr>
@@ -8361,7 +8189,7 @@
           <p:cNvPr id="4" name="Espaço Reservado para Data 3">
             <a:extLst>
               <a:ext uri="{FF2B5EF4-FFF2-40B4-BE49-F238E27FC236}">
-                <a16:creationId xmlns="" xmlns:a16="http://schemas.microsoft.com/office/drawing/2014/main" id="{2EF7B1F2-BB5A-44D0-816D-16AD2C71430E}"/>
+                <a16:creationId xmlns:a16="http://schemas.microsoft.com/office/drawing/2014/main" id="{2EF7B1F2-BB5A-44D0-816D-16AD2C71430E}"/>
               </a:ext>
             </a:extLst>
           </p:cNvPr>
@@ -8397,7 +8225,7 @@
           <a:p>
             <a:fld id="{63289F7E-B80B-496E-81B4-D396C37C9454}" type="datetimeFigureOut">
               <a:rPr lang="pt-BR" smtClean="0"/>
-              <a:t>13/05/2025</a:t>
+              <a:t>14/05/2025</a:t>
             </a:fld>
             <a:endParaRPr lang="pt-BR"/>
           </a:p>
@@ -8408,7 +8236,7 @@
           <p:cNvPr id="5" name="Espaço Reservado para Rodapé 4">
             <a:extLst>
               <a:ext uri="{FF2B5EF4-FFF2-40B4-BE49-F238E27FC236}">
-                <a16:creationId xmlns="" xmlns:a16="http://schemas.microsoft.com/office/drawing/2014/main" id="{C703F94C-2CC8-4DAA-BC35-14FC3E841DCD}"/>
+                <a16:creationId xmlns:a16="http://schemas.microsoft.com/office/drawing/2014/main" id="{C703F94C-2CC8-4DAA-BC35-14FC3E841DCD}"/>
               </a:ext>
             </a:extLst>
           </p:cNvPr>
@@ -8451,7 +8279,7 @@
           <p:cNvPr id="6" name="Espaço Reservado para Número de Slide 5">
             <a:extLst>
               <a:ext uri="{FF2B5EF4-FFF2-40B4-BE49-F238E27FC236}">
-                <a16:creationId xmlns="" xmlns:a16="http://schemas.microsoft.com/office/drawing/2014/main" id="{64051336-7048-457A-8B61-D94291D71648}"/>
+                <a16:creationId xmlns:a16="http://schemas.microsoft.com/office/drawing/2014/main" id="{64051336-7048-457A-8B61-D94291D71648}"/>
               </a:ext>
             </a:extLst>
           </p:cNvPr>
@@ -8487,7 +8315,7 @@
           <a:p>
             <a:fld id="{1A7E88B7-70CE-4035-AE73-13FA6FB985D4}" type="slidenum">
               <a:rPr lang="pt-BR" smtClean="0"/>
-              <a:t>‹nº›</a:t>
+              <a:t>‹#›</a:t>
             </a:fld>
             <a:endParaRPr lang="pt-BR"/>
           </a:p>
@@ -8950,7 +8778,7 @@
             <a:fld id="{1D8BD707-D9CF-40AE-B4C6-C98DA3205C09}" type="datetimeFigureOut">
               <a:rPr lang="en-US" smtClean="0"/>
               <a:pPr/>
-              <a:t>5/13/2025</a:t>
+              <a:t>5/14/2025</a:t>
             </a:fld>
             <a:endParaRPr lang="en-US"/>
           </a:p>
@@ -9029,7 +8857,7 @@
             <a:fld id="{B6F15528-21DE-4FAA-801E-634DDDAF4B2B}" type="slidenum">
               <a:rPr lang="en-US" smtClean="0"/>
               <a:pPr/>
-              <a:t>‹nº›</a:t>
+              <a:t>‹#›</a:t>
             </a:fld>
             <a:endParaRPr lang="en-US"/>
           </a:p>
@@ -9331,7 +9159,7 @@
           <p:cNvPr id="2" name="Título 1">
             <a:extLst>
               <a:ext uri="{FF2B5EF4-FFF2-40B4-BE49-F238E27FC236}">
-                <a16:creationId xmlns="" xmlns:a16="http://schemas.microsoft.com/office/drawing/2014/main" id="{32666AC8-2E17-4DB4-B0F5-60C640CCFD2E}"/>
+                <a16:creationId xmlns:a16="http://schemas.microsoft.com/office/drawing/2014/main" id="{32666AC8-2E17-4DB4-B0F5-60C640CCFD2E}"/>
               </a:ext>
             </a:extLst>
           </p:cNvPr>
@@ -9366,10 +9194,6 @@
               <a:rPr lang="pt-BR" sz="5400" dirty="0"/>
               <a:t> Learning:</a:t>
             </a:r>
-            <a:r>
-              <a:rPr lang="pt-BR" dirty="0"/>
-              <a:t/>
-            </a:r>
             <a:br>
               <a:rPr lang="pt-BR" dirty="0"/>
             </a:br>
@@ -9385,7 +9209,7 @@
           <p:cNvPr id="1026" name="Picture 2" descr="Logo">
             <a:extLst>
               <a:ext uri="{FF2B5EF4-FFF2-40B4-BE49-F238E27FC236}">
-                <a16:creationId xmlns="" xmlns:a16="http://schemas.microsoft.com/office/drawing/2014/main" id="{3F2642E0-4F6A-4196-8F58-E77D36E9A33F}"/>
+                <a16:creationId xmlns:a16="http://schemas.microsoft.com/office/drawing/2014/main" id="{3F2642E0-4F6A-4196-8F58-E77D36E9A33F}"/>
               </a:ext>
             </a:extLst>
           </p:cNvPr>
@@ -9430,7 +9254,7 @@
           <p:cNvPr id="5122" name="Picture 2" descr="Image result for machine learning">
             <a:extLst>
               <a:ext uri="{FF2B5EF4-FFF2-40B4-BE49-F238E27FC236}">
-                <a16:creationId xmlns="" xmlns:a16="http://schemas.microsoft.com/office/drawing/2014/main" id="{810CE0A2-4102-44A6-A370-175E7896CDCB}"/>
+                <a16:creationId xmlns:a16="http://schemas.microsoft.com/office/drawing/2014/main" id="{810CE0A2-4102-44A6-A370-175E7896CDCB}"/>
               </a:ext>
             </a:extLst>
           </p:cNvPr>
@@ -9475,7 +9299,7 @@
           <p:cNvPr id="3" name="Picture 2" descr="IoT Group">
             <a:extLst>
               <a:ext uri="{FF2B5EF4-FFF2-40B4-BE49-F238E27FC236}">
-                <a16:creationId xmlns="" xmlns:a16="http://schemas.microsoft.com/office/drawing/2014/main" id="{AC034F57-E830-B6E7-6790-12FDBBDB2975}"/>
+                <a16:creationId xmlns:a16="http://schemas.microsoft.com/office/drawing/2014/main" id="{AC034F57-E830-B6E7-6790-12FDBBDB2975}"/>
               </a:ext>
             </a:extLst>
           </p:cNvPr>
@@ -9520,7 +9344,7 @@
           <p:cNvPr id="5" name="CaixaDeTexto 4">
             <a:extLst>
               <a:ext uri="{FF2B5EF4-FFF2-40B4-BE49-F238E27FC236}">
-                <a16:creationId xmlns="" xmlns:a16="http://schemas.microsoft.com/office/drawing/2014/main" id="{2D82026D-D2EA-05D7-61F2-DEE04704DB7E}"/>
+                <a16:creationId xmlns:a16="http://schemas.microsoft.com/office/drawing/2014/main" id="{2D82026D-D2EA-05D7-61F2-DEE04704DB7E}"/>
               </a:ext>
             </a:extLst>
           </p:cNvPr>
@@ -9591,7 +9415,7 @@
         <p:cNvPr id="1" name="">
           <a:extLst>
             <a:ext uri="{FF2B5EF4-FFF2-40B4-BE49-F238E27FC236}">
-              <a16:creationId xmlns="" xmlns:a16="http://schemas.microsoft.com/office/drawing/2014/main" id="{1F378FD1-DBF4-DCA8-F1BC-B3E89729AAC1}"/>
+              <a16:creationId xmlns:a16="http://schemas.microsoft.com/office/drawing/2014/main" id="{1F378FD1-DBF4-DCA8-F1BC-B3E89729AAC1}"/>
             </a:ext>
           </a:extLst>
         </p:cNvPr>
@@ -9611,7 +9435,7 @@
           <p:cNvPr id="2" name="Título 1">
             <a:extLst>
               <a:ext uri="{FF2B5EF4-FFF2-40B4-BE49-F238E27FC236}">
-                <a16:creationId xmlns="" xmlns:a16="http://schemas.microsoft.com/office/drawing/2014/main" id="{27002D84-8C44-E80A-6CE1-1C285A07DF3A}"/>
+                <a16:creationId xmlns:a16="http://schemas.microsoft.com/office/drawing/2014/main" id="{27002D84-8C44-E80A-6CE1-1C285A07DF3A}"/>
               </a:ext>
             </a:extLst>
           </p:cNvPr>
@@ -9651,7 +9475,7 @@
           <p:cNvPr id="3" name="AutoShape 2" descr="An example of graph signal reconstruction over wireless sensor network. |  Download Scientific Diagram">
             <a:extLst>
               <a:ext uri="{FF2B5EF4-FFF2-40B4-BE49-F238E27FC236}">
-                <a16:creationId xmlns="" xmlns:a16="http://schemas.microsoft.com/office/drawing/2014/main" id="{3E14BFEB-7725-6B4D-C589-A43632C98002}"/>
+                <a16:creationId xmlns:a16="http://schemas.microsoft.com/office/drawing/2014/main" id="{3E14BFEB-7725-6B4D-C589-A43632C98002}"/>
               </a:ext>
             </a:extLst>
           </p:cNvPr>
@@ -9702,7 +9526,7 @@
           <p:cNvPr id="7" name="AutoShape 4" descr="An example of graph signal reconstruction over wireless sensor network. |  Download Scientific Diagram">
             <a:extLst>
               <a:ext uri="{FF2B5EF4-FFF2-40B4-BE49-F238E27FC236}">
-                <a16:creationId xmlns="" xmlns:a16="http://schemas.microsoft.com/office/drawing/2014/main" id="{DDC94C5F-D329-0D03-2D55-303CAEA46575}"/>
+                <a16:creationId xmlns:a16="http://schemas.microsoft.com/office/drawing/2014/main" id="{DDC94C5F-D329-0D03-2D55-303CAEA46575}"/>
               </a:ext>
             </a:extLst>
           </p:cNvPr>
@@ -9753,7 +9577,7 @@
           <p:cNvPr id="4" name="Espaço Reservado para Conteúdo 3">
             <a:extLst>
               <a:ext uri="{FF2B5EF4-FFF2-40B4-BE49-F238E27FC236}">
-                <a16:creationId xmlns="" xmlns:a16="http://schemas.microsoft.com/office/drawing/2014/main" id="{0C330112-2C2B-538C-EFFC-0C5273ED92DF}"/>
+                <a16:creationId xmlns:a16="http://schemas.microsoft.com/office/drawing/2014/main" id="{0C330112-2C2B-538C-EFFC-0C5273ED92DF}"/>
               </a:ext>
             </a:extLst>
           </p:cNvPr>
@@ -9796,7 +9620,7 @@
           <p:cNvPr id="8" name="Picture 7">
             <a:extLst>
               <a:ext uri="{FF2B5EF4-FFF2-40B4-BE49-F238E27FC236}">
-                <a16:creationId xmlns="" xmlns:a16="http://schemas.microsoft.com/office/drawing/2014/main" id="{4A874BBD-11DB-833A-341F-F134DDD11108}"/>
+                <a16:creationId xmlns:a16="http://schemas.microsoft.com/office/drawing/2014/main" id="{4A874BBD-11DB-833A-341F-F134DDD11108}"/>
               </a:ext>
             </a:extLst>
           </p:cNvPr>
@@ -9826,7 +9650,7 @@
           <p:cNvPr id="10" name="TextBox 9">
             <a:extLst>
               <a:ext uri="{FF2B5EF4-FFF2-40B4-BE49-F238E27FC236}">
-                <a16:creationId xmlns="" xmlns:a16="http://schemas.microsoft.com/office/drawing/2014/main" id="{FB63ADD3-D956-76C5-F130-F38465877D67}"/>
+                <a16:creationId xmlns:a16="http://schemas.microsoft.com/office/drawing/2014/main" id="{FB63ADD3-D956-76C5-F130-F38465877D67}"/>
               </a:ext>
             </a:extLst>
           </p:cNvPr>
@@ -9897,7 +9721,7 @@
         <p:cNvPr id="1" name="">
           <a:extLst>
             <a:ext uri="{FF2B5EF4-FFF2-40B4-BE49-F238E27FC236}">
-              <a16:creationId xmlns="" xmlns:a16="http://schemas.microsoft.com/office/drawing/2014/main" id="{9BB75298-302A-6135-F195-096473EDA4DD}"/>
+              <a16:creationId xmlns:a16="http://schemas.microsoft.com/office/drawing/2014/main" id="{9BB75298-302A-6135-F195-096473EDA4DD}"/>
             </a:ext>
           </a:extLst>
         </p:cNvPr>
@@ -9917,7 +9741,7 @@
           <p:cNvPr id="2" name="Título 1">
             <a:extLst>
               <a:ext uri="{FF2B5EF4-FFF2-40B4-BE49-F238E27FC236}">
-                <a16:creationId xmlns="" xmlns:a16="http://schemas.microsoft.com/office/drawing/2014/main" id="{27828DF8-D69B-BFFF-D2B4-A925DD43717D}"/>
+                <a16:creationId xmlns:a16="http://schemas.microsoft.com/office/drawing/2014/main" id="{27828DF8-D69B-BFFF-D2B4-A925DD43717D}"/>
               </a:ext>
             </a:extLst>
           </p:cNvPr>
@@ -9957,7 +9781,7 @@
           <p:cNvPr id="3" name="AutoShape 2" descr="An example of graph signal reconstruction over wireless sensor network. |  Download Scientific Diagram">
             <a:extLst>
               <a:ext uri="{FF2B5EF4-FFF2-40B4-BE49-F238E27FC236}">
-                <a16:creationId xmlns="" xmlns:a16="http://schemas.microsoft.com/office/drawing/2014/main" id="{A4C3F9D2-0307-0450-4E41-55D3298E641B}"/>
+                <a16:creationId xmlns:a16="http://schemas.microsoft.com/office/drawing/2014/main" id="{A4C3F9D2-0307-0450-4E41-55D3298E641B}"/>
               </a:ext>
             </a:extLst>
           </p:cNvPr>
@@ -10008,7 +9832,7 @@
           <p:cNvPr id="7" name="AutoShape 4" descr="An example of graph signal reconstruction over wireless sensor network. |  Download Scientific Diagram">
             <a:extLst>
               <a:ext uri="{FF2B5EF4-FFF2-40B4-BE49-F238E27FC236}">
-                <a16:creationId xmlns="" xmlns:a16="http://schemas.microsoft.com/office/drawing/2014/main" id="{A5277E26-0B39-A36B-7447-436FDC3E025E}"/>
+                <a16:creationId xmlns:a16="http://schemas.microsoft.com/office/drawing/2014/main" id="{A5277E26-0B39-A36B-7447-436FDC3E025E}"/>
               </a:ext>
             </a:extLst>
           </p:cNvPr>
@@ -10059,7 +9883,7 @@
           <p:cNvPr id="4" name="Espaço Reservado para Conteúdo 3">
             <a:extLst>
               <a:ext uri="{FF2B5EF4-FFF2-40B4-BE49-F238E27FC236}">
-                <a16:creationId xmlns="" xmlns:a16="http://schemas.microsoft.com/office/drawing/2014/main" id="{83702F57-B420-BA92-57FC-CDEAF0E04638}"/>
+                <a16:creationId xmlns:a16="http://schemas.microsoft.com/office/drawing/2014/main" id="{83702F57-B420-BA92-57FC-CDEAF0E04638}"/>
               </a:ext>
             </a:extLst>
           </p:cNvPr>
@@ -10102,7 +9926,7 @@
           <p:cNvPr id="6" name="Picture 5">
             <a:extLst>
               <a:ext uri="{FF2B5EF4-FFF2-40B4-BE49-F238E27FC236}">
-                <a16:creationId xmlns="" xmlns:a16="http://schemas.microsoft.com/office/drawing/2014/main" id="{BE9E2474-44BE-43D0-EE2F-D03349050DA2}"/>
+                <a16:creationId xmlns:a16="http://schemas.microsoft.com/office/drawing/2014/main" id="{BE9E2474-44BE-43D0-EE2F-D03349050DA2}"/>
               </a:ext>
             </a:extLst>
           </p:cNvPr>
@@ -10132,7 +9956,7 @@
           <p:cNvPr id="10" name="TextBox 9">
             <a:extLst>
               <a:ext uri="{FF2B5EF4-FFF2-40B4-BE49-F238E27FC236}">
-                <a16:creationId xmlns="" xmlns:a16="http://schemas.microsoft.com/office/drawing/2014/main" id="{E7FEC406-7A7E-5D78-DF69-D2416A2375C3}"/>
+                <a16:creationId xmlns:a16="http://schemas.microsoft.com/office/drawing/2014/main" id="{E7FEC406-7A7E-5D78-DF69-D2416A2375C3}"/>
               </a:ext>
             </a:extLst>
           </p:cNvPr>
@@ -10203,7 +10027,7 @@
         <p:cNvPr id="1" name="">
           <a:extLst>
             <a:ext uri="{FF2B5EF4-FFF2-40B4-BE49-F238E27FC236}">
-              <a16:creationId xmlns="" xmlns:a16="http://schemas.microsoft.com/office/drawing/2014/main" id="{749972DB-1A29-C878-AC52-B084A233C66B}"/>
+              <a16:creationId xmlns:a16="http://schemas.microsoft.com/office/drawing/2014/main" id="{749972DB-1A29-C878-AC52-B084A233C66B}"/>
             </a:ext>
           </a:extLst>
         </p:cNvPr>
@@ -10223,7 +10047,7 @@
           <p:cNvPr id="2" name="Título 1">
             <a:extLst>
               <a:ext uri="{FF2B5EF4-FFF2-40B4-BE49-F238E27FC236}">
-                <a16:creationId xmlns="" xmlns:a16="http://schemas.microsoft.com/office/drawing/2014/main" id="{223F31A0-EB34-A3FB-D3AD-8E88098E62F1}"/>
+                <a16:creationId xmlns:a16="http://schemas.microsoft.com/office/drawing/2014/main" id="{223F31A0-EB34-A3FB-D3AD-8E88098E62F1}"/>
               </a:ext>
             </a:extLst>
           </p:cNvPr>
@@ -10263,7 +10087,7 @@
           <p:cNvPr id="3" name="AutoShape 2" descr="An example of graph signal reconstruction over wireless sensor network. |  Download Scientific Diagram">
             <a:extLst>
               <a:ext uri="{FF2B5EF4-FFF2-40B4-BE49-F238E27FC236}">
-                <a16:creationId xmlns="" xmlns:a16="http://schemas.microsoft.com/office/drawing/2014/main" id="{A22086E9-56E3-EC28-E48A-9069376FF074}"/>
+                <a16:creationId xmlns:a16="http://schemas.microsoft.com/office/drawing/2014/main" id="{A22086E9-56E3-EC28-E48A-9069376FF074}"/>
               </a:ext>
             </a:extLst>
           </p:cNvPr>
@@ -10314,7 +10138,7 @@
           <p:cNvPr id="7" name="AutoShape 4" descr="An example of graph signal reconstruction over wireless sensor network. |  Download Scientific Diagram">
             <a:extLst>
               <a:ext uri="{FF2B5EF4-FFF2-40B4-BE49-F238E27FC236}">
-                <a16:creationId xmlns="" xmlns:a16="http://schemas.microsoft.com/office/drawing/2014/main" id="{E1A13779-07EA-5350-121F-C4141832B952}"/>
+                <a16:creationId xmlns:a16="http://schemas.microsoft.com/office/drawing/2014/main" id="{E1A13779-07EA-5350-121F-C4141832B952}"/>
               </a:ext>
             </a:extLst>
           </p:cNvPr>
@@ -10365,7 +10189,7 @@
           <p:cNvPr id="4" name="Espaço Reservado para Conteúdo 3">
             <a:extLst>
               <a:ext uri="{FF2B5EF4-FFF2-40B4-BE49-F238E27FC236}">
-                <a16:creationId xmlns="" xmlns:a16="http://schemas.microsoft.com/office/drawing/2014/main" id="{B461F4C5-B5F4-E3F6-B686-4C94C38803D5}"/>
+                <a16:creationId xmlns:a16="http://schemas.microsoft.com/office/drawing/2014/main" id="{B461F4C5-B5F4-E3F6-B686-4C94C38803D5}"/>
               </a:ext>
             </a:extLst>
           </p:cNvPr>
@@ -10408,7 +10232,7 @@
           <p:cNvPr id="6" name="Picture 5">
             <a:extLst>
               <a:ext uri="{FF2B5EF4-FFF2-40B4-BE49-F238E27FC236}">
-                <a16:creationId xmlns="" xmlns:a16="http://schemas.microsoft.com/office/drawing/2014/main" id="{CD544109-9098-CA3C-766B-DFEB05AE1F38}"/>
+                <a16:creationId xmlns:a16="http://schemas.microsoft.com/office/drawing/2014/main" id="{CD544109-9098-CA3C-766B-DFEB05AE1F38}"/>
               </a:ext>
             </a:extLst>
           </p:cNvPr>
@@ -10438,7 +10262,7 @@
           <p:cNvPr id="9" name="TextBox 9">
             <a:extLst>
               <a:ext uri="{FF2B5EF4-FFF2-40B4-BE49-F238E27FC236}">
-                <a16:creationId xmlns="" xmlns:a16="http://schemas.microsoft.com/office/drawing/2014/main" id="{E7FEC406-7A7E-5D78-DF69-D2416A2375C3}"/>
+                <a16:creationId xmlns:a16="http://schemas.microsoft.com/office/drawing/2014/main" id="{E7FEC406-7A7E-5D78-DF69-D2416A2375C3}"/>
               </a:ext>
             </a:extLst>
           </p:cNvPr>
@@ -10509,7 +10333,7 @@
         <p:cNvPr id="1" name="">
           <a:extLst>
             <a:ext uri="{FF2B5EF4-FFF2-40B4-BE49-F238E27FC236}">
-              <a16:creationId xmlns="" xmlns:a16="http://schemas.microsoft.com/office/drawing/2014/main" id="{69317B56-95CF-5EB4-1950-84D108AD8D37}"/>
+              <a16:creationId xmlns:a16="http://schemas.microsoft.com/office/drawing/2014/main" id="{69317B56-95CF-5EB4-1950-84D108AD8D37}"/>
             </a:ext>
           </a:extLst>
         </p:cNvPr>
@@ -10529,7 +10353,7 @@
           <p:cNvPr id="2" name="Título 1">
             <a:extLst>
               <a:ext uri="{FF2B5EF4-FFF2-40B4-BE49-F238E27FC236}">
-                <a16:creationId xmlns="" xmlns:a16="http://schemas.microsoft.com/office/drawing/2014/main" id="{48642745-4759-3504-B537-1A643C25576D}"/>
+                <a16:creationId xmlns:a16="http://schemas.microsoft.com/office/drawing/2014/main" id="{48642745-4759-3504-B537-1A643C25576D}"/>
               </a:ext>
             </a:extLst>
           </p:cNvPr>
@@ -10569,7 +10393,7 @@
           <p:cNvPr id="3" name="AutoShape 2" descr="An example of graph signal reconstruction over wireless sensor network. |  Download Scientific Diagram">
             <a:extLst>
               <a:ext uri="{FF2B5EF4-FFF2-40B4-BE49-F238E27FC236}">
-                <a16:creationId xmlns="" xmlns:a16="http://schemas.microsoft.com/office/drawing/2014/main" id="{84E44FE8-BA6E-9F6F-1997-0AD869D77EFD}"/>
+                <a16:creationId xmlns:a16="http://schemas.microsoft.com/office/drawing/2014/main" id="{84E44FE8-BA6E-9F6F-1997-0AD869D77EFD}"/>
               </a:ext>
             </a:extLst>
           </p:cNvPr>
@@ -10620,7 +10444,7 @@
           <p:cNvPr id="7" name="AutoShape 4" descr="An example of graph signal reconstruction over wireless sensor network. |  Download Scientific Diagram">
             <a:extLst>
               <a:ext uri="{FF2B5EF4-FFF2-40B4-BE49-F238E27FC236}">
-                <a16:creationId xmlns="" xmlns:a16="http://schemas.microsoft.com/office/drawing/2014/main" id="{21DB31B1-11EA-8016-35EE-14EA7345F531}"/>
+                <a16:creationId xmlns:a16="http://schemas.microsoft.com/office/drawing/2014/main" id="{21DB31B1-11EA-8016-35EE-14EA7345F531}"/>
               </a:ext>
             </a:extLst>
           </p:cNvPr>
@@ -10671,7 +10495,7 @@
           <p:cNvPr id="4" name="Espaço Reservado para Conteúdo 3">
             <a:extLst>
               <a:ext uri="{FF2B5EF4-FFF2-40B4-BE49-F238E27FC236}">
-                <a16:creationId xmlns="" xmlns:a16="http://schemas.microsoft.com/office/drawing/2014/main" id="{63D17EBA-F020-2A71-B133-21937AD74F91}"/>
+                <a16:creationId xmlns:a16="http://schemas.microsoft.com/office/drawing/2014/main" id="{63D17EBA-F020-2A71-B133-21937AD74F91}"/>
               </a:ext>
             </a:extLst>
           </p:cNvPr>
@@ -10714,7 +10538,7 @@
           <p:cNvPr id="6" name="Picture 5">
             <a:extLst>
               <a:ext uri="{FF2B5EF4-FFF2-40B4-BE49-F238E27FC236}">
-                <a16:creationId xmlns="" xmlns:a16="http://schemas.microsoft.com/office/drawing/2014/main" id="{9F08A47C-C93C-D40B-F5DC-3C29F2EEEE60}"/>
+                <a16:creationId xmlns:a16="http://schemas.microsoft.com/office/drawing/2014/main" id="{9F08A47C-C93C-D40B-F5DC-3C29F2EEEE60}"/>
               </a:ext>
             </a:extLst>
           </p:cNvPr>
@@ -10744,7 +10568,7 @@
           <p:cNvPr id="8" name="TextBox 7">
             <a:extLst>
               <a:ext uri="{FF2B5EF4-FFF2-40B4-BE49-F238E27FC236}">
-                <a16:creationId xmlns="" xmlns:a16="http://schemas.microsoft.com/office/drawing/2014/main" id="{4376C1A9-3731-8BF9-861E-3D686FEA4F43}"/>
+                <a16:creationId xmlns:a16="http://schemas.microsoft.com/office/drawing/2014/main" id="{4376C1A9-3731-8BF9-861E-3D686FEA4F43}"/>
               </a:ext>
             </a:extLst>
           </p:cNvPr>
@@ -10913,7 +10737,7 @@
           <p:cNvPr id="2" name="Título 1">
             <a:extLst>
               <a:ext uri="{FF2B5EF4-FFF2-40B4-BE49-F238E27FC236}">
-                <a16:creationId xmlns="" xmlns:a16="http://schemas.microsoft.com/office/drawing/2014/main" id="{5F09B89C-3183-4D52-981A-62798DDFF2B8}"/>
+                <a16:creationId xmlns:a16="http://schemas.microsoft.com/office/drawing/2014/main" id="{5F09B89C-3183-4D52-981A-62798DDFF2B8}"/>
               </a:ext>
             </a:extLst>
           </p:cNvPr>
@@ -10948,7 +10772,7 @@
           <p:cNvPr id="3" name="AutoShape 2" descr="An example of graph signal reconstruction over wireless sensor network. |  Download Scientific Diagram">
             <a:extLst>
               <a:ext uri="{FF2B5EF4-FFF2-40B4-BE49-F238E27FC236}">
-                <a16:creationId xmlns="" xmlns:a16="http://schemas.microsoft.com/office/drawing/2014/main" id="{0166B4DD-D72A-4A54-94A7-2C38133837FD}"/>
+                <a16:creationId xmlns:a16="http://schemas.microsoft.com/office/drawing/2014/main" id="{0166B4DD-D72A-4A54-94A7-2C38133837FD}"/>
               </a:ext>
             </a:extLst>
           </p:cNvPr>
@@ -10999,7 +10823,7 @@
           <p:cNvPr id="7" name="AutoShape 4" descr="An example of graph signal reconstruction over wireless sensor network. |  Download Scientific Diagram">
             <a:extLst>
               <a:ext uri="{FF2B5EF4-FFF2-40B4-BE49-F238E27FC236}">
-                <a16:creationId xmlns="" xmlns:a16="http://schemas.microsoft.com/office/drawing/2014/main" id="{14C2B67D-81A1-457E-A410-FE4350A3CCA4}"/>
+                <a16:creationId xmlns:a16="http://schemas.microsoft.com/office/drawing/2014/main" id="{14C2B67D-81A1-457E-A410-FE4350A3CCA4}"/>
               </a:ext>
             </a:extLst>
           </p:cNvPr>
@@ -11050,7 +10874,7 @@
           <p:cNvPr id="1026" name="Picture 2" descr="Univariate Anomaly Detection | Anomaly Detection Algorithms">
             <a:extLst>
               <a:ext uri="{FF2B5EF4-FFF2-40B4-BE49-F238E27FC236}">
-                <a16:creationId xmlns="" xmlns:a16="http://schemas.microsoft.com/office/drawing/2014/main" id="{D6FF8611-2758-C1DA-8FC6-10C7681C129F}"/>
+                <a16:creationId xmlns:a16="http://schemas.microsoft.com/office/drawing/2014/main" id="{D6FF8611-2758-C1DA-8FC6-10C7681C129F}"/>
               </a:ext>
             </a:extLst>
           </p:cNvPr>
@@ -11097,7 +10921,7 @@
           <p:cNvPr id="4" name="Espaço Reservado para Conteúdo 3">
             <a:extLst>
               <a:ext uri="{FF2B5EF4-FFF2-40B4-BE49-F238E27FC236}">
-                <a16:creationId xmlns="" xmlns:a16="http://schemas.microsoft.com/office/drawing/2014/main" id="{5F1B432F-F570-AEC0-CFFF-C1D9196D7234}"/>
+                <a16:creationId xmlns:a16="http://schemas.microsoft.com/office/drawing/2014/main" id="{5F1B432F-F570-AEC0-CFFF-C1D9196D7234}"/>
               </a:ext>
             </a:extLst>
           </p:cNvPr>
@@ -11214,7 +11038,7 @@
           <p:cNvPr id="2" name="Título 1">
             <a:extLst>
               <a:ext uri="{FF2B5EF4-FFF2-40B4-BE49-F238E27FC236}">
-                <a16:creationId xmlns="" xmlns:a16="http://schemas.microsoft.com/office/drawing/2014/main" id="{5F09B89C-3183-4D52-981A-62798DDFF2B8}"/>
+                <a16:creationId xmlns:a16="http://schemas.microsoft.com/office/drawing/2014/main" id="{5F09B89C-3183-4D52-981A-62798DDFF2B8}"/>
               </a:ext>
             </a:extLst>
           </p:cNvPr>
@@ -11249,7 +11073,7 @@
           <p:cNvPr id="3" name="AutoShape 2" descr="An example of graph signal reconstruction over wireless sensor network. |  Download Scientific Diagram">
             <a:extLst>
               <a:ext uri="{FF2B5EF4-FFF2-40B4-BE49-F238E27FC236}">
-                <a16:creationId xmlns="" xmlns:a16="http://schemas.microsoft.com/office/drawing/2014/main" id="{0166B4DD-D72A-4A54-94A7-2C38133837FD}"/>
+                <a16:creationId xmlns:a16="http://schemas.microsoft.com/office/drawing/2014/main" id="{0166B4DD-D72A-4A54-94A7-2C38133837FD}"/>
               </a:ext>
             </a:extLst>
           </p:cNvPr>
@@ -11300,7 +11124,7 @@
           <p:cNvPr id="7" name="AutoShape 4" descr="An example of graph signal reconstruction over wireless sensor network. |  Download Scientific Diagram">
             <a:extLst>
               <a:ext uri="{FF2B5EF4-FFF2-40B4-BE49-F238E27FC236}">
-                <a16:creationId xmlns="" xmlns:a16="http://schemas.microsoft.com/office/drawing/2014/main" id="{14C2B67D-81A1-457E-A410-FE4350A3CCA4}"/>
+                <a16:creationId xmlns:a16="http://schemas.microsoft.com/office/drawing/2014/main" id="{14C2B67D-81A1-457E-A410-FE4350A3CCA4}"/>
               </a:ext>
             </a:extLst>
           </p:cNvPr>
@@ -11351,7 +11175,7 @@
           <p:cNvPr id="4" name="Espaço Reservado para Conteúdo 3">
             <a:extLst>
               <a:ext uri="{FF2B5EF4-FFF2-40B4-BE49-F238E27FC236}">
-                <a16:creationId xmlns="" xmlns:a16="http://schemas.microsoft.com/office/drawing/2014/main" id="{5F1B432F-F570-AEC0-CFFF-C1D9196D7234}"/>
+                <a16:creationId xmlns:a16="http://schemas.microsoft.com/office/drawing/2014/main" id="{5F1B432F-F570-AEC0-CFFF-C1D9196D7234}"/>
               </a:ext>
             </a:extLst>
           </p:cNvPr>
@@ -11384,7 +11208,7 @@
           <p:cNvPr id="2050" name="Picture 2" descr="Anomaly Detection Real World Scenarios Approaches and Live Implementation -  YouTube">
             <a:extLst>
               <a:ext uri="{FF2B5EF4-FFF2-40B4-BE49-F238E27FC236}">
-                <a16:creationId xmlns="" xmlns:a16="http://schemas.microsoft.com/office/drawing/2014/main" id="{FDE7A801-6226-C67C-506A-7A9F297D280C}"/>
+                <a16:creationId xmlns:a16="http://schemas.microsoft.com/office/drawing/2014/main" id="{FDE7A801-6226-C67C-506A-7A9F297D280C}"/>
               </a:ext>
             </a:extLst>
           </p:cNvPr>
@@ -11461,7 +11285,7 @@
         <p:cNvPr id="1" name="">
           <a:extLst>
             <a:ext uri="{FF2B5EF4-FFF2-40B4-BE49-F238E27FC236}">
-              <a16:creationId xmlns="" xmlns:a16="http://schemas.microsoft.com/office/drawing/2014/main" id="{042E1AD8-1AE2-9D66-D1D0-BECEA32F14E0}"/>
+              <a16:creationId xmlns:a16="http://schemas.microsoft.com/office/drawing/2014/main" id="{042E1AD8-1AE2-9D66-D1D0-BECEA32F14E0}"/>
             </a:ext>
           </a:extLst>
         </p:cNvPr>
@@ -11481,7 +11305,7 @@
           <p:cNvPr id="2" name="Título 1">
             <a:extLst>
               <a:ext uri="{FF2B5EF4-FFF2-40B4-BE49-F238E27FC236}">
-                <a16:creationId xmlns="" xmlns:a16="http://schemas.microsoft.com/office/drawing/2014/main" id="{91362F63-8B67-2CA5-F1E0-70285F8A5D99}"/>
+                <a16:creationId xmlns:a16="http://schemas.microsoft.com/office/drawing/2014/main" id="{91362F63-8B67-2CA5-F1E0-70285F8A5D99}"/>
               </a:ext>
             </a:extLst>
           </p:cNvPr>
@@ -11516,7 +11340,7 @@
           <p:cNvPr id="3" name="AutoShape 2" descr="An example of graph signal reconstruction over wireless sensor network. |  Download Scientific Diagram">
             <a:extLst>
               <a:ext uri="{FF2B5EF4-FFF2-40B4-BE49-F238E27FC236}">
-                <a16:creationId xmlns="" xmlns:a16="http://schemas.microsoft.com/office/drawing/2014/main" id="{22FDC0BB-96C6-D071-6072-8265FA475D3B}"/>
+                <a16:creationId xmlns:a16="http://schemas.microsoft.com/office/drawing/2014/main" id="{22FDC0BB-96C6-D071-6072-8265FA475D3B}"/>
               </a:ext>
             </a:extLst>
           </p:cNvPr>
@@ -11567,7 +11391,7 @@
           <p:cNvPr id="7" name="AutoShape 4" descr="An example of graph signal reconstruction over wireless sensor network. |  Download Scientific Diagram">
             <a:extLst>
               <a:ext uri="{FF2B5EF4-FFF2-40B4-BE49-F238E27FC236}">
-                <a16:creationId xmlns="" xmlns:a16="http://schemas.microsoft.com/office/drawing/2014/main" id="{0D2FBB85-B0FE-5D58-DBE2-4C312CB1B3A1}"/>
+                <a16:creationId xmlns:a16="http://schemas.microsoft.com/office/drawing/2014/main" id="{0D2FBB85-B0FE-5D58-DBE2-4C312CB1B3A1}"/>
               </a:ext>
             </a:extLst>
           </p:cNvPr>
@@ -11618,7 +11442,7 @@
           <p:cNvPr id="4" name="Espaço Reservado para Conteúdo 3">
             <a:extLst>
               <a:ext uri="{FF2B5EF4-FFF2-40B4-BE49-F238E27FC236}">
-                <a16:creationId xmlns="" xmlns:a16="http://schemas.microsoft.com/office/drawing/2014/main" id="{F19EED01-E2A7-FCA9-AE40-ABE3206A5DB3}"/>
+                <a16:creationId xmlns:a16="http://schemas.microsoft.com/office/drawing/2014/main" id="{F19EED01-E2A7-FCA9-AE40-ABE3206A5DB3}"/>
               </a:ext>
             </a:extLst>
           </p:cNvPr>
@@ -11702,7 +11526,7 @@
           <p:cNvPr id="6" name="Picture 5">
             <a:extLst>
               <a:ext uri="{FF2B5EF4-FFF2-40B4-BE49-F238E27FC236}">
-                <a16:creationId xmlns="" xmlns:a16="http://schemas.microsoft.com/office/drawing/2014/main" id="{874D15ED-AE97-5474-7E5D-B644432B2D4C}"/>
+                <a16:creationId xmlns:a16="http://schemas.microsoft.com/office/drawing/2014/main" id="{874D15ED-AE97-5474-7E5D-B644432B2D4C}"/>
               </a:ext>
             </a:extLst>
           </p:cNvPr>
@@ -11732,7 +11556,7 @@
           <p:cNvPr id="9" name="Picture 8">
             <a:extLst>
               <a:ext uri="{FF2B5EF4-FFF2-40B4-BE49-F238E27FC236}">
-                <a16:creationId xmlns="" xmlns:a16="http://schemas.microsoft.com/office/drawing/2014/main" id="{14197941-A588-8F4A-49EA-1C5B6528F761}"/>
+                <a16:creationId xmlns:a16="http://schemas.microsoft.com/office/drawing/2014/main" id="{14197941-A588-8F4A-49EA-1C5B6528F761}"/>
               </a:ext>
             </a:extLst>
           </p:cNvPr>
@@ -11762,7 +11586,7 @@
           <p:cNvPr id="10" name="Arrow: Right 9">
             <a:extLst>
               <a:ext uri="{FF2B5EF4-FFF2-40B4-BE49-F238E27FC236}">
-                <a16:creationId xmlns="" xmlns:a16="http://schemas.microsoft.com/office/drawing/2014/main" id="{02EF8AE6-9567-78CC-094E-7578F2C11532}"/>
+                <a16:creationId xmlns:a16="http://schemas.microsoft.com/office/drawing/2014/main" id="{02EF8AE6-9567-78CC-094E-7578F2C11532}"/>
               </a:ext>
             </a:extLst>
           </p:cNvPr>
@@ -11852,7 +11676,7 @@
           <p:cNvPr id="2" name="Título 1">
             <a:extLst>
               <a:ext uri="{FF2B5EF4-FFF2-40B4-BE49-F238E27FC236}">
-                <a16:creationId xmlns="" xmlns:a16="http://schemas.microsoft.com/office/drawing/2014/main" id="{5F09B89C-3183-4D52-981A-62798DDFF2B8}"/>
+                <a16:creationId xmlns:a16="http://schemas.microsoft.com/office/drawing/2014/main" id="{5F09B89C-3183-4D52-981A-62798DDFF2B8}"/>
               </a:ext>
             </a:extLst>
           </p:cNvPr>
@@ -11892,7 +11716,7 @@
           <p:cNvPr id="3" name="AutoShape 2" descr="An example of graph signal reconstruction over wireless sensor network. |  Download Scientific Diagram">
             <a:extLst>
               <a:ext uri="{FF2B5EF4-FFF2-40B4-BE49-F238E27FC236}">
-                <a16:creationId xmlns="" xmlns:a16="http://schemas.microsoft.com/office/drawing/2014/main" id="{0166B4DD-D72A-4A54-94A7-2C38133837FD}"/>
+                <a16:creationId xmlns:a16="http://schemas.microsoft.com/office/drawing/2014/main" id="{0166B4DD-D72A-4A54-94A7-2C38133837FD}"/>
               </a:ext>
             </a:extLst>
           </p:cNvPr>
@@ -11943,7 +11767,7 @@
           <p:cNvPr id="7" name="AutoShape 4" descr="An example of graph signal reconstruction over wireless sensor network. |  Download Scientific Diagram">
             <a:extLst>
               <a:ext uri="{FF2B5EF4-FFF2-40B4-BE49-F238E27FC236}">
-                <a16:creationId xmlns="" xmlns:a16="http://schemas.microsoft.com/office/drawing/2014/main" id="{14C2B67D-81A1-457E-A410-FE4350A3CCA4}"/>
+                <a16:creationId xmlns:a16="http://schemas.microsoft.com/office/drawing/2014/main" id="{14C2B67D-81A1-457E-A410-FE4350A3CCA4}"/>
               </a:ext>
             </a:extLst>
           </p:cNvPr>
@@ -11994,7 +11818,7 @@
           <p:cNvPr id="4" name="Espaço Reservado para Conteúdo 3">
             <a:extLst>
               <a:ext uri="{FF2B5EF4-FFF2-40B4-BE49-F238E27FC236}">
-                <a16:creationId xmlns="" xmlns:a16="http://schemas.microsoft.com/office/drawing/2014/main" id="{5F1B432F-F570-AEC0-CFFF-C1D9196D7234}"/>
+                <a16:creationId xmlns:a16="http://schemas.microsoft.com/office/drawing/2014/main" id="{5F1B432F-F570-AEC0-CFFF-C1D9196D7234}"/>
               </a:ext>
             </a:extLst>
           </p:cNvPr>
@@ -12035,7 +11859,7 @@
           <p:cNvPr id="6" name="CaixaDeTexto 5">
             <a:extLst>
               <a:ext uri="{FF2B5EF4-FFF2-40B4-BE49-F238E27FC236}">
-                <a16:creationId xmlns="" xmlns:a16="http://schemas.microsoft.com/office/drawing/2014/main" id="{470482DB-F365-0A83-E102-37A8EB7EACEF}"/>
+                <a16:creationId xmlns:a16="http://schemas.microsoft.com/office/drawing/2014/main" id="{470482DB-F365-0A83-E102-37A8EB7EACEF}"/>
               </a:ext>
             </a:extLst>
           </p:cNvPr>
@@ -12122,7 +11946,7 @@
           <p:cNvPr id="6146" name="Picture 2" descr="Centro de Distribuição: uma solução mais que viável – Novidá">
             <a:extLst>
               <a:ext uri="{FF2B5EF4-FFF2-40B4-BE49-F238E27FC236}">
-                <a16:creationId xmlns="" xmlns:a16="http://schemas.microsoft.com/office/drawing/2014/main" id="{4EEAF6B8-1AE8-82F9-6BD7-E45E945A8CB5}"/>
+                <a16:creationId xmlns:a16="http://schemas.microsoft.com/office/drawing/2014/main" id="{4EEAF6B8-1AE8-82F9-6BD7-E45E945A8CB5}"/>
               </a:ext>
             </a:extLst>
           </p:cNvPr>
@@ -12169,7 +11993,7 @@
           <p:cNvPr id="8" name="Picture 2" descr="Mapa do Brasil">
             <a:extLst>
               <a:ext uri="{FF2B5EF4-FFF2-40B4-BE49-F238E27FC236}">
-                <a16:creationId xmlns="" xmlns:a16="http://schemas.microsoft.com/office/drawing/2014/main" id="{BBEA9087-A8E1-78C5-981B-C50D7CF4635F}"/>
+                <a16:creationId xmlns:a16="http://schemas.microsoft.com/office/drawing/2014/main" id="{BBEA9087-A8E1-78C5-981B-C50D7CF4635F}"/>
               </a:ext>
             </a:extLst>
           </p:cNvPr>
@@ -12239,7 +12063,7 @@
               <a:t>https://</a:t>
             </a:r>
             <a:r>
-              <a:rPr lang="pt-BR" u="sng" dirty="0" smtClean="0">
+              <a:rPr lang="pt-BR" u="sng" dirty="0">
                 <a:hlinkClick r:id="rId6"/>
               </a:rPr>
               <a:t>colab.research.google.com/github/zz4fap/tp557-iot-ml/blob/main/examples/k_means_centros_de_distribuição.ipynb</a:t>
@@ -12247,7 +12071,7 @@
             <a:endParaRPr lang="pt-BR" u="sng" dirty="0"/>
           </a:p>
           <a:p>
-            <a:endParaRPr lang="pt-BR" u="sng" dirty="0" smtClean="0"/>
+            <a:endParaRPr lang="pt-BR" u="sng" dirty="0"/>
           </a:p>
         </p:txBody>
       </p:sp>
@@ -12267,6 +12091,20 @@
 <file path=ppt/slides/slide18.xml><?xml version="1.0" encoding="utf-8"?>
 <p:sld xmlns:a="http://schemas.openxmlformats.org/drawingml/2006/main" xmlns:r="http://schemas.openxmlformats.org/officeDocument/2006/relationships" xmlns:p="http://schemas.openxmlformats.org/presentationml/2006/main">
   <p:cSld>
+    <p:bg>
+      <p:bgPr>
+        <a:blipFill dpi="0" rotWithShape="1">
+          <a:blip r:embed="rId3">
+            <a:lum/>
+          </a:blip>
+          <a:srcRect/>
+          <a:stretch>
+            <a:fillRect/>
+          </a:stretch>
+        </a:blipFill>
+        <a:effectLst/>
+      </p:bgPr>
+    </p:bg>
     <p:spTree>
       <p:nvGrpSpPr>
         <p:cNvPr id="1" name=""/>
@@ -12283,10 +12121,10 @@
       </p:grpSpPr>
       <p:sp>
         <p:nvSpPr>
-          <p:cNvPr id="2" name="Title 1">
-            <a:extLst>
-              <a:ext uri="{FF2B5EF4-FFF2-40B4-BE49-F238E27FC236}">
-                <a16:creationId xmlns="" xmlns:a16="http://schemas.microsoft.com/office/drawing/2014/main" id="{59016FD1-6296-97BB-4C76-AD710414CCC6}"/>
+          <p:cNvPr id="2" name="Título 1">
+            <a:extLst>
+              <a:ext uri="{FF2B5EF4-FFF2-40B4-BE49-F238E27FC236}">
+                <a16:creationId xmlns:a16="http://schemas.microsoft.com/office/drawing/2014/main" id="{5F09B89C-3183-4D52-981A-62798DDFF2B8}"/>
               </a:ext>
             </a:extLst>
           </p:cNvPr>
@@ -12297,21 +12135,138 @@
             <p:ph type="title"/>
           </p:nvPr>
         </p:nvSpPr>
-        <p:spPr/>
-        <p:txBody>
-          <a:bodyPr/>
-          <a:lstStyle/>
-          <a:p>
-            <a:endParaRPr lang="en-US"/>
-          </a:p>
-        </p:txBody>
-      </p:sp>
-      <p:sp>
-        <p:nvSpPr>
-          <p:cNvPr id="3" name="Content Placeholder 2">
-            <a:extLst>
-              <a:ext uri="{FF2B5EF4-FFF2-40B4-BE49-F238E27FC236}">
-                <a16:creationId xmlns="" xmlns:a16="http://schemas.microsoft.com/office/drawing/2014/main" id="{82472478-144F-3D25-9C47-48A21F2E7CAB}"/>
+        <p:spPr>
+          <a:xfrm>
+            <a:off x="304800" y="183092"/>
+            <a:ext cx="6559285" cy="762000"/>
+          </a:xfrm>
+        </p:spPr>
+        <p:txBody>
+          <a:bodyPr>
+            <a:normAutofit/>
+          </a:bodyPr>
+          <a:lstStyle/>
+          <a:p>
+            <a:r>
+              <a:rPr lang="pt-BR" dirty="0"/>
+              <a:t>K-</a:t>
+            </a:r>
+            <a:r>
+              <a:rPr lang="pt-BR" dirty="0" err="1"/>
+              <a:t>means</a:t>
+            </a:r>
+            <a:endParaRPr lang="pt-BR" dirty="0"/>
+          </a:p>
+        </p:txBody>
+      </p:sp>
+      <p:sp>
+        <p:nvSpPr>
+          <p:cNvPr id="3" name="AutoShape 2" descr="An example of graph signal reconstruction over wireless sensor network. |  Download Scientific Diagram">
+            <a:extLst>
+              <a:ext uri="{FF2B5EF4-FFF2-40B4-BE49-F238E27FC236}">
+                <a16:creationId xmlns:a16="http://schemas.microsoft.com/office/drawing/2014/main" id="{0166B4DD-D72A-4A54-94A7-2C38133837FD}"/>
+              </a:ext>
+            </a:extLst>
+          </p:cNvPr>
+          <p:cNvSpPr>
+            <a:spLocks noChangeAspect="1" noChangeArrowheads="1"/>
+          </p:cNvSpPr>
+          <p:nvPr/>
+        </p:nvSpPr>
+        <p:spPr bwMode="auto">
+          <a:xfrm>
+            <a:off x="5994400" y="3327400"/>
+            <a:ext cx="203200" cy="203200"/>
+          </a:xfrm>
+          <a:prstGeom prst="rect">
+            <a:avLst/>
+          </a:prstGeom>
+          <a:noFill/>
+          <a:extLst>
+            <a:ext uri="{909E8E84-426E-40DD-AFC4-6F175D3DCCD1}">
+              <a14:hiddenFill xmlns:a14="http://schemas.microsoft.com/office/drawing/2010/main">
+                <a:solidFill>
+                  <a:srgbClr val="FFFFFF"/>
+                </a:solidFill>
+              </a14:hiddenFill>
+            </a:ext>
+          </a:extLst>
+        </p:spPr>
+        <p:txBody>
+          <a:bodyPr vert="horz" wrap="square" lIns="60960" tIns="30480" rIns="60960" bIns="30480" numCol="1" anchor="t" anchorCtr="0" compatLnSpc="1">
+            <a:prstTxWarp prst="textNoShape">
+              <a:avLst/>
+            </a:prstTxWarp>
+          </a:bodyPr>
+          <a:lstStyle/>
+          <a:p>
+            <a:pPr defTabSz="609630"/>
+            <a:endParaRPr lang="pt-BR" sz="1200">
+              <a:solidFill>
+                <a:prstClr val="black"/>
+              </a:solidFill>
+              <a:latin typeface="Calibri"/>
+            </a:endParaRPr>
+          </a:p>
+        </p:txBody>
+      </p:sp>
+      <p:sp>
+        <p:nvSpPr>
+          <p:cNvPr id="7" name="AutoShape 4" descr="An example of graph signal reconstruction over wireless sensor network. |  Download Scientific Diagram">
+            <a:extLst>
+              <a:ext uri="{FF2B5EF4-FFF2-40B4-BE49-F238E27FC236}">
+                <a16:creationId xmlns:a16="http://schemas.microsoft.com/office/drawing/2014/main" id="{14C2B67D-81A1-457E-A410-FE4350A3CCA4}"/>
+              </a:ext>
+            </a:extLst>
+          </p:cNvPr>
+          <p:cNvSpPr>
+            <a:spLocks noChangeAspect="1" noChangeArrowheads="1"/>
+          </p:cNvSpPr>
+          <p:nvPr/>
+        </p:nvSpPr>
+        <p:spPr bwMode="auto">
+          <a:xfrm>
+            <a:off x="6096000" y="3429000"/>
+            <a:ext cx="203200" cy="203200"/>
+          </a:xfrm>
+          <a:prstGeom prst="rect">
+            <a:avLst/>
+          </a:prstGeom>
+          <a:noFill/>
+          <a:extLst>
+            <a:ext uri="{909E8E84-426E-40DD-AFC4-6F175D3DCCD1}">
+              <a14:hiddenFill xmlns:a14="http://schemas.microsoft.com/office/drawing/2010/main">
+                <a:solidFill>
+                  <a:srgbClr val="FFFFFF"/>
+                </a:solidFill>
+              </a14:hiddenFill>
+            </a:ext>
+          </a:extLst>
+        </p:spPr>
+        <p:txBody>
+          <a:bodyPr vert="horz" wrap="square" lIns="60960" tIns="30480" rIns="60960" bIns="30480" numCol="1" anchor="t" anchorCtr="0" compatLnSpc="1">
+            <a:prstTxWarp prst="textNoShape">
+              <a:avLst/>
+            </a:prstTxWarp>
+          </a:bodyPr>
+          <a:lstStyle/>
+          <a:p>
+            <a:pPr defTabSz="609630"/>
+            <a:endParaRPr lang="pt-BR" sz="1200">
+              <a:solidFill>
+                <a:prstClr val="black"/>
+              </a:solidFill>
+              <a:latin typeface="Calibri"/>
+            </a:endParaRPr>
+          </a:p>
+        </p:txBody>
+      </p:sp>
+      <p:sp>
+        <p:nvSpPr>
+          <p:cNvPr id="4" name="Espaço Reservado para Conteúdo 3">
+            <a:extLst>
+              <a:ext uri="{FF2B5EF4-FFF2-40B4-BE49-F238E27FC236}">
+                <a16:creationId xmlns:a16="http://schemas.microsoft.com/office/drawing/2014/main" id="{5F1B432F-F570-AEC0-CFFF-C1D9196D7234}"/>
               </a:ext>
             </a:extLst>
           </p:cNvPr>
@@ -12322,19 +12277,192 @@
             <p:ph idx="1"/>
           </p:nvPr>
         </p:nvSpPr>
-        <p:spPr/>
-        <p:txBody>
-          <a:bodyPr/>
-          <a:lstStyle/>
-          <a:p>
-            <a:endParaRPr lang="en-US"/>
-          </a:p>
-        </p:txBody>
-      </p:sp>
+        <p:spPr>
+          <a:xfrm>
+            <a:off x="304800" y="1066801"/>
+            <a:ext cx="9810044" cy="2737556"/>
+          </a:xfrm>
+        </p:spPr>
+        <p:txBody>
+          <a:bodyPr>
+            <a:normAutofit/>
+          </a:bodyPr>
+          <a:lstStyle/>
+          <a:p>
+            <a:pPr marL="0" indent="0">
+              <a:buNone/>
+            </a:pPr>
+            <a:endParaRPr lang="pt-BR" dirty="0"/>
+          </a:p>
+          <a:p>
+            <a:pPr marL="0" indent="0">
+              <a:buNone/>
+            </a:pPr>
+            <a:endParaRPr lang="pt-BR" dirty="0"/>
+          </a:p>
+        </p:txBody>
+      </p:sp>
+      <p:sp>
+        <p:nvSpPr>
+          <p:cNvPr id="6" name="CaixaDeTexto 5">
+            <a:extLst>
+              <a:ext uri="{FF2B5EF4-FFF2-40B4-BE49-F238E27FC236}">
+                <a16:creationId xmlns:a16="http://schemas.microsoft.com/office/drawing/2014/main" id="{470482DB-F365-0A83-E102-37A8EB7EACEF}"/>
+              </a:ext>
+            </a:extLst>
+          </p:cNvPr>
+          <p:cNvSpPr txBox="1"/>
+          <p:nvPr/>
+        </p:nvSpPr>
+        <p:spPr>
+          <a:xfrm>
+            <a:off x="846667" y="988201"/>
+            <a:ext cx="8229599" cy="4524315"/>
+          </a:xfrm>
+          <a:prstGeom prst="rect">
+            <a:avLst/>
+          </a:prstGeom>
+          <a:noFill/>
+        </p:spPr>
+        <p:txBody>
+          <a:bodyPr wrap="square">
+            <a:spAutoFit/>
+          </a:bodyPr>
+          <a:lstStyle/>
+          <a:p>
+            <a:r>
+              <a:rPr lang="pt-BR" dirty="0"/>
+              <a:t>Como escolher o K ótimo?</a:t>
+            </a:r>
+          </a:p>
+          <a:p>
+            <a:endParaRPr lang="pt-BR" dirty="0"/>
+          </a:p>
+          <a:p>
+            <a:endParaRPr lang="pt-BR" dirty="0"/>
+          </a:p>
+          <a:p>
+            <a:endParaRPr lang="pt-BR" dirty="0"/>
+          </a:p>
+          <a:p>
+            <a:endParaRPr lang="pt-BR" dirty="0"/>
+          </a:p>
+          <a:p>
+            <a:endParaRPr lang="pt-BR" dirty="0"/>
+          </a:p>
+          <a:p>
+            <a:endParaRPr lang="pt-BR" dirty="0"/>
+          </a:p>
+          <a:p>
+            <a:endParaRPr lang="pt-BR" dirty="0"/>
+          </a:p>
+          <a:p>
+            <a:endParaRPr lang="pt-BR" dirty="0"/>
+          </a:p>
+          <a:p>
+            <a:endParaRPr lang="pt-BR" dirty="0"/>
+          </a:p>
+          <a:p>
+            <a:endParaRPr lang="pt-BR" dirty="0"/>
+          </a:p>
+          <a:p>
+            <a:endParaRPr lang="pt-BR" dirty="0"/>
+          </a:p>
+          <a:p>
+            <a:endParaRPr lang="pt-BR" dirty="0"/>
+          </a:p>
+          <a:p>
+            <a:endParaRPr lang="pt-BR" dirty="0"/>
+          </a:p>
+          <a:p>
+            <a:endParaRPr lang="pt-BR" dirty="0"/>
+          </a:p>
+          <a:p>
+            <a:endParaRPr lang="pt-BR" dirty="0"/>
+          </a:p>
+        </p:txBody>
+      </p:sp>
+      <p:pic>
+        <p:nvPicPr>
+          <p:cNvPr id="2050" name="Picture 2" descr="Base Teórica do K-Means! Aprenda a Lógica desse Algoritmo Hoje!">
+            <a:extLst>
+              <a:ext uri="{FF2B5EF4-FFF2-40B4-BE49-F238E27FC236}">
+                <a16:creationId xmlns:a16="http://schemas.microsoft.com/office/drawing/2014/main" id="{0694ADFD-EB2E-2BF0-18BE-B07E4CD60A5F}"/>
+              </a:ext>
+            </a:extLst>
+          </p:cNvPr>
+          <p:cNvPicPr>
+            <a:picLocks noChangeAspect="1" noChangeArrowheads="1"/>
+          </p:cNvPicPr>
+          <p:nvPr/>
+        </p:nvPicPr>
+        <p:blipFill>
+          <a:blip r:embed="rId4">
+            <a:extLst>
+              <a:ext uri="{28A0092B-C50C-407E-A947-70E740481C1C}">
+                <a14:useLocalDpi xmlns:a14="http://schemas.microsoft.com/office/drawing/2010/main" val="0"/>
+              </a:ext>
+            </a:extLst>
+          </a:blip>
+          <a:srcRect/>
+          <a:stretch>
+            <a:fillRect/>
+          </a:stretch>
+        </p:blipFill>
+        <p:spPr bwMode="auto">
+          <a:xfrm>
+            <a:off x="1526381" y="1605398"/>
+            <a:ext cx="7549885" cy="3444004"/>
+          </a:xfrm>
+          <a:prstGeom prst="rect">
+            <a:avLst/>
+          </a:prstGeom>
+          <a:noFill/>
+          <a:extLst>
+            <a:ext uri="{909E8E84-426E-40DD-AFC4-6F175D3DCCD1}">
+              <a14:hiddenFill xmlns:a14="http://schemas.microsoft.com/office/drawing/2010/main">
+                <a:solidFill>
+                  <a:srgbClr val="FFFFFF"/>
+                </a:solidFill>
+              </a14:hiddenFill>
+            </a:ext>
+          </a:extLst>
+        </p:spPr>
+      </p:pic>
+      <p:pic>
+        <p:nvPicPr>
+          <p:cNvPr id="8" name="Imagem 7">
+            <a:extLst>
+              <a:ext uri="{FF2B5EF4-FFF2-40B4-BE49-F238E27FC236}">
+                <a16:creationId xmlns:a16="http://schemas.microsoft.com/office/drawing/2014/main" id="{EEF69E85-6440-34FE-5C8A-A5F37765D292}"/>
+              </a:ext>
+            </a:extLst>
+          </p:cNvPr>
+          <p:cNvPicPr>
+            <a:picLocks noChangeAspect="1"/>
+          </p:cNvPicPr>
+          <p:nvPr/>
+        </p:nvPicPr>
+        <p:blipFill>
+          <a:blip r:embed="rId5"/>
+          <a:stretch>
+            <a:fillRect/>
+          </a:stretch>
+        </p:blipFill>
+        <p:spPr>
+          <a:xfrm>
+            <a:off x="4486439" y="5536951"/>
+            <a:ext cx="2377646" cy="784928"/>
+          </a:xfrm>
+          <a:prstGeom prst="rect">
+            <a:avLst/>
+          </a:prstGeom>
+        </p:spPr>
+      </p:pic>
     </p:spTree>
     <p:extLst>
       <p:ext uri="{BB962C8B-B14F-4D97-AF65-F5344CB8AC3E}">
-        <p14:creationId xmlns:p14="http://schemas.microsoft.com/office/powerpoint/2010/main" val="151179307"/>
+        <p14:creationId xmlns:p14="http://schemas.microsoft.com/office/powerpoint/2010/main" val="1144642794"/>
       </p:ext>
     </p:extLst>
   </p:cSld>
@@ -12380,7 +12508,7 @@
           <p:cNvPr id="2" name="Título 1">
             <a:extLst>
               <a:ext uri="{FF2B5EF4-FFF2-40B4-BE49-F238E27FC236}">
-                <a16:creationId xmlns="" xmlns:a16="http://schemas.microsoft.com/office/drawing/2014/main" id="{5F09B89C-3183-4D52-981A-62798DDFF2B8}"/>
+                <a16:creationId xmlns:a16="http://schemas.microsoft.com/office/drawing/2014/main" id="{5F09B89C-3183-4D52-981A-62798DDFF2B8}"/>
               </a:ext>
             </a:extLst>
           </p:cNvPr>
@@ -12405,13 +12533,8 @@
           <a:p>
             <a:r>
               <a:rPr lang="pt-BR" dirty="0"/>
-              <a:t>K-</a:t>
-            </a:r>
-            <a:r>
-              <a:rPr lang="pt-BR" dirty="0" err="1"/>
-              <a:t>means</a:t>
-            </a:r>
-            <a:endParaRPr lang="pt-BR" dirty="0"/>
+              <a:t>Detecção de anomalias</a:t>
+            </a:r>
           </a:p>
         </p:txBody>
       </p:sp>
@@ -12420,7 +12543,7 @@
           <p:cNvPr id="3" name="AutoShape 2" descr="An example of graph signal reconstruction over wireless sensor network. |  Download Scientific Diagram">
             <a:extLst>
               <a:ext uri="{FF2B5EF4-FFF2-40B4-BE49-F238E27FC236}">
-                <a16:creationId xmlns="" xmlns:a16="http://schemas.microsoft.com/office/drawing/2014/main" id="{0166B4DD-D72A-4A54-94A7-2C38133837FD}"/>
+                <a16:creationId xmlns:a16="http://schemas.microsoft.com/office/drawing/2014/main" id="{0166B4DD-D72A-4A54-94A7-2C38133837FD}"/>
               </a:ext>
             </a:extLst>
           </p:cNvPr>
@@ -12456,12 +12579,36 @@
           </a:bodyPr>
           <a:lstStyle/>
           <a:p>
-            <a:pPr defTabSz="609630"/>
-            <a:endParaRPr lang="pt-BR" sz="1200">
+            <a:pPr marL="0" marR="0" lvl="0" indent="0" algn="l" defTabSz="609630" rtl="0" eaLnBrk="1" fontAlgn="auto" latinLnBrk="0" hangingPunct="1">
+              <a:lnSpc>
+                <a:spcPct val="100000"/>
+              </a:lnSpc>
+              <a:spcBef>
+                <a:spcPts val="0"/>
+              </a:spcBef>
+              <a:spcAft>
+                <a:spcPts val="0"/>
+              </a:spcAft>
+              <a:buClrTx/>
+              <a:buSzTx/>
+              <a:buFontTx/>
+              <a:buNone/>
+              <a:tabLst/>
+              <a:defRPr/>
+            </a:pPr>
+            <a:endParaRPr kumimoji="0" lang="pt-BR" sz="1200" b="0" i="0" u="none" strike="noStrike" kern="1200" cap="none" spc="0" normalizeH="0" baseline="0" noProof="0">
+              <a:ln>
+                <a:noFill/>
+              </a:ln>
               <a:solidFill>
                 <a:prstClr val="black"/>
               </a:solidFill>
+              <a:effectLst/>
+              <a:uLnTx/>
+              <a:uFillTx/>
               <a:latin typeface="Calibri"/>
+              <a:ea typeface="+mn-ea"/>
+              <a:cs typeface="+mn-cs"/>
             </a:endParaRPr>
           </a:p>
         </p:txBody>
@@ -12471,7 +12618,7 @@
           <p:cNvPr id="7" name="AutoShape 4" descr="An example of graph signal reconstruction over wireless sensor network. |  Download Scientific Diagram">
             <a:extLst>
               <a:ext uri="{FF2B5EF4-FFF2-40B4-BE49-F238E27FC236}">
-                <a16:creationId xmlns="" xmlns:a16="http://schemas.microsoft.com/office/drawing/2014/main" id="{14C2B67D-81A1-457E-A410-FE4350A3CCA4}"/>
+                <a16:creationId xmlns:a16="http://schemas.microsoft.com/office/drawing/2014/main" id="{14C2B67D-81A1-457E-A410-FE4350A3CCA4}"/>
               </a:ext>
             </a:extLst>
           </p:cNvPr>
@@ -12507,12 +12654,36 @@
           </a:bodyPr>
           <a:lstStyle/>
           <a:p>
-            <a:pPr defTabSz="609630"/>
-            <a:endParaRPr lang="pt-BR" sz="1200">
+            <a:pPr marL="0" marR="0" lvl="0" indent="0" algn="l" defTabSz="609630" rtl="0" eaLnBrk="1" fontAlgn="auto" latinLnBrk="0" hangingPunct="1">
+              <a:lnSpc>
+                <a:spcPct val="100000"/>
+              </a:lnSpc>
+              <a:spcBef>
+                <a:spcPts val="0"/>
+              </a:spcBef>
+              <a:spcAft>
+                <a:spcPts val="0"/>
+              </a:spcAft>
+              <a:buClrTx/>
+              <a:buSzTx/>
+              <a:buFontTx/>
+              <a:buNone/>
+              <a:tabLst/>
+              <a:defRPr/>
+            </a:pPr>
+            <a:endParaRPr kumimoji="0" lang="pt-BR" sz="1200" b="0" i="0" u="none" strike="noStrike" kern="1200" cap="none" spc="0" normalizeH="0" baseline="0" noProof="0">
+              <a:ln>
+                <a:noFill/>
+              </a:ln>
               <a:solidFill>
                 <a:prstClr val="black"/>
               </a:solidFill>
+              <a:effectLst/>
+              <a:uLnTx/>
+              <a:uFillTx/>
               <a:latin typeface="Calibri"/>
+              <a:ea typeface="+mn-ea"/>
+              <a:cs typeface="+mn-cs"/>
             </a:endParaRPr>
           </a:p>
         </p:txBody>
@@ -12522,7 +12693,7 @@
           <p:cNvPr id="4" name="Espaço Reservado para Conteúdo 3">
             <a:extLst>
               <a:ext uri="{FF2B5EF4-FFF2-40B4-BE49-F238E27FC236}">
-                <a16:creationId xmlns="" xmlns:a16="http://schemas.microsoft.com/office/drawing/2014/main" id="{5F1B432F-F570-AEC0-CFFF-C1D9196D7234}"/>
+                <a16:creationId xmlns:a16="http://schemas.microsoft.com/office/drawing/2014/main" id="{0349BA64-C9D7-4730-9CA9-5C4AD9FC7969}"/>
               </a:ext>
             </a:extLst>
           </p:cNvPr>
@@ -12535,122 +12706,41 @@
         </p:nvSpPr>
         <p:spPr>
           <a:xfrm>
-            <a:off x="304800" y="1066801"/>
-            <a:ext cx="9810044" cy="2737556"/>
+            <a:off x="304800" y="1066800"/>
+            <a:ext cx="9295589" cy="4330419"/>
           </a:xfrm>
         </p:spPr>
         <p:txBody>
           <a:bodyPr>
-            <a:normAutofit/>
+            <a:noAutofit/>
           </a:bodyPr>
           <a:lstStyle/>
           <a:p>
-            <a:pPr marL="0" indent="0">
+            <a:pPr marL="152408" indent="0" algn="just">
+              <a:lnSpc>
+                <a:spcPct val="107000"/>
+              </a:lnSpc>
+              <a:spcAft>
+                <a:spcPts val="533"/>
+              </a:spcAft>
               <a:buNone/>
             </a:pPr>
-            <a:endParaRPr lang="pt-BR" dirty="0"/>
-          </a:p>
-          <a:p>
-            <a:pPr marL="0" indent="0">
-              <a:buNone/>
-            </a:pPr>
-            <a:endParaRPr lang="pt-BR" dirty="0"/>
-          </a:p>
-        </p:txBody>
-      </p:sp>
-      <p:sp>
-        <p:nvSpPr>
-          <p:cNvPr id="6" name="CaixaDeTexto 5">
-            <a:extLst>
-              <a:ext uri="{FF2B5EF4-FFF2-40B4-BE49-F238E27FC236}">
-                <a16:creationId xmlns="" xmlns:a16="http://schemas.microsoft.com/office/drawing/2014/main" id="{470482DB-F365-0A83-E102-37A8EB7EACEF}"/>
-              </a:ext>
-            </a:extLst>
-          </p:cNvPr>
-          <p:cNvSpPr txBox="1"/>
-          <p:nvPr/>
-        </p:nvSpPr>
-        <p:spPr>
-          <a:xfrm>
-            <a:off x="846667" y="988201"/>
-            <a:ext cx="8229599" cy="4801314"/>
-          </a:xfrm>
-          <a:prstGeom prst="rect">
-            <a:avLst/>
-          </a:prstGeom>
-          <a:noFill/>
-        </p:spPr>
-        <p:txBody>
-          <a:bodyPr wrap="square">
-            <a:spAutoFit/>
-          </a:bodyPr>
-          <a:lstStyle/>
-          <a:p>
-            <a:endParaRPr lang="pt-BR" dirty="0"/>
-          </a:p>
-          <a:p>
-            <a:pPr marL="285750" indent="-285750">
-              <a:buFont typeface="Arial" panose="020B0604020202020204" pitchFamily="34" charset="0"/>
-              <a:buChar char="•"/>
-            </a:pPr>
-            <a:r>
-              <a:rPr lang="pt-BR" dirty="0"/>
-              <a:t>Exemplo: Centros de distribuição</a:t>
-            </a:r>
-          </a:p>
-          <a:p>
-            <a:endParaRPr lang="pt-BR" dirty="0"/>
-          </a:p>
-          <a:p>
-            <a:endParaRPr lang="pt-BR" dirty="0"/>
-          </a:p>
-          <a:p>
-            <a:endParaRPr lang="pt-BR" dirty="0"/>
-          </a:p>
-          <a:p>
-            <a:endParaRPr lang="pt-BR" dirty="0"/>
-          </a:p>
-          <a:p>
-            <a:endParaRPr lang="pt-BR" dirty="0"/>
-          </a:p>
-          <a:p>
-            <a:endParaRPr lang="pt-BR" dirty="0"/>
-          </a:p>
-          <a:p>
-            <a:endParaRPr lang="pt-BR" dirty="0"/>
-          </a:p>
-          <a:p>
-            <a:endParaRPr lang="pt-BR" dirty="0"/>
-          </a:p>
-          <a:p>
-            <a:endParaRPr lang="pt-BR" dirty="0"/>
-          </a:p>
-          <a:p>
-            <a:endParaRPr lang="pt-BR" dirty="0"/>
-          </a:p>
-          <a:p>
-            <a:endParaRPr lang="pt-BR" dirty="0"/>
-          </a:p>
-          <a:p>
-            <a:endParaRPr lang="pt-BR" dirty="0"/>
-          </a:p>
-          <a:p>
-            <a:endParaRPr lang="pt-BR" dirty="0"/>
-          </a:p>
-          <a:p>
-            <a:endParaRPr lang="pt-BR" dirty="0"/>
-          </a:p>
-          <a:p>
-            <a:endParaRPr lang="pt-BR" dirty="0"/>
+            <a:r>
+              <a:rPr lang="pt-BR" sz="2000" dirty="0">
+                <a:ea typeface="Calibri" panose="020F0502020204030204" pitchFamily="34" charset="0"/>
+                <a:cs typeface="Arial" panose="020B0604020202020204" pitchFamily="34" charset="0"/>
+              </a:rPr>
+              <a:t>Movimentação de containers ao longo do ciclo logístico</a:t>
+            </a:r>
           </a:p>
         </p:txBody>
       </p:sp>
       <p:pic>
         <p:nvPicPr>
-          <p:cNvPr id="8194" name="Picture 2">
-            <a:extLst>
-              <a:ext uri="{FF2B5EF4-FFF2-40B4-BE49-F238E27FC236}">
-                <a16:creationId xmlns="" xmlns:a16="http://schemas.microsoft.com/office/drawing/2014/main" id="{495C0F98-25B1-BB0B-22CE-238E6C7C5DE2}"/>
+          <p:cNvPr id="1026" name="Picture 2" descr="Free photo industrial containers box for logistic import export business.">
+            <a:extLst>
+              <a:ext uri="{FF2B5EF4-FFF2-40B4-BE49-F238E27FC236}">
+                <a16:creationId xmlns:a16="http://schemas.microsoft.com/office/drawing/2014/main" id="{FDC07977-F662-66CB-7534-103E83976919}"/>
               </a:ext>
             </a:extLst>
           </p:cNvPr>
@@ -12674,8 +12764,8 @@
         </p:blipFill>
         <p:spPr bwMode="auto">
           <a:xfrm>
-            <a:off x="2923294" y="2239786"/>
-            <a:ext cx="5419725" cy="3981450"/>
+            <a:off x="2742141" y="1819275"/>
+            <a:ext cx="5962650" cy="3971925"/>
           </a:xfrm>
           <a:prstGeom prst="rect">
             <a:avLst/>
@@ -12695,7 +12785,7 @@
     </p:spTree>
     <p:extLst>
       <p:ext uri="{BB962C8B-B14F-4D97-AF65-F5344CB8AC3E}">
-        <p14:creationId xmlns:p14="http://schemas.microsoft.com/office/powerpoint/2010/main" val="1881627728"/>
+        <p14:creationId xmlns:p14="http://schemas.microsoft.com/office/powerpoint/2010/main" val="3900979391"/>
       </p:ext>
     </p:extLst>
   </p:cSld>
@@ -12741,7 +12831,7 @@
           <p:cNvPr id="2" name="Título 1">
             <a:extLst>
               <a:ext uri="{FF2B5EF4-FFF2-40B4-BE49-F238E27FC236}">
-                <a16:creationId xmlns="" xmlns:a16="http://schemas.microsoft.com/office/drawing/2014/main" id="{5F09B89C-3183-4D52-981A-62798DDFF2B8}"/>
+                <a16:creationId xmlns:a16="http://schemas.microsoft.com/office/drawing/2014/main" id="{5F09B89C-3183-4D52-981A-62798DDFF2B8}"/>
               </a:ext>
             </a:extLst>
           </p:cNvPr>
@@ -12776,7 +12866,7 @@
           <p:cNvPr id="3" name="AutoShape 2" descr="An example of graph signal reconstruction over wireless sensor network. |  Download Scientific Diagram">
             <a:extLst>
               <a:ext uri="{FF2B5EF4-FFF2-40B4-BE49-F238E27FC236}">
-                <a16:creationId xmlns="" xmlns:a16="http://schemas.microsoft.com/office/drawing/2014/main" id="{0166B4DD-D72A-4A54-94A7-2C38133837FD}"/>
+                <a16:creationId xmlns:a16="http://schemas.microsoft.com/office/drawing/2014/main" id="{0166B4DD-D72A-4A54-94A7-2C38133837FD}"/>
               </a:ext>
             </a:extLst>
           </p:cNvPr>
@@ -12827,7 +12917,7 @@
           <p:cNvPr id="7" name="AutoShape 4" descr="An example of graph signal reconstruction over wireless sensor network. |  Download Scientific Diagram">
             <a:extLst>
               <a:ext uri="{FF2B5EF4-FFF2-40B4-BE49-F238E27FC236}">
-                <a16:creationId xmlns="" xmlns:a16="http://schemas.microsoft.com/office/drawing/2014/main" id="{14C2B67D-81A1-457E-A410-FE4350A3CCA4}"/>
+                <a16:creationId xmlns:a16="http://schemas.microsoft.com/office/drawing/2014/main" id="{14C2B67D-81A1-457E-A410-FE4350A3CCA4}"/>
               </a:ext>
             </a:extLst>
           </p:cNvPr>
@@ -12878,7 +12968,7 @@
           <p:cNvPr id="4" name="Espaço Reservado para Conteúdo 3">
             <a:extLst>
               <a:ext uri="{FF2B5EF4-FFF2-40B4-BE49-F238E27FC236}">
-                <a16:creationId xmlns="" xmlns:a16="http://schemas.microsoft.com/office/drawing/2014/main" id="{5F1B432F-F570-AEC0-CFFF-C1D9196D7234}"/>
+                <a16:creationId xmlns:a16="http://schemas.microsoft.com/office/drawing/2014/main" id="{5F1B432F-F570-AEC0-CFFF-C1D9196D7234}"/>
               </a:ext>
             </a:extLst>
           </p:cNvPr>
@@ -13001,7 +13091,7 @@
           <p:cNvPr id="2" name="Título 1">
             <a:extLst>
               <a:ext uri="{FF2B5EF4-FFF2-40B4-BE49-F238E27FC236}">
-                <a16:creationId xmlns="" xmlns:a16="http://schemas.microsoft.com/office/drawing/2014/main" id="{5F09B89C-3183-4D52-981A-62798DDFF2B8}"/>
+                <a16:creationId xmlns:a16="http://schemas.microsoft.com/office/drawing/2014/main" id="{5F09B89C-3183-4D52-981A-62798DDFF2B8}"/>
               </a:ext>
             </a:extLst>
           </p:cNvPr>
@@ -13026,13 +13116,8 @@
           <a:p>
             <a:r>
               <a:rPr lang="pt-BR" dirty="0"/>
-              <a:t>K-</a:t>
-            </a:r>
-            <a:r>
-              <a:rPr lang="pt-BR" dirty="0" err="1"/>
-              <a:t>means</a:t>
-            </a:r>
-            <a:endParaRPr lang="pt-BR" dirty="0"/>
+              <a:t>Detecção de anomalias</a:t>
+            </a:r>
           </a:p>
         </p:txBody>
       </p:sp>
@@ -13041,7 +13126,7 @@
           <p:cNvPr id="3" name="AutoShape 2" descr="An example of graph signal reconstruction over wireless sensor network. |  Download Scientific Diagram">
             <a:extLst>
               <a:ext uri="{FF2B5EF4-FFF2-40B4-BE49-F238E27FC236}">
-                <a16:creationId xmlns="" xmlns:a16="http://schemas.microsoft.com/office/drawing/2014/main" id="{0166B4DD-D72A-4A54-94A7-2C38133837FD}"/>
+                <a16:creationId xmlns:a16="http://schemas.microsoft.com/office/drawing/2014/main" id="{0166B4DD-D72A-4A54-94A7-2C38133837FD}"/>
               </a:ext>
             </a:extLst>
           </p:cNvPr>
@@ -13077,12 +13162,36 @@
           </a:bodyPr>
           <a:lstStyle/>
           <a:p>
-            <a:pPr defTabSz="609630"/>
-            <a:endParaRPr lang="pt-BR" sz="1200">
+            <a:pPr marL="0" marR="0" lvl="0" indent="0" algn="l" defTabSz="609630" rtl="0" eaLnBrk="1" fontAlgn="auto" latinLnBrk="0" hangingPunct="1">
+              <a:lnSpc>
+                <a:spcPct val="100000"/>
+              </a:lnSpc>
+              <a:spcBef>
+                <a:spcPts val="0"/>
+              </a:spcBef>
+              <a:spcAft>
+                <a:spcPts val="0"/>
+              </a:spcAft>
+              <a:buClrTx/>
+              <a:buSzTx/>
+              <a:buFontTx/>
+              <a:buNone/>
+              <a:tabLst/>
+              <a:defRPr/>
+            </a:pPr>
+            <a:endParaRPr kumimoji="0" lang="pt-BR" sz="1200" b="0" i="0" u="none" strike="noStrike" kern="1200" cap="none" spc="0" normalizeH="0" baseline="0" noProof="0">
+              <a:ln>
+                <a:noFill/>
+              </a:ln>
               <a:solidFill>
                 <a:prstClr val="black"/>
               </a:solidFill>
+              <a:effectLst/>
+              <a:uLnTx/>
+              <a:uFillTx/>
               <a:latin typeface="Calibri"/>
+              <a:ea typeface="+mn-ea"/>
+              <a:cs typeface="+mn-cs"/>
             </a:endParaRPr>
           </a:p>
         </p:txBody>
@@ -13092,7 +13201,7 @@
           <p:cNvPr id="7" name="AutoShape 4" descr="An example of graph signal reconstruction over wireless sensor network. |  Download Scientific Diagram">
             <a:extLst>
               <a:ext uri="{FF2B5EF4-FFF2-40B4-BE49-F238E27FC236}">
-                <a16:creationId xmlns="" xmlns:a16="http://schemas.microsoft.com/office/drawing/2014/main" id="{14C2B67D-81A1-457E-A410-FE4350A3CCA4}"/>
+                <a16:creationId xmlns:a16="http://schemas.microsoft.com/office/drawing/2014/main" id="{14C2B67D-81A1-457E-A410-FE4350A3CCA4}"/>
               </a:ext>
             </a:extLst>
           </p:cNvPr>
@@ -13128,12 +13237,36 @@
           </a:bodyPr>
           <a:lstStyle/>
           <a:p>
-            <a:pPr defTabSz="609630"/>
-            <a:endParaRPr lang="pt-BR" sz="1200">
+            <a:pPr marL="0" marR="0" lvl="0" indent="0" algn="l" defTabSz="609630" rtl="0" eaLnBrk="1" fontAlgn="auto" latinLnBrk="0" hangingPunct="1">
+              <a:lnSpc>
+                <a:spcPct val="100000"/>
+              </a:lnSpc>
+              <a:spcBef>
+                <a:spcPts val="0"/>
+              </a:spcBef>
+              <a:spcAft>
+                <a:spcPts val="0"/>
+              </a:spcAft>
+              <a:buClrTx/>
+              <a:buSzTx/>
+              <a:buFontTx/>
+              <a:buNone/>
+              <a:tabLst/>
+              <a:defRPr/>
+            </a:pPr>
+            <a:endParaRPr kumimoji="0" lang="pt-BR" sz="1200" b="0" i="0" u="none" strike="noStrike" kern="1200" cap="none" spc="0" normalizeH="0" baseline="0" noProof="0">
+              <a:ln>
+                <a:noFill/>
+              </a:ln>
               <a:solidFill>
                 <a:prstClr val="black"/>
               </a:solidFill>
+              <a:effectLst/>
+              <a:uLnTx/>
+              <a:uFillTx/>
               <a:latin typeface="Calibri"/>
+              <a:ea typeface="+mn-ea"/>
+              <a:cs typeface="+mn-cs"/>
             </a:endParaRPr>
           </a:p>
         </p:txBody>
@@ -13143,7 +13276,7 @@
           <p:cNvPr id="4" name="Espaço Reservado para Conteúdo 3">
             <a:extLst>
               <a:ext uri="{FF2B5EF4-FFF2-40B4-BE49-F238E27FC236}">
-                <a16:creationId xmlns="" xmlns:a16="http://schemas.microsoft.com/office/drawing/2014/main" id="{5F1B432F-F570-AEC0-CFFF-C1D9196D7234}"/>
+                <a16:creationId xmlns:a16="http://schemas.microsoft.com/office/drawing/2014/main" id="{0349BA64-C9D7-4730-9CA9-5C4AD9FC7969}"/>
               </a:ext>
             </a:extLst>
           </p:cNvPr>
@@ -13156,129 +13289,182 @@
         </p:nvSpPr>
         <p:spPr>
           <a:xfrm>
-            <a:off x="304800" y="1066801"/>
-            <a:ext cx="9810044" cy="2737556"/>
+            <a:off x="304800" y="1066800"/>
+            <a:ext cx="9295589" cy="4330419"/>
           </a:xfrm>
         </p:spPr>
         <p:txBody>
           <a:bodyPr>
-            <a:normAutofit/>
+            <a:noAutofit/>
           </a:bodyPr>
           <a:lstStyle/>
           <a:p>
-            <a:pPr marL="0" indent="0">
+            <a:pPr marL="152408" indent="0" algn="just">
+              <a:lnSpc>
+                <a:spcPct val="107000"/>
+              </a:lnSpc>
+              <a:spcAft>
+                <a:spcPts val="533"/>
+              </a:spcAft>
               <a:buNone/>
             </a:pPr>
-            <a:endParaRPr lang="pt-BR" dirty="0"/>
-          </a:p>
-          <a:p>
-            <a:pPr marL="0" indent="0">
+            <a:r>
+              <a:rPr lang="pt-BR" sz="2000" dirty="0">
+                <a:ea typeface="Calibri" panose="020F0502020204030204" pitchFamily="34" charset="0"/>
+                <a:cs typeface="Arial" panose="020B0604020202020204" pitchFamily="34" charset="0"/>
+              </a:rPr>
+              <a:t>Movimentação de containers ao longo do ciclo logístico</a:t>
+            </a:r>
+          </a:p>
+          <a:p>
+            <a:pPr marL="152408" indent="0" algn="just">
+              <a:lnSpc>
+                <a:spcPct val="107000"/>
+              </a:lnSpc>
+              <a:spcAft>
+                <a:spcPts val="533"/>
+              </a:spcAft>
               <a:buNone/>
             </a:pPr>
-            <a:endParaRPr lang="pt-BR" dirty="0"/>
-          </a:p>
-        </p:txBody>
-      </p:sp>
-      <p:sp>
-        <p:nvSpPr>
-          <p:cNvPr id="6" name="CaixaDeTexto 5">
-            <a:extLst>
-              <a:ext uri="{FF2B5EF4-FFF2-40B4-BE49-F238E27FC236}">
-                <a16:creationId xmlns="" xmlns:a16="http://schemas.microsoft.com/office/drawing/2014/main" id="{470482DB-F365-0A83-E102-37A8EB7EACEF}"/>
-              </a:ext>
-            </a:extLst>
-          </p:cNvPr>
-          <p:cNvSpPr txBox="1"/>
-          <p:nvPr/>
-        </p:nvSpPr>
-        <p:spPr>
-          <a:xfrm>
-            <a:off x="745067" y="989885"/>
-            <a:ext cx="8229599" cy="5355312"/>
-          </a:xfrm>
-          <a:prstGeom prst="rect">
-            <a:avLst/>
-          </a:prstGeom>
-          <a:noFill/>
-        </p:spPr>
-        <p:txBody>
-          <a:bodyPr wrap="square">
-            <a:spAutoFit/>
-          </a:bodyPr>
-          <a:lstStyle/>
-          <a:p>
-            <a:endParaRPr lang="pt-BR" dirty="0"/>
-          </a:p>
-          <a:p>
-            <a:pPr marL="285750" indent="-285750">
-              <a:buFont typeface="Arial" panose="020B0604020202020204" pitchFamily="34" charset="0"/>
-              <a:buChar char="•"/>
+            <a:endParaRPr lang="pt-BR" sz="2000" dirty="0">
+              <a:ea typeface="Calibri" panose="020F0502020204030204" pitchFamily="34" charset="0"/>
+              <a:cs typeface="Arial" panose="020B0604020202020204" pitchFamily="34" charset="0"/>
+            </a:endParaRPr>
+          </a:p>
+          <a:p>
+            <a:pPr marL="152408" indent="0" algn="just">
+              <a:lnSpc>
+                <a:spcPct val="107000"/>
+              </a:lnSpc>
+              <a:spcAft>
+                <a:spcPts val="533"/>
+              </a:spcAft>
+              <a:buNone/>
             </a:pPr>
             <a:r>
-              <a:rPr lang="pt-BR" dirty="0"/>
-              <a:t>Exemplo: Centros de distribuição</a:t>
-            </a:r>
-          </a:p>
-          <a:p>
-            <a:endParaRPr lang="pt-BR" dirty="0"/>
-          </a:p>
-          <a:p>
-            <a:r>
-              <a:rPr lang="pt-BR" dirty="0"/>
-              <a:t>Considerar a adição de mais lojas: sendo 21 só em São Paulo.</a:t>
-            </a:r>
-          </a:p>
-          <a:p>
-            <a:endParaRPr lang="pt-BR" dirty="0"/>
-          </a:p>
-          <a:p>
-            <a:endParaRPr lang="pt-BR" dirty="0"/>
-          </a:p>
-          <a:p>
-            <a:endParaRPr lang="pt-BR" dirty="0"/>
-          </a:p>
-          <a:p>
-            <a:endParaRPr lang="pt-BR" dirty="0"/>
-          </a:p>
-          <a:p>
-            <a:endParaRPr lang="pt-BR" dirty="0"/>
-          </a:p>
-          <a:p>
-            <a:endParaRPr lang="pt-BR" dirty="0"/>
-          </a:p>
-          <a:p>
-            <a:endParaRPr lang="pt-BR" dirty="0"/>
-          </a:p>
-          <a:p>
-            <a:endParaRPr lang="pt-BR" dirty="0"/>
-          </a:p>
-          <a:p>
-            <a:endParaRPr lang="pt-BR" dirty="0"/>
-          </a:p>
-          <a:p>
-            <a:endParaRPr lang="pt-BR" dirty="0"/>
-          </a:p>
-          <a:p>
-            <a:endParaRPr lang="pt-BR" dirty="0"/>
-          </a:p>
-          <a:p>
-            <a:endParaRPr lang="pt-BR" dirty="0"/>
-          </a:p>
-          <a:p>
-            <a:endParaRPr lang="pt-BR" dirty="0"/>
-          </a:p>
-          <a:p>
-            <a:endParaRPr lang="pt-BR" dirty="0"/>
-          </a:p>
-          <a:p>
-            <a:endParaRPr lang="pt-BR" dirty="0"/>
+              <a:rPr lang="pt-BR" sz="2000" dirty="0">
+                <a:ea typeface="Calibri" panose="020F0502020204030204" pitchFamily="34" charset="0"/>
+                <a:cs typeface="Arial" panose="020B0604020202020204" pitchFamily="34" charset="0"/>
+              </a:rPr>
+              <a:t>Classificação de 5 estados do container </a:t>
+            </a:r>
+          </a:p>
+          <a:p>
+            <a:pPr marL="495308" indent="-342900" algn="just">
+              <a:lnSpc>
+                <a:spcPct val="107000"/>
+              </a:lnSpc>
+              <a:spcAft>
+                <a:spcPts val="533"/>
+              </a:spcAft>
+            </a:pPr>
+            <a:r>
+              <a:rPr lang="pt-BR" sz="2000" dirty="0">
+                <a:ea typeface="Calibri" panose="020F0502020204030204" pitchFamily="34" charset="0"/>
+                <a:cs typeface="Arial" panose="020B0604020202020204" pitchFamily="34" charset="0"/>
+              </a:rPr>
+              <a:t>Parado</a:t>
+            </a:r>
+          </a:p>
+          <a:p>
+            <a:pPr marL="495308" indent="-342900" algn="just">
+              <a:lnSpc>
+                <a:spcPct val="107000"/>
+              </a:lnSpc>
+              <a:spcAft>
+                <a:spcPts val="533"/>
+              </a:spcAft>
+            </a:pPr>
+            <a:r>
+              <a:rPr lang="pt-BR" sz="2000" dirty="0">
+                <a:ea typeface="Calibri" panose="020F0502020204030204" pitchFamily="34" charset="0"/>
+                <a:cs typeface="Arial" panose="020B0604020202020204" pitchFamily="34" charset="0"/>
+              </a:rPr>
+              <a:t>Sendo erguido</a:t>
+            </a:r>
+          </a:p>
+          <a:p>
+            <a:pPr marL="495308" indent="-342900" algn="just">
+              <a:lnSpc>
+                <a:spcPct val="107000"/>
+              </a:lnSpc>
+              <a:spcAft>
+                <a:spcPts val="533"/>
+              </a:spcAft>
+            </a:pPr>
+            <a:r>
+              <a:rPr lang="pt-BR" sz="2000" dirty="0">
+                <a:ea typeface="Calibri" panose="020F0502020204030204" pitchFamily="34" charset="0"/>
+                <a:cs typeface="Arial" panose="020B0604020202020204" pitchFamily="34" charset="0"/>
+              </a:rPr>
+              <a:t>No mar</a:t>
+            </a:r>
+          </a:p>
+          <a:p>
+            <a:pPr marL="495308" indent="-342900" algn="just">
+              <a:lnSpc>
+                <a:spcPct val="107000"/>
+              </a:lnSpc>
+              <a:spcAft>
+                <a:spcPts val="533"/>
+              </a:spcAft>
+            </a:pPr>
+            <a:r>
+              <a:rPr lang="pt-BR" sz="2000" dirty="0">
+                <a:ea typeface="Calibri" panose="020F0502020204030204" pitchFamily="34" charset="0"/>
+                <a:cs typeface="Arial" panose="020B0604020202020204" pitchFamily="34" charset="0"/>
+              </a:rPr>
+              <a:t>No caminhão</a:t>
+            </a:r>
+          </a:p>
+          <a:p>
+            <a:pPr marL="495308" indent="-342900" algn="just">
+              <a:lnSpc>
+                <a:spcPct val="107000"/>
+              </a:lnSpc>
+              <a:spcAft>
+                <a:spcPts val="533"/>
+              </a:spcAft>
+            </a:pPr>
+            <a:r>
+              <a:rPr lang="pt-BR" sz="2000" dirty="0">
+                <a:solidFill>
+                  <a:srgbClr val="FF0000"/>
+                </a:solidFill>
+                <a:ea typeface="Calibri" panose="020F0502020204030204" pitchFamily="34" charset="0"/>
+                <a:cs typeface="Arial" panose="020B0604020202020204" pitchFamily="34" charset="0"/>
+              </a:rPr>
+              <a:t>Anomalia </a:t>
+            </a:r>
+            <a:r>
+              <a:rPr lang="pt-BR" sz="2000" dirty="0">
+                <a:ea typeface="Calibri" panose="020F0502020204030204" pitchFamily="34" charset="0"/>
+                <a:cs typeface="Arial" panose="020B0604020202020204" pitchFamily="34" charset="0"/>
+              </a:rPr>
+              <a:t>(e.g., container caindo no mar, empilhadeira tombando)</a:t>
+            </a:r>
+          </a:p>
+          <a:p>
+            <a:pPr marL="152408" indent="0" algn="just">
+              <a:lnSpc>
+                <a:spcPct val="107000"/>
+              </a:lnSpc>
+              <a:spcAft>
+                <a:spcPts val="533"/>
+              </a:spcAft>
+              <a:buNone/>
+            </a:pPr>
+            <a:endParaRPr lang="pt-BR" sz="2000" dirty="0">
+              <a:ea typeface="Calibri" panose="020F0502020204030204" pitchFamily="34" charset="0"/>
+              <a:cs typeface="Arial" panose="020B0604020202020204" pitchFamily="34" charset="0"/>
+            </a:endParaRPr>
           </a:p>
         </p:txBody>
       </p:sp>
     </p:spTree>
     <p:extLst>
       <p:ext uri="{BB962C8B-B14F-4D97-AF65-F5344CB8AC3E}">
-        <p14:creationId xmlns:p14="http://schemas.microsoft.com/office/powerpoint/2010/main" val="3567116465"/>
+        <p14:creationId xmlns:p14="http://schemas.microsoft.com/office/powerpoint/2010/main" val="3676245301"/>
       </p:ext>
     </p:extLst>
   </p:cSld>
@@ -13324,7 +13510,7 @@
           <p:cNvPr id="2" name="Título 1">
             <a:extLst>
               <a:ext uri="{FF2B5EF4-FFF2-40B4-BE49-F238E27FC236}">
-                <a16:creationId xmlns="" xmlns:a16="http://schemas.microsoft.com/office/drawing/2014/main" id="{5F09B89C-3183-4D52-981A-62798DDFF2B8}"/>
+                <a16:creationId xmlns:a16="http://schemas.microsoft.com/office/drawing/2014/main" id="{5F09B89C-3183-4D52-981A-62798DDFF2B8}"/>
               </a:ext>
             </a:extLst>
           </p:cNvPr>
@@ -13349,13 +13535,8 @@
           <a:p>
             <a:r>
               <a:rPr lang="pt-BR" dirty="0"/>
-              <a:t>K-</a:t>
-            </a:r>
-            <a:r>
-              <a:rPr lang="pt-BR" dirty="0" err="1"/>
-              <a:t>means</a:t>
-            </a:r>
-            <a:endParaRPr lang="pt-BR" dirty="0"/>
+              <a:t>Detecção de anomalias</a:t>
+            </a:r>
           </a:p>
         </p:txBody>
       </p:sp>
@@ -13364,7 +13545,7 @@
           <p:cNvPr id="3" name="AutoShape 2" descr="An example of graph signal reconstruction over wireless sensor network. |  Download Scientific Diagram">
             <a:extLst>
               <a:ext uri="{FF2B5EF4-FFF2-40B4-BE49-F238E27FC236}">
-                <a16:creationId xmlns="" xmlns:a16="http://schemas.microsoft.com/office/drawing/2014/main" id="{0166B4DD-D72A-4A54-94A7-2C38133837FD}"/>
+                <a16:creationId xmlns:a16="http://schemas.microsoft.com/office/drawing/2014/main" id="{0166B4DD-D72A-4A54-94A7-2C38133837FD}"/>
               </a:ext>
             </a:extLst>
           </p:cNvPr>
@@ -13400,12 +13581,36 @@
           </a:bodyPr>
           <a:lstStyle/>
           <a:p>
-            <a:pPr defTabSz="609630"/>
-            <a:endParaRPr lang="pt-BR" sz="1200">
+            <a:pPr marL="0" marR="0" lvl="0" indent="0" algn="l" defTabSz="609630" rtl="0" eaLnBrk="1" fontAlgn="auto" latinLnBrk="0" hangingPunct="1">
+              <a:lnSpc>
+                <a:spcPct val="100000"/>
+              </a:lnSpc>
+              <a:spcBef>
+                <a:spcPts val="0"/>
+              </a:spcBef>
+              <a:spcAft>
+                <a:spcPts val="0"/>
+              </a:spcAft>
+              <a:buClrTx/>
+              <a:buSzTx/>
+              <a:buFontTx/>
+              <a:buNone/>
+              <a:tabLst/>
+              <a:defRPr/>
+            </a:pPr>
+            <a:endParaRPr kumimoji="0" lang="pt-BR" sz="1200" b="0" i="0" u="none" strike="noStrike" kern="1200" cap="none" spc="0" normalizeH="0" baseline="0" noProof="0">
+              <a:ln>
+                <a:noFill/>
+              </a:ln>
               <a:solidFill>
                 <a:prstClr val="black"/>
               </a:solidFill>
+              <a:effectLst/>
+              <a:uLnTx/>
+              <a:uFillTx/>
               <a:latin typeface="Calibri"/>
+              <a:ea typeface="+mn-ea"/>
+              <a:cs typeface="+mn-cs"/>
             </a:endParaRPr>
           </a:p>
         </p:txBody>
@@ -13415,7 +13620,7 @@
           <p:cNvPr id="7" name="AutoShape 4" descr="An example of graph signal reconstruction over wireless sensor network. |  Download Scientific Diagram">
             <a:extLst>
               <a:ext uri="{FF2B5EF4-FFF2-40B4-BE49-F238E27FC236}">
-                <a16:creationId xmlns="" xmlns:a16="http://schemas.microsoft.com/office/drawing/2014/main" id="{14C2B67D-81A1-457E-A410-FE4350A3CCA4}"/>
+                <a16:creationId xmlns:a16="http://schemas.microsoft.com/office/drawing/2014/main" id="{14C2B67D-81A1-457E-A410-FE4350A3CCA4}"/>
               </a:ext>
             </a:extLst>
           </p:cNvPr>
@@ -13451,12 +13656,36 @@
           </a:bodyPr>
           <a:lstStyle/>
           <a:p>
-            <a:pPr defTabSz="609630"/>
-            <a:endParaRPr lang="pt-BR" sz="1200">
+            <a:pPr marL="0" marR="0" lvl="0" indent="0" algn="l" defTabSz="609630" rtl="0" eaLnBrk="1" fontAlgn="auto" latinLnBrk="0" hangingPunct="1">
+              <a:lnSpc>
+                <a:spcPct val="100000"/>
+              </a:lnSpc>
+              <a:spcBef>
+                <a:spcPts val="0"/>
+              </a:spcBef>
+              <a:spcAft>
+                <a:spcPts val="0"/>
+              </a:spcAft>
+              <a:buClrTx/>
+              <a:buSzTx/>
+              <a:buFontTx/>
+              <a:buNone/>
+              <a:tabLst/>
+              <a:defRPr/>
+            </a:pPr>
+            <a:endParaRPr kumimoji="0" lang="pt-BR" sz="1200" b="0" i="0" u="none" strike="noStrike" kern="1200" cap="none" spc="0" normalizeH="0" baseline="0" noProof="0">
+              <a:ln>
+                <a:noFill/>
+              </a:ln>
               <a:solidFill>
                 <a:prstClr val="black"/>
               </a:solidFill>
+              <a:effectLst/>
+              <a:uLnTx/>
+              <a:uFillTx/>
               <a:latin typeface="Calibri"/>
+              <a:ea typeface="+mn-ea"/>
+              <a:cs typeface="+mn-cs"/>
             </a:endParaRPr>
           </a:p>
         </p:txBody>
@@ -13466,7 +13695,7 @@
           <p:cNvPr id="4" name="Espaço Reservado para Conteúdo 3">
             <a:extLst>
               <a:ext uri="{FF2B5EF4-FFF2-40B4-BE49-F238E27FC236}">
-                <a16:creationId xmlns="" xmlns:a16="http://schemas.microsoft.com/office/drawing/2014/main" id="{5F1B432F-F570-AEC0-CFFF-C1D9196D7234}"/>
+                <a16:creationId xmlns:a16="http://schemas.microsoft.com/office/drawing/2014/main" id="{0349BA64-C9D7-4730-9CA9-5C4AD9FC7969}"/>
               </a:ext>
             </a:extLst>
           </p:cNvPr>
@@ -13479,190 +13708,57 @@
         </p:nvSpPr>
         <p:spPr>
           <a:xfrm>
-            <a:off x="304800" y="1066801"/>
-            <a:ext cx="9810044" cy="2737556"/>
+            <a:off x="304800" y="1066800"/>
+            <a:ext cx="9295589" cy="4330419"/>
           </a:xfrm>
         </p:spPr>
         <p:txBody>
           <a:bodyPr>
-            <a:normAutofit/>
+            <a:noAutofit/>
           </a:bodyPr>
           <a:lstStyle/>
           <a:p>
-            <a:pPr marL="0" indent="0">
+            <a:pPr marL="152408" indent="0" algn="just">
+              <a:lnSpc>
+                <a:spcPct val="107000"/>
+              </a:lnSpc>
+              <a:spcAft>
+                <a:spcPts val="533"/>
+              </a:spcAft>
               <a:buNone/>
             </a:pPr>
-            <a:endParaRPr lang="pt-BR" dirty="0"/>
-          </a:p>
-          <a:p>
-            <a:pPr marL="0" indent="0">
+            <a:r>
+              <a:rPr lang="pt-BR" sz="2000" dirty="0">
+                <a:ea typeface="Calibri" panose="020F0502020204030204" pitchFamily="34" charset="0"/>
+                <a:cs typeface="Arial" panose="020B0604020202020204" pitchFamily="34" charset="0"/>
+              </a:rPr>
+              <a:t>Trabalho:</a:t>
+            </a:r>
+          </a:p>
+          <a:p>
+            <a:pPr marL="152408" indent="0" algn="just">
+              <a:lnSpc>
+                <a:spcPct val="107000"/>
+              </a:lnSpc>
+              <a:spcAft>
+                <a:spcPts val="533"/>
+              </a:spcAft>
               <a:buNone/>
             </a:pPr>
-            <a:endParaRPr lang="pt-BR" dirty="0"/>
-          </a:p>
-        </p:txBody>
-      </p:sp>
-      <p:sp>
-        <p:nvSpPr>
-          <p:cNvPr id="6" name="CaixaDeTexto 5">
-            <a:extLst>
-              <a:ext uri="{FF2B5EF4-FFF2-40B4-BE49-F238E27FC236}">
-                <a16:creationId xmlns="" xmlns:a16="http://schemas.microsoft.com/office/drawing/2014/main" id="{470482DB-F365-0A83-E102-37A8EB7EACEF}"/>
-              </a:ext>
-            </a:extLst>
-          </p:cNvPr>
-          <p:cNvSpPr txBox="1"/>
-          <p:nvPr/>
-        </p:nvSpPr>
-        <p:spPr>
-          <a:xfrm>
-            <a:off x="846667" y="988201"/>
-            <a:ext cx="8229599" cy="4524315"/>
-          </a:xfrm>
-          <a:prstGeom prst="rect">
-            <a:avLst/>
-          </a:prstGeom>
-          <a:noFill/>
-        </p:spPr>
-        <p:txBody>
-          <a:bodyPr wrap="square">
-            <a:spAutoFit/>
-          </a:bodyPr>
-          <a:lstStyle/>
-          <a:p>
-            <a:r>
-              <a:rPr lang="pt-BR" dirty="0"/>
-              <a:t>Como escolher o K ótimo?</a:t>
-            </a:r>
-          </a:p>
-          <a:p>
-            <a:endParaRPr lang="pt-BR" dirty="0"/>
-          </a:p>
-          <a:p>
-            <a:endParaRPr lang="pt-BR" dirty="0"/>
-          </a:p>
-          <a:p>
-            <a:endParaRPr lang="pt-BR" dirty="0"/>
-          </a:p>
-          <a:p>
-            <a:endParaRPr lang="pt-BR" dirty="0"/>
-          </a:p>
-          <a:p>
-            <a:endParaRPr lang="pt-BR" dirty="0"/>
-          </a:p>
-          <a:p>
-            <a:endParaRPr lang="pt-BR" dirty="0"/>
-          </a:p>
-          <a:p>
-            <a:endParaRPr lang="pt-BR" dirty="0"/>
-          </a:p>
-          <a:p>
-            <a:endParaRPr lang="pt-BR" dirty="0"/>
-          </a:p>
-          <a:p>
-            <a:endParaRPr lang="pt-BR" dirty="0"/>
-          </a:p>
-          <a:p>
-            <a:endParaRPr lang="pt-BR" dirty="0"/>
-          </a:p>
-          <a:p>
-            <a:endParaRPr lang="pt-BR" dirty="0"/>
-          </a:p>
-          <a:p>
-            <a:endParaRPr lang="pt-BR" dirty="0"/>
-          </a:p>
-          <a:p>
-            <a:endParaRPr lang="pt-BR" dirty="0"/>
-          </a:p>
-          <a:p>
-            <a:endParaRPr lang="pt-BR" dirty="0"/>
-          </a:p>
-          <a:p>
-            <a:endParaRPr lang="pt-BR" dirty="0"/>
-          </a:p>
-        </p:txBody>
-      </p:sp>
-      <p:pic>
-        <p:nvPicPr>
-          <p:cNvPr id="2050" name="Picture 2" descr="Base Teórica do K-Means! Aprenda a Lógica desse Algoritmo Hoje!">
-            <a:extLst>
-              <a:ext uri="{FF2B5EF4-FFF2-40B4-BE49-F238E27FC236}">
-                <a16:creationId xmlns="" xmlns:a16="http://schemas.microsoft.com/office/drawing/2014/main" id="{0694ADFD-EB2E-2BF0-18BE-B07E4CD60A5F}"/>
-              </a:ext>
-            </a:extLst>
-          </p:cNvPr>
-          <p:cNvPicPr>
-            <a:picLocks noChangeAspect="1" noChangeArrowheads="1"/>
-          </p:cNvPicPr>
-          <p:nvPr/>
-        </p:nvPicPr>
-        <p:blipFill>
-          <a:blip r:embed="rId4">
-            <a:extLst>
-              <a:ext uri="{28A0092B-C50C-407E-A947-70E740481C1C}">
-                <a14:useLocalDpi xmlns:a14="http://schemas.microsoft.com/office/drawing/2010/main" val="0"/>
-              </a:ext>
-            </a:extLst>
-          </a:blip>
-          <a:srcRect/>
-          <a:stretch>
-            <a:fillRect/>
-          </a:stretch>
-        </p:blipFill>
-        <p:spPr bwMode="auto">
-          <a:xfrm>
-            <a:off x="1526381" y="1605398"/>
-            <a:ext cx="7549885" cy="3444004"/>
-          </a:xfrm>
-          <a:prstGeom prst="rect">
-            <a:avLst/>
-          </a:prstGeom>
-          <a:noFill/>
-          <a:extLst>
-            <a:ext uri="{909E8E84-426E-40DD-AFC4-6F175D3DCCD1}">
-              <a14:hiddenFill xmlns:a14="http://schemas.microsoft.com/office/drawing/2010/main">
-                <a:solidFill>
-                  <a:srgbClr val="FFFFFF"/>
-                </a:solidFill>
-              </a14:hiddenFill>
-            </a:ext>
-          </a:extLst>
-        </p:spPr>
-      </p:pic>
-      <p:pic>
-        <p:nvPicPr>
-          <p:cNvPr id="8" name="Imagem 7">
-            <a:extLst>
-              <a:ext uri="{FF2B5EF4-FFF2-40B4-BE49-F238E27FC236}">
-                <a16:creationId xmlns="" xmlns:a16="http://schemas.microsoft.com/office/drawing/2014/main" id="{EEF69E85-6440-34FE-5C8A-A5F37765D292}"/>
-              </a:ext>
-            </a:extLst>
-          </p:cNvPr>
-          <p:cNvPicPr>
-            <a:picLocks noChangeAspect="1"/>
-          </p:cNvPicPr>
-          <p:nvPr/>
-        </p:nvPicPr>
-        <p:blipFill>
-          <a:blip r:embed="rId5"/>
-          <a:stretch>
-            <a:fillRect/>
-          </a:stretch>
-        </p:blipFill>
-        <p:spPr>
-          <a:xfrm>
-            <a:off x="4486439" y="5536951"/>
-            <a:ext cx="2377646" cy="784928"/>
-          </a:xfrm>
-          <a:prstGeom prst="rect">
-            <a:avLst/>
-          </a:prstGeom>
-        </p:spPr>
-      </p:pic>
+            <a:r>
+              <a:rPr lang="pt-BR" sz="2000" dirty="0">
+                <a:ea typeface="Calibri" panose="020F0502020204030204" pitchFamily="34" charset="0"/>
+                <a:cs typeface="Arial" panose="020B0604020202020204" pitchFamily="34" charset="0"/>
+              </a:rPr>
+              <a:t>Incluir e analisar no Edge Impulse possíveis anomalias nos dados da movimentação da cadeira de rodas pela cabeça.</a:t>
+            </a:r>
+          </a:p>
+        </p:txBody>
+      </p:sp>
     </p:spTree>
     <p:extLst>
       <p:ext uri="{BB962C8B-B14F-4D97-AF65-F5344CB8AC3E}">
-        <p14:creationId xmlns:p14="http://schemas.microsoft.com/office/powerpoint/2010/main" val="1144642794"/>
+        <p14:creationId xmlns:p14="http://schemas.microsoft.com/office/powerpoint/2010/main" val="3910318190"/>
       </p:ext>
     </p:extLst>
   </p:cSld>
@@ -13705,45 +13801,10 @@
       </p:grpSpPr>
       <p:sp>
         <p:nvSpPr>
-          <p:cNvPr id="2" name="Título 1">
-            <a:extLst>
-              <a:ext uri="{FF2B5EF4-FFF2-40B4-BE49-F238E27FC236}">
-                <a16:creationId xmlns="" xmlns:a16="http://schemas.microsoft.com/office/drawing/2014/main" id="{5F09B89C-3183-4D52-981A-62798DDFF2B8}"/>
-              </a:ext>
-            </a:extLst>
-          </p:cNvPr>
-          <p:cNvSpPr>
-            <a:spLocks noGrp="1"/>
-          </p:cNvSpPr>
-          <p:nvPr>
-            <p:ph type="title"/>
-          </p:nvPr>
-        </p:nvSpPr>
-        <p:spPr>
-          <a:xfrm>
-            <a:off x="304800" y="183092"/>
-            <a:ext cx="6559285" cy="762000"/>
-          </a:xfrm>
-        </p:spPr>
-        <p:txBody>
-          <a:bodyPr>
-            <a:normAutofit/>
-          </a:bodyPr>
-          <a:lstStyle/>
-          <a:p>
-            <a:r>
-              <a:rPr lang="pt-BR" dirty="0"/>
-              <a:t>Detecção de anomalias</a:t>
-            </a:r>
-          </a:p>
-        </p:txBody>
-      </p:sp>
-      <p:sp>
-        <p:nvSpPr>
           <p:cNvPr id="3" name="AutoShape 2" descr="An example of graph signal reconstruction over wireless sensor network. |  Download Scientific Diagram">
             <a:extLst>
               <a:ext uri="{FF2B5EF4-FFF2-40B4-BE49-F238E27FC236}">
-                <a16:creationId xmlns="" xmlns:a16="http://schemas.microsoft.com/office/drawing/2014/main" id="{0166B4DD-D72A-4A54-94A7-2C38133837FD}"/>
+                <a16:creationId xmlns:a16="http://schemas.microsoft.com/office/drawing/2014/main" id="{0166B4DD-D72A-4A54-94A7-2C38133837FD}"/>
               </a:ext>
             </a:extLst>
           </p:cNvPr>
@@ -13818,7 +13879,7 @@
           <p:cNvPr id="7" name="AutoShape 4" descr="An example of graph signal reconstruction over wireless sensor network. |  Download Scientific Diagram">
             <a:extLst>
               <a:ext uri="{FF2B5EF4-FFF2-40B4-BE49-F238E27FC236}">
-                <a16:creationId xmlns="" xmlns:a16="http://schemas.microsoft.com/office/drawing/2014/main" id="{14C2B67D-81A1-457E-A410-FE4350A3CCA4}"/>
+                <a16:creationId xmlns:a16="http://schemas.microsoft.com/office/drawing/2014/main" id="{14C2B67D-81A1-457E-A410-FE4350A3CCA4}"/>
               </a:ext>
             </a:extLst>
           </p:cNvPr>
@@ -13893,1020 +13954,7 @@
           <p:cNvPr id="4" name="Espaço Reservado para Conteúdo 3">
             <a:extLst>
               <a:ext uri="{FF2B5EF4-FFF2-40B4-BE49-F238E27FC236}">
-                <a16:creationId xmlns="" xmlns:a16="http://schemas.microsoft.com/office/drawing/2014/main" id="{0349BA64-C9D7-4730-9CA9-5C4AD9FC7969}"/>
-              </a:ext>
-            </a:extLst>
-          </p:cNvPr>
-          <p:cNvSpPr>
-            <a:spLocks noGrp="1"/>
-          </p:cNvSpPr>
-          <p:nvPr>
-            <p:ph idx="1"/>
-          </p:nvPr>
-        </p:nvSpPr>
-        <p:spPr>
-          <a:xfrm>
-            <a:off x="304800" y="1066800"/>
-            <a:ext cx="9295589" cy="4330419"/>
-          </a:xfrm>
-        </p:spPr>
-        <p:txBody>
-          <a:bodyPr>
-            <a:noAutofit/>
-          </a:bodyPr>
-          <a:lstStyle/>
-          <a:p>
-            <a:pPr marL="495308" indent="-342900" algn="just">
-              <a:lnSpc>
-                <a:spcPct val="107000"/>
-              </a:lnSpc>
-              <a:spcAft>
-                <a:spcPts val="533"/>
-              </a:spcAft>
-            </a:pPr>
-            <a:r>
-              <a:rPr lang="pt-BR" sz="2000" dirty="0">
-                <a:ea typeface="Calibri" panose="020F0502020204030204" pitchFamily="34" charset="0"/>
-                <a:cs typeface="Arial" panose="020B0604020202020204" pitchFamily="34" charset="0"/>
-              </a:rPr>
-              <a:t>Movimentação de containers ao longo do ciclo logístico</a:t>
-            </a:r>
-          </a:p>
-        </p:txBody>
-      </p:sp>
-      <p:pic>
-        <p:nvPicPr>
-          <p:cNvPr id="1026" name="Picture 2" descr="Free photo industrial containers box for logistic import export business.">
-            <a:extLst>
-              <a:ext uri="{FF2B5EF4-FFF2-40B4-BE49-F238E27FC236}">
-                <a16:creationId xmlns="" xmlns:a16="http://schemas.microsoft.com/office/drawing/2014/main" id="{FDC07977-F662-66CB-7534-103E83976919}"/>
-              </a:ext>
-            </a:extLst>
-          </p:cNvPr>
-          <p:cNvPicPr>
-            <a:picLocks noChangeAspect="1" noChangeArrowheads="1"/>
-          </p:cNvPicPr>
-          <p:nvPr/>
-        </p:nvPicPr>
-        <p:blipFill>
-          <a:blip r:embed="rId4">
-            <a:extLst>
-              <a:ext uri="{28A0092B-C50C-407E-A947-70E740481C1C}">
-                <a14:useLocalDpi xmlns:a14="http://schemas.microsoft.com/office/drawing/2010/main" val="0"/>
-              </a:ext>
-            </a:extLst>
-          </a:blip>
-          <a:srcRect/>
-          <a:stretch>
-            <a:fillRect/>
-          </a:stretch>
-        </p:blipFill>
-        <p:spPr bwMode="auto">
-          <a:xfrm>
-            <a:off x="2742141" y="1819275"/>
-            <a:ext cx="5962650" cy="3971925"/>
-          </a:xfrm>
-          <a:prstGeom prst="rect">
-            <a:avLst/>
-          </a:prstGeom>
-          <a:noFill/>
-          <a:extLst>
-            <a:ext uri="{909E8E84-426E-40DD-AFC4-6F175D3DCCD1}">
-              <a14:hiddenFill xmlns:a14="http://schemas.microsoft.com/office/drawing/2010/main">
-                <a:solidFill>
-                  <a:srgbClr val="FFFFFF"/>
-                </a:solidFill>
-              </a14:hiddenFill>
-            </a:ext>
-          </a:extLst>
-        </p:spPr>
-      </p:pic>
-    </p:spTree>
-    <p:extLst>
-      <p:ext uri="{BB962C8B-B14F-4D97-AF65-F5344CB8AC3E}">
-        <p14:creationId xmlns:p14="http://schemas.microsoft.com/office/powerpoint/2010/main" val="3900979391"/>
-      </p:ext>
-    </p:extLst>
-  </p:cSld>
-  <p:clrMapOvr>
-    <a:masterClrMapping/>
-  </p:clrMapOvr>
-</p:sld>
-</file>
-
-<file path=ppt/slides/slide23.xml><?xml version="1.0" encoding="utf-8"?>
-<p:sld xmlns:a="http://schemas.openxmlformats.org/drawingml/2006/main" xmlns:r="http://schemas.openxmlformats.org/officeDocument/2006/relationships" xmlns:p="http://schemas.openxmlformats.org/presentationml/2006/main">
-  <p:cSld>
-    <p:bg>
-      <p:bgPr>
-        <a:blipFill dpi="0" rotWithShape="1">
-          <a:blip r:embed="rId3">
-            <a:lum/>
-          </a:blip>
-          <a:srcRect/>
-          <a:stretch>
-            <a:fillRect/>
-          </a:stretch>
-        </a:blipFill>
-        <a:effectLst/>
-      </p:bgPr>
-    </p:bg>
-    <p:spTree>
-      <p:nvGrpSpPr>
-        <p:cNvPr id="1" name=""/>
-        <p:cNvGrpSpPr/>
-        <p:nvPr/>
-      </p:nvGrpSpPr>
-      <p:grpSpPr>
-        <a:xfrm>
-          <a:off x="0" y="0"/>
-          <a:ext cx="0" cy="0"/>
-          <a:chOff x="0" y="0"/>
-          <a:chExt cx="0" cy="0"/>
-        </a:xfrm>
-      </p:grpSpPr>
-      <p:sp>
-        <p:nvSpPr>
-          <p:cNvPr id="2" name="Título 1">
-            <a:extLst>
-              <a:ext uri="{FF2B5EF4-FFF2-40B4-BE49-F238E27FC236}">
-                <a16:creationId xmlns="" xmlns:a16="http://schemas.microsoft.com/office/drawing/2014/main" id="{5F09B89C-3183-4D52-981A-62798DDFF2B8}"/>
-              </a:ext>
-            </a:extLst>
-          </p:cNvPr>
-          <p:cNvSpPr>
-            <a:spLocks noGrp="1"/>
-          </p:cNvSpPr>
-          <p:nvPr>
-            <p:ph type="title"/>
-          </p:nvPr>
-        </p:nvSpPr>
-        <p:spPr>
-          <a:xfrm>
-            <a:off x="304800" y="183092"/>
-            <a:ext cx="6559285" cy="762000"/>
-          </a:xfrm>
-        </p:spPr>
-        <p:txBody>
-          <a:bodyPr>
-            <a:normAutofit/>
-          </a:bodyPr>
-          <a:lstStyle/>
-          <a:p>
-            <a:r>
-              <a:rPr lang="pt-BR" dirty="0"/>
-              <a:t>Detecção de anomalias</a:t>
-            </a:r>
-          </a:p>
-        </p:txBody>
-      </p:sp>
-      <p:sp>
-        <p:nvSpPr>
-          <p:cNvPr id="3" name="AutoShape 2" descr="An example of graph signal reconstruction over wireless sensor network. |  Download Scientific Diagram">
-            <a:extLst>
-              <a:ext uri="{FF2B5EF4-FFF2-40B4-BE49-F238E27FC236}">
-                <a16:creationId xmlns="" xmlns:a16="http://schemas.microsoft.com/office/drawing/2014/main" id="{0166B4DD-D72A-4A54-94A7-2C38133837FD}"/>
-              </a:ext>
-            </a:extLst>
-          </p:cNvPr>
-          <p:cNvSpPr>
-            <a:spLocks noChangeAspect="1" noChangeArrowheads="1"/>
-          </p:cNvSpPr>
-          <p:nvPr/>
-        </p:nvSpPr>
-        <p:spPr bwMode="auto">
-          <a:xfrm>
-            <a:off x="5994400" y="3327400"/>
-            <a:ext cx="203200" cy="203200"/>
-          </a:xfrm>
-          <a:prstGeom prst="rect">
-            <a:avLst/>
-          </a:prstGeom>
-          <a:noFill/>
-          <a:extLst>
-            <a:ext uri="{909E8E84-426E-40DD-AFC4-6F175D3DCCD1}">
-              <a14:hiddenFill xmlns:a14="http://schemas.microsoft.com/office/drawing/2010/main">
-                <a:solidFill>
-                  <a:srgbClr val="FFFFFF"/>
-                </a:solidFill>
-              </a14:hiddenFill>
-            </a:ext>
-          </a:extLst>
-        </p:spPr>
-        <p:txBody>
-          <a:bodyPr vert="horz" wrap="square" lIns="60960" tIns="30480" rIns="60960" bIns="30480" numCol="1" anchor="t" anchorCtr="0" compatLnSpc="1">
-            <a:prstTxWarp prst="textNoShape">
-              <a:avLst/>
-            </a:prstTxWarp>
-          </a:bodyPr>
-          <a:lstStyle/>
-          <a:p>
-            <a:pPr marL="0" marR="0" lvl="0" indent="0" algn="l" defTabSz="609630" rtl="0" eaLnBrk="1" fontAlgn="auto" latinLnBrk="0" hangingPunct="1">
-              <a:lnSpc>
-                <a:spcPct val="100000"/>
-              </a:lnSpc>
-              <a:spcBef>
-                <a:spcPts val="0"/>
-              </a:spcBef>
-              <a:spcAft>
-                <a:spcPts val="0"/>
-              </a:spcAft>
-              <a:buClrTx/>
-              <a:buSzTx/>
-              <a:buFontTx/>
-              <a:buNone/>
-              <a:tabLst/>
-              <a:defRPr/>
-            </a:pPr>
-            <a:endParaRPr kumimoji="0" lang="pt-BR" sz="1200" b="0" i="0" u="none" strike="noStrike" kern="1200" cap="none" spc="0" normalizeH="0" baseline="0" noProof="0">
-              <a:ln>
-                <a:noFill/>
-              </a:ln>
-              <a:solidFill>
-                <a:prstClr val="black"/>
-              </a:solidFill>
-              <a:effectLst/>
-              <a:uLnTx/>
-              <a:uFillTx/>
-              <a:latin typeface="Calibri"/>
-              <a:ea typeface="+mn-ea"/>
-              <a:cs typeface="+mn-cs"/>
-            </a:endParaRPr>
-          </a:p>
-        </p:txBody>
-      </p:sp>
-      <p:sp>
-        <p:nvSpPr>
-          <p:cNvPr id="7" name="AutoShape 4" descr="An example of graph signal reconstruction over wireless sensor network. |  Download Scientific Diagram">
-            <a:extLst>
-              <a:ext uri="{FF2B5EF4-FFF2-40B4-BE49-F238E27FC236}">
-                <a16:creationId xmlns="" xmlns:a16="http://schemas.microsoft.com/office/drawing/2014/main" id="{14C2B67D-81A1-457E-A410-FE4350A3CCA4}"/>
-              </a:ext>
-            </a:extLst>
-          </p:cNvPr>
-          <p:cNvSpPr>
-            <a:spLocks noChangeAspect="1" noChangeArrowheads="1"/>
-          </p:cNvSpPr>
-          <p:nvPr/>
-        </p:nvSpPr>
-        <p:spPr bwMode="auto">
-          <a:xfrm>
-            <a:off x="6096000" y="3429000"/>
-            <a:ext cx="203200" cy="203200"/>
-          </a:xfrm>
-          <a:prstGeom prst="rect">
-            <a:avLst/>
-          </a:prstGeom>
-          <a:noFill/>
-          <a:extLst>
-            <a:ext uri="{909E8E84-426E-40DD-AFC4-6F175D3DCCD1}">
-              <a14:hiddenFill xmlns:a14="http://schemas.microsoft.com/office/drawing/2010/main">
-                <a:solidFill>
-                  <a:srgbClr val="FFFFFF"/>
-                </a:solidFill>
-              </a14:hiddenFill>
-            </a:ext>
-          </a:extLst>
-        </p:spPr>
-        <p:txBody>
-          <a:bodyPr vert="horz" wrap="square" lIns="60960" tIns="30480" rIns="60960" bIns="30480" numCol="1" anchor="t" anchorCtr="0" compatLnSpc="1">
-            <a:prstTxWarp prst="textNoShape">
-              <a:avLst/>
-            </a:prstTxWarp>
-          </a:bodyPr>
-          <a:lstStyle/>
-          <a:p>
-            <a:pPr marL="0" marR="0" lvl="0" indent="0" algn="l" defTabSz="609630" rtl="0" eaLnBrk="1" fontAlgn="auto" latinLnBrk="0" hangingPunct="1">
-              <a:lnSpc>
-                <a:spcPct val="100000"/>
-              </a:lnSpc>
-              <a:spcBef>
-                <a:spcPts val="0"/>
-              </a:spcBef>
-              <a:spcAft>
-                <a:spcPts val="0"/>
-              </a:spcAft>
-              <a:buClrTx/>
-              <a:buSzTx/>
-              <a:buFontTx/>
-              <a:buNone/>
-              <a:tabLst/>
-              <a:defRPr/>
-            </a:pPr>
-            <a:endParaRPr kumimoji="0" lang="pt-BR" sz="1200" b="0" i="0" u="none" strike="noStrike" kern="1200" cap="none" spc="0" normalizeH="0" baseline="0" noProof="0">
-              <a:ln>
-                <a:noFill/>
-              </a:ln>
-              <a:solidFill>
-                <a:prstClr val="black"/>
-              </a:solidFill>
-              <a:effectLst/>
-              <a:uLnTx/>
-              <a:uFillTx/>
-              <a:latin typeface="Calibri"/>
-              <a:ea typeface="+mn-ea"/>
-              <a:cs typeface="+mn-cs"/>
-            </a:endParaRPr>
-          </a:p>
-        </p:txBody>
-      </p:sp>
-      <p:sp>
-        <p:nvSpPr>
-          <p:cNvPr id="4" name="Espaço Reservado para Conteúdo 3">
-            <a:extLst>
-              <a:ext uri="{FF2B5EF4-FFF2-40B4-BE49-F238E27FC236}">
-                <a16:creationId xmlns="" xmlns:a16="http://schemas.microsoft.com/office/drawing/2014/main" id="{0349BA64-C9D7-4730-9CA9-5C4AD9FC7969}"/>
-              </a:ext>
-            </a:extLst>
-          </p:cNvPr>
-          <p:cNvSpPr>
-            <a:spLocks noGrp="1"/>
-          </p:cNvSpPr>
-          <p:nvPr>
-            <p:ph idx="1"/>
-          </p:nvPr>
-        </p:nvSpPr>
-        <p:spPr>
-          <a:xfrm>
-            <a:off x="304800" y="1066800"/>
-            <a:ext cx="9295589" cy="4330419"/>
-          </a:xfrm>
-        </p:spPr>
-        <p:txBody>
-          <a:bodyPr>
-            <a:noAutofit/>
-          </a:bodyPr>
-          <a:lstStyle/>
-          <a:p>
-            <a:pPr marL="495308" indent="-342900" algn="just">
-              <a:lnSpc>
-                <a:spcPct val="107000"/>
-              </a:lnSpc>
-              <a:spcAft>
-                <a:spcPts val="533"/>
-              </a:spcAft>
-            </a:pPr>
-            <a:r>
-              <a:rPr lang="pt-BR" sz="2000" dirty="0">
-                <a:ea typeface="Calibri" panose="020F0502020204030204" pitchFamily="34" charset="0"/>
-                <a:cs typeface="Arial" panose="020B0604020202020204" pitchFamily="34" charset="0"/>
-              </a:rPr>
-              <a:t>Movimentação de containers ao longo do ciclo logístico</a:t>
-            </a:r>
-          </a:p>
-          <a:p>
-            <a:pPr marL="152408" indent="0" algn="just">
-              <a:lnSpc>
-                <a:spcPct val="107000"/>
-              </a:lnSpc>
-              <a:spcAft>
-                <a:spcPts val="533"/>
-              </a:spcAft>
-              <a:buNone/>
-            </a:pPr>
-            <a:r>
-              <a:rPr lang="pt-BR" sz="2000" dirty="0">
-                <a:ea typeface="Calibri" panose="020F0502020204030204" pitchFamily="34" charset="0"/>
-                <a:cs typeface="Arial" panose="020B0604020202020204" pitchFamily="34" charset="0"/>
-              </a:rPr>
-              <a:t>Classificação de 5 estados do container </a:t>
-            </a:r>
-          </a:p>
-          <a:p>
-            <a:pPr marL="152408" indent="0" algn="just">
-              <a:lnSpc>
-                <a:spcPct val="107000"/>
-              </a:lnSpc>
-              <a:spcAft>
-                <a:spcPts val="533"/>
-              </a:spcAft>
-              <a:buNone/>
-            </a:pPr>
-            <a:endParaRPr lang="pt-BR" sz="2000" dirty="0">
-              <a:ea typeface="Calibri" panose="020F0502020204030204" pitchFamily="34" charset="0"/>
-              <a:cs typeface="Arial" panose="020B0604020202020204" pitchFamily="34" charset="0"/>
-            </a:endParaRPr>
-          </a:p>
-          <a:p>
-            <a:pPr marL="495308" indent="-342900" algn="just">
-              <a:lnSpc>
-                <a:spcPct val="107000"/>
-              </a:lnSpc>
-              <a:spcAft>
-                <a:spcPts val="533"/>
-              </a:spcAft>
-            </a:pPr>
-            <a:r>
-              <a:rPr lang="pt-BR" sz="2000" dirty="0">
-                <a:ea typeface="Calibri" panose="020F0502020204030204" pitchFamily="34" charset="0"/>
-                <a:cs typeface="Arial" panose="020B0604020202020204" pitchFamily="34" charset="0"/>
-              </a:rPr>
-              <a:t>Parado</a:t>
-            </a:r>
-          </a:p>
-          <a:p>
-            <a:pPr marL="495308" indent="-342900" algn="just">
-              <a:lnSpc>
-                <a:spcPct val="107000"/>
-              </a:lnSpc>
-              <a:spcAft>
-                <a:spcPts val="533"/>
-              </a:spcAft>
-            </a:pPr>
-            <a:r>
-              <a:rPr lang="pt-BR" sz="2000" dirty="0">
-                <a:ea typeface="Calibri" panose="020F0502020204030204" pitchFamily="34" charset="0"/>
-                <a:cs typeface="Arial" panose="020B0604020202020204" pitchFamily="34" charset="0"/>
-              </a:rPr>
-              <a:t>Sendo erguido</a:t>
-            </a:r>
-          </a:p>
-          <a:p>
-            <a:pPr marL="495308" indent="-342900" algn="just">
-              <a:lnSpc>
-                <a:spcPct val="107000"/>
-              </a:lnSpc>
-              <a:spcAft>
-                <a:spcPts val="533"/>
-              </a:spcAft>
-            </a:pPr>
-            <a:r>
-              <a:rPr lang="pt-BR" sz="2000" dirty="0">
-                <a:ea typeface="Calibri" panose="020F0502020204030204" pitchFamily="34" charset="0"/>
-                <a:cs typeface="Arial" panose="020B0604020202020204" pitchFamily="34" charset="0"/>
-              </a:rPr>
-              <a:t>No mar</a:t>
-            </a:r>
-          </a:p>
-          <a:p>
-            <a:pPr marL="495308" indent="-342900" algn="just">
-              <a:lnSpc>
-                <a:spcPct val="107000"/>
-              </a:lnSpc>
-              <a:spcAft>
-                <a:spcPts val="533"/>
-              </a:spcAft>
-            </a:pPr>
-            <a:r>
-              <a:rPr lang="pt-BR" sz="2000" dirty="0">
-                <a:ea typeface="Calibri" panose="020F0502020204030204" pitchFamily="34" charset="0"/>
-                <a:cs typeface="Arial" panose="020B0604020202020204" pitchFamily="34" charset="0"/>
-              </a:rPr>
-              <a:t>No caminhão</a:t>
-            </a:r>
-          </a:p>
-          <a:p>
-            <a:pPr marL="495308" indent="-342900" algn="just">
-              <a:lnSpc>
-                <a:spcPct val="107000"/>
-              </a:lnSpc>
-              <a:spcAft>
-                <a:spcPts val="533"/>
-              </a:spcAft>
-            </a:pPr>
-            <a:r>
-              <a:rPr lang="pt-BR" sz="2000" dirty="0">
-                <a:solidFill>
-                  <a:srgbClr val="FF0000"/>
-                </a:solidFill>
-                <a:ea typeface="Calibri" panose="020F0502020204030204" pitchFamily="34" charset="0"/>
-                <a:cs typeface="Arial" panose="020B0604020202020204" pitchFamily="34" charset="0"/>
-              </a:rPr>
-              <a:t>Anomalia </a:t>
-            </a:r>
-            <a:r>
-              <a:rPr lang="pt-BR" sz="2000" dirty="0">
-                <a:ea typeface="Calibri" panose="020F0502020204030204" pitchFamily="34" charset="0"/>
-                <a:cs typeface="Arial" panose="020B0604020202020204" pitchFamily="34" charset="0"/>
-              </a:rPr>
-              <a:t>(e.g., container caindo no mar, empilhadeira tombando)</a:t>
-            </a:r>
-          </a:p>
-          <a:p>
-            <a:pPr marL="152408" indent="0" algn="just">
-              <a:lnSpc>
-                <a:spcPct val="107000"/>
-              </a:lnSpc>
-              <a:spcAft>
-                <a:spcPts val="533"/>
-              </a:spcAft>
-              <a:buNone/>
-            </a:pPr>
-            <a:endParaRPr lang="pt-BR" sz="2000" dirty="0">
-              <a:ea typeface="Calibri" panose="020F0502020204030204" pitchFamily="34" charset="0"/>
-              <a:cs typeface="Arial" panose="020B0604020202020204" pitchFamily="34" charset="0"/>
-            </a:endParaRPr>
-          </a:p>
-        </p:txBody>
-      </p:sp>
-    </p:spTree>
-    <p:extLst>
-      <p:ext uri="{BB962C8B-B14F-4D97-AF65-F5344CB8AC3E}">
-        <p14:creationId xmlns:p14="http://schemas.microsoft.com/office/powerpoint/2010/main" val="3676245301"/>
-      </p:ext>
-    </p:extLst>
-  </p:cSld>
-  <p:clrMapOvr>
-    <a:masterClrMapping/>
-  </p:clrMapOvr>
-</p:sld>
-</file>
-
-<file path=ppt/slides/slide24.xml><?xml version="1.0" encoding="utf-8"?>
-<p:sld xmlns:a="http://schemas.openxmlformats.org/drawingml/2006/main" xmlns:r="http://schemas.openxmlformats.org/officeDocument/2006/relationships" xmlns:p="http://schemas.openxmlformats.org/presentationml/2006/main">
-  <p:cSld>
-    <p:bg>
-      <p:bgPr>
-        <a:blipFill dpi="0" rotWithShape="1">
-          <a:blip r:embed="rId3">
-            <a:lum/>
-          </a:blip>
-          <a:srcRect/>
-          <a:stretch>
-            <a:fillRect/>
-          </a:stretch>
-        </a:blipFill>
-        <a:effectLst/>
-      </p:bgPr>
-    </p:bg>
-    <p:spTree>
-      <p:nvGrpSpPr>
-        <p:cNvPr id="1" name=""/>
-        <p:cNvGrpSpPr/>
-        <p:nvPr/>
-      </p:nvGrpSpPr>
-      <p:grpSpPr>
-        <a:xfrm>
-          <a:off x="0" y="0"/>
-          <a:ext cx="0" cy="0"/>
-          <a:chOff x="0" y="0"/>
-          <a:chExt cx="0" cy="0"/>
-        </a:xfrm>
-      </p:grpSpPr>
-      <p:sp>
-        <p:nvSpPr>
-          <p:cNvPr id="2" name="Título 1">
-            <a:extLst>
-              <a:ext uri="{FF2B5EF4-FFF2-40B4-BE49-F238E27FC236}">
-                <a16:creationId xmlns="" xmlns:a16="http://schemas.microsoft.com/office/drawing/2014/main" id="{5F09B89C-3183-4D52-981A-62798DDFF2B8}"/>
-              </a:ext>
-            </a:extLst>
-          </p:cNvPr>
-          <p:cNvSpPr>
-            <a:spLocks noGrp="1"/>
-          </p:cNvSpPr>
-          <p:nvPr>
-            <p:ph type="title"/>
-          </p:nvPr>
-        </p:nvSpPr>
-        <p:spPr>
-          <a:xfrm>
-            <a:off x="304800" y="183092"/>
-            <a:ext cx="6559285" cy="762000"/>
-          </a:xfrm>
-        </p:spPr>
-        <p:txBody>
-          <a:bodyPr>
-            <a:normAutofit/>
-          </a:bodyPr>
-          <a:lstStyle/>
-          <a:p>
-            <a:r>
-              <a:rPr lang="pt-BR" dirty="0"/>
-              <a:t>Detecção de anomalias</a:t>
-            </a:r>
-          </a:p>
-        </p:txBody>
-      </p:sp>
-      <p:sp>
-        <p:nvSpPr>
-          <p:cNvPr id="3" name="AutoShape 2" descr="An example of graph signal reconstruction over wireless sensor network. |  Download Scientific Diagram">
-            <a:extLst>
-              <a:ext uri="{FF2B5EF4-FFF2-40B4-BE49-F238E27FC236}">
-                <a16:creationId xmlns="" xmlns:a16="http://schemas.microsoft.com/office/drawing/2014/main" id="{0166B4DD-D72A-4A54-94A7-2C38133837FD}"/>
-              </a:ext>
-            </a:extLst>
-          </p:cNvPr>
-          <p:cNvSpPr>
-            <a:spLocks noChangeAspect="1" noChangeArrowheads="1"/>
-          </p:cNvSpPr>
-          <p:nvPr/>
-        </p:nvSpPr>
-        <p:spPr bwMode="auto">
-          <a:xfrm>
-            <a:off x="5994400" y="3327400"/>
-            <a:ext cx="203200" cy="203200"/>
-          </a:xfrm>
-          <a:prstGeom prst="rect">
-            <a:avLst/>
-          </a:prstGeom>
-          <a:noFill/>
-          <a:extLst>
-            <a:ext uri="{909E8E84-426E-40DD-AFC4-6F175D3DCCD1}">
-              <a14:hiddenFill xmlns:a14="http://schemas.microsoft.com/office/drawing/2010/main">
-                <a:solidFill>
-                  <a:srgbClr val="FFFFFF"/>
-                </a:solidFill>
-              </a14:hiddenFill>
-            </a:ext>
-          </a:extLst>
-        </p:spPr>
-        <p:txBody>
-          <a:bodyPr vert="horz" wrap="square" lIns="60960" tIns="30480" rIns="60960" bIns="30480" numCol="1" anchor="t" anchorCtr="0" compatLnSpc="1">
-            <a:prstTxWarp prst="textNoShape">
-              <a:avLst/>
-            </a:prstTxWarp>
-          </a:bodyPr>
-          <a:lstStyle/>
-          <a:p>
-            <a:pPr marL="0" marR="0" lvl="0" indent="0" algn="l" defTabSz="609630" rtl="0" eaLnBrk="1" fontAlgn="auto" latinLnBrk="0" hangingPunct="1">
-              <a:lnSpc>
-                <a:spcPct val="100000"/>
-              </a:lnSpc>
-              <a:spcBef>
-                <a:spcPts val="0"/>
-              </a:spcBef>
-              <a:spcAft>
-                <a:spcPts val="0"/>
-              </a:spcAft>
-              <a:buClrTx/>
-              <a:buSzTx/>
-              <a:buFontTx/>
-              <a:buNone/>
-              <a:tabLst/>
-              <a:defRPr/>
-            </a:pPr>
-            <a:endParaRPr kumimoji="0" lang="pt-BR" sz="1200" b="0" i="0" u="none" strike="noStrike" kern="1200" cap="none" spc="0" normalizeH="0" baseline="0" noProof="0">
-              <a:ln>
-                <a:noFill/>
-              </a:ln>
-              <a:solidFill>
-                <a:prstClr val="black"/>
-              </a:solidFill>
-              <a:effectLst/>
-              <a:uLnTx/>
-              <a:uFillTx/>
-              <a:latin typeface="Calibri"/>
-              <a:ea typeface="+mn-ea"/>
-              <a:cs typeface="+mn-cs"/>
-            </a:endParaRPr>
-          </a:p>
-        </p:txBody>
-      </p:sp>
-      <p:sp>
-        <p:nvSpPr>
-          <p:cNvPr id="7" name="AutoShape 4" descr="An example of graph signal reconstruction over wireless sensor network. |  Download Scientific Diagram">
-            <a:extLst>
-              <a:ext uri="{FF2B5EF4-FFF2-40B4-BE49-F238E27FC236}">
-                <a16:creationId xmlns="" xmlns:a16="http://schemas.microsoft.com/office/drawing/2014/main" id="{14C2B67D-81A1-457E-A410-FE4350A3CCA4}"/>
-              </a:ext>
-            </a:extLst>
-          </p:cNvPr>
-          <p:cNvSpPr>
-            <a:spLocks noChangeAspect="1" noChangeArrowheads="1"/>
-          </p:cNvSpPr>
-          <p:nvPr/>
-        </p:nvSpPr>
-        <p:spPr bwMode="auto">
-          <a:xfrm>
-            <a:off x="6096000" y="3429000"/>
-            <a:ext cx="203200" cy="203200"/>
-          </a:xfrm>
-          <a:prstGeom prst="rect">
-            <a:avLst/>
-          </a:prstGeom>
-          <a:noFill/>
-          <a:extLst>
-            <a:ext uri="{909E8E84-426E-40DD-AFC4-6F175D3DCCD1}">
-              <a14:hiddenFill xmlns:a14="http://schemas.microsoft.com/office/drawing/2010/main">
-                <a:solidFill>
-                  <a:srgbClr val="FFFFFF"/>
-                </a:solidFill>
-              </a14:hiddenFill>
-            </a:ext>
-          </a:extLst>
-        </p:spPr>
-        <p:txBody>
-          <a:bodyPr vert="horz" wrap="square" lIns="60960" tIns="30480" rIns="60960" bIns="30480" numCol="1" anchor="t" anchorCtr="0" compatLnSpc="1">
-            <a:prstTxWarp prst="textNoShape">
-              <a:avLst/>
-            </a:prstTxWarp>
-          </a:bodyPr>
-          <a:lstStyle/>
-          <a:p>
-            <a:pPr marL="0" marR="0" lvl="0" indent="0" algn="l" defTabSz="609630" rtl="0" eaLnBrk="1" fontAlgn="auto" latinLnBrk="0" hangingPunct="1">
-              <a:lnSpc>
-                <a:spcPct val="100000"/>
-              </a:lnSpc>
-              <a:spcBef>
-                <a:spcPts val="0"/>
-              </a:spcBef>
-              <a:spcAft>
-                <a:spcPts val="0"/>
-              </a:spcAft>
-              <a:buClrTx/>
-              <a:buSzTx/>
-              <a:buFontTx/>
-              <a:buNone/>
-              <a:tabLst/>
-              <a:defRPr/>
-            </a:pPr>
-            <a:endParaRPr kumimoji="0" lang="pt-BR" sz="1200" b="0" i="0" u="none" strike="noStrike" kern="1200" cap="none" spc="0" normalizeH="0" baseline="0" noProof="0">
-              <a:ln>
-                <a:noFill/>
-              </a:ln>
-              <a:solidFill>
-                <a:prstClr val="black"/>
-              </a:solidFill>
-              <a:effectLst/>
-              <a:uLnTx/>
-              <a:uFillTx/>
-              <a:latin typeface="Calibri"/>
-              <a:ea typeface="+mn-ea"/>
-              <a:cs typeface="+mn-cs"/>
-            </a:endParaRPr>
-          </a:p>
-        </p:txBody>
-      </p:sp>
-      <p:sp>
-        <p:nvSpPr>
-          <p:cNvPr id="4" name="Espaço Reservado para Conteúdo 3">
-            <a:extLst>
-              <a:ext uri="{FF2B5EF4-FFF2-40B4-BE49-F238E27FC236}">
-                <a16:creationId xmlns="" xmlns:a16="http://schemas.microsoft.com/office/drawing/2014/main" id="{0349BA64-C9D7-4730-9CA9-5C4AD9FC7969}"/>
-              </a:ext>
-            </a:extLst>
-          </p:cNvPr>
-          <p:cNvSpPr>
-            <a:spLocks noGrp="1"/>
-          </p:cNvSpPr>
-          <p:nvPr>
-            <p:ph idx="1"/>
-          </p:nvPr>
-        </p:nvSpPr>
-        <p:spPr>
-          <a:xfrm>
-            <a:off x="304800" y="1066800"/>
-            <a:ext cx="9295589" cy="4330419"/>
-          </a:xfrm>
-        </p:spPr>
-        <p:txBody>
-          <a:bodyPr>
-            <a:noAutofit/>
-          </a:bodyPr>
-          <a:lstStyle/>
-          <a:p>
-            <a:pPr marL="152408" indent="0" algn="just">
-              <a:lnSpc>
-                <a:spcPct val="107000"/>
-              </a:lnSpc>
-              <a:spcAft>
-                <a:spcPts val="533"/>
-              </a:spcAft>
-              <a:buNone/>
-            </a:pPr>
-            <a:r>
-              <a:rPr lang="pt-BR" sz="2000" dirty="0">
-                <a:ea typeface="Calibri" panose="020F0502020204030204" pitchFamily="34" charset="0"/>
-                <a:cs typeface="Arial" panose="020B0604020202020204" pitchFamily="34" charset="0"/>
-              </a:rPr>
-              <a:t>Trabalho:</a:t>
-            </a:r>
-          </a:p>
-          <a:p>
-            <a:pPr marL="152408" indent="0" algn="just">
-              <a:lnSpc>
-                <a:spcPct val="107000"/>
-              </a:lnSpc>
-              <a:spcAft>
-                <a:spcPts val="533"/>
-              </a:spcAft>
-              <a:buNone/>
-            </a:pPr>
-            <a:r>
-              <a:rPr lang="pt-BR" sz="2000" dirty="0">
-                <a:ea typeface="Calibri" panose="020F0502020204030204" pitchFamily="34" charset="0"/>
-                <a:cs typeface="Arial" panose="020B0604020202020204" pitchFamily="34" charset="0"/>
-              </a:rPr>
-              <a:t>Incluir e analisar no </a:t>
-            </a:r>
-            <a:r>
-              <a:rPr lang="pt-BR" sz="2000" dirty="0" err="1">
-                <a:ea typeface="Calibri" panose="020F0502020204030204" pitchFamily="34" charset="0"/>
-                <a:cs typeface="Arial" panose="020B0604020202020204" pitchFamily="34" charset="0"/>
-              </a:rPr>
-              <a:t>edge</a:t>
-            </a:r>
-            <a:r>
-              <a:rPr lang="pt-BR" sz="2000" dirty="0">
-                <a:ea typeface="Calibri" panose="020F0502020204030204" pitchFamily="34" charset="0"/>
-                <a:cs typeface="Arial" panose="020B0604020202020204" pitchFamily="34" charset="0"/>
-              </a:rPr>
-              <a:t> impulse possíveis anomalias nos dados da movimentação da cadeira de rodas pela cabeça.</a:t>
-            </a:r>
-          </a:p>
-        </p:txBody>
-      </p:sp>
-    </p:spTree>
-    <p:extLst>
-      <p:ext uri="{BB962C8B-B14F-4D97-AF65-F5344CB8AC3E}">
-        <p14:creationId xmlns:p14="http://schemas.microsoft.com/office/powerpoint/2010/main" val="3910318190"/>
-      </p:ext>
-    </p:extLst>
-  </p:cSld>
-  <p:clrMapOvr>
-    <a:masterClrMapping/>
-  </p:clrMapOvr>
-</p:sld>
-</file>
-
-<file path=ppt/slides/slide25.xml><?xml version="1.0" encoding="utf-8"?>
-<p:sld xmlns:a="http://schemas.openxmlformats.org/drawingml/2006/main" xmlns:r="http://schemas.openxmlformats.org/officeDocument/2006/relationships" xmlns:p="http://schemas.openxmlformats.org/presentationml/2006/main">
-  <p:cSld>
-    <p:bg>
-      <p:bgPr>
-        <a:blipFill dpi="0" rotWithShape="1">
-          <a:blip r:embed="rId3">
-            <a:lum/>
-          </a:blip>
-          <a:srcRect/>
-          <a:stretch>
-            <a:fillRect/>
-          </a:stretch>
-        </a:blipFill>
-        <a:effectLst/>
-      </p:bgPr>
-    </p:bg>
-    <p:spTree>
-      <p:nvGrpSpPr>
-        <p:cNvPr id="1" name=""/>
-        <p:cNvGrpSpPr/>
-        <p:nvPr/>
-      </p:nvGrpSpPr>
-      <p:grpSpPr>
-        <a:xfrm>
-          <a:off x="0" y="0"/>
-          <a:ext cx="0" cy="0"/>
-          <a:chOff x="0" y="0"/>
-          <a:chExt cx="0" cy="0"/>
-        </a:xfrm>
-      </p:grpSpPr>
-      <p:sp>
-        <p:nvSpPr>
-          <p:cNvPr id="3" name="AutoShape 2" descr="An example of graph signal reconstruction over wireless sensor network. |  Download Scientific Diagram">
-            <a:extLst>
-              <a:ext uri="{FF2B5EF4-FFF2-40B4-BE49-F238E27FC236}">
-                <a16:creationId xmlns="" xmlns:a16="http://schemas.microsoft.com/office/drawing/2014/main" id="{0166B4DD-D72A-4A54-94A7-2C38133837FD}"/>
-              </a:ext>
-            </a:extLst>
-          </p:cNvPr>
-          <p:cNvSpPr>
-            <a:spLocks noChangeAspect="1" noChangeArrowheads="1"/>
-          </p:cNvSpPr>
-          <p:nvPr/>
-        </p:nvSpPr>
-        <p:spPr bwMode="auto">
-          <a:xfrm>
-            <a:off x="5994400" y="3327400"/>
-            <a:ext cx="203200" cy="203200"/>
-          </a:xfrm>
-          <a:prstGeom prst="rect">
-            <a:avLst/>
-          </a:prstGeom>
-          <a:noFill/>
-          <a:extLst>
-            <a:ext uri="{909E8E84-426E-40DD-AFC4-6F175D3DCCD1}">
-              <a14:hiddenFill xmlns:a14="http://schemas.microsoft.com/office/drawing/2010/main">
-                <a:solidFill>
-                  <a:srgbClr val="FFFFFF"/>
-                </a:solidFill>
-              </a14:hiddenFill>
-            </a:ext>
-          </a:extLst>
-        </p:spPr>
-        <p:txBody>
-          <a:bodyPr vert="horz" wrap="square" lIns="60960" tIns="30480" rIns="60960" bIns="30480" numCol="1" anchor="t" anchorCtr="0" compatLnSpc="1">
-            <a:prstTxWarp prst="textNoShape">
-              <a:avLst/>
-            </a:prstTxWarp>
-          </a:bodyPr>
-          <a:lstStyle/>
-          <a:p>
-            <a:pPr marL="0" marR="0" lvl="0" indent="0" algn="l" defTabSz="609630" rtl="0" eaLnBrk="1" fontAlgn="auto" latinLnBrk="0" hangingPunct="1">
-              <a:lnSpc>
-                <a:spcPct val="100000"/>
-              </a:lnSpc>
-              <a:spcBef>
-                <a:spcPts val="0"/>
-              </a:spcBef>
-              <a:spcAft>
-                <a:spcPts val="0"/>
-              </a:spcAft>
-              <a:buClrTx/>
-              <a:buSzTx/>
-              <a:buFontTx/>
-              <a:buNone/>
-              <a:tabLst/>
-              <a:defRPr/>
-            </a:pPr>
-            <a:endParaRPr kumimoji="0" lang="pt-BR" sz="1200" b="0" i="0" u="none" strike="noStrike" kern="1200" cap="none" spc="0" normalizeH="0" baseline="0" noProof="0">
-              <a:ln>
-                <a:noFill/>
-              </a:ln>
-              <a:solidFill>
-                <a:prstClr val="black"/>
-              </a:solidFill>
-              <a:effectLst/>
-              <a:uLnTx/>
-              <a:uFillTx/>
-              <a:latin typeface="Calibri"/>
-              <a:ea typeface="+mn-ea"/>
-              <a:cs typeface="+mn-cs"/>
-            </a:endParaRPr>
-          </a:p>
-        </p:txBody>
-      </p:sp>
-      <p:sp>
-        <p:nvSpPr>
-          <p:cNvPr id="7" name="AutoShape 4" descr="An example of graph signal reconstruction over wireless sensor network. |  Download Scientific Diagram">
-            <a:extLst>
-              <a:ext uri="{FF2B5EF4-FFF2-40B4-BE49-F238E27FC236}">
-                <a16:creationId xmlns="" xmlns:a16="http://schemas.microsoft.com/office/drawing/2014/main" id="{14C2B67D-81A1-457E-A410-FE4350A3CCA4}"/>
-              </a:ext>
-            </a:extLst>
-          </p:cNvPr>
-          <p:cNvSpPr>
-            <a:spLocks noChangeAspect="1" noChangeArrowheads="1"/>
-          </p:cNvSpPr>
-          <p:nvPr/>
-        </p:nvSpPr>
-        <p:spPr bwMode="auto">
-          <a:xfrm>
-            <a:off x="6096000" y="3429000"/>
-            <a:ext cx="203200" cy="203200"/>
-          </a:xfrm>
-          <a:prstGeom prst="rect">
-            <a:avLst/>
-          </a:prstGeom>
-          <a:noFill/>
-          <a:extLst>
-            <a:ext uri="{909E8E84-426E-40DD-AFC4-6F175D3DCCD1}">
-              <a14:hiddenFill xmlns:a14="http://schemas.microsoft.com/office/drawing/2010/main">
-                <a:solidFill>
-                  <a:srgbClr val="FFFFFF"/>
-                </a:solidFill>
-              </a14:hiddenFill>
-            </a:ext>
-          </a:extLst>
-        </p:spPr>
-        <p:txBody>
-          <a:bodyPr vert="horz" wrap="square" lIns="60960" tIns="30480" rIns="60960" bIns="30480" numCol="1" anchor="t" anchorCtr="0" compatLnSpc="1">
-            <a:prstTxWarp prst="textNoShape">
-              <a:avLst/>
-            </a:prstTxWarp>
-          </a:bodyPr>
-          <a:lstStyle/>
-          <a:p>
-            <a:pPr marL="0" marR="0" lvl="0" indent="0" algn="l" defTabSz="609630" rtl="0" eaLnBrk="1" fontAlgn="auto" latinLnBrk="0" hangingPunct="1">
-              <a:lnSpc>
-                <a:spcPct val="100000"/>
-              </a:lnSpc>
-              <a:spcBef>
-                <a:spcPts val="0"/>
-              </a:spcBef>
-              <a:spcAft>
-                <a:spcPts val="0"/>
-              </a:spcAft>
-              <a:buClrTx/>
-              <a:buSzTx/>
-              <a:buFontTx/>
-              <a:buNone/>
-              <a:tabLst/>
-              <a:defRPr/>
-            </a:pPr>
-            <a:endParaRPr kumimoji="0" lang="pt-BR" sz="1200" b="0" i="0" u="none" strike="noStrike" kern="1200" cap="none" spc="0" normalizeH="0" baseline="0" noProof="0">
-              <a:ln>
-                <a:noFill/>
-              </a:ln>
-              <a:solidFill>
-                <a:prstClr val="black"/>
-              </a:solidFill>
-              <a:effectLst/>
-              <a:uLnTx/>
-              <a:uFillTx/>
-              <a:latin typeface="Calibri"/>
-              <a:ea typeface="+mn-ea"/>
-              <a:cs typeface="+mn-cs"/>
-            </a:endParaRPr>
-          </a:p>
-        </p:txBody>
-      </p:sp>
-      <p:sp>
-        <p:nvSpPr>
-          <p:cNvPr id="4" name="Espaço Reservado para Conteúdo 3">
-            <a:extLst>
-              <a:ext uri="{FF2B5EF4-FFF2-40B4-BE49-F238E27FC236}">
-                <a16:creationId xmlns="" xmlns:a16="http://schemas.microsoft.com/office/drawing/2014/main" id="{0349BA64-C9D7-4730-9CA9-5C4AD9FC7969}"/>
+                <a16:creationId xmlns:a16="http://schemas.microsoft.com/office/drawing/2014/main" id="{0349BA64-C9D7-4730-9CA9-5C4AD9FC7969}"/>
               </a:ext>
             </a:extLst>
           </p:cNvPr>
@@ -15057,7 +14105,7 @@
           <p:cNvPr id="2" name="Título 1">
             <a:extLst>
               <a:ext uri="{FF2B5EF4-FFF2-40B4-BE49-F238E27FC236}">
-                <a16:creationId xmlns="" xmlns:a16="http://schemas.microsoft.com/office/drawing/2014/main" id="{5F09B89C-3183-4D52-981A-62798DDFF2B8}"/>
+                <a16:creationId xmlns:a16="http://schemas.microsoft.com/office/drawing/2014/main" id="{5F09B89C-3183-4D52-981A-62798DDFF2B8}"/>
               </a:ext>
             </a:extLst>
           </p:cNvPr>
@@ -15095,7 +14143,7 @@
           <p:cNvPr id="3" name="AutoShape 2" descr="An example of graph signal reconstruction over wireless sensor network. |  Download Scientific Diagram">
             <a:extLst>
               <a:ext uri="{FF2B5EF4-FFF2-40B4-BE49-F238E27FC236}">
-                <a16:creationId xmlns="" xmlns:a16="http://schemas.microsoft.com/office/drawing/2014/main" id="{0166B4DD-D72A-4A54-94A7-2C38133837FD}"/>
+                <a16:creationId xmlns:a16="http://schemas.microsoft.com/office/drawing/2014/main" id="{0166B4DD-D72A-4A54-94A7-2C38133837FD}"/>
               </a:ext>
             </a:extLst>
           </p:cNvPr>
@@ -15146,7 +14194,7 @@
           <p:cNvPr id="7" name="AutoShape 4" descr="An example of graph signal reconstruction over wireless sensor network. |  Download Scientific Diagram">
             <a:extLst>
               <a:ext uri="{FF2B5EF4-FFF2-40B4-BE49-F238E27FC236}">
-                <a16:creationId xmlns="" xmlns:a16="http://schemas.microsoft.com/office/drawing/2014/main" id="{14C2B67D-81A1-457E-A410-FE4350A3CCA4}"/>
+                <a16:creationId xmlns:a16="http://schemas.microsoft.com/office/drawing/2014/main" id="{14C2B67D-81A1-457E-A410-FE4350A3CCA4}"/>
               </a:ext>
             </a:extLst>
           </p:cNvPr>
@@ -15197,7 +14245,7 @@
           <p:cNvPr id="4" name="Espaço Reservado para Conteúdo 3">
             <a:extLst>
               <a:ext uri="{FF2B5EF4-FFF2-40B4-BE49-F238E27FC236}">
-                <a16:creationId xmlns="" xmlns:a16="http://schemas.microsoft.com/office/drawing/2014/main" id="{5F1B432F-F570-AEC0-CFFF-C1D9196D7234}"/>
+                <a16:creationId xmlns:a16="http://schemas.microsoft.com/office/drawing/2014/main" id="{5F1B432F-F570-AEC0-CFFF-C1D9196D7234}"/>
               </a:ext>
             </a:extLst>
           </p:cNvPr>
@@ -15236,7 +14284,7 @@
           <p:cNvPr id="3074" name="Picture 2" descr="Unsupervised machine learning">
             <a:extLst>
               <a:ext uri="{FF2B5EF4-FFF2-40B4-BE49-F238E27FC236}">
-                <a16:creationId xmlns="" xmlns:a16="http://schemas.microsoft.com/office/drawing/2014/main" id="{9C9BB3FA-B234-195B-6E78-1F5F1A0B5DD5}"/>
+                <a16:creationId xmlns:a16="http://schemas.microsoft.com/office/drawing/2014/main" id="{9C9BB3FA-B234-195B-6E78-1F5F1A0B5DD5}"/>
               </a:ext>
             </a:extLst>
           </p:cNvPr>
@@ -15283,7 +14331,7 @@
           <p:cNvPr id="3076" name="Picture 4" descr="Supervised machine learning">
             <a:extLst>
               <a:ext uri="{FF2B5EF4-FFF2-40B4-BE49-F238E27FC236}">
-                <a16:creationId xmlns="" xmlns:a16="http://schemas.microsoft.com/office/drawing/2014/main" id="{85D641D0-2AF2-0E0D-20E1-BE0FB83D483A}"/>
+                <a16:creationId xmlns:a16="http://schemas.microsoft.com/office/drawing/2014/main" id="{85D641D0-2AF2-0E0D-20E1-BE0FB83D483A}"/>
               </a:ext>
             </a:extLst>
           </p:cNvPr>
@@ -15374,7 +14422,7 @@
           <p:cNvPr id="2" name="Título 1">
             <a:extLst>
               <a:ext uri="{FF2B5EF4-FFF2-40B4-BE49-F238E27FC236}">
-                <a16:creationId xmlns="" xmlns:a16="http://schemas.microsoft.com/office/drawing/2014/main" id="{5F09B89C-3183-4D52-981A-62798DDFF2B8}"/>
+                <a16:creationId xmlns:a16="http://schemas.microsoft.com/office/drawing/2014/main" id="{5F09B89C-3183-4D52-981A-62798DDFF2B8}"/>
               </a:ext>
             </a:extLst>
           </p:cNvPr>
@@ -15409,7 +14457,7 @@
           <p:cNvPr id="3" name="AutoShape 2" descr="An example of graph signal reconstruction over wireless sensor network. |  Download Scientific Diagram">
             <a:extLst>
               <a:ext uri="{FF2B5EF4-FFF2-40B4-BE49-F238E27FC236}">
-                <a16:creationId xmlns="" xmlns:a16="http://schemas.microsoft.com/office/drawing/2014/main" id="{0166B4DD-D72A-4A54-94A7-2C38133837FD}"/>
+                <a16:creationId xmlns:a16="http://schemas.microsoft.com/office/drawing/2014/main" id="{0166B4DD-D72A-4A54-94A7-2C38133837FD}"/>
               </a:ext>
             </a:extLst>
           </p:cNvPr>
@@ -15460,7 +14508,7 @@
           <p:cNvPr id="7" name="AutoShape 4" descr="An example of graph signal reconstruction over wireless sensor network. |  Download Scientific Diagram">
             <a:extLst>
               <a:ext uri="{FF2B5EF4-FFF2-40B4-BE49-F238E27FC236}">
-                <a16:creationId xmlns="" xmlns:a16="http://schemas.microsoft.com/office/drawing/2014/main" id="{14C2B67D-81A1-457E-A410-FE4350A3CCA4}"/>
+                <a16:creationId xmlns:a16="http://schemas.microsoft.com/office/drawing/2014/main" id="{14C2B67D-81A1-457E-A410-FE4350A3CCA4}"/>
               </a:ext>
             </a:extLst>
           </p:cNvPr>
@@ -15511,7 +14559,7 @@
           <p:cNvPr id="4" name="Espaço Reservado para Conteúdo 3">
             <a:extLst>
               <a:ext uri="{FF2B5EF4-FFF2-40B4-BE49-F238E27FC236}">
-                <a16:creationId xmlns="" xmlns:a16="http://schemas.microsoft.com/office/drawing/2014/main" id="{5F1B432F-F570-AEC0-CFFF-C1D9196D7234}"/>
+                <a16:creationId xmlns:a16="http://schemas.microsoft.com/office/drawing/2014/main" id="{5F1B432F-F570-AEC0-CFFF-C1D9196D7234}"/>
               </a:ext>
             </a:extLst>
           </p:cNvPr>
@@ -15564,7 +14612,7 @@
           <p:cNvPr id="4098" name="Picture 2" descr="What is K-means Clustering and it's use cases ? | by Avijit das | Medium">
             <a:extLst>
               <a:ext uri="{FF2B5EF4-FFF2-40B4-BE49-F238E27FC236}">
-                <a16:creationId xmlns="" xmlns:a16="http://schemas.microsoft.com/office/drawing/2014/main" id="{056C7919-93FD-E63C-B36E-CC710CDD6044}"/>
+                <a16:creationId xmlns:a16="http://schemas.microsoft.com/office/drawing/2014/main" id="{056C7919-93FD-E63C-B36E-CC710CDD6044}"/>
               </a:ext>
             </a:extLst>
           </p:cNvPr>
@@ -15655,7 +14703,7 @@
           <p:cNvPr id="2" name="Título 1">
             <a:extLst>
               <a:ext uri="{FF2B5EF4-FFF2-40B4-BE49-F238E27FC236}">
-                <a16:creationId xmlns="" xmlns:a16="http://schemas.microsoft.com/office/drawing/2014/main" id="{5F09B89C-3183-4D52-981A-62798DDFF2B8}"/>
+                <a16:creationId xmlns:a16="http://schemas.microsoft.com/office/drawing/2014/main" id="{5F09B89C-3183-4D52-981A-62798DDFF2B8}"/>
               </a:ext>
             </a:extLst>
           </p:cNvPr>
@@ -15695,7 +14743,7 @@
           <p:cNvPr id="3" name="AutoShape 2" descr="An example of graph signal reconstruction over wireless sensor network. |  Download Scientific Diagram">
             <a:extLst>
               <a:ext uri="{FF2B5EF4-FFF2-40B4-BE49-F238E27FC236}">
-                <a16:creationId xmlns="" xmlns:a16="http://schemas.microsoft.com/office/drawing/2014/main" id="{0166B4DD-D72A-4A54-94A7-2C38133837FD}"/>
+                <a16:creationId xmlns:a16="http://schemas.microsoft.com/office/drawing/2014/main" id="{0166B4DD-D72A-4A54-94A7-2C38133837FD}"/>
               </a:ext>
             </a:extLst>
           </p:cNvPr>
@@ -15746,7 +14794,7 @@
           <p:cNvPr id="7" name="AutoShape 4" descr="An example of graph signal reconstruction over wireless sensor network. |  Download Scientific Diagram">
             <a:extLst>
               <a:ext uri="{FF2B5EF4-FFF2-40B4-BE49-F238E27FC236}">
-                <a16:creationId xmlns="" xmlns:a16="http://schemas.microsoft.com/office/drawing/2014/main" id="{14C2B67D-81A1-457E-A410-FE4350A3CCA4}"/>
+                <a16:creationId xmlns:a16="http://schemas.microsoft.com/office/drawing/2014/main" id="{14C2B67D-81A1-457E-A410-FE4350A3CCA4}"/>
               </a:ext>
             </a:extLst>
           </p:cNvPr>
@@ -15797,7 +14845,7 @@
           <p:cNvPr id="4" name="Espaço Reservado para Conteúdo 3">
             <a:extLst>
               <a:ext uri="{FF2B5EF4-FFF2-40B4-BE49-F238E27FC236}">
-                <a16:creationId xmlns="" xmlns:a16="http://schemas.microsoft.com/office/drawing/2014/main" id="{5F1B432F-F570-AEC0-CFFF-C1D9196D7234}"/>
+                <a16:creationId xmlns:a16="http://schemas.microsoft.com/office/drawing/2014/main" id="{5F1B432F-F570-AEC0-CFFF-C1D9196D7234}"/>
               </a:ext>
             </a:extLst>
           </p:cNvPr>
@@ -15881,7 +14929,7 @@
           <p:cNvPr id="4098" name="Picture 2" descr="K-Means Clustering Algorithm - Javatpoint">
             <a:extLst>
               <a:ext uri="{FF2B5EF4-FFF2-40B4-BE49-F238E27FC236}">
-                <a16:creationId xmlns="" xmlns:a16="http://schemas.microsoft.com/office/drawing/2014/main" id="{45592E60-7087-AC09-6FA1-B6EBEB4488EC}"/>
+                <a16:creationId xmlns:a16="http://schemas.microsoft.com/office/drawing/2014/main" id="{45592E60-7087-AC09-6FA1-B6EBEB4488EC}"/>
               </a:ext>
             </a:extLst>
           </p:cNvPr>
@@ -15972,7 +15020,7 @@
           <p:cNvPr id="2" name="Título 1">
             <a:extLst>
               <a:ext uri="{FF2B5EF4-FFF2-40B4-BE49-F238E27FC236}">
-                <a16:creationId xmlns="" xmlns:a16="http://schemas.microsoft.com/office/drawing/2014/main" id="{5F09B89C-3183-4D52-981A-62798DDFF2B8}"/>
+                <a16:creationId xmlns:a16="http://schemas.microsoft.com/office/drawing/2014/main" id="{5F09B89C-3183-4D52-981A-62798DDFF2B8}"/>
               </a:ext>
             </a:extLst>
           </p:cNvPr>
@@ -16012,7 +15060,7 @@
           <p:cNvPr id="3" name="AutoShape 2" descr="An example of graph signal reconstruction over wireless sensor network. |  Download Scientific Diagram">
             <a:extLst>
               <a:ext uri="{FF2B5EF4-FFF2-40B4-BE49-F238E27FC236}">
-                <a16:creationId xmlns="" xmlns:a16="http://schemas.microsoft.com/office/drawing/2014/main" id="{0166B4DD-D72A-4A54-94A7-2C38133837FD}"/>
+                <a16:creationId xmlns:a16="http://schemas.microsoft.com/office/drawing/2014/main" id="{0166B4DD-D72A-4A54-94A7-2C38133837FD}"/>
               </a:ext>
             </a:extLst>
           </p:cNvPr>
@@ -16063,7 +15111,7 @@
           <p:cNvPr id="7" name="AutoShape 4" descr="An example of graph signal reconstruction over wireless sensor network. |  Download Scientific Diagram">
             <a:extLst>
               <a:ext uri="{FF2B5EF4-FFF2-40B4-BE49-F238E27FC236}">
-                <a16:creationId xmlns="" xmlns:a16="http://schemas.microsoft.com/office/drawing/2014/main" id="{14C2B67D-81A1-457E-A410-FE4350A3CCA4}"/>
+                <a16:creationId xmlns:a16="http://schemas.microsoft.com/office/drawing/2014/main" id="{14C2B67D-81A1-457E-A410-FE4350A3CCA4}"/>
               </a:ext>
             </a:extLst>
           </p:cNvPr>
@@ -16114,7 +15162,7 @@
           <p:cNvPr id="4" name="Espaço Reservado para Conteúdo 3">
             <a:extLst>
               <a:ext uri="{FF2B5EF4-FFF2-40B4-BE49-F238E27FC236}">
-                <a16:creationId xmlns="" xmlns:a16="http://schemas.microsoft.com/office/drawing/2014/main" id="{5F1B432F-F570-AEC0-CFFF-C1D9196D7234}"/>
+                <a16:creationId xmlns:a16="http://schemas.microsoft.com/office/drawing/2014/main" id="{5F1B432F-F570-AEC0-CFFF-C1D9196D7234}"/>
               </a:ext>
             </a:extLst>
           </p:cNvPr>
@@ -16167,7 +15215,7 @@
               <p:cNvPr id="5" name="TextBox 4">
                 <a:extLst>
                   <a:ext uri="{FF2B5EF4-FFF2-40B4-BE49-F238E27FC236}">
-                    <a16:creationId xmlns="" xmlns:a16="http://schemas.microsoft.com/office/drawing/2014/main" id="{A60E2CD0-3AFD-013C-16CC-B158E81DC1CA}"/>
+                    <a16:creationId xmlns:a16="http://schemas.microsoft.com/office/drawing/2014/main" id="{A60E2CD0-3AFD-013C-16CC-B158E81DC1CA}"/>
                   </a:ext>
                 </a:extLst>
               </p:cNvPr>
@@ -16419,7 +15467,7 @@
         <p:cNvPr id="1" name="">
           <a:extLst>
             <a:ext uri="{FF2B5EF4-FFF2-40B4-BE49-F238E27FC236}">
-              <a16:creationId xmlns="" xmlns:a16="http://schemas.microsoft.com/office/drawing/2014/main" id="{8A1FE513-AB4A-132F-B33C-C1A69C4E90BB}"/>
+              <a16:creationId xmlns:a16="http://schemas.microsoft.com/office/drawing/2014/main" id="{8A1FE513-AB4A-132F-B33C-C1A69C4E90BB}"/>
             </a:ext>
           </a:extLst>
         </p:cNvPr>
@@ -16439,7 +15487,7 @@
           <p:cNvPr id="2" name="Título 1">
             <a:extLst>
               <a:ext uri="{FF2B5EF4-FFF2-40B4-BE49-F238E27FC236}">
-                <a16:creationId xmlns="" xmlns:a16="http://schemas.microsoft.com/office/drawing/2014/main" id="{E5BC5611-534A-CB77-C071-F477937D3B59}"/>
+                <a16:creationId xmlns:a16="http://schemas.microsoft.com/office/drawing/2014/main" id="{E5BC5611-534A-CB77-C071-F477937D3B59}"/>
               </a:ext>
             </a:extLst>
           </p:cNvPr>
@@ -16479,7 +15527,7 @@
           <p:cNvPr id="3" name="AutoShape 2" descr="An example of graph signal reconstruction over wireless sensor network. |  Download Scientific Diagram">
             <a:extLst>
               <a:ext uri="{FF2B5EF4-FFF2-40B4-BE49-F238E27FC236}">
-                <a16:creationId xmlns="" xmlns:a16="http://schemas.microsoft.com/office/drawing/2014/main" id="{7E7F13EA-3BD1-43C2-79EA-B881793AD8AD}"/>
+                <a16:creationId xmlns:a16="http://schemas.microsoft.com/office/drawing/2014/main" id="{7E7F13EA-3BD1-43C2-79EA-B881793AD8AD}"/>
               </a:ext>
             </a:extLst>
           </p:cNvPr>
@@ -16530,7 +15578,7 @@
           <p:cNvPr id="7" name="AutoShape 4" descr="An example of graph signal reconstruction over wireless sensor network. |  Download Scientific Diagram">
             <a:extLst>
               <a:ext uri="{FF2B5EF4-FFF2-40B4-BE49-F238E27FC236}">
-                <a16:creationId xmlns="" xmlns:a16="http://schemas.microsoft.com/office/drawing/2014/main" id="{A0891BC2-FEAE-19E7-B671-ECE0FACC07C4}"/>
+                <a16:creationId xmlns:a16="http://schemas.microsoft.com/office/drawing/2014/main" id="{A0891BC2-FEAE-19E7-B671-ECE0FACC07C4}"/>
               </a:ext>
             </a:extLst>
           </p:cNvPr>
@@ -16581,7 +15629,7 @@
           <p:cNvPr id="4" name="Espaço Reservado para Conteúdo 3">
             <a:extLst>
               <a:ext uri="{FF2B5EF4-FFF2-40B4-BE49-F238E27FC236}">
-                <a16:creationId xmlns="" xmlns:a16="http://schemas.microsoft.com/office/drawing/2014/main" id="{747C2E78-E437-28C4-0BAF-D2D2AC1C96CB}"/>
+                <a16:creationId xmlns:a16="http://schemas.microsoft.com/office/drawing/2014/main" id="{747C2E78-E437-28C4-0BAF-D2D2AC1C96CB}"/>
               </a:ext>
             </a:extLst>
           </p:cNvPr>
@@ -16624,7 +15672,7 @@
           <p:cNvPr id="6" name="Picture 5">
             <a:extLst>
               <a:ext uri="{FF2B5EF4-FFF2-40B4-BE49-F238E27FC236}">
-                <a16:creationId xmlns="" xmlns:a16="http://schemas.microsoft.com/office/drawing/2014/main" id="{F98B536F-38AB-58C5-0FFB-41BDB557E9EF}"/>
+                <a16:creationId xmlns:a16="http://schemas.microsoft.com/office/drawing/2014/main" id="{F98B536F-38AB-58C5-0FFB-41BDB557E9EF}"/>
               </a:ext>
             </a:extLst>
           </p:cNvPr>
@@ -16654,7 +15702,7 @@
           <p:cNvPr id="8" name="TextBox 7">
             <a:extLst>
               <a:ext uri="{FF2B5EF4-FFF2-40B4-BE49-F238E27FC236}">
-                <a16:creationId xmlns="" xmlns:a16="http://schemas.microsoft.com/office/drawing/2014/main" id="{04EA9FAE-D371-68E0-2CB7-9C8893491B3B}"/>
+                <a16:creationId xmlns:a16="http://schemas.microsoft.com/office/drawing/2014/main" id="{04EA9FAE-D371-68E0-2CB7-9C8893491B3B}"/>
               </a:ext>
             </a:extLst>
           </p:cNvPr>
@@ -16720,7 +15768,7 @@
         <p:cNvPr id="1" name="">
           <a:extLst>
             <a:ext uri="{FF2B5EF4-FFF2-40B4-BE49-F238E27FC236}">
-              <a16:creationId xmlns="" xmlns:a16="http://schemas.microsoft.com/office/drawing/2014/main" id="{B86C6B89-4D49-2EC0-F063-638BD6935412}"/>
+              <a16:creationId xmlns:a16="http://schemas.microsoft.com/office/drawing/2014/main" id="{B86C6B89-4D49-2EC0-F063-638BD6935412}"/>
             </a:ext>
           </a:extLst>
         </p:cNvPr>
@@ -16740,7 +15788,7 @@
           <p:cNvPr id="2" name="Título 1">
             <a:extLst>
               <a:ext uri="{FF2B5EF4-FFF2-40B4-BE49-F238E27FC236}">
-                <a16:creationId xmlns="" xmlns:a16="http://schemas.microsoft.com/office/drawing/2014/main" id="{B81115AF-9415-9558-8D7C-7CA5F9E9ED43}"/>
+                <a16:creationId xmlns:a16="http://schemas.microsoft.com/office/drawing/2014/main" id="{B81115AF-9415-9558-8D7C-7CA5F9E9ED43}"/>
               </a:ext>
             </a:extLst>
           </p:cNvPr>
@@ -16780,7 +15828,7 @@
           <p:cNvPr id="3" name="AutoShape 2" descr="An example of graph signal reconstruction over wireless sensor network. |  Download Scientific Diagram">
             <a:extLst>
               <a:ext uri="{FF2B5EF4-FFF2-40B4-BE49-F238E27FC236}">
-                <a16:creationId xmlns="" xmlns:a16="http://schemas.microsoft.com/office/drawing/2014/main" id="{55584ECE-67DE-1FFA-9FE4-D3C3D4136411}"/>
+                <a16:creationId xmlns:a16="http://schemas.microsoft.com/office/drawing/2014/main" id="{55584ECE-67DE-1FFA-9FE4-D3C3D4136411}"/>
               </a:ext>
             </a:extLst>
           </p:cNvPr>
@@ -16831,7 +15879,7 @@
           <p:cNvPr id="7" name="AutoShape 4" descr="An example of graph signal reconstruction over wireless sensor network. |  Download Scientific Diagram">
             <a:extLst>
               <a:ext uri="{FF2B5EF4-FFF2-40B4-BE49-F238E27FC236}">
-                <a16:creationId xmlns="" xmlns:a16="http://schemas.microsoft.com/office/drawing/2014/main" id="{A9D0FB6C-59DD-7620-EBAF-21BB030E5B51}"/>
+                <a16:creationId xmlns:a16="http://schemas.microsoft.com/office/drawing/2014/main" id="{A9D0FB6C-59DD-7620-EBAF-21BB030E5B51}"/>
               </a:ext>
             </a:extLst>
           </p:cNvPr>
@@ -16882,7 +15930,7 @@
           <p:cNvPr id="4" name="Espaço Reservado para Conteúdo 3">
             <a:extLst>
               <a:ext uri="{FF2B5EF4-FFF2-40B4-BE49-F238E27FC236}">
-                <a16:creationId xmlns="" xmlns:a16="http://schemas.microsoft.com/office/drawing/2014/main" id="{EC6F58C6-8849-231E-3B12-60D9682EF42B}"/>
+                <a16:creationId xmlns:a16="http://schemas.microsoft.com/office/drawing/2014/main" id="{EC6F58C6-8849-231E-3B12-60D9682EF42B}"/>
               </a:ext>
             </a:extLst>
           </p:cNvPr>
@@ -16925,7 +15973,7 @@
           <p:cNvPr id="6" name="Picture 5">
             <a:extLst>
               <a:ext uri="{FF2B5EF4-FFF2-40B4-BE49-F238E27FC236}">
-                <a16:creationId xmlns="" xmlns:a16="http://schemas.microsoft.com/office/drawing/2014/main" id="{69F3FE92-0D0B-AECE-B64E-FC9D2F3EADBC}"/>
+                <a16:creationId xmlns:a16="http://schemas.microsoft.com/office/drawing/2014/main" id="{69F3FE92-0D0B-AECE-B64E-FC9D2F3EADBC}"/>
               </a:ext>
             </a:extLst>
           </p:cNvPr>
@@ -16955,7 +16003,7 @@
           <p:cNvPr id="8" name="TextBox 7">
             <a:extLst>
               <a:ext uri="{FF2B5EF4-FFF2-40B4-BE49-F238E27FC236}">
-                <a16:creationId xmlns="" xmlns:a16="http://schemas.microsoft.com/office/drawing/2014/main" id="{5D947541-89EC-69EF-1918-6EFD56E0B3C2}"/>
+                <a16:creationId xmlns:a16="http://schemas.microsoft.com/office/drawing/2014/main" id="{5D947541-89EC-69EF-1918-6EFD56E0B3C2}"/>
               </a:ext>
             </a:extLst>
           </p:cNvPr>
@@ -17060,7 +16108,7 @@
         <p:cNvPr id="1" name="">
           <a:extLst>
             <a:ext uri="{FF2B5EF4-FFF2-40B4-BE49-F238E27FC236}">
-              <a16:creationId xmlns="" xmlns:a16="http://schemas.microsoft.com/office/drawing/2014/main" id="{42119100-E668-77C4-3183-771B95B265DA}"/>
+              <a16:creationId xmlns:a16="http://schemas.microsoft.com/office/drawing/2014/main" id="{42119100-E668-77C4-3183-771B95B265DA}"/>
             </a:ext>
           </a:extLst>
         </p:cNvPr>
@@ -17080,7 +16128,7 @@
           <p:cNvPr id="2" name="Título 1">
             <a:extLst>
               <a:ext uri="{FF2B5EF4-FFF2-40B4-BE49-F238E27FC236}">
-                <a16:creationId xmlns="" xmlns:a16="http://schemas.microsoft.com/office/drawing/2014/main" id="{4EBCA554-D396-DCCB-4744-F3695D6FD50E}"/>
+                <a16:creationId xmlns:a16="http://schemas.microsoft.com/office/drawing/2014/main" id="{4EBCA554-D396-DCCB-4744-F3695D6FD50E}"/>
               </a:ext>
             </a:extLst>
           </p:cNvPr>
@@ -17120,7 +16168,7 @@
           <p:cNvPr id="3" name="AutoShape 2" descr="An example of graph signal reconstruction over wireless sensor network. |  Download Scientific Diagram">
             <a:extLst>
               <a:ext uri="{FF2B5EF4-FFF2-40B4-BE49-F238E27FC236}">
-                <a16:creationId xmlns="" xmlns:a16="http://schemas.microsoft.com/office/drawing/2014/main" id="{3380BF6D-7A0A-C11E-50C6-1F567BA3A3D4}"/>
+                <a16:creationId xmlns:a16="http://schemas.microsoft.com/office/drawing/2014/main" id="{3380BF6D-7A0A-C11E-50C6-1F567BA3A3D4}"/>
               </a:ext>
             </a:extLst>
           </p:cNvPr>
@@ -17171,7 +16219,7 @@
           <p:cNvPr id="7" name="AutoShape 4" descr="An example of graph signal reconstruction over wireless sensor network. |  Download Scientific Diagram">
             <a:extLst>
               <a:ext uri="{FF2B5EF4-FFF2-40B4-BE49-F238E27FC236}">
-                <a16:creationId xmlns="" xmlns:a16="http://schemas.microsoft.com/office/drawing/2014/main" id="{52BFF569-F440-2D60-8296-D8243B2988E7}"/>
+                <a16:creationId xmlns:a16="http://schemas.microsoft.com/office/drawing/2014/main" id="{52BFF569-F440-2D60-8296-D8243B2988E7}"/>
               </a:ext>
             </a:extLst>
           </p:cNvPr>
@@ -17222,7 +16270,7 @@
           <p:cNvPr id="4" name="Espaço Reservado para Conteúdo 3">
             <a:extLst>
               <a:ext uri="{FF2B5EF4-FFF2-40B4-BE49-F238E27FC236}">
-                <a16:creationId xmlns="" xmlns:a16="http://schemas.microsoft.com/office/drawing/2014/main" id="{E0298857-CD80-B8D1-6E62-55E6C3A64A44}"/>
+                <a16:creationId xmlns:a16="http://schemas.microsoft.com/office/drawing/2014/main" id="{E0298857-CD80-B8D1-6E62-55E6C3A64A44}"/>
               </a:ext>
             </a:extLst>
           </p:cNvPr>
@@ -17265,7 +16313,7 @@
           <p:cNvPr id="6" name="Picture 5">
             <a:extLst>
               <a:ext uri="{FF2B5EF4-FFF2-40B4-BE49-F238E27FC236}">
-                <a16:creationId xmlns="" xmlns:a16="http://schemas.microsoft.com/office/drawing/2014/main" id="{1C0684BB-EFF7-DBA8-3519-25CE2A1A9632}"/>
+                <a16:creationId xmlns:a16="http://schemas.microsoft.com/office/drawing/2014/main" id="{1C0684BB-EFF7-DBA8-3519-25CE2A1A9632}"/>
               </a:ext>
             </a:extLst>
           </p:cNvPr>
@@ -17295,7 +16343,7 @@
           <p:cNvPr id="9" name="TextBox 8">
             <a:extLst>
               <a:ext uri="{FF2B5EF4-FFF2-40B4-BE49-F238E27FC236}">
-                <a16:creationId xmlns="" xmlns:a16="http://schemas.microsoft.com/office/drawing/2014/main" id="{38267D7C-379A-003E-4048-8D4DDD969EB6}"/>
+                <a16:creationId xmlns:a16="http://schemas.microsoft.com/office/drawing/2014/main" id="{38267D7C-379A-003E-4048-8D4DDD969EB6}"/>
               </a:ext>
             </a:extLst>
           </p:cNvPr>
@@ -17344,10 +16392,6 @@
                 <a:effectLst/>
               </a:rPr>
               <a:t> mais próximo com base na distância euclidiana.</a:t>
-            </a:r>
-            <a:r>
-              <a:rPr lang="pt-BR" dirty="0"/>
-              <a:t/>
             </a:r>
             <a:br>
               <a:rPr lang="pt-BR" dirty="0"/>

--- a/slides/TP557_16_detecção_de_anomalias.pptx
+++ b/slides/TP557_16_detecção_de_anomalias.pptx
@@ -6,10 +6,10 @@
     <p:sldMasterId id="2147483660" r:id="rId2"/>
   </p:sldMasterIdLst>
   <p:notesMasterIdLst>
-    <p:notesMasterId r:id="rId25"/>
+    <p:notesMasterId r:id="rId26"/>
   </p:notesMasterIdLst>
   <p:handoutMasterIdLst>
-    <p:handoutMasterId r:id="rId26"/>
+    <p:handoutMasterId r:id="rId27"/>
   </p:handoutMasterIdLst>
   <p:sldIdLst>
     <p:sldId id="256" r:id="rId3"/>
@@ -33,7 +33,8 @@
     <p:sldId id="611" r:id="rId21"/>
     <p:sldId id="612" r:id="rId22"/>
     <p:sldId id="615" r:id="rId23"/>
-    <p:sldId id="616" r:id="rId24"/>
+    <p:sldId id="631" r:id="rId24"/>
+    <p:sldId id="616" r:id="rId25"/>
   </p:sldIdLst>
   <p:sldSz cx="12192000" cy="6858000"/>
   <p:notesSz cx="7315200" cy="9601200"/>
@@ -222,7 +223,7 @@
           <a:p>
             <a:fld id="{144F1436-6906-4D93-B7A2-786C327BFA14}" type="datetimeFigureOut">
               <a:rPr lang="nl-BE" smtClean="0"/>
-              <a:t>14/05/2025</a:t>
+              <a:t>19/05/2025</a:t>
             </a:fld>
             <a:endParaRPr lang="nl-BE"/>
           </a:p>
@@ -288,7 +289,7 @@
           <a:p>
             <a:fld id="{F7E56D9B-79AD-444A-AFED-DEC23408F8B4}" type="slidenum">
               <a:rPr lang="nl-BE" smtClean="0"/>
-              <a:t>‹#›</a:t>
+              <a:t>‹nº›</a:t>
             </a:fld>
             <a:endParaRPr lang="nl-BE"/>
           </a:p>
@@ -387,7 +388,7 @@
           <a:p>
             <a:fld id="{AA8CD09E-2914-4F47-B6C1-51B2C31814C9}" type="datetimeFigureOut">
               <a:rPr lang="pt-BR" smtClean="0"/>
-              <a:t>14/05/2025</a:t>
+              <a:t>19/05/2025</a:t>
             </a:fld>
             <a:endParaRPr lang="pt-BR"/>
           </a:p>
@@ -545,7 +546,7 @@
           <a:p>
             <a:fld id="{6FC8D850-966F-45A6-8DE7-15B891E7D40D}" type="slidenum">
               <a:rPr lang="pt-BR" smtClean="0"/>
-              <a:t>‹#›</a:t>
+              <a:t>‹nº›</a:t>
             </a:fld>
             <a:endParaRPr lang="pt-BR"/>
           </a:p>
@@ -746,7 +747,7 @@
         <p:cNvPr id="1" name="">
           <a:extLst>
             <a:ext uri="{FF2B5EF4-FFF2-40B4-BE49-F238E27FC236}">
-              <a16:creationId xmlns:a16="http://schemas.microsoft.com/office/drawing/2014/main" id="{3DC8778D-274C-4550-BFA6-2BF2EE1372DF}"/>
+              <a16:creationId xmlns:a16="http://schemas.microsoft.com/office/drawing/2014/main" xmlns="" id="{3DC8778D-274C-4550-BFA6-2BF2EE1372DF}"/>
             </a:ext>
           </a:extLst>
         </p:cNvPr>
@@ -766,7 +767,7 @@
           <p:cNvPr id="2" name="Espaço Reservado para Imagem de Slide 1">
             <a:extLst>
               <a:ext uri="{FF2B5EF4-FFF2-40B4-BE49-F238E27FC236}">
-                <a16:creationId xmlns:a16="http://schemas.microsoft.com/office/drawing/2014/main" id="{C35AD5E8-765A-E917-B919-F1F6AE347F53}"/>
+                <a16:creationId xmlns:a16="http://schemas.microsoft.com/office/drawing/2014/main" xmlns="" id="{C35AD5E8-765A-E917-B919-F1F6AE347F53}"/>
               </a:ext>
             </a:extLst>
           </p:cNvPr>
@@ -784,7 +785,7 @@
           <p:cNvPr id="3" name="Espaço Reservado para Anotações 2">
             <a:extLst>
               <a:ext uri="{FF2B5EF4-FFF2-40B4-BE49-F238E27FC236}">
-                <a16:creationId xmlns:a16="http://schemas.microsoft.com/office/drawing/2014/main" id="{9D90C0BF-FC56-01AC-3AD0-5B5E6D0FB45D}"/>
+                <a16:creationId xmlns:a16="http://schemas.microsoft.com/office/drawing/2014/main" xmlns="" id="{9D90C0BF-FC56-01AC-3AD0-5B5E6D0FB45D}"/>
               </a:ext>
             </a:extLst>
           </p:cNvPr>
@@ -809,7 +810,7 @@
           <p:cNvPr id="4" name="Espaço Reservado para Número de Slide 3">
             <a:extLst>
               <a:ext uri="{FF2B5EF4-FFF2-40B4-BE49-F238E27FC236}">
-                <a16:creationId xmlns:a16="http://schemas.microsoft.com/office/drawing/2014/main" id="{41EF1718-29E8-7DF3-052E-E040AF947292}"/>
+                <a16:creationId xmlns:a16="http://schemas.microsoft.com/office/drawing/2014/main" xmlns="" id="{41EF1718-29E8-7DF3-052E-E040AF947292}"/>
               </a:ext>
             </a:extLst>
           </p:cNvPr>
@@ -854,7 +855,7 @@
         <p:cNvPr id="1" name="">
           <a:extLst>
             <a:ext uri="{FF2B5EF4-FFF2-40B4-BE49-F238E27FC236}">
-              <a16:creationId xmlns:a16="http://schemas.microsoft.com/office/drawing/2014/main" id="{D5CE570B-6F22-A16C-FB7C-644660A08E50}"/>
+              <a16:creationId xmlns:a16="http://schemas.microsoft.com/office/drawing/2014/main" xmlns="" id="{D5CE570B-6F22-A16C-FB7C-644660A08E50}"/>
             </a:ext>
           </a:extLst>
         </p:cNvPr>
@@ -874,7 +875,7 @@
           <p:cNvPr id="2" name="Espaço Reservado para Imagem de Slide 1">
             <a:extLst>
               <a:ext uri="{FF2B5EF4-FFF2-40B4-BE49-F238E27FC236}">
-                <a16:creationId xmlns:a16="http://schemas.microsoft.com/office/drawing/2014/main" id="{54988FE9-CE61-8F19-30AA-F0093DA959FE}"/>
+                <a16:creationId xmlns:a16="http://schemas.microsoft.com/office/drawing/2014/main" xmlns="" id="{54988FE9-CE61-8F19-30AA-F0093DA959FE}"/>
               </a:ext>
             </a:extLst>
           </p:cNvPr>
@@ -892,7 +893,7 @@
           <p:cNvPr id="3" name="Espaço Reservado para Anotações 2">
             <a:extLst>
               <a:ext uri="{FF2B5EF4-FFF2-40B4-BE49-F238E27FC236}">
-                <a16:creationId xmlns:a16="http://schemas.microsoft.com/office/drawing/2014/main" id="{FF56B3B1-0912-3AF5-3099-3CC1931A01BF}"/>
+                <a16:creationId xmlns:a16="http://schemas.microsoft.com/office/drawing/2014/main" xmlns="" id="{FF56B3B1-0912-3AF5-3099-3CC1931A01BF}"/>
               </a:ext>
             </a:extLst>
           </p:cNvPr>
@@ -917,7 +918,7 @@
           <p:cNvPr id="4" name="Espaço Reservado para Número de Slide 3">
             <a:extLst>
               <a:ext uri="{FF2B5EF4-FFF2-40B4-BE49-F238E27FC236}">
-                <a16:creationId xmlns:a16="http://schemas.microsoft.com/office/drawing/2014/main" id="{EA8F2BE0-E2B3-AC2B-9D52-752913B7CF4B}"/>
+                <a16:creationId xmlns:a16="http://schemas.microsoft.com/office/drawing/2014/main" xmlns="" id="{EA8F2BE0-E2B3-AC2B-9D52-752913B7CF4B}"/>
               </a:ext>
             </a:extLst>
           </p:cNvPr>
@@ -962,7 +963,7 @@
         <p:cNvPr id="1" name="">
           <a:extLst>
             <a:ext uri="{FF2B5EF4-FFF2-40B4-BE49-F238E27FC236}">
-              <a16:creationId xmlns:a16="http://schemas.microsoft.com/office/drawing/2014/main" id="{38F770F4-9A55-E975-D43C-FCEA3ED2C1A9}"/>
+              <a16:creationId xmlns:a16="http://schemas.microsoft.com/office/drawing/2014/main" xmlns="" id="{38F770F4-9A55-E975-D43C-FCEA3ED2C1A9}"/>
             </a:ext>
           </a:extLst>
         </p:cNvPr>
@@ -982,7 +983,7 @@
           <p:cNvPr id="2" name="Espaço Reservado para Imagem de Slide 1">
             <a:extLst>
               <a:ext uri="{FF2B5EF4-FFF2-40B4-BE49-F238E27FC236}">
-                <a16:creationId xmlns:a16="http://schemas.microsoft.com/office/drawing/2014/main" id="{AEDFCAA5-FC8C-DD9C-AFC5-CB278DE7F744}"/>
+                <a16:creationId xmlns:a16="http://schemas.microsoft.com/office/drawing/2014/main" xmlns="" id="{AEDFCAA5-FC8C-DD9C-AFC5-CB278DE7F744}"/>
               </a:ext>
             </a:extLst>
           </p:cNvPr>
@@ -1000,7 +1001,7 @@
           <p:cNvPr id="3" name="Espaço Reservado para Anotações 2">
             <a:extLst>
               <a:ext uri="{FF2B5EF4-FFF2-40B4-BE49-F238E27FC236}">
-                <a16:creationId xmlns:a16="http://schemas.microsoft.com/office/drawing/2014/main" id="{D403E6E9-E099-A9A5-653E-6F0722996927}"/>
+                <a16:creationId xmlns:a16="http://schemas.microsoft.com/office/drawing/2014/main" xmlns="" id="{D403E6E9-E099-A9A5-653E-6F0722996927}"/>
               </a:ext>
             </a:extLst>
           </p:cNvPr>
@@ -1025,7 +1026,7 @@
           <p:cNvPr id="4" name="Espaço Reservado para Número de Slide 3">
             <a:extLst>
               <a:ext uri="{FF2B5EF4-FFF2-40B4-BE49-F238E27FC236}">
-                <a16:creationId xmlns:a16="http://schemas.microsoft.com/office/drawing/2014/main" id="{384EBEF5-7321-520D-7991-F3CC5AF3A56D}"/>
+                <a16:creationId xmlns:a16="http://schemas.microsoft.com/office/drawing/2014/main" xmlns="" id="{384EBEF5-7321-520D-7991-F3CC5AF3A56D}"/>
               </a:ext>
             </a:extLst>
           </p:cNvPr>
@@ -1070,7 +1071,7 @@
         <p:cNvPr id="1" name="">
           <a:extLst>
             <a:ext uri="{FF2B5EF4-FFF2-40B4-BE49-F238E27FC236}">
-              <a16:creationId xmlns:a16="http://schemas.microsoft.com/office/drawing/2014/main" id="{31D8DD9A-FB73-B3DA-6F9F-A22549E2ACF5}"/>
+              <a16:creationId xmlns:a16="http://schemas.microsoft.com/office/drawing/2014/main" xmlns="" id="{31D8DD9A-FB73-B3DA-6F9F-A22549E2ACF5}"/>
             </a:ext>
           </a:extLst>
         </p:cNvPr>
@@ -1090,7 +1091,7 @@
           <p:cNvPr id="2" name="Espaço Reservado para Imagem de Slide 1">
             <a:extLst>
               <a:ext uri="{FF2B5EF4-FFF2-40B4-BE49-F238E27FC236}">
-                <a16:creationId xmlns:a16="http://schemas.microsoft.com/office/drawing/2014/main" id="{E99B0F2D-8473-FC35-AF28-ECE2A1829004}"/>
+                <a16:creationId xmlns:a16="http://schemas.microsoft.com/office/drawing/2014/main" xmlns="" id="{E99B0F2D-8473-FC35-AF28-ECE2A1829004}"/>
               </a:ext>
             </a:extLst>
           </p:cNvPr>
@@ -1108,7 +1109,7 @@
           <p:cNvPr id="3" name="Espaço Reservado para Anotações 2">
             <a:extLst>
               <a:ext uri="{FF2B5EF4-FFF2-40B4-BE49-F238E27FC236}">
-                <a16:creationId xmlns:a16="http://schemas.microsoft.com/office/drawing/2014/main" id="{8C9962D3-EA60-94A8-A6D4-C3161BED15BF}"/>
+                <a16:creationId xmlns:a16="http://schemas.microsoft.com/office/drawing/2014/main" xmlns="" id="{8C9962D3-EA60-94A8-A6D4-C3161BED15BF}"/>
               </a:ext>
             </a:extLst>
           </p:cNvPr>
@@ -1133,7 +1134,7 @@
           <p:cNvPr id="4" name="Espaço Reservado para Número de Slide 3">
             <a:extLst>
               <a:ext uri="{FF2B5EF4-FFF2-40B4-BE49-F238E27FC236}">
-                <a16:creationId xmlns:a16="http://schemas.microsoft.com/office/drawing/2014/main" id="{1A62ECEA-4026-B0E1-9730-4E6CBBB39369}"/>
+                <a16:creationId xmlns:a16="http://schemas.microsoft.com/office/drawing/2014/main" xmlns="" id="{1A62ECEA-4026-B0E1-9730-4E6CBBB39369}"/>
               </a:ext>
             </a:extLst>
           </p:cNvPr>
@@ -1346,7 +1347,7 @@
         <p:cNvPr id="1" name="">
           <a:extLst>
             <a:ext uri="{FF2B5EF4-FFF2-40B4-BE49-F238E27FC236}">
-              <a16:creationId xmlns:a16="http://schemas.microsoft.com/office/drawing/2014/main" id="{6E955CAB-F21A-9D08-F98D-00EB95ED3441}"/>
+              <a16:creationId xmlns:a16="http://schemas.microsoft.com/office/drawing/2014/main" xmlns="" id="{6E955CAB-F21A-9D08-F98D-00EB95ED3441}"/>
             </a:ext>
           </a:extLst>
         </p:cNvPr>
@@ -1366,7 +1367,7 @@
           <p:cNvPr id="2" name="Espaço Reservado para Imagem de Slide 1">
             <a:extLst>
               <a:ext uri="{FF2B5EF4-FFF2-40B4-BE49-F238E27FC236}">
-                <a16:creationId xmlns:a16="http://schemas.microsoft.com/office/drawing/2014/main" id="{0D72ECCF-390F-6700-31C9-EBB590D4368D}"/>
+                <a16:creationId xmlns:a16="http://schemas.microsoft.com/office/drawing/2014/main" xmlns="" id="{0D72ECCF-390F-6700-31C9-EBB590D4368D}"/>
               </a:ext>
             </a:extLst>
           </p:cNvPr>
@@ -1384,7 +1385,7 @@
           <p:cNvPr id="3" name="Espaço Reservado para Anotações 2">
             <a:extLst>
               <a:ext uri="{FF2B5EF4-FFF2-40B4-BE49-F238E27FC236}">
-                <a16:creationId xmlns:a16="http://schemas.microsoft.com/office/drawing/2014/main" id="{577FA9D6-B2FE-523B-86B7-0EFD6452DDF4}"/>
+                <a16:creationId xmlns:a16="http://schemas.microsoft.com/office/drawing/2014/main" xmlns="" id="{577FA9D6-B2FE-523B-86B7-0EFD6452DDF4}"/>
               </a:ext>
             </a:extLst>
           </p:cNvPr>
@@ -1409,7 +1410,7 @@
           <p:cNvPr id="4" name="Espaço Reservado para Número de Slide 3">
             <a:extLst>
               <a:ext uri="{FF2B5EF4-FFF2-40B4-BE49-F238E27FC236}">
-                <a16:creationId xmlns:a16="http://schemas.microsoft.com/office/drawing/2014/main" id="{1DBD4D4D-75F0-64AD-BA32-1AF4C4593BDD}"/>
+                <a16:creationId xmlns:a16="http://schemas.microsoft.com/office/drawing/2014/main" xmlns="" id="{1DBD4D4D-75F0-64AD-BA32-1AF4C4593BDD}"/>
               </a:ext>
             </a:extLst>
           </p:cNvPr>
@@ -2271,6 +2272,150 @@
     </p:spTree>
     <p:extLst>
       <p:ext uri="{BB962C8B-B14F-4D97-AF65-F5344CB8AC3E}">
+        <p14:creationId xmlns:p14="http://schemas.microsoft.com/office/powerpoint/2010/main" val="646709308"/>
+      </p:ext>
+    </p:extLst>
+  </p:cSld>
+  <p:clrMapOvr>
+    <a:masterClrMapping/>
+  </p:clrMapOvr>
+</p:notes>
+</file>
+
+<file path=ppt/notesSlides/notesSlide23.xml><?xml version="1.0" encoding="utf-8"?>
+<p:notes xmlns:a="http://schemas.openxmlformats.org/drawingml/2006/main" xmlns:r="http://schemas.openxmlformats.org/officeDocument/2006/relationships" xmlns:p="http://schemas.openxmlformats.org/presentationml/2006/main">
+  <p:cSld>
+    <p:spTree>
+      <p:nvGrpSpPr>
+        <p:cNvPr id="1" name=""/>
+        <p:cNvGrpSpPr/>
+        <p:nvPr/>
+      </p:nvGrpSpPr>
+      <p:grpSpPr>
+        <a:xfrm>
+          <a:off x="0" y="0"/>
+          <a:ext cx="0" cy="0"/>
+          <a:chOff x="0" y="0"/>
+          <a:chExt cx="0" cy="0"/>
+        </a:xfrm>
+      </p:grpSpPr>
+      <p:sp>
+        <p:nvSpPr>
+          <p:cNvPr id="2" name="Espaço Reservado para Imagem de Slide 1"/>
+          <p:cNvSpPr>
+            <a:spLocks noGrp="1" noRot="1" noChangeAspect="1"/>
+          </p:cNvSpPr>
+          <p:nvPr>
+            <p:ph type="sldImg"/>
+          </p:nvPr>
+        </p:nvSpPr>
+        <p:spPr/>
+      </p:sp>
+      <p:sp>
+        <p:nvSpPr>
+          <p:cNvPr id="3" name="Espaço Reservado para Anotações 2"/>
+          <p:cNvSpPr>
+            <a:spLocks noGrp="1"/>
+          </p:cNvSpPr>
+          <p:nvPr>
+            <p:ph type="body" idx="1"/>
+          </p:nvPr>
+        </p:nvSpPr>
+        <p:spPr/>
+        <p:txBody>
+          <a:bodyPr/>
+          <a:lstStyle/>
+          <a:p>
+            <a:endParaRPr lang="pt-BR" dirty="0"/>
+          </a:p>
+        </p:txBody>
+      </p:sp>
+      <p:sp>
+        <p:nvSpPr>
+          <p:cNvPr id="4" name="Espaço Reservado para Número de Slide 3"/>
+          <p:cNvSpPr>
+            <a:spLocks noGrp="1"/>
+          </p:cNvSpPr>
+          <p:nvPr>
+            <p:ph type="sldNum" sz="quarter" idx="5"/>
+          </p:nvPr>
+        </p:nvSpPr>
+        <p:spPr/>
+        <p:txBody>
+          <a:bodyPr/>
+          <a:lstStyle/>
+          <a:p>
+            <a:pPr marL="0" marR="0" lvl="0" indent="0" algn="r" defTabSz="914400" rtl="0" eaLnBrk="1" fontAlgn="auto" latinLnBrk="0" hangingPunct="1">
+              <a:lnSpc>
+                <a:spcPct val="100000"/>
+              </a:lnSpc>
+              <a:spcBef>
+                <a:spcPts val="0"/>
+              </a:spcBef>
+              <a:spcAft>
+                <a:spcPts val="0"/>
+              </a:spcAft>
+              <a:buClrTx/>
+              <a:buSzTx/>
+              <a:buFontTx/>
+              <a:buNone/>
+              <a:tabLst/>
+              <a:defRPr/>
+            </a:pPr>
+            <a:fld id="{6FC8D850-966F-45A6-8DE7-15B891E7D40D}" type="slidenum">
+              <a:rPr kumimoji="0" lang="pt-BR" sz="2200" b="0" i="0" u="none" strike="noStrike" kern="1200" cap="none" spc="0" normalizeH="0" baseline="0" noProof="0" smtClean="0">
+                <a:ln>
+                  <a:noFill/>
+                </a:ln>
+                <a:solidFill>
+                  <a:prstClr val="black"/>
+                </a:solidFill>
+                <a:effectLst/>
+                <a:uLnTx/>
+                <a:uFillTx/>
+                <a:latin typeface="Calibri" panose="020F0502020204030204"/>
+                <a:ea typeface="+mn-ea"/>
+                <a:cs typeface="+mn-cs"/>
+              </a:rPr>
+              <a:pPr marL="0" marR="0" lvl="0" indent="0" algn="r" defTabSz="914400" rtl="0" eaLnBrk="1" fontAlgn="auto" latinLnBrk="0" hangingPunct="1">
+                <a:lnSpc>
+                  <a:spcPct val="100000"/>
+                </a:lnSpc>
+                <a:spcBef>
+                  <a:spcPts val="0"/>
+                </a:spcBef>
+                <a:spcAft>
+                  <a:spcPts val="0"/>
+                </a:spcAft>
+                <a:buClrTx/>
+                <a:buSzTx/>
+                <a:buFontTx/>
+                <a:buNone/>
+                <a:tabLst/>
+                <a:defRPr/>
+              </a:pPr>
+              <a:t>23</a:t>
+            </a:fld>
+            <a:endParaRPr kumimoji="0" lang="pt-BR" sz="2200" b="0" i="0" u="none" strike="noStrike" kern="1200" cap="none" spc="0" normalizeH="0" baseline="0" noProof="0">
+              <a:ln>
+                <a:noFill/>
+              </a:ln>
+              <a:solidFill>
+                <a:prstClr val="black"/>
+              </a:solidFill>
+              <a:effectLst/>
+              <a:uLnTx/>
+              <a:uFillTx/>
+              <a:latin typeface="Calibri" panose="020F0502020204030204"/>
+              <a:ea typeface="+mn-ea"/>
+              <a:cs typeface="+mn-cs"/>
+            </a:endParaRPr>
+          </a:p>
+        </p:txBody>
+      </p:sp>
+    </p:spTree>
+    <p:extLst>
+      <p:ext uri="{BB962C8B-B14F-4D97-AF65-F5344CB8AC3E}">
         <p14:creationId xmlns:p14="http://schemas.microsoft.com/office/powerpoint/2010/main" val="227195064"/>
       </p:ext>
     </p:extLst>
@@ -2625,7 +2770,7 @@
         <p:cNvPr id="1" name="">
           <a:extLst>
             <a:ext uri="{FF2B5EF4-FFF2-40B4-BE49-F238E27FC236}">
-              <a16:creationId xmlns:a16="http://schemas.microsoft.com/office/drawing/2014/main" id="{5BDAD2A1-5359-2B35-87A2-CB62DA9AC234}"/>
+              <a16:creationId xmlns:a16="http://schemas.microsoft.com/office/drawing/2014/main" xmlns="" id="{5BDAD2A1-5359-2B35-87A2-CB62DA9AC234}"/>
             </a:ext>
           </a:extLst>
         </p:cNvPr>
@@ -2645,7 +2790,7 @@
           <p:cNvPr id="2" name="Espaço Reservado para Imagem de Slide 1">
             <a:extLst>
               <a:ext uri="{FF2B5EF4-FFF2-40B4-BE49-F238E27FC236}">
-                <a16:creationId xmlns:a16="http://schemas.microsoft.com/office/drawing/2014/main" id="{E3CCF2D8-39A8-6970-A91C-CA1BB1172B74}"/>
+                <a16:creationId xmlns:a16="http://schemas.microsoft.com/office/drawing/2014/main" xmlns="" id="{E3CCF2D8-39A8-6970-A91C-CA1BB1172B74}"/>
               </a:ext>
             </a:extLst>
           </p:cNvPr>
@@ -2663,7 +2808,7 @@
           <p:cNvPr id="3" name="Espaço Reservado para Anotações 2">
             <a:extLst>
               <a:ext uri="{FF2B5EF4-FFF2-40B4-BE49-F238E27FC236}">
-                <a16:creationId xmlns:a16="http://schemas.microsoft.com/office/drawing/2014/main" id="{D2A0BCB8-A319-F2B9-61A9-80B79A20C8AD}"/>
+                <a16:creationId xmlns:a16="http://schemas.microsoft.com/office/drawing/2014/main" xmlns="" id="{D2A0BCB8-A319-F2B9-61A9-80B79A20C8AD}"/>
               </a:ext>
             </a:extLst>
           </p:cNvPr>
@@ -2688,7 +2833,7 @@
           <p:cNvPr id="4" name="Espaço Reservado para Número de Slide 3">
             <a:extLst>
               <a:ext uri="{FF2B5EF4-FFF2-40B4-BE49-F238E27FC236}">
-                <a16:creationId xmlns:a16="http://schemas.microsoft.com/office/drawing/2014/main" id="{7430ECDE-57AD-7D93-14A4-A77602871389}"/>
+                <a16:creationId xmlns:a16="http://schemas.microsoft.com/office/drawing/2014/main" xmlns="" id="{7430ECDE-57AD-7D93-14A4-A77602871389}"/>
               </a:ext>
             </a:extLst>
           </p:cNvPr>
@@ -2733,7 +2878,7 @@
         <p:cNvPr id="1" name="">
           <a:extLst>
             <a:ext uri="{FF2B5EF4-FFF2-40B4-BE49-F238E27FC236}">
-              <a16:creationId xmlns:a16="http://schemas.microsoft.com/office/drawing/2014/main" id="{2E6003E3-9C23-DFB4-E656-EE817B7B63F5}"/>
+              <a16:creationId xmlns:a16="http://schemas.microsoft.com/office/drawing/2014/main" xmlns="" id="{2E6003E3-9C23-DFB4-E656-EE817B7B63F5}"/>
             </a:ext>
           </a:extLst>
         </p:cNvPr>
@@ -2753,7 +2898,7 @@
           <p:cNvPr id="2" name="Espaço Reservado para Imagem de Slide 1">
             <a:extLst>
               <a:ext uri="{FF2B5EF4-FFF2-40B4-BE49-F238E27FC236}">
-                <a16:creationId xmlns:a16="http://schemas.microsoft.com/office/drawing/2014/main" id="{A47E6B73-509B-606A-BA52-ECD9A901942C}"/>
+                <a16:creationId xmlns:a16="http://schemas.microsoft.com/office/drawing/2014/main" xmlns="" id="{A47E6B73-509B-606A-BA52-ECD9A901942C}"/>
               </a:ext>
             </a:extLst>
           </p:cNvPr>
@@ -2771,7 +2916,7 @@
           <p:cNvPr id="3" name="Espaço Reservado para Anotações 2">
             <a:extLst>
               <a:ext uri="{FF2B5EF4-FFF2-40B4-BE49-F238E27FC236}">
-                <a16:creationId xmlns:a16="http://schemas.microsoft.com/office/drawing/2014/main" id="{1E7DD88D-B209-FE30-9F24-9AD224BF1EC8}"/>
+                <a16:creationId xmlns:a16="http://schemas.microsoft.com/office/drawing/2014/main" xmlns="" id="{1E7DD88D-B209-FE30-9F24-9AD224BF1EC8}"/>
               </a:ext>
             </a:extLst>
           </p:cNvPr>
@@ -2796,7 +2941,7 @@
           <p:cNvPr id="4" name="Espaço Reservado para Número de Slide 3">
             <a:extLst>
               <a:ext uri="{FF2B5EF4-FFF2-40B4-BE49-F238E27FC236}">
-                <a16:creationId xmlns:a16="http://schemas.microsoft.com/office/drawing/2014/main" id="{4A209F62-F946-427E-D702-876E44243A30}"/>
+                <a16:creationId xmlns:a16="http://schemas.microsoft.com/office/drawing/2014/main" xmlns="" id="{4A209F62-F946-427E-D702-876E44243A30}"/>
               </a:ext>
             </a:extLst>
           </p:cNvPr>
@@ -2841,7 +2986,7 @@
         <p:cNvPr id="1" name="">
           <a:extLst>
             <a:ext uri="{FF2B5EF4-FFF2-40B4-BE49-F238E27FC236}">
-              <a16:creationId xmlns:a16="http://schemas.microsoft.com/office/drawing/2014/main" id="{31790B8E-ACCA-F7FC-062F-E911F5C53D3B}"/>
+              <a16:creationId xmlns:a16="http://schemas.microsoft.com/office/drawing/2014/main" xmlns="" id="{31790B8E-ACCA-F7FC-062F-E911F5C53D3B}"/>
             </a:ext>
           </a:extLst>
         </p:cNvPr>
@@ -2861,7 +3006,7 @@
           <p:cNvPr id="2" name="Espaço Reservado para Imagem de Slide 1">
             <a:extLst>
               <a:ext uri="{FF2B5EF4-FFF2-40B4-BE49-F238E27FC236}">
-                <a16:creationId xmlns:a16="http://schemas.microsoft.com/office/drawing/2014/main" id="{77BBB11C-3D4E-BD82-F35A-38E1761E0CFD}"/>
+                <a16:creationId xmlns:a16="http://schemas.microsoft.com/office/drawing/2014/main" xmlns="" id="{77BBB11C-3D4E-BD82-F35A-38E1761E0CFD}"/>
               </a:ext>
             </a:extLst>
           </p:cNvPr>
@@ -2879,7 +3024,7 @@
           <p:cNvPr id="3" name="Espaço Reservado para Anotações 2">
             <a:extLst>
               <a:ext uri="{FF2B5EF4-FFF2-40B4-BE49-F238E27FC236}">
-                <a16:creationId xmlns:a16="http://schemas.microsoft.com/office/drawing/2014/main" id="{88D90C90-61FD-F2FA-BABE-D96B4D6667D3}"/>
+                <a16:creationId xmlns:a16="http://schemas.microsoft.com/office/drawing/2014/main" xmlns="" id="{88D90C90-61FD-F2FA-BABE-D96B4D6667D3}"/>
               </a:ext>
             </a:extLst>
           </p:cNvPr>
@@ -2904,7 +3049,7 @@
           <p:cNvPr id="4" name="Espaço Reservado para Número de Slide 3">
             <a:extLst>
               <a:ext uri="{FF2B5EF4-FFF2-40B4-BE49-F238E27FC236}">
-                <a16:creationId xmlns:a16="http://schemas.microsoft.com/office/drawing/2014/main" id="{281AAE74-6902-1DF5-1CE0-D34FA2800337}"/>
+                <a16:creationId xmlns:a16="http://schemas.microsoft.com/office/drawing/2014/main" xmlns="" id="{281AAE74-6902-1DF5-1CE0-D34FA2800337}"/>
               </a:ext>
             </a:extLst>
           </p:cNvPr>
@@ -2963,7 +3108,7 @@
           <p:cNvPr id="2" name="Título 1">
             <a:extLst>
               <a:ext uri="{FF2B5EF4-FFF2-40B4-BE49-F238E27FC236}">
-                <a16:creationId xmlns:a16="http://schemas.microsoft.com/office/drawing/2014/main" id="{1DB9B4FF-B06E-403C-A326-BDC64D8FF94E}"/>
+                <a16:creationId xmlns:a16="http://schemas.microsoft.com/office/drawing/2014/main" xmlns="" id="{1DB9B4FF-B06E-403C-A326-BDC64D8FF94E}"/>
               </a:ext>
             </a:extLst>
           </p:cNvPr>
@@ -3000,7 +3145,7 @@
           <p:cNvPr id="3" name="Subtítulo 2">
             <a:extLst>
               <a:ext uri="{FF2B5EF4-FFF2-40B4-BE49-F238E27FC236}">
-                <a16:creationId xmlns:a16="http://schemas.microsoft.com/office/drawing/2014/main" id="{247BDFCE-746E-45BF-A319-4733D58D1632}"/>
+                <a16:creationId xmlns:a16="http://schemas.microsoft.com/office/drawing/2014/main" xmlns="" id="{247BDFCE-746E-45BF-A319-4733D58D1632}"/>
               </a:ext>
             </a:extLst>
           </p:cNvPr>
@@ -3070,7 +3215,7 @@
           <p:cNvPr id="4" name="Espaço Reservado para Data 3">
             <a:extLst>
               <a:ext uri="{FF2B5EF4-FFF2-40B4-BE49-F238E27FC236}">
-                <a16:creationId xmlns:a16="http://schemas.microsoft.com/office/drawing/2014/main" id="{9EDE2778-5372-4104-B96D-968184DA8288}"/>
+                <a16:creationId xmlns:a16="http://schemas.microsoft.com/office/drawing/2014/main" xmlns="" id="{9EDE2778-5372-4104-B96D-968184DA8288}"/>
               </a:ext>
             </a:extLst>
           </p:cNvPr>
@@ -3088,7 +3233,7 @@
           <a:p>
             <a:fld id="{63289F7E-B80B-496E-81B4-D396C37C9454}" type="datetimeFigureOut">
               <a:rPr lang="pt-BR" smtClean="0"/>
-              <a:t>14/05/2025</a:t>
+              <a:t>19/05/2025</a:t>
             </a:fld>
             <a:endParaRPr lang="pt-BR"/>
           </a:p>
@@ -3099,7 +3244,7 @@
           <p:cNvPr id="5" name="Espaço Reservado para Rodapé 4">
             <a:extLst>
               <a:ext uri="{FF2B5EF4-FFF2-40B4-BE49-F238E27FC236}">
-                <a16:creationId xmlns:a16="http://schemas.microsoft.com/office/drawing/2014/main" id="{C1DD0F41-C861-4051-988D-3024A37A4B93}"/>
+                <a16:creationId xmlns:a16="http://schemas.microsoft.com/office/drawing/2014/main" xmlns="" id="{C1DD0F41-C861-4051-988D-3024A37A4B93}"/>
               </a:ext>
             </a:extLst>
           </p:cNvPr>
@@ -3124,7 +3269,7 @@
           <p:cNvPr id="6" name="Espaço Reservado para Número de Slide 5">
             <a:extLst>
               <a:ext uri="{FF2B5EF4-FFF2-40B4-BE49-F238E27FC236}">
-                <a16:creationId xmlns:a16="http://schemas.microsoft.com/office/drawing/2014/main" id="{07E5967E-D980-431A-A5DB-3F0C5030A81E}"/>
+                <a16:creationId xmlns:a16="http://schemas.microsoft.com/office/drawing/2014/main" xmlns="" id="{07E5967E-D980-431A-A5DB-3F0C5030A81E}"/>
               </a:ext>
             </a:extLst>
           </p:cNvPr>
@@ -3142,7 +3287,7 @@
           <a:p>
             <a:fld id="{1A7E88B7-70CE-4035-AE73-13FA6FB985D4}" type="slidenum">
               <a:rPr lang="pt-BR" smtClean="0"/>
-              <a:t>‹#›</a:t>
+              <a:t>‹nº›</a:t>
             </a:fld>
             <a:endParaRPr lang="pt-BR"/>
           </a:p>
@@ -3183,7 +3328,7 @@
           <p:cNvPr id="2" name="Título 1">
             <a:extLst>
               <a:ext uri="{FF2B5EF4-FFF2-40B4-BE49-F238E27FC236}">
-                <a16:creationId xmlns:a16="http://schemas.microsoft.com/office/drawing/2014/main" id="{9036C49F-3E68-4175-81BA-3C3FEE44308A}"/>
+                <a16:creationId xmlns:a16="http://schemas.microsoft.com/office/drawing/2014/main" xmlns="" id="{9036C49F-3E68-4175-81BA-3C3FEE44308A}"/>
               </a:ext>
             </a:extLst>
           </p:cNvPr>
@@ -3211,7 +3356,7 @@
           <p:cNvPr id="3" name="Espaço Reservado para Texto Vertical 2">
             <a:extLst>
               <a:ext uri="{FF2B5EF4-FFF2-40B4-BE49-F238E27FC236}">
-                <a16:creationId xmlns:a16="http://schemas.microsoft.com/office/drawing/2014/main" id="{426FA736-3DD3-4D4E-B57B-BBE1D8F7D424}"/>
+                <a16:creationId xmlns:a16="http://schemas.microsoft.com/office/drawing/2014/main" xmlns="" id="{426FA736-3DD3-4D4E-B57B-BBE1D8F7D424}"/>
               </a:ext>
             </a:extLst>
           </p:cNvPr>
@@ -3268,7 +3413,7 @@
           <p:cNvPr id="4" name="Espaço Reservado para Data 3">
             <a:extLst>
               <a:ext uri="{FF2B5EF4-FFF2-40B4-BE49-F238E27FC236}">
-                <a16:creationId xmlns:a16="http://schemas.microsoft.com/office/drawing/2014/main" id="{99E8855C-D8FD-48F6-B14E-861E0DE4D915}"/>
+                <a16:creationId xmlns:a16="http://schemas.microsoft.com/office/drawing/2014/main" xmlns="" id="{99E8855C-D8FD-48F6-B14E-861E0DE4D915}"/>
               </a:ext>
             </a:extLst>
           </p:cNvPr>
@@ -3286,7 +3431,7 @@
           <a:p>
             <a:fld id="{63289F7E-B80B-496E-81B4-D396C37C9454}" type="datetimeFigureOut">
               <a:rPr lang="pt-BR" smtClean="0"/>
-              <a:t>14/05/2025</a:t>
+              <a:t>19/05/2025</a:t>
             </a:fld>
             <a:endParaRPr lang="pt-BR"/>
           </a:p>
@@ -3297,7 +3442,7 @@
           <p:cNvPr id="5" name="Espaço Reservado para Rodapé 4">
             <a:extLst>
               <a:ext uri="{FF2B5EF4-FFF2-40B4-BE49-F238E27FC236}">
-                <a16:creationId xmlns:a16="http://schemas.microsoft.com/office/drawing/2014/main" id="{97C0BB88-2F21-42A5-ACFF-83DA47F2D340}"/>
+                <a16:creationId xmlns:a16="http://schemas.microsoft.com/office/drawing/2014/main" xmlns="" id="{97C0BB88-2F21-42A5-ACFF-83DA47F2D340}"/>
               </a:ext>
             </a:extLst>
           </p:cNvPr>
@@ -3322,7 +3467,7 @@
           <p:cNvPr id="6" name="Espaço Reservado para Número de Slide 5">
             <a:extLst>
               <a:ext uri="{FF2B5EF4-FFF2-40B4-BE49-F238E27FC236}">
-                <a16:creationId xmlns:a16="http://schemas.microsoft.com/office/drawing/2014/main" id="{6CB462B3-1F22-4C05-B4B8-7A279FB7D5E9}"/>
+                <a16:creationId xmlns:a16="http://schemas.microsoft.com/office/drawing/2014/main" xmlns="" id="{6CB462B3-1F22-4C05-B4B8-7A279FB7D5E9}"/>
               </a:ext>
             </a:extLst>
           </p:cNvPr>
@@ -3340,7 +3485,7 @@
           <a:p>
             <a:fld id="{1A7E88B7-70CE-4035-AE73-13FA6FB985D4}" type="slidenum">
               <a:rPr lang="pt-BR" smtClean="0"/>
-              <a:t>‹#›</a:t>
+              <a:t>‹nº›</a:t>
             </a:fld>
             <a:endParaRPr lang="pt-BR"/>
           </a:p>
@@ -3381,7 +3526,7 @@
           <p:cNvPr id="2" name="Título Vertical 1">
             <a:extLst>
               <a:ext uri="{FF2B5EF4-FFF2-40B4-BE49-F238E27FC236}">
-                <a16:creationId xmlns:a16="http://schemas.microsoft.com/office/drawing/2014/main" id="{EAEAB728-701C-4207-A9D5-23FF45C60502}"/>
+                <a16:creationId xmlns:a16="http://schemas.microsoft.com/office/drawing/2014/main" xmlns="" id="{EAEAB728-701C-4207-A9D5-23FF45C60502}"/>
               </a:ext>
             </a:extLst>
           </p:cNvPr>
@@ -3414,7 +3559,7 @@
           <p:cNvPr id="3" name="Espaço Reservado para Texto Vertical 2">
             <a:extLst>
               <a:ext uri="{FF2B5EF4-FFF2-40B4-BE49-F238E27FC236}">
-                <a16:creationId xmlns:a16="http://schemas.microsoft.com/office/drawing/2014/main" id="{BA8C8CCF-7823-480A-9A19-0F664DD17E3B}"/>
+                <a16:creationId xmlns:a16="http://schemas.microsoft.com/office/drawing/2014/main" xmlns="" id="{BA8C8CCF-7823-480A-9A19-0F664DD17E3B}"/>
               </a:ext>
             </a:extLst>
           </p:cNvPr>
@@ -3476,7 +3621,7 @@
           <p:cNvPr id="4" name="Espaço Reservado para Data 3">
             <a:extLst>
               <a:ext uri="{FF2B5EF4-FFF2-40B4-BE49-F238E27FC236}">
-                <a16:creationId xmlns:a16="http://schemas.microsoft.com/office/drawing/2014/main" id="{721D5734-7B1F-425D-942F-6EB73344027C}"/>
+                <a16:creationId xmlns:a16="http://schemas.microsoft.com/office/drawing/2014/main" xmlns="" id="{721D5734-7B1F-425D-942F-6EB73344027C}"/>
               </a:ext>
             </a:extLst>
           </p:cNvPr>
@@ -3494,7 +3639,7 @@
           <a:p>
             <a:fld id="{63289F7E-B80B-496E-81B4-D396C37C9454}" type="datetimeFigureOut">
               <a:rPr lang="pt-BR" smtClean="0"/>
-              <a:t>14/05/2025</a:t>
+              <a:t>19/05/2025</a:t>
             </a:fld>
             <a:endParaRPr lang="pt-BR"/>
           </a:p>
@@ -3505,7 +3650,7 @@
           <p:cNvPr id="5" name="Espaço Reservado para Rodapé 4">
             <a:extLst>
               <a:ext uri="{FF2B5EF4-FFF2-40B4-BE49-F238E27FC236}">
-                <a16:creationId xmlns:a16="http://schemas.microsoft.com/office/drawing/2014/main" id="{1E1AAEAC-F08D-45FE-89EC-B1B349A868C9}"/>
+                <a16:creationId xmlns:a16="http://schemas.microsoft.com/office/drawing/2014/main" xmlns="" id="{1E1AAEAC-F08D-45FE-89EC-B1B349A868C9}"/>
               </a:ext>
             </a:extLst>
           </p:cNvPr>
@@ -3530,7 +3675,7 @@
           <p:cNvPr id="6" name="Espaço Reservado para Número de Slide 5">
             <a:extLst>
               <a:ext uri="{FF2B5EF4-FFF2-40B4-BE49-F238E27FC236}">
-                <a16:creationId xmlns:a16="http://schemas.microsoft.com/office/drawing/2014/main" id="{BAA44493-9911-47B2-87A6-C2141A972BC8}"/>
+                <a16:creationId xmlns:a16="http://schemas.microsoft.com/office/drawing/2014/main" xmlns="" id="{BAA44493-9911-47B2-87A6-C2141A972BC8}"/>
               </a:ext>
             </a:extLst>
           </p:cNvPr>
@@ -3548,7 +3693,7 @@
           <a:p>
             <a:fld id="{1A7E88B7-70CE-4035-AE73-13FA6FB985D4}" type="slidenum">
               <a:rPr lang="pt-BR" smtClean="0"/>
-              <a:t>‹#›</a:t>
+              <a:t>‹nº›</a:t>
             </a:fld>
             <a:endParaRPr lang="pt-BR"/>
           </a:p>
@@ -3749,7 +3894,7 @@
             <a:fld id="{1D8BD707-D9CF-40AE-B4C6-C98DA3205C09}" type="datetimeFigureOut">
               <a:rPr lang="en-US" smtClean="0"/>
               <a:pPr/>
-              <a:t>5/14/2025</a:t>
+              <a:t>5/19/2025</a:t>
             </a:fld>
             <a:endParaRPr lang="en-US"/>
           </a:p>
@@ -3792,7 +3937,7 @@
             <a:fld id="{B6F15528-21DE-4FAA-801E-634DDDAF4B2B}" type="slidenum">
               <a:rPr lang="en-US" smtClean="0"/>
               <a:pPr/>
-              <a:t>‹#›</a:t>
+              <a:t>‹nº›</a:t>
             </a:fld>
             <a:endParaRPr lang="en-US"/>
           </a:p>
@@ -3921,7 +4066,7 @@
             <a:fld id="{1D8BD707-D9CF-40AE-B4C6-C98DA3205C09}" type="datetimeFigureOut">
               <a:rPr lang="en-US" smtClean="0"/>
               <a:pPr/>
-              <a:t>5/14/2025</a:t>
+              <a:t>5/19/2025</a:t>
             </a:fld>
             <a:endParaRPr lang="en-US"/>
           </a:p>
@@ -3964,7 +4109,7 @@
             <a:fld id="{B6F15528-21DE-4FAA-801E-634DDDAF4B2B}" type="slidenum">
               <a:rPr lang="en-US" smtClean="0"/>
               <a:pPr/>
-              <a:t>‹#›</a:t>
+              <a:t>‹nº›</a:t>
             </a:fld>
             <a:endParaRPr lang="en-US"/>
           </a:p>
@@ -4169,7 +4314,7 @@
             <a:fld id="{1D8BD707-D9CF-40AE-B4C6-C98DA3205C09}" type="datetimeFigureOut">
               <a:rPr lang="en-US" smtClean="0"/>
               <a:pPr/>
-              <a:t>5/14/2025</a:t>
+              <a:t>5/19/2025</a:t>
             </a:fld>
             <a:endParaRPr lang="en-US"/>
           </a:p>
@@ -4212,7 +4357,7 @@
             <a:fld id="{B6F15528-21DE-4FAA-801E-634DDDAF4B2B}" type="slidenum">
               <a:rPr lang="en-US" smtClean="0"/>
               <a:pPr/>
-              <a:t>‹#›</a:t>
+              <a:t>‹nº›</a:t>
             </a:fld>
             <a:endParaRPr lang="en-US"/>
           </a:p>
@@ -4459,7 +4604,7 @@
             <a:fld id="{1D8BD707-D9CF-40AE-B4C6-C98DA3205C09}" type="datetimeFigureOut">
               <a:rPr lang="en-US" smtClean="0"/>
               <a:pPr/>
-              <a:t>5/14/2025</a:t>
+              <a:t>5/19/2025</a:t>
             </a:fld>
             <a:endParaRPr lang="en-US"/>
           </a:p>
@@ -4502,7 +4647,7 @@
             <a:fld id="{B6F15528-21DE-4FAA-801E-634DDDAF4B2B}" type="slidenum">
               <a:rPr lang="en-US" smtClean="0"/>
               <a:pPr/>
-              <a:t>‹#›</a:t>
+              <a:t>‹nº›</a:t>
             </a:fld>
             <a:endParaRPr lang="en-US"/>
           </a:p>
@@ -4883,7 +5028,7 @@
             <a:fld id="{1D8BD707-D9CF-40AE-B4C6-C98DA3205C09}" type="datetimeFigureOut">
               <a:rPr lang="en-US" smtClean="0"/>
               <a:pPr/>
-              <a:t>5/14/2025</a:t>
+              <a:t>5/19/2025</a:t>
             </a:fld>
             <a:endParaRPr lang="en-US"/>
           </a:p>
@@ -4926,7 +5071,7 @@
             <a:fld id="{B6F15528-21DE-4FAA-801E-634DDDAF4B2B}" type="slidenum">
               <a:rPr lang="en-US" smtClean="0"/>
               <a:pPr/>
-              <a:t>‹#›</a:t>
+              <a:t>‹nº›</a:t>
             </a:fld>
             <a:endParaRPr lang="en-US"/>
           </a:p>
@@ -5003,7 +5148,7 @@
             <a:fld id="{1D8BD707-D9CF-40AE-B4C6-C98DA3205C09}" type="datetimeFigureOut">
               <a:rPr lang="en-US" smtClean="0"/>
               <a:pPr/>
-              <a:t>5/14/2025</a:t>
+              <a:t>5/19/2025</a:t>
             </a:fld>
             <a:endParaRPr lang="en-US"/>
           </a:p>
@@ -5046,7 +5191,7 @@
             <a:fld id="{B6F15528-21DE-4FAA-801E-634DDDAF4B2B}" type="slidenum">
               <a:rPr lang="en-US" smtClean="0"/>
               <a:pPr/>
-              <a:t>‹#›</a:t>
+              <a:t>‹nº›</a:t>
             </a:fld>
             <a:endParaRPr lang="en-US"/>
           </a:p>
@@ -5100,7 +5245,7 @@
             <a:fld id="{1D8BD707-D9CF-40AE-B4C6-C98DA3205C09}" type="datetimeFigureOut">
               <a:rPr lang="en-US" smtClean="0"/>
               <a:pPr/>
-              <a:t>5/14/2025</a:t>
+              <a:t>5/19/2025</a:t>
             </a:fld>
             <a:endParaRPr lang="en-US"/>
           </a:p>
@@ -5143,7 +5288,7 @@
             <a:fld id="{B6F15528-21DE-4FAA-801E-634DDDAF4B2B}" type="slidenum">
               <a:rPr lang="en-US" smtClean="0"/>
               <a:pPr/>
-              <a:t>‹#›</a:t>
+              <a:t>‹nº›</a:t>
             </a:fld>
             <a:endParaRPr lang="en-US"/>
           </a:p>
@@ -5379,7 +5524,7 @@
             <a:fld id="{1D8BD707-D9CF-40AE-B4C6-C98DA3205C09}" type="datetimeFigureOut">
               <a:rPr lang="en-US" smtClean="0"/>
               <a:pPr/>
-              <a:t>5/14/2025</a:t>
+              <a:t>5/19/2025</a:t>
             </a:fld>
             <a:endParaRPr lang="en-US"/>
           </a:p>
@@ -5422,7 +5567,7 @@
             <a:fld id="{B6F15528-21DE-4FAA-801E-634DDDAF4B2B}" type="slidenum">
               <a:rPr lang="en-US" smtClean="0"/>
               <a:pPr/>
-              <a:t>‹#›</a:t>
+              <a:t>‹nº›</a:t>
             </a:fld>
             <a:endParaRPr lang="en-US"/>
           </a:p>
@@ -5463,7 +5608,7 @@
           <p:cNvPr id="2" name="Título 1">
             <a:extLst>
               <a:ext uri="{FF2B5EF4-FFF2-40B4-BE49-F238E27FC236}">
-                <a16:creationId xmlns:a16="http://schemas.microsoft.com/office/drawing/2014/main" id="{71BD44A5-8F21-4626-A01D-48A1C874B1D5}"/>
+                <a16:creationId xmlns:a16="http://schemas.microsoft.com/office/drawing/2014/main" xmlns="" id="{71BD44A5-8F21-4626-A01D-48A1C874B1D5}"/>
               </a:ext>
             </a:extLst>
           </p:cNvPr>
@@ -5491,7 +5636,7 @@
           <p:cNvPr id="3" name="Espaço Reservado para Conteúdo 2">
             <a:extLst>
               <a:ext uri="{FF2B5EF4-FFF2-40B4-BE49-F238E27FC236}">
-                <a16:creationId xmlns:a16="http://schemas.microsoft.com/office/drawing/2014/main" id="{B79E8085-65A9-48AA-951D-71D978BFF4ED}"/>
+                <a16:creationId xmlns:a16="http://schemas.microsoft.com/office/drawing/2014/main" xmlns="" id="{B79E8085-65A9-48AA-951D-71D978BFF4ED}"/>
               </a:ext>
             </a:extLst>
           </p:cNvPr>
@@ -5548,7 +5693,7 @@
           <p:cNvPr id="4" name="Espaço Reservado para Data 3">
             <a:extLst>
               <a:ext uri="{FF2B5EF4-FFF2-40B4-BE49-F238E27FC236}">
-                <a16:creationId xmlns:a16="http://schemas.microsoft.com/office/drawing/2014/main" id="{F05BE1AF-51EA-425D-B188-DE7BD675009F}"/>
+                <a16:creationId xmlns:a16="http://schemas.microsoft.com/office/drawing/2014/main" xmlns="" id="{F05BE1AF-51EA-425D-B188-DE7BD675009F}"/>
               </a:ext>
             </a:extLst>
           </p:cNvPr>
@@ -5566,7 +5711,7 @@
           <a:p>
             <a:fld id="{63289F7E-B80B-496E-81B4-D396C37C9454}" type="datetimeFigureOut">
               <a:rPr lang="pt-BR" smtClean="0"/>
-              <a:t>14/05/2025</a:t>
+              <a:t>19/05/2025</a:t>
             </a:fld>
             <a:endParaRPr lang="pt-BR"/>
           </a:p>
@@ -5577,7 +5722,7 @@
           <p:cNvPr id="5" name="Espaço Reservado para Rodapé 4">
             <a:extLst>
               <a:ext uri="{FF2B5EF4-FFF2-40B4-BE49-F238E27FC236}">
-                <a16:creationId xmlns:a16="http://schemas.microsoft.com/office/drawing/2014/main" id="{121BE632-29CF-4CB9-B365-C9EF38F89BE6}"/>
+                <a16:creationId xmlns:a16="http://schemas.microsoft.com/office/drawing/2014/main" xmlns="" id="{121BE632-29CF-4CB9-B365-C9EF38F89BE6}"/>
               </a:ext>
             </a:extLst>
           </p:cNvPr>
@@ -5602,7 +5747,7 @@
           <p:cNvPr id="6" name="Espaço Reservado para Número de Slide 5">
             <a:extLst>
               <a:ext uri="{FF2B5EF4-FFF2-40B4-BE49-F238E27FC236}">
-                <a16:creationId xmlns:a16="http://schemas.microsoft.com/office/drawing/2014/main" id="{60CF3DD1-9AEC-4A57-B461-4E4DD86FAC18}"/>
+                <a16:creationId xmlns:a16="http://schemas.microsoft.com/office/drawing/2014/main" xmlns="" id="{60CF3DD1-9AEC-4A57-B461-4E4DD86FAC18}"/>
               </a:ext>
             </a:extLst>
           </p:cNvPr>
@@ -5620,7 +5765,7 @@
           <a:p>
             <a:fld id="{1A7E88B7-70CE-4035-AE73-13FA6FB985D4}" type="slidenum">
               <a:rPr lang="pt-BR" smtClean="0"/>
-              <a:t>‹#›</a:t>
+              <a:t>‹nº›</a:t>
             </a:fld>
             <a:endParaRPr lang="pt-BR"/>
           </a:p>
@@ -5836,7 +5981,7 @@
             <a:fld id="{1D8BD707-D9CF-40AE-B4C6-C98DA3205C09}" type="datetimeFigureOut">
               <a:rPr lang="en-US" smtClean="0"/>
               <a:pPr/>
-              <a:t>5/14/2025</a:t>
+              <a:t>5/19/2025</a:t>
             </a:fld>
             <a:endParaRPr lang="en-US"/>
           </a:p>
@@ -5879,7 +6024,7 @@
             <a:fld id="{B6F15528-21DE-4FAA-801E-634DDDAF4B2B}" type="slidenum">
               <a:rPr lang="en-US" smtClean="0"/>
               <a:pPr/>
-              <a:t>‹#›</a:t>
+              <a:t>‹nº›</a:t>
             </a:fld>
             <a:endParaRPr lang="en-US"/>
           </a:p>
@@ -6008,7 +6153,7 @@
             <a:fld id="{1D8BD707-D9CF-40AE-B4C6-C98DA3205C09}" type="datetimeFigureOut">
               <a:rPr lang="en-US" smtClean="0"/>
               <a:pPr/>
-              <a:t>5/14/2025</a:t>
+              <a:t>5/19/2025</a:t>
             </a:fld>
             <a:endParaRPr lang="en-US"/>
           </a:p>
@@ -6051,7 +6196,7 @@
             <a:fld id="{B6F15528-21DE-4FAA-801E-634DDDAF4B2B}" type="slidenum">
               <a:rPr lang="en-US" smtClean="0"/>
               <a:pPr/>
-              <a:t>‹#›</a:t>
+              <a:t>‹nº›</a:t>
             </a:fld>
             <a:endParaRPr lang="en-US"/>
           </a:p>
@@ -6190,7 +6335,7 @@
             <a:fld id="{1D8BD707-D9CF-40AE-B4C6-C98DA3205C09}" type="datetimeFigureOut">
               <a:rPr lang="en-US" smtClean="0"/>
               <a:pPr/>
-              <a:t>5/14/2025</a:t>
+              <a:t>5/19/2025</a:t>
             </a:fld>
             <a:endParaRPr lang="en-US"/>
           </a:p>
@@ -6233,7 +6378,7 @@
             <a:fld id="{B6F15528-21DE-4FAA-801E-634DDDAF4B2B}" type="slidenum">
               <a:rPr lang="en-US" smtClean="0"/>
               <a:pPr/>
-              <a:t>‹#›</a:t>
+              <a:t>‹nº›</a:t>
             </a:fld>
             <a:endParaRPr lang="en-US"/>
           </a:p>
@@ -6274,7 +6419,7 @@
           <p:cNvPr id="2" name="Título 1">
             <a:extLst>
               <a:ext uri="{FF2B5EF4-FFF2-40B4-BE49-F238E27FC236}">
-                <a16:creationId xmlns:a16="http://schemas.microsoft.com/office/drawing/2014/main" id="{34AB2FF0-A4D7-4E28-991D-FF26140D5988}"/>
+                <a16:creationId xmlns:a16="http://schemas.microsoft.com/office/drawing/2014/main" xmlns="" id="{34AB2FF0-A4D7-4E28-991D-FF26140D5988}"/>
               </a:ext>
             </a:extLst>
           </p:cNvPr>
@@ -6311,7 +6456,7 @@
           <p:cNvPr id="3" name="Espaço Reservado para Texto 2">
             <a:extLst>
               <a:ext uri="{FF2B5EF4-FFF2-40B4-BE49-F238E27FC236}">
-                <a16:creationId xmlns:a16="http://schemas.microsoft.com/office/drawing/2014/main" id="{E2AC45B0-4145-40DB-8E61-105461170604}"/>
+                <a16:creationId xmlns:a16="http://schemas.microsoft.com/office/drawing/2014/main" xmlns="" id="{E2AC45B0-4145-40DB-8E61-105461170604}"/>
               </a:ext>
             </a:extLst>
           </p:cNvPr>
@@ -6436,7 +6581,7 @@
           <p:cNvPr id="4" name="Espaço Reservado para Data 3">
             <a:extLst>
               <a:ext uri="{FF2B5EF4-FFF2-40B4-BE49-F238E27FC236}">
-                <a16:creationId xmlns:a16="http://schemas.microsoft.com/office/drawing/2014/main" id="{50F1D3FB-740A-4EBA-A309-2CE71D12ECFB}"/>
+                <a16:creationId xmlns:a16="http://schemas.microsoft.com/office/drawing/2014/main" xmlns="" id="{50F1D3FB-740A-4EBA-A309-2CE71D12ECFB}"/>
               </a:ext>
             </a:extLst>
           </p:cNvPr>
@@ -6454,7 +6599,7 @@
           <a:p>
             <a:fld id="{63289F7E-B80B-496E-81B4-D396C37C9454}" type="datetimeFigureOut">
               <a:rPr lang="pt-BR" smtClean="0"/>
-              <a:t>14/05/2025</a:t>
+              <a:t>19/05/2025</a:t>
             </a:fld>
             <a:endParaRPr lang="pt-BR"/>
           </a:p>
@@ -6465,7 +6610,7 @@
           <p:cNvPr id="5" name="Espaço Reservado para Rodapé 4">
             <a:extLst>
               <a:ext uri="{FF2B5EF4-FFF2-40B4-BE49-F238E27FC236}">
-                <a16:creationId xmlns:a16="http://schemas.microsoft.com/office/drawing/2014/main" id="{BDCAB18F-8715-4465-A940-F9C193A2ACE9}"/>
+                <a16:creationId xmlns:a16="http://schemas.microsoft.com/office/drawing/2014/main" xmlns="" id="{BDCAB18F-8715-4465-A940-F9C193A2ACE9}"/>
               </a:ext>
             </a:extLst>
           </p:cNvPr>
@@ -6490,7 +6635,7 @@
           <p:cNvPr id="6" name="Espaço Reservado para Número de Slide 5">
             <a:extLst>
               <a:ext uri="{FF2B5EF4-FFF2-40B4-BE49-F238E27FC236}">
-                <a16:creationId xmlns:a16="http://schemas.microsoft.com/office/drawing/2014/main" id="{353466C6-8248-429F-8056-FF040BF509EB}"/>
+                <a16:creationId xmlns:a16="http://schemas.microsoft.com/office/drawing/2014/main" xmlns="" id="{353466C6-8248-429F-8056-FF040BF509EB}"/>
               </a:ext>
             </a:extLst>
           </p:cNvPr>
@@ -6508,7 +6653,7 @@
           <a:p>
             <a:fld id="{1A7E88B7-70CE-4035-AE73-13FA6FB985D4}" type="slidenum">
               <a:rPr lang="pt-BR" smtClean="0"/>
-              <a:t>‹#›</a:t>
+              <a:t>‹nº›</a:t>
             </a:fld>
             <a:endParaRPr lang="pt-BR"/>
           </a:p>
@@ -6549,7 +6694,7 @@
           <p:cNvPr id="2" name="Título 1">
             <a:extLst>
               <a:ext uri="{FF2B5EF4-FFF2-40B4-BE49-F238E27FC236}">
-                <a16:creationId xmlns:a16="http://schemas.microsoft.com/office/drawing/2014/main" id="{BC7BB9F0-F14B-4A91-B2B7-35BC47FE4DE7}"/>
+                <a16:creationId xmlns:a16="http://schemas.microsoft.com/office/drawing/2014/main" xmlns="" id="{BC7BB9F0-F14B-4A91-B2B7-35BC47FE4DE7}"/>
               </a:ext>
             </a:extLst>
           </p:cNvPr>
@@ -6577,7 +6722,7 @@
           <p:cNvPr id="3" name="Espaço Reservado para Conteúdo 2">
             <a:extLst>
               <a:ext uri="{FF2B5EF4-FFF2-40B4-BE49-F238E27FC236}">
-                <a16:creationId xmlns:a16="http://schemas.microsoft.com/office/drawing/2014/main" id="{EC1FC1C4-73DA-47A6-8496-B0B457F7D39A}"/>
+                <a16:creationId xmlns:a16="http://schemas.microsoft.com/office/drawing/2014/main" xmlns="" id="{EC1FC1C4-73DA-47A6-8496-B0B457F7D39A}"/>
               </a:ext>
             </a:extLst>
           </p:cNvPr>
@@ -6639,7 +6784,7 @@
           <p:cNvPr id="4" name="Espaço Reservado para Conteúdo 3">
             <a:extLst>
               <a:ext uri="{FF2B5EF4-FFF2-40B4-BE49-F238E27FC236}">
-                <a16:creationId xmlns:a16="http://schemas.microsoft.com/office/drawing/2014/main" id="{E92F06A8-A449-4D92-9912-76873E529B38}"/>
+                <a16:creationId xmlns:a16="http://schemas.microsoft.com/office/drawing/2014/main" xmlns="" id="{E92F06A8-A449-4D92-9912-76873E529B38}"/>
               </a:ext>
             </a:extLst>
           </p:cNvPr>
@@ -6701,7 +6846,7 @@
           <p:cNvPr id="5" name="Espaço Reservado para Data 4">
             <a:extLst>
               <a:ext uri="{FF2B5EF4-FFF2-40B4-BE49-F238E27FC236}">
-                <a16:creationId xmlns:a16="http://schemas.microsoft.com/office/drawing/2014/main" id="{938070A4-BC2F-4D55-BD8D-DEAF11BB9EE9}"/>
+                <a16:creationId xmlns:a16="http://schemas.microsoft.com/office/drawing/2014/main" xmlns="" id="{938070A4-BC2F-4D55-BD8D-DEAF11BB9EE9}"/>
               </a:ext>
             </a:extLst>
           </p:cNvPr>
@@ -6719,7 +6864,7 @@
           <a:p>
             <a:fld id="{63289F7E-B80B-496E-81B4-D396C37C9454}" type="datetimeFigureOut">
               <a:rPr lang="pt-BR" smtClean="0"/>
-              <a:t>14/05/2025</a:t>
+              <a:t>19/05/2025</a:t>
             </a:fld>
             <a:endParaRPr lang="pt-BR"/>
           </a:p>
@@ -6730,7 +6875,7 @@
           <p:cNvPr id="6" name="Espaço Reservado para Rodapé 5">
             <a:extLst>
               <a:ext uri="{FF2B5EF4-FFF2-40B4-BE49-F238E27FC236}">
-                <a16:creationId xmlns:a16="http://schemas.microsoft.com/office/drawing/2014/main" id="{45CC2DB8-844A-465F-BA9A-7734C80C7F43}"/>
+                <a16:creationId xmlns:a16="http://schemas.microsoft.com/office/drawing/2014/main" xmlns="" id="{45CC2DB8-844A-465F-BA9A-7734C80C7F43}"/>
               </a:ext>
             </a:extLst>
           </p:cNvPr>
@@ -6755,7 +6900,7 @@
           <p:cNvPr id="7" name="Espaço Reservado para Número de Slide 6">
             <a:extLst>
               <a:ext uri="{FF2B5EF4-FFF2-40B4-BE49-F238E27FC236}">
-                <a16:creationId xmlns:a16="http://schemas.microsoft.com/office/drawing/2014/main" id="{4CC606A8-097B-4040-94E0-CD8C88280D8F}"/>
+                <a16:creationId xmlns:a16="http://schemas.microsoft.com/office/drawing/2014/main" xmlns="" id="{4CC606A8-097B-4040-94E0-CD8C88280D8F}"/>
               </a:ext>
             </a:extLst>
           </p:cNvPr>
@@ -6773,7 +6918,7 @@
           <a:p>
             <a:fld id="{1A7E88B7-70CE-4035-AE73-13FA6FB985D4}" type="slidenum">
               <a:rPr lang="pt-BR" smtClean="0"/>
-              <a:t>‹#›</a:t>
+              <a:t>‹nº›</a:t>
             </a:fld>
             <a:endParaRPr lang="pt-BR"/>
           </a:p>
@@ -6814,7 +6959,7 @@
           <p:cNvPr id="2" name="Título 1">
             <a:extLst>
               <a:ext uri="{FF2B5EF4-FFF2-40B4-BE49-F238E27FC236}">
-                <a16:creationId xmlns:a16="http://schemas.microsoft.com/office/drawing/2014/main" id="{76D66686-0143-4CB6-8C09-BA326F1E7ACA}"/>
+                <a16:creationId xmlns:a16="http://schemas.microsoft.com/office/drawing/2014/main" xmlns="" id="{76D66686-0143-4CB6-8C09-BA326F1E7ACA}"/>
               </a:ext>
             </a:extLst>
           </p:cNvPr>
@@ -6847,7 +6992,7 @@
           <p:cNvPr id="3" name="Espaço Reservado para Texto 2">
             <a:extLst>
               <a:ext uri="{FF2B5EF4-FFF2-40B4-BE49-F238E27FC236}">
-                <a16:creationId xmlns:a16="http://schemas.microsoft.com/office/drawing/2014/main" id="{0227AB85-F59E-4BCE-B846-4FA0992C2F23}"/>
+                <a16:creationId xmlns:a16="http://schemas.microsoft.com/office/drawing/2014/main" xmlns="" id="{0227AB85-F59E-4BCE-B846-4FA0992C2F23}"/>
               </a:ext>
             </a:extLst>
           </p:cNvPr>
@@ -6918,7 +7063,7 @@
           <p:cNvPr id="4" name="Espaço Reservado para Conteúdo 3">
             <a:extLst>
               <a:ext uri="{FF2B5EF4-FFF2-40B4-BE49-F238E27FC236}">
-                <a16:creationId xmlns:a16="http://schemas.microsoft.com/office/drawing/2014/main" id="{3373456C-7319-4D0A-827D-D29F6B083F5D}"/>
+                <a16:creationId xmlns:a16="http://schemas.microsoft.com/office/drawing/2014/main" xmlns="" id="{3373456C-7319-4D0A-827D-D29F6B083F5D}"/>
               </a:ext>
             </a:extLst>
           </p:cNvPr>
@@ -6980,7 +7125,7 @@
           <p:cNvPr id="5" name="Espaço Reservado para Texto 4">
             <a:extLst>
               <a:ext uri="{FF2B5EF4-FFF2-40B4-BE49-F238E27FC236}">
-                <a16:creationId xmlns:a16="http://schemas.microsoft.com/office/drawing/2014/main" id="{4CD109D0-2E83-4262-8029-A871CEC47406}"/>
+                <a16:creationId xmlns:a16="http://schemas.microsoft.com/office/drawing/2014/main" xmlns="" id="{4CD109D0-2E83-4262-8029-A871CEC47406}"/>
               </a:ext>
             </a:extLst>
           </p:cNvPr>
@@ -7051,7 +7196,7 @@
           <p:cNvPr id="6" name="Espaço Reservado para Conteúdo 5">
             <a:extLst>
               <a:ext uri="{FF2B5EF4-FFF2-40B4-BE49-F238E27FC236}">
-                <a16:creationId xmlns:a16="http://schemas.microsoft.com/office/drawing/2014/main" id="{AD706E3A-CFBB-4A6C-A65F-D0360A9E74FE}"/>
+                <a16:creationId xmlns:a16="http://schemas.microsoft.com/office/drawing/2014/main" xmlns="" id="{AD706E3A-CFBB-4A6C-A65F-D0360A9E74FE}"/>
               </a:ext>
             </a:extLst>
           </p:cNvPr>
@@ -7113,7 +7258,7 @@
           <p:cNvPr id="7" name="Espaço Reservado para Data 6">
             <a:extLst>
               <a:ext uri="{FF2B5EF4-FFF2-40B4-BE49-F238E27FC236}">
-                <a16:creationId xmlns:a16="http://schemas.microsoft.com/office/drawing/2014/main" id="{4172C0E5-5AF0-4805-BB51-443733CD2BD5}"/>
+                <a16:creationId xmlns:a16="http://schemas.microsoft.com/office/drawing/2014/main" xmlns="" id="{4172C0E5-5AF0-4805-BB51-443733CD2BD5}"/>
               </a:ext>
             </a:extLst>
           </p:cNvPr>
@@ -7131,7 +7276,7 @@
           <a:p>
             <a:fld id="{63289F7E-B80B-496E-81B4-D396C37C9454}" type="datetimeFigureOut">
               <a:rPr lang="pt-BR" smtClean="0"/>
-              <a:t>14/05/2025</a:t>
+              <a:t>19/05/2025</a:t>
             </a:fld>
             <a:endParaRPr lang="pt-BR"/>
           </a:p>
@@ -7142,7 +7287,7 @@
           <p:cNvPr id="8" name="Espaço Reservado para Rodapé 7">
             <a:extLst>
               <a:ext uri="{FF2B5EF4-FFF2-40B4-BE49-F238E27FC236}">
-                <a16:creationId xmlns:a16="http://schemas.microsoft.com/office/drawing/2014/main" id="{0E801648-156F-497E-99CF-797DF48051E1}"/>
+                <a16:creationId xmlns:a16="http://schemas.microsoft.com/office/drawing/2014/main" xmlns="" id="{0E801648-156F-497E-99CF-797DF48051E1}"/>
               </a:ext>
             </a:extLst>
           </p:cNvPr>
@@ -7167,7 +7312,7 @@
           <p:cNvPr id="9" name="Espaço Reservado para Número de Slide 8">
             <a:extLst>
               <a:ext uri="{FF2B5EF4-FFF2-40B4-BE49-F238E27FC236}">
-                <a16:creationId xmlns:a16="http://schemas.microsoft.com/office/drawing/2014/main" id="{EEE23D32-80E7-4796-A137-66BF842E4B53}"/>
+                <a16:creationId xmlns:a16="http://schemas.microsoft.com/office/drawing/2014/main" xmlns="" id="{EEE23D32-80E7-4796-A137-66BF842E4B53}"/>
               </a:ext>
             </a:extLst>
           </p:cNvPr>
@@ -7185,7 +7330,7 @@
           <a:p>
             <a:fld id="{1A7E88B7-70CE-4035-AE73-13FA6FB985D4}" type="slidenum">
               <a:rPr lang="pt-BR" smtClean="0"/>
-              <a:t>‹#›</a:t>
+              <a:t>‹nº›</a:t>
             </a:fld>
             <a:endParaRPr lang="pt-BR"/>
           </a:p>
@@ -7226,7 +7371,7 @@
           <p:cNvPr id="2" name="Título 1">
             <a:extLst>
               <a:ext uri="{FF2B5EF4-FFF2-40B4-BE49-F238E27FC236}">
-                <a16:creationId xmlns:a16="http://schemas.microsoft.com/office/drawing/2014/main" id="{2BCE2379-C78F-47E1-8CFC-B846E7AF148D}"/>
+                <a16:creationId xmlns:a16="http://schemas.microsoft.com/office/drawing/2014/main" xmlns="" id="{2BCE2379-C78F-47E1-8CFC-B846E7AF148D}"/>
               </a:ext>
             </a:extLst>
           </p:cNvPr>
@@ -7254,7 +7399,7 @@
           <p:cNvPr id="3" name="Espaço Reservado para Data 2">
             <a:extLst>
               <a:ext uri="{FF2B5EF4-FFF2-40B4-BE49-F238E27FC236}">
-                <a16:creationId xmlns:a16="http://schemas.microsoft.com/office/drawing/2014/main" id="{342600A9-7F92-4E22-9D94-E4717252A817}"/>
+                <a16:creationId xmlns:a16="http://schemas.microsoft.com/office/drawing/2014/main" xmlns="" id="{342600A9-7F92-4E22-9D94-E4717252A817}"/>
               </a:ext>
             </a:extLst>
           </p:cNvPr>
@@ -7272,7 +7417,7 @@
           <a:p>
             <a:fld id="{63289F7E-B80B-496E-81B4-D396C37C9454}" type="datetimeFigureOut">
               <a:rPr lang="pt-BR" smtClean="0"/>
-              <a:t>14/05/2025</a:t>
+              <a:t>19/05/2025</a:t>
             </a:fld>
             <a:endParaRPr lang="pt-BR"/>
           </a:p>
@@ -7283,7 +7428,7 @@
           <p:cNvPr id="4" name="Espaço Reservado para Rodapé 3">
             <a:extLst>
               <a:ext uri="{FF2B5EF4-FFF2-40B4-BE49-F238E27FC236}">
-                <a16:creationId xmlns:a16="http://schemas.microsoft.com/office/drawing/2014/main" id="{192E6BED-F546-40CC-A2DF-99CBA853654E}"/>
+                <a16:creationId xmlns:a16="http://schemas.microsoft.com/office/drawing/2014/main" xmlns="" id="{192E6BED-F546-40CC-A2DF-99CBA853654E}"/>
               </a:ext>
             </a:extLst>
           </p:cNvPr>
@@ -7308,7 +7453,7 @@
           <p:cNvPr id="5" name="Espaço Reservado para Número de Slide 4">
             <a:extLst>
               <a:ext uri="{FF2B5EF4-FFF2-40B4-BE49-F238E27FC236}">
-                <a16:creationId xmlns:a16="http://schemas.microsoft.com/office/drawing/2014/main" id="{6091CC40-A8C4-4063-80EB-CC5099621678}"/>
+                <a16:creationId xmlns:a16="http://schemas.microsoft.com/office/drawing/2014/main" xmlns="" id="{6091CC40-A8C4-4063-80EB-CC5099621678}"/>
               </a:ext>
             </a:extLst>
           </p:cNvPr>
@@ -7326,7 +7471,7 @@
           <a:p>
             <a:fld id="{1A7E88B7-70CE-4035-AE73-13FA6FB985D4}" type="slidenum">
               <a:rPr lang="pt-BR" smtClean="0"/>
-              <a:t>‹#›</a:t>
+              <a:t>‹nº›</a:t>
             </a:fld>
             <a:endParaRPr lang="pt-BR"/>
           </a:p>
@@ -7367,7 +7512,7 @@
           <p:cNvPr id="2" name="Espaço Reservado para Data 1">
             <a:extLst>
               <a:ext uri="{FF2B5EF4-FFF2-40B4-BE49-F238E27FC236}">
-                <a16:creationId xmlns:a16="http://schemas.microsoft.com/office/drawing/2014/main" id="{DD19515C-212C-4EAE-84A3-8FF4BC844F1B}"/>
+                <a16:creationId xmlns:a16="http://schemas.microsoft.com/office/drawing/2014/main" xmlns="" id="{DD19515C-212C-4EAE-84A3-8FF4BC844F1B}"/>
               </a:ext>
             </a:extLst>
           </p:cNvPr>
@@ -7385,7 +7530,7 @@
           <a:p>
             <a:fld id="{63289F7E-B80B-496E-81B4-D396C37C9454}" type="datetimeFigureOut">
               <a:rPr lang="pt-BR" smtClean="0"/>
-              <a:t>14/05/2025</a:t>
+              <a:t>19/05/2025</a:t>
             </a:fld>
             <a:endParaRPr lang="pt-BR"/>
           </a:p>
@@ -7396,7 +7541,7 @@
           <p:cNvPr id="3" name="Espaço Reservado para Rodapé 2">
             <a:extLst>
               <a:ext uri="{FF2B5EF4-FFF2-40B4-BE49-F238E27FC236}">
-                <a16:creationId xmlns:a16="http://schemas.microsoft.com/office/drawing/2014/main" id="{94D3D120-B3E8-4C96-861D-7A4F12F49B3A}"/>
+                <a16:creationId xmlns:a16="http://schemas.microsoft.com/office/drawing/2014/main" xmlns="" id="{94D3D120-B3E8-4C96-861D-7A4F12F49B3A}"/>
               </a:ext>
             </a:extLst>
           </p:cNvPr>
@@ -7421,7 +7566,7 @@
           <p:cNvPr id="4" name="Espaço Reservado para Número de Slide 3">
             <a:extLst>
               <a:ext uri="{FF2B5EF4-FFF2-40B4-BE49-F238E27FC236}">
-                <a16:creationId xmlns:a16="http://schemas.microsoft.com/office/drawing/2014/main" id="{42E49B68-FA1B-468B-9F17-D5C09243D454}"/>
+                <a16:creationId xmlns:a16="http://schemas.microsoft.com/office/drawing/2014/main" xmlns="" id="{42E49B68-FA1B-468B-9F17-D5C09243D454}"/>
               </a:ext>
             </a:extLst>
           </p:cNvPr>
@@ -7439,7 +7584,7 @@
           <a:p>
             <a:fld id="{1A7E88B7-70CE-4035-AE73-13FA6FB985D4}" type="slidenum">
               <a:rPr lang="pt-BR" smtClean="0"/>
-              <a:t>‹#›</a:t>
+              <a:t>‹nº›</a:t>
             </a:fld>
             <a:endParaRPr lang="pt-BR"/>
           </a:p>
@@ -7480,7 +7625,7 @@
           <p:cNvPr id="2" name="Título 1">
             <a:extLst>
               <a:ext uri="{FF2B5EF4-FFF2-40B4-BE49-F238E27FC236}">
-                <a16:creationId xmlns:a16="http://schemas.microsoft.com/office/drawing/2014/main" id="{1C17BCBE-A897-4319-85EC-D87909C24980}"/>
+                <a16:creationId xmlns:a16="http://schemas.microsoft.com/office/drawing/2014/main" xmlns="" id="{1C17BCBE-A897-4319-85EC-D87909C24980}"/>
               </a:ext>
             </a:extLst>
           </p:cNvPr>
@@ -7517,7 +7662,7 @@
           <p:cNvPr id="3" name="Espaço Reservado para Conteúdo 2">
             <a:extLst>
               <a:ext uri="{FF2B5EF4-FFF2-40B4-BE49-F238E27FC236}">
-                <a16:creationId xmlns:a16="http://schemas.microsoft.com/office/drawing/2014/main" id="{4226F885-0204-4913-868B-4B8B82576F17}"/>
+                <a16:creationId xmlns:a16="http://schemas.microsoft.com/office/drawing/2014/main" xmlns="" id="{4226F885-0204-4913-868B-4B8B82576F17}"/>
               </a:ext>
             </a:extLst>
           </p:cNvPr>
@@ -7607,7 +7752,7 @@
           <p:cNvPr id="4" name="Espaço Reservado para Texto 3">
             <a:extLst>
               <a:ext uri="{FF2B5EF4-FFF2-40B4-BE49-F238E27FC236}">
-                <a16:creationId xmlns:a16="http://schemas.microsoft.com/office/drawing/2014/main" id="{00F9F784-A858-441B-8AB5-697098141751}"/>
+                <a16:creationId xmlns:a16="http://schemas.microsoft.com/office/drawing/2014/main" xmlns="" id="{00F9F784-A858-441B-8AB5-697098141751}"/>
               </a:ext>
             </a:extLst>
           </p:cNvPr>
@@ -7678,7 +7823,7 @@
           <p:cNvPr id="5" name="Espaço Reservado para Data 4">
             <a:extLst>
               <a:ext uri="{FF2B5EF4-FFF2-40B4-BE49-F238E27FC236}">
-                <a16:creationId xmlns:a16="http://schemas.microsoft.com/office/drawing/2014/main" id="{A4DC363A-5000-472E-8B17-02E7DCB8840A}"/>
+                <a16:creationId xmlns:a16="http://schemas.microsoft.com/office/drawing/2014/main" xmlns="" id="{A4DC363A-5000-472E-8B17-02E7DCB8840A}"/>
               </a:ext>
             </a:extLst>
           </p:cNvPr>
@@ -7696,7 +7841,7 @@
           <a:p>
             <a:fld id="{63289F7E-B80B-496E-81B4-D396C37C9454}" type="datetimeFigureOut">
               <a:rPr lang="pt-BR" smtClean="0"/>
-              <a:t>14/05/2025</a:t>
+              <a:t>19/05/2025</a:t>
             </a:fld>
             <a:endParaRPr lang="pt-BR"/>
           </a:p>
@@ -7707,7 +7852,7 @@
           <p:cNvPr id="6" name="Espaço Reservado para Rodapé 5">
             <a:extLst>
               <a:ext uri="{FF2B5EF4-FFF2-40B4-BE49-F238E27FC236}">
-                <a16:creationId xmlns:a16="http://schemas.microsoft.com/office/drawing/2014/main" id="{5548425D-2C21-4C56-BAD4-662978775C28}"/>
+                <a16:creationId xmlns:a16="http://schemas.microsoft.com/office/drawing/2014/main" xmlns="" id="{5548425D-2C21-4C56-BAD4-662978775C28}"/>
               </a:ext>
             </a:extLst>
           </p:cNvPr>
@@ -7732,7 +7877,7 @@
           <p:cNvPr id="7" name="Espaço Reservado para Número de Slide 6">
             <a:extLst>
               <a:ext uri="{FF2B5EF4-FFF2-40B4-BE49-F238E27FC236}">
-                <a16:creationId xmlns:a16="http://schemas.microsoft.com/office/drawing/2014/main" id="{C63E9726-E64C-42B2-AE8A-8C235A956B48}"/>
+                <a16:creationId xmlns:a16="http://schemas.microsoft.com/office/drawing/2014/main" xmlns="" id="{C63E9726-E64C-42B2-AE8A-8C235A956B48}"/>
               </a:ext>
             </a:extLst>
           </p:cNvPr>
@@ -7750,7 +7895,7 @@
           <a:p>
             <a:fld id="{1A7E88B7-70CE-4035-AE73-13FA6FB985D4}" type="slidenum">
               <a:rPr lang="pt-BR" smtClean="0"/>
-              <a:t>‹#›</a:t>
+              <a:t>‹nº›</a:t>
             </a:fld>
             <a:endParaRPr lang="pt-BR"/>
           </a:p>
@@ -7791,7 +7936,7 @@
           <p:cNvPr id="2" name="Título 1">
             <a:extLst>
               <a:ext uri="{FF2B5EF4-FFF2-40B4-BE49-F238E27FC236}">
-                <a16:creationId xmlns:a16="http://schemas.microsoft.com/office/drawing/2014/main" id="{11086A78-3E74-450C-96A6-CA8AC37AF772}"/>
+                <a16:creationId xmlns:a16="http://schemas.microsoft.com/office/drawing/2014/main" xmlns="" id="{11086A78-3E74-450C-96A6-CA8AC37AF772}"/>
               </a:ext>
             </a:extLst>
           </p:cNvPr>
@@ -7828,7 +7973,7 @@
           <p:cNvPr id="3" name="Espaço Reservado para Imagem 2">
             <a:extLst>
               <a:ext uri="{FF2B5EF4-FFF2-40B4-BE49-F238E27FC236}">
-                <a16:creationId xmlns:a16="http://schemas.microsoft.com/office/drawing/2014/main" id="{5F5B7312-975A-4DBC-9B2F-3652ADA006FD}"/>
+                <a16:creationId xmlns:a16="http://schemas.microsoft.com/office/drawing/2014/main" xmlns="" id="{5F5B7312-975A-4DBC-9B2F-3652ADA006FD}"/>
               </a:ext>
             </a:extLst>
           </p:cNvPr>
@@ -7895,7 +8040,7 @@
           <p:cNvPr id="4" name="Espaço Reservado para Texto 3">
             <a:extLst>
               <a:ext uri="{FF2B5EF4-FFF2-40B4-BE49-F238E27FC236}">
-                <a16:creationId xmlns:a16="http://schemas.microsoft.com/office/drawing/2014/main" id="{AAF805F5-1DFF-41C6-944C-7D79FE0D0963}"/>
+                <a16:creationId xmlns:a16="http://schemas.microsoft.com/office/drawing/2014/main" xmlns="" id="{AAF805F5-1DFF-41C6-944C-7D79FE0D0963}"/>
               </a:ext>
             </a:extLst>
           </p:cNvPr>
@@ -7966,7 +8111,7 @@
           <p:cNvPr id="5" name="Espaço Reservado para Data 4">
             <a:extLst>
               <a:ext uri="{FF2B5EF4-FFF2-40B4-BE49-F238E27FC236}">
-                <a16:creationId xmlns:a16="http://schemas.microsoft.com/office/drawing/2014/main" id="{02113D81-8665-4516-BD81-C6A1F254EECD}"/>
+                <a16:creationId xmlns:a16="http://schemas.microsoft.com/office/drawing/2014/main" xmlns="" id="{02113D81-8665-4516-BD81-C6A1F254EECD}"/>
               </a:ext>
             </a:extLst>
           </p:cNvPr>
@@ -7984,7 +8129,7 @@
           <a:p>
             <a:fld id="{63289F7E-B80B-496E-81B4-D396C37C9454}" type="datetimeFigureOut">
               <a:rPr lang="pt-BR" smtClean="0"/>
-              <a:t>14/05/2025</a:t>
+              <a:t>19/05/2025</a:t>
             </a:fld>
             <a:endParaRPr lang="pt-BR"/>
           </a:p>
@@ -7995,7 +8140,7 @@
           <p:cNvPr id="6" name="Espaço Reservado para Rodapé 5">
             <a:extLst>
               <a:ext uri="{FF2B5EF4-FFF2-40B4-BE49-F238E27FC236}">
-                <a16:creationId xmlns:a16="http://schemas.microsoft.com/office/drawing/2014/main" id="{2B00C88B-FF32-40AA-A187-727D96FD7862}"/>
+                <a16:creationId xmlns:a16="http://schemas.microsoft.com/office/drawing/2014/main" xmlns="" id="{2B00C88B-FF32-40AA-A187-727D96FD7862}"/>
               </a:ext>
             </a:extLst>
           </p:cNvPr>
@@ -8020,7 +8165,7 @@
           <p:cNvPr id="7" name="Espaço Reservado para Número de Slide 6">
             <a:extLst>
               <a:ext uri="{FF2B5EF4-FFF2-40B4-BE49-F238E27FC236}">
-                <a16:creationId xmlns:a16="http://schemas.microsoft.com/office/drawing/2014/main" id="{A04D1A2D-69F7-4B8F-A730-BC26DC340BA6}"/>
+                <a16:creationId xmlns:a16="http://schemas.microsoft.com/office/drawing/2014/main" xmlns="" id="{A04D1A2D-69F7-4B8F-A730-BC26DC340BA6}"/>
               </a:ext>
             </a:extLst>
           </p:cNvPr>
@@ -8038,7 +8183,7 @@
           <a:p>
             <a:fld id="{1A7E88B7-70CE-4035-AE73-13FA6FB985D4}" type="slidenum">
               <a:rPr lang="pt-BR" smtClean="0"/>
-              <a:t>‹#›</a:t>
+              <a:t>‹nº›</a:t>
             </a:fld>
             <a:endParaRPr lang="pt-BR"/>
           </a:p>
@@ -8084,7 +8229,7 @@
           <p:cNvPr id="2" name="Espaço Reservado para Título 1">
             <a:extLst>
               <a:ext uri="{FF2B5EF4-FFF2-40B4-BE49-F238E27FC236}">
-                <a16:creationId xmlns:a16="http://schemas.microsoft.com/office/drawing/2014/main" id="{E69A0273-1966-4A1B-9370-4C1CE5036371}"/>
+                <a16:creationId xmlns:a16="http://schemas.microsoft.com/office/drawing/2014/main" xmlns="" id="{E69A0273-1966-4A1B-9370-4C1CE5036371}"/>
               </a:ext>
             </a:extLst>
           </p:cNvPr>
@@ -8122,7 +8267,7 @@
           <p:cNvPr id="3" name="Espaço Reservado para Texto 2">
             <a:extLst>
               <a:ext uri="{FF2B5EF4-FFF2-40B4-BE49-F238E27FC236}">
-                <a16:creationId xmlns:a16="http://schemas.microsoft.com/office/drawing/2014/main" id="{3B9CF87A-0448-49A7-AB25-EBC1D56A40EF}"/>
+                <a16:creationId xmlns:a16="http://schemas.microsoft.com/office/drawing/2014/main" xmlns="" id="{3B9CF87A-0448-49A7-AB25-EBC1D56A40EF}"/>
               </a:ext>
             </a:extLst>
           </p:cNvPr>
@@ -8189,7 +8334,7 @@
           <p:cNvPr id="4" name="Espaço Reservado para Data 3">
             <a:extLst>
               <a:ext uri="{FF2B5EF4-FFF2-40B4-BE49-F238E27FC236}">
-                <a16:creationId xmlns:a16="http://schemas.microsoft.com/office/drawing/2014/main" id="{2EF7B1F2-BB5A-44D0-816D-16AD2C71430E}"/>
+                <a16:creationId xmlns:a16="http://schemas.microsoft.com/office/drawing/2014/main" xmlns="" id="{2EF7B1F2-BB5A-44D0-816D-16AD2C71430E}"/>
               </a:ext>
             </a:extLst>
           </p:cNvPr>
@@ -8225,7 +8370,7 @@
           <a:p>
             <a:fld id="{63289F7E-B80B-496E-81B4-D396C37C9454}" type="datetimeFigureOut">
               <a:rPr lang="pt-BR" smtClean="0"/>
-              <a:t>14/05/2025</a:t>
+              <a:t>19/05/2025</a:t>
             </a:fld>
             <a:endParaRPr lang="pt-BR"/>
           </a:p>
@@ -8236,7 +8381,7 @@
           <p:cNvPr id="5" name="Espaço Reservado para Rodapé 4">
             <a:extLst>
               <a:ext uri="{FF2B5EF4-FFF2-40B4-BE49-F238E27FC236}">
-                <a16:creationId xmlns:a16="http://schemas.microsoft.com/office/drawing/2014/main" id="{C703F94C-2CC8-4DAA-BC35-14FC3E841DCD}"/>
+                <a16:creationId xmlns:a16="http://schemas.microsoft.com/office/drawing/2014/main" xmlns="" id="{C703F94C-2CC8-4DAA-BC35-14FC3E841DCD}"/>
               </a:ext>
             </a:extLst>
           </p:cNvPr>
@@ -8279,7 +8424,7 @@
           <p:cNvPr id="6" name="Espaço Reservado para Número de Slide 5">
             <a:extLst>
               <a:ext uri="{FF2B5EF4-FFF2-40B4-BE49-F238E27FC236}">
-                <a16:creationId xmlns:a16="http://schemas.microsoft.com/office/drawing/2014/main" id="{64051336-7048-457A-8B61-D94291D71648}"/>
+                <a16:creationId xmlns:a16="http://schemas.microsoft.com/office/drawing/2014/main" xmlns="" id="{64051336-7048-457A-8B61-D94291D71648}"/>
               </a:ext>
             </a:extLst>
           </p:cNvPr>
@@ -8315,7 +8460,7 @@
           <a:p>
             <a:fld id="{1A7E88B7-70CE-4035-AE73-13FA6FB985D4}" type="slidenum">
               <a:rPr lang="pt-BR" smtClean="0"/>
-              <a:t>‹#›</a:t>
+              <a:t>‹nº›</a:t>
             </a:fld>
             <a:endParaRPr lang="pt-BR"/>
           </a:p>
@@ -8778,7 +8923,7 @@
             <a:fld id="{1D8BD707-D9CF-40AE-B4C6-C98DA3205C09}" type="datetimeFigureOut">
               <a:rPr lang="en-US" smtClean="0"/>
               <a:pPr/>
-              <a:t>5/14/2025</a:t>
+              <a:t>5/19/2025</a:t>
             </a:fld>
             <a:endParaRPr lang="en-US"/>
           </a:p>
@@ -8857,7 +9002,7 @@
             <a:fld id="{B6F15528-21DE-4FAA-801E-634DDDAF4B2B}" type="slidenum">
               <a:rPr lang="en-US" smtClean="0"/>
               <a:pPr/>
-              <a:t>‹#›</a:t>
+              <a:t>‹nº›</a:t>
             </a:fld>
             <a:endParaRPr lang="en-US"/>
           </a:p>
@@ -9159,7 +9304,7 @@
           <p:cNvPr id="2" name="Título 1">
             <a:extLst>
               <a:ext uri="{FF2B5EF4-FFF2-40B4-BE49-F238E27FC236}">
-                <a16:creationId xmlns:a16="http://schemas.microsoft.com/office/drawing/2014/main" id="{32666AC8-2E17-4DB4-B0F5-60C640CCFD2E}"/>
+                <a16:creationId xmlns:a16="http://schemas.microsoft.com/office/drawing/2014/main" xmlns="" id="{32666AC8-2E17-4DB4-B0F5-60C640CCFD2E}"/>
               </a:ext>
             </a:extLst>
           </p:cNvPr>
@@ -9194,6 +9339,10 @@
               <a:rPr lang="pt-BR" sz="5400" dirty="0"/>
               <a:t> Learning:</a:t>
             </a:r>
+            <a:r>
+              <a:rPr lang="pt-BR" dirty="0"/>
+              <a:t/>
+            </a:r>
             <a:br>
               <a:rPr lang="pt-BR" dirty="0"/>
             </a:br>
@@ -9209,7 +9358,7 @@
           <p:cNvPr id="1026" name="Picture 2" descr="Logo">
             <a:extLst>
               <a:ext uri="{FF2B5EF4-FFF2-40B4-BE49-F238E27FC236}">
-                <a16:creationId xmlns:a16="http://schemas.microsoft.com/office/drawing/2014/main" id="{3F2642E0-4F6A-4196-8F58-E77D36E9A33F}"/>
+                <a16:creationId xmlns:a16="http://schemas.microsoft.com/office/drawing/2014/main" xmlns="" id="{3F2642E0-4F6A-4196-8F58-E77D36E9A33F}"/>
               </a:ext>
             </a:extLst>
           </p:cNvPr>
@@ -9254,7 +9403,7 @@
           <p:cNvPr id="5122" name="Picture 2" descr="Image result for machine learning">
             <a:extLst>
               <a:ext uri="{FF2B5EF4-FFF2-40B4-BE49-F238E27FC236}">
-                <a16:creationId xmlns:a16="http://schemas.microsoft.com/office/drawing/2014/main" id="{810CE0A2-4102-44A6-A370-175E7896CDCB}"/>
+                <a16:creationId xmlns:a16="http://schemas.microsoft.com/office/drawing/2014/main" xmlns="" id="{810CE0A2-4102-44A6-A370-175E7896CDCB}"/>
               </a:ext>
             </a:extLst>
           </p:cNvPr>
@@ -9299,7 +9448,7 @@
           <p:cNvPr id="3" name="Picture 2" descr="IoT Group">
             <a:extLst>
               <a:ext uri="{FF2B5EF4-FFF2-40B4-BE49-F238E27FC236}">
-                <a16:creationId xmlns:a16="http://schemas.microsoft.com/office/drawing/2014/main" id="{AC034F57-E830-B6E7-6790-12FDBBDB2975}"/>
+                <a16:creationId xmlns:a16="http://schemas.microsoft.com/office/drawing/2014/main" xmlns="" id="{AC034F57-E830-B6E7-6790-12FDBBDB2975}"/>
               </a:ext>
             </a:extLst>
           </p:cNvPr>
@@ -9344,7 +9493,7 @@
           <p:cNvPr id="5" name="CaixaDeTexto 4">
             <a:extLst>
               <a:ext uri="{FF2B5EF4-FFF2-40B4-BE49-F238E27FC236}">
-                <a16:creationId xmlns:a16="http://schemas.microsoft.com/office/drawing/2014/main" id="{2D82026D-D2EA-05D7-61F2-DEE04704DB7E}"/>
+                <a16:creationId xmlns:a16="http://schemas.microsoft.com/office/drawing/2014/main" xmlns="" id="{2D82026D-D2EA-05D7-61F2-DEE04704DB7E}"/>
               </a:ext>
             </a:extLst>
           </p:cNvPr>
@@ -9415,7 +9564,7 @@
         <p:cNvPr id="1" name="">
           <a:extLst>
             <a:ext uri="{FF2B5EF4-FFF2-40B4-BE49-F238E27FC236}">
-              <a16:creationId xmlns:a16="http://schemas.microsoft.com/office/drawing/2014/main" id="{1F378FD1-DBF4-DCA8-F1BC-B3E89729AAC1}"/>
+              <a16:creationId xmlns:a16="http://schemas.microsoft.com/office/drawing/2014/main" xmlns="" id="{1F378FD1-DBF4-DCA8-F1BC-B3E89729AAC1}"/>
             </a:ext>
           </a:extLst>
         </p:cNvPr>
@@ -9435,7 +9584,7 @@
           <p:cNvPr id="2" name="Título 1">
             <a:extLst>
               <a:ext uri="{FF2B5EF4-FFF2-40B4-BE49-F238E27FC236}">
-                <a16:creationId xmlns:a16="http://schemas.microsoft.com/office/drawing/2014/main" id="{27002D84-8C44-E80A-6CE1-1C285A07DF3A}"/>
+                <a16:creationId xmlns:a16="http://schemas.microsoft.com/office/drawing/2014/main" xmlns="" id="{27002D84-8C44-E80A-6CE1-1C285A07DF3A}"/>
               </a:ext>
             </a:extLst>
           </p:cNvPr>
@@ -9475,7 +9624,7 @@
           <p:cNvPr id="3" name="AutoShape 2" descr="An example of graph signal reconstruction over wireless sensor network. |  Download Scientific Diagram">
             <a:extLst>
               <a:ext uri="{FF2B5EF4-FFF2-40B4-BE49-F238E27FC236}">
-                <a16:creationId xmlns:a16="http://schemas.microsoft.com/office/drawing/2014/main" id="{3E14BFEB-7725-6B4D-C589-A43632C98002}"/>
+                <a16:creationId xmlns:a16="http://schemas.microsoft.com/office/drawing/2014/main" xmlns="" id="{3E14BFEB-7725-6B4D-C589-A43632C98002}"/>
               </a:ext>
             </a:extLst>
           </p:cNvPr>
@@ -9526,7 +9675,7 @@
           <p:cNvPr id="7" name="AutoShape 4" descr="An example of graph signal reconstruction over wireless sensor network. |  Download Scientific Diagram">
             <a:extLst>
               <a:ext uri="{FF2B5EF4-FFF2-40B4-BE49-F238E27FC236}">
-                <a16:creationId xmlns:a16="http://schemas.microsoft.com/office/drawing/2014/main" id="{DDC94C5F-D329-0D03-2D55-303CAEA46575}"/>
+                <a16:creationId xmlns:a16="http://schemas.microsoft.com/office/drawing/2014/main" xmlns="" id="{DDC94C5F-D329-0D03-2D55-303CAEA46575}"/>
               </a:ext>
             </a:extLst>
           </p:cNvPr>
@@ -9577,7 +9726,7 @@
           <p:cNvPr id="4" name="Espaço Reservado para Conteúdo 3">
             <a:extLst>
               <a:ext uri="{FF2B5EF4-FFF2-40B4-BE49-F238E27FC236}">
-                <a16:creationId xmlns:a16="http://schemas.microsoft.com/office/drawing/2014/main" id="{0C330112-2C2B-538C-EFFC-0C5273ED92DF}"/>
+                <a16:creationId xmlns:a16="http://schemas.microsoft.com/office/drawing/2014/main" xmlns="" id="{0C330112-2C2B-538C-EFFC-0C5273ED92DF}"/>
               </a:ext>
             </a:extLst>
           </p:cNvPr>
@@ -9620,7 +9769,7 @@
           <p:cNvPr id="8" name="Picture 7">
             <a:extLst>
               <a:ext uri="{FF2B5EF4-FFF2-40B4-BE49-F238E27FC236}">
-                <a16:creationId xmlns:a16="http://schemas.microsoft.com/office/drawing/2014/main" id="{4A874BBD-11DB-833A-341F-F134DDD11108}"/>
+                <a16:creationId xmlns:a16="http://schemas.microsoft.com/office/drawing/2014/main" xmlns="" id="{4A874BBD-11DB-833A-341F-F134DDD11108}"/>
               </a:ext>
             </a:extLst>
           </p:cNvPr>
@@ -9650,7 +9799,7 @@
           <p:cNvPr id="10" name="TextBox 9">
             <a:extLst>
               <a:ext uri="{FF2B5EF4-FFF2-40B4-BE49-F238E27FC236}">
-                <a16:creationId xmlns:a16="http://schemas.microsoft.com/office/drawing/2014/main" id="{FB63ADD3-D956-76C5-F130-F38465877D67}"/>
+                <a16:creationId xmlns:a16="http://schemas.microsoft.com/office/drawing/2014/main" xmlns="" id="{FB63ADD3-D956-76C5-F130-F38465877D67}"/>
               </a:ext>
             </a:extLst>
           </p:cNvPr>
@@ -9721,7 +9870,7 @@
         <p:cNvPr id="1" name="">
           <a:extLst>
             <a:ext uri="{FF2B5EF4-FFF2-40B4-BE49-F238E27FC236}">
-              <a16:creationId xmlns:a16="http://schemas.microsoft.com/office/drawing/2014/main" id="{9BB75298-302A-6135-F195-096473EDA4DD}"/>
+              <a16:creationId xmlns:a16="http://schemas.microsoft.com/office/drawing/2014/main" xmlns="" id="{9BB75298-302A-6135-F195-096473EDA4DD}"/>
             </a:ext>
           </a:extLst>
         </p:cNvPr>
@@ -9741,7 +9890,7 @@
           <p:cNvPr id="2" name="Título 1">
             <a:extLst>
               <a:ext uri="{FF2B5EF4-FFF2-40B4-BE49-F238E27FC236}">
-                <a16:creationId xmlns:a16="http://schemas.microsoft.com/office/drawing/2014/main" id="{27828DF8-D69B-BFFF-D2B4-A925DD43717D}"/>
+                <a16:creationId xmlns:a16="http://schemas.microsoft.com/office/drawing/2014/main" xmlns="" id="{27828DF8-D69B-BFFF-D2B4-A925DD43717D}"/>
               </a:ext>
             </a:extLst>
           </p:cNvPr>
@@ -9781,7 +9930,7 @@
           <p:cNvPr id="3" name="AutoShape 2" descr="An example of graph signal reconstruction over wireless sensor network. |  Download Scientific Diagram">
             <a:extLst>
               <a:ext uri="{FF2B5EF4-FFF2-40B4-BE49-F238E27FC236}">
-                <a16:creationId xmlns:a16="http://schemas.microsoft.com/office/drawing/2014/main" id="{A4C3F9D2-0307-0450-4E41-55D3298E641B}"/>
+                <a16:creationId xmlns:a16="http://schemas.microsoft.com/office/drawing/2014/main" xmlns="" id="{A4C3F9D2-0307-0450-4E41-55D3298E641B}"/>
               </a:ext>
             </a:extLst>
           </p:cNvPr>
@@ -9832,7 +9981,7 @@
           <p:cNvPr id="7" name="AutoShape 4" descr="An example of graph signal reconstruction over wireless sensor network. |  Download Scientific Diagram">
             <a:extLst>
               <a:ext uri="{FF2B5EF4-FFF2-40B4-BE49-F238E27FC236}">
-                <a16:creationId xmlns:a16="http://schemas.microsoft.com/office/drawing/2014/main" id="{A5277E26-0B39-A36B-7447-436FDC3E025E}"/>
+                <a16:creationId xmlns:a16="http://schemas.microsoft.com/office/drawing/2014/main" xmlns="" id="{A5277E26-0B39-A36B-7447-436FDC3E025E}"/>
               </a:ext>
             </a:extLst>
           </p:cNvPr>
@@ -9883,7 +10032,7 @@
           <p:cNvPr id="4" name="Espaço Reservado para Conteúdo 3">
             <a:extLst>
               <a:ext uri="{FF2B5EF4-FFF2-40B4-BE49-F238E27FC236}">
-                <a16:creationId xmlns:a16="http://schemas.microsoft.com/office/drawing/2014/main" id="{83702F57-B420-BA92-57FC-CDEAF0E04638}"/>
+                <a16:creationId xmlns:a16="http://schemas.microsoft.com/office/drawing/2014/main" xmlns="" id="{83702F57-B420-BA92-57FC-CDEAF0E04638}"/>
               </a:ext>
             </a:extLst>
           </p:cNvPr>
@@ -9926,7 +10075,7 @@
           <p:cNvPr id="6" name="Picture 5">
             <a:extLst>
               <a:ext uri="{FF2B5EF4-FFF2-40B4-BE49-F238E27FC236}">
-                <a16:creationId xmlns:a16="http://schemas.microsoft.com/office/drawing/2014/main" id="{BE9E2474-44BE-43D0-EE2F-D03349050DA2}"/>
+                <a16:creationId xmlns:a16="http://schemas.microsoft.com/office/drawing/2014/main" xmlns="" id="{BE9E2474-44BE-43D0-EE2F-D03349050DA2}"/>
               </a:ext>
             </a:extLst>
           </p:cNvPr>
@@ -9956,7 +10105,7 @@
           <p:cNvPr id="10" name="TextBox 9">
             <a:extLst>
               <a:ext uri="{FF2B5EF4-FFF2-40B4-BE49-F238E27FC236}">
-                <a16:creationId xmlns:a16="http://schemas.microsoft.com/office/drawing/2014/main" id="{E7FEC406-7A7E-5D78-DF69-D2416A2375C3}"/>
+                <a16:creationId xmlns:a16="http://schemas.microsoft.com/office/drawing/2014/main" xmlns="" id="{E7FEC406-7A7E-5D78-DF69-D2416A2375C3}"/>
               </a:ext>
             </a:extLst>
           </p:cNvPr>
@@ -10027,7 +10176,7 @@
         <p:cNvPr id="1" name="">
           <a:extLst>
             <a:ext uri="{FF2B5EF4-FFF2-40B4-BE49-F238E27FC236}">
-              <a16:creationId xmlns:a16="http://schemas.microsoft.com/office/drawing/2014/main" id="{749972DB-1A29-C878-AC52-B084A233C66B}"/>
+              <a16:creationId xmlns:a16="http://schemas.microsoft.com/office/drawing/2014/main" xmlns="" id="{749972DB-1A29-C878-AC52-B084A233C66B}"/>
             </a:ext>
           </a:extLst>
         </p:cNvPr>
@@ -10047,7 +10196,7 @@
           <p:cNvPr id="2" name="Título 1">
             <a:extLst>
               <a:ext uri="{FF2B5EF4-FFF2-40B4-BE49-F238E27FC236}">
-                <a16:creationId xmlns:a16="http://schemas.microsoft.com/office/drawing/2014/main" id="{223F31A0-EB34-A3FB-D3AD-8E88098E62F1}"/>
+                <a16:creationId xmlns:a16="http://schemas.microsoft.com/office/drawing/2014/main" xmlns="" id="{223F31A0-EB34-A3FB-D3AD-8E88098E62F1}"/>
               </a:ext>
             </a:extLst>
           </p:cNvPr>
@@ -10087,7 +10236,7 @@
           <p:cNvPr id="3" name="AutoShape 2" descr="An example of graph signal reconstruction over wireless sensor network. |  Download Scientific Diagram">
             <a:extLst>
               <a:ext uri="{FF2B5EF4-FFF2-40B4-BE49-F238E27FC236}">
-                <a16:creationId xmlns:a16="http://schemas.microsoft.com/office/drawing/2014/main" id="{A22086E9-56E3-EC28-E48A-9069376FF074}"/>
+                <a16:creationId xmlns:a16="http://schemas.microsoft.com/office/drawing/2014/main" xmlns="" id="{A22086E9-56E3-EC28-E48A-9069376FF074}"/>
               </a:ext>
             </a:extLst>
           </p:cNvPr>
@@ -10138,7 +10287,7 @@
           <p:cNvPr id="7" name="AutoShape 4" descr="An example of graph signal reconstruction over wireless sensor network. |  Download Scientific Diagram">
             <a:extLst>
               <a:ext uri="{FF2B5EF4-FFF2-40B4-BE49-F238E27FC236}">
-                <a16:creationId xmlns:a16="http://schemas.microsoft.com/office/drawing/2014/main" id="{E1A13779-07EA-5350-121F-C4141832B952}"/>
+                <a16:creationId xmlns:a16="http://schemas.microsoft.com/office/drawing/2014/main" xmlns="" id="{E1A13779-07EA-5350-121F-C4141832B952}"/>
               </a:ext>
             </a:extLst>
           </p:cNvPr>
@@ -10189,7 +10338,7 @@
           <p:cNvPr id="4" name="Espaço Reservado para Conteúdo 3">
             <a:extLst>
               <a:ext uri="{FF2B5EF4-FFF2-40B4-BE49-F238E27FC236}">
-                <a16:creationId xmlns:a16="http://schemas.microsoft.com/office/drawing/2014/main" id="{B461F4C5-B5F4-E3F6-B686-4C94C38803D5}"/>
+                <a16:creationId xmlns:a16="http://schemas.microsoft.com/office/drawing/2014/main" xmlns="" id="{B461F4C5-B5F4-E3F6-B686-4C94C38803D5}"/>
               </a:ext>
             </a:extLst>
           </p:cNvPr>
@@ -10232,7 +10381,7 @@
           <p:cNvPr id="6" name="Picture 5">
             <a:extLst>
               <a:ext uri="{FF2B5EF4-FFF2-40B4-BE49-F238E27FC236}">
-                <a16:creationId xmlns:a16="http://schemas.microsoft.com/office/drawing/2014/main" id="{CD544109-9098-CA3C-766B-DFEB05AE1F38}"/>
+                <a16:creationId xmlns:a16="http://schemas.microsoft.com/office/drawing/2014/main" xmlns="" id="{CD544109-9098-CA3C-766B-DFEB05AE1F38}"/>
               </a:ext>
             </a:extLst>
           </p:cNvPr>
@@ -10262,7 +10411,7 @@
           <p:cNvPr id="9" name="TextBox 9">
             <a:extLst>
               <a:ext uri="{FF2B5EF4-FFF2-40B4-BE49-F238E27FC236}">
-                <a16:creationId xmlns:a16="http://schemas.microsoft.com/office/drawing/2014/main" id="{E7FEC406-7A7E-5D78-DF69-D2416A2375C3}"/>
+                <a16:creationId xmlns:a16="http://schemas.microsoft.com/office/drawing/2014/main" xmlns="" id="{E7FEC406-7A7E-5D78-DF69-D2416A2375C3}"/>
               </a:ext>
             </a:extLst>
           </p:cNvPr>
@@ -10333,7 +10482,7 @@
         <p:cNvPr id="1" name="">
           <a:extLst>
             <a:ext uri="{FF2B5EF4-FFF2-40B4-BE49-F238E27FC236}">
-              <a16:creationId xmlns:a16="http://schemas.microsoft.com/office/drawing/2014/main" id="{69317B56-95CF-5EB4-1950-84D108AD8D37}"/>
+              <a16:creationId xmlns:a16="http://schemas.microsoft.com/office/drawing/2014/main" xmlns="" id="{69317B56-95CF-5EB4-1950-84D108AD8D37}"/>
             </a:ext>
           </a:extLst>
         </p:cNvPr>
@@ -10353,7 +10502,7 @@
           <p:cNvPr id="2" name="Título 1">
             <a:extLst>
               <a:ext uri="{FF2B5EF4-FFF2-40B4-BE49-F238E27FC236}">
-                <a16:creationId xmlns:a16="http://schemas.microsoft.com/office/drawing/2014/main" id="{48642745-4759-3504-B537-1A643C25576D}"/>
+                <a16:creationId xmlns:a16="http://schemas.microsoft.com/office/drawing/2014/main" xmlns="" id="{48642745-4759-3504-B537-1A643C25576D}"/>
               </a:ext>
             </a:extLst>
           </p:cNvPr>
@@ -10393,7 +10542,7 @@
           <p:cNvPr id="3" name="AutoShape 2" descr="An example of graph signal reconstruction over wireless sensor network. |  Download Scientific Diagram">
             <a:extLst>
               <a:ext uri="{FF2B5EF4-FFF2-40B4-BE49-F238E27FC236}">
-                <a16:creationId xmlns:a16="http://schemas.microsoft.com/office/drawing/2014/main" id="{84E44FE8-BA6E-9F6F-1997-0AD869D77EFD}"/>
+                <a16:creationId xmlns:a16="http://schemas.microsoft.com/office/drawing/2014/main" xmlns="" id="{84E44FE8-BA6E-9F6F-1997-0AD869D77EFD}"/>
               </a:ext>
             </a:extLst>
           </p:cNvPr>
@@ -10444,7 +10593,7 @@
           <p:cNvPr id="7" name="AutoShape 4" descr="An example of graph signal reconstruction over wireless sensor network. |  Download Scientific Diagram">
             <a:extLst>
               <a:ext uri="{FF2B5EF4-FFF2-40B4-BE49-F238E27FC236}">
-                <a16:creationId xmlns:a16="http://schemas.microsoft.com/office/drawing/2014/main" id="{21DB31B1-11EA-8016-35EE-14EA7345F531}"/>
+                <a16:creationId xmlns:a16="http://schemas.microsoft.com/office/drawing/2014/main" xmlns="" id="{21DB31B1-11EA-8016-35EE-14EA7345F531}"/>
               </a:ext>
             </a:extLst>
           </p:cNvPr>
@@ -10495,7 +10644,7 @@
           <p:cNvPr id="4" name="Espaço Reservado para Conteúdo 3">
             <a:extLst>
               <a:ext uri="{FF2B5EF4-FFF2-40B4-BE49-F238E27FC236}">
-                <a16:creationId xmlns:a16="http://schemas.microsoft.com/office/drawing/2014/main" id="{63D17EBA-F020-2A71-B133-21937AD74F91}"/>
+                <a16:creationId xmlns:a16="http://schemas.microsoft.com/office/drawing/2014/main" xmlns="" id="{63D17EBA-F020-2A71-B133-21937AD74F91}"/>
               </a:ext>
             </a:extLst>
           </p:cNvPr>
@@ -10538,7 +10687,7 @@
           <p:cNvPr id="6" name="Picture 5">
             <a:extLst>
               <a:ext uri="{FF2B5EF4-FFF2-40B4-BE49-F238E27FC236}">
-                <a16:creationId xmlns:a16="http://schemas.microsoft.com/office/drawing/2014/main" id="{9F08A47C-C93C-D40B-F5DC-3C29F2EEEE60}"/>
+                <a16:creationId xmlns:a16="http://schemas.microsoft.com/office/drawing/2014/main" xmlns="" id="{9F08A47C-C93C-D40B-F5DC-3C29F2EEEE60}"/>
               </a:ext>
             </a:extLst>
           </p:cNvPr>
@@ -10568,7 +10717,7 @@
           <p:cNvPr id="8" name="TextBox 7">
             <a:extLst>
               <a:ext uri="{FF2B5EF4-FFF2-40B4-BE49-F238E27FC236}">
-                <a16:creationId xmlns:a16="http://schemas.microsoft.com/office/drawing/2014/main" id="{4376C1A9-3731-8BF9-861E-3D686FEA4F43}"/>
+                <a16:creationId xmlns:a16="http://schemas.microsoft.com/office/drawing/2014/main" xmlns="" id="{4376C1A9-3731-8BF9-861E-3D686FEA4F43}"/>
               </a:ext>
             </a:extLst>
           </p:cNvPr>
@@ -10737,7 +10886,7 @@
           <p:cNvPr id="2" name="Título 1">
             <a:extLst>
               <a:ext uri="{FF2B5EF4-FFF2-40B4-BE49-F238E27FC236}">
-                <a16:creationId xmlns:a16="http://schemas.microsoft.com/office/drawing/2014/main" id="{5F09B89C-3183-4D52-981A-62798DDFF2B8}"/>
+                <a16:creationId xmlns:a16="http://schemas.microsoft.com/office/drawing/2014/main" xmlns="" id="{5F09B89C-3183-4D52-981A-62798DDFF2B8}"/>
               </a:ext>
             </a:extLst>
           </p:cNvPr>
@@ -10772,7 +10921,7 @@
           <p:cNvPr id="3" name="AutoShape 2" descr="An example of graph signal reconstruction over wireless sensor network. |  Download Scientific Diagram">
             <a:extLst>
               <a:ext uri="{FF2B5EF4-FFF2-40B4-BE49-F238E27FC236}">
-                <a16:creationId xmlns:a16="http://schemas.microsoft.com/office/drawing/2014/main" id="{0166B4DD-D72A-4A54-94A7-2C38133837FD}"/>
+                <a16:creationId xmlns:a16="http://schemas.microsoft.com/office/drawing/2014/main" xmlns="" id="{0166B4DD-D72A-4A54-94A7-2C38133837FD}"/>
               </a:ext>
             </a:extLst>
           </p:cNvPr>
@@ -10823,7 +10972,7 @@
           <p:cNvPr id="7" name="AutoShape 4" descr="An example of graph signal reconstruction over wireless sensor network. |  Download Scientific Diagram">
             <a:extLst>
               <a:ext uri="{FF2B5EF4-FFF2-40B4-BE49-F238E27FC236}">
-                <a16:creationId xmlns:a16="http://schemas.microsoft.com/office/drawing/2014/main" id="{14C2B67D-81A1-457E-A410-FE4350A3CCA4}"/>
+                <a16:creationId xmlns:a16="http://schemas.microsoft.com/office/drawing/2014/main" xmlns="" id="{14C2B67D-81A1-457E-A410-FE4350A3CCA4}"/>
               </a:ext>
             </a:extLst>
           </p:cNvPr>
@@ -10874,7 +11023,7 @@
           <p:cNvPr id="1026" name="Picture 2" descr="Univariate Anomaly Detection | Anomaly Detection Algorithms">
             <a:extLst>
               <a:ext uri="{FF2B5EF4-FFF2-40B4-BE49-F238E27FC236}">
-                <a16:creationId xmlns:a16="http://schemas.microsoft.com/office/drawing/2014/main" id="{D6FF8611-2758-C1DA-8FC6-10C7681C129F}"/>
+                <a16:creationId xmlns:a16="http://schemas.microsoft.com/office/drawing/2014/main" xmlns="" id="{D6FF8611-2758-C1DA-8FC6-10C7681C129F}"/>
               </a:ext>
             </a:extLst>
           </p:cNvPr>
@@ -10921,7 +11070,7 @@
           <p:cNvPr id="4" name="Espaço Reservado para Conteúdo 3">
             <a:extLst>
               <a:ext uri="{FF2B5EF4-FFF2-40B4-BE49-F238E27FC236}">
-                <a16:creationId xmlns:a16="http://schemas.microsoft.com/office/drawing/2014/main" id="{5F1B432F-F570-AEC0-CFFF-C1D9196D7234}"/>
+                <a16:creationId xmlns:a16="http://schemas.microsoft.com/office/drawing/2014/main" xmlns="" id="{5F1B432F-F570-AEC0-CFFF-C1D9196D7234}"/>
               </a:ext>
             </a:extLst>
           </p:cNvPr>
@@ -11038,7 +11187,7 @@
           <p:cNvPr id="2" name="Título 1">
             <a:extLst>
               <a:ext uri="{FF2B5EF4-FFF2-40B4-BE49-F238E27FC236}">
-                <a16:creationId xmlns:a16="http://schemas.microsoft.com/office/drawing/2014/main" id="{5F09B89C-3183-4D52-981A-62798DDFF2B8}"/>
+                <a16:creationId xmlns:a16="http://schemas.microsoft.com/office/drawing/2014/main" xmlns="" id="{5F09B89C-3183-4D52-981A-62798DDFF2B8}"/>
               </a:ext>
             </a:extLst>
           </p:cNvPr>
@@ -11073,7 +11222,7 @@
           <p:cNvPr id="3" name="AutoShape 2" descr="An example of graph signal reconstruction over wireless sensor network. |  Download Scientific Diagram">
             <a:extLst>
               <a:ext uri="{FF2B5EF4-FFF2-40B4-BE49-F238E27FC236}">
-                <a16:creationId xmlns:a16="http://schemas.microsoft.com/office/drawing/2014/main" id="{0166B4DD-D72A-4A54-94A7-2C38133837FD}"/>
+                <a16:creationId xmlns:a16="http://schemas.microsoft.com/office/drawing/2014/main" xmlns="" id="{0166B4DD-D72A-4A54-94A7-2C38133837FD}"/>
               </a:ext>
             </a:extLst>
           </p:cNvPr>
@@ -11124,7 +11273,7 @@
           <p:cNvPr id="7" name="AutoShape 4" descr="An example of graph signal reconstruction over wireless sensor network. |  Download Scientific Diagram">
             <a:extLst>
               <a:ext uri="{FF2B5EF4-FFF2-40B4-BE49-F238E27FC236}">
-                <a16:creationId xmlns:a16="http://schemas.microsoft.com/office/drawing/2014/main" id="{14C2B67D-81A1-457E-A410-FE4350A3CCA4}"/>
+                <a16:creationId xmlns:a16="http://schemas.microsoft.com/office/drawing/2014/main" xmlns="" id="{14C2B67D-81A1-457E-A410-FE4350A3CCA4}"/>
               </a:ext>
             </a:extLst>
           </p:cNvPr>
@@ -11175,7 +11324,7 @@
           <p:cNvPr id="4" name="Espaço Reservado para Conteúdo 3">
             <a:extLst>
               <a:ext uri="{FF2B5EF4-FFF2-40B4-BE49-F238E27FC236}">
-                <a16:creationId xmlns:a16="http://schemas.microsoft.com/office/drawing/2014/main" id="{5F1B432F-F570-AEC0-CFFF-C1D9196D7234}"/>
+                <a16:creationId xmlns:a16="http://schemas.microsoft.com/office/drawing/2014/main" xmlns="" id="{5F1B432F-F570-AEC0-CFFF-C1D9196D7234}"/>
               </a:ext>
             </a:extLst>
           </p:cNvPr>
@@ -11208,7 +11357,7 @@
           <p:cNvPr id="2050" name="Picture 2" descr="Anomaly Detection Real World Scenarios Approaches and Live Implementation -  YouTube">
             <a:extLst>
               <a:ext uri="{FF2B5EF4-FFF2-40B4-BE49-F238E27FC236}">
-                <a16:creationId xmlns:a16="http://schemas.microsoft.com/office/drawing/2014/main" id="{FDE7A801-6226-C67C-506A-7A9F297D280C}"/>
+                <a16:creationId xmlns:a16="http://schemas.microsoft.com/office/drawing/2014/main" xmlns="" id="{FDE7A801-6226-C67C-506A-7A9F297D280C}"/>
               </a:ext>
             </a:extLst>
           </p:cNvPr>
@@ -11285,7 +11434,7 @@
         <p:cNvPr id="1" name="">
           <a:extLst>
             <a:ext uri="{FF2B5EF4-FFF2-40B4-BE49-F238E27FC236}">
-              <a16:creationId xmlns:a16="http://schemas.microsoft.com/office/drawing/2014/main" id="{042E1AD8-1AE2-9D66-D1D0-BECEA32F14E0}"/>
+              <a16:creationId xmlns:a16="http://schemas.microsoft.com/office/drawing/2014/main" xmlns="" id="{042E1AD8-1AE2-9D66-D1D0-BECEA32F14E0}"/>
             </a:ext>
           </a:extLst>
         </p:cNvPr>
@@ -11305,7 +11454,7 @@
           <p:cNvPr id="2" name="Título 1">
             <a:extLst>
               <a:ext uri="{FF2B5EF4-FFF2-40B4-BE49-F238E27FC236}">
-                <a16:creationId xmlns:a16="http://schemas.microsoft.com/office/drawing/2014/main" id="{91362F63-8B67-2CA5-F1E0-70285F8A5D99}"/>
+                <a16:creationId xmlns:a16="http://schemas.microsoft.com/office/drawing/2014/main" xmlns="" id="{91362F63-8B67-2CA5-F1E0-70285F8A5D99}"/>
               </a:ext>
             </a:extLst>
           </p:cNvPr>
@@ -11340,7 +11489,7 @@
           <p:cNvPr id="3" name="AutoShape 2" descr="An example of graph signal reconstruction over wireless sensor network. |  Download Scientific Diagram">
             <a:extLst>
               <a:ext uri="{FF2B5EF4-FFF2-40B4-BE49-F238E27FC236}">
-                <a16:creationId xmlns:a16="http://schemas.microsoft.com/office/drawing/2014/main" id="{22FDC0BB-96C6-D071-6072-8265FA475D3B}"/>
+                <a16:creationId xmlns:a16="http://schemas.microsoft.com/office/drawing/2014/main" xmlns="" id="{22FDC0BB-96C6-D071-6072-8265FA475D3B}"/>
               </a:ext>
             </a:extLst>
           </p:cNvPr>
@@ -11391,7 +11540,7 @@
           <p:cNvPr id="7" name="AutoShape 4" descr="An example of graph signal reconstruction over wireless sensor network. |  Download Scientific Diagram">
             <a:extLst>
               <a:ext uri="{FF2B5EF4-FFF2-40B4-BE49-F238E27FC236}">
-                <a16:creationId xmlns:a16="http://schemas.microsoft.com/office/drawing/2014/main" id="{0D2FBB85-B0FE-5D58-DBE2-4C312CB1B3A1}"/>
+                <a16:creationId xmlns:a16="http://schemas.microsoft.com/office/drawing/2014/main" xmlns="" id="{0D2FBB85-B0FE-5D58-DBE2-4C312CB1B3A1}"/>
               </a:ext>
             </a:extLst>
           </p:cNvPr>
@@ -11442,7 +11591,7 @@
           <p:cNvPr id="4" name="Espaço Reservado para Conteúdo 3">
             <a:extLst>
               <a:ext uri="{FF2B5EF4-FFF2-40B4-BE49-F238E27FC236}">
-                <a16:creationId xmlns:a16="http://schemas.microsoft.com/office/drawing/2014/main" id="{F19EED01-E2A7-FCA9-AE40-ABE3206A5DB3}"/>
+                <a16:creationId xmlns:a16="http://schemas.microsoft.com/office/drawing/2014/main" xmlns="" id="{F19EED01-E2A7-FCA9-AE40-ABE3206A5DB3}"/>
               </a:ext>
             </a:extLst>
           </p:cNvPr>
@@ -11526,7 +11675,7 @@
           <p:cNvPr id="6" name="Picture 5">
             <a:extLst>
               <a:ext uri="{FF2B5EF4-FFF2-40B4-BE49-F238E27FC236}">
-                <a16:creationId xmlns:a16="http://schemas.microsoft.com/office/drawing/2014/main" id="{874D15ED-AE97-5474-7E5D-B644432B2D4C}"/>
+                <a16:creationId xmlns:a16="http://schemas.microsoft.com/office/drawing/2014/main" xmlns="" id="{874D15ED-AE97-5474-7E5D-B644432B2D4C}"/>
               </a:ext>
             </a:extLst>
           </p:cNvPr>
@@ -11556,7 +11705,7 @@
           <p:cNvPr id="9" name="Picture 8">
             <a:extLst>
               <a:ext uri="{FF2B5EF4-FFF2-40B4-BE49-F238E27FC236}">
-                <a16:creationId xmlns:a16="http://schemas.microsoft.com/office/drawing/2014/main" id="{14197941-A588-8F4A-49EA-1C5B6528F761}"/>
+                <a16:creationId xmlns:a16="http://schemas.microsoft.com/office/drawing/2014/main" xmlns="" id="{14197941-A588-8F4A-49EA-1C5B6528F761}"/>
               </a:ext>
             </a:extLst>
           </p:cNvPr>
@@ -11586,7 +11735,7 @@
           <p:cNvPr id="10" name="Arrow: Right 9">
             <a:extLst>
               <a:ext uri="{FF2B5EF4-FFF2-40B4-BE49-F238E27FC236}">
-                <a16:creationId xmlns:a16="http://schemas.microsoft.com/office/drawing/2014/main" id="{02EF8AE6-9567-78CC-094E-7578F2C11532}"/>
+                <a16:creationId xmlns:a16="http://schemas.microsoft.com/office/drawing/2014/main" xmlns="" id="{02EF8AE6-9567-78CC-094E-7578F2C11532}"/>
               </a:ext>
             </a:extLst>
           </p:cNvPr>
@@ -11676,7 +11825,7 @@
           <p:cNvPr id="2" name="Título 1">
             <a:extLst>
               <a:ext uri="{FF2B5EF4-FFF2-40B4-BE49-F238E27FC236}">
-                <a16:creationId xmlns:a16="http://schemas.microsoft.com/office/drawing/2014/main" id="{5F09B89C-3183-4D52-981A-62798DDFF2B8}"/>
+                <a16:creationId xmlns:a16="http://schemas.microsoft.com/office/drawing/2014/main" xmlns="" id="{5F09B89C-3183-4D52-981A-62798DDFF2B8}"/>
               </a:ext>
             </a:extLst>
           </p:cNvPr>
@@ -11716,7 +11865,7 @@
           <p:cNvPr id="3" name="AutoShape 2" descr="An example of graph signal reconstruction over wireless sensor network. |  Download Scientific Diagram">
             <a:extLst>
               <a:ext uri="{FF2B5EF4-FFF2-40B4-BE49-F238E27FC236}">
-                <a16:creationId xmlns:a16="http://schemas.microsoft.com/office/drawing/2014/main" id="{0166B4DD-D72A-4A54-94A7-2C38133837FD}"/>
+                <a16:creationId xmlns:a16="http://schemas.microsoft.com/office/drawing/2014/main" xmlns="" id="{0166B4DD-D72A-4A54-94A7-2C38133837FD}"/>
               </a:ext>
             </a:extLst>
           </p:cNvPr>
@@ -11767,7 +11916,7 @@
           <p:cNvPr id="7" name="AutoShape 4" descr="An example of graph signal reconstruction over wireless sensor network. |  Download Scientific Diagram">
             <a:extLst>
               <a:ext uri="{FF2B5EF4-FFF2-40B4-BE49-F238E27FC236}">
-                <a16:creationId xmlns:a16="http://schemas.microsoft.com/office/drawing/2014/main" id="{14C2B67D-81A1-457E-A410-FE4350A3CCA4}"/>
+                <a16:creationId xmlns:a16="http://schemas.microsoft.com/office/drawing/2014/main" xmlns="" id="{14C2B67D-81A1-457E-A410-FE4350A3CCA4}"/>
               </a:ext>
             </a:extLst>
           </p:cNvPr>
@@ -11818,7 +11967,7 @@
           <p:cNvPr id="4" name="Espaço Reservado para Conteúdo 3">
             <a:extLst>
               <a:ext uri="{FF2B5EF4-FFF2-40B4-BE49-F238E27FC236}">
-                <a16:creationId xmlns:a16="http://schemas.microsoft.com/office/drawing/2014/main" id="{5F1B432F-F570-AEC0-CFFF-C1D9196D7234}"/>
+                <a16:creationId xmlns:a16="http://schemas.microsoft.com/office/drawing/2014/main" xmlns="" id="{5F1B432F-F570-AEC0-CFFF-C1D9196D7234}"/>
               </a:ext>
             </a:extLst>
           </p:cNvPr>
@@ -11859,7 +12008,7 @@
           <p:cNvPr id="6" name="CaixaDeTexto 5">
             <a:extLst>
               <a:ext uri="{FF2B5EF4-FFF2-40B4-BE49-F238E27FC236}">
-                <a16:creationId xmlns:a16="http://schemas.microsoft.com/office/drawing/2014/main" id="{470482DB-F365-0A83-E102-37A8EB7EACEF}"/>
+                <a16:creationId xmlns:a16="http://schemas.microsoft.com/office/drawing/2014/main" xmlns="" id="{470482DB-F365-0A83-E102-37A8EB7EACEF}"/>
               </a:ext>
             </a:extLst>
           </p:cNvPr>
@@ -11946,7 +12095,7 @@
           <p:cNvPr id="6146" name="Picture 2" descr="Centro de Distribuição: uma solução mais que viável – Novidá">
             <a:extLst>
               <a:ext uri="{FF2B5EF4-FFF2-40B4-BE49-F238E27FC236}">
-                <a16:creationId xmlns:a16="http://schemas.microsoft.com/office/drawing/2014/main" id="{4EEAF6B8-1AE8-82F9-6BD7-E45E945A8CB5}"/>
+                <a16:creationId xmlns:a16="http://schemas.microsoft.com/office/drawing/2014/main" xmlns="" id="{4EEAF6B8-1AE8-82F9-6BD7-E45E945A8CB5}"/>
               </a:ext>
             </a:extLst>
           </p:cNvPr>
@@ -11993,7 +12142,7 @@
           <p:cNvPr id="8" name="Picture 2" descr="Mapa do Brasil">
             <a:extLst>
               <a:ext uri="{FF2B5EF4-FFF2-40B4-BE49-F238E27FC236}">
-                <a16:creationId xmlns:a16="http://schemas.microsoft.com/office/drawing/2014/main" id="{BBEA9087-A8E1-78C5-981B-C50D7CF4635F}"/>
+                <a16:creationId xmlns:a16="http://schemas.microsoft.com/office/drawing/2014/main" xmlns="" id="{BBEA9087-A8E1-78C5-981B-C50D7CF4635F}"/>
               </a:ext>
             </a:extLst>
           </p:cNvPr>
@@ -12124,7 +12273,7 @@
           <p:cNvPr id="2" name="Título 1">
             <a:extLst>
               <a:ext uri="{FF2B5EF4-FFF2-40B4-BE49-F238E27FC236}">
-                <a16:creationId xmlns:a16="http://schemas.microsoft.com/office/drawing/2014/main" id="{5F09B89C-3183-4D52-981A-62798DDFF2B8}"/>
+                <a16:creationId xmlns:a16="http://schemas.microsoft.com/office/drawing/2014/main" xmlns="" id="{5F09B89C-3183-4D52-981A-62798DDFF2B8}"/>
               </a:ext>
             </a:extLst>
           </p:cNvPr>
@@ -12164,7 +12313,7 @@
           <p:cNvPr id="3" name="AutoShape 2" descr="An example of graph signal reconstruction over wireless sensor network. |  Download Scientific Diagram">
             <a:extLst>
               <a:ext uri="{FF2B5EF4-FFF2-40B4-BE49-F238E27FC236}">
-                <a16:creationId xmlns:a16="http://schemas.microsoft.com/office/drawing/2014/main" id="{0166B4DD-D72A-4A54-94A7-2C38133837FD}"/>
+                <a16:creationId xmlns:a16="http://schemas.microsoft.com/office/drawing/2014/main" xmlns="" id="{0166B4DD-D72A-4A54-94A7-2C38133837FD}"/>
               </a:ext>
             </a:extLst>
           </p:cNvPr>
@@ -12215,7 +12364,7 @@
           <p:cNvPr id="7" name="AutoShape 4" descr="An example of graph signal reconstruction over wireless sensor network. |  Download Scientific Diagram">
             <a:extLst>
               <a:ext uri="{FF2B5EF4-FFF2-40B4-BE49-F238E27FC236}">
-                <a16:creationId xmlns:a16="http://schemas.microsoft.com/office/drawing/2014/main" id="{14C2B67D-81A1-457E-A410-FE4350A3CCA4}"/>
+                <a16:creationId xmlns:a16="http://schemas.microsoft.com/office/drawing/2014/main" xmlns="" id="{14C2B67D-81A1-457E-A410-FE4350A3CCA4}"/>
               </a:ext>
             </a:extLst>
           </p:cNvPr>
@@ -12266,7 +12415,7 @@
           <p:cNvPr id="4" name="Espaço Reservado para Conteúdo 3">
             <a:extLst>
               <a:ext uri="{FF2B5EF4-FFF2-40B4-BE49-F238E27FC236}">
-                <a16:creationId xmlns:a16="http://schemas.microsoft.com/office/drawing/2014/main" id="{5F1B432F-F570-AEC0-CFFF-C1D9196D7234}"/>
+                <a16:creationId xmlns:a16="http://schemas.microsoft.com/office/drawing/2014/main" xmlns="" id="{5F1B432F-F570-AEC0-CFFF-C1D9196D7234}"/>
               </a:ext>
             </a:extLst>
           </p:cNvPr>
@@ -12307,7 +12456,7 @@
           <p:cNvPr id="6" name="CaixaDeTexto 5">
             <a:extLst>
               <a:ext uri="{FF2B5EF4-FFF2-40B4-BE49-F238E27FC236}">
-                <a16:creationId xmlns:a16="http://schemas.microsoft.com/office/drawing/2014/main" id="{470482DB-F365-0A83-E102-37A8EB7EACEF}"/>
+                <a16:creationId xmlns:a16="http://schemas.microsoft.com/office/drawing/2014/main" xmlns="" id="{470482DB-F365-0A83-E102-37A8EB7EACEF}"/>
               </a:ext>
             </a:extLst>
           </p:cNvPr>
@@ -12387,7 +12536,7 @@
           <p:cNvPr id="2050" name="Picture 2" descr="Base Teórica do K-Means! Aprenda a Lógica desse Algoritmo Hoje!">
             <a:extLst>
               <a:ext uri="{FF2B5EF4-FFF2-40B4-BE49-F238E27FC236}">
-                <a16:creationId xmlns:a16="http://schemas.microsoft.com/office/drawing/2014/main" id="{0694ADFD-EB2E-2BF0-18BE-B07E4CD60A5F}"/>
+                <a16:creationId xmlns:a16="http://schemas.microsoft.com/office/drawing/2014/main" xmlns="" id="{0694ADFD-EB2E-2BF0-18BE-B07E4CD60A5F}"/>
               </a:ext>
             </a:extLst>
           </p:cNvPr>
@@ -12434,7 +12583,7 @@
           <p:cNvPr id="8" name="Imagem 7">
             <a:extLst>
               <a:ext uri="{FF2B5EF4-FFF2-40B4-BE49-F238E27FC236}">
-                <a16:creationId xmlns:a16="http://schemas.microsoft.com/office/drawing/2014/main" id="{EEF69E85-6440-34FE-5C8A-A5F37765D292}"/>
+                <a16:creationId xmlns:a16="http://schemas.microsoft.com/office/drawing/2014/main" xmlns="" id="{EEF69E85-6440-34FE-5C8A-A5F37765D292}"/>
               </a:ext>
             </a:extLst>
           </p:cNvPr>
@@ -12508,7 +12657,7 @@
           <p:cNvPr id="2" name="Título 1">
             <a:extLst>
               <a:ext uri="{FF2B5EF4-FFF2-40B4-BE49-F238E27FC236}">
-                <a16:creationId xmlns:a16="http://schemas.microsoft.com/office/drawing/2014/main" id="{5F09B89C-3183-4D52-981A-62798DDFF2B8}"/>
+                <a16:creationId xmlns:a16="http://schemas.microsoft.com/office/drawing/2014/main" xmlns="" id="{5F09B89C-3183-4D52-981A-62798DDFF2B8}"/>
               </a:ext>
             </a:extLst>
           </p:cNvPr>
@@ -12543,7 +12692,7 @@
           <p:cNvPr id="3" name="AutoShape 2" descr="An example of graph signal reconstruction over wireless sensor network. |  Download Scientific Diagram">
             <a:extLst>
               <a:ext uri="{FF2B5EF4-FFF2-40B4-BE49-F238E27FC236}">
-                <a16:creationId xmlns:a16="http://schemas.microsoft.com/office/drawing/2014/main" id="{0166B4DD-D72A-4A54-94A7-2C38133837FD}"/>
+                <a16:creationId xmlns:a16="http://schemas.microsoft.com/office/drawing/2014/main" xmlns="" id="{0166B4DD-D72A-4A54-94A7-2C38133837FD}"/>
               </a:ext>
             </a:extLst>
           </p:cNvPr>
@@ -12618,7 +12767,7 @@
           <p:cNvPr id="7" name="AutoShape 4" descr="An example of graph signal reconstruction over wireless sensor network. |  Download Scientific Diagram">
             <a:extLst>
               <a:ext uri="{FF2B5EF4-FFF2-40B4-BE49-F238E27FC236}">
-                <a16:creationId xmlns:a16="http://schemas.microsoft.com/office/drawing/2014/main" id="{14C2B67D-81A1-457E-A410-FE4350A3CCA4}"/>
+                <a16:creationId xmlns:a16="http://schemas.microsoft.com/office/drawing/2014/main" xmlns="" id="{14C2B67D-81A1-457E-A410-FE4350A3CCA4}"/>
               </a:ext>
             </a:extLst>
           </p:cNvPr>
@@ -12693,7 +12842,7 @@
           <p:cNvPr id="4" name="Espaço Reservado para Conteúdo 3">
             <a:extLst>
               <a:ext uri="{FF2B5EF4-FFF2-40B4-BE49-F238E27FC236}">
-                <a16:creationId xmlns:a16="http://schemas.microsoft.com/office/drawing/2014/main" id="{0349BA64-C9D7-4730-9CA9-5C4AD9FC7969}"/>
+                <a16:creationId xmlns:a16="http://schemas.microsoft.com/office/drawing/2014/main" xmlns="" id="{0349BA64-C9D7-4730-9CA9-5C4AD9FC7969}"/>
               </a:ext>
             </a:extLst>
           </p:cNvPr>
@@ -12740,7 +12889,7 @@
           <p:cNvPr id="1026" name="Picture 2" descr="Free photo industrial containers box for logistic import export business.">
             <a:extLst>
               <a:ext uri="{FF2B5EF4-FFF2-40B4-BE49-F238E27FC236}">
-                <a16:creationId xmlns:a16="http://schemas.microsoft.com/office/drawing/2014/main" id="{FDC07977-F662-66CB-7534-103E83976919}"/>
+                <a16:creationId xmlns:a16="http://schemas.microsoft.com/office/drawing/2014/main" xmlns="" id="{FDC07977-F662-66CB-7534-103E83976919}"/>
               </a:ext>
             </a:extLst>
           </p:cNvPr>
@@ -12831,7 +12980,7 @@
           <p:cNvPr id="2" name="Título 1">
             <a:extLst>
               <a:ext uri="{FF2B5EF4-FFF2-40B4-BE49-F238E27FC236}">
-                <a16:creationId xmlns:a16="http://schemas.microsoft.com/office/drawing/2014/main" id="{5F09B89C-3183-4D52-981A-62798DDFF2B8}"/>
+                <a16:creationId xmlns:a16="http://schemas.microsoft.com/office/drawing/2014/main" xmlns="" id="{5F09B89C-3183-4D52-981A-62798DDFF2B8}"/>
               </a:ext>
             </a:extLst>
           </p:cNvPr>
@@ -12866,7 +13015,7 @@
           <p:cNvPr id="3" name="AutoShape 2" descr="An example of graph signal reconstruction over wireless sensor network. |  Download Scientific Diagram">
             <a:extLst>
               <a:ext uri="{FF2B5EF4-FFF2-40B4-BE49-F238E27FC236}">
-                <a16:creationId xmlns:a16="http://schemas.microsoft.com/office/drawing/2014/main" id="{0166B4DD-D72A-4A54-94A7-2C38133837FD}"/>
+                <a16:creationId xmlns:a16="http://schemas.microsoft.com/office/drawing/2014/main" xmlns="" id="{0166B4DD-D72A-4A54-94A7-2C38133837FD}"/>
               </a:ext>
             </a:extLst>
           </p:cNvPr>
@@ -12917,7 +13066,7 @@
           <p:cNvPr id="7" name="AutoShape 4" descr="An example of graph signal reconstruction over wireless sensor network. |  Download Scientific Diagram">
             <a:extLst>
               <a:ext uri="{FF2B5EF4-FFF2-40B4-BE49-F238E27FC236}">
-                <a16:creationId xmlns:a16="http://schemas.microsoft.com/office/drawing/2014/main" id="{14C2B67D-81A1-457E-A410-FE4350A3CCA4}"/>
+                <a16:creationId xmlns:a16="http://schemas.microsoft.com/office/drawing/2014/main" xmlns="" id="{14C2B67D-81A1-457E-A410-FE4350A3CCA4}"/>
               </a:ext>
             </a:extLst>
           </p:cNvPr>
@@ -12968,7 +13117,7 @@
           <p:cNvPr id="4" name="Espaço Reservado para Conteúdo 3">
             <a:extLst>
               <a:ext uri="{FF2B5EF4-FFF2-40B4-BE49-F238E27FC236}">
-                <a16:creationId xmlns:a16="http://schemas.microsoft.com/office/drawing/2014/main" id="{5F1B432F-F570-AEC0-CFFF-C1D9196D7234}"/>
+                <a16:creationId xmlns:a16="http://schemas.microsoft.com/office/drawing/2014/main" xmlns="" id="{5F1B432F-F570-AEC0-CFFF-C1D9196D7234}"/>
               </a:ext>
             </a:extLst>
           </p:cNvPr>
@@ -13091,7 +13240,7 @@
           <p:cNvPr id="2" name="Título 1">
             <a:extLst>
               <a:ext uri="{FF2B5EF4-FFF2-40B4-BE49-F238E27FC236}">
-                <a16:creationId xmlns:a16="http://schemas.microsoft.com/office/drawing/2014/main" id="{5F09B89C-3183-4D52-981A-62798DDFF2B8}"/>
+                <a16:creationId xmlns:a16="http://schemas.microsoft.com/office/drawing/2014/main" xmlns="" id="{5F09B89C-3183-4D52-981A-62798DDFF2B8}"/>
               </a:ext>
             </a:extLst>
           </p:cNvPr>
@@ -13126,7 +13275,7 @@
           <p:cNvPr id="3" name="AutoShape 2" descr="An example of graph signal reconstruction over wireless sensor network. |  Download Scientific Diagram">
             <a:extLst>
               <a:ext uri="{FF2B5EF4-FFF2-40B4-BE49-F238E27FC236}">
-                <a16:creationId xmlns:a16="http://schemas.microsoft.com/office/drawing/2014/main" id="{0166B4DD-D72A-4A54-94A7-2C38133837FD}"/>
+                <a16:creationId xmlns:a16="http://schemas.microsoft.com/office/drawing/2014/main" xmlns="" id="{0166B4DD-D72A-4A54-94A7-2C38133837FD}"/>
               </a:ext>
             </a:extLst>
           </p:cNvPr>
@@ -13201,7 +13350,7 @@
           <p:cNvPr id="7" name="AutoShape 4" descr="An example of graph signal reconstruction over wireless sensor network. |  Download Scientific Diagram">
             <a:extLst>
               <a:ext uri="{FF2B5EF4-FFF2-40B4-BE49-F238E27FC236}">
-                <a16:creationId xmlns:a16="http://schemas.microsoft.com/office/drawing/2014/main" id="{14C2B67D-81A1-457E-A410-FE4350A3CCA4}"/>
+                <a16:creationId xmlns:a16="http://schemas.microsoft.com/office/drawing/2014/main" xmlns="" id="{14C2B67D-81A1-457E-A410-FE4350A3CCA4}"/>
               </a:ext>
             </a:extLst>
           </p:cNvPr>
@@ -13276,7 +13425,7 @@
           <p:cNvPr id="4" name="Espaço Reservado para Conteúdo 3">
             <a:extLst>
               <a:ext uri="{FF2B5EF4-FFF2-40B4-BE49-F238E27FC236}">
-                <a16:creationId xmlns:a16="http://schemas.microsoft.com/office/drawing/2014/main" id="{0349BA64-C9D7-4730-9CA9-5C4AD9FC7969}"/>
+                <a16:creationId xmlns:a16="http://schemas.microsoft.com/office/drawing/2014/main" xmlns="" id="{0349BA64-C9D7-4730-9CA9-5C4AD9FC7969}"/>
               </a:ext>
             </a:extLst>
           </p:cNvPr>
@@ -13510,7 +13659,7 @@
           <p:cNvPr id="2" name="Título 1">
             <a:extLst>
               <a:ext uri="{FF2B5EF4-FFF2-40B4-BE49-F238E27FC236}">
-                <a16:creationId xmlns:a16="http://schemas.microsoft.com/office/drawing/2014/main" id="{5F09B89C-3183-4D52-981A-62798DDFF2B8}"/>
+                <a16:creationId xmlns:a16="http://schemas.microsoft.com/office/drawing/2014/main" xmlns="" id="{5F09B89C-3183-4D52-981A-62798DDFF2B8}"/>
               </a:ext>
             </a:extLst>
           </p:cNvPr>
@@ -13545,7 +13694,7 @@
           <p:cNvPr id="3" name="AutoShape 2" descr="An example of graph signal reconstruction over wireless sensor network. |  Download Scientific Diagram">
             <a:extLst>
               <a:ext uri="{FF2B5EF4-FFF2-40B4-BE49-F238E27FC236}">
-                <a16:creationId xmlns:a16="http://schemas.microsoft.com/office/drawing/2014/main" id="{0166B4DD-D72A-4A54-94A7-2C38133837FD}"/>
+                <a16:creationId xmlns:a16="http://schemas.microsoft.com/office/drawing/2014/main" xmlns="" id="{0166B4DD-D72A-4A54-94A7-2C38133837FD}"/>
               </a:ext>
             </a:extLst>
           </p:cNvPr>
@@ -13620,7 +13769,7 @@
           <p:cNvPr id="7" name="AutoShape 4" descr="An example of graph signal reconstruction over wireless sensor network. |  Download Scientific Diagram">
             <a:extLst>
               <a:ext uri="{FF2B5EF4-FFF2-40B4-BE49-F238E27FC236}">
-                <a16:creationId xmlns:a16="http://schemas.microsoft.com/office/drawing/2014/main" id="{14C2B67D-81A1-457E-A410-FE4350A3CCA4}"/>
+                <a16:creationId xmlns:a16="http://schemas.microsoft.com/office/drawing/2014/main" xmlns="" id="{14C2B67D-81A1-457E-A410-FE4350A3CCA4}"/>
               </a:ext>
             </a:extLst>
           </p:cNvPr>
@@ -13695,7 +13844,7 @@
           <p:cNvPr id="4" name="Espaço Reservado para Conteúdo 3">
             <a:extLst>
               <a:ext uri="{FF2B5EF4-FFF2-40B4-BE49-F238E27FC236}">
-                <a16:creationId xmlns:a16="http://schemas.microsoft.com/office/drawing/2014/main" id="{0349BA64-C9D7-4730-9CA9-5C4AD9FC7969}"/>
+                <a16:creationId xmlns:a16="http://schemas.microsoft.com/office/drawing/2014/main" xmlns="" id="{0349BA64-C9D7-4730-9CA9-5C4AD9FC7969}"/>
               </a:ext>
             </a:extLst>
           </p:cNvPr>
@@ -13709,7 +13858,7 @@
         <p:spPr>
           <a:xfrm>
             <a:off x="304800" y="1066800"/>
-            <a:ext cx="9295589" cy="4330419"/>
+            <a:ext cx="10084676" cy="4330419"/>
           </a:xfrm>
         </p:spPr>
         <p:txBody>
@@ -13750,11 +13899,70 @@
                 <a:ea typeface="Calibri" panose="020F0502020204030204" pitchFamily="34" charset="0"/>
                 <a:cs typeface="Arial" panose="020B0604020202020204" pitchFamily="34" charset="0"/>
               </a:rPr>
-              <a:t>Incluir e analisar no Edge Impulse possíveis anomalias nos dados da movimentação da cadeira de rodas pela cabeça.</a:t>
-            </a:r>
-          </a:p>
-        </p:txBody>
-      </p:sp>
+              <a:t>Incluir </a:t>
+            </a:r>
+            <a:r>
+              <a:rPr lang="pt-BR" sz="2000" dirty="0" smtClean="0">
+                <a:ea typeface="Calibri" panose="020F0502020204030204" pitchFamily="34" charset="0"/>
+                <a:cs typeface="Arial" panose="020B0604020202020204" pitchFamily="34" charset="0"/>
+              </a:rPr>
+              <a:t>no </a:t>
+            </a:r>
+            <a:r>
+              <a:rPr lang="pt-BR" sz="2000" dirty="0">
+                <a:ea typeface="Calibri" panose="020F0502020204030204" pitchFamily="34" charset="0"/>
+                <a:cs typeface="Arial" panose="020B0604020202020204" pitchFamily="34" charset="0"/>
+              </a:rPr>
+              <a:t>Edge Impulse possíveis anomalias nos dados </a:t>
+            </a:r>
+            <a:r>
+              <a:rPr lang="pt-BR" sz="2000" dirty="0">
+                <a:ea typeface="Calibri" panose="020F0502020204030204" pitchFamily="34" charset="0"/>
+                <a:cs typeface="Arial" panose="020B0604020202020204" pitchFamily="34" charset="0"/>
+              </a:rPr>
+              <a:t>do ciclo </a:t>
+            </a:r>
+            <a:r>
+              <a:rPr lang="pt-BR" sz="2000" dirty="0" smtClean="0">
+                <a:ea typeface="Calibri" panose="020F0502020204030204" pitchFamily="34" charset="0"/>
+                <a:cs typeface="Arial" panose="020B0604020202020204" pitchFamily="34" charset="0"/>
+              </a:rPr>
+              <a:t>logístico, e.g., quedas</a:t>
+            </a:r>
+            <a:r>
+              <a:rPr lang="pt-BR" sz="2000" dirty="0" smtClean="0">
+                <a:ea typeface="Calibri" panose="020F0502020204030204" pitchFamily="34" charset="0"/>
+                <a:cs typeface="Arial" panose="020B0604020202020204" pitchFamily="34" charset="0"/>
+              </a:rPr>
+              <a:t>.</a:t>
+            </a:r>
+          </a:p>
+        </p:txBody>
+      </p:sp>
+      <p:pic>
+        <p:nvPicPr>
+          <p:cNvPr id="6" name="Imagem 5"/>
+          <p:cNvPicPr>
+            <a:picLocks noChangeAspect="1"/>
+          </p:cNvPicPr>
+          <p:nvPr/>
+        </p:nvPicPr>
+        <p:blipFill>
+          <a:blip r:embed="rId4"/>
+          <a:stretch>
+            <a:fillRect/>
+          </a:stretch>
+        </p:blipFill>
+        <p:spPr>
+          <a:xfrm>
+            <a:off x="3379705" y="2128881"/>
+            <a:ext cx="5229390" cy="4230034"/>
+          </a:xfrm>
+          <a:prstGeom prst="rect">
+            <a:avLst/>
+          </a:prstGeom>
+        </p:spPr>
+      </p:pic>
     </p:spTree>
     <p:extLst>
       <p:ext uri="{BB962C8B-B14F-4D97-AF65-F5344CB8AC3E}">
@@ -13801,10 +14009,45 @@
       </p:grpSpPr>
       <p:sp>
         <p:nvSpPr>
+          <p:cNvPr id="2" name="Título 1">
+            <a:extLst>
+              <a:ext uri="{FF2B5EF4-FFF2-40B4-BE49-F238E27FC236}">
+                <a16:creationId xmlns:a16="http://schemas.microsoft.com/office/drawing/2014/main" xmlns="" id="{5F09B89C-3183-4D52-981A-62798DDFF2B8}"/>
+              </a:ext>
+            </a:extLst>
+          </p:cNvPr>
+          <p:cNvSpPr>
+            <a:spLocks noGrp="1"/>
+          </p:cNvSpPr>
+          <p:nvPr>
+            <p:ph type="title"/>
+          </p:nvPr>
+        </p:nvSpPr>
+        <p:spPr>
+          <a:xfrm>
+            <a:off x="304800" y="183092"/>
+            <a:ext cx="6559285" cy="762000"/>
+          </a:xfrm>
+        </p:spPr>
+        <p:txBody>
+          <a:bodyPr>
+            <a:normAutofit/>
+          </a:bodyPr>
+          <a:lstStyle/>
+          <a:p>
+            <a:r>
+              <a:rPr lang="pt-BR" dirty="0"/>
+              <a:t>Detecção de anomalias</a:t>
+            </a:r>
+          </a:p>
+        </p:txBody>
+      </p:sp>
+      <p:sp>
+        <p:nvSpPr>
           <p:cNvPr id="3" name="AutoShape 2" descr="An example of graph signal reconstruction over wireless sensor network. |  Download Scientific Diagram">
             <a:extLst>
               <a:ext uri="{FF2B5EF4-FFF2-40B4-BE49-F238E27FC236}">
-                <a16:creationId xmlns:a16="http://schemas.microsoft.com/office/drawing/2014/main" id="{0166B4DD-D72A-4A54-94A7-2C38133837FD}"/>
+                <a16:creationId xmlns:a16="http://schemas.microsoft.com/office/drawing/2014/main" xmlns="" id="{0166B4DD-D72A-4A54-94A7-2C38133837FD}"/>
               </a:ext>
             </a:extLst>
           </p:cNvPr>
@@ -13879,7 +14122,7 @@
           <p:cNvPr id="7" name="AutoShape 4" descr="An example of graph signal reconstruction over wireless sensor network. |  Download Scientific Diagram">
             <a:extLst>
               <a:ext uri="{FF2B5EF4-FFF2-40B4-BE49-F238E27FC236}">
-                <a16:creationId xmlns:a16="http://schemas.microsoft.com/office/drawing/2014/main" id="{14C2B67D-81A1-457E-A410-FE4350A3CCA4}"/>
+                <a16:creationId xmlns:a16="http://schemas.microsoft.com/office/drawing/2014/main" xmlns="" id="{14C2B67D-81A1-457E-A410-FE4350A3CCA4}"/>
               </a:ext>
             </a:extLst>
           </p:cNvPr>
@@ -13954,7 +14197,332 @@
           <p:cNvPr id="4" name="Espaço Reservado para Conteúdo 3">
             <a:extLst>
               <a:ext uri="{FF2B5EF4-FFF2-40B4-BE49-F238E27FC236}">
-                <a16:creationId xmlns:a16="http://schemas.microsoft.com/office/drawing/2014/main" id="{0349BA64-C9D7-4730-9CA9-5C4AD9FC7969}"/>
+                <a16:creationId xmlns:a16="http://schemas.microsoft.com/office/drawing/2014/main" xmlns="" id="{0349BA64-C9D7-4730-9CA9-5C4AD9FC7969}"/>
+              </a:ext>
+            </a:extLst>
+          </p:cNvPr>
+          <p:cNvSpPr>
+            <a:spLocks noGrp="1"/>
+          </p:cNvSpPr>
+          <p:nvPr>
+            <p:ph idx="1"/>
+          </p:nvPr>
+        </p:nvSpPr>
+        <p:spPr>
+          <a:xfrm>
+            <a:off x="304800" y="1066800"/>
+            <a:ext cx="9295589" cy="4330419"/>
+          </a:xfrm>
+        </p:spPr>
+        <p:txBody>
+          <a:bodyPr>
+            <a:noAutofit/>
+          </a:bodyPr>
+          <a:lstStyle/>
+          <a:p>
+            <a:pPr marL="152408" indent="0" algn="just">
+              <a:lnSpc>
+                <a:spcPct val="107000"/>
+              </a:lnSpc>
+              <a:spcAft>
+                <a:spcPts val="533"/>
+              </a:spcAft>
+              <a:buNone/>
+            </a:pPr>
+            <a:r>
+              <a:rPr lang="pt-BR" sz="2000" dirty="0">
+                <a:ea typeface="Calibri" panose="020F0502020204030204" pitchFamily="34" charset="0"/>
+                <a:cs typeface="Arial" panose="020B0604020202020204" pitchFamily="34" charset="0"/>
+              </a:rPr>
+              <a:t>Trabalho:</a:t>
+            </a:r>
+          </a:p>
+          <a:p>
+            <a:pPr marL="152408" indent="0" algn="just">
+              <a:lnSpc>
+                <a:spcPct val="107000"/>
+              </a:lnSpc>
+              <a:spcAft>
+                <a:spcPts val="533"/>
+              </a:spcAft>
+              <a:buNone/>
+            </a:pPr>
+            <a:r>
+              <a:rPr lang="pt-BR" sz="2000" dirty="0" smtClean="0">
+                <a:ea typeface="Calibri" panose="020F0502020204030204" pitchFamily="34" charset="0"/>
+                <a:cs typeface="Arial" panose="020B0604020202020204" pitchFamily="34" charset="0"/>
+              </a:rPr>
+              <a:t>Se baseie no seguinte tutorial</a:t>
+            </a:r>
+            <a:r>
+              <a:rPr lang="pt-BR" sz="2000" dirty="0">
+                <a:ea typeface="Calibri" panose="020F0502020204030204" pitchFamily="34" charset="0"/>
+                <a:cs typeface="Arial" panose="020B0604020202020204" pitchFamily="34" charset="0"/>
+              </a:rPr>
+              <a:t>: </a:t>
+            </a:r>
+            <a:r>
+              <a:rPr lang="pt-BR" sz="2000" dirty="0">
+                <a:ea typeface="Calibri" panose="020F0502020204030204" pitchFamily="34" charset="0"/>
+                <a:cs typeface="Arial" panose="020B0604020202020204" pitchFamily="34" charset="0"/>
+                <a:hlinkClick r:id="rId4"/>
+              </a:rPr>
+              <a:t>https://</a:t>
+            </a:r>
+            <a:r>
+              <a:rPr lang="pt-BR" sz="2000" dirty="0" smtClean="0">
+                <a:ea typeface="Calibri" panose="020F0502020204030204" pitchFamily="34" charset="0"/>
+                <a:cs typeface="Arial" panose="020B0604020202020204" pitchFamily="34" charset="0"/>
+                <a:hlinkClick r:id="rId4"/>
+              </a:rPr>
+              <a:t>docs.edgeimpulse.com/docs/tutorials/end-to-end-tutorials/time-series/continuous-motion-recognition</a:t>
+            </a:r>
+            <a:endParaRPr lang="pt-BR" sz="2000" dirty="0" smtClean="0">
+              <a:ea typeface="Calibri" panose="020F0502020204030204" pitchFamily="34" charset="0"/>
+              <a:cs typeface="Arial" panose="020B0604020202020204" pitchFamily="34" charset="0"/>
+            </a:endParaRPr>
+          </a:p>
+          <a:p>
+            <a:pPr marL="152408" indent="0" algn="just">
+              <a:lnSpc>
+                <a:spcPct val="107000"/>
+              </a:lnSpc>
+              <a:spcAft>
+                <a:spcPts val="533"/>
+              </a:spcAft>
+              <a:buNone/>
+            </a:pPr>
+            <a:endParaRPr lang="pt-BR" sz="2000" dirty="0">
+              <a:ea typeface="Calibri" panose="020F0502020204030204" pitchFamily="34" charset="0"/>
+              <a:cs typeface="Arial" panose="020B0604020202020204" pitchFamily="34" charset="0"/>
+            </a:endParaRPr>
+          </a:p>
+        </p:txBody>
+      </p:sp>
+      <p:pic>
+        <p:nvPicPr>
+          <p:cNvPr id="5" name="Imagem 4"/>
+          <p:cNvPicPr>
+            <a:picLocks noChangeAspect="1"/>
+          </p:cNvPicPr>
+          <p:nvPr/>
+        </p:nvPicPr>
+        <p:blipFill>
+          <a:blip r:embed="rId5"/>
+          <a:stretch>
+            <a:fillRect/>
+          </a:stretch>
+        </p:blipFill>
+        <p:spPr>
+          <a:xfrm>
+            <a:off x="1880651" y="2585226"/>
+            <a:ext cx="7719738" cy="3153421"/>
+          </a:xfrm>
+          <a:prstGeom prst="rect">
+            <a:avLst/>
+          </a:prstGeom>
+        </p:spPr>
+      </p:pic>
+    </p:spTree>
+    <p:extLst>
+      <p:ext uri="{BB962C8B-B14F-4D97-AF65-F5344CB8AC3E}">
+        <p14:creationId xmlns:p14="http://schemas.microsoft.com/office/powerpoint/2010/main" val="3798277554"/>
+      </p:ext>
+    </p:extLst>
+  </p:cSld>
+  <p:clrMapOvr>
+    <a:masterClrMapping/>
+  </p:clrMapOvr>
+</p:sld>
+</file>
+
+<file path=ppt/slides/slide23.xml><?xml version="1.0" encoding="utf-8"?>
+<p:sld xmlns:a="http://schemas.openxmlformats.org/drawingml/2006/main" xmlns:r="http://schemas.openxmlformats.org/officeDocument/2006/relationships" xmlns:p="http://schemas.openxmlformats.org/presentationml/2006/main">
+  <p:cSld>
+    <p:bg>
+      <p:bgPr>
+        <a:blipFill dpi="0" rotWithShape="1">
+          <a:blip r:embed="rId3">
+            <a:lum/>
+          </a:blip>
+          <a:srcRect/>
+          <a:stretch>
+            <a:fillRect/>
+          </a:stretch>
+        </a:blipFill>
+        <a:effectLst/>
+      </p:bgPr>
+    </p:bg>
+    <p:spTree>
+      <p:nvGrpSpPr>
+        <p:cNvPr id="1" name=""/>
+        <p:cNvGrpSpPr/>
+        <p:nvPr/>
+      </p:nvGrpSpPr>
+      <p:grpSpPr>
+        <a:xfrm>
+          <a:off x="0" y="0"/>
+          <a:ext cx="0" cy="0"/>
+          <a:chOff x="0" y="0"/>
+          <a:chExt cx="0" cy="0"/>
+        </a:xfrm>
+      </p:grpSpPr>
+      <p:sp>
+        <p:nvSpPr>
+          <p:cNvPr id="3" name="AutoShape 2" descr="An example of graph signal reconstruction over wireless sensor network. |  Download Scientific Diagram">
+            <a:extLst>
+              <a:ext uri="{FF2B5EF4-FFF2-40B4-BE49-F238E27FC236}">
+                <a16:creationId xmlns:a16="http://schemas.microsoft.com/office/drawing/2014/main" xmlns="" id="{0166B4DD-D72A-4A54-94A7-2C38133837FD}"/>
+              </a:ext>
+            </a:extLst>
+          </p:cNvPr>
+          <p:cNvSpPr>
+            <a:spLocks noChangeAspect="1" noChangeArrowheads="1"/>
+          </p:cNvSpPr>
+          <p:nvPr/>
+        </p:nvSpPr>
+        <p:spPr bwMode="auto">
+          <a:xfrm>
+            <a:off x="5994400" y="3327400"/>
+            <a:ext cx="203200" cy="203200"/>
+          </a:xfrm>
+          <a:prstGeom prst="rect">
+            <a:avLst/>
+          </a:prstGeom>
+          <a:noFill/>
+          <a:extLst>
+            <a:ext uri="{909E8E84-426E-40DD-AFC4-6F175D3DCCD1}">
+              <a14:hiddenFill xmlns:a14="http://schemas.microsoft.com/office/drawing/2010/main">
+                <a:solidFill>
+                  <a:srgbClr val="FFFFFF"/>
+                </a:solidFill>
+              </a14:hiddenFill>
+            </a:ext>
+          </a:extLst>
+        </p:spPr>
+        <p:txBody>
+          <a:bodyPr vert="horz" wrap="square" lIns="60960" tIns="30480" rIns="60960" bIns="30480" numCol="1" anchor="t" anchorCtr="0" compatLnSpc="1">
+            <a:prstTxWarp prst="textNoShape">
+              <a:avLst/>
+            </a:prstTxWarp>
+          </a:bodyPr>
+          <a:lstStyle/>
+          <a:p>
+            <a:pPr marL="0" marR="0" lvl="0" indent="0" algn="l" defTabSz="609630" rtl="0" eaLnBrk="1" fontAlgn="auto" latinLnBrk="0" hangingPunct="1">
+              <a:lnSpc>
+                <a:spcPct val="100000"/>
+              </a:lnSpc>
+              <a:spcBef>
+                <a:spcPts val="0"/>
+              </a:spcBef>
+              <a:spcAft>
+                <a:spcPts val="0"/>
+              </a:spcAft>
+              <a:buClrTx/>
+              <a:buSzTx/>
+              <a:buFontTx/>
+              <a:buNone/>
+              <a:tabLst/>
+              <a:defRPr/>
+            </a:pPr>
+            <a:endParaRPr kumimoji="0" lang="pt-BR" sz="1200" b="0" i="0" u="none" strike="noStrike" kern="1200" cap="none" spc="0" normalizeH="0" baseline="0" noProof="0">
+              <a:ln>
+                <a:noFill/>
+              </a:ln>
+              <a:solidFill>
+                <a:prstClr val="black"/>
+              </a:solidFill>
+              <a:effectLst/>
+              <a:uLnTx/>
+              <a:uFillTx/>
+              <a:latin typeface="Calibri"/>
+              <a:ea typeface="+mn-ea"/>
+              <a:cs typeface="+mn-cs"/>
+            </a:endParaRPr>
+          </a:p>
+        </p:txBody>
+      </p:sp>
+      <p:sp>
+        <p:nvSpPr>
+          <p:cNvPr id="7" name="AutoShape 4" descr="An example of graph signal reconstruction over wireless sensor network. |  Download Scientific Diagram">
+            <a:extLst>
+              <a:ext uri="{FF2B5EF4-FFF2-40B4-BE49-F238E27FC236}">
+                <a16:creationId xmlns:a16="http://schemas.microsoft.com/office/drawing/2014/main" xmlns="" id="{14C2B67D-81A1-457E-A410-FE4350A3CCA4}"/>
+              </a:ext>
+            </a:extLst>
+          </p:cNvPr>
+          <p:cNvSpPr>
+            <a:spLocks noChangeAspect="1" noChangeArrowheads="1"/>
+          </p:cNvSpPr>
+          <p:nvPr/>
+        </p:nvSpPr>
+        <p:spPr bwMode="auto">
+          <a:xfrm>
+            <a:off x="6096000" y="3429000"/>
+            <a:ext cx="203200" cy="203200"/>
+          </a:xfrm>
+          <a:prstGeom prst="rect">
+            <a:avLst/>
+          </a:prstGeom>
+          <a:noFill/>
+          <a:extLst>
+            <a:ext uri="{909E8E84-426E-40DD-AFC4-6F175D3DCCD1}">
+              <a14:hiddenFill xmlns:a14="http://schemas.microsoft.com/office/drawing/2010/main">
+                <a:solidFill>
+                  <a:srgbClr val="FFFFFF"/>
+                </a:solidFill>
+              </a14:hiddenFill>
+            </a:ext>
+          </a:extLst>
+        </p:spPr>
+        <p:txBody>
+          <a:bodyPr vert="horz" wrap="square" lIns="60960" tIns="30480" rIns="60960" bIns="30480" numCol="1" anchor="t" anchorCtr="0" compatLnSpc="1">
+            <a:prstTxWarp prst="textNoShape">
+              <a:avLst/>
+            </a:prstTxWarp>
+          </a:bodyPr>
+          <a:lstStyle/>
+          <a:p>
+            <a:pPr marL="0" marR="0" lvl="0" indent="0" algn="l" defTabSz="609630" rtl="0" eaLnBrk="1" fontAlgn="auto" latinLnBrk="0" hangingPunct="1">
+              <a:lnSpc>
+                <a:spcPct val="100000"/>
+              </a:lnSpc>
+              <a:spcBef>
+                <a:spcPts val="0"/>
+              </a:spcBef>
+              <a:spcAft>
+                <a:spcPts val="0"/>
+              </a:spcAft>
+              <a:buClrTx/>
+              <a:buSzTx/>
+              <a:buFontTx/>
+              <a:buNone/>
+              <a:tabLst/>
+              <a:defRPr/>
+            </a:pPr>
+            <a:endParaRPr kumimoji="0" lang="pt-BR" sz="1200" b="0" i="0" u="none" strike="noStrike" kern="1200" cap="none" spc="0" normalizeH="0" baseline="0" noProof="0">
+              <a:ln>
+                <a:noFill/>
+              </a:ln>
+              <a:solidFill>
+                <a:prstClr val="black"/>
+              </a:solidFill>
+              <a:effectLst/>
+              <a:uLnTx/>
+              <a:uFillTx/>
+              <a:latin typeface="Calibri"/>
+              <a:ea typeface="+mn-ea"/>
+              <a:cs typeface="+mn-cs"/>
+            </a:endParaRPr>
+          </a:p>
+        </p:txBody>
+      </p:sp>
+      <p:sp>
+        <p:nvSpPr>
+          <p:cNvPr id="4" name="Espaço Reservado para Conteúdo 3">
+            <a:extLst>
+              <a:ext uri="{FF2B5EF4-FFF2-40B4-BE49-F238E27FC236}">
+                <a16:creationId xmlns:a16="http://schemas.microsoft.com/office/drawing/2014/main" xmlns="" id="{0349BA64-C9D7-4730-9CA9-5C4AD9FC7969}"/>
               </a:ext>
             </a:extLst>
           </p:cNvPr>
@@ -14105,7 +14673,7 @@
           <p:cNvPr id="2" name="Título 1">
             <a:extLst>
               <a:ext uri="{FF2B5EF4-FFF2-40B4-BE49-F238E27FC236}">
-                <a16:creationId xmlns:a16="http://schemas.microsoft.com/office/drawing/2014/main" id="{5F09B89C-3183-4D52-981A-62798DDFF2B8}"/>
+                <a16:creationId xmlns:a16="http://schemas.microsoft.com/office/drawing/2014/main" xmlns="" id="{5F09B89C-3183-4D52-981A-62798DDFF2B8}"/>
               </a:ext>
             </a:extLst>
           </p:cNvPr>
@@ -14143,7 +14711,7 @@
           <p:cNvPr id="3" name="AutoShape 2" descr="An example of graph signal reconstruction over wireless sensor network. |  Download Scientific Diagram">
             <a:extLst>
               <a:ext uri="{FF2B5EF4-FFF2-40B4-BE49-F238E27FC236}">
-                <a16:creationId xmlns:a16="http://schemas.microsoft.com/office/drawing/2014/main" id="{0166B4DD-D72A-4A54-94A7-2C38133837FD}"/>
+                <a16:creationId xmlns:a16="http://schemas.microsoft.com/office/drawing/2014/main" xmlns="" id="{0166B4DD-D72A-4A54-94A7-2C38133837FD}"/>
               </a:ext>
             </a:extLst>
           </p:cNvPr>
@@ -14194,7 +14762,7 @@
           <p:cNvPr id="7" name="AutoShape 4" descr="An example of graph signal reconstruction over wireless sensor network. |  Download Scientific Diagram">
             <a:extLst>
               <a:ext uri="{FF2B5EF4-FFF2-40B4-BE49-F238E27FC236}">
-                <a16:creationId xmlns:a16="http://schemas.microsoft.com/office/drawing/2014/main" id="{14C2B67D-81A1-457E-A410-FE4350A3CCA4}"/>
+                <a16:creationId xmlns:a16="http://schemas.microsoft.com/office/drawing/2014/main" xmlns="" id="{14C2B67D-81A1-457E-A410-FE4350A3CCA4}"/>
               </a:ext>
             </a:extLst>
           </p:cNvPr>
@@ -14245,7 +14813,7 @@
           <p:cNvPr id="4" name="Espaço Reservado para Conteúdo 3">
             <a:extLst>
               <a:ext uri="{FF2B5EF4-FFF2-40B4-BE49-F238E27FC236}">
-                <a16:creationId xmlns:a16="http://schemas.microsoft.com/office/drawing/2014/main" id="{5F1B432F-F570-AEC0-CFFF-C1D9196D7234}"/>
+                <a16:creationId xmlns:a16="http://schemas.microsoft.com/office/drawing/2014/main" xmlns="" id="{5F1B432F-F570-AEC0-CFFF-C1D9196D7234}"/>
               </a:ext>
             </a:extLst>
           </p:cNvPr>
@@ -14284,7 +14852,7 @@
           <p:cNvPr id="3074" name="Picture 2" descr="Unsupervised machine learning">
             <a:extLst>
               <a:ext uri="{FF2B5EF4-FFF2-40B4-BE49-F238E27FC236}">
-                <a16:creationId xmlns:a16="http://schemas.microsoft.com/office/drawing/2014/main" id="{9C9BB3FA-B234-195B-6E78-1F5F1A0B5DD5}"/>
+                <a16:creationId xmlns:a16="http://schemas.microsoft.com/office/drawing/2014/main" xmlns="" id="{9C9BB3FA-B234-195B-6E78-1F5F1A0B5DD5}"/>
               </a:ext>
             </a:extLst>
           </p:cNvPr>
@@ -14331,7 +14899,7 @@
           <p:cNvPr id="3076" name="Picture 4" descr="Supervised machine learning">
             <a:extLst>
               <a:ext uri="{FF2B5EF4-FFF2-40B4-BE49-F238E27FC236}">
-                <a16:creationId xmlns:a16="http://schemas.microsoft.com/office/drawing/2014/main" id="{85D641D0-2AF2-0E0D-20E1-BE0FB83D483A}"/>
+                <a16:creationId xmlns:a16="http://schemas.microsoft.com/office/drawing/2014/main" xmlns="" id="{85D641D0-2AF2-0E0D-20E1-BE0FB83D483A}"/>
               </a:ext>
             </a:extLst>
           </p:cNvPr>
@@ -14422,7 +14990,7 @@
           <p:cNvPr id="2" name="Título 1">
             <a:extLst>
               <a:ext uri="{FF2B5EF4-FFF2-40B4-BE49-F238E27FC236}">
-                <a16:creationId xmlns:a16="http://schemas.microsoft.com/office/drawing/2014/main" id="{5F09B89C-3183-4D52-981A-62798DDFF2B8}"/>
+                <a16:creationId xmlns:a16="http://schemas.microsoft.com/office/drawing/2014/main" xmlns="" id="{5F09B89C-3183-4D52-981A-62798DDFF2B8}"/>
               </a:ext>
             </a:extLst>
           </p:cNvPr>
@@ -14457,7 +15025,7 @@
           <p:cNvPr id="3" name="AutoShape 2" descr="An example of graph signal reconstruction over wireless sensor network. |  Download Scientific Diagram">
             <a:extLst>
               <a:ext uri="{FF2B5EF4-FFF2-40B4-BE49-F238E27FC236}">
-                <a16:creationId xmlns:a16="http://schemas.microsoft.com/office/drawing/2014/main" id="{0166B4DD-D72A-4A54-94A7-2C38133837FD}"/>
+                <a16:creationId xmlns:a16="http://schemas.microsoft.com/office/drawing/2014/main" xmlns="" id="{0166B4DD-D72A-4A54-94A7-2C38133837FD}"/>
               </a:ext>
             </a:extLst>
           </p:cNvPr>
@@ -14508,7 +15076,7 @@
           <p:cNvPr id="7" name="AutoShape 4" descr="An example of graph signal reconstruction over wireless sensor network. |  Download Scientific Diagram">
             <a:extLst>
               <a:ext uri="{FF2B5EF4-FFF2-40B4-BE49-F238E27FC236}">
-                <a16:creationId xmlns:a16="http://schemas.microsoft.com/office/drawing/2014/main" id="{14C2B67D-81A1-457E-A410-FE4350A3CCA4}"/>
+                <a16:creationId xmlns:a16="http://schemas.microsoft.com/office/drawing/2014/main" xmlns="" id="{14C2B67D-81A1-457E-A410-FE4350A3CCA4}"/>
               </a:ext>
             </a:extLst>
           </p:cNvPr>
@@ -14559,7 +15127,7 @@
           <p:cNvPr id="4" name="Espaço Reservado para Conteúdo 3">
             <a:extLst>
               <a:ext uri="{FF2B5EF4-FFF2-40B4-BE49-F238E27FC236}">
-                <a16:creationId xmlns:a16="http://schemas.microsoft.com/office/drawing/2014/main" id="{5F1B432F-F570-AEC0-CFFF-C1D9196D7234}"/>
+                <a16:creationId xmlns:a16="http://schemas.microsoft.com/office/drawing/2014/main" xmlns="" id="{5F1B432F-F570-AEC0-CFFF-C1D9196D7234}"/>
               </a:ext>
             </a:extLst>
           </p:cNvPr>
@@ -14612,7 +15180,7 @@
           <p:cNvPr id="4098" name="Picture 2" descr="What is K-means Clustering and it's use cases ? | by Avijit das | Medium">
             <a:extLst>
               <a:ext uri="{FF2B5EF4-FFF2-40B4-BE49-F238E27FC236}">
-                <a16:creationId xmlns:a16="http://schemas.microsoft.com/office/drawing/2014/main" id="{056C7919-93FD-E63C-B36E-CC710CDD6044}"/>
+                <a16:creationId xmlns:a16="http://schemas.microsoft.com/office/drawing/2014/main" xmlns="" id="{056C7919-93FD-E63C-B36E-CC710CDD6044}"/>
               </a:ext>
             </a:extLst>
           </p:cNvPr>
@@ -14703,7 +15271,7 @@
           <p:cNvPr id="2" name="Título 1">
             <a:extLst>
               <a:ext uri="{FF2B5EF4-FFF2-40B4-BE49-F238E27FC236}">
-                <a16:creationId xmlns:a16="http://schemas.microsoft.com/office/drawing/2014/main" id="{5F09B89C-3183-4D52-981A-62798DDFF2B8}"/>
+                <a16:creationId xmlns:a16="http://schemas.microsoft.com/office/drawing/2014/main" xmlns="" id="{5F09B89C-3183-4D52-981A-62798DDFF2B8}"/>
               </a:ext>
             </a:extLst>
           </p:cNvPr>
@@ -14743,7 +15311,7 @@
           <p:cNvPr id="3" name="AutoShape 2" descr="An example of graph signal reconstruction over wireless sensor network. |  Download Scientific Diagram">
             <a:extLst>
               <a:ext uri="{FF2B5EF4-FFF2-40B4-BE49-F238E27FC236}">
-                <a16:creationId xmlns:a16="http://schemas.microsoft.com/office/drawing/2014/main" id="{0166B4DD-D72A-4A54-94A7-2C38133837FD}"/>
+                <a16:creationId xmlns:a16="http://schemas.microsoft.com/office/drawing/2014/main" xmlns="" id="{0166B4DD-D72A-4A54-94A7-2C38133837FD}"/>
               </a:ext>
             </a:extLst>
           </p:cNvPr>
@@ -14794,7 +15362,7 @@
           <p:cNvPr id="7" name="AutoShape 4" descr="An example of graph signal reconstruction over wireless sensor network. |  Download Scientific Diagram">
             <a:extLst>
               <a:ext uri="{FF2B5EF4-FFF2-40B4-BE49-F238E27FC236}">
-                <a16:creationId xmlns:a16="http://schemas.microsoft.com/office/drawing/2014/main" id="{14C2B67D-81A1-457E-A410-FE4350A3CCA4}"/>
+                <a16:creationId xmlns:a16="http://schemas.microsoft.com/office/drawing/2014/main" xmlns="" id="{14C2B67D-81A1-457E-A410-FE4350A3CCA4}"/>
               </a:ext>
             </a:extLst>
           </p:cNvPr>
@@ -14845,7 +15413,7 @@
           <p:cNvPr id="4" name="Espaço Reservado para Conteúdo 3">
             <a:extLst>
               <a:ext uri="{FF2B5EF4-FFF2-40B4-BE49-F238E27FC236}">
-                <a16:creationId xmlns:a16="http://schemas.microsoft.com/office/drawing/2014/main" id="{5F1B432F-F570-AEC0-CFFF-C1D9196D7234}"/>
+                <a16:creationId xmlns:a16="http://schemas.microsoft.com/office/drawing/2014/main" xmlns="" id="{5F1B432F-F570-AEC0-CFFF-C1D9196D7234}"/>
               </a:ext>
             </a:extLst>
           </p:cNvPr>
@@ -14929,7 +15497,7 @@
           <p:cNvPr id="4098" name="Picture 2" descr="K-Means Clustering Algorithm - Javatpoint">
             <a:extLst>
               <a:ext uri="{FF2B5EF4-FFF2-40B4-BE49-F238E27FC236}">
-                <a16:creationId xmlns:a16="http://schemas.microsoft.com/office/drawing/2014/main" id="{45592E60-7087-AC09-6FA1-B6EBEB4488EC}"/>
+                <a16:creationId xmlns:a16="http://schemas.microsoft.com/office/drawing/2014/main" xmlns="" id="{45592E60-7087-AC09-6FA1-B6EBEB4488EC}"/>
               </a:ext>
             </a:extLst>
           </p:cNvPr>
@@ -15020,7 +15588,7 @@
           <p:cNvPr id="2" name="Título 1">
             <a:extLst>
               <a:ext uri="{FF2B5EF4-FFF2-40B4-BE49-F238E27FC236}">
-                <a16:creationId xmlns:a16="http://schemas.microsoft.com/office/drawing/2014/main" id="{5F09B89C-3183-4D52-981A-62798DDFF2B8}"/>
+                <a16:creationId xmlns:a16="http://schemas.microsoft.com/office/drawing/2014/main" xmlns="" id="{5F09B89C-3183-4D52-981A-62798DDFF2B8}"/>
               </a:ext>
             </a:extLst>
           </p:cNvPr>
@@ -15060,7 +15628,7 @@
           <p:cNvPr id="3" name="AutoShape 2" descr="An example of graph signal reconstruction over wireless sensor network. |  Download Scientific Diagram">
             <a:extLst>
               <a:ext uri="{FF2B5EF4-FFF2-40B4-BE49-F238E27FC236}">
-                <a16:creationId xmlns:a16="http://schemas.microsoft.com/office/drawing/2014/main" id="{0166B4DD-D72A-4A54-94A7-2C38133837FD}"/>
+                <a16:creationId xmlns:a16="http://schemas.microsoft.com/office/drawing/2014/main" xmlns="" id="{0166B4DD-D72A-4A54-94A7-2C38133837FD}"/>
               </a:ext>
             </a:extLst>
           </p:cNvPr>
@@ -15111,7 +15679,7 @@
           <p:cNvPr id="7" name="AutoShape 4" descr="An example of graph signal reconstruction over wireless sensor network. |  Download Scientific Diagram">
             <a:extLst>
               <a:ext uri="{FF2B5EF4-FFF2-40B4-BE49-F238E27FC236}">
-                <a16:creationId xmlns:a16="http://schemas.microsoft.com/office/drawing/2014/main" id="{14C2B67D-81A1-457E-A410-FE4350A3CCA4}"/>
+                <a16:creationId xmlns:a16="http://schemas.microsoft.com/office/drawing/2014/main" xmlns="" id="{14C2B67D-81A1-457E-A410-FE4350A3CCA4}"/>
               </a:ext>
             </a:extLst>
           </p:cNvPr>
@@ -15162,7 +15730,7 @@
           <p:cNvPr id="4" name="Espaço Reservado para Conteúdo 3">
             <a:extLst>
               <a:ext uri="{FF2B5EF4-FFF2-40B4-BE49-F238E27FC236}">
-                <a16:creationId xmlns:a16="http://schemas.microsoft.com/office/drawing/2014/main" id="{5F1B432F-F570-AEC0-CFFF-C1D9196D7234}"/>
+                <a16:creationId xmlns:a16="http://schemas.microsoft.com/office/drawing/2014/main" xmlns="" id="{5F1B432F-F570-AEC0-CFFF-C1D9196D7234}"/>
               </a:ext>
             </a:extLst>
           </p:cNvPr>
@@ -15215,7 +15783,7 @@
               <p:cNvPr id="5" name="TextBox 4">
                 <a:extLst>
                   <a:ext uri="{FF2B5EF4-FFF2-40B4-BE49-F238E27FC236}">
-                    <a16:creationId xmlns:a16="http://schemas.microsoft.com/office/drawing/2014/main" id="{A60E2CD0-3AFD-013C-16CC-B158E81DC1CA}"/>
+                    <a16:creationId xmlns:a16="http://schemas.microsoft.com/office/drawing/2014/main" xmlns="" id="{A60E2CD0-3AFD-013C-16CC-B158E81DC1CA}"/>
                   </a:ext>
                 </a:extLst>
               </p:cNvPr>
@@ -15467,7 +16035,7 @@
         <p:cNvPr id="1" name="">
           <a:extLst>
             <a:ext uri="{FF2B5EF4-FFF2-40B4-BE49-F238E27FC236}">
-              <a16:creationId xmlns:a16="http://schemas.microsoft.com/office/drawing/2014/main" id="{8A1FE513-AB4A-132F-B33C-C1A69C4E90BB}"/>
+              <a16:creationId xmlns:a16="http://schemas.microsoft.com/office/drawing/2014/main" xmlns="" id="{8A1FE513-AB4A-132F-B33C-C1A69C4E90BB}"/>
             </a:ext>
           </a:extLst>
         </p:cNvPr>
@@ -15487,7 +16055,7 @@
           <p:cNvPr id="2" name="Título 1">
             <a:extLst>
               <a:ext uri="{FF2B5EF4-FFF2-40B4-BE49-F238E27FC236}">
-                <a16:creationId xmlns:a16="http://schemas.microsoft.com/office/drawing/2014/main" id="{E5BC5611-534A-CB77-C071-F477937D3B59}"/>
+                <a16:creationId xmlns:a16="http://schemas.microsoft.com/office/drawing/2014/main" xmlns="" id="{E5BC5611-534A-CB77-C071-F477937D3B59}"/>
               </a:ext>
             </a:extLst>
           </p:cNvPr>
@@ -15527,7 +16095,7 @@
           <p:cNvPr id="3" name="AutoShape 2" descr="An example of graph signal reconstruction over wireless sensor network. |  Download Scientific Diagram">
             <a:extLst>
               <a:ext uri="{FF2B5EF4-FFF2-40B4-BE49-F238E27FC236}">
-                <a16:creationId xmlns:a16="http://schemas.microsoft.com/office/drawing/2014/main" id="{7E7F13EA-3BD1-43C2-79EA-B881793AD8AD}"/>
+                <a16:creationId xmlns:a16="http://schemas.microsoft.com/office/drawing/2014/main" xmlns="" id="{7E7F13EA-3BD1-43C2-79EA-B881793AD8AD}"/>
               </a:ext>
             </a:extLst>
           </p:cNvPr>
@@ -15578,7 +16146,7 @@
           <p:cNvPr id="7" name="AutoShape 4" descr="An example of graph signal reconstruction over wireless sensor network. |  Download Scientific Diagram">
             <a:extLst>
               <a:ext uri="{FF2B5EF4-FFF2-40B4-BE49-F238E27FC236}">
-                <a16:creationId xmlns:a16="http://schemas.microsoft.com/office/drawing/2014/main" id="{A0891BC2-FEAE-19E7-B671-ECE0FACC07C4}"/>
+                <a16:creationId xmlns:a16="http://schemas.microsoft.com/office/drawing/2014/main" xmlns="" id="{A0891BC2-FEAE-19E7-B671-ECE0FACC07C4}"/>
               </a:ext>
             </a:extLst>
           </p:cNvPr>
@@ -15629,7 +16197,7 @@
           <p:cNvPr id="4" name="Espaço Reservado para Conteúdo 3">
             <a:extLst>
               <a:ext uri="{FF2B5EF4-FFF2-40B4-BE49-F238E27FC236}">
-                <a16:creationId xmlns:a16="http://schemas.microsoft.com/office/drawing/2014/main" id="{747C2E78-E437-28C4-0BAF-D2D2AC1C96CB}"/>
+                <a16:creationId xmlns:a16="http://schemas.microsoft.com/office/drawing/2014/main" xmlns="" id="{747C2E78-E437-28C4-0BAF-D2D2AC1C96CB}"/>
               </a:ext>
             </a:extLst>
           </p:cNvPr>
@@ -15672,7 +16240,7 @@
           <p:cNvPr id="6" name="Picture 5">
             <a:extLst>
               <a:ext uri="{FF2B5EF4-FFF2-40B4-BE49-F238E27FC236}">
-                <a16:creationId xmlns:a16="http://schemas.microsoft.com/office/drawing/2014/main" id="{F98B536F-38AB-58C5-0FFB-41BDB557E9EF}"/>
+                <a16:creationId xmlns:a16="http://schemas.microsoft.com/office/drawing/2014/main" xmlns="" id="{F98B536F-38AB-58C5-0FFB-41BDB557E9EF}"/>
               </a:ext>
             </a:extLst>
           </p:cNvPr>
@@ -15702,7 +16270,7 @@
           <p:cNvPr id="8" name="TextBox 7">
             <a:extLst>
               <a:ext uri="{FF2B5EF4-FFF2-40B4-BE49-F238E27FC236}">
-                <a16:creationId xmlns:a16="http://schemas.microsoft.com/office/drawing/2014/main" id="{04EA9FAE-D371-68E0-2CB7-9C8893491B3B}"/>
+                <a16:creationId xmlns:a16="http://schemas.microsoft.com/office/drawing/2014/main" xmlns="" id="{04EA9FAE-D371-68E0-2CB7-9C8893491B3B}"/>
               </a:ext>
             </a:extLst>
           </p:cNvPr>
@@ -15768,7 +16336,7 @@
         <p:cNvPr id="1" name="">
           <a:extLst>
             <a:ext uri="{FF2B5EF4-FFF2-40B4-BE49-F238E27FC236}">
-              <a16:creationId xmlns:a16="http://schemas.microsoft.com/office/drawing/2014/main" id="{B86C6B89-4D49-2EC0-F063-638BD6935412}"/>
+              <a16:creationId xmlns:a16="http://schemas.microsoft.com/office/drawing/2014/main" xmlns="" id="{B86C6B89-4D49-2EC0-F063-638BD6935412}"/>
             </a:ext>
           </a:extLst>
         </p:cNvPr>
@@ -15788,7 +16356,7 @@
           <p:cNvPr id="2" name="Título 1">
             <a:extLst>
               <a:ext uri="{FF2B5EF4-FFF2-40B4-BE49-F238E27FC236}">
-                <a16:creationId xmlns:a16="http://schemas.microsoft.com/office/drawing/2014/main" id="{B81115AF-9415-9558-8D7C-7CA5F9E9ED43}"/>
+                <a16:creationId xmlns:a16="http://schemas.microsoft.com/office/drawing/2014/main" xmlns="" id="{B81115AF-9415-9558-8D7C-7CA5F9E9ED43}"/>
               </a:ext>
             </a:extLst>
           </p:cNvPr>
@@ -15828,7 +16396,7 @@
           <p:cNvPr id="3" name="AutoShape 2" descr="An example of graph signal reconstruction over wireless sensor network. |  Download Scientific Diagram">
             <a:extLst>
               <a:ext uri="{FF2B5EF4-FFF2-40B4-BE49-F238E27FC236}">
-                <a16:creationId xmlns:a16="http://schemas.microsoft.com/office/drawing/2014/main" id="{55584ECE-67DE-1FFA-9FE4-D3C3D4136411}"/>
+                <a16:creationId xmlns:a16="http://schemas.microsoft.com/office/drawing/2014/main" xmlns="" id="{55584ECE-67DE-1FFA-9FE4-D3C3D4136411}"/>
               </a:ext>
             </a:extLst>
           </p:cNvPr>
@@ -15879,7 +16447,7 @@
           <p:cNvPr id="7" name="AutoShape 4" descr="An example of graph signal reconstruction over wireless sensor network. |  Download Scientific Diagram">
             <a:extLst>
               <a:ext uri="{FF2B5EF4-FFF2-40B4-BE49-F238E27FC236}">
-                <a16:creationId xmlns:a16="http://schemas.microsoft.com/office/drawing/2014/main" id="{A9D0FB6C-59DD-7620-EBAF-21BB030E5B51}"/>
+                <a16:creationId xmlns:a16="http://schemas.microsoft.com/office/drawing/2014/main" xmlns="" id="{A9D0FB6C-59DD-7620-EBAF-21BB030E5B51}"/>
               </a:ext>
             </a:extLst>
           </p:cNvPr>
@@ -15930,7 +16498,7 @@
           <p:cNvPr id="4" name="Espaço Reservado para Conteúdo 3">
             <a:extLst>
               <a:ext uri="{FF2B5EF4-FFF2-40B4-BE49-F238E27FC236}">
-                <a16:creationId xmlns:a16="http://schemas.microsoft.com/office/drawing/2014/main" id="{EC6F58C6-8849-231E-3B12-60D9682EF42B}"/>
+                <a16:creationId xmlns:a16="http://schemas.microsoft.com/office/drawing/2014/main" xmlns="" id="{EC6F58C6-8849-231E-3B12-60D9682EF42B}"/>
               </a:ext>
             </a:extLst>
           </p:cNvPr>
@@ -15973,7 +16541,7 @@
           <p:cNvPr id="6" name="Picture 5">
             <a:extLst>
               <a:ext uri="{FF2B5EF4-FFF2-40B4-BE49-F238E27FC236}">
-                <a16:creationId xmlns:a16="http://schemas.microsoft.com/office/drawing/2014/main" id="{69F3FE92-0D0B-AECE-B64E-FC9D2F3EADBC}"/>
+                <a16:creationId xmlns:a16="http://schemas.microsoft.com/office/drawing/2014/main" xmlns="" id="{69F3FE92-0D0B-AECE-B64E-FC9D2F3EADBC}"/>
               </a:ext>
             </a:extLst>
           </p:cNvPr>
@@ -16003,7 +16571,7 @@
           <p:cNvPr id="8" name="TextBox 7">
             <a:extLst>
               <a:ext uri="{FF2B5EF4-FFF2-40B4-BE49-F238E27FC236}">
-                <a16:creationId xmlns:a16="http://schemas.microsoft.com/office/drawing/2014/main" id="{5D947541-89EC-69EF-1918-6EFD56E0B3C2}"/>
+                <a16:creationId xmlns:a16="http://schemas.microsoft.com/office/drawing/2014/main" xmlns="" id="{5D947541-89EC-69EF-1918-6EFD56E0B3C2}"/>
               </a:ext>
             </a:extLst>
           </p:cNvPr>
@@ -16108,7 +16676,7 @@
         <p:cNvPr id="1" name="">
           <a:extLst>
             <a:ext uri="{FF2B5EF4-FFF2-40B4-BE49-F238E27FC236}">
-              <a16:creationId xmlns:a16="http://schemas.microsoft.com/office/drawing/2014/main" id="{42119100-E668-77C4-3183-771B95B265DA}"/>
+              <a16:creationId xmlns:a16="http://schemas.microsoft.com/office/drawing/2014/main" xmlns="" id="{42119100-E668-77C4-3183-771B95B265DA}"/>
             </a:ext>
           </a:extLst>
         </p:cNvPr>
@@ -16128,7 +16696,7 @@
           <p:cNvPr id="2" name="Título 1">
             <a:extLst>
               <a:ext uri="{FF2B5EF4-FFF2-40B4-BE49-F238E27FC236}">
-                <a16:creationId xmlns:a16="http://schemas.microsoft.com/office/drawing/2014/main" id="{4EBCA554-D396-DCCB-4744-F3695D6FD50E}"/>
+                <a16:creationId xmlns:a16="http://schemas.microsoft.com/office/drawing/2014/main" xmlns="" id="{4EBCA554-D396-DCCB-4744-F3695D6FD50E}"/>
               </a:ext>
             </a:extLst>
           </p:cNvPr>
@@ -16168,7 +16736,7 @@
           <p:cNvPr id="3" name="AutoShape 2" descr="An example of graph signal reconstruction over wireless sensor network. |  Download Scientific Diagram">
             <a:extLst>
               <a:ext uri="{FF2B5EF4-FFF2-40B4-BE49-F238E27FC236}">
-                <a16:creationId xmlns:a16="http://schemas.microsoft.com/office/drawing/2014/main" id="{3380BF6D-7A0A-C11E-50C6-1F567BA3A3D4}"/>
+                <a16:creationId xmlns:a16="http://schemas.microsoft.com/office/drawing/2014/main" xmlns="" id="{3380BF6D-7A0A-C11E-50C6-1F567BA3A3D4}"/>
               </a:ext>
             </a:extLst>
           </p:cNvPr>
@@ -16219,7 +16787,7 @@
           <p:cNvPr id="7" name="AutoShape 4" descr="An example of graph signal reconstruction over wireless sensor network. |  Download Scientific Diagram">
             <a:extLst>
               <a:ext uri="{FF2B5EF4-FFF2-40B4-BE49-F238E27FC236}">
-                <a16:creationId xmlns:a16="http://schemas.microsoft.com/office/drawing/2014/main" id="{52BFF569-F440-2D60-8296-D8243B2988E7}"/>
+                <a16:creationId xmlns:a16="http://schemas.microsoft.com/office/drawing/2014/main" xmlns="" id="{52BFF569-F440-2D60-8296-D8243B2988E7}"/>
               </a:ext>
             </a:extLst>
           </p:cNvPr>
@@ -16270,7 +16838,7 @@
           <p:cNvPr id="4" name="Espaço Reservado para Conteúdo 3">
             <a:extLst>
               <a:ext uri="{FF2B5EF4-FFF2-40B4-BE49-F238E27FC236}">
-                <a16:creationId xmlns:a16="http://schemas.microsoft.com/office/drawing/2014/main" id="{E0298857-CD80-B8D1-6E62-55E6C3A64A44}"/>
+                <a16:creationId xmlns:a16="http://schemas.microsoft.com/office/drawing/2014/main" xmlns="" id="{E0298857-CD80-B8D1-6E62-55E6C3A64A44}"/>
               </a:ext>
             </a:extLst>
           </p:cNvPr>
@@ -16313,7 +16881,7 @@
           <p:cNvPr id="6" name="Picture 5">
             <a:extLst>
               <a:ext uri="{FF2B5EF4-FFF2-40B4-BE49-F238E27FC236}">
-                <a16:creationId xmlns:a16="http://schemas.microsoft.com/office/drawing/2014/main" id="{1C0684BB-EFF7-DBA8-3519-25CE2A1A9632}"/>
+                <a16:creationId xmlns:a16="http://schemas.microsoft.com/office/drawing/2014/main" xmlns="" id="{1C0684BB-EFF7-DBA8-3519-25CE2A1A9632}"/>
               </a:ext>
             </a:extLst>
           </p:cNvPr>
@@ -16343,7 +16911,7 @@
           <p:cNvPr id="9" name="TextBox 8">
             <a:extLst>
               <a:ext uri="{FF2B5EF4-FFF2-40B4-BE49-F238E27FC236}">
-                <a16:creationId xmlns:a16="http://schemas.microsoft.com/office/drawing/2014/main" id="{38267D7C-379A-003E-4048-8D4DDD969EB6}"/>
+                <a16:creationId xmlns:a16="http://schemas.microsoft.com/office/drawing/2014/main" xmlns="" id="{38267D7C-379A-003E-4048-8D4DDD969EB6}"/>
               </a:ext>
             </a:extLst>
           </p:cNvPr>
@@ -16392,6 +16960,10 @@
                 <a:effectLst/>
               </a:rPr>
               <a:t> mais próximo com base na distância euclidiana.</a:t>
+            </a:r>
+            <a:r>
+              <a:rPr lang="pt-BR" dirty="0"/>
+              <a:t/>
             </a:r>
             <a:br>
               <a:rPr lang="pt-BR" dirty="0"/>

--- a/slides/TP557_16_detecção_de_anomalias.pptx
+++ b/slides/TP557_16_detecção_de_anomalias.pptx
@@ -223,7 +223,7 @@
           <a:p>
             <a:fld id="{144F1436-6906-4D93-B7A2-786C327BFA14}" type="datetimeFigureOut">
               <a:rPr lang="nl-BE" smtClean="0"/>
-              <a:t>19/05/2025</a:t>
+              <a:t>21/05/2025</a:t>
             </a:fld>
             <a:endParaRPr lang="nl-BE"/>
           </a:p>
@@ -289,7 +289,7 @@
           <a:p>
             <a:fld id="{F7E56D9B-79AD-444A-AFED-DEC23408F8B4}" type="slidenum">
               <a:rPr lang="nl-BE" smtClean="0"/>
-              <a:t>‹nº›</a:t>
+              <a:t>‹#›</a:t>
             </a:fld>
             <a:endParaRPr lang="nl-BE"/>
           </a:p>
@@ -388,7 +388,7 @@
           <a:p>
             <a:fld id="{AA8CD09E-2914-4F47-B6C1-51B2C31814C9}" type="datetimeFigureOut">
               <a:rPr lang="pt-BR" smtClean="0"/>
-              <a:t>19/05/2025</a:t>
+              <a:t>21/05/2025</a:t>
             </a:fld>
             <a:endParaRPr lang="pt-BR"/>
           </a:p>
@@ -546,7 +546,7 @@
           <a:p>
             <a:fld id="{6FC8D850-966F-45A6-8DE7-15B891E7D40D}" type="slidenum">
               <a:rPr lang="pt-BR" smtClean="0"/>
-              <a:t>‹nº›</a:t>
+              <a:t>‹#›</a:t>
             </a:fld>
             <a:endParaRPr lang="pt-BR"/>
           </a:p>
@@ -747,7 +747,7 @@
         <p:cNvPr id="1" name="">
           <a:extLst>
             <a:ext uri="{FF2B5EF4-FFF2-40B4-BE49-F238E27FC236}">
-              <a16:creationId xmlns:a16="http://schemas.microsoft.com/office/drawing/2014/main" xmlns="" id="{3DC8778D-274C-4550-BFA6-2BF2EE1372DF}"/>
+              <a16:creationId xmlns:a16="http://schemas.microsoft.com/office/drawing/2014/main" id="{3DC8778D-274C-4550-BFA6-2BF2EE1372DF}"/>
             </a:ext>
           </a:extLst>
         </p:cNvPr>
@@ -767,7 +767,7 @@
           <p:cNvPr id="2" name="Espaço Reservado para Imagem de Slide 1">
             <a:extLst>
               <a:ext uri="{FF2B5EF4-FFF2-40B4-BE49-F238E27FC236}">
-                <a16:creationId xmlns:a16="http://schemas.microsoft.com/office/drawing/2014/main" xmlns="" id="{C35AD5E8-765A-E917-B919-F1F6AE347F53}"/>
+                <a16:creationId xmlns:a16="http://schemas.microsoft.com/office/drawing/2014/main" id="{C35AD5E8-765A-E917-B919-F1F6AE347F53}"/>
               </a:ext>
             </a:extLst>
           </p:cNvPr>
@@ -785,7 +785,7 @@
           <p:cNvPr id="3" name="Espaço Reservado para Anotações 2">
             <a:extLst>
               <a:ext uri="{FF2B5EF4-FFF2-40B4-BE49-F238E27FC236}">
-                <a16:creationId xmlns:a16="http://schemas.microsoft.com/office/drawing/2014/main" xmlns="" id="{9D90C0BF-FC56-01AC-3AD0-5B5E6D0FB45D}"/>
+                <a16:creationId xmlns:a16="http://schemas.microsoft.com/office/drawing/2014/main" id="{9D90C0BF-FC56-01AC-3AD0-5B5E6D0FB45D}"/>
               </a:ext>
             </a:extLst>
           </p:cNvPr>
@@ -810,7 +810,7 @@
           <p:cNvPr id="4" name="Espaço Reservado para Número de Slide 3">
             <a:extLst>
               <a:ext uri="{FF2B5EF4-FFF2-40B4-BE49-F238E27FC236}">
-                <a16:creationId xmlns:a16="http://schemas.microsoft.com/office/drawing/2014/main" xmlns="" id="{41EF1718-29E8-7DF3-052E-E040AF947292}"/>
+                <a16:creationId xmlns:a16="http://schemas.microsoft.com/office/drawing/2014/main" id="{41EF1718-29E8-7DF3-052E-E040AF947292}"/>
               </a:ext>
             </a:extLst>
           </p:cNvPr>
@@ -855,7 +855,7 @@
         <p:cNvPr id="1" name="">
           <a:extLst>
             <a:ext uri="{FF2B5EF4-FFF2-40B4-BE49-F238E27FC236}">
-              <a16:creationId xmlns:a16="http://schemas.microsoft.com/office/drawing/2014/main" xmlns="" id="{D5CE570B-6F22-A16C-FB7C-644660A08E50}"/>
+              <a16:creationId xmlns:a16="http://schemas.microsoft.com/office/drawing/2014/main" id="{D5CE570B-6F22-A16C-FB7C-644660A08E50}"/>
             </a:ext>
           </a:extLst>
         </p:cNvPr>
@@ -875,7 +875,7 @@
           <p:cNvPr id="2" name="Espaço Reservado para Imagem de Slide 1">
             <a:extLst>
               <a:ext uri="{FF2B5EF4-FFF2-40B4-BE49-F238E27FC236}">
-                <a16:creationId xmlns:a16="http://schemas.microsoft.com/office/drawing/2014/main" xmlns="" id="{54988FE9-CE61-8F19-30AA-F0093DA959FE}"/>
+                <a16:creationId xmlns:a16="http://schemas.microsoft.com/office/drawing/2014/main" id="{54988FE9-CE61-8F19-30AA-F0093DA959FE}"/>
               </a:ext>
             </a:extLst>
           </p:cNvPr>
@@ -893,7 +893,7 @@
           <p:cNvPr id="3" name="Espaço Reservado para Anotações 2">
             <a:extLst>
               <a:ext uri="{FF2B5EF4-FFF2-40B4-BE49-F238E27FC236}">
-                <a16:creationId xmlns:a16="http://schemas.microsoft.com/office/drawing/2014/main" xmlns="" id="{FF56B3B1-0912-3AF5-3099-3CC1931A01BF}"/>
+                <a16:creationId xmlns:a16="http://schemas.microsoft.com/office/drawing/2014/main" id="{FF56B3B1-0912-3AF5-3099-3CC1931A01BF}"/>
               </a:ext>
             </a:extLst>
           </p:cNvPr>
@@ -918,7 +918,7 @@
           <p:cNvPr id="4" name="Espaço Reservado para Número de Slide 3">
             <a:extLst>
               <a:ext uri="{FF2B5EF4-FFF2-40B4-BE49-F238E27FC236}">
-                <a16:creationId xmlns:a16="http://schemas.microsoft.com/office/drawing/2014/main" xmlns="" id="{EA8F2BE0-E2B3-AC2B-9D52-752913B7CF4B}"/>
+                <a16:creationId xmlns:a16="http://schemas.microsoft.com/office/drawing/2014/main" id="{EA8F2BE0-E2B3-AC2B-9D52-752913B7CF4B}"/>
               </a:ext>
             </a:extLst>
           </p:cNvPr>
@@ -963,7 +963,7 @@
         <p:cNvPr id="1" name="">
           <a:extLst>
             <a:ext uri="{FF2B5EF4-FFF2-40B4-BE49-F238E27FC236}">
-              <a16:creationId xmlns:a16="http://schemas.microsoft.com/office/drawing/2014/main" xmlns="" id="{38F770F4-9A55-E975-D43C-FCEA3ED2C1A9}"/>
+              <a16:creationId xmlns:a16="http://schemas.microsoft.com/office/drawing/2014/main" id="{38F770F4-9A55-E975-D43C-FCEA3ED2C1A9}"/>
             </a:ext>
           </a:extLst>
         </p:cNvPr>
@@ -983,7 +983,7 @@
           <p:cNvPr id="2" name="Espaço Reservado para Imagem de Slide 1">
             <a:extLst>
               <a:ext uri="{FF2B5EF4-FFF2-40B4-BE49-F238E27FC236}">
-                <a16:creationId xmlns:a16="http://schemas.microsoft.com/office/drawing/2014/main" xmlns="" id="{AEDFCAA5-FC8C-DD9C-AFC5-CB278DE7F744}"/>
+                <a16:creationId xmlns:a16="http://schemas.microsoft.com/office/drawing/2014/main" id="{AEDFCAA5-FC8C-DD9C-AFC5-CB278DE7F744}"/>
               </a:ext>
             </a:extLst>
           </p:cNvPr>
@@ -1001,7 +1001,7 @@
           <p:cNvPr id="3" name="Espaço Reservado para Anotações 2">
             <a:extLst>
               <a:ext uri="{FF2B5EF4-FFF2-40B4-BE49-F238E27FC236}">
-                <a16:creationId xmlns:a16="http://schemas.microsoft.com/office/drawing/2014/main" xmlns="" id="{D403E6E9-E099-A9A5-653E-6F0722996927}"/>
+                <a16:creationId xmlns:a16="http://schemas.microsoft.com/office/drawing/2014/main" id="{D403E6E9-E099-A9A5-653E-6F0722996927}"/>
               </a:ext>
             </a:extLst>
           </p:cNvPr>
@@ -1026,7 +1026,7 @@
           <p:cNvPr id="4" name="Espaço Reservado para Número de Slide 3">
             <a:extLst>
               <a:ext uri="{FF2B5EF4-FFF2-40B4-BE49-F238E27FC236}">
-                <a16:creationId xmlns:a16="http://schemas.microsoft.com/office/drawing/2014/main" xmlns="" id="{384EBEF5-7321-520D-7991-F3CC5AF3A56D}"/>
+                <a16:creationId xmlns:a16="http://schemas.microsoft.com/office/drawing/2014/main" id="{384EBEF5-7321-520D-7991-F3CC5AF3A56D}"/>
               </a:ext>
             </a:extLst>
           </p:cNvPr>
@@ -1071,7 +1071,7 @@
         <p:cNvPr id="1" name="">
           <a:extLst>
             <a:ext uri="{FF2B5EF4-FFF2-40B4-BE49-F238E27FC236}">
-              <a16:creationId xmlns:a16="http://schemas.microsoft.com/office/drawing/2014/main" xmlns="" id="{31D8DD9A-FB73-B3DA-6F9F-A22549E2ACF5}"/>
+              <a16:creationId xmlns:a16="http://schemas.microsoft.com/office/drawing/2014/main" id="{31D8DD9A-FB73-B3DA-6F9F-A22549E2ACF5}"/>
             </a:ext>
           </a:extLst>
         </p:cNvPr>
@@ -1091,7 +1091,7 @@
           <p:cNvPr id="2" name="Espaço Reservado para Imagem de Slide 1">
             <a:extLst>
               <a:ext uri="{FF2B5EF4-FFF2-40B4-BE49-F238E27FC236}">
-                <a16:creationId xmlns:a16="http://schemas.microsoft.com/office/drawing/2014/main" xmlns="" id="{E99B0F2D-8473-FC35-AF28-ECE2A1829004}"/>
+                <a16:creationId xmlns:a16="http://schemas.microsoft.com/office/drawing/2014/main" id="{E99B0F2D-8473-FC35-AF28-ECE2A1829004}"/>
               </a:ext>
             </a:extLst>
           </p:cNvPr>
@@ -1109,7 +1109,7 @@
           <p:cNvPr id="3" name="Espaço Reservado para Anotações 2">
             <a:extLst>
               <a:ext uri="{FF2B5EF4-FFF2-40B4-BE49-F238E27FC236}">
-                <a16:creationId xmlns:a16="http://schemas.microsoft.com/office/drawing/2014/main" xmlns="" id="{8C9962D3-EA60-94A8-A6D4-C3161BED15BF}"/>
+                <a16:creationId xmlns:a16="http://schemas.microsoft.com/office/drawing/2014/main" id="{8C9962D3-EA60-94A8-A6D4-C3161BED15BF}"/>
               </a:ext>
             </a:extLst>
           </p:cNvPr>
@@ -1134,7 +1134,7 @@
           <p:cNvPr id="4" name="Espaço Reservado para Número de Slide 3">
             <a:extLst>
               <a:ext uri="{FF2B5EF4-FFF2-40B4-BE49-F238E27FC236}">
-                <a16:creationId xmlns:a16="http://schemas.microsoft.com/office/drawing/2014/main" xmlns="" id="{1A62ECEA-4026-B0E1-9730-4E6CBBB39369}"/>
+                <a16:creationId xmlns:a16="http://schemas.microsoft.com/office/drawing/2014/main" id="{1A62ECEA-4026-B0E1-9730-4E6CBBB39369}"/>
               </a:ext>
             </a:extLst>
           </p:cNvPr>
@@ -1347,7 +1347,7 @@
         <p:cNvPr id="1" name="">
           <a:extLst>
             <a:ext uri="{FF2B5EF4-FFF2-40B4-BE49-F238E27FC236}">
-              <a16:creationId xmlns:a16="http://schemas.microsoft.com/office/drawing/2014/main" xmlns="" id="{6E955CAB-F21A-9D08-F98D-00EB95ED3441}"/>
+              <a16:creationId xmlns:a16="http://schemas.microsoft.com/office/drawing/2014/main" id="{6E955CAB-F21A-9D08-F98D-00EB95ED3441}"/>
             </a:ext>
           </a:extLst>
         </p:cNvPr>
@@ -1367,7 +1367,7 @@
           <p:cNvPr id="2" name="Espaço Reservado para Imagem de Slide 1">
             <a:extLst>
               <a:ext uri="{FF2B5EF4-FFF2-40B4-BE49-F238E27FC236}">
-                <a16:creationId xmlns:a16="http://schemas.microsoft.com/office/drawing/2014/main" xmlns="" id="{0D72ECCF-390F-6700-31C9-EBB590D4368D}"/>
+                <a16:creationId xmlns:a16="http://schemas.microsoft.com/office/drawing/2014/main" id="{0D72ECCF-390F-6700-31C9-EBB590D4368D}"/>
               </a:ext>
             </a:extLst>
           </p:cNvPr>
@@ -1385,7 +1385,7 @@
           <p:cNvPr id="3" name="Espaço Reservado para Anotações 2">
             <a:extLst>
               <a:ext uri="{FF2B5EF4-FFF2-40B4-BE49-F238E27FC236}">
-                <a16:creationId xmlns:a16="http://schemas.microsoft.com/office/drawing/2014/main" xmlns="" id="{577FA9D6-B2FE-523B-86B7-0EFD6452DDF4}"/>
+                <a16:creationId xmlns:a16="http://schemas.microsoft.com/office/drawing/2014/main" id="{577FA9D6-B2FE-523B-86B7-0EFD6452DDF4}"/>
               </a:ext>
             </a:extLst>
           </p:cNvPr>
@@ -1410,7 +1410,7 @@
           <p:cNvPr id="4" name="Espaço Reservado para Número de Slide 3">
             <a:extLst>
               <a:ext uri="{FF2B5EF4-FFF2-40B4-BE49-F238E27FC236}">
-                <a16:creationId xmlns:a16="http://schemas.microsoft.com/office/drawing/2014/main" xmlns="" id="{1DBD4D4D-75F0-64AD-BA32-1AF4C4593BDD}"/>
+                <a16:creationId xmlns:a16="http://schemas.microsoft.com/office/drawing/2014/main" id="{1DBD4D4D-75F0-64AD-BA32-1AF4C4593BDD}"/>
               </a:ext>
             </a:extLst>
           </p:cNvPr>
@@ -2770,7 +2770,7 @@
         <p:cNvPr id="1" name="">
           <a:extLst>
             <a:ext uri="{FF2B5EF4-FFF2-40B4-BE49-F238E27FC236}">
-              <a16:creationId xmlns:a16="http://schemas.microsoft.com/office/drawing/2014/main" xmlns="" id="{5BDAD2A1-5359-2B35-87A2-CB62DA9AC234}"/>
+              <a16:creationId xmlns:a16="http://schemas.microsoft.com/office/drawing/2014/main" id="{5BDAD2A1-5359-2B35-87A2-CB62DA9AC234}"/>
             </a:ext>
           </a:extLst>
         </p:cNvPr>
@@ -2790,7 +2790,7 @@
           <p:cNvPr id="2" name="Espaço Reservado para Imagem de Slide 1">
             <a:extLst>
               <a:ext uri="{FF2B5EF4-FFF2-40B4-BE49-F238E27FC236}">
-                <a16:creationId xmlns:a16="http://schemas.microsoft.com/office/drawing/2014/main" xmlns="" id="{E3CCF2D8-39A8-6970-A91C-CA1BB1172B74}"/>
+                <a16:creationId xmlns:a16="http://schemas.microsoft.com/office/drawing/2014/main" id="{E3CCF2D8-39A8-6970-A91C-CA1BB1172B74}"/>
               </a:ext>
             </a:extLst>
           </p:cNvPr>
@@ -2808,7 +2808,7 @@
           <p:cNvPr id="3" name="Espaço Reservado para Anotações 2">
             <a:extLst>
               <a:ext uri="{FF2B5EF4-FFF2-40B4-BE49-F238E27FC236}">
-                <a16:creationId xmlns:a16="http://schemas.microsoft.com/office/drawing/2014/main" xmlns="" id="{D2A0BCB8-A319-F2B9-61A9-80B79A20C8AD}"/>
+                <a16:creationId xmlns:a16="http://schemas.microsoft.com/office/drawing/2014/main" id="{D2A0BCB8-A319-F2B9-61A9-80B79A20C8AD}"/>
               </a:ext>
             </a:extLst>
           </p:cNvPr>
@@ -2833,7 +2833,7 @@
           <p:cNvPr id="4" name="Espaço Reservado para Número de Slide 3">
             <a:extLst>
               <a:ext uri="{FF2B5EF4-FFF2-40B4-BE49-F238E27FC236}">
-                <a16:creationId xmlns:a16="http://schemas.microsoft.com/office/drawing/2014/main" xmlns="" id="{7430ECDE-57AD-7D93-14A4-A77602871389}"/>
+                <a16:creationId xmlns:a16="http://schemas.microsoft.com/office/drawing/2014/main" id="{7430ECDE-57AD-7D93-14A4-A77602871389}"/>
               </a:ext>
             </a:extLst>
           </p:cNvPr>
@@ -2878,7 +2878,7 @@
         <p:cNvPr id="1" name="">
           <a:extLst>
             <a:ext uri="{FF2B5EF4-FFF2-40B4-BE49-F238E27FC236}">
-              <a16:creationId xmlns:a16="http://schemas.microsoft.com/office/drawing/2014/main" xmlns="" id="{2E6003E3-9C23-DFB4-E656-EE817B7B63F5}"/>
+              <a16:creationId xmlns:a16="http://schemas.microsoft.com/office/drawing/2014/main" id="{2E6003E3-9C23-DFB4-E656-EE817B7B63F5}"/>
             </a:ext>
           </a:extLst>
         </p:cNvPr>
@@ -2898,7 +2898,7 @@
           <p:cNvPr id="2" name="Espaço Reservado para Imagem de Slide 1">
             <a:extLst>
               <a:ext uri="{FF2B5EF4-FFF2-40B4-BE49-F238E27FC236}">
-                <a16:creationId xmlns:a16="http://schemas.microsoft.com/office/drawing/2014/main" xmlns="" id="{A47E6B73-509B-606A-BA52-ECD9A901942C}"/>
+                <a16:creationId xmlns:a16="http://schemas.microsoft.com/office/drawing/2014/main" id="{A47E6B73-509B-606A-BA52-ECD9A901942C}"/>
               </a:ext>
             </a:extLst>
           </p:cNvPr>
@@ -2916,7 +2916,7 @@
           <p:cNvPr id="3" name="Espaço Reservado para Anotações 2">
             <a:extLst>
               <a:ext uri="{FF2B5EF4-FFF2-40B4-BE49-F238E27FC236}">
-                <a16:creationId xmlns:a16="http://schemas.microsoft.com/office/drawing/2014/main" xmlns="" id="{1E7DD88D-B209-FE30-9F24-9AD224BF1EC8}"/>
+                <a16:creationId xmlns:a16="http://schemas.microsoft.com/office/drawing/2014/main" id="{1E7DD88D-B209-FE30-9F24-9AD224BF1EC8}"/>
               </a:ext>
             </a:extLst>
           </p:cNvPr>
@@ -2941,7 +2941,7 @@
           <p:cNvPr id="4" name="Espaço Reservado para Número de Slide 3">
             <a:extLst>
               <a:ext uri="{FF2B5EF4-FFF2-40B4-BE49-F238E27FC236}">
-                <a16:creationId xmlns:a16="http://schemas.microsoft.com/office/drawing/2014/main" xmlns="" id="{4A209F62-F946-427E-D702-876E44243A30}"/>
+                <a16:creationId xmlns:a16="http://schemas.microsoft.com/office/drawing/2014/main" id="{4A209F62-F946-427E-D702-876E44243A30}"/>
               </a:ext>
             </a:extLst>
           </p:cNvPr>
@@ -2986,7 +2986,7 @@
         <p:cNvPr id="1" name="">
           <a:extLst>
             <a:ext uri="{FF2B5EF4-FFF2-40B4-BE49-F238E27FC236}">
-              <a16:creationId xmlns:a16="http://schemas.microsoft.com/office/drawing/2014/main" xmlns="" id="{31790B8E-ACCA-F7FC-062F-E911F5C53D3B}"/>
+              <a16:creationId xmlns:a16="http://schemas.microsoft.com/office/drawing/2014/main" id="{31790B8E-ACCA-F7FC-062F-E911F5C53D3B}"/>
             </a:ext>
           </a:extLst>
         </p:cNvPr>
@@ -3006,7 +3006,7 @@
           <p:cNvPr id="2" name="Espaço Reservado para Imagem de Slide 1">
             <a:extLst>
               <a:ext uri="{FF2B5EF4-FFF2-40B4-BE49-F238E27FC236}">
-                <a16:creationId xmlns:a16="http://schemas.microsoft.com/office/drawing/2014/main" xmlns="" id="{77BBB11C-3D4E-BD82-F35A-38E1761E0CFD}"/>
+                <a16:creationId xmlns:a16="http://schemas.microsoft.com/office/drawing/2014/main" id="{77BBB11C-3D4E-BD82-F35A-38E1761E0CFD}"/>
               </a:ext>
             </a:extLst>
           </p:cNvPr>
@@ -3024,7 +3024,7 @@
           <p:cNvPr id="3" name="Espaço Reservado para Anotações 2">
             <a:extLst>
               <a:ext uri="{FF2B5EF4-FFF2-40B4-BE49-F238E27FC236}">
-                <a16:creationId xmlns:a16="http://schemas.microsoft.com/office/drawing/2014/main" xmlns="" id="{88D90C90-61FD-F2FA-BABE-D96B4D6667D3}"/>
+                <a16:creationId xmlns:a16="http://schemas.microsoft.com/office/drawing/2014/main" id="{88D90C90-61FD-F2FA-BABE-D96B4D6667D3}"/>
               </a:ext>
             </a:extLst>
           </p:cNvPr>
@@ -3049,7 +3049,7 @@
           <p:cNvPr id="4" name="Espaço Reservado para Número de Slide 3">
             <a:extLst>
               <a:ext uri="{FF2B5EF4-FFF2-40B4-BE49-F238E27FC236}">
-                <a16:creationId xmlns:a16="http://schemas.microsoft.com/office/drawing/2014/main" xmlns="" id="{281AAE74-6902-1DF5-1CE0-D34FA2800337}"/>
+                <a16:creationId xmlns:a16="http://schemas.microsoft.com/office/drawing/2014/main" id="{281AAE74-6902-1DF5-1CE0-D34FA2800337}"/>
               </a:ext>
             </a:extLst>
           </p:cNvPr>
@@ -3108,7 +3108,7 @@
           <p:cNvPr id="2" name="Título 1">
             <a:extLst>
               <a:ext uri="{FF2B5EF4-FFF2-40B4-BE49-F238E27FC236}">
-                <a16:creationId xmlns:a16="http://schemas.microsoft.com/office/drawing/2014/main" xmlns="" id="{1DB9B4FF-B06E-403C-A326-BDC64D8FF94E}"/>
+                <a16:creationId xmlns:a16="http://schemas.microsoft.com/office/drawing/2014/main" id="{1DB9B4FF-B06E-403C-A326-BDC64D8FF94E}"/>
               </a:ext>
             </a:extLst>
           </p:cNvPr>
@@ -3145,7 +3145,7 @@
           <p:cNvPr id="3" name="Subtítulo 2">
             <a:extLst>
               <a:ext uri="{FF2B5EF4-FFF2-40B4-BE49-F238E27FC236}">
-                <a16:creationId xmlns:a16="http://schemas.microsoft.com/office/drawing/2014/main" xmlns="" id="{247BDFCE-746E-45BF-A319-4733D58D1632}"/>
+                <a16:creationId xmlns:a16="http://schemas.microsoft.com/office/drawing/2014/main" id="{247BDFCE-746E-45BF-A319-4733D58D1632}"/>
               </a:ext>
             </a:extLst>
           </p:cNvPr>
@@ -3215,7 +3215,7 @@
           <p:cNvPr id="4" name="Espaço Reservado para Data 3">
             <a:extLst>
               <a:ext uri="{FF2B5EF4-FFF2-40B4-BE49-F238E27FC236}">
-                <a16:creationId xmlns:a16="http://schemas.microsoft.com/office/drawing/2014/main" xmlns="" id="{9EDE2778-5372-4104-B96D-968184DA8288}"/>
+                <a16:creationId xmlns:a16="http://schemas.microsoft.com/office/drawing/2014/main" id="{9EDE2778-5372-4104-B96D-968184DA8288}"/>
               </a:ext>
             </a:extLst>
           </p:cNvPr>
@@ -3233,7 +3233,7 @@
           <a:p>
             <a:fld id="{63289F7E-B80B-496E-81B4-D396C37C9454}" type="datetimeFigureOut">
               <a:rPr lang="pt-BR" smtClean="0"/>
-              <a:t>19/05/2025</a:t>
+              <a:t>21/05/2025</a:t>
             </a:fld>
             <a:endParaRPr lang="pt-BR"/>
           </a:p>
@@ -3244,7 +3244,7 @@
           <p:cNvPr id="5" name="Espaço Reservado para Rodapé 4">
             <a:extLst>
               <a:ext uri="{FF2B5EF4-FFF2-40B4-BE49-F238E27FC236}">
-                <a16:creationId xmlns:a16="http://schemas.microsoft.com/office/drawing/2014/main" xmlns="" id="{C1DD0F41-C861-4051-988D-3024A37A4B93}"/>
+                <a16:creationId xmlns:a16="http://schemas.microsoft.com/office/drawing/2014/main" id="{C1DD0F41-C861-4051-988D-3024A37A4B93}"/>
               </a:ext>
             </a:extLst>
           </p:cNvPr>
@@ -3269,7 +3269,7 @@
           <p:cNvPr id="6" name="Espaço Reservado para Número de Slide 5">
             <a:extLst>
               <a:ext uri="{FF2B5EF4-FFF2-40B4-BE49-F238E27FC236}">
-                <a16:creationId xmlns:a16="http://schemas.microsoft.com/office/drawing/2014/main" xmlns="" id="{07E5967E-D980-431A-A5DB-3F0C5030A81E}"/>
+                <a16:creationId xmlns:a16="http://schemas.microsoft.com/office/drawing/2014/main" id="{07E5967E-D980-431A-A5DB-3F0C5030A81E}"/>
               </a:ext>
             </a:extLst>
           </p:cNvPr>
@@ -3287,7 +3287,7 @@
           <a:p>
             <a:fld id="{1A7E88B7-70CE-4035-AE73-13FA6FB985D4}" type="slidenum">
               <a:rPr lang="pt-BR" smtClean="0"/>
-              <a:t>‹nº›</a:t>
+              <a:t>‹#›</a:t>
             </a:fld>
             <a:endParaRPr lang="pt-BR"/>
           </a:p>
@@ -3328,7 +3328,7 @@
           <p:cNvPr id="2" name="Título 1">
             <a:extLst>
               <a:ext uri="{FF2B5EF4-FFF2-40B4-BE49-F238E27FC236}">
-                <a16:creationId xmlns:a16="http://schemas.microsoft.com/office/drawing/2014/main" xmlns="" id="{9036C49F-3E68-4175-81BA-3C3FEE44308A}"/>
+                <a16:creationId xmlns:a16="http://schemas.microsoft.com/office/drawing/2014/main" id="{9036C49F-3E68-4175-81BA-3C3FEE44308A}"/>
               </a:ext>
             </a:extLst>
           </p:cNvPr>
@@ -3356,7 +3356,7 @@
           <p:cNvPr id="3" name="Espaço Reservado para Texto Vertical 2">
             <a:extLst>
               <a:ext uri="{FF2B5EF4-FFF2-40B4-BE49-F238E27FC236}">
-                <a16:creationId xmlns:a16="http://schemas.microsoft.com/office/drawing/2014/main" xmlns="" id="{426FA736-3DD3-4D4E-B57B-BBE1D8F7D424}"/>
+                <a16:creationId xmlns:a16="http://schemas.microsoft.com/office/drawing/2014/main" id="{426FA736-3DD3-4D4E-B57B-BBE1D8F7D424}"/>
               </a:ext>
             </a:extLst>
           </p:cNvPr>
@@ -3413,7 +3413,7 @@
           <p:cNvPr id="4" name="Espaço Reservado para Data 3">
             <a:extLst>
               <a:ext uri="{FF2B5EF4-FFF2-40B4-BE49-F238E27FC236}">
-                <a16:creationId xmlns:a16="http://schemas.microsoft.com/office/drawing/2014/main" xmlns="" id="{99E8855C-D8FD-48F6-B14E-861E0DE4D915}"/>
+                <a16:creationId xmlns:a16="http://schemas.microsoft.com/office/drawing/2014/main" id="{99E8855C-D8FD-48F6-B14E-861E0DE4D915}"/>
               </a:ext>
             </a:extLst>
           </p:cNvPr>
@@ -3431,7 +3431,7 @@
           <a:p>
             <a:fld id="{63289F7E-B80B-496E-81B4-D396C37C9454}" type="datetimeFigureOut">
               <a:rPr lang="pt-BR" smtClean="0"/>
-              <a:t>19/05/2025</a:t>
+              <a:t>21/05/2025</a:t>
             </a:fld>
             <a:endParaRPr lang="pt-BR"/>
           </a:p>
@@ -3442,7 +3442,7 @@
           <p:cNvPr id="5" name="Espaço Reservado para Rodapé 4">
             <a:extLst>
               <a:ext uri="{FF2B5EF4-FFF2-40B4-BE49-F238E27FC236}">
-                <a16:creationId xmlns:a16="http://schemas.microsoft.com/office/drawing/2014/main" xmlns="" id="{97C0BB88-2F21-42A5-ACFF-83DA47F2D340}"/>
+                <a16:creationId xmlns:a16="http://schemas.microsoft.com/office/drawing/2014/main" id="{97C0BB88-2F21-42A5-ACFF-83DA47F2D340}"/>
               </a:ext>
             </a:extLst>
           </p:cNvPr>
@@ -3467,7 +3467,7 @@
           <p:cNvPr id="6" name="Espaço Reservado para Número de Slide 5">
             <a:extLst>
               <a:ext uri="{FF2B5EF4-FFF2-40B4-BE49-F238E27FC236}">
-                <a16:creationId xmlns:a16="http://schemas.microsoft.com/office/drawing/2014/main" xmlns="" id="{6CB462B3-1F22-4C05-B4B8-7A279FB7D5E9}"/>
+                <a16:creationId xmlns:a16="http://schemas.microsoft.com/office/drawing/2014/main" id="{6CB462B3-1F22-4C05-B4B8-7A279FB7D5E9}"/>
               </a:ext>
             </a:extLst>
           </p:cNvPr>
@@ -3485,7 +3485,7 @@
           <a:p>
             <a:fld id="{1A7E88B7-70CE-4035-AE73-13FA6FB985D4}" type="slidenum">
               <a:rPr lang="pt-BR" smtClean="0"/>
-              <a:t>‹nº›</a:t>
+              <a:t>‹#›</a:t>
             </a:fld>
             <a:endParaRPr lang="pt-BR"/>
           </a:p>
@@ -3526,7 +3526,7 @@
           <p:cNvPr id="2" name="Título Vertical 1">
             <a:extLst>
               <a:ext uri="{FF2B5EF4-FFF2-40B4-BE49-F238E27FC236}">
-                <a16:creationId xmlns:a16="http://schemas.microsoft.com/office/drawing/2014/main" xmlns="" id="{EAEAB728-701C-4207-A9D5-23FF45C60502}"/>
+                <a16:creationId xmlns:a16="http://schemas.microsoft.com/office/drawing/2014/main" id="{EAEAB728-701C-4207-A9D5-23FF45C60502}"/>
               </a:ext>
             </a:extLst>
           </p:cNvPr>
@@ -3559,7 +3559,7 @@
           <p:cNvPr id="3" name="Espaço Reservado para Texto Vertical 2">
             <a:extLst>
               <a:ext uri="{FF2B5EF4-FFF2-40B4-BE49-F238E27FC236}">
-                <a16:creationId xmlns:a16="http://schemas.microsoft.com/office/drawing/2014/main" xmlns="" id="{BA8C8CCF-7823-480A-9A19-0F664DD17E3B}"/>
+                <a16:creationId xmlns:a16="http://schemas.microsoft.com/office/drawing/2014/main" id="{BA8C8CCF-7823-480A-9A19-0F664DD17E3B}"/>
               </a:ext>
             </a:extLst>
           </p:cNvPr>
@@ -3621,7 +3621,7 @@
           <p:cNvPr id="4" name="Espaço Reservado para Data 3">
             <a:extLst>
               <a:ext uri="{FF2B5EF4-FFF2-40B4-BE49-F238E27FC236}">
-                <a16:creationId xmlns:a16="http://schemas.microsoft.com/office/drawing/2014/main" xmlns="" id="{721D5734-7B1F-425D-942F-6EB73344027C}"/>
+                <a16:creationId xmlns:a16="http://schemas.microsoft.com/office/drawing/2014/main" id="{721D5734-7B1F-425D-942F-6EB73344027C}"/>
               </a:ext>
             </a:extLst>
           </p:cNvPr>
@@ -3639,7 +3639,7 @@
           <a:p>
             <a:fld id="{63289F7E-B80B-496E-81B4-D396C37C9454}" type="datetimeFigureOut">
               <a:rPr lang="pt-BR" smtClean="0"/>
-              <a:t>19/05/2025</a:t>
+              <a:t>21/05/2025</a:t>
             </a:fld>
             <a:endParaRPr lang="pt-BR"/>
           </a:p>
@@ -3650,7 +3650,7 @@
           <p:cNvPr id="5" name="Espaço Reservado para Rodapé 4">
             <a:extLst>
               <a:ext uri="{FF2B5EF4-FFF2-40B4-BE49-F238E27FC236}">
-                <a16:creationId xmlns:a16="http://schemas.microsoft.com/office/drawing/2014/main" xmlns="" id="{1E1AAEAC-F08D-45FE-89EC-B1B349A868C9}"/>
+                <a16:creationId xmlns:a16="http://schemas.microsoft.com/office/drawing/2014/main" id="{1E1AAEAC-F08D-45FE-89EC-B1B349A868C9}"/>
               </a:ext>
             </a:extLst>
           </p:cNvPr>
@@ -3675,7 +3675,7 @@
           <p:cNvPr id="6" name="Espaço Reservado para Número de Slide 5">
             <a:extLst>
               <a:ext uri="{FF2B5EF4-FFF2-40B4-BE49-F238E27FC236}">
-                <a16:creationId xmlns:a16="http://schemas.microsoft.com/office/drawing/2014/main" xmlns="" id="{BAA44493-9911-47B2-87A6-C2141A972BC8}"/>
+                <a16:creationId xmlns:a16="http://schemas.microsoft.com/office/drawing/2014/main" id="{BAA44493-9911-47B2-87A6-C2141A972BC8}"/>
               </a:ext>
             </a:extLst>
           </p:cNvPr>
@@ -3693,7 +3693,7 @@
           <a:p>
             <a:fld id="{1A7E88B7-70CE-4035-AE73-13FA6FB985D4}" type="slidenum">
               <a:rPr lang="pt-BR" smtClean="0"/>
-              <a:t>‹nº›</a:t>
+              <a:t>‹#›</a:t>
             </a:fld>
             <a:endParaRPr lang="pt-BR"/>
           </a:p>
@@ -3894,7 +3894,7 @@
             <a:fld id="{1D8BD707-D9CF-40AE-B4C6-C98DA3205C09}" type="datetimeFigureOut">
               <a:rPr lang="en-US" smtClean="0"/>
               <a:pPr/>
-              <a:t>5/19/2025</a:t>
+              <a:t>5/21/2025</a:t>
             </a:fld>
             <a:endParaRPr lang="en-US"/>
           </a:p>
@@ -3937,7 +3937,7 @@
             <a:fld id="{B6F15528-21DE-4FAA-801E-634DDDAF4B2B}" type="slidenum">
               <a:rPr lang="en-US" smtClean="0"/>
               <a:pPr/>
-              <a:t>‹nº›</a:t>
+              <a:t>‹#›</a:t>
             </a:fld>
             <a:endParaRPr lang="en-US"/>
           </a:p>
@@ -4066,7 +4066,7 @@
             <a:fld id="{1D8BD707-D9CF-40AE-B4C6-C98DA3205C09}" type="datetimeFigureOut">
               <a:rPr lang="en-US" smtClean="0"/>
               <a:pPr/>
-              <a:t>5/19/2025</a:t>
+              <a:t>5/21/2025</a:t>
             </a:fld>
             <a:endParaRPr lang="en-US"/>
           </a:p>
@@ -4109,7 +4109,7 @@
             <a:fld id="{B6F15528-21DE-4FAA-801E-634DDDAF4B2B}" type="slidenum">
               <a:rPr lang="en-US" smtClean="0"/>
               <a:pPr/>
-              <a:t>‹nº›</a:t>
+              <a:t>‹#›</a:t>
             </a:fld>
             <a:endParaRPr lang="en-US"/>
           </a:p>
@@ -4314,7 +4314,7 @@
             <a:fld id="{1D8BD707-D9CF-40AE-B4C6-C98DA3205C09}" type="datetimeFigureOut">
               <a:rPr lang="en-US" smtClean="0"/>
               <a:pPr/>
-              <a:t>5/19/2025</a:t>
+              <a:t>5/21/2025</a:t>
             </a:fld>
             <a:endParaRPr lang="en-US"/>
           </a:p>
@@ -4357,7 +4357,7 @@
             <a:fld id="{B6F15528-21DE-4FAA-801E-634DDDAF4B2B}" type="slidenum">
               <a:rPr lang="en-US" smtClean="0"/>
               <a:pPr/>
-              <a:t>‹nº›</a:t>
+              <a:t>‹#›</a:t>
             </a:fld>
             <a:endParaRPr lang="en-US"/>
           </a:p>
@@ -4604,7 +4604,7 @@
             <a:fld id="{1D8BD707-D9CF-40AE-B4C6-C98DA3205C09}" type="datetimeFigureOut">
               <a:rPr lang="en-US" smtClean="0"/>
               <a:pPr/>
-              <a:t>5/19/2025</a:t>
+              <a:t>5/21/2025</a:t>
             </a:fld>
             <a:endParaRPr lang="en-US"/>
           </a:p>
@@ -4647,7 +4647,7 @@
             <a:fld id="{B6F15528-21DE-4FAA-801E-634DDDAF4B2B}" type="slidenum">
               <a:rPr lang="en-US" smtClean="0"/>
               <a:pPr/>
-              <a:t>‹nº›</a:t>
+              <a:t>‹#›</a:t>
             </a:fld>
             <a:endParaRPr lang="en-US"/>
           </a:p>
@@ -5028,7 +5028,7 @@
             <a:fld id="{1D8BD707-D9CF-40AE-B4C6-C98DA3205C09}" type="datetimeFigureOut">
               <a:rPr lang="en-US" smtClean="0"/>
               <a:pPr/>
-              <a:t>5/19/2025</a:t>
+              <a:t>5/21/2025</a:t>
             </a:fld>
             <a:endParaRPr lang="en-US"/>
           </a:p>
@@ -5071,7 +5071,7 @@
             <a:fld id="{B6F15528-21DE-4FAA-801E-634DDDAF4B2B}" type="slidenum">
               <a:rPr lang="en-US" smtClean="0"/>
               <a:pPr/>
-              <a:t>‹nº›</a:t>
+              <a:t>‹#›</a:t>
             </a:fld>
             <a:endParaRPr lang="en-US"/>
           </a:p>
@@ -5148,7 +5148,7 @@
             <a:fld id="{1D8BD707-D9CF-40AE-B4C6-C98DA3205C09}" type="datetimeFigureOut">
               <a:rPr lang="en-US" smtClean="0"/>
               <a:pPr/>
-              <a:t>5/19/2025</a:t>
+              <a:t>5/21/2025</a:t>
             </a:fld>
             <a:endParaRPr lang="en-US"/>
           </a:p>
@@ -5191,7 +5191,7 @@
             <a:fld id="{B6F15528-21DE-4FAA-801E-634DDDAF4B2B}" type="slidenum">
               <a:rPr lang="en-US" smtClean="0"/>
               <a:pPr/>
-              <a:t>‹nº›</a:t>
+              <a:t>‹#›</a:t>
             </a:fld>
             <a:endParaRPr lang="en-US"/>
           </a:p>
@@ -5245,7 +5245,7 @@
             <a:fld id="{1D8BD707-D9CF-40AE-B4C6-C98DA3205C09}" type="datetimeFigureOut">
               <a:rPr lang="en-US" smtClean="0"/>
               <a:pPr/>
-              <a:t>5/19/2025</a:t>
+              <a:t>5/21/2025</a:t>
             </a:fld>
             <a:endParaRPr lang="en-US"/>
           </a:p>
@@ -5288,7 +5288,7 @@
             <a:fld id="{B6F15528-21DE-4FAA-801E-634DDDAF4B2B}" type="slidenum">
               <a:rPr lang="en-US" smtClean="0"/>
               <a:pPr/>
-              <a:t>‹nº›</a:t>
+              <a:t>‹#›</a:t>
             </a:fld>
             <a:endParaRPr lang="en-US"/>
           </a:p>
@@ -5524,7 +5524,7 @@
             <a:fld id="{1D8BD707-D9CF-40AE-B4C6-C98DA3205C09}" type="datetimeFigureOut">
               <a:rPr lang="en-US" smtClean="0"/>
               <a:pPr/>
-              <a:t>5/19/2025</a:t>
+              <a:t>5/21/2025</a:t>
             </a:fld>
             <a:endParaRPr lang="en-US"/>
           </a:p>
@@ -5567,7 +5567,7 @@
             <a:fld id="{B6F15528-21DE-4FAA-801E-634DDDAF4B2B}" type="slidenum">
               <a:rPr lang="en-US" smtClean="0"/>
               <a:pPr/>
-              <a:t>‹nº›</a:t>
+              <a:t>‹#›</a:t>
             </a:fld>
             <a:endParaRPr lang="en-US"/>
           </a:p>
@@ -5608,7 +5608,7 @@
           <p:cNvPr id="2" name="Título 1">
             <a:extLst>
               <a:ext uri="{FF2B5EF4-FFF2-40B4-BE49-F238E27FC236}">
-                <a16:creationId xmlns:a16="http://schemas.microsoft.com/office/drawing/2014/main" xmlns="" id="{71BD44A5-8F21-4626-A01D-48A1C874B1D5}"/>
+                <a16:creationId xmlns:a16="http://schemas.microsoft.com/office/drawing/2014/main" id="{71BD44A5-8F21-4626-A01D-48A1C874B1D5}"/>
               </a:ext>
             </a:extLst>
           </p:cNvPr>
@@ -5636,7 +5636,7 @@
           <p:cNvPr id="3" name="Espaço Reservado para Conteúdo 2">
             <a:extLst>
               <a:ext uri="{FF2B5EF4-FFF2-40B4-BE49-F238E27FC236}">
-                <a16:creationId xmlns:a16="http://schemas.microsoft.com/office/drawing/2014/main" xmlns="" id="{B79E8085-65A9-48AA-951D-71D978BFF4ED}"/>
+                <a16:creationId xmlns:a16="http://schemas.microsoft.com/office/drawing/2014/main" id="{B79E8085-65A9-48AA-951D-71D978BFF4ED}"/>
               </a:ext>
             </a:extLst>
           </p:cNvPr>
@@ -5693,7 +5693,7 @@
           <p:cNvPr id="4" name="Espaço Reservado para Data 3">
             <a:extLst>
               <a:ext uri="{FF2B5EF4-FFF2-40B4-BE49-F238E27FC236}">
-                <a16:creationId xmlns:a16="http://schemas.microsoft.com/office/drawing/2014/main" xmlns="" id="{F05BE1AF-51EA-425D-B188-DE7BD675009F}"/>
+                <a16:creationId xmlns:a16="http://schemas.microsoft.com/office/drawing/2014/main" id="{F05BE1AF-51EA-425D-B188-DE7BD675009F}"/>
               </a:ext>
             </a:extLst>
           </p:cNvPr>
@@ -5711,7 +5711,7 @@
           <a:p>
             <a:fld id="{63289F7E-B80B-496E-81B4-D396C37C9454}" type="datetimeFigureOut">
               <a:rPr lang="pt-BR" smtClean="0"/>
-              <a:t>19/05/2025</a:t>
+              <a:t>21/05/2025</a:t>
             </a:fld>
             <a:endParaRPr lang="pt-BR"/>
           </a:p>
@@ -5722,7 +5722,7 @@
           <p:cNvPr id="5" name="Espaço Reservado para Rodapé 4">
             <a:extLst>
               <a:ext uri="{FF2B5EF4-FFF2-40B4-BE49-F238E27FC236}">
-                <a16:creationId xmlns:a16="http://schemas.microsoft.com/office/drawing/2014/main" xmlns="" id="{121BE632-29CF-4CB9-B365-C9EF38F89BE6}"/>
+                <a16:creationId xmlns:a16="http://schemas.microsoft.com/office/drawing/2014/main" id="{121BE632-29CF-4CB9-B365-C9EF38F89BE6}"/>
               </a:ext>
             </a:extLst>
           </p:cNvPr>
@@ -5747,7 +5747,7 @@
           <p:cNvPr id="6" name="Espaço Reservado para Número de Slide 5">
             <a:extLst>
               <a:ext uri="{FF2B5EF4-FFF2-40B4-BE49-F238E27FC236}">
-                <a16:creationId xmlns:a16="http://schemas.microsoft.com/office/drawing/2014/main" xmlns="" id="{60CF3DD1-9AEC-4A57-B461-4E4DD86FAC18}"/>
+                <a16:creationId xmlns:a16="http://schemas.microsoft.com/office/drawing/2014/main" id="{60CF3DD1-9AEC-4A57-B461-4E4DD86FAC18}"/>
               </a:ext>
             </a:extLst>
           </p:cNvPr>
@@ -5765,7 +5765,7 @@
           <a:p>
             <a:fld id="{1A7E88B7-70CE-4035-AE73-13FA6FB985D4}" type="slidenum">
               <a:rPr lang="pt-BR" smtClean="0"/>
-              <a:t>‹nº›</a:t>
+              <a:t>‹#›</a:t>
             </a:fld>
             <a:endParaRPr lang="pt-BR"/>
           </a:p>
@@ -5981,7 +5981,7 @@
             <a:fld id="{1D8BD707-D9CF-40AE-B4C6-C98DA3205C09}" type="datetimeFigureOut">
               <a:rPr lang="en-US" smtClean="0"/>
               <a:pPr/>
-              <a:t>5/19/2025</a:t>
+              <a:t>5/21/2025</a:t>
             </a:fld>
             <a:endParaRPr lang="en-US"/>
           </a:p>
@@ -6024,7 +6024,7 @@
             <a:fld id="{B6F15528-21DE-4FAA-801E-634DDDAF4B2B}" type="slidenum">
               <a:rPr lang="en-US" smtClean="0"/>
               <a:pPr/>
-              <a:t>‹nº›</a:t>
+              <a:t>‹#›</a:t>
             </a:fld>
             <a:endParaRPr lang="en-US"/>
           </a:p>
@@ -6153,7 +6153,7 @@
             <a:fld id="{1D8BD707-D9CF-40AE-B4C6-C98DA3205C09}" type="datetimeFigureOut">
               <a:rPr lang="en-US" smtClean="0"/>
               <a:pPr/>
-              <a:t>5/19/2025</a:t>
+              <a:t>5/21/2025</a:t>
             </a:fld>
             <a:endParaRPr lang="en-US"/>
           </a:p>
@@ -6196,7 +6196,7 @@
             <a:fld id="{B6F15528-21DE-4FAA-801E-634DDDAF4B2B}" type="slidenum">
               <a:rPr lang="en-US" smtClean="0"/>
               <a:pPr/>
-              <a:t>‹nº›</a:t>
+              <a:t>‹#›</a:t>
             </a:fld>
             <a:endParaRPr lang="en-US"/>
           </a:p>
@@ -6335,7 +6335,7 @@
             <a:fld id="{1D8BD707-D9CF-40AE-B4C6-C98DA3205C09}" type="datetimeFigureOut">
               <a:rPr lang="en-US" smtClean="0"/>
               <a:pPr/>
-              <a:t>5/19/2025</a:t>
+              <a:t>5/21/2025</a:t>
             </a:fld>
             <a:endParaRPr lang="en-US"/>
           </a:p>
@@ -6378,7 +6378,7 @@
             <a:fld id="{B6F15528-21DE-4FAA-801E-634DDDAF4B2B}" type="slidenum">
               <a:rPr lang="en-US" smtClean="0"/>
               <a:pPr/>
-              <a:t>‹nº›</a:t>
+              <a:t>‹#›</a:t>
             </a:fld>
             <a:endParaRPr lang="en-US"/>
           </a:p>
@@ -6419,7 +6419,7 @@
           <p:cNvPr id="2" name="Título 1">
             <a:extLst>
               <a:ext uri="{FF2B5EF4-FFF2-40B4-BE49-F238E27FC236}">
-                <a16:creationId xmlns:a16="http://schemas.microsoft.com/office/drawing/2014/main" xmlns="" id="{34AB2FF0-A4D7-4E28-991D-FF26140D5988}"/>
+                <a16:creationId xmlns:a16="http://schemas.microsoft.com/office/drawing/2014/main" id="{34AB2FF0-A4D7-4E28-991D-FF26140D5988}"/>
               </a:ext>
             </a:extLst>
           </p:cNvPr>
@@ -6456,7 +6456,7 @@
           <p:cNvPr id="3" name="Espaço Reservado para Texto 2">
             <a:extLst>
               <a:ext uri="{FF2B5EF4-FFF2-40B4-BE49-F238E27FC236}">
-                <a16:creationId xmlns:a16="http://schemas.microsoft.com/office/drawing/2014/main" xmlns="" id="{E2AC45B0-4145-40DB-8E61-105461170604}"/>
+                <a16:creationId xmlns:a16="http://schemas.microsoft.com/office/drawing/2014/main" id="{E2AC45B0-4145-40DB-8E61-105461170604}"/>
               </a:ext>
             </a:extLst>
           </p:cNvPr>
@@ -6581,7 +6581,7 @@
           <p:cNvPr id="4" name="Espaço Reservado para Data 3">
             <a:extLst>
               <a:ext uri="{FF2B5EF4-FFF2-40B4-BE49-F238E27FC236}">
-                <a16:creationId xmlns:a16="http://schemas.microsoft.com/office/drawing/2014/main" xmlns="" id="{50F1D3FB-740A-4EBA-A309-2CE71D12ECFB}"/>
+                <a16:creationId xmlns:a16="http://schemas.microsoft.com/office/drawing/2014/main" id="{50F1D3FB-740A-4EBA-A309-2CE71D12ECFB}"/>
               </a:ext>
             </a:extLst>
           </p:cNvPr>
@@ -6599,7 +6599,7 @@
           <a:p>
             <a:fld id="{63289F7E-B80B-496E-81B4-D396C37C9454}" type="datetimeFigureOut">
               <a:rPr lang="pt-BR" smtClean="0"/>
-              <a:t>19/05/2025</a:t>
+              <a:t>21/05/2025</a:t>
             </a:fld>
             <a:endParaRPr lang="pt-BR"/>
           </a:p>
@@ -6610,7 +6610,7 @@
           <p:cNvPr id="5" name="Espaço Reservado para Rodapé 4">
             <a:extLst>
               <a:ext uri="{FF2B5EF4-FFF2-40B4-BE49-F238E27FC236}">
-                <a16:creationId xmlns:a16="http://schemas.microsoft.com/office/drawing/2014/main" xmlns="" id="{BDCAB18F-8715-4465-A940-F9C193A2ACE9}"/>
+                <a16:creationId xmlns:a16="http://schemas.microsoft.com/office/drawing/2014/main" id="{BDCAB18F-8715-4465-A940-F9C193A2ACE9}"/>
               </a:ext>
             </a:extLst>
           </p:cNvPr>
@@ -6635,7 +6635,7 @@
           <p:cNvPr id="6" name="Espaço Reservado para Número de Slide 5">
             <a:extLst>
               <a:ext uri="{FF2B5EF4-FFF2-40B4-BE49-F238E27FC236}">
-                <a16:creationId xmlns:a16="http://schemas.microsoft.com/office/drawing/2014/main" xmlns="" id="{353466C6-8248-429F-8056-FF040BF509EB}"/>
+                <a16:creationId xmlns:a16="http://schemas.microsoft.com/office/drawing/2014/main" id="{353466C6-8248-429F-8056-FF040BF509EB}"/>
               </a:ext>
             </a:extLst>
           </p:cNvPr>
@@ -6653,7 +6653,7 @@
           <a:p>
             <a:fld id="{1A7E88B7-70CE-4035-AE73-13FA6FB985D4}" type="slidenum">
               <a:rPr lang="pt-BR" smtClean="0"/>
-              <a:t>‹nº›</a:t>
+              <a:t>‹#›</a:t>
             </a:fld>
             <a:endParaRPr lang="pt-BR"/>
           </a:p>
@@ -6694,7 +6694,7 @@
           <p:cNvPr id="2" name="Título 1">
             <a:extLst>
               <a:ext uri="{FF2B5EF4-FFF2-40B4-BE49-F238E27FC236}">
-                <a16:creationId xmlns:a16="http://schemas.microsoft.com/office/drawing/2014/main" xmlns="" id="{BC7BB9F0-F14B-4A91-B2B7-35BC47FE4DE7}"/>
+                <a16:creationId xmlns:a16="http://schemas.microsoft.com/office/drawing/2014/main" id="{BC7BB9F0-F14B-4A91-B2B7-35BC47FE4DE7}"/>
               </a:ext>
             </a:extLst>
           </p:cNvPr>
@@ -6722,7 +6722,7 @@
           <p:cNvPr id="3" name="Espaço Reservado para Conteúdo 2">
             <a:extLst>
               <a:ext uri="{FF2B5EF4-FFF2-40B4-BE49-F238E27FC236}">
-                <a16:creationId xmlns:a16="http://schemas.microsoft.com/office/drawing/2014/main" xmlns="" id="{EC1FC1C4-73DA-47A6-8496-B0B457F7D39A}"/>
+                <a16:creationId xmlns:a16="http://schemas.microsoft.com/office/drawing/2014/main" id="{EC1FC1C4-73DA-47A6-8496-B0B457F7D39A}"/>
               </a:ext>
             </a:extLst>
           </p:cNvPr>
@@ -6784,7 +6784,7 @@
           <p:cNvPr id="4" name="Espaço Reservado para Conteúdo 3">
             <a:extLst>
               <a:ext uri="{FF2B5EF4-FFF2-40B4-BE49-F238E27FC236}">
-                <a16:creationId xmlns:a16="http://schemas.microsoft.com/office/drawing/2014/main" xmlns="" id="{E92F06A8-A449-4D92-9912-76873E529B38}"/>
+                <a16:creationId xmlns:a16="http://schemas.microsoft.com/office/drawing/2014/main" id="{E92F06A8-A449-4D92-9912-76873E529B38}"/>
               </a:ext>
             </a:extLst>
           </p:cNvPr>
@@ -6846,7 +6846,7 @@
           <p:cNvPr id="5" name="Espaço Reservado para Data 4">
             <a:extLst>
               <a:ext uri="{FF2B5EF4-FFF2-40B4-BE49-F238E27FC236}">
-                <a16:creationId xmlns:a16="http://schemas.microsoft.com/office/drawing/2014/main" xmlns="" id="{938070A4-BC2F-4D55-BD8D-DEAF11BB9EE9}"/>
+                <a16:creationId xmlns:a16="http://schemas.microsoft.com/office/drawing/2014/main" id="{938070A4-BC2F-4D55-BD8D-DEAF11BB9EE9}"/>
               </a:ext>
             </a:extLst>
           </p:cNvPr>
@@ -6864,7 +6864,7 @@
           <a:p>
             <a:fld id="{63289F7E-B80B-496E-81B4-D396C37C9454}" type="datetimeFigureOut">
               <a:rPr lang="pt-BR" smtClean="0"/>
-              <a:t>19/05/2025</a:t>
+              <a:t>21/05/2025</a:t>
             </a:fld>
             <a:endParaRPr lang="pt-BR"/>
           </a:p>
@@ -6875,7 +6875,7 @@
           <p:cNvPr id="6" name="Espaço Reservado para Rodapé 5">
             <a:extLst>
               <a:ext uri="{FF2B5EF4-FFF2-40B4-BE49-F238E27FC236}">
-                <a16:creationId xmlns:a16="http://schemas.microsoft.com/office/drawing/2014/main" xmlns="" id="{45CC2DB8-844A-465F-BA9A-7734C80C7F43}"/>
+                <a16:creationId xmlns:a16="http://schemas.microsoft.com/office/drawing/2014/main" id="{45CC2DB8-844A-465F-BA9A-7734C80C7F43}"/>
               </a:ext>
             </a:extLst>
           </p:cNvPr>
@@ -6900,7 +6900,7 @@
           <p:cNvPr id="7" name="Espaço Reservado para Número de Slide 6">
             <a:extLst>
               <a:ext uri="{FF2B5EF4-FFF2-40B4-BE49-F238E27FC236}">
-                <a16:creationId xmlns:a16="http://schemas.microsoft.com/office/drawing/2014/main" xmlns="" id="{4CC606A8-097B-4040-94E0-CD8C88280D8F}"/>
+                <a16:creationId xmlns:a16="http://schemas.microsoft.com/office/drawing/2014/main" id="{4CC606A8-097B-4040-94E0-CD8C88280D8F}"/>
               </a:ext>
             </a:extLst>
           </p:cNvPr>
@@ -6918,7 +6918,7 @@
           <a:p>
             <a:fld id="{1A7E88B7-70CE-4035-AE73-13FA6FB985D4}" type="slidenum">
               <a:rPr lang="pt-BR" smtClean="0"/>
-              <a:t>‹nº›</a:t>
+              <a:t>‹#›</a:t>
             </a:fld>
             <a:endParaRPr lang="pt-BR"/>
           </a:p>
@@ -6959,7 +6959,7 @@
           <p:cNvPr id="2" name="Título 1">
             <a:extLst>
               <a:ext uri="{FF2B5EF4-FFF2-40B4-BE49-F238E27FC236}">
-                <a16:creationId xmlns:a16="http://schemas.microsoft.com/office/drawing/2014/main" xmlns="" id="{76D66686-0143-4CB6-8C09-BA326F1E7ACA}"/>
+                <a16:creationId xmlns:a16="http://schemas.microsoft.com/office/drawing/2014/main" id="{76D66686-0143-4CB6-8C09-BA326F1E7ACA}"/>
               </a:ext>
             </a:extLst>
           </p:cNvPr>
@@ -6992,7 +6992,7 @@
           <p:cNvPr id="3" name="Espaço Reservado para Texto 2">
             <a:extLst>
               <a:ext uri="{FF2B5EF4-FFF2-40B4-BE49-F238E27FC236}">
-                <a16:creationId xmlns:a16="http://schemas.microsoft.com/office/drawing/2014/main" xmlns="" id="{0227AB85-F59E-4BCE-B846-4FA0992C2F23}"/>
+                <a16:creationId xmlns:a16="http://schemas.microsoft.com/office/drawing/2014/main" id="{0227AB85-F59E-4BCE-B846-4FA0992C2F23}"/>
               </a:ext>
             </a:extLst>
           </p:cNvPr>
@@ -7063,7 +7063,7 @@
           <p:cNvPr id="4" name="Espaço Reservado para Conteúdo 3">
             <a:extLst>
               <a:ext uri="{FF2B5EF4-FFF2-40B4-BE49-F238E27FC236}">
-                <a16:creationId xmlns:a16="http://schemas.microsoft.com/office/drawing/2014/main" xmlns="" id="{3373456C-7319-4D0A-827D-D29F6B083F5D}"/>
+                <a16:creationId xmlns:a16="http://schemas.microsoft.com/office/drawing/2014/main" id="{3373456C-7319-4D0A-827D-D29F6B083F5D}"/>
               </a:ext>
             </a:extLst>
           </p:cNvPr>
@@ -7125,7 +7125,7 @@
           <p:cNvPr id="5" name="Espaço Reservado para Texto 4">
             <a:extLst>
               <a:ext uri="{FF2B5EF4-FFF2-40B4-BE49-F238E27FC236}">
-                <a16:creationId xmlns:a16="http://schemas.microsoft.com/office/drawing/2014/main" xmlns="" id="{4CD109D0-2E83-4262-8029-A871CEC47406}"/>
+                <a16:creationId xmlns:a16="http://schemas.microsoft.com/office/drawing/2014/main" id="{4CD109D0-2E83-4262-8029-A871CEC47406}"/>
               </a:ext>
             </a:extLst>
           </p:cNvPr>
@@ -7196,7 +7196,7 @@
           <p:cNvPr id="6" name="Espaço Reservado para Conteúdo 5">
             <a:extLst>
               <a:ext uri="{FF2B5EF4-FFF2-40B4-BE49-F238E27FC236}">
-                <a16:creationId xmlns:a16="http://schemas.microsoft.com/office/drawing/2014/main" xmlns="" id="{AD706E3A-CFBB-4A6C-A65F-D0360A9E74FE}"/>
+                <a16:creationId xmlns:a16="http://schemas.microsoft.com/office/drawing/2014/main" id="{AD706E3A-CFBB-4A6C-A65F-D0360A9E74FE}"/>
               </a:ext>
             </a:extLst>
           </p:cNvPr>
@@ -7258,7 +7258,7 @@
           <p:cNvPr id="7" name="Espaço Reservado para Data 6">
             <a:extLst>
               <a:ext uri="{FF2B5EF4-FFF2-40B4-BE49-F238E27FC236}">
-                <a16:creationId xmlns:a16="http://schemas.microsoft.com/office/drawing/2014/main" xmlns="" id="{4172C0E5-5AF0-4805-BB51-443733CD2BD5}"/>
+                <a16:creationId xmlns:a16="http://schemas.microsoft.com/office/drawing/2014/main" id="{4172C0E5-5AF0-4805-BB51-443733CD2BD5}"/>
               </a:ext>
             </a:extLst>
           </p:cNvPr>
@@ -7276,7 +7276,7 @@
           <a:p>
             <a:fld id="{63289F7E-B80B-496E-81B4-D396C37C9454}" type="datetimeFigureOut">
               <a:rPr lang="pt-BR" smtClean="0"/>
-              <a:t>19/05/2025</a:t>
+              <a:t>21/05/2025</a:t>
             </a:fld>
             <a:endParaRPr lang="pt-BR"/>
           </a:p>
@@ -7287,7 +7287,7 @@
           <p:cNvPr id="8" name="Espaço Reservado para Rodapé 7">
             <a:extLst>
               <a:ext uri="{FF2B5EF4-FFF2-40B4-BE49-F238E27FC236}">
-                <a16:creationId xmlns:a16="http://schemas.microsoft.com/office/drawing/2014/main" xmlns="" id="{0E801648-156F-497E-99CF-797DF48051E1}"/>
+                <a16:creationId xmlns:a16="http://schemas.microsoft.com/office/drawing/2014/main" id="{0E801648-156F-497E-99CF-797DF48051E1}"/>
               </a:ext>
             </a:extLst>
           </p:cNvPr>
@@ -7312,7 +7312,7 @@
           <p:cNvPr id="9" name="Espaço Reservado para Número de Slide 8">
             <a:extLst>
               <a:ext uri="{FF2B5EF4-FFF2-40B4-BE49-F238E27FC236}">
-                <a16:creationId xmlns:a16="http://schemas.microsoft.com/office/drawing/2014/main" xmlns="" id="{EEE23D32-80E7-4796-A137-66BF842E4B53}"/>
+                <a16:creationId xmlns:a16="http://schemas.microsoft.com/office/drawing/2014/main" id="{EEE23D32-80E7-4796-A137-66BF842E4B53}"/>
               </a:ext>
             </a:extLst>
           </p:cNvPr>
@@ -7330,7 +7330,7 @@
           <a:p>
             <a:fld id="{1A7E88B7-70CE-4035-AE73-13FA6FB985D4}" type="slidenum">
               <a:rPr lang="pt-BR" smtClean="0"/>
-              <a:t>‹nº›</a:t>
+              <a:t>‹#›</a:t>
             </a:fld>
             <a:endParaRPr lang="pt-BR"/>
           </a:p>
@@ -7371,7 +7371,7 @@
           <p:cNvPr id="2" name="Título 1">
             <a:extLst>
               <a:ext uri="{FF2B5EF4-FFF2-40B4-BE49-F238E27FC236}">
-                <a16:creationId xmlns:a16="http://schemas.microsoft.com/office/drawing/2014/main" xmlns="" id="{2BCE2379-C78F-47E1-8CFC-B846E7AF148D}"/>
+                <a16:creationId xmlns:a16="http://schemas.microsoft.com/office/drawing/2014/main" id="{2BCE2379-C78F-47E1-8CFC-B846E7AF148D}"/>
               </a:ext>
             </a:extLst>
           </p:cNvPr>
@@ -7399,7 +7399,7 @@
           <p:cNvPr id="3" name="Espaço Reservado para Data 2">
             <a:extLst>
               <a:ext uri="{FF2B5EF4-FFF2-40B4-BE49-F238E27FC236}">
-                <a16:creationId xmlns:a16="http://schemas.microsoft.com/office/drawing/2014/main" xmlns="" id="{342600A9-7F92-4E22-9D94-E4717252A817}"/>
+                <a16:creationId xmlns:a16="http://schemas.microsoft.com/office/drawing/2014/main" id="{342600A9-7F92-4E22-9D94-E4717252A817}"/>
               </a:ext>
             </a:extLst>
           </p:cNvPr>
@@ -7417,7 +7417,7 @@
           <a:p>
             <a:fld id="{63289F7E-B80B-496E-81B4-D396C37C9454}" type="datetimeFigureOut">
               <a:rPr lang="pt-BR" smtClean="0"/>
-              <a:t>19/05/2025</a:t>
+              <a:t>21/05/2025</a:t>
             </a:fld>
             <a:endParaRPr lang="pt-BR"/>
           </a:p>
@@ -7428,7 +7428,7 @@
           <p:cNvPr id="4" name="Espaço Reservado para Rodapé 3">
             <a:extLst>
               <a:ext uri="{FF2B5EF4-FFF2-40B4-BE49-F238E27FC236}">
-                <a16:creationId xmlns:a16="http://schemas.microsoft.com/office/drawing/2014/main" xmlns="" id="{192E6BED-F546-40CC-A2DF-99CBA853654E}"/>
+                <a16:creationId xmlns:a16="http://schemas.microsoft.com/office/drawing/2014/main" id="{192E6BED-F546-40CC-A2DF-99CBA853654E}"/>
               </a:ext>
             </a:extLst>
           </p:cNvPr>
@@ -7453,7 +7453,7 @@
           <p:cNvPr id="5" name="Espaço Reservado para Número de Slide 4">
             <a:extLst>
               <a:ext uri="{FF2B5EF4-FFF2-40B4-BE49-F238E27FC236}">
-                <a16:creationId xmlns:a16="http://schemas.microsoft.com/office/drawing/2014/main" xmlns="" id="{6091CC40-A8C4-4063-80EB-CC5099621678}"/>
+                <a16:creationId xmlns:a16="http://schemas.microsoft.com/office/drawing/2014/main" id="{6091CC40-A8C4-4063-80EB-CC5099621678}"/>
               </a:ext>
             </a:extLst>
           </p:cNvPr>
@@ -7471,7 +7471,7 @@
           <a:p>
             <a:fld id="{1A7E88B7-70CE-4035-AE73-13FA6FB985D4}" type="slidenum">
               <a:rPr lang="pt-BR" smtClean="0"/>
-              <a:t>‹nº›</a:t>
+              <a:t>‹#›</a:t>
             </a:fld>
             <a:endParaRPr lang="pt-BR"/>
           </a:p>
@@ -7512,7 +7512,7 @@
           <p:cNvPr id="2" name="Espaço Reservado para Data 1">
             <a:extLst>
               <a:ext uri="{FF2B5EF4-FFF2-40B4-BE49-F238E27FC236}">
-                <a16:creationId xmlns:a16="http://schemas.microsoft.com/office/drawing/2014/main" xmlns="" id="{DD19515C-212C-4EAE-84A3-8FF4BC844F1B}"/>
+                <a16:creationId xmlns:a16="http://schemas.microsoft.com/office/drawing/2014/main" id="{DD19515C-212C-4EAE-84A3-8FF4BC844F1B}"/>
               </a:ext>
             </a:extLst>
           </p:cNvPr>
@@ -7530,7 +7530,7 @@
           <a:p>
             <a:fld id="{63289F7E-B80B-496E-81B4-D396C37C9454}" type="datetimeFigureOut">
               <a:rPr lang="pt-BR" smtClean="0"/>
-              <a:t>19/05/2025</a:t>
+              <a:t>21/05/2025</a:t>
             </a:fld>
             <a:endParaRPr lang="pt-BR"/>
           </a:p>
@@ -7541,7 +7541,7 @@
           <p:cNvPr id="3" name="Espaço Reservado para Rodapé 2">
             <a:extLst>
               <a:ext uri="{FF2B5EF4-FFF2-40B4-BE49-F238E27FC236}">
-                <a16:creationId xmlns:a16="http://schemas.microsoft.com/office/drawing/2014/main" xmlns="" id="{94D3D120-B3E8-4C96-861D-7A4F12F49B3A}"/>
+                <a16:creationId xmlns:a16="http://schemas.microsoft.com/office/drawing/2014/main" id="{94D3D120-B3E8-4C96-861D-7A4F12F49B3A}"/>
               </a:ext>
             </a:extLst>
           </p:cNvPr>
@@ -7566,7 +7566,7 @@
           <p:cNvPr id="4" name="Espaço Reservado para Número de Slide 3">
             <a:extLst>
               <a:ext uri="{FF2B5EF4-FFF2-40B4-BE49-F238E27FC236}">
-                <a16:creationId xmlns:a16="http://schemas.microsoft.com/office/drawing/2014/main" xmlns="" id="{42E49B68-FA1B-468B-9F17-D5C09243D454}"/>
+                <a16:creationId xmlns:a16="http://schemas.microsoft.com/office/drawing/2014/main" id="{42E49B68-FA1B-468B-9F17-D5C09243D454}"/>
               </a:ext>
             </a:extLst>
           </p:cNvPr>
@@ -7584,7 +7584,7 @@
           <a:p>
             <a:fld id="{1A7E88B7-70CE-4035-AE73-13FA6FB985D4}" type="slidenum">
               <a:rPr lang="pt-BR" smtClean="0"/>
-              <a:t>‹nº›</a:t>
+              <a:t>‹#›</a:t>
             </a:fld>
             <a:endParaRPr lang="pt-BR"/>
           </a:p>
@@ -7625,7 +7625,7 @@
           <p:cNvPr id="2" name="Título 1">
             <a:extLst>
               <a:ext uri="{FF2B5EF4-FFF2-40B4-BE49-F238E27FC236}">
-                <a16:creationId xmlns:a16="http://schemas.microsoft.com/office/drawing/2014/main" xmlns="" id="{1C17BCBE-A897-4319-85EC-D87909C24980}"/>
+                <a16:creationId xmlns:a16="http://schemas.microsoft.com/office/drawing/2014/main" id="{1C17BCBE-A897-4319-85EC-D87909C24980}"/>
               </a:ext>
             </a:extLst>
           </p:cNvPr>
@@ -7662,7 +7662,7 @@
           <p:cNvPr id="3" name="Espaço Reservado para Conteúdo 2">
             <a:extLst>
               <a:ext uri="{FF2B5EF4-FFF2-40B4-BE49-F238E27FC236}">
-                <a16:creationId xmlns:a16="http://schemas.microsoft.com/office/drawing/2014/main" xmlns="" id="{4226F885-0204-4913-868B-4B8B82576F17}"/>
+                <a16:creationId xmlns:a16="http://schemas.microsoft.com/office/drawing/2014/main" id="{4226F885-0204-4913-868B-4B8B82576F17}"/>
               </a:ext>
             </a:extLst>
           </p:cNvPr>
@@ -7752,7 +7752,7 @@
           <p:cNvPr id="4" name="Espaço Reservado para Texto 3">
             <a:extLst>
               <a:ext uri="{FF2B5EF4-FFF2-40B4-BE49-F238E27FC236}">
-                <a16:creationId xmlns:a16="http://schemas.microsoft.com/office/drawing/2014/main" xmlns="" id="{00F9F784-A858-441B-8AB5-697098141751}"/>
+                <a16:creationId xmlns:a16="http://schemas.microsoft.com/office/drawing/2014/main" id="{00F9F784-A858-441B-8AB5-697098141751}"/>
               </a:ext>
             </a:extLst>
           </p:cNvPr>
@@ -7823,7 +7823,7 @@
           <p:cNvPr id="5" name="Espaço Reservado para Data 4">
             <a:extLst>
               <a:ext uri="{FF2B5EF4-FFF2-40B4-BE49-F238E27FC236}">
-                <a16:creationId xmlns:a16="http://schemas.microsoft.com/office/drawing/2014/main" xmlns="" id="{A4DC363A-5000-472E-8B17-02E7DCB8840A}"/>
+                <a16:creationId xmlns:a16="http://schemas.microsoft.com/office/drawing/2014/main" id="{A4DC363A-5000-472E-8B17-02E7DCB8840A}"/>
               </a:ext>
             </a:extLst>
           </p:cNvPr>
@@ -7841,7 +7841,7 @@
           <a:p>
             <a:fld id="{63289F7E-B80B-496E-81B4-D396C37C9454}" type="datetimeFigureOut">
               <a:rPr lang="pt-BR" smtClean="0"/>
-              <a:t>19/05/2025</a:t>
+              <a:t>21/05/2025</a:t>
             </a:fld>
             <a:endParaRPr lang="pt-BR"/>
           </a:p>
@@ -7852,7 +7852,7 @@
           <p:cNvPr id="6" name="Espaço Reservado para Rodapé 5">
             <a:extLst>
               <a:ext uri="{FF2B5EF4-FFF2-40B4-BE49-F238E27FC236}">
-                <a16:creationId xmlns:a16="http://schemas.microsoft.com/office/drawing/2014/main" xmlns="" id="{5548425D-2C21-4C56-BAD4-662978775C28}"/>
+                <a16:creationId xmlns:a16="http://schemas.microsoft.com/office/drawing/2014/main" id="{5548425D-2C21-4C56-BAD4-662978775C28}"/>
               </a:ext>
             </a:extLst>
           </p:cNvPr>
@@ -7877,7 +7877,7 @@
           <p:cNvPr id="7" name="Espaço Reservado para Número de Slide 6">
             <a:extLst>
               <a:ext uri="{FF2B5EF4-FFF2-40B4-BE49-F238E27FC236}">
-                <a16:creationId xmlns:a16="http://schemas.microsoft.com/office/drawing/2014/main" xmlns="" id="{C63E9726-E64C-42B2-AE8A-8C235A956B48}"/>
+                <a16:creationId xmlns:a16="http://schemas.microsoft.com/office/drawing/2014/main" id="{C63E9726-E64C-42B2-AE8A-8C235A956B48}"/>
               </a:ext>
             </a:extLst>
           </p:cNvPr>
@@ -7895,7 +7895,7 @@
           <a:p>
             <a:fld id="{1A7E88B7-70CE-4035-AE73-13FA6FB985D4}" type="slidenum">
               <a:rPr lang="pt-BR" smtClean="0"/>
-              <a:t>‹nº›</a:t>
+              <a:t>‹#›</a:t>
             </a:fld>
             <a:endParaRPr lang="pt-BR"/>
           </a:p>
@@ -7936,7 +7936,7 @@
           <p:cNvPr id="2" name="Título 1">
             <a:extLst>
               <a:ext uri="{FF2B5EF4-FFF2-40B4-BE49-F238E27FC236}">
-                <a16:creationId xmlns:a16="http://schemas.microsoft.com/office/drawing/2014/main" xmlns="" id="{11086A78-3E74-450C-96A6-CA8AC37AF772}"/>
+                <a16:creationId xmlns:a16="http://schemas.microsoft.com/office/drawing/2014/main" id="{11086A78-3E74-450C-96A6-CA8AC37AF772}"/>
               </a:ext>
             </a:extLst>
           </p:cNvPr>
@@ -7973,7 +7973,7 @@
           <p:cNvPr id="3" name="Espaço Reservado para Imagem 2">
             <a:extLst>
               <a:ext uri="{FF2B5EF4-FFF2-40B4-BE49-F238E27FC236}">
-                <a16:creationId xmlns:a16="http://schemas.microsoft.com/office/drawing/2014/main" xmlns="" id="{5F5B7312-975A-4DBC-9B2F-3652ADA006FD}"/>
+                <a16:creationId xmlns:a16="http://schemas.microsoft.com/office/drawing/2014/main" id="{5F5B7312-975A-4DBC-9B2F-3652ADA006FD}"/>
               </a:ext>
             </a:extLst>
           </p:cNvPr>
@@ -8040,7 +8040,7 @@
           <p:cNvPr id="4" name="Espaço Reservado para Texto 3">
             <a:extLst>
               <a:ext uri="{FF2B5EF4-FFF2-40B4-BE49-F238E27FC236}">
-                <a16:creationId xmlns:a16="http://schemas.microsoft.com/office/drawing/2014/main" xmlns="" id="{AAF805F5-1DFF-41C6-944C-7D79FE0D0963}"/>
+                <a16:creationId xmlns:a16="http://schemas.microsoft.com/office/drawing/2014/main" id="{AAF805F5-1DFF-41C6-944C-7D79FE0D0963}"/>
               </a:ext>
             </a:extLst>
           </p:cNvPr>
@@ -8111,7 +8111,7 @@
           <p:cNvPr id="5" name="Espaço Reservado para Data 4">
             <a:extLst>
               <a:ext uri="{FF2B5EF4-FFF2-40B4-BE49-F238E27FC236}">
-                <a16:creationId xmlns:a16="http://schemas.microsoft.com/office/drawing/2014/main" xmlns="" id="{02113D81-8665-4516-BD81-C6A1F254EECD}"/>
+                <a16:creationId xmlns:a16="http://schemas.microsoft.com/office/drawing/2014/main" id="{02113D81-8665-4516-BD81-C6A1F254EECD}"/>
               </a:ext>
             </a:extLst>
           </p:cNvPr>
@@ -8129,7 +8129,7 @@
           <a:p>
             <a:fld id="{63289F7E-B80B-496E-81B4-D396C37C9454}" type="datetimeFigureOut">
               <a:rPr lang="pt-BR" smtClean="0"/>
-              <a:t>19/05/2025</a:t>
+              <a:t>21/05/2025</a:t>
             </a:fld>
             <a:endParaRPr lang="pt-BR"/>
           </a:p>
@@ -8140,7 +8140,7 @@
           <p:cNvPr id="6" name="Espaço Reservado para Rodapé 5">
             <a:extLst>
               <a:ext uri="{FF2B5EF4-FFF2-40B4-BE49-F238E27FC236}">
-                <a16:creationId xmlns:a16="http://schemas.microsoft.com/office/drawing/2014/main" xmlns="" id="{2B00C88B-FF32-40AA-A187-727D96FD7862}"/>
+                <a16:creationId xmlns:a16="http://schemas.microsoft.com/office/drawing/2014/main" id="{2B00C88B-FF32-40AA-A187-727D96FD7862}"/>
               </a:ext>
             </a:extLst>
           </p:cNvPr>
@@ -8165,7 +8165,7 @@
           <p:cNvPr id="7" name="Espaço Reservado para Número de Slide 6">
             <a:extLst>
               <a:ext uri="{FF2B5EF4-FFF2-40B4-BE49-F238E27FC236}">
-                <a16:creationId xmlns:a16="http://schemas.microsoft.com/office/drawing/2014/main" xmlns="" id="{A04D1A2D-69F7-4B8F-A730-BC26DC340BA6}"/>
+                <a16:creationId xmlns:a16="http://schemas.microsoft.com/office/drawing/2014/main" id="{A04D1A2D-69F7-4B8F-A730-BC26DC340BA6}"/>
               </a:ext>
             </a:extLst>
           </p:cNvPr>
@@ -8183,7 +8183,7 @@
           <a:p>
             <a:fld id="{1A7E88B7-70CE-4035-AE73-13FA6FB985D4}" type="slidenum">
               <a:rPr lang="pt-BR" smtClean="0"/>
-              <a:t>‹nº›</a:t>
+              <a:t>‹#›</a:t>
             </a:fld>
             <a:endParaRPr lang="pt-BR"/>
           </a:p>
@@ -8229,7 +8229,7 @@
           <p:cNvPr id="2" name="Espaço Reservado para Título 1">
             <a:extLst>
               <a:ext uri="{FF2B5EF4-FFF2-40B4-BE49-F238E27FC236}">
-                <a16:creationId xmlns:a16="http://schemas.microsoft.com/office/drawing/2014/main" xmlns="" id="{E69A0273-1966-4A1B-9370-4C1CE5036371}"/>
+                <a16:creationId xmlns:a16="http://schemas.microsoft.com/office/drawing/2014/main" id="{E69A0273-1966-4A1B-9370-4C1CE5036371}"/>
               </a:ext>
             </a:extLst>
           </p:cNvPr>
@@ -8267,7 +8267,7 @@
           <p:cNvPr id="3" name="Espaço Reservado para Texto 2">
             <a:extLst>
               <a:ext uri="{FF2B5EF4-FFF2-40B4-BE49-F238E27FC236}">
-                <a16:creationId xmlns:a16="http://schemas.microsoft.com/office/drawing/2014/main" xmlns="" id="{3B9CF87A-0448-49A7-AB25-EBC1D56A40EF}"/>
+                <a16:creationId xmlns:a16="http://schemas.microsoft.com/office/drawing/2014/main" id="{3B9CF87A-0448-49A7-AB25-EBC1D56A40EF}"/>
               </a:ext>
             </a:extLst>
           </p:cNvPr>
@@ -8334,7 +8334,7 @@
           <p:cNvPr id="4" name="Espaço Reservado para Data 3">
             <a:extLst>
               <a:ext uri="{FF2B5EF4-FFF2-40B4-BE49-F238E27FC236}">
-                <a16:creationId xmlns:a16="http://schemas.microsoft.com/office/drawing/2014/main" xmlns="" id="{2EF7B1F2-BB5A-44D0-816D-16AD2C71430E}"/>
+                <a16:creationId xmlns:a16="http://schemas.microsoft.com/office/drawing/2014/main" id="{2EF7B1F2-BB5A-44D0-816D-16AD2C71430E}"/>
               </a:ext>
             </a:extLst>
           </p:cNvPr>
@@ -8370,7 +8370,7 @@
           <a:p>
             <a:fld id="{63289F7E-B80B-496E-81B4-D396C37C9454}" type="datetimeFigureOut">
               <a:rPr lang="pt-BR" smtClean="0"/>
-              <a:t>19/05/2025</a:t>
+              <a:t>21/05/2025</a:t>
             </a:fld>
             <a:endParaRPr lang="pt-BR"/>
           </a:p>
@@ -8381,7 +8381,7 @@
           <p:cNvPr id="5" name="Espaço Reservado para Rodapé 4">
             <a:extLst>
               <a:ext uri="{FF2B5EF4-FFF2-40B4-BE49-F238E27FC236}">
-                <a16:creationId xmlns:a16="http://schemas.microsoft.com/office/drawing/2014/main" xmlns="" id="{C703F94C-2CC8-4DAA-BC35-14FC3E841DCD}"/>
+                <a16:creationId xmlns:a16="http://schemas.microsoft.com/office/drawing/2014/main" id="{C703F94C-2CC8-4DAA-BC35-14FC3E841DCD}"/>
               </a:ext>
             </a:extLst>
           </p:cNvPr>
@@ -8424,7 +8424,7 @@
           <p:cNvPr id="6" name="Espaço Reservado para Número de Slide 5">
             <a:extLst>
               <a:ext uri="{FF2B5EF4-FFF2-40B4-BE49-F238E27FC236}">
-                <a16:creationId xmlns:a16="http://schemas.microsoft.com/office/drawing/2014/main" xmlns="" id="{64051336-7048-457A-8B61-D94291D71648}"/>
+                <a16:creationId xmlns:a16="http://schemas.microsoft.com/office/drawing/2014/main" id="{64051336-7048-457A-8B61-D94291D71648}"/>
               </a:ext>
             </a:extLst>
           </p:cNvPr>
@@ -8460,7 +8460,7 @@
           <a:p>
             <a:fld id="{1A7E88B7-70CE-4035-AE73-13FA6FB985D4}" type="slidenum">
               <a:rPr lang="pt-BR" smtClean="0"/>
-              <a:t>‹nº›</a:t>
+              <a:t>‹#›</a:t>
             </a:fld>
             <a:endParaRPr lang="pt-BR"/>
           </a:p>
@@ -8923,7 +8923,7 @@
             <a:fld id="{1D8BD707-D9CF-40AE-B4C6-C98DA3205C09}" type="datetimeFigureOut">
               <a:rPr lang="en-US" smtClean="0"/>
               <a:pPr/>
-              <a:t>5/19/2025</a:t>
+              <a:t>5/21/2025</a:t>
             </a:fld>
             <a:endParaRPr lang="en-US"/>
           </a:p>
@@ -9002,7 +9002,7 @@
             <a:fld id="{B6F15528-21DE-4FAA-801E-634DDDAF4B2B}" type="slidenum">
               <a:rPr lang="en-US" smtClean="0"/>
               <a:pPr/>
-              <a:t>‹nº›</a:t>
+              <a:t>‹#›</a:t>
             </a:fld>
             <a:endParaRPr lang="en-US"/>
           </a:p>
@@ -9304,7 +9304,7 @@
           <p:cNvPr id="2" name="Título 1">
             <a:extLst>
               <a:ext uri="{FF2B5EF4-FFF2-40B4-BE49-F238E27FC236}">
-                <a16:creationId xmlns:a16="http://schemas.microsoft.com/office/drawing/2014/main" xmlns="" id="{32666AC8-2E17-4DB4-B0F5-60C640CCFD2E}"/>
+                <a16:creationId xmlns:a16="http://schemas.microsoft.com/office/drawing/2014/main" id="{32666AC8-2E17-4DB4-B0F5-60C640CCFD2E}"/>
               </a:ext>
             </a:extLst>
           </p:cNvPr>
@@ -9339,10 +9339,6 @@
               <a:rPr lang="pt-BR" sz="5400" dirty="0"/>
               <a:t> Learning:</a:t>
             </a:r>
-            <a:r>
-              <a:rPr lang="pt-BR" dirty="0"/>
-              <a:t/>
-            </a:r>
             <a:br>
               <a:rPr lang="pt-BR" dirty="0"/>
             </a:br>
@@ -9358,7 +9354,7 @@
           <p:cNvPr id="1026" name="Picture 2" descr="Logo">
             <a:extLst>
               <a:ext uri="{FF2B5EF4-FFF2-40B4-BE49-F238E27FC236}">
-                <a16:creationId xmlns:a16="http://schemas.microsoft.com/office/drawing/2014/main" xmlns="" id="{3F2642E0-4F6A-4196-8F58-E77D36E9A33F}"/>
+                <a16:creationId xmlns:a16="http://schemas.microsoft.com/office/drawing/2014/main" id="{3F2642E0-4F6A-4196-8F58-E77D36E9A33F}"/>
               </a:ext>
             </a:extLst>
           </p:cNvPr>
@@ -9403,7 +9399,7 @@
           <p:cNvPr id="5122" name="Picture 2" descr="Image result for machine learning">
             <a:extLst>
               <a:ext uri="{FF2B5EF4-FFF2-40B4-BE49-F238E27FC236}">
-                <a16:creationId xmlns:a16="http://schemas.microsoft.com/office/drawing/2014/main" xmlns="" id="{810CE0A2-4102-44A6-A370-175E7896CDCB}"/>
+                <a16:creationId xmlns:a16="http://schemas.microsoft.com/office/drawing/2014/main" id="{810CE0A2-4102-44A6-A370-175E7896CDCB}"/>
               </a:ext>
             </a:extLst>
           </p:cNvPr>
@@ -9448,7 +9444,7 @@
           <p:cNvPr id="3" name="Picture 2" descr="IoT Group">
             <a:extLst>
               <a:ext uri="{FF2B5EF4-FFF2-40B4-BE49-F238E27FC236}">
-                <a16:creationId xmlns:a16="http://schemas.microsoft.com/office/drawing/2014/main" xmlns="" id="{AC034F57-E830-B6E7-6790-12FDBBDB2975}"/>
+                <a16:creationId xmlns:a16="http://schemas.microsoft.com/office/drawing/2014/main" id="{AC034F57-E830-B6E7-6790-12FDBBDB2975}"/>
               </a:ext>
             </a:extLst>
           </p:cNvPr>
@@ -9493,7 +9489,7 @@
           <p:cNvPr id="5" name="CaixaDeTexto 4">
             <a:extLst>
               <a:ext uri="{FF2B5EF4-FFF2-40B4-BE49-F238E27FC236}">
-                <a16:creationId xmlns:a16="http://schemas.microsoft.com/office/drawing/2014/main" xmlns="" id="{2D82026D-D2EA-05D7-61F2-DEE04704DB7E}"/>
+                <a16:creationId xmlns:a16="http://schemas.microsoft.com/office/drawing/2014/main" id="{2D82026D-D2EA-05D7-61F2-DEE04704DB7E}"/>
               </a:ext>
             </a:extLst>
           </p:cNvPr>
@@ -9564,7 +9560,7 @@
         <p:cNvPr id="1" name="">
           <a:extLst>
             <a:ext uri="{FF2B5EF4-FFF2-40B4-BE49-F238E27FC236}">
-              <a16:creationId xmlns:a16="http://schemas.microsoft.com/office/drawing/2014/main" xmlns="" id="{1F378FD1-DBF4-DCA8-F1BC-B3E89729AAC1}"/>
+              <a16:creationId xmlns:a16="http://schemas.microsoft.com/office/drawing/2014/main" id="{1F378FD1-DBF4-DCA8-F1BC-B3E89729AAC1}"/>
             </a:ext>
           </a:extLst>
         </p:cNvPr>
@@ -9584,7 +9580,7 @@
           <p:cNvPr id="2" name="Título 1">
             <a:extLst>
               <a:ext uri="{FF2B5EF4-FFF2-40B4-BE49-F238E27FC236}">
-                <a16:creationId xmlns:a16="http://schemas.microsoft.com/office/drawing/2014/main" xmlns="" id="{27002D84-8C44-E80A-6CE1-1C285A07DF3A}"/>
+                <a16:creationId xmlns:a16="http://schemas.microsoft.com/office/drawing/2014/main" id="{27002D84-8C44-E80A-6CE1-1C285A07DF3A}"/>
               </a:ext>
             </a:extLst>
           </p:cNvPr>
@@ -9624,7 +9620,7 @@
           <p:cNvPr id="3" name="AutoShape 2" descr="An example of graph signal reconstruction over wireless sensor network. |  Download Scientific Diagram">
             <a:extLst>
               <a:ext uri="{FF2B5EF4-FFF2-40B4-BE49-F238E27FC236}">
-                <a16:creationId xmlns:a16="http://schemas.microsoft.com/office/drawing/2014/main" xmlns="" id="{3E14BFEB-7725-6B4D-C589-A43632C98002}"/>
+                <a16:creationId xmlns:a16="http://schemas.microsoft.com/office/drawing/2014/main" id="{3E14BFEB-7725-6B4D-C589-A43632C98002}"/>
               </a:ext>
             </a:extLst>
           </p:cNvPr>
@@ -9675,7 +9671,7 @@
           <p:cNvPr id="7" name="AutoShape 4" descr="An example of graph signal reconstruction over wireless sensor network. |  Download Scientific Diagram">
             <a:extLst>
               <a:ext uri="{FF2B5EF4-FFF2-40B4-BE49-F238E27FC236}">
-                <a16:creationId xmlns:a16="http://schemas.microsoft.com/office/drawing/2014/main" xmlns="" id="{DDC94C5F-D329-0D03-2D55-303CAEA46575}"/>
+                <a16:creationId xmlns:a16="http://schemas.microsoft.com/office/drawing/2014/main" id="{DDC94C5F-D329-0D03-2D55-303CAEA46575}"/>
               </a:ext>
             </a:extLst>
           </p:cNvPr>
@@ -9726,7 +9722,7 @@
           <p:cNvPr id="4" name="Espaço Reservado para Conteúdo 3">
             <a:extLst>
               <a:ext uri="{FF2B5EF4-FFF2-40B4-BE49-F238E27FC236}">
-                <a16:creationId xmlns:a16="http://schemas.microsoft.com/office/drawing/2014/main" xmlns="" id="{0C330112-2C2B-538C-EFFC-0C5273ED92DF}"/>
+                <a16:creationId xmlns:a16="http://schemas.microsoft.com/office/drawing/2014/main" id="{0C330112-2C2B-538C-EFFC-0C5273ED92DF}"/>
               </a:ext>
             </a:extLst>
           </p:cNvPr>
@@ -9769,7 +9765,7 @@
           <p:cNvPr id="8" name="Picture 7">
             <a:extLst>
               <a:ext uri="{FF2B5EF4-FFF2-40B4-BE49-F238E27FC236}">
-                <a16:creationId xmlns:a16="http://schemas.microsoft.com/office/drawing/2014/main" xmlns="" id="{4A874BBD-11DB-833A-341F-F134DDD11108}"/>
+                <a16:creationId xmlns:a16="http://schemas.microsoft.com/office/drawing/2014/main" id="{4A874BBD-11DB-833A-341F-F134DDD11108}"/>
               </a:ext>
             </a:extLst>
           </p:cNvPr>
@@ -9799,7 +9795,7 @@
           <p:cNvPr id="10" name="TextBox 9">
             <a:extLst>
               <a:ext uri="{FF2B5EF4-FFF2-40B4-BE49-F238E27FC236}">
-                <a16:creationId xmlns:a16="http://schemas.microsoft.com/office/drawing/2014/main" xmlns="" id="{FB63ADD3-D956-76C5-F130-F38465877D67}"/>
+                <a16:creationId xmlns:a16="http://schemas.microsoft.com/office/drawing/2014/main" id="{FB63ADD3-D956-76C5-F130-F38465877D67}"/>
               </a:ext>
             </a:extLst>
           </p:cNvPr>
@@ -9870,7 +9866,7 @@
         <p:cNvPr id="1" name="">
           <a:extLst>
             <a:ext uri="{FF2B5EF4-FFF2-40B4-BE49-F238E27FC236}">
-              <a16:creationId xmlns:a16="http://schemas.microsoft.com/office/drawing/2014/main" xmlns="" id="{9BB75298-302A-6135-F195-096473EDA4DD}"/>
+              <a16:creationId xmlns:a16="http://schemas.microsoft.com/office/drawing/2014/main" id="{9BB75298-302A-6135-F195-096473EDA4DD}"/>
             </a:ext>
           </a:extLst>
         </p:cNvPr>
@@ -9890,7 +9886,7 @@
           <p:cNvPr id="2" name="Título 1">
             <a:extLst>
               <a:ext uri="{FF2B5EF4-FFF2-40B4-BE49-F238E27FC236}">
-                <a16:creationId xmlns:a16="http://schemas.microsoft.com/office/drawing/2014/main" xmlns="" id="{27828DF8-D69B-BFFF-D2B4-A925DD43717D}"/>
+                <a16:creationId xmlns:a16="http://schemas.microsoft.com/office/drawing/2014/main" id="{27828DF8-D69B-BFFF-D2B4-A925DD43717D}"/>
               </a:ext>
             </a:extLst>
           </p:cNvPr>
@@ -9930,7 +9926,7 @@
           <p:cNvPr id="3" name="AutoShape 2" descr="An example of graph signal reconstruction over wireless sensor network. |  Download Scientific Diagram">
             <a:extLst>
               <a:ext uri="{FF2B5EF4-FFF2-40B4-BE49-F238E27FC236}">
-                <a16:creationId xmlns:a16="http://schemas.microsoft.com/office/drawing/2014/main" xmlns="" id="{A4C3F9D2-0307-0450-4E41-55D3298E641B}"/>
+                <a16:creationId xmlns:a16="http://schemas.microsoft.com/office/drawing/2014/main" id="{A4C3F9D2-0307-0450-4E41-55D3298E641B}"/>
               </a:ext>
             </a:extLst>
           </p:cNvPr>
@@ -9981,7 +9977,7 @@
           <p:cNvPr id="7" name="AutoShape 4" descr="An example of graph signal reconstruction over wireless sensor network. |  Download Scientific Diagram">
             <a:extLst>
               <a:ext uri="{FF2B5EF4-FFF2-40B4-BE49-F238E27FC236}">
-                <a16:creationId xmlns:a16="http://schemas.microsoft.com/office/drawing/2014/main" xmlns="" id="{A5277E26-0B39-A36B-7447-436FDC3E025E}"/>
+                <a16:creationId xmlns:a16="http://schemas.microsoft.com/office/drawing/2014/main" id="{A5277E26-0B39-A36B-7447-436FDC3E025E}"/>
               </a:ext>
             </a:extLst>
           </p:cNvPr>
@@ -10032,7 +10028,7 @@
           <p:cNvPr id="4" name="Espaço Reservado para Conteúdo 3">
             <a:extLst>
               <a:ext uri="{FF2B5EF4-FFF2-40B4-BE49-F238E27FC236}">
-                <a16:creationId xmlns:a16="http://schemas.microsoft.com/office/drawing/2014/main" xmlns="" id="{83702F57-B420-BA92-57FC-CDEAF0E04638}"/>
+                <a16:creationId xmlns:a16="http://schemas.microsoft.com/office/drawing/2014/main" id="{83702F57-B420-BA92-57FC-CDEAF0E04638}"/>
               </a:ext>
             </a:extLst>
           </p:cNvPr>
@@ -10075,7 +10071,7 @@
           <p:cNvPr id="6" name="Picture 5">
             <a:extLst>
               <a:ext uri="{FF2B5EF4-FFF2-40B4-BE49-F238E27FC236}">
-                <a16:creationId xmlns:a16="http://schemas.microsoft.com/office/drawing/2014/main" xmlns="" id="{BE9E2474-44BE-43D0-EE2F-D03349050DA2}"/>
+                <a16:creationId xmlns:a16="http://schemas.microsoft.com/office/drawing/2014/main" id="{BE9E2474-44BE-43D0-EE2F-D03349050DA2}"/>
               </a:ext>
             </a:extLst>
           </p:cNvPr>
@@ -10105,7 +10101,7 @@
           <p:cNvPr id="10" name="TextBox 9">
             <a:extLst>
               <a:ext uri="{FF2B5EF4-FFF2-40B4-BE49-F238E27FC236}">
-                <a16:creationId xmlns:a16="http://schemas.microsoft.com/office/drawing/2014/main" xmlns="" id="{E7FEC406-7A7E-5D78-DF69-D2416A2375C3}"/>
+                <a16:creationId xmlns:a16="http://schemas.microsoft.com/office/drawing/2014/main" id="{E7FEC406-7A7E-5D78-DF69-D2416A2375C3}"/>
               </a:ext>
             </a:extLst>
           </p:cNvPr>
@@ -10176,7 +10172,7 @@
         <p:cNvPr id="1" name="">
           <a:extLst>
             <a:ext uri="{FF2B5EF4-FFF2-40B4-BE49-F238E27FC236}">
-              <a16:creationId xmlns:a16="http://schemas.microsoft.com/office/drawing/2014/main" xmlns="" id="{749972DB-1A29-C878-AC52-B084A233C66B}"/>
+              <a16:creationId xmlns:a16="http://schemas.microsoft.com/office/drawing/2014/main" id="{749972DB-1A29-C878-AC52-B084A233C66B}"/>
             </a:ext>
           </a:extLst>
         </p:cNvPr>
@@ -10196,7 +10192,7 @@
           <p:cNvPr id="2" name="Título 1">
             <a:extLst>
               <a:ext uri="{FF2B5EF4-FFF2-40B4-BE49-F238E27FC236}">
-                <a16:creationId xmlns:a16="http://schemas.microsoft.com/office/drawing/2014/main" xmlns="" id="{223F31A0-EB34-A3FB-D3AD-8E88098E62F1}"/>
+                <a16:creationId xmlns:a16="http://schemas.microsoft.com/office/drawing/2014/main" id="{223F31A0-EB34-A3FB-D3AD-8E88098E62F1}"/>
               </a:ext>
             </a:extLst>
           </p:cNvPr>
@@ -10236,7 +10232,7 @@
           <p:cNvPr id="3" name="AutoShape 2" descr="An example of graph signal reconstruction over wireless sensor network. |  Download Scientific Diagram">
             <a:extLst>
               <a:ext uri="{FF2B5EF4-FFF2-40B4-BE49-F238E27FC236}">
-                <a16:creationId xmlns:a16="http://schemas.microsoft.com/office/drawing/2014/main" xmlns="" id="{A22086E9-56E3-EC28-E48A-9069376FF074}"/>
+                <a16:creationId xmlns:a16="http://schemas.microsoft.com/office/drawing/2014/main" id="{A22086E9-56E3-EC28-E48A-9069376FF074}"/>
               </a:ext>
             </a:extLst>
           </p:cNvPr>
@@ -10287,7 +10283,7 @@
           <p:cNvPr id="7" name="AutoShape 4" descr="An example of graph signal reconstruction over wireless sensor network. |  Download Scientific Diagram">
             <a:extLst>
               <a:ext uri="{FF2B5EF4-FFF2-40B4-BE49-F238E27FC236}">
-                <a16:creationId xmlns:a16="http://schemas.microsoft.com/office/drawing/2014/main" xmlns="" id="{E1A13779-07EA-5350-121F-C4141832B952}"/>
+                <a16:creationId xmlns:a16="http://schemas.microsoft.com/office/drawing/2014/main" id="{E1A13779-07EA-5350-121F-C4141832B952}"/>
               </a:ext>
             </a:extLst>
           </p:cNvPr>
@@ -10338,7 +10334,7 @@
           <p:cNvPr id="4" name="Espaço Reservado para Conteúdo 3">
             <a:extLst>
               <a:ext uri="{FF2B5EF4-FFF2-40B4-BE49-F238E27FC236}">
-                <a16:creationId xmlns:a16="http://schemas.microsoft.com/office/drawing/2014/main" xmlns="" id="{B461F4C5-B5F4-E3F6-B686-4C94C38803D5}"/>
+                <a16:creationId xmlns:a16="http://schemas.microsoft.com/office/drawing/2014/main" id="{B461F4C5-B5F4-E3F6-B686-4C94C38803D5}"/>
               </a:ext>
             </a:extLst>
           </p:cNvPr>
@@ -10381,7 +10377,7 @@
           <p:cNvPr id="6" name="Picture 5">
             <a:extLst>
               <a:ext uri="{FF2B5EF4-FFF2-40B4-BE49-F238E27FC236}">
-                <a16:creationId xmlns:a16="http://schemas.microsoft.com/office/drawing/2014/main" xmlns="" id="{CD544109-9098-CA3C-766B-DFEB05AE1F38}"/>
+                <a16:creationId xmlns:a16="http://schemas.microsoft.com/office/drawing/2014/main" id="{CD544109-9098-CA3C-766B-DFEB05AE1F38}"/>
               </a:ext>
             </a:extLst>
           </p:cNvPr>
@@ -10411,7 +10407,7 @@
           <p:cNvPr id="9" name="TextBox 9">
             <a:extLst>
               <a:ext uri="{FF2B5EF4-FFF2-40B4-BE49-F238E27FC236}">
-                <a16:creationId xmlns:a16="http://schemas.microsoft.com/office/drawing/2014/main" xmlns="" id="{E7FEC406-7A7E-5D78-DF69-D2416A2375C3}"/>
+                <a16:creationId xmlns:a16="http://schemas.microsoft.com/office/drawing/2014/main" id="{E7FEC406-7A7E-5D78-DF69-D2416A2375C3}"/>
               </a:ext>
             </a:extLst>
           </p:cNvPr>
@@ -10482,7 +10478,7 @@
         <p:cNvPr id="1" name="">
           <a:extLst>
             <a:ext uri="{FF2B5EF4-FFF2-40B4-BE49-F238E27FC236}">
-              <a16:creationId xmlns:a16="http://schemas.microsoft.com/office/drawing/2014/main" xmlns="" id="{69317B56-95CF-5EB4-1950-84D108AD8D37}"/>
+              <a16:creationId xmlns:a16="http://schemas.microsoft.com/office/drawing/2014/main" id="{69317B56-95CF-5EB4-1950-84D108AD8D37}"/>
             </a:ext>
           </a:extLst>
         </p:cNvPr>
@@ -10502,7 +10498,7 @@
           <p:cNvPr id="2" name="Título 1">
             <a:extLst>
               <a:ext uri="{FF2B5EF4-FFF2-40B4-BE49-F238E27FC236}">
-                <a16:creationId xmlns:a16="http://schemas.microsoft.com/office/drawing/2014/main" xmlns="" id="{48642745-4759-3504-B537-1A643C25576D}"/>
+                <a16:creationId xmlns:a16="http://schemas.microsoft.com/office/drawing/2014/main" id="{48642745-4759-3504-B537-1A643C25576D}"/>
               </a:ext>
             </a:extLst>
           </p:cNvPr>
@@ -10542,7 +10538,7 @@
           <p:cNvPr id="3" name="AutoShape 2" descr="An example of graph signal reconstruction over wireless sensor network. |  Download Scientific Diagram">
             <a:extLst>
               <a:ext uri="{FF2B5EF4-FFF2-40B4-BE49-F238E27FC236}">
-                <a16:creationId xmlns:a16="http://schemas.microsoft.com/office/drawing/2014/main" xmlns="" id="{84E44FE8-BA6E-9F6F-1997-0AD869D77EFD}"/>
+                <a16:creationId xmlns:a16="http://schemas.microsoft.com/office/drawing/2014/main" id="{84E44FE8-BA6E-9F6F-1997-0AD869D77EFD}"/>
               </a:ext>
             </a:extLst>
           </p:cNvPr>
@@ -10593,7 +10589,7 @@
           <p:cNvPr id="7" name="AutoShape 4" descr="An example of graph signal reconstruction over wireless sensor network. |  Download Scientific Diagram">
             <a:extLst>
               <a:ext uri="{FF2B5EF4-FFF2-40B4-BE49-F238E27FC236}">
-                <a16:creationId xmlns:a16="http://schemas.microsoft.com/office/drawing/2014/main" xmlns="" id="{21DB31B1-11EA-8016-35EE-14EA7345F531}"/>
+                <a16:creationId xmlns:a16="http://schemas.microsoft.com/office/drawing/2014/main" id="{21DB31B1-11EA-8016-35EE-14EA7345F531}"/>
               </a:ext>
             </a:extLst>
           </p:cNvPr>
@@ -10644,7 +10640,7 @@
           <p:cNvPr id="4" name="Espaço Reservado para Conteúdo 3">
             <a:extLst>
               <a:ext uri="{FF2B5EF4-FFF2-40B4-BE49-F238E27FC236}">
-                <a16:creationId xmlns:a16="http://schemas.microsoft.com/office/drawing/2014/main" xmlns="" id="{63D17EBA-F020-2A71-B133-21937AD74F91}"/>
+                <a16:creationId xmlns:a16="http://schemas.microsoft.com/office/drawing/2014/main" id="{63D17EBA-F020-2A71-B133-21937AD74F91}"/>
               </a:ext>
             </a:extLst>
           </p:cNvPr>
@@ -10687,7 +10683,7 @@
           <p:cNvPr id="6" name="Picture 5">
             <a:extLst>
               <a:ext uri="{FF2B5EF4-FFF2-40B4-BE49-F238E27FC236}">
-                <a16:creationId xmlns:a16="http://schemas.microsoft.com/office/drawing/2014/main" xmlns="" id="{9F08A47C-C93C-D40B-F5DC-3C29F2EEEE60}"/>
+                <a16:creationId xmlns:a16="http://schemas.microsoft.com/office/drawing/2014/main" id="{9F08A47C-C93C-D40B-F5DC-3C29F2EEEE60}"/>
               </a:ext>
             </a:extLst>
           </p:cNvPr>
@@ -10717,7 +10713,7 @@
           <p:cNvPr id="8" name="TextBox 7">
             <a:extLst>
               <a:ext uri="{FF2B5EF4-FFF2-40B4-BE49-F238E27FC236}">
-                <a16:creationId xmlns:a16="http://schemas.microsoft.com/office/drawing/2014/main" xmlns="" id="{4376C1A9-3731-8BF9-861E-3D686FEA4F43}"/>
+                <a16:creationId xmlns:a16="http://schemas.microsoft.com/office/drawing/2014/main" id="{4376C1A9-3731-8BF9-861E-3D686FEA4F43}"/>
               </a:ext>
             </a:extLst>
           </p:cNvPr>
@@ -10886,7 +10882,7 @@
           <p:cNvPr id="2" name="Título 1">
             <a:extLst>
               <a:ext uri="{FF2B5EF4-FFF2-40B4-BE49-F238E27FC236}">
-                <a16:creationId xmlns:a16="http://schemas.microsoft.com/office/drawing/2014/main" xmlns="" id="{5F09B89C-3183-4D52-981A-62798DDFF2B8}"/>
+                <a16:creationId xmlns:a16="http://schemas.microsoft.com/office/drawing/2014/main" id="{5F09B89C-3183-4D52-981A-62798DDFF2B8}"/>
               </a:ext>
             </a:extLst>
           </p:cNvPr>
@@ -10921,7 +10917,7 @@
           <p:cNvPr id="3" name="AutoShape 2" descr="An example of graph signal reconstruction over wireless sensor network. |  Download Scientific Diagram">
             <a:extLst>
               <a:ext uri="{FF2B5EF4-FFF2-40B4-BE49-F238E27FC236}">
-                <a16:creationId xmlns:a16="http://schemas.microsoft.com/office/drawing/2014/main" xmlns="" id="{0166B4DD-D72A-4A54-94A7-2C38133837FD}"/>
+                <a16:creationId xmlns:a16="http://schemas.microsoft.com/office/drawing/2014/main" id="{0166B4DD-D72A-4A54-94A7-2C38133837FD}"/>
               </a:ext>
             </a:extLst>
           </p:cNvPr>
@@ -10972,7 +10968,7 @@
           <p:cNvPr id="7" name="AutoShape 4" descr="An example of graph signal reconstruction over wireless sensor network. |  Download Scientific Diagram">
             <a:extLst>
               <a:ext uri="{FF2B5EF4-FFF2-40B4-BE49-F238E27FC236}">
-                <a16:creationId xmlns:a16="http://schemas.microsoft.com/office/drawing/2014/main" xmlns="" id="{14C2B67D-81A1-457E-A410-FE4350A3CCA4}"/>
+                <a16:creationId xmlns:a16="http://schemas.microsoft.com/office/drawing/2014/main" id="{14C2B67D-81A1-457E-A410-FE4350A3CCA4}"/>
               </a:ext>
             </a:extLst>
           </p:cNvPr>
@@ -11023,7 +11019,7 @@
           <p:cNvPr id="1026" name="Picture 2" descr="Univariate Anomaly Detection | Anomaly Detection Algorithms">
             <a:extLst>
               <a:ext uri="{FF2B5EF4-FFF2-40B4-BE49-F238E27FC236}">
-                <a16:creationId xmlns:a16="http://schemas.microsoft.com/office/drawing/2014/main" xmlns="" id="{D6FF8611-2758-C1DA-8FC6-10C7681C129F}"/>
+                <a16:creationId xmlns:a16="http://schemas.microsoft.com/office/drawing/2014/main" id="{D6FF8611-2758-C1DA-8FC6-10C7681C129F}"/>
               </a:ext>
             </a:extLst>
           </p:cNvPr>
@@ -11070,7 +11066,7 @@
           <p:cNvPr id="4" name="Espaço Reservado para Conteúdo 3">
             <a:extLst>
               <a:ext uri="{FF2B5EF4-FFF2-40B4-BE49-F238E27FC236}">
-                <a16:creationId xmlns:a16="http://schemas.microsoft.com/office/drawing/2014/main" xmlns="" id="{5F1B432F-F570-AEC0-CFFF-C1D9196D7234}"/>
+                <a16:creationId xmlns:a16="http://schemas.microsoft.com/office/drawing/2014/main" id="{5F1B432F-F570-AEC0-CFFF-C1D9196D7234}"/>
               </a:ext>
             </a:extLst>
           </p:cNvPr>
@@ -11187,7 +11183,7 @@
           <p:cNvPr id="2" name="Título 1">
             <a:extLst>
               <a:ext uri="{FF2B5EF4-FFF2-40B4-BE49-F238E27FC236}">
-                <a16:creationId xmlns:a16="http://schemas.microsoft.com/office/drawing/2014/main" xmlns="" id="{5F09B89C-3183-4D52-981A-62798DDFF2B8}"/>
+                <a16:creationId xmlns:a16="http://schemas.microsoft.com/office/drawing/2014/main" id="{5F09B89C-3183-4D52-981A-62798DDFF2B8}"/>
               </a:ext>
             </a:extLst>
           </p:cNvPr>
@@ -11222,7 +11218,7 @@
           <p:cNvPr id="3" name="AutoShape 2" descr="An example of graph signal reconstruction over wireless sensor network. |  Download Scientific Diagram">
             <a:extLst>
               <a:ext uri="{FF2B5EF4-FFF2-40B4-BE49-F238E27FC236}">
-                <a16:creationId xmlns:a16="http://schemas.microsoft.com/office/drawing/2014/main" xmlns="" id="{0166B4DD-D72A-4A54-94A7-2C38133837FD}"/>
+                <a16:creationId xmlns:a16="http://schemas.microsoft.com/office/drawing/2014/main" id="{0166B4DD-D72A-4A54-94A7-2C38133837FD}"/>
               </a:ext>
             </a:extLst>
           </p:cNvPr>
@@ -11273,7 +11269,7 @@
           <p:cNvPr id="7" name="AutoShape 4" descr="An example of graph signal reconstruction over wireless sensor network. |  Download Scientific Diagram">
             <a:extLst>
               <a:ext uri="{FF2B5EF4-FFF2-40B4-BE49-F238E27FC236}">
-                <a16:creationId xmlns:a16="http://schemas.microsoft.com/office/drawing/2014/main" xmlns="" id="{14C2B67D-81A1-457E-A410-FE4350A3CCA4}"/>
+                <a16:creationId xmlns:a16="http://schemas.microsoft.com/office/drawing/2014/main" id="{14C2B67D-81A1-457E-A410-FE4350A3CCA4}"/>
               </a:ext>
             </a:extLst>
           </p:cNvPr>
@@ -11324,7 +11320,7 @@
           <p:cNvPr id="4" name="Espaço Reservado para Conteúdo 3">
             <a:extLst>
               <a:ext uri="{FF2B5EF4-FFF2-40B4-BE49-F238E27FC236}">
-                <a16:creationId xmlns:a16="http://schemas.microsoft.com/office/drawing/2014/main" xmlns="" id="{5F1B432F-F570-AEC0-CFFF-C1D9196D7234}"/>
+                <a16:creationId xmlns:a16="http://schemas.microsoft.com/office/drawing/2014/main" id="{5F1B432F-F570-AEC0-CFFF-C1D9196D7234}"/>
               </a:ext>
             </a:extLst>
           </p:cNvPr>
@@ -11357,7 +11353,7 @@
           <p:cNvPr id="2050" name="Picture 2" descr="Anomaly Detection Real World Scenarios Approaches and Live Implementation -  YouTube">
             <a:extLst>
               <a:ext uri="{FF2B5EF4-FFF2-40B4-BE49-F238E27FC236}">
-                <a16:creationId xmlns:a16="http://schemas.microsoft.com/office/drawing/2014/main" xmlns="" id="{FDE7A801-6226-C67C-506A-7A9F297D280C}"/>
+                <a16:creationId xmlns:a16="http://schemas.microsoft.com/office/drawing/2014/main" id="{FDE7A801-6226-C67C-506A-7A9F297D280C}"/>
               </a:ext>
             </a:extLst>
           </p:cNvPr>
@@ -11434,7 +11430,7 @@
         <p:cNvPr id="1" name="">
           <a:extLst>
             <a:ext uri="{FF2B5EF4-FFF2-40B4-BE49-F238E27FC236}">
-              <a16:creationId xmlns:a16="http://schemas.microsoft.com/office/drawing/2014/main" xmlns="" id="{042E1AD8-1AE2-9D66-D1D0-BECEA32F14E0}"/>
+              <a16:creationId xmlns:a16="http://schemas.microsoft.com/office/drawing/2014/main" id="{042E1AD8-1AE2-9D66-D1D0-BECEA32F14E0}"/>
             </a:ext>
           </a:extLst>
         </p:cNvPr>
@@ -11454,7 +11450,7 @@
           <p:cNvPr id="2" name="Título 1">
             <a:extLst>
               <a:ext uri="{FF2B5EF4-FFF2-40B4-BE49-F238E27FC236}">
-                <a16:creationId xmlns:a16="http://schemas.microsoft.com/office/drawing/2014/main" xmlns="" id="{91362F63-8B67-2CA5-F1E0-70285F8A5D99}"/>
+                <a16:creationId xmlns:a16="http://schemas.microsoft.com/office/drawing/2014/main" id="{91362F63-8B67-2CA5-F1E0-70285F8A5D99}"/>
               </a:ext>
             </a:extLst>
           </p:cNvPr>
@@ -11489,7 +11485,7 @@
           <p:cNvPr id="3" name="AutoShape 2" descr="An example of graph signal reconstruction over wireless sensor network. |  Download Scientific Diagram">
             <a:extLst>
               <a:ext uri="{FF2B5EF4-FFF2-40B4-BE49-F238E27FC236}">
-                <a16:creationId xmlns:a16="http://schemas.microsoft.com/office/drawing/2014/main" xmlns="" id="{22FDC0BB-96C6-D071-6072-8265FA475D3B}"/>
+                <a16:creationId xmlns:a16="http://schemas.microsoft.com/office/drawing/2014/main" id="{22FDC0BB-96C6-D071-6072-8265FA475D3B}"/>
               </a:ext>
             </a:extLst>
           </p:cNvPr>
@@ -11540,7 +11536,7 @@
           <p:cNvPr id="7" name="AutoShape 4" descr="An example of graph signal reconstruction over wireless sensor network. |  Download Scientific Diagram">
             <a:extLst>
               <a:ext uri="{FF2B5EF4-FFF2-40B4-BE49-F238E27FC236}">
-                <a16:creationId xmlns:a16="http://schemas.microsoft.com/office/drawing/2014/main" xmlns="" id="{0D2FBB85-B0FE-5D58-DBE2-4C312CB1B3A1}"/>
+                <a16:creationId xmlns:a16="http://schemas.microsoft.com/office/drawing/2014/main" id="{0D2FBB85-B0FE-5D58-DBE2-4C312CB1B3A1}"/>
               </a:ext>
             </a:extLst>
           </p:cNvPr>
@@ -11591,7 +11587,7 @@
           <p:cNvPr id="4" name="Espaço Reservado para Conteúdo 3">
             <a:extLst>
               <a:ext uri="{FF2B5EF4-FFF2-40B4-BE49-F238E27FC236}">
-                <a16:creationId xmlns:a16="http://schemas.microsoft.com/office/drawing/2014/main" xmlns="" id="{F19EED01-E2A7-FCA9-AE40-ABE3206A5DB3}"/>
+                <a16:creationId xmlns:a16="http://schemas.microsoft.com/office/drawing/2014/main" id="{F19EED01-E2A7-FCA9-AE40-ABE3206A5DB3}"/>
               </a:ext>
             </a:extLst>
           </p:cNvPr>
@@ -11675,7 +11671,7 @@
           <p:cNvPr id="6" name="Picture 5">
             <a:extLst>
               <a:ext uri="{FF2B5EF4-FFF2-40B4-BE49-F238E27FC236}">
-                <a16:creationId xmlns:a16="http://schemas.microsoft.com/office/drawing/2014/main" xmlns="" id="{874D15ED-AE97-5474-7E5D-B644432B2D4C}"/>
+                <a16:creationId xmlns:a16="http://schemas.microsoft.com/office/drawing/2014/main" id="{874D15ED-AE97-5474-7E5D-B644432B2D4C}"/>
               </a:ext>
             </a:extLst>
           </p:cNvPr>
@@ -11705,7 +11701,7 @@
           <p:cNvPr id="9" name="Picture 8">
             <a:extLst>
               <a:ext uri="{FF2B5EF4-FFF2-40B4-BE49-F238E27FC236}">
-                <a16:creationId xmlns:a16="http://schemas.microsoft.com/office/drawing/2014/main" xmlns="" id="{14197941-A588-8F4A-49EA-1C5B6528F761}"/>
+                <a16:creationId xmlns:a16="http://schemas.microsoft.com/office/drawing/2014/main" id="{14197941-A588-8F4A-49EA-1C5B6528F761}"/>
               </a:ext>
             </a:extLst>
           </p:cNvPr>
@@ -11735,7 +11731,7 @@
           <p:cNvPr id="10" name="Arrow: Right 9">
             <a:extLst>
               <a:ext uri="{FF2B5EF4-FFF2-40B4-BE49-F238E27FC236}">
-                <a16:creationId xmlns:a16="http://schemas.microsoft.com/office/drawing/2014/main" xmlns="" id="{02EF8AE6-9567-78CC-094E-7578F2C11532}"/>
+                <a16:creationId xmlns:a16="http://schemas.microsoft.com/office/drawing/2014/main" id="{02EF8AE6-9567-78CC-094E-7578F2C11532}"/>
               </a:ext>
             </a:extLst>
           </p:cNvPr>
@@ -11825,7 +11821,7 @@
           <p:cNvPr id="2" name="Título 1">
             <a:extLst>
               <a:ext uri="{FF2B5EF4-FFF2-40B4-BE49-F238E27FC236}">
-                <a16:creationId xmlns:a16="http://schemas.microsoft.com/office/drawing/2014/main" xmlns="" id="{5F09B89C-3183-4D52-981A-62798DDFF2B8}"/>
+                <a16:creationId xmlns:a16="http://schemas.microsoft.com/office/drawing/2014/main" id="{5F09B89C-3183-4D52-981A-62798DDFF2B8}"/>
               </a:ext>
             </a:extLst>
           </p:cNvPr>
@@ -11865,7 +11861,7 @@
           <p:cNvPr id="3" name="AutoShape 2" descr="An example of graph signal reconstruction over wireless sensor network. |  Download Scientific Diagram">
             <a:extLst>
               <a:ext uri="{FF2B5EF4-FFF2-40B4-BE49-F238E27FC236}">
-                <a16:creationId xmlns:a16="http://schemas.microsoft.com/office/drawing/2014/main" xmlns="" id="{0166B4DD-D72A-4A54-94A7-2C38133837FD}"/>
+                <a16:creationId xmlns:a16="http://schemas.microsoft.com/office/drawing/2014/main" id="{0166B4DD-D72A-4A54-94A7-2C38133837FD}"/>
               </a:ext>
             </a:extLst>
           </p:cNvPr>
@@ -11916,7 +11912,7 @@
           <p:cNvPr id="7" name="AutoShape 4" descr="An example of graph signal reconstruction over wireless sensor network. |  Download Scientific Diagram">
             <a:extLst>
               <a:ext uri="{FF2B5EF4-FFF2-40B4-BE49-F238E27FC236}">
-                <a16:creationId xmlns:a16="http://schemas.microsoft.com/office/drawing/2014/main" xmlns="" id="{14C2B67D-81A1-457E-A410-FE4350A3CCA4}"/>
+                <a16:creationId xmlns:a16="http://schemas.microsoft.com/office/drawing/2014/main" id="{14C2B67D-81A1-457E-A410-FE4350A3CCA4}"/>
               </a:ext>
             </a:extLst>
           </p:cNvPr>
@@ -11967,7 +11963,7 @@
           <p:cNvPr id="4" name="Espaço Reservado para Conteúdo 3">
             <a:extLst>
               <a:ext uri="{FF2B5EF4-FFF2-40B4-BE49-F238E27FC236}">
-                <a16:creationId xmlns:a16="http://schemas.microsoft.com/office/drawing/2014/main" xmlns="" id="{5F1B432F-F570-AEC0-CFFF-C1D9196D7234}"/>
+                <a16:creationId xmlns:a16="http://schemas.microsoft.com/office/drawing/2014/main" id="{5F1B432F-F570-AEC0-CFFF-C1D9196D7234}"/>
               </a:ext>
             </a:extLst>
           </p:cNvPr>
@@ -12008,7 +12004,7 @@
           <p:cNvPr id="6" name="CaixaDeTexto 5">
             <a:extLst>
               <a:ext uri="{FF2B5EF4-FFF2-40B4-BE49-F238E27FC236}">
-                <a16:creationId xmlns:a16="http://schemas.microsoft.com/office/drawing/2014/main" xmlns="" id="{470482DB-F365-0A83-E102-37A8EB7EACEF}"/>
+                <a16:creationId xmlns:a16="http://schemas.microsoft.com/office/drawing/2014/main" id="{470482DB-F365-0A83-E102-37A8EB7EACEF}"/>
               </a:ext>
             </a:extLst>
           </p:cNvPr>
@@ -12095,7 +12091,7 @@
           <p:cNvPr id="6146" name="Picture 2" descr="Centro de Distribuição: uma solução mais que viável – Novidá">
             <a:extLst>
               <a:ext uri="{FF2B5EF4-FFF2-40B4-BE49-F238E27FC236}">
-                <a16:creationId xmlns:a16="http://schemas.microsoft.com/office/drawing/2014/main" xmlns="" id="{4EEAF6B8-1AE8-82F9-6BD7-E45E945A8CB5}"/>
+                <a16:creationId xmlns:a16="http://schemas.microsoft.com/office/drawing/2014/main" id="{4EEAF6B8-1AE8-82F9-6BD7-E45E945A8CB5}"/>
               </a:ext>
             </a:extLst>
           </p:cNvPr>
@@ -12142,7 +12138,7 @@
           <p:cNvPr id="8" name="Picture 2" descr="Mapa do Brasil">
             <a:extLst>
               <a:ext uri="{FF2B5EF4-FFF2-40B4-BE49-F238E27FC236}">
-                <a16:creationId xmlns:a16="http://schemas.microsoft.com/office/drawing/2014/main" xmlns="" id="{BBEA9087-A8E1-78C5-981B-C50D7CF4635F}"/>
+                <a16:creationId xmlns:a16="http://schemas.microsoft.com/office/drawing/2014/main" id="{BBEA9087-A8E1-78C5-981B-C50D7CF4635F}"/>
               </a:ext>
             </a:extLst>
           </p:cNvPr>
@@ -12273,7 +12269,7 @@
           <p:cNvPr id="2" name="Título 1">
             <a:extLst>
               <a:ext uri="{FF2B5EF4-FFF2-40B4-BE49-F238E27FC236}">
-                <a16:creationId xmlns:a16="http://schemas.microsoft.com/office/drawing/2014/main" xmlns="" id="{5F09B89C-3183-4D52-981A-62798DDFF2B8}"/>
+                <a16:creationId xmlns:a16="http://schemas.microsoft.com/office/drawing/2014/main" id="{5F09B89C-3183-4D52-981A-62798DDFF2B8}"/>
               </a:ext>
             </a:extLst>
           </p:cNvPr>
@@ -12313,7 +12309,7 @@
           <p:cNvPr id="3" name="AutoShape 2" descr="An example of graph signal reconstruction over wireless sensor network. |  Download Scientific Diagram">
             <a:extLst>
               <a:ext uri="{FF2B5EF4-FFF2-40B4-BE49-F238E27FC236}">
-                <a16:creationId xmlns:a16="http://schemas.microsoft.com/office/drawing/2014/main" xmlns="" id="{0166B4DD-D72A-4A54-94A7-2C38133837FD}"/>
+                <a16:creationId xmlns:a16="http://schemas.microsoft.com/office/drawing/2014/main" id="{0166B4DD-D72A-4A54-94A7-2C38133837FD}"/>
               </a:ext>
             </a:extLst>
           </p:cNvPr>
@@ -12364,7 +12360,7 @@
           <p:cNvPr id="7" name="AutoShape 4" descr="An example of graph signal reconstruction over wireless sensor network. |  Download Scientific Diagram">
             <a:extLst>
               <a:ext uri="{FF2B5EF4-FFF2-40B4-BE49-F238E27FC236}">
-                <a16:creationId xmlns:a16="http://schemas.microsoft.com/office/drawing/2014/main" xmlns="" id="{14C2B67D-81A1-457E-A410-FE4350A3CCA4}"/>
+                <a16:creationId xmlns:a16="http://schemas.microsoft.com/office/drawing/2014/main" id="{14C2B67D-81A1-457E-A410-FE4350A3CCA4}"/>
               </a:ext>
             </a:extLst>
           </p:cNvPr>
@@ -12415,7 +12411,7 @@
           <p:cNvPr id="4" name="Espaço Reservado para Conteúdo 3">
             <a:extLst>
               <a:ext uri="{FF2B5EF4-FFF2-40B4-BE49-F238E27FC236}">
-                <a16:creationId xmlns:a16="http://schemas.microsoft.com/office/drawing/2014/main" xmlns="" id="{5F1B432F-F570-AEC0-CFFF-C1D9196D7234}"/>
+                <a16:creationId xmlns:a16="http://schemas.microsoft.com/office/drawing/2014/main" id="{5F1B432F-F570-AEC0-CFFF-C1D9196D7234}"/>
               </a:ext>
             </a:extLst>
           </p:cNvPr>
@@ -12456,7 +12452,7 @@
           <p:cNvPr id="6" name="CaixaDeTexto 5">
             <a:extLst>
               <a:ext uri="{FF2B5EF4-FFF2-40B4-BE49-F238E27FC236}">
-                <a16:creationId xmlns:a16="http://schemas.microsoft.com/office/drawing/2014/main" xmlns="" id="{470482DB-F365-0A83-E102-37A8EB7EACEF}"/>
+                <a16:creationId xmlns:a16="http://schemas.microsoft.com/office/drawing/2014/main" id="{470482DB-F365-0A83-E102-37A8EB7EACEF}"/>
               </a:ext>
             </a:extLst>
           </p:cNvPr>
@@ -12536,7 +12532,7 @@
           <p:cNvPr id="2050" name="Picture 2" descr="Base Teórica do K-Means! Aprenda a Lógica desse Algoritmo Hoje!">
             <a:extLst>
               <a:ext uri="{FF2B5EF4-FFF2-40B4-BE49-F238E27FC236}">
-                <a16:creationId xmlns:a16="http://schemas.microsoft.com/office/drawing/2014/main" xmlns="" id="{0694ADFD-EB2E-2BF0-18BE-B07E4CD60A5F}"/>
+                <a16:creationId xmlns:a16="http://schemas.microsoft.com/office/drawing/2014/main" id="{0694ADFD-EB2E-2BF0-18BE-B07E4CD60A5F}"/>
               </a:ext>
             </a:extLst>
           </p:cNvPr>
@@ -12583,7 +12579,7 @@
           <p:cNvPr id="8" name="Imagem 7">
             <a:extLst>
               <a:ext uri="{FF2B5EF4-FFF2-40B4-BE49-F238E27FC236}">
-                <a16:creationId xmlns:a16="http://schemas.microsoft.com/office/drawing/2014/main" xmlns="" id="{EEF69E85-6440-34FE-5C8A-A5F37765D292}"/>
+                <a16:creationId xmlns:a16="http://schemas.microsoft.com/office/drawing/2014/main" id="{EEF69E85-6440-34FE-5C8A-A5F37765D292}"/>
               </a:ext>
             </a:extLst>
           </p:cNvPr>
@@ -12657,7 +12653,7 @@
           <p:cNvPr id="2" name="Título 1">
             <a:extLst>
               <a:ext uri="{FF2B5EF4-FFF2-40B4-BE49-F238E27FC236}">
-                <a16:creationId xmlns:a16="http://schemas.microsoft.com/office/drawing/2014/main" xmlns="" id="{5F09B89C-3183-4D52-981A-62798DDFF2B8}"/>
+                <a16:creationId xmlns:a16="http://schemas.microsoft.com/office/drawing/2014/main" id="{5F09B89C-3183-4D52-981A-62798DDFF2B8}"/>
               </a:ext>
             </a:extLst>
           </p:cNvPr>
@@ -12692,7 +12688,7 @@
           <p:cNvPr id="3" name="AutoShape 2" descr="An example of graph signal reconstruction over wireless sensor network. |  Download Scientific Diagram">
             <a:extLst>
               <a:ext uri="{FF2B5EF4-FFF2-40B4-BE49-F238E27FC236}">
-                <a16:creationId xmlns:a16="http://schemas.microsoft.com/office/drawing/2014/main" xmlns="" id="{0166B4DD-D72A-4A54-94A7-2C38133837FD}"/>
+                <a16:creationId xmlns:a16="http://schemas.microsoft.com/office/drawing/2014/main" id="{0166B4DD-D72A-4A54-94A7-2C38133837FD}"/>
               </a:ext>
             </a:extLst>
           </p:cNvPr>
@@ -12767,7 +12763,7 @@
           <p:cNvPr id="7" name="AutoShape 4" descr="An example of graph signal reconstruction over wireless sensor network. |  Download Scientific Diagram">
             <a:extLst>
               <a:ext uri="{FF2B5EF4-FFF2-40B4-BE49-F238E27FC236}">
-                <a16:creationId xmlns:a16="http://schemas.microsoft.com/office/drawing/2014/main" xmlns="" id="{14C2B67D-81A1-457E-A410-FE4350A3CCA4}"/>
+                <a16:creationId xmlns:a16="http://schemas.microsoft.com/office/drawing/2014/main" id="{14C2B67D-81A1-457E-A410-FE4350A3CCA4}"/>
               </a:ext>
             </a:extLst>
           </p:cNvPr>
@@ -12842,7 +12838,7 @@
           <p:cNvPr id="4" name="Espaço Reservado para Conteúdo 3">
             <a:extLst>
               <a:ext uri="{FF2B5EF4-FFF2-40B4-BE49-F238E27FC236}">
-                <a16:creationId xmlns:a16="http://schemas.microsoft.com/office/drawing/2014/main" xmlns="" id="{0349BA64-C9D7-4730-9CA9-5C4AD9FC7969}"/>
+                <a16:creationId xmlns:a16="http://schemas.microsoft.com/office/drawing/2014/main" id="{0349BA64-C9D7-4730-9CA9-5C4AD9FC7969}"/>
               </a:ext>
             </a:extLst>
           </p:cNvPr>
@@ -12889,7 +12885,7 @@
           <p:cNvPr id="1026" name="Picture 2" descr="Free photo industrial containers box for logistic import export business.">
             <a:extLst>
               <a:ext uri="{FF2B5EF4-FFF2-40B4-BE49-F238E27FC236}">
-                <a16:creationId xmlns:a16="http://schemas.microsoft.com/office/drawing/2014/main" xmlns="" id="{FDC07977-F662-66CB-7534-103E83976919}"/>
+                <a16:creationId xmlns:a16="http://schemas.microsoft.com/office/drawing/2014/main" id="{FDC07977-F662-66CB-7534-103E83976919}"/>
               </a:ext>
             </a:extLst>
           </p:cNvPr>
@@ -12980,7 +12976,7 @@
           <p:cNvPr id="2" name="Título 1">
             <a:extLst>
               <a:ext uri="{FF2B5EF4-FFF2-40B4-BE49-F238E27FC236}">
-                <a16:creationId xmlns:a16="http://schemas.microsoft.com/office/drawing/2014/main" xmlns="" id="{5F09B89C-3183-4D52-981A-62798DDFF2B8}"/>
+                <a16:creationId xmlns:a16="http://schemas.microsoft.com/office/drawing/2014/main" id="{5F09B89C-3183-4D52-981A-62798DDFF2B8}"/>
               </a:ext>
             </a:extLst>
           </p:cNvPr>
@@ -13015,7 +13011,7 @@
           <p:cNvPr id="3" name="AutoShape 2" descr="An example of graph signal reconstruction over wireless sensor network. |  Download Scientific Diagram">
             <a:extLst>
               <a:ext uri="{FF2B5EF4-FFF2-40B4-BE49-F238E27FC236}">
-                <a16:creationId xmlns:a16="http://schemas.microsoft.com/office/drawing/2014/main" xmlns="" id="{0166B4DD-D72A-4A54-94A7-2C38133837FD}"/>
+                <a16:creationId xmlns:a16="http://schemas.microsoft.com/office/drawing/2014/main" id="{0166B4DD-D72A-4A54-94A7-2C38133837FD}"/>
               </a:ext>
             </a:extLst>
           </p:cNvPr>
@@ -13066,7 +13062,7 @@
           <p:cNvPr id="7" name="AutoShape 4" descr="An example of graph signal reconstruction over wireless sensor network. |  Download Scientific Diagram">
             <a:extLst>
               <a:ext uri="{FF2B5EF4-FFF2-40B4-BE49-F238E27FC236}">
-                <a16:creationId xmlns:a16="http://schemas.microsoft.com/office/drawing/2014/main" xmlns="" id="{14C2B67D-81A1-457E-A410-FE4350A3CCA4}"/>
+                <a16:creationId xmlns:a16="http://schemas.microsoft.com/office/drawing/2014/main" id="{14C2B67D-81A1-457E-A410-FE4350A3CCA4}"/>
               </a:ext>
             </a:extLst>
           </p:cNvPr>
@@ -13117,7 +13113,7 @@
           <p:cNvPr id="4" name="Espaço Reservado para Conteúdo 3">
             <a:extLst>
               <a:ext uri="{FF2B5EF4-FFF2-40B4-BE49-F238E27FC236}">
-                <a16:creationId xmlns:a16="http://schemas.microsoft.com/office/drawing/2014/main" xmlns="" id="{5F1B432F-F570-AEC0-CFFF-C1D9196D7234}"/>
+                <a16:creationId xmlns:a16="http://schemas.microsoft.com/office/drawing/2014/main" id="{5F1B432F-F570-AEC0-CFFF-C1D9196D7234}"/>
               </a:ext>
             </a:extLst>
           </p:cNvPr>
@@ -13240,7 +13236,7 @@
           <p:cNvPr id="2" name="Título 1">
             <a:extLst>
               <a:ext uri="{FF2B5EF4-FFF2-40B4-BE49-F238E27FC236}">
-                <a16:creationId xmlns:a16="http://schemas.microsoft.com/office/drawing/2014/main" xmlns="" id="{5F09B89C-3183-4D52-981A-62798DDFF2B8}"/>
+                <a16:creationId xmlns:a16="http://schemas.microsoft.com/office/drawing/2014/main" id="{5F09B89C-3183-4D52-981A-62798DDFF2B8}"/>
               </a:ext>
             </a:extLst>
           </p:cNvPr>
@@ -13275,7 +13271,7 @@
           <p:cNvPr id="3" name="AutoShape 2" descr="An example of graph signal reconstruction over wireless sensor network. |  Download Scientific Diagram">
             <a:extLst>
               <a:ext uri="{FF2B5EF4-FFF2-40B4-BE49-F238E27FC236}">
-                <a16:creationId xmlns:a16="http://schemas.microsoft.com/office/drawing/2014/main" xmlns="" id="{0166B4DD-D72A-4A54-94A7-2C38133837FD}"/>
+                <a16:creationId xmlns:a16="http://schemas.microsoft.com/office/drawing/2014/main" id="{0166B4DD-D72A-4A54-94A7-2C38133837FD}"/>
               </a:ext>
             </a:extLst>
           </p:cNvPr>
@@ -13350,7 +13346,7 @@
           <p:cNvPr id="7" name="AutoShape 4" descr="An example of graph signal reconstruction over wireless sensor network. |  Download Scientific Diagram">
             <a:extLst>
               <a:ext uri="{FF2B5EF4-FFF2-40B4-BE49-F238E27FC236}">
-                <a16:creationId xmlns:a16="http://schemas.microsoft.com/office/drawing/2014/main" xmlns="" id="{14C2B67D-81A1-457E-A410-FE4350A3CCA4}"/>
+                <a16:creationId xmlns:a16="http://schemas.microsoft.com/office/drawing/2014/main" id="{14C2B67D-81A1-457E-A410-FE4350A3CCA4}"/>
               </a:ext>
             </a:extLst>
           </p:cNvPr>
@@ -13425,7 +13421,7 @@
           <p:cNvPr id="4" name="Espaço Reservado para Conteúdo 3">
             <a:extLst>
               <a:ext uri="{FF2B5EF4-FFF2-40B4-BE49-F238E27FC236}">
-                <a16:creationId xmlns:a16="http://schemas.microsoft.com/office/drawing/2014/main" xmlns="" id="{0349BA64-C9D7-4730-9CA9-5C4AD9FC7969}"/>
+                <a16:creationId xmlns:a16="http://schemas.microsoft.com/office/drawing/2014/main" id="{0349BA64-C9D7-4730-9CA9-5C4AD9FC7969}"/>
               </a:ext>
             </a:extLst>
           </p:cNvPr>
@@ -13659,7 +13655,7 @@
           <p:cNvPr id="2" name="Título 1">
             <a:extLst>
               <a:ext uri="{FF2B5EF4-FFF2-40B4-BE49-F238E27FC236}">
-                <a16:creationId xmlns:a16="http://schemas.microsoft.com/office/drawing/2014/main" xmlns="" id="{5F09B89C-3183-4D52-981A-62798DDFF2B8}"/>
+                <a16:creationId xmlns:a16="http://schemas.microsoft.com/office/drawing/2014/main" id="{5F09B89C-3183-4D52-981A-62798DDFF2B8}"/>
               </a:ext>
             </a:extLst>
           </p:cNvPr>
@@ -13694,7 +13690,7 @@
           <p:cNvPr id="3" name="AutoShape 2" descr="An example of graph signal reconstruction over wireless sensor network. |  Download Scientific Diagram">
             <a:extLst>
               <a:ext uri="{FF2B5EF4-FFF2-40B4-BE49-F238E27FC236}">
-                <a16:creationId xmlns:a16="http://schemas.microsoft.com/office/drawing/2014/main" xmlns="" id="{0166B4DD-D72A-4A54-94A7-2C38133837FD}"/>
+                <a16:creationId xmlns:a16="http://schemas.microsoft.com/office/drawing/2014/main" id="{0166B4DD-D72A-4A54-94A7-2C38133837FD}"/>
               </a:ext>
             </a:extLst>
           </p:cNvPr>
@@ -13769,7 +13765,7 @@
           <p:cNvPr id="7" name="AutoShape 4" descr="An example of graph signal reconstruction over wireless sensor network. |  Download Scientific Diagram">
             <a:extLst>
               <a:ext uri="{FF2B5EF4-FFF2-40B4-BE49-F238E27FC236}">
-                <a16:creationId xmlns:a16="http://schemas.microsoft.com/office/drawing/2014/main" xmlns="" id="{14C2B67D-81A1-457E-A410-FE4350A3CCA4}"/>
+                <a16:creationId xmlns:a16="http://schemas.microsoft.com/office/drawing/2014/main" id="{14C2B67D-81A1-457E-A410-FE4350A3CCA4}"/>
               </a:ext>
             </a:extLst>
           </p:cNvPr>
@@ -13844,7 +13840,7 @@
           <p:cNvPr id="4" name="Espaço Reservado para Conteúdo 3">
             <a:extLst>
               <a:ext uri="{FF2B5EF4-FFF2-40B4-BE49-F238E27FC236}">
-                <a16:creationId xmlns:a16="http://schemas.microsoft.com/office/drawing/2014/main" xmlns="" id="{0349BA64-C9D7-4730-9CA9-5C4AD9FC7969}"/>
+                <a16:creationId xmlns:a16="http://schemas.microsoft.com/office/drawing/2014/main" id="{0349BA64-C9D7-4730-9CA9-5C4AD9FC7969}"/>
               </a:ext>
             </a:extLst>
           </p:cNvPr>
@@ -13899,42 +13895,7 @@
                 <a:ea typeface="Calibri" panose="020F0502020204030204" pitchFamily="34" charset="0"/>
                 <a:cs typeface="Arial" panose="020B0604020202020204" pitchFamily="34" charset="0"/>
               </a:rPr>
-              <a:t>Incluir </a:t>
-            </a:r>
-            <a:r>
-              <a:rPr lang="pt-BR" sz="2000" dirty="0" smtClean="0">
-                <a:ea typeface="Calibri" panose="020F0502020204030204" pitchFamily="34" charset="0"/>
-                <a:cs typeface="Arial" panose="020B0604020202020204" pitchFamily="34" charset="0"/>
-              </a:rPr>
-              <a:t>no </a:t>
-            </a:r>
-            <a:r>
-              <a:rPr lang="pt-BR" sz="2000" dirty="0">
-                <a:ea typeface="Calibri" panose="020F0502020204030204" pitchFamily="34" charset="0"/>
-                <a:cs typeface="Arial" panose="020B0604020202020204" pitchFamily="34" charset="0"/>
-              </a:rPr>
-              <a:t>Edge Impulse possíveis anomalias nos dados </a:t>
-            </a:r>
-            <a:r>
-              <a:rPr lang="pt-BR" sz="2000" dirty="0">
-                <a:ea typeface="Calibri" panose="020F0502020204030204" pitchFamily="34" charset="0"/>
-                <a:cs typeface="Arial" panose="020B0604020202020204" pitchFamily="34" charset="0"/>
-              </a:rPr>
-              <a:t>do ciclo </a:t>
-            </a:r>
-            <a:r>
-              <a:rPr lang="pt-BR" sz="2000" dirty="0" smtClean="0">
-                <a:ea typeface="Calibri" panose="020F0502020204030204" pitchFamily="34" charset="0"/>
-                <a:cs typeface="Arial" panose="020B0604020202020204" pitchFamily="34" charset="0"/>
-              </a:rPr>
-              <a:t>logístico, e.g., quedas</a:t>
-            </a:r>
-            <a:r>
-              <a:rPr lang="pt-BR" sz="2000" dirty="0" smtClean="0">
-                <a:ea typeface="Calibri" panose="020F0502020204030204" pitchFamily="34" charset="0"/>
-                <a:cs typeface="Arial" panose="020B0604020202020204" pitchFamily="34" charset="0"/>
-              </a:rPr>
-              <a:t>.</a:t>
+              <a:t>Incluir no Edge Impulse possíveis anomalias nos dados do ciclo logístico, e.g., quedas.</a:t>
             </a:r>
           </a:p>
         </p:txBody>
@@ -14012,7 +13973,7 @@
           <p:cNvPr id="2" name="Título 1">
             <a:extLst>
               <a:ext uri="{FF2B5EF4-FFF2-40B4-BE49-F238E27FC236}">
-                <a16:creationId xmlns:a16="http://schemas.microsoft.com/office/drawing/2014/main" xmlns="" id="{5F09B89C-3183-4D52-981A-62798DDFF2B8}"/>
+                <a16:creationId xmlns:a16="http://schemas.microsoft.com/office/drawing/2014/main" id="{5F09B89C-3183-4D52-981A-62798DDFF2B8}"/>
               </a:ext>
             </a:extLst>
           </p:cNvPr>
@@ -14047,7 +14008,7 @@
           <p:cNvPr id="3" name="AutoShape 2" descr="An example of graph signal reconstruction over wireless sensor network. |  Download Scientific Diagram">
             <a:extLst>
               <a:ext uri="{FF2B5EF4-FFF2-40B4-BE49-F238E27FC236}">
-                <a16:creationId xmlns:a16="http://schemas.microsoft.com/office/drawing/2014/main" xmlns="" id="{0166B4DD-D72A-4A54-94A7-2C38133837FD}"/>
+                <a16:creationId xmlns:a16="http://schemas.microsoft.com/office/drawing/2014/main" id="{0166B4DD-D72A-4A54-94A7-2C38133837FD}"/>
               </a:ext>
             </a:extLst>
           </p:cNvPr>
@@ -14122,7 +14083,7 @@
           <p:cNvPr id="7" name="AutoShape 4" descr="An example of graph signal reconstruction over wireless sensor network. |  Download Scientific Diagram">
             <a:extLst>
               <a:ext uri="{FF2B5EF4-FFF2-40B4-BE49-F238E27FC236}">
-                <a16:creationId xmlns:a16="http://schemas.microsoft.com/office/drawing/2014/main" xmlns="" id="{14C2B67D-81A1-457E-A410-FE4350A3CCA4}"/>
+                <a16:creationId xmlns:a16="http://schemas.microsoft.com/office/drawing/2014/main" id="{14C2B67D-81A1-457E-A410-FE4350A3CCA4}"/>
               </a:ext>
             </a:extLst>
           </p:cNvPr>
@@ -14197,7 +14158,7 @@
           <p:cNvPr id="4" name="Espaço Reservado para Conteúdo 3">
             <a:extLst>
               <a:ext uri="{FF2B5EF4-FFF2-40B4-BE49-F238E27FC236}">
-                <a16:creationId xmlns:a16="http://schemas.microsoft.com/office/drawing/2014/main" xmlns="" id="{0349BA64-C9D7-4730-9CA9-5C4AD9FC7969}"/>
+                <a16:creationId xmlns:a16="http://schemas.microsoft.com/office/drawing/2014/main" id="{0349BA64-C9D7-4730-9CA9-5C4AD9FC7969}"/>
               </a:ext>
             </a:extLst>
           </p:cNvPr>
@@ -14248,18 +14209,11 @@
               <a:buNone/>
             </a:pPr>
             <a:r>
-              <a:rPr lang="pt-BR" sz="2000" dirty="0" smtClean="0">
-                <a:ea typeface="Calibri" panose="020F0502020204030204" pitchFamily="34" charset="0"/>
-                <a:cs typeface="Arial" panose="020B0604020202020204" pitchFamily="34" charset="0"/>
-              </a:rPr>
-              <a:t>Se baseie no seguinte tutorial</a:t>
-            </a:r>
-            <a:r>
               <a:rPr lang="pt-BR" sz="2000" dirty="0">
                 <a:ea typeface="Calibri" panose="020F0502020204030204" pitchFamily="34" charset="0"/>
                 <a:cs typeface="Arial" panose="020B0604020202020204" pitchFamily="34" charset="0"/>
               </a:rPr>
-              <a:t>: </a:t>
+              <a:t>Se baseie no seguinte tutorial: </a:t>
             </a:r>
             <a:r>
               <a:rPr lang="pt-BR" sz="2000" dirty="0">
@@ -14267,17 +14221,9 @@
                 <a:cs typeface="Arial" panose="020B0604020202020204" pitchFamily="34" charset="0"/>
                 <a:hlinkClick r:id="rId4"/>
               </a:rPr>
-              <a:t>https://</a:t>
-            </a:r>
-            <a:r>
-              <a:rPr lang="pt-BR" sz="2000" dirty="0" smtClean="0">
-                <a:ea typeface="Calibri" panose="020F0502020204030204" pitchFamily="34" charset="0"/>
-                <a:cs typeface="Arial" panose="020B0604020202020204" pitchFamily="34" charset="0"/>
-                <a:hlinkClick r:id="rId4"/>
-              </a:rPr>
-              <a:t>docs.edgeimpulse.com/docs/tutorials/end-to-end-tutorials/time-series/continuous-motion-recognition</a:t>
-            </a:r>
-            <a:endParaRPr lang="pt-BR" sz="2000" dirty="0" smtClean="0">
+              <a:t>https://docs.edgeimpulse.com/docs/tutorials/end-to-end-tutorials/time-series/continuous-motion-recognition</a:t>
+            </a:r>
+            <a:endParaRPr lang="pt-BR" sz="2000" dirty="0">
               <a:ea typeface="Calibri" panose="020F0502020204030204" pitchFamily="34" charset="0"/>
               <a:cs typeface="Arial" panose="020B0604020202020204" pitchFamily="34" charset="0"/>
             </a:endParaRPr>
@@ -14372,7 +14318,7 @@
           <p:cNvPr id="3" name="AutoShape 2" descr="An example of graph signal reconstruction over wireless sensor network. |  Download Scientific Diagram">
             <a:extLst>
               <a:ext uri="{FF2B5EF4-FFF2-40B4-BE49-F238E27FC236}">
-                <a16:creationId xmlns:a16="http://schemas.microsoft.com/office/drawing/2014/main" xmlns="" id="{0166B4DD-D72A-4A54-94A7-2C38133837FD}"/>
+                <a16:creationId xmlns:a16="http://schemas.microsoft.com/office/drawing/2014/main" id="{0166B4DD-D72A-4A54-94A7-2C38133837FD}"/>
               </a:ext>
             </a:extLst>
           </p:cNvPr>
@@ -14447,7 +14393,7 @@
           <p:cNvPr id="7" name="AutoShape 4" descr="An example of graph signal reconstruction over wireless sensor network. |  Download Scientific Diagram">
             <a:extLst>
               <a:ext uri="{FF2B5EF4-FFF2-40B4-BE49-F238E27FC236}">
-                <a16:creationId xmlns:a16="http://schemas.microsoft.com/office/drawing/2014/main" xmlns="" id="{14C2B67D-81A1-457E-A410-FE4350A3CCA4}"/>
+                <a16:creationId xmlns:a16="http://schemas.microsoft.com/office/drawing/2014/main" id="{14C2B67D-81A1-457E-A410-FE4350A3CCA4}"/>
               </a:ext>
             </a:extLst>
           </p:cNvPr>
@@ -14522,7 +14468,7 @@
           <p:cNvPr id="4" name="Espaço Reservado para Conteúdo 3">
             <a:extLst>
               <a:ext uri="{FF2B5EF4-FFF2-40B4-BE49-F238E27FC236}">
-                <a16:creationId xmlns:a16="http://schemas.microsoft.com/office/drawing/2014/main" xmlns="" id="{0349BA64-C9D7-4730-9CA9-5C4AD9FC7969}"/>
+                <a16:creationId xmlns:a16="http://schemas.microsoft.com/office/drawing/2014/main" id="{0349BA64-C9D7-4730-9CA9-5C4AD9FC7969}"/>
               </a:ext>
             </a:extLst>
           </p:cNvPr>
@@ -14673,7 +14619,7 @@
           <p:cNvPr id="2" name="Título 1">
             <a:extLst>
               <a:ext uri="{FF2B5EF4-FFF2-40B4-BE49-F238E27FC236}">
-                <a16:creationId xmlns:a16="http://schemas.microsoft.com/office/drawing/2014/main" xmlns="" id="{5F09B89C-3183-4D52-981A-62798DDFF2B8}"/>
+                <a16:creationId xmlns:a16="http://schemas.microsoft.com/office/drawing/2014/main" id="{5F09B89C-3183-4D52-981A-62798DDFF2B8}"/>
               </a:ext>
             </a:extLst>
           </p:cNvPr>
@@ -14711,7 +14657,7 @@
           <p:cNvPr id="3" name="AutoShape 2" descr="An example of graph signal reconstruction over wireless sensor network. |  Download Scientific Diagram">
             <a:extLst>
               <a:ext uri="{FF2B5EF4-FFF2-40B4-BE49-F238E27FC236}">
-                <a16:creationId xmlns:a16="http://schemas.microsoft.com/office/drawing/2014/main" xmlns="" id="{0166B4DD-D72A-4A54-94A7-2C38133837FD}"/>
+                <a16:creationId xmlns:a16="http://schemas.microsoft.com/office/drawing/2014/main" id="{0166B4DD-D72A-4A54-94A7-2C38133837FD}"/>
               </a:ext>
             </a:extLst>
           </p:cNvPr>
@@ -14762,7 +14708,7 @@
           <p:cNvPr id="7" name="AutoShape 4" descr="An example of graph signal reconstruction over wireless sensor network. |  Download Scientific Diagram">
             <a:extLst>
               <a:ext uri="{FF2B5EF4-FFF2-40B4-BE49-F238E27FC236}">
-                <a16:creationId xmlns:a16="http://schemas.microsoft.com/office/drawing/2014/main" xmlns="" id="{14C2B67D-81A1-457E-A410-FE4350A3CCA4}"/>
+                <a16:creationId xmlns:a16="http://schemas.microsoft.com/office/drawing/2014/main" id="{14C2B67D-81A1-457E-A410-FE4350A3CCA4}"/>
               </a:ext>
             </a:extLst>
           </p:cNvPr>
@@ -14813,7 +14759,7 @@
           <p:cNvPr id="4" name="Espaço Reservado para Conteúdo 3">
             <a:extLst>
               <a:ext uri="{FF2B5EF4-FFF2-40B4-BE49-F238E27FC236}">
-                <a16:creationId xmlns:a16="http://schemas.microsoft.com/office/drawing/2014/main" xmlns="" id="{5F1B432F-F570-AEC0-CFFF-C1D9196D7234}"/>
+                <a16:creationId xmlns:a16="http://schemas.microsoft.com/office/drawing/2014/main" id="{5F1B432F-F570-AEC0-CFFF-C1D9196D7234}"/>
               </a:ext>
             </a:extLst>
           </p:cNvPr>
@@ -14852,7 +14798,7 @@
           <p:cNvPr id="3074" name="Picture 2" descr="Unsupervised machine learning">
             <a:extLst>
               <a:ext uri="{FF2B5EF4-FFF2-40B4-BE49-F238E27FC236}">
-                <a16:creationId xmlns:a16="http://schemas.microsoft.com/office/drawing/2014/main" xmlns="" id="{9C9BB3FA-B234-195B-6E78-1F5F1A0B5DD5}"/>
+                <a16:creationId xmlns:a16="http://schemas.microsoft.com/office/drawing/2014/main" id="{9C9BB3FA-B234-195B-6E78-1F5F1A0B5DD5}"/>
               </a:ext>
             </a:extLst>
           </p:cNvPr>
@@ -14899,7 +14845,7 @@
           <p:cNvPr id="3076" name="Picture 4" descr="Supervised machine learning">
             <a:extLst>
               <a:ext uri="{FF2B5EF4-FFF2-40B4-BE49-F238E27FC236}">
-                <a16:creationId xmlns:a16="http://schemas.microsoft.com/office/drawing/2014/main" xmlns="" id="{85D641D0-2AF2-0E0D-20E1-BE0FB83D483A}"/>
+                <a16:creationId xmlns:a16="http://schemas.microsoft.com/office/drawing/2014/main" id="{85D641D0-2AF2-0E0D-20E1-BE0FB83D483A}"/>
               </a:ext>
             </a:extLst>
           </p:cNvPr>
@@ -14990,7 +14936,7 @@
           <p:cNvPr id="2" name="Título 1">
             <a:extLst>
               <a:ext uri="{FF2B5EF4-FFF2-40B4-BE49-F238E27FC236}">
-                <a16:creationId xmlns:a16="http://schemas.microsoft.com/office/drawing/2014/main" xmlns="" id="{5F09B89C-3183-4D52-981A-62798DDFF2B8}"/>
+                <a16:creationId xmlns:a16="http://schemas.microsoft.com/office/drawing/2014/main" id="{5F09B89C-3183-4D52-981A-62798DDFF2B8}"/>
               </a:ext>
             </a:extLst>
           </p:cNvPr>
@@ -15025,7 +14971,7 @@
           <p:cNvPr id="3" name="AutoShape 2" descr="An example of graph signal reconstruction over wireless sensor network. |  Download Scientific Diagram">
             <a:extLst>
               <a:ext uri="{FF2B5EF4-FFF2-40B4-BE49-F238E27FC236}">
-                <a16:creationId xmlns:a16="http://schemas.microsoft.com/office/drawing/2014/main" xmlns="" id="{0166B4DD-D72A-4A54-94A7-2C38133837FD}"/>
+                <a16:creationId xmlns:a16="http://schemas.microsoft.com/office/drawing/2014/main" id="{0166B4DD-D72A-4A54-94A7-2C38133837FD}"/>
               </a:ext>
             </a:extLst>
           </p:cNvPr>
@@ -15076,7 +15022,7 @@
           <p:cNvPr id="7" name="AutoShape 4" descr="An example of graph signal reconstruction over wireless sensor network. |  Download Scientific Diagram">
             <a:extLst>
               <a:ext uri="{FF2B5EF4-FFF2-40B4-BE49-F238E27FC236}">
-                <a16:creationId xmlns:a16="http://schemas.microsoft.com/office/drawing/2014/main" xmlns="" id="{14C2B67D-81A1-457E-A410-FE4350A3CCA4}"/>
+                <a16:creationId xmlns:a16="http://schemas.microsoft.com/office/drawing/2014/main" id="{14C2B67D-81A1-457E-A410-FE4350A3CCA4}"/>
               </a:ext>
             </a:extLst>
           </p:cNvPr>
@@ -15127,7 +15073,7 @@
           <p:cNvPr id="4" name="Espaço Reservado para Conteúdo 3">
             <a:extLst>
               <a:ext uri="{FF2B5EF4-FFF2-40B4-BE49-F238E27FC236}">
-                <a16:creationId xmlns:a16="http://schemas.microsoft.com/office/drawing/2014/main" xmlns="" id="{5F1B432F-F570-AEC0-CFFF-C1D9196D7234}"/>
+                <a16:creationId xmlns:a16="http://schemas.microsoft.com/office/drawing/2014/main" id="{5F1B432F-F570-AEC0-CFFF-C1D9196D7234}"/>
               </a:ext>
             </a:extLst>
           </p:cNvPr>
@@ -15180,7 +15126,7 @@
           <p:cNvPr id="4098" name="Picture 2" descr="What is K-means Clustering and it's use cases ? | by Avijit das | Medium">
             <a:extLst>
               <a:ext uri="{FF2B5EF4-FFF2-40B4-BE49-F238E27FC236}">
-                <a16:creationId xmlns:a16="http://schemas.microsoft.com/office/drawing/2014/main" xmlns="" id="{056C7919-93FD-E63C-B36E-CC710CDD6044}"/>
+                <a16:creationId xmlns:a16="http://schemas.microsoft.com/office/drawing/2014/main" id="{056C7919-93FD-E63C-B36E-CC710CDD6044}"/>
               </a:ext>
             </a:extLst>
           </p:cNvPr>
@@ -15271,7 +15217,7 @@
           <p:cNvPr id="2" name="Título 1">
             <a:extLst>
               <a:ext uri="{FF2B5EF4-FFF2-40B4-BE49-F238E27FC236}">
-                <a16:creationId xmlns:a16="http://schemas.microsoft.com/office/drawing/2014/main" xmlns="" id="{5F09B89C-3183-4D52-981A-62798DDFF2B8}"/>
+                <a16:creationId xmlns:a16="http://schemas.microsoft.com/office/drawing/2014/main" id="{5F09B89C-3183-4D52-981A-62798DDFF2B8}"/>
               </a:ext>
             </a:extLst>
           </p:cNvPr>
@@ -15311,7 +15257,7 @@
           <p:cNvPr id="3" name="AutoShape 2" descr="An example of graph signal reconstruction over wireless sensor network. |  Download Scientific Diagram">
             <a:extLst>
               <a:ext uri="{FF2B5EF4-FFF2-40B4-BE49-F238E27FC236}">
-                <a16:creationId xmlns:a16="http://schemas.microsoft.com/office/drawing/2014/main" xmlns="" id="{0166B4DD-D72A-4A54-94A7-2C38133837FD}"/>
+                <a16:creationId xmlns:a16="http://schemas.microsoft.com/office/drawing/2014/main" id="{0166B4DD-D72A-4A54-94A7-2C38133837FD}"/>
               </a:ext>
             </a:extLst>
           </p:cNvPr>
@@ -15362,7 +15308,7 @@
           <p:cNvPr id="7" name="AutoShape 4" descr="An example of graph signal reconstruction over wireless sensor network. |  Download Scientific Diagram">
             <a:extLst>
               <a:ext uri="{FF2B5EF4-FFF2-40B4-BE49-F238E27FC236}">
-                <a16:creationId xmlns:a16="http://schemas.microsoft.com/office/drawing/2014/main" xmlns="" id="{14C2B67D-81A1-457E-A410-FE4350A3CCA4}"/>
+                <a16:creationId xmlns:a16="http://schemas.microsoft.com/office/drawing/2014/main" id="{14C2B67D-81A1-457E-A410-FE4350A3CCA4}"/>
               </a:ext>
             </a:extLst>
           </p:cNvPr>
@@ -15413,7 +15359,7 @@
           <p:cNvPr id="4" name="Espaço Reservado para Conteúdo 3">
             <a:extLst>
               <a:ext uri="{FF2B5EF4-FFF2-40B4-BE49-F238E27FC236}">
-                <a16:creationId xmlns:a16="http://schemas.microsoft.com/office/drawing/2014/main" xmlns="" id="{5F1B432F-F570-AEC0-CFFF-C1D9196D7234}"/>
+                <a16:creationId xmlns:a16="http://schemas.microsoft.com/office/drawing/2014/main" id="{5F1B432F-F570-AEC0-CFFF-C1D9196D7234}"/>
               </a:ext>
             </a:extLst>
           </p:cNvPr>
@@ -15497,7 +15443,7 @@
           <p:cNvPr id="4098" name="Picture 2" descr="K-Means Clustering Algorithm - Javatpoint">
             <a:extLst>
               <a:ext uri="{FF2B5EF4-FFF2-40B4-BE49-F238E27FC236}">
-                <a16:creationId xmlns:a16="http://schemas.microsoft.com/office/drawing/2014/main" xmlns="" id="{45592E60-7087-AC09-6FA1-B6EBEB4488EC}"/>
+                <a16:creationId xmlns:a16="http://schemas.microsoft.com/office/drawing/2014/main" id="{45592E60-7087-AC09-6FA1-B6EBEB4488EC}"/>
               </a:ext>
             </a:extLst>
           </p:cNvPr>
@@ -15588,7 +15534,7 @@
           <p:cNvPr id="2" name="Título 1">
             <a:extLst>
               <a:ext uri="{FF2B5EF4-FFF2-40B4-BE49-F238E27FC236}">
-                <a16:creationId xmlns:a16="http://schemas.microsoft.com/office/drawing/2014/main" xmlns="" id="{5F09B89C-3183-4D52-981A-62798DDFF2B8}"/>
+                <a16:creationId xmlns:a16="http://schemas.microsoft.com/office/drawing/2014/main" id="{5F09B89C-3183-4D52-981A-62798DDFF2B8}"/>
               </a:ext>
             </a:extLst>
           </p:cNvPr>
@@ -15628,7 +15574,7 @@
           <p:cNvPr id="3" name="AutoShape 2" descr="An example of graph signal reconstruction over wireless sensor network. |  Download Scientific Diagram">
             <a:extLst>
               <a:ext uri="{FF2B5EF4-FFF2-40B4-BE49-F238E27FC236}">
-                <a16:creationId xmlns:a16="http://schemas.microsoft.com/office/drawing/2014/main" xmlns="" id="{0166B4DD-D72A-4A54-94A7-2C38133837FD}"/>
+                <a16:creationId xmlns:a16="http://schemas.microsoft.com/office/drawing/2014/main" id="{0166B4DD-D72A-4A54-94A7-2C38133837FD}"/>
               </a:ext>
             </a:extLst>
           </p:cNvPr>
@@ -15679,7 +15625,7 @@
           <p:cNvPr id="7" name="AutoShape 4" descr="An example of graph signal reconstruction over wireless sensor network. |  Download Scientific Diagram">
             <a:extLst>
               <a:ext uri="{FF2B5EF4-FFF2-40B4-BE49-F238E27FC236}">
-                <a16:creationId xmlns:a16="http://schemas.microsoft.com/office/drawing/2014/main" xmlns="" id="{14C2B67D-81A1-457E-A410-FE4350A3CCA4}"/>
+                <a16:creationId xmlns:a16="http://schemas.microsoft.com/office/drawing/2014/main" id="{14C2B67D-81A1-457E-A410-FE4350A3CCA4}"/>
               </a:ext>
             </a:extLst>
           </p:cNvPr>
@@ -15730,7 +15676,7 @@
           <p:cNvPr id="4" name="Espaço Reservado para Conteúdo 3">
             <a:extLst>
               <a:ext uri="{FF2B5EF4-FFF2-40B4-BE49-F238E27FC236}">
-                <a16:creationId xmlns:a16="http://schemas.microsoft.com/office/drawing/2014/main" xmlns="" id="{5F1B432F-F570-AEC0-CFFF-C1D9196D7234}"/>
+                <a16:creationId xmlns:a16="http://schemas.microsoft.com/office/drawing/2014/main" id="{5F1B432F-F570-AEC0-CFFF-C1D9196D7234}"/>
               </a:ext>
             </a:extLst>
           </p:cNvPr>
@@ -15783,7 +15729,7 @@
               <p:cNvPr id="5" name="TextBox 4">
                 <a:extLst>
                   <a:ext uri="{FF2B5EF4-FFF2-40B4-BE49-F238E27FC236}">
-                    <a16:creationId xmlns:a16="http://schemas.microsoft.com/office/drawing/2014/main" xmlns="" id="{A60E2CD0-3AFD-013C-16CC-B158E81DC1CA}"/>
+                    <a16:creationId xmlns:a16="http://schemas.microsoft.com/office/drawing/2014/main" id="{A60E2CD0-3AFD-013C-16CC-B158E81DC1CA}"/>
                   </a:ext>
                 </a:extLst>
               </p:cNvPr>
@@ -16035,7 +15981,7 @@
         <p:cNvPr id="1" name="">
           <a:extLst>
             <a:ext uri="{FF2B5EF4-FFF2-40B4-BE49-F238E27FC236}">
-              <a16:creationId xmlns:a16="http://schemas.microsoft.com/office/drawing/2014/main" xmlns="" id="{8A1FE513-AB4A-132F-B33C-C1A69C4E90BB}"/>
+              <a16:creationId xmlns:a16="http://schemas.microsoft.com/office/drawing/2014/main" id="{8A1FE513-AB4A-132F-B33C-C1A69C4E90BB}"/>
             </a:ext>
           </a:extLst>
         </p:cNvPr>
@@ -16055,7 +16001,7 @@
           <p:cNvPr id="2" name="Título 1">
             <a:extLst>
               <a:ext uri="{FF2B5EF4-FFF2-40B4-BE49-F238E27FC236}">
-                <a16:creationId xmlns:a16="http://schemas.microsoft.com/office/drawing/2014/main" xmlns="" id="{E5BC5611-534A-CB77-C071-F477937D3B59}"/>
+                <a16:creationId xmlns:a16="http://schemas.microsoft.com/office/drawing/2014/main" id="{E5BC5611-534A-CB77-C071-F477937D3B59}"/>
               </a:ext>
             </a:extLst>
           </p:cNvPr>
@@ -16095,7 +16041,7 @@
           <p:cNvPr id="3" name="AutoShape 2" descr="An example of graph signal reconstruction over wireless sensor network. |  Download Scientific Diagram">
             <a:extLst>
               <a:ext uri="{FF2B5EF4-FFF2-40B4-BE49-F238E27FC236}">
-                <a16:creationId xmlns:a16="http://schemas.microsoft.com/office/drawing/2014/main" xmlns="" id="{7E7F13EA-3BD1-43C2-79EA-B881793AD8AD}"/>
+                <a16:creationId xmlns:a16="http://schemas.microsoft.com/office/drawing/2014/main" id="{7E7F13EA-3BD1-43C2-79EA-B881793AD8AD}"/>
               </a:ext>
             </a:extLst>
           </p:cNvPr>
@@ -16146,7 +16092,7 @@
           <p:cNvPr id="7" name="AutoShape 4" descr="An example of graph signal reconstruction over wireless sensor network. |  Download Scientific Diagram">
             <a:extLst>
               <a:ext uri="{FF2B5EF4-FFF2-40B4-BE49-F238E27FC236}">
-                <a16:creationId xmlns:a16="http://schemas.microsoft.com/office/drawing/2014/main" xmlns="" id="{A0891BC2-FEAE-19E7-B671-ECE0FACC07C4}"/>
+                <a16:creationId xmlns:a16="http://schemas.microsoft.com/office/drawing/2014/main" id="{A0891BC2-FEAE-19E7-B671-ECE0FACC07C4}"/>
               </a:ext>
             </a:extLst>
           </p:cNvPr>
@@ -16197,7 +16143,7 @@
           <p:cNvPr id="4" name="Espaço Reservado para Conteúdo 3">
             <a:extLst>
               <a:ext uri="{FF2B5EF4-FFF2-40B4-BE49-F238E27FC236}">
-                <a16:creationId xmlns:a16="http://schemas.microsoft.com/office/drawing/2014/main" xmlns="" id="{747C2E78-E437-28C4-0BAF-D2D2AC1C96CB}"/>
+                <a16:creationId xmlns:a16="http://schemas.microsoft.com/office/drawing/2014/main" id="{747C2E78-E437-28C4-0BAF-D2D2AC1C96CB}"/>
               </a:ext>
             </a:extLst>
           </p:cNvPr>
@@ -16240,7 +16186,7 @@
           <p:cNvPr id="6" name="Picture 5">
             <a:extLst>
               <a:ext uri="{FF2B5EF4-FFF2-40B4-BE49-F238E27FC236}">
-                <a16:creationId xmlns:a16="http://schemas.microsoft.com/office/drawing/2014/main" xmlns="" id="{F98B536F-38AB-58C5-0FFB-41BDB557E9EF}"/>
+                <a16:creationId xmlns:a16="http://schemas.microsoft.com/office/drawing/2014/main" id="{F98B536F-38AB-58C5-0FFB-41BDB557E9EF}"/>
               </a:ext>
             </a:extLst>
           </p:cNvPr>
@@ -16270,7 +16216,7 @@
           <p:cNvPr id="8" name="TextBox 7">
             <a:extLst>
               <a:ext uri="{FF2B5EF4-FFF2-40B4-BE49-F238E27FC236}">
-                <a16:creationId xmlns:a16="http://schemas.microsoft.com/office/drawing/2014/main" xmlns="" id="{04EA9FAE-D371-68E0-2CB7-9C8893491B3B}"/>
+                <a16:creationId xmlns:a16="http://schemas.microsoft.com/office/drawing/2014/main" id="{04EA9FAE-D371-68E0-2CB7-9C8893491B3B}"/>
               </a:ext>
             </a:extLst>
           </p:cNvPr>
@@ -16336,7 +16282,7 @@
         <p:cNvPr id="1" name="">
           <a:extLst>
             <a:ext uri="{FF2B5EF4-FFF2-40B4-BE49-F238E27FC236}">
-              <a16:creationId xmlns:a16="http://schemas.microsoft.com/office/drawing/2014/main" xmlns="" id="{B86C6B89-4D49-2EC0-F063-638BD6935412}"/>
+              <a16:creationId xmlns:a16="http://schemas.microsoft.com/office/drawing/2014/main" id="{B86C6B89-4D49-2EC0-F063-638BD6935412}"/>
             </a:ext>
           </a:extLst>
         </p:cNvPr>
@@ -16356,7 +16302,7 @@
           <p:cNvPr id="2" name="Título 1">
             <a:extLst>
               <a:ext uri="{FF2B5EF4-FFF2-40B4-BE49-F238E27FC236}">
-                <a16:creationId xmlns:a16="http://schemas.microsoft.com/office/drawing/2014/main" xmlns="" id="{B81115AF-9415-9558-8D7C-7CA5F9E9ED43}"/>
+                <a16:creationId xmlns:a16="http://schemas.microsoft.com/office/drawing/2014/main" id="{B81115AF-9415-9558-8D7C-7CA5F9E9ED43}"/>
               </a:ext>
             </a:extLst>
           </p:cNvPr>
@@ -16396,7 +16342,7 @@
           <p:cNvPr id="3" name="AutoShape 2" descr="An example of graph signal reconstruction over wireless sensor network. |  Download Scientific Diagram">
             <a:extLst>
               <a:ext uri="{FF2B5EF4-FFF2-40B4-BE49-F238E27FC236}">
-                <a16:creationId xmlns:a16="http://schemas.microsoft.com/office/drawing/2014/main" xmlns="" id="{55584ECE-67DE-1FFA-9FE4-D3C3D4136411}"/>
+                <a16:creationId xmlns:a16="http://schemas.microsoft.com/office/drawing/2014/main" id="{55584ECE-67DE-1FFA-9FE4-D3C3D4136411}"/>
               </a:ext>
             </a:extLst>
           </p:cNvPr>
@@ -16447,7 +16393,7 @@
           <p:cNvPr id="7" name="AutoShape 4" descr="An example of graph signal reconstruction over wireless sensor network. |  Download Scientific Diagram">
             <a:extLst>
               <a:ext uri="{FF2B5EF4-FFF2-40B4-BE49-F238E27FC236}">
-                <a16:creationId xmlns:a16="http://schemas.microsoft.com/office/drawing/2014/main" xmlns="" id="{A9D0FB6C-59DD-7620-EBAF-21BB030E5B51}"/>
+                <a16:creationId xmlns:a16="http://schemas.microsoft.com/office/drawing/2014/main" id="{A9D0FB6C-59DD-7620-EBAF-21BB030E5B51}"/>
               </a:ext>
             </a:extLst>
           </p:cNvPr>
@@ -16498,7 +16444,7 @@
           <p:cNvPr id="4" name="Espaço Reservado para Conteúdo 3">
             <a:extLst>
               <a:ext uri="{FF2B5EF4-FFF2-40B4-BE49-F238E27FC236}">
-                <a16:creationId xmlns:a16="http://schemas.microsoft.com/office/drawing/2014/main" xmlns="" id="{EC6F58C6-8849-231E-3B12-60D9682EF42B}"/>
+                <a16:creationId xmlns:a16="http://schemas.microsoft.com/office/drawing/2014/main" id="{EC6F58C6-8849-231E-3B12-60D9682EF42B}"/>
               </a:ext>
             </a:extLst>
           </p:cNvPr>
@@ -16541,7 +16487,7 @@
           <p:cNvPr id="6" name="Picture 5">
             <a:extLst>
               <a:ext uri="{FF2B5EF4-FFF2-40B4-BE49-F238E27FC236}">
-                <a16:creationId xmlns:a16="http://schemas.microsoft.com/office/drawing/2014/main" xmlns="" id="{69F3FE92-0D0B-AECE-B64E-FC9D2F3EADBC}"/>
+                <a16:creationId xmlns:a16="http://schemas.microsoft.com/office/drawing/2014/main" id="{69F3FE92-0D0B-AECE-B64E-FC9D2F3EADBC}"/>
               </a:ext>
             </a:extLst>
           </p:cNvPr>
@@ -16571,7 +16517,7 @@
           <p:cNvPr id="8" name="TextBox 7">
             <a:extLst>
               <a:ext uri="{FF2B5EF4-FFF2-40B4-BE49-F238E27FC236}">
-                <a16:creationId xmlns:a16="http://schemas.microsoft.com/office/drawing/2014/main" xmlns="" id="{5D947541-89EC-69EF-1918-6EFD56E0B3C2}"/>
+                <a16:creationId xmlns:a16="http://schemas.microsoft.com/office/drawing/2014/main" id="{5D947541-89EC-69EF-1918-6EFD56E0B3C2}"/>
               </a:ext>
             </a:extLst>
           </p:cNvPr>
@@ -16676,7 +16622,7 @@
         <p:cNvPr id="1" name="">
           <a:extLst>
             <a:ext uri="{FF2B5EF4-FFF2-40B4-BE49-F238E27FC236}">
-              <a16:creationId xmlns:a16="http://schemas.microsoft.com/office/drawing/2014/main" xmlns="" id="{42119100-E668-77C4-3183-771B95B265DA}"/>
+              <a16:creationId xmlns:a16="http://schemas.microsoft.com/office/drawing/2014/main" id="{42119100-E668-77C4-3183-771B95B265DA}"/>
             </a:ext>
           </a:extLst>
         </p:cNvPr>
@@ -16696,7 +16642,7 @@
           <p:cNvPr id="2" name="Título 1">
             <a:extLst>
               <a:ext uri="{FF2B5EF4-FFF2-40B4-BE49-F238E27FC236}">
-                <a16:creationId xmlns:a16="http://schemas.microsoft.com/office/drawing/2014/main" xmlns="" id="{4EBCA554-D396-DCCB-4744-F3695D6FD50E}"/>
+                <a16:creationId xmlns:a16="http://schemas.microsoft.com/office/drawing/2014/main" id="{4EBCA554-D396-DCCB-4744-F3695D6FD50E}"/>
               </a:ext>
             </a:extLst>
           </p:cNvPr>
@@ -16736,7 +16682,7 @@
           <p:cNvPr id="3" name="AutoShape 2" descr="An example of graph signal reconstruction over wireless sensor network. |  Download Scientific Diagram">
             <a:extLst>
               <a:ext uri="{FF2B5EF4-FFF2-40B4-BE49-F238E27FC236}">
-                <a16:creationId xmlns:a16="http://schemas.microsoft.com/office/drawing/2014/main" xmlns="" id="{3380BF6D-7A0A-C11E-50C6-1F567BA3A3D4}"/>
+                <a16:creationId xmlns:a16="http://schemas.microsoft.com/office/drawing/2014/main" id="{3380BF6D-7A0A-C11E-50C6-1F567BA3A3D4}"/>
               </a:ext>
             </a:extLst>
           </p:cNvPr>
@@ -16787,7 +16733,7 @@
           <p:cNvPr id="7" name="AutoShape 4" descr="An example of graph signal reconstruction over wireless sensor network. |  Download Scientific Diagram">
             <a:extLst>
               <a:ext uri="{FF2B5EF4-FFF2-40B4-BE49-F238E27FC236}">
-                <a16:creationId xmlns:a16="http://schemas.microsoft.com/office/drawing/2014/main" xmlns="" id="{52BFF569-F440-2D60-8296-D8243B2988E7}"/>
+                <a16:creationId xmlns:a16="http://schemas.microsoft.com/office/drawing/2014/main" id="{52BFF569-F440-2D60-8296-D8243B2988E7}"/>
               </a:ext>
             </a:extLst>
           </p:cNvPr>
@@ -16838,7 +16784,7 @@
           <p:cNvPr id="4" name="Espaço Reservado para Conteúdo 3">
             <a:extLst>
               <a:ext uri="{FF2B5EF4-FFF2-40B4-BE49-F238E27FC236}">
-                <a16:creationId xmlns:a16="http://schemas.microsoft.com/office/drawing/2014/main" xmlns="" id="{E0298857-CD80-B8D1-6E62-55E6C3A64A44}"/>
+                <a16:creationId xmlns:a16="http://schemas.microsoft.com/office/drawing/2014/main" id="{E0298857-CD80-B8D1-6E62-55E6C3A64A44}"/>
               </a:ext>
             </a:extLst>
           </p:cNvPr>
@@ -16881,7 +16827,7 @@
           <p:cNvPr id="6" name="Picture 5">
             <a:extLst>
               <a:ext uri="{FF2B5EF4-FFF2-40B4-BE49-F238E27FC236}">
-                <a16:creationId xmlns:a16="http://schemas.microsoft.com/office/drawing/2014/main" xmlns="" id="{1C0684BB-EFF7-DBA8-3519-25CE2A1A9632}"/>
+                <a16:creationId xmlns:a16="http://schemas.microsoft.com/office/drawing/2014/main" id="{1C0684BB-EFF7-DBA8-3519-25CE2A1A9632}"/>
               </a:ext>
             </a:extLst>
           </p:cNvPr>
@@ -16911,7 +16857,7 @@
           <p:cNvPr id="9" name="TextBox 8">
             <a:extLst>
               <a:ext uri="{FF2B5EF4-FFF2-40B4-BE49-F238E27FC236}">
-                <a16:creationId xmlns:a16="http://schemas.microsoft.com/office/drawing/2014/main" xmlns="" id="{38267D7C-379A-003E-4048-8D4DDD969EB6}"/>
+                <a16:creationId xmlns:a16="http://schemas.microsoft.com/office/drawing/2014/main" id="{38267D7C-379A-003E-4048-8D4DDD969EB6}"/>
               </a:ext>
             </a:extLst>
           </p:cNvPr>
@@ -16960,10 +16906,6 @@
                 <a:effectLst/>
               </a:rPr>
               <a:t> mais próximo com base na distância euclidiana.</a:t>
-            </a:r>
-            <a:r>
-              <a:rPr lang="pt-BR" dirty="0"/>
-              <a:t/>
             </a:r>
             <a:br>
               <a:rPr lang="pt-BR" dirty="0"/>

--- a/slides/TP557_16_detecção_de_anomalias.pptx
+++ b/slides/TP557_16_detecção_de_anomalias.pptx
@@ -223,7 +223,7 @@
           <a:p>
             <a:fld id="{144F1436-6906-4D93-B7A2-786C327BFA14}" type="datetimeFigureOut">
               <a:rPr lang="nl-BE" smtClean="0"/>
-              <a:t>21/05/2025</a:t>
+              <a:t>9/06/2025</a:t>
             </a:fld>
             <a:endParaRPr lang="nl-BE"/>
           </a:p>
@@ -388,7 +388,7 @@
           <a:p>
             <a:fld id="{AA8CD09E-2914-4F47-B6C1-51B2C31814C9}" type="datetimeFigureOut">
               <a:rPr lang="pt-BR" smtClean="0"/>
-              <a:t>21/05/2025</a:t>
+              <a:t>09/06/2025</a:t>
             </a:fld>
             <a:endParaRPr lang="pt-BR"/>
           </a:p>
@@ -3233,7 +3233,7 @@
           <a:p>
             <a:fld id="{63289F7E-B80B-496E-81B4-D396C37C9454}" type="datetimeFigureOut">
               <a:rPr lang="pt-BR" smtClean="0"/>
-              <a:t>21/05/2025</a:t>
+              <a:t>09/06/2025</a:t>
             </a:fld>
             <a:endParaRPr lang="pt-BR"/>
           </a:p>
@@ -3431,7 +3431,7 @@
           <a:p>
             <a:fld id="{63289F7E-B80B-496E-81B4-D396C37C9454}" type="datetimeFigureOut">
               <a:rPr lang="pt-BR" smtClean="0"/>
-              <a:t>21/05/2025</a:t>
+              <a:t>09/06/2025</a:t>
             </a:fld>
             <a:endParaRPr lang="pt-BR"/>
           </a:p>
@@ -3639,7 +3639,7 @@
           <a:p>
             <a:fld id="{63289F7E-B80B-496E-81B4-D396C37C9454}" type="datetimeFigureOut">
               <a:rPr lang="pt-BR" smtClean="0"/>
-              <a:t>21/05/2025</a:t>
+              <a:t>09/06/2025</a:t>
             </a:fld>
             <a:endParaRPr lang="pt-BR"/>
           </a:p>
@@ -3894,7 +3894,7 @@
             <a:fld id="{1D8BD707-D9CF-40AE-B4C6-C98DA3205C09}" type="datetimeFigureOut">
               <a:rPr lang="en-US" smtClean="0"/>
               <a:pPr/>
-              <a:t>5/21/2025</a:t>
+              <a:t>6/9/2025</a:t>
             </a:fld>
             <a:endParaRPr lang="en-US"/>
           </a:p>
@@ -4066,7 +4066,7 @@
             <a:fld id="{1D8BD707-D9CF-40AE-B4C6-C98DA3205C09}" type="datetimeFigureOut">
               <a:rPr lang="en-US" smtClean="0"/>
               <a:pPr/>
-              <a:t>5/21/2025</a:t>
+              <a:t>6/9/2025</a:t>
             </a:fld>
             <a:endParaRPr lang="en-US"/>
           </a:p>
@@ -4314,7 +4314,7 @@
             <a:fld id="{1D8BD707-D9CF-40AE-B4C6-C98DA3205C09}" type="datetimeFigureOut">
               <a:rPr lang="en-US" smtClean="0"/>
               <a:pPr/>
-              <a:t>5/21/2025</a:t>
+              <a:t>6/9/2025</a:t>
             </a:fld>
             <a:endParaRPr lang="en-US"/>
           </a:p>
@@ -4604,7 +4604,7 @@
             <a:fld id="{1D8BD707-D9CF-40AE-B4C6-C98DA3205C09}" type="datetimeFigureOut">
               <a:rPr lang="en-US" smtClean="0"/>
               <a:pPr/>
-              <a:t>5/21/2025</a:t>
+              <a:t>6/9/2025</a:t>
             </a:fld>
             <a:endParaRPr lang="en-US"/>
           </a:p>
@@ -5028,7 +5028,7 @@
             <a:fld id="{1D8BD707-D9CF-40AE-B4C6-C98DA3205C09}" type="datetimeFigureOut">
               <a:rPr lang="en-US" smtClean="0"/>
               <a:pPr/>
-              <a:t>5/21/2025</a:t>
+              <a:t>6/9/2025</a:t>
             </a:fld>
             <a:endParaRPr lang="en-US"/>
           </a:p>
@@ -5148,7 +5148,7 @@
             <a:fld id="{1D8BD707-D9CF-40AE-B4C6-C98DA3205C09}" type="datetimeFigureOut">
               <a:rPr lang="en-US" smtClean="0"/>
               <a:pPr/>
-              <a:t>5/21/2025</a:t>
+              <a:t>6/9/2025</a:t>
             </a:fld>
             <a:endParaRPr lang="en-US"/>
           </a:p>
@@ -5245,7 +5245,7 @@
             <a:fld id="{1D8BD707-D9CF-40AE-B4C6-C98DA3205C09}" type="datetimeFigureOut">
               <a:rPr lang="en-US" smtClean="0"/>
               <a:pPr/>
-              <a:t>5/21/2025</a:t>
+              <a:t>6/9/2025</a:t>
             </a:fld>
             <a:endParaRPr lang="en-US"/>
           </a:p>
@@ -5524,7 +5524,7 @@
             <a:fld id="{1D8BD707-D9CF-40AE-B4C6-C98DA3205C09}" type="datetimeFigureOut">
               <a:rPr lang="en-US" smtClean="0"/>
               <a:pPr/>
-              <a:t>5/21/2025</a:t>
+              <a:t>6/9/2025</a:t>
             </a:fld>
             <a:endParaRPr lang="en-US"/>
           </a:p>
@@ -5711,7 +5711,7 @@
           <a:p>
             <a:fld id="{63289F7E-B80B-496E-81B4-D396C37C9454}" type="datetimeFigureOut">
               <a:rPr lang="pt-BR" smtClean="0"/>
-              <a:t>21/05/2025</a:t>
+              <a:t>09/06/2025</a:t>
             </a:fld>
             <a:endParaRPr lang="pt-BR"/>
           </a:p>
@@ -5981,7 +5981,7 @@
             <a:fld id="{1D8BD707-D9CF-40AE-B4C6-C98DA3205C09}" type="datetimeFigureOut">
               <a:rPr lang="en-US" smtClean="0"/>
               <a:pPr/>
-              <a:t>5/21/2025</a:t>
+              <a:t>6/9/2025</a:t>
             </a:fld>
             <a:endParaRPr lang="en-US"/>
           </a:p>
@@ -6153,7 +6153,7 @@
             <a:fld id="{1D8BD707-D9CF-40AE-B4C6-C98DA3205C09}" type="datetimeFigureOut">
               <a:rPr lang="en-US" smtClean="0"/>
               <a:pPr/>
-              <a:t>5/21/2025</a:t>
+              <a:t>6/9/2025</a:t>
             </a:fld>
             <a:endParaRPr lang="en-US"/>
           </a:p>
@@ -6335,7 +6335,7 @@
             <a:fld id="{1D8BD707-D9CF-40AE-B4C6-C98DA3205C09}" type="datetimeFigureOut">
               <a:rPr lang="en-US" smtClean="0"/>
               <a:pPr/>
-              <a:t>5/21/2025</a:t>
+              <a:t>6/9/2025</a:t>
             </a:fld>
             <a:endParaRPr lang="en-US"/>
           </a:p>
@@ -6599,7 +6599,7 @@
           <a:p>
             <a:fld id="{63289F7E-B80B-496E-81B4-D396C37C9454}" type="datetimeFigureOut">
               <a:rPr lang="pt-BR" smtClean="0"/>
-              <a:t>21/05/2025</a:t>
+              <a:t>09/06/2025</a:t>
             </a:fld>
             <a:endParaRPr lang="pt-BR"/>
           </a:p>
@@ -6864,7 +6864,7 @@
           <a:p>
             <a:fld id="{63289F7E-B80B-496E-81B4-D396C37C9454}" type="datetimeFigureOut">
               <a:rPr lang="pt-BR" smtClean="0"/>
-              <a:t>21/05/2025</a:t>
+              <a:t>09/06/2025</a:t>
             </a:fld>
             <a:endParaRPr lang="pt-BR"/>
           </a:p>
@@ -7276,7 +7276,7 @@
           <a:p>
             <a:fld id="{63289F7E-B80B-496E-81B4-D396C37C9454}" type="datetimeFigureOut">
               <a:rPr lang="pt-BR" smtClean="0"/>
-              <a:t>21/05/2025</a:t>
+              <a:t>09/06/2025</a:t>
             </a:fld>
             <a:endParaRPr lang="pt-BR"/>
           </a:p>
@@ -7417,7 +7417,7 @@
           <a:p>
             <a:fld id="{63289F7E-B80B-496E-81B4-D396C37C9454}" type="datetimeFigureOut">
               <a:rPr lang="pt-BR" smtClean="0"/>
-              <a:t>21/05/2025</a:t>
+              <a:t>09/06/2025</a:t>
             </a:fld>
             <a:endParaRPr lang="pt-BR"/>
           </a:p>
@@ -7530,7 +7530,7 @@
           <a:p>
             <a:fld id="{63289F7E-B80B-496E-81B4-D396C37C9454}" type="datetimeFigureOut">
               <a:rPr lang="pt-BR" smtClean="0"/>
-              <a:t>21/05/2025</a:t>
+              <a:t>09/06/2025</a:t>
             </a:fld>
             <a:endParaRPr lang="pt-BR"/>
           </a:p>
@@ -7841,7 +7841,7 @@
           <a:p>
             <a:fld id="{63289F7E-B80B-496E-81B4-D396C37C9454}" type="datetimeFigureOut">
               <a:rPr lang="pt-BR" smtClean="0"/>
-              <a:t>21/05/2025</a:t>
+              <a:t>09/06/2025</a:t>
             </a:fld>
             <a:endParaRPr lang="pt-BR"/>
           </a:p>
@@ -8129,7 +8129,7 @@
           <a:p>
             <a:fld id="{63289F7E-B80B-496E-81B4-D396C37C9454}" type="datetimeFigureOut">
               <a:rPr lang="pt-BR" smtClean="0"/>
-              <a:t>21/05/2025</a:t>
+              <a:t>09/06/2025</a:t>
             </a:fld>
             <a:endParaRPr lang="pt-BR"/>
           </a:p>
@@ -8370,7 +8370,7 @@
           <a:p>
             <a:fld id="{63289F7E-B80B-496E-81B4-D396C37C9454}" type="datetimeFigureOut">
               <a:rPr lang="pt-BR" smtClean="0"/>
-              <a:t>21/05/2025</a:t>
+              <a:t>09/06/2025</a:t>
             </a:fld>
             <a:endParaRPr lang="pt-BR"/>
           </a:p>
@@ -8923,7 +8923,7 @@
             <a:fld id="{1D8BD707-D9CF-40AE-B4C6-C98DA3205C09}" type="datetimeFigureOut">
               <a:rPr lang="en-US" smtClean="0"/>
               <a:pPr/>
-              <a:t>5/21/2025</a:t>
+              <a:t>6/9/2025</a:t>
             </a:fld>
             <a:endParaRPr lang="en-US"/>
           </a:p>
@@ -9825,7 +9825,7 @@
                 </a:solidFill>
                 <a:effectLst/>
               </a:rPr>
-              <a:t>4. Recalcula-se o centroide do clusters.</a:t>
+              <a:t>4. Recalcula-se o centroide dos clusters.</a:t>
             </a:r>
             <a:endParaRPr lang="en-US" dirty="0"/>
           </a:p>
@@ -10756,7 +10756,7 @@
                 </a:solidFill>
                 <a:effectLst/>
               </a:rPr>
-              <a:t>até que um dos seguintes ocorra:</a:t>
+              <a:t>até que um dos casos abaixo ocorra:</a:t>
             </a:r>
             <a:endParaRPr lang="pt-BR" dirty="0"/>
           </a:p>
@@ -10772,7 +10772,7 @@
                 </a:solidFill>
                 <a:effectLst/>
               </a:rPr>
-              <a:t>A soma das distâncias entre os pontos de dados e o centroide correspondente seja minimizada</a:t>
+              <a:t>A soma das distâncias entre as amostras e o centroide correspondente seja minimizada</a:t>
             </a:r>
             <a:endParaRPr lang="pt-BR" dirty="0"/>
           </a:p>
@@ -11091,7 +11091,7 @@
           <a:p>
             <a:r>
               <a:rPr lang="pt-BR" dirty="0"/>
-              <a:t>A detecção de anomalias é a identificação de itens, eventos ou observações raras que levantam suspeitas por diferirem significativamente da maioria dos dados.</a:t>
+              <a:t>A detecção de anomalias é a identificação de itens, eventos ou observações raras que levantam suspeitas por diferem significativamente da maioria dos dados.</a:t>
             </a:r>
           </a:p>
           <a:p>
@@ -11118,14 +11118,14 @@
             <a:pPr lvl="1"/>
             <a:r>
               <a:rPr lang="pt-BR" dirty="0"/>
-              <a:t>Detecção de falhas</a:t>
+              <a:t>Detecção de falhas em equipamentos</a:t>
             </a:r>
           </a:p>
           <a:p>
             <a:pPr lvl="1"/>
             <a:r>
               <a:rPr lang="pt-BR" dirty="0"/>
-              <a:t>Detecção de movimento</a:t>
+              <a:t>Detecção de movimentos anômalos</a:t>
             </a:r>
           </a:p>
           <a:p>
@@ -11377,7 +11377,7 @@
         </p:blipFill>
         <p:spPr bwMode="auto">
           <a:xfrm>
-            <a:off x="948267" y="1445508"/>
+            <a:off x="381339" y="1445508"/>
             <a:ext cx="8387017" cy="4717697"/>
           </a:xfrm>
           <a:prstGeom prst="rect">
@@ -11395,6 +11395,131 @@
           </a:extLst>
         </p:spPr>
       </p:pic>
+      <p:sp>
+        <p:nvSpPr>
+          <p:cNvPr id="5" name="TextBox 4">
+            <a:extLst>
+              <a:ext uri="{FF2B5EF4-FFF2-40B4-BE49-F238E27FC236}">
+                <a16:creationId xmlns:a16="http://schemas.microsoft.com/office/drawing/2014/main" id="{994C47A3-058C-79BA-4495-77705E36B75F}"/>
+              </a:ext>
+            </a:extLst>
+          </p:cNvPr>
+          <p:cNvSpPr txBox="1"/>
+          <p:nvPr/>
+        </p:nvSpPr>
+        <p:spPr>
+          <a:xfrm>
+            <a:off x="8537757" y="3229455"/>
+            <a:ext cx="3349443" cy="1754326"/>
+          </a:xfrm>
+          <a:prstGeom prst="rect">
+            <a:avLst/>
+          </a:prstGeom>
+          <a:noFill/>
+        </p:spPr>
+        <p:txBody>
+          <a:bodyPr wrap="none" rtlCol="0">
+            <a:spAutoFit/>
+          </a:bodyPr>
+          <a:lstStyle/>
+          <a:p>
+            <a:pPr marL="285750" indent="-285750">
+              <a:buFont typeface="Arial" panose="020B0604020202020204" pitchFamily="34" charset="0"/>
+              <a:buChar char="•"/>
+            </a:pPr>
+            <a:r>
+              <a:rPr lang="pt-BR" sz="1200" dirty="0" err="1"/>
+              <a:t>Disrupção</a:t>
+            </a:r>
+            <a:r>
+              <a:rPr lang="pt-BR" sz="1200" dirty="0"/>
+              <a:t> de serviços de </a:t>
+            </a:r>
+            <a:r>
+              <a:rPr lang="pt-BR" sz="1200" dirty="0" err="1"/>
+              <a:t>telecom</a:t>
+            </a:r>
+            <a:endParaRPr lang="pt-BR" sz="1200" dirty="0"/>
+          </a:p>
+          <a:p>
+            <a:pPr marL="285750" indent="-285750">
+              <a:buFont typeface="Arial" panose="020B0604020202020204" pitchFamily="34" charset="0"/>
+              <a:buChar char="•"/>
+            </a:pPr>
+            <a:r>
+              <a:rPr lang="pt-BR" sz="1200" dirty="0"/>
+              <a:t>Compras fraudulentas</a:t>
+            </a:r>
+          </a:p>
+          <a:p>
+            <a:pPr marL="285750" indent="-285750">
+              <a:buFont typeface="Arial" panose="020B0604020202020204" pitchFamily="34" charset="0"/>
+              <a:buChar char="•"/>
+            </a:pPr>
+            <a:r>
+              <a:rPr lang="pt-BR" sz="1200" dirty="0"/>
+              <a:t>Fraudes em pagamentos e pedidos de exames</a:t>
+            </a:r>
+          </a:p>
+          <a:p>
+            <a:pPr marL="285750" indent="-285750">
+              <a:buFont typeface="Arial" panose="020B0604020202020204" pitchFamily="34" charset="0"/>
+              <a:buChar char="•"/>
+            </a:pPr>
+            <a:r>
+              <a:rPr lang="pt-BR" sz="1200" dirty="0"/>
+              <a:t>Comportamento anormal de máquinas</a:t>
+            </a:r>
+          </a:p>
+          <a:p>
+            <a:pPr marL="285750" indent="-285750">
+              <a:buFont typeface="Arial" panose="020B0604020202020204" pitchFamily="34" charset="0"/>
+              <a:buChar char="•"/>
+            </a:pPr>
+            <a:r>
+              <a:rPr lang="pt-BR" sz="1200" dirty="0"/>
+              <a:t>Contas comprometidas</a:t>
+            </a:r>
+          </a:p>
+          <a:p>
+            <a:pPr marL="285750" indent="-285750">
+              <a:buFont typeface="Arial" panose="020B0604020202020204" pitchFamily="34" charset="0"/>
+              <a:buChar char="•"/>
+            </a:pPr>
+            <a:r>
+              <a:rPr lang="pt-BR" sz="1200" dirty="0"/>
+              <a:t>Invasões em redes</a:t>
+            </a:r>
+          </a:p>
+          <a:p>
+            <a:pPr marL="285750" indent="-285750">
+              <a:buFont typeface="Arial" panose="020B0604020202020204" pitchFamily="34" charset="0"/>
+              <a:buChar char="•"/>
+            </a:pPr>
+            <a:r>
+              <a:rPr lang="pt-BR" sz="1200" dirty="0"/>
+              <a:t>Vazamentos de água e energia</a:t>
+            </a:r>
+          </a:p>
+          <a:p>
+            <a:pPr marL="285750" indent="-285750">
+              <a:buFont typeface="Arial" panose="020B0604020202020204" pitchFamily="34" charset="0"/>
+              <a:buChar char="•"/>
+            </a:pPr>
+            <a:r>
+              <a:rPr lang="pt-BR" sz="1200" dirty="0"/>
+              <a:t>Identificar objetos em imagens sem variação</a:t>
+            </a:r>
+          </a:p>
+          <a:p>
+            <a:pPr marL="285750" indent="-285750">
+              <a:buFont typeface="Arial" panose="020B0604020202020204" pitchFamily="34" charset="0"/>
+              <a:buChar char="•"/>
+            </a:pPr>
+            <a:endParaRPr lang="en-US" sz="1200" dirty="0"/>
+          </a:p>
+        </p:txBody>
+      </p:sp>
     </p:spTree>
     <p:extLst>
       <p:ext uri="{BB962C8B-B14F-4D97-AF65-F5344CB8AC3E}">
@@ -11772,6 +11897,44 @@
           </a:p>
         </p:txBody>
       </p:sp>
+      <p:sp>
+        <p:nvSpPr>
+          <p:cNvPr id="8" name="TextBox 7">
+            <a:extLst>
+              <a:ext uri="{FF2B5EF4-FFF2-40B4-BE49-F238E27FC236}">
+                <a16:creationId xmlns:a16="http://schemas.microsoft.com/office/drawing/2014/main" id="{4AD2CDDB-D885-653D-F29A-F22D7F769F27}"/>
+              </a:ext>
+            </a:extLst>
+          </p:cNvPr>
+          <p:cNvSpPr txBox="1"/>
+          <p:nvPr/>
+        </p:nvSpPr>
+        <p:spPr>
+          <a:xfrm>
+            <a:off x="2348730" y="6596390"/>
+            <a:ext cx="6094476" cy="261610"/>
+          </a:xfrm>
+          <a:prstGeom prst="rect">
+            <a:avLst/>
+          </a:prstGeom>
+          <a:noFill/>
+        </p:spPr>
+        <p:txBody>
+          <a:bodyPr wrap="square">
+            <a:spAutoFit/>
+          </a:bodyPr>
+          <a:lstStyle/>
+          <a:p>
+            <a:r>
+              <a:rPr lang="en-US" sz="1100" dirty="0">
+                <a:hlinkClick r:id="rId6"/>
+              </a:rPr>
+              <a:t>https://scikit-learn.org/stable/modules/outlier_detection.html#overview-of-outlier-detection-methods</a:t>
+            </a:r>
+            <a:endParaRPr lang="en-US" dirty="0"/>
+          </a:p>
+        </p:txBody>
+      </p:sp>
     </p:spTree>
     <p:extLst>
       <p:ext uri="{BB962C8B-B14F-4D97-AF65-F5344CB8AC3E}">
@@ -12036,7 +12199,7 @@
             </a:pPr>
             <a:r>
               <a:rPr lang="pt-BR" dirty="0"/>
-              <a:t>Exemplo: Escolha de Locais para Centros de Distribuição</a:t>
+              <a:t>Exemplo: Escolha de Locais para centros de distribuição</a:t>
             </a:r>
           </a:p>
           <a:p>
@@ -13138,13 +13301,37 @@
           <a:p>
             <a:r>
               <a:rPr lang="pt-BR" dirty="0"/>
-              <a:t>Diferentemente do aprendizado supervisionado, no aprendizado não-supervisionado, não existem rótulos.</a:t>
-            </a:r>
-          </a:p>
-          <a:p>
+              <a:t>Diferentemente do aprendizado supervisionado, no aprendizado não-supervisionado, </a:t>
+            </a:r>
+            <a:r>
+              <a:rPr lang="pt-BR" b="1" i="1" dirty="0">
+                <a:solidFill>
+                  <a:srgbClr val="7030A0"/>
+                </a:solidFill>
+              </a:rPr>
+              <a:t>não existem rótulos</a:t>
+            </a:r>
             <a:r>
               <a:rPr lang="pt-BR" dirty="0"/>
-              <a:t>Esses algoritmos descobrem padrões ocultos ou agrupamentos de dados sem a necessidade de rótulos.</a:t>
+              <a:t>.</a:t>
+            </a:r>
+          </a:p>
+          <a:p>
+            <a:r>
+              <a:rPr lang="pt-BR" dirty="0"/>
+              <a:t>Esses algoritmos </a:t>
+            </a:r>
+            <a:r>
+              <a:rPr lang="pt-BR" b="1" i="1" dirty="0">
+                <a:solidFill>
+                  <a:srgbClr val="0070C0"/>
+                </a:solidFill>
+              </a:rPr>
+              <a:t>descobrem padrões ocultos ou agrupamentos de dados</a:t>
+            </a:r>
+            <a:r>
+              <a:rPr lang="pt-BR" dirty="0"/>
+              <a:t> sem a necessidade de rótulos.</a:t>
             </a:r>
           </a:p>
           <a:p>
@@ -13164,7 +13351,15 @@
             <a:pPr lvl="1"/>
             <a:r>
               <a:rPr lang="pt-BR" dirty="0"/>
-              <a:t>Agrupamento</a:t>
+              <a:t>Agrupamento (i.e., </a:t>
+            </a:r>
+            <a:r>
+              <a:rPr lang="pt-BR" i="1" dirty="0"/>
+              <a:t>clusterização</a:t>
+            </a:r>
+            <a:r>
+              <a:rPr lang="pt-BR" dirty="0"/>
+              <a:t>)</a:t>
             </a:r>
           </a:p>
           <a:p>
@@ -15104,13 +15299,49 @@
           <a:p>
             <a:r>
               <a:rPr lang="pt-BR" dirty="0"/>
-              <a:t>O objetivo do agrupamento é dividir os dados em vários grupos ou clusters, de modo que os pontos de dados dentro de cada grupo sejam mais comparáveis ​​entre si e diferentes dos pontos de dados dentro dos outros grupos.</a:t>
-            </a:r>
-          </a:p>
-          <a:p>
+              <a:t>O objetivo do agrupamento é </a:t>
+            </a:r>
+            <a:r>
+              <a:rPr lang="pt-BR" b="1" i="1" dirty="0">
+                <a:solidFill>
+                  <a:srgbClr val="00B050"/>
+                </a:solidFill>
+              </a:rPr>
+              <a:t>dividir os dados em vários grupos ou clusters</a:t>
+            </a:r>
             <a:r>
               <a:rPr lang="pt-BR" dirty="0"/>
-              <a:t> É essencialmente um agrupamento de coisas com base em quão semelhantes (ou próximos) e diferentes elas são entre si. </a:t>
+              <a:t>, de modo que as amostras dentro de cada grupo sejam </a:t>
+            </a:r>
+            <a:r>
+              <a:rPr lang="pt-BR" b="1" i="1" dirty="0">
+                <a:solidFill>
+                  <a:srgbClr val="7030A0"/>
+                </a:solidFill>
+              </a:rPr>
+              <a:t>mais comparáveis ​​entre si e diferentes das amostras dentro dos outros grupos</a:t>
+            </a:r>
+            <a:r>
+              <a:rPr lang="pt-BR" dirty="0"/>
+              <a:t>.</a:t>
+            </a:r>
+          </a:p>
+          <a:p>
+            <a:r>
+              <a:rPr lang="pt-BR" dirty="0"/>
+              <a:t> É essencialmente um </a:t>
+            </a:r>
+            <a:r>
+              <a:rPr lang="pt-BR" b="1" i="1" dirty="0">
+                <a:solidFill>
+                  <a:schemeClr val="accent1"/>
+                </a:solidFill>
+              </a:rPr>
+              <a:t>agrupamento de amostras com base em quão semelhantes (ou próximos)</a:t>
+            </a:r>
+            <a:r>
+              <a:rPr lang="pt-BR" dirty="0"/>
+              <a:t> e diferentes elas são entre si. </a:t>
             </a:r>
           </a:p>
           <a:p>
@@ -15406,14 +15637,38 @@
             </a:r>
             <a:r>
               <a:rPr lang="pt-BR" dirty="0"/>
-              <a:t> é simples: agrupar pontos de dados semelhantes e descobrir padrões subjacentes.</a:t>
+              <a:t> é simples: </a:t>
+            </a:r>
+            <a:r>
+              <a:rPr lang="pt-BR" b="1" i="1" dirty="0">
+                <a:solidFill>
+                  <a:srgbClr val="7030A0"/>
+                </a:solidFill>
+              </a:rPr>
+              <a:t>agrupar amostras semelhantes </a:t>
+            </a:r>
+            <a:r>
+              <a:rPr lang="pt-BR" dirty="0"/>
+              <a:t>e descobrir padrões subjacentes.</a:t>
             </a:r>
           </a:p>
           <a:p>
             <a:pPr lvl="1"/>
             <a:r>
               <a:rPr lang="pt-BR" dirty="0"/>
-              <a:t>Semelhante aqui é no sentido de proximidade.</a:t>
+              <a:t>Semelhante aqui é no sentido de </a:t>
+            </a:r>
+            <a:r>
+              <a:rPr lang="pt-BR" b="1" i="1" dirty="0">
+                <a:solidFill>
+                  <a:srgbClr val="7030A0"/>
+                </a:solidFill>
+              </a:rPr>
+              <a:t>proximidade</a:t>
+            </a:r>
+            <a:r>
+              <a:rPr lang="pt-BR" dirty="0"/>
+              <a:t>.</a:t>
             </a:r>
           </a:p>
           <a:p>
@@ -15722,8 +15977,8 @@
           </a:p>
         </p:txBody>
       </p:sp>
-      <mc:AlternateContent xmlns:mc="http://schemas.openxmlformats.org/markup-compatibility/2006" xmlns:a14="http://schemas.microsoft.com/office/drawing/2010/main">
-        <mc:Choice Requires="a14">
+      <mc:AlternateContent xmlns:mc="http://schemas.openxmlformats.org/markup-compatibility/2006">
+        <mc:Choice xmlns:a14="http://schemas.microsoft.com/office/drawing/2010/main" Requires="a14">
           <p:sp>
             <p:nvSpPr>
               <p:cNvPr id="5" name="TextBox 4">
@@ -15876,7 +16131,7 @@
                 </a:pPr>
                 <a:r>
                   <a:rPr lang="pt-BR" sz="2000" dirty="0"/>
-                  <a:t>Calcule o novo centroide de cada cluster.</a:t>
+                  <a:t>Calcule o novo centroide de cada cluster*.</a:t>
                 </a:r>
               </a:p>
               <a:p>
@@ -15896,7 +16151,7 @@
             </p:txBody>
           </p:sp>
         </mc:Choice>
-        <mc:Fallback xmlns="">
+        <mc:Fallback>
           <p:sp>
             <p:nvSpPr>
               <p:cNvPr id="5" name="TextBox 4">
@@ -15946,6 +16201,42 @@
           </p:sp>
         </mc:Fallback>
       </mc:AlternateContent>
+      <p:sp>
+        <p:nvSpPr>
+          <p:cNvPr id="8" name="TextBox 7">
+            <a:extLst>
+              <a:ext uri="{FF2B5EF4-FFF2-40B4-BE49-F238E27FC236}">
+                <a16:creationId xmlns:a16="http://schemas.microsoft.com/office/drawing/2014/main" id="{DFF89C7B-D1B2-2FC5-A9C9-E593B0D40D00}"/>
+              </a:ext>
+            </a:extLst>
+          </p:cNvPr>
+          <p:cNvSpPr txBox="1"/>
+          <p:nvPr/>
+        </p:nvSpPr>
+        <p:spPr>
+          <a:xfrm>
+            <a:off x="1153033" y="4495377"/>
+            <a:ext cx="9414510" cy="276999"/>
+          </a:xfrm>
+          <a:prstGeom prst="rect">
+            <a:avLst/>
+          </a:prstGeom>
+          <a:noFill/>
+        </p:spPr>
+        <p:txBody>
+          <a:bodyPr wrap="square">
+            <a:spAutoFit/>
+          </a:bodyPr>
+          <a:lstStyle/>
+          <a:p>
+            <a:r>
+              <a:rPr lang="pt-BR" sz="1200" dirty="0"/>
+              <a:t>*os novos centroides são calculados como a média aritmética (centro geométrico) das amostras pertencentes a cada cluster.</a:t>
+            </a:r>
+            <a:endParaRPr lang="en-US" sz="1200" dirty="0"/>
+          </a:p>
+        </p:txBody>
+      </p:sp>
     </p:spTree>
     <p:extLst>
       <p:ext uri="{BB962C8B-B14F-4D97-AF65-F5344CB8AC3E}">

--- a/slides/TP557_16_detecção_de_anomalias.pptx
+++ b/slides/TP557_16_detecção_de_anomalias.pptx
@@ -6,10 +6,10 @@
     <p:sldMasterId id="2147483660" r:id="rId2"/>
   </p:sldMasterIdLst>
   <p:notesMasterIdLst>
-    <p:notesMasterId r:id="rId26"/>
+    <p:notesMasterId r:id="rId27"/>
   </p:notesMasterIdLst>
   <p:handoutMasterIdLst>
-    <p:handoutMasterId r:id="rId27"/>
+    <p:handoutMasterId r:id="rId28"/>
   </p:handoutMasterIdLst>
   <p:sldIdLst>
     <p:sldId id="256" r:id="rId3"/>
@@ -33,8 +33,9 @@
     <p:sldId id="611" r:id="rId21"/>
     <p:sldId id="612" r:id="rId22"/>
     <p:sldId id="615" r:id="rId23"/>
-    <p:sldId id="631" r:id="rId24"/>
-    <p:sldId id="616" r:id="rId25"/>
+    <p:sldId id="632" r:id="rId24"/>
+    <p:sldId id="631" r:id="rId25"/>
+    <p:sldId id="616" r:id="rId26"/>
   </p:sldIdLst>
   <p:sldSz cx="12192000" cy="6858000"/>
   <p:notesSz cx="7315200" cy="9601200"/>
@@ -2143,7 +2144,13 @@
   <p:cSld>
     <p:spTree>
       <p:nvGrpSpPr>
-        <p:cNvPr id="1" name=""/>
+        <p:cNvPr id="1" name="">
+          <a:extLst>
+            <a:ext uri="{FF2B5EF4-FFF2-40B4-BE49-F238E27FC236}">
+              <a16:creationId xmlns:a16="http://schemas.microsoft.com/office/drawing/2014/main" id="{6FAA2740-8B0A-7165-D2BD-59C9A1952B11}"/>
+            </a:ext>
+          </a:extLst>
+        </p:cNvPr>
         <p:cNvGrpSpPr/>
         <p:nvPr/>
       </p:nvGrpSpPr>
@@ -2157,7 +2164,13 @@
       </p:grpSpPr>
       <p:sp>
         <p:nvSpPr>
-          <p:cNvPr id="2" name="Espaço Reservado para Imagem de Slide 1"/>
+          <p:cNvPr id="2" name="Espaço Reservado para Imagem de Slide 1">
+            <a:extLst>
+              <a:ext uri="{FF2B5EF4-FFF2-40B4-BE49-F238E27FC236}">
+                <a16:creationId xmlns:a16="http://schemas.microsoft.com/office/drawing/2014/main" id="{B79CAD1E-261A-D9C8-AED4-6A238B4FE8CE}"/>
+              </a:ext>
+            </a:extLst>
+          </p:cNvPr>
           <p:cNvSpPr>
             <a:spLocks noGrp="1" noRot="1" noChangeAspect="1"/>
           </p:cNvSpPr>
@@ -2169,7 +2182,13 @@
       </p:sp>
       <p:sp>
         <p:nvSpPr>
-          <p:cNvPr id="3" name="Espaço Reservado para Anotações 2"/>
+          <p:cNvPr id="3" name="Espaço Reservado para Anotações 2">
+            <a:extLst>
+              <a:ext uri="{FF2B5EF4-FFF2-40B4-BE49-F238E27FC236}">
+                <a16:creationId xmlns:a16="http://schemas.microsoft.com/office/drawing/2014/main" id="{AD8B61AE-055E-B2A2-6C0A-9F85450452BF}"/>
+              </a:ext>
+            </a:extLst>
+          </p:cNvPr>
           <p:cNvSpPr>
             <a:spLocks noGrp="1"/>
           </p:cNvSpPr>
@@ -2188,7 +2207,13 @@
       </p:sp>
       <p:sp>
         <p:nvSpPr>
-          <p:cNvPr id="4" name="Espaço Reservado para Número de Slide 3"/>
+          <p:cNvPr id="4" name="Espaço Reservado para Número de Slide 3">
+            <a:extLst>
+              <a:ext uri="{FF2B5EF4-FFF2-40B4-BE49-F238E27FC236}">
+                <a16:creationId xmlns:a16="http://schemas.microsoft.com/office/drawing/2014/main" id="{1E232234-9E28-099D-9A25-5AF9D7A3BB94}"/>
+              </a:ext>
+            </a:extLst>
+          </p:cNvPr>
           <p:cNvSpPr>
             <a:spLocks noGrp="1"/>
           </p:cNvSpPr>
@@ -2272,7 +2297,7 @@
     </p:spTree>
     <p:extLst>
       <p:ext uri="{BB962C8B-B14F-4D97-AF65-F5344CB8AC3E}">
-        <p14:creationId xmlns:p14="http://schemas.microsoft.com/office/powerpoint/2010/main" val="646709308"/>
+        <p14:creationId xmlns:p14="http://schemas.microsoft.com/office/powerpoint/2010/main" val="4125948136"/>
       </p:ext>
     </p:extLst>
   </p:cSld>
@@ -2395,6 +2420,150 @@
                 <a:defRPr/>
               </a:pPr>
               <a:t>23</a:t>
+            </a:fld>
+            <a:endParaRPr kumimoji="0" lang="pt-BR" sz="2200" b="0" i="0" u="none" strike="noStrike" kern="1200" cap="none" spc="0" normalizeH="0" baseline="0" noProof="0">
+              <a:ln>
+                <a:noFill/>
+              </a:ln>
+              <a:solidFill>
+                <a:prstClr val="black"/>
+              </a:solidFill>
+              <a:effectLst/>
+              <a:uLnTx/>
+              <a:uFillTx/>
+              <a:latin typeface="Calibri" panose="020F0502020204030204"/>
+              <a:ea typeface="+mn-ea"/>
+              <a:cs typeface="+mn-cs"/>
+            </a:endParaRPr>
+          </a:p>
+        </p:txBody>
+      </p:sp>
+    </p:spTree>
+    <p:extLst>
+      <p:ext uri="{BB962C8B-B14F-4D97-AF65-F5344CB8AC3E}">
+        <p14:creationId xmlns:p14="http://schemas.microsoft.com/office/powerpoint/2010/main" val="646709308"/>
+      </p:ext>
+    </p:extLst>
+  </p:cSld>
+  <p:clrMapOvr>
+    <a:masterClrMapping/>
+  </p:clrMapOvr>
+</p:notes>
+</file>
+
+<file path=ppt/notesSlides/notesSlide24.xml><?xml version="1.0" encoding="utf-8"?>
+<p:notes xmlns:a="http://schemas.openxmlformats.org/drawingml/2006/main" xmlns:r="http://schemas.openxmlformats.org/officeDocument/2006/relationships" xmlns:p="http://schemas.openxmlformats.org/presentationml/2006/main">
+  <p:cSld>
+    <p:spTree>
+      <p:nvGrpSpPr>
+        <p:cNvPr id="1" name=""/>
+        <p:cNvGrpSpPr/>
+        <p:nvPr/>
+      </p:nvGrpSpPr>
+      <p:grpSpPr>
+        <a:xfrm>
+          <a:off x="0" y="0"/>
+          <a:ext cx="0" cy="0"/>
+          <a:chOff x="0" y="0"/>
+          <a:chExt cx="0" cy="0"/>
+        </a:xfrm>
+      </p:grpSpPr>
+      <p:sp>
+        <p:nvSpPr>
+          <p:cNvPr id="2" name="Espaço Reservado para Imagem de Slide 1"/>
+          <p:cNvSpPr>
+            <a:spLocks noGrp="1" noRot="1" noChangeAspect="1"/>
+          </p:cNvSpPr>
+          <p:nvPr>
+            <p:ph type="sldImg"/>
+          </p:nvPr>
+        </p:nvSpPr>
+        <p:spPr/>
+      </p:sp>
+      <p:sp>
+        <p:nvSpPr>
+          <p:cNvPr id="3" name="Espaço Reservado para Anotações 2"/>
+          <p:cNvSpPr>
+            <a:spLocks noGrp="1"/>
+          </p:cNvSpPr>
+          <p:nvPr>
+            <p:ph type="body" idx="1"/>
+          </p:nvPr>
+        </p:nvSpPr>
+        <p:spPr/>
+        <p:txBody>
+          <a:bodyPr/>
+          <a:lstStyle/>
+          <a:p>
+            <a:endParaRPr lang="pt-BR" dirty="0"/>
+          </a:p>
+        </p:txBody>
+      </p:sp>
+      <p:sp>
+        <p:nvSpPr>
+          <p:cNvPr id="4" name="Espaço Reservado para Número de Slide 3"/>
+          <p:cNvSpPr>
+            <a:spLocks noGrp="1"/>
+          </p:cNvSpPr>
+          <p:nvPr>
+            <p:ph type="sldNum" sz="quarter" idx="5"/>
+          </p:nvPr>
+        </p:nvSpPr>
+        <p:spPr/>
+        <p:txBody>
+          <a:bodyPr/>
+          <a:lstStyle/>
+          <a:p>
+            <a:pPr marL="0" marR="0" lvl="0" indent="0" algn="r" defTabSz="914400" rtl="0" eaLnBrk="1" fontAlgn="auto" latinLnBrk="0" hangingPunct="1">
+              <a:lnSpc>
+                <a:spcPct val="100000"/>
+              </a:lnSpc>
+              <a:spcBef>
+                <a:spcPts val="0"/>
+              </a:spcBef>
+              <a:spcAft>
+                <a:spcPts val="0"/>
+              </a:spcAft>
+              <a:buClrTx/>
+              <a:buSzTx/>
+              <a:buFontTx/>
+              <a:buNone/>
+              <a:tabLst/>
+              <a:defRPr/>
+            </a:pPr>
+            <a:fld id="{6FC8D850-966F-45A6-8DE7-15B891E7D40D}" type="slidenum">
+              <a:rPr kumimoji="0" lang="pt-BR" sz="2200" b="0" i="0" u="none" strike="noStrike" kern="1200" cap="none" spc="0" normalizeH="0" baseline="0" noProof="0" smtClean="0">
+                <a:ln>
+                  <a:noFill/>
+                </a:ln>
+                <a:solidFill>
+                  <a:prstClr val="black"/>
+                </a:solidFill>
+                <a:effectLst/>
+                <a:uLnTx/>
+                <a:uFillTx/>
+                <a:latin typeface="Calibri" panose="020F0502020204030204"/>
+                <a:ea typeface="+mn-ea"/>
+                <a:cs typeface="+mn-cs"/>
+              </a:rPr>
+              <a:pPr marL="0" marR="0" lvl="0" indent="0" algn="r" defTabSz="914400" rtl="0" eaLnBrk="1" fontAlgn="auto" latinLnBrk="0" hangingPunct="1">
+                <a:lnSpc>
+                  <a:spcPct val="100000"/>
+                </a:lnSpc>
+                <a:spcBef>
+                  <a:spcPts val="0"/>
+                </a:spcBef>
+                <a:spcAft>
+                  <a:spcPts val="0"/>
+                </a:spcAft>
+                <a:buClrTx/>
+                <a:buSzTx/>
+                <a:buFontTx/>
+                <a:buNone/>
+                <a:tabLst/>
+                <a:defRPr/>
+              </a:pPr>
+              <a:t>24</a:t>
             </a:fld>
             <a:endParaRPr kumimoji="0" lang="pt-BR" sz="2200" b="0" i="0" u="none" strike="noStrike" kern="1200" cap="none" spc="0" normalizeH="0" baseline="0" noProof="0">
               <a:ln>
@@ -14072,26 +14241,19 @@
                 <a:ea typeface="Calibri" panose="020F0502020204030204" pitchFamily="34" charset="0"/>
                 <a:cs typeface="Arial" panose="020B0604020202020204" pitchFamily="34" charset="0"/>
               </a:rPr>
-              <a:t>Trabalho:</a:t>
-            </a:r>
-          </a:p>
-          <a:p>
-            <a:pPr marL="152408" indent="0" algn="just">
-              <a:lnSpc>
-                <a:spcPct val="107000"/>
-              </a:lnSpc>
-              <a:spcAft>
-                <a:spcPts val="533"/>
-              </a:spcAft>
-              <a:buNone/>
-            </a:pPr>
-            <a:r>
-              <a:rPr lang="pt-BR" sz="2000" dirty="0">
+              <a:t>Detecção de anomalias com K-</a:t>
+            </a:r>
+            <a:r>
+              <a:rPr lang="pt-BR" sz="2000" dirty="0" err="1">
                 <a:ea typeface="Calibri" panose="020F0502020204030204" pitchFamily="34" charset="0"/>
                 <a:cs typeface="Arial" panose="020B0604020202020204" pitchFamily="34" charset="0"/>
               </a:rPr>
-              <a:t>Incluir no Edge Impulse possíveis anomalias nos dados do ciclo logístico, e.g., quedas.</a:t>
-            </a:r>
+              <a:t>means</a:t>
+            </a:r>
+            <a:endParaRPr lang="pt-BR" sz="2000" dirty="0">
+              <a:ea typeface="Calibri" panose="020F0502020204030204" pitchFamily="34" charset="0"/>
+              <a:cs typeface="Arial" panose="020B0604020202020204" pitchFamily="34" charset="0"/>
+            </a:endParaRPr>
           </a:p>
         </p:txBody>
       </p:sp>
@@ -14111,7 +14273,7 @@
         </p:blipFill>
         <p:spPr>
           <a:xfrm>
-            <a:off x="3379705" y="2128881"/>
+            <a:off x="3160249" y="1517183"/>
             <a:ext cx="5229390" cy="4230034"/>
           </a:xfrm>
           <a:prstGeom prst="rect">
@@ -14135,23 +14297,15 @@
 <file path=ppt/slides/slide22.xml><?xml version="1.0" encoding="utf-8"?>
 <p:sld xmlns:a="http://schemas.openxmlformats.org/drawingml/2006/main" xmlns:r="http://schemas.openxmlformats.org/officeDocument/2006/relationships" xmlns:p="http://schemas.openxmlformats.org/presentationml/2006/main">
   <p:cSld>
-    <p:bg>
-      <p:bgPr>
-        <a:blipFill dpi="0" rotWithShape="1">
-          <a:blip r:embed="rId3">
-            <a:lum/>
-          </a:blip>
-          <a:srcRect/>
-          <a:stretch>
-            <a:fillRect/>
-          </a:stretch>
-        </a:blipFill>
-        <a:effectLst/>
-      </p:bgPr>
-    </p:bg>
     <p:spTree>
       <p:nvGrpSpPr>
-        <p:cNvPr id="1" name=""/>
+        <p:cNvPr id="1" name="">
+          <a:extLst>
+            <a:ext uri="{FF2B5EF4-FFF2-40B4-BE49-F238E27FC236}">
+              <a16:creationId xmlns:a16="http://schemas.microsoft.com/office/drawing/2014/main" id="{C19A79EA-D73A-EFF7-6124-FAD5890EFF81}"/>
+            </a:ext>
+          </a:extLst>
+        </p:cNvPr>
         <p:cNvGrpSpPr/>
         <p:nvPr/>
       </p:nvGrpSpPr>
@@ -14168,7 +14322,7 @@
           <p:cNvPr id="2" name="Título 1">
             <a:extLst>
               <a:ext uri="{FF2B5EF4-FFF2-40B4-BE49-F238E27FC236}">
-                <a16:creationId xmlns:a16="http://schemas.microsoft.com/office/drawing/2014/main" id="{5F09B89C-3183-4D52-981A-62798DDFF2B8}"/>
+                <a16:creationId xmlns:a16="http://schemas.microsoft.com/office/drawing/2014/main" id="{B537074C-5689-05AD-4E6E-3B8E45AAEC28}"/>
               </a:ext>
             </a:extLst>
           </p:cNvPr>
@@ -14203,7 +14357,7 @@
           <p:cNvPr id="3" name="AutoShape 2" descr="An example of graph signal reconstruction over wireless sensor network. |  Download Scientific Diagram">
             <a:extLst>
               <a:ext uri="{FF2B5EF4-FFF2-40B4-BE49-F238E27FC236}">
-                <a16:creationId xmlns:a16="http://schemas.microsoft.com/office/drawing/2014/main" id="{0166B4DD-D72A-4A54-94A7-2C38133837FD}"/>
+                <a16:creationId xmlns:a16="http://schemas.microsoft.com/office/drawing/2014/main" id="{540F19B3-6833-93B5-0679-FC818E9185F7}"/>
               </a:ext>
             </a:extLst>
           </p:cNvPr>
@@ -14278,7 +14432,7 @@
           <p:cNvPr id="7" name="AutoShape 4" descr="An example of graph signal reconstruction over wireless sensor network. |  Download Scientific Diagram">
             <a:extLst>
               <a:ext uri="{FF2B5EF4-FFF2-40B4-BE49-F238E27FC236}">
-                <a16:creationId xmlns:a16="http://schemas.microsoft.com/office/drawing/2014/main" id="{14C2B67D-81A1-457E-A410-FE4350A3CCA4}"/>
+                <a16:creationId xmlns:a16="http://schemas.microsoft.com/office/drawing/2014/main" id="{AA43CB4B-9384-D6F7-EF9A-370C3840A9FF}"/>
               </a:ext>
             </a:extLst>
           </p:cNvPr>
@@ -14353,6 +14507,330 @@
           <p:cNvPr id="4" name="Espaço Reservado para Conteúdo 3">
             <a:extLst>
               <a:ext uri="{FF2B5EF4-FFF2-40B4-BE49-F238E27FC236}">
+                <a16:creationId xmlns:a16="http://schemas.microsoft.com/office/drawing/2014/main" id="{95EF48E8-8E35-2277-3FBF-A8C857C17A80}"/>
+              </a:ext>
+            </a:extLst>
+          </p:cNvPr>
+          <p:cNvSpPr>
+            <a:spLocks noGrp="1"/>
+          </p:cNvSpPr>
+          <p:nvPr>
+            <p:ph idx="1"/>
+          </p:nvPr>
+        </p:nvSpPr>
+        <p:spPr>
+          <a:xfrm>
+            <a:off x="304800" y="1066800"/>
+            <a:ext cx="10084676" cy="4330419"/>
+          </a:xfrm>
+        </p:spPr>
+        <p:txBody>
+          <a:bodyPr>
+            <a:noAutofit/>
+          </a:bodyPr>
+          <a:lstStyle/>
+          <a:p>
+            <a:pPr marL="152408" indent="0" algn="just">
+              <a:lnSpc>
+                <a:spcPct val="107000"/>
+              </a:lnSpc>
+              <a:spcAft>
+                <a:spcPts val="533"/>
+              </a:spcAft>
+              <a:buNone/>
+            </a:pPr>
+            <a:r>
+              <a:rPr lang="pt-BR" sz="2000" dirty="0">
+                <a:ea typeface="Calibri" panose="020F0502020204030204" pitchFamily="34" charset="0"/>
+                <a:cs typeface="Arial" panose="020B0604020202020204" pitchFamily="34" charset="0"/>
+              </a:rPr>
+              <a:t>Trabalho:</a:t>
+            </a:r>
+          </a:p>
+          <a:p>
+            <a:pPr marL="152408" indent="0" algn="just">
+              <a:lnSpc>
+                <a:spcPct val="107000"/>
+              </a:lnSpc>
+              <a:spcAft>
+                <a:spcPts val="533"/>
+              </a:spcAft>
+              <a:buNone/>
+            </a:pPr>
+            <a:r>
+              <a:rPr lang="pt-BR" sz="2000" dirty="0">
+                <a:ea typeface="Calibri" panose="020F0502020204030204" pitchFamily="34" charset="0"/>
+                <a:cs typeface="Arial" panose="020B0604020202020204" pitchFamily="34" charset="0"/>
+              </a:rPr>
+              <a:t>Incluir no Edge Impulse possíveis anomalias nos dados do ciclo logístico, e.g., quedas.</a:t>
+            </a:r>
+          </a:p>
+        </p:txBody>
+      </p:sp>
+      <p:pic>
+        <p:nvPicPr>
+          <p:cNvPr id="6" name="Imagem 5">
+            <a:extLst>
+              <a:ext uri="{FF2B5EF4-FFF2-40B4-BE49-F238E27FC236}">
+                <a16:creationId xmlns:a16="http://schemas.microsoft.com/office/drawing/2014/main" id="{3CD4FE33-F017-FD74-6F5F-CF4D4415C378}"/>
+              </a:ext>
+            </a:extLst>
+          </p:cNvPr>
+          <p:cNvPicPr>
+            <a:picLocks noChangeAspect="1"/>
+          </p:cNvPicPr>
+          <p:nvPr/>
+        </p:nvPicPr>
+        <p:blipFill>
+          <a:blip r:embed="rId3"/>
+          <a:stretch>
+            <a:fillRect/>
+          </a:stretch>
+        </p:blipFill>
+        <p:spPr>
+          <a:xfrm>
+            <a:off x="3379705" y="2128881"/>
+            <a:ext cx="5229390" cy="4230034"/>
+          </a:xfrm>
+          <a:prstGeom prst="rect">
+            <a:avLst/>
+          </a:prstGeom>
+        </p:spPr>
+      </p:pic>
+    </p:spTree>
+    <p:extLst>
+      <p:ext uri="{BB962C8B-B14F-4D97-AF65-F5344CB8AC3E}">
+        <p14:creationId xmlns:p14="http://schemas.microsoft.com/office/powerpoint/2010/main" val="2636746321"/>
+      </p:ext>
+    </p:extLst>
+  </p:cSld>
+  <p:clrMapOvr>
+    <a:masterClrMapping/>
+  </p:clrMapOvr>
+</p:sld>
+</file>
+
+<file path=ppt/slides/slide23.xml><?xml version="1.0" encoding="utf-8"?>
+<p:sld xmlns:a="http://schemas.openxmlformats.org/drawingml/2006/main" xmlns:r="http://schemas.openxmlformats.org/officeDocument/2006/relationships" xmlns:p="http://schemas.openxmlformats.org/presentationml/2006/main">
+  <p:cSld>
+    <p:bg>
+      <p:bgPr>
+        <a:blipFill dpi="0" rotWithShape="1">
+          <a:blip r:embed="rId3">
+            <a:lum/>
+          </a:blip>
+          <a:srcRect/>
+          <a:stretch>
+            <a:fillRect/>
+          </a:stretch>
+        </a:blipFill>
+        <a:effectLst/>
+      </p:bgPr>
+    </p:bg>
+    <p:spTree>
+      <p:nvGrpSpPr>
+        <p:cNvPr id="1" name=""/>
+        <p:cNvGrpSpPr/>
+        <p:nvPr/>
+      </p:nvGrpSpPr>
+      <p:grpSpPr>
+        <a:xfrm>
+          <a:off x="0" y="0"/>
+          <a:ext cx="0" cy="0"/>
+          <a:chOff x="0" y="0"/>
+          <a:chExt cx="0" cy="0"/>
+        </a:xfrm>
+      </p:grpSpPr>
+      <p:sp>
+        <p:nvSpPr>
+          <p:cNvPr id="2" name="Título 1">
+            <a:extLst>
+              <a:ext uri="{FF2B5EF4-FFF2-40B4-BE49-F238E27FC236}">
+                <a16:creationId xmlns:a16="http://schemas.microsoft.com/office/drawing/2014/main" id="{5F09B89C-3183-4D52-981A-62798DDFF2B8}"/>
+              </a:ext>
+            </a:extLst>
+          </p:cNvPr>
+          <p:cNvSpPr>
+            <a:spLocks noGrp="1"/>
+          </p:cNvSpPr>
+          <p:nvPr>
+            <p:ph type="title"/>
+          </p:nvPr>
+        </p:nvSpPr>
+        <p:spPr>
+          <a:xfrm>
+            <a:off x="304800" y="183092"/>
+            <a:ext cx="6559285" cy="762000"/>
+          </a:xfrm>
+        </p:spPr>
+        <p:txBody>
+          <a:bodyPr>
+            <a:normAutofit/>
+          </a:bodyPr>
+          <a:lstStyle/>
+          <a:p>
+            <a:r>
+              <a:rPr lang="pt-BR" dirty="0"/>
+              <a:t>Detecção de anomalias</a:t>
+            </a:r>
+          </a:p>
+        </p:txBody>
+      </p:sp>
+      <p:sp>
+        <p:nvSpPr>
+          <p:cNvPr id="3" name="AutoShape 2" descr="An example of graph signal reconstruction over wireless sensor network. |  Download Scientific Diagram">
+            <a:extLst>
+              <a:ext uri="{FF2B5EF4-FFF2-40B4-BE49-F238E27FC236}">
+                <a16:creationId xmlns:a16="http://schemas.microsoft.com/office/drawing/2014/main" id="{0166B4DD-D72A-4A54-94A7-2C38133837FD}"/>
+              </a:ext>
+            </a:extLst>
+          </p:cNvPr>
+          <p:cNvSpPr>
+            <a:spLocks noChangeAspect="1" noChangeArrowheads="1"/>
+          </p:cNvSpPr>
+          <p:nvPr/>
+        </p:nvSpPr>
+        <p:spPr bwMode="auto">
+          <a:xfrm>
+            <a:off x="5994400" y="3327400"/>
+            <a:ext cx="203200" cy="203200"/>
+          </a:xfrm>
+          <a:prstGeom prst="rect">
+            <a:avLst/>
+          </a:prstGeom>
+          <a:noFill/>
+          <a:extLst>
+            <a:ext uri="{909E8E84-426E-40DD-AFC4-6F175D3DCCD1}">
+              <a14:hiddenFill xmlns:a14="http://schemas.microsoft.com/office/drawing/2010/main">
+                <a:solidFill>
+                  <a:srgbClr val="FFFFFF"/>
+                </a:solidFill>
+              </a14:hiddenFill>
+            </a:ext>
+          </a:extLst>
+        </p:spPr>
+        <p:txBody>
+          <a:bodyPr vert="horz" wrap="square" lIns="60960" tIns="30480" rIns="60960" bIns="30480" numCol="1" anchor="t" anchorCtr="0" compatLnSpc="1">
+            <a:prstTxWarp prst="textNoShape">
+              <a:avLst/>
+            </a:prstTxWarp>
+          </a:bodyPr>
+          <a:lstStyle/>
+          <a:p>
+            <a:pPr marL="0" marR="0" lvl="0" indent="0" algn="l" defTabSz="609630" rtl="0" eaLnBrk="1" fontAlgn="auto" latinLnBrk="0" hangingPunct="1">
+              <a:lnSpc>
+                <a:spcPct val="100000"/>
+              </a:lnSpc>
+              <a:spcBef>
+                <a:spcPts val="0"/>
+              </a:spcBef>
+              <a:spcAft>
+                <a:spcPts val="0"/>
+              </a:spcAft>
+              <a:buClrTx/>
+              <a:buSzTx/>
+              <a:buFontTx/>
+              <a:buNone/>
+              <a:tabLst/>
+              <a:defRPr/>
+            </a:pPr>
+            <a:endParaRPr kumimoji="0" lang="pt-BR" sz="1200" b="0" i="0" u="none" strike="noStrike" kern="1200" cap="none" spc="0" normalizeH="0" baseline="0" noProof="0">
+              <a:ln>
+                <a:noFill/>
+              </a:ln>
+              <a:solidFill>
+                <a:prstClr val="black"/>
+              </a:solidFill>
+              <a:effectLst/>
+              <a:uLnTx/>
+              <a:uFillTx/>
+              <a:latin typeface="Calibri"/>
+              <a:ea typeface="+mn-ea"/>
+              <a:cs typeface="+mn-cs"/>
+            </a:endParaRPr>
+          </a:p>
+        </p:txBody>
+      </p:sp>
+      <p:sp>
+        <p:nvSpPr>
+          <p:cNvPr id="7" name="AutoShape 4" descr="An example of graph signal reconstruction over wireless sensor network. |  Download Scientific Diagram">
+            <a:extLst>
+              <a:ext uri="{FF2B5EF4-FFF2-40B4-BE49-F238E27FC236}">
+                <a16:creationId xmlns:a16="http://schemas.microsoft.com/office/drawing/2014/main" id="{14C2B67D-81A1-457E-A410-FE4350A3CCA4}"/>
+              </a:ext>
+            </a:extLst>
+          </p:cNvPr>
+          <p:cNvSpPr>
+            <a:spLocks noChangeAspect="1" noChangeArrowheads="1"/>
+          </p:cNvSpPr>
+          <p:nvPr/>
+        </p:nvSpPr>
+        <p:spPr bwMode="auto">
+          <a:xfrm>
+            <a:off x="6096000" y="3429000"/>
+            <a:ext cx="203200" cy="203200"/>
+          </a:xfrm>
+          <a:prstGeom prst="rect">
+            <a:avLst/>
+          </a:prstGeom>
+          <a:noFill/>
+          <a:extLst>
+            <a:ext uri="{909E8E84-426E-40DD-AFC4-6F175D3DCCD1}">
+              <a14:hiddenFill xmlns:a14="http://schemas.microsoft.com/office/drawing/2010/main">
+                <a:solidFill>
+                  <a:srgbClr val="FFFFFF"/>
+                </a:solidFill>
+              </a14:hiddenFill>
+            </a:ext>
+          </a:extLst>
+        </p:spPr>
+        <p:txBody>
+          <a:bodyPr vert="horz" wrap="square" lIns="60960" tIns="30480" rIns="60960" bIns="30480" numCol="1" anchor="t" anchorCtr="0" compatLnSpc="1">
+            <a:prstTxWarp prst="textNoShape">
+              <a:avLst/>
+            </a:prstTxWarp>
+          </a:bodyPr>
+          <a:lstStyle/>
+          <a:p>
+            <a:pPr marL="0" marR="0" lvl="0" indent="0" algn="l" defTabSz="609630" rtl="0" eaLnBrk="1" fontAlgn="auto" latinLnBrk="0" hangingPunct="1">
+              <a:lnSpc>
+                <a:spcPct val="100000"/>
+              </a:lnSpc>
+              <a:spcBef>
+                <a:spcPts val="0"/>
+              </a:spcBef>
+              <a:spcAft>
+                <a:spcPts val="0"/>
+              </a:spcAft>
+              <a:buClrTx/>
+              <a:buSzTx/>
+              <a:buFontTx/>
+              <a:buNone/>
+              <a:tabLst/>
+              <a:defRPr/>
+            </a:pPr>
+            <a:endParaRPr kumimoji="0" lang="pt-BR" sz="1200" b="0" i="0" u="none" strike="noStrike" kern="1200" cap="none" spc="0" normalizeH="0" baseline="0" noProof="0">
+              <a:ln>
+                <a:noFill/>
+              </a:ln>
+              <a:solidFill>
+                <a:prstClr val="black"/>
+              </a:solidFill>
+              <a:effectLst/>
+              <a:uLnTx/>
+              <a:uFillTx/>
+              <a:latin typeface="Calibri"/>
+              <a:ea typeface="+mn-ea"/>
+              <a:cs typeface="+mn-cs"/>
+            </a:endParaRPr>
+          </a:p>
+        </p:txBody>
+      </p:sp>
+      <p:sp>
+        <p:nvSpPr>
+          <p:cNvPr id="4" name="Espaço Reservado para Conteúdo 3">
+            <a:extLst>
+              <a:ext uri="{FF2B5EF4-FFF2-40B4-BE49-F238E27FC236}">
                 <a16:creationId xmlns:a16="http://schemas.microsoft.com/office/drawing/2014/main" id="{0349BA64-C9D7-4730-9CA9-5C4AD9FC7969}"/>
               </a:ext>
             </a:extLst>
@@ -14477,7 +14955,7 @@
 </p:sld>
 </file>
 
-<file path=ppt/slides/slide23.xml><?xml version="1.0" encoding="utf-8"?>
+<file path=ppt/slides/slide24.xml><?xml version="1.0" encoding="utf-8"?>
 <p:sld xmlns:a="http://schemas.openxmlformats.org/drawingml/2006/main" xmlns:r="http://schemas.openxmlformats.org/officeDocument/2006/relationships" xmlns:p="http://schemas.openxmlformats.org/presentationml/2006/main">
   <p:cSld>
     <p:bg>
@@ -15977,8 +16455,8 @@
           </a:p>
         </p:txBody>
       </p:sp>
-      <mc:AlternateContent xmlns:mc="http://schemas.openxmlformats.org/markup-compatibility/2006">
-        <mc:Choice xmlns:a14="http://schemas.microsoft.com/office/drawing/2010/main" Requires="a14">
+      <mc:AlternateContent xmlns:mc="http://schemas.openxmlformats.org/markup-compatibility/2006" xmlns:a14="http://schemas.microsoft.com/office/drawing/2010/main">
+        <mc:Choice Requires="a14">
           <p:sp>
             <p:nvSpPr>
               <p:cNvPr id="5" name="TextBox 4">
@@ -16151,7 +16629,7 @@
             </p:txBody>
           </p:sp>
         </mc:Choice>
-        <mc:Fallback>
+        <mc:Fallback xmlns="">
           <p:sp>
             <p:nvSpPr>
               <p:cNvPr id="5" name="TextBox 4">

--- a/slides/TP557_16_detecção_de_anomalias.pptx
+++ b/slides/TP557_16_detecção_de_anomalias.pptx
@@ -14281,6 +14281,44 @@
           </a:prstGeom>
         </p:spPr>
       </p:pic>
+      <p:sp>
+        <p:nvSpPr>
+          <p:cNvPr id="8" name="TextBox 7">
+            <a:extLst>
+              <a:ext uri="{FF2B5EF4-FFF2-40B4-BE49-F238E27FC236}">
+                <a16:creationId xmlns:a16="http://schemas.microsoft.com/office/drawing/2014/main" id="{DFDAC69C-2FEA-9925-46A8-2A2F62EAAD71}"/>
+              </a:ext>
+            </a:extLst>
+          </p:cNvPr>
+          <p:cNvSpPr txBox="1"/>
+          <p:nvPr/>
+        </p:nvSpPr>
+        <p:spPr>
+          <a:xfrm>
+            <a:off x="2855214" y="6034195"/>
+            <a:ext cx="6094476" cy="646331"/>
+          </a:xfrm>
+          <a:prstGeom prst="rect">
+            <a:avLst/>
+          </a:prstGeom>
+          <a:noFill/>
+        </p:spPr>
+        <p:txBody>
+          <a:bodyPr wrap="square">
+            <a:spAutoFit/>
+          </a:bodyPr>
+          <a:lstStyle/>
+          <a:p>
+            <a:r>
+              <a:rPr lang="en-US" dirty="0">
+                <a:hlinkClick r:id="rId5"/>
+              </a:rPr>
+              <a:t>https://colab.research.google.com/github/zz4fap/tp557-iot-ml/blob/main/examples/k_means_anomaly_detection.ipynb</a:t>
+            </a:r>
+            <a:endParaRPr lang="en-US" dirty="0"/>
+          </a:p>
+        </p:txBody>
+      </p:sp>
     </p:spTree>
     <p:extLst>
       <p:ext uri="{BB962C8B-B14F-4D97-AF65-F5344CB8AC3E}">
